--- a/第五週(10-08)/第五週_第2節_簡報.pptx
+++ b/第五週(10-08)/第五週_第2節_簡報.pptx
@@ -2047,7 +2047,7 @@
                 <a:ea typeface="Arial Unicode MS"/>
                 <a:cs typeface="Arial Unicode MS"/>
               </a:rPr>
-              <a:t>最後一件事：</a:t>
+              <a:t>最後一件事是</a:t>
             </a:r>
             <a:r>
               <a:rPr sz="1050" b="1" lang="zh-TW" dirty="0">
@@ -2993,7 +2993,7 @@
                 <a:ea typeface="Arial Unicode MS"/>
                 <a:cs typeface="Arial Unicode MS"/>
               </a:rPr>
-              <a:t>第一行，</a:t>
+              <a:t>先講第一行，</a:t>
             </a:r>
             <a:r>
               <a:rPr sz="1000" b="1" lang="zh-TW" dirty="0">
@@ -3532,7 +3532,7 @@
                 <a:ea typeface="Arial Unicode MS"/>
                 <a:cs typeface="Arial Unicode MS"/>
               </a:rPr>
-              <a:t>第二行，</a:t>
+              <a:t>第二行是</a:t>
             </a:r>
             <a:r>
               <a:rPr sz="1000" b="1" lang="zh-TW" dirty="0">
@@ -3961,7 +3961,7 @@
                 <a:ea typeface="Arial Unicode MS"/>
                 <a:cs typeface="Arial Unicode MS"/>
               </a:rPr>
-              <a:t>第三行，</a:t>
+              <a:t>第三行是</a:t>
             </a:r>
             <a:r>
               <a:rPr sz="1000" b="1" lang="zh-TW" dirty="0">
@@ -4522,7 +4522,7 @@
                 <a:ea typeface="Arial Unicode MS"/>
                 <a:cs typeface="Arial Unicode MS"/>
               </a:rPr>
-              <a:t>光達的第一行：</a:t>
+              <a:t>光達的第一行講的是</a:t>
             </a:r>
             <a:r>
               <a:rPr sz="1000" b="1" lang="zh-TW" dirty="0">
@@ -5083,7 +5083,7 @@
                 <a:ea typeface="Arial Unicode MS"/>
                 <a:cs typeface="Arial Unicode MS"/>
               </a:rPr>
-              <a:t>緊接著上一行：</a:t>
+              <a:t>緊接著上一行的是</a:t>
             </a:r>
             <a:r>
               <a:rPr sz="1200" b="1" lang="zh-TW" dirty="0">
@@ -5468,7 +5468,7 @@
                 <a:ea typeface="Arial Unicode MS"/>
                 <a:cs typeface="Arial Unicode MS"/>
               </a:rPr>
-              <a:t>光達的第三行：</a:t>
+              <a:t>光達的第三行講的是</a:t>
             </a:r>
             <a:r>
               <a:rPr sz="1050" b="1" lang="zh-TW" dirty="0">

--- a/第五週(10-08)/第五週_第2節_簡報.pptx
+++ b/第五週(10-08)/第五週_第2節_簡報.pptx
@@ -6258,8 +6258,8 @@
         </p:nvSpPr>
         <p:spPr>
           <a:xfrm>
-            <a:off x="6766560" y="-1371600"/>
-            <a:ext cx="4206240" cy="4206240"/>
+            <a:off x="6130753" y="-947729"/>
+            <a:ext cx="2987610" cy="2987610"/>
           </a:xfrm>
           <a:prstGeom prst="ellipse">
             <a:avLst/>
@@ -6283,8 +6283,8 @@
         </p:nvSpPr>
         <p:spPr>
           <a:xfrm>
-            <a:off x="7863840" y="3108960"/>
-            <a:ext cx="2560320" cy="2560320"/>
+            <a:off x="7104973" y="1520297"/>
+            <a:ext cx="1688649" cy="1688649"/>
           </a:xfrm>
           <a:prstGeom prst="ellipse">
             <a:avLst/>
@@ -6305,8 +6305,8 @@
         </p:nvSpPr>
         <p:spPr>
           <a:xfrm>
-            <a:off x="502920" y="1207008"/>
-            <a:ext cx="6949440" cy="274320"/>
+            <a:off x="1681812" y="883806"/>
+            <a:ext cx="4936051" cy="194844"/>
           </a:xfrm>
           <a:prstGeom prst="rect">
             <a:avLst/>
@@ -6322,7 +6322,7 @@
               <a:buNone/>
             </a:pPr>
             <a:r>
-              <a:rPr lang="en-US" sz="1250" b="1" dirty="0">
+              <a:rPr lang="en-US" sz="890" b="1" dirty="0">
                 <a:solidFill>
                   <a:srgbClr val="00A896"/>
                 </a:solidFill>
@@ -6332,7 +6332,7 @@
               </a:rPr>
               <a:t>MITUST · Nguyên lý xe tự lái · Tuần 5</a:t>
             </a:r>
-            <a:endParaRPr lang="en-US" sz="1250" dirty="0"/>
+            <a:endParaRPr lang="en-US" sz="890" dirty="0"/>
           </a:p>
         </p:txBody>
       </p:sp>
@@ -6344,8 +6344,8 @@
         </p:nvSpPr>
         <p:spPr>
           <a:xfrm>
-            <a:off x="502920" y="1572768"/>
-            <a:ext cx="7498080" cy="885499"/>
+            <a:off x="1681812" y="1143598"/>
+            <a:ext cx="5325739" cy="628953"/>
           </a:xfrm>
           <a:prstGeom prst="rect">
             <a:avLst/>
@@ -6364,7 +6364,7 @@
               <a:buNone/>
             </a:pPr>
             <a:r>
-              <a:rPr lang="en-US" sz="3400" b="1" dirty="0">
+              <a:rPr lang="en-US" sz="2410" b="1" dirty="0">
                 <a:solidFill>
                   <a:srgbClr val="FFFFFF"/>
                 </a:solidFill>
@@ -6374,7 +6374,7 @@
               </a:rPr>
               <a:t>Trang thứ hai của datasheet</a:t>
             </a:r>
-            <a:endParaRPr lang="en-US" sz="3400" dirty="0"/>
+            <a:endParaRPr lang="en-US" sz="2410" dirty="0"/>
           </a:p>
           <a:p>
             <a:pPr indent="0" marL="0">
@@ -6384,7 +6384,7 @@
               <a:buNone/>
             </a:pPr>
             <a:r>
-              <a:rPr lang="en-US" sz="1900" dirty="0">
+              <a:rPr lang="en-US" sz="1350" dirty="0">
                 <a:solidFill>
                   <a:srgbClr val="C8D6E2"/>
                 </a:solidFill>
@@ -6394,7 +6394,7 @@
               </a:rPr>
               <a:t>規格表的第二頁</a:t>
             </a:r>
-            <a:endParaRPr lang="en-US" sz="3400" dirty="0"/>
+            <a:endParaRPr lang="en-US" sz="2410" dirty="0"/>
           </a:p>
         </p:txBody>
       </p:sp>
@@ -6406,8 +6406,8 @@
         </p:nvSpPr>
         <p:spPr>
           <a:xfrm>
-            <a:off x="502920" y="3008479"/>
-            <a:ext cx="1371600" cy="41148"/>
+            <a:off x="1681812" y="2163355"/>
+            <a:ext cx="974221" cy="29227"/>
           </a:xfrm>
           <a:prstGeom prst="rect">
             <a:avLst/>
@@ -6426,8 +6426,8 @@
         </p:nvSpPr>
         <p:spPr>
           <a:xfrm>
-            <a:off x="502920" y="3209647"/>
-            <a:ext cx="7132320" cy="612545"/>
+            <a:off x="1681812" y="2306241"/>
+            <a:ext cx="5065947" cy="435079"/>
           </a:xfrm>
           <a:prstGeom prst="rect">
             <a:avLst/>
@@ -6446,7 +6446,7 @@
               <a:buNone/>
             </a:pPr>
             <a:r>
-              <a:rPr lang="en-US" sz="1450" dirty="0">
+              <a:rPr lang="en-US" sz="1030" dirty="0">
                 <a:solidFill>
                   <a:srgbClr val="C8D6E2"/>
                 </a:solidFill>
@@ -6456,7 +6456,7 @@
               </a:rPr>
               <a:t>Ba dòng ít ai đọc, nhưng hỏng là hỏng ở đó</a:t>
             </a:r>
-            <a:endParaRPr lang="en-US" sz="1450" dirty="0"/>
+            <a:endParaRPr lang="en-US" sz="1030" dirty="0"/>
           </a:p>
           <a:p>
             <a:pPr indent="0" marL="0">
@@ -6466,7 +6466,7 @@
               <a:buNone/>
             </a:pPr>
             <a:r>
-              <a:rPr lang="en-US" sz="1250" dirty="0">
+              <a:rPr lang="en-US" sz="890" dirty="0">
                 <a:solidFill>
                   <a:srgbClr val="8AA0B4"/>
                 </a:solidFill>
@@ -6476,7 +6476,7 @@
               </a:rPr>
               <a:t>三行很少人看，但出事都出在那裡</a:t>
             </a:r>
-            <a:endParaRPr lang="en-US" sz="1450" dirty="0"/>
+            <a:endParaRPr lang="en-US" sz="1030" dirty="0"/>
           </a:p>
         </p:txBody>
       </p:sp>
@@ -6488,8 +6488,8 @@
         </p:nvSpPr>
         <p:spPr>
           <a:xfrm>
-            <a:off x="502920" y="3895344"/>
-            <a:ext cx="5943600" cy="384048"/>
+            <a:off x="1681812" y="2793278"/>
+            <a:ext cx="4221622" cy="272782"/>
           </a:xfrm>
           <a:prstGeom prst="roundRect">
             <a:avLst>
@@ -6510,8 +6510,8 @@
         </p:nvSpPr>
         <p:spPr>
           <a:xfrm>
-            <a:off x="630936" y="3941064"/>
-            <a:ext cx="5687568" cy="292608"/>
+            <a:off x="1772740" y="2825752"/>
+            <a:ext cx="4039768" cy="207834"/>
           </a:xfrm>
           <a:prstGeom prst="rect">
             <a:avLst/>
@@ -6527,7 +6527,7 @@
               <a:buNone/>
             </a:pPr>
             <a:r>
-              <a:rPr lang="en-US" sz="1050" b="1" dirty="0">
+              <a:rPr lang="en-US" sz="750" b="1" dirty="0">
                 <a:solidFill>
                   <a:srgbClr val="9FD6CE"/>
                 </a:solidFill>
@@ -6537,7 +6537,7 @@
               </a:rPr>
               <a:t>工具｜Công cụ： ch-neural.github.io/MITUST-Principles-of-Self-Driving-Cars/week5/spec/</a:t>
             </a:r>
-            <a:endParaRPr lang="en-US" sz="1050" dirty="0"/>
+            <a:endParaRPr lang="en-US" sz="750" dirty="0"/>
           </a:p>
         </p:txBody>
       </p:sp>
@@ -6549,8 +6549,8 @@
         </p:nvSpPr>
         <p:spPr>
           <a:xfrm>
-            <a:off x="502920" y="4370832"/>
-            <a:ext cx="6949440" cy="274320"/>
+            <a:off x="1681812" y="3131008"/>
+            <a:ext cx="4936051" cy="194844"/>
           </a:xfrm>
           <a:prstGeom prst="rect">
             <a:avLst/>
@@ -6566,7 +6566,7 @@
               <a:buNone/>
             </a:pPr>
             <a:r>
-              <a:rPr lang="en-US" sz="1150" dirty="0">
+              <a:rPr lang="en-US" sz="820" dirty="0">
                 <a:solidFill>
                   <a:srgbClr val="8AA0B4"/>
                 </a:solidFill>
@@ -6576,7 +6576,7 @@
               </a:rPr>
               <a:t>第五週 第 2 節　2026/10/08（四）10:10–11:00　CH Tseng</a:t>
             </a:r>
-            <a:endParaRPr lang="en-US" sz="1150" dirty="0"/>
+            <a:endParaRPr lang="en-US" sz="820" dirty="0"/>
           </a:p>
         </p:txBody>
       </p:sp>
@@ -6588,8 +6588,8 @@
         </p:nvSpPr>
         <p:spPr>
           <a:xfrm>
-            <a:off x="356616" y="310896"/>
-            <a:ext cx="2212848" cy="749808"/>
+            <a:off x="1577895" y="247315"/>
+            <a:ext cx="1571743" cy="532574"/>
           </a:xfrm>
           <a:prstGeom prst="roundRect">
             <a:avLst>
@@ -6618,8 +6618,8 @@
         </p:blipFill>
         <p:spPr>
           <a:xfrm>
-            <a:off x="502920" y="475488"/>
-            <a:ext cx="1920240" cy="424269"/>
+            <a:off x="1681812" y="364222"/>
+            <a:ext cx="1363909" cy="301350"/>
           </a:xfrm>
           <a:prstGeom prst="rect">
             <a:avLst/>
@@ -6666,8 +6666,8 @@
         </p:nvSpPr>
         <p:spPr>
           <a:xfrm>
-            <a:off x="6766560" y="-1371600"/>
-            <a:ext cx="4206240" cy="4206240"/>
+            <a:off x="6130753" y="-947729"/>
+            <a:ext cx="2987610" cy="2987610"/>
           </a:xfrm>
           <a:prstGeom prst="ellipse">
             <a:avLst/>
@@ -6691,8 +6691,8 @@
         </p:nvSpPr>
         <p:spPr>
           <a:xfrm>
-            <a:off x="7863840" y="3108960"/>
-            <a:ext cx="2560320" cy="2560320"/>
+            <a:off x="7104973" y="1520297"/>
+            <a:ext cx="1688649" cy="1688649"/>
           </a:xfrm>
           <a:prstGeom prst="ellipse">
             <a:avLst/>
@@ -6713,8 +6713,8 @@
         </p:nvSpPr>
         <p:spPr>
           <a:xfrm>
-            <a:off x="502920" y="475488"/>
-            <a:ext cx="6766560" cy="274320"/>
+            <a:off x="1681812" y="364222"/>
+            <a:ext cx="4806155" cy="194844"/>
           </a:xfrm>
           <a:prstGeom prst="rect">
             <a:avLst/>
@@ -6730,7 +6730,7 @@
               <a:buNone/>
             </a:pPr>
             <a:r>
-              <a:rPr lang="en-US" sz="1250" b="1" dirty="0">
+              <a:rPr lang="en-US" sz="890" b="1" dirty="0">
                 <a:solidFill>
                   <a:srgbClr val="FFB020"/>
                 </a:solidFill>
@@ -6740,7 +6740,7 @@
               </a:rPr>
               <a:t>Thử nhanh · 小練習（3 分鐘動手）</a:t>
             </a:r>
-            <a:endParaRPr lang="en-US" sz="1250" dirty="0"/>
+            <a:endParaRPr lang="en-US" sz="890" dirty="0"/>
           </a:p>
         </p:txBody>
       </p:sp>
@@ -6752,8 +6752,8 @@
         </p:nvSpPr>
         <p:spPr>
           <a:xfrm>
-            <a:off x="502920" y="786384"/>
-            <a:ext cx="8046720" cy="1225296"/>
+            <a:off x="1681812" y="585045"/>
+            <a:ext cx="5715427" cy="870304"/>
           </a:xfrm>
           <a:prstGeom prst="rect">
             <a:avLst/>
@@ -6772,7 +6772,7 @@
               <a:buNone/>
             </a:pPr>
             <a:r>
-              <a:rPr lang="en-US" sz="2300" b="1" dirty="0">
+              <a:rPr lang="en-US" sz="1630" b="1" dirty="0">
                 <a:solidFill>
                   <a:srgbClr val="FFFFFF"/>
                 </a:solidFill>
@@ -6782,7 +6782,7 @@
               </a:rPr>
               <a:t>Mở công cụ, dùng công cụ nhỏ số ② để đổi «điểm mỗi giây» thành góc.</a:t>
             </a:r>
-            <a:endParaRPr lang="en-US" sz="2300" dirty="0"/>
+            <a:endParaRPr lang="en-US" sz="1630" dirty="0"/>
           </a:p>
           <a:p>
             <a:pPr indent="0" marL="0">
@@ -6792,7 +6792,7 @@
               <a:buNone/>
             </a:pPr>
             <a:r>
-              <a:rPr lang="en-US" sz="1500" dirty="0">
+              <a:rPr lang="en-US" sz="1070" dirty="0">
                 <a:solidFill>
                   <a:srgbClr val="AFC3D4"/>
                 </a:solidFill>
@@ -6802,7 +6802,7 @@
               </a:rPr>
               <a:t>打開工具，用第②個小工具，把「每秒幾點」換算成角度。</a:t>
             </a:r>
-            <a:endParaRPr lang="en-US" sz="2300" dirty="0"/>
+            <a:endParaRPr lang="en-US" sz="1630" dirty="0"/>
           </a:p>
         </p:txBody>
       </p:sp>
@@ -6814,8 +6814,8 @@
         </p:nvSpPr>
         <p:spPr>
           <a:xfrm>
-            <a:off x="502920" y="1880384"/>
-            <a:ext cx="8138160" cy="621792"/>
+            <a:off x="1681812" y="1362092"/>
+            <a:ext cx="5780375" cy="441647"/>
           </a:xfrm>
           <a:prstGeom prst="roundRect">
             <a:avLst>
@@ -6836,8 +6836,8 @@
         </p:nvSpPr>
         <p:spPr>
           <a:xfrm>
-            <a:off x="667512" y="2026688"/>
-            <a:ext cx="329184" cy="329184"/>
+            <a:off x="1798719" y="1466008"/>
+            <a:ext cx="233813" cy="233813"/>
           </a:xfrm>
           <a:prstGeom prst="ellipse">
             <a:avLst/>
@@ -6856,8 +6856,8 @@
         </p:nvSpPr>
         <p:spPr>
           <a:xfrm>
-            <a:off x="667512" y="2054120"/>
-            <a:ext cx="329184" cy="274320"/>
+            <a:off x="1798719" y="1485493"/>
+            <a:ext cx="233813" cy="194844"/>
           </a:xfrm>
           <a:prstGeom prst="rect">
             <a:avLst/>
@@ -6873,7 +6873,7 @@
               <a:buNone/>
             </a:pPr>
             <a:r>
-              <a:rPr lang="en-US" sz="1200" b="1" dirty="0">
+              <a:rPr lang="en-US" sz="850" b="1" dirty="0">
                 <a:solidFill>
                   <a:srgbClr val="FFFFFF"/>
                 </a:solidFill>
@@ -6883,7 +6883,7 @@
               </a:rPr>
               <a:t>1</a:t>
             </a:r>
-            <a:endParaRPr lang="en-US" sz="1200" dirty="0"/>
+            <a:endParaRPr lang="en-US" sz="850" dirty="0"/>
           </a:p>
         </p:txBody>
       </p:sp>
@@ -6895,8 +6895,8 @@
         </p:nvSpPr>
         <p:spPr>
           <a:xfrm>
-            <a:off x="1161288" y="1926104"/>
-            <a:ext cx="7296912" cy="548640"/>
+            <a:off x="2149438" y="1394566"/>
+            <a:ext cx="5182853" cy="389688"/>
           </a:xfrm>
           <a:prstGeom prst="rect">
             <a:avLst/>
@@ -6915,7 +6915,7 @@
               <a:buNone/>
             </a:pPr>
             <a:r>
-              <a:rPr lang="en-US" sz="1250" b="1" dirty="0">
+              <a:rPr lang="en-US" sz="890" b="1" dirty="0">
                 <a:solidFill>
                   <a:srgbClr val="FFFFFF"/>
                 </a:solidFill>
@@ -6925,7 +6925,7 @@
               </a:rPr>
               <a:t>Đặt 64 kênh, 1024 điểm mỗi vòng, 10 Hz — số điểm mỗi giây là bao nhiêu?</a:t>
             </a:r>
-            <a:endParaRPr lang="en-US" sz="1250" dirty="0"/>
+            <a:endParaRPr lang="en-US" sz="890" dirty="0"/>
           </a:p>
           <a:p>
             <a:pPr indent="0" marL="0">
@@ -6935,7 +6935,7 @@
               <a:buNone/>
             </a:pPr>
             <a:r>
-              <a:rPr lang="en-US" sz="1150" dirty="0">
+              <a:rPr lang="en-US" sz="820" dirty="0">
                 <a:solidFill>
                   <a:srgbClr val="AFC3D4"/>
                 </a:solidFill>
@@ -6945,7 +6945,7 @@
               </a:rPr>
               <a:t>設成 64 線、每圈 1024 點、10 Hz——每秒點數是多少？</a:t>
             </a:r>
-            <a:endParaRPr lang="en-US" sz="1250" dirty="0"/>
+            <a:endParaRPr lang="en-US" sz="890" dirty="0"/>
           </a:p>
         </p:txBody>
       </p:sp>
@@ -6957,8 +6957,8 @@
         </p:nvSpPr>
         <p:spPr>
           <a:xfrm>
-            <a:off x="502920" y="2593616"/>
-            <a:ext cx="8138160" cy="621792"/>
+            <a:off x="1681812" y="1868686"/>
+            <a:ext cx="5780375" cy="441647"/>
           </a:xfrm>
           <a:prstGeom prst="roundRect">
             <a:avLst>
@@ -6979,8 +6979,8 @@
         </p:nvSpPr>
         <p:spPr>
           <a:xfrm>
-            <a:off x="667512" y="2739920"/>
-            <a:ext cx="329184" cy="329184"/>
+            <a:off x="1798719" y="1972603"/>
+            <a:ext cx="233813" cy="233813"/>
           </a:xfrm>
           <a:prstGeom prst="ellipse">
             <a:avLst/>
@@ -6999,8 +6999,8 @@
         </p:nvSpPr>
         <p:spPr>
           <a:xfrm>
-            <a:off x="667512" y="2767352"/>
-            <a:ext cx="329184" cy="274320"/>
+            <a:off x="1798719" y="1992087"/>
+            <a:ext cx="233813" cy="194844"/>
           </a:xfrm>
           <a:prstGeom prst="rect">
             <a:avLst/>
@@ -7016,7 +7016,7 @@
               <a:buNone/>
             </a:pPr>
             <a:r>
-              <a:rPr lang="en-US" sz="1200" b="1" dirty="0">
+              <a:rPr lang="en-US" sz="850" b="1" dirty="0">
                 <a:solidFill>
                   <a:srgbClr val="FFFFFF"/>
                 </a:solidFill>
@@ -7026,7 +7026,7 @@
               </a:rPr>
               <a:t>2</a:t>
             </a:r>
-            <a:endParaRPr lang="en-US" sz="1200" dirty="0"/>
+            <a:endParaRPr lang="en-US" sz="850" dirty="0"/>
           </a:p>
         </p:txBody>
       </p:sp>
@@ -7038,8 +7038,8 @@
         </p:nvSpPr>
         <p:spPr>
           <a:xfrm>
-            <a:off x="1161288" y="2639336"/>
-            <a:ext cx="7296912" cy="548640"/>
+            <a:off x="2149438" y="1901160"/>
+            <a:ext cx="5182853" cy="389688"/>
           </a:xfrm>
           <a:prstGeom prst="rect">
             <a:avLst/>
@@ -7058,7 +7058,7 @@
               <a:buNone/>
             </a:pPr>
             <a:r>
-              <a:rPr lang="en-US" sz="1250" b="1" dirty="0">
+              <a:rPr lang="en-US" sz="890" b="1" dirty="0">
                 <a:solidFill>
                   <a:srgbClr val="FFFFFF"/>
                 </a:solidFill>
@@ -7068,7 +7068,7 @@
               </a:rPr>
               <a:t>Phân giải ngang lúc đó là bao nhiêu độ? Ở 40 m hai điểm cách nhau mấy centimet?</a:t>
             </a:r>
-            <a:endParaRPr lang="en-US" sz="1250" dirty="0"/>
+            <a:endParaRPr lang="en-US" sz="890" dirty="0"/>
           </a:p>
           <a:p>
             <a:pPr indent="0" marL="0">
@@ -7078,7 +7078,7 @@
               <a:buNone/>
             </a:pPr>
             <a:r>
-              <a:rPr lang="en-US" sz="1150" dirty="0">
+              <a:rPr lang="en-US" sz="820" dirty="0">
                 <a:solidFill>
                   <a:srgbClr val="AFC3D4"/>
                 </a:solidFill>
@@ -7088,7 +7088,7 @@
               </a:rPr>
               <a:t>這時候水平角解析度是幾度？40 公尺處兩個點相距幾公分？</a:t>
             </a:r>
-            <a:endParaRPr lang="en-US" sz="1250" dirty="0"/>
+            <a:endParaRPr lang="en-US" sz="890" dirty="0"/>
           </a:p>
         </p:txBody>
       </p:sp>
@@ -7100,8 +7100,8 @@
         </p:nvSpPr>
         <p:spPr>
           <a:xfrm>
-            <a:off x="502920" y="3306848"/>
-            <a:ext cx="8138160" cy="621792"/>
+            <a:off x="1681812" y="2375281"/>
+            <a:ext cx="5780375" cy="441647"/>
           </a:xfrm>
           <a:prstGeom prst="roundRect">
             <a:avLst>
@@ -7122,8 +7122,8 @@
         </p:nvSpPr>
         <p:spPr>
           <a:xfrm>
-            <a:off x="667512" y="3453152"/>
-            <a:ext cx="329184" cy="329184"/>
+            <a:off x="1798719" y="2479198"/>
+            <a:ext cx="233813" cy="233813"/>
           </a:xfrm>
           <a:prstGeom prst="ellipse">
             <a:avLst/>
@@ -7142,8 +7142,8 @@
         </p:nvSpPr>
         <p:spPr>
           <a:xfrm>
-            <a:off x="667512" y="3480584"/>
-            <a:ext cx="329184" cy="274320"/>
+            <a:off x="1798719" y="2498682"/>
+            <a:ext cx="233813" cy="194844"/>
           </a:xfrm>
           <a:prstGeom prst="rect">
             <a:avLst/>
@@ -7159,7 +7159,7 @@
               <a:buNone/>
             </a:pPr>
             <a:r>
-              <a:rPr lang="en-US" sz="1200" b="1" dirty="0">
+              <a:rPr lang="en-US" sz="850" b="1" dirty="0">
                 <a:solidFill>
                   <a:srgbClr val="FFFFFF"/>
                 </a:solidFill>
@@ -7169,7 +7169,7 @@
               </a:rPr>
               <a:t>3</a:t>
             </a:r>
-            <a:endParaRPr lang="en-US" sz="1200" dirty="0"/>
+            <a:endParaRPr lang="en-US" sz="850" dirty="0"/>
           </a:p>
         </p:txBody>
       </p:sp>
@@ -7181,8 +7181,8 @@
         </p:nvSpPr>
         <p:spPr>
           <a:xfrm>
-            <a:off x="1161288" y="3352568"/>
-            <a:ext cx="7296912" cy="548640"/>
+            <a:off x="2149438" y="2407755"/>
+            <a:ext cx="5182853" cy="389688"/>
           </a:xfrm>
           <a:prstGeom prst="rect">
             <a:avLst/>
@@ -7201,7 +7201,7 @@
               <a:buNone/>
             </a:pPr>
             <a:r>
-              <a:rPr lang="en-US" sz="1250" b="1" dirty="0">
+              <a:rPr lang="en-US" sz="890" b="1" dirty="0">
                 <a:solidFill>
                   <a:srgbClr val="FFFFFF"/>
                 </a:solidFill>
@@ -7211,7 +7211,7 @@
               </a:rPr>
               <a:t>Đổi sang 2048 điểm mỗi vòng: hai con số đó đổi thế nào?</a:t>
             </a:r>
-            <a:endParaRPr lang="en-US" sz="1250" dirty="0"/>
+            <a:endParaRPr lang="en-US" sz="890" dirty="0"/>
           </a:p>
           <a:p>
             <a:pPr indent="0" marL="0">
@@ -7221,7 +7221,7 @@
               <a:buNone/>
             </a:pPr>
             <a:r>
-              <a:rPr lang="en-US" sz="1150" dirty="0">
+              <a:rPr lang="en-US" sz="820" dirty="0">
                 <a:solidFill>
                   <a:srgbClr val="AFC3D4"/>
                 </a:solidFill>
@@ -7231,7 +7231,7 @@
               </a:rPr>
               <a:t>改成每圈 2048 點：這兩個數字怎麼變？</a:t>
             </a:r>
-            <a:endParaRPr lang="en-US" sz="1250" dirty="0"/>
+            <a:endParaRPr lang="en-US" sz="890" dirty="0"/>
           </a:p>
         </p:txBody>
       </p:sp>
@@ -7243,8 +7243,8 @@
         </p:nvSpPr>
         <p:spPr>
           <a:xfrm>
-            <a:off x="502920" y="4056656"/>
-            <a:ext cx="8046720" cy="457200"/>
+            <a:off x="1681812" y="2907855"/>
+            <a:ext cx="5715427" cy="324740"/>
           </a:xfrm>
           <a:prstGeom prst="rect">
             <a:avLst/>
@@ -7263,7 +7263,7 @@
               <a:buNone/>
             </a:pPr>
             <a:r>
-              <a:rPr lang="en-US" sz="1250" b="1" dirty="0">
+              <a:rPr lang="en-US" sz="890" b="1" dirty="0">
                 <a:solidFill>
                   <a:srgbClr val="FFB020"/>
                 </a:solidFill>
@@ -7273,7 +7273,7 @@
               </a:rPr>
               <a:t>Datasheet hay chỉ ghi «điểm mỗi giây» — con số oai nhất, nhưng không dùng thẳng được.</a:t>
             </a:r>
-            <a:endParaRPr lang="en-US" sz="1250" dirty="0"/>
+            <a:endParaRPr lang="en-US" sz="890" dirty="0"/>
           </a:p>
           <a:p>
             <a:pPr indent="0" marL="0">
@@ -7283,7 +7283,7 @@
               <a:buNone/>
             </a:pPr>
             <a:r>
-              <a:rPr lang="en-US" sz="1150" dirty="0">
+              <a:rPr lang="en-US" sz="820" dirty="0">
                 <a:solidFill>
                   <a:srgbClr val="FFB020"/>
                 </a:solidFill>
@@ -7293,7 +7293,7 @@
               </a:rPr>
               <a:t>規格表常常只寫「每秒幾點」——那是最威風的數字，可是不能直接拿來用。</a:t>
             </a:r>
-            <a:endParaRPr lang="en-US" sz="1250" dirty="0"/>
+            <a:endParaRPr lang="en-US" sz="890" dirty="0"/>
           </a:p>
         </p:txBody>
       </p:sp>
@@ -7305,8 +7305,8 @@
         </p:nvSpPr>
         <p:spPr>
           <a:xfrm>
-            <a:off x="109728" y="4791456"/>
-            <a:ext cx="822960" cy="256032"/>
+            <a:off x="1402536" y="3390800"/>
+            <a:ext cx="584532" cy="181855"/>
           </a:xfrm>
           <a:prstGeom prst="rect">
             <a:avLst/>
@@ -7322,7 +7322,7 @@
               <a:buNone/>
             </a:pPr>
             <a:r>
-              <a:rPr lang="en-US" sz="900" dirty="0">
+              <a:rPr lang="en-US" sz="640" dirty="0">
                 <a:solidFill>
                   <a:srgbClr val="9FB3C8"/>
                 </a:solidFill>
@@ -7332,7 +7332,7 @@
               </a:rPr>
               <a:t>10 / 14</a:t>
             </a:r>
-            <a:endParaRPr lang="en-US" sz="900" dirty="0"/>
+            <a:endParaRPr lang="en-US" sz="640" dirty="0"/>
           </a:p>
         </p:txBody>
       </p:sp>
@@ -7344,8 +7344,8 @@
         </p:nvSpPr>
         <p:spPr>
           <a:xfrm>
-            <a:off x="960120" y="4791456"/>
-            <a:ext cx="2011680" cy="256032"/>
+            <a:off x="2006553" y="3390800"/>
+            <a:ext cx="1428857" cy="181855"/>
           </a:xfrm>
           <a:prstGeom prst="rect">
             <a:avLst/>
@@ -7361,7 +7361,7 @@
               <a:buNone/>
             </a:pPr>
             <a:r>
-              <a:rPr lang="en-US" sz="900" dirty="0">
+              <a:rPr lang="en-US" sz="640" dirty="0">
                 <a:solidFill>
                   <a:srgbClr val="9FB3C8"/>
                 </a:solidFill>
@@ -7371,7 +7371,7 @@
               </a:rPr>
               <a:t>Tiết 2 · 第 2 節</a:t>
             </a:r>
-            <a:endParaRPr lang="en-US" sz="900" dirty="0"/>
+            <a:endParaRPr lang="en-US" sz="640" dirty="0"/>
           </a:p>
         </p:txBody>
       </p:sp>
@@ -7415,8 +7415,8 @@
         </p:nvSpPr>
         <p:spPr>
           <a:xfrm>
-            <a:off x="6766560" y="-1371600"/>
-            <a:ext cx="4206240" cy="4206240"/>
+            <a:off x="6130753" y="-947729"/>
+            <a:ext cx="2987610" cy="2987610"/>
           </a:xfrm>
           <a:prstGeom prst="ellipse">
             <a:avLst/>
@@ -7440,8 +7440,8 @@
         </p:nvSpPr>
         <p:spPr>
           <a:xfrm>
-            <a:off x="7863840" y="3108960"/>
-            <a:ext cx="2560320" cy="2560320"/>
+            <a:off x="7104973" y="1520297"/>
+            <a:ext cx="1688649" cy="1688649"/>
           </a:xfrm>
           <a:prstGeom prst="ellipse">
             <a:avLst/>
@@ -7462,8 +7462,8 @@
         </p:nvSpPr>
         <p:spPr>
           <a:xfrm>
-            <a:off x="502920" y="1691640"/>
-            <a:ext cx="4572000" cy="310896"/>
+            <a:off x="1681812" y="1228031"/>
+            <a:ext cx="3247402" cy="220823"/>
           </a:xfrm>
           <a:prstGeom prst="rect">
             <a:avLst/>
@@ -7479,7 +7479,7 @@
               <a:buNone/>
             </a:pPr>
             <a:r>
-              <a:rPr lang="en-US" sz="1350" b="1" dirty="0">
+              <a:rPr lang="en-US" sz="960" b="1" dirty="0">
                 <a:solidFill>
                   <a:srgbClr val="FFB020"/>
                 </a:solidFill>
@@ -7489,7 +7489,7 @@
               </a:rPr>
               <a:t>Phần 3 / 3</a:t>
             </a:r>
-            <a:endParaRPr lang="en-US" sz="1350" dirty="0"/>
+            <a:endParaRPr lang="en-US" sz="960" dirty="0"/>
           </a:p>
         </p:txBody>
       </p:sp>
@@ -7501,8 +7501,8 @@
         </p:nvSpPr>
         <p:spPr>
           <a:xfrm>
-            <a:off x="502920" y="2048256"/>
-            <a:ext cx="7315200" cy="1188720"/>
+            <a:off x="1681812" y="1481328"/>
+            <a:ext cx="5195843" cy="844324"/>
           </a:xfrm>
           <a:prstGeom prst="rect">
             <a:avLst/>
@@ -7521,7 +7521,7 @@
               <a:buNone/>
             </a:pPr>
             <a:r>
-              <a:rPr lang="en-US" sz="2900" b="1" dirty="0">
+              <a:rPr lang="en-US" sz="2060" b="1" dirty="0">
                 <a:solidFill>
                   <a:srgbClr val="FFFFFF"/>
                 </a:solidFill>
@@ -7531,7 +7531,7 @@
               </a:rPr>
               <a:t>Hai cảm biến tốt, ghép lại vẫn sai</a:t>
             </a:r>
-            <a:endParaRPr lang="en-US" sz="2900" dirty="0"/>
+            <a:endParaRPr lang="en-US" sz="2060" dirty="0"/>
           </a:p>
           <a:p>
             <a:pPr indent="0" marL="0">
@@ -7541,7 +7541,7 @@
               <a:buNone/>
             </a:pPr>
             <a:r>
-              <a:rPr lang="en-US" sz="1700" dirty="0">
+              <a:rPr lang="en-US" sz="1210" dirty="0">
                 <a:solidFill>
                   <a:srgbClr val="AFC3D4"/>
                 </a:solidFill>
@@ -7551,7 +7551,7 @@
               </a:rPr>
               <a:t>兩顆都是好的，合起來還是錯的</a:t>
             </a:r>
-            <a:endParaRPr lang="en-US" sz="2900" dirty="0"/>
+            <a:endParaRPr lang="en-US" sz="2060" dirty="0"/>
           </a:p>
         </p:txBody>
       </p:sp>
@@ -7563,8 +7563,8 @@
         </p:nvSpPr>
         <p:spPr>
           <a:xfrm>
-            <a:off x="502920" y="3346704"/>
-            <a:ext cx="7315200" cy="640080"/>
+            <a:off x="1681812" y="2403590"/>
+            <a:ext cx="5195843" cy="454636"/>
           </a:xfrm>
           <a:prstGeom prst="rect">
             <a:avLst/>
@@ -7583,7 +7583,7 @@
               <a:buNone/>
             </a:pPr>
             <a:r>
-              <a:rPr lang="en-US" sz="1350" dirty="0">
+              <a:rPr lang="en-US" sz="960" dirty="0">
                 <a:solidFill>
                   <a:srgbClr val="AFC3D4"/>
                 </a:solidFill>
@@ -7593,7 +7593,7 @@
               </a:rPr>
               <a:t>Hiệu chuẩn và đồng bộ thời gian</a:t>
             </a:r>
-            <a:endParaRPr lang="en-US" sz="1350" dirty="0"/>
+            <a:endParaRPr lang="en-US" sz="960" dirty="0"/>
           </a:p>
           <a:p>
             <a:pPr indent="0" marL="0">
@@ -7603,7 +7603,7 @@
               <a:buNone/>
             </a:pPr>
             <a:r>
-              <a:rPr lang="en-US" sz="1200" dirty="0">
+              <a:rPr lang="en-US" sz="850" dirty="0">
                 <a:solidFill>
                   <a:srgbClr val="8AA0B4"/>
                 </a:solidFill>
@@ -7613,7 +7613,7 @@
               </a:rPr>
               <a:t>標定與時間同步</a:t>
             </a:r>
-            <a:endParaRPr lang="en-US" sz="1350" dirty="0"/>
+            <a:endParaRPr lang="en-US" sz="960" dirty="0"/>
           </a:p>
         </p:txBody>
       </p:sp>
@@ -7625,8 +7625,8 @@
         </p:nvSpPr>
         <p:spPr>
           <a:xfrm>
-            <a:off x="109728" y="4791456"/>
-            <a:ext cx="822960" cy="256032"/>
+            <a:off x="1402536" y="3390800"/>
+            <a:ext cx="584532" cy="181855"/>
           </a:xfrm>
           <a:prstGeom prst="rect">
             <a:avLst/>
@@ -7642,7 +7642,7 @@
               <a:buNone/>
             </a:pPr>
             <a:r>
-              <a:rPr lang="en-US" sz="900" dirty="0">
+              <a:rPr lang="en-US" sz="640" dirty="0">
                 <a:solidFill>
                   <a:srgbClr val="9FB3C8"/>
                 </a:solidFill>
@@ -7652,7 +7652,7 @@
               </a:rPr>
               <a:t>11 / 14</a:t>
             </a:r>
-            <a:endParaRPr lang="en-US" sz="900" dirty="0"/>
+            <a:endParaRPr lang="en-US" sz="640" dirty="0"/>
           </a:p>
         </p:txBody>
       </p:sp>
@@ -7664,8 +7664,8 @@
         </p:nvSpPr>
         <p:spPr>
           <a:xfrm>
-            <a:off x="960120" y="4791456"/>
-            <a:ext cx="2011680" cy="256032"/>
+            <a:off x="2006553" y="3390800"/>
+            <a:ext cx="1428857" cy="181855"/>
           </a:xfrm>
           <a:prstGeom prst="rect">
             <a:avLst/>
@@ -7681,7 +7681,7 @@
               <a:buNone/>
             </a:pPr>
             <a:r>
-              <a:rPr lang="en-US" sz="900" dirty="0">
+              <a:rPr lang="en-US" sz="640" dirty="0">
                 <a:solidFill>
                   <a:srgbClr val="9FB3C8"/>
                 </a:solidFill>
@@ -7691,7 +7691,7 @@
               </a:rPr>
               <a:t>Tiết 2 · 第 2 節</a:t>
             </a:r>
-            <a:endParaRPr lang="en-US" sz="900" dirty="0"/>
+            <a:endParaRPr lang="en-US" sz="640" dirty="0"/>
           </a:p>
         </p:txBody>
       </p:sp>
@@ -7728,8 +7728,8 @@
         </p:nvSpPr>
         <p:spPr>
           <a:xfrm>
-            <a:off x="502920" y="292608"/>
-            <a:ext cx="8138160" cy="841248"/>
+            <a:off x="1681812" y="234326"/>
+            <a:ext cx="5780375" cy="597522"/>
           </a:xfrm>
           <a:prstGeom prst="rect">
             <a:avLst/>
@@ -7748,7 +7748,7 @@
               <a:buNone/>
             </a:pPr>
             <a:r>
-              <a:rPr lang="en-US" sz="2200" b="1" dirty="0">
+              <a:rPr lang="en-US" sz="1560" b="1" dirty="0">
                 <a:solidFill>
                   <a:srgbClr val="0B1F3A"/>
                 </a:solidFill>
@@ -7758,7 +7758,7 @@
               </a:rPr>
               <a:t>Hiệu chuẩn: nói cho xe biết mỗi con mắt ở đâu, nhìn hướng nào</a:t>
             </a:r>
-            <a:endParaRPr lang="en-US" sz="2200" dirty="0"/>
+            <a:endParaRPr lang="en-US" sz="1560" dirty="0"/>
           </a:p>
           <a:p>
             <a:pPr indent="0" marL="0">
@@ -7768,7 +7768,7 @@
               <a:buNone/>
             </a:pPr>
             <a:r>
-              <a:rPr lang="en-US" sz="1350" dirty="0">
+              <a:rPr lang="en-US" sz="960" dirty="0">
                 <a:solidFill>
                   <a:srgbClr val="5F7183"/>
                 </a:solidFill>
@@ -7778,7 +7778,7 @@
               </a:rPr>
               <a:t>標定：告訴車子每一隻眼睛裝在哪、朝哪看</a:t>
             </a:r>
-            <a:endParaRPr lang="en-US" sz="2200" dirty="0"/>
+            <a:endParaRPr lang="en-US" sz="1560" dirty="0"/>
           </a:p>
         </p:txBody>
       </p:sp>
@@ -7790,8 +7790,8 @@
         </p:nvSpPr>
         <p:spPr>
           <a:xfrm>
-            <a:off x="502920" y="1322366"/>
-            <a:ext cx="2529840" cy="2724912"/>
+            <a:off x="1681812" y="965743"/>
+            <a:ext cx="1796896" cy="1935452"/>
           </a:xfrm>
           <a:prstGeom prst="roundRect">
             <a:avLst>
@@ -7824,8 +7824,8 @@
         </p:nvSpPr>
         <p:spPr>
           <a:xfrm>
-            <a:off x="1530096" y="1505246"/>
-            <a:ext cx="475488" cy="475488"/>
+            <a:off x="2411395" y="1095639"/>
+            <a:ext cx="337730" cy="337730"/>
           </a:xfrm>
           <a:prstGeom prst="ellipse">
             <a:avLst/>
@@ -7844,8 +7844,8 @@
         </p:nvSpPr>
         <p:spPr>
           <a:xfrm>
-            <a:off x="1530096" y="1605830"/>
-            <a:ext cx="475488" cy="274320"/>
+            <a:off x="2411395" y="1167082"/>
+            <a:ext cx="337730" cy="194844"/>
           </a:xfrm>
           <a:prstGeom prst="rect">
             <a:avLst/>
@@ -7861,7 +7861,7 @@
               <a:buNone/>
             </a:pPr>
             <a:r>
-              <a:rPr lang="en-US" sz="1500" b="1" dirty="0">
+              <a:rPr lang="en-US" sz="1070" b="1" dirty="0">
                 <a:solidFill>
                   <a:srgbClr val="FFFFFF"/>
                 </a:solidFill>
@@ -7871,7 +7871,7 @@
               </a:rPr>
               <a:t>1</a:t>
             </a:r>
-            <a:endParaRPr lang="en-US" sz="1500" dirty="0"/>
+            <a:endParaRPr lang="en-US" sz="1070" dirty="0"/>
           </a:p>
         </p:txBody>
       </p:sp>
@@ -7883,8 +7883,8 @@
         </p:nvSpPr>
         <p:spPr>
           <a:xfrm>
-            <a:off x="630936" y="2072174"/>
-            <a:ext cx="2273808" cy="658368"/>
+            <a:off x="1772740" y="1498317"/>
+            <a:ext cx="1615041" cy="467626"/>
           </a:xfrm>
           <a:prstGeom prst="rect">
             <a:avLst/>
@@ -7903,7 +7903,7 @@
               <a:buNone/>
             </a:pPr>
             <a:r>
-              <a:rPr lang="en-US" sz="1400" b="1" dirty="0">
+              <a:rPr lang="en-US" sz="990" b="1" dirty="0">
                 <a:solidFill>
                   <a:srgbClr val="0B1F3A"/>
                 </a:solidFill>
@@ -7913,7 +7913,7 @@
               </a:rPr>
               <a:t>Tham số trong</a:t>
             </a:r>
-            <a:endParaRPr lang="en-US" sz="1400" dirty="0"/>
+            <a:endParaRPr lang="en-US" sz="990" dirty="0"/>
           </a:p>
           <a:p>
             <a:pPr algn="ctr" indent="0" marL="0">
@@ -7923,7 +7923,7 @@
               <a:buNone/>
             </a:pPr>
             <a:r>
-              <a:rPr lang="en-US" sz="1200" dirty="0">
+              <a:rPr lang="en-US" sz="850" dirty="0">
                 <a:solidFill>
                   <a:srgbClr val="007F72"/>
                 </a:solidFill>
@@ -7933,7 +7933,7 @@
               </a:rPr>
               <a:t>內參</a:t>
             </a:r>
-            <a:endParaRPr lang="en-US" sz="1400" dirty="0"/>
+            <a:endParaRPr lang="en-US" sz="990" dirty="0"/>
           </a:p>
         </p:txBody>
       </p:sp>
@@ -7945,8 +7945,8 @@
         </p:nvSpPr>
         <p:spPr>
           <a:xfrm>
-            <a:off x="630936" y="2767118"/>
-            <a:ext cx="2273808" cy="1170432"/>
+            <a:off x="1772740" y="1991922"/>
+            <a:ext cx="1615041" cy="831335"/>
           </a:xfrm>
           <a:prstGeom prst="rect">
             <a:avLst/>
@@ -7965,7 +7965,7 @@
               <a:buNone/>
             </a:pPr>
             <a:r>
-              <a:rPr lang="en-US" sz="1150" dirty="0">
+              <a:rPr lang="en-US" sz="820" dirty="0">
                 <a:solidFill>
                   <a:srgbClr val="5F7183"/>
                 </a:solidFill>
@@ -7975,7 +7975,7 @@
               </a:rPr>
               <a:t>Ống kính méo bao nhiêu</a:t>
             </a:r>
-            <a:endParaRPr lang="en-US" sz="1150" dirty="0"/>
+            <a:endParaRPr lang="en-US" sz="820" dirty="0"/>
           </a:p>
           <a:p>
             <a:pPr algn="ctr" indent="0" marL="0">
@@ -7985,7 +7985,7 @@
               <a:buNone/>
             </a:pPr>
             <a:r>
-              <a:rPr lang="en-US" sz="1150" dirty="0">
+              <a:rPr lang="en-US" sz="820" dirty="0">
                 <a:solidFill>
                   <a:srgbClr val="5F7183"/>
                 </a:solidFill>
@@ -7995,7 +7995,7 @@
               </a:rPr>
               <a:t>Tâm ảnh ở đâu</a:t>
             </a:r>
-            <a:endParaRPr lang="en-US" sz="1150" dirty="0"/>
+            <a:endParaRPr lang="en-US" sz="820" dirty="0"/>
           </a:p>
           <a:p>
             <a:pPr algn="ctr" indent="0" marL="0">
@@ -8005,7 +8005,7 @@
               <a:buNone/>
             </a:pPr>
             <a:r>
-              <a:rPr lang="en-US" sz="1050" dirty="0">
+              <a:rPr lang="en-US" sz="750" dirty="0">
                 <a:solidFill>
                   <a:srgbClr val="5F7183"/>
                 </a:solidFill>
@@ -8015,7 +8015,7 @@
               </a:rPr>
               <a:t>鏡頭扭曲多少</a:t>
             </a:r>
-            <a:endParaRPr lang="en-US" sz="1150" dirty="0"/>
+            <a:endParaRPr lang="en-US" sz="820" dirty="0"/>
           </a:p>
           <a:p>
             <a:pPr algn="ctr" indent="0" marL="0">
@@ -8025,7 +8025,7 @@
               <a:buNone/>
             </a:pPr>
             <a:r>
-              <a:rPr lang="en-US" sz="1050" dirty="0">
+              <a:rPr lang="en-US" sz="750" dirty="0">
                 <a:solidFill>
                   <a:srgbClr val="5F7183"/>
                 </a:solidFill>
@@ -8035,7 +8035,7 @@
               </a:rPr>
               <a:t>畫面中心在哪</a:t>
             </a:r>
-            <a:endParaRPr lang="en-US" sz="1150" dirty="0"/>
+            <a:endParaRPr lang="en-US" sz="820" dirty="0"/>
           </a:p>
         </p:txBody>
       </p:sp>
@@ -8047,8 +8047,8 @@
         </p:nvSpPr>
         <p:spPr>
           <a:xfrm>
-            <a:off x="3032760" y="2236766"/>
-            <a:ext cx="274320" cy="365760"/>
+            <a:off x="3478708" y="1615223"/>
+            <a:ext cx="194844" cy="259792"/>
           </a:xfrm>
           <a:prstGeom prst="rect">
             <a:avLst/>
@@ -8064,7 +8064,7 @@
               <a:buNone/>
             </a:pPr>
             <a:r>
-              <a:rPr lang="en-US" sz="1900" b="1" dirty="0">
+              <a:rPr lang="en-US" sz="1350" b="1" dirty="0">
                 <a:solidFill>
                   <a:srgbClr val="00A896"/>
                 </a:solidFill>
@@ -8074,7 +8074,7 @@
               </a:rPr>
               <a:t>→</a:t>
             </a:r>
-            <a:endParaRPr lang="en-US" sz="1900" dirty="0"/>
+            <a:endParaRPr lang="en-US" sz="1350" dirty="0"/>
           </a:p>
         </p:txBody>
       </p:sp>
@@ -8086,8 +8086,8 @@
         </p:nvSpPr>
         <p:spPr>
           <a:xfrm>
-            <a:off x="3307080" y="1322366"/>
-            <a:ext cx="2529840" cy="2724912"/>
+            <a:off x="3673552" y="965743"/>
+            <a:ext cx="1796896" cy="1935452"/>
           </a:xfrm>
           <a:prstGeom prst="roundRect">
             <a:avLst>
@@ -8120,8 +8120,8 @@
         </p:nvSpPr>
         <p:spPr>
           <a:xfrm>
-            <a:off x="4334256" y="1505246"/>
-            <a:ext cx="475488" cy="475488"/>
+            <a:off x="4403135" y="1095639"/>
+            <a:ext cx="337730" cy="337730"/>
           </a:xfrm>
           <a:prstGeom prst="ellipse">
             <a:avLst/>
@@ -8140,8 +8140,8 @@
         </p:nvSpPr>
         <p:spPr>
           <a:xfrm>
-            <a:off x="4334256" y="1605830"/>
-            <a:ext cx="475488" cy="274320"/>
+            <a:off x="4403135" y="1167082"/>
+            <a:ext cx="337730" cy="194844"/>
           </a:xfrm>
           <a:prstGeom prst="rect">
             <a:avLst/>
@@ -8157,7 +8157,7 @@
               <a:buNone/>
             </a:pPr>
             <a:r>
-              <a:rPr lang="en-US" sz="1500" b="1" dirty="0">
+              <a:rPr lang="en-US" sz="1070" b="1" dirty="0">
                 <a:solidFill>
                   <a:srgbClr val="FFFFFF"/>
                 </a:solidFill>
@@ -8167,7 +8167,7 @@
               </a:rPr>
               <a:t>2</a:t>
             </a:r>
-            <a:endParaRPr lang="en-US" sz="1500" dirty="0"/>
+            <a:endParaRPr lang="en-US" sz="1070" dirty="0"/>
           </a:p>
         </p:txBody>
       </p:sp>
@@ -8179,8 +8179,8 @@
         </p:nvSpPr>
         <p:spPr>
           <a:xfrm>
-            <a:off x="3435096" y="2072174"/>
-            <a:ext cx="2273808" cy="658368"/>
+            <a:off x="3764479" y="1498317"/>
+            <a:ext cx="1615041" cy="467626"/>
           </a:xfrm>
           <a:prstGeom prst="rect">
             <a:avLst/>
@@ -8199,7 +8199,7 @@
               <a:buNone/>
             </a:pPr>
             <a:r>
-              <a:rPr lang="en-US" sz="1400" b="1" dirty="0">
+              <a:rPr lang="en-US" sz="990" b="1" dirty="0">
                 <a:solidFill>
                   <a:srgbClr val="0B1F3A"/>
                 </a:solidFill>
@@ -8209,7 +8209,7 @@
               </a:rPr>
               <a:t>Tham số ngoài</a:t>
             </a:r>
-            <a:endParaRPr lang="en-US" sz="1400" dirty="0"/>
+            <a:endParaRPr lang="en-US" sz="990" dirty="0"/>
           </a:p>
           <a:p>
             <a:pPr algn="ctr" indent="0" marL="0">
@@ -8219,7 +8219,7 @@
               <a:buNone/>
             </a:pPr>
             <a:r>
-              <a:rPr lang="en-US" sz="1200" dirty="0">
+              <a:rPr lang="en-US" sz="850" dirty="0">
                 <a:solidFill>
                   <a:srgbClr val="007F72"/>
                 </a:solidFill>
@@ -8229,7 +8229,7 @@
               </a:rPr>
               <a:t>外參</a:t>
             </a:r>
-            <a:endParaRPr lang="en-US" sz="1400" dirty="0"/>
+            <a:endParaRPr lang="en-US" sz="990" dirty="0"/>
           </a:p>
         </p:txBody>
       </p:sp>
@@ -8241,8 +8241,8 @@
         </p:nvSpPr>
         <p:spPr>
           <a:xfrm>
-            <a:off x="3435096" y="2767118"/>
-            <a:ext cx="2273808" cy="1170432"/>
+            <a:off x="3764479" y="1991922"/>
+            <a:ext cx="1615041" cy="831335"/>
           </a:xfrm>
           <a:prstGeom prst="rect">
             <a:avLst/>
@@ -8261,7 +8261,7 @@
               <a:buNone/>
             </a:pPr>
             <a:r>
-              <a:rPr lang="en-US" sz="1150" dirty="0">
+              <a:rPr lang="en-US" sz="820" dirty="0">
                 <a:solidFill>
                   <a:srgbClr val="5F7183"/>
                 </a:solidFill>
@@ -8271,7 +8271,7 @@
               </a:rPr>
               <a:t>Camera và lidar</a:t>
             </a:r>
-            <a:endParaRPr lang="en-US" sz="1150" dirty="0"/>
+            <a:endParaRPr lang="en-US" sz="820" dirty="0"/>
           </a:p>
           <a:p>
             <a:pPr algn="ctr" indent="0" marL="0">
@@ -8281,7 +8281,7 @@
               <a:buNone/>
             </a:pPr>
             <a:r>
-              <a:rPr lang="en-US" sz="1150" dirty="0">
+              <a:rPr lang="en-US" sz="820" dirty="0">
                 <a:solidFill>
                   <a:srgbClr val="5F7183"/>
                 </a:solidFill>
@@ -8291,7 +8291,7 @@
               </a:rPr>
               <a:t>cách nhau bao xa, lệch mấy độ</a:t>
             </a:r>
-            <a:endParaRPr lang="en-US" sz="1150" dirty="0"/>
+            <a:endParaRPr lang="en-US" sz="820" dirty="0"/>
           </a:p>
           <a:p>
             <a:pPr algn="ctr" indent="0" marL="0">
@@ -8301,7 +8301,7 @@
               <a:buNone/>
             </a:pPr>
             <a:r>
-              <a:rPr lang="en-US" sz="1050" dirty="0">
+              <a:rPr lang="en-US" sz="750" dirty="0">
                 <a:solidFill>
                   <a:srgbClr val="5F7183"/>
                 </a:solidFill>
@@ -8311,7 +8311,7 @@
               </a:rPr>
               <a:t>相機和光達</a:t>
             </a:r>
-            <a:endParaRPr lang="en-US" sz="1150" dirty="0"/>
+            <a:endParaRPr lang="en-US" sz="820" dirty="0"/>
           </a:p>
           <a:p>
             <a:pPr algn="ctr" indent="0" marL="0">
@@ -8321,7 +8321,7 @@
               <a:buNone/>
             </a:pPr>
             <a:r>
-              <a:rPr lang="en-US" sz="1050" dirty="0">
+              <a:rPr lang="en-US" sz="750" dirty="0">
                 <a:solidFill>
                   <a:srgbClr val="5F7183"/>
                 </a:solidFill>
@@ -8331,7 +8331,7 @@
               </a:rPr>
               <a:t>相距多遠、差幾度</a:t>
             </a:r>
-            <a:endParaRPr lang="en-US" sz="1150" dirty="0"/>
+            <a:endParaRPr lang="en-US" sz="820" dirty="0"/>
           </a:p>
         </p:txBody>
       </p:sp>
@@ -8343,8 +8343,8 @@
         </p:nvSpPr>
         <p:spPr>
           <a:xfrm>
-            <a:off x="5836920" y="2236766"/>
-            <a:ext cx="274320" cy="365760"/>
+            <a:off x="5470448" y="1615223"/>
+            <a:ext cx="194844" cy="259792"/>
           </a:xfrm>
           <a:prstGeom prst="rect">
             <a:avLst/>
@@ -8360,7 +8360,7 @@
               <a:buNone/>
             </a:pPr>
             <a:r>
-              <a:rPr lang="en-US" sz="1900" b="1" dirty="0">
+              <a:rPr lang="en-US" sz="1350" b="1" dirty="0">
                 <a:solidFill>
                   <a:srgbClr val="00A896"/>
                 </a:solidFill>
@@ -8370,7 +8370,7 @@
               </a:rPr>
               <a:t>→</a:t>
             </a:r>
-            <a:endParaRPr lang="en-US" sz="1900" dirty="0"/>
+            <a:endParaRPr lang="en-US" sz="1350" dirty="0"/>
           </a:p>
         </p:txBody>
       </p:sp>
@@ -8382,8 +8382,8 @@
         </p:nvSpPr>
         <p:spPr>
           <a:xfrm>
-            <a:off x="6111240" y="1322366"/>
-            <a:ext cx="2529840" cy="2724912"/>
+            <a:off x="5665292" y="965743"/>
+            <a:ext cx="1796896" cy="1935452"/>
           </a:xfrm>
           <a:prstGeom prst="roundRect">
             <a:avLst>
@@ -8416,8 +8416,8 @@
         </p:nvSpPr>
         <p:spPr>
           <a:xfrm>
-            <a:off x="7138416" y="1505246"/>
-            <a:ext cx="475488" cy="475488"/>
+            <a:off x="6394875" y="1095639"/>
+            <a:ext cx="337730" cy="337730"/>
           </a:xfrm>
           <a:prstGeom prst="ellipse">
             <a:avLst/>
@@ -8436,8 +8436,8 @@
         </p:nvSpPr>
         <p:spPr>
           <a:xfrm>
-            <a:off x="7138416" y="1605830"/>
-            <a:ext cx="475488" cy="274320"/>
+            <a:off x="6394875" y="1167082"/>
+            <a:ext cx="337730" cy="194844"/>
           </a:xfrm>
           <a:prstGeom prst="rect">
             <a:avLst/>
@@ -8453,7 +8453,7 @@
               <a:buNone/>
             </a:pPr>
             <a:r>
-              <a:rPr lang="en-US" sz="1500" b="1" dirty="0">
+              <a:rPr lang="en-US" sz="1070" b="1" dirty="0">
                 <a:solidFill>
                   <a:srgbClr val="FFFFFF"/>
                 </a:solidFill>
@@ -8463,7 +8463,7 @@
               </a:rPr>
               <a:t>3</a:t>
             </a:r>
-            <a:endParaRPr lang="en-US" sz="1500" dirty="0"/>
+            <a:endParaRPr lang="en-US" sz="1070" dirty="0"/>
           </a:p>
         </p:txBody>
       </p:sp>
@@ -8475,8 +8475,8 @@
         </p:nvSpPr>
         <p:spPr>
           <a:xfrm>
-            <a:off x="6239256" y="2072174"/>
-            <a:ext cx="2273808" cy="658368"/>
+            <a:off x="5756219" y="1498317"/>
+            <a:ext cx="1615041" cy="467626"/>
           </a:xfrm>
           <a:prstGeom prst="rect">
             <a:avLst/>
@@ -8495,7 +8495,7 @@
               <a:buNone/>
             </a:pPr>
             <a:r>
-              <a:rPr lang="en-US" sz="1400" b="1" dirty="0">
+              <a:rPr lang="en-US" sz="990" b="1" dirty="0">
                 <a:solidFill>
                   <a:srgbClr val="0B1F3A"/>
                 </a:solidFill>
@@ -8505,7 +8505,7 @@
               </a:rPr>
               <a:t>Sai 1°</a:t>
             </a:r>
-            <a:endParaRPr lang="en-US" sz="1400" dirty="0"/>
+            <a:endParaRPr lang="en-US" sz="990" dirty="0"/>
           </a:p>
           <a:p>
             <a:pPr algn="ctr" indent="0" marL="0">
@@ -8515,7 +8515,7 @@
               <a:buNone/>
             </a:pPr>
             <a:r>
-              <a:rPr lang="en-US" sz="1200" dirty="0">
+              <a:rPr lang="en-US" sz="850" dirty="0">
                 <a:solidFill>
                   <a:srgbClr val="007F72"/>
                 </a:solidFill>
@@ -8525,7 +8525,7 @@
               </a:rPr>
               <a:t>差 1 度</a:t>
             </a:r>
-            <a:endParaRPr lang="en-US" sz="1400" dirty="0"/>
+            <a:endParaRPr lang="en-US" sz="990" dirty="0"/>
           </a:p>
         </p:txBody>
       </p:sp>
@@ -8537,8 +8537,8 @@
         </p:nvSpPr>
         <p:spPr>
           <a:xfrm>
-            <a:off x="6239256" y="2767118"/>
-            <a:ext cx="2273808" cy="1170432"/>
+            <a:off x="5756219" y="1991922"/>
+            <a:ext cx="1615041" cy="831335"/>
           </a:xfrm>
           <a:prstGeom prst="rect">
             <a:avLst/>
@@ -8557,7 +8557,7 @@
               <a:buNone/>
             </a:pPr>
             <a:r>
-              <a:rPr lang="en-US" sz="1150" dirty="0">
+              <a:rPr lang="en-US" sz="820" dirty="0">
                 <a:solidFill>
                   <a:srgbClr val="5F7183"/>
                 </a:solidFill>
@@ -8567,7 +8567,7 @@
               </a:rPr>
               <a:t>Ở 50 m lệch gần 0,9 m</a:t>
             </a:r>
-            <a:endParaRPr lang="en-US" sz="1150" dirty="0"/>
+            <a:endParaRPr lang="en-US" sz="820" dirty="0"/>
           </a:p>
           <a:p>
             <a:pPr algn="ctr" indent="0" marL="0">
@@ -8577,7 +8577,7 @@
               <a:buNone/>
             </a:pPr>
             <a:r>
-              <a:rPr lang="en-US" sz="1150" dirty="0">
+              <a:rPr lang="en-US" sz="820" dirty="0">
                 <a:solidFill>
                   <a:srgbClr val="5F7183"/>
                 </a:solidFill>
@@ -8587,7 +8587,7 @@
               </a:rPr>
               <a:t>Đủ để nhầm làn</a:t>
             </a:r>
-            <a:endParaRPr lang="en-US" sz="1150" dirty="0"/>
+            <a:endParaRPr lang="en-US" sz="820" dirty="0"/>
           </a:p>
           <a:p>
             <a:pPr algn="ctr" indent="0" marL="0">
@@ -8597,7 +8597,7 @@
               <a:buNone/>
             </a:pPr>
             <a:r>
-              <a:rPr lang="en-US" sz="1050" dirty="0">
+              <a:rPr lang="en-US" sz="750" dirty="0">
                 <a:solidFill>
                   <a:srgbClr val="5F7183"/>
                 </a:solidFill>
@@ -8607,7 +8607,7 @@
               </a:rPr>
               <a:t>50 公尺處差 0.9 公尺</a:t>
             </a:r>
-            <a:endParaRPr lang="en-US" sz="1150" dirty="0"/>
+            <a:endParaRPr lang="en-US" sz="820" dirty="0"/>
           </a:p>
           <a:p>
             <a:pPr algn="ctr" indent="0" marL="0">
@@ -8617,7 +8617,7 @@
               <a:buNone/>
             </a:pPr>
             <a:r>
-              <a:rPr lang="en-US" sz="1050" dirty="0">
+              <a:rPr lang="en-US" sz="750" dirty="0">
                 <a:solidFill>
                   <a:srgbClr val="5F7183"/>
                 </a:solidFill>
@@ -8627,7 +8627,7 @@
               </a:rPr>
               <a:t>足以搞錯車道</a:t>
             </a:r>
-            <a:endParaRPr lang="en-US" sz="1150" dirty="0"/>
+            <a:endParaRPr lang="en-US" sz="820" dirty="0"/>
           </a:p>
         </p:txBody>
       </p:sp>
@@ -8639,8 +8639,8 @@
         </p:nvSpPr>
         <p:spPr>
           <a:xfrm>
-            <a:off x="502920" y="4193582"/>
-            <a:ext cx="8138160" cy="566928"/>
+            <a:off x="1681812" y="3005111"/>
+            <a:ext cx="5780375" cy="402678"/>
           </a:xfrm>
           <a:prstGeom prst="rect">
             <a:avLst/>
@@ -8659,7 +8659,7 @@
               <a:buNone/>
             </a:pPr>
             <a:r>
-              <a:rPr lang="en-US" sz="1250" b="1" dirty="0">
+              <a:rPr lang="en-US" sz="890" b="1" dirty="0">
                 <a:solidFill>
                   <a:srgbClr val="0B1F3A"/>
                 </a:solidFill>
@@ -8669,7 +8669,7 @@
               </a:rPr>
               <a:t>Rung, va chạm, thay kính chắn gió — đều làm lệch. Nên phải hiệu chuẩn lại định kỳ.</a:t>
             </a:r>
-            <a:endParaRPr lang="en-US" sz="1250" dirty="0"/>
+            <a:endParaRPr lang="en-US" sz="890" dirty="0"/>
           </a:p>
           <a:p>
             <a:pPr indent="0" marL="0">
@@ -8679,7 +8679,7 @@
               <a:buNone/>
             </a:pPr>
             <a:r>
-              <a:rPr lang="en-US" sz="1150" dirty="0">
+              <a:rPr lang="en-US" sz="820" dirty="0">
                 <a:solidFill>
                   <a:srgbClr val="007F72"/>
                 </a:solidFill>
@@ -8689,7 +8689,7 @@
               </a:rPr>
               <a:t>震動、碰撞、換擋風玻璃，都會讓它跑掉。所以要定期重新標定。</a:t>
             </a:r>
-            <a:endParaRPr lang="en-US" sz="1250" dirty="0"/>
+            <a:endParaRPr lang="en-US" sz="890" dirty="0"/>
           </a:p>
         </p:txBody>
       </p:sp>
@@ -8709,8 +8709,8 @@
         </p:blipFill>
         <p:spPr>
           <a:xfrm>
-            <a:off x="7516368" y="4718304"/>
-            <a:ext cx="1097280" cy="242439"/>
+            <a:off x="6663327" y="3338842"/>
+            <a:ext cx="779376" cy="172200"/>
           </a:xfrm>
           <a:prstGeom prst="rect">
             <a:avLst/>
@@ -8725,8 +8725,8 @@
         </p:nvSpPr>
         <p:spPr>
           <a:xfrm>
-            <a:off x="109728" y="4791456"/>
-            <a:ext cx="822960" cy="256032"/>
+            <a:off x="1402536" y="3390800"/>
+            <a:ext cx="584532" cy="181855"/>
           </a:xfrm>
           <a:prstGeom prst="rect">
             <a:avLst/>
@@ -8742,7 +8742,7 @@
               <a:buNone/>
             </a:pPr>
             <a:r>
-              <a:rPr lang="en-US" sz="900" dirty="0">
+              <a:rPr lang="en-US" sz="640" dirty="0">
                 <a:solidFill>
                   <a:srgbClr val="5F7183"/>
                 </a:solidFill>
@@ -8752,7 +8752,7 @@
               </a:rPr>
               <a:t>12 / 14</a:t>
             </a:r>
-            <a:endParaRPr lang="en-US" sz="900" dirty="0"/>
+            <a:endParaRPr lang="en-US" sz="640" dirty="0"/>
           </a:p>
         </p:txBody>
       </p:sp>
@@ -8764,8 +8764,8 @@
         </p:nvSpPr>
         <p:spPr>
           <a:xfrm>
-            <a:off x="960120" y="4791456"/>
-            <a:ext cx="2011680" cy="256032"/>
+            <a:off x="2006553" y="3390800"/>
+            <a:ext cx="1428857" cy="181855"/>
           </a:xfrm>
           <a:prstGeom prst="rect">
             <a:avLst/>
@@ -8781,7 +8781,7 @@
               <a:buNone/>
             </a:pPr>
             <a:r>
-              <a:rPr lang="en-US" sz="900" dirty="0">
+              <a:rPr lang="en-US" sz="640" dirty="0">
                 <a:solidFill>
                   <a:srgbClr val="5F7183"/>
                 </a:solidFill>
@@ -8791,7 +8791,7 @@
               </a:rPr>
               <a:t>Tiết 2 · 第 2 節</a:t>
             </a:r>
-            <a:endParaRPr lang="en-US" sz="900" dirty="0"/>
+            <a:endParaRPr lang="en-US" sz="640" dirty="0"/>
           </a:p>
         </p:txBody>
       </p:sp>
@@ -8828,8 +8828,8 @@
         </p:nvSpPr>
         <p:spPr>
           <a:xfrm>
-            <a:off x="502920" y="420624"/>
-            <a:ext cx="8138160" cy="274320"/>
+            <a:off x="1681812" y="325253"/>
+            <a:ext cx="5780375" cy="194844"/>
           </a:xfrm>
           <a:prstGeom prst="rect">
             <a:avLst/>
@@ -8845,7 +8845,7 @@
               <a:buNone/>
             </a:pPr>
             <a:r>
-              <a:rPr lang="en-US" sz="1250" b="1" dirty="0">
+              <a:rPr lang="en-US" sz="890" b="1" dirty="0">
                 <a:solidFill>
                   <a:srgbClr val="007F72"/>
                 </a:solidFill>
@@ -8855,7 +8855,7 @@
               </a:rPr>
               <a:t>Đồng bộ · 時間同步</a:t>
             </a:r>
-            <a:endParaRPr lang="en-US" sz="1250" dirty="0"/>
+            <a:endParaRPr lang="en-US" sz="890" dirty="0"/>
           </a:p>
         </p:txBody>
       </p:sp>
@@ -8867,8 +8867,8 @@
         </p:nvSpPr>
         <p:spPr>
           <a:xfrm>
-            <a:off x="502920" y="1101852"/>
-            <a:ext cx="2468880" cy="2514600"/>
+            <a:off x="1681812" y="809116"/>
+            <a:ext cx="1753597" cy="1786071"/>
           </a:xfrm>
           <a:prstGeom prst="roundRect">
             <a:avLst>
@@ -8894,8 +8894,8 @@
         </p:nvSpPr>
         <p:spPr>
           <a:xfrm>
-            <a:off x="1493947" y="2203613"/>
-            <a:ext cx="929396" cy="755477"/>
+            <a:off x="2385719" y="1591675"/>
+            <a:ext cx="660132" cy="536601"/>
           </a:xfrm>
           <a:prstGeom prst="roundRect">
             <a:avLst>
@@ -8921,8 +8921,8 @@
         </p:nvSpPr>
         <p:spPr>
           <a:xfrm>
-            <a:off x="1339047" y="2048073"/>
-            <a:ext cx="929396" cy="755477"/>
+            <a:off x="2275697" y="1481198"/>
+            <a:ext cx="660132" cy="536601"/>
           </a:xfrm>
           <a:prstGeom prst="roundRect">
             <a:avLst>
@@ -8948,8 +8948,8 @@
         </p:nvSpPr>
         <p:spPr>
           <a:xfrm>
-            <a:off x="1184148" y="1892534"/>
-            <a:ext cx="929396" cy="755477"/>
+            <a:off x="2165675" y="1370721"/>
+            <a:ext cx="660132" cy="536601"/>
           </a:xfrm>
           <a:prstGeom prst="roundRect">
             <a:avLst>
@@ -8975,8 +8975,8 @@
         </p:nvSpPr>
         <p:spPr>
           <a:xfrm>
-            <a:off x="1029249" y="1736994"/>
-            <a:ext cx="929396" cy="755477"/>
+            <a:off x="2055653" y="1260245"/>
+            <a:ext cx="660132" cy="536601"/>
           </a:xfrm>
           <a:prstGeom prst="roundRect">
             <a:avLst>
@@ -9002,8 +9002,8 @@
         </p:nvSpPr>
         <p:spPr>
           <a:xfrm>
-            <a:off x="630936" y="2892430"/>
-            <a:ext cx="2212848" cy="399959"/>
+            <a:off x="1772740" y="2080928"/>
+            <a:ext cx="1571743" cy="284083"/>
           </a:xfrm>
           <a:prstGeom prst="rect">
             <a:avLst/>
@@ -9019,7 +9019,7 @@
               <a:buNone/>
             </a:pPr>
             <a:r>
-              <a:rPr lang="en-US" sz="1100" b="1" dirty="0">
+              <a:rPr lang="en-US" sz="780" b="1" dirty="0">
                 <a:solidFill>
                   <a:srgbClr val="8A5A00"/>
                 </a:solidFill>
@@ -9029,7 +9029,7 @@
               </a:rPr>
               <a:t>× 10 000</a:t>
             </a:r>
-            <a:endParaRPr lang="en-US" sz="1100" dirty="0"/>
+            <a:endParaRPr lang="en-US" sz="780" dirty="0"/>
           </a:p>
         </p:txBody>
       </p:sp>
@@ -9041,8 +9041,8 @@
         </p:nvSpPr>
         <p:spPr>
           <a:xfrm>
-            <a:off x="3429000" y="1319005"/>
-            <a:ext cx="5212080" cy="1005611"/>
+            <a:off x="3760150" y="963355"/>
+            <a:ext cx="3702038" cy="714266"/>
           </a:xfrm>
           <a:prstGeom prst="rect">
             <a:avLst/>
@@ -9061,7 +9061,7 @@
               <a:buNone/>
             </a:pPr>
             <a:r>
-              <a:rPr lang="en-US" sz="2300" b="1" dirty="0">
+              <a:rPr lang="en-US" sz="1630" b="1" dirty="0">
                 <a:solidFill>
                   <a:srgbClr val="0B1F3A"/>
                 </a:solidFill>
@@ -9071,7 +9071,7 @@
               </a:rPr>
               <a:t>Đồng bộ thời gian: hai con mắt phải nhìn cùng một khoảnh khắc</a:t>
             </a:r>
-            <a:endParaRPr lang="en-US" sz="2300" dirty="0"/>
+            <a:endParaRPr lang="en-US" sz="1630" dirty="0"/>
           </a:p>
           <a:p>
             <a:pPr indent="0" marL="0">
@@ -9081,7 +9081,7 @@
               <a:buNone/>
             </a:pPr>
             <a:r>
-              <a:rPr lang="en-US" sz="1400" dirty="0">
+              <a:rPr lang="en-US" sz="990" dirty="0">
                 <a:solidFill>
                   <a:srgbClr val="007F72"/>
                 </a:solidFill>
@@ -9091,7 +9091,7 @@
               </a:rPr>
               <a:t>時間同步：兩隻眼睛要看的是同一個瞬間</a:t>
             </a:r>
-            <a:endParaRPr lang="en-US" sz="2300" dirty="0"/>
+            <a:endParaRPr lang="en-US" sz="1630" dirty="0"/>
           </a:p>
         </p:txBody>
       </p:sp>
@@ -9103,8 +9103,8 @@
         </p:nvSpPr>
         <p:spPr>
           <a:xfrm>
-            <a:off x="3429000" y="2416057"/>
-            <a:ext cx="5212080" cy="1074682"/>
+            <a:off x="3760150" y="1742570"/>
+            <a:ext cx="3702038" cy="763326"/>
           </a:xfrm>
           <a:prstGeom prst="rect">
             <a:avLst/>
@@ -9123,7 +9123,7 @@
               <a:buNone/>
             </a:pPr>
             <a:r>
-              <a:rPr lang="en-US" sz="1250" dirty="0">
+              <a:rPr lang="en-US" sz="890" dirty="0">
                 <a:solidFill>
                   <a:srgbClr val="5F7183"/>
                 </a:solidFill>
@@ -9133,7 +9133,7 @@
               </a:rPr>
               <a:t>Lidar 10 Hz, camera 60 fps. Nếu không đóng dấu thời gian chung, khung ảnh và vòng quét có thể lệch nhau tới 50 ms — ở 40 km/h là hơn nửa mét.</a:t>
             </a:r>
-            <a:endParaRPr lang="en-US" sz="1250" dirty="0"/>
+            <a:endParaRPr lang="en-US" sz="890" dirty="0"/>
           </a:p>
           <a:p>
             <a:pPr indent="0" marL="0">
@@ -9143,7 +9143,7 @@
               <a:buNone/>
             </a:pPr>
             <a:r>
-              <a:rPr lang="en-US" sz="1150" dirty="0">
+              <a:rPr lang="en-US" sz="820" dirty="0">
                 <a:solidFill>
                   <a:srgbClr val="5F7183"/>
                 </a:solidFill>
@@ -9153,7 +9153,7 @@
               </a:rPr>
               <a:t>光達 10 Hz、相機 60 fps。如果沒有共同的時間戳，一張畫面和一圈掃描可能差到 50 毫秒——時速 40 就是超過半公尺。</a:t>
             </a:r>
-            <a:endParaRPr lang="en-US" sz="1250" dirty="0"/>
+            <a:endParaRPr lang="en-US" sz="890" dirty="0"/>
           </a:p>
         </p:txBody>
       </p:sp>
@@ -9165,8 +9165,8 @@
         </p:nvSpPr>
         <p:spPr>
           <a:xfrm>
-            <a:off x="502920" y="3913632"/>
-            <a:ext cx="8138160" cy="621792"/>
+            <a:off x="1681812" y="2806268"/>
+            <a:ext cx="5780375" cy="441647"/>
           </a:xfrm>
           <a:prstGeom prst="roundRect">
             <a:avLst>
@@ -9192,8 +9192,8 @@
         </p:nvSpPr>
         <p:spPr>
           <a:xfrm>
-            <a:off x="685800" y="3986784"/>
-            <a:ext cx="7772400" cy="493776"/>
+            <a:off x="1811708" y="2858226"/>
+            <a:ext cx="5520583" cy="350719"/>
           </a:xfrm>
           <a:prstGeom prst="rect">
             <a:avLst/>
@@ -9212,7 +9212,7 @@
               <a:buNone/>
             </a:pPr>
             <a:r>
-              <a:rPr lang="en-US" sz="1250" b="1" dirty="0">
+              <a:rPr lang="en-US" sz="890" b="1" dirty="0">
                 <a:solidFill>
                   <a:srgbClr val="7A4E00"/>
                 </a:solidFill>
@@ -9222,7 +9222,7 @@
               </a:rPr>
               <a:t>OS1 có dòng «multi-sensor phase lock» chính là để giải chuyện này.</a:t>
             </a:r>
-            <a:endParaRPr lang="en-US" sz="1250" dirty="0"/>
+            <a:endParaRPr lang="en-US" sz="890" dirty="0"/>
           </a:p>
           <a:p>
             <a:pPr indent="0" marL="0">
@@ -9232,7 +9232,7 @@
               <a:buNone/>
             </a:pPr>
             <a:r>
-              <a:rPr lang="en-US" sz="1150" dirty="0">
+              <a:rPr lang="en-US" sz="820" dirty="0">
                 <a:solidFill>
                   <a:srgbClr val="7A4E00"/>
                 </a:solidFill>
@@ -9242,7 +9242,7 @@
               </a:rPr>
               <a:t>OS1 規格表上那行 multi-sensor phase lock，就是在處理這件事。</a:t>
             </a:r>
-            <a:endParaRPr lang="en-US" sz="1250" dirty="0"/>
+            <a:endParaRPr lang="en-US" sz="890" dirty="0"/>
           </a:p>
         </p:txBody>
       </p:sp>
@@ -9262,8 +9262,8 @@
         </p:blipFill>
         <p:spPr>
           <a:xfrm>
-            <a:off x="7516368" y="4718304"/>
-            <a:ext cx="1097280" cy="242439"/>
+            <a:off x="6663327" y="3338842"/>
+            <a:ext cx="779376" cy="172200"/>
           </a:xfrm>
           <a:prstGeom prst="rect">
             <a:avLst/>
@@ -9278,8 +9278,8 @@
         </p:nvSpPr>
         <p:spPr>
           <a:xfrm>
-            <a:off x="109728" y="4791456"/>
-            <a:ext cx="822960" cy="256032"/>
+            <a:off x="1402536" y="3390800"/>
+            <a:ext cx="584532" cy="181855"/>
           </a:xfrm>
           <a:prstGeom prst="rect">
             <a:avLst/>
@@ -9295,7 +9295,7 @@
               <a:buNone/>
             </a:pPr>
             <a:r>
-              <a:rPr lang="en-US" sz="900" dirty="0">
+              <a:rPr lang="en-US" sz="640" dirty="0">
                 <a:solidFill>
                   <a:srgbClr val="5F7183"/>
                 </a:solidFill>
@@ -9305,7 +9305,7 @@
               </a:rPr>
               <a:t>13 / 14</a:t>
             </a:r>
-            <a:endParaRPr lang="en-US" sz="900" dirty="0"/>
+            <a:endParaRPr lang="en-US" sz="640" dirty="0"/>
           </a:p>
         </p:txBody>
       </p:sp>
@@ -9317,8 +9317,8 @@
         </p:nvSpPr>
         <p:spPr>
           <a:xfrm>
-            <a:off x="960120" y="4791456"/>
-            <a:ext cx="2011680" cy="256032"/>
+            <a:off x="2006553" y="3390800"/>
+            <a:ext cx="1428857" cy="181855"/>
           </a:xfrm>
           <a:prstGeom prst="rect">
             <a:avLst/>
@@ -9334,7 +9334,7 @@
               <a:buNone/>
             </a:pPr>
             <a:r>
-              <a:rPr lang="en-US" sz="900" dirty="0">
+              <a:rPr lang="en-US" sz="640" dirty="0">
                 <a:solidFill>
                   <a:srgbClr val="5F7183"/>
                 </a:solidFill>
@@ -9344,7 +9344,7 @@
               </a:rPr>
               <a:t>Tiết 2 · 第 2 節</a:t>
             </a:r>
-            <a:endParaRPr lang="en-US" sz="900" dirty="0"/>
+            <a:endParaRPr lang="en-US" sz="640" dirty="0"/>
           </a:p>
         </p:txBody>
       </p:sp>
@@ -9388,8 +9388,8 @@
         </p:nvSpPr>
         <p:spPr>
           <a:xfrm>
-            <a:off x="6766560" y="-1371600"/>
-            <a:ext cx="4206240" cy="4206240"/>
+            <a:off x="6130753" y="-947729"/>
+            <a:ext cx="2987610" cy="2987610"/>
           </a:xfrm>
           <a:prstGeom prst="ellipse">
             <a:avLst/>
@@ -9413,8 +9413,8 @@
         </p:nvSpPr>
         <p:spPr>
           <a:xfrm>
-            <a:off x="7863840" y="3108960"/>
-            <a:ext cx="2560320" cy="2560320"/>
+            <a:off x="7104973" y="1520297"/>
+            <a:ext cx="1688649" cy="1688649"/>
           </a:xfrm>
           <a:prstGeom prst="ellipse">
             <a:avLst/>
@@ -9435,8 +9435,8 @@
         </p:nvSpPr>
         <p:spPr>
           <a:xfrm>
-            <a:off x="502920" y="475488"/>
-            <a:ext cx="6766560" cy="274320"/>
+            <a:off x="1681812" y="364222"/>
+            <a:ext cx="4806155" cy="194844"/>
           </a:xfrm>
           <a:prstGeom prst="rect">
             <a:avLst/>
@@ -9452,7 +9452,7 @@
               <a:buNone/>
             </a:pPr>
             <a:r>
-              <a:rPr lang="en-US" sz="1250" b="1" dirty="0">
+              <a:rPr lang="en-US" sz="890" b="1" dirty="0">
                 <a:solidFill>
                   <a:srgbClr val="FFB020"/>
                 </a:solidFill>
@@ -9462,7 +9462,7 @@
               </a:rPr>
               <a:t>Tiết 2 · 第二節小結</a:t>
             </a:r>
-            <a:endParaRPr lang="en-US" sz="1250" dirty="0"/>
+            <a:endParaRPr lang="en-US" sz="890" dirty="0"/>
           </a:p>
         </p:txBody>
       </p:sp>
@@ -9474,8 +9474,8 @@
         </p:nvSpPr>
         <p:spPr>
           <a:xfrm>
-            <a:off x="502920" y="822960"/>
-            <a:ext cx="8046720" cy="1060704"/>
+            <a:off x="1681812" y="611024"/>
+            <a:ext cx="5715427" cy="753397"/>
           </a:xfrm>
           <a:prstGeom prst="rect">
             <a:avLst/>
@@ -9494,7 +9494,7 @@
               <a:buNone/>
             </a:pPr>
             <a:r>
-              <a:rPr lang="en-US" sz="2500" b="1" dirty="0">
+              <a:rPr lang="en-US" sz="1780" b="1" dirty="0">
                 <a:solidFill>
                   <a:srgbClr val="FFFFFF"/>
                 </a:solidFill>
@@ -9504,7 +9504,7 @@
               </a:rPr>
               <a:t>Mang ba câu này lên máy</a:t>
             </a:r>
-            <a:endParaRPr lang="en-US" sz="2500" dirty="0"/>
+            <a:endParaRPr lang="en-US" sz="1780" dirty="0"/>
           </a:p>
           <a:p>
             <a:pPr indent="0" marL="0">
@@ -9514,7 +9514,7 @@
               <a:buNone/>
             </a:pPr>
             <a:r>
-              <a:rPr lang="en-US" sz="1500" dirty="0">
+              <a:rPr lang="en-US" sz="1070" dirty="0">
                 <a:solidFill>
                   <a:srgbClr val="AFC3D4"/>
                 </a:solidFill>
@@ -9524,7 +9524,7 @@
               </a:rPr>
               <a:t>帶三句話上機</a:t>
             </a:r>
-            <a:endParaRPr lang="en-US" sz="2500" dirty="0"/>
+            <a:endParaRPr lang="en-US" sz="1780" dirty="0"/>
           </a:p>
         </p:txBody>
       </p:sp>
@@ -9536,8 +9536,8 @@
         </p:nvSpPr>
         <p:spPr>
           <a:xfrm>
-            <a:off x="502920" y="1773936"/>
-            <a:ext cx="45720" cy="672713"/>
+            <a:off x="1681812" y="1286484"/>
+            <a:ext cx="32474" cy="477815"/>
           </a:xfrm>
           <a:prstGeom prst="rect">
             <a:avLst/>
@@ -9556,8 +9556,8 @@
         </p:nvSpPr>
         <p:spPr>
           <a:xfrm>
-            <a:off x="722376" y="1737360"/>
-            <a:ext cx="7863840" cy="782441"/>
+            <a:off x="1837688" y="1260505"/>
+            <a:ext cx="5585531" cy="555752"/>
           </a:xfrm>
           <a:prstGeom prst="rect">
             <a:avLst/>
@@ -9576,7 +9576,7 @@
               <a:buNone/>
             </a:pPr>
             <a:r>
-              <a:rPr lang="en-US" sz="1350" b="1" dirty="0">
+              <a:rPr lang="en-US" sz="960" b="1" dirty="0">
                 <a:solidFill>
                   <a:srgbClr val="FFFFFF"/>
                 </a:solidFill>
@@ -9586,7 +9586,7 @@
               </a:rPr>
               <a:t>Camera: màn trập cuốn làm méo vật đang chạy; thiếu dải động thì hầm đen hoặc trời trắng; không có LFM thì đèn đỏ có thể chụp thành tắt.</a:t>
             </a:r>
-            <a:endParaRPr lang="en-US" sz="1350" dirty="0"/>
+            <a:endParaRPr lang="en-US" sz="960" dirty="0"/>
           </a:p>
           <a:p>
             <a:pPr indent="0" marL="0">
@@ -9596,7 +9596,7 @@
               <a:buNone/>
             </a:pPr>
             <a:r>
-              <a:rPr lang="en-US" sz="1200" dirty="0">
+              <a:rPr lang="en-US" sz="850" dirty="0">
                 <a:solidFill>
                   <a:srgbClr val="AFC3D4"/>
                 </a:solidFill>
@@ -9606,7 +9606,7 @@
               </a:rPr>
               <a:t>相機：捲簾快門會扭曲移動中的東西；動態範圍不夠，隧道裡黑或隧道外白；沒有 LFM，紅燈可能拍成沒亮。</a:t>
             </a:r>
-            <a:endParaRPr lang="en-US" sz="1350" dirty="0"/>
+            <a:endParaRPr lang="en-US" sz="960" dirty="0"/>
           </a:p>
         </p:txBody>
       </p:sp>
@@ -9618,8 +9618,8 @@
         </p:nvSpPr>
         <p:spPr>
           <a:xfrm>
-            <a:off x="502920" y="2647817"/>
-            <a:ext cx="45720" cy="672713"/>
+            <a:off x="1681812" y="1907184"/>
+            <a:ext cx="32474" cy="477815"/>
           </a:xfrm>
           <a:prstGeom prst="rect">
             <a:avLst/>
@@ -9638,8 +9638,8 @@
         </p:nvSpPr>
         <p:spPr>
           <a:xfrm>
-            <a:off x="722376" y="2611241"/>
-            <a:ext cx="7863840" cy="782441"/>
+            <a:off x="1837688" y="1881205"/>
+            <a:ext cx="5585531" cy="555752"/>
           </a:xfrm>
           <a:prstGeom prst="rect">
             <a:avLst/>
@@ -9658,7 +9658,7 @@
               <a:buNone/>
             </a:pPr>
             <a:r>
-              <a:rPr lang="en-US" sz="1350" b="1" dirty="0">
+              <a:rPr lang="en-US" sz="960" b="1" dirty="0">
                 <a:solidFill>
                   <a:srgbClr val="FFFFFF"/>
                 </a:solidFill>
@@ -9668,7 +9668,7 @@
               </a:rPr>
               <a:t>Lidar: bước sóng quyết định được bắn mạnh tới đâu; Class 1 là ngưỡng bắt buộc; nhiều lần phản hồi là để sống sót trong mưa bụi.</a:t>
             </a:r>
-            <a:endParaRPr lang="en-US" sz="1350" dirty="0"/>
+            <a:endParaRPr lang="en-US" sz="960" dirty="0"/>
           </a:p>
           <a:p>
             <a:pPr indent="0" marL="0">
@@ -9678,7 +9678,7 @@
               <a:buNone/>
             </a:pPr>
             <a:r>
-              <a:rPr lang="en-US" sz="1200" dirty="0">
+              <a:rPr lang="en-US" sz="850" dirty="0">
                 <a:solidFill>
                   <a:srgbClr val="AFC3D4"/>
                 </a:solidFill>
@@ -9688,7 +9688,7 @@
               </a:rPr>
               <a:t>光達：波長決定能打多強；Class 1 是門檻；多次回波是為了在雨和灰塵裡活下來。</a:t>
             </a:r>
-            <a:endParaRPr lang="en-US" sz="1350" dirty="0"/>
+            <a:endParaRPr lang="en-US" sz="960" dirty="0"/>
           </a:p>
         </p:txBody>
       </p:sp>
@@ -9700,8 +9700,8 @@
         </p:nvSpPr>
         <p:spPr>
           <a:xfrm>
-            <a:off x="502920" y="3521698"/>
-            <a:ext cx="45720" cy="672713"/>
+            <a:off x="1681812" y="2527885"/>
+            <a:ext cx="32474" cy="477815"/>
           </a:xfrm>
           <a:prstGeom prst="rect">
             <a:avLst/>
@@ -9720,8 +9720,8 @@
         </p:nvSpPr>
         <p:spPr>
           <a:xfrm>
-            <a:off x="722376" y="3485122"/>
-            <a:ext cx="7863840" cy="782441"/>
+            <a:off x="1837688" y="2501905"/>
+            <a:ext cx="5585531" cy="555752"/>
           </a:xfrm>
           <a:prstGeom prst="rect">
             <a:avLst/>
@@ -9740,7 +9740,7 @@
               <a:buNone/>
             </a:pPr>
             <a:r>
-              <a:rPr lang="en-US" sz="1350" b="1" dirty="0">
+              <a:rPr lang="en-US" sz="960" b="1" dirty="0">
                 <a:solidFill>
                   <a:srgbClr val="FFFFFF"/>
                 </a:solidFill>
@@ -9750,7 +9750,7 @@
               </a:rPr>
               <a:t>Hai cảm biến tốt chưa chắc ghép lại đúng: lệch 1° ở 50 m là gần 1 m; lệch 50 ms ở 40 km/h là hơn nửa mét.</a:t>
             </a:r>
-            <a:endParaRPr lang="en-US" sz="1350" dirty="0"/>
+            <a:endParaRPr lang="en-US" sz="960" dirty="0"/>
           </a:p>
           <a:p>
             <a:pPr indent="0" marL="0">
@@ -9760,7 +9760,7 @@
               <a:buNone/>
             </a:pPr>
             <a:r>
-              <a:rPr lang="en-US" sz="1200" dirty="0">
+              <a:rPr lang="en-US" sz="850" dirty="0">
                 <a:solidFill>
                   <a:srgbClr val="AFC3D4"/>
                 </a:solidFill>
@@ -9770,7 +9770,7 @@
               </a:rPr>
               <a:t>兩顆好的感測器合起來不一定對：差 1 度，50 公尺就差近 1 公尺；差 50 毫秒，時速 40 就差半公尺以上。</a:t>
             </a:r>
-            <a:endParaRPr lang="en-US" sz="1350" dirty="0"/>
+            <a:endParaRPr lang="en-US" sz="960" dirty="0"/>
           </a:p>
         </p:txBody>
       </p:sp>
@@ -9782,8 +9782,8 @@
         </p:nvSpPr>
         <p:spPr>
           <a:xfrm>
-            <a:off x="109728" y="4791456"/>
-            <a:ext cx="822960" cy="256032"/>
+            <a:off x="1402536" y="3390800"/>
+            <a:ext cx="584532" cy="181855"/>
           </a:xfrm>
           <a:prstGeom prst="rect">
             <a:avLst/>
@@ -9799,7 +9799,7 @@
               <a:buNone/>
             </a:pPr>
             <a:r>
-              <a:rPr lang="en-US" sz="900" dirty="0">
+              <a:rPr lang="en-US" sz="640" dirty="0">
                 <a:solidFill>
                   <a:srgbClr val="9FB3C8"/>
                 </a:solidFill>
@@ -9809,7 +9809,7 @@
               </a:rPr>
               <a:t>14 / 14</a:t>
             </a:r>
-            <a:endParaRPr lang="en-US" sz="900" dirty="0"/>
+            <a:endParaRPr lang="en-US" sz="640" dirty="0"/>
           </a:p>
         </p:txBody>
       </p:sp>
@@ -9821,8 +9821,8 @@
         </p:nvSpPr>
         <p:spPr>
           <a:xfrm>
-            <a:off x="960120" y="4791456"/>
-            <a:ext cx="2011680" cy="256032"/>
+            <a:off x="2006553" y="3390800"/>
+            <a:ext cx="1428857" cy="181855"/>
           </a:xfrm>
           <a:prstGeom prst="rect">
             <a:avLst/>
@@ -9838,7 +9838,7 @@
               <a:buNone/>
             </a:pPr>
             <a:r>
-              <a:rPr lang="en-US" sz="900" dirty="0">
+              <a:rPr lang="en-US" sz="640" dirty="0">
                 <a:solidFill>
                   <a:srgbClr val="9FB3C8"/>
                 </a:solidFill>
@@ -9848,7 +9848,7 @@
               </a:rPr>
               <a:t>Tiết 2 · 第 2 節</a:t>
             </a:r>
-            <a:endParaRPr lang="en-US" sz="900" dirty="0"/>
+            <a:endParaRPr lang="en-US" sz="640" dirty="0"/>
           </a:p>
         </p:txBody>
       </p:sp>
@@ -9892,8 +9892,8 @@
         </p:nvSpPr>
         <p:spPr>
           <a:xfrm>
-            <a:off x="6766560" y="-1371600"/>
-            <a:ext cx="4206240" cy="4206240"/>
+            <a:off x="6130753" y="-947729"/>
+            <a:ext cx="2987610" cy="2987610"/>
           </a:xfrm>
           <a:prstGeom prst="ellipse">
             <a:avLst/>
@@ -9917,8 +9917,8 @@
         </p:nvSpPr>
         <p:spPr>
           <a:xfrm>
-            <a:off x="7863840" y="3108960"/>
-            <a:ext cx="2560320" cy="2560320"/>
+            <a:off x="7104973" y="1520297"/>
+            <a:ext cx="1688649" cy="1688649"/>
           </a:xfrm>
           <a:prstGeom prst="ellipse">
             <a:avLst/>
@@ -9939,8 +9939,8 @@
         </p:nvSpPr>
         <p:spPr>
           <a:xfrm>
-            <a:off x="502920" y="1691640"/>
-            <a:ext cx="4572000" cy="310896"/>
+            <a:off x="1681812" y="1228031"/>
+            <a:ext cx="3247402" cy="220823"/>
           </a:xfrm>
           <a:prstGeom prst="rect">
             <a:avLst/>
@@ -9956,7 +9956,7 @@
               <a:buNone/>
             </a:pPr>
             <a:r>
-              <a:rPr lang="en-US" sz="1350" b="1" dirty="0">
+              <a:rPr lang="en-US" sz="960" b="1" dirty="0">
                 <a:solidFill>
                   <a:srgbClr val="FFB020"/>
                 </a:solidFill>
@@ -9966,7 +9966,7 @@
               </a:rPr>
               <a:t>Phần 1 / 3</a:t>
             </a:r>
-            <a:endParaRPr lang="en-US" sz="1350" dirty="0"/>
+            <a:endParaRPr lang="en-US" sz="960" dirty="0"/>
           </a:p>
         </p:txBody>
       </p:sp>
@@ -9978,8 +9978,8 @@
         </p:nvSpPr>
         <p:spPr>
           <a:xfrm>
-            <a:off x="502920" y="2048256"/>
-            <a:ext cx="7315200" cy="1188720"/>
+            <a:off x="1681812" y="1481328"/>
+            <a:ext cx="5195843" cy="844324"/>
           </a:xfrm>
           <a:prstGeom prst="rect">
             <a:avLst/>
@@ -9998,7 +9998,7 @@
               <a:buNone/>
             </a:pPr>
             <a:r>
-              <a:rPr lang="en-US" sz="2900" b="1" dirty="0">
+              <a:rPr lang="en-US" sz="2060" b="1" dirty="0">
                 <a:solidFill>
                   <a:srgbClr val="FFFFFF"/>
                 </a:solidFill>
@@ -10008,7 +10008,7 @@
               </a:rPr>
               <a:t>Camera: ba dòng quyết định lúc chói sáng và lúc vào hầm</a:t>
             </a:r>
-            <a:endParaRPr lang="en-US" sz="2900" dirty="0"/>
+            <a:endParaRPr lang="en-US" sz="2060" dirty="0"/>
           </a:p>
           <a:p>
             <a:pPr indent="0" marL="0">
@@ -10018,7 +10018,7 @@
               <a:buNone/>
             </a:pPr>
             <a:r>
-              <a:rPr lang="en-US" sz="1700" dirty="0">
+              <a:rPr lang="en-US" sz="1210" dirty="0">
                 <a:solidFill>
                   <a:srgbClr val="AFC3D4"/>
                 </a:solidFill>
@@ -10028,7 +10028,7 @@
               </a:rPr>
               <a:t>相機：決定逆光與進隧道的那三行</a:t>
             </a:r>
-            <a:endParaRPr lang="en-US" sz="2900" dirty="0"/>
+            <a:endParaRPr lang="en-US" sz="2060" dirty="0"/>
           </a:p>
         </p:txBody>
       </p:sp>
@@ -10040,8 +10040,8 @@
         </p:nvSpPr>
         <p:spPr>
           <a:xfrm>
-            <a:off x="502920" y="3346704"/>
-            <a:ext cx="7315200" cy="640080"/>
+            <a:off x="1681812" y="2403590"/>
+            <a:ext cx="5195843" cy="454636"/>
           </a:xfrm>
           <a:prstGeom prst="rect">
             <a:avLst/>
@@ -10060,7 +10060,7 @@
               <a:buNone/>
             </a:pPr>
             <a:r>
-              <a:rPr lang="en-US" sz="1350" dirty="0">
+              <a:rPr lang="en-US" sz="960" dirty="0">
                 <a:solidFill>
                   <a:srgbClr val="AFC3D4"/>
                 </a:solidFill>
@@ -10070,7 +10070,7 @@
               </a:rPr>
               <a:t>Kiểu màn trập · dải tương phản · nháy đèn LED</a:t>
             </a:r>
-            <a:endParaRPr lang="en-US" sz="1350" dirty="0"/>
+            <a:endParaRPr lang="en-US" sz="960" dirty="0"/>
           </a:p>
           <a:p>
             <a:pPr indent="0" marL="0">
@@ -10080,7 +10080,7 @@
               <a:buNone/>
             </a:pPr>
             <a:r>
-              <a:rPr lang="en-US" sz="1200" dirty="0">
+              <a:rPr lang="en-US" sz="850" dirty="0">
                 <a:solidFill>
                   <a:srgbClr val="8AA0B4"/>
                 </a:solidFill>
@@ -10090,7 +10090,7 @@
               </a:rPr>
               <a:t>快門方式・動態範圍・LED 閃爍</a:t>
             </a:r>
-            <a:endParaRPr lang="en-US" sz="1350" dirty="0"/>
+            <a:endParaRPr lang="en-US" sz="960" dirty="0"/>
           </a:p>
         </p:txBody>
       </p:sp>
@@ -10102,8 +10102,8 @@
         </p:nvSpPr>
         <p:spPr>
           <a:xfrm>
-            <a:off x="109728" y="4791456"/>
-            <a:ext cx="822960" cy="256032"/>
+            <a:off x="1402536" y="3390800"/>
+            <a:ext cx="584532" cy="181855"/>
           </a:xfrm>
           <a:prstGeom prst="rect">
             <a:avLst/>
@@ -10119,7 +10119,7 @@
               <a:buNone/>
             </a:pPr>
             <a:r>
-              <a:rPr lang="en-US" sz="900" dirty="0">
+              <a:rPr lang="en-US" sz="640" dirty="0">
                 <a:solidFill>
                   <a:srgbClr val="9FB3C8"/>
                 </a:solidFill>
@@ -10129,7 +10129,7 @@
               </a:rPr>
               <a:t>2 / 14</a:t>
             </a:r>
-            <a:endParaRPr lang="en-US" sz="900" dirty="0"/>
+            <a:endParaRPr lang="en-US" sz="640" dirty="0"/>
           </a:p>
         </p:txBody>
       </p:sp>
@@ -10141,8 +10141,8 @@
         </p:nvSpPr>
         <p:spPr>
           <a:xfrm>
-            <a:off x="960120" y="4791456"/>
-            <a:ext cx="2011680" cy="256032"/>
+            <a:off x="2006553" y="3390800"/>
+            <a:ext cx="1428857" cy="181855"/>
           </a:xfrm>
           <a:prstGeom prst="rect">
             <a:avLst/>
@@ -10158,7 +10158,7 @@
               <a:buNone/>
             </a:pPr>
             <a:r>
-              <a:rPr lang="en-US" sz="900" dirty="0">
+              <a:rPr lang="en-US" sz="640" dirty="0">
                 <a:solidFill>
                   <a:srgbClr val="9FB3C8"/>
                 </a:solidFill>
@@ -10168,7 +10168,7 @@
               </a:rPr>
               <a:t>Tiết 2 · 第 2 節</a:t>
             </a:r>
-            <a:endParaRPr lang="en-US" sz="900" dirty="0"/>
+            <a:endParaRPr lang="en-US" sz="640" dirty="0"/>
           </a:p>
         </p:txBody>
       </p:sp>
@@ -10205,8 +10205,8 @@
         </p:nvSpPr>
         <p:spPr>
           <a:xfrm>
-            <a:off x="502920" y="420624"/>
-            <a:ext cx="8138160" cy="274320"/>
+            <a:off x="1681812" y="325253"/>
+            <a:ext cx="5780375" cy="194844"/>
           </a:xfrm>
           <a:prstGeom prst="rect">
             <a:avLst/>
@@ -10222,7 +10222,7 @@
               <a:buNone/>
             </a:pPr>
             <a:r>
-              <a:rPr lang="en-US" sz="1250" b="1" dirty="0">
+              <a:rPr lang="en-US" sz="890" b="1" dirty="0">
                 <a:solidFill>
                   <a:srgbClr val="007F72"/>
                 </a:solidFill>
@@ -10232,7 +10232,7 @@
               </a:rPr>
               <a:t>1 / 3　Rolling shutter</a:t>
             </a:r>
-            <a:endParaRPr lang="en-US" sz="1250" dirty="0"/>
+            <a:endParaRPr lang="en-US" sz="890" dirty="0"/>
           </a:p>
         </p:txBody>
       </p:sp>
@@ -10244,8 +10244,8 @@
         </p:nvSpPr>
         <p:spPr>
           <a:xfrm>
-            <a:off x="502920" y="1101852"/>
-            <a:ext cx="2468880" cy="2514600"/>
+            <a:off x="1681812" y="809116"/>
+            <a:ext cx="1753597" cy="1786071"/>
           </a:xfrm>
           <a:prstGeom prst="roundRect">
             <a:avLst>
@@ -10271,8 +10271,8 @@
         </p:nvSpPr>
         <p:spPr>
           <a:xfrm>
-            <a:off x="896478" y="2003633"/>
-            <a:ext cx="1681764" cy="0"/>
+            <a:off x="1961349" y="1449633"/>
+            <a:ext cx="1194524" cy="0"/>
           </a:xfrm>
           <a:prstGeom prst="line">
             <a:avLst/>
@@ -10294,8 +10294,8 @@
         </p:nvSpPr>
         <p:spPr>
           <a:xfrm>
-            <a:off x="896478" y="2270272"/>
-            <a:ext cx="1681764" cy="0"/>
+            <a:off x="1961349" y="1639022"/>
+            <a:ext cx="1194524" cy="0"/>
           </a:xfrm>
           <a:prstGeom prst="line">
             <a:avLst/>
@@ -10317,8 +10317,8 @@
         </p:nvSpPr>
         <p:spPr>
           <a:xfrm>
-            <a:off x="896478" y="2136953"/>
-            <a:ext cx="1548994" cy="0"/>
+            <a:off x="1961349" y="1544328"/>
+            <a:ext cx="1100220" cy="0"/>
           </a:xfrm>
           <a:prstGeom prst="line">
             <a:avLst/>
@@ -10341,8 +10341,8 @@
         </p:nvSpPr>
         <p:spPr>
           <a:xfrm>
-            <a:off x="896478" y="2847990"/>
-            <a:ext cx="1681764" cy="0"/>
+            <a:off x="1961349" y="2049364"/>
+            <a:ext cx="1194524" cy="0"/>
           </a:xfrm>
           <a:prstGeom prst="line">
             <a:avLst/>
@@ -10364,8 +10364,8 @@
         </p:nvSpPr>
         <p:spPr>
           <a:xfrm>
-            <a:off x="896478" y="3114629"/>
-            <a:ext cx="1681764" cy="0"/>
+            <a:off x="1961349" y="2238752"/>
+            <a:ext cx="1194524" cy="0"/>
           </a:xfrm>
           <a:prstGeom prst="line">
             <a:avLst/>
@@ -10387,8 +10387,8 @@
         </p:nvSpPr>
         <p:spPr>
           <a:xfrm flipV="1">
-            <a:off x="896478" y="2892430"/>
-            <a:ext cx="420441" cy="177759"/>
+            <a:off x="1961349" y="2080928"/>
+            <a:ext cx="298631" cy="126259"/>
           </a:xfrm>
           <a:prstGeom prst="line">
             <a:avLst/>
@@ -10410,8 +10410,8 @@
         </p:nvSpPr>
         <p:spPr>
           <a:xfrm>
-            <a:off x="1316919" y="2892430"/>
-            <a:ext cx="420441" cy="199979"/>
+            <a:off x="2259980" y="2080928"/>
+            <a:ext cx="298631" cy="142041"/>
           </a:xfrm>
           <a:prstGeom prst="line">
             <a:avLst/>
@@ -10433,8 +10433,8 @@
         </p:nvSpPr>
         <p:spPr>
           <a:xfrm flipV="1">
-            <a:off x="1737360" y="2803550"/>
-            <a:ext cx="420441" cy="288859"/>
+            <a:off x="2558611" y="2017799"/>
+            <a:ext cx="298631" cy="205171"/>
           </a:xfrm>
           <a:prstGeom prst="line">
             <a:avLst/>
@@ -10456,8 +10456,8 @@
         </p:nvSpPr>
         <p:spPr>
           <a:xfrm>
-            <a:off x="2157801" y="2803550"/>
-            <a:ext cx="287670" cy="177759"/>
+            <a:off x="2857242" y="2017799"/>
+            <a:ext cx="204327" cy="126259"/>
           </a:xfrm>
           <a:prstGeom prst="line">
             <a:avLst/>
@@ -10480,8 +10480,8 @@
         </p:nvSpPr>
         <p:spPr>
           <a:xfrm>
-            <a:off x="3429000" y="1143789"/>
-            <a:ext cx="5212080" cy="1356044"/>
+            <a:off x="3760150" y="838903"/>
+            <a:ext cx="3702038" cy="963171"/>
           </a:xfrm>
           <a:prstGeom prst="rect">
             <a:avLst/>
@@ -10500,7 +10500,7 @@
               <a:buNone/>
             </a:pPr>
             <a:r>
-              <a:rPr lang="en-US" sz="2300" b="1" dirty="0">
+              <a:rPr lang="en-US" sz="1630" b="1" dirty="0">
                 <a:solidFill>
                   <a:srgbClr val="0B1F3A"/>
                 </a:solidFill>
@@ -10510,7 +10510,7 @@
               </a:rPr>
               <a:t>Màn trập cuốn: ảnh không phải chụp cùng một lúc, mà quét từ trên xuống</a:t>
             </a:r>
-            <a:endParaRPr lang="en-US" sz="2300" dirty="0"/>
+            <a:endParaRPr lang="en-US" sz="1630" dirty="0"/>
           </a:p>
           <a:p>
             <a:pPr indent="0" marL="0">
@@ -10520,7 +10520,7 @@
               <a:buNone/>
             </a:pPr>
             <a:r>
-              <a:rPr lang="en-US" sz="1400" dirty="0">
+              <a:rPr lang="en-US" sz="990" dirty="0">
                 <a:solidFill>
                   <a:srgbClr val="007F72"/>
                 </a:solidFill>
@@ -10530,7 +10530,7 @@
               </a:rPr>
               <a:t>捲簾快門：一張照片不是同時拍的，是從上往下掃出來的</a:t>
             </a:r>
-            <a:endParaRPr lang="en-US" sz="2300" dirty="0"/>
+            <a:endParaRPr lang="en-US" sz="1630" dirty="0"/>
           </a:p>
         </p:txBody>
       </p:sp>
@@ -10542,8 +10542,8 @@
         </p:nvSpPr>
         <p:spPr>
           <a:xfrm>
-            <a:off x="3429000" y="2591273"/>
-            <a:ext cx="5212080" cy="1074682"/>
+            <a:off x="3760150" y="1867022"/>
+            <a:ext cx="3702038" cy="763326"/>
           </a:xfrm>
           <a:prstGeom prst="rect">
             <a:avLst/>
@@ -10562,7 +10562,7 @@
               <a:buNone/>
             </a:pPr>
             <a:r>
-              <a:rPr lang="en-US" sz="1250" dirty="0">
+              <a:rPr lang="en-US" sz="890" dirty="0">
                 <a:solidFill>
                   <a:srgbClr val="5F7183"/>
                 </a:solidFill>
@@ -10572,7 +10572,7 @@
               </a:rPr>
               <a:t>Cảm biến đọc từng hàng, hàng cuối chậm hơn hàng đầu vài chục mili giây. Trong khoảng đó xe và vật đều đã di chuyển, nên cột điện bị nghiêng, cánh quạt bị cong.</a:t>
             </a:r>
-            <a:endParaRPr lang="en-US" sz="1250" dirty="0"/>
+            <a:endParaRPr lang="en-US" sz="890" dirty="0"/>
           </a:p>
           <a:p>
             <a:pPr indent="0" marL="0">
@@ -10582,7 +10582,7 @@
               <a:buNone/>
             </a:pPr>
             <a:r>
-              <a:rPr lang="en-US" sz="1150" dirty="0">
+              <a:rPr lang="en-US" sz="820" dirty="0">
                 <a:solidFill>
                   <a:srgbClr val="5F7183"/>
                 </a:solidFill>
@@ -10592,7 +10592,7 @@
               </a:rPr>
               <a:t>感光元件是一列一列讀出來的，最後一列比第一列晚了幾十毫秒。這段時間裡車子和目標都在動，所以電線桿會歪、螺旋槳會彎。</a:t>
             </a:r>
-            <a:endParaRPr lang="en-US" sz="1250" dirty="0"/>
+            <a:endParaRPr lang="en-US" sz="890" dirty="0"/>
           </a:p>
         </p:txBody>
       </p:sp>
@@ -10604,8 +10604,8 @@
         </p:nvSpPr>
         <p:spPr>
           <a:xfrm>
-            <a:off x="502920" y="3913632"/>
-            <a:ext cx="8138160" cy="621792"/>
+            <a:off x="1681812" y="2806268"/>
+            <a:ext cx="5780375" cy="441647"/>
           </a:xfrm>
           <a:prstGeom prst="roundRect">
             <a:avLst>
@@ -10631,8 +10631,8 @@
         </p:nvSpPr>
         <p:spPr>
           <a:xfrm>
-            <a:off x="685800" y="3986784"/>
-            <a:ext cx="7772400" cy="493776"/>
+            <a:off x="1811708" y="2858226"/>
+            <a:ext cx="5520583" cy="350719"/>
           </a:xfrm>
           <a:prstGeom prst="rect">
             <a:avLst/>
@@ -10651,7 +10651,7 @@
               <a:buNone/>
             </a:pPr>
             <a:r>
-              <a:rPr lang="en-US" sz="1250" b="1" dirty="0">
+              <a:rPr lang="en-US" sz="890" b="1" dirty="0">
                 <a:solidFill>
                   <a:srgbClr val="7A4E00"/>
                 </a:solidFill>
@@ -10661,7 +10661,7 @@
               </a:rPr>
               <a:t>Xe tự lái sợ nhất: vật ở rìa ảnh bị lệch chỗ, mà thuật toán lại tưởng nó thật.</a:t>
             </a:r>
-            <a:endParaRPr lang="en-US" sz="1250" dirty="0"/>
+            <a:endParaRPr lang="en-US" sz="890" dirty="0"/>
           </a:p>
           <a:p>
             <a:pPr indent="0" marL="0">
@@ -10671,7 +10671,7 @@
               <a:buNone/>
             </a:pPr>
             <a:r>
-              <a:rPr lang="en-US" sz="1150" dirty="0">
+              <a:rPr lang="en-US" sz="820" dirty="0">
                 <a:solidFill>
                   <a:srgbClr val="7A4E00"/>
                 </a:solidFill>
@@ -10681,7 +10681,7 @@
               </a:rPr>
               <a:t>自駕車最怕的是：畫面邊緣的東西位置被扭掉，演算法卻以為那是真的。</a:t>
             </a:r>
-            <a:endParaRPr lang="en-US" sz="1250" dirty="0"/>
+            <a:endParaRPr lang="en-US" sz="890" dirty="0"/>
           </a:p>
         </p:txBody>
       </p:sp>
@@ -10701,8 +10701,8 @@
         </p:blipFill>
         <p:spPr>
           <a:xfrm>
-            <a:off x="7516368" y="4718304"/>
-            <a:ext cx="1097280" cy="242439"/>
+            <a:off x="6663327" y="3338842"/>
+            <a:ext cx="779376" cy="172200"/>
           </a:xfrm>
           <a:prstGeom prst="rect">
             <a:avLst/>
@@ -10717,8 +10717,8 @@
         </p:nvSpPr>
         <p:spPr>
           <a:xfrm>
-            <a:off x="109728" y="4791456"/>
-            <a:ext cx="822960" cy="256032"/>
+            <a:off x="1402536" y="3390800"/>
+            <a:ext cx="584532" cy="181855"/>
           </a:xfrm>
           <a:prstGeom prst="rect">
             <a:avLst/>
@@ -10734,7 +10734,7 @@
               <a:buNone/>
             </a:pPr>
             <a:r>
-              <a:rPr lang="en-US" sz="900" dirty="0">
+              <a:rPr lang="en-US" sz="640" dirty="0">
                 <a:solidFill>
                   <a:srgbClr val="5F7183"/>
                 </a:solidFill>
@@ -10744,7 +10744,7 @@
               </a:rPr>
               <a:t>3 / 14</a:t>
             </a:r>
-            <a:endParaRPr lang="en-US" sz="900" dirty="0"/>
+            <a:endParaRPr lang="en-US" sz="640" dirty="0"/>
           </a:p>
         </p:txBody>
       </p:sp>
@@ -10756,8 +10756,8 @@
         </p:nvSpPr>
         <p:spPr>
           <a:xfrm>
-            <a:off x="960120" y="4791456"/>
-            <a:ext cx="2011680" cy="256032"/>
+            <a:off x="2006553" y="3390800"/>
+            <a:ext cx="1428857" cy="181855"/>
           </a:xfrm>
           <a:prstGeom prst="rect">
             <a:avLst/>
@@ -10773,7 +10773,7 @@
               <a:buNone/>
             </a:pPr>
             <a:r>
-              <a:rPr lang="en-US" sz="900" dirty="0">
+              <a:rPr lang="en-US" sz="640" dirty="0">
                 <a:solidFill>
                   <a:srgbClr val="5F7183"/>
                 </a:solidFill>
@@ -10783,7 +10783,7 @@
               </a:rPr>
               <a:t>Tiết 2 · 第 2 節</a:t>
             </a:r>
-            <a:endParaRPr lang="en-US" sz="900" dirty="0"/>
+            <a:endParaRPr lang="en-US" sz="640" dirty="0"/>
           </a:p>
         </p:txBody>
       </p:sp>
@@ -10820,8 +10820,8 @@
         </p:nvSpPr>
         <p:spPr>
           <a:xfrm>
-            <a:off x="502920" y="420624"/>
-            <a:ext cx="8138160" cy="274320"/>
+            <a:off x="1681812" y="325253"/>
+            <a:ext cx="5780375" cy="194844"/>
           </a:xfrm>
           <a:prstGeom prst="rect">
             <a:avLst/>
@@ -10837,7 +10837,7 @@
               <a:buNone/>
             </a:pPr>
             <a:r>
-              <a:rPr lang="en-US" sz="1250" b="1" dirty="0">
+              <a:rPr lang="en-US" sz="890" b="1" dirty="0">
                 <a:solidFill>
                   <a:srgbClr val="007F72"/>
                 </a:solidFill>
@@ -10847,7 +10847,7 @@
               </a:rPr>
               <a:t>2 / 3　Dynamic range</a:t>
             </a:r>
-            <a:endParaRPr lang="en-US" sz="1250" dirty="0"/>
+            <a:endParaRPr lang="en-US" sz="890" dirty="0"/>
           </a:p>
         </p:txBody>
       </p:sp>
@@ -10859,8 +10859,8 @@
         </p:nvSpPr>
         <p:spPr>
           <a:xfrm>
-            <a:off x="502920" y="1101852"/>
-            <a:ext cx="2468880" cy="2514600"/>
+            <a:off x="1681812" y="809116"/>
+            <a:ext cx="1753597" cy="1786071"/>
           </a:xfrm>
           <a:prstGeom prst="roundRect">
             <a:avLst>
@@ -10886,8 +10886,8 @@
         </p:nvSpPr>
         <p:spPr>
           <a:xfrm>
-            <a:off x="807964" y="1603675"/>
-            <a:ext cx="663854" cy="311079"/>
+            <a:off x="1898479" y="1165551"/>
+            <a:ext cx="471523" cy="220953"/>
           </a:xfrm>
           <a:prstGeom prst="rect">
             <a:avLst/>
@@ -10903,7 +10903,7 @@
               <a:buNone/>
             </a:pPr>
             <a:r>
-              <a:rPr lang="en-US" sz="900" b="1" dirty="0">
+              <a:rPr lang="en-US" sz="640" b="1" dirty="0">
                 <a:solidFill>
                   <a:srgbClr val="6FA8DC"/>
                 </a:solidFill>
@@ -10913,7 +10913,7 @@
               </a:rPr>
               <a:t>khô  乾</a:t>
             </a:r>
-            <a:endParaRPr lang="en-US" sz="900" dirty="0"/>
+            <a:endParaRPr lang="en-US" sz="640" dirty="0"/>
           </a:p>
         </p:txBody>
       </p:sp>
@@ -10925,8 +10925,8 @@
         </p:nvSpPr>
         <p:spPr>
           <a:xfrm>
-            <a:off x="807964" y="2000901"/>
-            <a:ext cx="398313" cy="183224"/>
+            <a:off x="1898479" y="1447693"/>
+            <a:ext cx="282914" cy="130140"/>
           </a:xfrm>
           <a:prstGeom prst="roundRect">
             <a:avLst>
@@ -10947,8 +10947,8 @@
         </p:nvSpPr>
         <p:spPr>
           <a:xfrm>
-            <a:off x="959323" y="2037546"/>
-            <a:ext cx="135426" cy="109934"/>
+            <a:off x="2005986" y="1473721"/>
+            <a:ext cx="96191" cy="78084"/>
           </a:xfrm>
           <a:prstGeom prst="roundRect">
             <a:avLst>
@@ -10969,8 +10969,8 @@
         </p:nvSpPr>
         <p:spPr>
           <a:xfrm>
-            <a:off x="1250533" y="2092513"/>
-            <a:ext cx="840882" cy="0"/>
+            <a:off x="2212827" y="1512763"/>
+            <a:ext cx="597262" cy="0"/>
           </a:xfrm>
           <a:prstGeom prst="line">
             <a:avLst/>
@@ -10992,8 +10992,8 @@
         </p:nvSpPr>
         <p:spPr>
           <a:xfrm>
-            <a:off x="2091416" y="1892534"/>
-            <a:ext cx="77450" cy="399959"/>
+            <a:off x="2810090" y="1370721"/>
+            <a:ext cx="55011" cy="284083"/>
           </a:xfrm>
           <a:prstGeom prst="roundRect">
             <a:avLst>
@@ -11014,8 +11014,8 @@
         </p:nvSpPr>
         <p:spPr>
           <a:xfrm>
-            <a:off x="807964" y="2403592"/>
-            <a:ext cx="663854" cy="311079"/>
+            <a:off x="1898479" y="1733716"/>
+            <a:ext cx="471523" cy="220953"/>
           </a:xfrm>
           <a:prstGeom prst="rect">
             <a:avLst/>
@@ -11031,7 +11031,7 @@
               <a:buNone/>
             </a:pPr>
             <a:r>
-              <a:rPr lang="en-US" sz="900" b="1" dirty="0">
+              <a:rPr lang="en-US" sz="640" b="1" dirty="0">
                 <a:solidFill>
                   <a:srgbClr val="D9463E"/>
                 </a:solidFill>
@@ -11041,7 +11041,7 @@
               </a:rPr>
               <a:t>ướt  濕</a:t>
             </a:r>
-            <a:endParaRPr lang="en-US" sz="900" dirty="0"/>
+            <a:endParaRPr lang="en-US" sz="640" dirty="0"/>
           </a:p>
         </p:txBody>
       </p:sp>
@@ -11053,8 +11053,8 @@
         </p:nvSpPr>
         <p:spPr>
           <a:xfrm>
-            <a:off x="807964" y="2800818"/>
-            <a:ext cx="398313" cy="183224"/>
+            <a:off x="1898479" y="2015858"/>
+            <a:ext cx="282914" cy="130140"/>
           </a:xfrm>
           <a:prstGeom prst="roundRect">
             <a:avLst>
@@ -11075,8 +11075,8 @@
         </p:nvSpPr>
         <p:spPr>
           <a:xfrm>
-            <a:off x="959323" y="2837463"/>
-            <a:ext cx="135426" cy="109934"/>
+            <a:off x="2005986" y="2041886"/>
+            <a:ext cx="96191" cy="78084"/>
           </a:xfrm>
           <a:prstGeom prst="roundRect">
             <a:avLst>
@@ -11097,8 +11097,8 @@
         </p:nvSpPr>
         <p:spPr>
           <a:xfrm>
-            <a:off x="1250533" y="2892430"/>
-            <a:ext cx="1371966" cy="0"/>
+            <a:off x="2212827" y="2080928"/>
+            <a:ext cx="974480" cy="0"/>
           </a:xfrm>
           <a:prstGeom prst="line">
             <a:avLst/>
@@ -11120,8 +11120,8 @@
         </p:nvSpPr>
         <p:spPr>
           <a:xfrm>
-            <a:off x="2622499" y="2692451"/>
-            <a:ext cx="77450" cy="399959"/>
+            <a:off x="3187308" y="1938887"/>
+            <a:ext cx="55011" cy="284083"/>
           </a:xfrm>
           <a:prstGeom prst="roundRect">
             <a:avLst>
@@ -11142,8 +11142,8 @@
         </p:nvSpPr>
         <p:spPr>
           <a:xfrm>
-            <a:off x="3429000" y="1319005"/>
-            <a:ext cx="5212080" cy="1005611"/>
+            <a:off x="3760150" y="963355"/>
+            <a:ext cx="3702038" cy="714266"/>
           </a:xfrm>
           <a:prstGeom prst="rect">
             <a:avLst/>
@@ -11162,7 +11162,7 @@
               <a:buNone/>
             </a:pPr>
             <a:r>
-              <a:rPr lang="en-US" sz="2300" b="1" dirty="0">
+              <a:rPr lang="en-US" sz="1630" b="1" dirty="0">
                 <a:solidFill>
                   <a:srgbClr val="0B1F3A"/>
                 </a:solidFill>
@@ -11172,7 +11172,7 @@
               </a:rPr>
               <a:t>Dải tương phản động: cùng một khung vừa có chỗ tối vừa có chỗ chói</a:t>
             </a:r>
-            <a:endParaRPr lang="en-US" sz="2300" dirty="0"/>
+            <a:endParaRPr lang="en-US" sz="1630" dirty="0"/>
           </a:p>
           <a:p>
             <a:pPr indent="0" marL="0">
@@ -11182,7 +11182,7 @@
               <a:buNone/>
             </a:pPr>
             <a:r>
-              <a:rPr lang="en-US" sz="1400" dirty="0">
+              <a:rPr lang="en-US" sz="990" dirty="0">
                 <a:solidFill>
                   <a:srgbClr val="007F72"/>
                 </a:solidFill>
@@ -11192,7 +11192,7 @@
               </a:rPr>
               <a:t>動態範圍：同一張畫面裡，又有很暗的地方又有很亮的地方</a:t>
             </a:r>
-            <a:endParaRPr lang="en-US" sz="2300" dirty="0"/>
+            <a:endParaRPr lang="en-US" sz="1630" dirty="0"/>
           </a:p>
         </p:txBody>
       </p:sp>
@@ -11204,8 +11204,8 @@
         </p:nvSpPr>
         <p:spPr>
           <a:xfrm>
-            <a:off x="3429000" y="2416057"/>
-            <a:ext cx="5212080" cy="1074682"/>
+            <a:off x="3760150" y="1742570"/>
+            <a:ext cx="3702038" cy="763326"/>
           </a:xfrm>
           <a:prstGeom prst="rect">
             <a:avLst/>
@@ -11224,7 +11224,7 @@
               <a:buNone/>
             </a:pPr>
             <a:r>
-              <a:rPr lang="en-US" sz="1250" dirty="0">
+              <a:rPr lang="en-US" sz="890" dirty="0">
                 <a:solidFill>
                   <a:srgbClr val="5F7183"/>
                 </a:solidFill>
@@ -11234,7 +11234,7 @@
               </a:rPr>
               <a:t>Ra khỏi đường hầm giữa trưa: trong hầm tối, ngoài hầm chói. Mắt người xử lý được khoảng 120 dB; AR0233AT ghi trên 140 dB, đó là lý do nó đắt.</a:t>
             </a:r>
-            <a:endParaRPr lang="en-US" sz="1250" dirty="0"/>
+            <a:endParaRPr lang="en-US" sz="890" dirty="0"/>
           </a:p>
           <a:p>
             <a:pPr indent="0" marL="0">
@@ -11244,7 +11244,7 @@
               <a:buNone/>
             </a:pPr>
             <a:r>
-              <a:rPr lang="en-US" sz="1150" dirty="0">
+              <a:rPr lang="en-US" sz="820" dirty="0">
                 <a:solidFill>
                   <a:srgbClr val="5F7183"/>
                 </a:solidFill>
@@ -11254,7 +11254,7 @@
               </a:rPr>
               <a:t>中午開出隧道口：裡面很暗，外面很亮。人眼大約能處理 120 dB；AR0233AT 寫的是 140 dB 以上，這就是它貴的原因。</a:t>
             </a:r>
-            <a:endParaRPr lang="en-US" sz="1250" dirty="0"/>
+            <a:endParaRPr lang="en-US" sz="890" dirty="0"/>
           </a:p>
         </p:txBody>
       </p:sp>
@@ -11266,8 +11266,8 @@
         </p:nvSpPr>
         <p:spPr>
           <a:xfrm>
-            <a:off x="502920" y="3913632"/>
-            <a:ext cx="8138160" cy="621792"/>
+            <a:off x="1681812" y="2806268"/>
+            <a:ext cx="5780375" cy="441647"/>
           </a:xfrm>
           <a:prstGeom prst="roundRect">
             <a:avLst>
@@ -11293,8 +11293,8 @@
         </p:nvSpPr>
         <p:spPr>
           <a:xfrm>
-            <a:off x="685800" y="3986784"/>
-            <a:ext cx="7772400" cy="493776"/>
+            <a:off x="1811708" y="2858226"/>
+            <a:ext cx="5520583" cy="350719"/>
           </a:xfrm>
           <a:prstGeom prst="rect">
             <a:avLst/>
@@ -11313,7 +11313,7 @@
               <a:buNone/>
             </a:pPr>
             <a:r>
-              <a:rPr lang="en-US" sz="1250" b="1" dirty="0">
+              <a:rPr lang="en-US" sz="890" b="1" dirty="0">
                 <a:solidFill>
                   <a:srgbClr val="7A4E00"/>
                 </a:solidFill>
@@ -11323,7 +11323,7 @@
               </a:rPr>
               <a:t>Thiếu dải động thì hoặc là trong hầm đen kịt, hoặc là ngoài hầm trắng xoá — chọn một.</a:t>
             </a:r>
-            <a:endParaRPr lang="en-US" sz="1250" dirty="0"/>
+            <a:endParaRPr lang="en-US" sz="890" dirty="0"/>
           </a:p>
           <a:p>
             <a:pPr indent="0" marL="0">
@@ -11333,7 +11333,7 @@
               <a:buNone/>
             </a:pPr>
             <a:r>
-              <a:rPr lang="en-US" sz="1150" dirty="0">
+              <a:rPr lang="en-US" sz="820" dirty="0">
                 <a:solidFill>
                   <a:srgbClr val="7A4E00"/>
                 </a:solidFill>
@@ -11343,7 +11343,7 @@
               </a:rPr>
               <a:t>動態範圍不夠的話，不是隧道裡一片黑，就是隧道外一片白——只能選一個。</a:t>
             </a:r>
-            <a:endParaRPr lang="en-US" sz="1250" dirty="0"/>
+            <a:endParaRPr lang="en-US" sz="890" dirty="0"/>
           </a:p>
         </p:txBody>
       </p:sp>
@@ -11363,8 +11363,8 @@
         </p:blipFill>
         <p:spPr>
           <a:xfrm>
-            <a:off x="7516368" y="4718304"/>
-            <a:ext cx="1097280" cy="242439"/>
+            <a:off x="6663327" y="3338842"/>
+            <a:ext cx="779376" cy="172200"/>
           </a:xfrm>
           <a:prstGeom prst="rect">
             <a:avLst/>
@@ -11379,8 +11379,8 @@
         </p:nvSpPr>
         <p:spPr>
           <a:xfrm>
-            <a:off x="109728" y="4791456"/>
-            <a:ext cx="822960" cy="256032"/>
+            <a:off x="1402536" y="3390800"/>
+            <a:ext cx="584532" cy="181855"/>
           </a:xfrm>
           <a:prstGeom prst="rect">
             <a:avLst/>
@@ -11396,7 +11396,7 @@
               <a:buNone/>
             </a:pPr>
             <a:r>
-              <a:rPr lang="en-US" sz="900" dirty="0">
+              <a:rPr lang="en-US" sz="640" dirty="0">
                 <a:solidFill>
                   <a:srgbClr val="5F7183"/>
                 </a:solidFill>
@@ -11406,7 +11406,7 @@
               </a:rPr>
               <a:t>4 / 14</a:t>
             </a:r>
-            <a:endParaRPr lang="en-US" sz="900" dirty="0"/>
+            <a:endParaRPr lang="en-US" sz="640" dirty="0"/>
           </a:p>
         </p:txBody>
       </p:sp>
@@ -11418,8 +11418,8 @@
         </p:nvSpPr>
         <p:spPr>
           <a:xfrm>
-            <a:off x="960120" y="4791456"/>
-            <a:ext cx="2011680" cy="256032"/>
+            <a:off x="2006553" y="3390800"/>
+            <a:ext cx="1428857" cy="181855"/>
           </a:xfrm>
           <a:prstGeom prst="rect">
             <a:avLst/>
@@ -11435,7 +11435,7 @@
               <a:buNone/>
             </a:pPr>
             <a:r>
-              <a:rPr lang="en-US" sz="900" dirty="0">
+              <a:rPr lang="en-US" sz="640" dirty="0">
                 <a:solidFill>
                   <a:srgbClr val="5F7183"/>
                 </a:solidFill>
@@ -11445,7 +11445,7 @@
               </a:rPr>
               <a:t>Tiết 2 · 第 2 節</a:t>
             </a:r>
-            <a:endParaRPr lang="en-US" sz="900" dirty="0"/>
+            <a:endParaRPr lang="en-US" sz="640" dirty="0"/>
           </a:p>
         </p:txBody>
       </p:sp>
@@ -11482,8 +11482,8 @@
         </p:nvSpPr>
         <p:spPr>
           <a:xfrm>
-            <a:off x="502920" y="420624"/>
-            <a:ext cx="8138160" cy="274320"/>
+            <a:off x="1681812" y="325253"/>
+            <a:ext cx="5780375" cy="194844"/>
           </a:xfrm>
           <a:prstGeom prst="rect">
             <a:avLst/>
@@ -11499,7 +11499,7 @@
               <a:buNone/>
             </a:pPr>
             <a:r>
-              <a:rPr lang="en-US" sz="1250" b="1" dirty="0">
+              <a:rPr lang="en-US" sz="890" b="1" dirty="0">
                 <a:solidFill>
                   <a:srgbClr val="007F72"/>
                 </a:solidFill>
@@ -11509,7 +11509,7 @@
               </a:rPr>
               <a:t>3 / 3　LED flicker</a:t>
             </a:r>
-            <a:endParaRPr lang="en-US" sz="1250" dirty="0"/>
+            <a:endParaRPr lang="en-US" sz="890" dirty="0"/>
           </a:p>
         </p:txBody>
       </p:sp>
@@ -11521,8 +11521,8 @@
         </p:nvSpPr>
         <p:spPr>
           <a:xfrm>
-            <a:off x="502920" y="1101852"/>
-            <a:ext cx="2468880" cy="2514600"/>
+            <a:off x="1681812" y="809116"/>
+            <a:ext cx="1753597" cy="1786071"/>
           </a:xfrm>
           <a:prstGeom prst="roundRect">
             <a:avLst>
@@ -11548,8 +11548,8 @@
         </p:nvSpPr>
         <p:spPr>
           <a:xfrm>
-            <a:off x="1493947" y="2203613"/>
-            <a:ext cx="929396" cy="755477"/>
+            <a:off x="2385719" y="1591675"/>
+            <a:ext cx="660132" cy="536601"/>
           </a:xfrm>
           <a:prstGeom prst="roundRect">
             <a:avLst>
@@ -11575,8 +11575,8 @@
         </p:nvSpPr>
         <p:spPr>
           <a:xfrm>
-            <a:off x="1339047" y="2048073"/>
-            <a:ext cx="929396" cy="755477"/>
+            <a:off x="2275697" y="1481198"/>
+            <a:ext cx="660132" cy="536601"/>
           </a:xfrm>
           <a:prstGeom prst="roundRect">
             <a:avLst>
@@ -11602,8 +11602,8 @@
         </p:nvSpPr>
         <p:spPr>
           <a:xfrm>
-            <a:off x="1184148" y="1892534"/>
-            <a:ext cx="929396" cy="755477"/>
+            <a:off x="2165675" y="1370721"/>
+            <a:ext cx="660132" cy="536601"/>
           </a:xfrm>
           <a:prstGeom prst="roundRect">
             <a:avLst>
@@ -11629,8 +11629,8 @@
         </p:nvSpPr>
         <p:spPr>
           <a:xfrm>
-            <a:off x="1029249" y="1736994"/>
-            <a:ext cx="929396" cy="755477"/>
+            <a:off x="2055653" y="1260245"/>
+            <a:ext cx="660132" cy="536601"/>
           </a:xfrm>
           <a:prstGeom prst="roundRect">
             <a:avLst>
@@ -11656,8 +11656,8 @@
         </p:nvSpPr>
         <p:spPr>
           <a:xfrm>
-            <a:off x="630936" y="2892430"/>
-            <a:ext cx="2212848" cy="399959"/>
+            <a:off x="1772740" y="2080928"/>
+            <a:ext cx="1571743" cy="284083"/>
           </a:xfrm>
           <a:prstGeom prst="rect">
             <a:avLst/>
@@ -11673,7 +11673,7 @@
               <a:buNone/>
             </a:pPr>
             <a:r>
-              <a:rPr lang="en-US" sz="1100" b="1" dirty="0">
+              <a:rPr lang="en-US" sz="780" b="1" dirty="0">
                 <a:solidFill>
                   <a:srgbClr val="A3382F"/>
                 </a:solidFill>
@@ -11683,7 +11683,7 @@
               </a:rPr>
               <a:t>× 10 000</a:t>
             </a:r>
-            <a:endParaRPr lang="en-US" sz="1100" dirty="0"/>
+            <a:endParaRPr lang="en-US" sz="780" dirty="0"/>
           </a:p>
         </p:txBody>
       </p:sp>
@@ -11695,8 +11695,8 @@
         </p:nvSpPr>
         <p:spPr>
           <a:xfrm>
-            <a:off x="3429000" y="1319005"/>
-            <a:ext cx="5212080" cy="1005611"/>
+            <a:off x="3760150" y="963355"/>
+            <a:ext cx="3702038" cy="714266"/>
           </a:xfrm>
           <a:prstGeom prst="rect">
             <a:avLst/>
@@ -11715,7 +11715,7 @@
               <a:buNone/>
             </a:pPr>
             <a:r>
-              <a:rPr lang="en-US" sz="2300" b="1" dirty="0">
+              <a:rPr lang="en-US" sz="1630" b="1" dirty="0">
                 <a:solidFill>
                   <a:srgbClr val="0B1F3A"/>
                 </a:solidFill>
@@ -11725,7 +11725,7 @@
               </a:rPr>
               <a:t>Đèn LED nhấp nháy: mắt người không thấy, camera thì thấy</a:t>
             </a:r>
-            <a:endParaRPr lang="en-US" sz="2300" dirty="0"/>
+            <a:endParaRPr lang="en-US" sz="1630" dirty="0"/>
           </a:p>
           <a:p>
             <a:pPr indent="0" marL="0">
@@ -11735,7 +11735,7 @@
               <a:buNone/>
             </a:pPr>
             <a:r>
-              <a:rPr lang="en-US" sz="1400" dirty="0">
+              <a:rPr lang="en-US" sz="990" dirty="0">
                 <a:solidFill>
                   <a:srgbClr val="007F72"/>
                 </a:solidFill>
@@ -11745,7 +11745,7 @@
               </a:rPr>
               <a:t>LED 在閃：人眼看不出來，相機看得出來</a:t>
             </a:r>
-            <a:endParaRPr lang="en-US" sz="2300" dirty="0"/>
+            <a:endParaRPr lang="en-US" sz="1630" dirty="0"/>
           </a:p>
         </p:txBody>
       </p:sp>
@@ -11757,8 +11757,8 @@
         </p:nvSpPr>
         <p:spPr>
           <a:xfrm>
-            <a:off x="3429000" y="2416057"/>
-            <a:ext cx="5212080" cy="1074682"/>
+            <a:off x="3760150" y="1742570"/>
+            <a:ext cx="3702038" cy="763326"/>
           </a:xfrm>
           <a:prstGeom prst="rect">
             <a:avLst/>
@@ -11777,7 +11777,7 @@
               <a:buNone/>
             </a:pPr>
             <a:r>
-              <a:rPr lang="en-US" sz="1250" dirty="0">
+              <a:rPr lang="en-US" sz="890" dirty="0">
                 <a:solidFill>
                   <a:srgbClr val="5F7183"/>
                 </a:solidFill>
@@ -11787,7 +11787,7 @@
               </a:rPr>
               <a:t>Đèn tín hiệu và đèn hậu LED nháy mấy trăm lần mỗi giây. Nếu khung hình rơi đúng lúc đèn tắt, camera chụp được một cái đèn đỏ đang «tắt».</a:t>
             </a:r>
-            <a:endParaRPr lang="en-US" sz="1250" dirty="0"/>
+            <a:endParaRPr lang="en-US" sz="890" dirty="0"/>
           </a:p>
           <a:p>
             <a:pPr indent="0" marL="0">
@@ -11797,7 +11797,7 @@
               <a:buNone/>
             </a:pPr>
             <a:r>
-              <a:rPr lang="en-US" sz="1150" dirty="0">
+              <a:rPr lang="en-US" sz="820" dirty="0">
                 <a:solidFill>
                   <a:srgbClr val="5F7183"/>
                 </a:solidFill>
@@ -11807,7 +11807,7 @@
               </a:rPr>
               <a:t>紅綠燈和 LED 尾燈每秒閃好幾百次。如果剛好在燈暗的那一瞬間拍，相機就拍到一個「沒亮」的紅燈。</a:t>
             </a:r>
-            <a:endParaRPr lang="en-US" sz="1250" dirty="0"/>
+            <a:endParaRPr lang="en-US" sz="890" dirty="0"/>
           </a:p>
         </p:txBody>
       </p:sp>
@@ -11819,8 +11819,8 @@
         </p:nvSpPr>
         <p:spPr>
           <a:xfrm>
-            <a:off x="502920" y="3913632"/>
-            <a:ext cx="8138160" cy="621792"/>
+            <a:off x="1681812" y="2806268"/>
+            <a:ext cx="5780375" cy="441647"/>
           </a:xfrm>
           <a:prstGeom prst="roundRect">
             <a:avLst>
@@ -11846,8 +11846,8 @@
         </p:nvSpPr>
         <p:spPr>
           <a:xfrm>
-            <a:off x="685800" y="3986784"/>
-            <a:ext cx="7772400" cy="493776"/>
+            <a:off x="1811708" y="2858226"/>
+            <a:ext cx="5520583" cy="350719"/>
           </a:xfrm>
           <a:prstGeom prst="rect">
             <a:avLst/>
@@ -11866,7 +11866,7 @@
               <a:buNone/>
             </a:pPr>
             <a:r>
-              <a:rPr lang="en-US" sz="1250" b="1" dirty="0">
+              <a:rPr lang="en-US" sz="890" b="1" dirty="0">
                 <a:solidFill>
                   <a:srgbClr val="7A4E00"/>
                 </a:solidFill>
@@ -11876,7 +11876,7 @@
               </a:rPr>
               <a:t>Dòng LFM trên datasheet là để chữa đúng chuyện này.</a:t>
             </a:r>
-            <a:endParaRPr lang="en-US" sz="1250" dirty="0"/>
+            <a:endParaRPr lang="en-US" sz="890" dirty="0"/>
           </a:p>
           <a:p>
             <a:pPr indent="0" marL="0">
@@ -11886,7 +11886,7 @@
               <a:buNone/>
             </a:pPr>
             <a:r>
-              <a:rPr lang="en-US" sz="1150" dirty="0">
+              <a:rPr lang="en-US" sz="820" dirty="0">
                 <a:solidFill>
                   <a:srgbClr val="7A4E00"/>
                 </a:solidFill>
@@ -11896,7 +11896,7 @@
               </a:rPr>
               <a:t>規格表上那行 LFM，就是專門解決這件事的。</a:t>
             </a:r>
-            <a:endParaRPr lang="en-US" sz="1250" dirty="0"/>
+            <a:endParaRPr lang="en-US" sz="890" dirty="0"/>
           </a:p>
         </p:txBody>
       </p:sp>
@@ -11916,8 +11916,8 @@
         </p:blipFill>
         <p:spPr>
           <a:xfrm>
-            <a:off x="7516368" y="4718304"/>
-            <a:ext cx="1097280" cy="242439"/>
+            <a:off x="6663327" y="3338842"/>
+            <a:ext cx="779376" cy="172200"/>
           </a:xfrm>
           <a:prstGeom prst="rect">
             <a:avLst/>
@@ -11932,8 +11932,8 @@
         </p:nvSpPr>
         <p:spPr>
           <a:xfrm>
-            <a:off x="109728" y="4791456"/>
-            <a:ext cx="822960" cy="256032"/>
+            <a:off x="1402536" y="3390800"/>
+            <a:ext cx="584532" cy="181855"/>
           </a:xfrm>
           <a:prstGeom prst="rect">
             <a:avLst/>
@@ -11949,7 +11949,7 @@
               <a:buNone/>
             </a:pPr>
             <a:r>
-              <a:rPr lang="en-US" sz="900" dirty="0">
+              <a:rPr lang="en-US" sz="640" dirty="0">
                 <a:solidFill>
                   <a:srgbClr val="5F7183"/>
                 </a:solidFill>
@@ -11959,7 +11959,7 @@
               </a:rPr>
               <a:t>5 / 14</a:t>
             </a:r>
-            <a:endParaRPr lang="en-US" sz="900" dirty="0"/>
+            <a:endParaRPr lang="en-US" sz="640" dirty="0"/>
           </a:p>
         </p:txBody>
       </p:sp>
@@ -11971,8 +11971,8 @@
         </p:nvSpPr>
         <p:spPr>
           <a:xfrm>
-            <a:off x="960120" y="4791456"/>
-            <a:ext cx="2011680" cy="256032"/>
+            <a:off x="2006553" y="3390800"/>
+            <a:ext cx="1428857" cy="181855"/>
           </a:xfrm>
           <a:prstGeom prst="rect">
             <a:avLst/>
@@ -11988,7 +11988,7 @@
               <a:buNone/>
             </a:pPr>
             <a:r>
-              <a:rPr lang="en-US" sz="900" dirty="0">
+              <a:rPr lang="en-US" sz="640" dirty="0">
                 <a:solidFill>
                   <a:srgbClr val="5F7183"/>
                 </a:solidFill>
@@ -11998,7 +11998,7 @@
               </a:rPr>
               <a:t>Tiết 2 · 第 2 節</a:t>
             </a:r>
-            <a:endParaRPr lang="en-US" sz="900" dirty="0"/>
+            <a:endParaRPr lang="en-US" sz="640" dirty="0"/>
           </a:p>
         </p:txBody>
       </p:sp>
@@ -12042,8 +12042,8 @@
         </p:nvSpPr>
         <p:spPr>
           <a:xfrm>
-            <a:off x="6766560" y="-1371600"/>
-            <a:ext cx="4206240" cy="4206240"/>
+            <a:off x="6130753" y="-947729"/>
+            <a:ext cx="2987610" cy="2987610"/>
           </a:xfrm>
           <a:prstGeom prst="ellipse">
             <a:avLst/>
@@ -12067,8 +12067,8 @@
         </p:nvSpPr>
         <p:spPr>
           <a:xfrm>
-            <a:off x="7863840" y="3108960"/>
-            <a:ext cx="2560320" cy="2560320"/>
+            <a:off x="7104973" y="1520297"/>
+            <a:ext cx="1688649" cy="1688649"/>
           </a:xfrm>
           <a:prstGeom prst="ellipse">
             <a:avLst/>
@@ -12089,8 +12089,8 @@
         </p:nvSpPr>
         <p:spPr>
           <a:xfrm>
-            <a:off x="502920" y="1691640"/>
-            <a:ext cx="4572000" cy="310896"/>
+            <a:off x="1681812" y="1228031"/>
+            <a:ext cx="3247402" cy="220823"/>
           </a:xfrm>
           <a:prstGeom prst="rect">
             <a:avLst/>
@@ -12106,7 +12106,7 @@
               <a:buNone/>
             </a:pPr>
             <a:r>
-              <a:rPr lang="en-US" sz="1350" b="1" dirty="0">
+              <a:rPr lang="en-US" sz="960" b="1" dirty="0">
                 <a:solidFill>
                   <a:srgbClr val="FFB020"/>
                 </a:solidFill>
@@ -12116,7 +12116,7 @@
               </a:rPr>
               <a:t>Phần 2 / 3</a:t>
             </a:r>
-            <a:endParaRPr lang="en-US" sz="1350" dirty="0"/>
+            <a:endParaRPr lang="en-US" sz="960" dirty="0"/>
           </a:p>
         </p:txBody>
       </p:sp>
@@ -12128,8 +12128,8 @@
         </p:nvSpPr>
         <p:spPr>
           <a:xfrm>
-            <a:off x="502920" y="2048256"/>
-            <a:ext cx="7315200" cy="1188720"/>
+            <a:off x="1681812" y="1481328"/>
+            <a:ext cx="5195843" cy="844324"/>
           </a:xfrm>
           <a:prstGeom prst="rect">
             <a:avLst/>
@@ -12148,7 +12148,7 @@
               <a:buNone/>
             </a:pPr>
             <a:r>
-              <a:rPr lang="en-US" sz="2900" b="1" dirty="0">
+              <a:rPr lang="en-US" sz="2060" b="1" dirty="0">
                 <a:solidFill>
                   <a:srgbClr val="FFFFFF"/>
                 </a:solidFill>
@@ -12158,7 +12158,7 @@
               </a:rPr>
               <a:t>Lidar: bước sóng, an toàn mắt, và mấy lần phản hồi</a:t>
             </a:r>
-            <a:endParaRPr lang="en-US" sz="2900" dirty="0"/>
+            <a:endParaRPr lang="en-US" sz="2060" dirty="0"/>
           </a:p>
           <a:p>
             <a:pPr indent="0" marL="0">
@@ -12168,7 +12168,7 @@
               <a:buNone/>
             </a:pPr>
             <a:r>
-              <a:rPr lang="en-US" sz="1700" dirty="0">
+              <a:rPr lang="en-US" sz="1210" dirty="0">
                 <a:solidFill>
                   <a:srgbClr val="AFC3D4"/>
                 </a:solidFill>
@@ -12178,7 +12178,7 @@
               </a:rPr>
               <a:t>光達：波長、眼睛安全，還有幾次回波</a:t>
             </a:r>
-            <a:endParaRPr lang="en-US" sz="2900" dirty="0"/>
+            <a:endParaRPr lang="en-US" sz="2060" dirty="0"/>
           </a:p>
         </p:txBody>
       </p:sp>
@@ -12190,8 +12190,8 @@
         </p:nvSpPr>
         <p:spPr>
           <a:xfrm>
-            <a:off x="502920" y="3346704"/>
-            <a:ext cx="7315200" cy="640080"/>
+            <a:off x="1681812" y="2403590"/>
+            <a:ext cx="5195843" cy="454636"/>
           </a:xfrm>
           <a:prstGeom prst="rect">
             <a:avLst/>
@@ -12210,7 +12210,7 @@
               <a:buNone/>
             </a:pPr>
             <a:r>
-              <a:rPr lang="en-US" sz="1350" dirty="0">
+              <a:rPr lang="en-US" sz="960" dirty="0">
                 <a:solidFill>
                   <a:srgbClr val="AFC3D4"/>
                 </a:solidFill>
@@ -12220,7 +12220,7 @@
               </a:rPr>
               <a:t>Ba dòng nữa, ít người đọc</a:t>
             </a:r>
-            <a:endParaRPr lang="en-US" sz="1350" dirty="0"/>
+            <a:endParaRPr lang="en-US" sz="960" dirty="0"/>
           </a:p>
           <a:p>
             <a:pPr indent="0" marL="0">
@@ -12230,7 +12230,7 @@
               <a:buNone/>
             </a:pPr>
             <a:r>
-              <a:rPr lang="en-US" sz="1200" dirty="0">
+              <a:rPr lang="en-US" sz="850" dirty="0">
                 <a:solidFill>
                   <a:srgbClr val="8AA0B4"/>
                 </a:solidFill>
@@ -12240,7 +12240,7 @@
               </a:rPr>
               <a:t>另外三行，一樣很少人讀</a:t>
             </a:r>
-            <a:endParaRPr lang="en-US" sz="1350" dirty="0"/>
+            <a:endParaRPr lang="en-US" sz="960" dirty="0"/>
           </a:p>
         </p:txBody>
       </p:sp>
@@ -12252,8 +12252,8 @@
         </p:nvSpPr>
         <p:spPr>
           <a:xfrm>
-            <a:off x="109728" y="4791456"/>
-            <a:ext cx="822960" cy="256032"/>
+            <a:off x="1402536" y="3390800"/>
+            <a:ext cx="584532" cy="181855"/>
           </a:xfrm>
           <a:prstGeom prst="rect">
             <a:avLst/>
@@ -12269,7 +12269,7 @@
               <a:buNone/>
             </a:pPr>
             <a:r>
-              <a:rPr lang="en-US" sz="900" dirty="0">
+              <a:rPr lang="en-US" sz="640" dirty="0">
                 <a:solidFill>
                   <a:srgbClr val="9FB3C8"/>
                 </a:solidFill>
@@ -12279,7 +12279,7 @@
               </a:rPr>
               <a:t>6 / 14</a:t>
             </a:r>
-            <a:endParaRPr lang="en-US" sz="900" dirty="0"/>
+            <a:endParaRPr lang="en-US" sz="640" dirty="0"/>
           </a:p>
         </p:txBody>
       </p:sp>
@@ -12291,8 +12291,8 @@
         </p:nvSpPr>
         <p:spPr>
           <a:xfrm>
-            <a:off x="960120" y="4791456"/>
-            <a:ext cx="2011680" cy="256032"/>
+            <a:off x="2006553" y="3390800"/>
+            <a:ext cx="1428857" cy="181855"/>
           </a:xfrm>
           <a:prstGeom prst="rect">
             <a:avLst/>
@@ -12308,7 +12308,7 @@
               <a:buNone/>
             </a:pPr>
             <a:r>
-              <a:rPr lang="en-US" sz="900" dirty="0">
+              <a:rPr lang="en-US" sz="640" dirty="0">
                 <a:solidFill>
                   <a:srgbClr val="9FB3C8"/>
                 </a:solidFill>
@@ -12318,7 +12318,7 @@
               </a:rPr>
               <a:t>Tiết 2 · 第 2 節</a:t>
             </a:r>
-            <a:endParaRPr lang="en-US" sz="900" dirty="0"/>
+            <a:endParaRPr lang="en-US" sz="640" dirty="0"/>
           </a:p>
         </p:txBody>
       </p:sp>
@@ -12355,8 +12355,8 @@
         </p:nvSpPr>
         <p:spPr>
           <a:xfrm>
-            <a:off x="502920" y="292608"/>
-            <a:ext cx="8138160" cy="841248"/>
+            <a:off x="1681812" y="234326"/>
+            <a:ext cx="5780375" cy="597522"/>
           </a:xfrm>
           <a:prstGeom prst="rect">
             <a:avLst/>
@@ -12375,7 +12375,7 @@
               <a:buNone/>
             </a:pPr>
             <a:r>
-              <a:rPr lang="en-US" sz="2200" b="1" dirty="0">
+              <a:rPr lang="en-US" sz="1560" b="1" dirty="0">
                 <a:solidFill>
                   <a:srgbClr val="0B1F3A"/>
                 </a:solidFill>
@@ -12385,7 +12385,7 @@
               </a:rPr>
               <a:t>905, 865 hay 1550 nm: chọn bước sóng là chọn đánh đổi</a:t>
             </a:r>
-            <a:endParaRPr lang="en-US" sz="2200" dirty="0"/>
+            <a:endParaRPr lang="en-US" sz="1560" dirty="0"/>
           </a:p>
           <a:p>
             <a:pPr indent="0" marL="0">
@@ -12395,7 +12395,7 @@
               <a:buNone/>
             </a:pPr>
             <a:r>
-              <a:rPr lang="en-US" sz="1350" dirty="0">
+              <a:rPr lang="en-US" sz="960" dirty="0">
                 <a:solidFill>
                   <a:srgbClr val="5F7183"/>
                 </a:solidFill>
@@ -12405,7 +12405,7 @@
               </a:rPr>
               <a:t>905、865 還是 1550 奈米：選波長就是選代價</a:t>
             </a:r>
-            <a:endParaRPr lang="en-US" sz="2200" dirty="0"/>
+            <a:endParaRPr lang="en-US" sz="1560" dirty="0"/>
           </a:p>
         </p:txBody>
       </p:sp>
@@ -12417,8 +12417,8 @@
         </p:nvSpPr>
         <p:spPr>
           <a:xfrm>
-            <a:off x="502920" y="1133856"/>
-            <a:ext cx="8138160" cy="713232"/>
+            <a:off x="1681812" y="831848"/>
+            <a:ext cx="5780375" cy="506595"/>
           </a:xfrm>
           <a:prstGeom prst="roundRect">
             <a:avLst>
@@ -12439,8 +12439,8 @@
         </p:nvSpPr>
         <p:spPr>
           <a:xfrm>
-            <a:off x="649224" y="1207008"/>
-            <a:ext cx="7845552" cy="566928"/>
+            <a:off x="1785729" y="883806"/>
+            <a:ext cx="5572542" cy="402678"/>
           </a:xfrm>
           <a:prstGeom prst="rect">
             <a:avLst/>
@@ -12459,7 +12459,7 @@
               <a:buNone/>
             </a:pPr>
             <a:r>
-              <a:rPr lang="en-US" sz="1150" b="1" dirty="0">
+              <a:rPr lang="en-US" sz="820" b="1" dirty="0">
                 <a:solidFill>
                   <a:srgbClr val="007F72"/>
                 </a:solidFill>
@@ -12469,7 +12469,7 @@
               </a:rPr>
               <a:t>Ba con số này đều nằm ở dòng «Laser Wavelength» trên datasheet.</a:t>
             </a:r>
-            <a:endParaRPr lang="en-US" sz="1150" dirty="0"/>
+            <a:endParaRPr lang="en-US" sz="820" dirty="0"/>
           </a:p>
           <a:p>
             <a:pPr indent="0" marL="0">
@@ -12479,7 +12479,7 @@
               <a:buNone/>
             </a:pPr>
             <a:r>
-              <a:rPr lang="en-US" sz="1000" dirty="0">
+              <a:rPr lang="en-US" sz="710" dirty="0">
                 <a:solidFill>
                   <a:srgbClr val="007F72"/>
                 </a:solidFill>
@@ -12489,7 +12489,7 @@
               </a:rPr>
               <a:t>這三個數字都寫在規格表的 Laser Wavelength 那一行。</a:t>
             </a:r>
-            <a:endParaRPr lang="en-US" sz="1150" dirty="0"/>
+            <a:endParaRPr lang="en-US" sz="820" dirty="0"/>
           </a:p>
         </p:txBody>
       </p:sp>
@@ -12508,18 +12508,18 @@
           </p:nvPr>
         </p:nvGraphicFramePr>
         <p:xfrm>
-          <a:off x="502920" y="1956816"/>
-          <a:ext cx="8138160" cy="914400"/>
+          <a:off x="1681812" y="1416380"/>
+          <a:ext cx="5780375" cy="914400"/>
         </p:xfrm>
         <a:graphic>
           <a:graphicData uri="http://schemas.openxmlformats.org/drawingml/2006/table">
             <a:tbl>
               <a:tblPr/>
               <a:tblGrid>
-                <a:gridCol w="2034540"/>
-                <a:gridCol w="2034540"/>
-                <a:gridCol w="2034540"/>
-                <a:gridCol w="2034540"/>
+                <a:gridCol w="1445094"/>
+                <a:gridCol w="1445094"/>
+                <a:gridCol w="1445094"/>
+                <a:gridCol w="1445094"/>
               </a:tblGrid>
               <a:tr h="384048">
                 <a:tc>
@@ -13801,8 +13801,8 @@
         </p:nvSpPr>
         <p:spPr>
           <a:xfrm>
-            <a:off x="502920" y="4279307"/>
-            <a:ext cx="8138160" cy="457200"/>
+            <a:off x="1681812" y="3065999"/>
+            <a:ext cx="5780375" cy="324740"/>
           </a:xfrm>
           <a:prstGeom prst="rect">
             <a:avLst/>
@@ -13821,7 +13821,7 @@
               <a:buNone/>
             </a:pPr>
             <a:r>
-              <a:rPr lang="en-US" sz="1200" b="1" dirty="0">
+              <a:rPr lang="en-US" sz="850" b="1" dirty="0">
                 <a:solidFill>
                   <a:srgbClr val="007F72"/>
                 </a:solidFill>
@@ -13831,7 +13831,7 @@
               </a:rPr>
               <a:t>Một dòng số, ba chuyện: an toàn, nhìn xa, và giá.</a:t>
             </a:r>
-            <a:endParaRPr lang="en-US" sz="1200" dirty="0"/>
+            <a:endParaRPr lang="en-US" sz="850" dirty="0"/>
           </a:p>
           <a:p>
             <a:pPr indent="0" marL="0">
@@ -13841,7 +13841,7 @@
               <a:buNone/>
             </a:pPr>
             <a:r>
-              <a:rPr lang="en-US" sz="1100" dirty="0">
+              <a:rPr lang="en-US" sz="780" dirty="0">
                 <a:solidFill>
                   <a:srgbClr val="007F72"/>
                 </a:solidFill>
@@ -13851,7 +13851,7 @@
               </a:rPr>
               <a:t>一行數字，背後是三件事：安全、看多遠、多少錢。</a:t>
             </a:r>
-            <a:endParaRPr lang="en-US" sz="1200" dirty="0"/>
+            <a:endParaRPr lang="en-US" sz="850" dirty="0"/>
           </a:p>
         </p:txBody>
       </p:sp>
@@ -13871,8 +13871,8 @@
         </p:blipFill>
         <p:spPr>
           <a:xfrm>
-            <a:off x="7516368" y="4718304"/>
-            <a:ext cx="1097280" cy="242439"/>
+            <a:off x="6663327" y="3338842"/>
+            <a:ext cx="779376" cy="172200"/>
           </a:xfrm>
           <a:prstGeom prst="rect">
             <a:avLst/>
@@ -13887,8 +13887,8 @@
         </p:nvSpPr>
         <p:spPr>
           <a:xfrm>
-            <a:off x="109728" y="4791456"/>
-            <a:ext cx="822960" cy="256032"/>
+            <a:off x="1402536" y="3390800"/>
+            <a:ext cx="584532" cy="181855"/>
           </a:xfrm>
           <a:prstGeom prst="rect">
             <a:avLst/>
@@ -13904,7 +13904,7 @@
               <a:buNone/>
             </a:pPr>
             <a:r>
-              <a:rPr lang="en-US" sz="900" dirty="0">
+              <a:rPr lang="en-US" sz="640" dirty="0">
                 <a:solidFill>
                   <a:srgbClr val="5F7183"/>
                 </a:solidFill>
@@ -13914,7 +13914,7 @@
               </a:rPr>
               <a:t>7 / 14</a:t>
             </a:r>
-            <a:endParaRPr lang="en-US" sz="900" dirty="0"/>
+            <a:endParaRPr lang="en-US" sz="640" dirty="0"/>
           </a:p>
         </p:txBody>
       </p:sp>
@@ -13926,8 +13926,8 @@
         </p:nvSpPr>
         <p:spPr>
           <a:xfrm>
-            <a:off x="960120" y="4791456"/>
-            <a:ext cx="2011680" cy="256032"/>
+            <a:off x="2006553" y="3390800"/>
+            <a:ext cx="1428857" cy="181855"/>
           </a:xfrm>
           <a:prstGeom prst="rect">
             <a:avLst/>
@@ -13943,7 +13943,7 @@
               <a:buNone/>
             </a:pPr>
             <a:r>
-              <a:rPr lang="en-US" sz="900" dirty="0">
+              <a:rPr lang="en-US" sz="640" dirty="0">
                 <a:solidFill>
                   <a:srgbClr val="5F7183"/>
                 </a:solidFill>
@@ -13953,7 +13953,7 @@
               </a:rPr>
               <a:t>Tiết 2 · 第 2 節</a:t>
             </a:r>
-            <a:endParaRPr lang="en-US" sz="900" dirty="0"/>
+            <a:endParaRPr lang="en-US" sz="640" dirty="0"/>
           </a:p>
         </p:txBody>
       </p:sp>
@@ -13990,8 +13990,8 @@
         </p:nvSpPr>
         <p:spPr>
           <a:xfrm>
-            <a:off x="502920" y="420624"/>
-            <a:ext cx="8138160" cy="274320"/>
+            <a:off x="1681812" y="325253"/>
+            <a:ext cx="5780375" cy="194844"/>
           </a:xfrm>
           <a:prstGeom prst="rect">
             <a:avLst/>
@@ -14007,7 +14007,7 @@
               <a:buNone/>
             </a:pPr>
             <a:r>
-              <a:rPr lang="en-US" sz="1250" b="1" dirty="0">
+              <a:rPr lang="en-US" sz="890" b="1" dirty="0">
                 <a:solidFill>
                   <a:srgbClr val="007F72"/>
                 </a:solidFill>
@@ -14017,7 +14017,7 @@
               </a:rPr>
               <a:t>An toàn mắt · 眼睛安全</a:t>
             </a:r>
-            <a:endParaRPr lang="en-US" sz="1250" dirty="0"/>
+            <a:endParaRPr lang="en-US" sz="890" dirty="0"/>
           </a:p>
         </p:txBody>
       </p:sp>
@@ -14029,8 +14029,8 @@
         </p:nvSpPr>
         <p:spPr>
           <a:xfrm>
-            <a:off x="502920" y="1101852"/>
-            <a:ext cx="2468880" cy="2514600"/>
+            <a:off x="1681812" y="809116"/>
+            <a:ext cx="1753597" cy="1786071"/>
           </a:xfrm>
           <a:prstGeom prst="roundRect">
             <a:avLst>
@@ -14056,8 +14056,8 @@
         </p:nvSpPr>
         <p:spPr>
           <a:xfrm flipV="1">
-            <a:off x="984992" y="1263446"/>
-            <a:ext cx="1216905" cy="1095706"/>
+            <a:off x="2024218" y="923893"/>
+            <a:ext cx="864344" cy="778259"/>
           </a:xfrm>
           <a:prstGeom prst="line">
             <a:avLst/>
@@ -14079,8 +14079,8 @@
         </p:nvSpPr>
         <p:spPr>
           <a:xfrm flipV="1">
-            <a:off x="984992" y="1590389"/>
-            <a:ext cx="1445833" cy="768763"/>
+            <a:off x="2024218" y="1156114"/>
+            <a:ext cx="1026947" cy="546037"/>
           </a:xfrm>
           <a:prstGeom prst="line">
             <a:avLst/>
@@ -14102,8 +14102,8 @@
         </p:nvSpPr>
         <p:spPr>
           <a:xfrm flipV="1">
-            <a:off x="984992" y="1963003"/>
-            <a:ext cx="1588867" cy="396149"/>
+            <a:off x="2024218" y="1420775"/>
+            <a:ext cx="1128541" cy="281377"/>
           </a:xfrm>
           <a:prstGeom prst="line">
             <a:avLst/>
@@ -14125,8 +14125,8 @@
         </p:nvSpPr>
         <p:spPr>
           <a:xfrm>
-            <a:off x="984992" y="2359152"/>
-            <a:ext cx="1637508" cy="0"/>
+            <a:off x="2024218" y="1702151"/>
+            <a:ext cx="1163089" cy="0"/>
           </a:xfrm>
           <a:prstGeom prst="line">
             <a:avLst/>
@@ -14148,8 +14148,8 @@
         </p:nvSpPr>
         <p:spPr>
           <a:xfrm>
-            <a:off x="984992" y="2359152"/>
-            <a:ext cx="1445833" cy="768763"/>
+            <a:off x="2024218" y="1702151"/>
+            <a:ext cx="1026947" cy="546037"/>
           </a:xfrm>
           <a:prstGeom prst="line">
             <a:avLst/>
@@ -14171,8 +14171,8 @@
         </p:nvSpPr>
         <p:spPr>
           <a:xfrm>
-            <a:off x="984992" y="2359152"/>
-            <a:ext cx="1216905" cy="1095706"/>
+            <a:off x="2024218" y="1702151"/>
+            <a:ext cx="864344" cy="778259"/>
           </a:xfrm>
           <a:prstGeom prst="line">
             <a:avLst/>
@@ -14194,8 +14194,8 @@
         </p:nvSpPr>
         <p:spPr>
           <a:xfrm>
-            <a:off x="907542" y="2281702"/>
-            <a:ext cx="154899" cy="154899"/>
+            <a:off x="1969207" y="1647140"/>
+            <a:ext cx="110022" cy="110022"/>
           </a:xfrm>
           <a:prstGeom prst="ellipse">
             <a:avLst/>
@@ -14214,8 +14214,8 @@
         </p:nvSpPr>
         <p:spPr>
           <a:xfrm>
-            <a:off x="2018333" y="2533737"/>
-            <a:ext cx="221285" cy="221285"/>
+            <a:off x="2758181" y="1826156"/>
+            <a:ext cx="157174" cy="157174"/>
           </a:xfrm>
           <a:prstGeom prst="roundRect">
             <a:avLst>
@@ -14236,8 +14236,8 @@
         </p:nvSpPr>
         <p:spPr>
           <a:xfrm>
-            <a:off x="3429000" y="1319005"/>
-            <a:ext cx="5212080" cy="1005611"/>
+            <a:off x="3760150" y="963355"/>
+            <a:ext cx="3702038" cy="714266"/>
           </a:xfrm>
           <a:prstGeom prst="rect">
             <a:avLst/>
@@ -14256,7 +14256,7 @@
               <a:buNone/>
             </a:pPr>
             <a:r>
-              <a:rPr lang="en-US" sz="2300" b="1" dirty="0">
+              <a:rPr lang="en-US" sz="1630" b="1" dirty="0">
                 <a:solidFill>
                   <a:srgbClr val="0B1F3A"/>
                 </a:solidFill>
@@ -14266,7 +14266,7 @@
               </a:rPr>
               <a:t>Class 1 eye-safe: dòng này không có thì đừng lắp lên xe</a:t>
             </a:r>
-            <a:endParaRPr lang="en-US" sz="2300" dirty="0"/>
+            <a:endParaRPr lang="en-US" sz="1630" dirty="0"/>
           </a:p>
           <a:p>
             <a:pPr indent="0" marL="0">
@@ -14276,7 +14276,7 @@
               <a:buNone/>
             </a:pPr>
             <a:r>
-              <a:rPr lang="en-US" sz="1400" dirty="0">
+              <a:rPr lang="en-US" sz="990" dirty="0">
                 <a:solidFill>
                   <a:srgbClr val="007F72"/>
                 </a:solidFill>
@@ -14286,7 +14286,7 @@
               </a:rPr>
               <a:t>Class 1 對眼睛安全：沒有這一行就不要裝上車</a:t>
             </a:r>
-            <a:endParaRPr lang="en-US" sz="2300" dirty="0"/>
+            <a:endParaRPr lang="en-US" sz="1630" dirty="0"/>
           </a:p>
         </p:txBody>
       </p:sp>
@@ -14298,8 +14298,8 @@
         </p:nvSpPr>
         <p:spPr>
           <a:xfrm>
-            <a:off x="3429000" y="2416057"/>
-            <a:ext cx="5212080" cy="1074682"/>
+            <a:off x="3760150" y="1742570"/>
+            <a:ext cx="3702038" cy="763326"/>
           </a:xfrm>
           <a:prstGeom prst="rect">
             <a:avLst/>
@@ -14318,7 +14318,7 @@
               <a:buNone/>
             </a:pPr>
             <a:r>
-              <a:rPr lang="en-US" sz="1250" dirty="0">
+              <a:rPr lang="en-US" sz="890" dirty="0">
                 <a:solidFill>
                   <a:srgbClr val="5F7183"/>
                 </a:solidFill>
@@ -14328,7 +14328,7 @@
               </a:rPr>
               <a:t>OS1 ghi «Class 1 eye-safe per IEC/EN 60825-1». Nghĩa là trong mọi điều kiện sử dụng bình thường, nhìn thẳng vào nó cũng không hại mắt.</a:t>
             </a:r>
-            <a:endParaRPr lang="en-US" sz="1250" dirty="0"/>
+            <a:endParaRPr lang="en-US" sz="890" dirty="0"/>
           </a:p>
           <a:p>
             <a:pPr indent="0" marL="0">
@@ -14338,7 +14338,7 @@
               <a:buNone/>
             </a:pPr>
             <a:r>
-              <a:rPr lang="en-US" sz="1150" dirty="0">
+              <a:rPr lang="en-US" sz="820" dirty="0">
                 <a:solidFill>
                   <a:srgbClr val="5F7183"/>
                 </a:solidFill>
@@ -14348,7 +14348,7 @@
               </a:rPr>
               <a:t>OS1 寫「Class 1 eye-safe per IEC/EN 60825-1」。意思是在正常使用的情況下，就算直視它也不會傷到眼睛。</a:t>
             </a:r>
-            <a:endParaRPr lang="en-US" sz="1250" dirty="0"/>
+            <a:endParaRPr lang="en-US" sz="890" dirty="0"/>
           </a:p>
         </p:txBody>
       </p:sp>
@@ -14360,8 +14360,8 @@
         </p:nvSpPr>
         <p:spPr>
           <a:xfrm>
-            <a:off x="502920" y="3913632"/>
-            <a:ext cx="8138160" cy="621792"/>
+            <a:off x="1681812" y="2806268"/>
+            <a:ext cx="5780375" cy="441647"/>
           </a:xfrm>
           <a:prstGeom prst="roundRect">
             <a:avLst>
@@ -14387,8 +14387,8 @@
         </p:nvSpPr>
         <p:spPr>
           <a:xfrm>
-            <a:off x="685800" y="3986784"/>
-            <a:ext cx="7772400" cy="493776"/>
+            <a:off x="1811708" y="2858226"/>
+            <a:ext cx="5520583" cy="350719"/>
           </a:xfrm>
           <a:prstGeom prst="rect">
             <a:avLst/>
@@ -14407,7 +14407,7 @@
               <a:buNone/>
             </a:pPr>
             <a:r>
-              <a:rPr lang="en-US" sz="1250" b="1" dirty="0">
+              <a:rPr lang="en-US" sz="890" b="1" dirty="0">
                 <a:solidFill>
                   <a:srgbClr val="7A4E00"/>
                 </a:solidFill>
@@ -14417,7 +14417,7 @@
               </a:rPr>
               <a:t>Đây không phải quảng cáo — đây là điều kiện để được bán.</a:t>
             </a:r>
-            <a:endParaRPr lang="en-US" sz="1250" dirty="0"/>
+            <a:endParaRPr lang="en-US" sz="890" dirty="0"/>
           </a:p>
           <a:p>
             <a:pPr indent="0" marL="0">
@@ -14427,7 +14427,7 @@
               <a:buNone/>
             </a:pPr>
             <a:r>
-              <a:rPr lang="en-US" sz="1150" dirty="0">
+              <a:rPr lang="en-US" sz="820" dirty="0">
                 <a:solidFill>
                   <a:srgbClr val="7A4E00"/>
                 </a:solidFill>
@@ -14437,7 +14437,7 @@
               </a:rPr>
               <a:t>這不是廣告詞，這是能不能賣的門檻。</a:t>
             </a:r>
-            <a:endParaRPr lang="en-US" sz="1250" dirty="0"/>
+            <a:endParaRPr lang="en-US" sz="890" dirty="0"/>
           </a:p>
         </p:txBody>
       </p:sp>
@@ -14457,8 +14457,8 @@
         </p:blipFill>
         <p:spPr>
           <a:xfrm>
-            <a:off x="7516368" y="4718304"/>
-            <a:ext cx="1097280" cy="242439"/>
+            <a:off x="6663327" y="3338842"/>
+            <a:ext cx="779376" cy="172200"/>
           </a:xfrm>
           <a:prstGeom prst="rect">
             <a:avLst/>
@@ -14473,8 +14473,8 @@
         </p:nvSpPr>
         <p:spPr>
           <a:xfrm>
-            <a:off x="109728" y="4791456"/>
-            <a:ext cx="822960" cy="256032"/>
+            <a:off x="1402536" y="3390800"/>
+            <a:ext cx="584532" cy="181855"/>
           </a:xfrm>
           <a:prstGeom prst="rect">
             <a:avLst/>
@@ -14490,7 +14490,7 @@
               <a:buNone/>
             </a:pPr>
             <a:r>
-              <a:rPr lang="en-US" sz="900" dirty="0">
+              <a:rPr lang="en-US" sz="640" dirty="0">
                 <a:solidFill>
                   <a:srgbClr val="5F7183"/>
                 </a:solidFill>
@@ -14500,7 +14500,7 @@
               </a:rPr>
               <a:t>8 / 14</a:t>
             </a:r>
-            <a:endParaRPr lang="en-US" sz="900" dirty="0"/>
+            <a:endParaRPr lang="en-US" sz="640" dirty="0"/>
           </a:p>
         </p:txBody>
       </p:sp>
@@ -14512,8 +14512,8 @@
         </p:nvSpPr>
         <p:spPr>
           <a:xfrm>
-            <a:off x="960120" y="4791456"/>
-            <a:ext cx="2011680" cy="256032"/>
+            <a:off x="2006553" y="3390800"/>
+            <a:ext cx="1428857" cy="181855"/>
           </a:xfrm>
           <a:prstGeom prst="rect">
             <a:avLst/>
@@ -14529,7 +14529,7 @@
               <a:buNone/>
             </a:pPr>
             <a:r>
-              <a:rPr lang="en-US" sz="900" dirty="0">
+              <a:rPr lang="en-US" sz="640" dirty="0">
                 <a:solidFill>
                   <a:srgbClr val="5F7183"/>
                 </a:solidFill>
@@ -14539,7 +14539,7 @@
               </a:rPr>
               <a:t>Tiết 2 · 第 2 節</a:t>
             </a:r>
-            <a:endParaRPr lang="en-US" sz="900" dirty="0"/>
+            <a:endParaRPr lang="en-US" sz="640" dirty="0"/>
           </a:p>
         </p:txBody>
       </p:sp>
@@ -14576,8 +14576,8 @@
         </p:nvSpPr>
         <p:spPr>
           <a:xfrm>
-            <a:off x="502920" y="420624"/>
-            <a:ext cx="8138160" cy="274320"/>
+            <a:off x="1681812" y="325253"/>
+            <a:ext cx="5780375" cy="194844"/>
           </a:xfrm>
           <a:prstGeom prst="rect">
             <a:avLst/>
@@ -14593,7 +14593,7 @@
               <a:buNone/>
             </a:pPr>
             <a:r>
-              <a:rPr lang="en-US" sz="1250" b="1" dirty="0">
+              <a:rPr lang="en-US" sz="890" b="1" dirty="0">
                 <a:solidFill>
                   <a:srgbClr val="007F72"/>
                 </a:solidFill>
@@ -14603,7 +14603,7 @@
               </a:rPr>
               <a:t>Số lần phản hồi · 回波次數</a:t>
             </a:r>
-            <a:endParaRPr lang="en-US" sz="1250" dirty="0"/>
+            <a:endParaRPr lang="en-US" sz="890" dirty="0"/>
           </a:p>
         </p:txBody>
       </p:sp>
@@ -14615,8 +14615,8 @@
         </p:nvSpPr>
         <p:spPr>
           <a:xfrm>
-            <a:off x="502920" y="1101852"/>
-            <a:ext cx="2468880" cy="2514600"/>
+            <a:off x="1681812" y="809116"/>
+            <a:ext cx="1753597" cy="1786071"/>
           </a:xfrm>
           <a:prstGeom prst="roundRect">
             <a:avLst>
@@ -14642,8 +14642,8 @@
         </p:nvSpPr>
         <p:spPr>
           <a:xfrm flipH="1" flipV="1">
-            <a:off x="1314902" y="1288435"/>
-            <a:ext cx="422458" cy="626319"/>
+            <a:off x="2258548" y="941642"/>
+            <a:ext cx="300063" cy="444862"/>
           </a:xfrm>
           <a:prstGeom prst="line">
             <a:avLst/>
@@ -14665,8 +14665,8 @@
         </p:nvSpPr>
         <p:spPr>
           <a:xfrm flipH="1" flipV="1">
-            <a:off x="1516480" y="1192287"/>
-            <a:ext cx="220880" cy="722467"/>
+            <a:off x="2401724" y="873350"/>
+            <a:ext cx="156887" cy="513154"/>
           </a:xfrm>
           <a:prstGeom prst="line">
             <a:avLst/>
@@ -14688,8 +14688,8 @@
         </p:nvSpPr>
         <p:spPr>
           <a:xfrm flipV="1">
-            <a:off x="1737360" y="1159276"/>
-            <a:ext cx="0" cy="755477"/>
+            <a:off x="2558611" y="849903"/>
+            <a:ext cx="0" cy="536601"/>
           </a:xfrm>
           <a:prstGeom prst="line">
             <a:avLst/>
@@ -14711,8 +14711,8 @@
         </p:nvSpPr>
         <p:spPr>
           <a:xfrm flipV="1">
-            <a:off x="1737360" y="1192287"/>
-            <a:ext cx="220880" cy="722467"/>
+            <a:off x="2558611" y="873350"/>
+            <a:ext cx="156887" cy="513154"/>
           </a:xfrm>
           <a:prstGeom prst="line">
             <a:avLst/>
@@ -14734,8 +14734,8 @@
         </p:nvSpPr>
         <p:spPr>
           <a:xfrm flipV="1">
-            <a:off x="1737360" y="1288435"/>
-            <a:ext cx="422458" cy="626319"/>
+            <a:off x="2558611" y="941642"/>
+            <a:ext cx="300063" cy="444862"/>
           </a:xfrm>
           <a:prstGeom prst="line">
             <a:avLst/>
@@ -14757,8 +14757,8 @@
         </p:nvSpPr>
         <p:spPr>
           <a:xfrm>
-            <a:off x="1675400" y="1852794"/>
-            <a:ext cx="123919" cy="123919"/>
+            <a:off x="2514602" y="1342495"/>
+            <a:ext cx="88018" cy="88018"/>
           </a:xfrm>
           <a:prstGeom prst="ellipse">
             <a:avLst/>
@@ -14777,8 +14777,8 @@
         </p:nvSpPr>
         <p:spPr>
           <a:xfrm flipH="1" flipV="1">
-            <a:off x="998392" y="2824237"/>
-            <a:ext cx="738968" cy="157073"/>
+            <a:off x="2033736" y="2032492"/>
+            <a:ext cx="524875" cy="111566"/>
           </a:xfrm>
           <a:prstGeom prst="line">
             <a:avLst/>
@@ -14800,8 +14800,8 @@
         </p:nvSpPr>
         <p:spPr>
           <a:xfrm flipH="1" flipV="1">
-            <a:off x="1261923" y="2394194"/>
-            <a:ext cx="475437" cy="587116"/>
+            <a:off x="2220917" y="1727041"/>
+            <a:ext cx="337694" cy="417017"/>
           </a:xfrm>
           <a:prstGeom prst="line">
             <a:avLst/>
@@ -14823,8 +14823,8 @@
         </p:nvSpPr>
         <p:spPr>
           <a:xfrm flipV="1">
-            <a:off x="1737360" y="2225832"/>
-            <a:ext cx="0" cy="755477"/>
+            <a:off x="2558611" y="1607457"/>
+            <a:ext cx="0" cy="536601"/>
           </a:xfrm>
           <a:prstGeom prst="line">
             <a:avLst/>
@@ -14846,8 +14846,8 @@
         </p:nvSpPr>
         <p:spPr>
           <a:xfrm flipV="1">
-            <a:off x="1737360" y="2394194"/>
-            <a:ext cx="475437" cy="587116"/>
+            <a:off x="2558611" y="1727041"/>
+            <a:ext cx="337694" cy="417017"/>
           </a:xfrm>
           <a:prstGeom prst="line">
             <a:avLst/>
@@ -14869,8 +14869,8 @@
         </p:nvSpPr>
         <p:spPr>
           <a:xfrm flipV="1">
-            <a:off x="1737360" y="2824237"/>
-            <a:ext cx="738968" cy="157073"/>
+            <a:off x="2558611" y="2032492"/>
+            <a:ext cx="524875" cy="111566"/>
           </a:xfrm>
           <a:prstGeom prst="line">
             <a:avLst/>
@@ -14892,8 +14892,8 @@
         </p:nvSpPr>
         <p:spPr>
           <a:xfrm>
-            <a:off x="1675400" y="2919350"/>
-            <a:ext cx="123919" cy="123919"/>
+            <a:off x="2514602" y="2100049"/>
+            <a:ext cx="88018" cy="88018"/>
           </a:xfrm>
           <a:prstGeom prst="ellipse">
             <a:avLst/>
@@ -14912,8 +14912,8 @@
         </p:nvSpPr>
         <p:spPr>
           <a:xfrm>
-            <a:off x="3429000" y="1319005"/>
-            <a:ext cx="5212080" cy="1005611"/>
+            <a:off x="3760150" y="963355"/>
+            <a:ext cx="3702038" cy="714266"/>
           </a:xfrm>
           <a:prstGeom prst="rect">
             <a:avLst/>
@@ -14932,7 +14932,7 @@
               <a:buNone/>
             </a:pPr>
             <a:r>
-              <a:rPr lang="en-US" sz="2300" b="1" dirty="0">
+              <a:rPr lang="en-US" sz="1630" b="1" dirty="0">
                 <a:solidFill>
                   <a:srgbClr val="0B1F3A"/>
                 </a:solidFill>
@@ -14942,7 +14942,7 @@
               </a:rPr>
               <a:t>«up to 2 returns»: một tia bắn ra có thể vọng về hai lần</a:t>
             </a:r>
-            <a:endParaRPr lang="en-US" sz="2300" dirty="0"/>
+            <a:endParaRPr lang="en-US" sz="1630" dirty="0"/>
           </a:p>
           <a:p>
             <a:pPr indent="0" marL="0">
@@ -14952,7 +14952,7 @@
               <a:buNone/>
             </a:pPr>
             <a:r>
-              <a:rPr lang="en-US" sz="1400" dirty="0">
+              <a:rPr lang="en-US" sz="990" dirty="0">
                 <a:solidFill>
                   <a:srgbClr val="007F72"/>
                 </a:solidFill>
@@ -14962,7 +14962,7 @@
               </a:rPr>
               <a:t>「最多兩次回波」：一道雷射射出去，可能彈回來兩次</a:t>
             </a:r>
-            <a:endParaRPr lang="en-US" sz="2300" dirty="0"/>
+            <a:endParaRPr lang="en-US" sz="1630" dirty="0"/>
           </a:p>
         </p:txBody>
       </p:sp>
@@ -14974,8 +14974,8 @@
         </p:nvSpPr>
         <p:spPr>
           <a:xfrm>
-            <a:off x="3429000" y="2416057"/>
-            <a:ext cx="5212080" cy="1074682"/>
+            <a:off x="3760150" y="1742570"/>
+            <a:ext cx="3702038" cy="763326"/>
           </a:xfrm>
           <a:prstGeom prst="rect">
             <a:avLst/>
@@ -14994,7 +14994,7 @@
               <a:buNone/>
             </a:pPr>
             <a:r>
-              <a:rPr lang="en-US" sz="1250" dirty="0">
+              <a:rPr lang="en-US" sz="890" dirty="0">
                 <a:solidFill>
                   <a:srgbClr val="5F7183"/>
                 </a:solidFill>
@@ -15004,7 +15004,7 @@
               </a:rPr>
               <a:t>Tia xuyên qua màn mưa, qua lá cây, qua khói bụi rồi mới chạm vật thật. Nếu cảm biến chỉ nhận một lần vọng, nó có thể coi hạt mưa là vật cản.</a:t>
             </a:r>
-            <a:endParaRPr lang="en-US" sz="1250" dirty="0"/>
+            <a:endParaRPr lang="en-US" sz="890" dirty="0"/>
           </a:p>
           <a:p>
             <a:pPr indent="0" marL="0">
@@ -15014,7 +15014,7 @@
               <a:buNone/>
             </a:pPr>
             <a:r>
-              <a:rPr lang="en-US" sz="1150" dirty="0">
+              <a:rPr lang="en-US" sz="820" dirty="0">
                 <a:solidFill>
                   <a:srgbClr val="5F7183"/>
                 </a:solidFill>
@@ -15024,7 +15024,7 @@
               </a:rPr>
               <a:t>雷射穿過雨幕、樹葉、煙塵，才打到真正的東西。如果感測器只收第一次回波，它可能把雨滴當成障礙物。</a:t>
             </a:r>
-            <a:endParaRPr lang="en-US" sz="1250" dirty="0"/>
+            <a:endParaRPr lang="en-US" sz="890" dirty="0"/>
           </a:p>
         </p:txBody>
       </p:sp>
@@ -15036,8 +15036,8 @@
         </p:nvSpPr>
         <p:spPr>
           <a:xfrm>
-            <a:off x="502920" y="3913632"/>
-            <a:ext cx="8138160" cy="621792"/>
+            <a:off x="1681812" y="2806268"/>
+            <a:ext cx="5780375" cy="441647"/>
           </a:xfrm>
           <a:prstGeom prst="roundRect">
             <a:avLst>
@@ -15063,8 +15063,8 @@
         </p:nvSpPr>
         <p:spPr>
           <a:xfrm>
-            <a:off x="685800" y="3986784"/>
-            <a:ext cx="7772400" cy="493776"/>
+            <a:off x="1811708" y="2858226"/>
+            <a:ext cx="5520583" cy="350719"/>
           </a:xfrm>
           <a:prstGeom prst="rect">
             <a:avLst/>
@@ -15083,7 +15083,7 @@
               <a:buNone/>
             </a:pPr>
             <a:r>
-              <a:rPr lang="en-US" sz="1250" b="1" dirty="0">
+              <a:rPr lang="en-US" sz="890" b="1" dirty="0">
                 <a:solidFill>
                   <a:srgbClr val="7A4E00"/>
                 </a:solidFill>
@@ -15093,7 +15093,7 @@
               </a:rPr>
               <a:t>Tuần 3 ta nói «tuyết bay cũng phản xạ» — dòng này chính là cách chữa.</a:t>
             </a:r>
-            <a:endParaRPr lang="en-US" sz="1250" dirty="0"/>
+            <a:endParaRPr lang="en-US" sz="890" dirty="0"/>
           </a:p>
           <a:p>
             <a:pPr indent="0" marL="0">
@@ -15103,7 +15103,7 @@
               <a:buNone/>
             </a:pPr>
             <a:r>
-              <a:rPr lang="en-US" sz="1150" dirty="0">
+              <a:rPr lang="en-US" sz="820" dirty="0">
                 <a:solidFill>
                   <a:srgbClr val="7A4E00"/>
                 </a:solidFill>
@@ -15113,7 +15113,7 @@
               </a:rPr>
               <a:t>第三週講過「飄著的雪也會反射」——這一行就是解法。</a:t>
             </a:r>
-            <a:endParaRPr lang="en-US" sz="1250" dirty="0"/>
+            <a:endParaRPr lang="en-US" sz="890" dirty="0"/>
           </a:p>
         </p:txBody>
       </p:sp>
@@ -15133,8 +15133,8 @@
         </p:blipFill>
         <p:spPr>
           <a:xfrm>
-            <a:off x="7516368" y="4718304"/>
-            <a:ext cx="1097280" cy="242439"/>
+            <a:off x="6663327" y="3338842"/>
+            <a:ext cx="779376" cy="172200"/>
           </a:xfrm>
           <a:prstGeom prst="rect">
             <a:avLst/>
@@ -15149,8 +15149,8 @@
         </p:nvSpPr>
         <p:spPr>
           <a:xfrm>
-            <a:off x="109728" y="4791456"/>
-            <a:ext cx="822960" cy="256032"/>
+            <a:off x="1402536" y="3390800"/>
+            <a:ext cx="584532" cy="181855"/>
           </a:xfrm>
           <a:prstGeom prst="rect">
             <a:avLst/>
@@ -15166,7 +15166,7 @@
               <a:buNone/>
             </a:pPr>
             <a:r>
-              <a:rPr lang="en-US" sz="900" dirty="0">
+              <a:rPr lang="en-US" sz="640" dirty="0">
                 <a:solidFill>
                   <a:srgbClr val="5F7183"/>
                 </a:solidFill>
@@ -15176,7 +15176,7 @@
               </a:rPr>
               <a:t>9 / 14</a:t>
             </a:r>
-            <a:endParaRPr lang="en-US" sz="900" dirty="0"/>
+            <a:endParaRPr lang="en-US" sz="640" dirty="0"/>
           </a:p>
         </p:txBody>
       </p:sp>
@@ -15188,8 +15188,8 @@
         </p:nvSpPr>
         <p:spPr>
           <a:xfrm>
-            <a:off x="960120" y="4791456"/>
-            <a:ext cx="2011680" cy="256032"/>
+            <a:off x="2006553" y="3390800"/>
+            <a:ext cx="1428857" cy="181855"/>
           </a:xfrm>
           <a:prstGeom prst="rect">
             <a:avLst/>
@@ -15205,7 +15205,7 @@
               <a:buNone/>
             </a:pPr>
             <a:r>
-              <a:rPr lang="en-US" sz="900" dirty="0">
+              <a:rPr lang="en-US" sz="640" dirty="0">
                 <a:solidFill>
                   <a:srgbClr val="5F7183"/>
                 </a:solidFill>
@@ -15215,7 +15215,7 @@
               </a:rPr>
               <a:t>Tiết 2 · 第 2 節</a:t>
             </a:r>
-            <a:endParaRPr lang="en-US" sz="900" dirty="0"/>
+            <a:endParaRPr lang="en-US" sz="640" dirty="0"/>
           </a:p>
         </p:txBody>
       </p:sp>

--- a/第五週(10-08)/第五週_第2節_簡報.pptx
+++ b/第五週(10-08)/第五週_第2節_簡報.pptx
@@ -6244,8 +6244,8 @@
       </p:nvGrpSpPr>
       <p:grpSpPr>
         <a:xfrm>
-          <a:off x="0" y="0"/>
-          <a:ext cx="0" cy="0"/>
+          <a:off x="1028250" y="0"/>
+          <a:ext cx="1" cy="1"/>
           <a:chOff x="0" y="0"/>
           <a:chExt cx="0" cy="0"/>
         </a:xfrm>
@@ -6258,8 +6258,8 @@
         </p:nvSpPr>
         <p:spPr>
           <a:xfrm>
-            <a:off x="6130753" y="-947729"/>
-            <a:ext cx="2987610" cy="2987610"/>
+            <a:off x="6273000" y="-1063125"/>
+            <a:ext cx="3260250" cy="3260250"/>
           </a:xfrm>
           <a:prstGeom prst="ellipse">
             <a:avLst/>
@@ -6283,8 +6283,8 @@
         </p:nvSpPr>
         <p:spPr>
           <a:xfrm>
-            <a:off x="7104973" y="1520297"/>
-            <a:ext cx="1688649" cy="1688649"/>
+            <a:off x="7336125" y="1630125"/>
+            <a:ext cx="1842750" cy="1842750"/>
           </a:xfrm>
           <a:prstGeom prst="ellipse">
             <a:avLst/>
@@ -6305,8 +6305,8 @@
         </p:nvSpPr>
         <p:spPr>
           <a:xfrm>
-            <a:off x="1681812" y="883806"/>
-            <a:ext cx="4936051" cy="194844"/>
+            <a:off x="1418063" y="935550"/>
+            <a:ext cx="5386500" cy="212625"/>
           </a:xfrm>
           <a:prstGeom prst="rect">
             <a:avLst/>
@@ -6322,7 +6322,7 @@
               <a:buNone/>
             </a:pPr>
             <a:r>
-              <a:rPr lang="en-US" sz="890" b="1" dirty="0">
+              <a:rPr lang="en-US" sz="970" b="1" dirty="0">
                 <a:solidFill>
                   <a:srgbClr val="00A896"/>
                 </a:solidFill>
@@ -6332,7 +6332,7 @@
               </a:rPr>
               <a:t>MITUST · Nguyên lý xe tự lái · Tuần 5</a:t>
             </a:r>
-            <a:endParaRPr lang="en-US" sz="890" dirty="0"/>
+            <a:endParaRPr lang="en-US" sz="970" dirty="0"/>
           </a:p>
         </p:txBody>
       </p:sp>
@@ -6344,8 +6344,8 @@
         </p:nvSpPr>
         <p:spPr>
           <a:xfrm>
-            <a:off x="1681812" y="1143598"/>
-            <a:ext cx="5325739" cy="628953"/>
+            <a:off x="1418063" y="1219050"/>
+            <a:ext cx="5811750" cy="686349"/>
           </a:xfrm>
           <a:prstGeom prst="rect">
             <a:avLst/>
@@ -6364,7 +6364,7 @@
               <a:buNone/>
             </a:pPr>
             <a:r>
-              <a:rPr lang="en-US" sz="2410" b="1" dirty="0">
+              <a:rPr lang="en-US" sz="2640" b="1" dirty="0">
                 <a:solidFill>
                   <a:srgbClr val="FFFFFF"/>
                 </a:solidFill>
@@ -6374,7 +6374,7 @@
               </a:rPr>
               <a:t>Trang thứ hai của datasheet</a:t>
             </a:r>
-            <a:endParaRPr lang="en-US" sz="2410" dirty="0"/>
+            <a:endParaRPr lang="en-US" sz="2640" dirty="0"/>
           </a:p>
           <a:p>
             <a:pPr indent="0" marL="0">
@@ -6384,7 +6384,7 @@
               <a:buNone/>
             </a:pPr>
             <a:r>
-              <a:rPr lang="en-US" sz="1350" dirty="0">
+              <a:rPr lang="en-US" sz="1470" dirty="0">
                 <a:solidFill>
                   <a:srgbClr val="C8D6E2"/>
                 </a:solidFill>
@@ -6394,7 +6394,7 @@
               </a:rPr>
               <a:t>規格表的第二頁</a:t>
             </a:r>
-            <a:endParaRPr lang="en-US" sz="2410" dirty="0"/>
+            <a:endParaRPr lang="en-US" sz="2640" dirty="0"/>
           </a:p>
         </p:txBody>
       </p:sp>
@@ -6406,8 +6406,8 @@
         </p:nvSpPr>
         <p:spPr>
           <a:xfrm>
-            <a:off x="1681812" y="2163355"/>
-            <a:ext cx="974221" cy="29227"/>
+            <a:off x="1418063" y="2331867"/>
+            <a:ext cx="1063125" cy="31894"/>
           </a:xfrm>
           <a:prstGeom prst="rect">
             <a:avLst/>
@@ -6426,8 +6426,8 @@
         </p:nvSpPr>
         <p:spPr>
           <a:xfrm>
-            <a:off x="1681812" y="2306241"/>
-            <a:ext cx="5065947" cy="435079"/>
+            <a:off x="1418063" y="2487792"/>
+            <a:ext cx="5528250" cy="474783"/>
           </a:xfrm>
           <a:prstGeom prst="rect">
             <a:avLst/>
@@ -6446,7 +6446,7 @@
               <a:buNone/>
             </a:pPr>
             <a:r>
-              <a:rPr lang="en-US" sz="1030" dirty="0">
+              <a:rPr lang="en-US" sz="1120" dirty="0">
                 <a:solidFill>
                   <a:srgbClr val="C8D6E2"/>
                 </a:solidFill>
@@ -6456,7 +6456,7 @@
               </a:rPr>
               <a:t>Ba dòng ít ai đọc, nhưng hỏng là hỏng ở đó</a:t>
             </a:r>
-            <a:endParaRPr lang="en-US" sz="1030" dirty="0"/>
+            <a:endParaRPr lang="en-US" sz="1120" dirty="0"/>
           </a:p>
           <a:p>
             <a:pPr indent="0" marL="0">
@@ -6466,7 +6466,7 @@
               <a:buNone/>
             </a:pPr>
             <a:r>
-              <a:rPr lang="en-US" sz="890" dirty="0">
+              <a:rPr lang="en-US" sz="970" dirty="0">
                 <a:solidFill>
                   <a:srgbClr val="8AA0B4"/>
                 </a:solidFill>
@@ -6476,7 +6476,7 @@
               </a:rPr>
               <a:t>三行很少人看，但出事都出在那裡</a:t>
             </a:r>
-            <a:endParaRPr lang="en-US" sz="1030" dirty="0"/>
+            <a:endParaRPr lang="en-US" sz="1120" dirty="0"/>
           </a:p>
         </p:txBody>
       </p:sp>
@@ -6488,8 +6488,8 @@
         </p:nvSpPr>
         <p:spPr>
           <a:xfrm>
-            <a:off x="1681812" y="2793278"/>
-            <a:ext cx="4221622" cy="272782"/>
+            <a:off x="1418063" y="3019275"/>
+            <a:ext cx="4606875" cy="297675"/>
           </a:xfrm>
           <a:prstGeom prst="roundRect">
             <a:avLst>
@@ -6510,8 +6510,8 @@
         </p:nvSpPr>
         <p:spPr>
           <a:xfrm>
-            <a:off x="1772740" y="2825752"/>
-            <a:ext cx="4039768" cy="207834"/>
+            <a:off x="1517288" y="3054713"/>
+            <a:ext cx="4408425" cy="226800"/>
           </a:xfrm>
           <a:prstGeom prst="rect">
             <a:avLst/>
@@ -6527,7 +6527,7 @@
               <a:buNone/>
             </a:pPr>
             <a:r>
-              <a:rPr lang="en-US" sz="750" b="1" dirty="0">
+              <a:rPr lang="en-US" sz="810" b="1" dirty="0">
                 <a:solidFill>
                   <a:srgbClr val="9FD6CE"/>
                 </a:solidFill>
@@ -6537,7 +6537,7 @@
               </a:rPr>
               <a:t>工具｜Công cụ： ch-neural.github.io/MITUST-Principles-of-Self-Driving-Cars/week5/spec/</a:t>
             </a:r>
-            <a:endParaRPr lang="en-US" sz="750" dirty="0"/>
+            <a:endParaRPr lang="en-US" sz="810" dirty="0"/>
           </a:p>
         </p:txBody>
       </p:sp>
@@ -6549,8 +6549,8 @@
         </p:nvSpPr>
         <p:spPr>
           <a:xfrm>
-            <a:off x="1681812" y="3131008"/>
-            <a:ext cx="4936051" cy="194844"/>
+            <a:off x="1418063" y="3387825"/>
+            <a:ext cx="5386500" cy="212625"/>
           </a:xfrm>
           <a:prstGeom prst="rect">
             <a:avLst/>
@@ -6566,7 +6566,7 @@
               <a:buNone/>
             </a:pPr>
             <a:r>
-              <a:rPr lang="en-US" sz="820" dirty="0">
+              <a:rPr lang="en-US" sz="890" dirty="0">
                 <a:solidFill>
                   <a:srgbClr val="8AA0B4"/>
                 </a:solidFill>
@@ -6576,7 +6576,7 @@
               </a:rPr>
               <a:t>第五週 第 2 節　2026/10/08（四）10:10–11:00　CH Tseng</a:t>
             </a:r>
-            <a:endParaRPr lang="en-US" sz="820" dirty="0"/>
+            <a:endParaRPr lang="en-US" sz="890" dirty="0"/>
           </a:p>
         </p:txBody>
       </p:sp>
@@ -6588,8 +6588,8 @@
         </p:nvSpPr>
         <p:spPr>
           <a:xfrm>
-            <a:off x="1577895" y="247315"/>
-            <a:ext cx="1571743" cy="532574"/>
+            <a:off x="1304663" y="240975"/>
+            <a:ext cx="1715175" cy="581175"/>
           </a:xfrm>
           <a:prstGeom prst="roundRect">
             <a:avLst>
@@ -6618,8 +6618,8 @@
         </p:blipFill>
         <p:spPr>
           <a:xfrm>
-            <a:off x="1681812" y="364222"/>
-            <a:ext cx="1363909" cy="301350"/>
+            <a:off x="502920" y="475488"/>
+            <a:ext cx="1920240" cy="424269"/>
           </a:xfrm>
           <a:prstGeom prst="rect">
             <a:avLst/>
@@ -6652,8 +6652,8 @@
       </p:nvGrpSpPr>
       <p:grpSpPr>
         <a:xfrm>
-          <a:off x="0" y="0"/>
-          <a:ext cx="0" cy="0"/>
+          <a:off x="925172" y="0"/>
+          <a:ext cx="1" cy="1"/>
           <a:chOff x="0" y="0"/>
           <a:chExt cx="0" cy="0"/>
         </a:xfrm>
@@ -6666,8 +6666,8 @@
         </p:nvSpPr>
         <p:spPr>
           <a:xfrm>
-            <a:off x="6130753" y="-947729"/>
-            <a:ext cx="2987610" cy="2987610"/>
+            <a:off x="6322478" y="-1094048"/>
+            <a:ext cx="3355082" cy="3355082"/>
           </a:xfrm>
           <a:prstGeom prst="ellipse">
             <a:avLst/>
@@ -6691,8 +6691,8 @@
         </p:nvSpPr>
         <p:spPr>
           <a:xfrm>
-            <a:off x="7104973" y="1520297"/>
-            <a:ext cx="1688649" cy="1688649"/>
+            <a:off x="7416526" y="1677541"/>
+            <a:ext cx="1896351" cy="1896351"/>
           </a:xfrm>
           <a:prstGeom prst="ellipse">
             <a:avLst/>
@@ -6713,8 +6713,8 @@
         </p:nvSpPr>
         <p:spPr>
           <a:xfrm>
-            <a:off x="1681812" y="364222"/>
-            <a:ext cx="4806155" cy="194844"/>
+            <a:off x="1326323" y="379270"/>
+            <a:ext cx="5397306" cy="218810"/>
           </a:xfrm>
           <a:prstGeom prst="rect">
             <a:avLst/>
@@ -6730,7 +6730,7 @@
               <a:buNone/>
             </a:pPr>
             <a:r>
-              <a:rPr lang="en-US" sz="890" b="1" dirty="0">
+              <a:rPr lang="en-US" sz="1000" b="1" dirty="0">
                 <a:solidFill>
                   <a:srgbClr val="FFB020"/>
                 </a:solidFill>
@@ -6740,7 +6740,7 @@
               </a:rPr>
               <a:t>Thử nhanh · 小練習（3 分鐘動手）</a:t>
             </a:r>
-            <a:endParaRPr lang="en-US" sz="890" dirty="0"/>
+            <a:endParaRPr lang="en-US" sz="1000" dirty="0"/>
           </a:p>
         </p:txBody>
       </p:sp>
@@ -6752,8 +6752,8 @@
         </p:nvSpPr>
         <p:spPr>
           <a:xfrm>
-            <a:off x="1681812" y="585045"/>
-            <a:ext cx="5715427" cy="870304"/>
+            <a:off x="1326323" y="627254"/>
+            <a:ext cx="6418418" cy="977350"/>
           </a:xfrm>
           <a:prstGeom prst="rect">
             <a:avLst/>
@@ -6772,7 +6772,7 @@
               <a:buNone/>
             </a:pPr>
             <a:r>
-              <a:rPr lang="en-US" sz="1630" b="1" dirty="0">
+              <a:rPr lang="en-US" sz="1830" b="1" dirty="0">
                 <a:solidFill>
                   <a:srgbClr val="FFFFFF"/>
                 </a:solidFill>
@@ -6782,7 +6782,7 @@
               </a:rPr>
               <a:t>Mở công cụ, dùng công cụ nhỏ số ② để đổi «điểm mỗi giây» thành góc.</a:t>
             </a:r>
-            <a:endParaRPr lang="en-US" sz="1630" dirty="0"/>
+            <a:endParaRPr lang="en-US" sz="1830" dirty="0"/>
           </a:p>
           <a:p>
             <a:pPr indent="0" marL="0">
@@ -6792,7 +6792,7 @@
               <a:buNone/>
             </a:pPr>
             <a:r>
-              <a:rPr lang="en-US" sz="1070" dirty="0">
+              <a:rPr lang="en-US" sz="1200" dirty="0">
                 <a:solidFill>
                   <a:srgbClr val="AFC3D4"/>
                 </a:solidFill>
@@ -6802,7 +6802,7 @@
               </a:rPr>
               <a:t>打開工具，用第②個小工具，把「每秒幾點」換算成角度。</a:t>
             </a:r>
-            <a:endParaRPr lang="en-US" sz="1630" dirty="0"/>
+            <a:endParaRPr lang="en-US" sz="1830" dirty="0"/>
           </a:p>
         </p:txBody>
       </p:sp>
@@ -6814,8 +6814,8 @@
         </p:nvSpPr>
         <p:spPr>
           <a:xfrm>
-            <a:off x="1681812" y="1362092"/>
-            <a:ext cx="5780375" cy="441647"/>
+            <a:off x="1326323" y="1499877"/>
+            <a:ext cx="6491354" cy="495969"/>
           </a:xfrm>
           <a:prstGeom prst="roundRect">
             <a:avLst>
@@ -6836,8 +6836,8 @@
         </p:nvSpPr>
         <p:spPr>
           <a:xfrm>
-            <a:off x="1798719" y="1466008"/>
-            <a:ext cx="233813" cy="233813"/>
+            <a:off x="1457609" y="1616575"/>
+            <a:ext cx="262572" cy="262572"/>
           </a:xfrm>
           <a:prstGeom prst="ellipse">
             <a:avLst/>
@@ -6856,8 +6856,8 @@
         </p:nvSpPr>
         <p:spPr>
           <a:xfrm>
-            <a:off x="1798719" y="1485493"/>
-            <a:ext cx="233813" cy="194844"/>
+            <a:off x="1457609" y="1638456"/>
+            <a:ext cx="262572" cy="218810"/>
           </a:xfrm>
           <a:prstGeom prst="rect">
             <a:avLst/>
@@ -6873,7 +6873,7 @@
               <a:buNone/>
             </a:pPr>
             <a:r>
-              <a:rPr lang="en-US" sz="850" b="1" dirty="0">
+              <a:rPr lang="en-US" sz="960" b="1" dirty="0">
                 <a:solidFill>
                   <a:srgbClr val="FFFFFF"/>
                 </a:solidFill>
@@ -6883,7 +6883,7 @@
               </a:rPr>
               <a:t>1</a:t>
             </a:r>
-            <a:endParaRPr lang="en-US" sz="850" dirty="0"/>
+            <a:endParaRPr lang="en-US" sz="960" dirty="0"/>
           </a:p>
         </p:txBody>
       </p:sp>
@@ -6895,8 +6895,8 @@
         </p:nvSpPr>
         <p:spPr>
           <a:xfrm>
-            <a:off x="2149438" y="1394566"/>
-            <a:ext cx="5182853" cy="389688"/>
+            <a:off x="1851466" y="1536345"/>
+            <a:ext cx="5820338" cy="437619"/>
           </a:xfrm>
           <a:prstGeom prst="rect">
             <a:avLst/>
@@ -6915,7 +6915,7 @@
               <a:buNone/>
             </a:pPr>
             <a:r>
-              <a:rPr lang="en-US" sz="890" b="1" dirty="0">
+              <a:rPr lang="en-US" sz="1000" b="1" dirty="0">
                 <a:solidFill>
                   <a:srgbClr val="FFFFFF"/>
                 </a:solidFill>
@@ -6925,7 +6925,7 @@
               </a:rPr>
               <a:t>Đặt 64 kênh, 1024 điểm mỗi vòng, 10 Hz — số điểm mỗi giây là bao nhiêu?</a:t>
             </a:r>
-            <a:endParaRPr lang="en-US" sz="890" dirty="0"/>
+            <a:endParaRPr lang="en-US" sz="1000" dirty="0"/>
           </a:p>
           <a:p>
             <a:pPr indent="0" marL="0">
@@ -6935,7 +6935,7 @@
               <a:buNone/>
             </a:pPr>
             <a:r>
-              <a:rPr lang="en-US" sz="820" dirty="0">
+              <a:rPr lang="en-US" sz="920" dirty="0">
                 <a:solidFill>
                   <a:srgbClr val="AFC3D4"/>
                 </a:solidFill>
@@ -6945,7 +6945,7 @@
               </a:rPr>
               <a:t>設成 64 線、每圈 1024 點、10 Hz——每秒點數是多少？</a:t>
             </a:r>
-            <a:endParaRPr lang="en-US" sz="890" dirty="0"/>
+            <a:endParaRPr lang="en-US" sz="1000" dirty="0"/>
           </a:p>
         </p:txBody>
       </p:sp>
@@ -6957,8 +6957,8 @@
         </p:nvSpPr>
         <p:spPr>
           <a:xfrm>
-            <a:off x="1681812" y="1868686"/>
-            <a:ext cx="5780375" cy="441647"/>
+            <a:off x="1326323" y="2068782"/>
+            <a:ext cx="6491354" cy="495969"/>
           </a:xfrm>
           <a:prstGeom prst="roundRect">
             <a:avLst>
@@ -6979,8 +6979,8 @@
         </p:nvSpPr>
         <p:spPr>
           <a:xfrm>
-            <a:off x="1798719" y="1972603"/>
-            <a:ext cx="233813" cy="233813"/>
+            <a:off x="1457609" y="2185481"/>
+            <a:ext cx="262572" cy="262572"/>
           </a:xfrm>
           <a:prstGeom prst="ellipse">
             <a:avLst/>
@@ -6999,8 +6999,8 @@
         </p:nvSpPr>
         <p:spPr>
           <a:xfrm>
-            <a:off x="1798719" y="1992087"/>
-            <a:ext cx="233813" cy="194844"/>
+            <a:off x="1457609" y="2207362"/>
+            <a:ext cx="262572" cy="218810"/>
           </a:xfrm>
           <a:prstGeom prst="rect">
             <a:avLst/>
@@ -7016,7 +7016,7 @@
               <a:buNone/>
             </a:pPr>
             <a:r>
-              <a:rPr lang="en-US" sz="850" b="1" dirty="0">
+              <a:rPr lang="en-US" sz="960" b="1" dirty="0">
                 <a:solidFill>
                   <a:srgbClr val="FFFFFF"/>
                 </a:solidFill>
@@ -7026,7 +7026,7 @@
               </a:rPr>
               <a:t>2</a:t>
             </a:r>
-            <a:endParaRPr lang="en-US" sz="850" dirty="0"/>
+            <a:endParaRPr lang="en-US" sz="960" dirty="0"/>
           </a:p>
         </p:txBody>
       </p:sp>
@@ -7038,8 +7038,8 @@
         </p:nvSpPr>
         <p:spPr>
           <a:xfrm>
-            <a:off x="2149438" y="1901160"/>
-            <a:ext cx="5182853" cy="389688"/>
+            <a:off x="1851466" y="2105250"/>
+            <a:ext cx="5820338" cy="437619"/>
           </a:xfrm>
           <a:prstGeom prst="rect">
             <a:avLst/>
@@ -7058,7 +7058,7 @@
               <a:buNone/>
             </a:pPr>
             <a:r>
-              <a:rPr lang="en-US" sz="890" b="1" dirty="0">
+              <a:rPr lang="en-US" sz="1000" b="1" dirty="0">
                 <a:solidFill>
                   <a:srgbClr val="FFFFFF"/>
                 </a:solidFill>
@@ -7068,7 +7068,7 @@
               </a:rPr>
               <a:t>Phân giải ngang lúc đó là bao nhiêu độ? Ở 40 m hai điểm cách nhau mấy centimet?</a:t>
             </a:r>
-            <a:endParaRPr lang="en-US" sz="890" dirty="0"/>
+            <a:endParaRPr lang="en-US" sz="1000" dirty="0"/>
           </a:p>
           <a:p>
             <a:pPr indent="0" marL="0">
@@ -7078,7 +7078,7 @@
               <a:buNone/>
             </a:pPr>
             <a:r>
-              <a:rPr lang="en-US" sz="820" dirty="0">
+              <a:rPr lang="en-US" sz="920" dirty="0">
                 <a:solidFill>
                   <a:srgbClr val="AFC3D4"/>
                 </a:solidFill>
@@ -7088,7 +7088,7 @@
               </a:rPr>
               <a:t>這時候水平角解析度是幾度？40 公尺處兩個點相距幾公分？</a:t>
             </a:r>
-            <a:endParaRPr lang="en-US" sz="890" dirty="0"/>
+            <a:endParaRPr lang="en-US" sz="1000" dirty="0"/>
           </a:p>
         </p:txBody>
       </p:sp>
@@ -7100,8 +7100,8 @@
         </p:nvSpPr>
         <p:spPr>
           <a:xfrm>
-            <a:off x="1681812" y="2375281"/>
-            <a:ext cx="5780375" cy="441647"/>
+            <a:off x="1326323" y="2637687"/>
+            <a:ext cx="6491354" cy="495969"/>
           </a:xfrm>
           <a:prstGeom prst="roundRect">
             <a:avLst>
@@ -7122,8 +7122,8 @@
         </p:nvSpPr>
         <p:spPr>
           <a:xfrm>
-            <a:off x="1798719" y="2479198"/>
-            <a:ext cx="233813" cy="233813"/>
+            <a:off x="1457609" y="2754386"/>
+            <a:ext cx="262572" cy="262572"/>
           </a:xfrm>
           <a:prstGeom prst="ellipse">
             <a:avLst/>
@@ -7142,8 +7142,8 @@
         </p:nvSpPr>
         <p:spPr>
           <a:xfrm>
-            <a:off x="1798719" y="2498682"/>
-            <a:ext cx="233813" cy="194844"/>
+            <a:off x="1457609" y="2776267"/>
+            <a:ext cx="262572" cy="218810"/>
           </a:xfrm>
           <a:prstGeom prst="rect">
             <a:avLst/>
@@ -7159,7 +7159,7 @@
               <a:buNone/>
             </a:pPr>
             <a:r>
-              <a:rPr lang="en-US" sz="850" b="1" dirty="0">
+              <a:rPr lang="en-US" sz="960" b="1" dirty="0">
                 <a:solidFill>
                   <a:srgbClr val="FFFFFF"/>
                 </a:solidFill>
@@ -7169,7 +7169,7 @@
               </a:rPr>
               <a:t>3</a:t>
             </a:r>
-            <a:endParaRPr lang="en-US" sz="850" dirty="0"/>
+            <a:endParaRPr lang="en-US" sz="960" dirty="0"/>
           </a:p>
         </p:txBody>
       </p:sp>
@@ -7181,8 +7181,8 @@
         </p:nvSpPr>
         <p:spPr>
           <a:xfrm>
-            <a:off x="2149438" y="2407755"/>
-            <a:ext cx="5182853" cy="389688"/>
+            <a:off x="1851466" y="2674156"/>
+            <a:ext cx="5820338" cy="437619"/>
           </a:xfrm>
           <a:prstGeom prst="rect">
             <a:avLst/>
@@ -7201,7 +7201,7 @@
               <a:buNone/>
             </a:pPr>
             <a:r>
-              <a:rPr lang="en-US" sz="890" b="1" dirty="0">
+              <a:rPr lang="en-US" sz="1000" b="1" dirty="0">
                 <a:solidFill>
                   <a:srgbClr val="FFFFFF"/>
                 </a:solidFill>
@@ -7211,7 +7211,7 @@
               </a:rPr>
               <a:t>Đổi sang 2048 điểm mỗi vòng: hai con số đó đổi thế nào?</a:t>
             </a:r>
-            <a:endParaRPr lang="en-US" sz="890" dirty="0"/>
+            <a:endParaRPr lang="en-US" sz="1000" dirty="0"/>
           </a:p>
           <a:p>
             <a:pPr indent="0" marL="0">
@@ -7221,7 +7221,7 @@
               <a:buNone/>
             </a:pPr>
             <a:r>
-              <a:rPr lang="en-US" sz="820" dirty="0">
+              <a:rPr lang="en-US" sz="920" dirty="0">
                 <a:solidFill>
                   <a:srgbClr val="AFC3D4"/>
                 </a:solidFill>
@@ -7231,7 +7231,7 @@
               </a:rPr>
               <a:t>改成每圈 2048 點：這兩個數字怎麼變？</a:t>
             </a:r>
-            <a:endParaRPr lang="en-US" sz="890" dirty="0"/>
+            <a:endParaRPr lang="en-US" sz="1000" dirty="0"/>
           </a:p>
         </p:txBody>
       </p:sp>
@@ -7243,8 +7243,8 @@
         </p:nvSpPr>
         <p:spPr>
           <a:xfrm>
-            <a:off x="1681812" y="2907855"/>
-            <a:ext cx="5715427" cy="324740"/>
+            <a:off x="1326323" y="3235767"/>
+            <a:ext cx="6418418" cy="364683"/>
           </a:xfrm>
           <a:prstGeom prst="rect">
             <a:avLst/>
@@ -7263,7 +7263,7 @@
               <a:buNone/>
             </a:pPr>
             <a:r>
-              <a:rPr lang="en-US" sz="890" b="1" dirty="0">
+              <a:rPr lang="en-US" sz="1000" b="1" dirty="0">
                 <a:solidFill>
                   <a:srgbClr val="FFB020"/>
                 </a:solidFill>
@@ -7273,7 +7273,7 @@
               </a:rPr>
               <a:t>Datasheet hay chỉ ghi «điểm mỗi giây» — con số oai nhất, nhưng không dùng thẳng được.</a:t>
             </a:r>
-            <a:endParaRPr lang="en-US" sz="890" dirty="0"/>
+            <a:endParaRPr lang="en-US" sz="1000" dirty="0"/>
           </a:p>
           <a:p>
             <a:pPr indent="0" marL="0">
@@ -7283,7 +7283,7 @@
               <a:buNone/>
             </a:pPr>
             <a:r>
-              <a:rPr lang="en-US" sz="820" dirty="0">
+              <a:rPr lang="en-US" sz="920" dirty="0">
                 <a:solidFill>
                   <a:srgbClr val="FFB020"/>
                 </a:solidFill>
@@ -7293,7 +7293,7 @@
               </a:rPr>
               <a:t>規格表常常只寫「每秒幾點」——那是最威風的數字，可是不能直接拿來用。</a:t>
             </a:r>
-            <a:endParaRPr lang="en-US" sz="890" dirty="0"/>
+            <a:endParaRPr lang="en-US" sz="1000" dirty="0"/>
           </a:p>
         </p:txBody>
       </p:sp>
@@ -7305,8 +7305,8 @@
         </p:nvSpPr>
         <p:spPr>
           <a:xfrm>
-            <a:off x="1402536" y="3390800"/>
-            <a:ext cx="584532" cy="181855"/>
+            <a:off x="1012696" y="102111"/>
+            <a:ext cx="656429" cy="204222"/>
           </a:xfrm>
           <a:prstGeom prst="rect">
             <a:avLst/>
@@ -7322,7 +7322,7 @@
               <a:buNone/>
             </a:pPr>
             <a:r>
-              <a:rPr lang="en-US" sz="640" dirty="0">
+              <a:rPr lang="en-US" sz="720" dirty="0">
                 <a:solidFill>
                   <a:srgbClr val="9FB3C8"/>
                 </a:solidFill>
@@ -7332,7 +7332,7 @@
               </a:rPr>
               <a:t>10 / 14</a:t>
             </a:r>
-            <a:endParaRPr lang="en-US" sz="640" dirty="0"/>
+            <a:endParaRPr lang="en-US" sz="720" dirty="0"/>
           </a:p>
         </p:txBody>
       </p:sp>
@@ -7344,8 +7344,8 @@
         </p:nvSpPr>
         <p:spPr>
           <a:xfrm>
-            <a:off x="2006553" y="3390800"/>
-            <a:ext cx="1428857" cy="181855"/>
+            <a:off x="1691006" y="102111"/>
+            <a:ext cx="1604604" cy="204222"/>
           </a:xfrm>
           <a:prstGeom prst="rect">
             <a:avLst/>
@@ -7361,7 +7361,7 @@
               <a:buNone/>
             </a:pPr>
             <a:r>
-              <a:rPr lang="en-US" sz="640" dirty="0">
+              <a:rPr lang="en-US" sz="720" dirty="0">
                 <a:solidFill>
                   <a:srgbClr val="9FB3C8"/>
                 </a:solidFill>
@@ -7371,7 +7371,7 @@
               </a:rPr>
               <a:t>Tiết 2 · 第 2 節</a:t>
             </a:r>
-            <a:endParaRPr lang="en-US" sz="640" dirty="0"/>
+            <a:endParaRPr lang="en-US" sz="720" dirty="0"/>
           </a:p>
         </p:txBody>
       </p:sp>
@@ -7401,8 +7401,8 @@
       </p:nvGrpSpPr>
       <p:grpSpPr>
         <a:xfrm>
-          <a:off x="0" y="0"/>
-          <a:ext cx="0" cy="0"/>
+          <a:off x="898071" y="0"/>
+          <a:ext cx="1" cy="1"/>
           <a:chOff x="0" y="0"/>
           <a:chExt cx="0" cy="0"/>
         </a:xfrm>
@@ -7415,8 +7415,8 @@
         </p:nvSpPr>
         <p:spPr>
           <a:xfrm>
-            <a:off x="6130753" y="-947729"/>
-            <a:ext cx="2987610" cy="2987610"/>
+            <a:off x="6335486" y="-1102179"/>
+            <a:ext cx="3380014" cy="3380014"/>
           </a:xfrm>
           <a:prstGeom prst="ellipse">
             <a:avLst/>
@@ -7440,8 +7440,8 @@
         </p:nvSpPr>
         <p:spPr>
           <a:xfrm>
-            <a:off x="7104973" y="1520297"/>
-            <a:ext cx="1688649" cy="1688649"/>
+            <a:off x="7437664" y="1690007"/>
+            <a:ext cx="1910443" cy="1910443"/>
           </a:xfrm>
           <a:prstGeom prst="ellipse">
             <a:avLst/>
@@ -7462,8 +7462,8 @@
         </p:nvSpPr>
         <p:spPr>
           <a:xfrm>
-            <a:off x="1681812" y="1228031"/>
-            <a:ext cx="3247402" cy="220823"/>
+            <a:off x="1302204" y="1359354"/>
+            <a:ext cx="3673929" cy="249827"/>
           </a:xfrm>
           <a:prstGeom prst="rect">
             <a:avLst/>
@@ -7479,7 +7479,7 @@
               <a:buNone/>
             </a:pPr>
             <a:r>
-              <a:rPr lang="en-US" sz="960" b="1" dirty="0">
+              <a:rPr lang="en-US" sz="1080" b="1" dirty="0">
                 <a:solidFill>
                   <a:srgbClr val="FFB020"/>
                 </a:solidFill>
@@ -7489,7 +7489,7 @@
               </a:rPr>
               <a:t>Phần 3 / 3</a:t>
             </a:r>
-            <a:endParaRPr lang="en-US" sz="960" dirty="0"/>
+            <a:endParaRPr lang="en-US" sz="1080" dirty="0"/>
           </a:p>
         </p:txBody>
       </p:sp>
@@ -7501,8 +7501,8 @@
         </p:nvSpPr>
         <p:spPr>
           <a:xfrm>
-            <a:off x="1681812" y="1481328"/>
-            <a:ext cx="5195843" cy="844324"/>
+            <a:off x="1302204" y="1645920"/>
+            <a:ext cx="5878286" cy="955221"/>
           </a:xfrm>
           <a:prstGeom prst="rect">
             <a:avLst/>
@@ -7521,7 +7521,7 @@
               <a:buNone/>
             </a:pPr>
             <a:r>
-              <a:rPr lang="en-US" sz="2060" b="1" dirty="0">
+              <a:rPr lang="en-US" sz="2330" b="1" dirty="0">
                 <a:solidFill>
                   <a:srgbClr val="FFFFFF"/>
                 </a:solidFill>
@@ -7531,7 +7531,7 @@
               </a:rPr>
               <a:t>Hai cảm biến tốt, ghép lại vẫn sai</a:t>
             </a:r>
-            <a:endParaRPr lang="en-US" sz="2060" dirty="0"/>
+            <a:endParaRPr lang="en-US" sz="2330" dirty="0"/>
           </a:p>
           <a:p>
             <a:pPr indent="0" marL="0">
@@ -7541,7 +7541,7 @@
               <a:buNone/>
             </a:pPr>
             <a:r>
-              <a:rPr lang="en-US" sz="1210" dirty="0">
+              <a:rPr lang="en-US" sz="1370" dirty="0">
                 <a:solidFill>
                   <a:srgbClr val="AFC3D4"/>
                 </a:solidFill>
@@ -7551,7 +7551,7 @@
               </a:rPr>
               <a:t>兩顆都是好的，合起來還是錯的</a:t>
             </a:r>
-            <a:endParaRPr lang="en-US" sz="2060" dirty="0"/>
+            <a:endParaRPr lang="en-US" sz="2330" dirty="0"/>
           </a:p>
         </p:txBody>
       </p:sp>
@@ -7563,8 +7563,8 @@
         </p:nvSpPr>
         <p:spPr>
           <a:xfrm>
-            <a:off x="1681812" y="2403590"/>
-            <a:ext cx="5195843" cy="454636"/>
+            <a:off x="1302204" y="2689316"/>
+            <a:ext cx="5878286" cy="514350"/>
           </a:xfrm>
           <a:prstGeom prst="rect">
             <a:avLst/>
@@ -7583,7 +7583,7 @@
               <a:buNone/>
             </a:pPr>
             <a:r>
-              <a:rPr lang="en-US" sz="960" dirty="0">
+              <a:rPr lang="en-US" sz="1080" dirty="0">
                 <a:solidFill>
                   <a:srgbClr val="AFC3D4"/>
                 </a:solidFill>
@@ -7593,7 +7593,7 @@
               </a:rPr>
               <a:t>Hiệu chuẩn và đồng bộ thời gian</a:t>
             </a:r>
-            <a:endParaRPr lang="en-US" sz="960" dirty="0"/>
+            <a:endParaRPr lang="en-US" sz="1080" dirty="0"/>
           </a:p>
           <a:p>
             <a:pPr indent="0" marL="0">
@@ -7603,7 +7603,7 @@
               <a:buNone/>
             </a:pPr>
             <a:r>
-              <a:rPr lang="en-US" sz="850" dirty="0">
+              <a:rPr lang="en-US" sz="960" dirty="0">
                 <a:solidFill>
                   <a:srgbClr val="8AA0B4"/>
                 </a:solidFill>
@@ -7613,7 +7613,7 @@
               </a:rPr>
               <a:t>標定與時間同步</a:t>
             </a:r>
-            <a:endParaRPr lang="en-US" sz="960" dirty="0"/>
+            <a:endParaRPr lang="en-US" sz="1080" dirty="0"/>
           </a:p>
         </p:txBody>
       </p:sp>
@@ -7625,8 +7625,8 @@
         </p:nvSpPr>
         <p:spPr>
           <a:xfrm>
-            <a:off x="1402536" y="3390800"/>
-            <a:ext cx="584532" cy="181855"/>
+            <a:off x="986246" y="102870"/>
+            <a:ext cx="661307" cy="205740"/>
           </a:xfrm>
           <a:prstGeom prst="rect">
             <a:avLst/>
@@ -7642,7 +7642,7 @@
               <a:buNone/>
             </a:pPr>
             <a:r>
-              <a:rPr lang="en-US" sz="640" dirty="0">
+              <a:rPr lang="en-US" sz="720" dirty="0">
                 <a:solidFill>
                   <a:srgbClr val="9FB3C8"/>
                 </a:solidFill>
@@ -7652,7 +7652,7 @@
               </a:rPr>
               <a:t>11 / 14</a:t>
             </a:r>
-            <a:endParaRPr lang="en-US" sz="640" dirty="0"/>
+            <a:endParaRPr lang="en-US" sz="720" dirty="0"/>
           </a:p>
         </p:txBody>
       </p:sp>
@@ -7664,8 +7664,8 @@
         </p:nvSpPr>
         <p:spPr>
           <a:xfrm>
-            <a:off x="2006553" y="3390800"/>
-            <a:ext cx="1428857" cy="181855"/>
+            <a:off x="1669596" y="102870"/>
+            <a:ext cx="1616529" cy="205740"/>
           </a:xfrm>
           <a:prstGeom prst="rect">
             <a:avLst/>
@@ -7681,7 +7681,7 @@
               <a:buNone/>
             </a:pPr>
             <a:r>
-              <a:rPr lang="en-US" sz="640" dirty="0">
+              <a:rPr lang="en-US" sz="720" dirty="0">
                 <a:solidFill>
                   <a:srgbClr val="9FB3C8"/>
                 </a:solidFill>
@@ -7691,7 +7691,7 @@
               </a:rPr>
               <a:t>Tiết 2 · 第 2 節</a:t>
             </a:r>
-            <a:endParaRPr lang="en-US" sz="640" dirty="0"/>
+            <a:endParaRPr lang="en-US" sz="720" dirty="0"/>
           </a:p>
         </p:txBody>
       </p:sp>
@@ -7714,8 +7714,8 @@
       </p:nvGrpSpPr>
       <p:grpSpPr>
         <a:xfrm>
-          <a:off x="0" y="0"/>
-          <a:ext cx="0" cy="0"/>
+          <a:off x="1114123" y="0"/>
+          <a:ext cx="1" cy="1"/>
           <a:chOff x="0" y="0"/>
           <a:chExt cx="0" cy="0"/>
         </a:xfrm>
@@ -7728,8 +7728,8 @@
         </p:nvSpPr>
         <p:spPr>
           <a:xfrm>
-            <a:off x="1681812" y="234326"/>
-            <a:ext cx="5780375" cy="597522"/>
+            <a:off x="1494490" y="221304"/>
+            <a:ext cx="6155021" cy="636249"/>
           </a:xfrm>
           <a:prstGeom prst="rect">
             <a:avLst/>
@@ -7748,7 +7748,7 @@
               <a:buNone/>
             </a:pPr>
             <a:r>
-              <a:rPr lang="en-US" sz="1560" b="1" dirty="0">
+              <a:rPr lang="en-US" sz="1660" b="1" dirty="0">
                 <a:solidFill>
                   <a:srgbClr val="0B1F3A"/>
                 </a:solidFill>
@@ -7758,7 +7758,7 @@
               </a:rPr>
               <a:t>Hiệu chuẩn: nói cho xe biết mỗi con mắt ở đâu, nhìn hướng nào</a:t>
             </a:r>
-            <a:endParaRPr lang="en-US" sz="1560" dirty="0"/>
+            <a:endParaRPr lang="en-US" sz="1660" dirty="0"/>
           </a:p>
           <a:p>
             <a:pPr indent="0" marL="0">
@@ -7768,7 +7768,7 @@
               <a:buNone/>
             </a:pPr>
             <a:r>
-              <a:rPr lang="en-US" sz="960" dirty="0">
+              <a:rPr lang="en-US" sz="1020" dirty="0">
                 <a:solidFill>
                   <a:srgbClr val="5F7183"/>
                 </a:solidFill>
@@ -7778,7 +7778,7 @@
               </a:rPr>
               <a:t>標定：告訴車子每一隻眼睛裝在哪、朝哪看</a:t>
             </a:r>
-            <a:endParaRPr lang="en-US" sz="1560" dirty="0"/>
+            <a:endParaRPr lang="en-US" sz="1660" dirty="0"/>
           </a:p>
         </p:txBody>
       </p:sp>
@@ -7790,8 +7790,8 @@
         </p:nvSpPr>
         <p:spPr>
           <a:xfrm>
-            <a:off x="1681812" y="965743"/>
-            <a:ext cx="1796896" cy="1935452"/>
+            <a:off x="1494490" y="1000127"/>
+            <a:ext cx="1913359" cy="2060895"/>
           </a:xfrm>
           <a:prstGeom prst="roundRect">
             <a:avLst>
@@ -7824,8 +7824,8 @@
         </p:nvSpPr>
         <p:spPr>
           <a:xfrm>
-            <a:off x="2411395" y="1095639"/>
-            <a:ext cx="337730" cy="337730"/>
+            <a:off x="2271359" y="1138442"/>
+            <a:ext cx="359619" cy="359619"/>
           </a:xfrm>
           <a:prstGeom prst="ellipse">
             <a:avLst/>
@@ -7844,8 +7844,8 @@
         </p:nvSpPr>
         <p:spPr>
           <a:xfrm>
-            <a:off x="2411395" y="1167082"/>
-            <a:ext cx="337730" cy="194844"/>
+            <a:off x="2271359" y="1214515"/>
+            <a:ext cx="359619" cy="207473"/>
           </a:xfrm>
           <a:prstGeom prst="rect">
             <a:avLst/>
@@ -7861,7 +7861,7 @@
               <a:buNone/>
             </a:pPr>
             <a:r>
-              <a:rPr lang="en-US" sz="1070" b="1" dirty="0">
+              <a:rPr lang="en-US" sz="1130" b="1" dirty="0">
                 <a:solidFill>
                   <a:srgbClr val="FFFFFF"/>
                 </a:solidFill>
@@ -7871,7 +7871,7 @@
               </a:rPr>
               <a:t>1</a:t>
             </a:r>
-            <a:endParaRPr lang="en-US" sz="1070" dirty="0"/>
+            <a:endParaRPr lang="en-US" sz="1130" dirty="0"/>
           </a:p>
         </p:txBody>
       </p:sp>
@@ -7883,8 +7883,8 @@
         </p:nvSpPr>
         <p:spPr>
           <a:xfrm>
-            <a:off x="1772740" y="1498317"/>
-            <a:ext cx="1615041" cy="467626"/>
+            <a:off x="1591310" y="1567218"/>
+            <a:ext cx="1719717" cy="497934"/>
           </a:xfrm>
           <a:prstGeom prst="rect">
             <a:avLst/>
@@ -7903,7 +7903,7 @@
               <a:buNone/>
             </a:pPr>
             <a:r>
-              <a:rPr lang="en-US" sz="990" b="1" dirty="0">
+              <a:rPr lang="en-US" sz="1060" b="1" dirty="0">
                 <a:solidFill>
                   <a:srgbClr val="0B1F3A"/>
                 </a:solidFill>
@@ -7913,7 +7913,7 @@
               </a:rPr>
               <a:t>Tham số trong</a:t>
             </a:r>
-            <a:endParaRPr lang="en-US" sz="990" dirty="0"/>
+            <a:endParaRPr lang="en-US" sz="1060" dirty="0"/>
           </a:p>
           <a:p>
             <a:pPr algn="ctr" indent="0" marL="0">
@@ -7923,7 +7923,7 @@
               <a:buNone/>
             </a:pPr>
             <a:r>
-              <a:rPr lang="en-US" sz="850" dirty="0">
+              <a:rPr lang="en-US" sz="910" dirty="0">
                 <a:solidFill>
                   <a:srgbClr val="007F72"/>
                 </a:solidFill>
@@ -7933,7 +7933,7 @@
               </a:rPr>
               <a:t>內參</a:t>
             </a:r>
-            <a:endParaRPr lang="en-US" sz="990" dirty="0"/>
+            <a:endParaRPr lang="en-US" sz="1060" dirty="0"/>
           </a:p>
         </p:txBody>
       </p:sp>
@@ -7945,8 +7945,8 @@
         </p:nvSpPr>
         <p:spPr>
           <a:xfrm>
-            <a:off x="1772740" y="1991922"/>
-            <a:ext cx="1615041" cy="831335"/>
+            <a:off x="1591310" y="2092816"/>
+            <a:ext cx="1719717" cy="885216"/>
           </a:xfrm>
           <a:prstGeom prst="rect">
             <a:avLst/>
@@ -7965,7 +7965,7 @@
               <a:buNone/>
             </a:pPr>
             <a:r>
-              <a:rPr lang="en-US" sz="820" dirty="0">
+              <a:rPr lang="en-US" sz="870" dirty="0">
                 <a:solidFill>
                   <a:srgbClr val="5F7183"/>
                 </a:solidFill>
@@ -7975,7 +7975,7 @@
               </a:rPr>
               <a:t>Ống kính méo bao nhiêu</a:t>
             </a:r>
-            <a:endParaRPr lang="en-US" sz="820" dirty="0"/>
+            <a:endParaRPr lang="en-US" sz="870" dirty="0"/>
           </a:p>
           <a:p>
             <a:pPr algn="ctr" indent="0" marL="0">
@@ -7985,7 +7985,7 @@
               <a:buNone/>
             </a:pPr>
             <a:r>
-              <a:rPr lang="en-US" sz="820" dirty="0">
+              <a:rPr lang="en-US" sz="870" dirty="0">
                 <a:solidFill>
                   <a:srgbClr val="5F7183"/>
                 </a:solidFill>
@@ -7995,7 +7995,7 @@
               </a:rPr>
               <a:t>Tâm ảnh ở đâu</a:t>
             </a:r>
-            <a:endParaRPr lang="en-US" sz="820" dirty="0"/>
+            <a:endParaRPr lang="en-US" sz="870" dirty="0"/>
           </a:p>
           <a:p>
             <a:pPr algn="ctr" indent="0" marL="0">
@@ -8005,7 +8005,7 @@
               <a:buNone/>
             </a:pPr>
             <a:r>
-              <a:rPr lang="en-US" sz="750" dirty="0">
+              <a:rPr lang="en-US" sz="790" dirty="0">
                 <a:solidFill>
                   <a:srgbClr val="5F7183"/>
                 </a:solidFill>
@@ -8015,7 +8015,7 @@
               </a:rPr>
               <a:t>鏡頭扭曲多少</a:t>
             </a:r>
-            <a:endParaRPr lang="en-US" sz="820" dirty="0"/>
+            <a:endParaRPr lang="en-US" sz="870" dirty="0"/>
           </a:p>
           <a:p>
             <a:pPr algn="ctr" indent="0" marL="0">
@@ -8025,7 +8025,7 @@
               <a:buNone/>
             </a:pPr>
             <a:r>
-              <a:rPr lang="en-US" sz="750" dirty="0">
+              <a:rPr lang="en-US" sz="790" dirty="0">
                 <a:solidFill>
                   <a:srgbClr val="5F7183"/>
                 </a:solidFill>
@@ -8035,7 +8035,7 @@
               </a:rPr>
               <a:t>畫面中心在哪</a:t>
             </a:r>
-            <a:endParaRPr lang="en-US" sz="820" dirty="0"/>
+            <a:endParaRPr lang="en-US" sz="870" dirty="0"/>
           </a:p>
         </p:txBody>
       </p:sp>
@@ -8047,8 +8047,8 @@
         </p:nvSpPr>
         <p:spPr>
           <a:xfrm>
-            <a:off x="3478708" y="1615223"/>
-            <a:ext cx="194844" cy="259792"/>
+            <a:off x="3407848" y="1691702"/>
+            <a:ext cx="207473" cy="276630"/>
           </a:xfrm>
           <a:prstGeom prst="rect">
             <a:avLst/>
@@ -8064,7 +8064,7 @@
               <a:buNone/>
             </a:pPr>
             <a:r>
-              <a:rPr lang="en-US" sz="1350" b="1" dirty="0">
+              <a:rPr lang="en-US" sz="1440" b="1" dirty="0">
                 <a:solidFill>
                   <a:srgbClr val="00A896"/>
                 </a:solidFill>
@@ -8074,7 +8074,7 @@
               </a:rPr>
               <a:t>→</a:t>
             </a:r>
-            <a:endParaRPr lang="en-US" sz="1350" dirty="0"/>
+            <a:endParaRPr lang="en-US" sz="1440" dirty="0"/>
           </a:p>
         </p:txBody>
       </p:sp>
@@ -8086,8 +8086,8 @@
         </p:nvSpPr>
         <p:spPr>
           <a:xfrm>
-            <a:off x="3673552" y="965743"/>
-            <a:ext cx="1796896" cy="1935452"/>
+            <a:off x="3615321" y="1000127"/>
+            <a:ext cx="1913359" cy="2060895"/>
           </a:xfrm>
           <a:prstGeom prst="roundRect">
             <a:avLst>
@@ -8120,8 +8120,8 @@
         </p:nvSpPr>
         <p:spPr>
           <a:xfrm>
-            <a:off x="4403135" y="1095639"/>
-            <a:ext cx="337730" cy="337730"/>
+            <a:off x="4392190" y="1138442"/>
+            <a:ext cx="359619" cy="359619"/>
           </a:xfrm>
           <a:prstGeom prst="ellipse">
             <a:avLst/>
@@ -8140,8 +8140,8 @@
         </p:nvSpPr>
         <p:spPr>
           <a:xfrm>
-            <a:off x="4403135" y="1167082"/>
-            <a:ext cx="337730" cy="194844"/>
+            <a:off x="4392190" y="1214515"/>
+            <a:ext cx="359619" cy="207473"/>
           </a:xfrm>
           <a:prstGeom prst="rect">
             <a:avLst/>
@@ -8157,7 +8157,7 @@
               <a:buNone/>
             </a:pPr>
             <a:r>
-              <a:rPr lang="en-US" sz="1070" b="1" dirty="0">
+              <a:rPr lang="en-US" sz="1130" b="1" dirty="0">
                 <a:solidFill>
                   <a:srgbClr val="FFFFFF"/>
                 </a:solidFill>
@@ -8167,7 +8167,7 @@
               </a:rPr>
               <a:t>2</a:t>
             </a:r>
-            <a:endParaRPr lang="en-US" sz="1070" dirty="0"/>
+            <a:endParaRPr lang="en-US" sz="1130" dirty="0"/>
           </a:p>
         </p:txBody>
       </p:sp>
@@ -8179,8 +8179,8 @@
         </p:nvSpPr>
         <p:spPr>
           <a:xfrm>
-            <a:off x="3764479" y="1498317"/>
-            <a:ext cx="1615041" cy="467626"/>
+            <a:off x="3712141" y="1567218"/>
+            <a:ext cx="1719717" cy="497934"/>
           </a:xfrm>
           <a:prstGeom prst="rect">
             <a:avLst/>
@@ -8199,7 +8199,7 @@
               <a:buNone/>
             </a:pPr>
             <a:r>
-              <a:rPr lang="en-US" sz="990" b="1" dirty="0">
+              <a:rPr lang="en-US" sz="1060" b="1" dirty="0">
                 <a:solidFill>
                   <a:srgbClr val="0B1F3A"/>
                 </a:solidFill>
@@ -8209,7 +8209,7 @@
               </a:rPr>
               <a:t>Tham số ngoài</a:t>
             </a:r>
-            <a:endParaRPr lang="en-US" sz="990" dirty="0"/>
+            <a:endParaRPr lang="en-US" sz="1060" dirty="0"/>
           </a:p>
           <a:p>
             <a:pPr algn="ctr" indent="0" marL="0">
@@ -8219,7 +8219,7 @@
               <a:buNone/>
             </a:pPr>
             <a:r>
-              <a:rPr lang="en-US" sz="850" dirty="0">
+              <a:rPr lang="en-US" sz="910" dirty="0">
                 <a:solidFill>
                   <a:srgbClr val="007F72"/>
                 </a:solidFill>
@@ -8229,7 +8229,7 @@
               </a:rPr>
               <a:t>外參</a:t>
             </a:r>
-            <a:endParaRPr lang="en-US" sz="990" dirty="0"/>
+            <a:endParaRPr lang="en-US" sz="1060" dirty="0"/>
           </a:p>
         </p:txBody>
       </p:sp>
@@ -8241,8 +8241,8 @@
         </p:nvSpPr>
         <p:spPr>
           <a:xfrm>
-            <a:off x="3764479" y="1991922"/>
-            <a:ext cx="1615041" cy="831335"/>
+            <a:off x="3712141" y="2092816"/>
+            <a:ext cx="1719717" cy="885216"/>
           </a:xfrm>
           <a:prstGeom prst="rect">
             <a:avLst/>
@@ -8261,7 +8261,7 @@
               <a:buNone/>
             </a:pPr>
             <a:r>
-              <a:rPr lang="en-US" sz="820" dirty="0">
+              <a:rPr lang="en-US" sz="870" dirty="0">
                 <a:solidFill>
                   <a:srgbClr val="5F7183"/>
                 </a:solidFill>
@@ -8271,7 +8271,7 @@
               </a:rPr>
               <a:t>Camera và lidar</a:t>
             </a:r>
-            <a:endParaRPr lang="en-US" sz="820" dirty="0"/>
+            <a:endParaRPr lang="en-US" sz="870" dirty="0"/>
           </a:p>
           <a:p>
             <a:pPr algn="ctr" indent="0" marL="0">
@@ -8281,7 +8281,7 @@
               <a:buNone/>
             </a:pPr>
             <a:r>
-              <a:rPr lang="en-US" sz="820" dirty="0">
+              <a:rPr lang="en-US" sz="870" dirty="0">
                 <a:solidFill>
                   <a:srgbClr val="5F7183"/>
                 </a:solidFill>
@@ -8291,7 +8291,7 @@
               </a:rPr>
               <a:t>cách nhau bao xa, lệch mấy độ</a:t>
             </a:r>
-            <a:endParaRPr lang="en-US" sz="820" dirty="0"/>
+            <a:endParaRPr lang="en-US" sz="870" dirty="0"/>
           </a:p>
           <a:p>
             <a:pPr algn="ctr" indent="0" marL="0">
@@ -8301,7 +8301,7 @@
               <a:buNone/>
             </a:pPr>
             <a:r>
-              <a:rPr lang="en-US" sz="750" dirty="0">
+              <a:rPr lang="en-US" sz="790" dirty="0">
                 <a:solidFill>
                   <a:srgbClr val="5F7183"/>
                 </a:solidFill>
@@ -8311,7 +8311,7 @@
               </a:rPr>
               <a:t>相機和光達</a:t>
             </a:r>
-            <a:endParaRPr lang="en-US" sz="820" dirty="0"/>
+            <a:endParaRPr lang="en-US" sz="870" dirty="0"/>
           </a:p>
           <a:p>
             <a:pPr algn="ctr" indent="0" marL="0">
@@ -8321,7 +8321,7 @@
               <a:buNone/>
             </a:pPr>
             <a:r>
-              <a:rPr lang="en-US" sz="750" dirty="0">
+              <a:rPr lang="en-US" sz="790" dirty="0">
                 <a:solidFill>
                   <a:srgbClr val="5F7183"/>
                 </a:solidFill>
@@ -8331,7 +8331,7 @@
               </a:rPr>
               <a:t>相距多遠、差幾度</a:t>
             </a:r>
-            <a:endParaRPr lang="en-US" sz="820" dirty="0"/>
+            <a:endParaRPr lang="en-US" sz="870" dirty="0"/>
           </a:p>
         </p:txBody>
       </p:sp>
@@ -8343,8 +8343,8 @@
         </p:nvSpPr>
         <p:spPr>
           <a:xfrm>
-            <a:off x="5470448" y="1615223"/>
-            <a:ext cx="194844" cy="259792"/>
+            <a:off x="5528679" y="1691702"/>
+            <a:ext cx="207473" cy="276630"/>
           </a:xfrm>
           <a:prstGeom prst="rect">
             <a:avLst/>
@@ -8360,7 +8360,7 @@
               <a:buNone/>
             </a:pPr>
             <a:r>
-              <a:rPr lang="en-US" sz="1350" b="1" dirty="0">
+              <a:rPr lang="en-US" sz="1440" b="1" dirty="0">
                 <a:solidFill>
                   <a:srgbClr val="00A896"/>
                 </a:solidFill>
@@ -8370,7 +8370,7 @@
               </a:rPr>
               <a:t>→</a:t>
             </a:r>
-            <a:endParaRPr lang="en-US" sz="1350" dirty="0"/>
+            <a:endParaRPr lang="en-US" sz="1440" dirty="0"/>
           </a:p>
         </p:txBody>
       </p:sp>
@@ -8382,8 +8382,8 @@
         </p:nvSpPr>
         <p:spPr>
           <a:xfrm>
-            <a:off x="5665292" y="965743"/>
-            <a:ext cx="1796896" cy="1935452"/>
+            <a:off x="5736152" y="1000127"/>
+            <a:ext cx="1913359" cy="2060895"/>
           </a:xfrm>
           <a:prstGeom prst="roundRect">
             <a:avLst>
@@ -8416,8 +8416,8 @@
         </p:nvSpPr>
         <p:spPr>
           <a:xfrm>
-            <a:off x="6394875" y="1095639"/>
-            <a:ext cx="337730" cy="337730"/>
+            <a:off x="6513022" y="1138442"/>
+            <a:ext cx="359619" cy="359619"/>
           </a:xfrm>
           <a:prstGeom prst="ellipse">
             <a:avLst/>
@@ -8436,8 +8436,8 @@
         </p:nvSpPr>
         <p:spPr>
           <a:xfrm>
-            <a:off x="6394875" y="1167082"/>
-            <a:ext cx="337730" cy="194844"/>
+            <a:off x="6513022" y="1214515"/>
+            <a:ext cx="359619" cy="207473"/>
           </a:xfrm>
           <a:prstGeom prst="rect">
             <a:avLst/>
@@ -8453,7 +8453,7 @@
               <a:buNone/>
             </a:pPr>
             <a:r>
-              <a:rPr lang="en-US" sz="1070" b="1" dirty="0">
+              <a:rPr lang="en-US" sz="1130" b="1" dirty="0">
                 <a:solidFill>
                   <a:srgbClr val="FFFFFF"/>
                 </a:solidFill>
@@ -8463,7 +8463,7 @@
               </a:rPr>
               <a:t>3</a:t>
             </a:r>
-            <a:endParaRPr lang="en-US" sz="1070" dirty="0"/>
+            <a:endParaRPr lang="en-US" sz="1130" dirty="0"/>
           </a:p>
         </p:txBody>
       </p:sp>
@@ -8475,8 +8475,8 @@
         </p:nvSpPr>
         <p:spPr>
           <a:xfrm>
-            <a:off x="5756219" y="1498317"/>
-            <a:ext cx="1615041" cy="467626"/>
+            <a:off x="5832972" y="1567218"/>
+            <a:ext cx="1719717" cy="497934"/>
           </a:xfrm>
           <a:prstGeom prst="rect">
             <a:avLst/>
@@ -8495,7 +8495,7 @@
               <a:buNone/>
             </a:pPr>
             <a:r>
-              <a:rPr lang="en-US" sz="990" b="1" dirty="0">
+              <a:rPr lang="en-US" sz="1060" b="1" dirty="0">
                 <a:solidFill>
                   <a:srgbClr val="0B1F3A"/>
                 </a:solidFill>
@@ -8505,7 +8505,7 @@
               </a:rPr>
               <a:t>Sai 1°</a:t>
             </a:r>
-            <a:endParaRPr lang="en-US" sz="990" dirty="0"/>
+            <a:endParaRPr lang="en-US" sz="1060" dirty="0"/>
           </a:p>
           <a:p>
             <a:pPr algn="ctr" indent="0" marL="0">
@@ -8515,7 +8515,7 @@
               <a:buNone/>
             </a:pPr>
             <a:r>
-              <a:rPr lang="en-US" sz="850" dirty="0">
+              <a:rPr lang="en-US" sz="910" dirty="0">
                 <a:solidFill>
                   <a:srgbClr val="007F72"/>
                 </a:solidFill>
@@ -8525,7 +8525,7 @@
               </a:rPr>
               <a:t>差 1 度</a:t>
             </a:r>
-            <a:endParaRPr lang="en-US" sz="990" dirty="0"/>
+            <a:endParaRPr lang="en-US" sz="1060" dirty="0"/>
           </a:p>
         </p:txBody>
       </p:sp>
@@ -8537,8 +8537,8 @@
         </p:nvSpPr>
         <p:spPr>
           <a:xfrm>
-            <a:off x="5756219" y="1991922"/>
-            <a:ext cx="1615041" cy="831335"/>
+            <a:off x="5832972" y="2092816"/>
+            <a:ext cx="1719717" cy="885216"/>
           </a:xfrm>
           <a:prstGeom prst="rect">
             <a:avLst/>
@@ -8557,7 +8557,7 @@
               <a:buNone/>
             </a:pPr>
             <a:r>
-              <a:rPr lang="en-US" sz="820" dirty="0">
+              <a:rPr lang="en-US" sz="870" dirty="0">
                 <a:solidFill>
                   <a:srgbClr val="5F7183"/>
                 </a:solidFill>
@@ -8567,7 +8567,7 @@
               </a:rPr>
               <a:t>Ở 50 m lệch gần 0,9 m</a:t>
             </a:r>
-            <a:endParaRPr lang="en-US" sz="820" dirty="0"/>
+            <a:endParaRPr lang="en-US" sz="870" dirty="0"/>
           </a:p>
           <a:p>
             <a:pPr algn="ctr" indent="0" marL="0">
@@ -8577,7 +8577,7 @@
               <a:buNone/>
             </a:pPr>
             <a:r>
-              <a:rPr lang="en-US" sz="820" dirty="0">
+              <a:rPr lang="en-US" sz="870" dirty="0">
                 <a:solidFill>
                   <a:srgbClr val="5F7183"/>
                 </a:solidFill>
@@ -8587,7 +8587,7 @@
               </a:rPr>
               <a:t>Đủ để nhầm làn</a:t>
             </a:r>
-            <a:endParaRPr lang="en-US" sz="820" dirty="0"/>
+            <a:endParaRPr lang="en-US" sz="870" dirty="0"/>
           </a:p>
           <a:p>
             <a:pPr algn="ctr" indent="0" marL="0">
@@ -8597,7 +8597,7 @@
               <a:buNone/>
             </a:pPr>
             <a:r>
-              <a:rPr lang="en-US" sz="750" dirty="0">
+              <a:rPr lang="en-US" sz="790" dirty="0">
                 <a:solidFill>
                   <a:srgbClr val="5F7183"/>
                 </a:solidFill>
@@ -8607,7 +8607,7 @@
               </a:rPr>
               <a:t>50 公尺處差 0.9 公尺</a:t>
             </a:r>
-            <a:endParaRPr lang="en-US" sz="820" dirty="0"/>
+            <a:endParaRPr lang="en-US" sz="870" dirty="0"/>
           </a:p>
           <a:p>
             <a:pPr algn="ctr" indent="0" marL="0">
@@ -8617,7 +8617,7 @@
               <a:buNone/>
             </a:pPr>
             <a:r>
-              <a:rPr lang="en-US" sz="750" dirty="0">
+              <a:rPr lang="en-US" sz="790" dirty="0">
                 <a:solidFill>
                   <a:srgbClr val="5F7183"/>
                 </a:solidFill>
@@ -8627,7 +8627,7 @@
               </a:rPr>
               <a:t>足以搞錯車道</a:t>
             </a:r>
-            <a:endParaRPr lang="en-US" sz="820" dirty="0"/>
+            <a:endParaRPr lang="en-US" sz="870" dirty="0"/>
           </a:p>
         </p:txBody>
       </p:sp>
@@ -8639,8 +8639,8 @@
         </p:nvSpPr>
         <p:spPr>
           <a:xfrm>
-            <a:off x="1681812" y="3005111"/>
-            <a:ext cx="5780375" cy="402678"/>
+            <a:off x="1494490" y="3171673"/>
+            <a:ext cx="6155021" cy="428777"/>
           </a:xfrm>
           <a:prstGeom prst="rect">
             <a:avLst/>
@@ -8659,7 +8659,7 @@
               <a:buNone/>
             </a:pPr>
             <a:r>
-              <a:rPr lang="en-US" sz="890" b="1" dirty="0">
+              <a:rPr lang="en-US" sz="950" b="1" dirty="0">
                 <a:solidFill>
                   <a:srgbClr val="0B1F3A"/>
                 </a:solidFill>
@@ -8669,7 +8669,7 @@
               </a:rPr>
               <a:t>Rung, va chạm, thay kính chắn gió — đều làm lệch. Nên phải hiệu chuẩn lại định kỳ.</a:t>
             </a:r>
-            <a:endParaRPr lang="en-US" sz="890" dirty="0"/>
+            <a:endParaRPr lang="en-US" sz="950" dirty="0"/>
           </a:p>
           <a:p>
             <a:pPr indent="0" marL="0">
@@ -8679,7 +8679,7 @@
               <a:buNone/>
             </a:pPr>
             <a:r>
-              <a:rPr lang="en-US" sz="820" dirty="0">
+              <a:rPr lang="en-US" sz="870" dirty="0">
                 <a:solidFill>
                   <a:srgbClr val="007F72"/>
                 </a:solidFill>
@@ -8689,7 +8689,7 @@
               </a:rPr>
               <a:t>震動、碰撞、換擋風玻璃，都會讓它跑掉。所以要定期重新標定。</a:t>
             </a:r>
-            <a:endParaRPr lang="en-US" sz="890" dirty="0"/>
+            <a:endParaRPr lang="en-US" sz="950" dirty="0"/>
           </a:p>
         </p:txBody>
       </p:sp>
@@ -8709,8 +8709,8 @@
         </p:blipFill>
         <p:spPr>
           <a:xfrm>
-            <a:off x="6663327" y="3338842"/>
-            <a:ext cx="779376" cy="172200"/>
+            <a:off x="7882128" y="109728"/>
+            <a:ext cx="1097280" cy="242439"/>
           </a:xfrm>
           <a:prstGeom prst="rect">
             <a:avLst/>
@@ -8725,8 +8725,8 @@
         </p:nvSpPr>
         <p:spPr>
           <a:xfrm>
-            <a:off x="1402536" y="3390800"/>
-            <a:ext cx="584532" cy="181855"/>
+            <a:off x="1197112" y="96821"/>
+            <a:ext cx="622418" cy="193641"/>
           </a:xfrm>
           <a:prstGeom prst="rect">
             <a:avLst/>
@@ -8742,7 +8742,7 @@
               <a:buNone/>
             </a:pPr>
             <a:r>
-              <a:rPr lang="en-US" sz="640" dirty="0">
+              <a:rPr lang="en-US" sz="680" dirty="0">
                 <a:solidFill>
                   <a:srgbClr val="5F7183"/>
                 </a:solidFill>
@@ -8752,7 +8752,7 @@
               </a:rPr>
               <a:t>12 / 14</a:t>
             </a:r>
-            <a:endParaRPr lang="en-US" sz="640" dirty="0"/>
+            <a:endParaRPr lang="en-US" sz="680" dirty="0"/>
           </a:p>
         </p:txBody>
       </p:sp>
@@ -8764,8 +8764,8 @@
         </p:nvSpPr>
         <p:spPr>
           <a:xfrm>
-            <a:off x="2006553" y="3390800"/>
-            <a:ext cx="1428857" cy="181855"/>
+            <a:off x="1840277" y="96821"/>
+            <a:ext cx="1521466" cy="193641"/>
           </a:xfrm>
           <a:prstGeom prst="rect">
             <a:avLst/>
@@ -8781,7 +8781,7 @@
               <a:buNone/>
             </a:pPr>
             <a:r>
-              <a:rPr lang="en-US" sz="640" dirty="0">
+              <a:rPr lang="en-US" sz="680" dirty="0">
                 <a:solidFill>
                   <a:srgbClr val="5F7183"/>
                 </a:solidFill>
@@ -8791,7 +8791,7 @@
               </a:rPr>
               <a:t>Tiết 2 · 第 2 節</a:t>
             </a:r>
-            <a:endParaRPr lang="en-US" sz="640" dirty="0"/>
+            <a:endParaRPr lang="en-US" sz="680" dirty="0"/>
           </a:p>
         </p:txBody>
       </p:sp>
@@ -8814,8 +8814,8 @@
       </p:nvGrpSpPr>
       <p:grpSpPr>
         <a:xfrm>
-          <a:off x="0" y="0"/>
-          <a:ext cx="0" cy="0"/>
+          <a:off x="942514" y="0"/>
+          <a:ext cx="1" cy="1"/>
           <a:chOff x="0" y="0"/>
           <a:chExt cx="0" cy="0"/>
         </a:xfrm>
@@ -8828,8 +8828,8 @@
         </p:nvSpPr>
         <p:spPr>
           <a:xfrm>
-            <a:off x="1681812" y="325253"/>
-            <a:ext cx="5780375" cy="194844"/>
+            <a:off x="1341758" y="333913"/>
+            <a:ext cx="6460485" cy="217769"/>
           </a:xfrm>
           <a:prstGeom prst="rect">
             <a:avLst/>
@@ -8845,7 +8845,7 @@
               <a:buNone/>
             </a:pPr>
             <a:r>
-              <a:rPr lang="en-US" sz="890" b="1" dirty="0">
+              <a:rPr lang="en-US" sz="990" b="1" dirty="0">
                 <a:solidFill>
                   <a:srgbClr val="007F72"/>
                 </a:solidFill>
@@ -8855,7 +8855,7 @@
               </a:rPr>
               <a:t>Đồng bộ · 時間同步</a:t>
             </a:r>
-            <a:endParaRPr lang="en-US" sz="890" dirty="0"/>
+            <a:endParaRPr lang="en-US" sz="990" dirty="0"/>
           </a:p>
         </p:txBody>
       </p:sp>
@@ -8867,8 +8867,8 @@
         </p:nvSpPr>
         <p:spPr>
           <a:xfrm>
-            <a:off x="1681812" y="809116"/>
-            <a:ext cx="1753597" cy="1786071"/>
+            <a:off x="1341758" y="874706"/>
+            <a:ext cx="1959922" cy="1996217"/>
           </a:xfrm>
           <a:prstGeom prst="roundRect">
             <a:avLst>
@@ -8894,8 +8894,8 @@
         </p:nvSpPr>
         <p:spPr>
           <a:xfrm>
-            <a:off x="2385719" y="1591675"/>
-            <a:ext cx="660132" cy="536601"/>
+            <a:off x="2128485" y="1749340"/>
+            <a:ext cx="737802" cy="599736"/>
           </a:xfrm>
           <a:prstGeom prst="roundRect">
             <a:avLst>
@@ -8921,8 +8921,8 @@
         </p:nvSpPr>
         <p:spPr>
           <a:xfrm>
-            <a:off x="2275697" y="1481198"/>
-            <a:ext cx="660132" cy="536601"/>
+            <a:off x="2005518" y="1625864"/>
+            <a:ext cx="737802" cy="599736"/>
           </a:xfrm>
           <a:prstGeom prst="roundRect">
             <a:avLst>
@@ -8948,8 +8948,8 @@
         </p:nvSpPr>
         <p:spPr>
           <a:xfrm>
-            <a:off x="2165675" y="1370721"/>
-            <a:ext cx="660132" cy="536601"/>
+            <a:off x="1882551" y="1502390"/>
+            <a:ext cx="737802" cy="599736"/>
           </a:xfrm>
           <a:prstGeom prst="roundRect">
             <a:avLst>
@@ -8975,8 +8975,8 @@
         </p:nvSpPr>
         <p:spPr>
           <a:xfrm>
-            <a:off x="2055653" y="1260245"/>
-            <a:ext cx="660132" cy="536601"/>
+            <a:off x="1759584" y="1378914"/>
+            <a:ext cx="737802" cy="599736"/>
           </a:xfrm>
           <a:prstGeom prst="roundRect">
             <a:avLst>
@@ -9002,8 +9002,8 @@
         </p:nvSpPr>
         <p:spPr>
           <a:xfrm>
-            <a:off x="1772740" y="2080928"/>
-            <a:ext cx="1571743" cy="284083"/>
+            <a:off x="1443383" y="2296158"/>
+            <a:ext cx="1756671" cy="317508"/>
           </a:xfrm>
           <a:prstGeom prst="rect">
             <a:avLst/>
@@ -9019,7 +9019,7 @@
               <a:buNone/>
             </a:pPr>
             <a:r>
-              <a:rPr lang="en-US" sz="780" b="1" dirty="0">
+              <a:rPr lang="en-US" sz="870" b="1" dirty="0">
                 <a:solidFill>
                   <a:srgbClr val="8A5A00"/>
                 </a:solidFill>
@@ -9029,7 +9029,7 @@
               </a:rPr>
               <a:t>× 10 000</a:t>
             </a:r>
-            <a:endParaRPr lang="en-US" sz="780" dirty="0"/>
+            <a:endParaRPr lang="en-US" sz="870" dirty="0"/>
           </a:p>
         </p:txBody>
       </p:sp>
@@ -9041,8 +9041,8 @@
         </p:nvSpPr>
         <p:spPr>
           <a:xfrm>
-            <a:off x="3760150" y="963355"/>
-            <a:ext cx="3702038" cy="714266"/>
+            <a:off x="3664629" y="1047093"/>
+            <a:ext cx="4137614" cy="798305"/>
           </a:xfrm>
           <a:prstGeom prst="rect">
             <a:avLst/>
@@ -9061,7 +9061,7 @@
               <a:buNone/>
             </a:pPr>
             <a:r>
-              <a:rPr lang="en-US" sz="1630" b="1" dirty="0">
+              <a:rPr lang="en-US" sz="1830" b="1" dirty="0">
                 <a:solidFill>
                   <a:srgbClr val="0B1F3A"/>
                 </a:solidFill>
@@ -9071,7 +9071,7 @@
               </a:rPr>
               <a:t>Đồng bộ thời gian: hai con mắt phải nhìn cùng một khoảnh khắc</a:t>
             </a:r>
-            <a:endParaRPr lang="en-US" sz="1630" dirty="0"/>
+            <a:endParaRPr lang="en-US" sz="1830" dirty="0"/>
           </a:p>
           <a:p>
             <a:pPr indent="0" marL="0">
@@ -9081,7 +9081,7 @@
               <a:buNone/>
             </a:pPr>
             <a:r>
-              <a:rPr lang="en-US" sz="990" dirty="0">
+              <a:rPr lang="en-US" sz="1110" dirty="0">
                 <a:solidFill>
                   <a:srgbClr val="007F72"/>
                 </a:solidFill>
@@ -9091,7 +9091,7 @@
               </a:rPr>
               <a:t>時間同步：兩隻眼睛要看的是同一個瞬間</a:t>
             </a:r>
-            <a:endParaRPr lang="en-US" sz="1630" dirty="0"/>
+            <a:endParaRPr lang="en-US" sz="1830" dirty="0"/>
           </a:p>
         </p:txBody>
       </p:sp>
@@ -9103,8 +9103,8 @@
         </p:nvSpPr>
         <p:spPr>
           <a:xfrm>
-            <a:off x="3760150" y="1742570"/>
-            <a:ext cx="3702038" cy="763326"/>
+            <a:off x="3664629" y="1917989"/>
+            <a:ext cx="4137614" cy="853137"/>
           </a:xfrm>
           <a:prstGeom prst="rect">
             <a:avLst/>
@@ -9123,7 +9123,7 @@
               <a:buNone/>
             </a:pPr>
             <a:r>
-              <a:rPr lang="en-US" sz="890" dirty="0">
+              <a:rPr lang="en-US" sz="990" dirty="0">
                 <a:solidFill>
                   <a:srgbClr val="5F7183"/>
                 </a:solidFill>
@@ -9133,7 +9133,7 @@
               </a:rPr>
               <a:t>Lidar 10 Hz, camera 60 fps. Nếu không đóng dấu thời gian chung, khung ảnh và vòng quét có thể lệch nhau tới 50 ms — ở 40 km/h là hơn nửa mét.</a:t>
             </a:r>
-            <a:endParaRPr lang="en-US" sz="890" dirty="0"/>
+            <a:endParaRPr lang="en-US" sz="990" dirty="0"/>
           </a:p>
           <a:p>
             <a:pPr indent="0" marL="0">
@@ -9143,7 +9143,7 @@
               <a:buNone/>
             </a:pPr>
             <a:r>
-              <a:rPr lang="en-US" sz="820" dirty="0">
+              <a:rPr lang="en-US" sz="910" dirty="0">
                 <a:solidFill>
                   <a:srgbClr val="5F7183"/>
                 </a:solidFill>
@@ -9153,7 +9153,7 @@
               </a:rPr>
               <a:t>光達 10 Hz、相機 60 fps。如果沒有共同的時間戳，一張畫面和一圈掃描可能差到 50 毫秒——時速 40 就是超過半公尺。</a:t>
             </a:r>
-            <a:endParaRPr lang="en-US" sz="890" dirty="0"/>
+            <a:endParaRPr lang="en-US" sz="990" dirty="0"/>
           </a:p>
         </p:txBody>
       </p:sp>
@@ -9165,8 +9165,8 @@
         </p:nvSpPr>
         <p:spPr>
           <a:xfrm>
-            <a:off x="1681812" y="2806268"/>
-            <a:ext cx="5780375" cy="441647"/>
+            <a:off x="1341758" y="3106840"/>
+            <a:ext cx="6460485" cy="493610"/>
           </a:xfrm>
           <a:prstGeom prst="roundRect">
             <a:avLst>
@@ -9192,8 +9192,8 @@
         </p:nvSpPr>
         <p:spPr>
           <a:xfrm>
-            <a:off x="1811708" y="2858226"/>
-            <a:ext cx="5520583" cy="350719"/>
+            <a:off x="1486937" y="3164912"/>
+            <a:ext cx="6170126" cy="391984"/>
           </a:xfrm>
           <a:prstGeom prst="rect">
             <a:avLst/>
@@ -9212,7 +9212,7 @@
               <a:buNone/>
             </a:pPr>
             <a:r>
-              <a:rPr lang="en-US" sz="890" b="1" dirty="0">
+              <a:rPr lang="en-US" sz="990" b="1" dirty="0">
                 <a:solidFill>
                   <a:srgbClr val="7A4E00"/>
                 </a:solidFill>
@@ -9222,7 +9222,7 @@
               </a:rPr>
               <a:t>OS1 có dòng «multi-sensor phase lock» chính là để giải chuyện này.</a:t>
             </a:r>
-            <a:endParaRPr lang="en-US" sz="890" dirty="0"/>
+            <a:endParaRPr lang="en-US" sz="990" dirty="0"/>
           </a:p>
           <a:p>
             <a:pPr indent="0" marL="0">
@@ -9232,7 +9232,7 @@
               <a:buNone/>
             </a:pPr>
             <a:r>
-              <a:rPr lang="en-US" sz="820" dirty="0">
+              <a:rPr lang="en-US" sz="910" dirty="0">
                 <a:solidFill>
                   <a:srgbClr val="7A4E00"/>
                 </a:solidFill>
@@ -9242,7 +9242,7 @@
               </a:rPr>
               <a:t>OS1 規格表上那行 multi-sensor phase lock，就是在處理這件事。</a:t>
             </a:r>
-            <a:endParaRPr lang="en-US" sz="890" dirty="0"/>
+            <a:endParaRPr lang="en-US" sz="990" dirty="0"/>
           </a:p>
         </p:txBody>
       </p:sp>
@@ -9262,8 +9262,8 @@
         </p:blipFill>
         <p:spPr>
           <a:xfrm>
-            <a:off x="6663327" y="3338842"/>
-            <a:ext cx="779376" cy="172200"/>
+            <a:off x="7882128" y="109728"/>
+            <a:ext cx="1097280" cy="242439"/>
           </a:xfrm>
           <a:prstGeom prst="rect">
             <a:avLst/>
@@ -9278,8 +9278,8 @@
         </p:nvSpPr>
         <p:spPr>
           <a:xfrm>
-            <a:off x="1402536" y="3390800"/>
-            <a:ext cx="584532" cy="181855"/>
+            <a:off x="1029622" y="101626"/>
+            <a:ext cx="653307" cy="203251"/>
           </a:xfrm>
           <a:prstGeom prst="rect">
             <a:avLst/>
@@ -9295,7 +9295,7 @@
               <a:buNone/>
             </a:pPr>
             <a:r>
-              <a:rPr lang="en-US" sz="640" dirty="0">
+              <a:rPr lang="en-US" sz="710" dirty="0">
                 <a:solidFill>
                   <a:srgbClr val="5F7183"/>
                 </a:solidFill>
@@ -9305,7 +9305,7 @@
               </a:rPr>
               <a:t>13 / 14</a:t>
             </a:r>
-            <a:endParaRPr lang="en-US" sz="640" dirty="0"/>
+            <a:endParaRPr lang="en-US" sz="710" dirty="0"/>
           </a:p>
         </p:txBody>
       </p:sp>
@@ -9317,8 +9317,8 @@
         </p:nvSpPr>
         <p:spPr>
           <a:xfrm>
-            <a:off x="2006553" y="3390800"/>
-            <a:ext cx="1428857" cy="181855"/>
+            <a:off x="1704706" y="101626"/>
+            <a:ext cx="1596974" cy="203251"/>
           </a:xfrm>
           <a:prstGeom prst="rect">
             <a:avLst/>
@@ -9334,7 +9334,7 @@
               <a:buNone/>
             </a:pPr>
             <a:r>
-              <a:rPr lang="en-US" sz="640" dirty="0">
+              <a:rPr lang="en-US" sz="710" dirty="0">
                 <a:solidFill>
                   <a:srgbClr val="5F7183"/>
                 </a:solidFill>
@@ -9344,7 +9344,7 @@
               </a:rPr>
               <a:t>Tiết 2 · 第 2 節</a:t>
             </a:r>
-            <a:endParaRPr lang="en-US" sz="640" dirty="0"/>
+            <a:endParaRPr lang="en-US" sz="710" dirty="0"/>
           </a:p>
         </p:txBody>
       </p:sp>
@@ -9374,8 +9374,8 @@
       </p:nvGrpSpPr>
       <p:grpSpPr>
         <a:xfrm>
-          <a:off x="0" y="0"/>
-          <a:ext cx="0" cy="0"/>
+          <a:off x="898071" y="0"/>
+          <a:ext cx="1" cy="1"/>
           <a:chOff x="0" y="0"/>
           <a:chExt cx="0" cy="0"/>
         </a:xfrm>
@@ -9388,8 +9388,8 @@
         </p:nvSpPr>
         <p:spPr>
           <a:xfrm>
-            <a:off x="6130753" y="-947729"/>
-            <a:ext cx="2987610" cy="2987610"/>
+            <a:off x="6335486" y="-1102179"/>
+            <a:ext cx="3380014" cy="3380014"/>
           </a:xfrm>
           <a:prstGeom prst="ellipse">
             <a:avLst/>
@@ -9413,8 +9413,8 @@
         </p:nvSpPr>
         <p:spPr>
           <a:xfrm>
-            <a:off x="7104973" y="1520297"/>
-            <a:ext cx="1688649" cy="1688649"/>
+            <a:off x="7437664" y="1690007"/>
+            <a:ext cx="1910443" cy="1910443"/>
           </a:xfrm>
           <a:prstGeom prst="ellipse">
             <a:avLst/>
@@ -9435,8 +9435,8 @@
         </p:nvSpPr>
         <p:spPr>
           <a:xfrm>
-            <a:off x="1681812" y="364222"/>
-            <a:ext cx="4806155" cy="194844"/>
+            <a:off x="1302204" y="382089"/>
+            <a:ext cx="5437414" cy="220436"/>
           </a:xfrm>
           <a:prstGeom prst="rect">
             <a:avLst/>
@@ -9452,7 +9452,7 @@
               <a:buNone/>
             </a:pPr>
             <a:r>
-              <a:rPr lang="en-US" sz="890" b="1" dirty="0">
+              <a:rPr lang="en-US" sz="1000" b="1" dirty="0">
                 <a:solidFill>
                   <a:srgbClr val="FFB020"/>
                 </a:solidFill>
@@ -9462,7 +9462,7 @@
               </a:rPr>
               <a:t>Tiết 2 · 第二節小結</a:t>
             </a:r>
-            <a:endParaRPr lang="en-US" sz="890" dirty="0"/>
+            <a:endParaRPr lang="en-US" sz="1000" dirty="0"/>
           </a:p>
         </p:txBody>
       </p:sp>
@@ -9474,8 +9474,8 @@
         </p:nvSpPr>
         <p:spPr>
           <a:xfrm>
-            <a:off x="1681812" y="611024"/>
-            <a:ext cx="5715427" cy="753397"/>
+            <a:off x="1302204" y="661307"/>
+            <a:ext cx="6466114" cy="852351"/>
           </a:xfrm>
           <a:prstGeom prst="rect">
             <a:avLst/>
@@ -9494,7 +9494,7 @@
               <a:buNone/>
             </a:pPr>
             <a:r>
-              <a:rPr lang="en-US" sz="1780" b="1" dirty="0">
+              <a:rPr lang="en-US" sz="2010" b="1" dirty="0">
                 <a:solidFill>
                   <a:srgbClr val="FFFFFF"/>
                 </a:solidFill>
@@ -9504,7 +9504,7 @@
               </a:rPr>
               <a:t>Mang ba câu này lên máy</a:t>
             </a:r>
-            <a:endParaRPr lang="en-US" sz="1780" dirty="0"/>
+            <a:endParaRPr lang="en-US" sz="2010" dirty="0"/>
           </a:p>
           <a:p>
             <a:pPr indent="0" marL="0">
@@ -9514,7 +9514,7 @@
               <a:buNone/>
             </a:pPr>
             <a:r>
-              <a:rPr lang="en-US" sz="1070" dirty="0">
+              <a:rPr lang="en-US" sz="1210" dirty="0">
                 <a:solidFill>
                   <a:srgbClr val="AFC3D4"/>
                 </a:solidFill>
@@ -9524,7 +9524,7 @@
               </a:rPr>
               <a:t>帶三句話上機</a:t>
             </a:r>
-            <a:endParaRPr lang="en-US" sz="1780" dirty="0"/>
+            <a:endParaRPr lang="en-US" sz="2010" dirty="0"/>
           </a:p>
         </p:txBody>
       </p:sp>
@@ -9536,8 +9536,8 @@
         </p:nvSpPr>
         <p:spPr>
           <a:xfrm>
-            <a:off x="1681812" y="1286484"/>
-            <a:ext cx="32474" cy="477815"/>
+            <a:off x="1302204" y="1425484"/>
+            <a:ext cx="36739" cy="540573"/>
           </a:xfrm>
           <a:prstGeom prst="rect">
             <a:avLst/>
@@ -9556,8 +9556,8 @@
         </p:nvSpPr>
         <p:spPr>
           <a:xfrm>
-            <a:off x="1837688" y="1260505"/>
-            <a:ext cx="5585531" cy="555752"/>
+            <a:off x="1478552" y="1396093"/>
+            <a:ext cx="6319157" cy="628747"/>
           </a:xfrm>
           <a:prstGeom prst="rect">
             <a:avLst/>
@@ -9576,7 +9576,7 @@
               <a:buNone/>
             </a:pPr>
             <a:r>
-              <a:rPr lang="en-US" sz="960" b="1" dirty="0">
+              <a:rPr lang="en-US" sz="1080" b="1" dirty="0">
                 <a:solidFill>
                   <a:srgbClr val="FFFFFF"/>
                 </a:solidFill>
@@ -9586,7 +9586,7 @@
               </a:rPr>
               <a:t>Camera: màn trập cuốn làm méo vật đang chạy; thiếu dải động thì hầm đen hoặc trời trắng; không có LFM thì đèn đỏ có thể chụp thành tắt.</a:t>
             </a:r>
-            <a:endParaRPr lang="en-US" sz="960" dirty="0"/>
+            <a:endParaRPr lang="en-US" sz="1080" dirty="0"/>
           </a:p>
           <a:p>
             <a:pPr indent="0" marL="0">
@@ -9596,7 +9596,7 @@
               <a:buNone/>
             </a:pPr>
             <a:r>
-              <a:rPr lang="en-US" sz="850" dirty="0">
+              <a:rPr lang="en-US" sz="960" dirty="0">
                 <a:solidFill>
                   <a:srgbClr val="AFC3D4"/>
                 </a:solidFill>
@@ -9606,7 +9606,7 @@
               </a:rPr>
               <a:t>相機：捲簾快門會扭曲移動中的東西；動態範圍不夠，隧道裡黑或隧道外白；沒有 LFM，紅燈可能拍成沒亮。</a:t>
             </a:r>
-            <a:endParaRPr lang="en-US" sz="960" dirty="0"/>
+            <a:endParaRPr lang="en-US" sz="1080" dirty="0"/>
           </a:p>
         </p:txBody>
       </p:sp>
@@ -9618,8 +9618,8 @@
         </p:nvSpPr>
         <p:spPr>
           <a:xfrm>
-            <a:off x="1681812" y="1907184"/>
-            <a:ext cx="32474" cy="477815"/>
+            <a:off x="1302204" y="2127710"/>
+            <a:ext cx="36739" cy="540573"/>
           </a:xfrm>
           <a:prstGeom prst="rect">
             <a:avLst/>
@@ -9638,8 +9638,8 @@
         </p:nvSpPr>
         <p:spPr>
           <a:xfrm>
-            <a:off x="1837688" y="1881205"/>
-            <a:ext cx="5585531" cy="555752"/>
+            <a:off x="1478552" y="2098319"/>
+            <a:ext cx="6319157" cy="628747"/>
           </a:xfrm>
           <a:prstGeom prst="rect">
             <a:avLst/>
@@ -9658,7 +9658,7 @@
               <a:buNone/>
             </a:pPr>
             <a:r>
-              <a:rPr lang="en-US" sz="960" b="1" dirty="0">
+              <a:rPr lang="en-US" sz="1080" b="1" dirty="0">
                 <a:solidFill>
                   <a:srgbClr val="FFFFFF"/>
                 </a:solidFill>
@@ -9668,7 +9668,7 @@
               </a:rPr>
               <a:t>Lidar: bước sóng quyết định được bắn mạnh tới đâu; Class 1 là ngưỡng bắt buộc; nhiều lần phản hồi là để sống sót trong mưa bụi.</a:t>
             </a:r>
-            <a:endParaRPr lang="en-US" sz="960" dirty="0"/>
+            <a:endParaRPr lang="en-US" sz="1080" dirty="0"/>
           </a:p>
           <a:p>
             <a:pPr indent="0" marL="0">
@@ -9678,7 +9678,7 @@
               <a:buNone/>
             </a:pPr>
             <a:r>
-              <a:rPr lang="en-US" sz="850" dirty="0">
+              <a:rPr lang="en-US" sz="960" dirty="0">
                 <a:solidFill>
                   <a:srgbClr val="AFC3D4"/>
                 </a:solidFill>
@@ -9688,7 +9688,7 @@
               </a:rPr>
               <a:t>光達：波長決定能打多強；Class 1 是門檻；多次回波是為了在雨和灰塵裡活下來。</a:t>
             </a:r>
-            <a:endParaRPr lang="en-US" sz="960" dirty="0"/>
+            <a:endParaRPr lang="en-US" sz="1080" dirty="0"/>
           </a:p>
         </p:txBody>
       </p:sp>
@@ -9700,8 +9700,8 @@
         </p:nvSpPr>
         <p:spPr>
           <a:xfrm>
-            <a:off x="1681812" y="2527885"/>
-            <a:ext cx="32474" cy="477815"/>
+            <a:off x="1302204" y="2829936"/>
+            <a:ext cx="36739" cy="540573"/>
           </a:xfrm>
           <a:prstGeom prst="rect">
             <a:avLst/>
@@ -9720,8 +9720,8 @@
         </p:nvSpPr>
         <p:spPr>
           <a:xfrm>
-            <a:off x="1837688" y="2501905"/>
-            <a:ext cx="5585531" cy="555752"/>
+            <a:off x="1478552" y="2800544"/>
+            <a:ext cx="6319157" cy="628747"/>
           </a:xfrm>
           <a:prstGeom prst="rect">
             <a:avLst/>
@@ -9740,7 +9740,7 @@
               <a:buNone/>
             </a:pPr>
             <a:r>
-              <a:rPr lang="en-US" sz="960" b="1" dirty="0">
+              <a:rPr lang="en-US" sz="1080" b="1" dirty="0">
                 <a:solidFill>
                   <a:srgbClr val="FFFFFF"/>
                 </a:solidFill>
@@ -9750,7 +9750,7 @@
               </a:rPr>
               <a:t>Hai cảm biến tốt chưa chắc ghép lại đúng: lệch 1° ở 50 m là gần 1 m; lệch 50 ms ở 40 km/h là hơn nửa mét.</a:t>
             </a:r>
-            <a:endParaRPr lang="en-US" sz="960" dirty="0"/>
+            <a:endParaRPr lang="en-US" sz="1080" dirty="0"/>
           </a:p>
           <a:p>
             <a:pPr indent="0" marL="0">
@@ -9760,7 +9760,7 @@
               <a:buNone/>
             </a:pPr>
             <a:r>
-              <a:rPr lang="en-US" sz="850" dirty="0">
+              <a:rPr lang="en-US" sz="960" dirty="0">
                 <a:solidFill>
                   <a:srgbClr val="AFC3D4"/>
                 </a:solidFill>
@@ -9770,7 +9770,7 @@
               </a:rPr>
               <a:t>兩顆好的感測器合起來不一定對：差 1 度，50 公尺就差近 1 公尺；差 50 毫秒，時速 40 就差半公尺以上。</a:t>
             </a:r>
-            <a:endParaRPr lang="en-US" sz="960" dirty="0"/>
+            <a:endParaRPr lang="en-US" sz="1080" dirty="0"/>
           </a:p>
         </p:txBody>
       </p:sp>
@@ -9782,8 +9782,8 @@
         </p:nvSpPr>
         <p:spPr>
           <a:xfrm>
-            <a:off x="1402536" y="3390800"/>
-            <a:ext cx="584532" cy="181855"/>
+            <a:off x="986246" y="102870"/>
+            <a:ext cx="661307" cy="205740"/>
           </a:xfrm>
           <a:prstGeom prst="rect">
             <a:avLst/>
@@ -9799,7 +9799,7 @@
               <a:buNone/>
             </a:pPr>
             <a:r>
-              <a:rPr lang="en-US" sz="640" dirty="0">
+              <a:rPr lang="en-US" sz="720" dirty="0">
                 <a:solidFill>
                   <a:srgbClr val="9FB3C8"/>
                 </a:solidFill>
@@ -9809,7 +9809,7 @@
               </a:rPr>
               <a:t>14 / 14</a:t>
             </a:r>
-            <a:endParaRPr lang="en-US" sz="640" dirty="0"/>
+            <a:endParaRPr lang="en-US" sz="720" dirty="0"/>
           </a:p>
         </p:txBody>
       </p:sp>
@@ -9821,8 +9821,8 @@
         </p:nvSpPr>
         <p:spPr>
           <a:xfrm>
-            <a:off x="2006553" y="3390800"/>
-            <a:ext cx="1428857" cy="181855"/>
+            <a:off x="1669596" y="102870"/>
+            <a:ext cx="1616529" cy="205740"/>
           </a:xfrm>
           <a:prstGeom prst="rect">
             <a:avLst/>
@@ -9838,7 +9838,7 @@
               <a:buNone/>
             </a:pPr>
             <a:r>
-              <a:rPr lang="en-US" sz="640" dirty="0">
+              <a:rPr lang="en-US" sz="720" dirty="0">
                 <a:solidFill>
                   <a:srgbClr val="9FB3C8"/>
                 </a:solidFill>
@@ -9848,7 +9848,7 @@
               </a:rPr>
               <a:t>Tiết 2 · 第 2 節</a:t>
             </a:r>
-            <a:endParaRPr lang="en-US" sz="640" dirty="0"/>
+            <a:endParaRPr lang="en-US" sz="720" dirty="0"/>
           </a:p>
         </p:txBody>
       </p:sp>
@@ -9878,8 +9878,8 @@
       </p:nvGrpSpPr>
       <p:grpSpPr>
         <a:xfrm>
-          <a:off x="0" y="0"/>
-          <a:ext cx="0" cy="0"/>
+          <a:off x="898071" y="0"/>
+          <a:ext cx="1" cy="1"/>
           <a:chOff x="0" y="0"/>
           <a:chExt cx="0" cy="0"/>
         </a:xfrm>
@@ -9892,8 +9892,8 @@
         </p:nvSpPr>
         <p:spPr>
           <a:xfrm>
-            <a:off x="6130753" y="-947729"/>
-            <a:ext cx="2987610" cy="2987610"/>
+            <a:off x="6335486" y="-1102179"/>
+            <a:ext cx="3380014" cy="3380014"/>
           </a:xfrm>
           <a:prstGeom prst="ellipse">
             <a:avLst/>
@@ -9917,8 +9917,8 @@
         </p:nvSpPr>
         <p:spPr>
           <a:xfrm>
-            <a:off x="7104973" y="1520297"/>
-            <a:ext cx="1688649" cy="1688649"/>
+            <a:off x="7437664" y="1690007"/>
+            <a:ext cx="1910443" cy="1910443"/>
           </a:xfrm>
           <a:prstGeom prst="ellipse">
             <a:avLst/>
@@ -9939,8 +9939,8 @@
         </p:nvSpPr>
         <p:spPr>
           <a:xfrm>
-            <a:off x="1681812" y="1228031"/>
-            <a:ext cx="3247402" cy="220823"/>
+            <a:off x="1302204" y="1359354"/>
+            <a:ext cx="3673929" cy="249827"/>
           </a:xfrm>
           <a:prstGeom prst="rect">
             <a:avLst/>
@@ -9956,7 +9956,7 @@
               <a:buNone/>
             </a:pPr>
             <a:r>
-              <a:rPr lang="en-US" sz="960" b="1" dirty="0">
+              <a:rPr lang="en-US" sz="1080" b="1" dirty="0">
                 <a:solidFill>
                   <a:srgbClr val="FFB020"/>
                 </a:solidFill>
@@ -9966,7 +9966,7 @@
               </a:rPr>
               <a:t>Phần 1 / 3</a:t>
             </a:r>
-            <a:endParaRPr lang="en-US" sz="960" dirty="0"/>
+            <a:endParaRPr lang="en-US" sz="1080" dirty="0"/>
           </a:p>
         </p:txBody>
       </p:sp>
@@ -9978,8 +9978,8 @@
         </p:nvSpPr>
         <p:spPr>
           <a:xfrm>
-            <a:off x="1681812" y="1481328"/>
-            <a:ext cx="5195843" cy="844324"/>
+            <a:off x="1302204" y="1645920"/>
+            <a:ext cx="5878286" cy="955221"/>
           </a:xfrm>
           <a:prstGeom prst="rect">
             <a:avLst/>
@@ -9998,7 +9998,7 @@
               <a:buNone/>
             </a:pPr>
             <a:r>
-              <a:rPr lang="en-US" sz="2060" b="1" dirty="0">
+              <a:rPr lang="en-US" sz="2330" b="1" dirty="0">
                 <a:solidFill>
                   <a:srgbClr val="FFFFFF"/>
                 </a:solidFill>
@@ -10008,7 +10008,7 @@
               </a:rPr>
               <a:t>Camera: ba dòng quyết định lúc chói sáng và lúc vào hầm</a:t>
             </a:r>
-            <a:endParaRPr lang="en-US" sz="2060" dirty="0"/>
+            <a:endParaRPr lang="en-US" sz="2330" dirty="0"/>
           </a:p>
           <a:p>
             <a:pPr indent="0" marL="0">
@@ -10018,7 +10018,7 @@
               <a:buNone/>
             </a:pPr>
             <a:r>
-              <a:rPr lang="en-US" sz="1210" dirty="0">
+              <a:rPr lang="en-US" sz="1370" dirty="0">
                 <a:solidFill>
                   <a:srgbClr val="AFC3D4"/>
                 </a:solidFill>
@@ -10028,7 +10028,7 @@
               </a:rPr>
               <a:t>相機：決定逆光與進隧道的那三行</a:t>
             </a:r>
-            <a:endParaRPr lang="en-US" sz="2060" dirty="0"/>
+            <a:endParaRPr lang="en-US" sz="2330" dirty="0"/>
           </a:p>
         </p:txBody>
       </p:sp>
@@ -10040,8 +10040,8 @@
         </p:nvSpPr>
         <p:spPr>
           <a:xfrm>
-            <a:off x="1681812" y="2403590"/>
-            <a:ext cx="5195843" cy="454636"/>
+            <a:off x="1302204" y="2689316"/>
+            <a:ext cx="5878286" cy="514350"/>
           </a:xfrm>
           <a:prstGeom prst="rect">
             <a:avLst/>
@@ -10060,7 +10060,7 @@
               <a:buNone/>
             </a:pPr>
             <a:r>
-              <a:rPr lang="en-US" sz="960" dirty="0">
+              <a:rPr lang="en-US" sz="1080" dirty="0">
                 <a:solidFill>
                   <a:srgbClr val="AFC3D4"/>
                 </a:solidFill>
@@ -10070,7 +10070,7 @@
               </a:rPr>
               <a:t>Kiểu màn trập · dải tương phản · nháy đèn LED</a:t>
             </a:r>
-            <a:endParaRPr lang="en-US" sz="960" dirty="0"/>
+            <a:endParaRPr lang="en-US" sz="1080" dirty="0"/>
           </a:p>
           <a:p>
             <a:pPr indent="0" marL="0">
@@ -10080,7 +10080,7 @@
               <a:buNone/>
             </a:pPr>
             <a:r>
-              <a:rPr lang="en-US" sz="850" dirty="0">
+              <a:rPr lang="en-US" sz="960" dirty="0">
                 <a:solidFill>
                   <a:srgbClr val="8AA0B4"/>
                 </a:solidFill>
@@ -10090,7 +10090,7 @@
               </a:rPr>
               <a:t>快門方式・動態範圍・LED 閃爍</a:t>
             </a:r>
-            <a:endParaRPr lang="en-US" sz="960" dirty="0"/>
+            <a:endParaRPr lang="en-US" sz="1080" dirty="0"/>
           </a:p>
         </p:txBody>
       </p:sp>
@@ -10102,8 +10102,8 @@
         </p:nvSpPr>
         <p:spPr>
           <a:xfrm>
-            <a:off x="1402536" y="3390800"/>
-            <a:ext cx="584532" cy="181855"/>
+            <a:off x="986246" y="102870"/>
+            <a:ext cx="661307" cy="205740"/>
           </a:xfrm>
           <a:prstGeom prst="rect">
             <a:avLst/>
@@ -10119,7 +10119,7 @@
               <a:buNone/>
             </a:pPr>
             <a:r>
-              <a:rPr lang="en-US" sz="640" dirty="0">
+              <a:rPr lang="en-US" sz="720" dirty="0">
                 <a:solidFill>
                   <a:srgbClr val="9FB3C8"/>
                 </a:solidFill>
@@ -10129,7 +10129,7 @@
               </a:rPr>
               <a:t>2 / 14</a:t>
             </a:r>
-            <a:endParaRPr lang="en-US" sz="640" dirty="0"/>
+            <a:endParaRPr lang="en-US" sz="720" dirty="0"/>
           </a:p>
         </p:txBody>
       </p:sp>
@@ -10141,8 +10141,8 @@
         </p:nvSpPr>
         <p:spPr>
           <a:xfrm>
-            <a:off x="2006553" y="3390800"/>
-            <a:ext cx="1428857" cy="181855"/>
+            <a:off x="1669596" y="102870"/>
+            <a:ext cx="1616529" cy="205740"/>
           </a:xfrm>
           <a:prstGeom prst="rect">
             <a:avLst/>
@@ -10158,7 +10158,7 @@
               <a:buNone/>
             </a:pPr>
             <a:r>
-              <a:rPr lang="en-US" sz="640" dirty="0">
+              <a:rPr lang="en-US" sz="720" dirty="0">
                 <a:solidFill>
                   <a:srgbClr val="9FB3C8"/>
                 </a:solidFill>
@@ -10168,7 +10168,7 @@
               </a:rPr>
               <a:t>Tiết 2 · 第 2 節</a:t>
             </a:r>
-            <a:endParaRPr lang="en-US" sz="640" dirty="0"/>
+            <a:endParaRPr lang="en-US" sz="720" dirty="0"/>
           </a:p>
         </p:txBody>
       </p:sp>
@@ -10191,8 +10191,8 @@
       </p:nvGrpSpPr>
       <p:grpSpPr>
         <a:xfrm>
-          <a:off x="0" y="0"/>
-          <a:ext cx="0" cy="0"/>
+          <a:off x="942514" y="0"/>
+          <a:ext cx="1" cy="1"/>
           <a:chOff x="0" y="0"/>
           <a:chExt cx="0" cy="0"/>
         </a:xfrm>
@@ -10205,8 +10205,8 @@
         </p:nvSpPr>
         <p:spPr>
           <a:xfrm>
-            <a:off x="1681812" y="325253"/>
-            <a:ext cx="5780375" cy="194844"/>
+            <a:off x="1341758" y="333913"/>
+            <a:ext cx="6460485" cy="217769"/>
           </a:xfrm>
           <a:prstGeom prst="rect">
             <a:avLst/>
@@ -10222,7 +10222,7 @@
               <a:buNone/>
             </a:pPr>
             <a:r>
-              <a:rPr lang="en-US" sz="890" b="1" dirty="0">
+              <a:rPr lang="en-US" sz="990" b="1" dirty="0">
                 <a:solidFill>
                   <a:srgbClr val="007F72"/>
                 </a:solidFill>
@@ -10232,7 +10232,7 @@
               </a:rPr>
               <a:t>1 / 3　Rolling shutter</a:t>
             </a:r>
-            <a:endParaRPr lang="en-US" sz="890" dirty="0"/>
+            <a:endParaRPr lang="en-US" sz="990" dirty="0"/>
           </a:p>
         </p:txBody>
       </p:sp>
@@ -10244,8 +10244,8 @@
         </p:nvSpPr>
         <p:spPr>
           <a:xfrm>
-            <a:off x="1681812" y="809116"/>
-            <a:ext cx="1753597" cy="1786071"/>
+            <a:off x="1341758" y="874706"/>
+            <a:ext cx="1959922" cy="1996217"/>
           </a:xfrm>
           <a:prstGeom prst="roundRect">
             <a:avLst>
@@ -10271,8 +10271,8 @@
         </p:nvSpPr>
         <p:spPr>
           <a:xfrm>
-            <a:off x="1961349" y="1449633"/>
-            <a:ext cx="1194524" cy="0"/>
+            <a:off x="1654184" y="1590586"/>
+            <a:ext cx="1335070" cy="1"/>
           </a:xfrm>
           <a:prstGeom prst="line">
             <a:avLst/>
@@ -10294,8 +10294,8 @@
         </p:nvSpPr>
         <p:spPr>
           <a:xfrm>
-            <a:off x="1961349" y="1639022"/>
-            <a:ext cx="1194524" cy="0"/>
+            <a:off x="1654184" y="1802257"/>
+            <a:ext cx="1335070" cy="1"/>
           </a:xfrm>
           <a:prstGeom prst="line">
             <a:avLst/>
@@ -10317,8 +10317,8 @@
         </p:nvSpPr>
         <p:spPr>
           <a:xfrm>
-            <a:off x="1961349" y="1544328"/>
-            <a:ext cx="1100220" cy="0"/>
+            <a:off x="1654184" y="1696422"/>
+            <a:ext cx="1229670" cy="1"/>
           </a:xfrm>
           <a:prstGeom prst="line">
             <a:avLst/>
@@ -10341,8 +10341,8 @@
         </p:nvSpPr>
         <p:spPr>
           <a:xfrm>
-            <a:off x="1961349" y="2049364"/>
-            <a:ext cx="1194524" cy="0"/>
+            <a:off x="1654184" y="2260879"/>
+            <a:ext cx="1335070" cy="1"/>
           </a:xfrm>
           <a:prstGeom prst="line">
             <a:avLst/>
@@ -10364,8 +10364,8 @@
         </p:nvSpPr>
         <p:spPr>
           <a:xfrm>
-            <a:off x="1961349" y="2238752"/>
-            <a:ext cx="1194524" cy="0"/>
+            <a:off x="1654184" y="2472551"/>
+            <a:ext cx="1335070" cy="1"/>
           </a:xfrm>
           <a:prstGeom prst="line">
             <a:avLst/>
@@ -10387,8 +10387,8 @@
         </p:nvSpPr>
         <p:spPr>
           <a:xfrm flipV="1">
-            <a:off x="1961349" y="2080928"/>
-            <a:ext cx="298631" cy="126259"/>
+            <a:off x="1654184" y="2296158"/>
+            <a:ext cx="333767" cy="141114"/>
           </a:xfrm>
           <a:prstGeom prst="line">
             <a:avLst/>
@@ -10410,8 +10410,8 @@
         </p:nvSpPr>
         <p:spPr>
           <a:xfrm>
-            <a:off x="2259980" y="2080928"/>
-            <a:ext cx="298631" cy="142041"/>
+            <a:off x="1987951" y="2296158"/>
+            <a:ext cx="333767" cy="158753"/>
           </a:xfrm>
           <a:prstGeom prst="line">
             <a:avLst/>
@@ -10433,8 +10433,8 @@
         </p:nvSpPr>
         <p:spPr>
           <a:xfrm flipV="1">
-            <a:off x="2558611" y="2017799"/>
-            <a:ext cx="298631" cy="205171"/>
+            <a:off x="2321719" y="2225600"/>
+            <a:ext cx="333767" cy="229311"/>
           </a:xfrm>
           <a:prstGeom prst="line">
             <a:avLst/>
@@ -10456,8 +10456,8 @@
         </p:nvSpPr>
         <p:spPr>
           <a:xfrm>
-            <a:off x="2857242" y="2017799"/>
-            <a:ext cx="204327" cy="126259"/>
+            <a:off x="2655486" y="2225600"/>
+            <a:ext cx="228367" cy="141114"/>
           </a:xfrm>
           <a:prstGeom prst="line">
             <a:avLst/>
@@ -10480,8 +10480,8 @@
         </p:nvSpPr>
         <p:spPr>
           <a:xfrm>
-            <a:off x="3760150" y="838903"/>
-            <a:ext cx="3702038" cy="963171"/>
+            <a:off x="3664629" y="907998"/>
+            <a:ext cx="4137614" cy="1076497"/>
           </a:xfrm>
           <a:prstGeom prst="rect">
             <a:avLst/>
@@ -10500,7 +10500,7 @@
               <a:buNone/>
             </a:pPr>
             <a:r>
-              <a:rPr lang="en-US" sz="1630" b="1" dirty="0">
+              <a:rPr lang="en-US" sz="1830" b="1" dirty="0">
                 <a:solidFill>
                   <a:srgbClr val="0B1F3A"/>
                 </a:solidFill>
@@ -10510,7 +10510,7 @@
               </a:rPr>
               <a:t>Màn trập cuốn: ảnh không phải chụp cùng một lúc, mà quét từ trên xuống</a:t>
             </a:r>
-            <a:endParaRPr lang="en-US" sz="1630" dirty="0"/>
+            <a:endParaRPr lang="en-US" sz="1830" dirty="0"/>
           </a:p>
           <a:p>
             <a:pPr indent="0" marL="0">
@@ -10520,7 +10520,7 @@
               <a:buNone/>
             </a:pPr>
             <a:r>
-              <a:rPr lang="en-US" sz="990" dirty="0">
+              <a:rPr lang="en-US" sz="1110" dirty="0">
                 <a:solidFill>
                   <a:srgbClr val="007F72"/>
                 </a:solidFill>
@@ -10530,7 +10530,7 @@
               </a:rPr>
               <a:t>捲簾快門：一張照片不是同時拍的，是從上往下掃出來的</a:t>
             </a:r>
-            <a:endParaRPr lang="en-US" sz="1630" dirty="0"/>
+            <a:endParaRPr lang="en-US" sz="1830" dirty="0"/>
           </a:p>
         </p:txBody>
       </p:sp>
@@ -10542,8 +10542,8 @@
         </p:nvSpPr>
         <p:spPr>
           <a:xfrm>
-            <a:off x="3760150" y="1867022"/>
-            <a:ext cx="3702038" cy="763326"/>
+            <a:off x="3664629" y="2057084"/>
+            <a:ext cx="4137614" cy="853137"/>
           </a:xfrm>
           <a:prstGeom prst="rect">
             <a:avLst/>
@@ -10562,7 +10562,7 @@
               <a:buNone/>
             </a:pPr>
             <a:r>
-              <a:rPr lang="en-US" sz="890" dirty="0">
+              <a:rPr lang="en-US" sz="990" dirty="0">
                 <a:solidFill>
                   <a:srgbClr val="5F7183"/>
                 </a:solidFill>
@@ -10572,7 +10572,7 @@
               </a:rPr>
               <a:t>Cảm biến đọc từng hàng, hàng cuối chậm hơn hàng đầu vài chục mili giây. Trong khoảng đó xe và vật đều đã di chuyển, nên cột điện bị nghiêng, cánh quạt bị cong.</a:t>
             </a:r>
-            <a:endParaRPr lang="en-US" sz="890" dirty="0"/>
+            <a:endParaRPr lang="en-US" sz="990" dirty="0"/>
           </a:p>
           <a:p>
             <a:pPr indent="0" marL="0">
@@ -10582,7 +10582,7 @@
               <a:buNone/>
             </a:pPr>
             <a:r>
-              <a:rPr lang="en-US" sz="820" dirty="0">
+              <a:rPr lang="en-US" sz="910" dirty="0">
                 <a:solidFill>
                   <a:srgbClr val="5F7183"/>
                 </a:solidFill>
@@ -10592,7 +10592,7 @@
               </a:rPr>
               <a:t>感光元件是一列一列讀出來的，最後一列比第一列晚了幾十毫秒。這段時間裡車子和目標都在動，所以電線桿會歪、螺旋槳會彎。</a:t>
             </a:r>
-            <a:endParaRPr lang="en-US" sz="890" dirty="0"/>
+            <a:endParaRPr lang="en-US" sz="990" dirty="0"/>
           </a:p>
         </p:txBody>
       </p:sp>
@@ -10604,8 +10604,8 @@
         </p:nvSpPr>
         <p:spPr>
           <a:xfrm>
-            <a:off x="1681812" y="2806268"/>
-            <a:ext cx="5780375" cy="441647"/>
+            <a:off x="1341758" y="3106840"/>
+            <a:ext cx="6460485" cy="493610"/>
           </a:xfrm>
           <a:prstGeom prst="roundRect">
             <a:avLst>
@@ -10631,8 +10631,8 @@
         </p:nvSpPr>
         <p:spPr>
           <a:xfrm>
-            <a:off x="1811708" y="2858226"/>
-            <a:ext cx="5520583" cy="350719"/>
+            <a:off x="1486937" y="3164912"/>
+            <a:ext cx="6170126" cy="391984"/>
           </a:xfrm>
           <a:prstGeom prst="rect">
             <a:avLst/>
@@ -10651,7 +10651,7 @@
               <a:buNone/>
             </a:pPr>
             <a:r>
-              <a:rPr lang="en-US" sz="890" b="1" dirty="0">
+              <a:rPr lang="en-US" sz="990" b="1" dirty="0">
                 <a:solidFill>
                   <a:srgbClr val="7A4E00"/>
                 </a:solidFill>
@@ -10661,7 +10661,7 @@
               </a:rPr>
               <a:t>Xe tự lái sợ nhất: vật ở rìa ảnh bị lệch chỗ, mà thuật toán lại tưởng nó thật.</a:t>
             </a:r>
-            <a:endParaRPr lang="en-US" sz="890" dirty="0"/>
+            <a:endParaRPr lang="en-US" sz="990" dirty="0"/>
           </a:p>
           <a:p>
             <a:pPr indent="0" marL="0">
@@ -10671,7 +10671,7 @@
               <a:buNone/>
             </a:pPr>
             <a:r>
-              <a:rPr lang="en-US" sz="820" dirty="0">
+              <a:rPr lang="en-US" sz="910" dirty="0">
                 <a:solidFill>
                   <a:srgbClr val="7A4E00"/>
                 </a:solidFill>
@@ -10681,7 +10681,7 @@
               </a:rPr>
               <a:t>自駕車最怕的是：畫面邊緣的東西位置被扭掉，演算法卻以為那是真的。</a:t>
             </a:r>
-            <a:endParaRPr lang="en-US" sz="890" dirty="0"/>
+            <a:endParaRPr lang="en-US" sz="990" dirty="0"/>
           </a:p>
         </p:txBody>
       </p:sp>
@@ -10701,8 +10701,8 @@
         </p:blipFill>
         <p:spPr>
           <a:xfrm>
-            <a:off x="6663327" y="3338842"/>
-            <a:ext cx="779376" cy="172200"/>
+            <a:off x="7882128" y="109728"/>
+            <a:ext cx="1097280" cy="242439"/>
           </a:xfrm>
           <a:prstGeom prst="rect">
             <a:avLst/>
@@ -10717,8 +10717,8 @@
         </p:nvSpPr>
         <p:spPr>
           <a:xfrm>
-            <a:off x="1402536" y="3390800"/>
-            <a:ext cx="584532" cy="181855"/>
+            <a:off x="1029622" y="101626"/>
+            <a:ext cx="653307" cy="203251"/>
           </a:xfrm>
           <a:prstGeom prst="rect">
             <a:avLst/>
@@ -10734,7 +10734,7 @@
               <a:buNone/>
             </a:pPr>
             <a:r>
-              <a:rPr lang="en-US" sz="640" dirty="0">
+              <a:rPr lang="en-US" sz="710" dirty="0">
                 <a:solidFill>
                   <a:srgbClr val="5F7183"/>
                 </a:solidFill>
@@ -10744,7 +10744,7 @@
               </a:rPr>
               <a:t>3 / 14</a:t>
             </a:r>
-            <a:endParaRPr lang="en-US" sz="640" dirty="0"/>
+            <a:endParaRPr lang="en-US" sz="710" dirty="0"/>
           </a:p>
         </p:txBody>
       </p:sp>
@@ -10756,8 +10756,8 @@
         </p:nvSpPr>
         <p:spPr>
           <a:xfrm>
-            <a:off x="2006553" y="3390800"/>
-            <a:ext cx="1428857" cy="181855"/>
+            <a:off x="1704706" y="101626"/>
+            <a:ext cx="1596974" cy="203251"/>
           </a:xfrm>
           <a:prstGeom prst="rect">
             <a:avLst/>
@@ -10773,7 +10773,7 @@
               <a:buNone/>
             </a:pPr>
             <a:r>
-              <a:rPr lang="en-US" sz="640" dirty="0">
+              <a:rPr lang="en-US" sz="710" dirty="0">
                 <a:solidFill>
                   <a:srgbClr val="5F7183"/>
                 </a:solidFill>
@@ -10783,7 +10783,7 @@
               </a:rPr>
               <a:t>Tiết 2 · 第 2 節</a:t>
             </a:r>
-            <a:endParaRPr lang="en-US" sz="640" dirty="0"/>
+            <a:endParaRPr lang="en-US" sz="710" dirty="0"/>
           </a:p>
         </p:txBody>
       </p:sp>
@@ -10806,8 +10806,8 @@
       </p:nvGrpSpPr>
       <p:grpSpPr>
         <a:xfrm>
-          <a:off x="0" y="0"/>
-          <a:ext cx="0" cy="0"/>
+          <a:off x="942514" y="0"/>
+          <a:ext cx="1" cy="1"/>
           <a:chOff x="0" y="0"/>
           <a:chExt cx="0" cy="0"/>
         </a:xfrm>
@@ -10820,8 +10820,8 @@
         </p:nvSpPr>
         <p:spPr>
           <a:xfrm>
-            <a:off x="1681812" y="325253"/>
-            <a:ext cx="5780375" cy="194844"/>
+            <a:off x="1341758" y="333913"/>
+            <a:ext cx="6460485" cy="217769"/>
           </a:xfrm>
           <a:prstGeom prst="rect">
             <a:avLst/>
@@ -10837,7 +10837,7 @@
               <a:buNone/>
             </a:pPr>
             <a:r>
-              <a:rPr lang="en-US" sz="890" b="1" dirty="0">
+              <a:rPr lang="en-US" sz="990" b="1" dirty="0">
                 <a:solidFill>
                   <a:srgbClr val="007F72"/>
                 </a:solidFill>
@@ -10847,7 +10847,7 @@
               </a:rPr>
               <a:t>2 / 3　Dynamic range</a:t>
             </a:r>
-            <a:endParaRPr lang="en-US" sz="890" dirty="0"/>
+            <a:endParaRPr lang="en-US" sz="990" dirty="0"/>
           </a:p>
         </p:txBody>
       </p:sp>
@@ -10859,8 +10859,8 @@
         </p:nvSpPr>
         <p:spPr>
           <a:xfrm>
-            <a:off x="1681812" y="809116"/>
-            <a:ext cx="1753597" cy="1786071"/>
+            <a:off x="1341758" y="874706"/>
+            <a:ext cx="1959922" cy="1996217"/>
           </a:xfrm>
           <a:prstGeom prst="roundRect">
             <a:avLst>
@@ -10886,8 +10886,8 @@
         </p:nvSpPr>
         <p:spPr>
           <a:xfrm>
-            <a:off x="1898479" y="1165551"/>
-            <a:ext cx="471523" cy="220953"/>
+            <a:off x="1583917" y="1273079"/>
+            <a:ext cx="527001" cy="246950"/>
           </a:xfrm>
           <a:prstGeom prst="rect">
             <a:avLst/>
@@ -10903,7 +10903,7 @@
               <a:buNone/>
             </a:pPr>
             <a:r>
-              <a:rPr lang="en-US" sz="640" b="1" dirty="0">
+              <a:rPr lang="en-US" sz="710" b="1" dirty="0">
                 <a:solidFill>
                   <a:srgbClr val="6FA8DC"/>
                 </a:solidFill>
@@ -10913,7 +10913,7 @@
               </a:rPr>
               <a:t>khô  乾</a:t>
             </a:r>
-            <a:endParaRPr lang="en-US" sz="640" dirty="0"/>
+            <a:endParaRPr lang="en-US" sz="710" dirty="0"/>
           </a:p>
         </p:txBody>
       </p:sp>
@@ -10925,8 +10925,8 @@
         </p:nvSpPr>
         <p:spPr>
           <a:xfrm>
-            <a:off x="1898479" y="1447693"/>
-            <a:ext cx="282914" cy="130140"/>
+            <a:off x="1583917" y="1588417"/>
+            <a:ext cx="316201" cy="145453"/>
           </a:xfrm>
           <a:prstGeom prst="roundRect">
             <a:avLst>
@@ -10947,8 +10947,8 @@
         </p:nvSpPr>
         <p:spPr>
           <a:xfrm>
-            <a:off x="2005986" y="1473721"/>
-            <a:ext cx="96191" cy="78084"/>
+            <a:off x="1704073" y="1617508"/>
+            <a:ext cx="107508" cy="87271"/>
           </a:xfrm>
           <a:prstGeom prst="roundRect">
             <a:avLst>
@@ -10969,8 +10969,8 @@
         </p:nvSpPr>
         <p:spPr>
           <a:xfrm>
-            <a:off x="2212827" y="1512763"/>
-            <a:ext cx="597262" cy="0"/>
+            <a:off x="1935251" y="1661143"/>
+            <a:ext cx="667535" cy="1"/>
           </a:xfrm>
           <a:prstGeom prst="line">
             <a:avLst/>
@@ -10992,8 +10992,8 @@
         </p:nvSpPr>
         <p:spPr>
           <a:xfrm>
-            <a:off x="2810090" y="1370721"/>
-            <a:ext cx="55011" cy="284083"/>
+            <a:off x="2602786" y="1502390"/>
+            <a:ext cx="61484" cy="317508"/>
           </a:xfrm>
           <a:prstGeom prst="roundRect">
             <a:avLst>
@@ -11014,8 +11014,8 @@
         </p:nvSpPr>
         <p:spPr>
           <a:xfrm>
-            <a:off x="1898479" y="1733716"/>
-            <a:ext cx="471523" cy="220953"/>
+            <a:off x="1583917" y="1908093"/>
+            <a:ext cx="527001" cy="246950"/>
           </a:xfrm>
           <a:prstGeom prst="rect">
             <a:avLst/>
@@ -11031,7 +11031,7 @@
               <a:buNone/>
             </a:pPr>
             <a:r>
-              <a:rPr lang="en-US" sz="640" b="1" dirty="0">
+              <a:rPr lang="en-US" sz="710" b="1" dirty="0">
                 <a:solidFill>
                   <a:srgbClr val="D9463E"/>
                 </a:solidFill>
@@ -11041,7 +11041,7 @@
               </a:rPr>
               <a:t>ướt  濕</a:t>
             </a:r>
-            <a:endParaRPr lang="en-US" sz="640" dirty="0"/>
+            <a:endParaRPr lang="en-US" sz="710" dirty="0"/>
           </a:p>
         </p:txBody>
       </p:sp>
@@ -11053,8 +11053,8 @@
         </p:nvSpPr>
         <p:spPr>
           <a:xfrm>
-            <a:off x="1898479" y="2015858"/>
-            <a:ext cx="282914" cy="130140"/>
+            <a:off x="1583917" y="2223432"/>
+            <a:ext cx="316201" cy="145453"/>
           </a:xfrm>
           <a:prstGeom prst="roundRect">
             <a:avLst>
@@ -11075,8 +11075,8 @@
         </p:nvSpPr>
         <p:spPr>
           <a:xfrm>
-            <a:off x="2005986" y="2041886"/>
-            <a:ext cx="96191" cy="78084"/>
+            <a:off x="1704073" y="2252522"/>
+            <a:ext cx="107508" cy="87271"/>
           </a:xfrm>
           <a:prstGeom prst="roundRect">
             <a:avLst>
@@ -11097,8 +11097,8 @@
         </p:nvSpPr>
         <p:spPr>
           <a:xfrm>
-            <a:off x="2212827" y="2080928"/>
-            <a:ext cx="974480" cy="0"/>
+            <a:off x="1935251" y="2296158"/>
+            <a:ext cx="1089136" cy="1"/>
           </a:xfrm>
           <a:prstGeom prst="line">
             <a:avLst/>
@@ -11120,8 +11120,8 @@
         </p:nvSpPr>
         <p:spPr>
           <a:xfrm>
-            <a:off x="3187308" y="1938887"/>
-            <a:ext cx="55011" cy="284083"/>
+            <a:off x="3024387" y="2137404"/>
+            <a:ext cx="61484" cy="317508"/>
           </a:xfrm>
           <a:prstGeom prst="roundRect">
             <a:avLst>
@@ -11142,8 +11142,8 @@
         </p:nvSpPr>
         <p:spPr>
           <a:xfrm>
-            <a:off x="3760150" y="963355"/>
-            <a:ext cx="3702038" cy="714266"/>
+            <a:off x="3664629" y="1047093"/>
+            <a:ext cx="4137614" cy="798305"/>
           </a:xfrm>
           <a:prstGeom prst="rect">
             <a:avLst/>
@@ -11162,7 +11162,7 @@
               <a:buNone/>
             </a:pPr>
             <a:r>
-              <a:rPr lang="en-US" sz="1630" b="1" dirty="0">
+              <a:rPr lang="en-US" sz="1830" b="1" dirty="0">
                 <a:solidFill>
                   <a:srgbClr val="0B1F3A"/>
                 </a:solidFill>
@@ -11172,7 +11172,7 @@
               </a:rPr>
               <a:t>Dải tương phản động: cùng một khung vừa có chỗ tối vừa có chỗ chói</a:t>
             </a:r>
-            <a:endParaRPr lang="en-US" sz="1630" dirty="0"/>
+            <a:endParaRPr lang="en-US" sz="1830" dirty="0"/>
           </a:p>
           <a:p>
             <a:pPr indent="0" marL="0">
@@ -11182,7 +11182,7 @@
               <a:buNone/>
             </a:pPr>
             <a:r>
-              <a:rPr lang="en-US" sz="990" dirty="0">
+              <a:rPr lang="en-US" sz="1110" dirty="0">
                 <a:solidFill>
                   <a:srgbClr val="007F72"/>
                 </a:solidFill>
@@ -11192,7 +11192,7 @@
               </a:rPr>
               <a:t>動態範圍：同一張畫面裡，又有很暗的地方又有很亮的地方</a:t>
             </a:r>
-            <a:endParaRPr lang="en-US" sz="1630" dirty="0"/>
+            <a:endParaRPr lang="en-US" sz="1830" dirty="0"/>
           </a:p>
         </p:txBody>
       </p:sp>
@@ -11204,8 +11204,8 @@
         </p:nvSpPr>
         <p:spPr>
           <a:xfrm>
-            <a:off x="3760150" y="1742570"/>
-            <a:ext cx="3702038" cy="763326"/>
+            <a:off x="3664629" y="1917989"/>
+            <a:ext cx="4137614" cy="853137"/>
           </a:xfrm>
           <a:prstGeom prst="rect">
             <a:avLst/>
@@ -11224,7 +11224,7 @@
               <a:buNone/>
             </a:pPr>
             <a:r>
-              <a:rPr lang="en-US" sz="890" dirty="0">
+              <a:rPr lang="en-US" sz="990" dirty="0">
                 <a:solidFill>
                   <a:srgbClr val="5F7183"/>
                 </a:solidFill>
@@ -11234,7 +11234,7 @@
               </a:rPr>
               <a:t>Ra khỏi đường hầm giữa trưa: trong hầm tối, ngoài hầm chói. Mắt người xử lý được khoảng 120 dB; AR0233AT ghi trên 140 dB, đó là lý do nó đắt.</a:t>
             </a:r>
-            <a:endParaRPr lang="en-US" sz="890" dirty="0"/>
+            <a:endParaRPr lang="en-US" sz="990" dirty="0"/>
           </a:p>
           <a:p>
             <a:pPr indent="0" marL="0">
@@ -11244,7 +11244,7 @@
               <a:buNone/>
             </a:pPr>
             <a:r>
-              <a:rPr lang="en-US" sz="820" dirty="0">
+              <a:rPr lang="en-US" sz="910" dirty="0">
                 <a:solidFill>
                   <a:srgbClr val="5F7183"/>
                 </a:solidFill>
@@ -11254,7 +11254,7 @@
               </a:rPr>
               <a:t>中午開出隧道口：裡面很暗，外面很亮。人眼大約能處理 120 dB；AR0233AT 寫的是 140 dB 以上，這就是它貴的原因。</a:t>
             </a:r>
-            <a:endParaRPr lang="en-US" sz="890" dirty="0"/>
+            <a:endParaRPr lang="en-US" sz="990" dirty="0"/>
           </a:p>
         </p:txBody>
       </p:sp>
@@ -11266,8 +11266,8 @@
         </p:nvSpPr>
         <p:spPr>
           <a:xfrm>
-            <a:off x="1681812" y="2806268"/>
-            <a:ext cx="5780375" cy="441647"/>
+            <a:off x="1341758" y="3106840"/>
+            <a:ext cx="6460485" cy="493610"/>
           </a:xfrm>
           <a:prstGeom prst="roundRect">
             <a:avLst>
@@ -11293,8 +11293,8 @@
         </p:nvSpPr>
         <p:spPr>
           <a:xfrm>
-            <a:off x="1811708" y="2858226"/>
-            <a:ext cx="5520583" cy="350719"/>
+            <a:off x="1486937" y="3164912"/>
+            <a:ext cx="6170126" cy="391984"/>
           </a:xfrm>
           <a:prstGeom prst="rect">
             <a:avLst/>
@@ -11313,7 +11313,7 @@
               <a:buNone/>
             </a:pPr>
             <a:r>
-              <a:rPr lang="en-US" sz="890" b="1" dirty="0">
+              <a:rPr lang="en-US" sz="990" b="1" dirty="0">
                 <a:solidFill>
                   <a:srgbClr val="7A4E00"/>
                 </a:solidFill>
@@ -11323,7 +11323,7 @@
               </a:rPr>
               <a:t>Thiếu dải động thì hoặc là trong hầm đen kịt, hoặc là ngoài hầm trắng xoá — chọn một.</a:t>
             </a:r>
-            <a:endParaRPr lang="en-US" sz="890" dirty="0"/>
+            <a:endParaRPr lang="en-US" sz="990" dirty="0"/>
           </a:p>
           <a:p>
             <a:pPr indent="0" marL="0">
@@ -11333,7 +11333,7 @@
               <a:buNone/>
             </a:pPr>
             <a:r>
-              <a:rPr lang="en-US" sz="820" dirty="0">
+              <a:rPr lang="en-US" sz="910" dirty="0">
                 <a:solidFill>
                   <a:srgbClr val="7A4E00"/>
                 </a:solidFill>
@@ -11343,7 +11343,7 @@
               </a:rPr>
               <a:t>動態範圍不夠的話，不是隧道裡一片黑，就是隧道外一片白——只能選一個。</a:t>
             </a:r>
-            <a:endParaRPr lang="en-US" sz="890" dirty="0"/>
+            <a:endParaRPr lang="en-US" sz="990" dirty="0"/>
           </a:p>
         </p:txBody>
       </p:sp>
@@ -11363,8 +11363,8 @@
         </p:blipFill>
         <p:spPr>
           <a:xfrm>
-            <a:off x="6663327" y="3338842"/>
-            <a:ext cx="779376" cy="172200"/>
+            <a:off x="7882128" y="109728"/>
+            <a:ext cx="1097280" cy="242439"/>
           </a:xfrm>
           <a:prstGeom prst="rect">
             <a:avLst/>
@@ -11379,8 +11379,8 @@
         </p:nvSpPr>
         <p:spPr>
           <a:xfrm>
-            <a:off x="1402536" y="3390800"/>
-            <a:ext cx="584532" cy="181855"/>
+            <a:off x="1029622" y="101626"/>
+            <a:ext cx="653307" cy="203251"/>
           </a:xfrm>
           <a:prstGeom prst="rect">
             <a:avLst/>
@@ -11396,7 +11396,7 @@
               <a:buNone/>
             </a:pPr>
             <a:r>
-              <a:rPr lang="en-US" sz="640" dirty="0">
+              <a:rPr lang="en-US" sz="710" dirty="0">
                 <a:solidFill>
                   <a:srgbClr val="5F7183"/>
                 </a:solidFill>
@@ -11406,7 +11406,7 @@
               </a:rPr>
               <a:t>4 / 14</a:t>
             </a:r>
-            <a:endParaRPr lang="en-US" sz="640" dirty="0"/>
+            <a:endParaRPr lang="en-US" sz="710" dirty="0"/>
           </a:p>
         </p:txBody>
       </p:sp>
@@ -11418,8 +11418,8 @@
         </p:nvSpPr>
         <p:spPr>
           <a:xfrm>
-            <a:off x="2006553" y="3390800"/>
-            <a:ext cx="1428857" cy="181855"/>
+            <a:off x="1704706" y="101626"/>
+            <a:ext cx="1596974" cy="203251"/>
           </a:xfrm>
           <a:prstGeom prst="rect">
             <a:avLst/>
@@ -11435,7 +11435,7 @@
               <a:buNone/>
             </a:pPr>
             <a:r>
-              <a:rPr lang="en-US" sz="640" dirty="0">
+              <a:rPr lang="en-US" sz="710" dirty="0">
                 <a:solidFill>
                   <a:srgbClr val="5F7183"/>
                 </a:solidFill>
@@ -11445,7 +11445,7 @@
               </a:rPr>
               <a:t>Tiết 2 · 第 2 節</a:t>
             </a:r>
-            <a:endParaRPr lang="en-US" sz="640" dirty="0"/>
+            <a:endParaRPr lang="en-US" sz="710" dirty="0"/>
           </a:p>
         </p:txBody>
       </p:sp>
@@ -11468,8 +11468,8 @@
       </p:nvGrpSpPr>
       <p:grpSpPr>
         <a:xfrm>
-          <a:off x="0" y="0"/>
-          <a:ext cx="0" cy="0"/>
+          <a:off x="942514" y="0"/>
+          <a:ext cx="1" cy="1"/>
           <a:chOff x="0" y="0"/>
           <a:chExt cx="0" cy="0"/>
         </a:xfrm>
@@ -11482,8 +11482,8 @@
         </p:nvSpPr>
         <p:spPr>
           <a:xfrm>
-            <a:off x="1681812" y="325253"/>
-            <a:ext cx="5780375" cy="194844"/>
+            <a:off x="1341758" y="333913"/>
+            <a:ext cx="6460485" cy="217769"/>
           </a:xfrm>
           <a:prstGeom prst="rect">
             <a:avLst/>
@@ -11499,7 +11499,7 @@
               <a:buNone/>
             </a:pPr>
             <a:r>
-              <a:rPr lang="en-US" sz="890" b="1" dirty="0">
+              <a:rPr lang="en-US" sz="990" b="1" dirty="0">
                 <a:solidFill>
                   <a:srgbClr val="007F72"/>
                 </a:solidFill>
@@ -11509,7 +11509,7 @@
               </a:rPr>
               <a:t>3 / 3　LED flicker</a:t>
             </a:r>
-            <a:endParaRPr lang="en-US" sz="890" dirty="0"/>
+            <a:endParaRPr lang="en-US" sz="990" dirty="0"/>
           </a:p>
         </p:txBody>
       </p:sp>
@@ -11521,8 +11521,8 @@
         </p:nvSpPr>
         <p:spPr>
           <a:xfrm>
-            <a:off x="1681812" y="809116"/>
-            <a:ext cx="1753597" cy="1786071"/>
+            <a:off x="1341758" y="874706"/>
+            <a:ext cx="1959922" cy="1996217"/>
           </a:xfrm>
           <a:prstGeom prst="roundRect">
             <a:avLst>
@@ -11548,8 +11548,8 @@
         </p:nvSpPr>
         <p:spPr>
           <a:xfrm>
-            <a:off x="2385719" y="1591675"/>
-            <a:ext cx="660132" cy="536601"/>
+            <a:off x="2128485" y="1749340"/>
+            <a:ext cx="737802" cy="599736"/>
           </a:xfrm>
           <a:prstGeom prst="roundRect">
             <a:avLst>
@@ -11575,8 +11575,8 @@
         </p:nvSpPr>
         <p:spPr>
           <a:xfrm>
-            <a:off x="2275697" y="1481198"/>
-            <a:ext cx="660132" cy="536601"/>
+            <a:off x="2005518" y="1625864"/>
+            <a:ext cx="737802" cy="599736"/>
           </a:xfrm>
           <a:prstGeom prst="roundRect">
             <a:avLst>
@@ -11602,8 +11602,8 @@
         </p:nvSpPr>
         <p:spPr>
           <a:xfrm>
-            <a:off x="2165675" y="1370721"/>
-            <a:ext cx="660132" cy="536601"/>
+            <a:off x="1882551" y="1502390"/>
+            <a:ext cx="737802" cy="599736"/>
           </a:xfrm>
           <a:prstGeom prst="roundRect">
             <a:avLst>
@@ -11629,8 +11629,8 @@
         </p:nvSpPr>
         <p:spPr>
           <a:xfrm>
-            <a:off x="2055653" y="1260245"/>
-            <a:ext cx="660132" cy="536601"/>
+            <a:off x="1759584" y="1378914"/>
+            <a:ext cx="737802" cy="599736"/>
           </a:xfrm>
           <a:prstGeom prst="roundRect">
             <a:avLst>
@@ -11656,8 +11656,8 @@
         </p:nvSpPr>
         <p:spPr>
           <a:xfrm>
-            <a:off x="1772740" y="2080928"/>
-            <a:ext cx="1571743" cy="284083"/>
+            <a:off x="1443383" y="2296158"/>
+            <a:ext cx="1756671" cy="317508"/>
           </a:xfrm>
           <a:prstGeom prst="rect">
             <a:avLst/>
@@ -11673,7 +11673,7 @@
               <a:buNone/>
             </a:pPr>
             <a:r>
-              <a:rPr lang="en-US" sz="780" b="1" dirty="0">
+              <a:rPr lang="en-US" sz="870" b="1" dirty="0">
                 <a:solidFill>
                   <a:srgbClr val="A3382F"/>
                 </a:solidFill>
@@ -11683,7 +11683,7 @@
               </a:rPr>
               <a:t>× 10 000</a:t>
             </a:r>
-            <a:endParaRPr lang="en-US" sz="780" dirty="0"/>
+            <a:endParaRPr lang="en-US" sz="870" dirty="0"/>
           </a:p>
         </p:txBody>
       </p:sp>
@@ -11695,8 +11695,8 @@
         </p:nvSpPr>
         <p:spPr>
           <a:xfrm>
-            <a:off x="3760150" y="963355"/>
-            <a:ext cx="3702038" cy="714266"/>
+            <a:off x="3664629" y="1047093"/>
+            <a:ext cx="4137614" cy="798305"/>
           </a:xfrm>
           <a:prstGeom prst="rect">
             <a:avLst/>
@@ -11715,7 +11715,7 @@
               <a:buNone/>
             </a:pPr>
             <a:r>
-              <a:rPr lang="en-US" sz="1630" b="1" dirty="0">
+              <a:rPr lang="en-US" sz="1830" b="1" dirty="0">
                 <a:solidFill>
                   <a:srgbClr val="0B1F3A"/>
                 </a:solidFill>
@@ -11725,7 +11725,7 @@
               </a:rPr>
               <a:t>Đèn LED nhấp nháy: mắt người không thấy, camera thì thấy</a:t>
             </a:r>
-            <a:endParaRPr lang="en-US" sz="1630" dirty="0"/>
+            <a:endParaRPr lang="en-US" sz="1830" dirty="0"/>
           </a:p>
           <a:p>
             <a:pPr indent="0" marL="0">
@@ -11735,7 +11735,7 @@
               <a:buNone/>
             </a:pPr>
             <a:r>
-              <a:rPr lang="en-US" sz="990" dirty="0">
+              <a:rPr lang="en-US" sz="1110" dirty="0">
                 <a:solidFill>
                   <a:srgbClr val="007F72"/>
                 </a:solidFill>
@@ -11745,7 +11745,7 @@
               </a:rPr>
               <a:t>LED 在閃：人眼看不出來，相機看得出來</a:t>
             </a:r>
-            <a:endParaRPr lang="en-US" sz="1630" dirty="0"/>
+            <a:endParaRPr lang="en-US" sz="1830" dirty="0"/>
           </a:p>
         </p:txBody>
       </p:sp>
@@ -11757,8 +11757,8 @@
         </p:nvSpPr>
         <p:spPr>
           <a:xfrm>
-            <a:off x="3760150" y="1742570"/>
-            <a:ext cx="3702038" cy="763326"/>
+            <a:off x="3664629" y="1917989"/>
+            <a:ext cx="4137614" cy="853137"/>
           </a:xfrm>
           <a:prstGeom prst="rect">
             <a:avLst/>
@@ -11777,7 +11777,7 @@
               <a:buNone/>
             </a:pPr>
             <a:r>
-              <a:rPr lang="en-US" sz="890" dirty="0">
+              <a:rPr lang="en-US" sz="990" dirty="0">
                 <a:solidFill>
                   <a:srgbClr val="5F7183"/>
                 </a:solidFill>
@@ -11787,7 +11787,7 @@
               </a:rPr>
               <a:t>Đèn tín hiệu và đèn hậu LED nháy mấy trăm lần mỗi giây. Nếu khung hình rơi đúng lúc đèn tắt, camera chụp được một cái đèn đỏ đang «tắt».</a:t>
             </a:r>
-            <a:endParaRPr lang="en-US" sz="890" dirty="0"/>
+            <a:endParaRPr lang="en-US" sz="990" dirty="0"/>
           </a:p>
           <a:p>
             <a:pPr indent="0" marL="0">
@@ -11797,7 +11797,7 @@
               <a:buNone/>
             </a:pPr>
             <a:r>
-              <a:rPr lang="en-US" sz="820" dirty="0">
+              <a:rPr lang="en-US" sz="910" dirty="0">
                 <a:solidFill>
                   <a:srgbClr val="5F7183"/>
                 </a:solidFill>
@@ -11807,7 +11807,7 @@
               </a:rPr>
               <a:t>紅綠燈和 LED 尾燈每秒閃好幾百次。如果剛好在燈暗的那一瞬間拍，相機就拍到一個「沒亮」的紅燈。</a:t>
             </a:r>
-            <a:endParaRPr lang="en-US" sz="890" dirty="0"/>
+            <a:endParaRPr lang="en-US" sz="990" dirty="0"/>
           </a:p>
         </p:txBody>
       </p:sp>
@@ -11819,8 +11819,8 @@
         </p:nvSpPr>
         <p:spPr>
           <a:xfrm>
-            <a:off x="1681812" y="2806268"/>
-            <a:ext cx="5780375" cy="441647"/>
+            <a:off x="1341758" y="3106840"/>
+            <a:ext cx="6460485" cy="493610"/>
           </a:xfrm>
           <a:prstGeom prst="roundRect">
             <a:avLst>
@@ -11846,8 +11846,8 @@
         </p:nvSpPr>
         <p:spPr>
           <a:xfrm>
-            <a:off x="1811708" y="2858226"/>
-            <a:ext cx="5520583" cy="350719"/>
+            <a:off x="1486937" y="3164912"/>
+            <a:ext cx="6170126" cy="391984"/>
           </a:xfrm>
           <a:prstGeom prst="rect">
             <a:avLst/>
@@ -11866,7 +11866,7 @@
               <a:buNone/>
             </a:pPr>
             <a:r>
-              <a:rPr lang="en-US" sz="890" b="1" dirty="0">
+              <a:rPr lang="en-US" sz="990" b="1" dirty="0">
                 <a:solidFill>
                   <a:srgbClr val="7A4E00"/>
                 </a:solidFill>
@@ -11876,7 +11876,7 @@
               </a:rPr>
               <a:t>Dòng LFM trên datasheet là để chữa đúng chuyện này.</a:t>
             </a:r>
-            <a:endParaRPr lang="en-US" sz="890" dirty="0"/>
+            <a:endParaRPr lang="en-US" sz="990" dirty="0"/>
           </a:p>
           <a:p>
             <a:pPr indent="0" marL="0">
@@ -11886,7 +11886,7 @@
               <a:buNone/>
             </a:pPr>
             <a:r>
-              <a:rPr lang="en-US" sz="820" dirty="0">
+              <a:rPr lang="en-US" sz="910" dirty="0">
                 <a:solidFill>
                   <a:srgbClr val="7A4E00"/>
                 </a:solidFill>
@@ -11896,7 +11896,7 @@
               </a:rPr>
               <a:t>規格表上那行 LFM，就是專門解決這件事的。</a:t>
             </a:r>
-            <a:endParaRPr lang="en-US" sz="890" dirty="0"/>
+            <a:endParaRPr lang="en-US" sz="990" dirty="0"/>
           </a:p>
         </p:txBody>
       </p:sp>
@@ -11916,8 +11916,8 @@
         </p:blipFill>
         <p:spPr>
           <a:xfrm>
-            <a:off x="6663327" y="3338842"/>
-            <a:ext cx="779376" cy="172200"/>
+            <a:off x="7882128" y="109728"/>
+            <a:ext cx="1097280" cy="242439"/>
           </a:xfrm>
           <a:prstGeom prst="rect">
             <a:avLst/>
@@ -11932,8 +11932,8 @@
         </p:nvSpPr>
         <p:spPr>
           <a:xfrm>
-            <a:off x="1402536" y="3390800"/>
-            <a:ext cx="584532" cy="181855"/>
+            <a:off x="1029622" y="101626"/>
+            <a:ext cx="653307" cy="203251"/>
           </a:xfrm>
           <a:prstGeom prst="rect">
             <a:avLst/>
@@ -11949,7 +11949,7 @@
               <a:buNone/>
             </a:pPr>
             <a:r>
-              <a:rPr lang="en-US" sz="640" dirty="0">
+              <a:rPr lang="en-US" sz="710" dirty="0">
                 <a:solidFill>
                   <a:srgbClr val="5F7183"/>
                 </a:solidFill>
@@ -11959,7 +11959,7 @@
               </a:rPr>
               <a:t>5 / 14</a:t>
             </a:r>
-            <a:endParaRPr lang="en-US" sz="640" dirty="0"/>
+            <a:endParaRPr lang="en-US" sz="710" dirty="0"/>
           </a:p>
         </p:txBody>
       </p:sp>
@@ -11971,8 +11971,8 @@
         </p:nvSpPr>
         <p:spPr>
           <a:xfrm>
-            <a:off x="2006553" y="3390800"/>
-            <a:ext cx="1428857" cy="181855"/>
+            <a:off x="1704706" y="101626"/>
+            <a:ext cx="1596974" cy="203251"/>
           </a:xfrm>
           <a:prstGeom prst="rect">
             <a:avLst/>
@@ -11988,7 +11988,7 @@
               <a:buNone/>
             </a:pPr>
             <a:r>
-              <a:rPr lang="en-US" sz="640" dirty="0">
+              <a:rPr lang="en-US" sz="710" dirty="0">
                 <a:solidFill>
                   <a:srgbClr val="5F7183"/>
                 </a:solidFill>
@@ -11998,7 +11998,7 @@
               </a:rPr>
               <a:t>Tiết 2 · 第 2 節</a:t>
             </a:r>
-            <a:endParaRPr lang="en-US" sz="640" dirty="0"/>
+            <a:endParaRPr lang="en-US" sz="710" dirty="0"/>
           </a:p>
         </p:txBody>
       </p:sp>
@@ -12028,8 +12028,8 @@
       </p:nvGrpSpPr>
       <p:grpSpPr>
         <a:xfrm>
-          <a:off x="0" y="0"/>
-          <a:ext cx="0" cy="0"/>
+          <a:off x="898071" y="0"/>
+          <a:ext cx="1" cy="1"/>
           <a:chOff x="0" y="0"/>
           <a:chExt cx="0" cy="0"/>
         </a:xfrm>
@@ -12042,8 +12042,8 @@
         </p:nvSpPr>
         <p:spPr>
           <a:xfrm>
-            <a:off x="6130753" y="-947729"/>
-            <a:ext cx="2987610" cy="2987610"/>
+            <a:off x="6335486" y="-1102179"/>
+            <a:ext cx="3380014" cy="3380014"/>
           </a:xfrm>
           <a:prstGeom prst="ellipse">
             <a:avLst/>
@@ -12067,8 +12067,8 @@
         </p:nvSpPr>
         <p:spPr>
           <a:xfrm>
-            <a:off x="7104973" y="1520297"/>
-            <a:ext cx="1688649" cy="1688649"/>
+            <a:off x="7437664" y="1690007"/>
+            <a:ext cx="1910443" cy="1910443"/>
           </a:xfrm>
           <a:prstGeom prst="ellipse">
             <a:avLst/>
@@ -12089,8 +12089,8 @@
         </p:nvSpPr>
         <p:spPr>
           <a:xfrm>
-            <a:off x="1681812" y="1228031"/>
-            <a:ext cx="3247402" cy="220823"/>
+            <a:off x="1302204" y="1359354"/>
+            <a:ext cx="3673929" cy="249827"/>
           </a:xfrm>
           <a:prstGeom prst="rect">
             <a:avLst/>
@@ -12106,7 +12106,7 @@
               <a:buNone/>
             </a:pPr>
             <a:r>
-              <a:rPr lang="en-US" sz="960" b="1" dirty="0">
+              <a:rPr lang="en-US" sz="1080" b="1" dirty="0">
                 <a:solidFill>
                   <a:srgbClr val="FFB020"/>
                 </a:solidFill>
@@ -12116,7 +12116,7 @@
               </a:rPr>
               <a:t>Phần 2 / 3</a:t>
             </a:r>
-            <a:endParaRPr lang="en-US" sz="960" dirty="0"/>
+            <a:endParaRPr lang="en-US" sz="1080" dirty="0"/>
           </a:p>
         </p:txBody>
       </p:sp>
@@ -12128,8 +12128,8 @@
         </p:nvSpPr>
         <p:spPr>
           <a:xfrm>
-            <a:off x="1681812" y="1481328"/>
-            <a:ext cx="5195843" cy="844324"/>
+            <a:off x="1302204" y="1645920"/>
+            <a:ext cx="5878286" cy="955221"/>
           </a:xfrm>
           <a:prstGeom prst="rect">
             <a:avLst/>
@@ -12148,7 +12148,7 @@
               <a:buNone/>
             </a:pPr>
             <a:r>
-              <a:rPr lang="en-US" sz="2060" b="1" dirty="0">
+              <a:rPr lang="en-US" sz="2330" b="1" dirty="0">
                 <a:solidFill>
                   <a:srgbClr val="FFFFFF"/>
                 </a:solidFill>
@@ -12158,7 +12158,7 @@
               </a:rPr>
               <a:t>Lidar: bước sóng, an toàn mắt, và mấy lần phản hồi</a:t>
             </a:r>
-            <a:endParaRPr lang="en-US" sz="2060" dirty="0"/>
+            <a:endParaRPr lang="en-US" sz="2330" dirty="0"/>
           </a:p>
           <a:p>
             <a:pPr indent="0" marL="0">
@@ -12168,7 +12168,7 @@
               <a:buNone/>
             </a:pPr>
             <a:r>
-              <a:rPr lang="en-US" sz="1210" dirty="0">
+              <a:rPr lang="en-US" sz="1370" dirty="0">
                 <a:solidFill>
                   <a:srgbClr val="AFC3D4"/>
                 </a:solidFill>
@@ -12178,7 +12178,7 @@
               </a:rPr>
               <a:t>光達：波長、眼睛安全，還有幾次回波</a:t>
             </a:r>
-            <a:endParaRPr lang="en-US" sz="2060" dirty="0"/>
+            <a:endParaRPr lang="en-US" sz="2330" dirty="0"/>
           </a:p>
         </p:txBody>
       </p:sp>
@@ -12190,8 +12190,8 @@
         </p:nvSpPr>
         <p:spPr>
           <a:xfrm>
-            <a:off x="1681812" y="2403590"/>
-            <a:ext cx="5195843" cy="454636"/>
+            <a:off x="1302204" y="2689316"/>
+            <a:ext cx="5878286" cy="514350"/>
           </a:xfrm>
           <a:prstGeom prst="rect">
             <a:avLst/>
@@ -12210,7 +12210,7 @@
               <a:buNone/>
             </a:pPr>
             <a:r>
-              <a:rPr lang="en-US" sz="960" dirty="0">
+              <a:rPr lang="en-US" sz="1080" dirty="0">
                 <a:solidFill>
                   <a:srgbClr val="AFC3D4"/>
                 </a:solidFill>
@@ -12220,7 +12220,7 @@
               </a:rPr>
               <a:t>Ba dòng nữa, ít người đọc</a:t>
             </a:r>
-            <a:endParaRPr lang="en-US" sz="960" dirty="0"/>
+            <a:endParaRPr lang="en-US" sz="1080" dirty="0"/>
           </a:p>
           <a:p>
             <a:pPr indent="0" marL="0">
@@ -12230,7 +12230,7 @@
               <a:buNone/>
             </a:pPr>
             <a:r>
-              <a:rPr lang="en-US" sz="850" dirty="0">
+              <a:rPr lang="en-US" sz="960" dirty="0">
                 <a:solidFill>
                   <a:srgbClr val="8AA0B4"/>
                 </a:solidFill>
@@ -12240,7 +12240,7 @@
               </a:rPr>
               <a:t>另外三行，一樣很少人讀</a:t>
             </a:r>
-            <a:endParaRPr lang="en-US" sz="960" dirty="0"/>
+            <a:endParaRPr lang="en-US" sz="1080" dirty="0"/>
           </a:p>
         </p:txBody>
       </p:sp>
@@ -12252,8 +12252,8 @@
         </p:nvSpPr>
         <p:spPr>
           <a:xfrm>
-            <a:off x="1402536" y="3390800"/>
-            <a:ext cx="584532" cy="181855"/>
+            <a:off x="986246" y="102870"/>
+            <a:ext cx="661307" cy="205740"/>
           </a:xfrm>
           <a:prstGeom prst="rect">
             <a:avLst/>
@@ -12269,7 +12269,7 @@
               <a:buNone/>
             </a:pPr>
             <a:r>
-              <a:rPr lang="en-US" sz="640" dirty="0">
+              <a:rPr lang="en-US" sz="720" dirty="0">
                 <a:solidFill>
                   <a:srgbClr val="9FB3C8"/>
                 </a:solidFill>
@@ -12279,7 +12279,7 @@
               </a:rPr>
               <a:t>6 / 14</a:t>
             </a:r>
-            <a:endParaRPr lang="en-US" sz="640" dirty="0"/>
+            <a:endParaRPr lang="en-US" sz="720" dirty="0"/>
           </a:p>
         </p:txBody>
       </p:sp>
@@ -12291,8 +12291,8 @@
         </p:nvSpPr>
         <p:spPr>
           <a:xfrm>
-            <a:off x="2006553" y="3390800"/>
-            <a:ext cx="1428857" cy="181855"/>
+            <a:off x="1669596" y="102870"/>
+            <a:ext cx="1616529" cy="205740"/>
           </a:xfrm>
           <a:prstGeom prst="rect">
             <a:avLst/>
@@ -12308,7 +12308,7 @@
               <a:buNone/>
             </a:pPr>
             <a:r>
-              <a:rPr lang="en-US" sz="640" dirty="0">
+              <a:rPr lang="en-US" sz="720" dirty="0">
                 <a:solidFill>
                   <a:srgbClr val="9FB3C8"/>
                 </a:solidFill>
@@ -12318,7 +12318,7 @@
               </a:rPr>
               <a:t>Tiết 2 · 第 2 節</a:t>
             </a:r>
-            <a:endParaRPr lang="en-US" sz="640" dirty="0"/>
+            <a:endParaRPr lang="en-US" sz="720" dirty="0"/>
           </a:p>
         </p:txBody>
       </p:sp>
@@ -12341,8 +12341,8 @@
       </p:nvGrpSpPr>
       <p:grpSpPr>
         <a:xfrm>
-          <a:off x="0" y="0"/>
-          <a:ext cx="0" cy="0"/>
+          <a:off x="1096600" y="0"/>
+          <a:ext cx="1" cy="1"/>
           <a:chOff x="0" y="0"/>
           <a:chExt cx="0" cy="0"/>
         </a:xfrm>
@@ -12355,8 +12355,8 @@
         </p:nvSpPr>
         <p:spPr>
           <a:xfrm>
-            <a:off x="1681812" y="234326"/>
-            <a:ext cx="5780375" cy="597522"/>
+            <a:off x="1478894" y="222426"/>
+            <a:ext cx="6186212" cy="639474"/>
           </a:xfrm>
           <a:prstGeom prst="rect">
             <a:avLst/>
@@ -12375,7 +12375,7 @@
               <a:buNone/>
             </a:pPr>
             <a:r>
-              <a:rPr lang="en-US" sz="1560" b="1" dirty="0">
+              <a:rPr lang="en-US" sz="1670" b="1" dirty="0">
                 <a:solidFill>
                   <a:srgbClr val="0B1F3A"/>
                 </a:solidFill>
@@ -12385,7 +12385,7 @@
               </a:rPr>
               <a:t>905, 865 hay 1550 nm: chọn bước sóng là chọn đánh đổi</a:t>
             </a:r>
-            <a:endParaRPr lang="en-US" sz="1560" dirty="0"/>
+            <a:endParaRPr lang="en-US" sz="1670" dirty="0"/>
           </a:p>
           <a:p>
             <a:pPr indent="0" marL="0">
@@ -12395,7 +12395,7 @@
               <a:buNone/>
             </a:pPr>
             <a:r>
-              <a:rPr lang="en-US" sz="960" dirty="0">
+              <a:rPr lang="en-US" sz="1030" dirty="0">
                 <a:solidFill>
                   <a:srgbClr val="5F7183"/>
                 </a:solidFill>
@@ -12405,7 +12405,7 @@
               </a:rPr>
               <a:t>905、865 還是 1550 奈米：選波長就是選代價</a:t>
             </a:r>
-            <a:endParaRPr lang="en-US" sz="1560" dirty="0"/>
+            <a:endParaRPr lang="en-US" sz="1670" dirty="0"/>
           </a:p>
         </p:txBody>
       </p:sp>
@@ -12417,8 +12417,8 @@
         </p:nvSpPr>
         <p:spPr>
           <a:xfrm>
-            <a:off x="1681812" y="831848"/>
-            <a:ext cx="5780375" cy="506595"/>
+            <a:off x="1478894" y="861899"/>
+            <a:ext cx="6186212" cy="542162"/>
           </a:xfrm>
           <a:prstGeom prst="roundRect">
             <a:avLst>
@@ -12439,8 +12439,8 @@
         </p:nvSpPr>
         <p:spPr>
           <a:xfrm>
-            <a:off x="1785729" y="883806"/>
-            <a:ext cx="5572542" cy="402678"/>
+            <a:off x="1590107" y="917506"/>
+            <a:ext cx="5963787" cy="430950"/>
           </a:xfrm>
           <a:prstGeom prst="rect">
             <a:avLst/>
@@ -12459,7 +12459,7 @@
               <a:buNone/>
             </a:pPr>
             <a:r>
-              <a:rPr lang="en-US" sz="820" b="1" dirty="0">
+              <a:rPr lang="en-US" sz="870" b="1" dirty="0">
                 <a:solidFill>
                   <a:srgbClr val="007F72"/>
                 </a:solidFill>
@@ -12469,7 +12469,7 @@
               </a:rPr>
               <a:t>Ba con số này đều nằm ở dòng «Laser Wavelength» trên datasheet.</a:t>
             </a:r>
-            <a:endParaRPr lang="en-US" sz="820" dirty="0"/>
+            <a:endParaRPr lang="en-US" sz="870" dirty="0"/>
           </a:p>
           <a:p>
             <a:pPr indent="0" marL="0">
@@ -12479,7 +12479,7 @@
               <a:buNone/>
             </a:pPr>
             <a:r>
-              <a:rPr lang="en-US" sz="710" dirty="0">
+              <a:rPr lang="en-US" sz="760" dirty="0">
                 <a:solidFill>
                   <a:srgbClr val="007F72"/>
                 </a:solidFill>
@@ -12489,7 +12489,7 @@
               </a:rPr>
               <a:t>這三個數字都寫在規格表的 Laser Wavelength 那一行。</a:t>
             </a:r>
-            <a:endParaRPr lang="en-US" sz="820" dirty="0"/>
+            <a:endParaRPr lang="en-US" sz="870" dirty="0"/>
           </a:p>
         </p:txBody>
       </p:sp>
@@ -12508,18 +12508,18 @@
           </p:nvPr>
         </p:nvGraphicFramePr>
         <p:xfrm>
-          <a:off x="1681812" y="1416380"/>
-          <a:ext cx="5780375" cy="914400"/>
+          <a:off x="1478894" y="1487471"/>
+          <a:ext cx="6186212" cy="695080"/>
         </p:xfrm>
         <a:graphic>
           <a:graphicData uri="http://schemas.openxmlformats.org/drawingml/2006/table">
             <a:tbl>
               <a:tblPr/>
               <a:tblGrid>
-                <a:gridCol w="1445094"/>
-                <a:gridCol w="1445094"/>
-                <a:gridCol w="1445094"/>
-                <a:gridCol w="1445094"/>
+                <a:gridCol w="2034540"/>
+                <a:gridCol w="2034540"/>
+                <a:gridCol w="2034540"/>
+                <a:gridCol w="2034540"/>
               </a:tblGrid>
               <a:tr h="384048">
                 <a:tc>
@@ -12531,7 +12531,7 @@
                         <a:buNone/>
                       </a:pPr>
                       <a:r>
-                        <a:rPr lang="en-US" sz="1100" b="1" dirty="0">
+                        <a:rPr lang="en-US" sz="840" b="1" dirty="0">
                           <a:solidFill>
                             <a:srgbClr val="FFFFFF"/>
                           </a:solidFill>
@@ -12541,14 +12541,14 @@
                         </a:rPr>
                         <a:t>Bước sóng</a:t>
                       </a:r>
-                      <a:endParaRPr lang="en-US" sz="1200" dirty="0"/>
+                      <a:endParaRPr lang="en-US" sz="910" dirty="0"/>
                     </a:p>
                     <a:p>
                       <a:pPr algn="l" indent="0" marL="0">
                         <a:buNone/>
                       </a:pPr>
                       <a:r>
-                        <a:rPr lang="en-US" sz="950" dirty="0">
+                        <a:rPr lang="en-US" sz="720" dirty="0">
                           <a:solidFill>
                             <a:srgbClr val="CFE0EC"/>
                           </a:solidFill>
@@ -12558,7 +12558,7 @@
                         </a:rPr>
                         <a:t>波長</a:t>
                       </a:r>
-                      <a:endParaRPr lang="en-US" sz="1200" dirty="0"/>
+                      <a:endParaRPr lang="en-US" sz="910" dirty="0"/>
                     </a:p>
                   </a:txBody>
                   <a:tcPr marL="63500" marR="63500" marT="38100" marB="38100" anchor="ctr">
@@ -12612,7 +12612,7 @@
                         <a:buNone/>
                       </a:pPr>
                       <a:r>
-                        <a:rPr lang="en-US" sz="1100" b="1" dirty="0">
+                        <a:rPr lang="en-US" sz="840" b="1" dirty="0">
                           <a:solidFill>
                             <a:srgbClr val="FFFFFF"/>
                           </a:solidFill>
@@ -12622,14 +12622,14 @@
                         </a:rPr>
                         <a:t>Ai dùng</a:t>
                       </a:r>
-                      <a:endParaRPr lang="en-US" sz="1200" dirty="0"/>
+                      <a:endParaRPr lang="en-US" sz="910" dirty="0"/>
                     </a:p>
                     <a:p>
                       <a:pPr algn="l" indent="0" marL="0">
                         <a:buNone/>
                       </a:pPr>
                       <a:r>
-                        <a:rPr lang="en-US" sz="950" dirty="0">
+                        <a:rPr lang="en-US" sz="720" dirty="0">
                           <a:solidFill>
                             <a:srgbClr val="CFE0EC"/>
                           </a:solidFill>
@@ -12639,7 +12639,7 @@
                         </a:rPr>
                         <a:t>誰在用</a:t>
                       </a:r>
-                      <a:endParaRPr lang="en-US" sz="1200" dirty="0"/>
+                      <a:endParaRPr lang="en-US" sz="910" dirty="0"/>
                     </a:p>
                   </a:txBody>
                   <a:tcPr marL="63500" marR="63500" marT="38100" marB="38100" anchor="ctr">
@@ -12693,7 +12693,7 @@
                         <a:buNone/>
                       </a:pPr>
                       <a:r>
-                        <a:rPr lang="en-US" sz="1100" b="1" dirty="0">
+                        <a:rPr lang="en-US" sz="840" b="1" dirty="0">
                           <a:solidFill>
                             <a:srgbClr val="FFFFFF"/>
                           </a:solidFill>
@@ -12703,14 +12703,14 @@
                         </a:rPr>
                         <a:t>Được lợi gì</a:t>
                       </a:r>
-                      <a:endParaRPr lang="en-US" sz="1200" dirty="0"/>
+                      <a:endParaRPr lang="en-US" sz="910" dirty="0"/>
                     </a:p>
                     <a:p>
                       <a:pPr algn="l" indent="0" marL="0">
                         <a:buNone/>
                       </a:pPr>
                       <a:r>
-                        <a:rPr lang="en-US" sz="950" dirty="0">
+                        <a:rPr lang="en-US" sz="720" dirty="0">
                           <a:solidFill>
                             <a:srgbClr val="CFE0EC"/>
                           </a:solidFill>
@@ -12720,7 +12720,7 @@
                         </a:rPr>
                         <a:t>好處</a:t>
                       </a:r>
-                      <a:endParaRPr lang="en-US" sz="1200" dirty="0"/>
+                      <a:endParaRPr lang="en-US" sz="910" dirty="0"/>
                     </a:p>
                   </a:txBody>
                   <a:tcPr marL="63500" marR="63500" marT="38100" marB="38100" anchor="ctr">
@@ -12774,7 +12774,7 @@
                         <a:buNone/>
                       </a:pPr>
                       <a:r>
-                        <a:rPr lang="en-US" sz="1100" b="1" dirty="0">
+                        <a:rPr lang="en-US" sz="840" b="1" dirty="0">
                           <a:solidFill>
                             <a:srgbClr val="FFFFFF"/>
                           </a:solidFill>
@@ -12784,14 +12784,14 @@
                         </a:rPr>
                         <a:t>Trả giá gì</a:t>
                       </a:r>
-                      <a:endParaRPr lang="en-US" sz="1200" dirty="0"/>
+                      <a:endParaRPr lang="en-US" sz="910" dirty="0"/>
                     </a:p>
                     <a:p>
                       <a:pPr algn="l" indent="0" marL="0">
                         <a:buNone/>
                       </a:pPr>
                       <a:r>
-                        <a:rPr lang="en-US" sz="950" dirty="0">
+                        <a:rPr lang="en-US" sz="720" dirty="0">
                           <a:solidFill>
                             <a:srgbClr val="CFE0EC"/>
                           </a:solidFill>
@@ -12801,7 +12801,7 @@
                         </a:rPr>
                         <a:t>代價</a:t>
                       </a:r>
-                      <a:endParaRPr lang="en-US" sz="1200" dirty="0"/>
+                      <a:endParaRPr lang="en-US" sz="910" dirty="0"/>
                     </a:p>
                   </a:txBody>
                   <a:tcPr marL="63500" marR="63500" marT="38100" marB="38100" anchor="ctr">
@@ -12857,7 +12857,7 @@
                         <a:buNone/>
                       </a:pPr>
                       <a:r>
-                        <a:rPr lang="en-US" sz="1100" b="1" dirty="0">
+                        <a:rPr lang="en-US" sz="840" b="1" dirty="0">
                           <a:solidFill>
                             <a:srgbClr val="0B1F3A"/>
                           </a:solidFill>
@@ -12867,14 +12867,14 @@
                         </a:rPr>
                         <a:t>905 nm</a:t>
                       </a:r>
-                      <a:endParaRPr lang="en-US" sz="1200" dirty="0"/>
+                      <a:endParaRPr lang="en-US" sz="910" dirty="0"/>
                     </a:p>
                     <a:p>
                       <a:pPr algn="l" indent="0" marL="0">
                         <a:buNone/>
                       </a:pPr>
                       <a:r>
-                        <a:rPr lang="en-US" sz="950" dirty="0">
+                        <a:rPr lang="en-US" sz="720" dirty="0">
                           <a:solidFill>
                             <a:srgbClr val="5F7183"/>
                           </a:solidFill>
@@ -12884,7 +12884,7 @@
                         </a:rPr>
                         <a:t>905 奈米</a:t>
                       </a:r>
-                      <a:endParaRPr lang="en-US" sz="1200" dirty="0"/>
+                      <a:endParaRPr lang="en-US" sz="910" dirty="0"/>
                     </a:p>
                   </a:txBody>
                   <a:tcPr marL="63500" marR="63500" marT="38100" marB="38100" anchor="ctr">
@@ -12935,7 +12935,7 @@
                         <a:buNone/>
                       </a:pPr>
                       <a:r>
-                        <a:rPr lang="en-US" sz="1100" dirty="0">
+                        <a:rPr lang="en-US" sz="840" dirty="0">
                           <a:solidFill>
                             <a:srgbClr val="1A2733"/>
                           </a:solidFill>
@@ -12945,14 +12945,14 @@
                         </a:rPr>
                         <a:t>Phổ biến nhất</a:t>
                       </a:r>
-                      <a:endParaRPr lang="en-US" sz="1200" dirty="0"/>
+                      <a:endParaRPr lang="en-US" sz="910" dirty="0"/>
                     </a:p>
                     <a:p>
                       <a:pPr algn="l" indent="0" marL="0">
                         <a:buNone/>
                       </a:pPr>
                       <a:r>
-                        <a:rPr lang="en-US" sz="950" dirty="0">
+                        <a:rPr lang="en-US" sz="720" dirty="0">
                           <a:solidFill>
                             <a:srgbClr val="5F7183"/>
                           </a:solidFill>
@@ -12962,7 +12962,7 @@
                         </a:rPr>
                         <a:t>最常見</a:t>
                       </a:r>
-                      <a:endParaRPr lang="en-US" sz="1200" dirty="0"/>
+                      <a:endParaRPr lang="en-US" sz="910" dirty="0"/>
                     </a:p>
                   </a:txBody>
                   <a:tcPr marL="63500" marR="63500" marT="38100" marB="38100" anchor="ctr">
@@ -13013,7 +13013,7 @@
                         <a:buNone/>
                       </a:pPr>
                       <a:r>
-                        <a:rPr lang="en-US" sz="1100" dirty="0">
+                        <a:rPr lang="en-US" sz="840" dirty="0">
                           <a:solidFill>
                             <a:srgbClr val="1A2733"/>
                           </a:solidFill>
@@ -13023,14 +13023,14 @@
                         </a:rPr>
                         <a:t>Cảm biến silic, rẻ</a:t>
                       </a:r>
-                      <a:endParaRPr lang="en-US" sz="1200" dirty="0"/>
+                      <a:endParaRPr lang="en-US" sz="910" dirty="0"/>
                     </a:p>
                     <a:p>
                       <a:pPr algn="l" indent="0" marL="0">
                         <a:buNone/>
                       </a:pPr>
                       <a:r>
-                        <a:rPr lang="en-US" sz="950" dirty="0">
+                        <a:rPr lang="en-US" sz="720" dirty="0">
                           <a:solidFill>
                             <a:srgbClr val="5F7183"/>
                           </a:solidFill>
@@ -13040,7 +13040,7 @@
                         </a:rPr>
                         <a:t>用矽做接收器，便宜</a:t>
                       </a:r>
-                      <a:endParaRPr lang="en-US" sz="1200" dirty="0"/>
+                      <a:endParaRPr lang="en-US" sz="910" dirty="0"/>
                     </a:p>
                   </a:txBody>
                   <a:tcPr marL="63500" marR="63500" marT="38100" marB="38100" anchor="ctr">
@@ -13091,7 +13091,7 @@
                         <a:buNone/>
                       </a:pPr>
                       <a:r>
-                        <a:rPr lang="en-US" sz="1100" dirty="0">
+                        <a:rPr lang="en-US" sz="840" dirty="0">
                           <a:solidFill>
                             <a:srgbClr val="1A2733"/>
                           </a:solidFill>
@@ -13101,14 +13101,14 @@
                         </a:rPr>
                         <a:t>Tới thẳng võng mạc nên công suất bị siết</a:t>
                       </a:r>
-                      <a:endParaRPr lang="en-US" sz="1200" dirty="0"/>
+                      <a:endParaRPr lang="en-US" sz="910" dirty="0"/>
                     </a:p>
                     <a:p>
                       <a:pPr algn="l" indent="0" marL="0">
                         <a:buNone/>
                       </a:pPr>
                       <a:r>
-                        <a:rPr lang="en-US" sz="950" dirty="0">
+                        <a:rPr lang="en-US" sz="720" dirty="0">
                           <a:solidFill>
                             <a:srgbClr val="5F7183"/>
                           </a:solidFill>
@@ -13118,7 +13118,7 @@
                         </a:rPr>
                         <a:t>會直達視網膜，功率被法規壓住</a:t>
                       </a:r>
-                      <a:endParaRPr lang="en-US" sz="1200" dirty="0"/>
+                      <a:endParaRPr lang="en-US" sz="910" dirty="0"/>
                     </a:p>
                   </a:txBody>
                   <a:tcPr marL="63500" marR="63500" marT="38100" marB="38100" anchor="ctr">
@@ -13171,7 +13171,7 @@
                         <a:buNone/>
                       </a:pPr>
                       <a:r>
-                        <a:rPr lang="en-US" sz="1100" b="1" dirty="0">
+                        <a:rPr lang="en-US" sz="840" b="1" dirty="0">
                           <a:solidFill>
                             <a:srgbClr val="0B1F3A"/>
                           </a:solidFill>
@@ -13181,14 +13181,14 @@
                         </a:rPr>
                         <a:t>865 nm</a:t>
                       </a:r>
-                      <a:endParaRPr lang="en-US" sz="1200" dirty="0"/>
+                      <a:endParaRPr lang="en-US" sz="910" dirty="0"/>
                     </a:p>
                     <a:p>
                       <a:pPr algn="l" indent="0" marL="0">
                         <a:buNone/>
                       </a:pPr>
                       <a:r>
-                        <a:rPr lang="en-US" sz="950" dirty="0">
+                        <a:rPr lang="en-US" sz="720" dirty="0">
                           <a:solidFill>
                             <a:srgbClr val="5F7183"/>
                           </a:solidFill>
@@ -13198,7 +13198,7 @@
                         </a:rPr>
                         <a:t>865 奈米</a:t>
                       </a:r>
-                      <a:endParaRPr lang="en-US" sz="1200" dirty="0"/>
+                      <a:endParaRPr lang="en-US" sz="910" dirty="0"/>
                     </a:p>
                   </a:txBody>
                   <a:tcPr marL="63500" marR="63500" marT="38100" marB="38100" anchor="ctr">
@@ -13249,7 +13249,7 @@
                         <a:buNone/>
                       </a:pPr>
                       <a:r>
-                        <a:rPr lang="en-US" sz="1100" dirty="0">
+                        <a:rPr lang="en-US" sz="840" dirty="0">
                           <a:solidFill>
                             <a:srgbClr val="1A2733"/>
                           </a:solidFill>
@@ -13259,14 +13259,14 @@
                         </a:rPr>
                         <a:t>Ouster OS1</a:t>
                       </a:r>
-                      <a:endParaRPr lang="en-US" sz="1200" dirty="0"/>
+                      <a:endParaRPr lang="en-US" sz="910" dirty="0"/>
                     </a:p>
                     <a:p>
                       <a:pPr algn="l" indent="0" marL="0">
                         <a:buNone/>
                       </a:pPr>
                       <a:r>
-                        <a:rPr lang="en-US" sz="950" dirty="0">
+                        <a:rPr lang="en-US" sz="720" dirty="0">
                           <a:solidFill>
                             <a:srgbClr val="5F7183"/>
                           </a:solidFill>
@@ -13276,7 +13276,7 @@
                         </a:rPr>
                         <a:t>Ouster OS1</a:t>
                       </a:r>
-                      <a:endParaRPr lang="en-US" sz="1200" dirty="0"/>
+                      <a:endParaRPr lang="en-US" sz="910" dirty="0"/>
                     </a:p>
                   </a:txBody>
                   <a:tcPr marL="63500" marR="63500" marT="38100" marB="38100" anchor="ctr">
@@ -13327,7 +13327,7 @@
                         <a:buNone/>
                       </a:pPr>
                       <a:r>
-                        <a:rPr lang="en-US" sz="1100" dirty="0">
+                        <a:rPr lang="en-US" sz="840" dirty="0">
                           <a:solidFill>
                             <a:srgbClr val="1A2733"/>
                           </a:solidFill>
@@ -13337,14 +13337,14 @@
                         </a:rPr>
                         <a:t>Cùng họ với 905</a:t>
                       </a:r>
-                      <a:endParaRPr lang="en-US" sz="1200" dirty="0"/>
+                      <a:endParaRPr lang="en-US" sz="910" dirty="0"/>
                     </a:p>
                     <a:p>
                       <a:pPr algn="l" indent="0" marL="0">
                         <a:buNone/>
                       </a:pPr>
                       <a:r>
-                        <a:rPr lang="en-US" sz="950" dirty="0">
+                        <a:rPr lang="en-US" sz="720" dirty="0">
                           <a:solidFill>
                             <a:srgbClr val="5F7183"/>
                           </a:solidFill>
@@ -13354,7 +13354,7 @@
                         </a:rPr>
                         <a:t>跟 905 同一類</a:t>
                       </a:r>
-                      <a:endParaRPr lang="en-US" sz="1200" dirty="0"/>
+                      <a:endParaRPr lang="en-US" sz="910" dirty="0"/>
                     </a:p>
                   </a:txBody>
                   <a:tcPr marL="63500" marR="63500" marT="38100" marB="38100" anchor="ctr">
@@ -13405,7 +13405,7 @@
                         <a:buNone/>
                       </a:pPr>
                       <a:r>
-                        <a:rPr lang="en-US" sz="1100" dirty="0">
+                        <a:rPr lang="en-US" sz="840" dirty="0">
                           <a:solidFill>
                             <a:srgbClr val="1A2733"/>
                           </a:solidFill>
@@ -13415,14 +13415,14 @@
                         </a:rPr>
                         <a:t>Giống trên</a:t>
                       </a:r>
-                      <a:endParaRPr lang="en-US" sz="1200" dirty="0"/>
+                      <a:endParaRPr lang="en-US" sz="910" dirty="0"/>
                     </a:p>
                     <a:p>
                       <a:pPr algn="l" indent="0" marL="0">
                         <a:buNone/>
                       </a:pPr>
                       <a:r>
-                        <a:rPr lang="en-US" sz="950" dirty="0">
+                        <a:rPr lang="en-US" sz="720" dirty="0">
                           <a:solidFill>
                             <a:srgbClr val="5F7183"/>
                           </a:solidFill>
@@ -13432,7 +13432,7 @@
                         </a:rPr>
                         <a:t>同上</a:t>
                       </a:r>
-                      <a:endParaRPr lang="en-US" sz="1200" dirty="0"/>
+                      <a:endParaRPr lang="en-US" sz="910" dirty="0"/>
                     </a:p>
                   </a:txBody>
                   <a:tcPr marL="63500" marR="63500" marT="38100" marB="38100" anchor="ctr">
@@ -13485,7 +13485,7 @@
                         <a:buNone/>
                       </a:pPr>
                       <a:r>
-                        <a:rPr lang="en-US" sz="1100" b="1" dirty="0">
+                        <a:rPr lang="en-US" sz="840" b="1" dirty="0">
                           <a:solidFill>
                             <a:srgbClr val="0B1F3A"/>
                           </a:solidFill>
@@ -13495,14 +13495,14 @@
                         </a:rPr>
                         <a:t>1550 nm</a:t>
                       </a:r>
-                      <a:endParaRPr lang="en-US" sz="1200" dirty="0"/>
+                      <a:endParaRPr lang="en-US" sz="910" dirty="0"/>
                     </a:p>
                     <a:p>
                       <a:pPr algn="l" indent="0" marL="0">
                         <a:buNone/>
                       </a:pPr>
                       <a:r>
-                        <a:rPr lang="en-US" sz="950" dirty="0">
+                        <a:rPr lang="en-US" sz="720" dirty="0">
                           <a:solidFill>
                             <a:srgbClr val="5F7183"/>
                           </a:solidFill>
@@ -13512,7 +13512,7 @@
                         </a:rPr>
                         <a:t>1550 奈米</a:t>
                       </a:r>
-                      <a:endParaRPr lang="en-US" sz="1200" dirty="0"/>
+                      <a:endParaRPr lang="en-US" sz="910" dirty="0"/>
                     </a:p>
                   </a:txBody>
                   <a:tcPr marL="63500" marR="63500" marT="38100" marB="38100" anchor="ctr">
@@ -13563,7 +13563,7 @@
                         <a:buNone/>
                       </a:pPr>
                       <a:r>
-                        <a:rPr lang="en-US" sz="1100" dirty="0">
+                        <a:rPr lang="en-US" sz="840" dirty="0">
                           <a:solidFill>
                             <a:srgbClr val="1A2733"/>
                           </a:solidFill>
@@ -13573,14 +13573,14 @@
                         </a:rPr>
                         <a:t>Lidar tầm xa cao cấp</a:t>
                       </a:r>
-                      <a:endParaRPr lang="en-US" sz="1200" dirty="0"/>
+                      <a:endParaRPr lang="en-US" sz="910" dirty="0"/>
                     </a:p>
                     <a:p>
                       <a:pPr algn="l" indent="0" marL="0">
                         <a:buNone/>
                       </a:pPr>
                       <a:r>
-                        <a:rPr lang="en-US" sz="950" dirty="0">
+                        <a:rPr lang="en-US" sz="720" dirty="0">
                           <a:solidFill>
                             <a:srgbClr val="5F7183"/>
                           </a:solidFill>
@@ -13590,7 +13590,7 @@
                         </a:rPr>
                         <a:t>高階長距光達</a:t>
                       </a:r>
-                      <a:endParaRPr lang="en-US" sz="1200" dirty="0"/>
+                      <a:endParaRPr lang="en-US" sz="910" dirty="0"/>
                     </a:p>
                   </a:txBody>
                   <a:tcPr marL="63500" marR="63500" marT="38100" marB="38100" anchor="ctr">
@@ -13641,7 +13641,7 @@
                         <a:buNone/>
                       </a:pPr>
                       <a:r>
-                        <a:rPr lang="en-US" sz="1100" dirty="0">
+                        <a:rPr lang="en-US" sz="840" dirty="0">
                           <a:solidFill>
                             <a:srgbClr val="1A2733"/>
                           </a:solidFill>
@@ -13651,14 +13651,14 @@
                         </a:rPr>
                         <a:t>Bị nước trong mắt hấp thụ → bắn mạnh hơn hàng chục lần → nhìn xa hơn</a:t>
                       </a:r>
-                      <a:endParaRPr lang="en-US" sz="1200" dirty="0"/>
+                      <a:endParaRPr lang="en-US" sz="910" dirty="0"/>
                     </a:p>
                     <a:p>
                       <a:pPr algn="l" indent="0" marL="0">
                         <a:buNone/>
                       </a:pPr>
                       <a:r>
-                        <a:rPr lang="en-US" sz="950" dirty="0">
+                        <a:rPr lang="en-US" sz="720" dirty="0">
                           <a:solidFill>
                             <a:srgbClr val="5F7183"/>
                           </a:solidFill>
@@ -13668,7 +13668,7 @@
                         </a:rPr>
                         <a:t>先被眼睛裡的水吸收 → 可以打強幾十倍 → 看得更遠</a:t>
                       </a:r>
-                      <a:endParaRPr lang="en-US" sz="1200" dirty="0"/>
+                      <a:endParaRPr lang="en-US" sz="910" dirty="0"/>
                     </a:p>
                   </a:txBody>
                   <a:tcPr marL="63500" marR="63500" marT="38100" marB="38100" anchor="ctr">
@@ -13719,7 +13719,7 @@
                         <a:buNone/>
                       </a:pPr>
                       <a:r>
-                        <a:rPr lang="en-US" sz="1100" dirty="0">
+                        <a:rPr lang="en-US" sz="840" dirty="0">
                           <a:solidFill>
                             <a:srgbClr val="1A2733"/>
                           </a:solidFill>
@@ -13729,14 +13729,14 @@
                         </a:rPr>
                         <a:t>Cảm biến InGaAs, đắt hơn nhiều</a:t>
                       </a:r>
-                      <a:endParaRPr lang="en-US" sz="1200" dirty="0"/>
+                      <a:endParaRPr lang="en-US" sz="910" dirty="0"/>
                     </a:p>
                     <a:p>
                       <a:pPr algn="l" indent="0" marL="0">
                         <a:buNone/>
                       </a:pPr>
                       <a:r>
-                        <a:rPr lang="en-US" sz="950" dirty="0">
+                        <a:rPr lang="en-US" sz="720" dirty="0">
                           <a:solidFill>
                             <a:srgbClr val="5F7183"/>
                           </a:solidFill>
@@ -13746,7 +13746,7 @@
                         </a:rPr>
                         <a:t>要用銦鎵砷接收器，貴好幾倍</a:t>
                       </a:r>
-                      <a:endParaRPr lang="en-US" sz="1200" dirty="0"/>
+                      <a:endParaRPr lang="en-US" sz="910" dirty="0"/>
                     </a:p>
                   </a:txBody>
                   <a:tcPr marL="63500" marR="63500" marT="38100" marB="38100" anchor="ctr">
@@ -13801,8 +13801,8 @@
         </p:nvSpPr>
         <p:spPr>
           <a:xfrm>
-            <a:off x="1681812" y="3065999"/>
-            <a:ext cx="5780375" cy="324740"/>
+            <a:off x="1478894" y="3252910"/>
+            <a:ext cx="6186212" cy="347540"/>
           </a:xfrm>
           <a:prstGeom prst="rect">
             <a:avLst/>
@@ -13821,7 +13821,7 @@
               <a:buNone/>
             </a:pPr>
             <a:r>
-              <a:rPr lang="en-US" sz="850" b="1" dirty="0">
+              <a:rPr lang="en-US" sz="910" b="1" dirty="0">
                 <a:solidFill>
                   <a:srgbClr val="007F72"/>
                 </a:solidFill>
@@ -13831,7 +13831,7 @@
               </a:rPr>
               <a:t>Một dòng số, ba chuyện: an toàn, nhìn xa, và giá.</a:t>
             </a:r>
-            <a:endParaRPr lang="en-US" sz="850" dirty="0"/>
+            <a:endParaRPr lang="en-US" sz="910" dirty="0"/>
           </a:p>
           <a:p>
             <a:pPr indent="0" marL="0">
@@ -13841,7 +13841,7 @@
               <a:buNone/>
             </a:pPr>
             <a:r>
-              <a:rPr lang="en-US" sz="780" dirty="0">
+              <a:rPr lang="en-US" sz="840" dirty="0">
                 <a:solidFill>
                   <a:srgbClr val="007F72"/>
                 </a:solidFill>
@@ -13851,7 +13851,7 @@
               </a:rPr>
               <a:t>一行數字，背後是三件事：安全、看多遠、多少錢。</a:t>
             </a:r>
-            <a:endParaRPr lang="en-US" sz="850" dirty="0"/>
+            <a:endParaRPr lang="en-US" sz="910" dirty="0"/>
           </a:p>
         </p:txBody>
       </p:sp>
@@ -13871,8 +13871,8 @@
         </p:blipFill>
         <p:spPr>
           <a:xfrm>
-            <a:off x="6663327" y="3338842"/>
-            <a:ext cx="779376" cy="172200"/>
+            <a:off x="7882128" y="109728"/>
+            <a:ext cx="1097280" cy="242439"/>
           </a:xfrm>
           <a:prstGeom prst="rect">
             <a:avLst/>
@@ -13887,8 +13887,8 @@
         </p:nvSpPr>
         <p:spPr>
           <a:xfrm>
-            <a:off x="1402536" y="3390800"/>
-            <a:ext cx="584532" cy="181855"/>
+            <a:off x="1180009" y="97311"/>
+            <a:ext cx="625572" cy="194622"/>
           </a:xfrm>
           <a:prstGeom prst="rect">
             <a:avLst/>
@@ -13904,7 +13904,7 @@
               <a:buNone/>
             </a:pPr>
             <a:r>
-              <a:rPr lang="en-US" sz="640" dirty="0">
+              <a:rPr lang="en-US" sz="680" dirty="0">
                 <a:solidFill>
                   <a:srgbClr val="5F7183"/>
                 </a:solidFill>
@@ -13914,7 +13914,7 @@
               </a:rPr>
               <a:t>7 / 14</a:t>
             </a:r>
-            <a:endParaRPr lang="en-US" sz="640" dirty="0"/>
+            <a:endParaRPr lang="en-US" sz="680" dirty="0"/>
           </a:p>
         </p:txBody>
       </p:sp>
@@ -13926,8 +13926,8 @@
         </p:nvSpPr>
         <p:spPr>
           <a:xfrm>
-            <a:off x="2006553" y="3390800"/>
-            <a:ext cx="1428857" cy="181855"/>
+            <a:off x="1826434" y="97311"/>
+            <a:ext cx="1529176" cy="194622"/>
           </a:xfrm>
           <a:prstGeom prst="rect">
             <a:avLst/>
@@ -13943,7 +13943,7 @@
               <a:buNone/>
             </a:pPr>
             <a:r>
-              <a:rPr lang="en-US" sz="640" dirty="0">
+              <a:rPr lang="en-US" sz="680" dirty="0">
                 <a:solidFill>
                   <a:srgbClr val="5F7183"/>
                 </a:solidFill>
@@ -13953,7 +13953,7 @@
               </a:rPr>
               <a:t>Tiết 2 · 第 2 節</a:t>
             </a:r>
-            <a:endParaRPr lang="en-US" sz="640" dirty="0"/>
+            <a:endParaRPr lang="en-US" sz="680" dirty="0"/>
           </a:p>
         </p:txBody>
       </p:sp>
@@ -13976,8 +13976,8 @@
       </p:nvGrpSpPr>
       <p:grpSpPr>
         <a:xfrm>
-          <a:off x="0" y="0"/>
-          <a:ext cx="0" cy="0"/>
+          <a:off x="942514" y="0"/>
+          <a:ext cx="1" cy="1"/>
           <a:chOff x="0" y="0"/>
           <a:chExt cx="0" cy="0"/>
         </a:xfrm>
@@ -13990,8 +13990,8 @@
         </p:nvSpPr>
         <p:spPr>
           <a:xfrm>
-            <a:off x="1681812" y="325253"/>
-            <a:ext cx="5780375" cy="194844"/>
+            <a:off x="1341758" y="333913"/>
+            <a:ext cx="6460485" cy="217769"/>
           </a:xfrm>
           <a:prstGeom prst="rect">
             <a:avLst/>
@@ -14007,7 +14007,7 @@
               <a:buNone/>
             </a:pPr>
             <a:r>
-              <a:rPr lang="en-US" sz="890" b="1" dirty="0">
+              <a:rPr lang="en-US" sz="990" b="1" dirty="0">
                 <a:solidFill>
                   <a:srgbClr val="007F72"/>
                 </a:solidFill>
@@ -14017,7 +14017,7 @@
               </a:rPr>
               <a:t>An toàn mắt · 眼睛安全</a:t>
             </a:r>
-            <a:endParaRPr lang="en-US" sz="890" dirty="0"/>
+            <a:endParaRPr lang="en-US" sz="990" dirty="0"/>
           </a:p>
         </p:txBody>
       </p:sp>
@@ -14029,8 +14029,8 @@
         </p:nvSpPr>
         <p:spPr>
           <a:xfrm>
-            <a:off x="1681812" y="809116"/>
-            <a:ext cx="1753597" cy="1786071"/>
+            <a:off x="1341758" y="874706"/>
+            <a:ext cx="1959922" cy="1996217"/>
           </a:xfrm>
           <a:prstGeom prst="roundRect">
             <a:avLst>
@@ -14056,8 +14056,8 @@
         </p:nvSpPr>
         <p:spPr>
           <a:xfrm flipV="1">
-            <a:off x="2024218" y="923893"/>
-            <a:ext cx="864344" cy="778259"/>
+            <a:off x="1724451" y="1002988"/>
+            <a:ext cx="966041" cy="869827"/>
           </a:xfrm>
           <a:prstGeom prst="line">
             <a:avLst/>
@@ -14079,8 +14079,8 @@
         </p:nvSpPr>
         <p:spPr>
           <a:xfrm flipV="1">
-            <a:off x="2024218" y="1156114"/>
-            <a:ext cx="1026947" cy="546037"/>
+            <a:off x="1724451" y="1262532"/>
+            <a:ext cx="1147776" cy="610283"/>
           </a:xfrm>
           <a:prstGeom prst="line">
             <a:avLst/>
@@ -14102,8 +14102,8 @@
         </p:nvSpPr>
         <p:spPr>
           <a:xfrm flipV="1">
-            <a:off x="2024218" y="1420775"/>
-            <a:ext cx="1128541" cy="281377"/>
+            <a:off x="1724451" y="1558332"/>
+            <a:ext cx="1261323" cy="314483"/>
           </a:xfrm>
           <a:prstGeom prst="line">
             <a:avLst/>
@@ -14125,8 +14125,8 @@
         </p:nvSpPr>
         <p:spPr>
           <a:xfrm>
-            <a:off x="2024218" y="1702151"/>
-            <a:ext cx="1163089" cy="0"/>
+            <a:off x="1724451" y="1872815"/>
+            <a:ext cx="1299937" cy="1"/>
           </a:xfrm>
           <a:prstGeom prst="line">
             <a:avLst/>
@@ -14148,8 +14148,8 @@
         </p:nvSpPr>
         <p:spPr>
           <a:xfrm>
-            <a:off x="2024218" y="1702151"/>
-            <a:ext cx="1026947" cy="546037"/>
+            <a:off x="1724451" y="1872815"/>
+            <a:ext cx="1147776" cy="610283"/>
           </a:xfrm>
           <a:prstGeom prst="line">
             <a:avLst/>
@@ -14171,8 +14171,8 @@
         </p:nvSpPr>
         <p:spPr>
           <a:xfrm>
-            <a:off x="2024218" y="1702151"/>
-            <a:ext cx="864344" cy="778259"/>
+            <a:off x="1724451" y="1872815"/>
+            <a:ext cx="966041" cy="869827"/>
           </a:xfrm>
           <a:prstGeom prst="line">
             <a:avLst/>
@@ -14194,8 +14194,8 @@
         </p:nvSpPr>
         <p:spPr>
           <a:xfrm>
-            <a:off x="1969207" y="1647140"/>
-            <a:ext cx="110022" cy="110022"/>
+            <a:off x="1662967" y="1811331"/>
+            <a:ext cx="122967" cy="122967"/>
           </a:xfrm>
           <a:prstGeom prst="ellipse">
             <a:avLst/>
@@ -14214,8 +14214,8 @@
         </p:nvSpPr>
         <p:spPr>
           <a:xfrm>
-            <a:off x="2758181" y="1826156"/>
-            <a:ext cx="157174" cy="157174"/>
+            <a:off x="2544769" y="2011409"/>
+            <a:ext cx="175667" cy="175667"/>
           </a:xfrm>
           <a:prstGeom prst="roundRect">
             <a:avLst>
@@ -14236,8 +14236,8 @@
         </p:nvSpPr>
         <p:spPr>
           <a:xfrm>
-            <a:off x="3760150" y="963355"/>
-            <a:ext cx="3702038" cy="714266"/>
+            <a:off x="3664629" y="1047093"/>
+            <a:ext cx="4137614" cy="798305"/>
           </a:xfrm>
           <a:prstGeom prst="rect">
             <a:avLst/>
@@ -14256,7 +14256,7 @@
               <a:buNone/>
             </a:pPr>
             <a:r>
-              <a:rPr lang="en-US" sz="1630" b="1" dirty="0">
+              <a:rPr lang="en-US" sz="1830" b="1" dirty="0">
                 <a:solidFill>
                   <a:srgbClr val="0B1F3A"/>
                 </a:solidFill>
@@ -14266,7 +14266,7 @@
               </a:rPr>
               <a:t>Class 1 eye-safe: dòng này không có thì đừng lắp lên xe</a:t>
             </a:r>
-            <a:endParaRPr lang="en-US" sz="1630" dirty="0"/>
+            <a:endParaRPr lang="en-US" sz="1830" dirty="0"/>
           </a:p>
           <a:p>
             <a:pPr indent="0" marL="0">
@@ -14276,7 +14276,7 @@
               <a:buNone/>
             </a:pPr>
             <a:r>
-              <a:rPr lang="en-US" sz="990" dirty="0">
+              <a:rPr lang="en-US" sz="1110" dirty="0">
                 <a:solidFill>
                   <a:srgbClr val="007F72"/>
                 </a:solidFill>
@@ -14286,7 +14286,7 @@
               </a:rPr>
               <a:t>Class 1 對眼睛安全：沒有這一行就不要裝上車</a:t>
             </a:r>
-            <a:endParaRPr lang="en-US" sz="1630" dirty="0"/>
+            <a:endParaRPr lang="en-US" sz="1830" dirty="0"/>
           </a:p>
         </p:txBody>
       </p:sp>
@@ -14298,8 +14298,8 @@
         </p:nvSpPr>
         <p:spPr>
           <a:xfrm>
-            <a:off x="3760150" y="1742570"/>
-            <a:ext cx="3702038" cy="763326"/>
+            <a:off x="3664629" y="1917989"/>
+            <a:ext cx="4137614" cy="853137"/>
           </a:xfrm>
           <a:prstGeom prst="rect">
             <a:avLst/>
@@ -14318,7 +14318,7 @@
               <a:buNone/>
             </a:pPr>
             <a:r>
-              <a:rPr lang="en-US" sz="890" dirty="0">
+              <a:rPr lang="en-US" sz="990" dirty="0">
                 <a:solidFill>
                   <a:srgbClr val="5F7183"/>
                 </a:solidFill>
@@ -14328,7 +14328,7 @@
               </a:rPr>
               <a:t>OS1 ghi «Class 1 eye-safe per IEC/EN 60825-1». Nghĩa là trong mọi điều kiện sử dụng bình thường, nhìn thẳng vào nó cũng không hại mắt.</a:t>
             </a:r>
-            <a:endParaRPr lang="en-US" sz="890" dirty="0"/>
+            <a:endParaRPr lang="en-US" sz="990" dirty="0"/>
           </a:p>
           <a:p>
             <a:pPr indent="0" marL="0">
@@ -14338,7 +14338,7 @@
               <a:buNone/>
             </a:pPr>
             <a:r>
-              <a:rPr lang="en-US" sz="820" dirty="0">
+              <a:rPr lang="en-US" sz="910" dirty="0">
                 <a:solidFill>
                   <a:srgbClr val="5F7183"/>
                 </a:solidFill>
@@ -14348,7 +14348,7 @@
               </a:rPr>
               <a:t>OS1 寫「Class 1 eye-safe per IEC/EN 60825-1」。意思是在正常使用的情況下，就算直視它也不會傷到眼睛。</a:t>
             </a:r>
-            <a:endParaRPr lang="en-US" sz="890" dirty="0"/>
+            <a:endParaRPr lang="en-US" sz="990" dirty="0"/>
           </a:p>
         </p:txBody>
       </p:sp>
@@ -14360,8 +14360,8 @@
         </p:nvSpPr>
         <p:spPr>
           <a:xfrm>
-            <a:off x="1681812" y="2806268"/>
-            <a:ext cx="5780375" cy="441647"/>
+            <a:off x="1341758" y="3106840"/>
+            <a:ext cx="6460485" cy="493610"/>
           </a:xfrm>
           <a:prstGeom prst="roundRect">
             <a:avLst>
@@ -14387,8 +14387,8 @@
         </p:nvSpPr>
         <p:spPr>
           <a:xfrm>
-            <a:off x="1811708" y="2858226"/>
-            <a:ext cx="5520583" cy="350719"/>
+            <a:off x="1486937" y="3164912"/>
+            <a:ext cx="6170126" cy="391984"/>
           </a:xfrm>
           <a:prstGeom prst="rect">
             <a:avLst/>
@@ -14407,7 +14407,7 @@
               <a:buNone/>
             </a:pPr>
             <a:r>
-              <a:rPr lang="en-US" sz="890" b="1" dirty="0">
+              <a:rPr lang="en-US" sz="990" b="1" dirty="0">
                 <a:solidFill>
                   <a:srgbClr val="7A4E00"/>
                 </a:solidFill>
@@ -14417,7 +14417,7 @@
               </a:rPr>
               <a:t>Đây không phải quảng cáo — đây là điều kiện để được bán.</a:t>
             </a:r>
-            <a:endParaRPr lang="en-US" sz="890" dirty="0"/>
+            <a:endParaRPr lang="en-US" sz="990" dirty="0"/>
           </a:p>
           <a:p>
             <a:pPr indent="0" marL="0">
@@ -14427,7 +14427,7 @@
               <a:buNone/>
             </a:pPr>
             <a:r>
-              <a:rPr lang="en-US" sz="820" dirty="0">
+              <a:rPr lang="en-US" sz="910" dirty="0">
                 <a:solidFill>
                   <a:srgbClr val="7A4E00"/>
                 </a:solidFill>
@@ -14437,7 +14437,7 @@
               </a:rPr>
               <a:t>這不是廣告詞，這是能不能賣的門檻。</a:t>
             </a:r>
-            <a:endParaRPr lang="en-US" sz="890" dirty="0"/>
+            <a:endParaRPr lang="en-US" sz="990" dirty="0"/>
           </a:p>
         </p:txBody>
       </p:sp>
@@ -14457,8 +14457,8 @@
         </p:blipFill>
         <p:spPr>
           <a:xfrm>
-            <a:off x="6663327" y="3338842"/>
-            <a:ext cx="779376" cy="172200"/>
+            <a:off x="7882128" y="109728"/>
+            <a:ext cx="1097280" cy="242439"/>
           </a:xfrm>
           <a:prstGeom prst="rect">
             <a:avLst/>
@@ -14473,8 +14473,8 @@
         </p:nvSpPr>
         <p:spPr>
           <a:xfrm>
-            <a:off x="1402536" y="3390800"/>
-            <a:ext cx="584532" cy="181855"/>
+            <a:off x="1029622" y="101626"/>
+            <a:ext cx="653307" cy="203251"/>
           </a:xfrm>
           <a:prstGeom prst="rect">
             <a:avLst/>
@@ -14490,7 +14490,7 @@
               <a:buNone/>
             </a:pPr>
             <a:r>
-              <a:rPr lang="en-US" sz="640" dirty="0">
+              <a:rPr lang="en-US" sz="710" dirty="0">
                 <a:solidFill>
                   <a:srgbClr val="5F7183"/>
                 </a:solidFill>
@@ -14500,7 +14500,7 @@
               </a:rPr>
               <a:t>8 / 14</a:t>
             </a:r>
-            <a:endParaRPr lang="en-US" sz="640" dirty="0"/>
+            <a:endParaRPr lang="en-US" sz="710" dirty="0"/>
           </a:p>
         </p:txBody>
       </p:sp>
@@ -14512,8 +14512,8 @@
         </p:nvSpPr>
         <p:spPr>
           <a:xfrm>
-            <a:off x="2006553" y="3390800"/>
-            <a:ext cx="1428857" cy="181855"/>
+            <a:off x="1704706" y="101626"/>
+            <a:ext cx="1596974" cy="203251"/>
           </a:xfrm>
           <a:prstGeom prst="rect">
             <a:avLst/>
@@ -14529,7 +14529,7 @@
               <a:buNone/>
             </a:pPr>
             <a:r>
-              <a:rPr lang="en-US" sz="640" dirty="0">
+              <a:rPr lang="en-US" sz="710" dirty="0">
                 <a:solidFill>
                   <a:srgbClr val="5F7183"/>
                 </a:solidFill>
@@ -14539,7 +14539,7 @@
               </a:rPr>
               <a:t>Tiết 2 · 第 2 節</a:t>
             </a:r>
-            <a:endParaRPr lang="en-US" sz="640" dirty="0"/>
+            <a:endParaRPr lang="en-US" sz="710" dirty="0"/>
           </a:p>
         </p:txBody>
       </p:sp>
@@ -14562,8 +14562,8 @@
       </p:nvGrpSpPr>
       <p:grpSpPr>
         <a:xfrm>
-          <a:off x="0" y="0"/>
-          <a:ext cx="0" cy="0"/>
+          <a:off x="942514" y="0"/>
+          <a:ext cx="1" cy="1"/>
           <a:chOff x="0" y="0"/>
           <a:chExt cx="0" cy="0"/>
         </a:xfrm>
@@ -14576,8 +14576,8 @@
         </p:nvSpPr>
         <p:spPr>
           <a:xfrm>
-            <a:off x="1681812" y="325253"/>
-            <a:ext cx="5780375" cy="194844"/>
+            <a:off x="1341758" y="333913"/>
+            <a:ext cx="6460485" cy="217769"/>
           </a:xfrm>
           <a:prstGeom prst="rect">
             <a:avLst/>
@@ -14593,7 +14593,7 @@
               <a:buNone/>
             </a:pPr>
             <a:r>
-              <a:rPr lang="en-US" sz="890" b="1" dirty="0">
+              <a:rPr lang="en-US" sz="990" b="1" dirty="0">
                 <a:solidFill>
                   <a:srgbClr val="007F72"/>
                 </a:solidFill>
@@ -14603,7 +14603,7 @@
               </a:rPr>
               <a:t>Số lần phản hồi · 回波次數</a:t>
             </a:r>
-            <a:endParaRPr lang="en-US" sz="890" dirty="0"/>
+            <a:endParaRPr lang="en-US" sz="990" dirty="0"/>
           </a:p>
         </p:txBody>
       </p:sp>
@@ -14615,8 +14615,8 @@
         </p:nvSpPr>
         <p:spPr>
           <a:xfrm>
-            <a:off x="1681812" y="809116"/>
-            <a:ext cx="1753597" cy="1786071"/>
+            <a:off x="1341758" y="874706"/>
+            <a:ext cx="1959922" cy="1996217"/>
           </a:xfrm>
           <a:prstGeom prst="roundRect">
             <a:avLst>
@@ -14642,8 +14642,8 @@
         </p:nvSpPr>
         <p:spPr>
           <a:xfrm flipH="1" flipV="1">
-            <a:off x="2258548" y="941642"/>
-            <a:ext cx="300063" cy="444862"/>
+            <a:off x="1986350" y="1022825"/>
+            <a:ext cx="335369" cy="497204"/>
           </a:xfrm>
           <a:prstGeom prst="line">
             <a:avLst/>
@@ -14665,8 +14665,8 @@
         </p:nvSpPr>
         <p:spPr>
           <a:xfrm flipH="1" flipV="1">
-            <a:off x="2401724" y="873350"/>
-            <a:ext cx="156887" cy="513154"/>
+            <a:off x="2146373" y="946498"/>
+            <a:ext cx="175346" cy="573531"/>
           </a:xfrm>
           <a:prstGeom prst="line">
             <a:avLst/>
@@ -14688,8 +14688,8 @@
         </p:nvSpPr>
         <p:spPr>
           <a:xfrm flipV="1">
-            <a:off x="2558611" y="849903"/>
-            <a:ext cx="0" cy="536601"/>
+            <a:off x="2321719" y="920292"/>
+            <a:ext cx="1" cy="599736"/>
           </a:xfrm>
           <a:prstGeom prst="line">
             <a:avLst/>
@@ -14711,8 +14711,8 @@
         </p:nvSpPr>
         <p:spPr>
           <a:xfrm flipV="1">
-            <a:off x="2558611" y="873350"/>
-            <a:ext cx="156887" cy="513154"/>
+            <a:off x="2321719" y="946498"/>
+            <a:ext cx="175346" cy="573531"/>
           </a:xfrm>
           <a:prstGeom prst="line">
             <a:avLst/>
@@ -14734,8 +14734,8 @@
         </p:nvSpPr>
         <p:spPr>
           <a:xfrm flipV="1">
-            <a:off x="2558611" y="941642"/>
-            <a:ext cx="300063" cy="444862"/>
+            <a:off x="2321719" y="1022825"/>
+            <a:ext cx="335369" cy="497204"/>
           </a:xfrm>
           <a:prstGeom prst="line">
             <a:avLst/>
@@ -14757,8 +14757,8 @@
         </p:nvSpPr>
         <p:spPr>
           <a:xfrm>
-            <a:off x="2514602" y="1342495"/>
-            <a:ext cx="88018" cy="88018"/>
+            <a:off x="2272532" y="1470842"/>
+            <a:ext cx="98373" cy="98373"/>
           </a:xfrm>
           <a:prstGeom prst="ellipse">
             <a:avLst/>
@@ -14777,8 +14777,8 @@
         </p:nvSpPr>
         <p:spPr>
           <a:xfrm flipH="1" flipV="1">
-            <a:off x="2033736" y="2032492"/>
-            <a:ext cx="524875" cy="111566"/>
+            <a:off x="1735088" y="2242023"/>
+            <a:ext cx="586630" cy="124693"/>
           </a:xfrm>
           <a:prstGeom prst="line">
             <a:avLst/>
@@ -14800,8 +14800,8 @@
         </p:nvSpPr>
         <p:spPr>
           <a:xfrm flipH="1" flipV="1">
-            <a:off x="2220917" y="1727041"/>
-            <a:ext cx="337694" cy="417017"/>
+            <a:off x="1944293" y="1900633"/>
+            <a:ext cx="377426" cy="466083"/>
           </a:xfrm>
           <a:prstGeom prst="line">
             <a:avLst/>
@@ -14823,8 +14823,8 @@
         </p:nvSpPr>
         <p:spPr>
           <a:xfrm flipV="1">
-            <a:off x="2558611" y="1607457"/>
-            <a:ext cx="0" cy="536601"/>
+            <a:off x="2321719" y="1766979"/>
+            <a:ext cx="1" cy="599736"/>
           </a:xfrm>
           <a:prstGeom prst="line">
             <a:avLst/>
@@ -14846,8 +14846,8 @@
         </p:nvSpPr>
         <p:spPr>
           <a:xfrm flipV="1">
-            <a:off x="2558611" y="1727041"/>
-            <a:ext cx="337694" cy="417017"/>
+            <a:off x="2321719" y="1900633"/>
+            <a:ext cx="377426" cy="466083"/>
           </a:xfrm>
           <a:prstGeom prst="line">
             <a:avLst/>
@@ -14869,8 +14869,8 @@
         </p:nvSpPr>
         <p:spPr>
           <a:xfrm flipV="1">
-            <a:off x="2558611" y="2032492"/>
-            <a:ext cx="524875" cy="111566"/>
+            <a:off x="2321719" y="2242023"/>
+            <a:ext cx="586630" cy="124693"/>
           </a:xfrm>
           <a:prstGeom prst="line">
             <a:avLst/>
@@ -14892,8 +14892,8 @@
         </p:nvSpPr>
         <p:spPr>
           <a:xfrm>
-            <a:off x="2514602" y="2100049"/>
-            <a:ext cx="88018" cy="88018"/>
+            <a:off x="2272532" y="2317528"/>
+            <a:ext cx="98373" cy="98373"/>
           </a:xfrm>
           <a:prstGeom prst="ellipse">
             <a:avLst/>
@@ -14912,8 +14912,8 @@
         </p:nvSpPr>
         <p:spPr>
           <a:xfrm>
-            <a:off x="3760150" y="963355"/>
-            <a:ext cx="3702038" cy="714266"/>
+            <a:off x="3664629" y="1047093"/>
+            <a:ext cx="4137614" cy="798305"/>
           </a:xfrm>
           <a:prstGeom prst="rect">
             <a:avLst/>
@@ -14932,7 +14932,7 @@
               <a:buNone/>
             </a:pPr>
             <a:r>
-              <a:rPr lang="en-US" sz="1630" b="1" dirty="0">
+              <a:rPr lang="en-US" sz="1830" b="1" dirty="0">
                 <a:solidFill>
                   <a:srgbClr val="0B1F3A"/>
                 </a:solidFill>
@@ -14942,7 +14942,7 @@
               </a:rPr>
               <a:t>«up to 2 returns»: một tia bắn ra có thể vọng về hai lần</a:t>
             </a:r>
-            <a:endParaRPr lang="en-US" sz="1630" dirty="0"/>
+            <a:endParaRPr lang="en-US" sz="1830" dirty="0"/>
           </a:p>
           <a:p>
             <a:pPr indent="0" marL="0">
@@ -14952,7 +14952,7 @@
               <a:buNone/>
             </a:pPr>
             <a:r>
-              <a:rPr lang="en-US" sz="990" dirty="0">
+              <a:rPr lang="en-US" sz="1110" dirty="0">
                 <a:solidFill>
                   <a:srgbClr val="007F72"/>
                 </a:solidFill>
@@ -14962,7 +14962,7 @@
               </a:rPr>
               <a:t>「最多兩次回波」：一道雷射射出去，可能彈回來兩次</a:t>
             </a:r>
-            <a:endParaRPr lang="en-US" sz="1630" dirty="0"/>
+            <a:endParaRPr lang="en-US" sz="1830" dirty="0"/>
           </a:p>
         </p:txBody>
       </p:sp>
@@ -14974,8 +14974,8 @@
         </p:nvSpPr>
         <p:spPr>
           <a:xfrm>
-            <a:off x="3760150" y="1742570"/>
-            <a:ext cx="3702038" cy="763326"/>
+            <a:off x="3664629" y="1917989"/>
+            <a:ext cx="4137614" cy="853137"/>
           </a:xfrm>
           <a:prstGeom prst="rect">
             <a:avLst/>
@@ -14994,7 +14994,7 @@
               <a:buNone/>
             </a:pPr>
             <a:r>
-              <a:rPr lang="en-US" sz="890" dirty="0">
+              <a:rPr lang="en-US" sz="990" dirty="0">
                 <a:solidFill>
                   <a:srgbClr val="5F7183"/>
                 </a:solidFill>
@@ -15004,7 +15004,7 @@
               </a:rPr>
               <a:t>Tia xuyên qua màn mưa, qua lá cây, qua khói bụi rồi mới chạm vật thật. Nếu cảm biến chỉ nhận một lần vọng, nó có thể coi hạt mưa là vật cản.</a:t>
             </a:r>
-            <a:endParaRPr lang="en-US" sz="890" dirty="0"/>
+            <a:endParaRPr lang="en-US" sz="990" dirty="0"/>
           </a:p>
           <a:p>
             <a:pPr indent="0" marL="0">
@@ -15014,7 +15014,7 @@
               <a:buNone/>
             </a:pPr>
             <a:r>
-              <a:rPr lang="en-US" sz="820" dirty="0">
+              <a:rPr lang="en-US" sz="910" dirty="0">
                 <a:solidFill>
                   <a:srgbClr val="5F7183"/>
                 </a:solidFill>
@@ -15024,7 +15024,7 @@
               </a:rPr>
               <a:t>雷射穿過雨幕、樹葉、煙塵，才打到真正的東西。如果感測器只收第一次回波，它可能把雨滴當成障礙物。</a:t>
             </a:r>
-            <a:endParaRPr lang="en-US" sz="890" dirty="0"/>
+            <a:endParaRPr lang="en-US" sz="990" dirty="0"/>
           </a:p>
         </p:txBody>
       </p:sp>
@@ -15036,8 +15036,8 @@
         </p:nvSpPr>
         <p:spPr>
           <a:xfrm>
-            <a:off x="1681812" y="2806268"/>
-            <a:ext cx="5780375" cy="441647"/>
+            <a:off x="1341758" y="3106840"/>
+            <a:ext cx="6460485" cy="493610"/>
           </a:xfrm>
           <a:prstGeom prst="roundRect">
             <a:avLst>
@@ -15063,8 +15063,8 @@
         </p:nvSpPr>
         <p:spPr>
           <a:xfrm>
-            <a:off x="1811708" y="2858226"/>
-            <a:ext cx="5520583" cy="350719"/>
+            <a:off x="1486937" y="3164912"/>
+            <a:ext cx="6170126" cy="391984"/>
           </a:xfrm>
           <a:prstGeom prst="rect">
             <a:avLst/>
@@ -15083,7 +15083,7 @@
               <a:buNone/>
             </a:pPr>
             <a:r>
-              <a:rPr lang="en-US" sz="890" b="1" dirty="0">
+              <a:rPr lang="en-US" sz="990" b="1" dirty="0">
                 <a:solidFill>
                   <a:srgbClr val="7A4E00"/>
                 </a:solidFill>
@@ -15093,7 +15093,7 @@
               </a:rPr>
               <a:t>Tuần 3 ta nói «tuyết bay cũng phản xạ» — dòng này chính là cách chữa.</a:t>
             </a:r>
-            <a:endParaRPr lang="en-US" sz="890" dirty="0"/>
+            <a:endParaRPr lang="en-US" sz="990" dirty="0"/>
           </a:p>
           <a:p>
             <a:pPr indent="0" marL="0">
@@ -15103,7 +15103,7 @@
               <a:buNone/>
             </a:pPr>
             <a:r>
-              <a:rPr lang="en-US" sz="820" dirty="0">
+              <a:rPr lang="en-US" sz="910" dirty="0">
                 <a:solidFill>
                   <a:srgbClr val="7A4E00"/>
                 </a:solidFill>
@@ -15113,7 +15113,7 @@
               </a:rPr>
               <a:t>第三週講過「飄著的雪也會反射」——這一行就是解法。</a:t>
             </a:r>
-            <a:endParaRPr lang="en-US" sz="890" dirty="0"/>
+            <a:endParaRPr lang="en-US" sz="990" dirty="0"/>
           </a:p>
         </p:txBody>
       </p:sp>
@@ -15133,8 +15133,8 @@
         </p:blipFill>
         <p:spPr>
           <a:xfrm>
-            <a:off x="6663327" y="3338842"/>
-            <a:ext cx="779376" cy="172200"/>
+            <a:off x="7882128" y="109728"/>
+            <a:ext cx="1097280" cy="242439"/>
           </a:xfrm>
           <a:prstGeom prst="rect">
             <a:avLst/>
@@ -15149,8 +15149,8 @@
         </p:nvSpPr>
         <p:spPr>
           <a:xfrm>
-            <a:off x="1402536" y="3390800"/>
-            <a:ext cx="584532" cy="181855"/>
+            <a:off x="1029622" y="101626"/>
+            <a:ext cx="653307" cy="203251"/>
           </a:xfrm>
           <a:prstGeom prst="rect">
             <a:avLst/>
@@ -15166,7 +15166,7 @@
               <a:buNone/>
             </a:pPr>
             <a:r>
-              <a:rPr lang="en-US" sz="640" dirty="0">
+              <a:rPr lang="en-US" sz="710" dirty="0">
                 <a:solidFill>
                   <a:srgbClr val="5F7183"/>
                 </a:solidFill>
@@ -15176,7 +15176,7 @@
               </a:rPr>
               <a:t>9 / 14</a:t>
             </a:r>
-            <a:endParaRPr lang="en-US" sz="640" dirty="0"/>
+            <a:endParaRPr lang="en-US" sz="710" dirty="0"/>
           </a:p>
         </p:txBody>
       </p:sp>
@@ -15188,8 +15188,8 @@
         </p:nvSpPr>
         <p:spPr>
           <a:xfrm>
-            <a:off x="2006553" y="3390800"/>
-            <a:ext cx="1428857" cy="181855"/>
+            <a:off x="1704706" y="101626"/>
+            <a:ext cx="1596974" cy="203251"/>
           </a:xfrm>
           <a:prstGeom prst="rect">
             <a:avLst/>
@@ -15205,7 +15205,7 @@
               <a:buNone/>
             </a:pPr>
             <a:r>
-              <a:rPr lang="en-US" sz="640" dirty="0">
+              <a:rPr lang="en-US" sz="710" dirty="0">
                 <a:solidFill>
                   <a:srgbClr val="5F7183"/>
                 </a:solidFill>
@@ -15215,7 +15215,7 @@
               </a:rPr>
               <a:t>Tiết 2 · 第 2 節</a:t>
             </a:r>
-            <a:endParaRPr lang="en-US" sz="640" dirty="0"/>
+            <a:endParaRPr lang="en-US" sz="710" dirty="0"/>
           </a:p>
         </p:txBody>
       </p:sp>

--- a/第五週(10-08)/第五週_第2節_簡報.pptx
+++ b/第五週(10-08)/第五週_第2節_簡報.pptx
@@ -440,11 +440,154 @@
                 <a:spcPct val="115000"/>
               </a:lnSpc>
               <a:spcAft>
-                <a:spcPts val="600"/>
-              </a:spcAft>
-            </a:pPr>
-            <a:r>
-              <a:rPr sz="1200" lang="zh-TW" dirty="0">
+                <a:spcPts val="500"/>
+              </a:spcAft>
+            </a:pPr>
+            <a:r>
+              <a:rPr sz="1000" b="1" lang="zh-TW" dirty="0">
+                <a:solidFill>
+                  <a:srgbClr val="000000"/>
+                </a:solidFill>
+                <a:latin typeface="Arial Unicode MS"/>
+                <a:ea typeface="Arial Unicode MS"/>
+                <a:cs typeface="Arial Unicode MS"/>
+              </a:rPr>
+              <a:t>▍這一張要做什麼</a:t>
+            </a:r>
+            <a:r>
+              <a:rPr sz="1000" lang="zh-TW" dirty="0">
+                <a:solidFill>
+                  <a:srgbClr val="000000"/>
+                </a:solidFill>
+                <a:latin typeface="Arial Unicode MS"/>
+                <a:ea typeface="Arial Unicode MS"/>
+                <a:cs typeface="Arial Unicode MS"/>
+              </a:rPr>
+              <a:t>
+</a:t>
+            </a:r>
+          </a:p>
+          <a:p>
+            <a:pPr algn="l">
+              <a:lnSpc>
+                <a:spcPct val="115000"/>
+              </a:lnSpc>
+              <a:spcAft>
+                <a:spcPts val="500"/>
+              </a:spcAft>
+            </a:pPr>
+            <a:r>
+              <a:rPr sz="1000" lang="zh-TW" dirty="0">
+                <a:solidFill>
+                  <a:srgbClr val="000000"/>
+                </a:solidFill>
+                <a:latin typeface="Arial Unicode MS"/>
+                <a:ea typeface="Arial Unicode MS"/>
+                <a:cs typeface="Arial Unicode MS"/>
+              </a:rPr>
+              <a:t>第二節開場。從「看得多遠多清楚」進到「看得準不準、合不合得起來」。
+</a:t>
+            </a:r>
+          </a:p>
+          <a:p>
+            <a:pPr algn="l">
+              <a:lnSpc>
+                <a:spcPct val="115000"/>
+              </a:lnSpc>
+              <a:spcAft>
+                <a:spcPts val="500"/>
+              </a:spcAft>
+            </a:pPr>
+            <a:r>
+              <a:rPr sz="1000" b="1" lang="zh-TW" dirty="0">
+                <a:solidFill>
+                  <a:srgbClr val="000000"/>
+                </a:solidFill>
+                <a:latin typeface="Arial Unicode MS"/>
+                <a:ea typeface="Arial Unicode MS"/>
+                <a:cs typeface="Arial Unicode MS"/>
+              </a:rPr>
+              <a:t>▍畫面上圈這裡</a:t>
+            </a:r>
+            <a:r>
+              <a:rPr sz="1000" lang="zh-TW" dirty="0">
+                <a:solidFill>
+                  <a:srgbClr val="000000"/>
+                </a:solidFill>
+                <a:latin typeface="Arial Unicode MS"/>
+                <a:ea typeface="Arial Unicode MS"/>
+                <a:cs typeface="Arial Unicode MS"/>
+              </a:rPr>
+              <a:t>
+</a:t>
+            </a:r>
+          </a:p>
+          <a:p>
+            <a:pPr algn="l">
+              <a:lnSpc>
+                <a:spcPct val="115000"/>
+              </a:lnSpc>
+              <a:spcAft>
+                <a:spcPts val="500"/>
+              </a:spcAft>
+            </a:pPr>
+            <a:r>
+              <a:rPr sz="1000" lang="zh-TW" dirty="0">
+                <a:solidFill>
+                  <a:srgbClr val="000000"/>
+                </a:solidFill>
+                <a:latin typeface="Arial Unicode MS"/>
+                <a:ea typeface="Arial Unicode MS"/>
+                <a:cs typeface="Arial Unicode MS"/>
+              </a:rPr>
+              <a:t>圈主標「第二頁」，說明這些是上一節沒碰到的規格行。
+</a:t>
+            </a:r>
+          </a:p>
+          <a:p>
+            <a:pPr algn="l">
+              <a:lnSpc>
+                <a:spcPct val="115000"/>
+              </a:lnSpc>
+              <a:spcAft>
+                <a:spcPts val="500"/>
+              </a:spcAft>
+            </a:pPr>
+            <a:r>
+              <a:rPr sz="1000" b="1" lang="zh-TW" dirty="0">
+                <a:solidFill>
+                  <a:srgbClr val="000000"/>
+                </a:solidFill>
+                <a:latin typeface="Arial Unicode MS"/>
+                <a:ea typeface="Arial Unicode MS"/>
+                <a:cs typeface="Arial Unicode MS"/>
+              </a:rPr>
+              <a:t>▍以下照著唸</a:t>
+            </a:r>
+            <a:r>
+              <a:rPr sz="1000" lang="zh-TW" dirty="0">
+                <a:solidFill>
+                  <a:srgbClr val="000000"/>
+                </a:solidFill>
+                <a:latin typeface="Arial Unicode MS"/>
+                <a:ea typeface="Arial Unicode MS"/>
+                <a:cs typeface="Arial Unicode MS"/>
+              </a:rPr>
+              <a:t>
+</a:t>
+            </a:r>
+          </a:p>
+          <a:p>
+            <a:pPr algn="l">
+              <a:lnSpc>
+                <a:spcPct val="115000"/>
+              </a:lnSpc>
+              <a:spcAft>
+                <a:spcPts val="500"/>
+              </a:spcAft>
+            </a:pPr>
+            <a:r>
+              <a:rPr sz="1000" lang="zh-TW" dirty="0">
                 <a:solidFill>
                   <a:srgbClr val="000000"/>
                 </a:solidFill>
@@ -462,11 +605,11 @@
                 <a:spcPct val="115000"/>
               </a:lnSpc>
               <a:spcAft>
-                <a:spcPts val="600"/>
-              </a:spcAft>
-            </a:pPr>
-            <a:r>
-              <a:rPr sz="1200" lang="zh-TW" dirty="0">
+                <a:spcPts val="500"/>
+              </a:spcAft>
+            </a:pPr>
+            <a:r>
+              <a:rPr sz="1000" lang="zh-TW" dirty="0">
                 <a:solidFill>
                   <a:srgbClr val="000000"/>
                 </a:solidFill>
@@ -477,7 +620,7 @@
               <a:t>上一節我們找的四個數字，是規格表的</a:t>
             </a:r>
             <a:r>
-              <a:rPr sz="1200" b="1" lang="zh-TW" dirty="0">
+              <a:rPr sz="1000" b="1" lang="zh-TW" dirty="0">
                 <a:solidFill>
                   <a:srgbClr val="000000"/>
                 </a:solidFill>
@@ -488,7 +631,7 @@
               <a:t>第一頁</a:t>
             </a:r>
             <a:r>
-              <a:rPr sz="1200" lang="zh-TW" dirty="0">
+              <a:rPr sz="1000" lang="zh-TW" dirty="0">
                 <a:solidFill>
                   <a:srgbClr val="000000"/>
                 </a:solidFill>
@@ -506,11 +649,11 @@
                 <a:spcPct val="115000"/>
               </a:lnSpc>
               <a:spcAft>
-                <a:spcPts val="600"/>
-              </a:spcAft>
-            </a:pPr>
-            <a:r>
-              <a:rPr sz="1200" lang="zh-TW" dirty="0">
+                <a:spcPts val="500"/>
+              </a:spcAft>
+            </a:pPr>
+            <a:r>
+              <a:rPr sz="1000" lang="zh-TW" dirty="0">
                 <a:solidFill>
                   <a:srgbClr val="000000"/>
                 </a:solidFill>
@@ -521,7 +664,7 @@
               <a:t>這一節我要帶各位往下翻。第二頁上還有一堆數字，大部分的人不看，可是</a:t>
             </a:r>
             <a:r>
-              <a:rPr sz="1200" b="1" lang="zh-TW" dirty="0">
+              <a:rPr sz="1000" b="1" lang="zh-TW" dirty="0">
                 <a:solidFill>
                   <a:srgbClr val="000000"/>
                 </a:solidFill>
@@ -532,7 +675,7 @@
               <a:t>真的出事的時候，常常是出在那幾行</a:t>
             </a:r>
             <a:r>
-              <a:rPr sz="1200" lang="zh-TW" dirty="0">
+              <a:rPr sz="1000" lang="zh-TW" dirty="0">
                 <a:solidFill>
                   <a:srgbClr val="000000"/>
                 </a:solidFill>
@@ -550,11 +693,11 @@
                 <a:spcPct val="115000"/>
               </a:lnSpc>
               <a:spcAft>
-                <a:spcPts val="600"/>
-              </a:spcAft>
-            </a:pPr>
-            <a:r>
-              <a:rPr sz="1200" lang="zh-TW" dirty="0">
+                <a:spcPts val="500"/>
+              </a:spcAft>
+            </a:pPr>
+            <a:r>
+              <a:rPr sz="1000" lang="zh-TW" dirty="0">
                 <a:solidFill>
                   <a:srgbClr val="000000"/>
                 </a:solidFill>
@@ -572,11 +715,11 @@
                 <a:spcPct val="115000"/>
               </a:lnSpc>
               <a:spcAft>
-                <a:spcPts val="600"/>
-              </a:spcAft>
-            </a:pPr>
-            <a:r>
-              <a:rPr sz="1200" lang="zh-TW" dirty="0">
+                <a:spcPts val="500"/>
+              </a:spcAft>
+            </a:pPr>
+            <a:r>
+              <a:rPr sz="1000" lang="zh-TW" dirty="0">
                 <a:solidFill>
                   <a:srgbClr val="000000"/>
                 </a:solidFill>
@@ -587,7 +730,7 @@
               <a:t>第一組是相機的：</a:t>
             </a:r>
             <a:r>
-              <a:rPr sz="1200" b="1" lang="zh-TW" dirty="0">
+              <a:rPr sz="1000" b="1" lang="zh-TW" dirty="0">
                 <a:solidFill>
                   <a:srgbClr val="000000"/>
                 </a:solidFill>
@@ -598,7 +741,7 @@
               <a:t>快門怎麼掃、動態範圍多少、LED 閃爍怎麼處理</a:t>
             </a:r>
             <a:r>
-              <a:rPr sz="1200" lang="zh-TW" dirty="0">
+              <a:rPr sz="1000" lang="zh-TW" dirty="0">
                 <a:solidFill>
                   <a:srgbClr val="000000"/>
                 </a:solidFill>
@@ -616,11 +759,11 @@
                 <a:spcPct val="115000"/>
               </a:lnSpc>
               <a:spcAft>
-                <a:spcPts val="600"/>
-              </a:spcAft>
-            </a:pPr>
-            <a:r>
-              <a:rPr sz="1200" lang="zh-TW" dirty="0">
+                <a:spcPts val="500"/>
+              </a:spcAft>
+            </a:pPr>
+            <a:r>
+              <a:rPr sz="1000" lang="zh-TW" dirty="0">
                 <a:solidFill>
                   <a:srgbClr val="000000"/>
                 </a:solidFill>
@@ -631,7 +774,7 @@
               <a:t>第二組是光達的：</a:t>
             </a:r>
             <a:r>
-              <a:rPr sz="1200" b="1" lang="zh-TW" dirty="0">
+              <a:rPr sz="1000" b="1" lang="zh-TW" dirty="0">
                 <a:solidFill>
                   <a:srgbClr val="000000"/>
                 </a:solidFill>
@@ -642,7 +785,7 @@
               <a:t>波長、眼睛安全等級、幾次回波</a:t>
             </a:r>
             <a:r>
-              <a:rPr sz="1200" lang="zh-TW" dirty="0">
+              <a:rPr sz="1000" lang="zh-TW" dirty="0">
                 <a:solidFill>
                   <a:srgbClr val="000000"/>
                 </a:solidFill>
@@ -660,11 +803,11 @@
                 <a:spcPct val="115000"/>
               </a:lnSpc>
               <a:spcAft>
-                <a:spcPts val="600"/>
-              </a:spcAft>
-            </a:pPr>
-            <a:r>
-              <a:rPr sz="1200" lang="zh-TW" dirty="0">
+                <a:spcPts val="500"/>
+              </a:spcAft>
+            </a:pPr>
+            <a:r>
+              <a:rPr sz="1000" lang="zh-TW" dirty="0">
                 <a:solidFill>
                   <a:srgbClr val="000000"/>
                 </a:solidFill>
@@ -675,7 +818,7 @@
               <a:t>第三組是兩種都有的，而且是最多人忽略的：</a:t>
             </a:r>
             <a:r>
-              <a:rPr sz="1200" b="1" lang="zh-TW" dirty="0">
+              <a:rPr sz="1000" b="1" lang="zh-TW" dirty="0">
                 <a:solidFill>
                   <a:srgbClr val="000000"/>
                 </a:solidFill>
@@ -686,7 +829,7 @@
               <a:t>標定和時間同步</a:t>
             </a:r>
             <a:r>
-              <a:rPr sz="1200" lang="zh-TW" dirty="0">
+              <a:rPr sz="1000" lang="zh-TW" dirty="0">
                 <a:solidFill>
                   <a:srgbClr val="000000"/>
                 </a:solidFill>
@@ -704,11 +847,11 @@
                 <a:spcPct val="115000"/>
               </a:lnSpc>
               <a:spcAft>
-                <a:spcPts val="600"/>
-              </a:spcAft>
-            </a:pPr>
-            <a:r>
-              <a:rPr sz="1200" lang="zh-TW" dirty="0">
+                <a:spcPts val="500"/>
+              </a:spcAft>
+            </a:pPr>
+            <a:r>
+              <a:rPr sz="1000" lang="zh-TW" dirty="0">
                 <a:solidFill>
                   <a:srgbClr val="000000"/>
                 </a:solidFill>
@@ -829,6 +972,149 @@
               </a:spcAft>
             </a:pPr>
             <a:r>
+              <a:rPr sz="1000" b="1" lang="zh-TW" dirty="0">
+                <a:solidFill>
+                  <a:srgbClr val="000000"/>
+                </a:solidFill>
+                <a:latin typeface="Arial Unicode MS"/>
+                <a:ea typeface="Arial Unicode MS"/>
+                <a:cs typeface="Arial Unicode MS"/>
+              </a:rPr>
+              <a:t>▍這一張要做什麼</a:t>
+            </a:r>
+            <a:r>
+              <a:rPr sz="1000" lang="zh-TW" dirty="0">
+                <a:solidFill>
+                  <a:srgbClr val="000000"/>
+                </a:solidFill>
+                <a:latin typeface="Arial Unicode MS"/>
+                <a:ea typeface="Arial Unicode MS"/>
+                <a:cs typeface="Arial Unicode MS"/>
+              </a:rPr>
+              <a:t>
+</a:t>
+            </a:r>
+          </a:p>
+          <a:p>
+            <a:pPr algn="l">
+              <a:lnSpc>
+                <a:spcPct val="115000"/>
+              </a:lnSpc>
+              <a:spcAft>
+                <a:spcPts val="500"/>
+              </a:spcAft>
+            </a:pPr>
+            <a:r>
+              <a:rPr sz="1000" lang="zh-TW" dirty="0">
+                <a:solidFill>
+                  <a:srgbClr val="000000"/>
+                </a:solidFill>
+                <a:latin typeface="Arial Unicode MS"/>
+                <a:ea typeface="Arial Unicode MS"/>
+                <a:cs typeface="Arial Unicode MS"/>
+              </a:rPr>
+              <a:t>三分鐘的小練習，讓學生自己把每秒點數換算成角度。
+</a:t>
+            </a:r>
+          </a:p>
+          <a:p>
+            <a:pPr algn="l">
+              <a:lnSpc>
+                <a:spcPct val="115000"/>
+              </a:lnSpc>
+              <a:spcAft>
+                <a:spcPts val="500"/>
+              </a:spcAft>
+            </a:pPr>
+            <a:r>
+              <a:rPr sz="1000" b="1" lang="zh-TW" dirty="0">
+                <a:solidFill>
+                  <a:srgbClr val="000000"/>
+                </a:solidFill>
+                <a:latin typeface="Arial Unicode MS"/>
+                <a:ea typeface="Arial Unicode MS"/>
+                <a:cs typeface="Arial Unicode MS"/>
+              </a:rPr>
+              <a:t>▍畫面上圈這裡</a:t>
+            </a:r>
+            <a:r>
+              <a:rPr sz="1000" lang="zh-TW" dirty="0">
+                <a:solidFill>
+                  <a:srgbClr val="000000"/>
+                </a:solidFill>
+                <a:latin typeface="Arial Unicode MS"/>
+                <a:ea typeface="Arial Unicode MS"/>
+                <a:cs typeface="Arial Unicode MS"/>
+              </a:rPr>
+              <a:t>
+</a:t>
+            </a:r>
+          </a:p>
+          <a:p>
+            <a:pPr algn="l">
+              <a:lnSpc>
+                <a:spcPct val="115000"/>
+              </a:lnSpc>
+              <a:spcAft>
+                <a:spcPts val="500"/>
+              </a:spcAft>
+            </a:pPr>
+            <a:r>
+              <a:rPr sz="1000" lang="zh-TW" dirty="0">
+                <a:solidFill>
+                  <a:srgbClr val="000000"/>
+                </a:solidFill>
+                <a:latin typeface="Arial Unicode MS"/>
+                <a:ea typeface="Arial Unicode MS"/>
+                <a:cs typeface="Arial Unicode MS"/>
+              </a:rPr>
+              <a:t>圈題目指定的第②個小工具。巡堂確認每個人都真的按過一次。
+</a:t>
+            </a:r>
+          </a:p>
+          <a:p>
+            <a:pPr algn="l">
+              <a:lnSpc>
+                <a:spcPct val="115000"/>
+              </a:lnSpc>
+              <a:spcAft>
+                <a:spcPts val="500"/>
+              </a:spcAft>
+            </a:pPr>
+            <a:r>
+              <a:rPr sz="1000" b="1" lang="zh-TW" dirty="0">
+                <a:solidFill>
+                  <a:srgbClr val="000000"/>
+                </a:solidFill>
+                <a:latin typeface="Arial Unicode MS"/>
+                <a:ea typeface="Arial Unicode MS"/>
+                <a:cs typeface="Arial Unicode MS"/>
+              </a:rPr>
+              <a:t>▍以下照著唸</a:t>
+            </a:r>
+            <a:r>
+              <a:rPr sz="1000" lang="zh-TW" dirty="0">
+                <a:solidFill>
+                  <a:srgbClr val="000000"/>
+                </a:solidFill>
+                <a:latin typeface="Arial Unicode MS"/>
+                <a:ea typeface="Arial Unicode MS"/>
+                <a:cs typeface="Arial Unicode MS"/>
+              </a:rPr>
+              <a:t>
+</a:t>
+            </a:r>
+          </a:p>
+          <a:p>
+            <a:pPr algn="l">
+              <a:lnSpc>
+                <a:spcPct val="115000"/>
+              </a:lnSpc>
+              <a:spcAft>
+                <a:spcPts val="500"/>
+              </a:spcAft>
+            </a:pPr>
+            <a:r>
               <a:rPr sz="1000" lang="zh-TW" dirty="0">
                 <a:solidFill>
                   <a:srgbClr val="000000"/>
@@ -1324,6 +1610,149 @@
               </a:spcAft>
             </a:pPr>
             <a:r>
+              <a:rPr sz="1200" b="1" lang="zh-TW" dirty="0">
+                <a:solidFill>
+                  <a:srgbClr val="000000"/>
+                </a:solidFill>
+                <a:latin typeface="Arial Unicode MS"/>
+                <a:ea typeface="Arial Unicode MS"/>
+                <a:cs typeface="Arial Unicode MS"/>
+              </a:rPr>
+              <a:t>▍這一張要做什麼</a:t>
+            </a:r>
+            <a:r>
+              <a:rPr sz="1200" lang="zh-TW" dirty="0">
+                <a:solidFill>
+                  <a:srgbClr val="000000"/>
+                </a:solidFill>
+                <a:latin typeface="Arial Unicode MS"/>
+                <a:ea typeface="Arial Unicode MS"/>
+                <a:cs typeface="Arial Unicode MS"/>
+              </a:rPr>
+              <a:t>
+</a:t>
+            </a:r>
+          </a:p>
+          <a:p>
+            <a:pPr algn="l">
+              <a:lnSpc>
+                <a:spcPct val="115000"/>
+              </a:lnSpc>
+              <a:spcAft>
+                <a:spcPts val="600"/>
+              </a:spcAft>
+            </a:pPr>
+            <a:r>
+              <a:rPr sz="1200" lang="zh-TW" dirty="0">
+                <a:solidFill>
+                  <a:srgbClr val="000000"/>
+                </a:solidFill>
+                <a:latin typeface="Arial Unicode MS"/>
+                <a:ea typeface="Arial Unicode MS"/>
+                <a:cs typeface="Arial Unicode MS"/>
+              </a:rPr>
+              <a:t>段落分隔。丟出第二節的收尾問題：兩顆都好的感測器合起來可能還是錯的。
+</a:t>
+            </a:r>
+          </a:p>
+          <a:p>
+            <a:pPr algn="l">
+              <a:lnSpc>
+                <a:spcPct val="115000"/>
+              </a:lnSpc>
+              <a:spcAft>
+                <a:spcPts val="600"/>
+              </a:spcAft>
+            </a:pPr>
+            <a:r>
+              <a:rPr sz="1200" b="1" lang="zh-TW" dirty="0">
+                <a:solidFill>
+                  <a:srgbClr val="000000"/>
+                </a:solidFill>
+                <a:latin typeface="Arial Unicode MS"/>
+                <a:ea typeface="Arial Unicode MS"/>
+                <a:cs typeface="Arial Unicode MS"/>
+              </a:rPr>
+              <a:t>▍畫面上圈這裡</a:t>
+            </a:r>
+            <a:r>
+              <a:rPr sz="1200" lang="zh-TW" dirty="0">
+                <a:solidFill>
+                  <a:srgbClr val="000000"/>
+                </a:solidFill>
+                <a:latin typeface="Arial Unicode MS"/>
+                <a:ea typeface="Arial Unicode MS"/>
+                <a:cs typeface="Arial Unicode MS"/>
+              </a:rPr>
+              <a:t>
+</a:t>
+            </a:r>
+          </a:p>
+          <a:p>
+            <a:pPr algn="l">
+              <a:lnSpc>
+                <a:spcPct val="115000"/>
+              </a:lnSpc>
+              <a:spcAft>
+                <a:spcPts val="600"/>
+              </a:spcAft>
+            </a:pPr>
+            <a:r>
+              <a:rPr sz="1200" lang="zh-TW" dirty="0">
+                <a:solidFill>
+                  <a:srgbClr val="000000"/>
+                </a:solidFill>
+                <a:latin typeface="Arial Unicode MS"/>
+                <a:ea typeface="Arial Unicode MS"/>
+                <a:cs typeface="Arial Unicode MS"/>
+              </a:rPr>
+              <a:t>不用圈。這一句停兩秒再翻頁。
+</a:t>
+            </a:r>
+          </a:p>
+          <a:p>
+            <a:pPr algn="l">
+              <a:lnSpc>
+                <a:spcPct val="115000"/>
+              </a:lnSpc>
+              <a:spcAft>
+                <a:spcPts val="600"/>
+              </a:spcAft>
+            </a:pPr>
+            <a:r>
+              <a:rPr sz="1200" b="1" lang="zh-TW" dirty="0">
+                <a:solidFill>
+                  <a:srgbClr val="000000"/>
+                </a:solidFill>
+                <a:latin typeface="Arial Unicode MS"/>
+                <a:ea typeface="Arial Unicode MS"/>
+                <a:cs typeface="Arial Unicode MS"/>
+              </a:rPr>
+              <a:t>▍以下照著唸</a:t>
+            </a:r>
+            <a:r>
+              <a:rPr sz="1200" lang="zh-TW" dirty="0">
+                <a:solidFill>
+                  <a:srgbClr val="000000"/>
+                </a:solidFill>
+                <a:latin typeface="Arial Unicode MS"/>
+                <a:ea typeface="Arial Unicode MS"/>
+                <a:cs typeface="Arial Unicode MS"/>
+              </a:rPr>
+              <a:t>
+</a:t>
+            </a:r>
+          </a:p>
+          <a:p>
+            <a:pPr algn="l">
+              <a:lnSpc>
+                <a:spcPct val="115000"/>
+              </a:lnSpc>
+              <a:spcAft>
+                <a:spcPts val="600"/>
+              </a:spcAft>
+            </a:pPr>
+            <a:r>
               <a:rPr sz="1200" lang="zh-TW" dirty="0">
                 <a:solidFill>
                   <a:srgbClr val="000000"/>
@@ -1445,6 +1874,149 @@
               </a:spcAft>
             </a:pPr>
             <a:r>
+              <a:rPr sz="1000" b="1" lang="zh-TW" dirty="0">
+                <a:solidFill>
+                  <a:srgbClr val="000000"/>
+                </a:solidFill>
+                <a:latin typeface="Arial Unicode MS"/>
+                <a:ea typeface="Arial Unicode MS"/>
+                <a:cs typeface="Arial Unicode MS"/>
+              </a:rPr>
+              <a:t>▍這一張要做什麼</a:t>
+            </a:r>
+            <a:r>
+              <a:rPr sz="1000" lang="zh-TW" dirty="0">
+                <a:solidFill>
+                  <a:srgbClr val="000000"/>
+                </a:solidFill>
+                <a:latin typeface="Arial Unicode MS"/>
+                <a:ea typeface="Arial Unicode MS"/>
+                <a:cs typeface="Arial Unicode MS"/>
+              </a:rPr>
+              <a:t>
+</a:t>
+            </a:r>
+          </a:p>
+          <a:p>
+            <a:pPr algn="l">
+              <a:lnSpc>
+                <a:spcPct val="115000"/>
+              </a:lnSpc>
+              <a:spcAft>
+                <a:spcPts val="500"/>
+              </a:spcAft>
+            </a:pPr>
+            <a:r>
+              <a:rPr sz="1000" lang="zh-TW" dirty="0">
+                <a:solidFill>
+                  <a:srgbClr val="000000"/>
+                </a:solidFill>
+                <a:latin typeface="Arial Unicode MS"/>
+                <a:ea typeface="Arial Unicode MS"/>
+                <a:cs typeface="Arial Unicode MS"/>
+              </a:rPr>
+              <a:t>標定：告訴車子每一隻眼睛裝在哪、朝哪看。
+</a:t>
+            </a:r>
+          </a:p>
+          <a:p>
+            <a:pPr algn="l">
+              <a:lnSpc>
+                <a:spcPct val="115000"/>
+              </a:lnSpc>
+              <a:spcAft>
+                <a:spcPts val="500"/>
+              </a:spcAft>
+            </a:pPr>
+            <a:r>
+              <a:rPr sz="1000" b="1" lang="zh-TW" dirty="0">
+                <a:solidFill>
+                  <a:srgbClr val="000000"/>
+                </a:solidFill>
+                <a:latin typeface="Arial Unicode MS"/>
+                <a:ea typeface="Arial Unicode MS"/>
+                <a:cs typeface="Arial Unicode MS"/>
+              </a:rPr>
+              <a:t>▍畫面上圈這裡</a:t>
+            </a:r>
+            <a:r>
+              <a:rPr sz="1000" lang="zh-TW" dirty="0">
+                <a:solidFill>
+                  <a:srgbClr val="000000"/>
+                </a:solidFill>
+                <a:latin typeface="Arial Unicode MS"/>
+                <a:ea typeface="Arial Unicode MS"/>
+                <a:cs typeface="Arial Unicode MS"/>
+              </a:rPr>
+              <a:t>
+</a:t>
+            </a:r>
+          </a:p>
+          <a:p>
+            <a:pPr algn="l">
+              <a:lnSpc>
+                <a:spcPct val="115000"/>
+              </a:lnSpc>
+              <a:spcAft>
+                <a:spcPts val="500"/>
+              </a:spcAft>
+            </a:pPr>
+            <a:r>
+              <a:rPr sz="1000" lang="zh-TW" dirty="0">
+                <a:solidFill>
+                  <a:srgbClr val="000000"/>
+                </a:solidFill>
+                <a:latin typeface="Arial Unicode MS"/>
+                <a:ea typeface="Arial Unicode MS"/>
+                <a:cs typeface="Arial Unicode MS"/>
+              </a:rPr>
+              <a:t>一步一步圈，最後圈偏差角度造成的位置誤差那個數字。
+</a:t>
+            </a:r>
+          </a:p>
+          <a:p>
+            <a:pPr algn="l">
+              <a:lnSpc>
+                <a:spcPct val="115000"/>
+              </a:lnSpc>
+              <a:spcAft>
+                <a:spcPts val="500"/>
+              </a:spcAft>
+            </a:pPr>
+            <a:r>
+              <a:rPr sz="1000" b="1" lang="zh-TW" dirty="0">
+                <a:solidFill>
+                  <a:srgbClr val="000000"/>
+                </a:solidFill>
+                <a:latin typeface="Arial Unicode MS"/>
+                <a:ea typeface="Arial Unicode MS"/>
+                <a:cs typeface="Arial Unicode MS"/>
+              </a:rPr>
+              <a:t>▍以下照著唸</a:t>
+            </a:r>
+            <a:r>
+              <a:rPr sz="1000" lang="zh-TW" dirty="0">
+                <a:solidFill>
+                  <a:srgbClr val="000000"/>
+                </a:solidFill>
+                <a:latin typeface="Arial Unicode MS"/>
+                <a:ea typeface="Arial Unicode MS"/>
+                <a:cs typeface="Arial Unicode MS"/>
+              </a:rPr>
+              <a:t>
+</a:t>
+            </a:r>
+          </a:p>
+          <a:p>
+            <a:pPr algn="l">
+              <a:lnSpc>
+                <a:spcPct val="115000"/>
+              </a:lnSpc>
+              <a:spcAft>
+                <a:spcPts val="500"/>
+              </a:spcAft>
+            </a:pPr>
+            <a:r>
               <a:rPr sz="1000" lang="zh-TW" dirty="0">
                 <a:solidFill>
                   <a:srgbClr val="000000"/>
@@ -2035,11 +2607,154 @@
                 <a:spcPct val="115000"/>
               </a:lnSpc>
               <a:spcAft>
-                <a:spcPts val="525"/>
-              </a:spcAft>
-            </a:pPr>
-            <a:r>
-              <a:rPr sz="1050" lang="zh-TW" dirty="0">
+                <a:spcPts val="500"/>
+              </a:spcAft>
+            </a:pPr>
+            <a:r>
+              <a:rPr sz="1000" b="1" lang="zh-TW" dirty="0">
+                <a:solidFill>
+                  <a:srgbClr val="000000"/>
+                </a:solidFill>
+                <a:latin typeface="Arial Unicode MS"/>
+                <a:ea typeface="Arial Unicode MS"/>
+                <a:cs typeface="Arial Unicode MS"/>
+              </a:rPr>
+              <a:t>▍這一張要做什麼</a:t>
+            </a:r>
+            <a:r>
+              <a:rPr sz="1000" lang="zh-TW" dirty="0">
+                <a:solidFill>
+                  <a:srgbClr val="000000"/>
+                </a:solidFill>
+                <a:latin typeface="Arial Unicode MS"/>
+                <a:ea typeface="Arial Unicode MS"/>
+                <a:cs typeface="Arial Unicode MS"/>
+              </a:rPr>
+              <a:t>
+</a:t>
+            </a:r>
+          </a:p>
+          <a:p>
+            <a:pPr algn="l">
+              <a:lnSpc>
+                <a:spcPct val="115000"/>
+              </a:lnSpc>
+              <a:spcAft>
+                <a:spcPts val="500"/>
+              </a:spcAft>
+            </a:pPr>
+            <a:r>
+              <a:rPr sz="1000" lang="zh-TW" dirty="0">
+                <a:solidFill>
+                  <a:srgbClr val="000000"/>
+                </a:solidFill>
+                <a:latin typeface="Arial Unicode MS"/>
+                <a:ea typeface="Arial Unicode MS"/>
+                <a:cs typeface="Arial Unicode MS"/>
+              </a:rPr>
+              <a:t>時間同步：兩隻眼睛要看的是同一個瞬間。
+</a:t>
+            </a:r>
+          </a:p>
+          <a:p>
+            <a:pPr algn="l">
+              <a:lnSpc>
+                <a:spcPct val="115000"/>
+              </a:lnSpc>
+              <a:spcAft>
+                <a:spcPts val="500"/>
+              </a:spcAft>
+            </a:pPr>
+            <a:r>
+              <a:rPr sz="1000" b="1" lang="zh-TW" dirty="0">
+                <a:solidFill>
+                  <a:srgbClr val="000000"/>
+                </a:solidFill>
+                <a:latin typeface="Arial Unicode MS"/>
+                <a:ea typeface="Arial Unicode MS"/>
+                <a:cs typeface="Arial Unicode MS"/>
+              </a:rPr>
+              <a:t>▍畫面上圈這裡</a:t>
+            </a:r>
+            <a:r>
+              <a:rPr sz="1000" lang="zh-TW" dirty="0">
+                <a:solidFill>
+                  <a:srgbClr val="000000"/>
+                </a:solidFill>
+                <a:latin typeface="Arial Unicode MS"/>
+                <a:ea typeface="Arial Unicode MS"/>
+                <a:cs typeface="Arial Unicode MS"/>
+              </a:rPr>
+              <a:t>
+</a:t>
+            </a:r>
+          </a:p>
+          <a:p>
+            <a:pPr algn="l">
+              <a:lnSpc>
+                <a:spcPct val="115000"/>
+              </a:lnSpc>
+              <a:spcAft>
+                <a:spcPts val="500"/>
+              </a:spcAft>
+            </a:pPr>
+            <a:r>
+              <a:rPr sz="1000" lang="zh-TW" dirty="0">
+                <a:solidFill>
+                  <a:srgbClr val="000000"/>
+                </a:solidFill>
+                <a:latin typeface="Arial Unicode MS"/>
+                <a:ea typeface="Arial Unicode MS"/>
+                <a:cs typeface="Arial Unicode MS"/>
+              </a:rPr>
+              <a:t>圈時間差乘上車速算出來的那個距離，那就是不同步的代價。
+</a:t>
+            </a:r>
+          </a:p>
+          <a:p>
+            <a:pPr algn="l">
+              <a:lnSpc>
+                <a:spcPct val="115000"/>
+              </a:lnSpc>
+              <a:spcAft>
+                <a:spcPts val="500"/>
+              </a:spcAft>
+            </a:pPr>
+            <a:r>
+              <a:rPr sz="1000" b="1" lang="zh-TW" dirty="0">
+                <a:solidFill>
+                  <a:srgbClr val="000000"/>
+                </a:solidFill>
+                <a:latin typeface="Arial Unicode MS"/>
+                <a:ea typeface="Arial Unicode MS"/>
+                <a:cs typeface="Arial Unicode MS"/>
+              </a:rPr>
+              <a:t>▍以下照著唸</a:t>
+            </a:r>
+            <a:r>
+              <a:rPr sz="1000" lang="zh-TW" dirty="0">
+                <a:solidFill>
+                  <a:srgbClr val="000000"/>
+                </a:solidFill>
+                <a:latin typeface="Arial Unicode MS"/>
+                <a:ea typeface="Arial Unicode MS"/>
+                <a:cs typeface="Arial Unicode MS"/>
+              </a:rPr>
+              <a:t>
+</a:t>
+            </a:r>
+          </a:p>
+          <a:p>
+            <a:pPr algn="l">
+              <a:lnSpc>
+                <a:spcPct val="115000"/>
+              </a:lnSpc>
+              <a:spcAft>
+                <a:spcPts val="500"/>
+              </a:spcAft>
+            </a:pPr>
+            <a:r>
+              <a:rPr sz="1000" lang="zh-TW" dirty="0">
                 <a:solidFill>
                   <a:srgbClr val="000000"/>
                 </a:solidFill>
@@ -2050,7 +2765,7 @@
               <a:t>最後一件事是</a:t>
             </a:r>
             <a:r>
-              <a:rPr sz="1050" b="1" lang="zh-TW" dirty="0">
+              <a:rPr sz="1000" b="1" lang="zh-TW" dirty="0">
                 <a:solidFill>
                   <a:srgbClr val="000000"/>
                 </a:solidFill>
@@ -2061,7 +2776,7 @@
               <a:t>時間同步</a:t>
             </a:r>
             <a:r>
-              <a:rPr sz="1050" lang="zh-TW" dirty="0">
+              <a:rPr sz="1000" lang="zh-TW" dirty="0">
                 <a:solidFill>
                   <a:srgbClr val="000000"/>
                 </a:solidFill>
@@ -2079,11 +2794,11 @@
                 <a:spcPct val="115000"/>
               </a:lnSpc>
               <a:spcAft>
-                <a:spcPts val="525"/>
-              </a:spcAft>
-            </a:pPr>
-            <a:r>
-              <a:rPr sz="1050" lang="zh-TW" dirty="0">
+                <a:spcPts val="500"/>
+              </a:spcAft>
+            </a:pPr>
+            <a:r>
+              <a:rPr sz="1000" lang="zh-TW" dirty="0">
                 <a:solidFill>
                   <a:srgbClr val="000000"/>
                 </a:solidFill>
@@ -2101,11 +2816,11 @@
                 <a:spcPct val="115000"/>
               </a:lnSpc>
               <a:spcAft>
-                <a:spcPts val="525"/>
-              </a:spcAft>
-            </a:pPr>
-            <a:r>
-              <a:rPr sz="1050" lang="zh-TW" dirty="0">
+                <a:spcPts val="500"/>
+              </a:spcAft>
+            </a:pPr>
+            <a:r>
+              <a:rPr sz="1000" lang="zh-TW" dirty="0">
                 <a:solidFill>
                   <a:srgbClr val="000000"/>
                 </a:solidFill>
@@ -2123,11 +2838,11 @@
                 <a:spcPct val="115000"/>
               </a:lnSpc>
               <a:spcAft>
-                <a:spcPts val="525"/>
-              </a:spcAft>
-            </a:pPr>
-            <a:r>
-              <a:rPr sz="1050" lang="zh-TW" dirty="0">
+                <a:spcPts val="500"/>
+              </a:spcAft>
+            </a:pPr>
+            <a:r>
+              <a:rPr sz="1000" lang="zh-TW" dirty="0">
                 <a:solidFill>
                   <a:srgbClr val="000000"/>
                 </a:solidFill>
@@ -2138,7 +2853,7 @@
               <a:t>假設車子現在收到一張相機的畫面，還有一圈光達的點雲，要把它們合起來。問題是——</a:t>
             </a:r>
             <a:r>
-              <a:rPr sz="1050" b="1" lang="zh-TW" dirty="0">
+              <a:rPr sz="1000" b="1" lang="zh-TW" dirty="0">
                 <a:solidFill>
                   <a:srgbClr val="000000"/>
                 </a:solidFill>
@@ -2149,7 +2864,7 @@
               <a:t>這兩份資料是同一個瞬間的嗎？</a:t>
             </a:r>
             <a:r>
-              <a:rPr sz="1050" lang="zh-TW" dirty="0">
+              <a:rPr sz="1000" lang="zh-TW" dirty="0">
                 <a:solidFill>
                   <a:srgbClr val="000000"/>
                 </a:solidFill>
@@ -2167,11 +2882,11 @@
                 <a:spcPct val="115000"/>
               </a:lnSpc>
               <a:spcAft>
-                <a:spcPts val="525"/>
-              </a:spcAft>
-            </a:pPr>
-            <a:r>
-              <a:rPr sz="1050" lang="zh-TW" dirty="0">
+                <a:spcPts val="500"/>
+              </a:spcAft>
+            </a:pPr>
+            <a:r>
+              <a:rPr sz="1000" lang="zh-TW" dirty="0">
                 <a:solidFill>
                   <a:srgbClr val="000000"/>
                 </a:solidFill>
@@ -2182,7 +2897,7 @@
               <a:t>如果沒有處理，它們可能差到五十毫秒。時速四十的時候，五十毫秒車子走了</a:t>
             </a:r>
             <a:r>
-              <a:rPr sz="1050" b="1" lang="zh-TW" dirty="0">
+              <a:rPr sz="1000" b="1" lang="zh-TW" dirty="0">
                 <a:solidFill>
                   <a:srgbClr val="000000"/>
                 </a:solidFill>
@@ -2193,7 +2908,7 @@
               <a:t>零點五六公尺</a:t>
             </a:r>
             <a:r>
-              <a:rPr sz="1050" lang="zh-TW" dirty="0">
+              <a:rPr sz="1000" lang="zh-TW" dirty="0">
                 <a:solidFill>
                   <a:srgbClr val="000000"/>
                 </a:solidFill>
@@ -2211,11 +2926,11 @@
                 <a:spcPct val="115000"/>
               </a:lnSpc>
               <a:spcAft>
-                <a:spcPts val="525"/>
-              </a:spcAft>
-            </a:pPr>
-            <a:r>
-              <a:rPr sz="1050" lang="zh-TW" dirty="0">
+                <a:spcPts val="500"/>
+              </a:spcAft>
+            </a:pPr>
+            <a:r>
+              <a:rPr sz="1000" lang="zh-TW" dirty="0">
                 <a:solidFill>
                   <a:srgbClr val="000000"/>
                 </a:solidFill>
@@ -2226,7 +2941,7 @@
               <a:t>所以你會把相機在 A 點看到的人，跟光達在 B 點量到的距離配在一起，得到一個</a:t>
             </a:r>
             <a:r>
-              <a:rPr sz="1050" b="1" lang="zh-TW" dirty="0">
+              <a:rPr sz="1000" b="1" lang="zh-TW" dirty="0">
                 <a:solidFill>
                   <a:srgbClr val="000000"/>
                 </a:solidFill>
@@ -2237,7 +2952,7 @@
               <a:t>根本不存在的位置</a:t>
             </a:r>
             <a:r>
-              <a:rPr sz="1050" lang="zh-TW" dirty="0">
+              <a:rPr sz="1000" lang="zh-TW" dirty="0">
                 <a:solidFill>
                   <a:srgbClr val="000000"/>
                 </a:solidFill>
@@ -2255,11 +2970,11 @@
                 <a:spcPct val="115000"/>
               </a:lnSpc>
               <a:spcAft>
-                <a:spcPts val="525"/>
-              </a:spcAft>
-            </a:pPr>
-            <a:r>
-              <a:rPr sz="1050" lang="zh-TW" dirty="0">
+                <a:spcPts val="500"/>
+              </a:spcAft>
+            </a:pPr>
+            <a:r>
+              <a:rPr sz="1000" lang="zh-TW" dirty="0">
                 <a:solidFill>
                   <a:srgbClr val="000000"/>
                 </a:solidFill>
@@ -2277,11 +2992,11 @@
                 <a:spcPct val="115000"/>
               </a:lnSpc>
               <a:spcAft>
-                <a:spcPts val="525"/>
-              </a:spcAft>
-            </a:pPr>
-            <a:r>
-              <a:rPr sz="1050" lang="zh-TW" dirty="0">
+                <a:spcPts val="500"/>
+              </a:spcAft>
+            </a:pPr>
+            <a:r>
+              <a:rPr sz="1000" lang="zh-TW" dirty="0">
                 <a:solidFill>
                   <a:srgbClr val="000000"/>
                 </a:solidFill>
@@ -2292,7 +3007,7 @@
               <a:t>解法是讓每一顆感測器都在資料上蓋一個</a:t>
             </a:r>
             <a:r>
-              <a:rPr sz="1050" b="1" lang="zh-TW" dirty="0">
+              <a:rPr sz="1000" b="1" lang="zh-TW" dirty="0">
                 <a:solidFill>
                   <a:srgbClr val="000000"/>
                 </a:solidFill>
@@ -2303,7 +3018,7 @@
               <a:t>時間戳</a:t>
             </a:r>
             <a:r>
-              <a:rPr sz="1050" lang="zh-TW" dirty="0">
+              <a:rPr sz="1000" lang="zh-TW" dirty="0">
                 <a:solidFill>
                   <a:srgbClr val="000000"/>
                 </a:solidFill>
@@ -2314,7 +3029,7 @@
               <a:t>，而且全車用同一個時鐘。高階一點的做法是讓光達的轉動跟相機的快門</a:t>
             </a:r>
             <a:r>
-              <a:rPr sz="1050" b="1" lang="zh-TW" dirty="0">
+              <a:rPr sz="1000" b="1" lang="zh-TW" dirty="0">
                 <a:solidFill>
                   <a:srgbClr val="000000"/>
                 </a:solidFill>
@@ -2325,7 +3040,7 @@
               <a:t>對齊</a:t>
             </a:r>
             <a:r>
-              <a:rPr sz="1050" lang="zh-TW" dirty="0">
+              <a:rPr sz="1000" lang="zh-TW" dirty="0">
                 <a:solidFill>
                   <a:srgbClr val="000000"/>
                 </a:solidFill>
@@ -2343,11 +3058,11 @@
                 <a:spcPct val="115000"/>
               </a:lnSpc>
               <a:spcAft>
-                <a:spcPts val="525"/>
-              </a:spcAft>
-            </a:pPr>
-            <a:r>
-              <a:rPr sz="1050" lang="zh-TW" dirty="0">
+                <a:spcPts val="500"/>
+              </a:spcAft>
+            </a:pPr>
+            <a:r>
+              <a:rPr sz="1000" lang="zh-TW" dirty="0">
                 <a:solidFill>
                   <a:srgbClr val="000000"/>
                 </a:solidFill>
@@ -2358,7 +3073,7 @@
               <a:t>所以請各位記住：</a:t>
             </a:r>
             <a:r>
-              <a:rPr sz="1050" b="1" lang="zh-TW" dirty="0">
+              <a:rPr sz="1000" b="1" lang="zh-TW" dirty="0">
                 <a:solidFill>
                   <a:srgbClr val="000000"/>
                 </a:solidFill>
@@ -2369,7 +3084,7 @@
               <a:t>兩顆感測器各自都是好的，不代表合起來是對的。</a:t>
             </a:r>
             <a:r>
-              <a:rPr sz="1050" lang="zh-TW" dirty="0">
+              <a:rPr sz="1000" lang="zh-TW" dirty="0">
                 <a:solidFill>
                   <a:srgbClr val="000000"/>
                 </a:solidFill>
@@ -2387,11 +3102,11 @@
                 <a:spcPct val="115000"/>
               </a:lnSpc>
               <a:spcAft>
-                <a:spcPts val="525"/>
-              </a:spcAft>
-            </a:pPr>
-            <a:r>
-              <a:rPr sz="1050" lang="zh-TW" dirty="0">
+                <a:spcPts val="500"/>
+              </a:spcAft>
+            </a:pPr>
+            <a:r>
+              <a:rPr sz="1000" lang="zh-TW" dirty="0">
                 <a:solidFill>
                   <a:srgbClr val="000000"/>
                 </a:solidFill>
@@ -2409,11 +3124,11 @@
                 <a:spcPct val="115000"/>
               </a:lnSpc>
               <a:spcAft>
-                <a:spcPts val="525"/>
-              </a:spcAft>
-            </a:pPr>
-            <a:r>
-              <a:rPr sz="1050" lang="zh-TW" dirty="0">
+                <a:spcPts val="500"/>
+              </a:spcAft>
+            </a:pPr>
+            <a:r>
+              <a:rPr sz="1000" lang="zh-TW" dirty="0">
                 <a:solidFill>
                   <a:srgbClr val="000000"/>
                 </a:solidFill>
@@ -2424,7 +3139,7 @@
               <a:t>下一節我們回到工具上，把今天和上一節講的東西，全部用在一件事上：</a:t>
             </a:r>
             <a:r>
-              <a:rPr sz="1050" b="1" lang="zh-TW" dirty="0">
+              <a:rPr sz="1000" b="1" lang="zh-TW" dirty="0">
                 <a:solidFill>
                   <a:srgbClr val="000000"/>
                 </a:solidFill>
@@ -2435,7 +3150,7 @@
               <a:t>幫一個指定的情境選一顆感測器</a:t>
             </a:r>
             <a:r>
-              <a:rPr sz="1050" lang="zh-TW" dirty="0">
+              <a:rPr sz="1000" lang="zh-TW" dirty="0">
                 <a:solidFill>
                   <a:srgbClr val="000000"/>
                 </a:solidFill>
@@ -2552,11 +3267,154 @@
                 <a:spcPct val="115000"/>
               </a:lnSpc>
               <a:spcAft>
-                <a:spcPts val="600"/>
-              </a:spcAft>
-            </a:pPr>
-            <a:r>
-              <a:rPr sz="1200" lang="zh-TW" dirty="0">
+                <a:spcPts val="500"/>
+              </a:spcAft>
+            </a:pPr>
+            <a:r>
+              <a:rPr sz="1000" b="1" lang="zh-TW" dirty="0">
+                <a:solidFill>
+                  <a:srgbClr val="000000"/>
+                </a:solidFill>
+                <a:latin typeface="Arial Unicode MS"/>
+                <a:ea typeface="Arial Unicode MS"/>
+                <a:cs typeface="Arial Unicode MS"/>
+              </a:rPr>
+              <a:t>▍這一張要做什麼</a:t>
+            </a:r>
+            <a:r>
+              <a:rPr sz="1000" lang="zh-TW" dirty="0">
+                <a:solidFill>
+                  <a:srgbClr val="000000"/>
+                </a:solidFill>
+                <a:latin typeface="Arial Unicode MS"/>
+                <a:ea typeface="Arial Unicode MS"/>
+                <a:cs typeface="Arial Unicode MS"/>
+              </a:rPr>
+              <a:t>
+</a:t>
+            </a:r>
+          </a:p>
+          <a:p>
+            <a:pPr algn="l">
+              <a:lnSpc>
+                <a:spcPct val="115000"/>
+              </a:lnSpc>
+              <a:spcAft>
+                <a:spcPts val="500"/>
+              </a:spcAft>
+            </a:pPr>
+            <a:r>
+              <a:rPr sz="1000" lang="zh-TW" dirty="0">
+                <a:solidFill>
+                  <a:srgbClr val="000000"/>
+                </a:solidFill>
+                <a:latin typeface="Arial Unicode MS"/>
+                <a:ea typeface="Arial Unicode MS"/>
+                <a:cs typeface="Arial Unicode MS"/>
+              </a:rPr>
+              <a:t>第二節小結，三句話帶上機。
+</a:t>
+            </a:r>
+          </a:p>
+          <a:p>
+            <a:pPr algn="l">
+              <a:lnSpc>
+                <a:spcPct val="115000"/>
+              </a:lnSpc>
+              <a:spcAft>
+                <a:spcPts val="500"/>
+              </a:spcAft>
+            </a:pPr>
+            <a:r>
+              <a:rPr sz="1000" b="1" lang="zh-TW" dirty="0">
+                <a:solidFill>
+                  <a:srgbClr val="000000"/>
+                </a:solidFill>
+                <a:latin typeface="Arial Unicode MS"/>
+                <a:ea typeface="Arial Unicode MS"/>
+                <a:cs typeface="Arial Unicode MS"/>
+              </a:rPr>
+              <a:t>▍畫面上圈這裡</a:t>
+            </a:r>
+            <a:r>
+              <a:rPr sz="1000" lang="zh-TW" dirty="0">
+                <a:solidFill>
+                  <a:srgbClr val="000000"/>
+                </a:solidFill>
+                <a:latin typeface="Arial Unicode MS"/>
+                <a:ea typeface="Arial Unicode MS"/>
+                <a:cs typeface="Arial Unicode MS"/>
+              </a:rPr>
+              <a:t>
+</a:t>
+            </a:r>
+          </a:p>
+          <a:p>
+            <a:pPr algn="l">
+              <a:lnSpc>
+                <a:spcPct val="115000"/>
+              </a:lnSpc>
+              <a:spcAft>
+                <a:spcPts val="500"/>
+              </a:spcAft>
+            </a:pPr>
+            <a:r>
+              <a:rPr sz="1000" lang="zh-TW" dirty="0">
+                <a:solidFill>
+                  <a:srgbClr val="000000"/>
+                </a:solidFill>
+                <a:latin typeface="Arial Unicode MS"/>
+                <a:ea typeface="Arial Unicode MS"/>
+                <a:cs typeface="Arial Unicode MS"/>
+              </a:rPr>
+              <a:t>三條一條一條圈。第三條「合起來不一定對」是明天做專題時最常忘的。
+</a:t>
+            </a:r>
+          </a:p>
+          <a:p>
+            <a:pPr algn="l">
+              <a:lnSpc>
+                <a:spcPct val="115000"/>
+              </a:lnSpc>
+              <a:spcAft>
+                <a:spcPts val="500"/>
+              </a:spcAft>
+            </a:pPr>
+            <a:r>
+              <a:rPr sz="1000" b="1" lang="zh-TW" dirty="0">
+                <a:solidFill>
+                  <a:srgbClr val="000000"/>
+                </a:solidFill>
+                <a:latin typeface="Arial Unicode MS"/>
+                <a:ea typeface="Arial Unicode MS"/>
+                <a:cs typeface="Arial Unicode MS"/>
+              </a:rPr>
+              <a:t>▍以下照著唸</a:t>
+            </a:r>
+            <a:r>
+              <a:rPr sz="1000" lang="zh-TW" dirty="0">
+                <a:solidFill>
+                  <a:srgbClr val="000000"/>
+                </a:solidFill>
+                <a:latin typeface="Arial Unicode MS"/>
+                <a:ea typeface="Arial Unicode MS"/>
+                <a:cs typeface="Arial Unicode MS"/>
+              </a:rPr>
+              <a:t>
+</a:t>
+            </a:r>
+          </a:p>
+          <a:p>
+            <a:pPr algn="l">
+              <a:lnSpc>
+                <a:spcPct val="115000"/>
+              </a:lnSpc>
+              <a:spcAft>
+                <a:spcPts val="500"/>
+              </a:spcAft>
+            </a:pPr>
+            <a:r>
+              <a:rPr sz="1000" lang="zh-TW" dirty="0">
                 <a:solidFill>
                   <a:srgbClr val="000000"/>
                 </a:solidFill>
@@ -2574,11 +3432,11 @@
                 <a:spcPct val="115000"/>
               </a:lnSpc>
               <a:spcAft>
-                <a:spcPts val="600"/>
-              </a:spcAft>
-            </a:pPr>
-            <a:r>
-              <a:rPr sz="1200" b="1" lang="zh-TW" dirty="0">
+                <a:spcPts val="500"/>
+              </a:spcAft>
+            </a:pPr>
+            <a:r>
+              <a:rPr sz="1000" b="1" lang="zh-TW" dirty="0">
                 <a:solidFill>
                   <a:srgbClr val="000000"/>
                 </a:solidFill>
@@ -2589,7 +3447,7 @@
               <a:t>第一句，相機的三行。</a:t>
             </a:r>
             <a:r>
-              <a:rPr sz="1200" lang="zh-TW" dirty="0">
+              <a:rPr sz="1000" lang="zh-TW" dirty="0">
                 <a:solidFill>
                   <a:srgbClr val="000000"/>
                 </a:solidFill>
@@ -2607,11 +3465,11 @@
                 <a:spcPct val="115000"/>
               </a:lnSpc>
               <a:spcAft>
-                <a:spcPts val="600"/>
-              </a:spcAft>
-            </a:pPr>
-            <a:r>
-              <a:rPr sz="1200" b="1" lang="zh-TW" dirty="0">
+                <a:spcPts val="500"/>
+              </a:spcAft>
+            </a:pPr>
+            <a:r>
+              <a:rPr sz="1000" b="1" lang="zh-TW" dirty="0">
                 <a:solidFill>
                   <a:srgbClr val="000000"/>
                 </a:solidFill>
@@ -2622,7 +3480,7 @@
               <a:t>第二句，光達的三行。</a:t>
             </a:r>
             <a:r>
-              <a:rPr sz="1200" lang="zh-TW" dirty="0">
+              <a:rPr sz="1000" lang="zh-TW" dirty="0">
                 <a:solidFill>
                   <a:srgbClr val="000000"/>
                 </a:solidFill>
@@ -2640,11 +3498,11 @@
                 <a:spcPct val="115000"/>
               </a:lnSpc>
               <a:spcAft>
-                <a:spcPts val="600"/>
-              </a:spcAft>
-            </a:pPr>
-            <a:r>
-              <a:rPr sz="1200" b="1" lang="zh-TW" dirty="0">
+                <a:spcPts val="500"/>
+              </a:spcAft>
+            </a:pPr>
+            <a:r>
+              <a:rPr sz="1000" b="1" lang="zh-TW" dirty="0">
                 <a:solidFill>
                   <a:srgbClr val="000000"/>
                 </a:solidFill>
@@ -2655,7 +3513,7 @@
               <a:t>第三句，兩顆好的感測器合起來不一定對。</a:t>
             </a:r>
             <a:r>
-              <a:rPr sz="1200" lang="zh-TW" dirty="0">
+              <a:rPr sz="1000" lang="zh-TW" dirty="0">
                 <a:solidFill>
                   <a:srgbClr val="000000"/>
                 </a:solidFill>
@@ -2673,11 +3531,11 @@
                 <a:spcPct val="115000"/>
               </a:lnSpc>
               <a:spcAft>
-                <a:spcPts val="600"/>
-              </a:spcAft>
-            </a:pPr>
-            <a:r>
-              <a:rPr sz="1200" lang="zh-TW" dirty="0">
+                <a:spcPts val="500"/>
+              </a:spcAft>
+            </a:pPr>
+            <a:r>
+              <a:rPr sz="1000" lang="zh-TW" dirty="0">
                 <a:solidFill>
                   <a:srgbClr val="000000"/>
                 </a:solidFill>
@@ -2688,7 +3546,7 @@
               <a:t>下一節整節都在電腦上。各位要做的事是：拿四個型號、三個情境，自己判斷哪一顆能用、哪一顆不行，而且要講得出</a:t>
             </a:r>
             <a:r>
-              <a:rPr sz="1200" b="1" lang="zh-TW" dirty="0">
+              <a:rPr sz="1000" b="1" lang="zh-TW" dirty="0">
                 <a:solidFill>
                   <a:srgbClr val="000000"/>
                 </a:solidFill>
@@ -2699,7 +3557,7 @@
               <a:t>卡在哪一行</a:t>
             </a:r>
             <a:r>
-              <a:rPr sz="1200" lang="zh-TW" dirty="0">
+              <a:rPr sz="1000" lang="zh-TW" dirty="0">
                 <a:solidFill>
                   <a:srgbClr val="000000"/>
                 </a:solidFill>
@@ -2717,11 +3575,11 @@
                 <a:spcPct val="115000"/>
               </a:lnSpc>
               <a:spcAft>
-                <a:spcPts val="600"/>
-              </a:spcAft>
-            </a:pPr>
-            <a:r>
-              <a:rPr sz="1200" lang="zh-TW" dirty="0">
+                <a:spcPts val="500"/>
+              </a:spcAft>
+            </a:pPr>
+            <a:r>
+              <a:rPr sz="1000" lang="zh-TW" dirty="0">
                 <a:solidFill>
                   <a:srgbClr val="000000"/>
                 </a:solidFill>
@@ -2739,11 +3597,11 @@
                 <a:spcPct val="115000"/>
               </a:lnSpc>
               <a:spcAft>
-                <a:spcPts val="600"/>
-              </a:spcAft>
-            </a:pPr>
-            <a:r>
-              <a:rPr sz="1200" lang="zh-TW" dirty="0">
+                <a:spcPts val="500"/>
+              </a:spcAft>
+            </a:pPr>
+            <a:r>
+              <a:rPr sz="1000" lang="zh-TW" dirty="0">
                 <a:solidFill>
                   <a:srgbClr val="000000"/>
                 </a:solidFill>
@@ -2864,6 +3722,149 @@
               </a:spcAft>
             </a:pPr>
             <a:r>
+              <a:rPr sz="1200" b="1" lang="zh-TW" dirty="0">
+                <a:solidFill>
+                  <a:srgbClr val="000000"/>
+                </a:solidFill>
+                <a:latin typeface="Arial Unicode MS"/>
+                <a:ea typeface="Arial Unicode MS"/>
+                <a:cs typeface="Arial Unicode MS"/>
+              </a:rPr>
+              <a:t>▍這一張要做什麼</a:t>
+            </a:r>
+            <a:r>
+              <a:rPr sz="1200" lang="zh-TW" dirty="0">
+                <a:solidFill>
+                  <a:srgbClr val="000000"/>
+                </a:solidFill>
+                <a:latin typeface="Arial Unicode MS"/>
+                <a:ea typeface="Arial Unicode MS"/>
+                <a:cs typeface="Arial Unicode MS"/>
+              </a:rPr>
+              <a:t>
+</a:t>
+            </a:r>
+          </a:p>
+          <a:p>
+            <a:pPr algn="l">
+              <a:lnSpc>
+                <a:spcPct val="115000"/>
+              </a:lnSpc>
+              <a:spcAft>
+                <a:spcPts val="600"/>
+              </a:spcAft>
+            </a:pPr>
+            <a:r>
+              <a:rPr sz="1200" lang="zh-TW" dirty="0">
+                <a:solidFill>
+                  <a:srgbClr val="000000"/>
+                </a:solidFill>
+                <a:latin typeface="Arial Unicode MS"/>
+                <a:ea typeface="Arial Unicode MS"/>
+                <a:cs typeface="Arial Unicode MS"/>
+              </a:rPr>
+              <a:t>段落分隔。宣告接下來三行決定逆光與進隧道會發生什麼事。
+</a:t>
+            </a:r>
+          </a:p>
+          <a:p>
+            <a:pPr algn="l">
+              <a:lnSpc>
+                <a:spcPct val="115000"/>
+              </a:lnSpc>
+              <a:spcAft>
+                <a:spcPts val="600"/>
+              </a:spcAft>
+            </a:pPr>
+            <a:r>
+              <a:rPr sz="1200" b="1" lang="zh-TW" dirty="0">
+                <a:solidFill>
+                  <a:srgbClr val="000000"/>
+                </a:solidFill>
+                <a:latin typeface="Arial Unicode MS"/>
+                <a:ea typeface="Arial Unicode MS"/>
+                <a:cs typeface="Arial Unicode MS"/>
+              </a:rPr>
+              <a:t>▍畫面上圈這裡</a:t>
+            </a:r>
+            <a:r>
+              <a:rPr sz="1200" lang="zh-TW" dirty="0">
+                <a:solidFill>
+                  <a:srgbClr val="000000"/>
+                </a:solidFill>
+                <a:latin typeface="Arial Unicode MS"/>
+                <a:ea typeface="Arial Unicode MS"/>
+                <a:cs typeface="Arial Unicode MS"/>
+              </a:rPr>
+              <a:t>
+</a:t>
+            </a:r>
+          </a:p>
+          <a:p>
+            <a:pPr algn="l">
+              <a:lnSpc>
+                <a:spcPct val="115000"/>
+              </a:lnSpc>
+              <a:spcAft>
+                <a:spcPts val="600"/>
+              </a:spcAft>
+            </a:pPr>
+            <a:r>
+              <a:rPr sz="1200" lang="zh-TW" dirty="0">
+                <a:solidFill>
+                  <a:srgbClr val="000000"/>
+                </a:solidFill>
+                <a:latin typeface="Arial Unicode MS"/>
+                <a:ea typeface="Arial Unicode MS"/>
+                <a:cs typeface="Arial Unicode MS"/>
+              </a:rPr>
+              <a:t>不用圈。
+</a:t>
+            </a:r>
+          </a:p>
+          <a:p>
+            <a:pPr algn="l">
+              <a:lnSpc>
+                <a:spcPct val="115000"/>
+              </a:lnSpc>
+              <a:spcAft>
+                <a:spcPts val="600"/>
+              </a:spcAft>
+            </a:pPr>
+            <a:r>
+              <a:rPr sz="1200" b="1" lang="zh-TW" dirty="0">
+                <a:solidFill>
+                  <a:srgbClr val="000000"/>
+                </a:solidFill>
+                <a:latin typeface="Arial Unicode MS"/>
+                <a:ea typeface="Arial Unicode MS"/>
+                <a:cs typeface="Arial Unicode MS"/>
+              </a:rPr>
+              <a:t>▍以下照著唸</a:t>
+            </a:r>
+            <a:r>
+              <a:rPr sz="1200" lang="zh-TW" dirty="0">
+                <a:solidFill>
+                  <a:srgbClr val="000000"/>
+                </a:solidFill>
+                <a:latin typeface="Arial Unicode MS"/>
+                <a:ea typeface="Arial Unicode MS"/>
+                <a:cs typeface="Arial Unicode MS"/>
+              </a:rPr>
+              <a:t>
+</a:t>
+            </a:r>
+          </a:p>
+          <a:p>
+            <a:pPr algn="l">
+              <a:lnSpc>
+                <a:spcPct val="115000"/>
+              </a:lnSpc>
+              <a:spcAft>
+                <a:spcPts val="600"/>
+              </a:spcAft>
+            </a:pPr>
+            <a:r>
               <a:rPr sz="1200" lang="zh-TW" dirty="0">
                 <a:solidFill>
                   <a:srgbClr val="000000"/>
@@ -2985,6 +3986,149 @@
               </a:spcAft>
             </a:pPr>
             <a:r>
+              <a:rPr sz="1000" b="1" lang="zh-TW" dirty="0">
+                <a:solidFill>
+                  <a:srgbClr val="000000"/>
+                </a:solidFill>
+                <a:latin typeface="Arial Unicode MS"/>
+                <a:ea typeface="Arial Unicode MS"/>
+                <a:cs typeface="Arial Unicode MS"/>
+              </a:rPr>
+              <a:t>▍這一張要做什麼</a:t>
+            </a:r>
+            <a:r>
+              <a:rPr sz="1000" lang="zh-TW" dirty="0">
+                <a:solidFill>
+                  <a:srgbClr val="000000"/>
+                </a:solidFill>
+                <a:latin typeface="Arial Unicode MS"/>
+                <a:ea typeface="Arial Unicode MS"/>
+                <a:cs typeface="Arial Unicode MS"/>
+              </a:rPr>
+              <a:t>
+</a:t>
+            </a:r>
+          </a:p>
+          <a:p>
+            <a:pPr algn="l">
+              <a:lnSpc>
+                <a:spcPct val="115000"/>
+              </a:lnSpc>
+              <a:spcAft>
+                <a:spcPts val="500"/>
+              </a:spcAft>
+            </a:pPr>
+            <a:r>
+              <a:rPr sz="1000" lang="zh-TW" dirty="0">
+                <a:solidFill>
+                  <a:srgbClr val="000000"/>
+                </a:solidFill>
+                <a:latin typeface="Arial Unicode MS"/>
+                <a:ea typeface="Arial Unicode MS"/>
+                <a:cs typeface="Arial Unicode MS"/>
+              </a:rPr>
+              <a:t>捲簾快門：一張照片不是同時拍的，是從上往下掃出來的。
+</a:t>
+            </a:r>
+          </a:p>
+          <a:p>
+            <a:pPr algn="l">
+              <a:lnSpc>
+                <a:spcPct val="115000"/>
+              </a:lnSpc>
+              <a:spcAft>
+                <a:spcPts val="500"/>
+              </a:spcAft>
+            </a:pPr>
+            <a:r>
+              <a:rPr sz="1000" b="1" lang="zh-TW" dirty="0">
+                <a:solidFill>
+                  <a:srgbClr val="000000"/>
+                </a:solidFill>
+                <a:latin typeface="Arial Unicode MS"/>
+                <a:ea typeface="Arial Unicode MS"/>
+                <a:cs typeface="Arial Unicode MS"/>
+              </a:rPr>
+              <a:t>▍畫面上圈這裡</a:t>
+            </a:r>
+            <a:r>
+              <a:rPr sz="1000" lang="zh-TW" dirty="0">
+                <a:solidFill>
+                  <a:srgbClr val="000000"/>
+                </a:solidFill>
+                <a:latin typeface="Arial Unicode MS"/>
+                <a:ea typeface="Arial Unicode MS"/>
+                <a:cs typeface="Arial Unicode MS"/>
+              </a:rPr>
+              <a:t>
+</a:t>
+            </a:r>
+          </a:p>
+          <a:p>
+            <a:pPr algn="l">
+              <a:lnSpc>
+                <a:spcPct val="115000"/>
+              </a:lnSpc>
+              <a:spcAft>
+                <a:spcPts val="500"/>
+              </a:spcAft>
+            </a:pPr>
+            <a:r>
+              <a:rPr sz="1000" lang="zh-TW" dirty="0">
+                <a:solidFill>
+                  <a:srgbClr val="000000"/>
+                </a:solidFill>
+                <a:latin typeface="Arial Unicode MS"/>
+                <a:ea typeface="Arial Unicode MS"/>
+                <a:cs typeface="Arial Unicode MS"/>
+              </a:rPr>
+              <a:t>圈示意圖上時間差那個箭頭，再圈下方高速物體被拉歪的例子。
+</a:t>
+            </a:r>
+          </a:p>
+          <a:p>
+            <a:pPr algn="l">
+              <a:lnSpc>
+                <a:spcPct val="115000"/>
+              </a:lnSpc>
+              <a:spcAft>
+                <a:spcPts val="500"/>
+              </a:spcAft>
+            </a:pPr>
+            <a:r>
+              <a:rPr sz="1000" b="1" lang="zh-TW" dirty="0">
+                <a:solidFill>
+                  <a:srgbClr val="000000"/>
+                </a:solidFill>
+                <a:latin typeface="Arial Unicode MS"/>
+                <a:ea typeface="Arial Unicode MS"/>
+                <a:cs typeface="Arial Unicode MS"/>
+              </a:rPr>
+              <a:t>▍以下照著唸</a:t>
+            </a:r>
+            <a:r>
+              <a:rPr sz="1000" lang="zh-TW" dirty="0">
+                <a:solidFill>
+                  <a:srgbClr val="000000"/>
+                </a:solidFill>
+                <a:latin typeface="Arial Unicode MS"/>
+                <a:ea typeface="Arial Unicode MS"/>
+                <a:cs typeface="Arial Unicode MS"/>
+              </a:rPr>
+              <a:t>
+</a:t>
+            </a:r>
+          </a:p>
+          <a:p>
+            <a:pPr algn="l">
+              <a:lnSpc>
+                <a:spcPct val="115000"/>
+              </a:lnSpc>
+              <a:spcAft>
+                <a:spcPts val="500"/>
+              </a:spcAft>
+            </a:pPr>
+            <a:r>
               <a:rPr sz="1000" lang="zh-TW" dirty="0">
                 <a:solidFill>
                   <a:srgbClr val="000000"/>
@@ -3524,6 +4668,149 @@
               </a:spcAft>
             </a:pPr>
             <a:r>
+              <a:rPr sz="1000" b="1" lang="zh-TW" dirty="0">
+                <a:solidFill>
+                  <a:srgbClr val="000000"/>
+                </a:solidFill>
+                <a:latin typeface="Arial Unicode MS"/>
+                <a:ea typeface="Arial Unicode MS"/>
+                <a:cs typeface="Arial Unicode MS"/>
+              </a:rPr>
+              <a:t>▍這一張要做什麼</a:t>
+            </a:r>
+            <a:r>
+              <a:rPr sz="1000" lang="zh-TW" dirty="0">
+                <a:solidFill>
+                  <a:srgbClr val="000000"/>
+                </a:solidFill>
+                <a:latin typeface="Arial Unicode MS"/>
+                <a:ea typeface="Arial Unicode MS"/>
+                <a:cs typeface="Arial Unicode MS"/>
+              </a:rPr>
+              <a:t>
+</a:t>
+            </a:r>
+          </a:p>
+          <a:p>
+            <a:pPr algn="l">
+              <a:lnSpc>
+                <a:spcPct val="115000"/>
+              </a:lnSpc>
+              <a:spcAft>
+                <a:spcPts val="500"/>
+              </a:spcAft>
+            </a:pPr>
+            <a:r>
+              <a:rPr sz="1000" lang="zh-TW" dirty="0">
+                <a:solidFill>
+                  <a:srgbClr val="000000"/>
+                </a:solidFill>
+                <a:latin typeface="Arial Unicode MS"/>
+                <a:ea typeface="Arial Unicode MS"/>
+                <a:cs typeface="Arial Unicode MS"/>
+              </a:rPr>
+              <a:t>動態範圍：同一張畫面裡又有很暗又有很亮的地方。這條直接對應進隧道。
+</a:t>
+            </a:r>
+          </a:p>
+          <a:p>
+            <a:pPr algn="l">
+              <a:lnSpc>
+                <a:spcPct val="115000"/>
+              </a:lnSpc>
+              <a:spcAft>
+                <a:spcPts val="500"/>
+              </a:spcAft>
+            </a:pPr>
+            <a:r>
+              <a:rPr sz="1000" b="1" lang="zh-TW" dirty="0">
+                <a:solidFill>
+                  <a:srgbClr val="000000"/>
+                </a:solidFill>
+                <a:latin typeface="Arial Unicode MS"/>
+                <a:ea typeface="Arial Unicode MS"/>
+                <a:cs typeface="Arial Unicode MS"/>
+              </a:rPr>
+              <a:t>▍畫面上圈這裡</a:t>
+            </a:r>
+            <a:r>
+              <a:rPr sz="1000" lang="zh-TW" dirty="0">
+                <a:solidFill>
+                  <a:srgbClr val="000000"/>
+                </a:solidFill>
+                <a:latin typeface="Arial Unicode MS"/>
+                <a:ea typeface="Arial Unicode MS"/>
+                <a:cs typeface="Arial Unicode MS"/>
+              </a:rPr>
+              <a:t>
+</a:t>
+            </a:r>
+          </a:p>
+          <a:p>
+            <a:pPr algn="l">
+              <a:lnSpc>
+                <a:spcPct val="115000"/>
+              </a:lnSpc>
+              <a:spcAft>
+                <a:spcPts val="500"/>
+              </a:spcAft>
+            </a:pPr>
+            <a:r>
+              <a:rPr sz="1000" lang="zh-TW" dirty="0">
+                <a:solidFill>
+                  <a:srgbClr val="000000"/>
+                </a:solidFill>
+                <a:latin typeface="Arial Unicode MS"/>
+                <a:ea typeface="Arial Unicode MS"/>
+                <a:cs typeface="Arial Unicode MS"/>
+              </a:rPr>
+              <a:t>圈 dB 那個數字，再圈隧道口那個例子。這一條學生最有感。
+</a:t>
+            </a:r>
+          </a:p>
+          <a:p>
+            <a:pPr algn="l">
+              <a:lnSpc>
+                <a:spcPct val="115000"/>
+              </a:lnSpc>
+              <a:spcAft>
+                <a:spcPts val="500"/>
+              </a:spcAft>
+            </a:pPr>
+            <a:r>
+              <a:rPr sz="1000" b="1" lang="zh-TW" dirty="0">
+                <a:solidFill>
+                  <a:srgbClr val="000000"/>
+                </a:solidFill>
+                <a:latin typeface="Arial Unicode MS"/>
+                <a:ea typeface="Arial Unicode MS"/>
+                <a:cs typeface="Arial Unicode MS"/>
+              </a:rPr>
+              <a:t>▍以下照著唸</a:t>
+            </a:r>
+            <a:r>
+              <a:rPr sz="1000" lang="zh-TW" dirty="0">
+                <a:solidFill>
+                  <a:srgbClr val="000000"/>
+                </a:solidFill>
+                <a:latin typeface="Arial Unicode MS"/>
+                <a:ea typeface="Arial Unicode MS"/>
+                <a:cs typeface="Arial Unicode MS"/>
+              </a:rPr>
+              <a:t>
+</a:t>
+            </a:r>
+          </a:p>
+          <a:p>
+            <a:pPr algn="l">
+              <a:lnSpc>
+                <a:spcPct val="115000"/>
+              </a:lnSpc>
+              <a:spcAft>
+                <a:spcPts val="500"/>
+              </a:spcAft>
+            </a:pPr>
+            <a:r>
               <a:rPr sz="1000" lang="zh-TW" dirty="0">
                 <a:solidFill>
                   <a:srgbClr val="000000"/>
@@ -3953,6 +5240,149 @@
               </a:spcAft>
             </a:pPr>
             <a:r>
+              <a:rPr sz="1000" b="1" lang="zh-TW" dirty="0">
+                <a:solidFill>
+                  <a:srgbClr val="000000"/>
+                </a:solidFill>
+                <a:latin typeface="Arial Unicode MS"/>
+                <a:ea typeface="Arial Unicode MS"/>
+                <a:cs typeface="Arial Unicode MS"/>
+              </a:rPr>
+              <a:t>▍這一張要做什麼</a:t>
+            </a:r>
+            <a:r>
+              <a:rPr sz="1000" lang="zh-TW" dirty="0">
+                <a:solidFill>
+                  <a:srgbClr val="000000"/>
+                </a:solidFill>
+                <a:latin typeface="Arial Unicode MS"/>
+                <a:ea typeface="Arial Unicode MS"/>
+                <a:cs typeface="Arial Unicode MS"/>
+              </a:rPr>
+              <a:t>
+</a:t>
+            </a:r>
+          </a:p>
+          <a:p>
+            <a:pPr algn="l">
+              <a:lnSpc>
+                <a:spcPct val="115000"/>
+              </a:lnSpc>
+              <a:spcAft>
+                <a:spcPts val="500"/>
+              </a:spcAft>
+            </a:pPr>
+            <a:r>
+              <a:rPr sz="1000" lang="zh-TW" dirty="0">
+                <a:solidFill>
+                  <a:srgbClr val="000000"/>
+                </a:solidFill>
+                <a:latin typeface="Arial Unicode MS"/>
+                <a:ea typeface="Arial Unicode MS"/>
+                <a:cs typeface="Arial Unicode MS"/>
+              </a:rPr>
+              <a:t>LED 閃爍：人眼看不出來，相機看得出來，結果號誌可能整個是黑的。
+</a:t>
+            </a:r>
+          </a:p>
+          <a:p>
+            <a:pPr algn="l">
+              <a:lnSpc>
+                <a:spcPct val="115000"/>
+              </a:lnSpc>
+              <a:spcAft>
+                <a:spcPts val="500"/>
+              </a:spcAft>
+            </a:pPr>
+            <a:r>
+              <a:rPr sz="1000" b="1" lang="zh-TW" dirty="0">
+                <a:solidFill>
+                  <a:srgbClr val="000000"/>
+                </a:solidFill>
+                <a:latin typeface="Arial Unicode MS"/>
+                <a:ea typeface="Arial Unicode MS"/>
+                <a:cs typeface="Arial Unicode MS"/>
+              </a:rPr>
+              <a:t>▍畫面上圈這裡</a:t>
+            </a:r>
+            <a:r>
+              <a:rPr sz="1000" lang="zh-TW" dirty="0">
+                <a:solidFill>
+                  <a:srgbClr val="000000"/>
+                </a:solidFill>
+                <a:latin typeface="Arial Unicode MS"/>
+                <a:ea typeface="Arial Unicode MS"/>
+                <a:cs typeface="Arial Unicode MS"/>
+              </a:rPr>
+              <a:t>
+</a:t>
+            </a:r>
+          </a:p>
+          <a:p>
+            <a:pPr algn="l">
+              <a:lnSpc>
+                <a:spcPct val="115000"/>
+              </a:lnSpc>
+              <a:spcAft>
+                <a:spcPts val="500"/>
+              </a:spcAft>
+            </a:pPr>
+            <a:r>
+              <a:rPr sz="1000" lang="zh-TW" dirty="0">
+                <a:solidFill>
+                  <a:srgbClr val="000000"/>
+                </a:solidFill>
+                <a:latin typeface="Arial Unicode MS"/>
+                <a:ea typeface="Arial Unicode MS"/>
+                <a:cs typeface="Arial Unicode MS"/>
+              </a:rPr>
+              <a:t>圈「人眼看不出來」與「相機看得出來」，兩邊各指一次。
+</a:t>
+            </a:r>
+          </a:p>
+          <a:p>
+            <a:pPr algn="l">
+              <a:lnSpc>
+                <a:spcPct val="115000"/>
+              </a:lnSpc>
+              <a:spcAft>
+                <a:spcPts val="500"/>
+              </a:spcAft>
+            </a:pPr>
+            <a:r>
+              <a:rPr sz="1000" b="1" lang="zh-TW" dirty="0">
+                <a:solidFill>
+                  <a:srgbClr val="000000"/>
+                </a:solidFill>
+                <a:latin typeface="Arial Unicode MS"/>
+                <a:ea typeface="Arial Unicode MS"/>
+                <a:cs typeface="Arial Unicode MS"/>
+              </a:rPr>
+              <a:t>▍以下照著唸</a:t>
+            </a:r>
+            <a:r>
+              <a:rPr sz="1000" lang="zh-TW" dirty="0">
+                <a:solidFill>
+                  <a:srgbClr val="000000"/>
+                </a:solidFill>
+                <a:latin typeface="Arial Unicode MS"/>
+                <a:ea typeface="Arial Unicode MS"/>
+                <a:cs typeface="Arial Unicode MS"/>
+              </a:rPr>
+              <a:t>
+</a:t>
+            </a:r>
+          </a:p>
+          <a:p>
+            <a:pPr algn="l">
+              <a:lnSpc>
+                <a:spcPct val="115000"/>
+              </a:lnSpc>
+              <a:spcAft>
+                <a:spcPts val="500"/>
+              </a:spcAft>
+            </a:pPr>
+            <a:r>
               <a:rPr sz="1000" lang="zh-TW" dirty="0">
                 <a:solidFill>
                   <a:srgbClr val="000000"/>
@@ -4393,6 +5823,149 @@
               </a:spcAft>
             </a:pPr>
             <a:r>
+              <a:rPr sz="1200" b="1" lang="zh-TW" dirty="0">
+                <a:solidFill>
+                  <a:srgbClr val="000000"/>
+                </a:solidFill>
+                <a:latin typeface="Arial Unicode MS"/>
+                <a:ea typeface="Arial Unicode MS"/>
+                <a:cs typeface="Arial Unicode MS"/>
+              </a:rPr>
+              <a:t>▍這一張要做什麼</a:t>
+            </a:r>
+            <a:r>
+              <a:rPr sz="1200" lang="zh-TW" dirty="0">
+                <a:solidFill>
+                  <a:srgbClr val="000000"/>
+                </a:solidFill>
+                <a:latin typeface="Arial Unicode MS"/>
+                <a:ea typeface="Arial Unicode MS"/>
+                <a:cs typeface="Arial Unicode MS"/>
+              </a:rPr>
+              <a:t>
+</a:t>
+            </a:r>
+          </a:p>
+          <a:p>
+            <a:pPr algn="l">
+              <a:lnSpc>
+                <a:spcPct val="115000"/>
+              </a:lnSpc>
+              <a:spcAft>
+                <a:spcPts val="600"/>
+              </a:spcAft>
+            </a:pPr>
+            <a:r>
+              <a:rPr sz="1200" lang="zh-TW" dirty="0">
+                <a:solidFill>
+                  <a:srgbClr val="000000"/>
+                </a:solidFill>
+                <a:latin typeface="Arial Unicode MS"/>
+                <a:ea typeface="Arial Unicode MS"/>
+                <a:cs typeface="Arial Unicode MS"/>
+              </a:rPr>
+              <a:t>段落分隔。切到光達的三行：波長、眼睛安全、回波次數。
+</a:t>
+            </a:r>
+          </a:p>
+          <a:p>
+            <a:pPr algn="l">
+              <a:lnSpc>
+                <a:spcPct val="115000"/>
+              </a:lnSpc>
+              <a:spcAft>
+                <a:spcPts val="600"/>
+              </a:spcAft>
+            </a:pPr>
+            <a:r>
+              <a:rPr sz="1200" b="1" lang="zh-TW" dirty="0">
+                <a:solidFill>
+                  <a:srgbClr val="000000"/>
+                </a:solidFill>
+                <a:latin typeface="Arial Unicode MS"/>
+                <a:ea typeface="Arial Unicode MS"/>
+                <a:cs typeface="Arial Unicode MS"/>
+              </a:rPr>
+              <a:t>▍畫面上圈這裡</a:t>
+            </a:r>
+            <a:r>
+              <a:rPr sz="1200" lang="zh-TW" dirty="0">
+                <a:solidFill>
+                  <a:srgbClr val="000000"/>
+                </a:solidFill>
+                <a:latin typeface="Arial Unicode MS"/>
+                <a:ea typeface="Arial Unicode MS"/>
+                <a:cs typeface="Arial Unicode MS"/>
+              </a:rPr>
+              <a:t>
+</a:t>
+            </a:r>
+          </a:p>
+          <a:p>
+            <a:pPr algn="l">
+              <a:lnSpc>
+                <a:spcPct val="115000"/>
+              </a:lnSpc>
+              <a:spcAft>
+                <a:spcPts val="600"/>
+              </a:spcAft>
+            </a:pPr>
+            <a:r>
+              <a:rPr sz="1200" lang="zh-TW" dirty="0">
+                <a:solidFill>
+                  <a:srgbClr val="000000"/>
+                </a:solidFill>
+                <a:latin typeface="Arial Unicode MS"/>
+                <a:ea typeface="Arial Unicode MS"/>
+                <a:cs typeface="Arial Unicode MS"/>
+              </a:rPr>
+              <a:t>不用圈。
+</a:t>
+            </a:r>
+          </a:p>
+          <a:p>
+            <a:pPr algn="l">
+              <a:lnSpc>
+                <a:spcPct val="115000"/>
+              </a:lnSpc>
+              <a:spcAft>
+                <a:spcPts val="600"/>
+              </a:spcAft>
+            </a:pPr>
+            <a:r>
+              <a:rPr sz="1200" b="1" lang="zh-TW" dirty="0">
+                <a:solidFill>
+                  <a:srgbClr val="000000"/>
+                </a:solidFill>
+                <a:latin typeface="Arial Unicode MS"/>
+                <a:ea typeface="Arial Unicode MS"/>
+                <a:cs typeface="Arial Unicode MS"/>
+              </a:rPr>
+              <a:t>▍以下照著唸</a:t>
+            </a:r>
+            <a:r>
+              <a:rPr sz="1200" lang="zh-TW" dirty="0">
+                <a:solidFill>
+                  <a:srgbClr val="000000"/>
+                </a:solidFill>
+                <a:latin typeface="Arial Unicode MS"/>
+                <a:ea typeface="Arial Unicode MS"/>
+                <a:cs typeface="Arial Unicode MS"/>
+              </a:rPr>
+              <a:t>
+</a:t>
+            </a:r>
+          </a:p>
+          <a:p>
+            <a:pPr algn="l">
+              <a:lnSpc>
+                <a:spcPct val="115000"/>
+              </a:lnSpc>
+              <a:spcAft>
+                <a:spcPts val="600"/>
+              </a:spcAft>
+            </a:pPr>
+            <a:r>
               <a:rPr sz="1200" lang="zh-TW" dirty="0">
                 <a:solidFill>
                   <a:srgbClr val="000000"/>
@@ -4514,6 +6087,149 @@
               </a:spcAft>
             </a:pPr>
             <a:r>
+              <a:rPr sz="1000" b="1" lang="zh-TW" dirty="0">
+                <a:solidFill>
+                  <a:srgbClr val="000000"/>
+                </a:solidFill>
+                <a:latin typeface="Arial Unicode MS"/>
+                <a:ea typeface="Arial Unicode MS"/>
+                <a:cs typeface="Arial Unicode MS"/>
+              </a:rPr>
+              <a:t>▍這一張要做什麼</a:t>
+            </a:r>
+            <a:r>
+              <a:rPr sz="1000" lang="zh-TW" dirty="0">
+                <a:solidFill>
+                  <a:srgbClr val="000000"/>
+                </a:solidFill>
+                <a:latin typeface="Arial Unicode MS"/>
+                <a:ea typeface="Arial Unicode MS"/>
+                <a:cs typeface="Arial Unicode MS"/>
+              </a:rPr>
+              <a:t>
+</a:t>
+            </a:r>
+          </a:p>
+          <a:p>
+            <a:pPr algn="l">
+              <a:lnSpc>
+                <a:spcPct val="115000"/>
+              </a:lnSpc>
+              <a:spcAft>
+                <a:spcPts val="500"/>
+              </a:spcAft>
+            </a:pPr>
+            <a:r>
+              <a:rPr sz="1000" lang="zh-TW" dirty="0">
+                <a:solidFill>
+                  <a:srgbClr val="000000"/>
+                </a:solidFill>
+                <a:latin typeface="Arial Unicode MS"/>
+                <a:ea typeface="Arial Unicode MS"/>
+                <a:cs typeface="Arial Unicode MS"/>
+              </a:rPr>
+              <a:t>三種波長各有代價，選波長就是選代價。
+</a:t>
+            </a:r>
+          </a:p>
+          <a:p>
+            <a:pPr algn="l">
+              <a:lnSpc>
+                <a:spcPct val="115000"/>
+              </a:lnSpc>
+              <a:spcAft>
+                <a:spcPts val="500"/>
+              </a:spcAft>
+            </a:pPr>
+            <a:r>
+              <a:rPr sz="1000" b="1" lang="zh-TW" dirty="0">
+                <a:solidFill>
+                  <a:srgbClr val="000000"/>
+                </a:solidFill>
+                <a:latin typeface="Arial Unicode MS"/>
+                <a:ea typeface="Arial Unicode MS"/>
+                <a:cs typeface="Arial Unicode MS"/>
+              </a:rPr>
+              <a:t>▍畫面上圈這裡</a:t>
+            </a:r>
+            <a:r>
+              <a:rPr sz="1000" lang="zh-TW" dirty="0">
+                <a:solidFill>
+                  <a:srgbClr val="000000"/>
+                </a:solidFill>
+                <a:latin typeface="Arial Unicode MS"/>
+                <a:ea typeface="Arial Unicode MS"/>
+                <a:cs typeface="Arial Unicode MS"/>
+              </a:rPr>
+              <a:t>
+</a:t>
+            </a:r>
+          </a:p>
+          <a:p>
+            <a:pPr algn="l">
+              <a:lnSpc>
+                <a:spcPct val="115000"/>
+              </a:lnSpc>
+              <a:spcAft>
+                <a:spcPts val="500"/>
+              </a:spcAft>
+            </a:pPr>
+            <a:r>
+              <a:rPr sz="1000" lang="zh-TW" dirty="0">
+                <a:solidFill>
+                  <a:srgbClr val="000000"/>
+                </a:solidFill>
+                <a:latin typeface="Arial Unicode MS"/>
+                <a:ea typeface="Arial Unicode MS"/>
+                <a:cs typeface="Arial Unicode MS"/>
+              </a:rPr>
+              <a:t>一列一列圈，每圈一列念一次它的代價。
+</a:t>
+            </a:r>
+          </a:p>
+          <a:p>
+            <a:pPr algn="l">
+              <a:lnSpc>
+                <a:spcPct val="115000"/>
+              </a:lnSpc>
+              <a:spcAft>
+                <a:spcPts val="500"/>
+              </a:spcAft>
+            </a:pPr>
+            <a:r>
+              <a:rPr sz="1000" b="1" lang="zh-TW" dirty="0">
+                <a:solidFill>
+                  <a:srgbClr val="000000"/>
+                </a:solidFill>
+                <a:latin typeface="Arial Unicode MS"/>
+                <a:ea typeface="Arial Unicode MS"/>
+                <a:cs typeface="Arial Unicode MS"/>
+              </a:rPr>
+              <a:t>▍以下照著唸</a:t>
+            </a:r>
+            <a:r>
+              <a:rPr sz="1000" lang="zh-TW" dirty="0">
+                <a:solidFill>
+                  <a:srgbClr val="000000"/>
+                </a:solidFill>
+                <a:latin typeface="Arial Unicode MS"/>
+                <a:ea typeface="Arial Unicode MS"/>
+                <a:cs typeface="Arial Unicode MS"/>
+              </a:rPr>
+              <a:t>
+</a:t>
+            </a:r>
+          </a:p>
+          <a:p>
+            <a:pPr algn="l">
+              <a:lnSpc>
+                <a:spcPct val="115000"/>
+              </a:lnSpc>
+              <a:spcAft>
+                <a:spcPts val="500"/>
+              </a:spcAft>
+            </a:pPr>
+            <a:r>
               <a:rPr sz="1000" lang="zh-TW" dirty="0">
                 <a:solidFill>
                   <a:srgbClr val="000000"/>
@@ -5071,11 +6787,154 @@
                 <a:spcPct val="115000"/>
               </a:lnSpc>
               <a:spcAft>
-                <a:spcPts val="600"/>
-              </a:spcAft>
-            </a:pPr>
-            <a:r>
-              <a:rPr sz="1200" lang="zh-TW" dirty="0">
+                <a:spcPts val="500"/>
+              </a:spcAft>
+            </a:pPr>
+            <a:r>
+              <a:rPr sz="1000" b="1" lang="zh-TW" dirty="0">
+                <a:solidFill>
+                  <a:srgbClr val="000000"/>
+                </a:solidFill>
+                <a:latin typeface="Arial Unicode MS"/>
+                <a:ea typeface="Arial Unicode MS"/>
+                <a:cs typeface="Arial Unicode MS"/>
+              </a:rPr>
+              <a:t>▍這一張要做什麼</a:t>
+            </a:r>
+            <a:r>
+              <a:rPr sz="1000" lang="zh-TW" dirty="0">
+                <a:solidFill>
+                  <a:srgbClr val="000000"/>
+                </a:solidFill>
+                <a:latin typeface="Arial Unicode MS"/>
+                <a:ea typeface="Arial Unicode MS"/>
+                <a:cs typeface="Arial Unicode MS"/>
+              </a:rPr>
+              <a:t>
+</a:t>
+            </a:r>
+          </a:p>
+          <a:p>
+            <a:pPr algn="l">
+              <a:lnSpc>
+                <a:spcPct val="115000"/>
+              </a:lnSpc>
+              <a:spcAft>
+                <a:spcPts val="500"/>
+              </a:spcAft>
+            </a:pPr>
+            <a:r>
+              <a:rPr sz="1000" lang="zh-TW" dirty="0">
+                <a:solidFill>
+                  <a:srgbClr val="000000"/>
+                </a:solidFill>
+                <a:latin typeface="Arial Unicode MS"/>
+                <a:ea typeface="Arial Unicode MS"/>
+                <a:cs typeface="Arial Unicode MS"/>
+              </a:rPr>
+              <a:t>Class 1 眼睛安全：沒有這一行就不要裝上車。
+</a:t>
+            </a:r>
+          </a:p>
+          <a:p>
+            <a:pPr algn="l">
+              <a:lnSpc>
+                <a:spcPct val="115000"/>
+              </a:lnSpc>
+              <a:spcAft>
+                <a:spcPts val="500"/>
+              </a:spcAft>
+            </a:pPr>
+            <a:r>
+              <a:rPr sz="1000" b="1" lang="zh-TW" dirty="0">
+                <a:solidFill>
+                  <a:srgbClr val="000000"/>
+                </a:solidFill>
+                <a:latin typeface="Arial Unicode MS"/>
+                <a:ea typeface="Arial Unicode MS"/>
+                <a:cs typeface="Arial Unicode MS"/>
+              </a:rPr>
+              <a:t>▍畫面上圈這裡</a:t>
+            </a:r>
+            <a:r>
+              <a:rPr sz="1000" lang="zh-TW" dirty="0">
+                <a:solidFill>
+                  <a:srgbClr val="000000"/>
+                </a:solidFill>
+                <a:latin typeface="Arial Unicode MS"/>
+                <a:ea typeface="Arial Unicode MS"/>
+                <a:cs typeface="Arial Unicode MS"/>
+              </a:rPr>
+              <a:t>
+</a:t>
+            </a:r>
+          </a:p>
+          <a:p>
+            <a:pPr algn="l">
+              <a:lnSpc>
+                <a:spcPct val="115000"/>
+              </a:lnSpc>
+              <a:spcAft>
+                <a:spcPts val="500"/>
+              </a:spcAft>
+            </a:pPr>
+            <a:r>
+              <a:rPr sz="1000" lang="zh-TW" dirty="0">
+                <a:solidFill>
+                  <a:srgbClr val="000000"/>
+                </a:solidFill>
+                <a:latin typeface="Arial Unicode MS"/>
+                <a:ea typeface="Arial Unicode MS"/>
+                <a:cs typeface="Arial Unicode MS"/>
+              </a:rPr>
+              <a:t>圈「Class 1」那幾個字。這是安全底線，語氣要重。
+</a:t>
+            </a:r>
+          </a:p>
+          <a:p>
+            <a:pPr algn="l">
+              <a:lnSpc>
+                <a:spcPct val="115000"/>
+              </a:lnSpc>
+              <a:spcAft>
+                <a:spcPts val="500"/>
+              </a:spcAft>
+            </a:pPr>
+            <a:r>
+              <a:rPr sz="1000" b="1" lang="zh-TW" dirty="0">
+                <a:solidFill>
+                  <a:srgbClr val="000000"/>
+                </a:solidFill>
+                <a:latin typeface="Arial Unicode MS"/>
+                <a:ea typeface="Arial Unicode MS"/>
+                <a:cs typeface="Arial Unicode MS"/>
+              </a:rPr>
+              <a:t>▍以下照著唸</a:t>
+            </a:r>
+            <a:r>
+              <a:rPr sz="1000" lang="zh-TW" dirty="0">
+                <a:solidFill>
+                  <a:srgbClr val="000000"/>
+                </a:solidFill>
+                <a:latin typeface="Arial Unicode MS"/>
+                <a:ea typeface="Arial Unicode MS"/>
+                <a:cs typeface="Arial Unicode MS"/>
+              </a:rPr>
+              <a:t>
+</a:t>
+            </a:r>
+          </a:p>
+          <a:p>
+            <a:pPr algn="l">
+              <a:lnSpc>
+                <a:spcPct val="115000"/>
+              </a:lnSpc>
+              <a:spcAft>
+                <a:spcPts val="500"/>
+              </a:spcAft>
+            </a:pPr>
+            <a:r>
+              <a:rPr sz="1000" lang="zh-TW" dirty="0">
                 <a:solidFill>
                   <a:srgbClr val="000000"/>
                 </a:solidFill>
@@ -5086,7 +6945,7 @@
               <a:t>緊接著上一行的是</a:t>
             </a:r>
             <a:r>
-              <a:rPr sz="1200" b="1" lang="zh-TW" dirty="0">
+              <a:rPr sz="1000" b="1" lang="zh-TW" dirty="0">
                 <a:solidFill>
                   <a:srgbClr val="000000"/>
                 </a:solidFill>
@@ -5097,7 +6956,7 @@
               <a:t>眼睛安全等級</a:t>
             </a:r>
             <a:r>
-              <a:rPr sz="1200" lang="zh-TW" dirty="0">
+              <a:rPr sz="1000" lang="zh-TW" dirty="0">
                 <a:solidFill>
                   <a:srgbClr val="000000"/>
                 </a:solidFill>
@@ -5115,11 +6974,11 @@
                 <a:spcPct val="115000"/>
               </a:lnSpc>
               <a:spcAft>
-                <a:spcPts val="600"/>
-              </a:spcAft>
-            </a:pPr>
-            <a:r>
-              <a:rPr sz="1200" lang="zh-TW" dirty="0">
+                <a:spcPts val="500"/>
+              </a:spcAft>
+            </a:pPr>
+            <a:r>
+              <a:rPr sz="1000" lang="zh-TW" dirty="0">
                 <a:solidFill>
                   <a:srgbClr val="000000"/>
                 </a:solidFill>
@@ -5130,7 +6989,7 @@
               <a:t>OS1 的規格表上寫：</a:t>
             </a:r>
             <a:r>
-              <a:rPr sz="1200" b="1" lang="zh-TW" dirty="0">
+              <a:rPr sz="1000" b="1" lang="zh-TW" dirty="0">
                 <a:solidFill>
                   <a:srgbClr val="000000"/>
                 </a:solidFill>
@@ -5141,7 +7000,7 @@
               <a:t>Class 1 eye-safe per IEC/EN 60825-1: 2014</a:t>
             </a:r>
             <a:r>
-              <a:rPr sz="1200" lang="zh-TW" dirty="0">
+              <a:rPr sz="1000" lang="zh-TW" dirty="0">
                 <a:solidFill>
                   <a:srgbClr val="000000"/>
                 </a:solidFill>
@@ -5159,11 +7018,11 @@
                 <a:spcPct val="115000"/>
               </a:lnSpc>
               <a:spcAft>
-                <a:spcPts val="600"/>
-              </a:spcAft>
-            </a:pPr>
-            <a:r>
-              <a:rPr sz="1200" lang="zh-TW" dirty="0">
+                <a:spcPts val="500"/>
+              </a:spcAft>
+            </a:pPr>
+            <a:r>
+              <a:rPr sz="1000" lang="zh-TW" dirty="0">
                 <a:solidFill>
                   <a:srgbClr val="000000"/>
                 </a:solidFill>
@@ -5174,7 +7033,7 @@
               <a:t>這一行在講什麼？IEC 60825 是雷射產品的國際安全標準，把雷射分成好幾級。Class 1 是最安全的那一級，意思是：</a:t>
             </a:r>
             <a:r>
-              <a:rPr sz="1200" b="1" lang="zh-TW" dirty="0">
+              <a:rPr sz="1000" b="1" lang="zh-TW" dirty="0">
                 <a:solidFill>
                   <a:srgbClr val="000000"/>
                 </a:solidFill>
@@ -5185,7 +7044,7 @@
               <a:t>在正常使用的情況下，就算有人直直盯著它看，也不會傷到眼睛。</a:t>
             </a:r>
             <a:r>
-              <a:rPr sz="1200" lang="zh-TW" dirty="0">
+              <a:rPr sz="1000" lang="zh-TW" dirty="0">
                 <a:solidFill>
                   <a:srgbClr val="000000"/>
                 </a:solidFill>
@@ -5203,11 +7062,11 @@
                 <a:spcPct val="115000"/>
               </a:lnSpc>
               <a:spcAft>
-                <a:spcPts val="600"/>
-              </a:spcAft>
-            </a:pPr>
-            <a:r>
-              <a:rPr sz="1200" lang="zh-TW" dirty="0">
+                <a:spcPts val="500"/>
+              </a:spcAft>
+            </a:pPr>
+            <a:r>
+              <a:rPr sz="1000" lang="zh-TW" dirty="0">
                 <a:solidFill>
                   <a:srgbClr val="000000"/>
                 </a:solidFill>
@@ -5225,11 +7084,11 @@
                 <a:spcPct val="115000"/>
               </a:lnSpc>
               <a:spcAft>
-                <a:spcPts val="600"/>
-              </a:spcAft>
-            </a:pPr>
-            <a:r>
-              <a:rPr sz="1200" lang="zh-TW" dirty="0">
+                <a:spcPts val="500"/>
+              </a:spcAft>
+            </a:pPr>
+            <a:r>
+              <a:rPr sz="1000" lang="zh-TW" dirty="0">
                 <a:solidFill>
                   <a:srgbClr val="000000"/>
                 </a:solidFill>
@@ -5240,7 +7099,7 @@
               <a:t>因為光達是裝在</a:t>
             </a:r>
             <a:r>
-              <a:rPr sz="1200" b="1" lang="zh-TW" dirty="0">
+              <a:rPr sz="1000" b="1" lang="zh-TW" dirty="0">
                 <a:solidFill>
                   <a:srgbClr val="000000"/>
                 </a:solidFill>
@@ -5251,7 +7110,7 @@
               <a:t>馬路上跑的車</a:t>
             </a:r>
             <a:r>
-              <a:rPr sz="1200" lang="zh-TW" dirty="0">
+              <a:rPr sz="1000" lang="zh-TW" dirty="0">
                 <a:solidFill>
                   <a:srgbClr val="000000"/>
                 </a:solidFill>
@@ -5269,11 +7128,11 @@
                 <a:spcPct val="115000"/>
               </a:lnSpc>
               <a:spcAft>
-                <a:spcPts val="600"/>
-              </a:spcAft>
-            </a:pPr>
-            <a:r>
-              <a:rPr sz="1200" lang="zh-TW" dirty="0">
+                <a:spcPts val="500"/>
+              </a:spcAft>
+            </a:pPr>
+            <a:r>
+              <a:rPr sz="1000" lang="zh-TW" dirty="0">
                 <a:solidFill>
                   <a:srgbClr val="000000"/>
                 </a:solidFill>
@@ -5284,7 +7143,7 @@
               <a:t>所以這一行不是加分項，是</a:t>
             </a:r>
             <a:r>
-              <a:rPr sz="1200" b="1" lang="zh-TW" dirty="0">
+              <a:rPr sz="1000" b="1" lang="zh-TW" dirty="0">
                 <a:solidFill>
                   <a:srgbClr val="000000"/>
                 </a:solidFill>
@@ -5295,7 +7154,7 @@
               <a:t>門檻</a:t>
             </a:r>
             <a:r>
-              <a:rPr sz="1200" lang="zh-TW" dirty="0">
+              <a:rPr sz="1000" lang="zh-TW" dirty="0">
                 <a:solidFill>
                   <a:srgbClr val="000000"/>
                 </a:solidFill>
@@ -5313,11 +7172,11 @@
                 <a:spcPct val="115000"/>
               </a:lnSpc>
               <a:spcAft>
-                <a:spcPts val="600"/>
-              </a:spcAft>
-            </a:pPr>
-            <a:r>
-              <a:rPr sz="1200" lang="zh-TW" dirty="0">
+                <a:spcPts val="500"/>
+              </a:spcAft>
+            </a:pPr>
+            <a:r>
+              <a:rPr sz="1000" lang="zh-TW" dirty="0">
                 <a:solidFill>
                   <a:srgbClr val="000000"/>
                 </a:solidFill>
@@ -5335,11 +7194,11 @@
                 <a:spcPct val="115000"/>
               </a:lnSpc>
               <a:spcAft>
-                <a:spcPts val="600"/>
-              </a:spcAft>
-            </a:pPr>
-            <a:r>
-              <a:rPr sz="1200" lang="zh-TW" dirty="0">
+                <a:spcPts val="500"/>
+              </a:spcAft>
+            </a:pPr>
+            <a:r>
+              <a:rPr sz="1000" lang="zh-TW" dirty="0">
                 <a:solidFill>
                   <a:srgbClr val="000000"/>
                 </a:solidFill>
@@ -5456,11 +7315,154 @@
                 <a:spcPct val="115000"/>
               </a:lnSpc>
               <a:spcAft>
-                <a:spcPts val="525"/>
-              </a:spcAft>
-            </a:pPr>
-            <a:r>
-              <a:rPr sz="1050" lang="zh-TW" dirty="0">
+                <a:spcPts val="500"/>
+              </a:spcAft>
+            </a:pPr>
+            <a:r>
+              <a:rPr sz="1000" b="1" lang="zh-TW" dirty="0">
+                <a:solidFill>
+                  <a:srgbClr val="000000"/>
+                </a:solidFill>
+                <a:latin typeface="Arial Unicode MS"/>
+                <a:ea typeface="Arial Unicode MS"/>
+                <a:cs typeface="Arial Unicode MS"/>
+              </a:rPr>
+              <a:t>▍這一張要做什麼</a:t>
+            </a:r>
+            <a:r>
+              <a:rPr sz="1000" lang="zh-TW" dirty="0">
+                <a:solidFill>
+                  <a:srgbClr val="000000"/>
+                </a:solidFill>
+                <a:latin typeface="Arial Unicode MS"/>
+                <a:ea typeface="Arial Unicode MS"/>
+                <a:cs typeface="Arial Unicode MS"/>
+              </a:rPr>
+              <a:t>
+</a:t>
+            </a:r>
+          </a:p>
+          <a:p>
+            <a:pPr algn="l">
+              <a:lnSpc>
+                <a:spcPct val="115000"/>
+              </a:lnSpc>
+              <a:spcAft>
+                <a:spcPts val="500"/>
+              </a:spcAft>
+            </a:pPr>
+            <a:r>
+              <a:rPr sz="1000" lang="zh-TW" dirty="0">
+                <a:solidFill>
+                  <a:srgbClr val="000000"/>
+                </a:solidFill>
+                <a:latin typeface="Arial Unicode MS"/>
+                <a:ea typeface="Arial Unicode MS"/>
+                <a:cs typeface="Arial Unicode MS"/>
+              </a:rPr>
+              <a:t>多次回波：一道雷射可能彈回兩次，這在下雨和玻璃前面很關鍵。
+</a:t>
+            </a:r>
+          </a:p>
+          <a:p>
+            <a:pPr algn="l">
+              <a:lnSpc>
+                <a:spcPct val="115000"/>
+              </a:lnSpc>
+              <a:spcAft>
+                <a:spcPts val="500"/>
+              </a:spcAft>
+            </a:pPr>
+            <a:r>
+              <a:rPr sz="1000" b="1" lang="zh-TW" dirty="0">
+                <a:solidFill>
+                  <a:srgbClr val="000000"/>
+                </a:solidFill>
+                <a:latin typeface="Arial Unicode MS"/>
+                <a:ea typeface="Arial Unicode MS"/>
+                <a:cs typeface="Arial Unicode MS"/>
+              </a:rPr>
+              <a:t>▍畫面上圈這裡</a:t>
+            </a:r>
+            <a:r>
+              <a:rPr sz="1000" lang="zh-TW" dirty="0">
+                <a:solidFill>
+                  <a:srgbClr val="000000"/>
+                </a:solidFill>
+                <a:latin typeface="Arial Unicode MS"/>
+                <a:ea typeface="Arial Unicode MS"/>
+                <a:cs typeface="Arial Unicode MS"/>
+              </a:rPr>
+              <a:t>
+</a:t>
+            </a:r>
+          </a:p>
+          <a:p>
+            <a:pPr algn="l">
+              <a:lnSpc>
+                <a:spcPct val="115000"/>
+              </a:lnSpc>
+              <a:spcAft>
+                <a:spcPts val="500"/>
+              </a:spcAft>
+            </a:pPr>
+            <a:r>
+              <a:rPr sz="1000" lang="zh-TW" dirty="0">
+                <a:solidFill>
+                  <a:srgbClr val="000000"/>
+                </a:solidFill>
+                <a:latin typeface="Arial Unicode MS"/>
+                <a:ea typeface="Arial Unicode MS"/>
+                <a:cs typeface="Arial Unicode MS"/>
+              </a:rPr>
+              <a:t>圈示意圖上第一次與第二次回波的兩個點。
+</a:t>
+            </a:r>
+          </a:p>
+          <a:p>
+            <a:pPr algn="l">
+              <a:lnSpc>
+                <a:spcPct val="115000"/>
+              </a:lnSpc>
+              <a:spcAft>
+                <a:spcPts val="500"/>
+              </a:spcAft>
+            </a:pPr>
+            <a:r>
+              <a:rPr sz="1000" b="1" lang="zh-TW" dirty="0">
+                <a:solidFill>
+                  <a:srgbClr val="000000"/>
+                </a:solidFill>
+                <a:latin typeface="Arial Unicode MS"/>
+                <a:ea typeface="Arial Unicode MS"/>
+                <a:cs typeface="Arial Unicode MS"/>
+              </a:rPr>
+              <a:t>▍以下照著唸</a:t>
+            </a:r>
+            <a:r>
+              <a:rPr sz="1000" lang="zh-TW" dirty="0">
+                <a:solidFill>
+                  <a:srgbClr val="000000"/>
+                </a:solidFill>
+                <a:latin typeface="Arial Unicode MS"/>
+                <a:ea typeface="Arial Unicode MS"/>
+                <a:cs typeface="Arial Unicode MS"/>
+              </a:rPr>
+              <a:t>
+</a:t>
+            </a:r>
+          </a:p>
+          <a:p>
+            <a:pPr algn="l">
+              <a:lnSpc>
+                <a:spcPct val="115000"/>
+              </a:lnSpc>
+              <a:spcAft>
+                <a:spcPts val="500"/>
+              </a:spcAft>
+            </a:pPr>
+            <a:r>
+              <a:rPr sz="1000" lang="zh-TW" dirty="0">
                 <a:solidFill>
                   <a:srgbClr val="000000"/>
                 </a:solidFill>
@@ -5471,7 +7473,7 @@
               <a:t>光達的第三行講的是</a:t>
             </a:r>
             <a:r>
-              <a:rPr sz="1050" b="1" lang="zh-TW" dirty="0">
+              <a:rPr sz="1000" b="1" lang="zh-TW" dirty="0">
                 <a:solidFill>
                   <a:srgbClr val="000000"/>
                 </a:solidFill>
@@ -5482,7 +7484,7 @@
               <a:t>回波次數</a:t>
             </a:r>
             <a:r>
-              <a:rPr sz="1050" lang="zh-TW" dirty="0">
+              <a:rPr sz="1000" lang="zh-TW" dirty="0">
                 <a:solidFill>
                   <a:srgbClr val="000000"/>
                 </a:solidFill>
@@ -5493,7 +7495,7 @@
               <a:t>。OS1 的規格表上寫 </a:t>
             </a:r>
             <a:r>
-              <a:rPr sz="1050" b="1" lang="zh-TW" dirty="0">
+              <a:rPr sz="1000" b="1" lang="zh-TW" dirty="0">
                 <a:solidFill>
                   <a:srgbClr val="000000"/>
                 </a:solidFill>
@@ -5504,7 +7506,7 @@
               <a:t>number of returns: up to 2</a:t>
             </a:r>
             <a:r>
-              <a:rPr sz="1050" lang="zh-TW" dirty="0">
+              <a:rPr sz="1000" lang="zh-TW" dirty="0">
                 <a:solidFill>
                   <a:srgbClr val="000000"/>
                 </a:solidFill>
@@ -5522,11 +7524,11 @@
                 <a:spcPct val="115000"/>
               </a:lnSpc>
               <a:spcAft>
-                <a:spcPts val="525"/>
-              </a:spcAft>
-            </a:pPr>
-            <a:r>
-              <a:rPr sz="1050" lang="zh-TW" dirty="0">
+                <a:spcPts val="500"/>
+              </a:spcAft>
+            </a:pPr>
+            <a:r>
+              <a:rPr sz="1000" lang="zh-TW" dirty="0">
                 <a:solidFill>
                   <a:srgbClr val="000000"/>
                 </a:solidFill>
@@ -5544,11 +7546,11 @@
                 <a:spcPct val="115000"/>
               </a:lnSpc>
               <a:spcAft>
-                <a:spcPts val="525"/>
-              </a:spcAft>
-            </a:pPr>
-            <a:r>
-              <a:rPr sz="1050" lang="zh-TW" dirty="0">
+                <a:spcPts val="500"/>
+              </a:spcAft>
+            </a:pPr>
+            <a:r>
+              <a:rPr sz="1000" lang="zh-TW" dirty="0">
                 <a:solidFill>
                   <a:srgbClr val="000000"/>
                 </a:solidFill>
@@ -5566,11 +7568,11 @@
                 <a:spcPct val="115000"/>
               </a:lnSpc>
               <a:spcAft>
-                <a:spcPts val="525"/>
-              </a:spcAft>
-            </a:pPr>
-            <a:r>
-              <a:rPr sz="1050" lang="zh-TW" dirty="0">
+                <a:spcPts val="500"/>
+              </a:spcAft>
+            </a:pPr>
+            <a:r>
+              <a:rPr sz="1000" lang="zh-TW" dirty="0">
                 <a:solidFill>
                   <a:srgbClr val="000000"/>
                 </a:solidFill>
@@ -5581,7 +7583,7 @@
               <a:t>那道雷射可能</a:t>
             </a:r>
             <a:r>
-              <a:rPr sz="1050" b="1" lang="zh-TW" dirty="0">
+              <a:rPr sz="1000" b="1" lang="zh-TW" dirty="0">
                 <a:solidFill>
                   <a:srgbClr val="000000"/>
                 </a:solidFill>
@@ -5592,7 +7594,7 @@
               <a:t>先打到一顆雨滴，彈回來一次</a:t>
             </a:r>
             <a:r>
-              <a:rPr sz="1050" lang="zh-TW" dirty="0">
+              <a:rPr sz="1000" lang="zh-TW" dirty="0">
                 <a:solidFill>
                   <a:srgbClr val="000000"/>
                 </a:solidFill>
@@ -5603,7 +7605,7 @@
               <a:t>；穿過去之後，</a:t>
             </a:r>
             <a:r>
-              <a:rPr sz="1050" b="1" lang="zh-TW" dirty="0">
+              <a:rPr sz="1000" b="1" lang="zh-TW" dirty="0">
                 <a:solidFill>
                   <a:srgbClr val="000000"/>
                 </a:solidFill>
@@ -5614,7 +7616,7 @@
               <a:t>再打到真正的車，又彈回來一次</a:t>
             </a:r>
             <a:r>
-              <a:rPr sz="1050" lang="zh-TW" dirty="0">
+              <a:rPr sz="1000" lang="zh-TW" dirty="0">
                 <a:solidFill>
                   <a:srgbClr val="000000"/>
                 </a:solidFill>
@@ -5632,11 +7634,11 @@
                 <a:spcPct val="115000"/>
               </a:lnSpc>
               <a:spcAft>
-                <a:spcPts val="525"/>
-              </a:spcAft>
-            </a:pPr>
-            <a:r>
-              <a:rPr sz="1050" lang="zh-TW" dirty="0">
+                <a:spcPts val="500"/>
+              </a:spcAft>
+            </a:pPr>
+            <a:r>
+              <a:rPr sz="1000" lang="zh-TW" dirty="0">
                 <a:solidFill>
                   <a:srgbClr val="000000"/>
                 </a:solidFill>
@@ -5647,7 +7649,7 @@
               <a:t>如果這顆光達只收</a:t>
             </a:r>
             <a:r>
-              <a:rPr sz="1050" b="1" lang="zh-TW" dirty="0">
+              <a:rPr sz="1000" b="1" lang="zh-TW" dirty="0">
                 <a:solidFill>
                   <a:srgbClr val="000000"/>
                 </a:solidFill>
@@ -5658,7 +7660,7 @@
               <a:t>第一次</a:t>
             </a:r>
             <a:r>
-              <a:rPr sz="1050" lang="zh-TW" dirty="0">
+              <a:rPr sz="1000" lang="zh-TW" dirty="0">
                 <a:solidFill>
                   <a:srgbClr val="000000"/>
                 </a:solidFill>
@@ -5676,11 +7678,11 @@
                 <a:spcPct val="115000"/>
               </a:lnSpc>
               <a:spcAft>
-                <a:spcPts val="525"/>
-              </a:spcAft>
-            </a:pPr>
-            <a:r>
-              <a:rPr sz="1050" lang="zh-TW" dirty="0">
+                <a:spcPts val="500"/>
+              </a:spcAft>
+            </a:pPr>
+            <a:r>
+              <a:rPr sz="1000" lang="zh-TW" dirty="0">
                 <a:solidFill>
                   <a:srgbClr val="000000"/>
                 </a:solidFill>
@@ -5691,7 +7693,7 @@
               <a:t>這就是第三週我們講下雪那一輪的時候，我說的那件事：</a:t>
             </a:r>
             <a:r>
-              <a:rPr sz="1050" b="1" lang="zh-TW" dirty="0">
+              <a:rPr sz="1000" b="1" lang="zh-TW" dirty="0">
                 <a:solidFill>
                   <a:srgbClr val="000000"/>
                 </a:solidFill>
@@ -5702,7 +7704,7 @@
               <a:t>飄在空中的雪花本身就會反射雷射</a:t>
             </a:r>
             <a:r>
-              <a:rPr sz="1050" lang="zh-TW" dirty="0">
+              <a:rPr sz="1000" lang="zh-TW" dirty="0">
                 <a:solidFill>
                   <a:srgbClr val="000000"/>
                 </a:solidFill>
@@ -5720,11 +7722,11 @@
                 <a:spcPct val="115000"/>
               </a:lnSpc>
               <a:spcAft>
-                <a:spcPts val="525"/>
-              </a:spcAft>
-            </a:pPr>
-            <a:r>
-              <a:rPr sz="1050" lang="zh-TW" dirty="0">
+                <a:spcPts val="500"/>
+              </a:spcAft>
+            </a:pPr>
+            <a:r>
+              <a:rPr sz="1000" lang="zh-TW" dirty="0">
                 <a:solidFill>
                   <a:srgbClr val="000000"/>
                 </a:solidFill>
@@ -5735,7 +7737,7 @@
               <a:t>處理的方法就是收</a:t>
             </a:r>
             <a:r>
-              <a:rPr sz="1050" b="1" lang="zh-TW" dirty="0">
+              <a:rPr sz="1000" b="1" lang="zh-TW" dirty="0">
                 <a:solidFill>
                   <a:srgbClr val="000000"/>
                 </a:solidFill>
@@ -5746,7 +7748,7 @@
               <a:t>多次回波</a:t>
             </a:r>
             <a:r>
-              <a:rPr sz="1050" lang="zh-TW" dirty="0">
+              <a:rPr sz="1000" lang="zh-TW" dirty="0">
                 <a:solidFill>
                   <a:srgbClr val="000000"/>
                 </a:solidFill>
@@ -5764,11 +7766,11 @@
                 <a:spcPct val="115000"/>
               </a:lnSpc>
               <a:spcAft>
-                <a:spcPts val="525"/>
-              </a:spcAft>
-            </a:pPr>
-            <a:r>
-              <a:rPr sz="1050" lang="zh-TW" dirty="0">
+                <a:spcPts val="500"/>
+              </a:spcAft>
+            </a:pPr>
+            <a:r>
+              <a:rPr sz="1000" lang="zh-TW" dirty="0">
                 <a:solidFill>
                   <a:srgbClr val="000000"/>
                 </a:solidFill>
@@ -5779,7 +7781,7 @@
               <a:t>規格表上還會寫 </a:t>
             </a:r>
             <a:r>
-              <a:rPr sz="1050" b="1" lang="zh-TW" dirty="0">
+              <a:rPr sz="1000" b="1" lang="zh-TW" dirty="0">
                 <a:solidFill>
                   <a:srgbClr val="000000"/>
                 </a:solidFill>
@@ -5790,7 +7792,7 @@
               <a:t>Return Order</a:t>
             </a:r>
             <a:r>
-              <a:rPr sz="1050" lang="zh-TW" dirty="0">
+              <a:rPr sz="1000" lang="zh-TW" dirty="0">
                 <a:solidFill>
                   <a:srgbClr val="000000"/>
                 </a:solidFill>
@@ -5808,11 +7810,11 @@
                 <a:spcPct val="115000"/>
               </a:lnSpc>
               <a:spcAft>
-                <a:spcPts val="525"/>
-              </a:spcAft>
-            </a:pPr>
-            <a:r>
-              <a:rPr sz="1050" lang="zh-TW" dirty="0">
+                <a:spcPts val="500"/>
+              </a:spcAft>
+            </a:pPr>
+            <a:r>
+              <a:rPr sz="1000" lang="zh-TW" dirty="0">
                 <a:solidFill>
                   <a:srgbClr val="000000"/>
                 </a:solidFill>
@@ -5823,7 +7825,7 @@
               <a:t>所以「up to 2 returns」這一行，其實就是在回答：</a:t>
             </a:r>
             <a:r>
-              <a:rPr sz="1050" b="1" lang="zh-TW" dirty="0">
+              <a:rPr sz="1000" b="1" lang="zh-TW" dirty="0">
                 <a:solidFill>
                   <a:srgbClr val="000000"/>
                 </a:solidFill>
@@ -5834,7 +7836,7 @@
               <a:t>這顆光達在雨天和灰塵裡好不好用。</a:t>
             </a:r>
             <a:r>
-              <a:rPr sz="1050" lang="zh-TW" dirty="0">
+              <a:rPr sz="1000" lang="zh-TW" dirty="0">
                 <a:solidFill>
                   <a:srgbClr val="000000"/>
                 </a:solidFill>
@@ -5852,11 +7854,11 @@
                 <a:spcPct val="115000"/>
               </a:lnSpc>
               <a:spcAft>
-                <a:spcPts val="525"/>
-              </a:spcAft>
-            </a:pPr>
-            <a:r>
-              <a:rPr sz="1050" lang="zh-TW" dirty="0">
+                <a:spcPts val="500"/>
+              </a:spcAft>
+            </a:pPr>
+            <a:r>
+              <a:rPr sz="1000" lang="zh-TW" dirty="0">
                 <a:solidFill>
                   <a:srgbClr val="000000"/>
                 </a:solidFill>

--- a/第五週(10-08)/第五週_第2節_簡報.pptx
+++ b/第五週(10-08)/第五週_第2節_簡報.pptx
@@ -14343,7 +14343,7 @@
       </p:nvGrpSpPr>
       <p:grpSpPr>
         <a:xfrm>
-          <a:off x="1096600" y="0"/>
+          <a:off x="1084799" y="0"/>
           <a:ext cx="1" cy="1"/>
           <a:chOff x="0" y="0"/>
           <a:chExt cx="0" cy="0"/>
@@ -14357,8 +14357,8 @@
         </p:nvSpPr>
         <p:spPr>
           <a:xfrm>
-            <a:off x="1478894" y="222426"/>
-            <a:ext cx="6186212" cy="639474"/>
+            <a:off x="1468391" y="223181"/>
+            <a:ext cx="6207218" cy="641645"/>
           </a:xfrm>
           <a:prstGeom prst="rect">
             <a:avLst/>
@@ -14377,7 +14377,7 @@
               <a:buNone/>
             </a:pPr>
             <a:r>
-              <a:rPr lang="en-US" sz="1670" b="1" dirty="0">
+              <a:rPr lang="en-US" sz="1680" b="1" dirty="0">
                 <a:solidFill>
                   <a:srgbClr val="0B1F3A"/>
                 </a:solidFill>
@@ -14387,7 +14387,7 @@
               </a:rPr>
               <a:t>905, 865 hay 1550 nm: chọn bước sóng là chọn đánh đổi</a:t>
             </a:r>
-            <a:endParaRPr lang="en-US" sz="1670" dirty="0"/>
+            <a:endParaRPr lang="en-US" sz="1680" dirty="0"/>
           </a:p>
           <a:p>
             <a:pPr indent="0" marL="0">
@@ -14407,7 +14407,7 @@
               </a:rPr>
               <a:t>905、865 還是 1550 奈米：選波長就是選代價</a:t>
             </a:r>
-            <a:endParaRPr lang="en-US" sz="1670" dirty="0"/>
+            <a:endParaRPr lang="en-US" sz="1680" dirty="0"/>
           </a:p>
         </p:txBody>
       </p:sp>
@@ -14419,8 +14419,8 @@
         </p:nvSpPr>
         <p:spPr>
           <a:xfrm>
-            <a:off x="1478894" y="861899"/>
-            <a:ext cx="6186212" cy="542162"/>
+            <a:off x="1468391" y="864826"/>
+            <a:ext cx="6207218" cy="544003"/>
           </a:xfrm>
           <a:prstGeom prst="roundRect">
             <a:avLst>
@@ -14441,8 +14441,8 @@
         </p:nvSpPr>
         <p:spPr>
           <a:xfrm>
-            <a:off x="1590107" y="917506"/>
-            <a:ext cx="5963787" cy="430950"/>
+            <a:off x="1579981" y="920621"/>
+            <a:ext cx="5984038" cy="432413"/>
           </a:xfrm>
           <a:prstGeom prst="rect">
             <a:avLst/>
@@ -14461,7 +14461,7 @@
               <a:buNone/>
             </a:pPr>
             <a:r>
-              <a:rPr lang="en-US" sz="870" b="1" dirty="0">
+              <a:rPr lang="en-US" sz="880" b="1" dirty="0">
                 <a:solidFill>
                   <a:srgbClr val="007F72"/>
                 </a:solidFill>
@@ -14471,7 +14471,7 @@
               </a:rPr>
               <a:t>Ba con số này đều nằm ở dòng «Laser Wavelength» trên datasheet.</a:t>
             </a:r>
-            <a:endParaRPr lang="en-US" sz="870" dirty="0"/>
+            <a:endParaRPr lang="en-US" sz="880" dirty="0"/>
           </a:p>
           <a:p>
             <a:pPr indent="0" marL="0">
@@ -14491,7 +14491,7 @@
               </a:rPr>
               <a:t>這三個數字都寫在規格表的 Laser Wavelength 那一行。</a:t>
             </a:r>
-            <a:endParaRPr lang="en-US" sz="870" dirty="0"/>
+            <a:endParaRPr lang="en-US" sz="880" dirty="0"/>
           </a:p>
         </p:txBody>
       </p:sp>
@@ -14510,20 +14510,20 @@
           </p:nvPr>
         </p:nvGraphicFramePr>
         <p:xfrm>
-          <a:off x="1478894" y="1487471"/>
-          <a:ext cx="6186212" cy="695080"/>
+          <a:off x="1468391" y="1492522"/>
+          <a:ext cx="6207218" cy="697440"/>
         </p:xfrm>
         <a:graphic>
           <a:graphicData uri="http://schemas.openxmlformats.org/drawingml/2006/table">
             <a:tbl>
               <a:tblPr/>
               <a:tblGrid>
-                <a:gridCol w="2034540"/>
-                <a:gridCol w="2034540"/>
-                <a:gridCol w="2034540"/>
-                <a:gridCol w="2034540"/>
+                <a:gridCol w="1551805"/>
+                <a:gridCol w="1551805"/>
+                <a:gridCol w="1551805"/>
+                <a:gridCol w="1551805"/>
               </a:tblGrid>
-              <a:tr h="384048">
+              <a:tr h="223181">
                 <a:tc>
                   <a:txBody>
                     <a:bodyPr/>
@@ -14533,7 +14533,7 @@
                         <a:buNone/>
                       </a:pPr>
                       <a:r>
-                        <a:rPr lang="en-US" sz="840" b="1" dirty="0">
+                        <a:rPr lang="en-US" sz="720" b="1" dirty="0">
                           <a:solidFill>
                             <a:srgbClr val="FFFFFF"/>
                           </a:solidFill>
@@ -14543,14 +14543,14 @@
                         </a:rPr>
                         <a:t>Bước sóng</a:t>
                       </a:r>
-                      <a:endParaRPr lang="en-US" sz="910" dirty="0"/>
+                      <a:endParaRPr lang="en-US" sz="920" dirty="0"/>
                     </a:p>
                     <a:p>
                       <a:pPr algn="l" indent="0" marL="0">
                         <a:buNone/>
                       </a:pPr>
                       <a:r>
-                        <a:rPr lang="en-US" sz="720" dirty="0">
+                        <a:rPr lang="en-US" sz="610" dirty="0">
                           <a:solidFill>
                             <a:srgbClr val="CFE0EC"/>
                           </a:solidFill>
@@ -14560,7 +14560,7 @@
                         </a:rPr>
                         <a:t>波長</a:t>
                       </a:r>
-                      <a:endParaRPr lang="en-US" sz="910" dirty="0"/>
+                      <a:endParaRPr lang="en-US" sz="920" dirty="0"/>
                     </a:p>
                   </a:txBody>
                   <a:tcPr marL="63500" marR="63500" marT="38100" marB="38100" anchor="ctr">
@@ -14614,7 +14614,7 @@
                         <a:buNone/>
                       </a:pPr>
                       <a:r>
-                        <a:rPr lang="en-US" sz="840" b="1" dirty="0">
+                        <a:rPr lang="en-US" sz="720" b="1" dirty="0">
                           <a:solidFill>
                             <a:srgbClr val="FFFFFF"/>
                           </a:solidFill>
@@ -14624,14 +14624,14 @@
                         </a:rPr>
                         <a:t>Ai dùng</a:t>
                       </a:r>
-                      <a:endParaRPr lang="en-US" sz="910" dirty="0"/>
+                      <a:endParaRPr lang="en-US" sz="920" dirty="0"/>
                     </a:p>
                     <a:p>
                       <a:pPr algn="l" indent="0" marL="0">
                         <a:buNone/>
                       </a:pPr>
                       <a:r>
-                        <a:rPr lang="en-US" sz="720" dirty="0">
+                        <a:rPr lang="en-US" sz="610" dirty="0">
                           <a:solidFill>
                             <a:srgbClr val="CFE0EC"/>
                           </a:solidFill>
@@ -14641,7 +14641,7 @@
                         </a:rPr>
                         <a:t>誰在用</a:t>
                       </a:r>
-                      <a:endParaRPr lang="en-US" sz="910" dirty="0"/>
+                      <a:endParaRPr lang="en-US" sz="920" dirty="0"/>
                     </a:p>
                   </a:txBody>
                   <a:tcPr marL="63500" marR="63500" marT="38100" marB="38100" anchor="ctr">
@@ -14695,7 +14695,7 @@
                         <a:buNone/>
                       </a:pPr>
                       <a:r>
-                        <a:rPr lang="en-US" sz="840" b="1" dirty="0">
+                        <a:rPr lang="en-US" sz="720" b="1" dirty="0">
                           <a:solidFill>
                             <a:srgbClr val="FFFFFF"/>
                           </a:solidFill>
@@ -14705,14 +14705,14 @@
                         </a:rPr>
                         <a:t>Được lợi gì</a:t>
                       </a:r>
-                      <a:endParaRPr lang="en-US" sz="910" dirty="0"/>
+                      <a:endParaRPr lang="en-US" sz="920" dirty="0"/>
                     </a:p>
                     <a:p>
                       <a:pPr algn="l" indent="0" marL="0">
                         <a:buNone/>
                       </a:pPr>
                       <a:r>
-                        <a:rPr lang="en-US" sz="720" dirty="0">
+                        <a:rPr lang="en-US" sz="610" dirty="0">
                           <a:solidFill>
                             <a:srgbClr val="CFE0EC"/>
                           </a:solidFill>
@@ -14722,7 +14722,7 @@
                         </a:rPr>
                         <a:t>好處</a:t>
                       </a:r>
-                      <a:endParaRPr lang="en-US" sz="910" dirty="0"/>
+                      <a:endParaRPr lang="en-US" sz="920" dirty="0"/>
                     </a:p>
                   </a:txBody>
                   <a:tcPr marL="63500" marR="63500" marT="38100" marB="38100" anchor="ctr">
@@ -14776,7 +14776,7 @@
                         <a:buNone/>
                       </a:pPr>
                       <a:r>
-                        <a:rPr lang="en-US" sz="840" b="1" dirty="0">
+                        <a:rPr lang="en-US" sz="720" b="1" dirty="0">
                           <a:solidFill>
                             <a:srgbClr val="FFFFFF"/>
                           </a:solidFill>
@@ -14786,14 +14786,14 @@
                         </a:rPr>
                         <a:t>Trả giá gì</a:t>
                       </a:r>
-                      <a:endParaRPr lang="en-US" sz="910" dirty="0"/>
+                      <a:endParaRPr lang="en-US" sz="920" dirty="0"/>
                     </a:p>
                     <a:p>
                       <a:pPr algn="l" indent="0" marL="0">
                         <a:buNone/>
                       </a:pPr>
                       <a:r>
-                        <a:rPr lang="en-US" sz="720" dirty="0">
+                        <a:rPr lang="en-US" sz="610" dirty="0">
                           <a:solidFill>
                             <a:srgbClr val="CFE0EC"/>
                           </a:solidFill>
@@ -14803,7 +14803,7 @@
                         </a:rPr>
                         <a:t>代價</a:t>
                       </a:r>
-                      <a:endParaRPr lang="en-US" sz="910" dirty="0"/>
+                      <a:endParaRPr lang="en-US" sz="920" dirty="0"/>
                     </a:p>
                   </a:txBody>
                   <a:tcPr marL="63500" marR="63500" marT="38100" marB="38100" anchor="ctr">
@@ -14849,7 +14849,7 @@
                   </a:tcPr>
                 </a:tc>
               </a:tr>
-              <a:tr h="384048">
+              <a:tr h="223181">
                 <a:tc>
                   <a:txBody>
                     <a:bodyPr/>
@@ -14859,7 +14859,7 @@
                         <a:buNone/>
                       </a:pPr>
                       <a:r>
-                        <a:rPr lang="en-US" sz="840" b="1" dirty="0">
+                        <a:rPr lang="en-US" sz="720" b="1" dirty="0">
                           <a:solidFill>
                             <a:srgbClr val="0B1F3A"/>
                           </a:solidFill>
@@ -14869,14 +14869,14 @@
                         </a:rPr>
                         <a:t>905 nm</a:t>
                       </a:r>
-                      <a:endParaRPr lang="en-US" sz="910" dirty="0"/>
+                      <a:endParaRPr lang="en-US" sz="920" dirty="0"/>
                     </a:p>
                     <a:p>
                       <a:pPr algn="l" indent="0" marL="0">
                         <a:buNone/>
                       </a:pPr>
                       <a:r>
-                        <a:rPr lang="en-US" sz="720" dirty="0">
+                        <a:rPr lang="en-US" sz="610" dirty="0">
                           <a:solidFill>
                             <a:srgbClr val="5F7183"/>
                           </a:solidFill>
@@ -14886,7 +14886,7 @@
                         </a:rPr>
                         <a:t>905 奈米</a:t>
                       </a:r>
-                      <a:endParaRPr lang="en-US" sz="910" dirty="0"/>
+                      <a:endParaRPr lang="en-US" sz="920" dirty="0"/>
                     </a:p>
                   </a:txBody>
                   <a:tcPr marL="63500" marR="63500" marT="38100" marB="38100" anchor="ctr">
@@ -14937,7 +14937,7 @@
                         <a:buNone/>
                       </a:pPr>
                       <a:r>
-                        <a:rPr lang="en-US" sz="840" dirty="0">
+                        <a:rPr lang="en-US" sz="720" dirty="0">
                           <a:solidFill>
                             <a:srgbClr val="1A2733"/>
                           </a:solidFill>
@@ -14947,14 +14947,14 @@
                         </a:rPr>
                         <a:t>Phổ biến nhất</a:t>
                       </a:r>
-                      <a:endParaRPr lang="en-US" sz="910" dirty="0"/>
+                      <a:endParaRPr lang="en-US" sz="920" dirty="0"/>
                     </a:p>
                     <a:p>
                       <a:pPr algn="l" indent="0" marL="0">
                         <a:buNone/>
                       </a:pPr>
                       <a:r>
-                        <a:rPr lang="en-US" sz="720" dirty="0">
+                        <a:rPr lang="en-US" sz="610" dirty="0">
                           <a:solidFill>
                             <a:srgbClr val="5F7183"/>
                           </a:solidFill>
@@ -14964,7 +14964,7 @@
                         </a:rPr>
                         <a:t>最常見</a:t>
                       </a:r>
-                      <a:endParaRPr lang="en-US" sz="910" dirty="0"/>
+                      <a:endParaRPr lang="en-US" sz="920" dirty="0"/>
                     </a:p>
                   </a:txBody>
                   <a:tcPr marL="63500" marR="63500" marT="38100" marB="38100" anchor="ctr">
@@ -15015,7 +15015,7 @@
                         <a:buNone/>
                       </a:pPr>
                       <a:r>
-                        <a:rPr lang="en-US" sz="840" dirty="0">
+                        <a:rPr lang="en-US" sz="720" dirty="0">
                           <a:solidFill>
                             <a:srgbClr val="1A2733"/>
                           </a:solidFill>
@@ -15025,14 +15025,14 @@
                         </a:rPr>
                         <a:t>Cảm biến silic, rẻ</a:t>
                       </a:r>
-                      <a:endParaRPr lang="en-US" sz="910" dirty="0"/>
+                      <a:endParaRPr lang="en-US" sz="920" dirty="0"/>
                     </a:p>
                     <a:p>
                       <a:pPr algn="l" indent="0" marL="0">
                         <a:buNone/>
                       </a:pPr>
                       <a:r>
-                        <a:rPr lang="en-US" sz="720" dirty="0">
+                        <a:rPr lang="en-US" sz="610" dirty="0">
                           <a:solidFill>
                             <a:srgbClr val="5F7183"/>
                           </a:solidFill>
@@ -15042,7 +15042,7 @@
                         </a:rPr>
                         <a:t>用矽做接收器，便宜</a:t>
                       </a:r>
-                      <a:endParaRPr lang="en-US" sz="910" dirty="0"/>
+                      <a:endParaRPr lang="en-US" sz="920" dirty="0"/>
                     </a:p>
                   </a:txBody>
                   <a:tcPr marL="63500" marR="63500" marT="38100" marB="38100" anchor="ctr">
@@ -15093,7 +15093,7 @@
                         <a:buNone/>
                       </a:pPr>
                       <a:r>
-                        <a:rPr lang="en-US" sz="840" dirty="0">
+                        <a:rPr lang="en-US" sz="720" dirty="0">
                           <a:solidFill>
                             <a:srgbClr val="1A2733"/>
                           </a:solidFill>
@@ -15101,16 +15101,16 @@
                           <a:ea typeface="Arial" pitchFamily="34" charset="-122"/>
                           <a:cs typeface="Arial" pitchFamily="34" charset="-120"/>
                         </a:rPr>
-                        <a:t>Tới thẳng võng mạc nên công suất bị siết</a:t>
+                        <a:t>Tới võng mạc — công suất bị siết</a:t>
                       </a:r>
-                      <a:endParaRPr lang="en-US" sz="910" dirty="0"/>
+                      <a:endParaRPr lang="en-US" sz="920" dirty="0"/>
                     </a:p>
                     <a:p>
                       <a:pPr algn="l" indent="0" marL="0">
                         <a:buNone/>
                       </a:pPr>
                       <a:r>
-                        <a:rPr lang="en-US" sz="720" dirty="0">
+                        <a:rPr lang="en-US" sz="610" dirty="0">
                           <a:solidFill>
                             <a:srgbClr val="5F7183"/>
                           </a:solidFill>
@@ -15118,9 +15118,9 @@
                           <a:ea typeface="微軟正黑體" pitchFamily="34" charset="-122"/>
                           <a:cs typeface="微軟正黑體" pitchFamily="34" charset="-120"/>
                         </a:rPr>
-                        <a:t>會直達視網膜，功率被法規壓住</a:t>
+                        <a:t>直達視網膜，功率被壓住</a:t>
                       </a:r>
-                      <a:endParaRPr lang="en-US" sz="910" dirty="0"/>
+                      <a:endParaRPr lang="en-US" sz="920" dirty="0"/>
                     </a:p>
                   </a:txBody>
                   <a:tcPr marL="63500" marR="63500" marT="38100" marB="38100" anchor="ctr">
@@ -15163,7 +15163,7 @@
                   </a:tcPr>
                 </a:tc>
               </a:tr>
-              <a:tr h="384048">
+              <a:tr h="223181">
                 <a:tc>
                   <a:txBody>
                     <a:bodyPr/>
@@ -15173,7 +15173,7 @@
                         <a:buNone/>
                       </a:pPr>
                       <a:r>
-                        <a:rPr lang="en-US" sz="840" b="1" dirty="0">
+                        <a:rPr lang="en-US" sz="720" b="1" dirty="0">
                           <a:solidFill>
                             <a:srgbClr val="0B1F3A"/>
                           </a:solidFill>
@@ -15183,14 +15183,14 @@
                         </a:rPr>
                         <a:t>865 nm</a:t>
                       </a:r>
-                      <a:endParaRPr lang="en-US" sz="910" dirty="0"/>
+                      <a:endParaRPr lang="en-US" sz="920" dirty="0"/>
                     </a:p>
                     <a:p>
                       <a:pPr algn="l" indent="0" marL="0">
                         <a:buNone/>
                       </a:pPr>
                       <a:r>
-                        <a:rPr lang="en-US" sz="720" dirty="0">
+                        <a:rPr lang="en-US" sz="610" dirty="0">
                           <a:solidFill>
                             <a:srgbClr val="5F7183"/>
                           </a:solidFill>
@@ -15200,7 +15200,7 @@
                         </a:rPr>
                         <a:t>865 奈米</a:t>
                       </a:r>
-                      <a:endParaRPr lang="en-US" sz="910" dirty="0"/>
+                      <a:endParaRPr lang="en-US" sz="920" dirty="0"/>
                     </a:p>
                   </a:txBody>
                   <a:tcPr marL="63500" marR="63500" marT="38100" marB="38100" anchor="ctr">
@@ -15251,7 +15251,7 @@
                         <a:buNone/>
                       </a:pPr>
                       <a:r>
-                        <a:rPr lang="en-US" sz="840" dirty="0">
+                        <a:rPr lang="en-US" sz="720" dirty="0">
                           <a:solidFill>
                             <a:srgbClr val="1A2733"/>
                           </a:solidFill>
@@ -15261,14 +15261,14 @@
                         </a:rPr>
                         <a:t>Ouster OS1</a:t>
                       </a:r>
-                      <a:endParaRPr lang="en-US" sz="910" dirty="0"/>
+                      <a:endParaRPr lang="en-US" sz="920" dirty="0"/>
                     </a:p>
                     <a:p>
                       <a:pPr algn="l" indent="0" marL="0">
                         <a:buNone/>
                       </a:pPr>
                       <a:r>
-                        <a:rPr lang="en-US" sz="720" dirty="0">
+                        <a:rPr lang="en-US" sz="610" dirty="0">
                           <a:solidFill>
                             <a:srgbClr val="5F7183"/>
                           </a:solidFill>
@@ -15278,7 +15278,7 @@
                         </a:rPr>
                         <a:t>Ouster OS1</a:t>
                       </a:r>
-                      <a:endParaRPr lang="en-US" sz="910" dirty="0"/>
+                      <a:endParaRPr lang="en-US" sz="920" dirty="0"/>
                     </a:p>
                   </a:txBody>
                   <a:tcPr marL="63500" marR="63500" marT="38100" marB="38100" anchor="ctr">
@@ -15329,7 +15329,7 @@
                         <a:buNone/>
                       </a:pPr>
                       <a:r>
-                        <a:rPr lang="en-US" sz="840" dirty="0">
+                        <a:rPr lang="en-US" sz="720" dirty="0">
                           <a:solidFill>
                             <a:srgbClr val="1A2733"/>
                           </a:solidFill>
@@ -15339,14 +15339,14 @@
                         </a:rPr>
                         <a:t>Cùng họ với 905</a:t>
                       </a:r>
-                      <a:endParaRPr lang="en-US" sz="910" dirty="0"/>
+                      <a:endParaRPr lang="en-US" sz="920" dirty="0"/>
                     </a:p>
                     <a:p>
                       <a:pPr algn="l" indent="0" marL="0">
                         <a:buNone/>
                       </a:pPr>
                       <a:r>
-                        <a:rPr lang="en-US" sz="720" dirty="0">
+                        <a:rPr lang="en-US" sz="610" dirty="0">
                           <a:solidFill>
                             <a:srgbClr val="5F7183"/>
                           </a:solidFill>
@@ -15356,7 +15356,7 @@
                         </a:rPr>
                         <a:t>跟 905 同一類</a:t>
                       </a:r>
-                      <a:endParaRPr lang="en-US" sz="910" dirty="0"/>
+                      <a:endParaRPr lang="en-US" sz="920" dirty="0"/>
                     </a:p>
                   </a:txBody>
                   <a:tcPr marL="63500" marR="63500" marT="38100" marB="38100" anchor="ctr">
@@ -15407,7 +15407,7 @@
                         <a:buNone/>
                       </a:pPr>
                       <a:r>
-                        <a:rPr lang="en-US" sz="840" dirty="0">
+                        <a:rPr lang="en-US" sz="720" dirty="0">
                           <a:solidFill>
                             <a:srgbClr val="1A2733"/>
                           </a:solidFill>
@@ -15417,14 +15417,14 @@
                         </a:rPr>
                         <a:t>Giống trên</a:t>
                       </a:r>
-                      <a:endParaRPr lang="en-US" sz="910" dirty="0"/>
+                      <a:endParaRPr lang="en-US" sz="920" dirty="0"/>
                     </a:p>
                     <a:p>
                       <a:pPr algn="l" indent="0" marL="0">
                         <a:buNone/>
                       </a:pPr>
                       <a:r>
-                        <a:rPr lang="en-US" sz="720" dirty="0">
+                        <a:rPr lang="en-US" sz="610" dirty="0">
                           <a:solidFill>
                             <a:srgbClr val="5F7183"/>
                           </a:solidFill>
@@ -15434,7 +15434,7 @@
                         </a:rPr>
                         <a:t>同上</a:t>
                       </a:r>
-                      <a:endParaRPr lang="en-US" sz="910" dirty="0"/>
+                      <a:endParaRPr lang="en-US" sz="920" dirty="0"/>
                     </a:p>
                   </a:txBody>
                   <a:tcPr marL="63500" marR="63500" marT="38100" marB="38100" anchor="ctr">
@@ -15477,7 +15477,7 @@
                   </a:tcPr>
                 </a:tc>
               </a:tr>
-              <a:tr h="384048">
+              <a:tr h="223181">
                 <a:tc>
                   <a:txBody>
                     <a:bodyPr/>
@@ -15487,7 +15487,7 @@
                         <a:buNone/>
                       </a:pPr>
                       <a:r>
-                        <a:rPr lang="en-US" sz="840" b="1" dirty="0">
+                        <a:rPr lang="en-US" sz="720" b="1" dirty="0">
                           <a:solidFill>
                             <a:srgbClr val="0B1F3A"/>
                           </a:solidFill>
@@ -15497,14 +15497,14 @@
                         </a:rPr>
                         <a:t>1550 nm</a:t>
                       </a:r>
-                      <a:endParaRPr lang="en-US" sz="910" dirty="0"/>
+                      <a:endParaRPr lang="en-US" sz="920" dirty="0"/>
                     </a:p>
                     <a:p>
                       <a:pPr algn="l" indent="0" marL="0">
                         <a:buNone/>
                       </a:pPr>
                       <a:r>
-                        <a:rPr lang="en-US" sz="720" dirty="0">
+                        <a:rPr lang="en-US" sz="610" dirty="0">
                           <a:solidFill>
                             <a:srgbClr val="5F7183"/>
                           </a:solidFill>
@@ -15514,7 +15514,7 @@
                         </a:rPr>
                         <a:t>1550 奈米</a:t>
                       </a:r>
-                      <a:endParaRPr lang="en-US" sz="910" dirty="0"/>
+                      <a:endParaRPr lang="en-US" sz="920" dirty="0"/>
                     </a:p>
                   </a:txBody>
                   <a:tcPr marL="63500" marR="63500" marT="38100" marB="38100" anchor="ctr">
@@ -15565,7 +15565,7 @@
                         <a:buNone/>
                       </a:pPr>
                       <a:r>
-                        <a:rPr lang="en-US" sz="840" dirty="0">
+                        <a:rPr lang="en-US" sz="720" dirty="0">
                           <a:solidFill>
                             <a:srgbClr val="1A2733"/>
                           </a:solidFill>
@@ -15575,14 +15575,14 @@
                         </a:rPr>
                         <a:t>Lidar tầm xa cao cấp</a:t>
                       </a:r>
-                      <a:endParaRPr lang="en-US" sz="910" dirty="0"/>
+                      <a:endParaRPr lang="en-US" sz="920" dirty="0"/>
                     </a:p>
                     <a:p>
                       <a:pPr algn="l" indent="0" marL="0">
                         <a:buNone/>
                       </a:pPr>
                       <a:r>
-                        <a:rPr lang="en-US" sz="720" dirty="0">
+                        <a:rPr lang="en-US" sz="610" dirty="0">
                           <a:solidFill>
                             <a:srgbClr val="5F7183"/>
                           </a:solidFill>
@@ -15592,7 +15592,7 @@
                         </a:rPr>
                         <a:t>高階長距光達</a:t>
                       </a:r>
-                      <a:endParaRPr lang="en-US" sz="910" dirty="0"/>
+                      <a:endParaRPr lang="en-US" sz="920" dirty="0"/>
                     </a:p>
                   </a:txBody>
                   <a:tcPr marL="63500" marR="63500" marT="38100" marB="38100" anchor="ctr">
@@ -15643,7 +15643,7 @@
                         <a:buNone/>
                       </a:pPr>
                       <a:r>
-                        <a:rPr lang="en-US" sz="840" dirty="0">
+                        <a:rPr lang="en-US" sz="720" dirty="0">
                           <a:solidFill>
                             <a:srgbClr val="1A2733"/>
                           </a:solidFill>
@@ -15653,14 +15653,14 @@
                         </a:rPr>
                         <a:t>Bị nước trong mắt hấp thụ → bắn mạnh hơn hàng chục lần → nhìn xa hơn</a:t>
                       </a:r>
-                      <a:endParaRPr lang="en-US" sz="910" dirty="0"/>
+                      <a:endParaRPr lang="en-US" sz="920" dirty="0"/>
                     </a:p>
                     <a:p>
                       <a:pPr algn="l" indent="0" marL="0">
                         <a:buNone/>
                       </a:pPr>
                       <a:r>
-                        <a:rPr lang="en-US" sz="720" dirty="0">
+                        <a:rPr lang="en-US" sz="610" dirty="0">
                           <a:solidFill>
                             <a:srgbClr val="5F7183"/>
                           </a:solidFill>
@@ -15670,7 +15670,7 @@
                         </a:rPr>
                         <a:t>先被眼睛裡的水吸收 → 可以打強幾十倍 → 看得更遠</a:t>
                       </a:r>
-                      <a:endParaRPr lang="en-US" sz="910" dirty="0"/>
+                      <a:endParaRPr lang="en-US" sz="920" dirty="0"/>
                     </a:p>
                   </a:txBody>
                   <a:tcPr marL="63500" marR="63500" marT="38100" marB="38100" anchor="ctr">
@@ -15721,7 +15721,7 @@
                         <a:buNone/>
                       </a:pPr>
                       <a:r>
-                        <a:rPr lang="en-US" sz="840" dirty="0">
+                        <a:rPr lang="en-US" sz="720" dirty="0">
                           <a:solidFill>
                             <a:srgbClr val="1A2733"/>
                           </a:solidFill>
@@ -15731,14 +15731,14 @@
                         </a:rPr>
                         <a:t>Cảm biến InGaAs, đắt hơn nhiều</a:t>
                       </a:r>
-                      <a:endParaRPr lang="en-US" sz="910" dirty="0"/>
+                      <a:endParaRPr lang="en-US" sz="920" dirty="0"/>
                     </a:p>
                     <a:p>
                       <a:pPr algn="l" indent="0" marL="0">
                         <a:buNone/>
                       </a:pPr>
                       <a:r>
-                        <a:rPr lang="en-US" sz="720" dirty="0">
+                        <a:rPr lang="en-US" sz="610" dirty="0">
                           <a:solidFill>
                             <a:srgbClr val="5F7183"/>
                           </a:solidFill>
@@ -15748,7 +15748,7 @@
                         </a:rPr>
                         <a:t>要用銦鎵砷接收器，貴好幾倍</a:t>
                       </a:r>
-                      <a:endParaRPr lang="en-US" sz="910" dirty="0"/>
+                      <a:endParaRPr lang="en-US" sz="920" dirty="0"/>
                     </a:p>
                   </a:txBody>
                   <a:tcPr marL="63500" marR="63500" marT="38100" marB="38100" anchor="ctr">
@@ -15803,8 +15803,8 @@
         </p:nvSpPr>
         <p:spPr>
           <a:xfrm>
-            <a:off x="1478894" y="3252910"/>
-            <a:ext cx="6186212" cy="347540"/>
+            <a:off x="1468391" y="3251730"/>
+            <a:ext cx="6207218" cy="348720"/>
           </a:xfrm>
           <a:prstGeom prst="rect">
             <a:avLst/>
@@ -15823,7 +15823,7 @@
               <a:buNone/>
             </a:pPr>
             <a:r>
-              <a:rPr lang="en-US" sz="910" b="1" dirty="0">
+              <a:rPr lang="en-US" sz="920" b="1" dirty="0">
                 <a:solidFill>
                   <a:srgbClr val="007F72"/>
                 </a:solidFill>
@@ -15833,7 +15833,7 @@
               </a:rPr>
               <a:t>Một dòng số, ba chuyện: an toàn, nhìn xa, và giá.</a:t>
             </a:r>
-            <a:endParaRPr lang="en-US" sz="910" dirty="0"/>
+            <a:endParaRPr lang="en-US" sz="920" dirty="0"/>
           </a:p>
           <a:p>
             <a:pPr indent="0" marL="0">
@@ -15853,7 +15853,7 @@
               </a:rPr>
               <a:t>一行數字，背後是三件事：安全、看多遠、多少錢。</a:t>
             </a:r>
-            <a:endParaRPr lang="en-US" sz="910" dirty="0"/>
+            <a:endParaRPr lang="en-US" sz="920" dirty="0"/>
           </a:p>
         </p:txBody>
       </p:sp>
@@ -15889,8 +15889,8 @@
         </p:nvSpPr>
         <p:spPr>
           <a:xfrm>
-            <a:off x="1180009" y="97311"/>
-            <a:ext cx="625572" cy="194622"/>
+            <a:off x="1168491" y="97642"/>
+            <a:ext cx="627696" cy="195283"/>
           </a:xfrm>
           <a:prstGeom prst="rect">
             <a:avLst/>
@@ -15906,7 +15906,7 @@
               <a:buNone/>
             </a:pPr>
             <a:r>
-              <a:rPr lang="en-US" sz="680" dirty="0">
+              <a:rPr lang="en-US" sz="690" dirty="0">
                 <a:solidFill>
                   <a:srgbClr val="5F7183"/>
                 </a:solidFill>
@@ -15916,7 +15916,7 @@
               </a:rPr>
               <a:t>7 / 14</a:t>
             </a:r>
-            <a:endParaRPr lang="en-US" sz="680" dirty="0"/>
+            <a:endParaRPr lang="en-US" sz="690" dirty="0"/>
           </a:p>
         </p:txBody>
       </p:sp>
@@ -15928,8 +15928,8 @@
         </p:nvSpPr>
         <p:spPr>
           <a:xfrm>
-            <a:off x="1826434" y="97311"/>
-            <a:ext cx="1529176" cy="194622"/>
+            <a:off x="1817111" y="97642"/>
+            <a:ext cx="1534369" cy="195283"/>
           </a:xfrm>
           <a:prstGeom prst="rect">
             <a:avLst/>
@@ -15945,7 +15945,7 @@
               <a:buNone/>
             </a:pPr>
             <a:r>
-              <a:rPr lang="en-US" sz="680" dirty="0">
+              <a:rPr lang="en-US" sz="690" dirty="0">
                 <a:solidFill>
                   <a:srgbClr val="5F7183"/>
                 </a:solidFill>
@@ -15955,7 +15955,7 @@
               </a:rPr>
               <a:t>Tiết 2 · 第 2 節</a:t>
             </a:r>
-            <a:endParaRPr lang="en-US" sz="680" dirty="0"/>
+            <a:endParaRPr lang="en-US" sz="690" dirty="0"/>
           </a:p>
         </p:txBody>
       </p:sp>

--- a/第五週(10-08)/第五週_第2節_簡報.pptx
+++ b/第五週(10-08)/第五週_第2節_簡報.pptx
@@ -8246,7 +8246,7 @@
       </p:nvGrpSpPr>
       <p:grpSpPr>
         <a:xfrm>
-          <a:off x="1028250" y="0"/>
+          <a:off x="15750" y="0"/>
           <a:ext cx="1" cy="1"/>
           <a:chOff x="0" y="0"/>
           <a:chExt cx="0" cy="0"/>
@@ -8260,8 +8260,8 @@
         </p:nvSpPr>
         <p:spPr>
           <a:xfrm>
-            <a:off x="6273000" y="-1063125"/>
-            <a:ext cx="3260250" cy="3260250"/>
+            <a:off x="6759000" y="-1366875"/>
+            <a:ext cx="4191750" cy="4191750"/>
           </a:xfrm>
           <a:prstGeom prst="ellipse">
             <a:avLst/>
@@ -8285,8 +8285,8 @@
         </p:nvSpPr>
         <p:spPr>
           <a:xfrm>
-            <a:off x="7336125" y="1630125"/>
-            <a:ext cx="1842750" cy="1842750"/>
+            <a:off x="8125875" y="2095875"/>
+            <a:ext cx="2369250" cy="2369250"/>
           </a:xfrm>
           <a:prstGeom prst="ellipse">
             <a:avLst/>
@@ -8307,8 +8307,8 @@
         </p:nvSpPr>
         <p:spPr>
           <a:xfrm>
-            <a:off x="1418063" y="935550"/>
-            <a:ext cx="5386500" cy="212625"/>
+            <a:off x="516938" y="1202850"/>
+            <a:ext cx="6925500" cy="273375"/>
           </a:xfrm>
           <a:prstGeom prst="rect">
             <a:avLst/>
@@ -8324,7 +8324,7 @@
               <a:buNone/>
             </a:pPr>
             <a:r>
-              <a:rPr lang="en-US" sz="970" b="1" dirty="0">
+              <a:rPr lang="en-US" sz="1250" b="1" dirty="0">
                 <a:solidFill>
                   <a:srgbClr val="00A896"/>
                 </a:solidFill>
@@ -8334,7 +8334,7 @@
               </a:rPr>
               <a:t>MITUST · Nguyên lý xe tự lái · Tuần 5</a:t>
             </a:r>
-            <a:endParaRPr lang="en-US" sz="970" dirty="0"/>
+            <a:endParaRPr lang="en-US" sz="1250" dirty="0"/>
           </a:p>
         </p:txBody>
       </p:sp>
@@ -8346,8 +8346,8 @@
         </p:nvSpPr>
         <p:spPr>
           <a:xfrm>
-            <a:off x="1418063" y="1219050"/>
-            <a:ext cx="5811750" cy="686349"/>
+            <a:off x="516938" y="1567350"/>
+            <a:ext cx="7472250" cy="882449"/>
           </a:xfrm>
           <a:prstGeom prst="rect">
             <a:avLst/>
@@ -8366,7 +8366,7 @@
               <a:buNone/>
             </a:pPr>
             <a:r>
-              <a:rPr lang="en-US" sz="2640" b="1" dirty="0">
+              <a:rPr lang="en-US" sz="3390" b="1" dirty="0">
                 <a:solidFill>
                   <a:srgbClr val="FFFFFF"/>
                 </a:solidFill>
@@ -8376,7 +8376,7 @@
               </a:rPr>
               <a:t>Trang thứ hai của datasheet</a:t>
             </a:r>
-            <a:endParaRPr lang="en-US" sz="2640" dirty="0"/>
+            <a:endParaRPr lang="en-US" sz="3390" dirty="0"/>
           </a:p>
           <a:p>
             <a:pPr indent="0" marL="0">
@@ -8386,7 +8386,7 @@
               <a:buNone/>
             </a:pPr>
             <a:r>
-              <a:rPr lang="en-US" sz="1470" dirty="0">
+              <a:rPr lang="en-US" sz="1890" dirty="0">
                 <a:solidFill>
                   <a:srgbClr val="C8D6E2"/>
                 </a:solidFill>
@@ -8396,7 +8396,7 @@
               </a:rPr>
               <a:t>規格表的第二頁</a:t>
             </a:r>
-            <a:endParaRPr lang="en-US" sz="2640" dirty="0"/>
+            <a:endParaRPr lang="en-US" sz="3390" dirty="0"/>
           </a:p>
         </p:txBody>
       </p:sp>
@@ -8408,8 +8408,8 @@
         </p:nvSpPr>
         <p:spPr>
           <a:xfrm>
-            <a:off x="1418063" y="2331867"/>
-            <a:ext cx="1063125" cy="31894"/>
+            <a:off x="516938" y="2998115"/>
+            <a:ext cx="1366875" cy="41006"/>
           </a:xfrm>
           <a:prstGeom prst="rect">
             <a:avLst/>
@@ -8428,8 +8428,8 @@
         </p:nvSpPr>
         <p:spPr>
           <a:xfrm>
-            <a:off x="1418063" y="2487792"/>
-            <a:ext cx="5528250" cy="474783"/>
+            <a:off x="516938" y="3198590"/>
+            <a:ext cx="7107750" cy="610435"/>
           </a:xfrm>
           <a:prstGeom prst="rect">
             <a:avLst/>
@@ -8448,7 +8448,7 @@
               <a:buNone/>
             </a:pPr>
             <a:r>
-              <a:rPr lang="en-US" sz="1120" dirty="0">
+              <a:rPr lang="en-US" sz="1450" dirty="0">
                 <a:solidFill>
                   <a:srgbClr val="C8D6E2"/>
                 </a:solidFill>
@@ -8458,7 +8458,7 @@
               </a:rPr>
               <a:t>Ba dòng ít ai đọc, nhưng hỏng là hỏng ở đó</a:t>
             </a:r>
-            <a:endParaRPr lang="en-US" sz="1120" dirty="0"/>
+            <a:endParaRPr lang="en-US" sz="1450" dirty="0"/>
           </a:p>
           <a:p>
             <a:pPr indent="0" marL="0">
@@ -8468,7 +8468,7 @@
               <a:buNone/>
             </a:pPr>
             <a:r>
-              <a:rPr lang="en-US" sz="970" dirty="0">
+              <a:rPr lang="en-US" sz="1250" dirty="0">
                 <a:solidFill>
                   <a:srgbClr val="8AA0B4"/>
                 </a:solidFill>
@@ -8478,7 +8478,7 @@
               </a:rPr>
               <a:t>三行很少人看，但出事都出在那裡</a:t>
             </a:r>
-            <a:endParaRPr lang="en-US" sz="1120" dirty="0"/>
+            <a:endParaRPr lang="en-US" sz="1450" dirty="0"/>
           </a:p>
         </p:txBody>
       </p:sp>
@@ -8490,8 +8490,8 @@
         </p:nvSpPr>
         <p:spPr>
           <a:xfrm>
-            <a:off x="1418063" y="3019275"/>
-            <a:ext cx="4606875" cy="297675"/>
+            <a:off x="516938" y="3881925"/>
+            <a:ext cx="5923125" cy="382725"/>
           </a:xfrm>
           <a:prstGeom prst="roundRect">
             <a:avLst>
@@ -8512,8 +8512,8 @@
         </p:nvSpPr>
         <p:spPr>
           <a:xfrm>
-            <a:off x="1517288" y="3054713"/>
-            <a:ext cx="4408425" cy="226800"/>
+            <a:off x="644513" y="3927488"/>
+            <a:ext cx="5667975" cy="291600"/>
           </a:xfrm>
           <a:prstGeom prst="rect">
             <a:avLst/>
@@ -8529,7 +8529,7 @@
               <a:buNone/>
             </a:pPr>
             <a:r>
-              <a:rPr lang="en-US" sz="810" b="1" dirty="0">
+              <a:rPr lang="en-US" sz="1050" b="1" dirty="0">
                 <a:solidFill>
                   <a:srgbClr val="9FD6CE"/>
                 </a:solidFill>
@@ -8539,7 +8539,7 @@
               </a:rPr>
               <a:t>工具｜Công cụ： ch-neural.github.io/MITUST-Principles-of-Self-Driving-Cars/week5/spec/</a:t>
             </a:r>
-            <a:endParaRPr lang="en-US" sz="810" dirty="0"/>
+            <a:endParaRPr lang="en-US" sz="1050" dirty="0"/>
           </a:p>
         </p:txBody>
       </p:sp>
@@ -8551,8 +8551,8 @@
         </p:nvSpPr>
         <p:spPr>
           <a:xfrm>
-            <a:off x="1418063" y="3387825"/>
-            <a:ext cx="5386500" cy="212625"/>
+            <a:off x="516938" y="4355775"/>
+            <a:ext cx="6925500" cy="273375"/>
           </a:xfrm>
           <a:prstGeom prst="rect">
             <a:avLst/>
@@ -8568,7 +8568,7 @@
               <a:buNone/>
             </a:pPr>
             <a:r>
-              <a:rPr lang="en-US" sz="890" dirty="0">
+              <a:rPr lang="en-US" sz="1150" dirty="0">
                 <a:solidFill>
                   <a:srgbClr val="8AA0B4"/>
                 </a:solidFill>
@@ -8578,7 +8578,7 @@
               </a:rPr>
               <a:t>第五週 第 2 節　2026/10/08（四）10:10–11:00　CH Tseng</a:t>
             </a:r>
-            <a:endParaRPr lang="en-US" sz="890" dirty="0"/>
+            <a:endParaRPr lang="en-US" sz="1150" dirty="0"/>
           </a:p>
         </p:txBody>
       </p:sp>
@@ -8590,8 +8590,8 @@
         </p:nvSpPr>
         <p:spPr>
           <a:xfrm>
-            <a:off x="1304663" y="240975"/>
-            <a:ext cx="1715175" cy="581175"/>
+            <a:off x="371138" y="309825"/>
+            <a:ext cx="2205225" cy="747225"/>
           </a:xfrm>
           <a:prstGeom prst="roundRect">
             <a:avLst>
@@ -8654,7 +8654,7 @@
       </p:nvGrpSpPr>
       <p:grpSpPr>
         <a:xfrm>
-          <a:off x="925172" y="0"/>
+          <a:off x="0" y="0"/>
           <a:ext cx="1" cy="1"/>
           <a:chOff x="0" y="0"/>
           <a:chExt cx="0" cy="0"/>
@@ -8668,8 +8668,8 @@
         </p:nvSpPr>
         <p:spPr>
           <a:xfrm>
-            <a:off x="6322478" y="-1094048"/>
-            <a:ext cx="3355082" cy="3355082"/>
+            <a:off x="6766560" y="-1371600"/>
+            <a:ext cx="4206240" cy="4206240"/>
           </a:xfrm>
           <a:prstGeom prst="ellipse">
             <a:avLst/>
@@ -8693,8 +8693,8 @@
         </p:nvSpPr>
         <p:spPr>
           <a:xfrm>
-            <a:off x="7416526" y="1677541"/>
-            <a:ext cx="1896351" cy="1896351"/>
+            <a:off x="8138160" y="2103120"/>
+            <a:ext cx="2377440" cy="2377440"/>
           </a:xfrm>
           <a:prstGeom prst="ellipse">
             <a:avLst/>
@@ -8715,8 +8715,8 @@
         </p:nvSpPr>
         <p:spPr>
           <a:xfrm>
-            <a:off x="1326323" y="379270"/>
-            <a:ext cx="5397306" cy="218810"/>
+            <a:off x="502920" y="475488"/>
+            <a:ext cx="6766560" cy="274320"/>
           </a:xfrm>
           <a:prstGeom prst="rect">
             <a:avLst/>
@@ -8732,7 +8732,7 @@
               <a:buNone/>
             </a:pPr>
             <a:r>
-              <a:rPr lang="en-US" sz="1000" b="1" dirty="0">
+              <a:rPr lang="en-US" sz="1250" b="1" dirty="0">
                 <a:solidFill>
                   <a:srgbClr val="FFB020"/>
                 </a:solidFill>
@@ -8742,7 +8742,7 @@
               </a:rPr>
               <a:t>Thử nhanh · 小練習（3 分鐘動手）</a:t>
             </a:r>
-            <a:endParaRPr lang="en-US" sz="1000" dirty="0"/>
+            <a:endParaRPr lang="en-US" sz="1250" dirty="0"/>
           </a:p>
         </p:txBody>
       </p:sp>
@@ -8754,8 +8754,8 @@
         </p:nvSpPr>
         <p:spPr>
           <a:xfrm>
-            <a:off x="1326323" y="627254"/>
-            <a:ext cx="6418418" cy="977350"/>
+            <a:off x="502920" y="786384"/>
+            <a:ext cx="8046720" cy="1225296"/>
           </a:xfrm>
           <a:prstGeom prst="rect">
             <a:avLst/>
@@ -8774,7 +8774,7 @@
               <a:buNone/>
             </a:pPr>
             <a:r>
-              <a:rPr lang="en-US" sz="1830" b="1" dirty="0">
+              <a:rPr lang="en-US" sz="2300" b="1" dirty="0">
                 <a:solidFill>
                   <a:srgbClr val="FFFFFF"/>
                 </a:solidFill>
@@ -8784,7 +8784,7 @@
               </a:rPr>
               <a:t>Mở công cụ, dùng công cụ nhỏ số ② để đổi «điểm mỗi giây» thành góc.</a:t>
             </a:r>
-            <a:endParaRPr lang="en-US" sz="1830" dirty="0"/>
+            <a:endParaRPr lang="en-US" sz="2300" dirty="0"/>
           </a:p>
           <a:p>
             <a:pPr indent="0" marL="0">
@@ -8794,7 +8794,7 @@
               <a:buNone/>
             </a:pPr>
             <a:r>
-              <a:rPr lang="en-US" sz="1200" dirty="0">
+              <a:rPr lang="en-US" sz="1500" dirty="0">
                 <a:solidFill>
                   <a:srgbClr val="AFC3D4"/>
                 </a:solidFill>
@@ -8804,7 +8804,7 @@
               </a:rPr>
               <a:t>打開工具，用第②個小工具，把「每秒幾點」換算成角度。</a:t>
             </a:r>
-            <a:endParaRPr lang="en-US" sz="1830" dirty="0"/>
+            <a:endParaRPr lang="en-US" sz="2300" dirty="0"/>
           </a:p>
         </p:txBody>
       </p:sp>
@@ -8816,8 +8816,8 @@
         </p:nvSpPr>
         <p:spPr>
           <a:xfrm>
-            <a:off x="1326323" y="1499877"/>
-            <a:ext cx="6491354" cy="495969"/>
+            <a:off x="502920" y="1880384"/>
+            <a:ext cx="8138160" cy="621792"/>
           </a:xfrm>
           <a:prstGeom prst="roundRect">
             <a:avLst>
@@ -8838,8 +8838,8 @@
         </p:nvSpPr>
         <p:spPr>
           <a:xfrm>
-            <a:off x="1457609" y="1616575"/>
-            <a:ext cx="262572" cy="262572"/>
+            <a:off x="667512" y="2026688"/>
+            <a:ext cx="329184" cy="329184"/>
           </a:xfrm>
           <a:prstGeom prst="ellipse">
             <a:avLst/>
@@ -8858,8 +8858,8 @@
         </p:nvSpPr>
         <p:spPr>
           <a:xfrm>
-            <a:off x="1457609" y="1638456"/>
-            <a:ext cx="262572" cy="218810"/>
+            <a:off x="667512" y="2054120"/>
+            <a:ext cx="329184" cy="274320"/>
           </a:xfrm>
           <a:prstGeom prst="rect">
             <a:avLst/>
@@ -8875,7 +8875,7 @@
               <a:buNone/>
             </a:pPr>
             <a:r>
-              <a:rPr lang="en-US" sz="960" b="1" dirty="0">
+              <a:rPr lang="en-US" sz="1200" b="1" dirty="0">
                 <a:solidFill>
                   <a:srgbClr val="FFFFFF"/>
                 </a:solidFill>
@@ -8885,7 +8885,7 @@
               </a:rPr>
               <a:t>1</a:t>
             </a:r>
-            <a:endParaRPr lang="en-US" sz="960" dirty="0"/>
+            <a:endParaRPr lang="en-US" sz="1200" dirty="0"/>
           </a:p>
         </p:txBody>
       </p:sp>
@@ -8897,8 +8897,8 @@
         </p:nvSpPr>
         <p:spPr>
           <a:xfrm>
-            <a:off x="1851466" y="1536345"/>
-            <a:ext cx="5820338" cy="437619"/>
+            <a:off x="1161288" y="1926104"/>
+            <a:ext cx="7296912" cy="548640"/>
           </a:xfrm>
           <a:prstGeom prst="rect">
             <a:avLst/>
@@ -8917,7 +8917,7 @@
               <a:buNone/>
             </a:pPr>
             <a:r>
-              <a:rPr lang="en-US" sz="1000" b="1" dirty="0">
+              <a:rPr lang="en-US" sz="1250" b="1" dirty="0">
                 <a:solidFill>
                   <a:srgbClr val="FFFFFF"/>
                 </a:solidFill>
@@ -8927,7 +8927,7 @@
               </a:rPr>
               <a:t>Đặt 64 kênh, 1024 điểm mỗi vòng, 10 Hz — số điểm mỗi giây là bao nhiêu?</a:t>
             </a:r>
-            <a:endParaRPr lang="en-US" sz="1000" dirty="0"/>
+            <a:endParaRPr lang="en-US" sz="1250" dirty="0"/>
           </a:p>
           <a:p>
             <a:pPr indent="0" marL="0">
@@ -8937,7 +8937,7 @@
               <a:buNone/>
             </a:pPr>
             <a:r>
-              <a:rPr lang="en-US" sz="920" dirty="0">
+              <a:rPr lang="en-US" sz="1150" dirty="0">
                 <a:solidFill>
                   <a:srgbClr val="AFC3D4"/>
                 </a:solidFill>
@@ -8947,7 +8947,7 @@
               </a:rPr>
               <a:t>設成 64 線、每圈 1024 點、10 Hz——每秒點數是多少？</a:t>
             </a:r>
-            <a:endParaRPr lang="en-US" sz="1000" dirty="0"/>
+            <a:endParaRPr lang="en-US" sz="1250" dirty="0"/>
           </a:p>
         </p:txBody>
       </p:sp>
@@ -8959,8 +8959,8 @@
         </p:nvSpPr>
         <p:spPr>
           <a:xfrm>
-            <a:off x="1326323" y="2068782"/>
-            <a:ext cx="6491354" cy="495969"/>
+            <a:off x="502920" y="2593616"/>
+            <a:ext cx="8138160" cy="621792"/>
           </a:xfrm>
           <a:prstGeom prst="roundRect">
             <a:avLst>
@@ -8981,8 +8981,8 @@
         </p:nvSpPr>
         <p:spPr>
           <a:xfrm>
-            <a:off x="1457609" y="2185481"/>
-            <a:ext cx="262572" cy="262572"/>
+            <a:off x="667512" y="2739920"/>
+            <a:ext cx="329184" cy="329184"/>
           </a:xfrm>
           <a:prstGeom prst="ellipse">
             <a:avLst/>
@@ -9001,8 +9001,8 @@
         </p:nvSpPr>
         <p:spPr>
           <a:xfrm>
-            <a:off x="1457609" y="2207362"/>
-            <a:ext cx="262572" cy="218810"/>
+            <a:off x="667512" y="2767352"/>
+            <a:ext cx="329184" cy="274320"/>
           </a:xfrm>
           <a:prstGeom prst="rect">
             <a:avLst/>
@@ -9018,7 +9018,7 @@
               <a:buNone/>
             </a:pPr>
             <a:r>
-              <a:rPr lang="en-US" sz="960" b="1" dirty="0">
+              <a:rPr lang="en-US" sz="1200" b="1" dirty="0">
                 <a:solidFill>
                   <a:srgbClr val="FFFFFF"/>
                 </a:solidFill>
@@ -9028,7 +9028,7 @@
               </a:rPr>
               <a:t>2</a:t>
             </a:r>
-            <a:endParaRPr lang="en-US" sz="960" dirty="0"/>
+            <a:endParaRPr lang="en-US" sz="1200" dirty="0"/>
           </a:p>
         </p:txBody>
       </p:sp>
@@ -9040,8 +9040,8 @@
         </p:nvSpPr>
         <p:spPr>
           <a:xfrm>
-            <a:off x="1851466" y="2105250"/>
-            <a:ext cx="5820338" cy="437619"/>
+            <a:off x="1161288" y="2639336"/>
+            <a:ext cx="7296912" cy="548640"/>
           </a:xfrm>
           <a:prstGeom prst="rect">
             <a:avLst/>
@@ -9060,7 +9060,7 @@
               <a:buNone/>
             </a:pPr>
             <a:r>
-              <a:rPr lang="en-US" sz="1000" b="1" dirty="0">
+              <a:rPr lang="en-US" sz="1250" b="1" dirty="0">
                 <a:solidFill>
                   <a:srgbClr val="FFFFFF"/>
                 </a:solidFill>
@@ -9070,7 +9070,7 @@
               </a:rPr>
               <a:t>Phân giải ngang lúc đó là bao nhiêu độ? Ở 40 m hai điểm cách nhau mấy centimet?</a:t>
             </a:r>
-            <a:endParaRPr lang="en-US" sz="1000" dirty="0"/>
+            <a:endParaRPr lang="en-US" sz="1250" dirty="0"/>
           </a:p>
           <a:p>
             <a:pPr indent="0" marL="0">
@@ -9080,7 +9080,7 @@
               <a:buNone/>
             </a:pPr>
             <a:r>
-              <a:rPr lang="en-US" sz="920" dirty="0">
+              <a:rPr lang="en-US" sz="1150" dirty="0">
                 <a:solidFill>
                   <a:srgbClr val="AFC3D4"/>
                 </a:solidFill>
@@ -9090,7 +9090,7 @@
               </a:rPr>
               <a:t>這時候水平角解析度是幾度？40 公尺處兩個點相距幾公分？</a:t>
             </a:r>
-            <a:endParaRPr lang="en-US" sz="1000" dirty="0"/>
+            <a:endParaRPr lang="en-US" sz="1250" dirty="0"/>
           </a:p>
         </p:txBody>
       </p:sp>
@@ -9102,8 +9102,8 @@
         </p:nvSpPr>
         <p:spPr>
           <a:xfrm>
-            <a:off x="1326323" y="2637687"/>
-            <a:ext cx="6491354" cy="495969"/>
+            <a:off x="502920" y="3306848"/>
+            <a:ext cx="8138160" cy="621792"/>
           </a:xfrm>
           <a:prstGeom prst="roundRect">
             <a:avLst>
@@ -9124,8 +9124,8 @@
         </p:nvSpPr>
         <p:spPr>
           <a:xfrm>
-            <a:off x="1457609" y="2754386"/>
-            <a:ext cx="262572" cy="262572"/>
+            <a:off x="667512" y="3453152"/>
+            <a:ext cx="329184" cy="329184"/>
           </a:xfrm>
           <a:prstGeom prst="ellipse">
             <a:avLst/>
@@ -9144,8 +9144,8 @@
         </p:nvSpPr>
         <p:spPr>
           <a:xfrm>
-            <a:off x="1457609" y="2776267"/>
-            <a:ext cx="262572" cy="218810"/>
+            <a:off x="667512" y="3480584"/>
+            <a:ext cx="329184" cy="274320"/>
           </a:xfrm>
           <a:prstGeom prst="rect">
             <a:avLst/>
@@ -9161,7 +9161,7 @@
               <a:buNone/>
             </a:pPr>
             <a:r>
-              <a:rPr lang="en-US" sz="960" b="1" dirty="0">
+              <a:rPr lang="en-US" sz="1200" b="1" dirty="0">
                 <a:solidFill>
                   <a:srgbClr val="FFFFFF"/>
                 </a:solidFill>
@@ -9171,7 +9171,7 @@
               </a:rPr>
               <a:t>3</a:t>
             </a:r>
-            <a:endParaRPr lang="en-US" sz="960" dirty="0"/>
+            <a:endParaRPr lang="en-US" sz="1200" dirty="0"/>
           </a:p>
         </p:txBody>
       </p:sp>
@@ -9183,8 +9183,8 @@
         </p:nvSpPr>
         <p:spPr>
           <a:xfrm>
-            <a:off x="1851466" y="2674156"/>
-            <a:ext cx="5820338" cy="437619"/>
+            <a:off x="1161288" y="3352568"/>
+            <a:ext cx="7296912" cy="548640"/>
           </a:xfrm>
           <a:prstGeom prst="rect">
             <a:avLst/>
@@ -9203,7 +9203,7 @@
               <a:buNone/>
             </a:pPr>
             <a:r>
-              <a:rPr lang="en-US" sz="1000" b="1" dirty="0">
+              <a:rPr lang="en-US" sz="1250" b="1" dirty="0">
                 <a:solidFill>
                   <a:srgbClr val="FFFFFF"/>
                 </a:solidFill>
@@ -9213,7 +9213,7 @@
               </a:rPr>
               <a:t>Đổi sang 2048 điểm mỗi vòng: hai con số đó đổi thế nào?</a:t>
             </a:r>
-            <a:endParaRPr lang="en-US" sz="1000" dirty="0"/>
+            <a:endParaRPr lang="en-US" sz="1250" dirty="0"/>
           </a:p>
           <a:p>
             <a:pPr indent="0" marL="0">
@@ -9223,7 +9223,7 @@
               <a:buNone/>
             </a:pPr>
             <a:r>
-              <a:rPr lang="en-US" sz="920" dirty="0">
+              <a:rPr lang="en-US" sz="1150" dirty="0">
                 <a:solidFill>
                   <a:srgbClr val="AFC3D4"/>
                 </a:solidFill>
@@ -9233,7 +9233,7 @@
               </a:rPr>
               <a:t>改成每圈 2048 點：這兩個數字怎麼變？</a:t>
             </a:r>
-            <a:endParaRPr lang="en-US" sz="1000" dirty="0"/>
+            <a:endParaRPr lang="en-US" sz="1250" dirty="0"/>
           </a:p>
         </p:txBody>
       </p:sp>
@@ -9245,8 +9245,8 @@
         </p:nvSpPr>
         <p:spPr>
           <a:xfrm>
-            <a:off x="1326323" y="3235767"/>
-            <a:ext cx="6418418" cy="364683"/>
+            <a:off x="502920" y="4056656"/>
+            <a:ext cx="8046720" cy="457200"/>
           </a:xfrm>
           <a:prstGeom prst="rect">
             <a:avLst/>
@@ -9265,7 +9265,7 @@
               <a:buNone/>
             </a:pPr>
             <a:r>
-              <a:rPr lang="en-US" sz="1000" b="1" dirty="0">
+              <a:rPr lang="en-US" sz="1250" b="1" dirty="0">
                 <a:solidFill>
                   <a:srgbClr val="FFB020"/>
                 </a:solidFill>
@@ -9275,7 +9275,7 @@
               </a:rPr>
               <a:t>Datasheet hay chỉ ghi «điểm mỗi giây» — con số oai nhất, nhưng không dùng thẳng được.</a:t>
             </a:r>
-            <a:endParaRPr lang="en-US" sz="1000" dirty="0"/>
+            <a:endParaRPr lang="en-US" sz="1250" dirty="0"/>
           </a:p>
           <a:p>
             <a:pPr indent="0" marL="0">
@@ -9285,7 +9285,7 @@
               <a:buNone/>
             </a:pPr>
             <a:r>
-              <a:rPr lang="en-US" sz="920" dirty="0">
+              <a:rPr lang="en-US" sz="1150" dirty="0">
                 <a:solidFill>
                   <a:srgbClr val="FFB020"/>
                 </a:solidFill>
@@ -9295,7 +9295,7 @@
               </a:rPr>
               <a:t>規格表常常只寫「每秒幾點」——那是最威風的數字，可是不能直接拿來用。</a:t>
             </a:r>
-            <a:endParaRPr lang="en-US" sz="1000" dirty="0"/>
+            <a:endParaRPr lang="en-US" sz="1250" dirty="0"/>
           </a:p>
         </p:txBody>
       </p:sp>
@@ -9307,8 +9307,8 @@
         </p:nvSpPr>
         <p:spPr>
           <a:xfrm>
-            <a:off x="1012696" y="102111"/>
-            <a:ext cx="656429" cy="204222"/>
+            <a:off x="109728" y="128016"/>
+            <a:ext cx="822960" cy="256032"/>
           </a:xfrm>
           <a:prstGeom prst="rect">
             <a:avLst/>
@@ -9324,7 +9324,7 @@
               <a:buNone/>
             </a:pPr>
             <a:r>
-              <a:rPr lang="en-US" sz="720" dirty="0">
+              <a:rPr lang="en-US" sz="900" dirty="0">
                 <a:solidFill>
                   <a:srgbClr val="9FB3C8"/>
                 </a:solidFill>
@@ -9334,7 +9334,7 @@
               </a:rPr>
               <a:t>10 / 14</a:t>
             </a:r>
-            <a:endParaRPr lang="en-US" sz="720" dirty="0"/>
+            <a:endParaRPr lang="en-US" sz="900" dirty="0"/>
           </a:p>
         </p:txBody>
       </p:sp>
@@ -9346,8 +9346,8 @@
         </p:nvSpPr>
         <p:spPr>
           <a:xfrm>
-            <a:off x="1691006" y="102111"/>
-            <a:ext cx="1604604" cy="204222"/>
+            <a:off x="960120" y="128016"/>
+            <a:ext cx="2011680" cy="256032"/>
           </a:xfrm>
           <a:prstGeom prst="rect">
             <a:avLst/>
@@ -9363,7 +9363,7 @@
               <a:buNone/>
             </a:pPr>
             <a:r>
-              <a:rPr lang="en-US" sz="720" dirty="0">
+              <a:rPr lang="en-US" sz="900" dirty="0">
                 <a:solidFill>
                   <a:srgbClr val="9FB3C8"/>
                 </a:solidFill>
@@ -9373,7 +9373,7 @@
               </a:rPr>
               <a:t>Tiết 2 · 第 2 節</a:t>
             </a:r>
-            <a:endParaRPr lang="en-US" sz="720" dirty="0"/>
+            <a:endParaRPr lang="en-US" sz="900" dirty="0"/>
           </a:p>
         </p:txBody>
       </p:sp>
@@ -9403,7 +9403,7 @@
       </p:nvGrpSpPr>
       <p:grpSpPr>
         <a:xfrm>
-          <a:off x="898071" y="0"/>
+          <a:off x="0" y="0"/>
           <a:ext cx="1" cy="1"/>
           <a:chOff x="0" y="0"/>
           <a:chExt cx="0" cy="0"/>
@@ -9417,8 +9417,8 @@
         </p:nvSpPr>
         <p:spPr>
           <a:xfrm>
-            <a:off x="6335486" y="-1102179"/>
-            <a:ext cx="3380014" cy="3380014"/>
+            <a:off x="6766560" y="-1371600"/>
+            <a:ext cx="4206240" cy="4206240"/>
           </a:xfrm>
           <a:prstGeom prst="ellipse">
             <a:avLst/>
@@ -9442,8 +9442,8 @@
         </p:nvSpPr>
         <p:spPr>
           <a:xfrm>
-            <a:off x="7437664" y="1690007"/>
-            <a:ext cx="1910443" cy="1910443"/>
+            <a:off x="8138160" y="2103120"/>
+            <a:ext cx="2377440" cy="2377440"/>
           </a:xfrm>
           <a:prstGeom prst="ellipse">
             <a:avLst/>
@@ -9464,8 +9464,8 @@
         </p:nvSpPr>
         <p:spPr>
           <a:xfrm>
-            <a:off x="1302204" y="1359354"/>
-            <a:ext cx="3673929" cy="249827"/>
+            <a:off x="502920" y="1691640"/>
+            <a:ext cx="4572000" cy="310896"/>
           </a:xfrm>
           <a:prstGeom prst="rect">
             <a:avLst/>
@@ -9481,7 +9481,7 @@
               <a:buNone/>
             </a:pPr>
             <a:r>
-              <a:rPr lang="en-US" sz="1080" b="1" dirty="0">
+              <a:rPr lang="en-US" sz="1350" b="1" dirty="0">
                 <a:solidFill>
                   <a:srgbClr val="FFB020"/>
                 </a:solidFill>
@@ -9491,7 +9491,7 @@
               </a:rPr>
               <a:t>Phần 3 / 3</a:t>
             </a:r>
-            <a:endParaRPr lang="en-US" sz="1080" dirty="0"/>
+            <a:endParaRPr lang="en-US" sz="1350" dirty="0"/>
           </a:p>
         </p:txBody>
       </p:sp>
@@ -9503,8 +9503,8 @@
         </p:nvSpPr>
         <p:spPr>
           <a:xfrm>
-            <a:off x="1302204" y="1645920"/>
-            <a:ext cx="5878286" cy="955221"/>
+            <a:off x="502920" y="2048256"/>
+            <a:ext cx="7315200" cy="1188720"/>
           </a:xfrm>
           <a:prstGeom prst="rect">
             <a:avLst/>
@@ -9523,7 +9523,7 @@
               <a:buNone/>
             </a:pPr>
             <a:r>
-              <a:rPr lang="en-US" sz="2330" b="1" dirty="0">
+              <a:rPr lang="en-US" sz="2900" b="1" dirty="0">
                 <a:solidFill>
                   <a:srgbClr val="FFFFFF"/>
                 </a:solidFill>
@@ -9533,7 +9533,7 @@
               </a:rPr>
               <a:t>Hai cảm biến tốt, ghép lại vẫn sai</a:t>
             </a:r>
-            <a:endParaRPr lang="en-US" sz="2330" dirty="0"/>
+            <a:endParaRPr lang="en-US" sz="2900" dirty="0"/>
           </a:p>
           <a:p>
             <a:pPr indent="0" marL="0">
@@ -9543,7 +9543,7 @@
               <a:buNone/>
             </a:pPr>
             <a:r>
-              <a:rPr lang="en-US" sz="1370" dirty="0">
+              <a:rPr lang="en-US" sz="1700" dirty="0">
                 <a:solidFill>
                   <a:srgbClr val="AFC3D4"/>
                 </a:solidFill>
@@ -9553,7 +9553,7 @@
               </a:rPr>
               <a:t>兩顆都是好的，合起來還是錯的</a:t>
             </a:r>
-            <a:endParaRPr lang="en-US" sz="2330" dirty="0"/>
+            <a:endParaRPr lang="en-US" sz="2900" dirty="0"/>
           </a:p>
         </p:txBody>
       </p:sp>
@@ -9565,8 +9565,8 @@
         </p:nvSpPr>
         <p:spPr>
           <a:xfrm>
-            <a:off x="1302204" y="2689316"/>
-            <a:ext cx="5878286" cy="514350"/>
+            <a:off x="502920" y="3346704"/>
+            <a:ext cx="7315200" cy="640080"/>
           </a:xfrm>
           <a:prstGeom prst="rect">
             <a:avLst/>
@@ -9585,7 +9585,7 @@
               <a:buNone/>
             </a:pPr>
             <a:r>
-              <a:rPr lang="en-US" sz="1080" dirty="0">
+              <a:rPr lang="en-US" sz="1350" dirty="0">
                 <a:solidFill>
                   <a:srgbClr val="AFC3D4"/>
                 </a:solidFill>
@@ -9595,7 +9595,7 @@
               </a:rPr>
               <a:t>Hiệu chuẩn và đồng bộ thời gian</a:t>
             </a:r>
-            <a:endParaRPr lang="en-US" sz="1080" dirty="0"/>
+            <a:endParaRPr lang="en-US" sz="1350" dirty="0"/>
           </a:p>
           <a:p>
             <a:pPr indent="0" marL="0">
@@ -9605,7 +9605,7 @@
               <a:buNone/>
             </a:pPr>
             <a:r>
-              <a:rPr lang="en-US" sz="960" dirty="0">
+              <a:rPr lang="en-US" sz="1200" dirty="0">
                 <a:solidFill>
                   <a:srgbClr val="8AA0B4"/>
                 </a:solidFill>
@@ -9615,7 +9615,7 @@
               </a:rPr>
               <a:t>標定與時間同步</a:t>
             </a:r>
-            <a:endParaRPr lang="en-US" sz="1080" dirty="0"/>
+            <a:endParaRPr lang="en-US" sz="1350" dirty="0"/>
           </a:p>
         </p:txBody>
       </p:sp>
@@ -9627,8 +9627,8 @@
         </p:nvSpPr>
         <p:spPr>
           <a:xfrm>
-            <a:off x="986246" y="102870"/>
-            <a:ext cx="661307" cy="205740"/>
+            <a:off x="109728" y="128016"/>
+            <a:ext cx="822960" cy="256032"/>
           </a:xfrm>
           <a:prstGeom prst="rect">
             <a:avLst/>
@@ -9644,7 +9644,7 @@
               <a:buNone/>
             </a:pPr>
             <a:r>
-              <a:rPr lang="en-US" sz="720" dirty="0">
+              <a:rPr lang="en-US" sz="900" dirty="0">
                 <a:solidFill>
                   <a:srgbClr val="9FB3C8"/>
                 </a:solidFill>
@@ -9654,7 +9654,7 @@
               </a:rPr>
               <a:t>11 / 14</a:t>
             </a:r>
-            <a:endParaRPr lang="en-US" sz="720" dirty="0"/>
+            <a:endParaRPr lang="en-US" sz="900" dirty="0"/>
           </a:p>
         </p:txBody>
       </p:sp>
@@ -9666,8 +9666,8 @@
         </p:nvSpPr>
         <p:spPr>
           <a:xfrm>
-            <a:off x="1669596" y="102870"/>
-            <a:ext cx="1616529" cy="205740"/>
+            <a:off x="960120" y="128016"/>
+            <a:ext cx="2011680" cy="256032"/>
           </a:xfrm>
           <a:prstGeom prst="rect">
             <a:avLst/>
@@ -9683,7 +9683,7 @@
               <a:buNone/>
             </a:pPr>
             <a:r>
-              <a:rPr lang="en-US" sz="720" dirty="0">
+              <a:rPr lang="en-US" sz="900" dirty="0">
                 <a:solidFill>
                   <a:srgbClr val="9FB3C8"/>
                 </a:solidFill>
@@ -9693,7 +9693,7 @@
               </a:rPr>
               <a:t>Tiết 2 · 第 2 節</a:t>
             </a:r>
-            <a:endParaRPr lang="en-US" sz="720" dirty="0"/>
+            <a:endParaRPr lang="en-US" sz="900" dirty="0"/>
           </a:p>
         </p:txBody>
       </p:sp>
@@ -9716,7 +9716,7 @@
       </p:nvGrpSpPr>
       <p:grpSpPr>
         <a:xfrm>
-          <a:off x="1114123" y="0"/>
+          <a:off x="126158" y="0"/>
           <a:ext cx="1" cy="1"/>
           <a:chOff x="0" y="0"/>
           <a:chExt cx="0" cy="0"/>
@@ -9730,8 +9730,8 @@
         </p:nvSpPr>
         <p:spPr>
           <a:xfrm>
-            <a:off x="1494490" y="221304"/>
-            <a:ext cx="6155021" cy="636249"/>
+            <a:off x="615201" y="284534"/>
+            <a:ext cx="7913598" cy="818035"/>
           </a:xfrm>
           <a:prstGeom prst="rect">
             <a:avLst/>
@@ -9750,7 +9750,7 @@
               <a:buNone/>
             </a:pPr>
             <a:r>
-              <a:rPr lang="en-US" sz="1660" b="1" dirty="0">
+              <a:rPr lang="en-US" sz="2140" b="1" dirty="0">
                 <a:solidFill>
                   <a:srgbClr val="0B1F3A"/>
                 </a:solidFill>
@@ -9760,7 +9760,7 @@
               </a:rPr>
               <a:t>Hiệu chuẩn: nói cho xe biết mỗi con mắt ở đâu, nhìn hướng nào</a:t>
             </a:r>
-            <a:endParaRPr lang="en-US" sz="1660" dirty="0"/>
+            <a:endParaRPr lang="en-US" sz="2140" dirty="0"/>
           </a:p>
           <a:p>
             <a:pPr indent="0" marL="0">
@@ -9770,7 +9770,7 @@
               <a:buNone/>
             </a:pPr>
             <a:r>
-              <a:rPr lang="en-US" sz="1020" dirty="0">
+              <a:rPr lang="en-US" sz="1310" dirty="0">
                 <a:solidFill>
                   <a:srgbClr val="5F7183"/>
                 </a:solidFill>
@@ -9780,7 +9780,7 @@
               </a:rPr>
               <a:t>標定：告訴車子每一隻眼睛裝在哪、朝哪看</a:t>
             </a:r>
-            <a:endParaRPr lang="en-US" sz="1660" dirty="0"/>
+            <a:endParaRPr lang="en-US" sz="2140" dirty="0"/>
           </a:p>
         </p:txBody>
       </p:sp>
@@ -9792,8 +9792,8 @@
         </p:nvSpPr>
         <p:spPr>
           <a:xfrm>
-            <a:off x="1494490" y="1000127"/>
-            <a:ext cx="1913359" cy="2060895"/>
+            <a:off x="615201" y="1285877"/>
+            <a:ext cx="2460032" cy="2649722"/>
           </a:xfrm>
           <a:prstGeom prst="roundRect">
             <a:avLst>
@@ -9826,8 +9826,8 @@
         </p:nvSpPr>
         <p:spPr>
           <a:xfrm>
-            <a:off x="2271359" y="1138442"/>
-            <a:ext cx="359619" cy="359619"/>
+            <a:off x="1614033" y="1463711"/>
+            <a:ext cx="462368" cy="462368"/>
           </a:xfrm>
           <a:prstGeom prst="ellipse">
             <a:avLst/>
@@ -9846,8 +9846,8 @@
         </p:nvSpPr>
         <p:spPr>
           <a:xfrm>
-            <a:off x="2271359" y="1214515"/>
-            <a:ext cx="359619" cy="207473"/>
+            <a:off x="1614033" y="1561519"/>
+            <a:ext cx="462368" cy="266751"/>
           </a:xfrm>
           <a:prstGeom prst="rect">
             <a:avLst/>
@@ -9863,7 +9863,7 @@
               <a:buNone/>
             </a:pPr>
             <a:r>
-              <a:rPr lang="en-US" sz="1130" b="1" dirty="0">
+              <a:rPr lang="en-US" sz="1460" b="1" dirty="0">
                 <a:solidFill>
                   <a:srgbClr val="FFFFFF"/>
                 </a:solidFill>
@@ -9873,7 +9873,7 @@
               </a:rPr>
               <a:t>1</a:t>
             </a:r>
-            <a:endParaRPr lang="en-US" sz="1130" dirty="0"/>
+            <a:endParaRPr lang="en-US" sz="1460" dirty="0"/>
           </a:p>
         </p:txBody>
       </p:sp>
@@ -9885,8 +9885,8 @@
         </p:nvSpPr>
         <p:spPr>
           <a:xfrm>
-            <a:off x="1591310" y="1567218"/>
-            <a:ext cx="1719717" cy="497934"/>
+            <a:off x="739684" y="2014995"/>
+            <a:ext cx="2211065" cy="640201"/>
           </a:xfrm>
           <a:prstGeom prst="rect">
             <a:avLst/>
@@ -9905,7 +9905,7 @@
               <a:buNone/>
             </a:pPr>
             <a:r>
-              <a:rPr lang="en-US" sz="1060" b="1" dirty="0">
+              <a:rPr lang="en-US" sz="1360" b="1" dirty="0">
                 <a:solidFill>
                   <a:srgbClr val="0B1F3A"/>
                 </a:solidFill>
@@ -9915,7 +9915,7 @@
               </a:rPr>
               <a:t>Tham số trong</a:t>
             </a:r>
-            <a:endParaRPr lang="en-US" sz="1060" dirty="0"/>
+            <a:endParaRPr lang="en-US" sz="1360" dirty="0"/>
           </a:p>
           <a:p>
             <a:pPr algn="ctr" indent="0" marL="0">
@@ -9925,7 +9925,7 @@
               <a:buNone/>
             </a:pPr>
             <a:r>
-              <a:rPr lang="en-US" sz="910" dirty="0">
+              <a:rPr lang="en-US" sz="1170" dirty="0">
                 <a:solidFill>
                   <a:srgbClr val="007F72"/>
                 </a:solidFill>
@@ -9935,7 +9935,7 @@
               </a:rPr>
               <a:t>內參</a:t>
             </a:r>
-            <a:endParaRPr lang="en-US" sz="1060" dirty="0"/>
+            <a:endParaRPr lang="en-US" sz="1360" dirty="0"/>
           </a:p>
         </p:txBody>
       </p:sp>
@@ -9947,8 +9947,8 @@
         </p:nvSpPr>
         <p:spPr>
           <a:xfrm>
-            <a:off x="1591310" y="2092816"/>
-            <a:ext cx="1719717" cy="885216"/>
+            <a:off x="739684" y="2690763"/>
+            <a:ext cx="2211065" cy="1138135"/>
           </a:xfrm>
           <a:prstGeom prst="rect">
             <a:avLst/>
@@ -9967,7 +9967,7 @@
               <a:buNone/>
             </a:pPr>
             <a:r>
-              <a:rPr lang="en-US" sz="870" dirty="0">
+              <a:rPr lang="en-US" sz="1120" dirty="0">
                 <a:solidFill>
                   <a:srgbClr val="5F7183"/>
                 </a:solidFill>
@@ -9977,7 +9977,7 @@
               </a:rPr>
               <a:t>Ống kính méo bao nhiêu</a:t>
             </a:r>
-            <a:endParaRPr lang="en-US" sz="870" dirty="0"/>
+            <a:endParaRPr lang="en-US" sz="1120" dirty="0"/>
           </a:p>
           <a:p>
             <a:pPr algn="ctr" indent="0" marL="0">
@@ -9987,7 +9987,7 @@
               <a:buNone/>
             </a:pPr>
             <a:r>
-              <a:rPr lang="en-US" sz="870" dirty="0">
+              <a:rPr lang="en-US" sz="1120" dirty="0">
                 <a:solidFill>
                   <a:srgbClr val="5F7183"/>
                 </a:solidFill>
@@ -9997,7 +9997,7 @@
               </a:rPr>
               <a:t>Tâm ảnh ở đâu</a:t>
             </a:r>
-            <a:endParaRPr lang="en-US" sz="870" dirty="0"/>
+            <a:endParaRPr lang="en-US" sz="1120" dirty="0"/>
           </a:p>
           <a:p>
             <a:pPr algn="ctr" indent="0" marL="0">
@@ -10007,7 +10007,7 @@
               <a:buNone/>
             </a:pPr>
             <a:r>
-              <a:rPr lang="en-US" sz="790" dirty="0">
+              <a:rPr lang="en-US" sz="1020" dirty="0">
                 <a:solidFill>
                   <a:srgbClr val="5F7183"/>
                 </a:solidFill>
@@ -10017,7 +10017,7 @@
               </a:rPr>
               <a:t>鏡頭扭曲多少</a:t>
             </a:r>
-            <a:endParaRPr lang="en-US" sz="870" dirty="0"/>
+            <a:endParaRPr lang="en-US" sz="1120" dirty="0"/>
           </a:p>
           <a:p>
             <a:pPr algn="ctr" indent="0" marL="0">
@@ -10027,7 +10027,7 @@
               <a:buNone/>
             </a:pPr>
             <a:r>
-              <a:rPr lang="en-US" sz="790" dirty="0">
+              <a:rPr lang="en-US" sz="1020" dirty="0">
                 <a:solidFill>
                   <a:srgbClr val="5F7183"/>
                 </a:solidFill>
@@ -10037,7 +10037,7 @@
               </a:rPr>
               <a:t>畫面中心在哪</a:t>
             </a:r>
-            <a:endParaRPr lang="en-US" sz="870" dirty="0"/>
+            <a:endParaRPr lang="en-US" sz="1120" dirty="0"/>
           </a:p>
         </p:txBody>
       </p:sp>
@@ -10049,8 +10049,8 @@
         </p:nvSpPr>
         <p:spPr>
           <a:xfrm>
-            <a:off x="3407848" y="1691702"/>
-            <a:ext cx="207473" cy="276630"/>
+            <a:off x="3075233" y="2175045"/>
+            <a:ext cx="266751" cy="355667"/>
           </a:xfrm>
           <a:prstGeom prst="rect">
             <a:avLst/>
@@ -10066,7 +10066,7 @@
               <a:buNone/>
             </a:pPr>
             <a:r>
-              <a:rPr lang="en-US" sz="1440" b="1" dirty="0">
+              <a:rPr lang="en-US" sz="1850" b="1" dirty="0">
                 <a:solidFill>
                   <a:srgbClr val="00A896"/>
                 </a:solidFill>
@@ -10076,7 +10076,7 @@
               </a:rPr>
               <a:t>→</a:t>
             </a:r>
-            <a:endParaRPr lang="en-US" sz="1440" dirty="0"/>
+            <a:endParaRPr lang="en-US" sz="1850" dirty="0"/>
           </a:p>
         </p:txBody>
       </p:sp>
@@ -10088,8 +10088,8 @@
         </p:nvSpPr>
         <p:spPr>
           <a:xfrm>
-            <a:off x="3615321" y="1000127"/>
-            <a:ext cx="1913359" cy="2060895"/>
+            <a:off x="3341984" y="1285877"/>
+            <a:ext cx="2460032" cy="2649722"/>
           </a:xfrm>
           <a:prstGeom prst="roundRect">
             <a:avLst>
@@ -10122,8 +10122,8 @@
         </p:nvSpPr>
         <p:spPr>
           <a:xfrm>
-            <a:off x="4392190" y="1138442"/>
-            <a:ext cx="359619" cy="359619"/>
+            <a:off x="4340816" y="1463711"/>
+            <a:ext cx="462368" cy="462368"/>
           </a:xfrm>
           <a:prstGeom prst="ellipse">
             <a:avLst/>
@@ -10142,8 +10142,8 @@
         </p:nvSpPr>
         <p:spPr>
           <a:xfrm>
-            <a:off x="4392190" y="1214515"/>
-            <a:ext cx="359619" cy="207473"/>
+            <a:off x="4340816" y="1561519"/>
+            <a:ext cx="462368" cy="266751"/>
           </a:xfrm>
           <a:prstGeom prst="rect">
             <a:avLst/>
@@ -10159,7 +10159,7 @@
               <a:buNone/>
             </a:pPr>
             <a:r>
-              <a:rPr lang="en-US" sz="1130" b="1" dirty="0">
+              <a:rPr lang="en-US" sz="1460" b="1" dirty="0">
                 <a:solidFill>
                   <a:srgbClr val="FFFFFF"/>
                 </a:solidFill>
@@ -10169,7 +10169,7 @@
               </a:rPr>
               <a:t>2</a:t>
             </a:r>
-            <a:endParaRPr lang="en-US" sz="1130" dirty="0"/>
+            <a:endParaRPr lang="en-US" sz="1460" dirty="0"/>
           </a:p>
         </p:txBody>
       </p:sp>
@@ -10181,8 +10181,8 @@
         </p:nvSpPr>
         <p:spPr>
           <a:xfrm>
-            <a:off x="3712141" y="1567218"/>
-            <a:ext cx="1719717" cy="497934"/>
+            <a:off x="3466467" y="2014995"/>
+            <a:ext cx="2211065" cy="640201"/>
           </a:xfrm>
           <a:prstGeom prst="rect">
             <a:avLst/>
@@ -10201,7 +10201,7 @@
               <a:buNone/>
             </a:pPr>
             <a:r>
-              <a:rPr lang="en-US" sz="1060" b="1" dirty="0">
+              <a:rPr lang="en-US" sz="1360" b="1" dirty="0">
                 <a:solidFill>
                   <a:srgbClr val="0B1F3A"/>
                 </a:solidFill>
@@ -10211,7 +10211,7 @@
               </a:rPr>
               <a:t>Tham số ngoài</a:t>
             </a:r>
-            <a:endParaRPr lang="en-US" sz="1060" dirty="0"/>
+            <a:endParaRPr lang="en-US" sz="1360" dirty="0"/>
           </a:p>
           <a:p>
             <a:pPr algn="ctr" indent="0" marL="0">
@@ -10221,7 +10221,7 @@
               <a:buNone/>
             </a:pPr>
             <a:r>
-              <a:rPr lang="en-US" sz="910" dirty="0">
+              <a:rPr lang="en-US" sz="1170" dirty="0">
                 <a:solidFill>
                   <a:srgbClr val="007F72"/>
                 </a:solidFill>
@@ -10231,7 +10231,7 @@
               </a:rPr>
               <a:t>外參</a:t>
             </a:r>
-            <a:endParaRPr lang="en-US" sz="1060" dirty="0"/>
+            <a:endParaRPr lang="en-US" sz="1360" dirty="0"/>
           </a:p>
         </p:txBody>
       </p:sp>
@@ -10243,8 +10243,8 @@
         </p:nvSpPr>
         <p:spPr>
           <a:xfrm>
-            <a:off x="3712141" y="2092816"/>
-            <a:ext cx="1719717" cy="885216"/>
+            <a:off x="3466467" y="2690763"/>
+            <a:ext cx="2211065" cy="1138135"/>
           </a:xfrm>
           <a:prstGeom prst="rect">
             <a:avLst/>
@@ -10263,7 +10263,7 @@
               <a:buNone/>
             </a:pPr>
             <a:r>
-              <a:rPr lang="en-US" sz="870" dirty="0">
+              <a:rPr lang="en-US" sz="1120" dirty="0">
                 <a:solidFill>
                   <a:srgbClr val="5F7183"/>
                 </a:solidFill>
@@ -10273,7 +10273,7 @@
               </a:rPr>
               <a:t>Camera và lidar</a:t>
             </a:r>
-            <a:endParaRPr lang="en-US" sz="870" dirty="0"/>
+            <a:endParaRPr lang="en-US" sz="1120" dirty="0"/>
           </a:p>
           <a:p>
             <a:pPr algn="ctr" indent="0" marL="0">
@@ -10283,7 +10283,7 @@
               <a:buNone/>
             </a:pPr>
             <a:r>
-              <a:rPr lang="en-US" sz="870" dirty="0">
+              <a:rPr lang="en-US" sz="1120" dirty="0">
                 <a:solidFill>
                   <a:srgbClr val="5F7183"/>
                 </a:solidFill>
@@ -10293,7 +10293,7 @@
               </a:rPr>
               <a:t>cách nhau bao xa, lệch mấy độ</a:t>
             </a:r>
-            <a:endParaRPr lang="en-US" sz="870" dirty="0"/>
+            <a:endParaRPr lang="en-US" sz="1120" dirty="0"/>
           </a:p>
           <a:p>
             <a:pPr algn="ctr" indent="0" marL="0">
@@ -10303,7 +10303,7 @@
               <a:buNone/>
             </a:pPr>
             <a:r>
-              <a:rPr lang="en-US" sz="790" dirty="0">
+              <a:rPr lang="en-US" sz="1020" dirty="0">
                 <a:solidFill>
                   <a:srgbClr val="5F7183"/>
                 </a:solidFill>
@@ -10313,7 +10313,7 @@
               </a:rPr>
               <a:t>相機和光達</a:t>
             </a:r>
-            <a:endParaRPr lang="en-US" sz="870" dirty="0"/>
+            <a:endParaRPr lang="en-US" sz="1120" dirty="0"/>
           </a:p>
           <a:p>
             <a:pPr algn="ctr" indent="0" marL="0">
@@ -10323,7 +10323,7 @@
               <a:buNone/>
             </a:pPr>
             <a:r>
-              <a:rPr lang="en-US" sz="790" dirty="0">
+              <a:rPr lang="en-US" sz="1020" dirty="0">
                 <a:solidFill>
                   <a:srgbClr val="5F7183"/>
                 </a:solidFill>
@@ -10333,7 +10333,7 @@
               </a:rPr>
               <a:t>相距多遠、差幾度</a:t>
             </a:r>
-            <a:endParaRPr lang="en-US" sz="870" dirty="0"/>
+            <a:endParaRPr lang="en-US" sz="1120" dirty="0"/>
           </a:p>
         </p:txBody>
       </p:sp>
@@ -10345,8 +10345,8 @@
         </p:nvSpPr>
         <p:spPr>
           <a:xfrm>
-            <a:off x="5528679" y="1691702"/>
-            <a:ext cx="207473" cy="276630"/>
+            <a:off x="5802016" y="2175045"/>
+            <a:ext cx="266751" cy="355667"/>
           </a:xfrm>
           <a:prstGeom prst="rect">
             <a:avLst/>
@@ -10362,7 +10362,7 @@
               <a:buNone/>
             </a:pPr>
             <a:r>
-              <a:rPr lang="en-US" sz="1440" b="1" dirty="0">
+              <a:rPr lang="en-US" sz="1850" b="1" dirty="0">
                 <a:solidFill>
                   <a:srgbClr val="00A896"/>
                 </a:solidFill>
@@ -10372,7 +10372,7 @@
               </a:rPr>
               <a:t>→</a:t>
             </a:r>
-            <a:endParaRPr lang="en-US" sz="1440" dirty="0"/>
+            <a:endParaRPr lang="en-US" sz="1850" dirty="0"/>
           </a:p>
         </p:txBody>
       </p:sp>
@@ -10384,8 +10384,8 @@
         </p:nvSpPr>
         <p:spPr>
           <a:xfrm>
-            <a:off x="5736152" y="1000127"/>
-            <a:ext cx="1913359" cy="2060895"/>
+            <a:off x="6068767" y="1285877"/>
+            <a:ext cx="2460032" cy="2649722"/>
           </a:xfrm>
           <a:prstGeom prst="roundRect">
             <a:avLst>
@@ -10418,8 +10418,8 @@
         </p:nvSpPr>
         <p:spPr>
           <a:xfrm>
-            <a:off x="6513022" y="1138442"/>
-            <a:ext cx="359619" cy="359619"/>
+            <a:off x="7067599" y="1463711"/>
+            <a:ext cx="462368" cy="462368"/>
           </a:xfrm>
           <a:prstGeom prst="ellipse">
             <a:avLst/>
@@ -10438,8 +10438,8 @@
         </p:nvSpPr>
         <p:spPr>
           <a:xfrm>
-            <a:off x="6513022" y="1214515"/>
-            <a:ext cx="359619" cy="207473"/>
+            <a:off x="7067599" y="1561519"/>
+            <a:ext cx="462368" cy="266751"/>
           </a:xfrm>
           <a:prstGeom prst="rect">
             <a:avLst/>
@@ -10455,7 +10455,7 @@
               <a:buNone/>
             </a:pPr>
             <a:r>
-              <a:rPr lang="en-US" sz="1130" b="1" dirty="0">
+              <a:rPr lang="en-US" sz="1460" b="1" dirty="0">
                 <a:solidFill>
                   <a:srgbClr val="FFFFFF"/>
                 </a:solidFill>
@@ -10465,7 +10465,7 @@
               </a:rPr>
               <a:t>3</a:t>
             </a:r>
-            <a:endParaRPr lang="en-US" sz="1130" dirty="0"/>
+            <a:endParaRPr lang="en-US" sz="1460" dirty="0"/>
           </a:p>
         </p:txBody>
       </p:sp>
@@ -10477,8 +10477,8 @@
         </p:nvSpPr>
         <p:spPr>
           <a:xfrm>
-            <a:off x="5832972" y="1567218"/>
-            <a:ext cx="1719717" cy="497934"/>
+            <a:off x="6193250" y="2014995"/>
+            <a:ext cx="2211065" cy="640201"/>
           </a:xfrm>
           <a:prstGeom prst="rect">
             <a:avLst/>
@@ -10497,7 +10497,7 @@
               <a:buNone/>
             </a:pPr>
             <a:r>
-              <a:rPr lang="en-US" sz="1060" b="1" dirty="0">
+              <a:rPr lang="en-US" sz="1360" b="1" dirty="0">
                 <a:solidFill>
                   <a:srgbClr val="0B1F3A"/>
                 </a:solidFill>
@@ -10507,7 +10507,7 @@
               </a:rPr>
               <a:t>Sai 1°</a:t>
             </a:r>
-            <a:endParaRPr lang="en-US" sz="1060" dirty="0"/>
+            <a:endParaRPr lang="en-US" sz="1360" dirty="0"/>
           </a:p>
           <a:p>
             <a:pPr algn="ctr" indent="0" marL="0">
@@ -10517,7 +10517,7 @@
               <a:buNone/>
             </a:pPr>
             <a:r>
-              <a:rPr lang="en-US" sz="910" dirty="0">
+              <a:rPr lang="en-US" sz="1170" dirty="0">
                 <a:solidFill>
                   <a:srgbClr val="007F72"/>
                 </a:solidFill>
@@ -10527,7 +10527,7 @@
               </a:rPr>
               <a:t>差 1 度</a:t>
             </a:r>
-            <a:endParaRPr lang="en-US" sz="1060" dirty="0"/>
+            <a:endParaRPr lang="en-US" sz="1360" dirty="0"/>
           </a:p>
         </p:txBody>
       </p:sp>
@@ -10539,8 +10539,8 @@
         </p:nvSpPr>
         <p:spPr>
           <a:xfrm>
-            <a:off x="5832972" y="2092816"/>
-            <a:ext cx="1719717" cy="885216"/>
+            <a:off x="6193250" y="2690763"/>
+            <a:ext cx="2211065" cy="1138135"/>
           </a:xfrm>
           <a:prstGeom prst="rect">
             <a:avLst/>
@@ -10559,7 +10559,7 @@
               <a:buNone/>
             </a:pPr>
             <a:r>
-              <a:rPr lang="en-US" sz="870" dirty="0">
+              <a:rPr lang="en-US" sz="1120" dirty="0">
                 <a:solidFill>
                   <a:srgbClr val="5F7183"/>
                 </a:solidFill>
@@ -10569,7 +10569,7 @@
               </a:rPr>
               <a:t>Ở 50 m lệch gần 0,9 m</a:t>
             </a:r>
-            <a:endParaRPr lang="en-US" sz="870" dirty="0"/>
+            <a:endParaRPr lang="en-US" sz="1120" dirty="0"/>
           </a:p>
           <a:p>
             <a:pPr algn="ctr" indent="0" marL="0">
@@ -10579,7 +10579,7 @@
               <a:buNone/>
             </a:pPr>
             <a:r>
-              <a:rPr lang="en-US" sz="870" dirty="0">
+              <a:rPr lang="en-US" sz="1120" dirty="0">
                 <a:solidFill>
                   <a:srgbClr val="5F7183"/>
                 </a:solidFill>
@@ -10589,7 +10589,7 @@
               </a:rPr>
               <a:t>Đủ để nhầm làn</a:t>
             </a:r>
-            <a:endParaRPr lang="en-US" sz="870" dirty="0"/>
+            <a:endParaRPr lang="en-US" sz="1120" dirty="0"/>
           </a:p>
           <a:p>
             <a:pPr algn="ctr" indent="0" marL="0">
@@ -10599,7 +10599,7 @@
               <a:buNone/>
             </a:pPr>
             <a:r>
-              <a:rPr lang="en-US" sz="790" dirty="0">
+              <a:rPr lang="en-US" sz="1020" dirty="0">
                 <a:solidFill>
                   <a:srgbClr val="5F7183"/>
                 </a:solidFill>
@@ -10609,7 +10609,7 @@
               </a:rPr>
               <a:t>50 公尺處差 0.9 公尺</a:t>
             </a:r>
-            <a:endParaRPr lang="en-US" sz="870" dirty="0"/>
+            <a:endParaRPr lang="en-US" sz="1120" dirty="0"/>
           </a:p>
           <a:p>
             <a:pPr algn="ctr" indent="0" marL="0">
@@ -10619,7 +10619,7 @@
               <a:buNone/>
             </a:pPr>
             <a:r>
-              <a:rPr lang="en-US" sz="790" dirty="0">
+              <a:rPr lang="en-US" sz="1020" dirty="0">
                 <a:solidFill>
                   <a:srgbClr val="5F7183"/>
                 </a:solidFill>
@@ -10629,7 +10629,7 @@
               </a:rPr>
               <a:t>足以搞錯車道</a:t>
             </a:r>
-            <a:endParaRPr lang="en-US" sz="870" dirty="0"/>
+            <a:endParaRPr lang="en-US" sz="1120" dirty="0"/>
           </a:p>
         </p:txBody>
       </p:sp>
@@ -10641,8 +10641,8 @@
         </p:nvSpPr>
         <p:spPr>
           <a:xfrm>
-            <a:off x="1494490" y="3171673"/>
-            <a:ext cx="6155021" cy="428777"/>
+            <a:off x="615201" y="4077866"/>
+            <a:ext cx="7913598" cy="551284"/>
           </a:xfrm>
           <a:prstGeom prst="rect">
             <a:avLst/>
@@ -10661,7 +10661,7 @@
               <a:buNone/>
             </a:pPr>
             <a:r>
-              <a:rPr lang="en-US" sz="950" b="1" dirty="0">
+              <a:rPr lang="en-US" sz="1220" b="1" dirty="0">
                 <a:solidFill>
                   <a:srgbClr val="0B1F3A"/>
                 </a:solidFill>
@@ -10671,7 +10671,7 @@
               </a:rPr>
               <a:t>Rung, va chạm, thay kính chắn gió — đều làm lệch. Nên phải hiệu chuẩn lại định kỳ.</a:t>
             </a:r>
-            <a:endParaRPr lang="en-US" sz="950" dirty="0"/>
+            <a:endParaRPr lang="en-US" sz="1220" dirty="0"/>
           </a:p>
           <a:p>
             <a:pPr indent="0" marL="0">
@@ -10681,7 +10681,7 @@
               <a:buNone/>
             </a:pPr>
             <a:r>
-              <a:rPr lang="en-US" sz="870" dirty="0">
+              <a:rPr lang="en-US" sz="1120" dirty="0">
                 <a:solidFill>
                   <a:srgbClr val="007F72"/>
                 </a:solidFill>
@@ -10691,7 +10691,7 @@
               </a:rPr>
               <a:t>震動、碰撞、換擋風玻璃，都會讓它跑掉。所以要定期重新標定。</a:t>
             </a:r>
-            <a:endParaRPr lang="en-US" sz="950" dirty="0"/>
+            <a:endParaRPr lang="en-US" sz="1220" dirty="0"/>
           </a:p>
         </p:txBody>
       </p:sp>
@@ -10727,8 +10727,8 @@
         </p:nvSpPr>
         <p:spPr>
           <a:xfrm>
-            <a:off x="1197112" y="96821"/>
-            <a:ext cx="622418" cy="193641"/>
+            <a:off x="232859" y="124484"/>
+            <a:ext cx="800252" cy="248967"/>
           </a:xfrm>
           <a:prstGeom prst="rect">
             <a:avLst/>
@@ -10744,7 +10744,7 @@
               <a:buNone/>
             </a:pPr>
             <a:r>
-              <a:rPr lang="en-US" sz="680" dirty="0">
+              <a:rPr lang="en-US" sz="880" dirty="0">
                 <a:solidFill>
                   <a:srgbClr val="5F7183"/>
                 </a:solidFill>
@@ -10754,7 +10754,7 @@
               </a:rPr>
               <a:t>12 / 14</a:t>
             </a:r>
-            <a:endParaRPr lang="en-US" sz="680" dirty="0"/>
+            <a:endParaRPr lang="en-US" sz="880" dirty="0"/>
           </a:p>
         </p:txBody>
       </p:sp>
@@ -10766,8 +10766,8 @@
         </p:nvSpPr>
         <p:spPr>
           <a:xfrm>
-            <a:off x="1840277" y="96821"/>
-            <a:ext cx="1521466" cy="193641"/>
+            <a:off x="1059785" y="124484"/>
+            <a:ext cx="1956170" cy="248967"/>
           </a:xfrm>
           <a:prstGeom prst="rect">
             <a:avLst/>
@@ -10783,7 +10783,7 @@
               <a:buNone/>
             </a:pPr>
             <a:r>
-              <a:rPr lang="en-US" sz="680" dirty="0">
+              <a:rPr lang="en-US" sz="880" dirty="0">
                 <a:solidFill>
                   <a:srgbClr val="5F7183"/>
                 </a:solidFill>
@@ -10793,7 +10793,7 @@
               </a:rPr>
               <a:t>Tiết 2 · 第 2 節</a:t>
             </a:r>
-            <a:endParaRPr lang="en-US" sz="680" dirty="0"/>
+            <a:endParaRPr lang="en-US" sz="880" dirty="0"/>
           </a:p>
         </p:txBody>
       </p:sp>
@@ -10816,7 +10816,7 @@
       </p:nvGrpSpPr>
       <p:grpSpPr>
         <a:xfrm>
-          <a:off x="942514" y="0"/>
+          <a:off x="0" y="0"/>
           <a:ext cx="1" cy="1"/>
           <a:chOff x="0" y="0"/>
           <a:chExt cx="0" cy="0"/>
@@ -10830,8 +10830,8 @@
         </p:nvSpPr>
         <p:spPr>
           <a:xfrm>
-            <a:off x="1341758" y="333913"/>
-            <a:ext cx="6460485" cy="217769"/>
+            <a:off x="502920" y="420624"/>
+            <a:ext cx="8138160" cy="274320"/>
           </a:xfrm>
           <a:prstGeom prst="rect">
             <a:avLst/>
@@ -10847,7 +10847,7 @@
               <a:buNone/>
             </a:pPr>
             <a:r>
-              <a:rPr lang="en-US" sz="990" b="1" dirty="0">
+              <a:rPr lang="en-US" sz="1250" b="1" dirty="0">
                 <a:solidFill>
                   <a:srgbClr val="007F72"/>
                 </a:solidFill>
@@ -10857,7 +10857,7 @@
               </a:rPr>
               <a:t>Đồng bộ · 時間同步</a:t>
             </a:r>
-            <a:endParaRPr lang="en-US" sz="990" dirty="0"/>
+            <a:endParaRPr lang="en-US" sz="1250" dirty="0"/>
           </a:p>
         </p:txBody>
       </p:sp>
@@ -10869,8 +10869,8 @@
         </p:nvSpPr>
         <p:spPr>
           <a:xfrm>
-            <a:off x="1341758" y="874706"/>
-            <a:ext cx="1959922" cy="1996217"/>
+            <a:off x="502920" y="1101852"/>
+            <a:ext cx="2468880" cy="2514600"/>
           </a:xfrm>
           <a:prstGeom prst="roundRect">
             <a:avLst>
@@ -10896,8 +10896,8 @@
         </p:nvSpPr>
         <p:spPr>
           <a:xfrm>
-            <a:off x="2128485" y="1749340"/>
-            <a:ext cx="737802" cy="599736"/>
+            <a:off x="1493947" y="2203613"/>
+            <a:ext cx="929396" cy="755477"/>
           </a:xfrm>
           <a:prstGeom prst="roundRect">
             <a:avLst>
@@ -10923,8 +10923,8 @@
         </p:nvSpPr>
         <p:spPr>
           <a:xfrm>
-            <a:off x="2005518" y="1625864"/>
-            <a:ext cx="737802" cy="599736"/>
+            <a:off x="1339047" y="2048073"/>
+            <a:ext cx="929396" cy="755477"/>
           </a:xfrm>
           <a:prstGeom prst="roundRect">
             <a:avLst>
@@ -10950,8 +10950,8 @@
         </p:nvSpPr>
         <p:spPr>
           <a:xfrm>
-            <a:off x="1882551" y="1502390"/>
-            <a:ext cx="737802" cy="599736"/>
+            <a:off x="1184148" y="1892534"/>
+            <a:ext cx="929396" cy="755477"/>
           </a:xfrm>
           <a:prstGeom prst="roundRect">
             <a:avLst>
@@ -10977,8 +10977,8 @@
         </p:nvSpPr>
         <p:spPr>
           <a:xfrm>
-            <a:off x="1759584" y="1378914"/>
-            <a:ext cx="737802" cy="599736"/>
+            <a:off x="1029249" y="1736994"/>
+            <a:ext cx="929396" cy="755477"/>
           </a:xfrm>
           <a:prstGeom prst="roundRect">
             <a:avLst>
@@ -11004,8 +11004,8 @@
         </p:nvSpPr>
         <p:spPr>
           <a:xfrm>
-            <a:off x="1443383" y="2296158"/>
-            <a:ext cx="1756671" cy="317508"/>
+            <a:off x="630936" y="2892430"/>
+            <a:ext cx="2212848" cy="399959"/>
           </a:xfrm>
           <a:prstGeom prst="rect">
             <a:avLst/>
@@ -11021,7 +11021,7 @@
               <a:buNone/>
             </a:pPr>
             <a:r>
-              <a:rPr lang="en-US" sz="870" b="1" dirty="0">
+              <a:rPr lang="en-US" sz="1100" b="1" dirty="0">
                 <a:solidFill>
                   <a:srgbClr val="8A5A00"/>
                 </a:solidFill>
@@ -11031,7 +11031,7 @@
               </a:rPr>
               <a:t>× 10 000</a:t>
             </a:r>
-            <a:endParaRPr lang="en-US" sz="870" dirty="0"/>
+            <a:endParaRPr lang="en-US" sz="1100" dirty="0"/>
           </a:p>
         </p:txBody>
       </p:sp>
@@ -11043,8 +11043,8 @@
         </p:nvSpPr>
         <p:spPr>
           <a:xfrm>
-            <a:off x="3664629" y="1047093"/>
-            <a:ext cx="4137614" cy="798305"/>
+            <a:off x="3429000" y="1319005"/>
+            <a:ext cx="5212080" cy="1005611"/>
           </a:xfrm>
           <a:prstGeom prst="rect">
             <a:avLst/>
@@ -11063,7 +11063,7 @@
               <a:buNone/>
             </a:pPr>
             <a:r>
-              <a:rPr lang="en-US" sz="1830" b="1" dirty="0">
+              <a:rPr lang="en-US" sz="2300" b="1" dirty="0">
                 <a:solidFill>
                   <a:srgbClr val="0B1F3A"/>
                 </a:solidFill>
@@ -11073,7 +11073,7 @@
               </a:rPr>
               <a:t>Đồng bộ thời gian: hai con mắt phải nhìn cùng một khoảnh khắc</a:t>
             </a:r>
-            <a:endParaRPr lang="en-US" sz="1830" dirty="0"/>
+            <a:endParaRPr lang="en-US" sz="2300" dirty="0"/>
           </a:p>
           <a:p>
             <a:pPr indent="0" marL="0">
@@ -11083,7 +11083,7 @@
               <a:buNone/>
             </a:pPr>
             <a:r>
-              <a:rPr lang="en-US" sz="1110" dirty="0">
+              <a:rPr lang="en-US" sz="1400" dirty="0">
                 <a:solidFill>
                   <a:srgbClr val="007F72"/>
                 </a:solidFill>
@@ -11093,7 +11093,7 @@
               </a:rPr>
               <a:t>時間同步：兩隻眼睛要看的是同一個瞬間</a:t>
             </a:r>
-            <a:endParaRPr lang="en-US" sz="1830" dirty="0"/>
+            <a:endParaRPr lang="en-US" sz="2300" dirty="0"/>
           </a:p>
         </p:txBody>
       </p:sp>
@@ -11105,8 +11105,8 @@
         </p:nvSpPr>
         <p:spPr>
           <a:xfrm>
-            <a:off x="3664629" y="1917989"/>
-            <a:ext cx="4137614" cy="853137"/>
+            <a:off x="3429000" y="2416057"/>
+            <a:ext cx="5212080" cy="1074682"/>
           </a:xfrm>
           <a:prstGeom prst="rect">
             <a:avLst/>
@@ -11125,7 +11125,7 @@
               <a:buNone/>
             </a:pPr>
             <a:r>
-              <a:rPr lang="en-US" sz="990" dirty="0">
+              <a:rPr lang="en-US" sz="1250" dirty="0">
                 <a:solidFill>
                   <a:srgbClr val="5F7183"/>
                 </a:solidFill>
@@ -11135,7 +11135,7 @@
               </a:rPr>
               <a:t>Lidar 10 Hz, camera 60 fps. Nếu không đóng dấu thời gian chung, khung ảnh và vòng quét có thể lệch nhau tới 50 ms — ở 40 km/h là hơn nửa mét.</a:t>
             </a:r>
-            <a:endParaRPr lang="en-US" sz="990" dirty="0"/>
+            <a:endParaRPr lang="en-US" sz="1250" dirty="0"/>
           </a:p>
           <a:p>
             <a:pPr indent="0" marL="0">
@@ -11145,7 +11145,7 @@
               <a:buNone/>
             </a:pPr>
             <a:r>
-              <a:rPr lang="en-US" sz="910" dirty="0">
+              <a:rPr lang="en-US" sz="1150" dirty="0">
                 <a:solidFill>
                   <a:srgbClr val="5F7183"/>
                 </a:solidFill>
@@ -11155,7 +11155,7 @@
               </a:rPr>
               <a:t>光達 10 Hz、相機 60 fps。如果沒有共同的時間戳，一張畫面和一圈掃描可能差到 50 毫秒——時速 40 就是超過半公尺。</a:t>
             </a:r>
-            <a:endParaRPr lang="en-US" sz="990" dirty="0"/>
+            <a:endParaRPr lang="en-US" sz="1250" dirty="0"/>
           </a:p>
         </p:txBody>
       </p:sp>
@@ -11167,8 +11167,8 @@
         </p:nvSpPr>
         <p:spPr>
           <a:xfrm>
-            <a:off x="1341758" y="3106840"/>
-            <a:ext cx="6460485" cy="493610"/>
+            <a:off x="502920" y="3913632"/>
+            <a:ext cx="8138160" cy="621792"/>
           </a:xfrm>
           <a:prstGeom prst="roundRect">
             <a:avLst>
@@ -11194,8 +11194,8 @@
         </p:nvSpPr>
         <p:spPr>
           <a:xfrm>
-            <a:off x="1486937" y="3164912"/>
-            <a:ext cx="6170126" cy="391984"/>
+            <a:off x="685800" y="3986784"/>
+            <a:ext cx="7772400" cy="493776"/>
           </a:xfrm>
           <a:prstGeom prst="rect">
             <a:avLst/>
@@ -11214,7 +11214,7 @@
               <a:buNone/>
             </a:pPr>
             <a:r>
-              <a:rPr lang="en-US" sz="990" b="1" dirty="0">
+              <a:rPr lang="en-US" sz="1250" b="1" dirty="0">
                 <a:solidFill>
                   <a:srgbClr val="7A4E00"/>
                 </a:solidFill>
@@ -11224,7 +11224,7 @@
               </a:rPr>
               <a:t>OS1 có dòng «multi-sensor phase lock» chính là để giải chuyện này.</a:t>
             </a:r>
-            <a:endParaRPr lang="en-US" sz="990" dirty="0"/>
+            <a:endParaRPr lang="en-US" sz="1250" dirty="0"/>
           </a:p>
           <a:p>
             <a:pPr indent="0" marL="0">
@@ -11234,7 +11234,7 @@
               <a:buNone/>
             </a:pPr>
             <a:r>
-              <a:rPr lang="en-US" sz="910" dirty="0">
+              <a:rPr lang="en-US" sz="1150" dirty="0">
                 <a:solidFill>
                   <a:srgbClr val="7A4E00"/>
                 </a:solidFill>
@@ -11244,7 +11244,7 @@
               </a:rPr>
               <a:t>OS1 規格表上那行 multi-sensor phase lock，就是在處理這件事。</a:t>
             </a:r>
-            <a:endParaRPr lang="en-US" sz="990" dirty="0"/>
+            <a:endParaRPr lang="en-US" sz="1250" dirty="0"/>
           </a:p>
         </p:txBody>
       </p:sp>
@@ -11280,8 +11280,8 @@
         </p:nvSpPr>
         <p:spPr>
           <a:xfrm>
-            <a:off x="1029622" y="101626"/>
-            <a:ext cx="653307" cy="203251"/>
+            <a:off x="109728" y="128016"/>
+            <a:ext cx="822960" cy="256032"/>
           </a:xfrm>
           <a:prstGeom prst="rect">
             <a:avLst/>
@@ -11297,7 +11297,7 @@
               <a:buNone/>
             </a:pPr>
             <a:r>
-              <a:rPr lang="en-US" sz="710" dirty="0">
+              <a:rPr lang="en-US" sz="900" dirty="0">
                 <a:solidFill>
                   <a:srgbClr val="5F7183"/>
                 </a:solidFill>
@@ -11307,7 +11307,7 @@
               </a:rPr>
               <a:t>13 / 14</a:t>
             </a:r>
-            <a:endParaRPr lang="en-US" sz="710" dirty="0"/>
+            <a:endParaRPr lang="en-US" sz="900" dirty="0"/>
           </a:p>
         </p:txBody>
       </p:sp>
@@ -11319,8 +11319,8 @@
         </p:nvSpPr>
         <p:spPr>
           <a:xfrm>
-            <a:off x="1704706" y="101626"/>
-            <a:ext cx="1596974" cy="203251"/>
+            <a:off x="960120" y="128016"/>
+            <a:ext cx="2011680" cy="256032"/>
           </a:xfrm>
           <a:prstGeom prst="rect">
             <a:avLst/>
@@ -11336,7 +11336,7 @@
               <a:buNone/>
             </a:pPr>
             <a:r>
-              <a:rPr lang="en-US" sz="710" dirty="0">
+              <a:rPr lang="en-US" sz="900" dirty="0">
                 <a:solidFill>
                   <a:srgbClr val="5F7183"/>
                 </a:solidFill>
@@ -11346,7 +11346,7 @@
               </a:rPr>
               <a:t>Tiết 2 · 第 2 節</a:t>
             </a:r>
-            <a:endParaRPr lang="en-US" sz="710" dirty="0"/>
+            <a:endParaRPr lang="en-US" sz="900" dirty="0"/>
           </a:p>
         </p:txBody>
       </p:sp>
@@ -11376,7 +11376,7 @@
       </p:nvGrpSpPr>
       <p:grpSpPr>
         <a:xfrm>
-          <a:off x="898071" y="0"/>
+          <a:off x="0" y="0"/>
           <a:ext cx="1" cy="1"/>
           <a:chOff x="0" y="0"/>
           <a:chExt cx="0" cy="0"/>
@@ -11390,8 +11390,8 @@
         </p:nvSpPr>
         <p:spPr>
           <a:xfrm>
-            <a:off x="6335486" y="-1102179"/>
-            <a:ext cx="3380014" cy="3380014"/>
+            <a:off x="6766560" y="-1371600"/>
+            <a:ext cx="4206240" cy="4206240"/>
           </a:xfrm>
           <a:prstGeom prst="ellipse">
             <a:avLst/>
@@ -11415,8 +11415,8 @@
         </p:nvSpPr>
         <p:spPr>
           <a:xfrm>
-            <a:off x="7437664" y="1690007"/>
-            <a:ext cx="1910443" cy="1910443"/>
+            <a:off x="8138160" y="2103120"/>
+            <a:ext cx="2377440" cy="2377440"/>
           </a:xfrm>
           <a:prstGeom prst="ellipse">
             <a:avLst/>
@@ -11437,8 +11437,8 @@
         </p:nvSpPr>
         <p:spPr>
           <a:xfrm>
-            <a:off x="1302204" y="382089"/>
-            <a:ext cx="5437414" cy="220436"/>
+            <a:off x="502920" y="475488"/>
+            <a:ext cx="6766560" cy="274320"/>
           </a:xfrm>
           <a:prstGeom prst="rect">
             <a:avLst/>
@@ -11454,7 +11454,7 @@
               <a:buNone/>
             </a:pPr>
             <a:r>
-              <a:rPr lang="en-US" sz="1000" b="1" dirty="0">
+              <a:rPr lang="en-US" sz="1250" b="1" dirty="0">
                 <a:solidFill>
                   <a:srgbClr val="FFB020"/>
                 </a:solidFill>
@@ -11464,7 +11464,7 @@
               </a:rPr>
               <a:t>Tiết 2 · 第二節小結</a:t>
             </a:r>
-            <a:endParaRPr lang="en-US" sz="1000" dirty="0"/>
+            <a:endParaRPr lang="en-US" sz="1250" dirty="0"/>
           </a:p>
         </p:txBody>
       </p:sp>
@@ -11476,8 +11476,8 @@
         </p:nvSpPr>
         <p:spPr>
           <a:xfrm>
-            <a:off x="1302204" y="661307"/>
-            <a:ext cx="6466114" cy="852351"/>
+            <a:off x="502920" y="822960"/>
+            <a:ext cx="8046720" cy="1060704"/>
           </a:xfrm>
           <a:prstGeom prst="rect">
             <a:avLst/>
@@ -11496,7 +11496,7 @@
               <a:buNone/>
             </a:pPr>
             <a:r>
-              <a:rPr lang="en-US" sz="2010" b="1" dirty="0">
+              <a:rPr lang="en-US" sz="2500" b="1" dirty="0">
                 <a:solidFill>
                   <a:srgbClr val="FFFFFF"/>
                 </a:solidFill>
@@ -11506,7 +11506,7 @@
               </a:rPr>
               <a:t>Mang ba câu này lên máy</a:t>
             </a:r>
-            <a:endParaRPr lang="en-US" sz="2010" dirty="0"/>
+            <a:endParaRPr lang="en-US" sz="2500" dirty="0"/>
           </a:p>
           <a:p>
             <a:pPr indent="0" marL="0">
@@ -11516,7 +11516,7 @@
               <a:buNone/>
             </a:pPr>
             <a:r>
-              <a:rPr lang="en-US" sz="1210" dirty="0">
+              <a:rPr lang="en-US" sz="1500" dirty="0">
                 <a:solidFill>
                   <a:srgbClr val="AFC3D4"/>
                 </a:solidFill>
@@ -11526,7 +11526,7 @@
               </a:rPr>
               <a:t>帶三句話上機</a:t>
             </a:r>
-            <a:endParaRPr lang="en-US" sz="2010" dirty="0"/>
+            <a:endParaRPr lang="en-US" sz="2500" dirty="0"/>
           </a:p>
         </p:txBody>
       </p:sp>
@@ -11538,8 +11538,8 @@
         </p:nvSpPr>
         <p:spPr>
           <a:xfrm>
-            <a:off x="1302204" y="1425484"/>
-            <a:ext cx="36739" cy="540573"/>
+            <a:off x="502920" y="1773936"/>
+            <a:ext cx="45720" cy="672713"/>
           </a:xfrm>
           <a:prstGeom prst="rect">
             <a:avLst/>
@@ -11558,8 +11558,8 @@
         </p:nvSpPr>
         <p:spPr>
           <a:xfrm>
-            <a:off x="1478552" y="1396093"/>
-            <a:ext cx="6319157" cy="628747"/>
+            <a:off x="722376" y="1737360"/>
+            <a:ext cx="7863840" cy="782441"/>
           </a:xfrm>
           <a:prstGeom prst="rect">
             <a:avLst/>
@@ -11578,7 +11578,7 @@
               <a:buNone/>
             </a:pPr>
             <a:r>
-              <a:rPr lang="en-US" sz="1080" b="1" dirty="0">
+              <a:rPr lang="en-US" sz="1350" b="1" dirty="0">
                 <a:solidFill>
                   <a:srgbClr val="FFFFFF"/>
                 </a:solidFill>
@@ -11588,7 +11588,7 @@
               </a:rPr>
               <a:t>Camera: màn trập cuốn làm méo vật đang chạy; thiếu dải động thì hầm đen hoặc trời trắng; không có LFM thì đèn đỏ có thể chụp thành tắt.</a:t>
             </a:r>
-            <a:endParaRPr lang="en-US" sz="1080" dirty="0"/>
+            <a:endParaRPr lang="en-US" sz="1350" dirty="0"/>
           </a:p>
           <a:p>
             <a:pPr indent="0" marL="0">
@@ -11598,7 +11598,7 @@
               <a:buNone/>
             </a:pPr>
             <a:r>
-              <a:rPr lang="en-US" sz="960" dirty="0">
+              <a:rPr lang="en-US" sz="1200" dirty="0">
                 <a:solidFill>
                   <a:srgbClr val="AFC3D4"/>
                 </a:solidFill>
@@ -11608,7 +11608,7 @@
               </a:rPr>
               <a:t>相機：捲簾快門會扭曲移動中的東西；動態範圍不夠，隧道裡黑或隧道外白；沒有 LFM，紅燈可能拍成沒亮。</a:t>
             </a:r>
-            <a:endParaRPr lang="en-US" sz="1080" dirty="0"/>
+            <a:endParaRPr lang="en-US" sz="1350" dirty="0"/>
           </a:p>
         </p:txBody>
       </p:sp>
@@ -11620,8 +11620,8 @@
         </p:nvSpPr>
         <p:spPr>
           <a:xfrm>
-            <a:off x="1302204" y="2127710"/>
-            <a:ext cx="36739" cy="540573"/>
+            <a:off x="502920" y="2647817"/>
+            <a:ext cx="45720" cy="672713"/>
           </a:xfrm>
           <a:prstGeom prst="rect">
             <a:avLst/>
@@ -11640,8 +11640,8 @@
         </p:nvSpPr>
         <p:spPr>
           <a:xfrm>
-            <a:off x="1478552" y="2098319"/>
-            <a:ext cx="6319157" cy="628747"/>
+            <a:off x="722376" y="2611241"/>
+            <a:ext cx="7863840" cy="782441"/>
           </a:xfrm>
           <a:prstGeom prst="rect">
             <a:avLst/>
@@ -11660,7 +11660,7 @@
               <a:buNone/>
             </a:pPr>
             <a:r>
-              <a:rPr lang="en-US" sz="1080" b="1" dirty="0">
+              <a:rPr lang="en-US" sz="1350" b="1" dirty="0">
                 <a:solidFill>
                   <a:srgbClr val="FFFFFF"/>
                 </a:solidFill>
@@ -11670,7 +11670,7 @@
               </a:rPr>
               <a:t>Lidar: bước sóng quyết định được bắn mạnh tới đâu; Class 1 là ngưỡng bắt buộc; nhiều lần phản hồi là để sống sót trong mưa bụi.</a:t>
             </a:r>
-            <a:endParaRPr lang="en-US" sz="1080" dirty="0"/>
+            <a:endParaRPr lang="en-US" sz="1350" dirty="0"/>
           </a:p>
           <a:p>
             <a:pPr indent="0" marL="0">
@@ -11680,7 +11680,7 @@
               <a:buNone/>
             </a:pPr>
             <a:r>
-              <a:rPr lang="en-US" sz="960" dirty="0">
+              <a:rPr lang="en-US" sz="1200" dirty="0">
                 <a:solidFill>
                   <a:srgbClr val="AFC3D4"/>
                 </a:solidFill>
@@ -11690,7 +11690,7 @@
               </a:rPr>
               <a:t>光達：波長決定能打多強；Class 1 是門檻；多次回波是為了在雨和灰塵裡活下來。</a:t>
             </a:r>
-            <a:endParaRPr lang="en-US" sz="1080" dirty="0"/>
+            <a:endParaRPr lang="en-US" sz="1350" dirty="0"/>
           </a:p>
         </p:txBody>
       </p:sp>
@@ -11702,8 +11702,8 @@
         </p:nvSpPr>
         <p:spPr>
           <a:xfrm>
-            <a:off x="1302204" y="2829936"/>
-            <a:ext cx="36739" cy="540573"/>
+            <a:off x="502920" y="3521698"/>
+            <a:ext cx="45720" cy="672713"/>
           </a:xfrm>
           <a:prstGeom prst="rect">
             <a:avLst/>
@@ -11722,8 +11722,8 @@
         </p:nvSpPr>
         <p:spPr>
           <a:xfrm>
-            <a:off x="1478552" y="2800544"/>
-            <a:ext cx="6319157" cy="628747"/>
+            <a:off x="722376" y="3485122"/>
+            <a:ext cx="7863840" cy="782441"/>
           </a:xfrm>
           <a:prstGeom prst="rect">
             <a:avLst/>
@@ -11742,7 +11742,7 @@
               <a:buNone/>
             </a:pPr>
             <a:r>
-              <a:rPr lang="en-US" sz="1080" b="1" dirty="0">
+              <a:rPr lang="en-US" sz="1350" b="1" dirty="0">
                 <a:solidFill>
                   <a:srgbClr val="FFFFFF"/>
                 </a:solidFill>
@@ -11752,7 +11752,7 @@
               </a:rPr>
               <a:t>Hai cảm biến tốt chưa chắc ghép lại đúng: lệch 1° ở 50 m là gần 1 m; lệch 50 ms ở 40 km/h là hơn nửa mét.</a:t>
             </a:r>
-            <a:endParaRPr lang="en-US" sz="1080" dirty="0"/>
+            <a:endParaRPr lang="en-US" sz="1350" dirty="0"/>
           </a:p>
           <a:p>
             <a:pPr indent="0" marL="0">
@@ -11762,7 +11762,7 @@
               <a:buNone/>
             </a:pPr>
             <a:r>
-              <a:rPr lang="en-US" sz="960" dirty="0">
+              <a:rPr lang="en-US" sz="1200" dirty="0">
                 <a:solidFill>
                   <a:srgbClr val="AFC3D4"/>
                 </a:solidFill>
@@ -11772,7 +11772,7 @@
               </a:rPr>
               <a:t>兩顆好的感測器合起來不一定對：差 1 度，50 公尺就差近 1 公尺；差 50 毫秒，時速 40 就差半公尺以上。</a:t>
             </a:r>
-            <a:endParaRPr lang="en-US" sz="1080" dirty="0"/>
+            <a:endParaRPr lang="en-US" sz="1350" dirty="0"/>
           </a:p>
         </p:txBody>
       </p:sp>
@@ -11784,8 +11784,8 @@
         </p:nvSpPr>
         <p:spPr>
           <a:xfrm>
-            <a:off x="986246" y="102870"/>
-            <a:ext cx="661307" cy="205740"/>
+            <a:off x="109728" y="128016"/>
+            <a:ext cx="822960" cy="256032"/>
           </a:xfrm>
           <a:prstGeom prst="rect">
             <a:avLst/>
@@ -11801,7 +11801,7 @@
               <a:buNone/>
             </a:pPr>
             <a:r>
-              <a:rPr lang="en-US" sz="720" dirty="0">
+              <a:rPr lang="en-US" sz="900" dirty="0">
                 <a:solidFill>
                   <a:srgbClr val="9FB3C8"/>
                 </a:solidFill>
@@ -11811,7 +11811,7 @@
               </a:rPr>
               <a:t>14 / 14</a:t>
             </a:r>
-            <a:endParaRPr lang="en-US" sz="720" dirty="0"/>
+            <a:endParaRPr lang="en-US" sz="900" dirty="0"/>
           </a:p>
         </p:txBody>
       </p:sp>
@@ -11823,8 +11823,8 @@
         </p:nvSpPr>
         <p:spPr>
           <a:xfrm>
-            <a:off x="1669596" y="102870"/>
-            <a:ext cx="1616529" cy="205740"/>
+            <a:off x="960120" y="128016"/>
+            <a:ext cx="2011680" cy="256032"/>
           </a:xfrm>
           <a:prstGeom prst="rect">
             <a:avLst/>
@@ -11840,7 +11840,7 @@
               <a:buNone/>
             </a:pPr>
             <a:r>
-              <a:rPr lang="en-US" sz="720" dirty="0">
+              <a:rPr lang="en-US" sz="900" dirty="0">
                 <a:solidFill>
                   <a:srgbClr val="9FB3C8"/>
                 </a:solidFill>
@@ -11850,7 +11850,7 @@
               </a:rPr>
               <a:t>Tiết 2 · 第 2 節</a:t>
             </a:r>
-            <a:endParaRPr lang="en-US" sz="720" dirty="0"/>
+            <a:endParaRPr lang="en-US" sz="900" dirty="0"/>
           </a:p>
         </p:txBody>
       </p:sp>
@@ -11880,7 +11880,7 @@
       </p:nvGrpSpPr>
       <p:grpSpPr>
         <a:xfrm>
-          <a:off x="898071" y="0"/>
+          <a:off x="0" y="0"/>
           <a:ext cx="1" cy="1"/>
           <a:chOff x="0" y="0"/>
           <a:chExt cx="0" cy="0"/>
@@ -11894,8 +11894,8 @@
         </p:nvSpPr>
         <p:spPr>
           <a:xfrm>
-            <a:off x="6335486" y="-1102179"/>
-            <a:ext cx="3380014" cy="3380014"/>
+            <a:off x="6766560" y="-1371600"/>
+            <a:ext cx="4206240" cy="4206240"/>
           </a:xfrm>
           <a:prstGeom prst="ellipse">
             <a:avLst/>
@@ -11919,8 +11919,8 @@
         </p:nvSpPr>
         <p:spPr>
           <a:xfrm>
-            <a:off x="7437664" y="1690007"/>
-            <a:ext cx="1910443" cy="1910443"/>
+            <a:off x="8138160" y="2103120"/>
+            <a:ext cx="2377440" cy="2377440"/>
           </a:xfrm>
           <a:prstGeom prst="ellipse">
             <a:avLst/>
@@ -11941,8 +11941,8 @@
         </p:nvSpPr>
         <p:spPr>
           <a:xfrm>
-            <a:off x="1302204" y="1359354"/>
-            <a:ext cx="3673929" cy="249827"/>
+            <a:off x="502920" y="1691640"/>
+            <a:ext cx="4572000" cy="310896"/>
           </a:xfrm>
           <a:prstGeom prst="rect">
             <a:avLst/>
@@ -11958,7 +11958,7 @@
               <a:buNone/>
             </a:pPr>
             <a:r>
-              <a:rPr lang="en-US" sz="1080" b="1" dirty="0">
+              <a:rPr lang="en-US" sz="1350" b="1" dirty="0">
                 <a:solidFill>
                   <a:srgbClr val="FFB020"/>
                 </a:solidFill>
@@ -11968,7 +11968,7 @@
               </a:rPr>
               <a:t>Phần 1 / 3</a:t>
             </a:r>
-            <a:endParaRPr lang="en-US" sz="1080" dirty="0"/>
+            <a:endParaRPr lang="en-US" sz="1350" dirty="0"/>
           </a:p>
         </p:txBody>
       </p:sp>
@@ -11980,8 +11980,8 @@
         </p:nvSpPr>
         <p:spPr>
           <a:xfrm>
-            <a:off x="1302204" y="1645920"/>
-            <a:ext cx="5878286" cy="955221"/>
+            <a:off x="502920" y="2048256"/>
+            <a:ext cx="7315200" cy="1188720"/>
           </a:xfrm>
           <a:prstGeom prst="rect">
             <a:avLst/>
@@ -12000,7 +12000,7 @@
               <a:buNone/>
             </a:pPr>
             <a:r>
-              <a:rPr lang="en-US" sz="2330" b="1" dirty="0">
+              <a:rPr lang="en-US" sz="2900" b="1" dirty="0">
                 <a:solidFill>
                   <a:srgbClr val="FFFFFF"/>
                 </a:solidFill>
@@ -12010,7 +12010,7 @@
               </a:rPr>
               <a:t>Camera: ba dòng quyết định lúc chói sáng và lúc vào hầm</a:t>
             </a:r>
-            <a:endParaRPr lang="en-US" sz="2330" dirty="0"/>
+            <a:endParaRPr lang="en-US" sz="2900" dirty="0"/>
           </a:p>
           <a:p>
             <a:pPr indent="0" marL="0">
@@ -12020,7 +12020,7 @@
               <a:buNone/>
             </a:pPr>
             <a:r>
-              <a:rPr lang="en-US" sz="1370" dirty="0">
+              <a:rPr lang="en-US" sz="1700" dirty="0">
                 <a:solidFill>
                   <a:srgbClr val="AFC3D4"/>
                 </a:solidFill>
@@ -12030,7 +12030,7 @@
               </a:rPr>
               <a:t>相機：決定逆光與進隧道的那三行</a:t>
             </a:r>
-            <a:endParaRPr lang="en-US" sz="2330" dirty="0"/>
+            <a:endParaRPr lang="en-US" sz="2900" dirty="0"/>
           </a:p>
         </p:txBody>
       </p:sp>
@@ -12042,8 +12042,8 @@
         </p:nvSpPr>
         <p:spPr>
           <a:xfrm>
-            <a:off x="1302204" y="2689316"/>
-            <a:ext cx="5878286" cy="514350"/>
+            <a:off x="502920" y="3346704"/>
+            <a:ext cx="7315200" cy="640080"/>
           </a:xfrm>
           <a:prstGeom prst="rect">
             <a:avLst/>
@@ -12062,7 +12062,7 @@
               <a:buNone/>
             </a:pPr>
             <a:r>
-              <a:rPr lang="en-US" sz="1080" dirty="0">
+              <a:rPr lang="en-US" sz="1350" dirty="0">
                 <a:solidFill>
                   <a:srgbClr val="AFC3D4"/>
                 </a:solidFill>
@@ -12072,7 +12072,7 @@
               </a:rPr>
               <a:t>Kiểu màn trập · dải tương phản · nháy đèn LED</a:t>
             </a:r>
-            <a:endParaRPr lang="en-US" sz="1080" dirty="0"/>
+            <a:endParaRPr lang="en-US" sz="1350" dirty="0"/>
           </a:p>
           <a:p>
             <a:pPr indent="0" marL="0">
@@ -12082,7 +12082,7 @@
               <a:buNone/>
             </a:pPr>
             <a:r>
-              <a:rPr lang="en-US" sz="960" dirty="0">
+              <a:rPr lang="en-US" sz="1200" dirty="0">
                 <a:solidFill>
                   <a:srgbClr val="8AA0B4"/>
                 </a:solidFill>
@@ -12092,7 +12092,7 @@
               </a:rPr>
               <a:t>快門方式・動態範圍・LED 閃爍</a:t>
             </a:r>
-            <a:endParaRPr lang="en-US" sz="1080" dirty="0"/>
+            <a:endParaRPr lang="en-US" sz="1350" dirty="0"/>
           </a:p>
         </p:txBody>
       </p:sp>
@@ -12104,8 +12104,8 @@
         </p:nvSpPr>
         <p:spPr>
           <a:xfrm>
-            <a:off x="986246" y="102870"/>
-            <a:ext cx="661307" cy="205740"/>
+            <a:off x="109728" y="128016"/>
+            <a:ext cx="822960" cy="256032"/>
           </a:xfrm>
           <a:prstGeom prst="rect">
             <a:avLst/>
@@ -12121,7 +12121,7 @@
               <a:buNone/>
             </a:pPr>
             <a:r>
-              <a:rPr lang="en-US" sz="720" dirty="0">
+              <a:rPr lang="en-US" sz="900" dirty="0">
                 <a:solidFill>
                   <a:srgbClr val="9FB3C8"/>
                 </a:solidFill>
@@ -12131,7 +12131,7 @@
               </a:rPr>
               <a:t>2 / 14</a:t>
             </a:r>
-            <a:endParaRPr lang="en-US" sz="720" dirty="0"/>
+            <a:endParaRPr lang="en-US" sz="900" dirty="0"/>
           </a:p>
         </p:txBody>
       </p:sp>
@@ -12143,8 +12143,8 @@
         </p:nvSpPr>
         <p:spPr>
           <a:xfrm>
-            <a:off x="1669596" y="102870"/>
-            <a:ext cx="1616529" cy="205740"/>
+            <a:off x="960120" y="128016"/>
+            <a:ext cx="2011680" cy="256032"/>
           </a:xfrm>
           <a:prstGeom prst="rect">
             <a:avLst/>
@@ -12160,7 +12160,7 @@
               <a:buNone/>
             </a:pPr>
             <a:r>
-              <a:rPr lang="en-US" sz="720" dirty="0">
+              <a:rPr lang="en-US" sz="900" dirty="0">
                 <a:solidFill>
                   <a:srgbClr val="9FB3C8"/>
                 </a:solidFill>
@@ -12170,7 +12170,7 @@
               </a:rPr>
               <a:t>Tiết 2 · 第 2 節</a:t>
             </a:r>
-            <a:endParaRPr lang="en-US" sz="720" dirty="0"/>
+            <a:endParaRPr lang="en-US" sz="900" dirty="0"/>
           </a:p>
         </p:txBody>
       </p:sp>
@@ -12193,7 +12193,7 @@
       </p:nvGrpSpPr>
       <p:grpSpPr>
         <a:xfrm>
-          <a:off x="942514" y="0"/>
+          <a:off x="0" y="0"/>
           <a:ext cx="1" cy="1"/>
           <a:chOff x="0" y="0"/>
           <a:chExt cx="0" cy="0"/>
@@ -12207,8 +12207,8 @@
         </p:nvSpPr>
         <p:spPr>
           <a:xfrm>
-            <a:off x="1341758" y="333913"/>
-            <a:ext cx="6460485" cy="217769"/>
+            <a:off x="502920" y="420624"/>
+            <a:ext cx="8138160" cy="274320"/>
           </a:xfrm>
           <a:prstGeom prst="rect">
             <a:avLst/>
@@ -12224,7 +12224,7 @@
               <a:buNone/>
             </a:pPr>
             <a:r>
-              <a:rPr lang="en-US" sz="990" b="1" dirty="0">
+              <a:rPr lang="en-US" sz="1250" b="1" dirty="0">
                 <a:solidFill>
                   <a:srgbClr val="007F72"/>
                 </a:solidFill>
@@ -12234,7 +12234,7 @@
               </a:rPr>
               <a:t>1 / 3　Rolling shutter</a:t>
             </a:r>
-            <a:endParaRPr lang="en-US" sz="990" dirty="0"/>
+            <a:endParaRPr lang="en-US" sz="1250" dirty="0"/>
           </a:p>
         </p:txBody>
       </p:sp>
@@ -12246,8 +12246,8 @@
         </p:nvSpPr>
         <p:spPr>
           <a:xfrm>
-            <a:off x="1341758" y="874706"/>
-            <a:ext cx="1959922" cy="1996217"/>
+            <a:off x="502920" y="1101852"/>
+            <a:ext cx="2468880" cy="2514600"/>
           </a:xfrm>
           <a:prstGeom prst="roundRect">
             <a:avLst>
@@ -12273,8 +12273,8 @@
         </p:nvSpPr>
         <p:spPr>
           <a:xfrm>
-            <a:off x="1654184" y="1590586"/>
-            <a:ext cx="1335070" cy="1"/>
+            <a:off x="896478" y="2003633"/>
+            <a:ext cx="1681764" cy="1"/>
           </a:xfrm>
           <a:prstGeom prst="line">
             <a:avLst/>
@@ -12296,8 +12296,8 @@
         </p:nvSpPr>
         <p:spPr>
           <a:xfrm>
-            <a:off x="1654184" y="1802257"/>
-            <a:ext cx="1335070" cy="1"/>
+            <a:off x="896478" y="2270272"/>
+            <a:ext cx="1681764" cy="1"/>
           </a:xfrm>
           <a:prstGeom prst="line">
             <a:avLst/>
@@ -12319,8 +12319,8 @@
         </p:nvSpPr>
         <p:spPr>
           <a:xfrm>
-            <a:off x="1654184" y="1696422"/>
-            <a:ext cx="1229670" cy="1"/>
+            <a:off x="896478" y="2136953"/>
+            <a:ext cx="1548994" cy="1"/>
           </a:xfrm>
           <a:prstGeom prst="line">
             <a:avLst/>
@@ -12343,8 +12343,8 @@
         </p:nvSpPr>
         <p:spPr>
           <a:xfrm>
-            <a:off x="1654184" y="2260879"/>
-            <a:ext cx="1335070" cy="1"/>
+            <a:off x="896478" y="2847990"/>
+            <a:ext cx="1681764" cy="1"/>
           </a:xfrm>
           <a:prstGeom prst="line">
             <a:avLst/>
@@ -12366,8 +12366,8 @@
         </p:nvSpPr>
         <p:spPr>
           <a:xfrm>
-            <a:off x="1654184" y="2472551"/>
-            <a:ext cx="1335070" cy="1"/>
+            <a:off x="896478" y="3114629"/>
+            <a:ext cx="1681764" cy="1"/>
           </a:xfrm>
           <a:prstGeom prst="line">
             <a:avLst/>
@@ -12389,8 +12389,8 @@
         </p:nvSpPr>
         <p:spPr>
           <a:xfrm flipV="1">
-            <a:off x="1654184" y="2296158"/>
-            <a:ext cx="333767" cy="141114"/>
+            <a:off x="896478" y="2892430"/>
+            <a:ext cx="420441" cy="177759"/>
           </a:xfrm>
           <a:prstGeom prst="line">
             <a:avLst/>
@@ -12412,8 +12412,8 @@
         </p:nvSpPr>
         <p:spPr>
           <a:xfrm>
-            <a:off x="1987951" y="2296158"/>
-            <a:ext cx="333767" cy="158753"/>
+            <a:off x="1316919" y="2892430"/>
+            <a:ext cx="420441" cy="199979"/>
           </a:xfrm>
           <a:prstGeom prst="line">
             <a:avLst/>
@@ -12435,8 +12435,8 @@
         </p:nvSpPr>
         <p:spPr>
           <a:xfrm flipV="1">
-            <a:off x="2321719" y="2225600"/>
-            <a:ext cx="333767" cy="229311"/>
+            <a:off x="1737360" y="2803550"/>
+            <a:ext cx="420441" cy="288859"/>
           </a:xfrm>
           <a:prstGeom prst="line">
             <a:avLst/>
@@ -12458,8 +12458,8 @@
         </p:nvSpPr>
         <p:spPr>
           <a:xfrm>
-            <a:off x="2655486" y="2225600"/>
-            <a:ext cx="228367" cy="141114"/>
+            <a:off x="2157801" y="2803550"/>
+            <a:ext cx="287670" cy="177759"/>
           </a:xfrm>
           <a:prstGeom prst="line">
             <a:avLst/>
@@ -12482,8 +12482,8 @@
         </p:nvSpPr>
         <p:spPr>
           <a:xfrm>
-            <a:off x="3664629" y="907998"/>
-            <a:ext cx="4137614" cy="1076497"/>
+            <a:off x="3429000" y="1143789"/>
+            <a:ext cx="5212080" cy="1356044"/>
           </a:xfrm>
           <a:prstGeom prst="rect">
             <a:avLst/>
@@ -12502,7 +12502,7 @@
               <a:buNone/>
             </a:pPr>
             <a:r>
-              <a:rPr lang="en-US" sz="1830" b="1" dirty="0">
+              <a:rPr lang="en-US" sz="2300" b="1" dirty="0">
                 <a:solidFill>
                   <a:srgbClr val="0B1F3A"/>
                 </a:solidFill>
@@ -12512,7 +12512,7 @@
               </a:rPr>
               <a:t>Màn trập cuốn: ảnh không phải chụp cùng một lúc, mà quét từ trên xuống</a:t>
             </a:r>
-            <a:endParaRPr lang="en-US" sz="1830" dirty="0"/>
+            <a:endParaRPr lang="en-US" sz="2300" dirty="0"/>
           </a:p>
           <a:p>
             <a:pPr indent="0" marL="0">
@@ -12522,7 +12522,7 @@
               <a:buNone/>
             </a:pPr>
             <a:r>
-              <a:rPr lang="en-US" sz="1110" dirty="0">
+              <a:rPr lang="en-US" sz="1400" dirty="0">
                 <a:solidFill>
                   <a:srgbClr val="007F72"/>
                 </a:solidFill>
@@ -12532,7 +12532,7 @@
               </a:rPr>
               <a:t>捲簾快門：一張照片不是同時拍的，是從上往下掃出來的</a:t>
             </a:r>
-            <a:endParaRPr lang="en-US" sz="1830" dirty="0"/>
+            <a:endParaRPr lang="en-US" sz="2300" dirty="0"/>
           </a:p>
         </p:txBody>
       </p:sp>
@@ -12544,8 +12544,8 @@
         </p:nvSpPr>
         <p:spPr>
           <a:xfrm>
-            <a:off x="3664629" y="2057084"/>
-            <a:ext cx="4137614" cy="853137"/>
+            <a:off x="3429000" y="2591273"/>
+            <a:ext cx="5212080" cy="1074682"/>
           </a:xfrm>
           <a:prstGeom prst="rect">
             <a:avLst/>
@@ -12564,7 +12564,7 @@
               <a:buNone/>
             </a:pPr>
             <a:r>
-              <a:rPr lang="en-US" sz="990" dirty="0">
+              <a:rPr lang="en-US" sz="1250" dirty="0">
                 <a:solidFill>
                   <a:srgbClr val="5F7183"/>
                 </a:solidFill>
@@ -12574,7 +12574,7 @@
               </a:rPr>
               <a:t>Cảm biến đọc từng hàng, hàng cuối chậm hơn hàng đầu vài chục mili giây. Trong khoảng đó xe và vật đều đã di chuyển, nên cột điện bị nghiêng, cánh quạt bị cong.</a:t>
             </a:r>
-            <a:endParaRPr lang="en-US" sz="990" dirty="0"/>
+            <a:endParaRPr lang="en-US" sz="1250" dirty="0"/>
           </a:p>
           <a:p>
             <a:pPr indent="0" marL="0">
@@ -12584,7 +12584,7 @@
               <a:buNone/>
             </a:pPr>
             <a:r>
-              <a:rPr lang="en-US" sz="910" dirty="0">
+              <a:rPr lang="en-US" sz="1150" dirty="0">
                 <a:solidFill>
                   <a:srgbClr val="5F7183"/>
                 </a:solidFill>
@@ -12594,7 +12594,7 @@
               </a:rPr>
               <a:t>感光元件是一列一列讀出來的，最後一列比第一列晚了幾十毫秒。這段時間裡車子和目標都在動，所以電線桿會歪、螺旋槳會彎。</a:t>
             </a:r>
-            <a:endParaRPr lang="en-US" sz="990" dirty="0"/>
+            <a:endParaRPr lang="en-US" sz="1250" dirty="0"/>
           </a:p>
         </p:txBody>
       </p:sp>
@@ -12606,8 +12606,8 @@
         </p:nvSpPr>
         <p:spPr>
           <a:xfrm>
-            <a:off x="1341758" y="3106840"/>
-            <a:ext cx="6460485" cy="493610"/>
+            <a:off x="502920" y="3913632"/>
+            <a:ext cx="8138160" cy="621792"/>
           </a:xfrm>
           <a:prstGeom prst="roundRect">
             <a:avLst>
@@ -12633,8 +12633,8 @@
         </p:nvSpPr>
         <p:spPr>
           <a:xfrm>
-            <a:off x="1486937" y="3164912"/>
-            <a:ext cx="6170126" cy="391984"/>
+            <a:off x="685800" y="3986784"/>
+            <a:ext cx="7772400" cy="493776"/>
           </a:xfrm>
           <a:prstGeom prst="rect">
             <a:avLst/>
@@ -12653,7 +12653,7 @@
               <a:buNone/>
             </a:pPr>
             <a:r>
-              <a:rPr lang="en-US" sz="990" b="1" dirty="0">
+              <a:rPr lang="en-US" sz="1250" b="1" dirty="0">
                 <a:solidFill>
                   <a:srgbClr val="7A4E00"/>
                 </a:solidFill>
@@ -12663,7 +12663,7 @@
               </a:rPr>
               <a:t>Xe tự lái sợ nhất: vật ở rìa ảnh bị lệch chỗ, mà thuật toán lại tưởng nó thật.</a:t>
             </a:r>
-            <a:endParaRPr lang="en-US" sz="990" dirty="0"/>
+            <a:endParaRPr lang="en-US" sz="1250" dirty="0"/>
           </a:p>
           <a:p>
             <a:pPr indent="0" marL="0">
@@ -12673,7 +12673,7 @@
               <a:buNone/>
             </a:pPr>
             <a:r>
-              <a:rPr lang="en-US" sz="910" dirty="0">
+              <a:rPr lang="en-US" sz="1150" dirty="0">
                 <a:solidFill>
                   <a:srgbClr val="7A4E00"/>
                 </a:solidFill>
@@ -12683,7 +12683,7 @@
               </a:rPr>
               <a:t>自駕車最怕的是：畫面邊緣的東西位置被扭掉，演算法卻以為那是真的。</a:t>
             </a:r>
-            <a:endParaRPr lang="en-US" sz="990" dirty="0"/>
+            <a:endParaRPr lang="en-US" sz="1250" dirty="0"/>
           </a:p>
         </p:txBody>
       </p:sp>
@@ -12719,8 +12719,8 @@
         </p:nvSpPr>
         <p:spPr>
           <a:xfrm>
-            <a:off x="1029622" y="101626"/>
-            <a:ext cx="653307" cy="203251"/>
+            <a:off x="109728" y="128016"/>
+            <a:ext cx="822960" cy="256032"/>
           </a:xfrm>
           <a:prstGeom prst="rect">
             <a:avLst/>
@@ -12736,7 +12736,7 @@
               <a:buNone/>
             </a:pPr>
             <a:r>
-              <a:rPr lang="en-US" sz="710" dirty="0">
+              <a:rPr lang="en-US" sz="900" dirty="0">
                 <a:solidFill>
                   <a:srgbClr val="5F7183"/>
                 </a:solidFill>
@@ -12746,7 +12746,7 @@
               </a:rPr>
               <a:t>3 / 14</a:t>
             </a:r>
-            <a:endParaRPr lang="en-US" sz="710" dirty="0"/>
+            <a:endParaRPr lang="en-US" sz="900" dirty="0"/>
           </a:p>
         </p:txBody>
       </p:sp>
@@ -12758,8 +12758,8 @@
         </p:nvSpPr>
         <p:spPr>
           <a:xfrm>
-            <a:off x="1704706" y="101626"/>
-            <a:ext cx="1596974" cy="203251"/>
+            <a:off x="960120" y="128016"/>
+            <a:ext cx="2011680" cy="256032"/>
           </a:xfrm>
           <a:prstGeom prst="rect">
             <a:avLst/>
@@ -12775,7 +12775,7 @@
               <a:buNone/>
             </a:pPr>
             <a:r>
-              <a:rPr lang="en-US" sz="710" dirty="0">
+              <a:rPr lang="en-US" sz="900" dirty="0">
                 <a:solidFill>
                   <a:srgbClr val="5F7183"/>
                 </a:solidFill>
@@ -12785,7 +12785,7 @@
               </a:rPr>
               <a:t>Tiết 2 · 第 2 節</a:t>
             </a:r>
-            <a:endParaRPr lang="en-US" sz="710" dirty="0"/>
+            <a:endParaRPr lang="en-US" sz="900" dirty="0"/>
           </a:p>
         </p:txBody>
       </p:sp>
@@ -12808,7 +12808,7 @@
       </p:nvGrpSpPr>
       <p:grpSpPr>
         <a:xfrm>
-          <a:off x="942514" y="0"/>
+          <a:off x="0" y="0"/>
           <a:ext cx="1" cy="1"/>
           <a:chOff x="0" y="0"/>
           <a:chExt cx="0" cy="0"/>
@@ -12822,8 +12822,8 @@
         </p:nvSpPr>
         <p:spPr>
           <a:xfrm>
-            <a:off x="1341758" y="333913"/>
-            <a:ext cx="6460485" cy="217769"/>
+            <a:off x="502920" y="420624"/>
+            <a:ext cx="8138160" cy="274320"/>
           </a:xfrm>
           <a:prstGeom prst="rect">
             <a:avLst/>
@@ -12839,7 +12839,7 @@
               <a:buNone/>
             </a:pPr>
             <a:r>
-              <a:rPr lang="en-US" sz="990" b="1" dirty="0">
+              <a:rPr lang="en-US" sz="1250" b="1" dirty="0">
                 <a:solidFill>
                   <a:srgbClr val="007F72"/>
                 </a:solidFill>
@@ -12849,7 +12849,7 @@
               </a:rPr>
               <a:t>2 / 3　Dynamic range</a:t>
             </a:r>
-            <a:endParaRPr lang="en-US" sz="990" dirty="0"/>
+            <a:endParaRPr lang="en-US" sz="1250" dirty="0"/>
           </a:p>
         </p:txBody>
       </p:sp>
@@ -12861,8 +12861,8 @@
         </p:nvSpPr>
         <p:spPr>
           <a:xfrm>
-            <a:off x="1341758" y="874706"/>
-            <a:ext cx="1959922" cy="1996217"/>
+            <a:off x="502920" y="1101852"/>
+            <a:ext cx="2468880" cy="2514600"/>
           </a:xfrm>
           <a:prstGeom prst="roundRect">
             <a:avLst>
@@ -12888,8 +12888,8 @@
         </p:nvSpPr>
         <p:spPr>
           <a:xfrm>
-            <a:off x="1583917" y="1273079"/>
-            <a:ext cx="527001" cy="246950"/>
+            <a:off x="807964" y="1603675"/>
+            <a:ext cx="663854" cy="311079"/>
           </a:xfrm>
           <a:prstGeom prst="rect">
             <a:avLst/>
@@ -12905,7 +12905,7 @@
               <a:buNone/>
             </a:pPr>
             <a:r>
-              <a:rPr lang="en-US" sz="710" b="1" dirty="0">
+              <a:rPr lang="en-US" sz="900" b="1" dirty="0">
                 <a:solidFill>
                   <a:srgbClr val="6FA8DC"/>
                 </a:solidFill>
@@ -12915,7 +12915,7 @@
               </a:rPr>
               <a:t>khô  乾</a:t>
             </a:r>
-            <a:endParaRPr lang="en-US" sz="710" dirty="0"/>
+            <a:endParaRPr lang="en-US" sz="900" dirty="0"/>
           </a:p>
         </p:txBody>
       </p:sp>
@@ -12927,8 +12927,8 @@
         </p:nvSpPr>
         <p:spPr>
           <a:xfrm>
-            <a:off x="1583917" y="1588417"/>
-            <a:ext cx="316201" cy="145453"/>
+            <a:off x="807964" y="2000901"/>
+            <a:ext cx="398313" cy="183224"/>
           </a:xfrm>
           <a:prstGeom prst="roundRect">
             <a:avLst>
@@ -12949,8 +12949,8 @@
         </p:nvSpPr>
         <p:spPr>
           <a:xfrm>
-            <a:off x="1704073" y="1617508"/>
-            <a:ext cx="107508" cy="87271"/>
+            <a:off x="959323" y="2037546"/>
+            <a:ext cx="135426" cy="109934"/>
           </a:xfrm>
           <a:prstGeom prst="roundRect">
             <a:avLst>
@@ -12971,8 +12971,8 @@
         </p:nvSpPr>
         <p:spPr>
           <a:xfrm>
-            <a:off x="1935251" y="1661143"/>
-            <a:ext cx="667535" cy="1"/>
+            <a:off x="1250533" y="2092513"/>
+            <a:ext cx="840882" cy="1"/>
           </a:xfrm>
           <a:prstGeom prst="line">
             <a:avLst/>
@@ -12994,8 +12994,8 @@
         </p:nvSpPr>
         <p:spPr>
           <a:xfrm>
-            <a:off x="2602786" y="1502390"/>
-            <a:ext cx="61484" cy="317508"/>
+            <a:off x="2091416" y="1892534"/>
+            <a:ext cx="77450" cy="399959"/>
           </a:xfrm>
           <a:prstGeom prst="roundRect">
             <a:avLst>
@@ -13016,8 +13016,8 @@
         </p:nvSpPr>
         <p:spPr>
           <a:xfrm>
-            <a:off x="1583917" y="1908093"/>
-            <a:ext cx="527001" cy="246950"/>
+            <a:off x="807964" y="2403592"/>
+            <a:ext cx="663854" cy="311079"/>
           </a:xfrm>
           <a:prstGeom prst="rect">
             <a:avLst/>
@@ -13033,7 +13033,7 @@
               <a:buNone/>
             </a:pPr>
             <a:r>
-              <a:rPr lang="en-US" sz="710" b="1" dirty="0">
+              <a:rPr lang="en-US" sz="900" b="1" dirty="0">
                 <a:solidFill>
                   <a:srgbClr val="D9463E"/>
                 </a:solidFill>
@@ -13043,7 +13043,7 @@
               </a:rPr>
               <a:t>ướt  濕</a:t>
             </a:r>
-            <a:endParaRPr lang="en-US" sz="710" dirty="0"/>
+            <a:endParaRPr lang="en-US" sz="900" dirty="0"/>
           </a:p>
         </p:txBody>
       </p:sp>
@@ -13055,8 +13055,8 @@
         </p:nvSpPr>
         <p:spPr>
           <a:xfrm>
-            <a:off x="1583917" y="2223432"/>
-            <a:ext cx="316201" cy="145453"/>
+            <a:off x="807964" y="2800818"/>
+            <a:ext cx="398313" cy="183224"/>
           </a:xfrm>
           <a:prstGeom prst="roundRect">
             <a:avLst>
@@ -13077,8 +13077,8 @@
         </p:nvSpPr>
         <p:spPr>
           <a:xfrm>
-            <a:off x="1704073" y="2252522"/>
-            <a:ext cx="107508" cy="87271"/>
+            <a:off x="959323" y="2837463"/>
+            <a:ext cx="135426" cy="109934"/>
           </a:xfrm>
           <a:prstGeom prst="roundRect">
             <a:avLst>
@@ -13099,8 +13099,8 @@
         </p:nvSpPr>
         <p:spPr>
           <a:xfrm>
-            <a:off x="1935251" y="2296158"/>
-            <a:ext cx="1089136" cy="1"/>
+            <a:off x="1250533" y="2892430"/>
+            <a:ext cx="1371966" cy="1"/>
           </a:xfrm>
           <a:prstGeom prst="line">
             <a:avLst/>
@@ -13122,8 +13122,8 @@
         </p:nvSpPr>
         <p:spPr>
           <a:xfrm>
-            <a:off x="3024387" y="2137404"/>
-            <a:ext cx="61484" cy="317508"/>
+            <a:off x="2622499" y="2692451"/>
+            <a:ext cx="77450" cy="399959"/>
           </a:xfrm>
           <a:prstGeom prst="roundRect">
             <a:avLst>
@@ -13144,8 +13144,8 @@
         </p:nvSpPr>
         <p:spPr>
           <a:xfrm>
-            <a:off x="3664629" y="1047093"/>
-            <a:ext cx="4137614" cy="798305"/>
+            <a:off x="3429000" y="1319005"/>
+            <a:ext cx="5212080" cy="1005611"/>
           </a:xfrm>
           <a:prstGeom prst="rect">
             <a:avLst/>
@@ -13164,7 +13164,7 @@
               <a:buNone/>
             </a:pPr>
             <a:r>
-              <a:rPr lang="en-US" sz="1830" b="1" dirty="0">
+              <a:rPr lang="en-US" sz="2300" b="1" dirty="0">
                 <a:solidFill>
                   <a:srgbClr val="0B1F3A"/>
                 </a:solidFill>
@@ -13174,7 +13174,7 @@
               </a:rPr>
               <a:t>Dải tương phản động: cùng một khung vừa có chỗ tối vừa có chỗ chói</a:t>
             </a:r>
-            <a:endParaRPr lang="en-US" sz="1830" dirty="0"/>
+            <a:endParaRPr lang="en-US" sz="2300" dirty="0"/>
           </a:p>
           <a:p>
             <a:pPr indent="0" marL="0">
@@ -13184,7 +13184,7 @@
               <a:buNone/>
             </a:pPr>
             <a:r>
-              <a:rPr lang="en-US" sz="1110" dirty="0">
+              <a:rPr lang="en-US" sz="1400" dirty="0">
                 <a:solidFill>
                   <a:srgbClr val="007F72"/>
                 </a:solidFill>
@@ -13194,7 +13194,7 @@
               </a:rPr>
               <a:t>動態範圍：同一張畫面裡，又有很暗的地方又有很亮的地方</a:t>
             </a:r>
-            <a:endParaRPr lang="en-US" sz="1830" dirty="0"/>
+            <a:endParaRPr lang="en-US" sz="2300" dirty="0"/>
           </a:p>
         </p:txBody>
       </p:sp>
@@ -13206,8 +13206,8 @@
         </p:nvSpPr>
         <p:spPr>
           <a:xfrm>
-            <a:off x="3664629" y="1917989"/>
-            <a:ext cx="4137614" cy="853137"/>
+            <a:off x="3429000" y="2416057"/>
+            <a:ext cx="5212080" cy="1074682"/>
           </a:xfrm>
           <a:prstGeom prst="rect">
             <a:avLst/>
@@ -13226,7 +13226,7 @@
               <a:buNone/>
             </a:pPr>
             <a:r>
-              <a:rPr lang="en-US" sz="990" dirty="0">
+              <a:rPr lang="en-US" sz="1250" dirty="0">
                 <a:solidFill>
                   <a:srgbClr val="5F7183"/>
                 </a:solidFill>
@@ -13236,7 +13236,7 @@
               </a:rPr>
               <a:t>Ra khỏi đường hầm giữa trưa: trong hầm tối, ngoài hầm chói. Mắt người xử lý được khoảng 120 dB; AR0233AT ghi trên 140 dB, đó là lý do nó đắt.</a:t>
             </a:r>
-            <a:endParaRPr lang="en-US" sz="990" dirty="0"/>
+            <a:endParaRPr lang="en-US" sz="1250" dirty="0"/>
           </a:p>
           <a:p>
             <a:pPr indent="0" marL="0">
@@ -13246,7 +13246,7 @@
               <a:buNone/>
             </a:pPr>
             <a:r>
-              <a:rPr lang="en-US" sz="910" dirty="0">
+              <a:rPr lang="en-US" sz="1150" dirty="0">
                 <a:solidFill>
                   <a:srgbClr val="5F7183"/>
                 </a:solidFill>
@@ -13256,7 +13256,7 @@
               </a:rPr>
               <a:t>中午開出隧道口：裡面很暗，外面很亮。人眼大約能處理 120 dB；AR0233AT 寫的是 140 dB 以上，這就是它貴的原因。</a:t>
             </a:r>
-            <a:endParaRPr lang="en-US" sz="990" dirty="0"/>
+            <a:endParaRPr lang="en-US" sz="1250" dirty="0"/>
           </a:p>
         </p:txBody>
       </p:sp>
@@ -13268,8 +13268,8 @@
         </p:nvSpPr>
         <p:spPr>
           <a:xfrm>
-            <a:off x="1341758" y="3106840"/>
-            <a:ext cx="6460485" cy="493610"/>
+            <a:off x="502920" y="3913632"/>
+            <a:ext cx="8138160" cy="621792"/>
           </a:xfrm>
           <a:prstGeom prst="roundRect">
             <a:avLst>
@@ -13295,8 +13295,8 @@
         </p:nvSpPr>
         <p:spPr>
           <a:xfrm>
-            <a:off x="1486937" y="3164912"/>
-            <a:ext cx="6170126" cy="391984"/>
+            <a:off x="685800" y="3986784"/>
+            <a:ext cx="7772400" cy="493776"/>
           </a:xfrm>
           <a:prstGeom prst="rect">
             <a:avLst/>
@@ -13315,7 +13315,7 @@
               <a:buNone/>
             </a:pPr>
             <a:r>
-              <a:rPr lang="en-US" sz="990" b="1" dirty="0">
+              <a:rPr lang="en-US" sz="1250" b="1" dirty="0">
                 <a:solidFill>
                   <a:srgbClr val="7A4E00"/>
                 </a:solidFill>
@@ -13325,7 +13325,7 @@
               </a:rPr>
               <a:t>Thiếu dải động thì hoặc là trong hầm đen kịt, hoặc là ngoài hầm trắng xoá — chọn một.</a:t>
             </a:r>
-            <a:endParaRPr lang="en-US" sz="990" dirty="0"/>
+            <a:endParaRPr lang="en-US" sz="1250" dirty="0"/>
           </a:p>
           <a:p>
             <a:pPr indent="0" marL="0">
@@ -13335,7 +13335,7 @@
               <a:buNone/>
             </a:pPr>
             <a:r>
-              <a:rPr lang="en-US" sz="910" dirty="0">
+              <a:rPr lang="en-US" sz="1150" dirty="0">
                 <a:solidFill>
                   <a:srgbClr val="7A4E00"/>
                 </a:solidFill>
@@ -13345,7 +13345,7 @@
               </a:rPr>
               <a:t>動態範圍不夠的話，不是隧道裡一片黑，就是隧道外一片白——只能選一個。</a:t>
             </a:r>
-            <a:endParaRPr lang="en-US" sz="990" dirty="0"/>
+            <a:endParaRPr lang="en-US" sz="1250" dirty="0"/>
           </a:p>
         </p:txBody>
       </p:sp>
@@ -13381,8 +13381,8 @@
         </p:nvSpPr>
         <p:spPr>
           <a:xfrm>
-            <a:off x="1029622" y="101626"/>
-            <a:ext cx="653307" cy="203251"/>
+            <a:off x="109728" y="128016"/>
+            <a:ext cx="822960" cy="256032"/>
           </a:xfrm>
           <a:prstGeom prst="rect">
             <a:avLst/>
@@ -13398,7 +13398,7 @@
               <a:buNone/>
             </a:pPr>
             <a:r>
-              <a:rPr lang="en-US" sz="710" dirty="0">
+              <a:rPr lang="en-US" sz="900" dirty="0">
                 <a:solidFill>
                   <a:srgbClr val="5F7183"/>
                 </a:solidFill>
@@ -13408,7 +13408,7 @@
               </a:rPr>
               <a:t>4 / 14</a:t>
             </a:r>
-            <a:endParaRPr lang="en-US" sz="710" dirty="0"/>
+            <a:endParaRPr lang="en-US" sz="900" dirty="0"/>
           </a:p>
         </p:txBody>
       </p:sp>
@@ -13420,8 +13420,8 @@
         </p:nvSpPr>
         <p:spPr>
           <a:xfrm>
-            <a:off x="1704706" y="101626"/>
-            <a:ext cx="1596974" cy="203251"/>
+            <a:off x="960120" y="128016"/>
+            <a:ext cx="2011680" cy="256032"/>
           </a:xfrm>
           <a:prstGeom prst="rect">
             <a:avLst/>
@@ -13437,7 +13437,7 @@
               <a:buNone/>
             </a:pPr>
             <a:r>
-              <a:rPr lang="en-US" sz="710" dirty="0">
+              <a:rPr lang="en-US" sz="900" dirty="0">
                 <a:solidFill>
                   <a:srgbClr val="5F7183"/>
                 </a:solidFill>
@@ -13447,7 +13447,7 @@
               </a:rPr>
               <a:t>Tiết 2 · 第 2 節</a:t>
             </a:r>
-            <a:endParaRPr lang="en-US" sz="710" dirty="0"/>
+            <a:endParaRPr lang="en-US" sz="900" dirty="0"/>
           </a:p>
         </p:txBody>
       </p:sp>
@@ -13470,7 +13470,7 @@
       </p:nvGrpSpPr>
       <p:grpSpPr>
         <a:xfrm>
-          <a:off x="942514" y="0"/>
+          <a:off x="0" y="0"/>
           <a:ext cx="1" cy="1"/>
           <a:chOff x="0" y="0"/>
           <a:chExt cx="0" cy="0"/>
@@ -13484,8 +13484,8 @@
         </p:nvSpPr>
         <p:spPr>
           <a:xfrm>
-            <a:off x="1341758" y="333913"/>
-            <a:ext cx="6460485" cy="217769"/>
+            <a:off x="502920" y="420624"/>
+            <a:ext cx="8138160" cy="274320"/>
           </a:xfrm>
           <a:prstGeom prst="rect">
             <a:avLst/>
@@ -13501,7 +13501,7 @@
               <a:buNone/>
             </a:pPr>
             <a:r>
-              <a:rPr lang="en-US" sz="990" b="1" dirty="0">
+              <a:rPr lang="en-US" sz="1250" b="1" dirty="0">
                 <a:solidFill>
                   <a:srgbClr val="007F72"/>
                 </a:solidFill>
@@ -13511,7 +13511,7 @@
               </a:rPr>
               <a:t>3 / 3　LED flicker</a:t>
             </a:r>
-            <a:endParaRPr lang="en-US" sz="990" dirty="0"/>
+            <a:endParaRPr lang="en-US" sz="1250" dirty="0"/>
           </a:p>
         </p:txBody>
       </p:sp>
@@ -13523,8 +13523,8 @@
         </p:nvSpPr>
         <p:spPr>
           <a:xfrm>
-            <a:off x="1341758" y="874706"/>
-            <a:ext cx="1959922" cy="1996217"/>
+            <a:off x="502920" y="1101852"/>
+            <a:ext cx="2468880" cy="2514600"/>
           </a:xfrm>
           <a:prstGeom prst="roundRect">
             <a:avLst>
@@ -13550,8 +13550,8 @@
         </p:nvSpPr>
         <p:spPr>
           <a:xfrm>
-            <a:off x="2128485" y="1749340"/>
-            <a:ext cx="737802" cy="599736"/>
+            <a:off x="1493947" y="2203613"/>
+            <a:ext cx="929396" cy="755477"/>
           </a:xfrm>
           <a:prstGeom prst="roundRect">
             <a:avLst>
@@ -13577,8 +13577,8 @@
         </p:nvSpPr>
         <p:spPr>
           <a:xfrm>
-            <a:off x="2005518" y="1625864"/>
-            <a:ext cx="737802" cy="599736"/>
+            <a:off x="1339047" y="2048073"/>
+            <a:ext cx="929396" cy="755477"/>
           </a:xfrm>
           <a:prstGeom prst="roundRect">
             <a:avLst>
@@ -13604,8 +13604,8 @@
         </p:nvSpPr>
         <p:spPr>
           <a:xfrm>
-            <a:off x="1882551" y="1502390"/>
-            <a:ext cx="737802" cy="599736"/>
+            <a:off x="1184148" y="1892534"/>
+            <a:ext cx="929396" cy="755477"/>
           </a:xfrm>
           <a:prstGeom prst="roundRect">
             <a:avLst>
@@ -13631,8 +13631,8 @@
         </p:nvSpPr>
         <p:spPr>
           <a:xfrm>
-            <a:off x="1759584" y="1378914"/>
-            <a:ext cx="737802" cy="599736"/>
+            <a:off x="1029249" y="1736994"/>
+            <a:ext cx="929396" cy="755477"/>
           </a:xfrm>
           <a:prstGeom prst="roundRect">
             <a:avLst>
@@ -13658,8 +13658,8 @@
         </p:nvSpPr>
         <p:spPr>
           <a:xfrm>
-            <a:off x="1443383" y="2296158"/>
-            <a:ext cx="1756671" cy="317508"/>
+            <a:off x="630936" y="2892430"/>
+            <a:ext cx="2212848" cy="399959"/>
           </a:xfrm>
           <a:prstGeom prst="rect">
             <a:avLst/>
@@ -13675,7 +13675,7 @@
               <a:buNone/>
             </a:pPr>
             <a:r>
-              <a:rPr lang="en-US" sz="870" b="1" dirty="0">
+              <a:rPr lang="en-US" sz="1100" b="1" dirty="0">
                 <a:solidFill>
                   <a:srgbClr val="A3382F"/>
                 </a:solidFill>
@@ -13685,7 +13685,7 @@
               </a:rPr>
               <a:t>× 10 000</a:t>
             </a:r>
-            <a:endParaRPr lang="en-US" sz="870" dirty="0"/>
+            <a:endParaRPr lang="en-US" sz="1100" dirty="0"/>
           </a:p>
         </p:txBody>
       </p:sp>
@@ -13697,8 +13697,8 @@
         </p:nvSpPr>
         <p:spPr>
           <a:xfrm>
-            <a:off x="3664629" y="1047093"/>
-            <a:ext cx="4137614" cy="798305"/>
+            <a:off x="3429000" y="1319005"/>
+            <a:ext cx="5212080" cy="1005611"/>
           </a:xfrm>
           <a:prstGeom prst="rect">
             <a:avLst/>
@@ -13717,7 +13717,7 @@
               <a:buNone/>
             </a:pPr>
             <a:r>
-              <a:rPr lang="en-US" sz="1830" b="1" dirty="0">
+              <a:rPr lang="en-US" sz="2300" b="1" dirty="0">
                 <a:solidFill>
                   <a:srgbClr val="0B1F3A"/>
                 </a:solidFill>
@@ -13727,7 +13727,7 @@
               </a:rPr>
               <a:t>Đèn LED nhấp nháy: mắt người không thấy, camera thì thấy</a:t>
             </a:r>
-            <a:endParaRPr lang="en-US" sz="1830" dirty="0"/>
+            <a:endParaRPr lang="en-US" sz="2300" dirty="0"/>
           </a:p>
           <a:p>
             <a:pPr indent="0" marL="0">
@@ -13737,7 +13737,7 @@
               <a:buNone/>
             </a:pPr>
             <a:r>
-              <a:rPr lang="en-US" sz="1110" dirty="0">
+              <a:rPr lang="en-US" sz="1400" dirty="0">
                 <a:solidFill>
                   <a:srgbClr val="007F72"/>
                 </a:solidFill>
@@ -13747,7 +13747,7 @@
               </a:rPr>
               <a:t>LED 在閃：人眼看不出來，相機看得出來</a:t>
             </a:r>
-            <a:endParaRPr lang="en-US" sz="1830" dirty="0"/>
+            <a:endParaRPr lang="en-US" sz="2300" dirty="0"/>
           </a:p>
         </p:txBody>
       </p:sp>
@@ -13759,8 +13759,8 @@
         </p:nvSpPr>
         <p:spPr>
           <a:xfrm>
-            <a:off x="3664629" y="1917989"/>
-            <a:ext cx="4137614" cy="853137"/>
+            <a:off x="3429000" y="2416057"/>
+            <a:ext cx="5212080" cy="1074682"/>
           </a:xfrm>
           <a:prstGeom prst="rect">
             <a:avLst/>
@@ -13779,7 +13779,7 @@
               <a:buNone/>
             </a:pPr>
             <a:r>
-              <a:rPr lang="en-US" sz="990" dirty="0">
+              <a:rPr lang="en-US" sz="1250" dirty="0">
                 <a:solidFill>
                   <a:srgbClr val="5F7183"/>
                 </a:solidFill>
@@ -13789,7 +13789,7 @@
               </a:rPr>
               <a:t>Đèn tín hiệu và đèn hậu LED nháy mấy trăm lần mỗi giây. Nếu khung hình rơi đúng lúc đèn tắt, camera chụp được một cái đèn đỏ đang «tắt».</a:t>
             </a:r>
-            <a:endParaRPr lang="en-US" sz="990" dirty="0"/>
+            <a:endParaRPr lang="en-US" sz="1250" dirty="0"/>
           </a:p>
           <a:p>
             <a:pPr indent="0" marL="0">
@@ -13799,7 +13799,7 @@
               <a:buNone/>
             </a:pPr>
             <a:r>
-              <a:rPr lang="en-US" sz="910" dirty="0">
+              <a:rPr lang="en-US" sz="1150" dirty="0">
                 <a:solidFill>
                   <a:srgbClr val="5F7183"/>
                 </a:solidFill>
@@ -13809,7 +13809,7 @@
               </a:rPr>
               <a:t>紅綠燈和 LED 尾燈每秒閃好幾百次。如果剛好在燈暗的那一瞬間拍，相機就拍到一個「沒亮」的紅燈。</a:t>
             </a:r>
-            <a:endParaRPr lang="en-US" sz="990" dirty="0"/>
+            <a:endParaRPr lang="en-US" sz="1250" dirty="0"/>
           </a:p>
         </p:txBody>
       </p:sp>
@@ -13821,8 +13821,8 @@
         </p:nvSpPr>
         <p:spPr>
           <a:xfrm>
-            <a:off x="1341758" y="3106840"/>
-            <a:ext cx="6460485" cy="493610"/>
+            <a:off x="502920" y="3913632"/>
+            <a:ext cx="8138160" cy="621792"/>
           </a:xfrm>
           <a:prstGeom prst="roundRect">
             <a:avLst>
@@ -13848,8 +13848,8 @@
         </p:nvSpPr>
         <p:spPr>
           <a:xfrm>
-            <a:off x="1486937" y="3164912"/>
-            <a:ext cx="6170126" cy="391984"/>
+            <a:off x="685800" y="3986784"/>
+            <a:ext cx="7772400" cy="493776"/>
           </a:xfrm>
           <a:prstGeom prst="rect">
             <a:avLst/>
@@ -13868,7 +13868,7 @@
               <a:buNone/>
             </a:pPr>
             <a:r>
-              <a:rPr lang="en-US" sz="990" b="1" dirty="0">
+              <a:rPr lang="en-US" sz="1250" b="1" dirty="0">
                 <a:solidFill>
                   <a:srgbClr val="7A4E00"/>
                 </a:solidFill>
@@ -13878,7 +13878,7 @@
               </a:rPr>
               <a:t>Dòng LFM trên datasheet là để chữa đúng chuyện này.</a:t>
             </a:r>
-            <a:endParaRPr lang="en-US" sz="990" dirty="0"/>
+            <a:endParaRPr lang="en-US" sz="1250" dirty="0"/>
           </a:p>
           <a:p>
             <a:pPr indent="0" marL="0">
@@ -13888,7 +13888,7 @@
               <a:buNone/>
             </a:pPr>
             <a:r>
-              <a:rPr lang="en-US" sz="910" dirty="0">
+              <a:rPr lang="en-US" sz="1150" dirty="0">
                 <a:solidFill>
                   <a:srgbClr val="7A4E00"/>
                 </a:solidFill>
@@ -13898,7 +13898,7 @@
               </a:rPr>
               <a:t>規格表上那行 LFM，就是專門解決這件事的。</a:t>
             </a:r>
-            <a:endParaRPr lang="en-US" sz="990" dirty="0"/>
+            <a:endParaRPr lang="en-US" sz="1250" dirty="0"/>
           </a:p>
         </p:txBody>
       </p:sp>
@@ -13934,8 +13934,8 @@
         </p:nvSpPr>
         <p:spPr>
           <a:xfrm>
-            <a:off x="1029622" y="101626"/>
-            <a:ext cx="653307" cy="203251"/>
+            <a:off x="109728" y="128016"/>
+            <a:ext cx="822960" cy="256032"/>
           </a:xfrm>
           <a:prstGeom prst="rect">
             <a:avLst/>
@@ -13951,7 +13951,7 @@
               <a:buNone/>
             </a:pPr>
             <a:r>
-              <a:rPr lang="en-US" sz="710" dirty="0">
+              <a:rPr lang="en-US" sz="900" dirty="0">
                 <a:solidFill>
                   <a:srgbClr val="5F7183"/>
                 </a:solidFill>
@@ -13961,7 +13961,7 @@
               </a:rPr>
               <a:t>5 / 14</a:t>
             </a:r>
-            <a:endParaRPr lang="en-US" sz="710" dirty="0"/>
+            <a:endParaRPr lang="en-US" sz="900" dirty="0"/>
           </a:p>
         </p:txBody>
       </p:sp>
@@ -13973,8 +13973,8 @@
         </p:nvSpPr>
         <p:spPr>
           <a:xfrm>
-            <a:off x="1704706" y="101626"/>
-            <a:ext cx="1596974" cy="203251"/>
+            <a:off x="960120" y="128016"/>
+            <a:ext cx="2011680" cy="256032"/>
           </a:xfrm>
           <a:prstGeom prst="rect">
             <a:avLst/>
@@ -13990,7 +13990,7 @@
               <a:buNone/>
             </a:pPr>
             <a:r>
-              <a:rPr lang="en-US" sz="710" dirty="0">
+              <a:rPr lang="en-US" sz="900" dirty="0">
                 <a:solidFill>
                   <a:srgbClr val="5F7183"/>
                 </a:solidFill>
@@ -14000,7 +14000,7 @@
               </a:rPr>
               <a:t>Tiết 2 · 第 2 節</a:t>
             </a:r>
-            <a:endParaRPr lang="en-US" sz="710" dirty="0"/>
+            <a:endParaRPr lang="en-US" sz="900" dirty="0"/>
           </a:p>
         </p:txBody>
       </p:sp>
@@ -14030,7 +14030,7 @@
       </p:nvGrpSpPr>
       <p:grpSpPr>
         <a:xfrm>
-          <a:off x="898071" y="0"/>
+          <a:off x="0" y="0"/>
           <a:ext cx="1" cy="1"/>
           <a:chOff x="0" y="0"/>
           <a:chExt cx="0" cy="0"/>
@@ -14044,8 +14044,8 @@
         </p:nvSpPr>
         <p:spPr>
           <a:xfrm>
-            <a:off x="6335486" y="-1102179"/>
-            <a:ext cx="3380014" cy="3380014"/>
+            <a:off x="6766560" y="-1371600"/>
+            <a:ext cx="4206240" cy="4206240"/>
           </a:xfrm>
           <a:prstGeom prst="ellipse">
             <a:avLst/>
@@ -14069,8 +14069,8 @@
         </p:nvSpPr>
         <p:spPr>
           <a:xfrm>
-            <a:off x="7437664" y="1690007"/>
-            <a:ext cx="1910443" cy="1910443"/>
+            <a:off x="8138160" y="2103120"/>
+            <a:ext cx="2377440" cy="2377440"/>
           </a:xfrm>
           <a:prstGeom prst="ellipse">
             <a:avLst/>
@@ -14091,8 +14091,8 @@
         </p:nvSpPr>
         <p:spPr>
           <a:xfrm>
-            <a:off x="1302204" y="1359354"/>
-            <a:ext cx="3673929" cy="249827"/>
+            <a:off x="502920" y="1691640"/>
+            <a:ext cx="4572000" cy="310896"/>
           </a:xfrm>
           <a:prstGeom prst="rect">
             <a:avLst/>
@@ -14108,7 +14108,7 @@
               <a:buNone/>
             </a:pPr>
             <a:r>
-              <a:rPr lang="en-US" sz="1080" b="1" dirty="0">
+              <a:rPr lang="en-US" sz="1350" b="1" dirty="0">
                 <a:solidFill>
                   <a:srgbClr val="FFB020"/>
                 </a:solidFill>
@@ -14118,7 +14118,7 @@
               </a:rPr>
               <a:t>Phần 2 / 3</a:t>
             </a:r>
-            <a:endParaRPr lang="en-US" sz="1080" dirty="0"/>
+            <a:endParaRPr lang="en-US" sz="1350" dirty="0"/>
           </a:p>
         </p:txBody>
       </p:sp>
@@ -14130,8 +14130,8 @@
         </p:nvSpPr>
         <p:spPr>
           <a:xfrm>
-            <a:off x="1302204" y="1645920"/>
-            <a:ext cx="5878286" cy="955221"/>
+            <a:off x="502920" y="2048256"/>
+            <a:ext cx="7315200" cy="1188720"/>
           </a:xfrm>
           <a:prstGeom prst="rect">
             <a:avLst/>
@@ -14150,7 +14150,7 @@
               <a:buNone/>
             </a:pPr>
             <a:r>
-              <a:rPr lang="en-US" sz="2330" b="1" dirty="0">
+              <a:rPr lang="en-US" sz="2900" b="1" dirty="0">
                 <a:solidFill>
                   <a:srgbClr val="FFFFFF"/>
                 </a:solidFill>
@@ -14160,7 +14160,7 @@
               </a:rPr>
               <a:t>Lidar: bước sóng, an toàn mắt, và mấy lần phản hồi</a:t>
             </a:r>
-            <a:endParaRPr lang="en-US" sz="2330" dirty="0"/>
+            <a:endParaRPr lang="en-US" sz="2900" dirty="0"/>
           </a:p>
           <a:p>
             <a:pPr indent="0" marL="0">
@@ -14170,7 +14170,7 @@
               <a:buNone/>
             </a:pPr>
             <a:r>
-              <a:rPr lang="en-US" sz="1370" dirty="0">
+              <a:rPr lang="en-US" sz="1700" dirty="0">
                 <a:solidFill>
                   <a:srgbClr val="AFC3D4"/>
                 </a:solidFill>
@@ -14180,7 +14180,7 @@
               </a:rPr>
               <a:t>光達：波長、眼睛安全，還有幾次回波</a:t>
             </a:r>
-            <a:endParaRPr lang="en-US" sz="2330" dirty="0"/>
+            <a:endParaRPr lang="en-US" sz="2900" dirty="0"/>
           </a:p>
         </p:txBody>
       </p:sp>
@@ -14192,8 +14192,8 @@
         </p:nvSpPr>
         <p:spPr>
           <a:xfrm>
-            <a:off x="1302204" y="2689316"/>
-            <a:ext cx="5878286" cy="514350"/>
+            <a:off x="502920" y="3346704"/>
+            <a:ext cx="7315200" cy="640080"/>
           </a:xfrm>
           <a:prstGeom prst="rect">
             <a:avLst/>
@@ -14212,7 +14212,7 @@
               <a:buNone/>
             </a:pPr>
             <a:r>
-              <a:rPr lang="en-US" sz="1080" dirty="0">
+              <a:rPr lang="en-US" sz="1350" dirty="0">
                 <a:solidFill>
                   <a:srgbClr val="AFC3D4"/>
                 </a:solidFill>
@@ -14222,7 +14222,7 @@
               </a:rPr>
               <a:t>Ba dòng nữa, ít người đọc</a:t>
             </a:r>
-            <a:endParaRPr lang="en-US" sz="1080" dirty="0"/>
+            <a:endParaRPr lang="en-US" sz="1350" dirty="0"/>
           </a:p>
           <a:p>
             <a:pPr indent="0" marL="0">
@@ -14232,7 +14232,7 @@
               <a:buNone/>
             </a:pPr>
             <a:r>
-              <a:rPr lang="en-US" sz="960" dirty="0">
+              <a:rPr lang="en-US" sz="1200" dirty="0">
                 <a:solidFill>
                   <a:srgbClr val="8AA0B4"/>
                 </a:solidFill>
@@ -14242,7 +14242,7 @@
               </a:rPr>
               <a:t>另外三行，一樣很少人讀</a:t>
             </a:r>
-            <a:endParaRPr lang="en-US" sz="1080" dirty="0"/>
+            <a:endParaRPr lang="en-US" sz="1350" dirty="0"/>
           </a:p>
         </p:txBody>
       </p:sp>
@@ -14254,8 +14254,8 @@
         </p:nvSpPr>
         <p:spPr>
           <a:xfrm>
-            <a:off x="986246" y="102870"/>
-            <a:ext cx="661307" cy="205740"/>
+            <a:off x="109728" y="128016"/>
+            <a:ext cx="822960" cy="256032"/>
           </a:xfrm>
           <a:prstGeom prst="rect">
             <a:avLst/>
@@ -14271,7 +14271,7 @@
               <a:buNone/>
             </a:pPr>
             <a:r>
-              <a:rPr lang="en-US" sz="720" dirty="0">
+              <a:rPr lang="en-US" sz="900" dirty="0">
                 <a:solidFill>
                   <a:srgbClr val="9FB3C8"/>
                 </a:solidFill>
@@ -14281,7 +14281,7 @@
               </a:rPr>
               <a:t>6 / 14</a:t>
             </a:r>
-            <a:endParaRPr lang="en-US" sz="720" dirty="0"/>
+            <a:endParaRPr lang="en-US" sz="900" dirty="0"/>
           </a:p>
         </p:txBody>
       </p:sp>
@@ -14293,8 +14293,8 @@
         </p:nvSpPr>
         <p:spPr>
           <a:xfrm>
-            <a:off x="1669596" y="102870"/>
-            <a:ext cx="1616529" cy="205740"/>
+            <a:off x="960120" y="128016"/>
+            <a:ext cx="2011680" cy="256032"/>
           </a:xfrm>
           <a:prstGeom prst="rect">
             <a:avLst/>
@@ -14310,7 +14310,7 @@
               <a:buNone/>
             </a:pPr>
             <a:r>
-              <a:rPr lang="en-US" sz="720" dirty="0">
+              <a:rPr lang="en-US" sz="900" dirty="0">
                 <a:solidFill>
                   <a:srgbClr val="9FB3C8"/>
                 </a:solidFill>
@@ -14320,7 +14320,7 @@
               </a:rPr>
               <a:t>Tiết 2 · 第 2 節</a:t>
             </a:r>
-            <a:endParaRPr lang="en-US" sz="720" dirty="0"/>
+            <a:endParaRPr lang="en-US" sz="900" dirty="0"/>
           </a:p>
         </p:txBody>
       </p:sp>
@@ -14343,7 +14343,7 @@
       </p:nvGrpSpPr>
       <p:grpSpPr>
         <a:xfrm>
-          <a:off x="1084799" y="0"/>
+          <a:off x="88455" y="0"/>
           <a:ext cx="1" cy="1"/>
           <a:chOff x="0" y="0"/>
           <a:chExt cx="0" cy="0"/>
@@ -14357,8 +14357,8 @@
         </p:nvSpPr>
         <p:spPr>
           <a:xfrm>
-            <a:off x="1468391" y="223181"/>
-            <a:ext cx="6207218" cy="641645"/>
+            <a:off x="581645" y="286947"/>
+            <a:ext cx="7980709" cy="824972"/>
           </a:xfrm>
           <a:prstGeom prst="rect">
             <a:avLst/>
@@ -14377,7 +14377,7 @@
               <a:buNone/>
             </a:pPr>
             <a:r>
-              <a:rPr lang="en-US" sz="1680" b="1" dirty="0">
+              <a:rPr lang="en-US" sz="2160" b="1" dirty="0">
                 <a:solidFill>
                   <a:srgbClr val="0B1F3A"/>
                 </a:solidFill>
@@ -14387,7 +14387,7 @@
               </a:rPr>
               <a:t>905, 865 hay 1550 nm: chọn bước sóng là chọn đánh đổi</a:t>
             </a:r>
-            <a:endParaRPr lang="en-US" sz="1680" dirty="0"/>
+            <a:endParaRPr lang="en-US" sz="2160" dirty="0"/>
           </a:p>
           <a:p>
             <a:pPr indent="0" marL="0">
@@ -14397,7 +14397,7 @@
               <a:buNone/>
             </a:pPr>
             <a:r>
-              <a:rPr lang="en-US" sz="1030" dirty="0">
+              <a:rPr lang="en-US" sz="1320" dirty="0">
                 <a:solidFill>
                   <a:srgbClr val="5F7183"/>
                 </a:solidFill>
@@ -14407,7 +14407,7 @@
               </a:rPr>
               <a:t>905、865 還是 1550 奈米：選波長就是選代價</a:t>
             </a:r>
-            <a:endParaRPr lang="en-US" sz="1680" dirty="0"/>
+            <a:endParaRPr lang="en-US" sz="2160" dirty="0"/>
           </a:p>
         </p:txBody>
       </p:sp>
@@ -14419,8 +14419,8 @@
         </p:nvSpPr>
         <p:spPr>
           <a:xfrm>
-            <a:off x="1468391" y="864826"/>
-            <a:ext cx="6207218" cy="544003"/>
+            <a:off x="581645" y="1111919"/>
+            <a:ext cx="7980709" cy="699433"/>
           </a:xfrm>
           <a:prstGeom prst="roundRect">
             <a:avLst>
@@ -14441,8 +14441,8 @@
         </p:nvSpPr>
         <p:spPr>
           <a:xfrm>
-            <a:off x="1579981" y="920621"/>
-            <a:ext cx="5984038" cy="432413"/>
+            <a:off x="725119" y="1183656"/>
+            <a:ext cx="7693763" cy="555960"/>
           </a:xfrm>
           <a:prstGeom prst="rect">
             <a:avLst/>
@@ -14461,7 +14461,7 @@
               <a:buNone/>
             </a:pPr>
             <a:r>
-              <a:rPr lang="en-US" sz="880" b="1" dirty="0">
+              <a:rPr lang="en-US" sz="1130" b="1" dirty="0">
                 <a:solidFill>
                   <a:srgbClr val="007F72"/>
                 </a:solidFill>
@@ -14471,7 +14471,7 @@
               </a:rPr>
               <a:t>Ba con số này đều nằm ở dòng «Laser Wavelength» trên datasheet.</a:t>
             </a:r>
-            <a:endParaRPr lang="en-US" sz="880" dirty="0"/>
+            <a:endParaRPr lang="en-US" sz="1130" dirty="0"/>
           </a:p>
           <a:p>
             <a:pPr indent="0" marL="0">
@@ -14481,7 +14481,7 @@
               <a:buNone/>
             </a:pPr>
             <a:r>
-              <a:rPr lang="en-US" sz="760" dirty="0">
+              <a:rPr lang="en-US" sz="980" dirty="0">
                 <a:solidFill>
                   <a:srgbClr val="007F72"/>
                 </a:solidFill>
@@ -14491,7 +14491,7 @@
               </a:rPr>
               <a:t>這三個數字都寫在規格表的 Laser Wavelength 那一行。</a:t>
             </a:r>
-            <a:endParaRPr lang="en-US" sz="880" dirty="0"/>
+            <a:endParaRPr lang="en-US" sz="1130" dirty="0"/>
           </a:p>
         </p:txBody>
       </p:sp>
@@ -14510,20 +14510,20 @@
           </p:nvPr>
         </p:nvGraphicFramePr>
         <p:xfrm>
-          <a:off x="1468391" y="1492522"/>
-          <a:ext cx="6207218" cy="697440"/>
+          <a:off x="581645" y="1918957"/>
+          <a:ext cx="7980709" cy="896709"/>
         </p:xfrm>
         <a:graphic>
           <a:graphicData uri="http://schemas.openxmlformats.org/drawingml/2006/table">
             <a:tbl>
               <a:tblPr/>
               <a:tblGrid>
-                <a:gridCol w="1551805"/>
-                <a:gridCol w="1551805"/>
-                <a:gridCol w="1551805"/>
-                <a:gridCol w="1551805"/>
+                <a:gridCol w="1995177"/>
+                <a:gridCol w="1995177"/>
+                <a:gridCol w="1995177"/>
+                <a:gridCol w="1995177"/>
               </a:tblGrid>
-              <a:tr h="223181">
+              <a:tr h="286947">
                 <a:tc>
                   <a:txBody>
                     <a:bodyPr/>
@@ -14533,7 +14533,7 @@
                         <a:buNone/>
                       </a:pPr>
                       <a:r>
-                        <a:rPr lang="en-US" sz="720" b="1" dirty="0">
+                        <a:rPr lang="en-US" sz="930" b="1" dirty="0">
                           <a:solidFill>
                             <a:srgbClr val="FFFFFF"/>
                           </a:solidFill>
@@ -14543,14 +14543,14 @@
                         </a:rPr>
                         <a:t>Bước sóng</a:t>
                       </a:r>
-                      <a:endParaRPr lang="en-US" sz="920" dirty="0"/>
+                      <a:endParaRPr lang="en-US" sz="1180" dirty="0"/>
                     </a:p>
                     <a:p>
                       <a:pPr algn="l" indent="0" marL="0">
                         <a:buNone/>
                       </a:pPr>
                       <a:r>
-                        <a:rPr lang="en-US" sz="610" dirty="0">
+                        <a:rPr lang="en-US" sz="780" dirty="0">
                           <a:solidFill>
                             <a:srgbClr val="CFE0EC"/>
                           </a:solidFill>
@@ -14560,7 +14560,7 @@
                         </a:rPr>
                         <a:t>波長</a:t>
                       </a:r>
-                      <a:endParaRPr lang="en-US" sz="920" dirty="0"/>
+                      <a:endParaRPr lang="en-US" sz="1180" dirty="0"/>
                     </a:p>
                   </a:txBody>
                   <a:tcPr marL="63500" marR="63500" marT="38100" marB="38100" anchor="ctr">
@@ -14614,7 +14614,7 @@
                         <a:buNone/>
                       </a:pPr>
                       <a:r>
-                        <a:rPr lang="en-US" sz="720" b="1" dirty="0">
+                        <a:rPr lang="en-US" sz="930" b="1" dirty="0">
                           <a:solidFill>
                             <a:srgbClr val="FFFFFF"/>
                           </a:solidFill>
@@ -14624,14 +14624,14 @@
                         </a:rPr>
                         <a:t>Ai dùng</a:t>
                       </a:r>
-                      <a:endParaRPr lang="en-US" sz="920" dirty="0"/>
+                      <a:endParaRPr lang="en-US" sz="1180" dirty="0"/>
                     </a:p>
                     <a:p>
                       <a:pPr algn="l" indent="0" marL="0">
                         <a:buNone/>
                       </a:pPr>
                       <a:r>
-                        <a:rPr lang="en-US" sz="610" dirty="0">
+                        <a:rPr lang="en-US" sz="780" dirty="0">
                           <a:solidFill>
                             <a:srgbClr val="CFE0EC"/>
                           </a:solidFill>
@@ -14641,7 +14641,7 @@
                         </a:rPr>
                         <a:t>誰在用</a:t>
                       </a:r>
-                      <a:endParaRPr lang="en-US" sz="920" dirty="0"/>
+                      <a:endParaRPr lang="en-US" sz="1180" dirty="0"/>
                     </a:p>
                   </a:txBody>
                   <a:tcPr marL="63500" marR="63500" marT="38100" marB="38100" anchor="ctr">
@@ -14695,7 +14695,7 @@
                         <a:buNone/>
                       </a:pPr>
                       <a:r>
-                        <a:rPr lang="en-US" sz="720" b="1" dirty="0">
+                        <a:rPr lang="en-US" sz="930" b="1" dirty="0">
                           <a:solidFill>
                             <a:srgbClr val="FFFFFF"/>
                           </a:solidFill>
@@ -14705,14 +14705,14 @@
                         </a:rPr>
                         <a:t>Được lợi gì</a:t>
                       </a:r>
-                      <a:endParaRPr lang="en-US" sz="920" dirty="0"/>
+                      <a:endParaRPr lang="en-US" sz="1180" dirty="0"/>
                     </a:p>
                     <a:p>
                       <a:pPr algn="l" indent="0" marL="0">
                         <a:buNone/>
                       </a:pPr>
                       <a:r>
-                        <a:rPr lang="en-US" sz="610" dirty="0">
+                        <a:rPr lang="en-US" sz="780" dirty="0">
                           <a:solidFill>
                             <a:srgbClr val="CFE0EC"/>
                           </a:solidFill>
@@ -14722,7 +14722,7 @@
                         </a:rPr>
                         <a:t>好處</a:t>
                       </a:r>
-                      <a:endParaRPr lang="en-US" sz="920" dirty="0"/>
+                      <a:endParaRPr lang="en-US" sz="1180" dirty="0"/>
                     </a:p>
                   </a:txBody>
                   <a:tcPr marL="63500" marR="63500" marT="38100" marB="38100" anchor="ctr">
@@ -14776,7 +14776,7 @@
                         <a:buNone/>
                       </a:pPr>
                       <a:r>
-                        <a:rPr lang="en-US" sz="720" b="1" dirty="0">
+                        <a:rPr lang="en-US" sz="930" b="1" dirty="0">
                           <a:solidFill>
                             <a:srgbClr val="FFFFFF"/>
                           </a:solidFill>
@@ -14786,14 +14786,14 @@
                         </a:rPr>
                         <a:t>Trả giá gì</a:t>
                       </a:r>
-                      <a:endParaRPr lang="en-US" sz="920" dirty="0"/>
+                      <a:endParaRPr lang="en-US" sz="1180" dirty="0"/>
                     </a:p>
                     <a:p>
                       <a:pPr algn="l" indent="0" marL="0">
                         <a:buNone/>
                       </a:pPr>
                       <a:r>
-                        <a:rPr lang="en-US" sz="610" dirty="0">
+                        <a:rPr lang="en-US" sz="780" dirty="0">
                           <a:solidFill>
                             <a:srgbClr val="CFE0EC"/>
                           </a:solidFill>
@@ -14803,7 +14803,7 @@
                         </a:rPr>
                         <a:t>代價</a:t>
                       </a:r>
-                      <a:endParaRPr lang="en-US" sz="920" dirty="0"/>
+                      <a:endParaRPr lang="en-US" sz="1180" dirty="0"/>
                     </a:p>
                   </a:txBody>
                   <a:tcPr marL="63500" marR="63500" marT="38100" marB="38100" anchor="ctr">
@@ -14849,7 +14849,7 @@
                   </a:tcPr>
                 </a:tc>
               </a:tr>
-              <a:tr h="223181">
+              <a:tr h="286947">
                 <a:tc>
                   <a:txBody>
                     <a:bodyPr/>
@@ -14859,7 +14859,7 @@
                         <a:buNone/>
                       </a:pPr>
                       <a:r>
-                        <a:rPr lang="en-US" sz="720" b="1" dirty="0">
+                        <a:rPr lang="en-US" sz="930" b="1" dirty="0">
                           <a:solidFill>
                             <a:srgbClr val="0B1F3A"/>
                           </a:solidFill>
@@ -14869,14 +14869,14 @@
                         </a:rPr>
                         <a:t>905 nm</a:t>
                       </a:r>
-                      <a:endParaRPr lang="en-US" sz="920" dirty="0"/>
+                      <a:endParaRPr lang="en-US" sz="1180" dirty="0"/>
                     </a:p>
                     <a:p>
                       <a:pPr algn="l" indent="0" marL="0">
                         <a:buNone/>
                       </a:pPr>
                       <a:r>
-                        <a:rPr lang="en-US" sz="610" dirty="0">
+                        <a:rPr lang="en-US" sz="780" dirty="0">
                           <a:solidFill>
                             <a:srgbClr val="5F7183"/>
                           </a:solidFill>
@@ -14886,7 +14886,7 @@
                         </a:rPr>
                         <a:t>905 奈米</a:t>
                       </a:r>
-                      <a:endParaRPr lang="en-US" sz="920" dirty="0"/>
+                      <a:endParaRPr lang="en-US" sz="1180" dirty="0"/>
                     </a:p>
                   </a:txBody>
                   <a:tcPr marL="63500" marR="63500" marT="38100" marB="38100" anchor="ctr">
@@ -14937,7 +14937,7 @@
                         <a:buNone/>
                       </a:pPr>
                       <a:r>
-                        <a:rPr lang="en-US" sz="720" dirty="0">
+                        <a:rPr lang="en-US" sz="930" dirty="0">
                           <a:solidFill>
                             <a:srgbClr val="1A2733"/>
                           </a:solidFill>
@@ -14947,14 +14947,14 @@
                         </a:rPr>
                         <a:t>Phổ biến nhất</a:t>
                       </a:r>
-                      <a:endParaRPr lang="en-US" sz="920" dirty="0"/>
+                      <a:endParaRPr lang="en-US" sz="1180" dirty="0"/>
                     </a:p>
                     <a:p>
                       <a:pPr algn="l" indent="0" marL="0">
                         <a:buNone/>
                       </a:pPr>
                       <a:r>
-                        <a:rPr lang="en-US" sz="610" dirty="0">
+                        <a:rPr lang="en-US" sz="780" dirty="0">
                           <a:solidFill>
                             <a:srgbClr val="5F7183"/>
                           </a:solidFill>
@@ -14964,7 +14964,7 @@
                         </a:rPr>
                         <a:t>最常見</a:t>
                       </a:r>
-                      <a:endParaRPr lang="en-US" sz="920" dirty="0"/>
+                      <a:endParaRPr lang="en-US" sz="1180" dirty="0"/>
                     </a:p>
                   </a:txBody>
                   <a:tcPr marL="63500" marR="63500" marT="38100" marB="38100" anchor="ctr">
@@ -15015,7 +15015,7 @@
                         <a:buNone/>
                       </a:pPr>
                       <a:r>
-                        <a:rPr lang="en-US" sz="720" dirty="0">
+                        <a:rPr lang="en-US" sz="930" dirty="0">
                           <a:solidFill>
                             <a:srgbClr val="1A2733"/>
                           </a:solidFill>
@@ -15025,14 +15025,14 @@
                         </a:rPr>
                         <a:t>Cảm biến silic, rẻ</a:t>
                       </a:r>
-                      <a:endParaRPr lang="en-US" sz="920" dirty="0"/>
+                      <a:endParaRPr lang="en-US" sz="1180" dirty="0"/>
                     </a:p>
                     <a:p>
                       <a:pPr algn="l" indent="0" marL="0">
                         <a:buNone/>
                       </a:pPr>
                       <a:r>
-                        <a:rPr lang="en-US" sz="610" dirty="0">
+                        <a:rPr lang="en-US" sz="780" dirty="0">
                           <a:solidFill>
                             <a:srgbClr val="5F7183"/>
                           </a:solidFill>
@@ -15042,7 +15042,7 @@
                         </a:rPr>
                         <a:t>用矽做接收器，便宜</a:t>
                       </a:r>
-                      <a:endParaRPr lang="en-US" sz="920" dirty="0"/>
+                      <a:endParaRPr lang="en-US" sz="1180" dirty="0"/>
                     </a:p>
                   </a:txBody>
                   <a:tcPr marL="63500" marR="63500" marT="38100" marB="38100" anchor="ctr">
@@ -15093,7 +15093,7 @@
                         <a:buNone/>
                       </a:pPr>
                       <a:r>
-                        <a:rPr lang="en-US" sz="720" dirty="0">
+                        <a:rPr lang="en-US" sz="930" dirty="0">
                           <a:solidFill>
                             <a:srgbClr val="1A2733"/>
                           </a:solidFill>
@@ -15103,14 +15103,14 @@
                         </a:rPr>
                         <a:t>Tới võng mạc — công suất bị siết</a:t>
                       </a:r>
-                      <a:endParaRPr lang="en-US" sz="920" dirty="0"/>
+                      <a:endParaRPr lang="en-US" sz="1180" dirty="0"/>
                     </a:p>
                     <a:p>
                       <a:pPr algn="l" indent="0" marL="0">
                         <a:buNone/>
                       </a:pPr>
                       <a:r>
-                        <a:rPr lang="en-US" sz="610" dirty="0">
+                        <a:rPr lang="en-US" sz="780" dirty="0">
                           <a:solidFill>
                             <a:srgbClr val="5F7183"/>
                           </a:solidFill>
@@ -15120,7 +15120,7 @@
                         </a:rPr>
                         <a:t>直達視網膜，功率被壓住</a:t>
                       </a:r>
-                      <a:endParaRPr lang="en-US" sz="920" dirty="0"/>
+                      <a:endParaRPr lang="en-US" sz="1180" dirty="0"/>
                     </a:p>
                   </a:txBody>
                   <a:tcPr marL="63500" marR="63500" marT="38100" marB="38100" anchor="ctr">
@@ -15163,7 +15163,7 @@
                   </a:tcPr>
                 </a:tc>
               </a:tr>
-              <a:tr h="223181">
+              <a:tr h="286947">
                 <a:tc>
                   <a:txBody>
                     <a:bodyPr/>
@@ -15173,7 +15173,7 @@
                         <a:buNone/>
                       </a:pPr>
                       <a:r>
-                        <a:rPr lang="en-US" sz="720" b="1" dirty="0">
+                        <a:rPr lang="en-US" sz="930" b="1" dirty="0">
                           <a:solidFill>
                             <a:srgbClr val="0B1F3A"/>
                           </a:solidFill>
@@ -15183,14 +15183,14 @@
                         </a:rPr>
                         <a:t>865 nm</a:t>
                       </a:r>
-                      <a:endParaRPr lang="en-US" sz="920" dirty="0"/>
+                      <a:endParaRPr lang="en-US" sz="1180" dirty="0"/>
                     </a:p>
                     <a:p>
                       <a:pPr algn="l" indent="0" marL="0">
                         <a:buNone/>
                       </a:pPr>
                       <a:r>
-                        <a:rPr lang="en-US" sz="610" dirty="0">
+                        <a:rPr lang="en-US" sz="780" dirty="0">
                           <a:solidFill>
                             <a:srgbClr val="5F7183"/>
                           </a:solidFill>
@@ -15200,7 +15200,7 @@
                         </a:rPr>
                         <a:t>865 奈米</a:t>
                       </a:r>
-                      <a:endParaRPr lang="en-US" sz="920" dirty="0"/>
+                      <a:endParaRPr lang="en-US" sz="1180" dirty="0"/>
                     </a:p>
                   </a:txBody>
                   <a:tcPr marL="63500" marR="63500" marT="38100" marB="38100" anchor="ctr">
@@ -15251,7 +15251,7 @@
                         <a:buNone/>
                       </a:pPr>
                       <a:r>
-                        <a:rPr lang="en-US" sz="720" dirty="0">
+                        <a:rPr lang="en-US" sz="930" dirty="0">
                           <a:solidFill>
                             <a:srgbClr val="1A2733"/>
                           </a:solidFill>
@@ -15261,14 +15261,14 @@
                         </a:rPr>
                         <a:t>Ouster OS1</a:t>
                       </a:r>
-                      <a:endParaRPr lang="en-US" sz="920" dirty="0"/>
+                      <a:endParaRPr lang="en-US" sz="1180" dirty="0"/>
                     </a:p>
                     <a:p>
                       <a:pPr algn="l" indent="0" marL="0">
                         <a:buNone/>
                       </a:pPr>
                       <a:r>
-                        <a:rPr lang="en-US" sz="610" dirty="0">
+                        <a:rPr lang="en-US" sz="780" dirty="0">
                           <a:solidFill>
                             <a:srgbClr val="5F7183"/>
                           </a:solidFill>
@@ -15278,7 +15278,7 @@
                         </a:rPr>
                         <a:t>Ouster OS1</a:t>
                       </a:r>
-                      <a:endParaRPr lang="en-US" sz="920" dirty="0"/>
+                      <a:endParaRPr lang="en-US" sz="1180" dirty="0"/>
                     </a:p>
                   </a:txBody>
                   <a:tcPr marL="63500" marR="63500" marT="38100" marB="38100" anchor="ctr">
@@ -15329,7 +15329,7 @@
                         <a:buNone/>
                       </a:pPr>
                       <a:r>
-                        <a:rPr lang="en-US" sz="720" dirty="0">
+                        <a:rPr lang="en-US" sz="930" dirty="0">
                           <a:solidFill>
                             <a:srgbClr val="1A2733"/>
                           </a:solidFill>
@@ -15339,14 +15339,14 @@
                         </a:rPr>
                         <a:t>Cùng họ với 905</a:t>
                       </a:r>
-                      <a:endParaRPr lang="en-US" sz="920" dirty="0"/>
+                      <a:endParaRPr lang="en-US" sz="1180" dirty="0"/>
                     </a:p>
                     <a:p>
                       <a:pPr algn="l" indent="0" marL="0">
                         <a:buNone/>
                       </a:pPr>
                       <a:r>
-                        <a:rPr lang="en-US" sz="610" dirty="0">
+                        <a:rPr lang="en-US" sz="780" dirty="0">
                           <a:solidFill>
                             <a:srgbClr val="5F7183"/>
                           </a:solidFill>
@@ -15356,7 +15356,7 @@
                         </a:rPr>
                         <a:t>跟 905 同一類</a:t>
                       </a:r>
-                      <a:endParaRPr lang="en-US" sz="920" dirty="0"/>
+                      <a:endParaRPr lang="en-US" sz="1180" dirty="0"/>
                     </a:p>
                   </a:txBody>
                   <a:tcPr marL="63500" marR="63500" marT="38100" marB="38100" anchor="ctr">
@@ -15407,7 +15407,7 @@
                         <a:buNone/>
                       </a:pPr>
                       <a:r>
-                        <a:rPr lang="en-US" sz="720" dirty="0">
+                        <a:rPr lang="en-US" sz="930" dirty="0">
                           <a:solidFill>
                             <a:srgbClr val="1A2733"/>
                           </a:solidFill>
@@ -15417,14 +15417,14 @@
                         </a:rPr>
                         <a:t>Giống trên</a:t>
                       </a:r>
-                      <a:endParaRPr lang="en-US" sz="920" dirty="0"/>
+                      <a:endParaRPr lang="en-US" sz="1180" dirty="0"/>
                     </a:p>
                     <a:p>
                       <a:pPr algn="l" indent="0" marL="0">
                         <a:buNone/>
                       </a:pPr>
                       <a:r>
-                        <a:rPr lang="en-US" sz="610" dirty="0">
+                        <a:rPr lang="en-US" sz="780" dirty="0">
                           <a:solidFill>
                             <a:srgbClr val="5F7183"/>
                           </a:solidFill>
@@ -15434,7 +15434,7 @@
                         </a:rPr>
                         <a:t>同上</a:t>
                       </a:r>
-                      <a:endParaRPr lang="en-US" sz="920" dirty="0"/>
+                      <a:endParaRPr lang="en-US" sz="1180" dirty="0"/>
                     </a:p>
                   </a:txBody>
                   <a:tcPr marL="63500" marR="63500" marT="38100" marB="38100" anchor="ctr">
@@ -15477,7 +15477,7 @@
                   </a:tcPr>
                 </a:tc>
               </a:tr>
-              <a:tr h="223181">
+              <a:tr h="286947">
                 <a:tc>
                   <a:txBody>
                     <a:bodyPr/>
@@ -15487,7 +15487,7 @@
                         <a:buNone/>
                       </a:pPr>
                       <a:r>
-                        <a:rPr lang="en-US" sz="720" b="1" dirty="0">
+                        <a:rPr lang="en-US" sz="930" b="1" dirty="0">
                           <a:solidFill>
                             <a:srgbClr val="0B1F3A"/>
                           </a:solidFill>
@@ -15497,14 +15497,14 @@
                         </a:rPr>
                         <a:t>1550 nm</a:t>
                       </a:r>
-                      <a:endParaRPr lang="en-US" sz="920" dirty="0"/>
+                      <a:endParaRPr lang="en-US" sz="1180" dirty="0"/>
                     </a:p>
                     <a:p>
                       <a:pPr algn="l" indent="0" marL="0">
                         <a:buNone/>
                       </a:pPr>
                       <a:r>
-                        <a:rPr lang="en-US" sz="610" dirty="0">
+                        <a:rPr lang="en-US" sz="780" dirty="0">
                           <a:solidFill>
                             <a:srgbClr val="5F7183"/>
                           </a:solidFill>
@@ -15514,7 +15514,7 @@
                         </a:rPr>
                         <a:t>1550 奈米</a:t>
                       </a:r>
-                      <a:endParaRPr lang="en-US" sz="920" dirty="0"/>
+                      <a:endParaRPr lang="en-US" sz="1180" dirty="0"/>
                     </a:p>
                   </a:txBody>
                   <a:tcPr marL="63500" marR="63500" marT="38100" marB="38100" anchor="ctr">
@@ -15565,7 +15565,7 @@
                         <a:buNone/>
                       </a:pPr>
                       <a:r>
-                        <a:rPr lang="en-US" sz="720" dirty="0">
+                        <a:rPr lang="en-US" sz="930" dirty="0">
                           <a:solidFill>
                             <a:srgbClr val="1A2733"/>
                           </a:solidFill>
@@ -15575,14 +15575,14 @@
                         </a:rPr>
                         <a:t>Lidar tầm xa cao cấp</a:t>
                       </a:r>
-                      <a:endParaRPr lang="en-US" sz="920" dirty="0"/>
+                      <a:endParaRPr lang="en-US" sz="1180" dirty="0"/>
                     </a:p>
                     <a:p>
                       <a:pPr algn="l" indent="0" marL="0">
                         <a:buNone/>
                       </a:pPr>
                       <a:r>
-                        <a:rPr lang="en-US" sz="610" dirty="0">
+                        <a:rPr lang="en-US" sz="780" dirty="0">
                           <a:solidFill>
                             <a:srgbClr val="5F7183"/>
                           </a:solidFill>
@@ -15592,7 +15592,7 @@
                         </a:rPr>
                         <a:t>高階長距光達</a:t>
                       </a:r>
-                      <a:endParaRPr lang="en-US" sz="920" dirty="0"/>
+                      <a:endParaRPr lang="en-US" sz="1180" dirty="0"/>
                     </a:p>
                   </a:txBody>
                   <a:tcPr marL="63500" marR="63500" marT="38100" marB="38100" anchor="ctr">
@@ -15643,7 +15643,7 @@
                         <a:buNone/>
                       </a:pPr>
                       <a:r>
-                        <a:rPr lang="en-US" sz="720" dirty="0">
+                        <a:rPr lang="en-US" sz="930" dirty="0">
                           <a:solidFill>
                             <a:srgbClr val="1A2733"/>
                           </a:solidFill>
@@ -15653,14 +15653,14 @@
                         </a:rPr>
                         <a:t>Bị nước trong mắt hấp thụ → bắn mạnh hơn hàng chục lần → nhìn xa hơn</a:t>
                       </a:r>
-                      <a:endParaRPr lang="en-US" sz="920" dirty="0"/>
+                      <a:endParaRPr lang="en-US" sz="1180" dirty="0"/>
                     </a:p>
                     <a:p>
                       <a:pPr algn="l" indent="0" marL="0">
                         <a:buNone/>
                       </a:pPr>
                       <a:r>
-                        <a:rPr lang="en-US" sz="610" dirty="0">
+                        <a:rPr lang="en-US" sz="780" dirty="0">
                           <a:solidFill>
                             <a:srgbClr val="5F7183"/>
                           </a:solidFill>
@@ -15670,7 +15670,7 @@
                         </a:rPr>
                         <a:t>先被眼睛裡的水吸收 → 可以打強幾十倍 → 看得更遠</a:t>
                       </a:r>
-                      <a:endParaRPr lang="en-US" sz="920" dirty="0"/>
+                      <a:endParaRPr lang="en-US" sz="1180" dirty="0"/>
                     </a:p>
                   </a:txBody>
                   <a:tcPr marL="63500" marR="63500" marT="38100" marB="38100" anchor="ctr">
@@ -15721,7 +15721,7 @@
                         <a:buNone/>
                       </a:pPr>
                       <a:r>
-                        <a:rPr lang="en-US" sz="720" dirty="0">
+                        <a:rPr lang="en-US" sz="930" dirty="0">
                           <a:solidFill>
                             <a:srgbClr val="1A2733"/>
                           </a:solidFill>
@@ -15731,14 +15731,14 @@
                         </a:rPr>
                         <a:t>Cảm biến InGaAs, đắt hơn nhiều</a:t>
                       </a:r>
-                      <a:endParaRPr lang="en-US" sz="920" dirty="0"/>
+                      <a:endParaRPr lang="en-US" sz="1180" dirty="0"/>
                     </a:p>
                     <a:p>
                       <a:pPr algn="l" indent="0" marL="0">
                         <a:buNone/>
                       </a:pPr>
                       <a:r>
-                        <a:rPr lang="en-US" sz="610" dirty="0">
+                        <a:rPr lang="en-US" sz="780" dirty="0">
                           <a:solidFill>
                             <a:srgbClr val="5F7183"/>
                           </a:solidFill>
@@ -15748,7 +15748,7 @@
                         </a:rPr>
                         <a:t>要用銦鎵砷接收器，貴好幾倍</a:t>
                       </a:r>
-                      <a:endParaRPr lang="en-US" sz="920" dirty="0"/>
+                      <a:endParaRPr lang="en-US" sz="1180" dirty="0"/>
                     </a:p>
                   </a:txBody>
                   <a:tcPr marL="63500" marR="63500" marT="38100" marB="38100" anchor="ctr">
@@ -15803,8 +15803,8 @@
         </p:nvSpPr>
         <p:spPr>
           <a:xfrm>
-            <a:off x="1468391" y="3251730"/>
-            <a:ext cx="6207218" cy="348720"/>
+            <a:off x="581645" y="4180796"/>
+            <a:ext cx="7980709" cy="448354"/>
           </a:xfrm>
           <a:prstGeom prst="rect">
             <a:avLst/>
@@ -15823,7 +15823,7 @@
               <a:buNone/>
             </a:pPr>
             <a:r>
-              <a:rPr lang="en-US" sz="920" b="1" dirty="0">
+              <a:rPr lang="en-US" sz="1180" b="1" dirty="0">
                 <a:solidFill>
                   <a:srgbClr val="007F72"/>
                 </a:solidFill>
@@ -15833,7 +15833,7 @@
               </a:rPr>
               <a:t>Một dòng số, ba chuyện: an toàn, nhìn xa, và giá.</a:t>
             </a:r>
-            <a:endParaRPr lang="en-US" sz="920" dirty="0"/>
+            <a:endParaRPr lang="en-US" sz="1180" dirty="0"/>
           </a:p>
           <a:p>
             <a:pPr indent="0" marL="0">
@@ -15843,7 +15843,7 @@
               <a:buNone/>
             </a:pPr>
             <a:r>
-              <a:rPr lang="en-US" sz="840" dirty="0">
+              <a:rPr lang="en-US" sz="1080" dirty="0">
                 <a:solidFill>
                   <a:srgbClr val="007F72"/>
                 </a:solidFill>
@@ -15853,7 +15853,7 @@
               </a:rPr>
               <a:t>一行數字，背後是三件事：安全、看多遠、多少錢。</a:t>
             </a:r>
-            <a:endParaRPr lang="en-US" sz="920" dirty="0"/>
+            <a:endParaRPr lang="en-US" sz="1180" dirty="0"/>
           </a:p>
         </p:txBody>
       </p:sp>
@@ -15889,8 +15889,8 @@
         </p:nvSpPr>
         <p:spPr>
           <a:xfrm>
-            <a:off x="1168491" y="97642"/>
-            <a:ext cx="627696" cy="195283"/>
+            <a:off x="196060" y="125539"/>
+            <a:ext cx="807038" cy="251078"/>
           </a:xfrm>
           <a:prstGeom prst="rect">
             <a:avLst/>
@@ -15906,7 +15906,7 @@
               <a:buNone/>
             </a:pPr>
             <a:r>
-              <a:rPr lang="en-US" sz="690" dirty="0">
+              <a:rPr lang="en-US" sz="880" dirty="0">
                 <a:solidFill>
                   <a:srgbClr val="5F7183"/>
                 </a:solidFill>
@@ -15916,7 +15916,7 @@
               </a:rPr>
               <a:t>7 / 14</a:t>
             </a:r>
-            <a:endParaRPr lang="en-US" sz="690" dirty="0"/>
+            <a:endParaRPr lang="en-US" sz="880" dirty="0"/>
           </a:p>
         </p:txBody>
       </p:sp>
@@ -15928,8 +15928,8 @@
         </p:nvSpPr>
         <p:spPr>
           <a:xfrm>
-            <a:off x="1817111" y="97642"/>
-            <a:ext cx="1534369" cy="195283"/>
+            <a:off x="1030000" y="125539"/>
+            <a:ext cx="1972760" cy="251078"/>
           </a:xfrm>
           <a:prstGeom prst="rect">
             <a:avLst/>
@@ -15945,7 +15945,7 @@
               <a:buNone/>
             </a:pPr>
             <a:r>
-              <a:rPr lang="en-US" sz="690" dirty="0">
+              <a:rPr lang="en-US" sz="880" dirty="0">
                 <a:solidFill>
                   <a:srgbClr val="5F7183"/>
                 </a:solidFill>
@@ -15955,7 +15955,7 @@
               </a:rPr>
               <a:t>Tiết 2 · 第 2 節</a:t>
             </a:r>
-            <a:endParaRPr lang="en-US" sz="690" dirty="0"/>
+            <a:endParaRPr lang="en-US" sz="880" dirty="0"/>
           </a:p>
         </p:txBody>
       </p:sp>
@@ -15978,7 +15978,7 @@
       </p:nvGrpSpPr>
       <p:grpSpPr>
         <a:xfrm>
-          <a:off x="942514" y="0"/>
+          <a:off x="0" y="0"/>
           <a:ext cx="1" cy="1"/>
           <a:chOff x="0" y="0"/>
           <a:chExt cx="0" cy="0"/>
@@ -15992,8 +15992,8 @@
         </p:nvSpPr>
         <p:spPr>
           <a:xfrm>
-            <a:off x="1341758" y="333913"/>
-            <a:ext cx="6460485" cy="217769"/>
+            <a:off x="502920" y="420624"/>
+            <a:ext cx="8138160" cy="274320"/>
           </a:xfrm>
           <a:prstGeom prst="rect">
             <a:avLst/>
@@ -16009,7 +16009,7 @@
               <a:buNone/>
             </a:pPr>
             <a:r>
-              <a:rPr lang="en-US" sz="990" b="1" dirty="0">
+              <a:rPr lang="en-US" sz="1250" b="1" dirty="0">
                 <a:solidFill>
                   <a:srgbClr val="007F72"/>
                 </a:solidFill>
@@ -16019,7 +16019,7 @@
               </a:rPr>
               <a:t>An toàn mắt · 眼睛安全</a:t>
             </a:r>
-            <a:endParaRPr lang="en-US" sz="990" dirty="0"/>
+            <a:endParaRPr lang="en-US" sz="1250" dirty="0"/>
           </a:p>
         </p:txBody>
       </p:sp>
@@ -16031,8 +16031,8 @@
         </p:nvSpPr>
         <p:spPr>
           <a:xfrm>
-            <a:off x="1341758" y="874706"/>
-            <a:ext cx="1959922" cy="1996217"/>
+            <a:off x="502920" y="1101852"/>
+            <a:ext cx="2468880" cy="2514600"/>
           </a:xfrm>
           <a:prstGeom prst="roundRect">
             <a:avLst>
@@ -16058,8 +16058,8 @@
         </p:nvSpPr>
         <p:spPr>
           <a:xfrm flipV="1">
-            <a:off x="1724451" y="1002988"/>
-            <a:ext cx="966041" cy="869827"/>
+            <a:off x="984992" y="1263446"/>
+            <a:ext cx="1216905" cy="1095706"/>
           </a:xfrm>
           <a:prstGeom prst="line">
             <a:avLst/>
@@ -16081,8 +16081,8 @@
         </p:nvSpPr>
         <p:spPr>
           <a:xfrm flipV="1">
-            <a:off x="1724451" y="1262532"/>
-            <a:ext cx="1147776" cy="610283"/>
+            <a:off x="984992" y="1590389"/>
+            <a:ext cx="1445833" cy="768763"/>
           </a:xfrm>
           <a:prstGeom prst="line">
             <a:avLst/>
@@ -16104,8 +16104,8 @@
         </p:nvSpPr>
         <p:spPr>
           <a:xfrm flipV="1">
-            <a:off x="1724451" y="1558332"/>
-            <a:ext cx="1261323" cy="314483"/>
+            <a:off x="984992" y="1963003"/>
+            <a:ext cx="1588867" cy="396149"/>
           </a:xfrm>
           <a:prstGeom prst="line">
             <a:avLst/>
@@ -16127,8 +16127,8 @@
         </p:nvSpPr>
         <p:spPr>
           <a:xfrm>
-            <a:off x="1724451" y="1872815"/>
-            <a:ext cx="1299937" cy="1"/>
+            <a:off x="984992" y="2359152"/>
+            <a:ext cx="1637508" cy="1"/>
           </a:xfrm>
           <a:prstGeom prst="line">
             <a:avLst/>
@@ -16150,8 +16150,8 @@
         </p:nvSpPr>
         <p:spPr>
           <a:xfrm>
-            <a:off x="1724451" y="1872815"/>
-            <a:ext cx="1147776" cy="610283"/>
+            <a:off x="984992" y="2359152"/>
+            <a:ext cx="1445833" cy="768763"/>
           </a:xfrm>
           <a:prstGeom prst="line">
             <a:avLst/>
@@ -16173,8 +16173,8 @@
         </p:nvSpPr>
         <p:spPr>
           <a:xfrm>
-            <a:off x="1724451" y="1872815"/>
-            <a:ext cx="966041" cy="869827"/>
+            <a:off x="984992" y="2359152"/>
+            <a:ext cx="1216905" cy="1095706"/>
           </a:xfrm>
           <a:prstGeom prst="line">
             <a:avLst/>
@@ -16196,8 +16196,8 @@
         </p:nvSpPr>
         <p:spPr>
           <a:xfrm>
-            <a:off x="1662967" y="1811331"/>
-            <a:ext cx="122967" cy="122967"/>
+            <a:off x="907542" y="2281702"/>
+            <a:ext cx="154899" cy="154899"/>
           </a:xfrm>
           <a:prstGeom prst="ellipse">
             <a:avLst/>
@@ -16216,8 +16216,8 @@
         </p:nvSpPr>
         <p:spPr>
           <a:xfrm>
-            <a:off x="2544769" y="2011409"/>
-            <a:ext cx="175667" cy="175667"/>
+            <a:off x="2018333" y="2533737"/>
+            <a:ext cx="221285" cy="221285"/>
           </a:xfrm>
           <a:prstGeom prst="roundRect">
             <a:avLst>
@@ -16238,8 +16238,8 @@
         </p:nvSpPr>
         <p:spPr>
           <a:xfrm>
-            <a:off x="3664629" y="1047093"/>
-            <a:ext cx="4137614" cy="798305"/>
+            <a:off x="3429000" y="1319005"/>
+            <a:ext cx="5212080" cy="1005611"/>
           </a:xfrm>
           <a:prstGeom prst="rect">
             <a:avLst/>
@@ -16258,7 +16258,7 @@
               <a:buNone/>
             </a:pPr>
             <a:r>
-              <a:rPr lang="en-US" sz="1830" b="1" dirty="0">
+              <a:rPr lang="en-US" sz="2300" b="1" dirty="0">
                 <a:solidFill>
                   <a:srgbClr val="0B1F3A"/>
                 </a:solidFill>
@@ -16268,7 +16268,7 @@
               </a:rPr>
               <a:t>Class 1 eye-safe: dòng này không có thì đừng lắp lên xe</a:t>
             </a:r>
-            <a:endParaRPr lang="en-US" sz="1830" dirty="0"/>
+            <a:endParaRPr lang="en-US" sz="2300" dirty="0"/>
           </a:p>
           <a:p>
             <a:pPr indent="0" marL="0">
@@ -16278,7 +16278,7 @@
               <a:buNone/>
             </a:pPr>
             <a:r>
-              <a:rPr lang="en-US" sz="1110" dirty="0">
+              <a:rPr lang="en-US" sz="1400" dirty="0">
                 <a:solidFill>
                   <a:srgbClr val="007F72"/>
                 </a:solidFill>
@@ -16288,7 +16288,7 @@
               </a:rPr>
               <a:t>Class 1 對眼睛安全：沒有這一行就不要裝上車</a:t>
             </a:r>
-            <a:endParaRPr lang="en-US" sz="1830" dirty="0"/>
+            <a:endParaRPr lang="en-US" sz="2300" dirty="0"/>
           </a:p>
         </p:txBody>
       </p:sp>
@@ -16300,8 +16300,8 @@
         </p:nvSpPr>
         <p:spPr>
           <a:xfrm>
-            <a:off x="3664629" y="1917989"/>
-            <a:ext cx="4137614" cy="853137"/>
+            <a:off x="3429000" y="2416057"/>
+            <a:ext cx="5212080" cy="1074682"/>
           </a:xfrm>
           <a:prstGeom prst="rect">
             <a:avLst/>
@@ -16320,7 +16320,7 @@
               <a:buNone/>
             </a:pPr>
             <a:r>
-              <a:rPr lang="en-US" sz="990" dirty="0">
+              <a:rPr lang="en-US" sz="1250" dirty="0">
                 <a:solidFill>
                   <a:srgbClr val="5F7183"/>
                 </a:solidFill>
@@ -16330,7 +16330,7 @@
               </a:rPr>
               <a:t>OS1 ghi «Class 1 eye-safe per IEC/EN 60825-1». Nghĩa là trong mọi điều kiện sử dụng bình thường, nhìn thẳng vào nó cũng không hại mắt.</a:t>
             </a:r>
-            <a:endParaRPr lang="en-US" sz="990" dirty="0"/>
+            <a:endParaRPr lang="en-US" sz="1250" dirty="0"/>
           </a:p>
           <a:p>
             <a:pPr indent="0" marL="0">
@@ -16340,7 +16340,7 @@
               <a:buNone/>
             </a:pPr>
             <a:r>
-              <a:rPr lang="en-US" sz="910" dirty="0">
+              <a:rPr lang="en-US" sz="1150" dirty="0">
                 <a:solidFill>
                   <a:srgbClr val="5F7183"/>
                 </a:solidFill>
@@ -16350,7 +16350,7 @@
               </a:rPr>
               <a:t>OS1 寫「Class 1 eye-safe per IEC/EN 60825-1」。意思是在正常使用的情況下，就算直視它也不會傷到眼睛。</a:t>
             </a:r>
-            <a:endParaRPr lang="en-US" sz="990" dirty="0"/>
+            <a:endParaRPr lang="en-US" sz="1250" dirty="0"/>
           </a:p>
         </p:txBody>
       </p:sp>
@@ -16362,8 +16362,8 @@
         </p:nvSpPr>
         <p:spPr>
           <a:xfrm>
-            <a:off x="1341758" y="3106840"/>
-            <a:ext cx="6460485" cy="493610"/>
+            <a:off x="502920" y="3913632"/>
+            <a:ext cx="8138160" cy="621792"/>
           </a:xfrm>
           <a:prstGeom prst="roundRect">
             <a:avLst>
@@ -16389,8 +16389,8 @@
         </p:nvSpPr>
         <p:spPr>
           <a:xfrm>
-            <a:off x="1486937" y="3164912"/>
-            <a:ext cx="6170126" cy="391984"/>
+            <a:off x="685800" y="3986784"/>
+            <a:ext cx="7772400" cy="493776"/>
           </a:xfrm>
           <a:prstGeom prst="rect">
             <a:avLst/>
@@ -16409,7 +16409,7 @@
               <a:buNone/>
             </a:pPr>
             <a:r>
-              <a:rPr lang="en-US" sz="990" b="1" dirty="0">
+              <a:rPr lang="en-US" sz="1250" b="1" dirty="0">
                 <a:solidFill>
                   <a:srgbClr val="7A4E00"/>
                 </a:solidFill>
@@ -16419,7 +16419,7 @@
               </a:rPr>
               <a:t>Đây không phải quảng cáo — đây là điều kiện để được bán.</a:t>
             </a:r>
-            <a:endParaRPr lang="en-US" sz="990" dirty="0"/>
+            <a:endParaRPr lang="en-US" sz="1250" dirty="0"/>
           </a:p>
           <a:p>
             <a:pPr indent="0" marL="0">
@@ -16429,7 +16429,7 @@
               <a:buNone/>
             </a:pPr>
             <a:r>
-              <a:rPr lang="en-US" sz="910" dirty="0">
+              <a:rPr lang="en-US" sz="1150" dirty="0">
                 <a:solidFill>
                   <a:srgbClr val="7A4E00"/>
                 </a:solidFill>
@@ -16439,7 +16439,7 @@
               </a:rPr>
               <a:t>這不是廣告詞，這是能不能賣的門檻。</a:t>
             </a:r>
-            <a:endParaRPr lang="en-US" sz="990" dirty="0"/>
+            <a:endParaRPr lang="en-US" sz="1250" dirty="0"/>
           </a:p>
         </p:txBody>
       </p:sp>
@@ -16475,8 +16475,8 @@
         </p:nvSpPr>
         <p:spPr>
           <a:xfrm>
-            <a:off x="1029622" y="101626"/>
-            <a:ext cx="653307" cy="203251"/>
+            <a:off x="109728" y="128016"/>
+            <a:ext cx="822960" cy="256032"/>
           </a:xfrm>
           <a:prstGeom prst="rect">
             <a:avLst/>
@@ -16492,7 +16492,7 @@
               <a:buNone/>
             </a:pPr>
             <a:r>
-              <a:rPr lang="en-US" sz="710" dirty="0">
+              <a:rPr lang="en-US" sz="900" dirty="0">
                 <a:solidFill>
                   <a:srgbClr val="5F7183"/>
                 </a:solidFill>
@@ -16502,7 +16502,7 @@
               </a:rPr>
               <a:t>8 / 14</a:t>
             </a:r>
-            <a:endParaRPr lang="en-US" sz="710" dirty="0"/>
+            <a:endParaRPr lang="en-US" sz="900" dirty="0"/>
           </a:p>
         </p:txBody>
       </p:sp>
@@ -16514,8 +16514,8 @@
         </p:nvSpPr>
         <p:spPr>
           <a:xfrm>
-            <a:off x="1704706" y="101626"/>
-            <a:ext cx="1596974" cy="203251"/>
+            <a:off x="960120" y="128016"/>
+            <a:ext cx="2011680" cy="256032"/>
           </a:xfrm>
           <a:prstGeom prst="rect">
             <a:avLst/>
@@ -16531,7 +16531,7 @@
               <a:buNone/>
             </a:pPr>
             <a:r>
-              <a:rPr lang="en-US" sz="710" dirty="0">
+              <a:rPr lang="en-US" sz="900" dirty="0">
                 <a:solidFill>
                   <a:srgbClr val="5F7183"/>
                 </a:solidFill>
@@ -16541,7 +16541,7 @@
               </a:rPr>
               <a:t>Tiết 2 · 第 2 節</a:t>
             </a:r>
-            <a:endParaRPr lang="en-US" sz="710" dirty="0"/>
+            <a:endParaRPr lang="en-US" sz="900" dirty="0"/>
           </a:p>
         </p:txBody>
       </p:sp>
@@ -16564,7 +16564,7 @@
       </p:nvGrpSpPr>
       <p:grpSpPr>
         <a:xfrm>
-          <a:off x="942514" y="0"/>
+          <a:off x="0" y="0"/>
           <a:ext cx="1" cy="1"/>
           <a:chOff x="0" y="0"/>
           <a:chExt cx="0" cy="0"/>
@@ -16578,8 +16578,8 @@
         </p:nvSpPr>
         <p:spPr>
           <a:xfrm>
-            <a:off x="1341758" y="333913"/>
-            <a:ext cx="6460485" cy="217769"/>
+            <a:off x="502920" y="420624"/>
+            <a:ext cx="8138160" cy="274320"/>
           </a:xfrm>
           <a:prstGeom prst="rect">
             <a:avLst/>
@@ -16595,7 +16595,7 @@
               <a:buNone/>
             </a:pPr>
             <a:r>
-              <a:rPr lang="en-US" sz="990" b="1" dirty="0">
+              <a:rPr lang="en-US" sz="1250" b="1" dirty="0">
                 <a:solidFill>
                   <a:srgbClr val="007F72"/>
                 </a:solidFill>
@@ -16605,7 +16605,7 @@
               </a:rPr>
               <a:t>Số lần phản hồi · 回波次數</a:t>
             </a:r>
-            <a:endParaRPr lang="en-US" sz="990" dirty="0"/>
+            <a:endParaRPr lang="en-US" sz="1250" dirty="0"/>
           </a:p>
         </p:txBody>
       </p:sp>
@@ -16617,8 +16617,8 @@
         </p:nvSpPr>
         <p:spPr>
           <a:xfrm>
-            <a:off x="1341758" y="874706"/>
-            <a:ext cx="1959922" cy="1996217"/>
+            <a:off x="502920" y="1101852"/>
+            <a:ext cx="2468880" cy="2514600"/>
           </a:xfrm>
           <a:prstGeom prst="roundRect">
             <a:avLst>
@@ -16644,8 +16644,8 @@
         </p:nvSpPr>
         <p:spPr>
           <a:xfrm flipH="1" flipV="1">
-            <a:off x="1986350" y="1022825"/>
-            <a:ext cx="335369" cy="497204"/>
+            <a:off x="1314902" y="1288435"/>
+            <a:ext cx="422458" cy="626319"/>
           </a:xfrm>
           <a:prstGeom prst="line">
             <a:avLst/>
@@ -16667,8 +16667,8 @@
         </p:nvSpPr>
         <p:spPr>
           <a:xfrm flipH="1" flipV="1">
-            <a:off x="2146373" y="946498"/>
-            <a:ext cx="175346" cy="573531"/>
+            <a:off x="1516480" y="1192287"/>
+            <a:ext cx="220880" cy="722467"/>
           </a:xfrm>
           <a:prstGeom prst="line">
             <a:avLst/>
@@ -16690,8 +16690,8 @@
         </p:nvSpPr>
         <p:spPr>
           <a:xfrm flipV="1">
-            <a:off x="2321719" y="920292"/>
-            <a:ext cx="1" cy="599736"/>
+            <a:off x="1737360" y="1159276"/>
+            <a:ext cx="1" cy="755477"/>
           </a:xfrm>
           <a:prstGeom prst="line">
             <a:avLst/>
@@ -16713,8 +16713,8 @@
         </p:nvSpPr>
         <p:spPr>
           <a:xfrm flipV="1">
-            <a:off x="2321719" y="946498"/>
-            <a:ext cx="175346" cy="573531"/>
+            <a:off x="1737360" y="1192287"/>
+            <a:ext cx="220880" cy="722467"/>
           </a:xfrm>
           <a:prstGeom prst="line">
             <a:avLst/>
@@ -16736,8 +16736,8 @@
         </p:nvSpPr>
         <p:spPr>
           <a:xfrm flipV="1">
-            <a:off x="2321719" y="1022825"/>
-            <a:ext cx="335369" cy="497204"/>
+            <a:off x="1737360" y="1288435"/>
+            <a:ext cx="422458" cy="626319"/>
           </a:xfrm>
           <a:prstGeom prst="line">
             <a:avLst/>
@@ -16759,8 +16759,8 @@
         </p:nvSpPr>
         <p:spPr>
           <a:xfrm>
-            <a:off x="2272532" y="1470842"/>
-            <a:ext cx="98373" cy="98373"/>
+            <a:off x="1675400" y="1852794"/>
+            <a:ext cx="123919" cy="123919"/>
           </a:xfrm>
           <a:prstGeom prst="ellipse">
             <a:avLst/>
@@ -16779,8 +16779,8 @@
         </p:nvSpPr>
         <p:spPr>
           <a:xfrm flipH="1" flipV="1">
-            <a:off x="1735088" y="2242023"/>
-            <a:ext cx="586630" cy="124693"/>
+            <a:off x="998392" y="2824237"/>
+            <a:ext cx="738968" cy="157073"/>
           </a:xfrm>
           <a:prstGeom prst="line">
             <a:avLst/>
@@ -16802,8 +16802,8 @@
         </p:nvSpPr>
         <p:spPr>
           <a:xfrm flipH="1" flipV="1">
-            <a:off x="1944293" y="1900633"/>
-            <a:ext cx="377426" cy="466083"/>
+            <a:off x="1261923" y="2394194"/>
+            <a:ext cx="475437" cy="587116"/>
           </a:xfrm>
           <a:prstGeom prst="line">
             <a:avLst/>
@@ -16825,8 +16825,8 @@
         </p:nvSpPr>
         <p:spPr>
           <a:xfrm flipV="1">
-            <a:off x="2321719" y="1766979"/>
-            <a:ext cx="1" cy="599736"/>
+            <a:off x="1737360" y="2225832"/>
+            <a:ext cx="1" cy="755477"/>
           </a:xfrm>
           <a:prstGeom prst="line">
             <a:avLst/>
@@ -16848,8 +16848,8 @@
         </p:nvSpPr>
         <p:spPr>
           <a:xfrm flipV="1">
-            <a:off x="2321719" y="1900633"/>
-            <a:ext cx="377426" cy="466083"/>
+            <a:off x="1737360" y="2394194"/>
+            <a:ext cx="475437" cy="587116"/>
           </a:xfrm>
           <a:prstGeom prst="line">
             <a:avLst/>
@@ -16871,8 +16871,8 @@
         </p:nvSpPr>
         <p:spPr>
           <a:xfrm flipV="1">
-            <a:off x="2321719" y="2242023"/>
-            <a:ext cx="586630" cy="124693"/>
+            <a:off x="1737360" y="2824237"/>
+            <a:ext cx="738968" cy="157073"/>
           </a:xfrm>
           <a:prstGeom prst="line">
             <a:avLst/>
@@ -16894,8 +16894,8 @@
         </p:nvSpPr>
         <p:spPr>
           <a:xfrm>
-            <a:off x="2272532" y="2317528"/>
-            <a:ext cx="98373" cy="98373"/>
+            <a:off x="1675400" y="2919350"/>
+            <a:ext cx="123919" cy="123919"/>
           </a:xfrm>
           <a:prstGeom prst="ellipse">
             <a:avLst/>
@@ -16914,8 +16914,8 @@
         </p:nvSpPr>
         <p:spPr>
           <a:xfrm>
-            <a:off x="3664629" y="1047093"/>
-            <a:ext cx="4137614" cy="798305"/>
+            <a:off x="3429000" y="1319005"/>
+            <a:ext cx="5212080" cy="1005611"/>
           </a:xfrm>
           <a:prstGeom prst="rect">
             <a:avLst/>
@@ -16934,7 +16934,7 @@
               <a:buNone/>
             </a:pPr>
             <a:r>
-              <a:rPr lang="en-US" sz="1830" b="1" dirty="0">
+              <a:rPr lang="en-US" sz="2300" b="1" dirty="0">
                 <a:solidFill>
                   <a:srgbClr val="0B1F3A"/>
                 </a:solidFill>
@@ -16944,7 +16944,7 @@
               </a:rPr>
               <a:t>«up to 2 returns»: một tia bắn ra có thể vọng về hai lần</a:t>
             </a:r>
-            <a:endParaRPr lang="en-US" sz="1830" dirty="0"/>
+            <a:endParaRPr lang="en-US" sz="2300" dirty="0"/>
           </a:p>
           <a:p>
             <a:pPr indent="0" marL="0">
@@ -16954,7 +16954,7 @@
               <a:buNone/>
             </a:pPr>
             <a:r>
-              <a:rPr lang="en-US" sz="1110" dirty="0">
+              <a:rPr lang="en-US" sz="1400" dirty="0">
                 <a:solidFill>
                   <a:srgbClr val="007F72"/>
                 </a:solidFill>
@@ -16964,7 +16964,7 @@
               </a:rPr>
               <a:t>「最多兩次回波」：一道雷射射出去，可能彈回來兩次</a:t>
             </a:r>
-            <a:endParaRPr lang="en-US" sz="1830" dirty="0"/>
+            <a:endParaRPr lang="en-US" sz="2300" dirty="0"/>
           </a:p>
         </p:txBody>
       </p:sp>
@@ -16976,8 +16976,8 @@
         </p:nvSpPr>
         <p:spPr>
           <a:xfrm>
-            <a:off x="3664629" y="1917989"/>
-            <a:ext cx="4137614" cy="853137"/>
+            <a:off x="3429000" y="2416057"/>
+            <a:ext cx="5212080" cy="1074682"/>
           </a:xfrm>
           <a:prstGeom prst="rect">
             <a:avLst/>
@@ -16996,7 +16996,7 @@
               <a:buNone/>
             </a:pPr>
             <a:r>
-              <a:rPr lang="en-US" sz="990" dirty="0">
+              <a:rPr lang="en-US" sz="1250" dirty="0">
                 <a:solidFill>
                   <a:srgbClr val="5F7183"/>
                 </a:solidFill>
@@ -17006,7 +17006,7 @@
               </a:rPr>
               <a:t>Tia xuyên qua màn mưa, qua lá cây, qua khói bụi rồi mới chạm vật thật. Nếu cảm biến chỉ nhận một lần vọng, nó có thể coi hạt mưa là vật cản.</a:t>
             </a:r>
-            <a:endParaRPr lang="en-US" sz="990" dirty="0"/>
+            <a:endParaRPr lang="en-US" sz="1250" dirty="0"/>
           </a:p>
           <a:p>
             <a:pPr indent="0" marL="0">
@@ -17016,7 +17016,7 @@
               <a:buNone/>
             </a:pPr>
             <a:r>
-              <a:rPr lang="en-US" sz="910" dirty="0">
+              <a:rPr lang="en-US" sz="1150" dirty="0">
                 <a:solidFill>
                   <a:srgbClr val="5F7183"/>
                 </a:solidFill>
@@ -17026,7 +17026,7 @@
               </a:rPr>
               <a:t>雷射穿過雨幕、樹葉、煙塵，才打到真正的東西。如果感測器只收第一次回波，它可能把雨滴當成障礙物。</a:t>
             </a:r>
-            <a:endParaRPr lang="en-US" sz="990" dirty="0"/>
+            <a:endParaRPr lang="en-US" sz="1250" dirty="0"/>
           </a:p>
         </p:txBody>
       </p:sp>
@@ -17038,8 +17038,8 @@
         </p:nvSpPr>
         <p:spPr>
           <a:xfrm>
-            <a:off x="1341758" y="3106840"/>
-            <a:ext cx="6460485" cy="493610"/>
+            <a:off x="502920" y="3913632"/>
+            <a:ext cx="8138160" cy="621792"/>
           </a:xfrm>
           <a:prstGeom prst="roundRect">
             <a:avLst>
@@ -17065,8 +17065,8 @@
         </p:nvSpPr>
         <p:spPr>
           <a:xfrm>
-            <a:off x="1486937" y="3164912"/>
-            <a:ext cx="6170126" cy="391984"/>
+            <a:off x="685800" y="3986784"/>
+            <a:ext cx="7772400" cy="493776"/>
           </a:xfrm>
           <a:prstGeom prst="rect">
             <a:avLst/>
@@ -17085,7 +17085,7 @@
               <a:buNone/>
             </a:pPr>
             <a:r>
-              <a:rPr lang="en-US" sz="990" b="1" dirty="0">
+              <a:rPr lang="en-US" sz="1250" b="1" dirty="0">
                 <a:solidFill>
                   <a:srgbClr val="7A4E00"/>
                 </a:solidFill>
@@ -17095,7 +17095,7 @@
               </a:rPr>
               <a:t>Tuần 3 ta nói «tuyết bay cũng phản xạ» — dòng này chính là cách chữa.</a:t>
             </a:r>
-            <a:endParaRPr lang="en-US" sz="990" dirty="0"/>
+            <a:endParaRPr lang="en-US" sz="1250" dirty="0"/>
           </a:p>
           <a:p>
             <a:pPr indent="0" marL="0">
@@ -17105,7 +17105,7 @@
               <a:buNone/>
             </a:pPr>
             <a:r>
-              <a:rPr lang="en-US" sz="910" dirty="0">
+              <a:rPr lang="en-US" sz="1150" dirty="0">
                 <a:solidFill>
                   <a:srgbClr val="7A4E00"/>
                 </a:solidFill>
@@ -17115,7 +17115,7 @@
               </a:rPr>
               <a:t>第三週講過「飄著的雪也會反射」——這一行就是解法。</a:t>
             </a:r>
-            <a:endParaRPr lang="en-US" sz="990" dirty="0"/>
+            <a:endParaRPr lang="en-US" sz="1250" dirty="0"/>
           </a:p>
         </p:txBody>
       </p:sp>
@@ -17151,8 +17151,8 @@
         </p:nvSpPr>
         <p:spPr>
           <a:xfrm>
-            <a:off x="1029622" y="101626"/>
-            <a:ext cx="653307" cy="203251"/>
+            <a:off x="109728" y="128016"/>
+            <a:ext cx="822960" cy="256032"/>
           </a:xfrm>
           <a:prstGeom prst="rect">
             <a:avLst/>
@@ -17168,7 +17168,7 @@
               <a:buNone/>
             </a:pPr>
             <a:r>
-              <a:rPr lang="en-US" sz="710" dirty="0">
+              <a:rPr lang="en-US" sz="900" dirty="0">
                 <a:solidFill>
                   <a:srgbClr val="5F7183"/>
                 </a:solidFill>
@@ -17178,7 +17178,7 @@
               </a:rPr>
               <a:t>9 / 14</a:t>
             </a:r>
-            <a:endParaRPr lang="en-US" sz="710" dirty="0"/>
+            <a:endParaRPr lang="en-US" sz="900" dirty="0"/>
           </a:p>
         </p:txBody>
       </p:sp>
@@ -17190,8 +17190,8 @@
         </p:nvSpPr>
         <p:spPr>
           <a:xfrm>
-            <a:off x="1704706" y="101626"/>
-            <a:ext cx="1596974" cy="203251"/>
+            <a:off x="960120" y="128016"/>
+            <a:ext cx="2011680" cy="256032"/>
           </a:xfrm>
           <a:prstGeom prst="rect">
             <a:avLst/>
@@ -17207,7 +17207,7 @@
               <a:buNone/>
             </a:pPr>
             <a:r>
-              <a:rPr lang="en-US" sz="710" dirty="0">
+              <a:rPr lang="en-US" sz="900" dirty="0">
                 <a:solidFill>
                   <a:srgbClr val="5F7183"/>
                 </a:solidFill>
@@ -17217,7 +17217,7 @@
               </a:rPr>
               <a:t>Tiết 2 · 第 2 節</a:t>
             </a:r>
-            <a:endParaRPr lang="en-US" sz="710" dirty="0"/>
+            <a:endParaRPr lang="en-US" sz="900" dirty="0"/>
           </a:p>
         </p:txBody>
       </p:sp>

--- a/第五週(10-08)/第五週_第2節_簡報.pptx
+++ b/第五週(10-08)/第五週_第2節_簡報.pptx
@@ -2707,7 +2707,7 @@
                 <a:ea typeface="Arial Unicode MS"/>
                 <a:cs typeface="Arial Unicode MS"/>
               </a:rPr>
-              <a:t>圈時間差乘上車速算出來的那個距離，那就是不同步的代價。
+              <a:t>圈上面算出來的 50 毫秒與半公尺，再指圖裡 Additional Programmability 的 Multi-sensor phase lock。
 </a:t>
             </a:r>
           </a:p>
@@ -6887,7 +6887,7 @@
                 <a:ea typeface="Arial Unicode MS"/>
                 <a:cs typeface="Arial Unicode MS"/>
               </a:rPr>
-              <a:t>圈「Class 1」那幾個字。這是安全底線，語氣要重。
+              <a:t>在圖上圈 Laser Product Class 那一行的 Class 1 與 IEC/EN 60825-1，再圈下一行的 865 nm。語氣要重。
 </a:t>
             </a:r>
           </a:p>
@@ -7415,7 +7415,7 @@
                 <a:ea typeface="Arial Unicode MS"/>
                 <a:cs typeface="Arial Unicode MS"/>
               </a:rPr>
-              <a:t>圈示意圖上第一次與第二次回波的兩個點。
+              <a:t>在圖上圈 # of Returns 的 up to 2，再圈 Return Order 那一行。
 </a:t>
             </a:r>
           </a:p>
@@ -10863,22 +10863,146 @@
       </p:sp>
       <p:sp>
         <p:nvSpPr>
-          <p:cNvPr id="3" name="Shape 1"/>
+          <p:cNvPr id="3" name="Text 1"/>
+          <p:cNvSpPr txBox="1"/>
+          <p:nvPr/>
+        </p:nvSpPr>
+        <p:spPr>
+          <a:xfrm>
+            <a:off x="502920" y="1103050"/>
+            <a:ext cx="8138160" cy="563762"/>
+          </a:xfrm>
+          <a:prstGeom prst="rect">
+            <a:avLst/>
+          </a:prstGeom>
+          <a:noFill/>
+          <a:ln/>
+        </p:spPr>
+        <p:txBody>
+          <a:bodyPr wrap="square" lIns="0" tIns="0" rIns="0" bIns="0" rtlCol="0" anchor="t"/>
+          <a:lstStyle/>
+          <a:p>
+            <a:pPr indent="0" marL="0">
+              <a:lnSpc>
+                <a:spcPct val="120000"/>
+              </a:lnSpc>
+              <a:buNone/>
+            </a:pPr>
+            <a:r>
+              <a:rPr lang="en-US" sz="1900" b="1" dirty="0">
+                <a:solidFill>
+                  <a:srgbClr val="0B1F3A"/>
+                </a:solidFill>
+                <a:latin typeface="Arial" pitchFamily="34" charset="0"/>
+                <a:ea typeface="Arial" pitchFamily="34" charset="-122"/>
+                <a:cs typeface="Arial" pitchFamily="34" charset="-120"/>
+              </a:rPr>
+              <a:t>Đồng bộ thời gian: hai con mắt phải nhìn cùng một khoảnh khắc</a:t>
+            </a:r>
+            <a:endParaRPr lang="en-US" sz="1900" dirty="0"/>
+          </a:p>
+          <a:p>
+            <a:pPr indent="0" marL="0">
+              <a:lnSpc>
+                <a:spcPct val="120000"/>
+              </a:lnSpc>
+              <a:buNone/>
+            </a:pPr>
+            <a:r>
+              <a:rPr lang="en-US" sz="1200" dirty="0">
+                <a:solidFill>
+                  <a:srgbClr val="007F72"/>
+                </a:solidFill>
+                <a:latin typeface="微軟正黑體" pitchFamily="34" charset="0"/>
+                <a:ea typeface="微軟正黑體" pitchFamily="34" charset="-122"/>
+                <a:cs typeface="微軟正黑體" pitchFamily="34" charset="-120"/>
+              </a:rPr>
+              <a:t>時間同步：兩隻眼睛要看的是同一個瞬間</a:t>
+            </a:r>
+            <a:endParaRPr lang="en-US" sz="1900" dirty="0"/>
+          </a:p>
+        </p:txBody>
+      </p:sp>
+      <p:sp>
+        <p:nvSpPr>
+          <p:cNvPr id="4" name="Text 2"/>
+          <p:cNvSpPr txBox="1"/>
+          <p:nvPr/>
+        </p:nvSpPr>
+        <p:spPr>
+          <a:xfrm>
+            <a:off x="502920" y="1758252"/>
+            <a:ext cx="8138160" cy="684636"/>
+          </a:xfrm>
+          <a:prstGeom prst="rect">
+            <a:avLst/>
+          </a:prstGeom>
+          <a:noFill/>
+          <a:ln/>
+        </p:spPr>
+        <p:txBody>
+          <a:bodyPr wrap="square" lIns="0" tIns="0" rIns="0" bIns="0" rtlCol="0" anchor="t"/>
+          <a:lstStyle/>
+          <a:p>
+            <a:pPr indent="0" marL="0">
+              <a:lnSpc>
+                <a:spcPct val="128000"/>
+              </a:lnSpc>
+              <a:buNone/>
+            </a:pPr>
+            <a:r>
+              <a:rPr lang="en-US" sz="1250" dirty="0">
+                <a:solidFill>
+                  <a:srgbClr val="5F7183"/>
+                </a:solidFill>
+                <a:latin typeface="Arial" pitchFamily="34" charset="0"/>
+                <a:ea typeface="Arial" pitchFamily="34" charset="-122"/>
+                <a:cs typeface="Arial" pitchFamily="34" charset="-120"/>
+              </a:rPr>
+              <a:t>Lidar 10 Hz, camera 60 fps. Không có dấu thời gian chung thì lệch tới 50 ms — 40 km/h là hơn nửa mét.</a:t>
+            </a:r>
+            <a:endParaRPr lang="en-US" sz="1250" dirty="0"/>
+          </a:p>
+          <a:p>
+            <a:pPr indent="0" marL="0">
+              <a:lnSpc>
+                <a:spcPct val="128000"/>
+              </a:lnSpc>
+              <a:buNone/>
+            </a:pPr>
+            <a:r>
+              <a:rPr lang="en-US" sz="1150" dirty="0">
+                <a:solidFill>
+                  <a:srgbClr val="5F7183"/>
+                </a:solidFill>
+                <a:latin typeface="微軟正黑體" pitchFamily="34" charset="0"/>
+                <a:ea typeface="微軟正黑體" pitchFamily="34" charset="-122"/>
+                <a:cs typeface="微軟正黑體" pitchFamily="34" charset="-120"/>
+              </a:rPr>
+              <a:t>光達 10 Hz、相機 60 fps。沒有共同時間戳，兩邊可能差 50 毫秒——時速 40 就超過半公尺。</a:t>
+            </a:r>
+            <a:endParaRPr lang="en-US" sz="1250" dirty="0"/>
+          </a:p>
+        </p:txBody>
+      </p:sp>
+      <p:sp>
+        <p:nvSpPr>
+          <p:cNvPr id="5" name="Shape 3"/>
           <p:cNvSpPr/>
           <p:nvPr/>
         </p:nvSpPr>
         <p:spPr>
           <a:xfrm>
-            <a:off x="502920" y="1101852"/>
-            <a:ext cx="2468880" cy="2514600"/>
+            <a:off x="502920" y="2668114"/>
+            <a:ext cx="8138160" cy="1208942"/>
           </a:xfrm>
           <a:prstGeom prst="roundRect">
             <a:avLst>
-              <a:gd name="adj" fmla="val 4444"/>
+              <a:gd name="adj" fmla="val 6807"/>
             </a:avLst>
           </a:prstGeom>
           <a:solidFill>
-            <a:srgbClr val="F4F7FA"/>
+            <a:srgbClr val="FFFFFF"/>
           </a:solidFill>
           <a:ln w="12700">
             <a:solidFill>
@@ -10888,124 +11012,40 @@
           </a:ln>
         </p:spPr>
       </p:sp>
-      <p:sp>
-        <p:nvSpPr>
-          <p:cNvPr id="4" name="Shape 2"/>
-          <p:cNvSpPr/>
-          <p:nvPr/>
-        </p:nvSpPr>
-        <p:spPr>
-          <a:xfrm>
-            <a:off x="1493947" y="2203613"/>
-            <a:ext cx="929396" cy="755477"/>
-          </a:xfrm>
-          <a:prstGeom prst="roundRect">
-            <a:avLst>
-              <a:gd name="adj" fmla="val 6052"/>
-            </a:avLst>
-          </a:prstGeom>
-          <a:solidFill>
-            <a:srgbClr val="C8D3DE"/>
-          </a:solidFill>
-          <a:ln w="15240">
-            <a:solidFill>
-              <a:srgbClr val="F4F7FA"/>
-            </a:solidFill>
-            <a:prstDash val="solid"/>
-          </a:ln>
-        </p:spPr>
-      </p:sp>
-      <p:sp>
-        <p:nvSpPr>
-          <p:cNvPr id="5" name="Shape 3"/>
-          <p:cNvSpPr/>
-          <p:nvPr/>
-        </p:nvSpPr>
-        <p:spPr>
-          <a:xfrm>
-            <a:off x="1339047" y="2048073"/>
-            <a:ext cx="929396" cy="755477"/>
-          </a:xfrm>
-          <a:prstGeom prst="roundRect">
-            <a:avLst>
-              <a:gd name="adj" fmla="val 6052"/>
-            </a:avLst>
-          </a:prstGeom>
-          <a:solidFill>
-            <a:srgbClr val="C8D3DE"/>
-          </a:solidFill>
-          <a:ln w="15240">
-            <a:solidFill>
-              <a:srgbClr val="F4F7FA"/>
-            </a:solidFill>
-            <a:prstDash val="solid"/>
-          </a:ln>
-        </p:spPr>
-      </p:sp>
-      <p:sp>
-        <p:nvSpPr>
-          <p:cNvPr id="6" name="Shape 4"/>
-          <p:cNvSpPr/>
-          <p:nvPr/>
-        </p:nvSpPr>
-        <p:spPr>
-          <a:xfrm>
-            <a:off x="1184148" y="1892534"/>
-            <a:ext cx="929396" cy="755477"/>
-          </a:xfrm>
-          <a:prstGeom prst="roundRect">
-            <a:avLst>
-              <a:gd name="adj" fmla="val 6052"/>
-            </a:avLst>
-          </a:prstGeom>
-          <a:solidFill>
-            <a:srgbClr val="C8D3DE"/>
-          </a:solidFill>
-          <a:ln w="15240">
-            <a:solidFill>
-              <a:srgbClr val="F4F7FA"/>
-            </a:solidFill>
-            <a:prstDash val="solid"/>
-          </a:ln>
-        </p:spPr>
-      </p:sp>
-      <p:sp>
-        <p:nvSpPr>
-          <p:cNvPr id="7" name="Shape 5"/>
-          <p:cNvSpPr/>
-          <p:nvPr/>
-        </p:nvSpPr>
-        <p:spPr>
-          <a:xfrm>
-            <a:off x="1029249" y="1736994"/>
-            <a:ext cx="929396" cy="755477"/>
-          </a:xfrm>
-          <a:prstGeom prst="roundRect">
-            <a:avLst>
-              <a:gd name="adj" fmla="val 6052"/>
-            </a:avLst>
-          </a:prstGeom>
-          <a:solidFill>
-            <a:srgbClr val="8A5A00"/>
-          </a:solidFill>
-          <a:ln w="15240">
-            <a:solidFill>
-              <a:srgbClr val="F4F7FA"/>
-            </a:solidFill>
-            <a:prstDash val="solid"/>
-          </a:ln>
-        </p:spPr>
-      </p:sp>
-      <p:sp>
-        <p:nvSpPr>
-          <p:cNvPr id="8" name="Text 6"/>
+      <p:pic>
+        <p:nvPicPr>
+          <p:cNvPr id="6" name="Image 0" descr="/Users/tsengchenghsun/Class/carClass/Claude outputs/第五週(10-8)/src/img/w5_os1_phase.png">    </p:cNvPr>
+          <p:cNvPicPr>
+            <a:picLocks noChangeAspect="1"/>
+          </p:cNvPicPr>
+          <p:nvPr/>
+        </p:nvPicPr>
+        <p:blipFill>
+          <a:blip r:embed="rId1"/>
+          <a:stretch>
+            <a:fillRect/>
+          </a:stretch>
+        </p:blipFill>
+        <p:spPr>
+          <a:xfrm>
+            <a:off x="576072" y="2759554"/>
+            <a:ext cx="7991856" cy="861470"/>
+          </a:xfrm>
+          <a:prstGeom prst="rect">
+            <a:avLst/>
+          </a:prstGeom>
+        </p:spPr>
+      </p:pic>
+      <p:sp>
+        <p:nvSpPr>
+          <p:cNvPr id="7" name="Text 4"/>
           <p:cNvSpPr txBox="1"/>
           <p:nvPr/>
         </p:nvSpPr>
         <p:spPr>
           <a:xfrm>
-            <a:off x="630936" y="2892430"/>
-            <a:ext cx="2212848" cy="399959"/>
+            <a:off x="576072" y="3657600"/>
+            <a:ext cx="7991856" cy="182880"/>
           </a:xfrm>
           <a:prstGeom prst="rect">
             <a:avLst/>
@@ -11021,147 +11061,23 @@
               <a:buNone/>
             </a:pPr>
             <a:r>
-              <a:rPr lang="en-US" sz="1100" b="1" dirty="0">
-                <a:solidFill>
-                  <a:srgbClr val="8A5A00"/>
+              <a:rPr lang="en-US" sz="700" dirty="0">
+                <a:solidFill>
+                  <a:srgbClr val="5F7183"/>
                 </a:solidFill>
                 <a:latin typeface="Arial" pitchFamily="34" charset="0"/>
                 <a:ea typeface="Arial" pitchFamily="34" charset="-122"/>
                 <a:cs typeface="Arial" pitchFamily="34" charset="-120"/>
               </a:rPr>
-              <a:t>× 10 000</a:t>
-            </a:r>
-            <a:endParaRPr lang="en-US" sz="1100" dirty="0"/>
+              <a:t>Ouster OS1 datasheet, Rev7 / FW 3.2, p.3 · 節錄 · 讀取 2026/10/02</a:t>
+            </a:r>
+            <a:endParaRPr lang="en-US" sz="700" dirty="0"/>
           </a:p>
         </p:txBody>
       </p:sp>
       <p:sp>
         <p:nvSpPr>
-          <p:cNvPr id="9" name="Text 7"/>
-          <p:cNvSpPr txBox="1"/>
-          <p:nvPr/>
-        </p:nvSpPr>
-        <p:spPr>
-          <a:xfrm>
-            <a:off x="3429000" y="1319005"/>
-            <a:ext cx="5212080" cy="1005611"/>
-          </a:xfrm>
-          <a:prstGeom prst="rect">
-            <a:avLst/>
-          </a:prstGeom>
-          <a:noFill/>
-          <a:ln/>
-        </p:spPr>
-        <p:txBody>
-          <a:bodyPr wrap="square" lIns="0" tIns="0" rIns="0" bIns="0" rtlCol="0" anchor="t"/>
-          <a:lstStyle/>
-          <a:p>
-            <a:pPr indent="0" marL="0">
-              <a:lnSpc>
-                <a:spcPct val="120000"/>
-              </a:lnSpc>
-              <a:buNone/>
-            </a:pPr>
-            <a:r>
-              <a:rPr lang="en-US" sz="2300" b="1" dirty="0">
-                <a:solidFill>
-                  <a:srgbClr val="0B1F3A"/>
-                </a:solidFill>
-                <a:latin typeface="Arial" pitchFamily="34" charset="0"/>
-                <a:ea typeface="Arial" pitchFamily="34" charset="-122"/>
-                <a:cs typeface="Arial" pitchFamily="34" charset="-120"/>
-              </a:rPr>
-              <a:t>Đồng bộ thời gian: hai con mắt phải nhìn cùng một khoảnh khắc</a:t>
-            </a:r>
-            <a:endParaRPr lang="en-US" sz="2300" dirty="0"/>
-          </a:p>
-          <a:p>
-            <a:pPr indent="0" marL="0">
-              <a:lnSpc>
-                <a:spcPct val="120000"/>
-              </a:lnSpc>
-              <a:buNone/>
-            </a:pPr>
-            <a:r>
-              <a:rPr lang="en-US" sz="1400" dirty="0">
-                <a:solidFill>
-                  <a:srgbClr val="007F72"/>
-                </a:solidFill>
-                <a:latin typeface="微軟正黑體" pitchFamily="34" charset="0"/>
-                <a:ea typeface="微軟正黑體" pitchFamily="34" charset="-122"/>
-                <a:cs typeface="微軟正黑體" pitchFamily="34" charset="-120"/>
-              </a:rPr>
-              <a:t>時間同步：兩隻眼睛要看的是同一個瞬間</a:t>
-            </a:r>
-            <a:endParaRPr lang="en-US" sz="2300" dirty="0"/>
-          </a:p>
-        </p:txBody>
-      </p:sp>
-      <p:sp>
-        <p:nvSpPr>
-          <p:cNvPr id="10" name="Text 8"/>
-          <p:cNvSpPr txBox="1"/>
-          <p:nvPr/>
-        </p:nvSpPr>
-        <p:spPr>
-          <a:xfrm>
-            <a:off x="3429000" y="2416057"/>
-            <a:ext cx="5212080" cy="1074682"/>
-          </a:xfrm>
-          <a:prstGeom prst="rect">
-            <a:avLst/>
-          </a:prstGeom>
-          <a:noFill/>
-          <a:ln/>
-        </p:spPr>
-        <p:txBody>
-          <a:bodyPr wrap="square" lIns="0" tIns="0" rIns="0" bIns="0" rtlCol="0" anchor="t"/>
-          <a:lstStyle/>
-          <a:p>
-            <a:pPr indent="0" marL="0">
-              <a:lnSpc>
-                <a:spcPct val="128000"/>
-              </a:lnSpc>
-              <a:buNone/>
-            </a:pPr>
-            <a:r>
-              <a:rPr lang="en-US" sz="1250" dirty="0">
-                <a:solidFill>
-                  <a:srgbClr val="5F7183"/>
-                </a:solidFill>
-                <a:latin typeface="Arial" pitchFamily="34" charset="0"/>
-                <a:ea typeface="Arial" pitchFamily="34" charset="-122"/>
-                <a:cs typeface="Arial" pitchFamily="34" charset="-120"/>
-              </a:rPr>
-              <a:t>Lidar 10 Hz, camera 60 fps. Nếu không đóng dấu thời gian chung, khung ảnh và vòng quét có thể lệch nhau tới 50 ms — ở 40 km/h là hơn nửa mét.</a:t>
-            </a:r>
-            <a:endParaRPr lang="en-US" sz="1250" dirty="0"/>
-          </a:p>
-          <a:p>
-            <a:pPr indent="0" marL="0">
-              <a:lnSpc>
-                <a:spcPct val="128000"/>
-              </a:lnSpc>
-              <a:buNone/>
-            </a:pPr>
-            <a:r>
-              <a:rPr lang="en-US" sz="1150" dirty="0">
-                <a:solidFill>
-                  <a:srgbClr val="5F7183"/>
-                </a:solidFill>
-                <a:latin typeface="微軟正黑體" pitchFamily="34" charset="0"/>
-                <a:ea typeface="微軟正黑體" pitchFamily="34" charset="-122"/>
-                <a:cs typeface="微軟正黑體" pitchFamily="34" charset="-120"/>
-              </a:rPr>
-              <a:t>光達 10 Hz、相機 60 fps。如果沒有共同的時間戳，一張畫面和一圈掃描可能差到 50 毫秒——時速 40 就是超過半公尺。</a:t>
-            </a:r>
-            <a:endParaRPr lang="en-US" sz="1250" dirty="0"/>
-          </a:p>
-        </p:txBody>
-      </p:sp>
-      <p:sp>
-        <p:nvSpPr>
-          <p:cNvPr id="11" name="Shape 9"/>
+          <p:cNvPr id="8" name="Shape 5"/>
           <p:cNvSpPr/>
           <p:nvPr/>
         </p:nvSpPr>
@@ -11188,7 +11104,7 @@
       </p:sp>
       <p:sp>
         <p:nvSpPr>
-          <p:cNvPr id="12" name="Text 10"/>
+          <p:cNvPr id="9" name="Text 6"/>
           <p:cNvSpPr txBox="1"/>
           <p:nvPr/>
         </p:nvSpPr>
@@ -11250,14 +11166,14 @@
       </p:sp>
       <p:pic>
         <p:nvPicPr>
-          <p:cNvPr id="14" name="Image 0" descr="/Users/tsengchenghsun/Class/carClass/Claude outputs/第五週(10-8)/src/logo.png">    </p:cNvPr>
+          <p:cNvPr id="11" name="Image 1" descr="/Users/tsengchenghsun/Class/carClass/Claude outputs/第五週(10-8)/src/logo.png">    </p:cNvPr>
           <p:cNvPicPr>
             <a:picLocks noChangeAspect="1"/>
           </p:cNvPicPr>
           <p:nvPr/>
         </p:nvPicPr>
         <p:blipFill>
-          <a:blip r:embed="rId1"/>
+          <a:blip r:embed="rId2"/>
           <a:stretch>
             <a:fillRect/>
           </a:stretch>
@@ -11274,7 +11190,7 @@
       </p:pic>
       <p:sp>
         <p:nvSpPr>
-          <p:cNvPr id="15" name="Text 11"/>
+          <p:cNvPr id="12" name="Text 7"/>
           <p:cNvSpPr txBox="1"/>
           <p:nvPr/>
         </p:nvSpPr>
@@ -11313,7 +11229,7 @@
       </p:sp>
       <p:sp>
         <p:nvSpPr>
-          <p:cNvPr id="16" name="Text 12"/>
+          <p:cNvPr id="13" name="Text 8"/>
           <p:cNvSpPr txBox="1"/>
           <p:nvPr/>
         </p:nvSpPr>
@@ -16025,22 +15941,146 @@
       </p:sp>
       <p:sp>
         <p:nvSpPr>
-          <p:cNvPr id="3" name="Shape 1"/>
+          <p:cNvPr id="3" name="Text 1"/>
+          <p:cNvSpPr txBox="1"/>
+          <p:nvPr/>
+        </p:nvSpPr>
+        <p:spPr>
+          <a:xfrm>
+            <a:off x="502920" y="1178160"/>
+            <a:ext cx="8138160" cy="563762"/>
+          </a:xfrm>
+          <a:prstGeom prst="rect">
+            <a:avLst/>
+          </a:prstGeom>
+          <a:noFill/>
+          <a:ln/>
+        </p:spPr>
+        <p:txBody>
+          <a:bodyPr wrap="square" lIns="0" tIns="0" rIns="0" bIns="0" rtlCol="0" anchor="t"/>
+          <a:lstStyle/>
+          <a:p>
+            <a:pPr indent="0" marL="0">
+              <a:lnSpc>
+                <a:spcPct val="120000"/>
+              </a:lnSpc>
+              <a:buNone/>
+            </a:pPr>
+            <a:r>
+              <a:rPr lang="en-US" sz="1900" b="1" dirty="0">
+                <a:solidFill>
+                  <a:srgbClr val="0B1F3A"/>
+                </a:solidFill>
+                <a:latin typeface="Arial" pitchFamily="34" charset="0"/>
+                <a:ea typeface="Arial" pitchFamily="34" charset="-122"/>
+                <a:cs typeface="Arial" pitchFamily="34" charset="-120"/>
+              </a:rPr>
+              <a:t>Class 1 eye-safe: dòng này không có thì đừng lắp lên xe</a:t>
+            </a:r>
+            <a:endParaRPr lang="en-US" sz="1900" dirty="0"/>
+          </a:p>
+          <a:p>
+            <a:pPr indent="0" marL="0">
+              <a:lnSpc>
+                <a:spcPct val="120000"/>
+              </a:lnSpc>
+              <a:buNone/>
+            </a:pPr>
+            <a:r>
+              <a:rPr lang="en-US" sz="1200" dirty="0">
+                <a:solidFill>
+                  <a:srgbClr val="007F72"/>
+                </a:solidFill>
+                <a:latin typeface="微軟正黑體" pitchFamily="34" charset="0"/>
+                <a:ea typeface="微軟正黑體" pitchFamily="34" charset="-122"/>
+                <a:cs typeface="微軟正黑體" pitchFamily="34" charset="-120"/>
+              </a:rPr>
+              <a:t>Class 1 對眼睛安全：沒有這一行就不要裝上車</a:t>
+            </a:r>
+            <a:endParaRPr lang="en-US" sz="1900" dirty="0"/>
+          </a:p>
+        </p:txBody>
+      </p:sp>
+      <p:sp>
+        <p:nvSpPr>
+          <p:cNvPr id="4" name="Text 2"/>
+          <p:cNvSpPr txBox="1"/>
+          <p:nvPr/>
+        </p:nvSpPr>
+        <p:spPr>
+          <a:xfrm>
+            <a:off x="502920" y="1833362"/>
+            <a:ext cx="8138160" cy="481486"/>
+          </a:xfrm>
+          <a:prstGeom prst="rect">
+            <a:avLst/>
+          </a:prstGeom>
+          <a:noFill/>
+          <a:ln/>
+        </p:spPr>
+        <p:txBody>
+          <a:bodyPr wrap="square" lIns="0" tIns="0" rIns="0" bIns="0" rtlCol="0" anchor="t"/>
+          <a:lstStyle/>
+          <a:p>
+            <a:pPr indent="0" marL="0">
+              <a:lnSpc>
+                <a:spcPct val="128000"/>
+              </a:lnSpc>
+              <a:buNone/>
+            </a:pPr>
+            <a:r>
+              <a:rPr lang="en-US" sz="1250" dirty="0">
+                <a:solidFill>
+                  <a:srgbClr val="5F7183"/>
+                </a:solidFill>
+                <a:latin typeface="Arial" pitchFamily="34" charset="0"/>
+                <a:ea typeface="Arial" pitchFamily="34" charset="-122"/>
+                <a:cs typeface="Arial" pitchFamily="34" charset="-120"/>
+              </a:rPr>
+              <a:t>Nghĩa là dùng bình thường, nhìn thẳng vào nó cũng không hại mắt.</a:t>
+            </a:r>
+            <a:endParaRPr lang="en-US" sz="1250" dirty="0"/>
+          </a:p>
+          <a:p>
+            <a:pPr indent="0" marL="0">
+              <a:lnSpc>
+                <a:spcPct val="128000"/>
+              </a:lnSpc>
+              <a:buNone/>
+            </a:pPr>
+            <a:r>
+              <a:rPr lang="en-US" sz="1150" dirty="0">
+                <a:solidFill>
+                  <a:srgbClr val="5F7183"/>
+                </a:solidFill>
+                <a:latin typeface="微軟正黑體" pitchFamily="34" charset="0"/>
+                <a:ea typeface="微軟正黑體" pitchFamily="34" charset="-122"/>
+                <a:cs typeface="微軟正黑體" pitchFamily="34" charset="-120"/>
+              </a:rPr>
+              <a:t>意思是在正常使用的情況下，就算直視它也不會傷到眼睛。</a:t>
+            </a:r>
+            <a:endParaRPr lang="en-US" sz="1250" dirty="0"/>
+          </a:p>
+        </p:txBody>
+      </p:sp>
+      <p:sp>
+        <p:nvSpPr>
+          <p:cNvPr id="5" name="Shape 3"/>
           <p:cNvSpPr/>
           <p:nvPr/>
         </p:nvSpPr>
         <p:spPr>
           <a:xfrm>
-            <a:off x="502920" y="1101852"/>
-            <a:ext cx="2468880" cy="2514600"/>
+            <a:off x="502920" y="2615184"/>
+            <a:ext cx="8138160" cy="1261872"/>
           </a:xfrm>
           <a:prstGeom prst="roundRect">
             <a:avLst>
-              <a:gd name="adj" fmla="val 4444"/>
+              <a:gd name="adj" fmla="val 6522"/>
             </a:avLst>
           </a:prstGeom>
           <a:solidFill>
-            <a:srgbClr val="F4F7FA"/>
+            <a:srgbClr val="FFFFFF"/>
           </a:solidFill>
           <a:ln w="12700">
             <a:solidFill>
@@ -16050,313 +16090,72 @@
           </a:ln>
         </p:spPr>
       </p:sp>
-      <p:sp>
-        <p:nvSpPr>
-          <p:cNvPr id="4" name="Shape 2"/>
-          <p:cNvSpPr/>
-          <p:nvPr/>
-        </p:nvSpPr>
-        <p:spPr>
-          <a:xfrm flipV="1">
-            <a:off x="984992" y="1263446"/>
-            <a:ext cx="1216905" cy="1095706"/>
-          </a:xfrm>
-          <a:prstGeom prst="line">
-            <a:avLst/>
-          </a:prstGeom>
-          <a:noFill/>
-          <a:ln w="17780">
-            <a:solidFill>
-              <a:srgbClr val="2E6E4E"/>
-            </a:solidFill>
-            <a:prstDash val="solid"/>
-          </a:ln>
-        </p:spPr>
-      </p:sp>
-      <p:sp>
-        <p:nvSpPr>
-          <p:cNvPr id="5" name="Shape 3"/>
-          <p:cNvSpPr/>
-          <p:nvPr/>
-        </p:nvSpPr>
-        <p:spPr>
-          <a:xfrm flipV="1">
-            <a:off x="984992" y="1590389"/>
-            <a:ext cx="1445833" cy="768763"/>
-          </a:xfrm>
-          <a:prstGeom prst="line">
-            <a:avLst/>
-          </a:prstGeom>
-          <a:noFill/>
-          <a:ln w="17780">
-            <a:solidFill>
-              <a:srgbClr val="2E6E4E"/>
-            </a:solidFill>
-            <a:prstDash val="solid"/>
-          </a:ln>
-        </p:spPr>
-      </p:sp>
-      <p:sp>
-        <p:nvSpPr>
-          <p:cNvPr id="6" name="Shape 4"/>
-          <p:cNvSpPr/>
-          <p:nvPr/>
-        </p:nvSpPr>
-        <p:spPr>
-          <a:xfrm flipV="1">
-            <a:off x="984992" y="1963003"/>
-            <a:ext cx="1588867" cy="396149"/>
-          </a:xfrm>
-          <a:prstGeom prst="line">
-            <a:avLst/>
-          </a:prstGeom>
-          <a:noFill/>
-          <a:ln w="17780">
-            <a:solidFill>
-              <a:srgbClr val="2E6E4E"/>
-            </a:solidFill>
-            <a:prstDash val="solid"/>
-          </a:ln>
-        </p:spPr>
-      </p:sp>
-      <p:sp>
-        <p:nvSpPr>
-          <p:cNvPr id="7" name="Shape 5"/>
-          <p:cNvSpPr/>
-          <p:nvPr/>
-        </p:nvSpPr>
-        <p:spPr>
-          <a:xfrm>
-            <a:off x="984992" y="2359152"/>
-            <a:ext cx="1637508" cy="1"/>
-          </a:xfrm>
-          <a:prstGeom prst="line">
-            <a:avLst/>
-          </a:prstGeom>
-          <a:noFill/>
-          <a:ln w="17780">
-            <a:solidFill>
-              <a:srgbClr val="2E6E4E"/>
-            </a:solidFill>
-            <a:prstDash val="solid"/>
-          </a:ln>
-        </p:spPr>
-      </p:sp>
-      <p:sp>
-        <p:nvSpPr>
-          <p:cNvPr id="8" name="Shape 6"/>
-          <p:cNvSpPr/>
-          <p:nvPr/>
-        </p:nvSpPr>
-        <p:spPr>
-          <a:xfrm>
-            <a:off x="984992" y="2359152"/>
-            <a:ext cx="1445833" cy="768763"/>
-          </a:xfrm>
-          <a:prstGeom prst="line">
-            <a:avLst/>
-          </a:prstGeom>
-          <a:noFill/>
-          <a:ln w="17780">
-            <a:solidFill>
-              <a:srgbClr val="2E6E4E"/>
-            </a:solidFill>
-            <a:prstDash val="solid"/>
-          </a:ln>
-        </p:spPr>
-      </p:sp>
-      <p:sp>
-        <p:nvSpPr>
-          <p:cNvPr id="9" name="Shape 7"/>
-          <p:cNvSpPr/>
-          <p:nvPr/>
-        </p:nvSpPr>
-        <p:spPr>
-          <a:xfrm>
-            <a:off x="984992" y="2359152"/>
-            <a:ext cx="1216905" cy="1095706"/>
-          </a:xfrm>
-          <a:prstGeom prst="line">
-            <a:avLst/>
-          </a:prstGeom>
-          <a:noFill/>
-          <a:ln w="17780">
-            <a:solidFill>
-              <a:srgbClr val="2E6E4E"/>
-            </a:solidFill>
-            <a:prstDash val="solid"/>
-          </a:ln>
-        </p:spPr>
-      </p:sp>
-      <p:sp>
-        <p:nvSpPr>
-          <p:cNvPr id="10" name="Shape 8"/>
-          <p:cNvSpPr/>
-          <p:nvPr/>
-        </p:nvSpPr>
-        <p:spPr>
-          <a:xfrm>
-            <a:off x="907542" y="2281702"/>
-            <a:ext cx="154899" cy="154899"/>
-          </a:xfrm>
-          <a:prstGeom prst="ellipse">
-            <a:avLst/>
-          </a:prstGeom>
-          <a:solidFill>
-            <a:srgbClr val="2E6E4E"/>
-          </a:solidFill>
-          <a:ln/>
-        </p:spPr>
-      </p:sp>
-      <p:sp>
-        <p:nvSpPr>
-          <p:cNvPr id="11" name="Shape 9"/>
-          <p:cNvSpPr/>
-          <p:nvPr/>
-        </p:nvSpPr>
-        <p:spPr>
-          <a:xfrm>
-            <a:off x="2018333" y="2533737"/>
-            <a:ext cx="221285" cy="221285"/>
-          </a:xfrm>
-          <a:prstGeom prst="roundRect">
-            <a:avLst>
-              <a:gd name="adj" fmla="val 20000"/>
-            </a:avLst>
-          </a:prstGeom>
-          <a:solidFill>
-            <a:srgbClr val="D9463E"/>
-          </a:solidFill>
-          <a:ln/>
-        </p:spPr>
-      </p:sp>
-      <p:sp>
-        <p:nvSpPr>
-          <p:cNvPr id="12" name="Text 10"/>
-          <p:cNvSpPr txBox="1"/>
-          <p:nvPr/>
-        </p:nvSpPr>
-        <p:spPr>
-          <a:xfrm>
-            <a:off x="3429000" y="1319005"/>
-            <a:ext cx="5212080" cy="1005611"/>
+      <p:pic>
+        <p:nvPicPr>
+          <p:cNvPr id="6" name="Image 0" descr="/Users/tsengchenghsun/Class/carClass/Claude outputs/第五週(10-8)/src/img/w5_os1_laser.png">    </p:cNvPr>
+          <p:cNvPicPr>
+            <a:picLocks noChangeAspect="1"/>
+          </p:cNvPicPr>
+          <p:nvPr/>
+        </p:nvPicPr>
+        <p:blipFill>
+          <a:blip r:embed="rId1"/>
+          <a:stretch>
+            <a:fillRect/>
+          </a:stretch>
+        </p:blipFill>
+        <p:spPr>
+          <a:xfrm>
+            <a:off x="2607162" y="2706624"/>
+            <a:ext cx="3929676" cy="914400"/>
           </a:xfrm>
           <a:prstGeom prst="rect">
             <a:avLst/>
           </a:prstGeom>
+        </p:spPr>
+      </p:pic>
+      <p:sp>
+        <p:nvSpPr>
+          <p:cNvPr id="7" name="Text 4"/>
+          <p:cNvSpPr txBox="1"/>
+          <p:nvPr/>
+        </p:nvSpPr>
+        <p:spPr>
+          <a:xfrm>
+            <a:off x="576072" y="3657600"/>
+            <a:ext cx="7991856" cy="182880"/>
+          </a:xfrm>
+          <a:prstGeom prst="rect">
+            <a:avLst/>
+          </a:prstGeom>
           <a:noFill/>
           <a:ln/>
         </p:spPr>
         <p:txBody>
-          <a:bodyPr wrap="square" lIns="0" tIns="0" rIns="0" bIns="0" rtlCol="0" anchor="t"/>
+          <a:bodyPr wrap="square" lIns="0" tIns="0" rIns="0" bIns="0" rtlCol="0" anchor="ctr"/>
           <a:lstStyle/>
           <a:p>
-            <a:pPr indent="0" marL="0">
-              <a:lnSpc>
-                <a:spcPct val="120000"/>
-              </a:lnSpc>
+            <a:pPr algn="ctr" indent="0" marL="0">
               <a:buNone/>
             </a:pPr>
             <a:r>
-              <a:rPr lang="en-US" sz="2300" b="1" dirty="0">
-                <a:solidFill>
-                  <a:srgbClr val="0B1F3A"/>
+              <a:rPr lang="en-US" sz="700" dirty="0">
+                <a:solidFill>
+                  <a:srgbClr val="5F7183"/>
                 </a:solidFill>
                 <a:latin typeface="Arial" pitchFamily="34" charset="0"/>
                 <a:ea typeface="Arial" pitchFamily="34" charset="-122"/>
                 <a:cs typeface="Arial" pitchFamily="34" charset="-120"/>
               </a:rPr>
-              <a:t>Class 1 eye-safe: dòng này không có thì đừng lắp lên xe</a:t>
-            </a:r>
-            <a:endParaRPr lang="en-US" sz="2300" dirty="0"/>
-          </a:p>
-          <a:p>
-            <a:pPr indent="0" marL="0">
-              <a:lnSpc>
-                <a:spcPct val="120000"/>
-              </a:lnSpc>
-              <a:buNone/>
-            </a:pPr>
-            <a:r>
-              <a:rPr lang="en-US" sz="1400" dirty="0">
-                <a:solidFill>
-                  <a:srgbClr val="007F72"/>
-                </a:solidFill>
-                <a:latin typeface="微軟正黑體" pitchFamily="34" charset="0"/>
-                <a:ea typeface="微軟正黑體" pitchFamily="34" charset="-122"/>
-                <a:cs typeface="微軟正黑體" pitchFamily="34" charset="-120"/>
-              </a:rPr>
-              <a:t>Class 1 對眼睛安全：沒有這一行就不要裝上車</a:t>
-            </a:r>
-            <a:endParaRPr lang="en-US" sz="2300" dirty="0"/>
+              <a:t>Ouster OS1 datasheet, Rev7 / FW 3.2, p.2 · 節錄 · 讀取 2026/10/02</a:t>
+            </a:r>
+            <a:endParaRPr lang="en-US" sz="700" dirty="0"/>
           </a:p>
         </p:txBody>
       </p:sp>
       <p:sp>
         <p:nvSpPr>
-          <p:cNvPr id="13" name="Text 11"/>
-          <p:cNvSpPr txBox="1"/>
-          <p:nvPr/>
-        </p:nvSpPr>
-        <p:spPr>
-          <a:xfrm>
-            <a:off x="3429000" y="2416057"/>
-            <a:ext cx="5212080" cy="1074682"/>
-          </a:xfrm>
-          <a:prstGeom prst="rect">
-            <a:avLst/>
-          </a:prstGeom>
-          <a:noFill/>
-          <a:ln/>
-        </p:spPr>
-        <p:txBody>
-          <a:bodyPr wrap="square" lIns="0" tIns="0" rIns="0" bIns="0" rtlCol="0" anchor="t"/>
-          <a:lstStyle/>
-          <a:p>
-            <a:pPr indent="0" marL="0">
-              <a:lnSpc>
-                <a:spcPct val="128000"/>
-              </a:lnSpc>
-              <a:buNone/>
-            </a:pPr>
-            <a:r>
-              <a:rPr lang="en-US" sz="1250" dirty="0">
-                <a:solidFill>
-                  <a:srgbClr val="5F7183"/>
-                </a:solidFill>
-                <a:latin typeface="Arial" pitchFamily="34" charset="0"/>
-                <a:ea typeface="Arial" pitchFamily="34" charset="-122"/>
-                <a:cs typeface="Arial" pitchFamily="34" charset="-120"/>
-              </a:rPr>
-              <a:t>OS1 ghi «Class 1 eye-safe per IEC/EN 60825-1». Nghĩa là trong mọi điều kiện sử dụng bình thường, nhìn thẳng vào nó cũng không hại mắt.</a:t>
-            </a:r>
-            <a:endParaRPr lang="en-US" sz="1250" dirty="0"/>
-          </a:p>
-          <a:p>
-            <a:pPr indent="0" marL="0">
-              <a:lnSpc>
-                <a:spcPct val="128000"/>
-              </a:lnSpc>
-              <a:buNone/>
-            </a:pPr>
-            <a:r>
-              <a:rPr lang="en-US" sz="1150" dirty="0">
-                <a:solidFill>
-                  <a:srgbClr val="5F7183"/>
-                </a:solidFill>
-                <a:latin typeface="微軟正黑體" pitchFamily="34" charset="0"/>
-                <a:ea typeface="微軟正黑體" pitchFamily="34" charset="-122"/>
-                <a:cs typeface="微軟正黑體" pitchFamily="34" charset="-120"/>
-              </a:rPr>
-              <a:t>OS1 寫「Class 1 eye-safe per IEC/EN 60825-1」。意思是在正常使用的情況下，就算直視它也不會傷到眼睛。</a:t>
-            </a:r>
-            <a:endParaRPr lang="en-US" sz="1250" dirty="0"/>
-          </a:p>
-        </p:txBody>
-      </p:sp>
-      <p:sp>
-        <p:nvSpPr>
-          <p:cNvPr id="14" name="Shape 12"/>
+          <p:cNvPr id="8" name="Shape 5"/>
           <p:cNvSpPr/>
           <p:nvPr/>
         </p:nvSpPr>
@@ -16383,7 +16182,7 @@
       </p:sp>
       <p:sp>
         <p:nvSpPr>
-          <p:cNvPr id="15" name="Text 13"/>
+          <p:cNvPr id="9" name="Text 6"/>
           <p:cNvSpPr txBox="1"/>
           <p:nvPr/>
         </p:nvSpPr>
@@ -16445,14 +16244,14 @@
       </p:sp>
       <p:pic>
         <p:nvPicPr>
-          <p:cNvPr id="17" name="Image 0" descr="/Users/tsengchenghsun/Class/carClass/Claude outputs/第五週(10-8)/src/logo.png">    </p:cNvPr>
+          <p:cNvPr id="11" name="Image 1" descr="/Users/tsengchenghsun/Class/carClass/Claude outputs/第五週(10-8)/src/logo.png">    </p:cNvPr>
           <p:cNvPicPr>
             <a:picLocks noChangeAspect="1"/>
           </p:cNvPicPr>
           <p:nvPr/>
         </p:nvPicPr>
         <p:blipFill>
-          <a:blip r:embed="rId1"/>
+          <a:blip r:embed="rId2"/>
           <a:stretch>
             <a:fillRect/>
           </a:stretch>
@@ -16469,7 +16268,7 @@
       </p:pic>
       <p:sp>
         <p:nvSpPr>
-          <p:cNvPr id="18" name="Text 14"/>
+          <p:cNvPr id="12" name="Text 7"/>
           <p:cNvSpPr txBox="1"/>
           <p:nvPr/>
         </p:nvSpPr>
@@ -16508,7 +16307,7 @@
       </p:sp>
       <p:sp>
         <p:nvSpPr>
-          <p:cNvPr id="19" name="Text 15"/>
+          <p:cNvPr id="13" name="Text 8"/>
           <p:cNvSpPr txBox="1"/>
           <p:nvPr/>
         </p:nvSpPr>
@@ -16611,22 +16410,146 @@
       </p:sp>
       <p:sp>
         <p:nvSpPr>
-          <p:cNvPr id="3" name="Shape 1"/>
+          <p:cNvPr id="3" name="Text 1"/>
+          <p:cNvSpPr txBox="1"/>
+          <p:nvPr/>
+        </p:nvSpPr>
+        <p:spPr>
+          <a:xfrm>
+            <a:off x="502920" y="1076585"/>
+            <a:ext cx="8138160" cy="563762"/>
+          </a:xfrm>
+          <a:prstGeom prst="rect">
+            <a:avLst/>
+          </a:prstGeom>
+          <a:noFill/>
+          <a:ln/>
+        </p:spPr>
+        <p:txBody>
+          <a:bodyPr wrap="square" lIns="0" tIns="0" rIns="0" bIns="0" rtlCol="0" anchor="t"/>
+          <a:lstStyle/>
+          <a:p>
+            <a:pPr indent="0" marL="0">
+              <a:lnSpc>
+                <a:spcPct val="120000"/>
+              </a:lnSpc>
+              <a:buNone/>
+            </a:pPr>
+            <a:r>
+              <a:rPr lang="en-US" sz="1900" b="1" dirty="0">
+                <a:solidFill>
+                  <a:srgbClr val="0B1F3A"/>
+                </a:solidFill>
+                <a:latin typeface="Arial" pitchFamily="34" charset="0"/>
+                <a:ea typeface="Arial" pitchFamily="34" charset="-122"/>
+                <a:cs typeface="Arial" pitchFamily="34" charset="-120"/>
+              </a:rPr>
+              <a:t>«up to 2 returns»: một tia bắn ra có thể vọng về hai lần</a:t>
+            </a:r>
+            <a:endParaRPr lang="en-US" sz="1900" dirty="0"/>
+          </a:p>
+          <a:p>
+            <a:pPr indent="0" marL="0">
+              <a:lnSpc>
+                <a:spcPct val="120000"/>
+              </a:lnSpc>
+              <a:buNone/>
+            </a:pPr>
+            <a:r>
+              <a:rPr lang="en-US" sz="1200" dirty="0">
+                <a:solidFill>
+                  <a:srgbClr val="007F72"/>
+                </a:solidFill>
+                <a:latin typeface="微軟正黑體" pitchFamily="34" charset="0"/>
+                <a:ea typeface="微軟正黑體" pitchFamily="34" charset="-122"/>
+                <a:cs typeface="微軟正黑體" pitchFamily="34" charset="-120"/>
+              </a:rPr>
+              <a:t>「最多兩次回波」：一道雷射射出去，可能彈回來兩次</a:t>
+            </a:r>
+            <a:endParaRPr lang="en-US" sz="1900" dirty="0"/>
+          </a:p>
+        </p:txBody>
+      </p:sp>
+      <p:sp>
+        <p:nvSpPr>
+          <p:cNvPr id="4" name="Text 2"/>
+          <p:cNvSpPr txBox="1"/>
+          <p:nvPr/>
+        </p:nvSpPr>
+        <p:spPr>
+          <a:xfrm>
+            <a:off x="502920" y="1731787"/>
+            <a:ext cx="8138160" cy="684636"/>
+          </a:xfrm>
+          <a:prstGeom prst="rect">
+            <a:avLst/>
+          </a:prstGeom>
+          <a:noFill/>
+          <a:ln/>
+        </p:spPr>
+        <p:txBody>
+          <a:bodyPr wrap="square" lIns="0" tIns="0" rIns="0" bIns="0" rtlCol="0" anchor="t"/>
+          <a:lstStyle/>
+          <a:p>
+            <a:pPr indent="0" marL="0">
+              <a:lnSpc>
+                <a:spcPct val="128000"/>
+              </a:lnSpc>
+              <a:buNone/>
+            </a:pPr>
+            <a:r>
+              <a:rPr lang="en-US" sz="1250" dirty="0">
+                <a:solidFill>
+                  <a:srgbClr val="5F7183"/>
+                </a:solidFill>
+                <a:latin typeface="Arial" pitchFamily="34" charset="0"/>
+                <a:ea typeface="Arial" pitchFamily="34" charset="-122"/>
+                <a:cs typeface="Arial" pitchFamily="34" charset="-120"/>
+              </a:rPr>
+              <a:t>Tia xuyên mưa, lá cây, khói bụi rồi mới chạm vật thật. Chỉ nhận một lần vọng thì hạt mưa thành vật cản.</a:t>
+            </a:r>
+            <a:endParaRPr lang="en-US" sz="1250" dirty="0"/>
+          </a:p>
+          <a:p>
+            <a:pPr indent="0" marL="0">
+              <a:lnSpc>
+                <a:spcPct val="128000"/>
+              </a:lnSpc>
+              <a:buNone/>
+            </a:pPr>
+            <a:r>
+              <a:rPr lang="en-US" sz="1150" dirty="0">
+                <a:solidFill>
+                  <a:srgbClr val="5F7183"/>
+                </a:solidFill>
+                <a:latin typeface="微軟正黑體" pitchFamily="34" charset="0"/>
+                <a:ea typeface="微軟正黑體" pitchFamily="34" charset="-122"/>
+                <a:cs typeface="微軟正黑體" pitchFamily="34" charset="-120"/>
+              </a:rPr>
+              <a:t>雷射穿過雨幕、樹葉、煙塵才打到真正的東西。只收第一次回波，就可能把雨滴當成障礙物。</a:t>
+            </a:r>
+            <a:endParaRPr lang="en-US" sz="1250" dirty="0"/>
+          </a:p>
+        </p:txBody>
+      </p:sp>
+      <p:sp>
+        <p:nvSpPr>
+          <p:cNvPr id="5" name="Shape 3"/>
           <p:cNvSpPr/>
           <p:nvPr/>
         </p:nvSpPr>
         <p:spPr>
           <a:xfrm>
-            <a:off x="502920" y="1101852"/>
-            <a:ext cx="2468880" cy="2514600"/>
+            <a:off x="502920" y="2615184"/>
+            <a:ext cx="8138160" cy="1261872"/>
           </a:xfrm>
           <a:prstGeom prst="roundRect">
             <a:avLst>
-              <a:gd name="adj" fmla="val 4444"/>
+              <a:gd name="adj" fmla="val 6522"/>
             </a:avLst>
           </a:prstGeom>
           <a:solidFill>
-            <a:srgbClr val="F4F7FA"/>
+            <a:srgbClr val="FFFFFF"/>
           </a:solidFill>
           <a:ln w="12700">
             <a:solidFill>
@@ -16636,403 +16559,72 @@
           </a:ln>
         </p:spPr>
       </p:sp>
-      <p:sp>
-        <p:nvSpPr>
-          <p:cNvPr id="4" name="Shape 2"/>
-          <p:cNvSpPr/>
-          <p:nvPr/>
-        </p:nvSpPr>
-        <p:spPr>
-          <a:xfrm flipH="1" flipV="1">
-            <a:off x="1314902" y="1288435"/>
-            <a:ext cx="422458" cy="626319"/>
-          </a:xfrm>
-          <a:prstGeom prst="line">
-            <a:avLst/>
-          </a:prstGeom>
-          <a:noFill/>
-          <a:ln w="15240">
-            <a:solidFill>
-              <a:srgbClr val="1F6F5C"/>
-            </a:solidFill>
-            <a:prstDash val="solid"/>
-          </a:ln>
-        </p:spPr>
-      </p:sp>
-      <p:sp>
-        <p:nvSpPr>
-          <p:cNvPr id="5" name="Shape 3"/>
-          <p:cNvSpPr/>
-          <p:nvPr/>
-        </p:nvSpPr>
-        <p:spPr>
-          <a:xfrm flipH="1" flipV="1">
-            <a:off x="1516480" y="1192287"/>
-            <a:ext cx="220880" cy="722467"/>
-          </a:xfrm>
-          <a:prstGeom prst="line">
-            <a:avLst/>
-          </a:prstGeom>
-          <a:noFill/>
-          <a:ln w="15240">
-            <a:solidFill>
-              <a:srgbClr val="1F6F5C"/>
-            </a:solidFill>
-            <a:prstDash val="solid"/>
-          </a:ln>
-        </p:spPr>
-      </p:sp>
-      <p:sp>
-        <p:nvSpPr>
-          <p:cNvPr id="6" name="Shape 4"/>
-          <p:cNvSpPr/>
-          <p:nvPr/>
-        </p:nvSpPr>
-        <p:spPr>
-          <a:xfrm flipV="1">
-            <a:off x="1737360" y="1159276"/>
-            <a:ext cx="1" cy="755477"/>
-          </a:xfrm>
-          <a:prstGeom prst="line">
-            <a:avLst/>
-          </a:prstGeom>
-          <a:noFill/>
-          <a:ln w="15240">
-            <a:solidFill>
-              <a:srgbClr val="1F6F5C"/>
-            </a:solidFill>
-            <a:prstDash val="solid"/>
-          </a:ln>
-        </p:spPr>
-      </p:sp>
-      <p:sp>
-        <p:nvSpPr>
-          <p:cNvPr id="7" name="Shape 5"/>
-          <p:cNvSpPr/>
-          <p:nvPr/>
-        </p:nvSpPr>
-        <p:spPr>
-          <a:xfrm flipV="1">
-            <a:off x="1737360" y="1192287"/>
-            <a:ext cx="220880" cy="722467"/>
-          </a:xfrm>
-          <a:prstGeom prst="line">
-            <a:avLst/>
-          </a:prstGeom>
-          <a:noFill/>
-          <a:ln w="15240">
-            <a:solidFill>
-              <a:srgbClr val="1F6F5C"/>
-            </a:solidFill>
-            <a:prstDash val="solid"/>
-          </a:ln>
-        </p:spPr>
-      </p:sp>
-      <p:sp>
-        <p:nvSpPr>
-          <p:cNvPr id="8" name="Shape 6"/>
-          <p:cNvSpPr/>
-          <p:nvPr/>
-        </p:nvSpPr>
-        <p:spPr>
-          <a:xfrm flipV="1">
-            <a:off x="1737360" y="1288435"/>
-            <a:ext cx="422458" cy="626319"/>
-          </a:xfrm>
-          <a:prstGeom prst="line">
-            <a:avLst/>
-          </a:prstGeom>
-          <a:noFill/>
-          <a:ln w="15240">
-            <a:solidFill>
-              <a:srgbClr val="1F6F5C"/>
-            </a:solidFill>
-            <a:prstDash val="solid"/>
-          </a:ln>
-        </p:spPr>
-      </p:sp>
-      <p:sp>
-        <p:nvSpPr>
-          <p:cNvPr id="9" name="Shape 7"/>
-          <p:cNvSpPr/>
-          <p:nvPr/>
-        </p:nvSpPr>
-        <p:spPr>
-          <a:xfrm>
-            <a:off x="1675400" y="1852794"/>
-            <a:ext cx="123919" cy="123919"/>
-          </a:xfrm>
-          <a:prstGeom prst="ellipse">
-            <a:avLst/>
-          </a:prstGeom>
-          <a:solidFill>
-            <a:srgbClr val="1F6F5C"/>
-          </a:solidFill>
-          <a:ln/>
-        </p:spPr>
-      </p:sp>
-      <p:sp>
-        <p:nvSpPr>
-          <p:cNvPr id="10" name="Shape 8"/>
-          <p:cNvSpPr/>
-          <p:nvPr/>
-        </p:nvSpPr>
-        <p:spPr>
-          <a:xfrm flipH="1" flipV="1">
-            <a:off x="998392" y="2824237"/>
-            <a:ext cx="738968" cy="157073"/>
-          </a:xfrm>
-          <a:prstGeom prst="line">
-            <a:avLst/>
-          </a:prstGeom>
-          <a:noFill/>
-          <a:ln w="15240">
-            <a:solidFill>
-              <a:srgbClr val="1F6F5C"/>
-            </a:solidFill>
-            <a:prstDash val="solid"/>
-          </a:ln>
-        </p:spPr>
-      </p:sp>
-      <p:sp>
-        <p:nvSpPr>
-          <p:cNvPr id="11" name="Shape 9"/>
-          <p:cNvSpPr/>
-          <p:nvPr/>
-        </p:nvSpPr>
-        <p:spPr>
-          <a:xfrm flipH="1" flipV="1">
-            <a:off x="1261923" y="2394194"/>
-            <a:ext cx="475437" cy="587116"/>
-          </a:xfrm>
-          <a:prstGeom prst="line">
-            <a:avLst/>
-          </a:prstGeom>
-          <a:noFill/>
-          <a:ln w="15240">
-            <a:solidFill>
-              <a:srgbClr val="1F6F5C"/>
-            </a:solidFill>
-            <a:prstDash val="solid"/>
-          </a:ln>
-        </p:spPr>
-      </p:sp>
-      <p:sp>
-        <p:nvSpPr>
-          <p:cNvPr id="12" name="Shape 10"/>
-          <p:cNvSpPr/>
-          <p:nvPr/>
-        </p:nvSpPr>
-        <p:spPr>
-          <a:xfrm flipV="1">
-            <a:off x="1737360" y="2225832"/>
-            <a:ext cx="1" cy="755477"/>
-          </a:xfrm>
-          <a:prstGeom prst="line">
-            <a:avLst/>
-          </a:prstGeom>
-          <a:noFill/>
-          <a:ln w="15240">
-            <a:solidFill>
-              <a:srgbClr val="1F6F5C"/>
-            </a:solidFill>
-            <a:prstDash val="solid"/>
-          </a:ln>
-        </p:spPr>
-      </p:sp>
-      <p:sp>
-        <p:nvSpPr>
-          <p:cNvPr id="13" name="Shape 11"/>
-          <p:cNvSpPr/>
-          <p:nvPr/>
-        </p:nvSpPr>
-        <p:spPr>
-          <a:xfrm flipV="1">
-            <a:off x="1737360" y="2394194"/>
-            <a:ext cx="475437" cy="587116"/>
-          </a:xfrm>
-          <a:prstGeom prst="line">
-            <a:avLst/>
-          </a:prstGeom>
-          <a:noFill/>
-          <a:ln w="15240">
-            <a:solidFill>
-              <a:srgbClr val="1F6F5C"/>
-            </a:solidFill>
-            <a:prstDash val="solid"/>
-          </a:ln>
-        </p:spPr>
-      </p:sp>
-      <p:sp>
-        <p:nvSpPr>
-          <p:cNvPr id="14" name="Shape 12"/>
-          <p:cNvSpPr/>
-          <p:nvPr/>
-        </p:nvSpPr>
-        <p:spPr>
-          <a:xfrm flipV="1">
-            <a:off x="1737360" y="2824237"/>
-            <a:ext cx="738968" cy="157073"/>
-          </a:xfrm>
-          <a:prstGeom prst="line">
-            <a:avLst/>
-          </a:prstGeom>
-          <a:noFill/>
-          <a:ln w="15240">
-            <a:solidFill>
-              <a:srgbClr val="1F6F5C"/>
-            </a:solidFill>
-            <a:prstDash val="solid"/>
-          </a:ln>
-        </p:spPr>
-      </p:sp>
-      <p:sp>
-        <p:nvSpPr>
-          <p:cNvPr id="15" name="Shape 13"/>
-          <p:cNvSpPr/>
-          <p:nvPr/>
-        </p:nvSpPr>
-        <p:spPr>
-          <a:xfrm>
-            <a:off x="1675400" y="2919350"/>
-            <a:ext cx="123919" cy="123919"/>
-          </a:xfrm>
-          <a:prstGeom prst="ellipse">
-            <a:avLst/>
-          </a:prstGeom>
-          <a:solidFill>
-            <a:srgbClr val="1F6F5C"/>
-          </a:solidFill>
-          <a:ln/>
-        </p:spPr>
-      </p:sp>
-      <p:sp>
-        <p:nvSpPr>
-          <p:cNvPr id="16" name="Text 14"/>
-          <p:cNvSpPr txBox="1"/>
-          <p:nvPr/>
-        </p:nvSpPr>
-        <p:spPr>
-          <a:xfrm>
-            <a:off x="3429000" y="1319005"/>
-            <a:ext cx="5212080" cy="1005611"/>
+      <p:pic>
+        <p:nvPicPr>
+          <p:cNvPr id="6" name="Image 0" descr="/Users/tsengchenghsun/Class/carClass/Claude outputs/第五週(10-8)/src/img/w5_os1_returns.png">    </p:cNvPr>
+          <p:cNvPicPr>
+            <a:picLocks noChangeAspect="1"/>
+          </p:cNvPicPr>
+          <p:nvPr/>
+        </p:nvPicPr>
+        <p:blipFill>
+          <a:blip r:embed="rId1"/>
+          <a:stretch>
+            <a:fillRect/>
+          </a:stretch>
+        </p:blipFill>
+        <p:spPr>
+          <a:xfrm>
+            <a:off x="928499" y="2706624"/>
+            <a:ext cx="7287003" cy="914400"/>
           </a:xfrm>
           <a:prstGeom prst="rect">
             <a:avLst/>
           </a:prstGeom>
+        </p:spPr>
+      </p:pic>
+      <p:sp>
+        <p:nvSpPr>
+          <p:cNvPr id="7" name="Text 4"/>
+          <p:cNvSpPr txBox="1"/>
+          <p:nvPr/>
+        </p:nvSpPr>
+        <p:spPr>
+          <a:xfrm>
+            <a:off x="576072" y="3657600"/>
+            <a:ext cx="7991856" cy="182880"/>
+          </a:xfrm>
+          <a:prstGeom prst="rect">
+            <a:avLst/>
+          </a:prstGeom>
           <a:noFill/>
           <a:ln/>
         </p:spPr>
         <p:txBody>
-          <a:bodyPr wrap="square" lIns="0" tIns="0" rIns="0" bIns="0" rtlCol="0" anchor="t"/>
+          <a:bodyPr wrap="square" lIns="0" tIns="0" rIns="0" bIns="0" rtlCol="0" anchor="ctr"/>
           <a:lstStyle/>
           <a:p>
-            <a:pPr indent="0" marL="0">
-              <a:lnSpc>
-                <a:spcPct val="120000"/>
-              </a:lnSpc>
+            <a:pPr algn="ctr" indent="0" marL="0">
               <a:buNone/>
             </a:pPr>
             <a:r>
-              <a:rPr lang="en-US" sz="2300" b="1" dirty="0">
-                <a:solidFill>
-                  <a:srgbClr val="0B1F3A"/>
+              <a:rPr lang="en-US" sz="700" dirty="0">
+                <a:solidFill>
+                  <a:srgbClr val="5F7183"/>
                 </a:solidFill>
                 <a:latin typeface="Arial" pitchFamily="34" charset="0"/>
                 <a:ea typeface="Arial" pitchFamily="34" charset="-122"/>
                 <a:cs typeface="Arial" pitchFamily="34" charset="-120"/>
               </a:rPr>
-              <a:t>«up to 2 returns»: một tia bắn ra có thể vọng về hai lần</a:t>
-            </a:r>
-            <a:endParaRPr lang="en-US" sz="2300" dirty="0"/>
-          </a:p>
-          <a:p>
-            <a:pPr indent="0" marL="0">
-              <a:lnSpc>
-                <a:spcPct val="120000"/>
-              </a:lnSpc>
-              <a:buNone/>
-            </a:pPr>
-            <a:r>
-              <a:rPr lang="en-US" sz="1400" dirty="0">
-                <a:solidFill>
-                  <a:srgbClr val="007F72"/>
-                </a:solidFill>
-                <a:latin typeface="微軟正黑體" pitchFamily="34" charset="0"/>
-                <a:ea typeface="微軟正黑體" pitchFamily="34" charset="-122"/>
-                <a:cs typeface="微軟正黑體" pitchFamily="34" charset="-120"/>
-              </a:rPr>
-              <a:t>「最多兩次回波」：一道雷射射出去，可能彈回來兩次</a:t>
-            </a:r>
-            <a:endParaRPr lang="en-US" sz="2300" dirty="0"/>
+              <a:t>Ouster OS1 datasheet, Rev7 / FW 3.2, p.1 · 節錄 · 讀取 2026/10/02</a:t>
+            </a:r>
+            <a:endParaRPr lang="en-US" sz="700" dirty="0"/>
           </a:p>
         </p:txBody>
       </p:sp>
       <p:sp>
         <p:nvSpPr>
-          <p:cNvPr id="17" name="Text 15"/>
-          <p:cNvSpPr txBox="1"/>
-          <p:nvPr/>
-        </p:nvSpPr>
-        <p:spPr>
-          <a:xfrm>
-            <a:off x="3429000" y="2416057"/>
-            <a:ext cx="5212080" cy="1074682"/>
-          </a:xfrm>
-          <a:prstGeom prst="rect">
-            <a:avLst/>
-          </a:prstGeom>
-          <a:noFill/>
-          <a:ln/>
-        </p:spPr>
-        <p:txBody>
-          <a:bodyPr wrap="square" lIns="0" tIns="0" rIns="0" bIns="0" rtlCol="0" anchor="t"/>
-          <a:lstStyle/>
-          <a:p>
-            <a:pPr indent="0" marL="0">
-              <a:lnSpc>
-                <a:spcPct val="128000"/>
-              </a:lnSpc>
-              <a:buNone/>
-            </a:pPr>
-            <a:r>
-              <a:rPr lang="en-US" sz="1250" dirty="0">
-                <a:solidFill>
-                  <a:srgbClr val="5F7183"/>
-                </a:solidFill>
-                <a:latin typeface="Arial" pitchFamily="34" charset="0"/>
-                <a:ea typeface="Arial" pitchFamily="34" charset="-122"/>
-                <a:cs typeface="Arial" pitchFamily="34" charset="-120"/>
-              </a:rPr>
-              <a:t>Tia xuyên qua màn mưa, qua lá cây, qua khói bụi rồi mới chạm vật thật. Nếu cảm biến chỉ nhận một lần vọng, nó có thể coi hạt mưa là vật cản.</a:t>
-            </a:r>
-            <a:endParaRPr lang="en-US" sz="1250" dirty="0"/>
-          </a:p>
-          <a:p>
-            <a:pPr indent="0" marL="0">
-              <a:lnSpc>
-                <a:spcPct val="128000"/>
-              </a:lnSpc>
-              <a:buNone/>
-            </a:pPr>
-            <a:r>
-              <a:rPr lang="en-US" sz="1150" dirty="0">
-                <a:solidFill>
-                  <a:srgbClr val="5F7183"/>
-                </a:solidFill>
-                <a:latin typeface="微軟正黑體" pitchFamily="34" charset="0"/>
-                <a:ea typeface="微軟正黑體" pitchFamily="34" charset="-122"/>
-                <a:cs typeface="微軟正黑體" pitchFamily="34" charset="-120"/>
-              </a:rPr>
-              <a:t>雷射穿過雨幕、樹葉、煙塵，才打到真正的東西。如果感測器只收第一次回波，它可能把雨滴當成障礙物。</a:t>
-            </a:r>
-            <a:endParaRPr lang="en-US" sz="1250" dirty="0"/>
-          </a:p>
-        </p:txBody>
-      </p:sp>
-      <p:sp>
-        <p:nvSpPr>
-          <p:cNvPr id="18" name="Shape 16"/>
+          <p:cNvPr id="8" name="Shape 5"/>
           <p:cNvSpPr/>
           <p:nvPr/>
         </p:nvSpPr>
@@ -17059,7 +16651,7 @@
       </p:sp>
       <p:sp>
         <p:nvSpPr>
-          <p:cNvPr id="19" name="Text 17"/>
+          <p:cNvPr id="9" name="Text 6"/>
           <p:cNvSpPr txBox="1"/>
           <p:nvPr/>
         </p:nvSpPr>
@@ -17121,14 +16713,14 @@
       </p:sp>
       <p:pic>
         <p:nvPicPr>
-          <p:cNvPr id="21" name="Image 0" descr="/Users/tsengchenghsun/Class/carClass/Claude outputs/第五週(10-8)/src/logo.png">    </p:cNvPr>
+          <p:cNvPr id="11" name="Image 1" descr="/Users/tsengchenghsun/Class/carClass/Claude outputs/第五週(10-8)/src/logo.png">    </p:cNvPr>
           <p:cNvPicPr>
             <a:picLocks noChangeAspect="1"/>
           </p:cNvPicPr>
           <p:nvPr/>
         </p:nvPicPr>
         <p:blipFill>
-          <a:blip r:embed="rId1"/>
+          <a:blip r:embed="rId2"/>
           <a:stretch>
             <a:fillRect/>
           </a:stretch>
@@ -17145,7 +16737,7 @@
       </p:pic>
       <p:sp>
         <p:nvSpPr>
-          <p:cNvPr id="22" name="Text 18"/>
+          <p:cNvPr id="12" name="Text 7"/>
           <p:cNvSpPr txBox="1"/>
           <p:nvPr/>
         </p:nvSpPr>
@@ -17184,7 +16776,7 @@
       </p:sp>
       <p:sp>
         <p:nvSpPr>
-          <p:cNvPr id="23" name="Text 19"/>
+          <p:cNvPr id="13" name="Text 8"/>
           <p:cNvSpPr txBox="1"/>
           <p:nvPr/>
         </p:nvSpPr>

--- a/第五週(10-08)/第五週_第2節_簡報.pptx
+++ b/第五週(10-08)/第五週_第2節_簡報.pptx
@@ -436,15 +436,15 @@
           <a:lstStyle/>
           <a:p>
             <a:pPr algn="l">
-              <a:lnSpc>
-                <a:spcPct val="115000"/>
-              </a:lnSpc>
-              <a:spcAft>
-                <a:spcPts val="500"/>
-              </a:spcAft>
-            </a:pPr>
-            <a:r>
-              <a:rPr sz="1000" b="1" lang="zh-TW" dirty="0">
+              <a:spcBef>
+                <a:spcPts val="0"/>
+              </a:spcBef>
+              <a:spcAft>
+                <a:spcPts val="158"/>
+              </a:spcAft>
+            </a:pPr>
+            <a:r>
+              <a:rPr sz="950" b="1" lang="zh-TW" dirty="0">
                 <a:solidFill>
                   <a:srgbClr val="000000"/>
                 </a:solidFill>
@@ -455,7 +455,7 @@
               <a:t>▍這一張要做什麼</a:t>
             </a:r>
             <a:r>
-              <a:rPr sz="1000" lang="zh-TW" dirty="0">
+              <a:rPr sz="950" lang="zh-TW" dirty="0">
                 <a:solidFill>
                   <a:srgbClr val="000000"/>
                 </a:solidFill>
@@ -469,15 +469,15 @@
           </a:p>
           <a:p>
             <a:pPr algn="l">
-              <a:lnSpc>
-                <a:spcPct val="115000"/>
-              </a:lnSpc>
-              <a:spcAft>
-                <a:spcPts val="500"/>
-              </a:spcAft>
-            </a:pPr>
-            <a:r>
-              <a:rPr sz="1000" lang="zh-TW" dirty="0">
+              <a:spcBef>
+                <a:spcPts val="0"/>
+              </a:spcBef>
+              <a:spcAft>
+                <a:spcPts val="158"/>
+              </a:spcAft>
+            </a:pPr>
+            <a:r>
+              <a:rPr sz="950" lang="zh-TW" dirty="0">
                 <a:solidFill>
                   <a:srgbClr val="000000"/>
                 </a:solidFill>
@@ -491,15 +491,15 @@
           </a:p>
           <a:p>
             <a:pPr algn="l">
-              <a:lnSpc>
-                <a:spcPct val="115000"/>
-              </a:lnSpc>
-              <a:spcAft>
-                <a:spcPts val="500"/>
-              </a:spcAft>
-            </a:pPr>
-            <a:r>
-              <a:rPr sz="1000" b="1" lang="zh-TW" dirty="0">
+              <a:spcBef>
+                <a:spcPts val="0"/>
+              </a:spcBef>
+              <a:spcAft>
+                <a:spcPts val="158"/>
+              </a:spcAft>
+            </a:pPr>
+            <a:r>
+              <a:rPr sz="950" b="1" lang="zh-TW" dirty="0">
                 <a:solidFill>
                   <a:srgbClr val="000000"/>
                 </a:solidFill>
@@ -510,7 +510,7 @@
               <a:t>▍畫面上圈這裡</a:t>
             </a:r>
             <a:r>
-              <a:rPr sz="1000" lang="zh-TW" dirty="0">
+              <a:rPr sz="950" lang="zh-TW" dirty="0">
                 <a:solidFill>
                   <a:srgbClr val="000000"/>
                 </a:solidFill>
@@ -524,15 +524,15 @@
           </a:p>
           <a:p>
             <a:pPr algn="l">
-              <a:lnSpc>
-                <a:spcPct val="115000"/>
-              </a:lnSpc>
-              <a:spcAft>
-                <a:spcPts val="500"/>
-              </a:spcAft>
-            </a:pPr>
-            <a:r>
-              <a:rPr sz="1000" lang="zh-TW" dirty="0">
+              <a:spcBef>
+                <a:spcPts val="0"/>
+              </a:spcBef>
+              <a:spcAft>
+                <a:spcPts val="158"/>
+              </a:spcAft>
+            </a:pPr>
+            <a:r>
+              <a:rPr sz="950" lang="zh-TW" dirty="0">
                 <a:solidFill>
                   <a:srgbClr val="000000"/>
                 </a:solidFill>
@@ -546,15 +546,15 @@
           </a:p>
           <a:p>
             <a:pPr algn="l">
-              <a:lnSpc>
-                <a:spcPct val="115000"/>
-              </a:lnSpc>
-              <a:spcAft>
-                <a:spcPts val="500"/>
-              </a:spcAft>
-            </a:pPr>
-            <a:r>
-              <a:rPr sz="1000" b="1" lang="zh-TW" dirty="0">
+              <a:spcBef>
+                <a:spcPts val="0"/>
+              </a:spcBef>
+              <a:spcAft>
+                <a:spcPts val="158"/>
+              </a:spcAft>
+            </a:pPr>
+            <a:r>
+              <a:rPr sz="950" b="1" lang="zh-TW" dirty="0">
                 <a:solidFill>
                   <a:srgbClr val="000000"/>
                 </a:solidFill>
@@ -565,7 +565,7 @@
               <a:t>▍以下照著唸</a:t>
             </a:r>
             <a:r>
-              <a:rPr sz="1000" lang="zh-TW" dirty="0">
+              <a:rPr sz="950" lang="zh-TW" dirty="0">
                 <a:solidFill>
                   <a:srgbClr val="000000"/>
                 </a:solidFill>
@@ -579,15 +579,15 @@
           </a:p>
           <a:p>
             <a:pPr algn="l">
-              <a:lnSpc>
-                <a:spcPct val="115000"/>
-              </a:lnSpc>
-              <a:spcAft>
-                <a:spcPts val="500"/>
-              </a:spcAft>
-            </a:pPr>
-            <a:r>
-              <a:rPr sz="1000" lang="zh-TW" dirty="0">
+              <a:spcBef>
+                <a:spcPts val="0"/>
+              </a:spcBef>
+              <a:spcAft>
+                <a:spcPts val="158"/>
+              </a:spcAft>
+            </a:pPr>
+            <a:r>
+              <a:rPr sz="950" lang="zh-TW" dirty="0">
                 <a:solidFill>
                   <a:srgbClr val="000000"/>
                 </a:solidFill>
@@ -601,15 +601,15 @@
           </a:p>
           <a:p>
             <a:pPr algn="l">
-              <a:lnSpc>
-                <a:spcPct val="115000"/>
-              </a:lnSpc>
-              <a:spcAft>
-                <a:spcPts val="500"/>
-              </a:spcAft>
-            </a:pPr>
-            <a:r>
-              <a:rPr sz="1000" lang="zh-TW" dirty="0">
+              <a:spcBef>
+                <a:spcPts val="0"/>
+              </a:spcBef>
+              <a:spcAft>
+                <a:spcPts val="158"/>
+              </a:spcAft>
+            </a:pPr>
+            <a:r>
+              <a:rPr sz="950" lang="zh-TW" dirty="0">
                 <a:solidFill>
                   <a:srgbClr val="000000"/>
                 </a:solidFill>
@@ -620,7 +620,7 @@
               <a:t>上一節我們找的四個數字，是規格表的</a:t>
             </a:r>
             <a:r>
-              <a:rPr sz="1000" b="1" lang="zh-TW" dirty="0">
+              <a:rPr sz="950" b="1" lang="zh-TW" dirty="0">
                 <a:solidFill>
                   <a:srgbClr val="000000"/>
                 </a:solidFill>
@@ -631,7 +631,7 @@
               <a:t>第一頁</a:t>
             </a:r>
             <a:r>
-              <a:rPr sz="1000" lang="zh-TW" dirty="0">
+              <a:rPr sz="950" lang="zh-TW" dirty="0">
                 <a:solidFill>
                   <a:srgbClr val="000000"/>
                 </a:solidFill>
@@ -645,15 +645,15 @@
           </a:p>
           <a:p>
             <a:pPr algn="l">
-              <a:lnSpc>
-                <a:spcPct val="115000"/>
-              </a:lnSpc>
-              <a:spcAft>
-                <a:spcPts val="500"/>
-              </a:spcAft>
-            </a:pPr>
-            <a:r>
-              <a:rPr sz="1000" lang="zh-TW" dirty="0">
+              <a:spcBef>
+                <a:spcPts val="0"/>
+              </a:spcBef>
+              <a:spcAft>
+                <a:spcPts val="158"/>
+              </a:spcAft>
+            </a:pPr>
+            <a:r>
+              <a:rPr sz="950" lang="zh-TW" dirty="0">
                 <a:solidFill>
                   <a:srgbClr val="000000"/>
                 </a:solidFill>
@@ -664,7 +664,7 @@
               <a:t>這一節我要帶各位往下翻。第二頁上還有一堆數字，大部分的人不看，可是</a:t>
             </a:r>
             <a:r>
-              <a:rPr sz="1000" b="1" lang="zh-TW" dirty="0">
+              <a:rPr sz="950" b="1" lang="zh-TW" dirty="0">
                 <a:solidFill>
                   <a:srgbClr val="000000"/>
                 </a:solidFill>
@@ -675,7 +675,7 @@
               <a:t>真的出事的時候，常常是出在那幾行</a:t>
             </a:r>
             <a:r>
-              <a:rPr sz="1000" lang="zh-TW" dirty="0">
+              <a:rPr sz="950" lang="zh-TW" dirty="0">
                 <a:solidFill>
                   <a:srgbClr val="000000"/>
                 </a:solidFill>
@@ -689,15 +689,15 @@
           </a:p>
           <a:p>
             <a:pPr algn="l">
-              <a:lnSpc>
-                <a:spcPct val="115000"/>
-              </a:lnSpc>
-              <a:spcAft>
-                <a:spcPts val="500"/>
-              </a:spcAft>
-            </a:pPr>
-            <a:r>
-              <a:rPr sz="1000" lang="zh-TW" dirty="0">
+              <a:spcBef>
+                <a:spcPts val="0"/>
+              </a:spcBef>
+              <a:spcAft>
+                <a:spcPts val="158"/>
+              </a:spcAft>
+            </a:pPr>
+            <a:r>
+              <a:rPr sz="950" lang="zh-TW" dirty="0">
                 <a:solidFill>
                   <a:srgbClr val="000000"/>
                 </a:solidFill>
@@ -711,15 +711,15 @@
           </a:p>
           <a:p>
             <a:pPr algn="l">
-              <a:lnSpc>
-                <a:spcPct val="115000"/>
-              </a:lnSpc>
-              <a:spcAft>
-                <a:spcPts val="500"/>
-              </a:spcAft>
-            </a:pPr>
-            <a:r>
-              <a:rPr sz="1000" lang="zh-TW" dirty="0">
+              <a:spcBef>
+                <a:spcPts val="0"/>
+              </a:spcBef>
+              <a:spcAft>
+                <a:spcPts val="158"/>
+              </a:spcAft>
+            </a:pPr>
+            <a:r>
+              <a:rPr sz="950" lang="zh-TW" dirty="0">
                 <a:solidFill>
                   <a:srgbClr val="000000"/>
                 </a:solidFill>
@@ -730,7 +730,7 @@
               <a:t>第一組是相機的：</a:t>
             </a:r>
             <a:r>
-              <a:rPr sz="1000" b="1" lang="zh-TW" dirty="0">
+              <a:rPr sz="950" b="1" lang="zh-TW" dirty="0">
                 <a:solidFill>
                   <a:srgbClr val="000000"/>
                 </a:solidFill>
@@ -741,7 +741,7 @@
               <a:t>快門怎麼掃、動態範圍多少、LED 閃爍怎麼處理</a:t>
             </a:r>
             <a:r>
-              <a:rPr sz="1000" lang="zh-TW" dirty="0">
+              <a:rPr sz="950" lang="zh-TW" dirty="0">
                 <a:solidFill>
                   <a:srgbClr val="000000"/>
                 </a:solidFill>
@@ -755,15 +755,15 @@
           </a:p>
           <a:p>
             <a:pPr algn="l">
-              <a:lnSpc>
-                <a:spcPct val="115000"/>
-              </a:lnSpc>
-              <a:spcAft>
-                <a:spcPts val="500"/>
-              </a:spcAft>
-            </a:pPr>
-            <a:r>
-              <a:rPr sz="1000" lang="zh-TW" dirty="0">
+              <a:spcBef>
+                <a:spcPts val="0"/>
+              </a:spcBef>
+              <a:spcAft>
+                <a:spcPts val="158"/>
+              </a:spcAft>
+            </a:pPr>
+            <a:r>
+              <a:rPr sz="950" lang="zh-TW" dirty="0">
                 <a:solidFill>
                   <a:srgbClr val="000000"/>
                 </a:solidFill>
@@ -774,7 +774,7 @@
               <a:t>第二組是光達的：</a:t>
             </a:r>
             <a:r>
-              <a:rPr sz="1000" b="1" lang="zh-TW" dirty="0">
+              <a:rPr sz="950" b="1" lang="zh-TW" dirty="0">
                 <a:solidFill>
                   <a:srgbClr val="000000"/>
                 </a:solidFill>
@@ -785,7 +785,7 @@
               <a:t>波長、眼睛安全等級、幾次回波</a:t>
             </a:r>
             <a:r>
-              <a:rPr sz="1000" lang="zh-TW" dirty="0">
+              <a:rPr sz="950" lang="zh-TW" dirty="0">
                 <a:solidFill>
                   <a:srgbClr val="000000"/>
                 </a:solidFill>
@@ -799,15 +799,15 @@
           </a:p>
           <a:p>
             <a:pPr algn="l">
-              <a:lnSpc>
-                <a:spcPct val="115000"/>
-              </a:lnSpc>
-              <a:spcAft>
-                <a:spcPts val="500"/>
-              </a:spcAft>
-            </a:pPr>
-            <a:r>
-              <a:rPr sz="1000" lang="zh-TW" dirty="0">
+              <a:spcBef>
+                <a:spcPts val="0"/>
+              </a:spcBef>
+              <a:spcAft>
+                <a:spcPts val="158"/>
+              </a:spcAft>
+            </a:pPr>
+            <a:r>
+              <a:rPr sz="950" lang="zh-TW" dirty="0">
                 <a:solidFill>
                   <a:srgbClr val="000000"/>
                 </a:solidFill>
@@ -818,7 +818,7 @@
               <a:t>第三組是兩種都有的，而且是最多人忽略的：</a:t>
             </a:r>
             <a:r>
-              <a:rPr sz="1000" b="1" lang="zh-TW" dirty="0">
+              <a:rPr sz="950" b="1" lang="zh-TW" dirty="0">
                 <a:solidFill>
                   <a:srgbClr val="000000"/>
                 </a:solidFill>
@@ -829,7 +829,7 @@
               <a:t>標定和時間同步</a:t>
             </a:r>
             <a:r>
-              <a:rPr sz="1000" lang="zh-TW" dirty="0">
+              <a:rPr sz="950" lang="zh-TW" dirty="0">
                 <a:solidFill>
                   <a:srgbClr val="000000"/>
                 </a:solidFill>
@@ -843,15 +843,15 @@
           </a:p>
           <a:p>
             <a:pPr algn="l">
-              <a:lnSpc>
-                <a:spcPct val="115000"/>
-              </a:lnSpc>
-              <a:spcAft>
-                <a:spcPts val="500"/>
-              </a:spcAft>
-            </a:pPr>
-            <a:r>
-              <a:rPr sz="1000" lang="zh-TW" dirty="0">
+              <a:spcBef>
+                <a:spcPts val="0"/>
+              </a:spcBef>
+              <a:spcAft>
+                <a:spcPts val="158"/>
+              </a:spcAft>
+            </a:pPr>
+            <a:r>
+              <a:rPr sz="950" lang="zh-TW" dirty="0">
                 <a:solidFill>
                   <a:srgbClr val="000000"/>
                 </a:solidFill>
@@ -885,11 +885,11 @@
           <a:lstStyle/>
           <a:p>
             <a:pPr algn="l">
-              <a:lnSpc>
-                <a:spcPct val="115000"/>
-              </a:lnSpc>
-              <a:spcAft>
-                <a:spcPts val="500"/>
+              <a:spcBef>
+                <a:spcPts val="0"/>
+              </a:spcBef>
+              <a:spcAft>
+                <a:spcPts val="167"/>
               </a:spcAft>
             </a:pPr>
             <a:r>
@@ -964,15 +964,15 @@
           <a:lstStyle/>
           <a:p>
             <a:pPr algn="l">
-              <a:lnSpc>
-                <a:spcPct val="115000"/>
-              </a:lnSpc>
-              <a:spcAft>
-                <a:spcPts val="500"/>
-              </a:spcAft>
-            </a:pPr>
-            <a:r>
-              <a:rPr sz="1000" b="1" lang="zh-TW" dirty="0">
+              <a:spcBef>
+                <a:spcPts val="0"/>
+              </a:spcBef>
+              <a:spcAft>
+                <a:spcPts val="133"/>
+              </a:spcAft>
+            </a:pPr>
+            <a:r>
+              <a:rPr sz="800" b="1" lang="zh-TW" dirty="0">
                 <a:solidFill>
                   <a:srgbClr val="000000"/>
                 </a:solidFill>
@@ -983,7 +983,7 @@
               <a:t>▍這一張要做什麼</a:t>
             </a:r>
             <a:r>
-              <a:rPr sz="1000" lang="zh-TW" dirty="0">
+              <a:rPr sz="800" lang="zh-TW" dirty="0">
                 <a:solidFill>
                   <a:srgbClr val="000000"/>
                 </a:solidFill>
@@ -997,15 +997,15 @@
           </a:p>
           <a:p>
             <a:pPr algn="l">
-              <a:lnSpc>
-                <a:spcPct val="115000"/>
-              </a:lnSpc>
-              <a:spcAft>
-                <a:spcPts val="500"/>
-              </a:spcAft>
-            </a:pPr>
-            <a:r>
-              <a:rPr sz="1000" lang="zh-TW" dirty="0">
+              <a:spcBef>
+                <a:spcPts val="0"/>
+              </a:spcBef>
+              <a:spcAft>
+                <a:spcPts val="133"/>
+              </a:spcAft>
+            </a:pPr>
+            <a:r>
+              <a:rPr sz="800" lang="zh-TW" dirty="0">
                 <a:solidFill>
                   <a:srgbClr val="000000"/>
                 </a:solidFill>
@@ -1019,15 +1019,15 @@
           </a:p>
           <a:p>
             <a:pPr algn="l">
-              <a:lnSpc>
-                <a:spcPct val="115000"/>
-              </a:lnSpc>
-              <a:spcAft>
-                <a:spcPts val="500"/>
-              </a:spcAft>
-            </a:pPr>
-            <a:r>
-              <a:rPr sz="1000" b="1" lang="zh-TW" dirty="0">
+              <a:spcBef>
+                <a:spcPts val="0"/>
+              </a:spcBef>
+              <a:spcAft>
+                <a:spcPts val="133"/>
+              </a:spcAft>
+            </a:pPr>
+            <a:r>
+              <a:rPr sz="800" b="1" lang="zh-TW" dirty="0">
                 <a:solidFill>
                   <a:srgbClr val="000000"/>
                 </a:solidFill>
@@ -1038,7 +1038,7 @@
               <a:t>▍畫面上圈這裡</a:t>
             </a:r>
             <a:r>
-              <a:rPr sz="1000" lang="zh-TW" dirty="0">
+              <a:rPr sz="800" lang="zh-TW" dirty="0">
                 <a:solidFill>
                   <a:srgbClr val="000000"/>
                 </a:solidFill>
@@ -1052,15 +1052,15 @@
           </a:p>
           <a:p>
             <a:pPr algn="l">
-              <a:lnSpc>
-                <a:spcPct val="115000"/>
-              </a:lnSpc>
-              <a:spcAft>
-                <a:spcPts val="500"/>
-              </a:spcAft>
-            </a:pPr>
-            <a:r>
-              <a:rPr sz="1000" lang="zh-TW" dirty="0">
+              <a:spcBef>
+                <a:spcPts val="0"/>
+              </a:spcBef>
+              <a:spcAft>
+                <a:spcPts val="133"/>
+              </a:spcAft>
+            </a:pPr>
+            <a:r>
+              <a:rPr sz="800" lang="zh-TW" dirty="0">
                 <a:solidFill>
                   <a:srgbClr val="000000"/>
                 </a:solidFill>
@@ -1074,15 +1074,15 @@
           </a:p>
           <a:p>
             <a:pPr algn="l">
-              <a:lnSpc>
-                <a:spcPct val="115000"/>
-              </a:lnSpc>
-              <a:spcAft>
-                <a:spcPts val="500"/>
-              </a:spcAft>
-            </a:pPr>
-            <a:r>
-              <a:rPr sz="1000" b="1" lang="zh-TW" dirty="0">
+              <a:spcBef>
+                <a:spcPts val="0"/>
+              </a:spcBef>
+              <a:spcAft>
+                <a:spcPts val="133"/>
+              </a:spcAft>
+            </a:pPr>
+            <a:r>
+              <a:rPr sz="800" b="1" lang="zh-TW" dirty="0">
                 <a:solidFill>
                   <a:srgbClr val="000000"/>
                 </a:solidFill>
@@ -1093,7 +1093,7 @@
               <a:t>▍以下照著唸</a:t>
             </a:r>
             <a:r>
-              <a:rPr sz="1000" lang="zh-TW" dirty="0">
+              <a:rPr sz="800" lang="zh-TW" dirty="0">
                 <a:solidFill>
                   <a:srgbClr val="000000"/>
                 </a:solidFill>
@@ -1107,15 +1107,15 @@
           </a:p>
           <a:p>
             <a:pPr algn="l">
-              <a:lnSpc>
-                <a:spcPct val="115000"/>
-              </a:lnSpc>
-              <a:spcAft>
-                <a:spcPts val="500"/>
-              </a:spcAft>
-            </a:pPr>
-            <a:r>
-              <a:rPr sz="1000" lang="zh-TW" dirty="0">
+              <a:spcBef>
+                <a:spcPts val="0"/>
+              </a:spcBef>
+              <a:spcAft>
+                <a:spcPts val="133"/>
+              </a:spcAft>
+            </a:pPr>
+            <a:r>
+              <a:rPr sz="800" lang="zh-TW" dirty="0">
                 <a:solidFill>
                   <a:srgbClr val="000000"/>
                 </a:solidFill>
@@ -1129,15 +1129,15 @@
           </a:p>
           <a:p>
             <a:pPr algn="l">
-              <a:lnSpc>
-                <a:spcPct val="115000"/>
-              </a:lnSpc>
-              <a:spcAft>
-                <a:spcPts val="500"/>
-              </a:spcAft>
-            </a:pPr>
-            <a:r>
-              <a:rPr sz="1000" lang="zh-TW" dirty="0">
+              <a:spcBef>
+                <a:spcPts val="0"/>
+              </a:spcBef>
+              <a:spcAft>
+                <a:spcPts val="133"/>
+              </a:spcAft>
+            </a:pPr>
+            <a:r>
+              <a:rPr sz="800" lang="zh-TW" dirty="0">
                 <a:solidFill>
                   <a:srgbClr val="000000"/>
                 </a:solidFill>
@@ -1151,15 +1151,15 @@
           </a:p>
           <a:p>
             <a:pPr algn="l">
-              <a:lnSpc>
-                <a:spcPct val="115000"/>
-              </a:lnSpc>
-              <a:spcAft>
-                <a:spcPts val="500"/>
-              </a:spcAft>
-            </a:pPr>
-            <a:r>
-              <a:rPr sz="1000" lang="zh-TW" dirty="0">
+              <a:spcBef>
+                <a:spcPts val="0"/>
+              </a:spcBef>
+              <a:spcAft>
+                <a:spcPts val="133"/>
+              </a:spcAft>
+            </a:pPr>
+            <a:r>
+              <a:rPr sz="800" lang="zh-TW" dirty="0">
                 <a:solidFill>
                   <a:srgbClr val="000000"/>
                 </a:solidFill>
@@ -1170,7 +1170,7 @@
               <a:t>請把三個滑桿設成：</a:t>
             </a:r>
             <a:r>
-              <a:rPr sz="1000" b="1" lang="zh-TW" dirty="0">
+              <a:rPr sz="800" b="1" lang="zh-TW" dirty="0">
                 <a:solidFill>
                   <a:srgbClr val="000000"/>
                 </a:solidFill>
@@ -1181,7 +1181,7 @@
               <a:t>64 線、每圈 1024 點、10 赫茲</a:t>
             </a:r>
             <a:r>
-              <a:rPr sz="1000" lang="zh-TW" dirty="0">
+              <a:rPr sz="800" lang="zh-TW" dirty="0">
                 <a:solidFill>
                   <a:srgbClr val="000000"/>
                 </a:solidFill>
@@ -1195,15 +1195,15 @@
           </a:p>
           <a:p>
             <a:pPr algn="l">
-              <a:lnSpc>
-                <a:spcPct val="115000"/>
-              </a:lnSpc>
-              <a:spcAft>
-                <a:spcPts val="500"/>
-              </a:spcAft>
-            </a:pPr>
-            <a:r>
-              <a:rPr sz="1000" lang="zh-TW" dirty="0">
+              <a:spcBef>
+                <a:spcPts val="0"/>
+              </a:spcBef>
+              <a:spcAft>
+                <a:spcPts val="133"/>
+              </a:spcAft>
+            </a:pPr>
+            <a:r>
+              <a:rPr sz="800" lang="zh-TW" dirty="0">
                 <a:solidFill>
                   <a:srgbClr val="000000"/>
                 </a:solidFill>
@@ -1214,7 +1214,7 @@
               <a:t>現在看它算出來的每秒點數。六十四乘一千零二十四乘十，等於</a:t>
             </a:r>
             <a:r>
-              <a:rPr sz="1000" b="1" lang="zh-TW" dirty="0">
+              <a:rPr sz="800" b="1" lang="zh-TW" dirty="0">
                 <a:solidFill>
                   <a:srgbClr val="000000"/>
                 </a:solidFill>
@@ -1225,7 +1225,7 @@
               <a:t>六十五萬五千三百六十</a:t>
             </a:r>
             <a:r>
-              <a:rPr sz="1000" lang="zh-TW" dirty="0">
+              <a:rPr sz="800" lang="zh-TW" dirty="0">
                 <a:solidFill>
                   <a:srgbClr val="000000"/>
                 </a:solidFill>
@@ -1239,15 +1239,15 @@
           </a:p>
           <a:p>
             <a:pPr algn="l">
-              <a:lnSpc>
-                <a:spcPct val="115000"/>
-              </a:lnSpc>
-              <a:spcAft>
-                <a:spcPts val="500"/>
-              </a:spcAft>
-            </a:pPr>
-            <a:r>
-              <a:rPr sz="1000" lang="zh-TW" dirty="0">
+              <a:spcBef>
+                <a:spcPts val="0"/>
+              </a:spcBef>
+              <a:spcAft>
+                <a:spcPts val="133"/>
+              </a:spcAft>
+            </a:pPr>
+            <a:r>
+              <a:rPr sz="800" lang="zh-TW" dirty="0">
                 <a:solidFill>
                   <a:srgbClr val="000000"/>
                 </a:solidFill>
@@ -1258,7 +1258,7 @@
               <a:t>規格表上的廠商最喜歡寫這個數字，因為它看起來很大、很厲害。可是這個數字</a:t>
             </a:r>
             <a:r>
-              <a:rPr sz="1000" b="1" lang="zh-TW" dirty="0">
+              <a:rPr sz="800" b="1" lang="zh-TW" dirty="0">
                 <a:solidFill>
                   <a:srgbClr val="000000"/>
                 </a:solidFill>
@@ -1269,7 +1269,7 @@
               <a:t>不能直接拿來用</a:t>
             </a:r>
             <a:r>
-              <a:rPr sz="1000" lang="zh-TW" dirty="0">
+              <a:rPr sz="800" lang="zh-TW" dirty="0">
                 <a:solidFill>
                   <a:srgbClr val="000000"/>
                 </a:solidFill>
@@ -1283,15 +1283,15 @@
           </a:p>
           <a:p>
             <a:pPr algn="l">
-              <a:lnSpc>
-                <a:spcPct val="115000"/>
-              </a:lnSpc>
-              <a:spcAft>
-                <a:spcPts val="500"/>
-              </a:spcAft>
-            </a:pPr>
-            <a:r>
-              <a:rPr sz="1000" lang="zh-TW" dirty="0">
+              <a:spcBef>
+                <a:spcPts val="0"/>
+              </a:spcBef>
+              <a:spcAft>
+                <a:spcPts val="133"/>
+              </a:spcAft>
+            </a:pPr>
+            <a:r>
+              <a:rPr sz="800" lang="zh-TW" dirty="0">
                 <a:solidFill>
                   <a:srgbClr val="000000"/>
                 </a:solidFill>
@@ -1302,7 +1302,7 @@
               <a:t>要回答那個問題，必須先換成角度。三百六十度除以每圈一千零二十四個點，等於</a:t>
             </a:r>
             <a:r>
-              <a:rPr sz="1000" b="1" lang="zh-TW" dirty="0">
+              <a:rPr sz="800" b="1" lang="zh-TW" dirty="0">
                 <a:solidFill>
                   <a:srgbClr val="000000"/>
                 </a:solidFill>
@@ -1313,7 +1313,7 @@
               <a:t>零點三五度</a:t>
             </a:r>
             <a:r>
-              <a:rPr sz="1000" lang="zh-TW" dirty="0">
+              <a:rPr sz="800" lang="zh-TW" dirty="0">
                 <a:solidFill>
                   <a:srgbClr val="000000"/>
                 </a:solidFill>
@@ -1327,15 +1327,15 @@
           </a:p>
           <a:p>
             <a:pPr algn="l">
-              <a:lnSpc>
-                <a:spcPct val="115000"/>
-              </a:lnSpc>
-              <a:spcAft>
-                <a:spcPts val="500"/>
-              </a:spcAft>
-            </a:pPr>
-            <a:r>
-              <a:rPr sz="1000" lang="zh-TW" dirty="0">
+              <a:spcBef>
+                <a:spcPts val="0"/>
+              </a:spcBef>
+              <a:spcAft>
+                <a:spcPts val="133"/>
+              </a:spcAft>
+            </a:pPr>
+            <a:r>
+              <a:rPr sz="800" lang="zh-TW" dirty="0">
                 <a:solidFill>
                   <a:srgbClr val="000000"/>
                 </a:solidFill>
@@ -1346,7 +1346,7 @@
               <a:t>再往下一行：零點三五度在四十公尺處，張開</a:t>
             </a:r>
             <a:r>
-              <a:rPr sz="1000" b="1" lang="zh-TW" dirty="0">
+              <a:rPr sz="800" b="1" lang="zh-TW" dirty="0">
                 <a:solidFill>
                   <a:srgbClr val="000000"/>
                 </a:solidFill>
@@ -1357,7 +1357,7 @@
               <a:t>零點二五公尺</a:t>
             </a:r>
             <a:r>
-              <a:rPr sz="1000" lang="zh-TW" dirty="0">
+              <a:rPr sz="800" lang="zh-TW" dirty="0">
                 <a:solidFill>
                   <a:srgbClr val="000000"/>
                 </a:solidFill>
@@ -1371,15 +1371,15 @@
           </a:p>
           <a:p>
             <a:pPr algn="l">
-              <a:lnSpc>
-                <a:spcPct val="115000"/>
-              </a:lnSpc>
-              <a:spcAft>
-                <a:spcPts val="500"/>
-              </a:spcAft>
-            </a:pPr>
-            <a:r>
-              <a:rPr sz="1000" lang="zh-TW" dirty="0">
+              <a:spcBef>
+                <a:spcPts val="0"/>
+              </a:spcBef>
+              <a:spcAft>
+                <a:spcPts val="133"/>
+              </a:spcAft>
+            </a:pPr>
+            <a:r>
+              <a:rPr sz="800" lang="zh-TW" dirty="0">
                 <a:solidFill>
                   <a:srgbClr val="000000"/>
                 </a:solidFill>
@@ -1390,7 +1390,7 @@
               <a:t>現在請大家把每圈點數改成 </a:t>
             </a:r>
             <a:r>
-              <a:rPr sz="1000" b="1" lang="zh-TW" dirty="0">
+              <a:rPr sz="800" b="1" lang="zh-TW" dirty="0">
                 <a:solidFill>
                   <a:srgbClr val="000000"/>
                 </a:solidFill>
@@ -1401,7 +1401,7 @@
               <a:t>2048</a:t>
             </a:r>
             <a:r>
-              <a:rPr sz="1000" lang="zh-TW" dirty="0">
+              <a:rPr sz="800" lang="zh-TW" dirty="0">
                 <a:solidFill>
                   <a:srgbClr val="000000"/>
                 </a:solidFill>
@@ -1415,15 +1415,15 @@
           </a:p>
           <a:p>
             <a:pPr algn="l">
-              <a:lnSpc>
-                <a:spcPct val="115000"/>
-              </a:lnSpc>
-              <a:spcAft>
-                <a:spcPts val="500"/>
-              </a:spcAft>
-            </a:pPr>
-            <a:r>
-              <a:rPr sz="1000" lang="zh-TW" dirty="0">
+              <a:spcBef>
+                <a:spcPts val="0"/>
+              </a:spcBef>
+              <a:spcAft>
+                <a:spcPts val="133"/>
+              </a:spcAft>
+            </a:pPr>
+            <a:r>
+              <a:rPr sz="800" lang="zh-TW" dirty="0">
                 <a:solidFill>
                   <a:srgbClr val="000000"/>
                 </a:solidFill>
@@ -1437,15 +1437,15 @@
           </a:p>
           <a:p>
             <a:pPr algn="l">
-              <a:lnSpc>
-                <a:spcPct val="115000"/>
-              </a:lnSpc>
-              <a:spcAft>
-                <a:spcPts val="500"/>
-              </a:spcAft>
-            </a:pPr>
-            <a:r>
-              <a:rPr sz="1000" lang="zh-TW" dirty="0">
+              <a:spcBef>
+                <a:spcPts val="0"/>
+              </a:spcBef>
+              <a:spcAft>
+                <a:spcPts val="133"/>
+              </a:spcAft>
+            </a:pPr>
+            <a:r>
+              <a:rPr sz="800" lang="zh-TW" dirty="0">
                 <a:solidFill>
                   <a:srgbClr val="000000"/>
                 </a:solidFill>
@@ -1456,7 +1456,7 @@
               <a:t>這就是我要各位記住的動作：</a:t>
             </a:r>
             <a:r>
-              <a:rPr sz="1000" b="1" lang="zh-TW" dirty="0">
+              <a:rPr sz="800" b="1" lang="zh-TW" dirty="0">
                 <a:solidFill>
                   <a:srgbClr val="000000"/>
                 </a:solidFill>
@@ -1467,7 +1467,7 @@
               <a:t>看到「每秒幾百萬點」，先把它換算成角度，再換算成你關心的那個距離上的公分數。</a:t>
             </a:r>
             <a:r>
-              <a:rPr sz="1000" lang="zh-TW" dirty="0">
+              <a:rPr sz="800" lang="zh-TW" dirty="0">
                 <a:solidFill>
                   <a:srgbClr val="000000"/>
                 </a:solidFill>
@@ -1481,15 +1481,15 @@
           </a:p>
           <a:p>
             <a:pPr algn="l">
-              <a:lnSpc>
-                <a:spcPct val="115000"/>
-              </a:lnSpc>
-              <a:spcAft>
-                <a:spcPts val="500"/>
-              </a:spcAft>
-            </a:pPr>
-            <a:r>
-              <a:rPr sz="1000" lang="zh-TW" dirty="0">
+              <a:spcBef>
+                <a:spcPts val="0"/>
+              </a:spcBef>
+              <a:spcAft>
+                <a:spcPts val="133"/>
+              </a:spcAft>
+            </a:pPr>
+            <a:r>
+              <a:rPr sz="800" lang="zh-TW" dirty="0">
                 <a:solidFill>
                   <a:srgbClr val="000000"/>
                 </a:solidFill>
@@ -1523,11 +1523,11 @@
           <a:lstStyle/>
           <a:p>
             <a:pPr algn="l">
-              <a:lnSpc>
-                <a:spcPct val="115000"/>
-              </a:lnSpc>
-              <a:spcAft>
-                <a:spcPts val="500"/>
+              <a:spcBef>
+                <a:spcPts val="0"/>
+              </a:spcBef>
+              <a:spcAft>
+                <a:spcPts val="167"/>
               </a:spcAft>
             </a:pPr>
             <a:r>
@@ -1602,11 +1602,11 @@
           <a:lstStyle/>
           <a:p>
             <a:pPr algn="l">
-              <a:lnSpc>
-                <a:spcPct val="115000"/>
-              </a:lnSpc>
-              <a:spcAft>
-                <a:spcPts val="600"/>
+              <a:spcBef>
+                <a:spcPts val="0"/>
+              </a:spcBef>
+              <a:spcAft>
+                <a:spcPts val="200"/>
               </a:spcAft>
             </a:pPr>
             <a:r>
@@ -1635,11 +1635,11 @@
           </a:p>
           <a:p>
             <a:pPr algn="l">
-              <a:lnSpc>
-                <a:spcPct val="115000"/>
-              </a:lnSpc>
-              <a:spcAft>
-                <a:spcPts val="600"/>
+              <a:spcBef>
+                <a:spcPts val="0"/>
+              </a:spcBef>
+              <a:spcAft>
+                <a:spcPts val="200"/>
               </a:spcAft>
             </a:pPr>
             <a:r>
@@ -1657,11 +1657,11 @@
           </a:p>
           <a:p>
             <a:pPr algn="l">
-              <a:lnSpc>
-                <a:spcPct val="115000"/>
-              </a:lnSpc>
-              <a:spcAft>
-                <a:spcPts val="600"/>
+              <a:spcBef>
+                <a:spcPts val="0"/>
+              </a:spcBef>
+              <a:spcAft>
+                <a:spcPts val="200"/>
               </a:spcAft>
             </a:pPr>
             <a:r>
@@ -1690,11 +1690,11 @@
           </a:p>
           <a:p>
             <a:pPr algn="l">
-              <a:lnSpc>
-                <a:spcPct val="115000"/>
-              </a:lnSpc>
-              <a:spcAft>
-                <a:spcPts val="600"/>
+              <a:spcBef>
+                <a:spcPts val="0"/>
+              </a:spcBef>
+              <a:spcAft>
+                <a:spcPts val="200"/>
               </a:spcAft>
             </a:pPr>
             <a:r>
@@ -1712,11 +1712,11 @@
           </a:p>
           <a:p>
             <a:pPr algn="l">
-              <a:lnSpc>
-                <a:spcPct val="115000"/>
-              </a:lnSpc>
-              <a:spcAft>
-                <a:spcPts val="600"/>
+              <a:spcBef>
+                <a:spcPts val="0"/>
+              </a:spcBef>
+              <a:spcAft>
+                <a:spcPts val="200"/>
               </a:spcAft>
             </a:pPr>
             <a:r>
@@ -1745,11 +1745,11 @@
           </a:p>
           <a:p>
             <a:pPr algn="l">
-              <a:lnSpc>
-                <a:spcPct val="115000"/>
-              </a:lnSpc>
-              <a:spcAft>
-                <a:spcPts val="600"/>
+              <a:spcBef>
+                <a:spcPts val="0"/>
+              </a:spcBef>
+              <a:spcAft>
+                <a:spcPts val="200"/>
               </a:spcAft>
             </a:pPr>
             <a:r>
@@ -1787,11 +1787,11 @@
           <a:lstStyle/>
           <a:p>
             <a:pPr algn="l">
-              <a:lnSpc>
-                <a:spcPct val="115000"/>
-              </a:lnSpc>
-              <a:spcAft>
-                <a:spcPts val="500"/>
+              <a:spcBef>
+                <a:spcPts val="0"/>
+              </a:spcBef>
+              <a:spcAft>
+                <a:spcPts val="167"/>
               </a:spcAft>
             </a:pPr>
             <a:r>
@@ -1866,15 +1866,15 @@
           <a:lstStyle/>
           <a:p>
             <a:pPr algn="l">
-              <a:lnSpc>
-                <a:spcPct val="115000"/>
-              </a:lnSpc>
-              <a:spcAft>
-                <a:spcPts val="500"/>
-              </a:spcAft>
-            </a:pPr>
-            <a:r>
-              <a:rPr sz="1000" b="1" lang="zh-TW" dirty="0">
+              <a:spcBef>
+                <a:spcPts val="0"/>
+              </a:spcBef>
+              <a:spcAft>
+                <a:spcPts val="133"/>
+              </a:spcAft>
+            </a:pPr>
+            <a:r>
+              <a:rPr sz="800" b="1" lang="zh-TW" dirty="0">
                 <a:solidFill>
                   <a:srgbClr val="000000"/>
                 </a:solidFill>
@@ -1885,7 +1885,7 @@
               <a:t>▍這一張要做什麼</a:t>
             </a:r>
             <a:r>
-              <a:rPr sz="1000" lang="zh-TW" dirty="0">
+              <a:rPr sz="800" lang="zh-TW" dirty="0">
                 <a:solidFill>
                   <a:srgbClr val="000000"/>
                 </a:solidFill>
@@ -1899,15 +1899,15 @@
           </a:p>
           <a:p>
             <a:pPr algn="l">
-              <a:lnSpc>
-                <a:spcPct val="115000"/>
-              </a:lnSpc>
-              <a:spcAft>
-                <a:spcPts val="500"/>
-              </a:spcAft>
-            </a:pPr>
-            <a:r>
-              <a:rPr sz="1000" lang="zh-TW" dirty="0">
+              <a:spcBef>
+                <a:spcPts val="0"/>
+              </a:spcBef>
+              <a:spcAft>
+                <a:spcPts val="133"/>
+              </a:spcAft>
+            </a:pPr>
+            <a:r>
+              <a:rPr sz="800" lang="zh-TW" dirty="0">
                 <a:solidFill>
                   <a:srgbClr val="000000"/>
                 </a:solidFill>
@@ -1921,15 +1921,15 @@
           </a:p>
           <a:p>
             <a:pPr algn="l">
-              <a:lnSpc>
-                <a:spcPct val="115000"/>
-              </a:lnSpc>
-              <a:spcAft>
-                <a:spcPts val="500"/>
-              </a:spcAft>
-            </a:pPr>
-            <a:r>
-              <a:rPr sz="1000" b="1" lang="zh-TW" dirty="0">
+              <a:spcBef>
+                <a:spcPts val="0"/>
+              </a:spcBef>
+              <a:spcAft>
+                <a:spcPts val="133"/>
+              </a:spcAft>
+            </a:pPr>
+            <a:r>
+              <a:rPr sz="800" b="1" lang="zh-TW" dirty="0">
                 <a:solidFill>
                   <a:srgbClr val="000000"/>
                 </a:solidFill>
@@ -1940,7 +1940,7 @@
               <a:t>▍畫面上圈這裡</a:t>
             </a:r>
             <a:r>
-              <a:rPr sz="1000" lang="zh-TW" dirty="0">
+              <a:rPr sz="800" lang="zh-TW" dirty="0">
                 <a:solidFill>
                   <a:srgbClr val="000000"/>
                 </a:solidFill>
@@ -1954,15 +1954,15 @@
           </a:p>
           <a:p>
             <a:pPr algn="l">
-              <a:lnSpc>
-                <a:spcPct val="115000"/>
-              </a:lnSpc>
-              <a:spcAft>
-                <a:spcPts val="500"/>
-              </a:spcAft>
-            </a:pPr>
-            <a:r>
-              <a:rPr sz="1000" lang="zh-TW" dirty="0">
+              <a:spcBef>
+                <a:spcPts val="0"/>
+              </a:spcBef>
+              <a:spcAft>
+                <a:spcPts val="133"/>
+              </a:spcAft>
+            </a:pPr>
+            <a:r>
+              <a:rPr sz="800" lang="zh-TW" dirty="0">
                 <a:solidFill>
                   <a:srgbClr val="000000"/>
                 </a:solidFill>
@@ -1976,15 +1976,15 @@
           </a:p>
           <a:p>
             <a:pPr algn="l">
-              <a:lnSpc>
-                <a:spcPct val="115000"/>
-              </a:lnSpc>
-              <a:spcAft>
-                <a:spcPts val="500"/>
-              </a:spcAft>
-            </a:pPr>
-            <a:r>
-              <a:rPr sz="1000" b="1" lang="zh-TW" dirty="0">
+              <a:spcBef>
+                <a:spcPts val="0"/>
+              </a:spcBef>
+              <a:spcAft>
+                <a:spcPts val="133"/>
+              </a:spcAft>
+            </a:pPr>
+            <a:r>
+              <a:rPr sz="800" b="1" lang="zh-TW" dirty="0">
                 <a:solidFill>
                   <a:srgbClr val="000000"/>
                 </a:solidFill>
@@ -1995,7 +1995,7 @@
               <a:t>▍以下照著唸</a:t>
             </a:r>
             <a:r>
-              <a:rPr sz="1000" lang="zh-TW" dirty="0">
+              <a:rPr sz="800" lang="zh-TW" dirty="0">
                 <a:solidFill>
                   <a:srgbClr val="000000"/>
                 </a:solidFill>
@@ -2009,15 +2009,15 @@
           </a:p>
           <a:p>
             <a:pPr algn="l">
-              <a:lnSpc>
-                <a:spcPct val="115000"/>
-              </a:lnSpc>
-              <a:spcAft>
-                <a:spcPts val="500"/>
-              </a:spcAft>
-            </a:pPr>
-            <a:r>
-              <a:rPr sz="1000" lang="zh-TW" dirty="0">
+              <a:spcBef>
+                <a:spcPts val="0"/>
+              </a:spcBef>
+              <a:spcAft>
+                <a:spcPts val="133"/>
+              </a:spcAft>
+            </a:pPr>
+            <a:r>
+              <a:rPr sz="800" lang="zh-TW" dirty="0">
                 <a:solidFill>
                   <a:srgbClr val="000000"/>
                 </a:solidFill>
@@ -2028,7 +2028,7 @@
               <a:t>現在講一件規格表上</a:t>
             </a:r>
             <a:r>
-              <a:rPr sz="1000" b="1" lang="zh-TW" dirty="0">
+              <a:rPr sz="800" b="1" lang="zh-TW" dirty="0">
                 <a:solidFill>
                   <a:srgbClr val="000000"/>
                 </a:solidFill>
@@ -2039,7 +2039,7 @@
               <a:t>常常找不到</a:t>
             </a:r>
             <a:r>
-              <a:rPr sz="1000" lang="zh-TW" dirty="0">
+              <a:rPr sz="800" lang="zh-TW" dirty="0">
                 <a:solidFill>
                   <a:srgbClr val="000000"/>
                 </a:solidFill>
@@ -2050,7 +2050,7 @@
               <a:t>，但是害人最慘的事：</a:t>
             </a:r>
             <a:r>
-              <a:rPr sz="1000" b="1" lang="zh-TW" dirty="0">
+              <a:rPr sz="800" b="1" lang="zh-TW" dirty="0">
                 <a:solidFill>
                   <a:srgbClr val="000000"/>
                 </a:solidFill>
@@ -2061,7 +2061,7 @@
               <a:t>標定</a:t>
             </a:r>
             <a:r>
-              <a:rPr sz="1000" lang="zh-TW" dirty="0">
+              <a:rPr sz="800" lang="zh-TW" dirty="0">
                 <a:solidFill>
                   <a:srgbClr val="000000"/>
                 </a:solidFill>
@@ -2075,15 +2075,15 @@
           </a:p>
           <a:p>
             <a:pPr algn="l">
-              <a:lnSpc>
-                <a:spcPct val="115000"/>
-              </a:lnSpc>
-              <a:spcAft>
-                <a:spcPts val="500"/>
-              </a:spcAft>
-            </a:pPr>
-            <a:r>
-              <a:rPr sz="1000" lang="zh-TW" dirty="0">
+              <a:spcBef>
+                <a:spcPts val="0"/>
+              </a:spcBef>
+              <a:spcAft>
+                <a:spcPts val="133"/>
+              </a:spcAft>
+            </a:pPr>
+            <a:r>
+              <a:rPr sz="800" lang="zh-TW" dirty="0">
                 <a:solidFill>
                   <a:srgbClr val="000000"/>
                 </a:solidFill>
@@ -2094,7 +2094,7 @@
               <a:t>先講問題。一台車上有相機、有光達。相機說「前面有一個人」，光達說「前面三十公尺有一團東西」。要把這兩句話</a:t>
             </a:r>
             <a:r>
-              <a:rPr sz="1000" b="1" lang="zh-TW" dirty="0">
+              <a:rPr sz="800" b="1" lang="zh-TW" dirty="0">
                 <a:solidFill>
                   <a:srgbClr val="000000"/>
                 </a:solidFill>
@@ -2105,7 +2105,7 @@
               <a:t>合成一句</a:t>
             </a:r>
             <a:r>
-              <a:rPr sz="1000" lang="zh-TW" dirty="0">
+              <a:rPr sz="800" lang="zh-TW" dirty="0">
                 <a:solidFill>
                   <a:srgbClr val="000000"/>
                 </a:solidFill>
@@ -2119,15 +2119,15 @@
           </a:p>
           <a:p>
             <a:pPr algn="l">
-              <a:lnSpc>
-                <a:spcPct val="115000"/>
-              </a:lnSpc>
-              <a:spcAft>
-                <a:spcPts val="500"/>
-              </a:spcAft>
-            </a:pPr>
-            <a:r>
-              <a:rPr sz="1000" b="1" lang="zh-TW" dirty="0">
+              <a:spcBef>
+                <a:spcPts val="0"/>
+              </a:spcBef>
+              <a:spcAft>
+                <a:spcPts val="133"/>
+              </a:spcAft>
+            </a:pPr>
+            <a:r>
+              <a:rPr sz="800" b="1" lang="zh-TW" dirty="0">
                 <a:solidFill>
                   <a:srgbClr val="000000"/>
                 </a:solidFill>
@@ -2138,7 +2138,7 @@
               <a:t>相機和光達，到底差多遠、差幾度？</a:t>
             </a:r>
             <a:r>
-              <a:rPr sz="1000" lang="zh-TW" dirty="0">
+              <a:rPr sz="800" lang="zh-TW" dirty="0">
                 <a:solidFill>
                   <a:srgbClr val="000000"/>
                 </a:solidFill>
@@ -2152,15 +2152,15 @@
           </a:p>
           <a:p>
             <a:pPr algn="l">
-              <a:lnSpc>
-                <a:spcPct val="115000"/>
-              </a:lnSpc>
-              <a:spcAft>
-                <a:spcPts val="500"/>
-              </a:spcAft>
-            </a:pPr>
-            <a:r>
-              <a:rPr sz="1000" lang="zh-TW" dirty="0">
+              <a:spcBef>
+                <a:spcPts val="0"/>
+              </a:spcBef>
+              <a:spcAft>
+                <a:spcPts val="133"/>
+              </a:spcAft>
+            </a:pPr>
+            <a:r>
+              <a:rPr sz="800" lang="zh-TW" dirty="0">
                 <a:solidFill>
                   <a:srgbClr val="000000"/>
                 </a:solidFill>
@@ -2174,15 +2174,15 @@
           </a:p>
           <a:p>
             <a:pPr algn="l">
-              <a:lnSpc>
-                <a:spcPct val="115000"/>
-              </a:lnSpc>
-              <a:spcAft>
-                <a:spcPts val="500"/>
-              </a:spcAft>
-            </a:pPr>
-            <a:r>
-              <a:rPr sz="1000" b="1" lang="zh-TW" dirty="0">
+              <a:spcBef>
+                <a:spcPts val="0"/>
+              </a:spcBef>
+              <a:spcAft>
+                <a:spcPts val="133"/>
+              </a:spcAft>
+            </a:pPr>
+            <a:r>
+              <a:rPr sz="800" b="1" lang="zh-TW" dirty="0">
                 <a:solidFill>
                   <a:srgbClr val="000000"/>
                 </a:solidFill>
@@ -2193,7 +2193,7 @@
               <a:t>第一種叫內參，intrinsic。</a:t>
             </a:r>
             <a:r>
-              <a:rPr sz="1000" lang="zh-TW" dirty="0">
+              <a:rPr sz="800" lang="zh-TW" dirty="0">
                 <a:solidFill>
                   <a:srgbClr val="000000"/>
                 </a:solidFill>
@@ -2207,15 +2207,15 @@
           </a:p>
           <a:p>
             <a:pPr algn="l">
-              <a:lnSpc>
-                <a:spcPct val="115000"/>
-              </a:lnSpc>
-              <a:spcAft>
-                <a:spcPts val="500"/>
-              </a:spcAft>
-            </a:pPr>
-            <a:r>
-              <a:rPr sz="1000" b="1" lang="zh-TW" dirty="0">
+              <a:spcBef>
+                <a:spcPts val="0"/>
+              </a:spcBef>
+              <a:spcAft>
+                <a:spcPts val="133"/>
+              </a:spcAft>
+            </a:pPr>
+            <a:r>
+              <a:rPr sz="800" b="1" lang="zh-TW" dirty="0">
                 <a:solidFill>
                   <a:srgbClr val="000000"/>
                 </a:solidFill>
@@ -2226,7 +2226,7 @@
               <a:t>第二種叫外參，extrinsic。</a:t>
             </a:r>
             <a:r>
-              <a:rPr sz="1000" lang="zh-TW" dirty="0">
+              <a:rPr sz="800" lang="zh-TW" dirty="0">
                 <a:solidFill>
                   <a:srgbClr val="000000"/>
                 </a:solidFill>
@@ -2240,15 +2240,15 @@
           </a:p>
           <a:p>
             <a:pPr algn="l">
-              <a:lnSpc>
-                <a:spcPct val="115000"/>
-              </a:lnSpc>
-              <a:spcAft>
-                <a:spcPts val="500"/>
-              </a:spcAft>
-            </a:pPr>
-            <a:r>
-              <a:rPr sz="1000" lang="zh-TW" dirty="0">
+              <a:spcBef>
+                <a:spcPts val="0"/>
+              </a:spcBef>
+              <a:spcAft>
+                <a:spcPts val="133"/>
+              </a:spcAft>
+            </a:pPr>
+            <a:r>
+              <a:rPr sz="800" lang="zh-TW" dirty="0">
                 <a:solidFill>
                   <a:srgbClr val="000000"/>
                 </a:solidFill>
@@ -2262,15 +2262,15 @@
           </a:p>
           <a:p>
             <a:pPr algn="l">
-              <a:lnSpc>
-                <a:spcPct val="115000"/>
-              </a:lnSpc>
-              <a:spcAft>
-                <a:spcPts val="500"/>
-              </a:spcAft>
-            </a:pPr>
-            <a:r>
-              <a:rPr sz="1000" lang="zh-TW" dirty="0">
+              <a:spcBef>
+                <a:spcPts val="0"/>
+              </a:spcBef>
+              <a:spcAft>
+                <a:spcPts val="133"/>
+              </a:spcAft>
+            </a:pPr>
+            <a:r>
+              <a:rPr sz="800" lang="zh-TW" dirty="0">
                 <a:solidFill>
                   <a:srgbClr val="000000"/>
                 </a:solidFill>
@@ -2281,7 +2281,7 @@
               <a:t>假設角度只差了</a:t>
             </a:r>
             <a:r>
-              <a:rPr sz="1000" b="1" lang="zh-TW" dirty="0">
+              <a:rPr sz="800" b="1" lang="zh-TW" dirty="0">
                 <a:solidFill>
                   <a:srgbClr val="000000"/>
                 </a:solidFill>
@@ -2292,7 +2292,7 @@
               <a:t>一度</a:t>
             </a:r>
             <a:r>
-              <a:rPr sz="1000" lang="zh-TW" dirty="0">
+              <a:rPr sz="800" lang="zh-TW" dirty="0">
                 <a:solidFill>
                   <a:srgbClr val="000000"/>
                 </a:solidFill>
@@ -2306,15 +2306,15 @@
           </a:p>
           <a:p>
             <a:pPr algn="l">
-              <a:lnSpc>
-                <a:spcPct val="115000"/>
-              </a:lnSpc>
-              <a:spcAft>
-                <a:spcPts val="500"/>
-              </a:spcAft>
-            </a:pPr>
-            <a:r>
-              <a:rPr sz="1000" lang="zh-TW" dirty="0">
+              <a:spcBef>
+                <a:spcPts val="0"/>
+              </a:spcBef>
+              <a:spcAft>
+                <a:spcPts val="133"/>
+              </a:spcAft>
+            </a:pPr>
+            <a:r>
+              <a:rPr sz="800" lang="zh-TW" dirty="0">
                 <a:solidFill>
                   <a:srgbClr val="000000"/>
                 </a:solidFill>
@@ -2325,7 +2325,7 @@
               <a:t>在五十公尺外，一度張開的距離是：五十乘以一度的弧度，大約</a:t>
             </a:r>
             <a:r>
-              <a:rPr sz="1000" b="1" lang="zh-TW" dirty="0">
+              <a:rPr sz="800" b="1" lang="zh-TW" dirty="0">
                 <a:solidFill>
                   <a:srgbClr val="000000"/>
                 </a:solidFill>
@@ -2336,7 +2336,7 @@
               <a:t>零點八七公尺</a:t>
             </a:r>
             <a:r>
-              <a:rPr sz="1000" lang="zh-TW" dirty="0">
+              <a:rPr sz="800" lang="zh-TW" dirty="0">
                 <a:solidFill>
                   <a:srgbClr val="000000"/>
                 </a:solidFill>
@@ -2350,15 +2350,15 @@
           </a:p>
           <a:p>
             <a:pPr algn="l">
-              <a:lnSpc>
-                <a:spcPct val="115000"/>
-              </a:lnSpc>
-              <a:spcAft>
-                <a:spcPts val="500"/>
-              </a:spcAft>
-            </a:pPr>
-            <a:r>
-              <a:rPr sz="1000" lang="zh-TW" dirty="0">
+              <a:spcBef>
+                <a:spcPts val="0"/>
+              </a:spcBef>
+              <a:spcAft>
+                <a:spcPts val="133"/>
+              </a:spcAft>
+            </a:pPr>
+            <a:r>
+              <a:rPr sz="800" lang="zh-TW" dirty="0">
                 <a:solidFill>
                   <a:srgbClr val="000000"/>
                 </a:solidFill>
@@ -2369,7 +2369,7 @@
               <a:t>我把這個數字寫在白板上：</a:t>
             </a:r>
             <a:r>
-              <a:rPr sz="1000" b="1" lang="zh-TW" dirty="0">
+              <a:rPr sz="800" b="1" lang="zh-TW" dirty="0">
                 <a:solidFill>
                   <a:srgbClr val="000000"/>
                 </a:solidFill>
@@ -2380,7 +2380,7 @@
               <a:t>差一度，五十公尺外就差了將近一公尺。</a:t>
             </a:r>
             <a:r>
-              <a:rPr sz="1000" lang="zh-TW" dirty="0">
+              <a:rPr sz="800" lang="zh-TW" dirty="0">
                 <a:solidFill>
                   <a:srgbClr val="000000"/>
                 </a:solidFill>
@@ -2394,15 +2394,15 @@
           </a:p>
           <a:p>
             <a:pPr algn="l">
-              <a:lnSpc>
-                <a:spcPct val="115000"/>
-              </a:lnSpc>
-              <a:spcAft>
-                <a:spcPts val="500"/>
-              </a:spcAft>
-            </a:pPr>
-            <a:r>
-              <a:rPr sz="1000" lang="zh-TW" dirty="0">
+              <a:spcBef>
+                <a:spcPts val="0"/>
+              </a:spcBef>
+              <a:spcAft>
+                <a:spcPts val="133"/>
+              </a:spcAft>
+            </a:pPr>
+            <a:r>
+              <a:rPr sz="800" lang="zh-TW" dirty="0">
                 <a:solidFill>
                   <a:srgbClr val="000000"/>
                 </a:solidFill>
@@ -2416,15 +2416,15 @@
           </a:p>
           <a:p>
             <a:pPr algn="l">
-              <a:lnSpc>
-                <a:spcPct val="115000"/>
-              </a:lnSpc>
-              <a:spcAft>
-                <a:spcPts val="500"/>
-              </a:spcAft>
-            </a:pPr>
-            <a:r>
-              <a:rPr sz="1000" lang="zh-TW" dirty="0">
+              <a:spcBef>
+                <a:spcPts val="0"/>
+              </a:spcBef>
+              <a:spcAft>
+                <a:spcPts val="133"/>
+              </a:spcAft>
+            </a:pPr>
+            <a:r>
+              <a:rPr sz="800" lang="zh-TW" dirty="0">
                 <a:solidFill>
                   <a:srgbClr val="000000"/>
                 </a:solidFill>
@@ -2435,7 +2435,7 @@
               <a:t>更麻煩的是：標定</a:t>
             </a:r>
             <a:r>
-              <a:rPr sz="1000" b="1" lang="zh-TW" dirty="0">
+              <a:rPr sz="800" b="1" lang="zh-TW" dirty="0">
                 <a:solidFill>
                   <a:srgbClr val="000000"/>
                 </a:solidFill>
@@ -2446,7 +2446,7 @@
               <a:t>會跑掉</a:t>
             </a:r>
             <a:r>
-              <a:rPr sz="1000" lang="zh-TW" dirty="0">
+              <a:rPr sz="800" lang="zh-TW" dirty="0">
                 <a:solidFill>
                   <a:srgbClr val="000000"/>
                 </a:solidFill>
@@ -2457,7 +2457,7 @@
               <a:t>。車子每天在路上震動，過了一個坑洞，或者擋風玻璃換過一次，外參就變了。所以真正在營運的自駕車隊，要</a:t>
             </a:r>
             <a:r>
-              <a:rPr sz="1000" b="1" lang="zh-TW" dirty="0">
+              <a:rPr sz="800" b="1" lang="zh-TW" dirty="0">
                 <a:solidFill>
                   <a:srgbClr val="000000"/>
                 </a:solidFill>
@@ -2468,7 +2468,7 @@
               <a:t>定期重新標定</a:t>
             </a:r>
             <a:r>
-              <a:rPr sz="1000" lang="zh-TW" dirty="0">
+              <a:rPr sz="800" lang="zh-TW" dirty="0">
                 <a:solidFill>
                   <a:srgbClr val="000000"/>
                 </a:solidFill>
@@ -2482,15 +2482,15 @@
           </a:p>
           <a:p>
             <a:pPr algn="l">
-              <a:lnSpc>
-                <a:spcPct val="115000"/>
-              </a:lnSpc>
-              <a:spcAft>
-                <a:spcPts val="500"/>
-              </a:spcAft>
-            </a:pPr>
-            <a:r>
-              <a:rPr sz="1000" lang="zh-TW" dirty="0">
+              <a:spcBef>
+                <a:spcPts val="0"/>
+              </a:spcBef>
+              <a:spcAft>
+                <a:spcPts val="133"/>
+              </a:spcAft>
+            </a:pPr>
+            <a:r>
+              <a:rPr sz="800" lang="zh-TW" dirty="0">
                 <a:solidFill>
                   <a:srgbClr val="000000"/>
                 </a:solidFill>
@@ -2524,11 +2524,11 @@
           <a:lstStyle/>
           <a:p>
             <a:pPr algn="l">
-              <a:lnSpc>
-                <a:spcPct val="115000"/>
-              </a:lnSpc>
-              <a:spcAft>
-                <a:spcPts val="500"/>
+              <a:spcBef>
+                <a:spcPts val="0"/>
+              </a:spcBef>
+              <a:spcAft>
+                <a:spcPts val="167"/>
               </a:spcAft>
             </a:pPr>
             <a:r>
@@ -2603,15 +2603,15 @@
           <a:lstStyle/>
           <a:p>
             <a:pPr algn="l">
-              <a:lnSpc>
-                <a:spcPct val="115000"/>
-              </a:lnSpc>
-              <a:spcAft>
-                <a:spcPts val="500"/>
-              </a:spcAft>
-            </a:pPr>
-            <a:r>
-              <a:rPr sz="1000" b="1" lang="zh-TW" dirty="0">
+              <a:spcBef>
+                <a:spcPts val="0"/>
+              </a:spcBef>
+              <a:spcAft>
+                <a:spcPts val="142"/>
+              </a:spcAft>
+            </a:pPr>
+            <a:r>
+              <a:rPr sz="850" b="1" lang="zh-TW" dirty="0">
                 <a:solidFill>
                   <a:srgbClr val="000000"/>
                 </a:solidFill>
@@ -2622,7 +2622,7 @@
               <a:t>▍這一張要做什麼</a:t>
             </a:r>
             <a:r>
-              <a:rPr sz="1000" lang="zh-TW" dirty="0">
+              <a:rPr sz="850" lang="zh-TW" dirty="0">
                 <a:solidFill>
                   <a:srgbClr val="000000"/>
                 </a:solidFill>
@@ -2636,15 +2636,15 @@
           </a:p>
           <a:p>
             <a:pPr algn="l">
-              <a:lnSpc>
-                <a:spcPct val="115000"/>
-              </a:lnSpc>
-              <a:spcAft>
-                <a:spcPts val="500"/>
-              </a:spcAft>
-            </a:pPr>
-            <a:r>
-              <a:rPr sz="1000" lang="zh-TW" dirty="0">
+              <a:spcBef>
+                <a:spcPts val="0"/>
+              </a:spcBef>
+              <a:spcAft>
+                <a:spcPts val="142"/>
+              </a:spcAft>
+            </a:pPr>
+            <a:r>
+              <a:rPr sz="850" lang="zh-TW" dirty="0">
                 <a:solidFill>
                   <a:srgbClr val="000000"/>
                 </a:solidFill>
@@ -2658,15 +2658,15 @@
           </a:p>
           <a:p>
             <a:pPr algn="l">
-              <a:lnSpc>
-                <a:spcPct val="115000"/>
-              </a:lnSpc>
-              <a:spcAft>
-                <a:spcPts val="500"/>
-              </a:spcAft>
-            </a:pPr>
-            <a:r>
-              <a:rPr sz="1000" b="1" lang="zh-TW" dirty="0">
+              <a:spcBef>
+                <a:spcPts val="0"/>
+              </a:spcBef>
+              <a:spcAft>
+                <a:spcPts val="142"/>
+              </a:spcAft>
+            </a:pPr>
+            <a:r>
+              <a:rPr sz="850" b="1" lang="zh-TW" dirty="0">
                 <a:solidFill>
                   <a:srgbClr val="000000"/>
                 </a:solidFill>
@@ -2677,7 +2677,7 @@
               <a:t>▍畫面上圈這裡</a:t>
             </a:r>
             <a:r>
-              <a:rPr sz="1000" lang="zh-TW" dirty="0">
+              <a:rPr sz="850" lang="zh-TW" dirty="0">
                 <a:solidFill>
                   <a:srgbClr val="000000"/>
                 </a:solidFill>
@@ -2691,15 +2691,15 @@
           </a:p>
           <a:p>
             <a:pPr algn="l">
-              <a:lnSpc>
-                <a:spcPct val="115000"/>
-              </a:lnSpc>
-              <a:spcAft>
-                <a:spcPts val="500"/>
-              </a:spcAft>
-            </a:pPr>
-            <a:r>
-              <a:rPr sz="1000" lang="zh-TW" dirty="0">
+              <a:spcBef>
+                <a:spcPts val="0"/>
+              </a:spcBef>
+              <a:spcAft>
+                <a:spcPts val="142"/>
+              </a:spcAft>
+            </a:pPr>
+            <a:r>
+              <a:rPr sz="850" lang="zh-TW" dirty="0">
                 <a:solidFill>
                   <a:srgbClr val="000000"/>
                 </a:solidFill>
@@ -2713,15 +2713,15 @@
           </a:p>
           <a:p>
             <a:pPr algn="l">
-              <a:lnSpc>
-                <a:spcPct val="115000"/>
-              </a:lnSpc>
-              <a:spcAft>
-                <a:spcPts val="500"/>
-              </a:spcAft>
-            </a:pPr>
-            <a:r>
-              <a:rPr sz="1000" b="1" lang="zh-TW" dirty="0">
+              <a:spcBef>
+                <a:spcPts val="0"/>
+              </a:spcBef>
+              <a:spcAft>
+                <a:spcPts val="142"/>
+              </a:spcAft>
+            </a:pPr>
+            <a:r>
+              <a:rPr sz="850" b="1" lang="zh-TW" dirty="0">
                 <a:solidFill>
                   <a:srgbClr val="000000"/>
                 </a:solidFill>
@@ -2732,7 +2732,7 @@
               <a:t>▍以下照著唸</a:t>
             </a:r>
             <a:r>
-              <a:rPr sz="1000" lang="zh-TW" dirty="0">
+              <a:rPr sz="850" lang="zh-TW" dirty="0">
                 <a:solidFill>
                   <a:srgbClr val="000000"/>
                 </a:solidFill>
@@ -2746,15 +2746,15 @@
           </a:p>
           <a:p>
             <a:pPr algn="l">
-              <a:lnSpc>
-                <a:spcPct val="115000"/>
-              </a:lnSpc>
-              <a:spcAft>
-                <a:spcPts val="500"/>
-              </a:spcAft>
-            </a:pPr>
-            <a:r>
-              <a:rPr sz="1000" lang="zh-TW" dirty="0">
+              <a:spcBef>
+                <a:spcPts val="0"/>
+              </a:spcBef>
+              <a:spcAft>
+                <a:spcPts val="142"/>
+              </a:spcAft>
+            </a:pPr>
+            <a:r>
+              <a:rPr sz="850" lang="zh-TW" dirty="0">
                 <a:solidFill>
                   <a:srgbClr val="000000"/>
                 </a:solidFill>
@@ -2765,7 +2765,7 @@
               <a:t>最後一件事是</a:t>
             </a:r>
             <a:r>
-              <a:rPr sz="1000" b="1" lang="zh-TW" dirty="0">
+              <a:rPr sz="850" b="1" lang="zh-TW" dirty="0">
                 <a:solidFill>
                   <a:srgbClr val="000000"/>
                 </a:solidFill>
@@ -2776,7 +2776,7 @@
               <a:t>時間同步</a:t>
             </a:r>
             <a:r>
-              <a:rPr sz="1000" lang="zh-TW" dirty="0">
+              <a:rPr sz="850" lang="zh-TW" dirty="0">
                 <a:solidFill>
                   <a:srgbClr val="000000"/>
                 </a:solidFill>
@@ -2790,15 +2790,15 @@
           </a:p>
           <a:p>
             <a:pPr algn="l">
-              <a:lnSpc>
-                <a:spcPct val="115000"/>
-              </a:lnSpc>
-              <a:spcAft>
-                <a:spcPts val="500"/>
-              </a:spcAft>
-            </a:pPr>
-            <a:r>
-              <a:rPr sz="1000" lang="zh-TW" dirty="0">
+              <a:spcBef>
+                <a:spcPts val="0"/>
+              </a:spcBef>
+              <a:spcAft>
+                <a:spcPts val="142"/>
+              </a:spcAft>
+            </a:pPr>
+            <a:r>
+              <a:rPr sz="850" lang="zh-TW" dirty="0">
                 <a:solidFill>
                   <a:srgbClr val="000000"/>
                 </a:solidFill>
@@ -2812,15 +2812,15 @@
           </a:p>
           <a:p>
             <a:pPr algn="l">
-              <a:lnSpc>
-                <a:spcPct val="115000"/>
-              </a:lnSpc>
-              <a:spcAft>
-                <a:spcPts val="500"/>
-              </a:spcAft>
-            </a:pPr>
-            <a:r>
-              <a:rPr sz="1000" lang="zh-TW" dirty="0">
+              <a:spcBef>
+                <a:spcPts val="0"/>
+              </a:spcBef>
+              <a:spcAft>
+                <a:spcPts val="142"/>
+              </a:spcAft>
+            </a:pPr>
+            <a:r>
+              <a:rPr sz="850" lang="zh-TW" dirty="0">
                 <a:solidFill>
                   <a:srgbClr val="000000"/>
                 </a:solidFill>
@@ -2834,15 +2834,15 @@
           </a:p>
           <a:p>
             <a:pPr algn="l">
-              <a:lnSpc>
-                <a:spcPct val="115000"/>
-              </a:lnSpc>
-              <a:spcAft>
-                <a:spcPts val="500"/>
-              </a:spcAft>
-            </a:pPr>
-            <a:r>
-              <a:rPr sz="1000" lang="zh-TW" dirty="0">
+              <a:spcBef>
+                <a:spcPts val="0"/>
+              </a:spcBef>
+              <a:spcAft>
+                <a:spcPts val="142"/>
+              </a:spcAft>
+            </a:pPr>
+            <a:r>
+              <a:rPr sz="850" lang="zh-TW" dirty="0">
                 <a:solidFill>
                   <a:srgbClr val="000000"/>
                 </a:solidFill>
@@ -2853,7 +2853,7 @@
               <a:t>假設車子現在收到一張相機的畫面，還有一圈光達的點雲，要把它們合起來。問題是——</a:t>
             </a:r>
             <a:r>
-              <a:rPr sz="1000" b="1" lang="zh-TW" dirty="0">
+              <a:rPr sz="850" b="1" lang="zh-TW" dirty="0">
                 <a:solidFill>
                   <a:srgbClr val="000000"/>
                 </a:solidFill>
@@ -2864,7 +2864,7 @@
               <a:t>這兩份資料是同一個瞬間的嗎？</a:t>
             </a:r>
             <a:r>
-              <a:rPr sz="1000" lang="zh-TW" dirty="0">
+              <a:rPr sz="850" lang="zh-TW" dirty="0">
                 <a:solidFill>
                   <a:srgbClr val="000000"/>
                 </a:solidFill>
@@ -2878,15 +2878,15 @@
           </a:p>
           <a:p>
             <a:pPr algn="l">
-              <a:lnSpc>
-                <a:spcPct val="115000"/>
-              </a:lnSpc>
-              <a:spcAft>
-                <a:spcPts val="500"/>
-              </a:spcAft>
-            </a:pPr>
-            <a:r>
-              <a:rPr sz="1000" lang="zh-TW" dirty="0">
+              <a:spcBef>
+                <a:spcPts val="0"/>
+              </a:spcBef>
+              <a:spcAft>
+                <a:spcPts val="142"/>
+              </a:spcAft>
+            </a:pPr>
+            <a:r>
+              <a:rPr sz="850" lang="zh-TW" dirty="0">
                 <a:solidFill>
                   <a:srgbClr val="000000"/>
                 </a:solidFill>
@@ -2897,7 +2897,7 @@
               <a:t>如果沒有處理，它們可能差到五十毫秒。時速四十的時候，五十毫秒車子走了</a:t>
             </a:r>
             <a:r>
-              <a:rPr sz="1000" b="1" lang="zh-TW" dirty="0">
+              <a:rPr sz="850" b="1" lang="zh-TW" dirty="0">
                 <a:solidFill>
                   <a:srgbClr val="000000"/>
                 </a:solidFill>
@@ -2908,7 +2908,7 @@
               <a:t>零點五六公尺</a:t>
             </a:r>
             <a:r>
-              <a:rPr sz="1000" lang="zh-TW" dirty="0">
+              <a:rPr sz="850" lang="zh-TW" dirty="0">
                 <a:solidFill>
                   <a:srgbClr val="000000"/>
                 </a:solidFill>
@@ -2922,15 +2922,15 @@
           </a:p>
           <a:p>
             <a:pPr algn="l">
-              <a:lnSpc>
-                <a:spcPct val="115000"/>
-              </a:lnSpc>
-              <a:spcAft>
-                <a:spcPts val="500"/>
-              </a:spcAft>
-            </a:pPr>
-            <a:r>
-              <a:rPr sz="1000" lang="zh-TW" dirty="0">
+              <a:spcBef>
+                <a:spcPts val="0"/>
+              </a:spcBef>
+              <a:spcAft>
+                <a:spcPts val="142"/>
+              </a:spcAft>
+            </a:pPr>
+            <a:r>
+              <a:rPr sz="850" lang="zh-TW" dirty="0">
                 <a:solidFill>
                   <a:srgbClr val="000000"/>
                 </a:solidFill>
@@ -2941,7 +2941,7 @@
               <a:t>所以你會把相機在 A 點看到的人，跟光達在 B 點量到的距離配在一起，得到一個</a:t>
             </a:r>
             <a:r>
-              <a:rPr sz="1000" b="1" lang="zh-TW" dirty="0">
+              <a:rPr sz="850" b="1" lang="zh-TW" dirty="0">
                 <a:solidFill>
                   <a:srgbClr val="000000"/>
                 </a:solidFill>
@@ -2952,7 +2952,7 @@
               <a:t>根本不存在的位置</a:t>
             </a:r>
             <a:r>
-              <a:rPr sz="1000" lang="zh-TW" dirty="0">
+              <a:rPr sz="850" lang="zh-TW" dirty="0">
                 <a:solidFill>
                   <a:srgbClr val="000000"/>
                 </a:solidFill>
@@ -2966,15 +2966,15 @@
           </a:p>
           <a:p>
             <a:pPr algn="l">
-              <a:lnSpc>
-                <a:spcPct val="115000"/>
-              </a:lnSpc>
-              <a:spcAft>
-                <a:spcPts val="500"/>
-              </a:spcAft>
-            </a:pPr>
-            <a:r>
-              <a:rPr sz="1000" lang="zh-TW" dirty="0">
+              <a:spcBef>
+                <a:spcPts val="0"/>
+              </a:spcBef>
+              <a:spcAft>
+                <a:spcPts val="142"/>
+              </a:spcAft>
+            </a:pPr>
+            <a:r>
+              <a:rPr sz="850" lang="zh-TW" dirty="0">
                 <a:solidFill>
                   <a:srgbClr val="000000"/>
                 </a:solidFill>
@@ -2988,15 +2988,15 @@
           </a:p>
           <a:p>
             <a:pPr algn="l">
-              <a:lnSpc>
-                <a:spcPct val="115000"/>
-              </a:lnSpc>
-              <a:spcAft>
-                <a:spcPts val="500"/>
-              </a:spcAft>
-            </a:pPr>
-            <a:r>
-              <a:rPr sz="1000" lang="zh-TW" dirty="0">
+              <a:spcBef>
+                <a:spcPts val="0"/>
+              </a:spcBef>
+              <a:spcAft>
+                <a:spcPts val="142"/>
+              </a:spcAft>
+            </a:pPr>
+            <a:r>
+              <a:rPr sz="850" lang="zh-TW" dirty="0">
                 <a:solidFill>
                   <a:srgbClr val="000000"/>
                 </a:solidFill>
@@ -3007,7 +3007,7 @@
               <a:t>解法是讓每一顆感測器都在資料上蓋一個</a:t>
             </a:r>
             <a:r>
-              <a:rPr sz="1000" b="1" lang="zh-TW" dirty="0">
+              <a:rPr sz="850" b="1" lang="zh-TW" dirty="0">
                 <a:solidFill>
                   <a:srgbClr val="000000"/>
                 </a:solidFill>
@@ -3018,7 +3018,7 @@
               <a:t>時間戳</a:t>
             </a:r>
             <a:r>
-              <a:rPr sz="1000" lang="zh-TW" dirty="0">
+              <a:rPr sz="850" lang="zh-TW" dirty="0">
                 <a:solidFill>
                   <a:srgbClr val="000000"/>
                 </a:solidFill>
@@ -3029,7 +3029,7 @@
               <a:t>，而且全車用同一個時鐘。高階一點的做法是讓光達的轉動跟相機的快門</a:t>
             </a:r>
             <a:r>
-              <a:rPr sz="1000" b="1" lang="zh-TW" dirty="0">
+              <a:rPr sz="850" b="1" lang="zh-TW" dirty="0">
                 <a:solidFill>
                   <a:srgbClr val="000000"/>
                 </a:solidFill>
@@ -3040,7 +3040,7 @@
               <a:t>對齊</a:t>
             </a:r>
             <a:r>
-              <a:rPr sz="1000" lang="zh-TW" dirty="0">
+              <a:rPr sz="850" lang="zh-TW" dirty="0">
                 <a:solidFill>
                   <a:srgbClr val="000000"/>
                 </a:solidFill>
@@ -3054,15 +3054,15 @@
           </a:p>
           <a:p>
             <a:pPr algn="l">
-              <a:lnSpc>
-                <a:spcPct val="115000"/>
-              </a:lnSpc>
-              <a:spcAft>
-                <a:spcPts val="500"/>
-              </a:spcAft>
-            </a:pPr>
-            <a:r>
-              <a:rPr sz="1000" lang="zh-TW" dirty="0">
+              <a:spcBef>
+                <a:spcPts val="0"/>
+              </a:spcBef>
+              <a:spcAft>
+                <a:spcPts val="142"/>
+              </a:spcAft>
+            </a:pPr>
+            <a:r>
+              <a:rPr sz="850" lang="zh-TW" dirty="0">
                 <a:solidFill>
                   <a:srgbClr val="000000"/>
                 </a:solidFill>
@@ -3073,7 +3073,7 @@
               <a:t>所以請各位記住：</a:t>
             </a:r>
             <a:r>
-              <a:rPr sz="1000" b="1" lang="zh-TW" dirty="0">
+              <a:rPr sz="850" b="1" lang="zh-TW" dirty="0">
                 <a:solidFill>
                   <a:srgbClr val="000000"/>
                 </a:solidFill>
@@ -3084,7 +3084,7 @@
               <a:t>兩顆感測器各自都是好的，不代表合起來是對的。</a:t>
             </a:r>
             <a:r>
-              <a:rPr sz="1000" lang="zh-TW" dirty="0">
+              <a:rPr sz="850" lang="zh-TW" dirty="0">
                 <a:solidFill>
                   <a:srgbClr val="000000"/>
                 </a:solidFill>
@@ -3098,15 +3098,15 @@
           </a:p>
           <a:p>
             <a:pPr algn="l">
-              <a:lnSpc>
-                <a:spcPct val="115000"/>
-              </a:lnSpc>
-              <a:spcAft>
-                <a:spcPts val="500"/>
-              </a:spcAft>
-            </a:pPr>
-            <a:r>
-              <a:rPr sz="1000" lang="zh-TW" dirty="0">
+              <a:spcBef>
+                <a:spcPts val="0"/>
+              </a:spcBef>
+              <a:spcAft>
+                <a:spcPts val="142"/>
+              </a:spcAft>
+            </a:pPr>
+            <a:r>
+              <a:rPr sz="850" lang="zh-TW" dirty="0">
                 <a:solidFill>
                   <a:srgbClr val="000000"/>
                 </a:solidFill>
@@ -3120,15 +3120,15 @@
           </a:p>
           <a:p>
             <a:pPr algn="l">
-              <a:lnSpc>
-                <a:spcPct val="115000"/>
-              </a:lnSpc>
-              <a:spcAft>
-                <a:spcPts val="500"/>
-              </a:spcAft>
-            </a:pPr>
-            <a:r>
-              <a:rPr sz="1000" lang="zh-TW" dirty="0">
+              <a:spcBef>
+                <a:spcPts val="0"/>
+              </a:spcBef>
+              <a:spcAft>
+                <a:spcPts val="142"/>
+              </a:spcAft>
+            </a:pPr>
+            <a:r>
+              <a:rPr sz="850" lang="zh-TW" dirty="0">
                 <a:solidFill>
                   <a:srgbClr val="000000"/>
                 </a:solidFill>
@@ -3139,7 +3139,7 @@
               <a:t>下一節我們回到工具上，把今天和上一節講的東西，全部用在一件事上：</a:t>
             </a:r>
             <a:r>
-              <a:rPr sz="1000" b="1" lang="zh-TW" dirty="0">
+              <a:rPr sz="850" b="1" lang="zh-TW" dirty="0">
                 <a:solidFill>
                   <a:srgbClr val="000000"/>
                 </a:solidFill>
@@ -3150,7 +3150,7 @@
               <a:t>幫一個指定的情境選一顆感測器</a:t>
             </a:r>
             <a:r>
-              <a:rPr sz="1000" lang="zh-TW" dirty="0">
+              <a:rPr sz="850" lang="zh-TW" dirty="0">
                 <a:solidFill>
                   <a:srgbClr val="000000"/>
                 </a:solidFill>
@@ -3184,11 +3184,11 @@
           <a:lstStyle/>
           <a:p>
             <a:pPr algn="l">
-              <a:lnSpc>
-                <a:spcPct val="115000"/>
-              </a:lnSpc>
-              <a:spcAft>
-                <a:spcPts val="500"/>
+              <a:spcBef>
+                <a:spcPts val="0"/>
+              </a:spcBef>
+              <a:spcAft>
+                <a:spcPts val="167"/>
               </a:spcAft>
             </a:pPr>
             <a:r>
@@ -3263,11 +3263,11 @@
           <a:lstStyle/>
           <a:p>
             <a:pPr algn="l">
-              <a:lnSpc>
-                <a:spcPct val="115000"/>
-              </a:lnSpc>
-              <a:spcAft>
-                <a:spcPts val="500"/>
+              <a:spcBef>
+                <a:spcPts val="0"/>
+              </a:spcBef>
+              <a:spcAft>
+                <a:spcPts val="167"/>
               </a:spcAft>
             </a:pPr>
             <a:r>
@@ -3296,11 +3296,11 @@
           </a:p>
           <a:p>
             <a:pPr algn="l">
-              <a:lnSpc>
-                <a:spcPct val="115000"/>
-              </a:lnSpc>
-              <a:spcAft>
-                <a:spcPts val="500"/>
+              <a:spcBef>
+                <a:spcPts val="0"/>
+              </a:spcBef>
+              <a:spcAft>
+                <a:spcPts val="167"/>
               </a:spcAft>
             </a:pPr>
             <a:r>
@@ -3318,11 +3318,11 @@
           </a:p>
           <a:p>
             <a:pPr algn="l">
-              <a:lnSpc>
-                <a:spcPct val="115000"/>
-              </a:lnSpc>
-              <a:spcAft>
-                <a:spcPts val="500"/>
+              <a:spcBef>
+                <a:spcPts val="0"/>
+              </a:spcBef>
+              <a:spcAft>
+                <a:spcPts val="167"/>
               </a:spcAft>
             </a:pPr>
             <a:r>
@@ -3351,11 +3351,11 @@
           </a:p>
           <a:p>
             <a:pPr algn="l">
-              <a:lnSpc>
-                <a:spcPct val="115000"/>
-              </a:lnSpc>
-              <a:spcAft>
-                <a:spcPts val="500"/>
+              <a:spcBef>
+                <a:spcPts val="0"/>
+              </a:spcBef>
+              <a:spcAft>
+                <a:spcPts val="167"/>
               </a:spcAft>
             </a:pPr>
             <a:r>
@@ -3373,11 +3373,11 @@
           </a:p>
           <a:p>
             <a:pPr algn="l">
-              <a:lnSpc>
-                <a:spcPct val="115000"/>
-              </a:lnSpc>
-              <a:spcAft>
-                <a:spcPts val="500"/>
+              <a:spcBef>
+                <a:spcPts val="0"/>
+              </a:spcBef>
+              <a:spcAft>
+                <a:spcPts val="167"/>
               </a:spcAft>
             </a:pPr>
             <a:r>
@@ -3406,11 +3406,11 @@
           </a:p>
           <a:p>
             <a:pPr algn="l">
-              <a:lnSpc>
-                <a:spcPct val="115000"/>
-              </a:lnSpc>
-              <a:spcAft>
-                <a:spcPts val="500"/>
+              <a:spcBef>
+                <a:spcPts val="0"/>
+              </a:spcBef>
+              <a:spcAft>
+                <a:spcPts val="167"/>
               </a:spcAft>
             </a:pPr>
             <a:r>
@@ -3428,11 +3428,11 @@
           </a:p>
           <a:p>
             <a:pPr algn="l">
-              <a:lnSpc>
-                <a:spcPct val="115000"/>
-              </a:lnSpc>
-              <a:spcAft>
-                <a:spcPts val="500"/>
+              <a:spcBef>
+                <a:spcPts val="0"/>
+              </a:spcBef>
+              <a:spcAft>
+                <a:spcPts val="167"/>
               </a:spcAft>
             </a:pPr>
             <a:r>
@@ -3461,11 +3461,11 @@
           </a:p>
           <a:p>
             <a:pPr algn="l">
-              <a:lnSpc>
-                <a:spcPct val="115000"/>
-              </a:lnSpc>
-              <a:spcAft>
-                <a:spcPts val="500"/>
+              <a:spcBef>
+                <a:spcPts val="0"/>
+              </a:spcBef>
+              <a:spcAft>
+                <a:spcPts val="167"/>
               </a:spcAft>
             </a:pPr>
             <a:r>
@@ -3494,11 +3494,11 @@
           </a:p>
           <a:p>
             <a:pPr algn="l">
-              <a:lnSpc>
-                <a:spcPct val="115000"/>
-              </a:lnSpc>
-              <a:spcAft>
-                <a:spcPts val="500"/>
+              <a:spcBef>
+                <a:spcPts val="0"/>
+              </a:spcBef>
+              <a:spcAft>
+                <a:spcPts val="167"/>
               </a:spcAft>
             </a:pPr>
             <a:r>
@@ -3527,11 +3527,11 @@
           </a:p>
           <a:p>
             <a:pPr algn="l">
-              <a:lnSpc>
-                <a:spcPct val="115000"/>
-              </a:lnSpc>
-              <a:spcAft>
-                <a:spcPts val="500"/>
+              <a:spcBef>
+                <a:spcPts val="0"/>
+              </a:spcBef>
+              <a:spcAft>
+                <a:spcPts val="167"/>
               </a:spcAft>
             </a:pPr>
             <a:r>
@@ -3571,11 +3571,11 @@
           </a:p>
           <a:p>
             <a:pPr algn="l">
-              <a:lnSpc>
-                <a:spcPct val="115000"/>
-              </a:lnSpc>
-              <a:spcAft>
-                <a:spcPts val="500"/>
+              <a:spcBef>
+                <a:spcPts val="0"/>
+              </a:spcBef>
+              <a:spcAft>
+                <a:spcPts val="167"/>
               </a:spcAft>
             </a:pPr>
             <a:r>
@@ -3593,11 +3593,11 @@
           </a:p>
           <a:p>
             <a:pPr algn="l">
-              <a:lnSpc>
-                <a:spcPct val="115000"/>
-              </a:lnSpc>
-              <a:spcAft>
-                <a:spcPts val="500"/>
+              <a:spcBef>
+                <a:spcPts val="0"/>
+              </a:spcBef>
+              <a:spcAft>
+                <a:spcPts val="167"/>
               </a:spcAft>
             </a:pPr>
             <a:r>
@@ -3635,11 +3635,11 @@
           <a:lstStyle/>
           <a:p>
             <a:pPr algn="l">
-              <a:lnSpc>
-                <a:spcPct val="115000"/>
-              </a:lnSpc>
-              <a:spcAft>
-                <a:spcPts val="500"/>
+              <a:spcBef>
+                <a:spcPts val="0"/>
+              </a:spcBef>
+              <a:spcAft>
+                <a:spcPts val="167"/>
               </a:spcAft>
             </a:pPr>
             <a:r>
@@ -3714,11 +3714,11 @@
           <a:lstStyle/>
           <a:p>
             <a:pPr algn="l">
-              <a:lnSpc>
-                <a:spcPct val="115000"/>
-              </a:lnSpc>
-              <a:spcAft>
-                <a:spcPts val="600"/>
+              <a:spcBef>
+                <a:spcPts val="0"/>
+              </a:spcBef>
+              <a:spcAft>
+                <a:spcPts val="200"/>
               </a:spcAft>
             </a:pPr>
             <a:r>
@@ -3747,11 +3747,11 @@
           </a:p>
           <a:p>
             <a:pPr algn="l">
-              <a:lnSpc>
-                <a:spcPct val="115000"/>
-              </a:lnSpc>
-              <a:spcAft>
-                <a:spcPts val="600"/>
+              <a:spcBef>
+                <a:spcPts val="0"/>
+              </a:spcBef>
+              <a:spcAft>
+                <a:spcPts val="200"/>
               </a:spcAft>
             </a:pPr>
             <a:r>
@@ -3769,11 +3769,11 @@
           </a:p>
           <a:p>
             <a:pPr algn="l">
-              <a:lnSpc>
-                <a:spcPct val="115000"/>
-              </a:lnSpc>
-              <a:spcAft>
-                <a:spcPts val="600"/>
+              <a:spcBef>
+                <a:spcPts val="0"/>
+              </a:spcBef>
+              <a:spcAft>
+                <a:spcPts val="200"/>
               </a:spcAft>
             </a:pPr>
             <a:r>
@@ -3802,11 +3802,11 @@
           </a:p>
           <a:p>
             <a:pPr algn="l">
-              <a:lnSpc>
-                <a:spcPct val="115000"/>
-              </a:lnSpc>
-              <a:spcAft>
-                <a:spcPts val="600"/>
+              <a:spcBef>
+                <a:spcPts val="0"/>
+              </a:spcBef>
+              <a:spcAft>
+                <a:spcPts val="200"/>
               </a:spcAft>
             </a:pPr>
             <a:r>
@@ -3824,11 +3824,11 @@
           </a:p>
           <a:p>
             <a:pPr algn="l">
-              <a:lnSpc>
-                <a:spcPct val="115000"/>
-              </a:lnSpc>
-              <a:spcAft>
-                <a:spcPts val="600"/>
+              <a:spcBef>
+                <a:spcPts val="0"/>
+              </a:spcBef>
+              <a:spcAft>
+                <a:spcPts val="200"/>
               </a:spcAft>
             </a:pPr>
             <a:r>
@@ -3857,11 +3857,11 @@
           </a:p>
           <a:p>
             <a:pPr algn="l">
-              <a:lnSpc>
-                <a:spcPct val="115000"/>
-              </a:lnSpc>
-              <a:spcAft>
-                <a:spcPts val="600"/>
+              <a:spcBef>
+                <a:spcPts val="0"/>
+              </a:spcBef>
+              <a:spcAft>
+                <a:spcPts val="200"/>
               </a:spcAft>
             </a:pPr>
             <a:r>
@@ -3899,11 +3899,11 @@
           <a:lstStyle/>
           <a:p>
             <a:pPr algn="l">
-              <a:lnSpc>
-                <a:spcPct val="115000"/>
-              </a:lnSpc>
-              <a:spcAft>
-                <a:spcPts val="500"/>
+              <a:spcBef>
+                <a:spcPts val="0"/>
+              </a:spcBef>
+              <a:spcAft>
+                <a:spcPts val="167"/>
               </a:spcAft>
             </a:pPr>
             <a:r>
@@ -3978,15 +3978,15 @@
           <a:lstStyle/>
           <a:p>
             <a:pPr algn="l">
-              <a:lnSpc>
-                <a:spcPct val="115000"/>
-              </a:lnSpc>
-              <a:spcAft>
-                <a:spcPts val="500"/>
-              </a:spcAft>
-            </a:pPr>
-            <a:r>
-              <a:rPr sz="1000" b="1" lang="zh-TW" dirty="0">
+              <a:spcBef>
+                <a:spcPts val="0"/>
+              </a:spcBef>
+              <a:spcAft>
+                <a:spcPts val="133"/>
+              </a:spcAft>
+            </a:pPr>
+            <a:r>
+              <a:rPr sz="800" b="1" lang="zh-TW" dirty="0">
                 <a:solidFill>
                   <a:srgbClr val="000000"/>
                 </a:solidFill>
@@ -3997,7 +3997,7 @@
               <a:t>▍這一張要做什麼</a:t>
             </a:r>
             <a:r>
-              <a:rPr sz="1000" lang="zh-TW" dirty="0">
+              <a:rPr sz="800" lang="zh-TW" dirty="0">
                 <a:solidFill>
                   <a:srgbClr val="000000"/>
                 </a:solidFill>
@@ -4011,15 +4011,15 @@
           </a:p>
           <a:p>
             <a:pPr algn="l">
-              <a:lnSpc>
-                <a:spcPct val="115000"/>
-              </a:lnSpc>
-              <a:spcAft>
-                <a:spcPts val="500"/>
-              </a:spcAft>
-            </a:pPr>
-            <a:r>
-              <a:rPr sz="1000" lang="zh-TW" dirty="0">
+              <a:spcBef>
+                <a:spcPts val="0"/>
+              </a:spcBef>
+              <a:spcAft>
+                <a:spcPts val="133"/>
+              </a:spcAft>
+            </a:pPr>
+            <a:r>
+              <a:rPr sz="800" lang="zh-TW" dirty="0">
                 <a:solidFill>
                   <a:srgbClr val="000000"/>
                 </a:solidFill>
@@ -4033,15 +4033,15 @@
           </a:p>
           <a:p>
             <a:pPr algn="l">
-              <a:lnSpc>
-                <a:spcPct val="115000"/>
-              </a:lnSpc>
-              <a:spcAft>
-                <a:spcPts val="500"/>
-              </a:spcAft>
-            </a:pPr>
-            <a:r>
-              <a:rPr sz="1000" b="1" lang="zh-TW" dirty="0">
+              <a:spcBef>
+                <a:spcPts val="0"/>
+              </a:spcBef>
+              <a:spcAft>
+                <a:spcPts val="133"/>
+              </a:spcAft>
+            </a:pPr>
+            <a:r>
+              <a:rPr sz="800" b="1" lang="zh-TW" dirty="0">
                 <a:solidFill>
                   <a:srgbClr val="000000"/>
                 </a:solidFill>
@@ -4052,7 +4052,7 @@
               <a:t>▍畫面上圈這裡</a:t>
             </a:r>
             <a:r>
-              <a:rPr sz="1000" lang="zh-TW" dirty="0">
+              <a:rPr sz="800" lang="zh-TW" dirty="0">
                 <a:solidFill>
                   <a:srgbClr val="000000"/>
                 </a:solidFill>
@@ -4066,15 +4066,15 @@
           </a:p>
           <a:p>
             <a:pPr algn="l">
-              <a:lnSpc>
-                <a:spcPct val="115000"/>
-              </a:lnSpc>
-              <a:spcAft>
-                <a:spcPts val="500"/>
-              </a:spcAft>
-            </a:pPr>
-            <a:r>
-              <a:rPr sz="1000" lang="zh-TW" dirty="0">
+              <a:spcBef>
+                <a:spcPts val="0"/>
+              </a:spcBef>
+              <a:spcAft>
+                <a:spcPts val="133"/>
+              </a:spcAft>
+            </a:pPr>
+            <a:r>
+              <a:rPr sz="800" lang="zh-TW" dirty="0">
                 <a:solidFill>
                   <a:srgbClr val="000000"/>
                 </a:solidFill>
@@ -4088,15 +4088,15 @@
           </a:p>
           <a:p>
             <a:pPr algn="l">
-              <a:lnSpc>
-                <a:spcPct val="115000"/>
-              </a:lnSpc>
-              <a:spcAft>
-                <a:spcPts val="500"/>
-              </a:spcAft>
-            </a:pPr>
-            <a:r>
-              <a:rPr sz="1000" b="1" lang="zh-TW" dirty="0">
+              <a:spcBef>
+                <a:spcPts val="0"/>
+              </a:spcBef>
+              <a:spcAft>
+                <a:spcPts val="133"/>
+              </a:spcAft>
+            </a:pPr>
+            <a:r>
+              <a:rPr sz="800" b="1" lang="zh-TW" dirty="0">
                 <a:solidFill>
                   <a:srgbClr val="000000"/>
                 </a:solidFill>
@@ -4107,7 +4107,7 @@
               <a:t>▍以下照著唸</a:t>
             </a:r>
             <a:r>
-              <a:rPr sz="1000" lang="zh-TW" dirty="0">
+              <a:rPr sz="800" lang="zh-TW" dirty="0">
                 <a:solidFill>
                   <a:srgbClr val="000000"/>
                 </a:solidFill>
@@ -4121,15 +4121,15 @@
           </a:p>
           <a:p>
             <a:pPr algn="l">
-              <a:lnSpc>
-                <a:spcPct val="115000"/>
-              </a:lnSpc>
-              <a:spcAft>
-                <a:spcPts val="500"/>
-              </a:spcAft>
-            </a:pPr>
-            <a:r>
-              <a:rPr sz="1000" lang="zh-TW" dirty="0">
+              <a:spcBef>
+                <a:spcPts val="0"/>
+              </a:spcBef>
+              <a:spcAft>
+                <a:spcPts val="133"/>
+              </a:spcAft>
+            </a:pPr>
+            <a:r>
+              <a:rPr sz="800" lang="zh-TW" dirty="0">
                 <a:solidFill>
                   <a:srgbClr val="000000"/>
                 </a:solidFill>
@@ -4140,7 +4140,7 @@
               <a:t>先講第一行，</a:t>
             </a:r>
             <a:r>
-              <a:rPr sz="1000" b="1" lang="zh-TW" dirty="0">
+              <a:rPr sz="800" b="1" lang="zh-TW" dirty="0">
                 <a:solidFill>
                   <a:srgbClr val="000000"/>
                 </a:solidFill>
@@ -4151,7 +4151,7 @@
               <a:t>快門方式</a:t>
             </a:r>
             <a:r>
-              <a:rPr sz="1000" lang="zh-TW" dirty="0">
+              <a:rPr sz="800" lang="zh-TW" dirty="0">
                 <a:solidFill>
                   <a:srgbClr val="000000"/>
                 </a:solidFill>
@@ -4165,15 +4165,15 @@
           </a:p>
           <a:p>
             <a:pPr algn="l">
-              <a:lnSpc>
-                <a:spcPct val="115000"/>
-              </a:lnSpc>
-              <a:spcAft>
-                <a:spcPts val="500"/>
-              </a:spcAft>
-            </a:pPr>
-            <a:r>
-              <a:rPr sz="1000" lang="zh-TW" dirty="0">
+              <a:spcBef>
+                <a:spcPts val="0"/>
+              </a:spcBef>
+              <a:spcAft>
+                <a:spcPts val="133"/>
+              </a:spcAft>
+            </a:pPr>
+            <a:r>
+              <a:rPr sz="800" lang="zh-TW" dirty="0">
                 <a:solidFill>
                   <a:srgbClr val="000000"/>
                 </a:solidFill>
@@ -4184,7 +4184,7 @@
               <a:t>大部分的人以為，相機按一下就是一整張照片同時拍好。</a:t>
             </a:r>
             <a:r>
-              <a:rPr sz="1000" b="1" lang="zh-TW" dirty="0">
+              <a:rPr sz="800" b="1" lang="zh-TW" dirty="0">
                 <a:solidFill>
                   <a:srgbClr val="000000"/>
                 </a:solidFill>
@@ -4195,7 +4195,7 @@
               <a:t>大部分的車用相機不是這樣。</a:t>
             </a:r>
             <a:r>
-              <a:rPr sz="1000" lang="zh-TW" dirty="0">
+              <a:rPr sz="800" lang="zh-TW" dirty="0">
                 <a:solidFill>
                   <a:srgbClr val="000000"/>
                 </a:solidFill>
@@ -4209,15 +4209,15 @@
           </a:p>
           <a:p>
             <a:pPr algn="l">
-              <a:lnSpc>
-                <a:spcPct val="115000"/>
-              </a:lnSpc>
-              <a:spcAft>
-                <a:spcPts val="500"/>
-              </a:spcAft>
-            </a:pPr>
-            <a:r>
-              <a:rPr sz="1000" lang="zh-TW" dirty="0">
+              <a:spcBef>
+                <a:spcPts val="0"/>
+              </a:spcBef>
+              <a:spcAft>
+                <a:spcPts val="133"/>
+              </a:spcAft>
+            </a:pPr>
+            <a:r>
+              <a:rPr sz="800" lang="zh-TW" dirty="0">
                 <a:solidFill>
                   <a:srgbClr val="000000"/>
                 </a:solidFill>
@@ -4228,7 +4228,7 @@
               <a:t>它叫</a:t>
             </a:r>
             <a:r>
-              <a:rPr sz="1000" b="1" lang="zh-TW" dirty="0">
+              <a:rPr sz="800" b="1" lang="zh-TW" dirty="0">
                 <a:solidFill>
                   <a:srgbClr val="000000"/>
                 </a:solidFill>
@@ -4239,7 +4239,7 @@
               <a:t>捲簾快門</a:t>
             </a:r>
             <a:r>
-              <a:rPr sz="1000" lang="zh-TW" dirty="0">
+              <a:rPr sz="800" lang="zh-TW" dirty="0">
                 <a:solidFill>
                   <a:srgbClr val="000000"/>
                 </a:solidFill>
@@ -4250,7 +4250,7 @@
               <a:t>，rolling shutter。感光元件是</a:t>
             </a:r>
             <a:r>
-              <a:rPr sz="1000" b="1" lang="zh-TW" dirty="0">
+              <a:rPr sz="800" b="1" lang="zh-TW" dirty="0">
                 <a:solidFill>
                   <a:srgbClr val="000000"/>
                 </a:solidFill>
@@ -4261,7 +4261,7 @@
               <a:t>一列一列</a:t>
             </a:r>
             <a:r>
-              <a:rPr sz="1000" lang="zh-TW" dirty="0">
+              <a:rPr sz="800" lang="zh-TW" dirty="0">
                 <a:solidFill>
                   <a:srgbClr val="000000"/>
                 </a:solidFill>
@@ -4275,15 +4275,15 @@
           </a:p>
           <a:p>
             <a:pPr algn="l">
-              <a:lnSpc>
-                <a:spcPct val="115000"/>
-              </a:lnSpc>
-              <a:spcAft>
-                <a:spcPts val="500"/>
-              </a:spcAft>
-            </a:pPr>
-            <a:r>
-              <a:rPr sz="1000" lang="zh-TW" dirty="0">
+              <a:spcBef>
+                <a:spcPts val="0"/>
+              </a:spcBef>
+              <a:spcAft>
+                <a:spcPts val="133"/>
+              </a:spcAft>
+            </a:pPr>
+            <a:r>
+              <a:rPr sz="800" lang="zh-TW" dirty="0">
                 <a:solidFill>
                   <a:srgbClr val="000000"/>
                 </a:solidFill>
@@ -4294,7 +4294,7 @@
               <a:t>所以同一張照片裡面，最上面那一列和最下面那一列，</a:t>
             </a:r>
             <a:r>
-              <a:rPr sz="1000" b="1" lang="zh-TW" dirty="0">
+              <a:rPr sz="800" b="1" lang="zh-TW" dirty="0">
                 <a:solidFill>
                   <a:srgbClr val="000000"/>
                 </a:solidFill>
@@ -4305,7 +4305,7 @@
               <a:t>不是同一個時間拍的</a:t>
             </a:r>
             <a:r>
-              <a:rPr sz="1000" lang="zh-TW" dirty="0">
+              <a:rPr sz="800" lang="zh-TW" dirty="0">
                 <a:solidFill>
                   <a:srgbClr val="000000"/>
                 </a:solidFill>
@@ -4319,15 +4319,15 @@
           </a:p>
           <a:p>
             <a:pPr algn="l">
-              <a:lnSpc>
-                <a:spcPct val="115000"/>
-              </a:lnSpc>
-              <a:spcAft>
-                <a:spcPts val="500"/>
-              </a:spcAft>
-            </a:pPr>
-            <a:r>
-              <a:rPr sz="1000" lang="zh-TW" dirty="0">
+              <a:spcBef>
+                <a:spcPts val="0"/>
+              </a:spcBef>
+              <a:spcAft>
+                <a:spcPts val="133"/>
+              </a:spcAft>
+            </a:pPr>
+            <a:r>
+              <a:rPr sz="800" lang="zh-TW" dirty="0">
                 <a:solidFill>
                   <a:srgbClr val="000000"/>
                 </a:solidFill>
@@ -4341,15 +4341,15 @@
           </a:p>
           <a:p>
             <a:pPr algn="l">
-              <a:lnSpc>
-                <a:spcPct val="115000"/>
-              </a:lnSpc>
-              <a:spcAft>
-                <a:spcPts val="500"/>
-              </a:spcAft>
-            </a:pPr>
-            <a:r>
-              <a:rPr sz="1000" lang="zh-TW" dirty="0">
+              <a:spcBef>
+                <a:spcPts val="0"/>
+              </a:spcBef>
+              <a:spcAft>
+                <a:spcPts val="133"/>
+              </a:spcAft>
+            </a:pPr>
+            <a:r>
+              <a:rPr sz="800" lang="zh-TW" dirty="0">
                 <a:solidFill>
                   <a:srgbClr val="000000"/>
                 </a:solidFill>
@@ -4363,15 +4363,15 @@
           </a:p>
           <a:p>
             <a:pPr algn="l">
-              <a:lnSpc>
-                <a:spcPct val="115000"/>
-              </a:lnSpc>
-              <a:spcAft>
-                <a:spcPts val="500"/>
-              </a:spcAft>
-            </a:pPr>
-            <a:r>
-              <a:rPr sz="1000" lang="zh-TW" dirty="0">
+              <a:spcBef>
+                <a:spcPts val="0"/>
+              </a:spcBef>
+              <a:spcAft>
+                <a:spcPts val="133"/>
+              </a:spcAft>
+            </a:pPr>
+            <a:r>
+              <a:rPr sz="800" lang="zh-TW" dirty="0">
                 <a:solidFill>
                   <a:srgbClr val="000000"/>
                 </a:solidFill>
@@ -4385,15 +4385,15 @@
           </a:p>
           <a:p>
             <a:pPr algn="l">
-              <a:lnSpc>
-                <a:spcPct val="115000"/>
-              </a:lnSpc>
-              <a:spcAft>
-                <a:spcPts val="500"/>
-              </a:spcAft>
-            </a:pPr>
-            <a:r>
-              <a:rPr sz="1000" lang="zh-TW" dirty="0">
+              <a:spcBef>
+                <a:spcPts val="0"/>
+              </a:spcBef>
+              <a:spcAft>
+                <a:spcPts val="133"/>
+              </a:spcAft>
+            </a:pPr>
+            <a:r>
+              <a:rPr sz="800" lang="zh-TW" dirty="0">
                 <a:solidFill>
                   <a:srgbClr val="000000"/>
                 </a:solidFill>
@@ -4404,7 +4404,7 @@
               <a:t>假設你的車以時速六十在跑，旁邊有一台機車從右邊切過來。畫面上半部拍到他的時候他在 A 點，下半部拍到他的時候他已經到 B 點了。演算法看到的是一個</a:t>
             </a:r>
             <a:r>
-              <a:rPr sz="1000" b="1" lang="zh-TW" dirty="0">
+              <a:rPr sz="800" b="1" lang="zh-TW" dirty="0">
                 <a:solidFill>
                   <a:srgbClr val="000000"/>
                 </a:solidFill>
@@ -4415,7 +4415,7 @@
               <a:t>被扭曲的形狀</a:t>
             </a:r>
             <a:r>
-              <a:rPr sz="1000" lang="zh-TW" dirty="0">
+              <a:rPr sz="800" lang="zh-TW" dirty="0">
                 <a:solidFill>
                   <a:srgbClr val="000000"/>
                 </a:solidFill>
@@ -4429,15 +4429,15 @@
           </a:p>
           <a:p>
             <a:pPr algn="l">
-              <a:lnSpc>
-                <a:spcPct val="115000"/>
-              </a:lnSpc>
-              <a:spcAft>
-                <a:spcPts val="500"/>
-              </a:spcAft>
-            </a:pPr>
-            <a:r>
-              <a:rPr sz="1000" lang="zh-TW" dirty="0">
+              <a:spcBef>
+                <a:spcPts val="0"/>
+              </a:spcBef>
+              <a:spcAft>
+                <a:spcPts val="133"/>
+              </a:spcAft>
+            </a:pPr>
+            <a:r>
+              <a:rPr sz="800" lang="zh-TW" dirty="0">
                 <a:solidFill>
                   <a:srgbClr val="000000"/>
                 </a:solidFill>
@@ -4451,15 +4451,15 @@
           </a:p>
           <a:p>
             <a:pPr algn="l">
-              <a:lnSpc>
-                <a:spcPct val="115000"/>
-              </a:lnSpc>
-              <a:spcAft>
-                <a:spcPts val="500"/>
-              </a:spcAft>
-            </a:pPr>
-            <a:r>
-              <a:rPr sz="1000" lang="zh-TW" dirty="0">
+              <a:spcBef>
+                <a:spcPts val="0"/>
+              </a:spcBef>
+              <a:spcAft>
+                <a:spcPts val="133"/>
+              </a:spcAft>
+            </a:pPr>
+            <a:r>
+              <a:rPr sz="800" lang="zh-TW" dirty="0">
                 <a:solidFill>
                   <a:srgbClr val="000000"/>
                 </a:solidFill>
@@ -4473,15 +4473,15 @@
           </a:p>
           <a:p>
             <a:pPr algn="l">
-              <a:lnSpc>
-                <a:spcPct val="115000"/>
-              </a:lnSpc>
-              <a:spcAft>
-                <a:spcPts val="500"/>
-              </a:spcAft>
-            </a:pPr>
-            <a:r>
-              <a:rPr sz="1000" lang="zh-TW" dirty="0">
+              <a:spcBef>
+                <a:spcPts val="0"/>
+              </a:spcBef>
+              <a:spcAft>
+                <a:spcPts val="133"/>
+              </a:spcAft>
+            </a:pPr>
+            <a:r>
+              <a:rPr sz="800" lang="zh-TW" dirty="0">
                 <a:solidFill>
                   <a:srgbClr val="000000"/>
                 </a:solidFill>
@@ -4492,7 +4492,7 @@
               <a:t>大部分的車用感測器還是用捲簾，因為便宜。它的補救方式是</a:t>
             </a:r>
             <a:r>
-              <a:rPr sz="1000" b="1" lang="zh-TW" dirty="0">
+              <a:rPr sz="800" b="1" lang="zh-TW" dirty="0">
                 <a:solidFill>
                   <a:srgbClr val="000000"/>
                 </a:solidFill>
@@ -4503,7 +4503,7 @@
               <a:t>讀得很快</a:t>
             </a:r>
             <a:r>
-              <a:rPr sz="1000" lang="zh-TW" dirty="0">
+              <a:rPr sz="800" lang="zh-TW" dirty="0">
                 <a:solidFill>
                   <a:srgbClr val="000000"/>
                 </a:solidFill>
@@ -4517,15 +4517,15 @@
           </a:p>
           <a:p>
             <a:pPr algn="l">
-              <a:lnSpc>
-                <a:spcPct val="115000"/>
-              </a:lnSpc>
-              <a:spcAft>
-                <a:spcPts val="500"/>
-              </a:spcAft>
-            </a:pPr>
-            <a:r>
-              <a:rPr sz="1000" lang="zh-TW" dirty="0">
+              <a:spcBef>
+                <a:spcPts val="0"/>
+              </a:spcBef>
+              <a:spcAft>
+                <a:spcPts val="133"/>
+              </a:spcAft>
+            </a:pPr>
+            <a:r>
+              <a:rPr sz="800" lang="zh-TW" dirty="0">
                 <a:solidFill>
                   <a:srgbClr val="000000"/>
                 </a:solidFill>
@@ -4536,7 +4536,7 @@
               <a:t>所以「更新率 60 fps」這一行，除了講即時性，它其實也在講</a:t>
             </a:r>
             <a:r>
-              <a:rPr sz="1000" b="1" lang="zh-TW" dirty="0">
+              <a:rPr sz="800" b="1" lang="zh-TW" dirty="0">
                 <a:solidFill>
                   <a:srgbClr val="000000"/>
                 </a:solidFill>
@@ -4547,7 +4547,7 @@
               <a:t>扭曲有多嚴重</a:t>
             </a:r>
             <a:r>
-              <a:rPr sz="1000" lang="zh-TW" dirty="0">
+              <a:rPr sz="800" lang="zh-TW" dirty="0">
                 <a:solidFill>
                   <a:srgbClr val="000000"/>
                 </a:solidFill>
@@ -4581,11 +4581,11 @@
           <a:lstStyle/>
           <a:p>
             <a:pPr algn="l">
-              <a:lnSpc>
-                <a:spcPct val="115000"/>
-              </a:lnSpc>
-              <a:spcAft>
-                <a:spcPts val="500"/>
+              <a:spcBef>
+                <a:spcPts val="0"/>
+              </a:spcBef>
+              <a:spcAft>
+                <a:spcPts val="167"/>
               </a:spcAft>
             </a:pPr>
             <a:r>
@@ -4660,15 +4660,15 @@
           <a:lstStyle/>
           <a:p>
             <a:pPr algn="l">
-              <a:lnSpc>
-                <a:spcPct val="115000"/>
-              </a:lnSpc>
-              <a:spcAft>
-                <a:spcPts val="500"/>
-              </a:spcAft>
-            </a:pPr>
-            <a:r>
-              <a:rPr sz="1000" b="1" lang="zh-TW" dirty="0">
+              <a:spcBef>
+                <a:spcPts val="0"/>
+              </a:spcBef>
+              <a:spcAft>
+                <a:spcPts val="133"/>
+              </a:spcAft>
+            </a:pPr>
+            <a:r>
+              <a:rPr sz="800" b="1" lang="zh-TW" dirty="0">
                 <a:solidFill>
                   <a:srgbClr val="000000"/>
                 </a:solidFill>
@@ -4679,7 +4679,7 @@
               <a:t>▍這一張要做什麼</a:t>
             </a:r>
             <a:r>
-              <a:rPr sz="1000" lang="zh-TW" dirty="0">
+              <a:rPr sz="800" lang="zh-TW" dirty="0">
                 <a:solidFill>
                   <a:srgbClr val="000000"/>
                 </a:solidFill>
@@ -4693,15 +4693,15 @@
           </a:p>
           <a:p>
             <a:pPr algn="l">
-              <a:lnSpc>
-                <a:spcPct val="115000"/>
-              </a:lnSpc>
-              <a:spcAft>
-                <a:spcPts val="500"/>
-              </a:spcAft>
-            </a:pPr>
-            <a:r>
-              <a:rPr sz="1000" lang="zh-TW" dirty="0">
+              <a:spcBef>
+                <a:spcPts val="0"/>
+              </a:spcBef>
+              <a:spcAft>
+                <a:spcPts val="133"/>
+              </a:spcAft>
+            </a:pPr>
+            <a:r>
+              <a:rPr sz="800" lang="zh-TW" dirty="0">
                 <a:solidFill>
                   <a:srgbClr val="000000"/>
                 </a:solidFill>
@@ -4715,15 +4715,15 @@
           </a:p>
           <a:p>
             <a:pPr algn="l">
-              <a:lnSpc>
-                <a:spcPct val="115000"/>
-              </a:lnSpc>
-              <a:spcAft>
-                <a:spcPts val="500"/>
-              </a:spcAft>
-            </a:pPr>
-            <a:r>
-              <a:rPr sz="1000" b="1" lang="zh-TW" dirty="0">
+              <a:spcBef>
+                <a:spcPts val="0"/>
+              </a:spcBef>
+              <a:spcAft>
+                <a:spcPts val="133"/>
+              </a:spcAft>
+            </a:pPr>
+            <a:r>
+              <a:rPr sz="800" b="1" lang="zh-TW" dirty="0">
                 <a:solidFill>
                   <a:srgbClr val="000000"/>
                 </a:solidFill>
@@ -4734,7 +4734,7 @@
               <a:t>▍畫面上圈這裡</a:t>
             </a:r>
             <a:r>
-              <a:rPr sz="1000" lang="zh-TW" dirty="0">
+              <a:rPr sz="800" lang="zh-TW" dirty="0">
                 <a:solidFill>
                   <a:srgbClr val="000000"/>
                 </a:solidFill>
@@ -4748,15 +4748,15 @@
           </a:p>
           <a:p>
             <a:pPr algn="l">
-              <a:lnSpc>
-                <a:spcPct val="115000"/>
-              </a:lnSpc>
-              <a:spcAft>
-                <a:spcPts val="500"/>
-              </a:spcAft>
-            </a:pPr>
-            <a:r>
-              <a:rPr sz="1000" lang="zh-TW" dirty="0">
+              <a:spcBef>
+                <a:spcPts val="0"/>
+              </a:spcBef>
+              <a:spcAft>
+                <a:spcPts val="133"/>
+              </a:spcAft>
+            </a:pPr>
+            <a:r>
+              <a:rPr sz="800" lang="zh-TW" dirty="0">
                 <a:solidFill>
                   <a:srgbClr val="000000"/>
                 </a:solidFill>
@@ -4770,15 +4770,15 @@
           </a:p>
           <a:p>
             <a:pPr algn="l">
-              <a:lnSpc>
-                <a:spcPct val="115000"/>
-              </a:lnSpc>
-              <a:spcAft>
-                <a:spcPts val="500"/>
-              </a:spcAft>
-            </a:pPr>
-            <a:r>
-              <a:rPr sz="1000" b="1" lang="zh-TW" dirty="0">
+              <a:spcBef>
+                <a:spcPts val="0"/>
+              </a:spcBef>
+              <a:spcAft>
+                <a:spcPts val="133"/>
+              </a:spcAft>
+            </a:pPr>
+            <a:r>
+              <a:rPr sz="800" b="1" lang="zh-TW" dirty="0">
                 <a:solidFill>
                   <a:srgbClr val="000000"/>
                 </a:solidFill>
@@ -4789,7 +4789,7 @@
               <a:t>▍以下照著唸</a:t>
             </a:r>
             <a:r>
-              <a:rPr sz="1000" lang="zh-TW" dirty="0">
+              <a:rPr sz="800" lang="zh-TW" dirty="0">
                 <a:solidFill>
                   <a:srgbClr val="000000"/>
                 </a:solidFill>
@@ -4803,15 +4803,15 @@
           </a:p>
           <a:p>
             <a:pPr algn="l">
-              <a:lnSpc>
-                <a:spcPct val="115000"/>
-              </a:lnSpc>
-              <a:spcAft>
-                <a:spcPts val="500"/>
-              </a:spcAft>
-            </a:pPr>
-            <a:r>
-              <a:rPr sz="1000" lang="zh-TW" dirty="0">
+              <a:spcBef>
+                <a:spcPts val="0"/>
+              </a:spcBef>
+              <a:spcAft>
+                <a:spcPts val="133"/>
+              </a:spcAft>
+            </a:pPr>
+            <a:r>
+              <a:rPr sz="800" lang="zh-TW" dirty="0">
                 <a:solidFill>
                   <a:srgbClr val="000000"/>
                 </a:solidFill>
@@ -4822,7 +4822,7 @@
               <a:t>第二行是</a:t>
             </a:r>
             <a:r>
-              <a:rPr sz="1000" b="1" lang="zh-TW" dirty="0">
+              <a:rPr sz="800" b="1" lang="zh-TW" dirty="0">
                 <a:solidFill>
                   <a:srgbClr val="000000"/>
                 </a:solidFill>
@@ -4833,7 +4833,7 @@
               <a:t>動態範圍</a:t>
             </a:r>
             <a:r>
-              <a:rPr sz="1000" lang="zh-TW" dirty="0">
+              <a:rPr sz="800" lang="zh-TW" dirty="0">
                 <a:solidFill>
                   <a:srgbClr val="000000"/>
                 </a:solidFill>
@@ -4847,15 +4847,15 @@
           </a:p>
           <a:p>
             <a:pPr algn="l">
-              <a:lnSpc>
-                <a:spcPct val="115000"/>
-              </a:lnSpc>
-              <a:spcAft>
-                <a:spcPts val="500"/>
-              </a:spcAft>
-            </a:pPr>
-            <a:r>
-              <a:rPr sz="1000" lang="zh-TW" dirty="0">
+              <a:spcBef>
+                <a:spcPts val="0"/>
+              </a:spcBef>
+              <a:spcAft>
+                <a:spcPts val="133"/>
+              </a:spcAft>
+            </a:pPr>
+            <a:r>
+              <a:rPr sz="800" lang="zh-TW" dirty="0">
                 <a:solidFill>
                   <a:srgbClr val="000000"/>
                 </a:solidFill>
@@ -4869,15 +4869,15 @@
           </a:p>
           <a:p>
             <a:pPr algn="l">
-              <a:lnSpc>
-                <a:spcPct val="115000"/>
-              </a:lnSpc>
-              <a:spcAft>
-                <a:spcPts val="500"/>
-              </a:spcAft>
-            </a:pPr>
-            <a:r>
-              <a:rPr sz="1000" lang="zh-TW" dirty="0">
+              <a:spcBef>
+                <a:spcPts val="0"/>
+              </a:spcBef>
+              <a:spcAft>
+                <a:spcPts val="133"/>
+              </a:spcAft>
+            </a:pPr>
+            <a:r>
+              <a:rPr sz="800" lang="zh-TW" dirty="0">
                 <a:solidFill>
                   <a:srgbClr val="000000"/>
                 </a:solidFill>
@@ -4891,15 +4891,15 @@
           </a:p>
           <a:p>
             <a:pPr algn="l">
-              <a:lnSpc>
-                <a:spcPct val="115000"/>
-              </a:lnSpc>
-              <a:spcAft>
-                <a:spcPts val="500"/>
-              </a:spcAft>
-            </a:pPr>
-            <a:r>
-              <a:rPr sz="1000" lang="zh-TW" dirty="0">
+              <a:spcBef>
+                <a:spcPts val="0"/>
+              </a:spcBef>
+              <a:spcAft>
+                <a:spcPts val="133"/>
+              </a:spcAft>
+            </a:pPr>
+            <a:r>
+              <a:rPr sz="800" lang="zh-TW" dirty="0">
                 <a:solidFill>
                   <a:srgbClr val="000000"/>
                 </a:solidFill>
@@ -4913,15 +4913,15 @@
           </a:p>
           <a:p>
             <a:pPr algn="l">
-              <a:lnSpc>
-                <a:spcPct val="115000"/>
-              </a:lnSpc>
-              <a:spcAft>
-                <a:spcPts val="500"/>
-              </a:spcAft>
-            </a:pPr>
-            <a:r>
-              <a:rPr sz="1000" lang="zh-TW" dirty="0">
+              <a:spcBef>
+                <a:spcPts val="0"/>
+              </a:spcBef>
+              <a:spcAft>
+                <a:spcPts val="133"/>
+              </a:spcAft>
+            </a:pPr>
+            <a:r>
+              <a:rPr sz="800" lang="zh-TW" dirty="0">
                 <a:solidFill>
                   <a:srgbClr val="000000"/>
                 </a:solidFill>
@@ -4932,7 +4932,7 @@
               <a:t>相機也一樣，而且它沒有兩秒可以適應。隧道裡面很暗，出口外面很亮，這兩個亮度差可能是好幾萬倍。如果相機的動態範圍不夠，它只能選一邊：</a:t>
             </a:r>
             <a:r>
-              <a:rPr sz="1000" b="1" lang="zh-TW" dirty="0">
+              <a:rPr sz="800" b="1" lang="zh-TW" dirty="0">
                 <a:solidFill>
                   <a:srgbClr val="000000"/>
                 </a:solidFill>
@@ -4943,7 +4943,7 @@
               <a:t>要嘛把裡面拍清楚，外面整片白；要嘛把外面拍清楚，裡面整片黑。</a:t>
             </a:r>
             <a:r>
-              <a:rPr sz="1000" lang="zh-TW" dirty="0">
+              <a:rPr sz="800" lang="zh-TW" dirty="0">
                 <a:solidFill>
                   <a:srgbClr val="000000"/>
                 </a:solidFill>
@@ -4957,15 +4957,15 @@
           </a:p>
           <a:p>
             <a:pPr algn="l">
-              <a:lnSpc>
-                <a:spcPct val="115000"/>
-              </a:lnSpc>
-              <a:spcAft>
-                <a:spcPts val="500"/>
-              </a:spcAft>
-            </a:pPr>
-            <a:r>
-              <a:rPr sz="1000" lang="zh-TW" dirty="0">
+              <a:spcBef>
+                <a:spcPts val="0"/>
+              </a:spcBef>
+              <a:spcAft>
+                <a:spcPts val="133"/>
+              </a:spcAft>
+            </a:pPr>
+            <a:r>
+              <a:rPr sz="800" lang="zh-TW" dirty="0">
                 <a:solidFill>
                   <a:srgbClr val="000000"/>
                 </a:solidFill>
@@ -4979,15 +4979,15 @@
           </a:p>
           <a:p>
             <a:pPr algn="l">
-              <a:lnSpc>
-                <a:spcPct val="115000"/>
-              </a:lnSpc>
-              <a:spcAft>
-                <a:spcPts val="500"/>
-              </a:spcAft>
-            </a:pPr>
-            <a:r>
-              <a:rPr sz="1000" lang="zh-TW" dirty="0">
+              <a:spcBef>
+                <a:spcPts val="0"/>
+              </a:spcBef>
+              <a:spcAft>
+                <a:spcPts val="133"/>
+              </a:spcAft>
+            </a:pPr>
+            <a:r>
+              <a:rPr sz="800" lang="zh-TW" dirty="0">
                 <a:solidFill>
                   <a:srgbClr val="000000"/>
                 </a:solidFill>
@@ -5001,15 +5001,15 @@
           </a:p>
           <a:p>
             <a:pPr algn="l">
-              <a:lnSpc>
-                <a:spcPct val="115000"/>
-              </a:lnSpc>
-              <a:spcAft>
-                <a:spcPts val="500"/>
-              </a:spcAft>
-            </a:pPr>
-            <a:r>
-              <a:rPr sz="1000" lang="zh-TW" dirty="0">
+              <a:spcBef>
+                <a:spcPts val="0"/>
+              </a:spcBef>
+              <a:spcAft>
+                <a:spcPts val="133"/>
+              </a:spcAft>
+            </a:pPr>
+            <a:r>
+              <a:rPr sz="800" lang="zh-TW" dirty="0">
                 <a:solidFill>
                   <a:srgbClr val="000000"/>
                 </a:solidFill>
@@ -5020,7 +5020,7 @@
               <a:t>人的眼睛大概可以處理 120 dB 左右。我們昨天那顆 AR0233AT，規格表上寫 </a:t>
             </a:r>
             <a:r>
-              <a:rPr sz="1000" b="1" lang="zh-TW" dirty="0">
+              <a:rPr sz="800" b="1" lang="zh-TW" dirty="0">
                 <a:solidFill>
                   <a:srgbClr val="000000"/>
                 </a:solidFill>
@@ -5031,7 +5031,7 @@
               <a:t>140 dB 以上</a:t>
             </a:r>
             <a:r>
-              <a:rPr sz="1000" lang="zh-TW" dirty="0">
+              <a:rPr sz="800" lang="zh-TW" dirty="0">
                 <a:solidFill>
                   <a:srgbClr val="000000"/>
                 </a:solidFill>
@@ -5045,15 +5045,15 @@
           </a:p>
           <a:p>
             <a:pPr algn="l">
-              <a:lnSpc>
-                <a:spcPct val="115000"/>
-              </a:lnSpc>
-              <a:spcAft>
-                <a:spcPts val="500"/>
-              </a:spcAft>
-            </a:pPr>
-            <a:r>
-              <a:rPr sz="1000" lang="zh-TW" dirty="0">
+              <a:spcBef>
+                <a:spcPts val="0"/>
+              </a:spcBef>
+              <a:spcAft>
+                <a:spcPts val="133"/>
+              </a:spcAft>
+            </a:pPr>
+            <a:r>
+              <a:rPr sz="800" lang="zh-TW" dirty="0">
                 <a:solidFill>
                   <a:srgbClr val="000000"/>
                 </a:solidFill>
@@ -5067,15 +5067,15 @@
           </a:p>
           <a:p>
             <a:pPr algn="l">
-              <a:lnSpc>
-                <a:spcPct val="115000"/>
-              </a:lnSpc>
-              <a:spcAft>
-                <a:spcPts val="500"/>
-              </a:spcAft>
-            </a:pPr>
-            <a:r>
-              <a:rPr sz="1000" lang="zh-TW" dirty="0">
+              <a:spcBef>
+                <a:spcPts val="0"/>
+              </a:spcBef>
+              <a:spcAft>
+                <a:spcPts val="133"/>
+              </a:spcAft>
+            </a:pPr>
+            <a:r>
+              <a:rPr sz="800" lang="zh-TW" dirty="0">
                 <a:solidFill>
                   <a:srgbClr val="000000"/>
                 </a:solidFill>
@@ -5086,7 +5086,7 @@
               <a:t>所以以後看到規格表上寫 120 dB 和寫 140 dB，那不是差百分之十七，是</a:t>
             </a:r>
             <a:r>
-              <a:rPr sz="1000" b="1" lang="zh-TW" dirty="0">
+              <a:rPr sz="800" b="1" lang="zh-TW" dirty="0">
                 <a:solidFill>
                   <a:srgbClr val="000000"/>
                 </a:solidFill>
@@ -5097,7 +5097,7 @@
               <a:t>差十倍</a:t>
             </a:r>
             <a:r>
-              <a:rPr sz="1000" lang="zh-TW" dirty="0">
+              <a:rPr sz="800" lang="zh-TW" dirty="0">
                 <a:solidFill>
                   <a:srgbClr val="000000"/>
                 </a:solidFill>
@@ -5111,15 +5111,15 @@
           </a:p>
           <a:p>
             <a:pPr algn="l">
-              <a:lnSpc>
-                <a:spcPct val="115000"/>
-              </a:lnSpc>
-              <a:spcAft>
-                <a:spcPts val="500"/>
-              </a:spcAft>
-            </a:pPr>
-            <a:r>
-              <a:rPr sz="1000" lang="zh-TW" dirty="0">
+              <a:spcBef>
+                <a:spcPts val="0"/>
+              </a:spcBef>
+              <a:spcAft>
+                <a:spcPts val="133"/>
+              </a:spcAft>
+            </a:pPr>
+            <a:r>
+              <a:rPr sz="800" lang="zh-TW" dirty="0">
                 <a:solidFill>
                   <a:srgbClr val="000000"/>
                 </a:solidFill>
@@ -5153,11 +5153,11 @@
           <a:lstStyle/>
           <a:p>
             <a:pPr algn="l">
-              <a:lnSpc>
-                <a:spcPct val="115000"/>
-              </a:lnSpc>
-              <a:spcAft>
-                <a:spcPts val="500"/>
+              <a:spcBef>
+                <a:spcPts val="0"/>
+              </a:spcBef>
+              <a:spcAft>
+                <a:spcPts val="167"/>
               </a:spcAft>
             </a:pPr>
             <a:r>
@@ -5232,15 +5232,15 @@
           <a:lstStyle/>
           <a:p>
             <a:pPr algn="l">
-              <a:lnSpc>
-                <a:spcPct val="115000"/>
-              </a:lnSpc>
-              <a:spcAft>
-                <a:spcPts val="500"/>
-              </a:spcAft>
-            </a:pPr>
-            <a:r>
-              <a:rPr sz="1000" b="1" lang="zh-TW" dirty="0">
+              <a:spcBef>
+                <a:spcPts val="0"/>
+              </a:spcBef>
+              <a:spcAft>
+                <a:spcPts val="133"/>
+              </a:spcAft>
+            </a:pPr>
+            <a:r>
+              <a:rPr sz="800" b="1" lang="zh-TW" dirty="0">
                 <a:solidFill>
                   <a:srgbClr val="000000"/>
                 </a:solidFill>
@@ -5251,7 +5251,7 @@
               <a:t>▍這一張要做什麼</a:t>
             </a:r>
             <a:r>
-              <a:rPr sz="1000" lang="zh-TW" dirty="0">
+              <a:rPr sz="800" lang="zh-TW" dirty="0">
                 <a:solidFill>
                   <a:srgbClr val="000000"/>
                 </a:solidFill>
@@ -5265,15 +5265,15 @@
           </a:p>
           <a:p>
             <a:pPr algn="l">
-              <a:lnSpc>
-                <a:spcPct val="115000"/>
-              </a:lnSpc>
-              <a:spcAft>
-                <a:spcPts val="500"/>
-              </a:spcAft>
-            </a:pPr>
-            <a:r>
-              <a:rPr sz="1000" lang="zh-TW" dirty="0">
+              <a:spcBef>
+                <a:spcPts val="0"/>
+              </a:spcBef>
+              <a:spcAft>
+                <a:spcPts val="133"/>
+              </a:spcAft>
+            </a:pPr>
+            <a:r>
+              <a:rPr sz="800" lang="zh-TW" dirty="0">
                 <a:solidFill>
                   <a:srgbClr val="000000"/>
                 </a:solidFill>
@@ -5287,15 +5287,15 @@
           </a:p>
           <a:p>
             <a:pPr algn="l">
-              <a:lnSpc>
-                <a:spcPct val="115000"/>
-              </a:lnSpc>
-              <a:spcAft>
-                <a:spcPts val="500"/>
-              </a:spcAft>
-            </a:pPr>
-            <a:r>
-              <a:rPr sz="1000" b="1" lang="zh-TW" dirty="0">
+              <a:spcBef>
+                <a:spcPts val="0"/>
+              </a:spcBef>
+              <a:spcAft>
+                <a:spcPts val="133"/>
+              </a:spcAft>
+            </a:pPr>
+            <a:r>
+              <a:rPr sz="800" b="1" lang="zh-TW" dirty="0">
                 <a:solidFill>
                   <a:srgbClr val="000000"/>
                 </a:solidFill>
@@ -5306,7 +5306,7 @@
               <a:t>▍畫面上圈這裡</a:t>
             </a:r>
             <a:r>
-              <a:rPr sz="1000" lang="zh-TW" dirty="0">
+              <a:rPr sz="800" lang="zh-TW" dirty="0">
                 <a:solidFill>
                   <a:srgbClr val="000000"/>
                 </a:solidFill>
@@ -5320,15 +5320,15 @@
           </a:p>
           <a:p>
             <a:pPr algn="l">
-              <a:lnSpc>
-                <a:spcPct val="115000"/>
-              </a:lnSpc>
-              <a:spcAft>
-                <a:spcPts val="500"/>
-              </a:spcAft>
-            </a:pPr>
-            <a:r>
-              <a:rPr sz="1000" lang="zh-TW" dirty="0">
+              <a:spcBef>
+                <a:spcPts val="0"/>
+              </a:spcBef>
+              <a:spcAft>
+                <a:spcPts val="133"/>
+              </a:spcAft>
+            </a:pPr>
+            <a:r>
+              <a:rPr sz="800" lang="zh-TW" dirty="0">
                 <a:solidFill>
                   <a:srgbClr val="000000"/>
                 </a:solidFill>
@@ -5342,15 +5342,15 @@
           </a:p>
           <a:p>
             <a:pPr algn="l">
-              <a:lnSpc>
-                <a:spcPct val="115000"/>
-              </a:lnSpc>
-              <a:spcAft>
-                <a:spcPts val="500"/>
-              </a:spcAft>
-            </a:pPr>
-            <a:r>
-              <a:rPr sz="1000" b="1" lang="zh-TW" dirty="0">
+              <a:spcBef>
+                <a:spcPts val="0"/>
+              </a:spcBef>
+              <a:spcAft>
+                <a:spcPts val="133"/>
+              </a:spcAft>
+            </a:pPr>
+            <a:r>
+              <a:rPr sz="800" b="1" lang="zh-TW" dirty="0">
                 <a:solidFill>
                   <a:srgbClr val="000000"/>
                 </a:solidFill>
@@ -5361,7 +5361,7 @@
               <a:t>▍以下照著唸</a:t>
             </a:r>
             <a:r>
-              <a:rPr sz="1000" lang="zh-TW" dirty="0">
+              <a:rPr sz="800" lang="zh-TW" dirty="0">
                 <a:solidFill>
                   <a:srgbClr val="000000"/>
                 </a:solidFill>
@@ -5375,15 +5375,15 @@
           </a:p>
           <a:p>
             <a:pPr algn="l">
-              <a:lnSpc>
-                <a:spcPct val="115000"/>
-              </a:lnSpc>
-              <a:spcAft>
-                <a:spcPts val="500"/>
-              </a:spcAft>
-            </a:pPr>
-            <a:r>
-              <a:rPr sz="1000" lang="zh-TW" dirty="0">
+              <a:spcBef>
+                <a:spcPts val="0"/>
+              </a:spcBef>
+              <a:spcAft>
+                <a:spcPts val="133"/>
+              </a:spcAft>
+            </a:pPr>
+            <a:r>
+              <a:rPr sz="800" lang="zh-TW" dirty="0">
                 <a:solidFill>
                   <a:srgbClr val="000000"/>
                 </a:solidFill>
@@ -5394,7 +5394,7 @@
               <a:t>第三行是</a:t>
             </a:r>
             <a:r>
-              <a:rPr sz="1000" b="1" lang="zh-TW" dirty="0">
+              <a:rPr sz="800" b="1" lang="zh-TW" dirty="0">
                 <a:solidFill>
                   <a:srgbClr val="000000"/>
                 </a:solidFill>
@@ -5405,7 +5405,7 @@
               <a:t>LED 閃爍抑制</a:t>
             </a:r>
             <a:r>
-              <a:rPr sz="1000" lang="zh-TW" dirty="0">
+              <a:rPr sz="800" lang="zh-TW" dirty="0">
                 <a:solidFill>
                   <a:srgbClr val="000000"/>
                 </a:solidFill>
@@ -5419,15 +5419,15 @@
           </a:p>
           <a:p>
             <a:pPr algn="l">
-              <a:lnSpc>
-                <a:spcPct val="115000"/>
-              </a:lnSpc>
-              <a:spcAft>
-                <a:spcPts val="500"/>
-              </a:spcAft>
-            </a:pPr>
-            <a:r>
-              <a:rPr sz="1000" lang="zh-TW" dirty="0">
+              <a:spcBef>
+                <a:spcPts val="0"/>
+              </a:spcBef>
+              <a:spcAft>
+                <a:spcPts val="133"/>
+              </a:spcAft>
+            </a:pPr>
+            <a:r>
+              <a:rPr sz="800" lang="zh-TW" dirty="0">
                 <a:solidFill>
                   <a:srgbClr val="000000"/>
                 </a:solidFill>
@@ -5441,15 +5441,15 @@
           </a:p>
           <a:p>
             <a:pPr algn="l">
-              <a:lnSpc>
-                <a:spcPct val="115000"/>
-              </a:lnSpc>
-              <a:spcAft>
-                <a:spcPts val="500"/>
-              </a:spcAft>
-            </a:pPr>
-            <a:r>
-              <a:rPr sz="1000" lang="zh-TW" dirty="0">
+              <a:spcBef>
+                <a:spcPts val="0"/>
+              </a:spcBef>
+              <a:spcAft>
+                <a:spcPts val="133"/>
+              </a:spcAft>
+            </a:pPr>
+            <a:r>
+              <a:rPr sz="800" lang="zh-TW" dirty="0">
                 <a:solidFill>
                   <a:srgbClr val="000000"/>
                 </a:solidFill>
@@ -5460,7 +5460,7 @@
               <a:t>現在路上的紅綠燈、車子的尾燈，幾乎全部換成 LED 了。LED 不是一直亮著的，它是</a:t>
             </a:r>
             <a:r>
-              <a:rPr sz="1000" b="1" lang="zh-TW" dirty="0">
+              <a:rPr sz="800" b="1" lang="zh-TW" dirty="0">
                 <a:solidFill>
                   <a:srgbClr val="000000"/>
                 </a:solidFill>
@@ -5471,7 +5471,7 @@
               <a:t>用很快的速度在閃</a:t>
             </a:r>
             <a:r>
-              <a:rPr sz="1000" lang="zh-TW" dirty="0">
+              <a:rPr sz="800" lang="zh-TW" dirty="0">
                 <a:solidFill>
                   <a:srgbClr val="000000"/>
                 </a:solidFill>
@@ -5485,15 +5485,15 @@
           </a:p>
           <a:p>
             <a:pPr algn="l">
-              <a:lnSpc>
-                <a:spcPct val="115000"/>
-              </a:lnSpc>
-              <a:spcAft>
-                <a:spcPts val="500"/>
-              </a:spcAft>
-            </a:pPr>
-            <a:r>
-              <a:rPr sz="1000" lang="zh-TW" dirty="0">
+              <a:spcBef>
+                <a:spcPts val="0"/>
+              </a:spcBef>
+              <a:spcAft>
+                <a:spcPts val="133"/>
+              </a:spcAft>
+            </a:pPr>
+            <a:r>
+              <a:rPr sz="800" lang="zh-TW" dirty="0">
                 <a:solidFill>
                   <a:srgbClr val="000000"/>
                 </a:solidFill>
@@ -5507,15 +5507,15 @@
           </a:p>
           <a:p>
             <a:pPr algn="l">
-              <a:lnSpc>
-                <a:spcPct val="115000"/>
-              </a:lnSpc>
-              <a:spcAft>
-                <a:spcPts val="500"/>
-              </a:spcAft>
-            </a:pPr>
-            <a:r>
-              <a:rPr sz="1000" b="1" lang="zh-TW" dirty="0">
+              <a:spcBef>
+                <a:spcPts val="0"/>
+              </a:spcBef>
+              <a:spcAft>
+                <a:spcPts val="133"/>
+              </a:spcAft>
+            </a:pPr>
+            <a:r>
+              <a:rPr sz="800" b="1" lang="zh-TW" dirty="0">
                 <a:solidFill>
                   <a:srgbClr val="000000"/>
                 </a:solidFill>
@@ -5526,7 +5526,7 @@
               <a:t>你就拍到一個沒有亮的紅燈。</a:t>
             </a:r>
             <a:r>
-              <a:rPr sz="1000" lang="zh-TW" dirty="0">
+              <a:rPr sz="800" lang="zh-TW" dirty="0">
                 <a:solidFill>
                   <a:srgbClr val="000000"/>
                 </a:solidFill>
@@ -5540,15 +5540,15 @@
           </a:p>
           <a:p>
             <a:pPr algn="l">
-              <a:lnSpc>
-                <a:spcPct val="115000"/>
-              </a:lnSpc>
-              <a:spcAft>
-                <a:spcPts val="500"/>
-              </a:spcAft>
-            </a:pPr>
-            <a:r>
-              <a:rPr sz="1000" lang="zh-TW" dirty="0">
+              <a:spcBef>
+                <a:spcPts val="0"/>
+              </a:spcBef>
+              <a:spcAft>
+                <a:spcPts val="133"/>
+              </a:spcAft>
+            </a:pPr>
+            <a:r>
+              <a:rPr sz="800" lang="zh-TW" dirty="0">
                 <a:solidFill>
                   <a:srgbClr val="000000"/>
                 </a:solidFill>
@@ -5562,15 +5562,15 @@
           </a:p>
           <a:p>
             <a:pPr algn="l">
-              <a:lnSpc>
-                <a:spcPct val="115000"/>
-              </a:lnSpc>
-              <a:spcAft>
-                <a:spcPts val="500"/>
-              </a:spcAft>
-            </a:pPr>
-            <a:r>
-              <a:rPr sz="1000" lang="zh-TW" dirty="0">
+              <a:spcBef>
+                <a:spcPts val="0"/>
+              </a:spcBef>
+              <a:spcAft>
+                <a:spcPts val="133"/>
+              </a:spcAft>
+            </a:pPr>
+            <a:r>
+              <a:rPr sz="800" lang="zh-TW" dirty="0">
                 <a:solidFill>
                   <a:srgbClr val="000000"/>
                 </a:solidFill>
@@ -5584,15 +5584,15 @@
           </a:p>
           <a:p>
             <a:pPr algn="l">
-              <a:lnSpc>
-                <a:spcPct val="115000"/>
-              </a:lnSpc>
-              <a:spcAft>
-                <a:spcPts val="500"/>
-              </a:spcAft>
-            </a:pPr>
-            <a:r>
-              <a:rPr sz="1000" lang="zh-TW" dirty="0">
+              <a:spcBef>
+                <a:spcPts val="0"/>
+              </a:spcBef>
+              <a:spcAft>
+                <a:spcPts val="133"/>
+              </a:spcAft>
+            </a:pPr>
+            <a:r>
+              <a:rPr sz="800" lang="zh-TW" dirty="0">
                 <a:solidFill>
                   <a:srgbClr val="000000"/>
                 </a:solidFill>
@@ -5606,15 +5606,15 @@
           </a:p>
           <a:p>
             <a:pPr algn="l">
-              <a:lnSpc>
-                <a:spcPct val="115000"/>
-              </a:lnSpc>
-              <a:spcAft>
-                <a:spcPts val="500"/>
-              </a:spcAft>
-            </a:pPr>
-            <a:r>
-              <a:rPr sz="1000" lang="zh-TW" dirty="0">
+              <a:spcBef>
+                <a:spcPts val="0"/>
+              </a:spcBef>
+              <a:spcAft>
+                <a:spcPts val="133"/>
+              </a:spcAft>
+            </a:pPr>
+            <a:r>
+              <a:rPr sz="800" lang="zh-TW" dirty="0">
                 <a:solidFill>
                   <a:srgbClr val="000000"/>
                 </a:solidFill>
@@ -5625,7 +5625,7 @@
               <a:t>所以車用的影像感測器要特別處理這件事，作法是</a:t>
             </a:r>
             <a:r>
-              <a:rPr sz="1000" b="1" lang="zh-TW" dirty="0">
+              <a:rPr sz="800" b="1" lang="zh-TW" dirty="0">
                 <a:solidFill>
                   <a:srgbClr val="000000"/>
                 </a:solidFill>
@@ -5636,7 +5636,7 @@
               <a:t>把曝光拆成好幾段</a:t>
             </a:r>
             <a:r>
-              <a:rPr sz="1000" lang="zh-TW" dirty="0">
+              <a:rPr sz="800" lang="zh-TW" dirty="0">
                 <a:solidFill>
                   <a:srgbClr val="000000"/>
                 </a:solidFill>
@@ -5650,15 +5650,15 @@
           </a:p>
           <a:p>
             <a:pPr algn="l">
-              <a:lnSpc>
-                <a:spcPct val="115000"/>
-              </a:lnSpc>
-              <a:spcAft>
-                <a:spcPts val="500"/>
-              </a:spcAft>
-            </a:pPr>
-            <a:r>
-              <a:rPr sz="1000" lang="zh-TW" dirty="0">
+              <a:spcBef>
+                <a:spcPts val="0"/>
+              </a:spcBef>
+              <a:spcAft>
+                <a:spcPts val="133"/>
+              </a:spcAft>
+            </a:pPr>
+            <a:r>
+              <a:rPr sz="800" lang="zh-TW" dirty="0">
                 <a:solidFill>
                   <a:srgbClr val="000000"/>
                 </a:solidFill>
@@ -5669,7 +5669,7 @@
               <a:t>各位回去看 AR0233AT 的規格表，上面寫著「Full resolution LFM」，就是這個功能。這一行是一顆感測器能不能拿來做自駕的</a:t>
             </a:r>
             <a:r>
-              <a:rPr sz="1000" b="1" lang="zh-TW" dirty="0">
+              <a:rPr sz="800" b="1" lang="zh-TW" dirty="0">
                 <a:solidFill>
                   <a:srgbClr val="000000"/>
                 </a:solidFill>
@@ -5680,7 +5680,7 @@
               <a:t>及格線</a:t>
             </a:r>
             <a:r>
-              <a:rPr sz="1000" lang="zh-TW" dirty="0">
+              <a:rPr sz="800" lang="zh-TW" dirty="0">
                 <a:solidFill>
                   <a:srgbClr val="000000"/>
                 </a:solidFill>
@@ -5694,15 +5694,15 @@
           </a:p>
           <a:p>
             <a:pPr algn="l">
-              <a:lnSpc>
-                <a:spcPct val="115000"/>
-              </a:lnSpc>
-              <a:spcAft>
-                <a:spcPts val="500"/>
-              </a:spcAft>
-            </a:pPr>
-            <a:r>
-              <a:rPr sz="1000" lang="zh-TW" dirty="0">
+              <a:spcBef>
+                <a:spcPts val="0"/>
+              </a:spcBef>
+              <a:spcAft>
+                <a:spcPts val="133"/>
+              </a:spcAft>
+            </a:pPr>
+            <a:r>
+              <a:rPr sz="800" lang="zh-TW" dirty="0">
                 <a:solidFill>
                   <a:srgbClr val="000000"/>
                 </a:solidFill>
@@ -5736,11 +5736,11 @@
           <a:lstStyle/>
           <a:p>
             <a:pPr algn="l">
-              <a:lnSpc>
-                <a:spcPct val="115000"/>
-              </a:lnSpc>
-              <a:spcAft>
-                <a:spcPts val="500"/>
+              <a:spcBef>
+                <a:spcPts val="0"/>
+              </a:spcBef>
+              <a:spcAft>
+                <a:spcPts val="167"/>
               </a:spcAft>
             </a:pPr>
             <a:r>
@@ -5815,11 +5815,11 @@
           <a:lstStyle/>
           <a:p>
             <a:pPr algn="l">
-              <a:lnSpc>
-                <a:spcPct val="115000"/>
-              </a:lnSpc>
-              <a:spcAft>
-                <a:spcPts val="600"/>
+              <a:spcBef>
+                <a:spcPts val="0"/>
+              </a:spcBef>
+              <a:spcAft>
+                <a:spcPts val="200"/>
               </a:spcAft>
             </a:pPr>
             <a:r>
@@ -5848,11 +5848,11 @@
           </a:p>
           <a:p>
             <a:pPr algn="l">
-              <a:lnSpc>
-                <a:spcPct val="115000"/>
-              </a:lnSpc>
-              <a:spcAft>
-                <a:spcPts val="600"/>
+              <a:spcBef>
+                <a:spcPts val="0"/>
+              </a:spcBef>
+              <a:spcAft>
+                <a:spcPts val="200"/>
               </a:spcAft>
             </a:pPr>
             <a:r>
@@ -5870,11 +5870,11 @@
           </a:p>
           <a:p>
             <a:pPr algn="l">
-              <a:lnSpc>
-                <a:spcPct val="115000"/>
-              </a:lnSpc>
-              <a:spcAft>
-                <a:spcPts val="600"/>
+              <a:spcBef>
+                <a:spcPts val="0"/>
+              </a:spcBef>
+              <a:spcAft>
+                <a:spcPts val="200"/>
               </a:spcAft>
             </a:pPr>
             <a:r>
@@ -5903,11 +5903,11 @@
           </a:p>
           <a:p>
             <a:pPr algn="l">
-              <a:lnSpc>
-                <a:spcPct val="115000"/>
-              </a:lnSpc>
-              <a:spcAft>
-                <a:spcPts val="600"/>
+              <a:spcBef>
+                <a:spcPts val="0"/>
+              </a:spcBef>
+              <a:spcAft>
+                <a:spcPts val="200"/>
               </a:spcAft>
             </a:pPr>
             <a:r>
@@ -5925,11 +5925,11 @@
           </a:p>
           <a:p>
             <a:pPr algn="l">
-              <a:lnSpc>
-                <a:spcPct val="115000"/>
-              </a:lnSpc>
-              <a:spcAft>
-                <a:spcPts val="600"/>
+              <a:spcBef>
+                <a:spcPts val="0"/>
+              </a:spcBef>
+              <a:spcAft>
+                <a:spcPts val="200"/>
               </a:spcAft>
             </a:pPr>
             <a:r>
@@ -5958,11 +5958,11 @@
           </a:p>
           <a:p>
             <a:pPr algn="l">
-              <a:lnSpc>
-                <a:spcPct val="115000"/>
-              </a:lnSpc>
-              <a:spcAft>
-                <a:spcPts val="600"/>
+              <a:spcBef>
+                <a:spcPts val="0"/>
+              </a:spcBef>
+              <a:spcAft>
+                <a:spcPts val="200"/>
               </a:spcAft>
             </a:pPr>
             <a:r>
@@ -6000,11 +6000,11 @@
           <a:lstStyle/>
           <a:p>
             <a:pPr algn="l">
-              <a:lnSpc>
-                <a:spcPct val="115000"/>
-              </a:lnSpc>
-              <a:spcAft>
-                <a:spcPts val="500"/>
+              <a:spcBef>
+                <a:spcPts val="0"/>
+              </a:spcBef>
+              <a:spcAft>
+                <a:spcPts val="167"/>
               </a:spcAft>
             </a:pPr>
             <a:r>
@@ -6079,15 +6079,15 @@
           <a:lstStyle/>
           <a:p>
             <a:pPr algn="l">
-              <a:lnSpc>
-                <a:spcPct val="115000"/>
-              </a:lnSpc>
-              <a:spcAft>
-                <a:spcPts val="500"/>
-              </a:spcAft>
-            </a:pPr>
-            <a:r>
-              <a:rPr sz="1000" b="1" lang="zh-TW" dirty="0">
+              <a:spcBef>
+                <a:spcPts val="0"/>
+              </a:spcBef>
+              <a:spcAft>
+                <a:spcPts val="133"/>
+              </a:spcAft>
+            </a:pPr>
+            <a:r>
+              <a:rPr sz="800" b="1" lang="zh-TW" dirty="0">
                 <a:solidFill>
                   <a:srgbClr val="000000"/>
                 </a:solidFill>
@@ -6098,7 +6098,7 @@
               <a:t>▍這一張要做什麼</a:t>
             </a:r>
             <a:r>
-              <a:rPr sz="1000" lang="zh-TW" dirty="0">
+              <a:rPr sz="800" lang="zh-TW" dirty="0">
                 <a:solidFill>
                   <a:srgbClr val="000000"/>
                 </a:solidFill>
@@ -6112,15 +6112,15 @@
           </a:p>
           <a:p>
             <a:pPr algn="l">
-              <a:lnSpc>
-                <a:spcPct val="115000"/>
-              </a:lnSpc>
-              <a:spcAft>
-                <a:spcPts val="500"/>
-              </a:spcAft>
-            </a:pPr>
-            <a:r>
-              <a:rPr sz="1000" lang="zh-TW" dirty="0">
+              <a:spcBef>
+                <a:spcPts val="0"/>
+              </a:spcBef>
+              <a:spcAft>
+                <a:spcPts val="133"/>
+              </a:spcAft>
+            </a:pPr>
+            <a:r>
+              <a:rPr sz="800" lang="zh-TW" dirty="0">
                 <a:solidFill>
                   <a:srgbClr val="000000"/>
                 </a:solidFill>
@@ -6134,15 +6134,15 @@
           </a:p>
           <a:p>
             <a:pPr algn="l">
-              <a:lnSpc>
-                <a:spcPct val="115000"/>
-              </a:lnSpc>
-              <a:spcAft>
-                <a:spcPts val="500"/>
-              </a:spcAft>
-            </a:pPr>
-            <a:r>
-              <a:rPr sz="1000" b="1" lang="zh-TW" dirty="0">
+              <a:spcBef>
+                <a:spcPts val="0"/>
+              </a:spcBef>
+              <a:spcAft>
+                <a:spcPts val="133"/>
+              </a:spcAft>
+            </a:pPr>
+            <a:r>
+              <a:rPr sz="800" b="1" lang="zh-TW" dirty="0">
                 <a:solidFill>
                   <a:srgbClr val="000000"/>
                 </a:solidFill>
@@ -6153,7 +6153,7 @@
               <a:t>▍畫面上圈這裡</a:t>
             </a:r>
             <a:r>
-              <a:rPr sz="1000" lang="zh-TW" dirty="0">
+              <a:rPr sz="800" lang="zh-TW" dirty="0">
                 <a:solidFill>
                   <a:srgbClr val="000000"/>
                 </a:solidFill>
@@ -6167,15 +6167,15 @@
           </a:p>
           <a:p>
             <a:pPr algn="l">
-              <a:lnSpc>
-                <a:spcPct val="115000"/>
-              </a:lnSpc>
-              <a:spcAft>
-                <a:spcPts val="500"/>
-              </a:spcAft>
-            </a:pPr>
-            <a:r>
-              <a:rPr sz="1000" lang="zh-TW" dirty="0">
+              <a:spcBef>
+                <a:spcPts val="0"/>
+              </a:spcBef>
+              <a:spcAft>
+                <a:spcPts val="133"/>
+              </a:spcAft>
+            </a:pPr>
+            <a:r>
+              <a:rPr sz="800" lang="zh-TW" dirty="0">
                 <a:solidFill>
                   <a:srgbClr val="000000"/>
                 </a:solidFill>
@@ -6189,15 +6189,15 @@
           </a:p>
           <a:p>
             <a:pPr algn="l">
-              <a:lnSpc>
-                <a:spcPct val="115000"/>
-              </a:lnSpc>
-              <a:spcAft>
-                <a:spcPts val="500"/>
-              </a:spcAft>
-            </a:pPr>
-            <a:r>
-              <a:rPr sz="1000" b="1" lang="zh-TW" dirty="0">
+              <a:spcBef>
+                <a:spcPts val="0"/>
+              </a:spcBef>
+              <a:spcAft>
+                <a:spcPts val="133"/>
+              </a:spcAft>
+            </a:pPr>
+            <a:r>
+              <a:rPr sz="800" b="1" lang="zh-TW" dirty="0">
                 <a:solidFill>
                   <a:srgbClr val="000000"/>
                 </a:solidFill>
@@ -6208,7 +6208,7 @@
               <a:t>▍以下照著唸</a:t>
             </a:r>
             <a:r>
-              <a:rPr sz="1000" lang="zh-TW" dirty="0">
+              <a:rPr sz="800" lang="zh-TW" dirty="0">
                 <a:solidFill>
                   <a:srgbClr val="000000"/>
                 </a:solidFill>
@@ -6222,15 +6222,15 @@
           </a:p>
           <a:p>
             <a:pPr algn="l">
-              <a:lnSpc>
-                <a:spcPct val="115000"/>
-              </a:lnSpc>
-              <a:spcAft>
-                <a:spcPts val="500"/>
-              </a:spcAft>
-            </a:pPr>
-            <a:r>
-              <a:rPr sz="1000" lang="zh-TW" dirty="0">
+              <a:spcBef>
+                <a:spcPts val="0"/>
+              </a:spcBef>
+              <a:spcAft>
+                <a:spcPts val="133"/>
+              </a:spcAft>
+            </a:pPr>
+            <a:r>
+              <a:rPr sz="800" lang="zh-TW" dirty="0">
                 <a:solidFill>
                   <a:srgbClr val="000000"/>
                 </a:solidFill>
@@ -6241,7 +6241,7 @@
               <a:t>光達的第一行講的是</a:t>
             </a:r>
             <a:r>
-              <a:rPr sz="1000" b="1" lang="zh-TW" dirty="0">
+              <a:rPr sz="800" b="1" lang="zh-TW" dirty="0">
                 <a:solidFill>
                   <a:srgbClr val="000000"/>
                 </a:solidFill>
@@ -6252,7 +6252,7 @@
               <a:t>波長</a:t>
             </a:r>
             <a:r>
-              <a:rPr sz="1000" lang="zh-TW" dirty="0">
+              <a:rPr sz="800" lang="zh-TW" dirty="0">
                 <a:solidFill>
                   <a:srgbClr val="000000"/>
                 </a:solidFill>
@@ -6266,15 +6266,15 @@
           </a:p>
           <a:p>
             <a:pPr algn="l">
-              <a:lnSpc>
-                <a:spcPct val="115000"/>
-              </a:lnSpc>
-              <a:spcAft>
-                <a:spcPts val="500"/>
-              </a:spcAft>
-            </a:pPr>
-            <a:r>
-              <a:rPr sz="1000" lang="zh-TW" dirty="0">
+              <a:spcBef>
+                <a:spcPts val="0"/>
+              </a:spcBef>
+              <a:spcAft>
+                <a:spcPts val="133"/>
+              </a:spcAft>
+            </a:pPr>
+            <a:r>
+              <a:rPr sz="800" lang="zh-TW" dirty="0">
                 <a:solidFill>
                   <a:srgbClr val="000000"/>
                 </a:solidFill>
@@ -6285,7 +6285,7 @@
               <a:t>規格表上會寫一個數字，單位是奈米。路上最常見的是 </a:t>
             </a:r>
             <a:r>
-              <a:rPr sz="1000" b="1" lang="zh-TW" dirty="0">
+              <a:rPr sz="800" b="1" lang="zh-TW" dirty="0">
                 <a:solidFill>
                   <a:srgbClr val="000000"/>
                 </a:solidFill>
@@ -6296,7 +6296,7 @@
               <a:t>905 奈米</a:t>
             </a:r>
             <a:r>
-              <a:rPr sz="1000" lang="zh-TW" dirty="0">
+              <a:rPr sz="800" lang="zh-TW" dirty="0">
                 <a:solidFill>
                   <a:srgbClr val="000000"/>
                 </a:solidFill>
@@ -6307,7 +6307,7 @@
               <a:t>，我們看的 OS1 寫的是 </a:t>
             </a:r>
             <a:r>
-              <a:rPr sz="1000" b="1" lang="zh-TW" dirty="0">
+              <a:rPr sz="800" b="1" lang="zh-TW" dirty="0">
                 <a:solidFill>
                   <a:srgbClr val="000000"/>
                 </a:solidFill>
@@ -6318,7 +6318,7 @@
               <a:t>865</a:t>
             </a:r>
             <a:r>
-              <a:rPr sz="1000" lang="zh-TW" dirty="0">
+              <a:rPr sz="800" lang="zh-TW" dirty="0">
                 <a:solidFill>
                   <a:srgbClr val="000000"/>
                 </a:solidFill>
@@ -6329,7 +6329,7 @@
               <a:t>，還有一種比較貴的是 </a:t>
             </a:r>
             <a:r>
-              <a:rPr sz="1000" b="1" lang="zh-TW" dirty="0">
+              <a:rPr sz="800" b="1" lang="zh-TW" dirty="0">
                 <a:solidFill>
                   <a:srgbClr val="000000"/>
                 </a:solidFill>
@@ -6340,7 +6340,7 @@
               <a:t>1550 奈米</a:t>
             </a:r>
             <a:r>
-              <a:rPr sz="1000" lang="zh-TW" dirty="0">
+              <a:rPr sz="800" lang="zh-TW" dirty="0">
                 <a:solidFill>
                   <a:srgbClr val="000000"/>
                 </a:solidFill>
@@ -6354,15 +6354,15 @@
           </a:p>
           <a:p>
             <a:pPr algn="l">
-              <a:lnSpc>
-                <a:spcPct val="115000"/>
-              </a:lnSpc>
-              <a:spcAft>
-                <a:spcPts val="500"/>
-              </a:spcAft>
-            </a:pPr>
-            <a:r>
-              <a:rPr sz="1000" lang="zh-TW" dirty="0">
+              <a:spcBef>
+                <a:spcPts val="0"/>
+              </a:spcBef>
+              <a:spcAft>
+                <a:spcPts val="133"/>
+              </a:spcAft>
+            </a:pPr>
+            <a:r>
+              <a:rPr sz="800" lang="zh-TW" dirty="0">
                 <a:solidFill>
                   <a:srgbClr val="000000"/>
                 </a:solidFill>
@@ -6376,15 +6376,15 @@
           </a:p>
           <a:p>
             <a:pPr algn="l">
-              <a:lnSpc>
-                <a:spcPct val="115000"/>
-              </a:lnSpc>
-              <a:spcAft>
-                <a:spcPts val="500"/>
-              </a:spcAft>
-            </a:pPr>
-            <a:r>
-              <a:rPr sz="1000" lang="zh-TW" dirty="0">
+              <a:spcBef>
+                <a:spcPts val="0"/>
+              </a:spcBef>
+              <a:spcAft>
+                <a:spcPts val="133"/>
+              </a:spcAft>
+            </a:pPr>
+            <a:r>
+              <a:rPr sz="800" lang="zh-TW" dirty="0">
                 <a:solidFill>
                   <a:srgbClr val="000000"/>
                 </a:solidFill>
@@ -6395,7 +6395,7 @@
               <a:t>各位還記得第三週講的：光達打的是紅外線雷射，人眼看不到。看不到的東西打到眼睛裡，人不會眨眼、也不會閃避，所以</a:t>
             </a:r>
             <a:r>
-              <a:rPr sz="1000" b="1" lang="zh-TW" dirty="0">
+              <a:rPr sz="800" b="1" lang="zh-TW" dirty="0">
                 <a:solidFill>
                   <a:srgbClr val="000000"/>
                 </a:solidFill>
@@ -6406,7 +6406,7 @@
               <a:t>法規對雷射的功率管得很嚴</a:t>
             </a:r>
             <a:r>
-              <a:rPr sz="1000" lang="zh-TW" dirty="0">
+              <a:rPr sz="800" lang="zh-TW" dirty="0">
                 <a:solidFill>
                   <a:srgbClr val="000000"/>
                 </a:solidFill>
@@ -6420,15 +6420,15 @@
           </a:p>
           <a:p>
             <a:pPr algn="l">
-              <a:lnSpc>
-                <a:spcPct val="115000"/>
-              </a:lnSpc>
-              <a:spcAft>
-                <a:spcPts val="500"/>
-              </a:spcAft>
-            </a:pPr>
-            <a:r>
-              <a:rPr sz="1000" lang="zh-TW" dirty="0">
+              <a:spcBef>
+                <a:spcPts val="0"/>
+              </a:spcBef>
+              <a:spcAft>
+                <a:spcPts val="133"/>
+              </a:spcAft>
+            </a:pPr>
+            <a:r>
+              <a:rPr sz="800" lang="zh-TW" dirty="0">
                 <a:solidFill>
                   <a:srgbClr val="000000"/>
                 </a:solidFill>
@@ -6442,15 +6442,15 @@
           </a:p>
           <a:p>
             <a:pPr algn="l">
-              <a:lnSpc>
-                <a:spcPct val="115000"/>
-              </a:lnSpc>
-              <a:spcAft>
-                <a:spcPts val="500"/>
-              </a:spcAft>
-            </a:pPr>
-            <a:r>
-              <a:rPr sz="1000" lang="zh-TW" dirty="0">
+              <a:spcBef>
+                <a:spcPts val="0"/>
+              </a:spcBef>
+              <a:spcAft>
+                <a:spcPts val="133"/>
+              </a:spcAft>
+            </a:pPr>
+            <a:r>
+              <a:rPr sz="800" lang="zh-TW" dirty="0">
                 <a:solidFill>
                   <a:srgbClr val="000000"/>
                 </a:solidFill>
@@ -6461,7 +6461,7 @@
               <a:t>關鍵在這裡：</a:t>
             </a:r>
             <a:r>
-              <a:rPr sz="1000" b="1" lang="zh-TW" dirty="0">
+              <a:rPr sz="800" b="1" lang="zh-TW" dirty="0">
                 <a:solidFill>
                   <a:srgbClr val="000000"/>
                 </a:solidFill>
@@ -6472,7 +6472,7 @@
               <a:t>905 奈米的光會穿過眼睛的水晶體，直接打到視網膜上。</a:t>
             </a:r>
             <a:r>
-              <a:rPr sz="1000" lang="zh-TW" dirty="0">
+              <a:rPr sz="800" lang="zh-TW" dirty="0">
                 <a:solidFill>
                   <a:srgbClr val="000000"/>
                 </a:solidFill>
@@ -6486,15 +6486,15 @@
           </a:p>
           <a:p>
             <a:pPr algn="l">
-              <a:lnSpc>
-                <a:spcPct val="115000"/>
-              </a:lnSpc>
-              <a:spcAft>
-                <a:spcPts val="500"/>
-              </a:spcAft>
-            </a:pPr>
-            <a:r>
-              <a:rPr sz="1000" lang="zh-TW" dirty="0">
+              <a:spcBef>
+                <a:spcPts val="0"/>
+              </a:spcBef>
+              <a:spcAft>
+                <a:spcPts val="133"/>
+              </a:spcAft>
+            </a:pPr>
+            <a:r>
+              <a:rPr sz="800" lang="zh-TW" dirty="0">
                 <a:solidFill>
                   <a:srgbClr val="000000"/>
                 </a:solidFill>
@@ -6505,7 +6505,7 @@
               <a:t>1550 奈米不一樣。這個波長會</a:t>
             </a:r>
             <a:r>
-              <a:rPr sz="1000" b="1" lang="zh-TW" dirty="0">
+              <a:rPr sz="800" b="1" lang="zh-TW" dirty="0">
                 <a:solidFill>
                   <a:srgbClr val="000000"/>
                 </a:solidFill>
@@ -6516,7 +6516,7 @@
               <a:t>先被眼睛裡面的水吸收掉</a:t>
             </a:r>
             <a:r>
-              <a:rPr sz="1000" lang="zh-TW" dirty="0">
+              <a:rPr sz="800" lang="zh-TW" dirty="0">
                 <a:solidFill>
                   <a:srgbClr val="000000"/>
                 </a:solidFill>
@@ -6527,7 +6527,7 @@
               <a:t>，還沒到視網膜就被擋住了。所以在同樣的安全等級下，1550 可以打</a:t>
             </a:r>
             <a:r>
-              <a:rPr sz="1000" b="1" lang="zh-TW" dirty="0">
+              <a:rPr sz="800" b="1" lang="zh-TW" dirty="0">
                 <a:solidFill>
                   <a:srgbClr val="000000"/>
                 </a:solidFill>
@@ -6538,7 +6538,7 @@
               <a:t>強幾十倍</a:t>
             </a:r>
             <a:r>
-              <a:rPr sz="1000" lang="zh-TW" dirty="0">
+              <a:rPr sz="800" lang="zh-TW" dirty="0">
                 <a:solidFill>
                   <a:srgbClr val="000000"/>
                 </a:solidFill>
@@ -6552,15 +6552,15 @@
           </a:p>
           <a:p>
             <a:pPr algn="l">
-              <a:lnSpc>
-                <a:spcPct val="115000"/>
-              </a:lnSpc>
-              <a:spcAft>
-                <a:spcPts val="500"/>
-              </a:spcAft>
-            </a:pPr>
-            <a:r>
-              <a:rPr sz="1000" lang="zh-TW" dirty="0">
+              <a:spcBef>
+                <a:spcPts val="0"/>
+              </a:spcBef>
+              <a:spcAft>
+                <a:spcPts val="133"/>
+              </a:spcAft>
+            </a:pPr>
+            <a:r>
+              <a:rPr sz="800" lang="zh-TW" dirty="0">
                 <a:solidFill>
                   <a:srgbClr val="000000"/>
                 </a:solidFill>
@@ -6574,15 +6574,15 @@
           </a:p>
           <a:p>
             <a:pPr algn="l">
-              <a:lnSpc>
-                <a:spcPct val="115000"/>
-              </a:lnSpc>
-              <a:spcAft>
-                <a:spcPts val="500"/>
-              </a:spcAft>
-            </a:pPr>
-            <a:r>
-              <a:rPr sz="1000" lang="zh-TW" dirty="0">
+              <a:spcBef>
+                <a:spcPts val="0"/>
+              </a:spcBef>
+              <a:spcAft>
+                <a:spcPts val="133"/>
+              </a:spcAft>
+            </a:pPr>
+            <a:r>
+              <a:rPr sz="800" lang="zh-TW" dirty="0">
                 <a:solidFill>
                   <a:srgbClr val="000000"/>
                 </a:solidFill>
@@ -6593,7 +6593,7 @@
               <a:t>那為什麼不是每一家都用？因為</a:t>
             </a:r>
             <a:r>
-              <a:rPr sz="1000" b="1" lang="zh-TW" dirty="0">
+              <a:rPr sz="800" b="1" lang="zh-TW" dirty="0">
                 <a:solidFill>
                   <a:srgbClr val="000000"/>
                 </a:solidFill>
@@ -6604,7 +6604,7 @@
               <a:t>貴</a:t>
             </a:r>
             <a:r>
-              <a:rPr sz="1000" lang="zh-TW" dirty="0">
+              <a:rPr sz="800" lang="zh-TW" dirty="0">
                 <a:solidFill>
                   <a:srgbClr val="000000"/>
                 </a:solidFill>
@@ -6618,15 +6618,15 @@
           </a:p>
           <a:p>
             <a:pPr algn="l">
-              <a:lnSpc>
-                <a:spcPct val="115000"/>
-              </a:lnSpc>
-              <a:spcAft>
-                <a:spcPts val="500"/>
-              </a:spcAft>
-            </a:pPr>
-            <a:r>
-              <a:rPr sz="1000" lang="zh-TW" dirty="0">
+              <a:spcBef>
+                <a:spcPts val="0"/>
+              </a:spcBef>
+              <a:spcAft>
+                <a:spcPts val="133"/>
+              </a:spcAft>
+            </a:pPr>
+            <a:r>
+              <a:rPr sz="800" lang="zh-TW" dirty="0">
                 <a:solidFill>
                   <a:srgbClr val="000000"/>
                 </a:solidFill>
@@ -6637,7 +6637,7 @@
               <a:t>所以規格表上這一行，看起來只是一個數字，背後是</a:t>
             </a:r>
             <a:r>
-              <a:rPr sz="1000" b="1" lang="zh-TW" dirty="0">
+              <a:rPr sz="800" b="1" lang="zh-TW" dirty="0">
                 <a:solidFill>
                   <a:srgbClr val="000000"/>
                 </a:solidFill>
@@ -6648,7 +6648,7 @@
               <a:t>安全法規、看多遠、多少錢</a:t>
             </a:r>
             <a:r>
-              <a:rPr sz="1000" lang="zh-TW" dirty="0">
+              <a:rPr sz="800" lang="zh-TW" dirty="0">
                 <a:solidFill>
                   <a:srgbClr val="000000"/>
                 </a:solidFill>
@@ -6662,15 +6662,15 @@
           </a:p>
           <a:p>
             <a:pPr algn="l">
-              <a:lnSpc>
-                <a:spcPct val="115000"/>
-              </a:lnSpc>
-              <a:spcAft>
-                <a:spcPts val="500"/>
-              </a:spcAft>
-            </a:pPr>
-            <a:r>
-              <a:rPr sz="1000" lang="zh-TW" dirty="0">
+              <a:spcBef>
+                <a:spcPts val="0"/>
+              </a:spcBef>
+              <a:spcAft>
+                <a:spcPts val="133"/>
+              </a:spcAft>
+            </a:pPr>
+            <a:r>
+              <a:rPr sz="800" lang="zh-TW" dirty="0">
                 <a:solidFill>
                   <a:srgbClr val="000000"/>
                 </a:solidFill>
@@ -6704,11 +6704,11 @@
           <a:lstStyle/>
           <a:p>
             <a:pPr algn="l">
-              <a:lnSpc>
-                <a:spcPct val="115000"/>
-              </a:lnSpc>
-              <a:spcAft>
-                <a:spcPts val="500"/>
+              <a:spcBef>
+                <a:spcPts val="0"/>
+              </a:spcBef>
+              <a:spcAft>
+                <a:spcPts val="167"/>
               </a:spcAft>
             </a:pPr>
             <a:r>
@@ -6783,15 +6783,15 @@
           <a:lstStyle/>
           <a:p>
             <a:pPr algn="l">
-              <a:lnSpc>
-                <a:spcPct val="115000"/>
-              </a:lnSpc>
-              <a:spcAft>
-                <a:spcPts val="500"/>
-              </a:spcAft>
-            </a:pPr>
-            <a:r>
-              <a:rPr sz="1000" b="1" lang="zh-TW" dirty="0">
+              <a:spcBef>
+                <a:spcPts val="0"/>
+              </a:spcBef>
+              <a:spcAft>
+                <a:spcPts val="158"/>
+              </a:spcAft>
+            </a:pPr>
+            <a:r>
+              <a:rPr sz="950" b="1" lang="zh-TW" dirty="0">
                 <a:solidFill>
                   <a:srgbClr val="000000"/>
                 </a:solidFill>
@@ -6802,7 +6802,7 @@
               <a:t>▍這一張要做什麼</a:t>
             </a:r>
             <a:r>
-              <a:rPr sz="1000" lang="zh-TW" dirty="0">
+              <a:rPr sz="950" lang="zh-TW" dirty="0">
                 <a:solidFill>
                   <a:srgbClr val="000000"/>
                 </a:solidFill>
@@ -6816,15 +6816,15 @@
           </a:p>
           <a:p>
             <a:pPr algn="l">
-              <a:lnSpc>
-                <a:spcPct val="115000"/>
-              </a:lnSpc>
-              <a:spcAft>
-                <a:spcPts val="500"/>
-              </a:spcAft>
-            </a:pPr>
-            <a:r>
-              <a:rPr sz="1000" lang="zh-TW" dirty="0">
+              <a:spcBef>
+                <a:spcPts val="0"/>
+              </a:spcBef>
+              <a:spcAft>
+                <a:spcPts val="158"/>
+              </a:spcAft>
+            </a:pPr>
+            <a:r>
+              <a:rPr sz="950" lang="zh-TW" dirty="0">
                 <a:solidFill>
                   <a:srgbClr val="000000"/>
                 </a:solidFill>
@@ -6838,15 +6838,15 @@
           </a:p>
           <a:p>
             <a:pPr algn="l">
-              <a:lnSpc>
-                <a:spcPct val="115000"/>
-              </a:lnSpc>
-              <a:spcAft>
-                <a:spcPts val="500"/>
-              </a:spcAft>
-            </a:pPr>
-            <a:r>
-              <a:rPr sz="1000" b="1" lang="zh-TW" dirty="0">
+              <a:spcBef>
+                <a:spcPts val="0"/>
+              </a:spcBef>
+              <a:spcAft>
+                <a:spcPts val="158"/>
+              </a:spcAft>
+            </a:pPr>
+            <a:r>
+              <a:rPr sz="950" b="1" lang="zh-TW" dirty="0">
                 <a:solidFill>
                   <a:srgbClr val="000000"/>
                 </a:solidFill>
@@ -6857,7 +6857,7 @@
               <a:t>▍畫面上圈這裡</a:t>
             </a:r>
             <a:r>
-              <a:rPr sz="1000" lang="zh-TW" dirty="0">
+              <a:rPr sz="950" lang="zh-TW" dirty="0">
                 <a:solidFill>
                   <a:srgbClr val="000000"/>
                 </a:solidFill>
@@ -6871,15 +6871,15 @@
           </a:p>
           <a:p>
             <a:pPr algn="l">
-              <a:lnSpc>
-                <a:spcPct val="115000"/>
-              </a:lnSpc>
-              <a:spcAft>
-                <a:spcPts val="500"/>
-              </a:spcAft>
-            </a:pPr>
-            <a:r>
-              <a:rPr sz="1000" lang="zh-TW" dirty="0">
+              <a:spcBef>
+                <a:spcPts val="0"/>
+              </a:spcBef>
+              <a:spcAft>
+                <a:spcPts val="158"/>
+              </a:spcAft>
+            </a:pPr>
+            <a:r>
+              <a:rPr sz="950" lang="zh-TW" dirty="0">
                 <a:solidFill>
                   <a:srgbClr val="000000"/>
                 </a:solidFill>
@@ -6893,15 +6893,15 @@
           </a:p>
           <a:p>
             <a:pPr algn="l">
-              <a:lnSpc>
-                <a:spcPct val="115000"/>
-              </a:lnSpc>
-              <a:spcAft>
-                <a:spcPts val="500"/>
-              </a:spcAft>
-            </a:pPr>
-            <a:r>
-              <a:rPr sz="1000" b="1" lang="zh-TW" dirty="0">
+              <a:spcBef>
+                <a:spcPts val="0"/>
+              </a:spcBef>
+              <a:spcAft>
+                <a:spcPts val="158"/>
+              </a:spcAft>
+            </a:pPr>
+            <a:r>
+              <a:rPr sz="950" b="1" lang="zh-TW" dirty="0">
                 <a:solidFill>
                   <a:srgbClr val="000000"/>
                 </a:solidFill>
@@ -6912,7 +6912,7 @@
               <a:t>▍以下照著唸</a:t>
             </a:r>
             <a:r>
-              <a:rPr sz="1000" lang="zh-TW" dirty="0">
+              <a:rPr sz="950" lang="zh-TW" dirty="0">
                 <a:solidFill>
                   <a:srgbClr val="000000"/>
                 </a:solidFill>
@@ -6926,15 +6926,15 @@
           </a:p>
           <a:p>
             <a:pPr algn="l">
-              <a:lnSpc>
-                <a:spcPct val="115000"/>
-              </a:lnSpc>
-              <a:spcAft>
-                <a:spcPts val="500"/>
-              </a:spcAft>
-            </a:pPr>
-            <a:r>
-              <a:rPr sz="1000" lang="zh-TW" dirty="0">
+              <a:spcBef>
+                <a:spcPts val="0"/>
+              </a:spcBef>
+              <a:spcAft>
+                <a:spcPts val="158"/>
+              </a:spcAft>
+            </a:pPr>
+            <a:r>
+              <a:rPr sz="950" lang="zh-TW" dirty="0">
                 <a:solidFill>
                   <a:srgbClr val="000000"/>
                 </a:solidFill>
@@ -6945,7 +6945,7 @@
               <a:t>緊接著上一行的是</a:t>
             </a:r>
             <a:r>
-              <a:rPr sz="1000" b="1" lang="zh-TW" dirty="0">
+              <a:rPr sz="950" b="1" lang="zh-TW" dirty="0">
                 <a:solidFill>
                   <a:srgbClr val="000000"/>
                 </a:solidFill>
@@ -6956,7 +6956,7 @@
               <a:t>眼睛安全等級</a:t>
             </a:r>
             <a:r>
-              <a:rPr sz="1000" lang="zh-TW" dirty="0">
+              <a:rPr sz="950" lang="zh-TW" dirty="0">
                 <a:solidFill>
                   <a:srgbClr val="000000"/>
                 </a:solidFill>
@@ -6970,15 +6970,15 @@
           </a:p>
           <a:p>
             <a:pPr algn="l">
-              <a:lnSpc>
-                <a:spcPct val="115000"/>
-              </a:lnSpc>
-              <a:spcAft>
-                <a:spcPts val="500"/>
-              </a:spcAft>
-            </a:pPr>
-            <a:r>
-              <a:rPr sz="1000" lang="zh-TW" dirty="0">
+              <a:spcBef>
+                <a:spcPts val="0"/>
+              </a:spcBef>
+              <a:spcAft>
+                <a:spcPts val="158"/>
+              </a:spcAft>
+            </a:pPr>
+            <a:r>
+              <a:rPr sz="950" lang="zh-TW" dirty="0">
                 <a:solidFill>
                   <a:srgbClr val="000000"/>
                 </a:solidFill>
@@ -6989,7 +6989,7 @@
               <a:t>OS1 的規格表上寫：</a:t>
             </a:r>
             <a:r>
-              <a:rPr sz="1000" b="1" lang="zh-TW" dirty="0">
+              <a:rPr sz="950" b="1" lang="zh-TW" dirty="0">
                 <a:solidFill>
                   <a:srgbClr val="000000"/>
                 </a:solidFill>
@@ -7000,7 +7000,7 @@
               <a:t>Class 1 eye-safe per IEC/EN 60825-1: 2014</a:t>
             </a:r>
             <a:r>
-              <a:rPr sz="1000" lang="zh-TW" dirty="0">
+              <a:rPr sz="950" lang="zh-TW" dirty="0">
                 <a:solidFill>
                   <a:srgbClr val="000000"/>
                 </a:solidFill>
@@ -7014,15 +7014,15 @@
           </a:p>
           <a:p>
             <a:pPr algn="l">
-              <a:lnSpc>
-                <a:spcPct val="115000"/>
-              </a:lnSpc>
-              <a:spcAft>
-                <a:spcPts val="500"/>
-              </a:spcAft>
-            </a:pPr>
-            <a:r>
-              <a:rPr sz="1000" lang="zh-TW" dirty="0">
+              <a:spcBef>
+                <a:spcPts val="0"/>
+              </a:spcBef>
+              <a:spcAft>
+                <a:spcPts val="158"/>
+              </a:spcAft>
+            </a:pPr>
+            <a:r>
+              <a:rPr sz="950" lang="zh-TW" dirty="0">
                 <a:solidFill>
                   <a:srgbClr val="000000"/>
                 </a:solidFill>
@@ -7033,7 +7033,7 @@
               <a:t>這一行在講什麼？IEC 60825 是雷射產品的國際安全標準，把雷射分成好幾級。Class 1 是最安全的那一級，意思是：</a:t>
             </a:r>
             <a:r>
-              <a:rPr sz="1000" b="1" lang="zh-TW" dirty="0">
+              <a:rPr sz="950" b="1" lang="zh-TW" dirty="0">
                 <a:solidFill>
                   <a:srgbClr val="000000"/>
                 </a:solidFill>
@@ -7044,7 +7044,7 @@
               <a:t>在正常使用的情況下，就算有人直直盯著它看，也不會傷到眼睛。</a:t>
             </a:r>
             <a:r>
-              <a:rPr sz="1000" lang="zh-TW" dirty="0">
+              <a:rPr sz="950" lang="zh-TW" dirty="0">
                 <a:solidFill>
                   <a:srgbClr val="000000"/>
                 </a:solidFill>
@@ -7058,15 +7058,15 @@
           </a:p>
           <a:p>
             <a:pPr algn="l">
-              <a:lnSpc>
-                <a:spcPct val="115000"/>
-              </a:lnSpc>
-              <a:spcAft>
-                <a:spcPts val="500"/>
-              </a:spcAft>
-            </a:pPr>
-            <a:r>
-              <a:rPr sz="1000" lang="zh-TW" dirty="0">
+              <a:spcBef>
+                <a:spcPts val="0"/>
+              </a:spcBef>
+              <a:spcAft>
+                <a:spcPts val="158"/>
+              </a:spcAft>
+            </a:pPr>
+            <a:r>
+              <a:rPr sz="950" lang="zh-TW" dirty="0">
                 <a:solidFill>
                   <a:srgbClr val="000000"/>
                 </a:solidFill>
@@ -7080,15 +7080,15 @@
           </a:p>
           <a:p>
             <a:pPr algn="l">
-              <a:lnSpc>
-                <a:spcPct val="115000"/>
-              </a:lnSpc>
-              <a:spcAft>
-                <a:spcPts val="500"/>
-              </a:spcAft>
-            </a:pPr>
-            <a:r>
-              <a:rPr sz="1000" lang="zh-TW" dirty="0">
+              <a:spcBef>
+                <a:spcPts val="0"/>
+              </a:spcBef>
+              <a:spcAft>
+                <a:spcPts val="158"/>
+              </a:spcAft>
+            </a:pPr>
+            <a:r>
+              <a:rPr sz="950" lang="zh-TW" dirty="0">
                 <a:solidFill>
                   <a:srgbClr val="000000"/>
                 </a:solidFill>
@@ -7099,7 +7099,7 @@
               <a:t>因為光達是裝在</a:t>
             </a:r>
             <a:r>
-              <a:rPr sz="1000" b="1" lang="zh-TW" dirty="0">
+              <a:rPr sz="950" b="1" lang="zh-TW" dirty="0">
                 <a:solidFill>
                   <a:srgbClr val="000000"/>
                 </a:solidFill>
@@ -7110,7 +7110,7 @@
               <a:t>馬路上跑的車</a:t>
             </a:r>
             <a:r>
-              <a:rPr sz="1000" lang="zh-TW" dirty="0">
+              <a:rPr sz="950" lang="zh-TW" dirty="0">
                 <a:solidFill>
                   <a:srgbClr val="000000"/>
                 </a:solidFill>
@@ -7124,15 +7124,15 @@
           </a:p>
           <a:p>
             <a:pPr algn="l">
-              <a:lnSpc>
-                <a:spcPct val="115000"/>
-              </a:lnSpc>
-              <a:spcAft>
-                <a:spcPts val="500"/>
-              </a:spcAft>
-            </a:pPr>
-            <a:r>
-              <a:rPr sz="1000" lang="zh-TW" dirty="0">
+              <a:spcBef>
+                <a:spcPts val="0"/>
+              </a:spcBef>
+              <a:spcAft>
+                <a:spcPts val="158"/>
+              </a:spcAft>
+            </a:pPr>
+            <a:r>
+              <a:rPr sz="950" lang="zh-TW" dirty="0">
                 <a:solidFill>
                   <a:srgbClr val="000000"/>
                 </a:solidFill>
@@ -7143,7 +7143,7 @@
               <a:t>所以這一行不是加分項，是</a:t>
             </a:r>
             <a:r>
-              <a:rPr sz="1000" b="1" lang="zh-TW" dirty="0">
+              <a:rPr sz="950" b="1" lang="zh-TW" dirty="0">
                 <a:solidFill>
                   <a:srgbClr val="000000"/>
                 </a:solidFill>
@@ -7154,7 +7154,7 @@
               <a:t>門檻</a:t>
             </a:r>
             <a:r>
-              <a:rPr sz="1000" lang="zh-TW" dirty="0">
+              <a:rPr sz="950" lang="zh-TW" dirty="0">
                 <a:solidFill>
                   <a:srgbClr val="000000"/>
                 </a:solidFill>
@@ -7168,15 +7168,15 @@
           </a:p>
           <a:p>
             <a:pPr algn="l">
-              <a:lnSpc>
-                <a:spcPct val="115000"/>
-              </a:lnSpc>
-              <a:spcAft>
-                <a:spcPts val="500"/>
-              </a:spcAft>
-            </a:pPr>
-            <a:r>
-              <a:rPr sz="1000" lang="zh-TW" dirty="0">
+              <a:spcBef>
+                <a:spcPts val="0"/>
+              </a:spcBef>
+              <a:spcAft>
+                <a:spcPts val="158"/>
+              </a:spcAft>
+            </a:pPr>
+            <a:r>
+              <a:rPr sz="950" lang="zh-TW" dirty="0">
                 <a:solidFill>
                   <a:srgbClr val="000000"/>
                 </a:solidFill>
@@ -7190,15 +7190,15 @@
           </a:p>
           <a:p>
             <a:pPr algn="l">
-              <a:lnSpc>
-                <a:spcPct val="115000"/>
-              </a:lnSpc>
-              <a:spcAft>
-                <a:spcPts val="500"/>
-              </a:spcAft>
-            </a:pPr>
-            <a:r>
-              <a:rPr sz="1000" lang="zh-TW" dirty="0">
+              <a:spcBef>
+                <a:spcPts val="0"/>
+              </a:spcBef>
+              <a:spcAft>
+                <a:spcPts val="158"/>
+              </a:spcAft>
+            </a:pPr>
+            <a:r>
+              <a:rPr sz="950" lang="zh-TW" dirty="0">
                 <a:solidFill>
                   <a:srgbClr val="000000"/>
                 </a:solidFill>
@@ -7232,11 +7232,11 @@
           <a:lstStyle/>
           <a:p>
             <a:pPr algn="l">
-              <a:lnSpc>
-                <a:spcPct val="115000"/>
-              </a:lnSpc>
-              <a:spcAft>
-                <a:spcPts val="500"/>
+              <a:spcBef>
+                <a:spcPts val="0"/>
+              </a:spcBef>
+              <a:spcAft>
+                <a:spcPts val="167"/>
               </a:spcAft>
             </a:pPr>
             <a:r>
@@ -7311,15 +7311,15 @@
           <a:lstStyle/>
           <a:p>
             <a:pPr algn="l">
-              <a:lnSpc>
-                <a:spcPct val="115000"/>
-              </a:lnSpc>
-              <a:spcAft>
-                <a:spcPts val="500"/>
-              </a:spcAft>
-            </a:pPr>
-            <a:r>
-              <a:rPr sz="1000" b="1" lang="zh-TW" dirty="0">
+              <a:spcBef>
+                <a:spcPts val="0"/>
+              </a:spcBef>
+              <a:spcAft>
+                <a:spcPts val="150"/>
+              </a:spcAft>
+            </a:pPr>
+            <a:r>
+              <a:rPr sz="900" b="1" lang="zh-TW" dirty="0">
                 <a:solidFill>
                   <a:srgbClr val="000000"/>
                 </a:solidFill>
@@ -7330,7 +7330,7 @@
               <a:t>▍這一張要做什麼</a:t>
             </a:r>
             <a:r>
-              <a:rPr sz="1000" lang="zh-TW" dirty="0">
+              <a:rPr sz="900" lang="zh-TW" dirty="0">
                 <a:solidFill>
                   <a:srgbClr val="000000"/>
                 </a:solidFill>
@@ -7344,15 +7344,15 @@
           </a:p>
           <a:p>
             <a:pPr algn="l">
-              <a:lnSpc>
-                <a:spcPct val="115000"/>
-              </a:lnSpc>
-              <a:spcAft>
-                <a:spcPts val="500"/>
-              </a:spcAft>
-            </a:pPr>
-            <a:r>
-              <a:rPr sz="1000" lang="zh-TW" dirty="0">
+              <a:spcBef>
+                <a:spcPts val="0"/>
+              </a:spcBef>
+              <a:spcAft>
+                <a:spcPts val="150"/>
+              </a:spcAft>
+            </a:pPr>
+            <a:r>
+              <a:rPr sz="900" lang="zh-TW" dirty="0">
                 <a:solidFill>
                   <a:srgbClr val="000000"/>
                 </a:solidFill>
@@ -7366,15 +7366,15 @@
           </a:p>
           <a:p>
             <a:pPr algn="l">
-              <a:lnSpc>
-                <a:spcPct val="115000"/>
-              </a:lnSpc>
-              <a:spcAft>
-                <a:spcPts val="500"/>
-              </a:spcAft>
-            </a:pPr>
-            <a:r>
-              <a:rPr sz="1000" b="1" lang="zh-TW" dirty="0">
+              <a:spcBef>
+                <a:spcPts val="0"/>
+              </a:spcBef>
+              <a:spcAft>
+                <a:spcPts val="150"/>
+              </a:spcAft>
+            </a:pPr>
+            <a:r>
+              <a:rPr sz="900" b="1" lang="zh-TW" dirty="0">
                 <a:solidFill>
                   <a:srgbClr val="000000"/>
                 </a:solidFill>
@@ -7385,7 +7385,7 @@
               <a:t>▍畫面上圈這裡</a:t>
             </a:r>
             <a:r>
-              <a:rPr sz="1000" lang="zh-TW" dirty="0">
+              <a:rPr sz="900" lang="zh-TW" dirty="0">
                 <a:solidFill>
                   <a:srgbClr val="000000"/>
                 </a:solidFill>
@@ -7399,15 +7399,15 @@
           </a:p>
           <a:p>
             <a:pPr algn="l">
-              <a:lnSpc>
-                <a:spcPct val="115000"/>
-              </a:lnSpc>
-              <a:spcAft>
-                <a:spcPts val="500"/>
-              </a:spcAft>
-            </a:pPr>
-            <a:r>
-              <a:rPr sz="1000" lang="zh-TW" dirty="0">
+              <a:spcBef>
+                <a:spcPts val="0"/>
+              </a:spcBef>
+              <a:spcAft>
+                <a:spcPts val="150"/>
+              </a:spcAft>
+            </a:pPr>
+            <a:r>
+              <a:rPr sz="900" lang="zh-TW" dirty="0">
                 <a:solidFill>
                   <a:srgbClr val="000000"/>
                 </a:solidFill>
@@ -7421,15 +7421,15 @@
           </a:p>
           <a:p>
             <a:pPr algn="l">
-              <a:lnSpc>
-                <a:spcPct val="115000"/>
-              </a:lnSpc>
-              <a:spcAft>
-                <a:spcPts val="500"/>
-              </a:spcAft>
-            </a:pPr>
-            <a:r>
-              <a:rPr sz="1000" b="1" lang="zh-TW" dirty="0">
+              <a:spcBef>
+                <a:spcPts val="0"/>
+              </a:spcBef>
+              <a:spcAft>
+                <a:spcPts val="150"/>
+              </a:spcAft>
+            </a:pPr>
+            <a:r>
+              <a:rPr sz="900" b="1" lang="zh-TW" dirty="0">
                 <a:solidFill>
                   <a:srgbClr val="000000"/>
                 </a:solidFill>
@@ -7440,7 +7440,7 @@
               <a:t>▍以下照著唸</a:t>
             </a:r>
             <a:r>
-              <a:rPr sz="1000" lang="zh-TW" dirty="0">
+              <a:rPr sz="900" lang="zh-TW" dirty="0">
                 <a:solidFill>
                   <a:srgbClr val="000000"/>
                 </a:solidFill>
@@ -7454,15 +7454,15 @@
           </a:p>
           <a:p>
             <a:pPr algn="l">
-              <a:lnSpc>
-                <a:spcPct val="115000"/>
-              </a:lnSpc>
-              <a:spcAft>
-                <a:spcPts val="500"/>
-              </a:spcAft>
-            </a:pPr>
-            <a:r>
-              <a:rPr sz="1000" lang="zh-TW" dirty="0">
+              <a:spcBef>
+                <a:spcPts val="0"/>
+              </a:spcBef>
+              <a:spcAft>
+                <a:spcPts val="150"/>
+              </a:spcAft>
+            </a:pPr>
+            <a:r>
+              <a:rPr sz="900" lang="zh-TW" dirty="0">
                 <a:solidFill>
                   <a:srgbClr val="000000"/>
                 </a:solidFill>
@@ -7473,7 +7473,7 @@
               <a:t>光達的第三行講的是</a:t>
             </a:r>
             <a:r>
-              <a:rPr sz="1000" b="1" lang="zh-TW" dirty="0">
+              <a:rPr sz="900" b="1" lang="zh-TW" dirty="0">
                 <a:solidFill>
                   <a:srgbClr val="000000"/>
                 </a:solidFill>
@@ -7484,7 +7484,7 @@
               <a:t>回波次數</a:t>
             </a:r>
             <a:r>
-              <a:rPr sz="1000" lang="zh-TW" dirty="0">
+              <a:rPr sz="900" lang="zh-TW" dirty="0">
                 <a:solidFill>
                   <a:srgbClr val="000000"/>
                 </a:solidFill>
@@ -7495,7 +7495,7 @@
               <a:t>。OS1 的規格表上寫 </a:t>
             </a:r>
             <a:r>
-              <a:rPr sz="1000" b="1" lang="zh-TW" dirty="0">
+              <a:rPr sz="900" b="1" lang="zh-TW" dirty="0">
                 <a:solidFill>
                   <a:srgbClr val="000000"/>
                 </a:solidFill>
@@ -7506,7 +7506,7 @@
               <a:t>number of returns: up to 2</a:t>
             </a:r>
             <a:r>
-              <a:rPr sz="1000" lang="zh-TW" dirty="0">
+              <a:rPr sz="900" lang="zh-TW" dirty="0">
                 <a:solidFill>
                   <a:srgbClr val="000000"/>
                 </a:solidFill>
@@ -7520,15 +7520,15 @@
           </a:p>
           <a:p>
             <a:pPr algn="l">
-              <a:lnSpc>
-                <a:spcPct val="115000"/>
-              </a:lnSpc>
-              <a:spcAft>
-                <a:spcPts val="500"/>
-              </a:spcAft>
-            </a:pPr>
-            <a:r>
-              <a:rPr sz="1000" lang="zh-TW" dirty="0">
+              <a:spcBef>
+                <a:spcPts val="0"/>
+              </a:spcBef>
+              <a:spcAft>
+                <a:spcPts val="150"/>
+              </a:spcAft>
+            </a:pPr>
+            <a:r>
+              <a:rPr sz="900" lang="zh-TW" dirty="0">
                 <a:solidFill>
                   <a:srgbClr val="000000"/>
                 </a:solidFill>
@@ -7542,15 +7542,15 @@
           </a:p>
           <a:p>
             <a:pPr algn="l">
-              <a:lnSpc>
-                <a:spcPct val="115000"/>
-              </a:lnSpc>
-              <a:spcAft>
-                <a:spcPts val="500"/>
-              </a:spcAft>
-            </a:pPr>
-            <a:r>
-              <a:rPr sz="1000" lang="zh-TW" dirty="0">
+              <a:spcBef>
+                <a:spcPts val="0"/>
+              </a:spcBef>
+              <a:spcAft>
+                <a:spcPts val="150"/>
+              </a:spcAft>
+            </a:pPr>
+            <a:r>
+              <a:rPr sz="900" lang="zh-TW" dirty="0">
                 <a:solidFill>
                   <a:srgbClr val="000000"/>
                 </a:solidFill>
@@ -7564,15 +7564,15 @@
           </a:p>
           <a:p>
             <a:pPr algn="l">
-              <a:lnSpc>
-                <a:spcPct val="115000"/>
-              </a:lnSpc>
-              <a:spcAft>
-                <a:spcPts val="500"/>
-              </a:spcAft>
-            </a:pPr>
-            <a:r>
-              <a:rPr sz="1000" lang="zh-TW" dirty="0">
+              <a:spcBef>
+                <a:spcPts val="0"/>
+              </a:spcBef>
+              <a:spcAft>
+                <a:spcPts val="150"/>
+              </a:spcAft>
+            </a:pPr>
+            <a:r>
+              <a:rPr sz="900" lang="zh-TW" dirty="0">
                 <a:solidFill>
                   <a:srgbClr val="000000"/>
                 </a:solidFill>
@@ -7583,7 +7583,7 @@
               <a:t>那道雷射可能</a:t>
             </a:r>
             <a:r>
-              <a:rPr sz="1000" b="1" lang="zh-TW" dirty="0">
+              <a:rPr sz="900" b="1" lang="zh-TW" dirty="0">
                 <a:solidFill>
                   <a:srgbClr val="000000"/>
                 </a:solidFill>
@@ -7594,7 +7594,7 @@
               <a:t>先打到一顆雨滴，彈回來一次</a:t>
             </a:r>
             <a:r>
-              <a:rPr sz="1000" lang="zh-TW" dirty="0">
+              <a:rPr sz="900" lang="zh-TW" dirty="0">
                 <a:solidFill>
                   <a:srgbClr val="000000"/>
                 </a:solidFill>
@@ -7605,7 +7605,7 @@
               <a:t>；穿過去之後，</a:t>
             </a:r>
             <a:r>
-              <a:rPr sz="1000" b="1" lang="zh-TW" dirty="0">
+              <a:rPr sz="900" b="1" lang="zh-TW" dirty="0">
                 <a:solidFill>
                   <a:srgbClr val="000000"/>
                 </a:solidFill>
@@ -7616,7 +7616,7 @@
               <a:t>再打到真正的車，又彈回來一次</a:t>
             </a:r>
             <a:r>
-              <a:rPr sz="1000" lang="zh-TW" dirty="0">
+              <a:rPr sz="900" lang="zh-TW" dirty="0">
                 <a:solidFill>
                   <a:srgbClr val="000000"/>
                 </a:solidFill>
@@ -7630,15 +7630,15 @@
           </a:p>
           <a:p>
             <a:pPr algn="l">
-              <a:lnSpc>
-                <a:spcPct val="115000"/>
-              </a:lnSpc>
-              <a:spcAft>
-                <a:spcPts val="500"/>
-              </a:spcAft>
-            </a:pPr>
-            <a:r>
-              <a:rPr sz="1000" lang="zh-TW" dirty="0">
+              <a:spcBef>
+                <a:spcPts val="0"/>
+              </a:spcBef>
+              <a:spcAft>
+                <a:spcPts val="150"/>
+              </a:spcAft>
+            </a:pPr>
+            <a:r>
+              <a:rPr sz="900" lang="zh-TW" dirty="0">
                 <a:solidFill>
                   <a:srgbClr val="000000"/>
                 </a:solidFill>
@@ -7649,7 +7649,7 @@
               <a:t>如果這顆光達只收</a:t>
             </a:r>
             <a:r>
-              <a:rPr sz="1000" b="1" lang="zh-TW" dirty="0">
+              <a:rPr sz="900" b="1" lang="zh-TW" dirty="0">
                 <a:solidFill>
                   <a:srgbClr val="000000"/>
                 </a:solidFill>
@@ -7660,7 +7660,7 @@
               <a:t>第一次</a:t>
             </a:r>
             <a:r>
-              <a:rPr sz="1000" lang="zh-TW" dirty="0">
+              <a:rPr sz="900" lang="zh-TW" dirty="0">
                 <a:solidFill>
                   <a:srgbClr val="000000"/>
                 </a:solidFill>
@@ -7674,15 +7674,15 @@
           </a:p>
           <a:p>
             <a:pPr algn="l">
-              <a:lnSpc>
-                <a:spcPct val="115000"/>
-              </a:lnSpc>
-              <a:spcAft>
-                <a:spcPts val="500"/>
-              </a:spcAft>
-            </a:pPr>
-            <a:r>
-              <a:rPr sz="1000" lang="zh-TW" dirty="0">
+              <a:spcBef>
+                <a:spcPts val="0"/>
+              </a:spcBef>
+              <a:spcAft>
+                <a:spcPts val="150"/>
+              </a:spcAft>
+            </a:pPr>
+            <a:r>
+              <a:rPr sz="900" lang="zh-TW" dirty="0">
                 <a:solidFill>
                   <a:srgbClr val="000000"/>
                 </a:solidFill>
@@ -7693,7 +7693,7 @@
               <a:t>這就是第三週我們講下雪那一輪的時候，我說的那件事：</a:t>
             </a:r>
             <a:r>
-              <a:rPr sz="1000" b="1" lang="zh-TW" dirty="0">
+              <a:rPr sz="900" b="1" lang="zh-TW" dirty="0">
                 <a:solidFill>
                   <a:srgbClr val="000000"/>
                 </a:solidFill>
@@ -7704,7 +7704,7 @@
               <a:t>飄在空中的雪花本身就會反射雷射</a:t>
             </a:r>
             <a:r>
-              <a:rPr sz="1000" lang="zh-TW" dirty="0">
+              <a:rPr sz="900" lang="zh-TW" dirty="0">
                 <a:solidFill>
                   <a:srgbClr val="000000"/>
                 </a:solidFill>
@@ -7718,15 +7718,15 @@
           </a:p>
           <a:p>
             <a:pPr algn="l">
-              <a:lnSpc>
-                <a:spcPct val="115000"/>
-              </a:lnSpc>
-              <a:spcAft>
-                <a:spcPts val="500"/>
-              </a:spcAft>
-            </a:pPr>
-            <a:r>
-              <a:rPr sz="1000" lang="zh-TW" dirty="0">
+              <a:spcBef>
+                <a:spcPts val="0"/>
+              </a:spcBef>
+              <a:spcAft>
+                <a:spcPts val="150"/>
+              </a:spcAft>
+            </a:pPr>
+            <a:r>
+              <a:rPr sz="900" lang="zh-TW" dirty="0">
                 <a:solidFill>
                   <a:srgbClr val="000000"/>
                 </a:solidFill>
@@ -7737,7 +7737,7 @@
               <a:t>處理的方法就是收</a:t>
             </a:r>
             <a:r>
-              <a:rPr sz="1000" b="1" lang="zh-TW" dirty="0">
+              <a:rPr sz="900" b="1" lang="zh-TW" dirty="0">
                 <a:solidFill>
                   <a:srgbClr val="000000"/>
                 </a:solidFill>
@@ -7748,7 +7748,7 @@
               <a:t>多次回波</a:t>
             </a:r>
             <a:r>
-              <a:rPr sz="1000" lang="zh-TW" dirty="0">
+              <a:rPr sz="900" lang="zh-TW" dirty="0">
                 <a:solidFill>
                   <a:srgbClr val="000000"/>
                 </a:solidFill>
@@ -7762,15 +7762,15 @@
           </a:p>
           <a:p>
             <a:pPr algn="l">
-              <a:lnSpc>
-                <a:spcPct val="115000"/>
-              </a:lnSpc>
-              <a:spcAft>
-                <a:spcPts val="500"/>
-              </a:spcAft>
-            </a:pPr>
-            <a:r>
-              <a:rPr sz="1000" lang="zh-TW" dirty="0">
+              <a:spcBef>
+                <a:spcPts val="0"/>
+              </a:spcBef>
+              <a:spcAft>
+                <a:spcPts val="150"/>
+              </a:spcAft>
+            </a:pPr>
+            <a:r>
+              <a:rPr sz="900" lang="zh-TW" dirty="0">
                 <a:solidFill>
                   <a:srgbClr val="000000"/>
                 </a:solidFill>
@@ -7781,7 +7781,7 @@
               <a:t>規格表上還會寫 </a:t>
             </a:r>
             <a:r>
-              <a:rPr sz="1000" b="1" lang="zh-TW" dirty="0">
+              <a:rPr sz="900" b="1" lang="zh-TW" dirty="0">
                 <a:solidFill>
                   <a:srgbClr val="000000"/>
                 </a:solidFill>
@@ -7792,7 +7792,7 @@
               <a:t>Return Order</a:t>
             </a:r>
             <a:r>
-              <a:rPr sz="1000" lang="zh-TW" dirty="0">
+              <a:rPr sz="900" lang="zh-TW" dirty="0">
                 <a:solidFill>
                   <a:srgbClr val="000000"/>
                 </a:solidFill>
@@ -7806,15 +7806,15 @@
           </a:p>
           <a:p>
             <a:pPr algn="l">
-              <a:lnSpc>
-                <a:spcPct val="115000"/>
-              </a:lnSpc>
-              <a:spcAft>
-                <a:spcPts val="500"/>
-              </a:spcAft>
-            </a:pPr>
-            <a:r>
-              <a:rPr sz="1000" lang="zh-TW" dirty="0">
+              <a:spcBef>
+                <a:spcPts val="0"/>
+              </a:spcBef>
+              <a:spcAft>
+                <a:spcPts val="150"/>
+              </a:spcAft>
+            </a:pPr>
+            <a:r>
+              <a:rPr sz="900" lang="zh-TW" dirty="0">
                 <a:solidFill>
                   <a:srgbClr val="000000"/>
                 </a:solidFill>
@@ -7825,7 +7825,7 @@
               <a:t>所以「up to 2 returns」這一行，其實就是在回答：</a:t>
             </a:r>
             <a:r>
-              <a:rPr sz="1000" b="1" lang="zh-TW" dirty="0">
+              <a:rPr sz="900" b="1" lang="zh-TW" dirty="0">
                 <a:solidFill>
                   <a:srgbClr val="000000"/>
                 </a:solidFill>
@@ -7836,7 +7836,7 @@
               <a:t>這顆光達在雨天和灰塵裡好不好用。</a:t>
             </a:r>
             <a:r>
-              <a:rPr sz="1000" lang="zh-TW" dirty="0">
+              <a:rPr sz="900" lang="zh-TW" dirty="0">
                 <a:solidFill>
                   <a:srgbClr val="000000"/>
                 </a:solidFill>
@@ -7850,15 +7850,15 @@
           </a:p>
           <a:p>
             <a:pPr algn="l">
-              <a:lnSpc>
-                <a:spcPct val="115000"/>
-              </a:lnSpc>
-              <a:spcAft>
-                <a:spcPts val="500"/>
-              </a:spcAft>
-            </a:pPr>
-            <a:r>
-              <a:rPr sz="1000" lang="zh-TW" dirty="0">
+              <a:spcBef>
+                <a:spcPts val="0"/>
+              </a:spcBef>
+              <a:spcAft>
+                <a:spcPts val="150"/>
+              </a:spcAft>
+            </a:pPr>
+            <a:r>
+              <a:rPr sz="900" lang="zh-TW" dirty="0">
                 <a:solidFill>
                   <a:srgbClr val="000000"/>
                 </a:solidFill>
@@ -7892,11 +7892,11 @@
           <a:lstStyle/>
           <a:p>
             <a:pPr algn="l">
-              <a:lnSpc>
-                <a:spcPct val="115000"/>
-              </a:lnSpc>
-              <a:spcAft>
-                <a:spcPts val="500"/>
+              <a:spcBef>
+                <a:spcPts val="0"/>
+              </a:spcBef>
+              <a:spcAft>
+                <a:spcPts val="167"/>
               </a:spcAft>
             </a:pPr>
             <a:r>

--- a/第五週(10-08)/第五週_第2節_簡報.pptx
+++ b/第五週(10-08)/第五週_第2節_簡報.pptx
@@ -3048,7 +3048,29 @@
                 <a:ea typeface="Arial Unicode MS"/>
                 <a:cs typeface="Arial Unicode MS"/>
               </a:rPr>
-              <a:t>——OS1 規格表上那行 multi-sensor phase lock，講的就是這件事。
+              <a:t>——OS1 規格表上 Additional Programmability 的</a:t>
+            </a:r>
+            <a:r>
+              <a:rPr sz="850" b="1" lang="zh-TW" dirty="0">
+                <a:solidFill>
+                  <a:srgbClr val="000000"/>
+                </a:solidFill>
+                <a:latin typeface="Arial Unicode MS"/>
+                <a:ea typeface="Arial Unicode MS"/>
+                <a:cs typeface="Arial Unicode MS"/>
+              </a:rPr>
+              <a:t>第一條</a:t>
+            </a:r>
+            <a:r>
+              <a:rPr sz="850" lang="zh-TW" dirty="0">
+                <a:solidFill>
+                  <a:srgbClr val="000000"/>
+                </a:solidFill>
+                <a:latin typeface="Arial Unicode MS"/>
+                <a:ea typeface="Arial Unicode MS"/>
+                <a:cs typeface="Arial Unicode MS"/>
+              </a:rPr>
+              <a:t> multi-sensor phase lock，講的就是這件事。
 </a:t>
             </a:r>
           </a:p>
@@ -6942,7 +6964,7 @@
                 <a:ea typeface="Arial Unicode MS"/>
                 <a:cs typeface="Arial Unicode MS"/>
               </a:rPr>
-              <a:t>緊接著上一行的是</a:t>
+              <a:t>左邊這一塊是 OS1 datasheet 的 LASER 區塊，</a:t>
             </a:r>
             <a:r>
               <a:rPr sz="950" b="1" lang="zh-TW" dirty="0">
@@ -6953,7 +6975,51 @@
                 <a:ea typeface="Arial Unicode MS"/>
                 <a:cs typeface="Arial Unicode MS"/>
               </a:rPr>
-              <a:t>眼睛安全等級</a:t>
+              <a:t>第一行就是眼睛安全等級</a:t>
+            </a:r>
+            <a:r>
+              <a:rPr sz="950" lang="zh-TW" dirty="0">
+                <a:solidFill>
+                  <a:srgbClr val="000000"/>
+                </a:solidFill>
+                <a:latin typeface="Arial Unicode MS"/>
+                <a:ea typeface="Arial Unicode MS"/>
+                <a:cs typeface="Arial Unicode MS"/>
+              </a:rPr>
+              <a:t>，剛剛講的波長在它下面一行。
+</a:t>
+            </a:r>
+          </a:p>
+          <a:p>
+            <a:pPr algn="l">
+              <a:spcBef>
+                <a:spcPts val="0"/>
+              </a:spcBef>
+              <a:spcAft>
+                <a:spcPts val="158"/>
+              </a:spcAft>
+            </a:pPr>
+            <a:r>
+              <a:rPr sz="950" lang="zh-TW" dirty="0">
+                <a:solidFill>
+                  <a:srgbClr val="000000"/>
+                </a:solidFill>
+                <a:latin typeface="Arial Unicode MS"/>
+                <a:ea typeface="Arial Unicode MS"/>
+                <a:cs typeface="Arial Unicode MS"/>
+              </a:rPr>
+              <a:t>上面寫的是：</a:t>
+            </a:r>
+            <a:r>
+              <a:rPr sz="950" b="1" lang="zh-TW" dirty="0">
+                <a:solidFill>
+                  <a:srgbClr val="000000"/>
+                </a:solidFill>
+                <a:latin typeface="Arial Unicode MS"/>
+                <a:ea typeface="Arial Unicode MS"/>
+                <a:cs typeface="Arial Unicode MS"/>
+              </a:rPr>
+              <a:t>Class 1 eye-safe per IEC/EN 60825-1: 2014</a:t>
             </a:r>
             <a:r>
               <a:rPr sz="950" lang="zh-TW" dirty="0">
@@ -6986,50 +7052,6 @@
                 <a:ea typeface="Arial Unicode MS"/>
                 <a:cs typeface="Arial Unicode MS"/>
               </a:rPr>
-              <a:t>OS1 的規格表上寫：</a:t>
-            </a:r>
-            <a:r>
-              <a:rPr sz="950" b="1" lang="zh-TW" dirty="0">
-                <a:solidFill>
-                  <a:srgbClr val="000000"/>
-                </a:solidFill>
-                <a:latin typeface="Arial Unicode MS"/>
-                <a:ea typeface="Arial Unicode MS"/>
-                <a:cs typeface="Arial Unicode MS"/>
-              </a:rPr>
-              <a:t>Class 1 eye-safe per IEC/EN 60825-1: 2014</a:t>
-            </a:r>
-            <a:r>
-              <a:rPr sz="950" lang="zh-TW" dirty="0">
-                <a:solidFill>
-                  <a:srgbClr val="000000"/>
-                </a:solidFill>
-                <a:latin typeface="Arial Unicode MS"/>
-                <a:ea typeface="Arial Unicode MS"/>
-                <a:cs typeface="Arial Unicode MS"/>
-              </a:rPr>
-              <a:t>。
-</a:t>
-            </a:r>
-          </a:p>
-          <a:p>
-            <a:pPr algn="l">
-              <a:spcBef>
-                <a:spcPts val="0"/>
-              </a:spcBef>
-              <a:spcAft>
-                <a:spcPts val="158"/>
-              </a:spcAft>
-            </a:pPr>
-            <a:r>
-              <a:rPr sz="950" lang="zh-TW" dirty="0">
-                <a:solidFill>
-                  <a:srgbClr val="000000"/>
-                </a:solidFill>
-                <a:latin typeface="Arial Unicode MS"/>
-                <a:ea typeface="Arial Unicode MS"/>
-                <a:cs typeface="Arial Unicode MS"/>
-              </a:rPr>
               <a:t>這一行在講什麼？IEC 60825 是雷射產品的國際安全標準，把雷射分成好幾級。Class 1 是最安全的那一級，意思是：</a:t>
             </a:r>
             <a:r>
@@ -7074,7 +7096,7 @@
                 <a:ea typeface="Arial Unicode MS"/>
                 <a:cs typeface="Arial Unicode MS"/>
               </a:rPr>
-              <a:t>為什麼這件事重要到要寫在規格表的第一頁？
+              <a:t>為什麼這件事重要到要單獨列一行？
 </a:t>
             </a:r>
           </a:p>
@@ -7315,11 +7337,11 @@
                 <a:spcPts val="0"/>
               </a:spcBef>
               <a:spcAft>
-                <a:spcPts val="150"/>
-              </a:spcAft>
-            </a:pPr>
-            <a:r>
-              <a:rPr sz="900" b="1" lang="zh-TW" dirty="0">
+                <a:spcPts val="142"/>
+              </a:spcAft>
+            </a:pPr>
+            <a:r>
+              <a:rPr sz="850" b="1" lang="zh-TW" dirty="0">
                 <a:solidFill>
                   <a:srgbClr val="000000"/>
                 </a:solidFill>
@@ -7330,7 +7352,7 @@
               <a:t>▍這一張要做什麼</a:t>
             </a:r>
             <a:r>
-              <a:rPr sz="900" lang="zh-TW" dirty="0">
+              <a:rPr sz="850" lang="zh-TW" dirty="0">
                 <a:solidFill>
                   <a:srgbClr val="000000"/>
                 </a:solidFill>
@@ -7348,11 +7370,11 @@
                 <a:spcPts val="0"/>
               </a:spcBef>
               <a:spcAft>
-                <a:spcPts val="150"/>
-              </a:spcAft>
-            </a:pPr>
-            <a:r>
-              <a:rPr sz="900" lang="zh-TW" dirty="0">
+                <a:spcPts val="142"/>
+              </a:spcAft>
+            </a:pPr>
+            <a:r>
+              <a:rPr sz="850" lang="zh-TW" dirty="0">
                 <a:solidFill>
                   <a:srgbClr val="000000"/>
                 </a:solidFill>
@@ -7370,11 +7392,11 @@
                 <a:spcPts val="0"/>
               </a:spcBef>
               <a:spcAft>
-                <a:spcPts val="150"/>
-              </a:spcAft>
-            </a:pPr>
-            <a:r>
-              <a:rPr sz="900" b="1" lang="zh-TW" dirty="0">
+                <a:spcPts val="142"/>
+              </a:spcAft>
+            </a:pPr>
+            <a:r>
+              <a:rPr sz="850" b="1" lang="zh-TW" dirty="0">
                 <a:solidFill>
                   <a:srgbClr val="000000"/>
                 </a:solidFill>
@@ -7385,7 +7407,7 @@
               <a:t>▍畫面上圈這裡</a:t>
             </a:r>
             <a:r>
-              <a:rPr sz="900" lang="zh-TW" dirty="0">
+              <a:rPr sz="850" lang="zh-TW" dirty="0">
                 <a:solidFill>
                   <a:srgbClr val="000000"/>
                 </a:solidFill>
@@ -7403,11 +7425,11 @@
                 <a:spcPts val="0"/>
               </a:spcBef>
               <a:spcAft>
-                <a:spcPts val="150"/>
-              </a:spcAft>
-            </a:pPr>
-            <a:r>
-              <a:rPr sz="900" lang="zh-TW" dirty="0">
+                <a:spcPts val="142"/>
+              </a:spcAft>
+            </a:pPr>
+            <a:r>
+              <a:rPr sz="850" lang="zh-TW" dirty="0">
                 <a:solidFill>
                   <a:srgbClr val="000000"/>
                 </a:solidFill>
@@ -7425,11 +7447,11 @@
                 <a:spcPts val="0"/>
               </a:spcBef>
               <a:spcAft>
-                <a:spcPts val="150"/>
-              </a:spcAft>
-            </a:pPr>
-            <a:r>
-              <a:rPr sz="900" b="1" lang="zh-TW" dirty="0">
+                <a:spcPts val="142"/>
+              </a:spcAft>
+            </a:pPr>
+            <a:r>
+              <a:rPr sz="850" b="1" lang="zh-TW" dirty="0">
                 <a:solidFill>
                   <a:srgbClr val="000000"/>
                 </a:solidFill>
@@ -7440,7 +7462,7 @@
               <a:t>▍以下照著唸</a:t>
             </a:r>
             <a:r>
-              <a:rPr sz="900" lang="zh-TW" dirty="0">
+              <a:rPr sz="850" lang="zh-TW" dirty="0">
                 <a:solidFill>
                   <a:srgbClr val="000000"/>
                 </a:solidFill>
@@ -7458,22 +7480,22 @@
                 <a:spcPts val="0"/>
               </a:spcBef>
               <a:spcAft>
-                <a:spcPts val="150"/>
-              </a:spcAft>
-            </a:pPr>
-            <a:r>
-              <a:rPr sz="900" lang="zh-TW" dirty="0">
-                <a:solidFill>
-                  <a:srgbClr val="000000"/>
-                </a:solidFill>
-                <a:latin typeface="Arial Unicode MS"/>
-                <a:ea typeface="Arial Unicode MS"/>
-                <a:cs typeface="Arial Unicode MS"/>
-              </a:rPr>
-              <a:t>光達的第三行講的是</a:t>
-            </a:r>
-            <a:r>
-              <a:rPr sz="900" b="1" lang="zh-TW" dirty="0">
+                <a:spcPts val="142"/>
+              </a:spcAft>
+            </a:pPr>
+            <a:r>
+              <a:rPr sz="850" lang="zh-TW" dirty="0">
+                <a:solidFill>
+                  <a:srgbClr val="000000"/>
+                </a:solidFill>
+                <a:latin typeface="Arial Unicode MS"/>
+                <a:ea typeface="Arial Unicode MS"/>
+                <a:cs typeface="Arial Unicode MS"/>
+              </a:rPr>
+              <a:t>光達的第三件事是</a:t>
+            </a:r>
+            <a:r>
+              <a:rPr sz="850" b="1" lang="zh-TW" dirty="0">
                 <a:solidFill>
                   <a:srgbClr val="000000"/>
                 </a:solidFill>
@@ -7484,29 +7506,51 @@
               <a:t>回波次數</a:t>
             </a:r>
             <a:r>
-              <a:rPr sz="900" lang="zh-TW" dirty="0">
-                <a:solidFill>
-                  <a:srgbClr val="000000"/>
-                </a:solidFill>
-                <a:latin typeface="Arial Unicode MS"/>
-                <a:ea typeface="Arial Unicode MS"/>
-                <a:cs typeface="Arial Unicode MS"/>
-              </a:rPr>
-              <a:t>。OS1 的規格表上寫 </a:t>
-            </a:r>
-            <a:r>
-              <a:rPr sz="900" b="1" lang="zh-TW" dirty="0">
-                <a:solidFill>
-                  <a:srgbClr val="000000"/>
-                </a:solidFill>
-                <a:latin typeface="Arial Unicode MS"/>
-                <a:ea typeface="Arial Unicode MS"/>
-                <a:cs typeface="Arial Unicode MS"/>
-              </a:rPr>
-              <a:t>number of returns: up to 2</a:t>
-            </a:r>
-            <a:r>
-              <a:rPr sz="900" lang="zh-TW" dirty="0">
+              <a:rPr sz="850" lang="zh-TW" dirty="0">
+                <a:solidFill>
+                  <a:srgbClr val="000000"/>
+                </a:solidFill>
+                <a:latin typeface="Arial Unicode MS"/>
+                <a:ea typeface="Arial Unicode MS"/>
+                <a:cs typeface="Arial Unicode MS"/>
+              </a:rPr>
+              <a:t>。OS1 的規格表上這一行叫 </a:t>
+            </a:r>
+            <a:r>
+              <a:rPr sz="850" b="1" lang="zh-TW" dirty="0">
+                <a:solidFill>
+                  <a:srgbClr val="000000"/>
+                </a:solidFill>
+                <a:latin typeface="Arial Unicode MS"/>
+                <a:ea typeface="Arial Unicode MS"/>
+                <a:cs typeface="Arial Unicode MS"/>
+              </a:rPr>
+              <a:t># of Returns</a:t>
+            </a:r>
+            <a:r>
+              <a:rPr sz="850" lang="zh-TW" dirty="0">
+                <a:solidFill>
+                  <a:srgbClr val="000000"/>
+                </a:solidFill>
+                <a:latin typeface="Arial Unicode MS"/>
+                <a:ea typeface="Arial Unicode MS"/>
+                <a:cs typeface="Arial Unicode MS"/>
+              </a:rPr>
+              <a:t>，寫著 </a:t>
+            </a:r>
+            <a:r>
+              <a:rPr sz="850" b="1" lang="zh-TW" dirty="0">
+                <a:solidFill>
+                  <a:srgbClr val="000000"/>
+                </a:solidFill>
+                <a:latin typeface="Arial Unicode MS"/>
+                <a:ea typeface="Arial Unicode MS"/>
+                <a:cs typeface="Arial Unicode MS"/>
+              </a:rPr>
+              <a:t>up to 2</a:t>
+            </a:r>
+            <a:r>
+              <a:rPr sz="850" lang="zh-TW" dirty="0">
                 <a:solidFill>
                   <a:srgbClr val="000000"/>
                 </a:solidFill>
@@ -7524,11 +7568,11 @@
                 <a:spcPts val="0"/>
               </a:spcBef>
               <a:spcAft>
-                <a:spcPts val="150"/>
-              </a:spcAft>
-            </a:pPr>
-            <a:r>
-              <a:rPr sz="900" lang="zh-TW" dirty="0">
+                <a:spcPts val="142"/>
+              </a:spcAft>
+            </a:pPr>
+            <a:r>
+              <a:rPr sz="850" lang="zh-TW" dirty="0">
                 <a:solidFill>
                   <a:srgbClr val="000000"/>
                 </a:solidFill>
@@ -7546,11 +7590,11 @@
                 <a:spcPts val="0"/>
               </a:spcBef>
               <a:spcAft>
-                <a:spcPts val="150"/>
-              </a:spcAft>
-            </a:pPr>
-            <a:r>
-              <a:rPr sz="900" lang="zh-TW" dirty="0">
+                <a:spcPts val="142"/>
+              </a:spcAft>
+            </a:pPr>
+            <a:r>
+              <a:rPr sz="850" lang="zh-TW" dirty="0">
                 <a:solidFill>
                   <a:srgbClr val="000000"/>
                 </a:solidFill>
@@ -7568,11 +7612,11 @@
                 <a:spcPts val="0"/>
               </a:spcBef>
               <a:spcAft>
-                <a:spcPts val="150"/>
-              </a:spcAft>
-            </a:pPr>
-            <a:r>
-              <a:rPr sz="900" lang="zh-TW" dirty="0">
+                <a:spcPts val="142"/>
+              </a:spcAft>
+            </a:pPr>
+            <a:r>
+              <a:rPr sz="850" lang="zh-TW" dirty="0">
                 <a:solidFill>
                   <a:srgbClr val="000000"/>
                 </a:solidFill>
@@ -7583,7 +7627,7 @@
               <a:t>那道雷射可能</a:t>
             </a:r>
             <a:r>
-              <a:rPr sz="900" b="1" lang="zh-TW" dirty="0">
+              <a:rPr sz="850" b="1" lang="zh-TW" dirty="0">
                 <a:solidFill>
                   <a:srgbClr val="000000"/>
                 </a:solidFill>
@@ -7594,7 +7638,7 @@
               <a:t>先打到一顆雨滴，彈回來一次</a:t>
             </a:r>
             <a:r>
-              <a:rPr sz="900" lang="zh-TW" dirty="0">
+              <a:rPr sz="850" lang="zh-TW" dirty="0">
                 <a:solidFill>
                   <a:srgbClr val="000000"/>
                 </a:solidFill>
@@ -7605,7 +7649,7 @@
               <a:t>；穿過去之後，</a:t>
             </a:r>
             <a:r>
-              <a:rPr sz="900" b="1" lang="zh-TW" dirty="0">
+              <a:rPr sz="850" b="1" lang="zh-TW" dirty="0">
                 <a:solidFill>
                   <a:srgbClr val="000000"/>
                 </a:solidFill>
@@ -7616,7 +7660,7 @@
               <a:t>再打到真正的車，又彈回來一次</a:t>
             </a:r>
             <a:r>
-              <a:rPr sz="900" lang="zh-TW" dirty="0">
+              <a:rPr sz="850" lang="zh-TW" dirty="0">
                 <a:solidFill>
                   <a:srgbClr val="000000"/>
                 </a:solidFill>
@@ -7634,11 +7678,11 @@
                 <a:spcPts val="0"/>
               </a:spcBef>
               <a:spcAft>
-                <a:spcPts val="150"/>
-              </a:spcAft>
-            </a:pPr>
-            <a:r>
-              <a:rPr sz="900" lang="zh-TW" dirty="0">
+                <a:spcPts val="142"/>
+              </a:spcAft>
+            </a:pPr>
+            <a:r>
+              <a:rPr sz="850" lang="zh-TW" dirty="0">
                 <a:solidFill>
                   <a:srgbClr val="000000"/>
                 </a:solidFill>
@@ -7649,7 +7693,7 @@
               <a:t>如果這顆光達只收</a:t>
             </a:r>
             <a:r>
-              <a:rPr sz="900" b="1" lang="zh-TW" dirty="0">
+              <a:rPr sz="850" b="1" lang="zh-TW" dirty="0">
                 <a:solidFill>
                   <a:srgbClr val="000000"/>
                 </a:solidFill>
@@ -7660,7 +7704,7 @@
               <a:t>第一次</a:t>
             </a:r>
             <a:r>
-              <a:rPr sz="900" lang="zh-TW" dirty="0">
+              <a:rPr sz="850" lang="zh-TW" dirty="0">
                 <a:solidFill>
                   <a:srgbClr val="000000"/>
                 </a:solidFill>
@@ -7678,11 +7722,11 @@
                 <a:spcPts val="0"/>
               </a:spcBef>
               <a:spcAft>
-                <a:spcPts val="150"/>
-              </a:spcAft>
-            </a:pPr>
-            <a:r>
-              <a:rPr sz="900" lang="zh-TW" dirty="0">
+                <a:spcPts val="142"/>
+              </a:spcAft>
+            </a:pPr>
+            <a:r>
+              <a:rPr sz="850" lang="zh-TW" dirty="0">
                 <a:solidFill>
                   <a:srgbClr val="000000"/>
                 </a:solidFill>
@@ -7693,7 +7737,7 @@
               <a:t>這就是第三週我們講下雪那一輪的時候，我說的那件事：</a:t>
             </a:r>
             <a:r>
-              <a:rPr sz="900" b="1" lang="zh-TW" dirty="0">
+              <a:rPr sz="850" b="1" lang="zh-TW" dirty="0">
                 <a:solidFill>
                   <a:srgbClr val="000000"/>
                 </a:solidFill>
@@ -7704,7 +7748,7 @@
               <a:t>飄在空中的雪花本身就會反射雷射</a:t>
             </a:r>
             <a:r>
-              <a:rPr sz="900" lang="zh-TW" dirty="0">
+              <a:rPr sz="850" lang="zh-TW" dirty="0">
                 <a:solidFill>
                   <a:srgbClr val="000000"/>
                 </a:solidFill>
@@ -7722,11 +7766,11 @@
                 <a:spcPts val="0"/>
               </a:spcBef>
               <a:spcAft>
-                <a:spcPts val="150"/>
-              </a:spcAft>
-            </a:pPr>
-            <a:r>
-              <a:rPr sz="900" lang="zh-TW" dirty="0">
+                <a:spcPts val="142"/>
+              </a:spcAft>
+            </a:pPr>
+            <a:r>
+              <a:rPr sz="850" lang="zh-TW" dirty="0">
                 <a:solidFill>
                   <a:srgbClr val="000000"/>
                 </a:solidFill>
@@ -7737,7 +7781,7 @@
               <a:t>處理的方法就是收</a:t>
             </a:r>
             <a:r>
-              <a:rPr sz="900" b="1" lang="zh-TW" dirty="0">
+              <a:rPr sz="850" b="1" lang="zh-TW" dirty="0">
                 <a:solidFill>
                   <a:srgbClr val="000000"/>
                 </a:solidFill>
@@ -7748,7 +7792,7 @@
               <a:t>多次回波</a:t>
             </a:r>
             <a:r>
-              <a:rPr sz="900" lang="zh-TW" dirty="0">
+              <a:rPr sz="850" lang="zh-TW" dirty="0">
                 <a:solidFill>
                   <a:srgbClr val="000000"/>
                 </a:solidFill>
@@ -7766,22 +7810,22 @@
                 <a:spcPts val="0"/>
               </a:spcBef>
               <a:spcAft>
-                <a:spcPts val="150"/>
-              </a:spcAft>
-            </a:pPr>
-            <a:r>
-              <a:rPr sz="900" lang="zh-TW" dirty="0">
-                <a:solidFill>
-                  <a:srgbClr val="000000"/>
-                </a:solidFill>
-                <a:latin typeface="Arial Unicode MS"/>
-                <a:ea typeface="Arial Unicode MS"/>
-                <a:cs typeface="Arial Unicode MS"/>
-              </a:rPr>
-              <a:t>規格表上還會寫 </a:t>
-            </a:r>
-            <a:r>
-              <a:rPr sz="900" b="1" lang="zh-TW" dirty="0">
+                <a:spcPts val="142"/>
+              </a:spcAft>
+            </a:pPr>
+            <a:r>
+              <a:rPr sz="850" lang="zh-TW" dirty="0">
+                <a:solidFill>
+                  <a:srgbClr val="000000"/>
+                </a:solidFill>
+                <a:latin typeface="Arial Unicode MS"/>
+                <a:ea typeface="Arial Unicode MS"/>
+                <a:cs typeface="Arial Unicode MS"/>
+              </a:rPr>
+              <a:t>下面那一行 </a:t>
+            </a:r>
+            <a:r>
+              <a:rPr sz="850" b="1" lang="zh-TW" dirty="0">
                 <a:solidFill>
                   <a:srgbClr val="000000"/>
                 </a:solidFill>
@@ -7792,15 +7836,15 @@
               <a:t>Return Order</a:t>
             </a:r>
             <a:r>
-              <a:rPr sz="900" lang="zh-TW" dirty="0">
-                <a:solidFill>
-                  <a:srgbClr val="000000"/>
-                </a:solidFill>
-                <a:latin typeface="Arial Unicode MS"/>
-                <a:ea typeface="Arial Unicode MS"/>
-                <a:cs typeface="Arial Unicode MS"/>
-              </a:rPr>
-              <a:t>，回波的順序怎麼排——最強的先、最遠的先、還是最近的先。這是給寫演算法的人選的。
+              <a:rPr sz="850" lang="zh-TW" dirty="0">
+                <a:solidFill>
+                  <a:srgbClr val="000000"/>
+                </a:solidFill>
+                <a:latin typeface="Arial Unicode MS"/>
+                <a:ea typeface="Arial Unicode MS"/>
+                <a:cs typeface="Arial Unicode MS"/>
+              </a:rPr>
+              <a:t> 是回波的順序怎麼排，OS1 寫了三種：最強排到最弱、最遠排到最近、最近排到最遠。這是給寫演算法的人選的。
 </a:t>
             </a:r>
           </a:p>
@@ -7810,11 +7854,11 @@
                 <a:spcPts val="0"/>
               </a:spcBef>
               <a:spcAft>
-                <a:spcPts val="150"/>
-              </a:spcAft>
-            </a:pPr>
-            <a:r>
-              <a:rPr sz="900" lang="zh-TW" dirty="0">
+                <a:spcPts val="142"/>
+              </a:spcAft>
+            </a:pPr>
+            <a:r>
+              <a:rPr sz="850" lang="zh-TW" dirty="0">
                 <a:solidFill>
                   <a:srgbClr val="000000"/>
                 </a:solidFill>
@@ -7825,7 +7869,7 @@
               <a:t>所以「up to 2 returns」這一行，其實就是在回答：</a:t>
             </a:r>
             <a:r>
-              <a:rPr sz="900" b="1" lang="zh-TW" dirty="0">
+              <a:rPr sz="850" b="1" lang="zh-TW" dirty="0">
                 <a:solidFill>
                   <a:srgbClr val="000000"/>
                 </a:solidFill>
@@ -7836,7 +7880,7 @@
               <a:t>這顆光達在雨天和灰塵裡好不好用。</a:t>
             </a:r>
             <a:r>
-              <a:rPr sz="900" lang="zh-TW" dirty="0">
+              <a:rPr sz="850" lang="zh-TW" dirty="0">
                 <a:solidFill>
                   <a:srgbClr val="000000"/>
                 </a:solidFill>
@@ -7854,11 +7898,11 @@
                 <a:spcPts val="0"/>
               </a:spcBef>
               <a:spcAft>
-                <a:spcPts val="150"/>
-              </a:spcAft>
-            </a:pPr>
-            <a:r>
-              <a:rPr sz="900" lang="zh-TW" dirty="0">
+                <a:spcPts val="142"/>
+              </a:spcAft>
+            </a:pPr>
+            <a:r>
+              <a:rPr sz="850" lang="zh-TW" dirty="0">
                 <a:solidFill>
                   <a:srgbClr val="000000"/>
                 </a:solidFill>
@@ -16416,7 +16460,7 @@
         </p:nvSpPr>
         <p:spPr>
           <a:xfrm>
-            <a:off x="502920" y="1076585"/>
+            <a:off x="502920" y="1275342"/>
             <a:ext cx="8138160" cy="563762"/>
           </a:xfrm>
           <a:prstGeom prst="rect">
@@ -16478,7 +16522,7 @@
         </p:nvSpPr>
         <p:spPr>
           <a:xfrm>
-            <a:off x="502920" y="1731787"/>
+            <a:off x="502920" y="1930544"/>
             <a:ext cx="8138160" cy="684636"/>
           </a:xfrm>
           <a:prstGeom prst="rect">
@@ -16540,12 +16584,12 @@
         </p:nvSpPr>
         <p:spPr>
           <a:xfrm>
-            <a:off x="502920" y="2615184"/>
-            <a:ext cx="8138160" cy="1261872"/>
+            <a:off x="502920" y="3012698"/>
+            <a:ext cx="8138160" cy="864358"/>
           </a:xfrm>
           <a:prstGeom prst="roundRect">
             <a:avLst>
-              <a:gd name="adj" fmla="val 6522"/>
+              <a:gd name="adj" fmla="val 9521"/>
             </a:avLst>
           </a:prstGeom>
           <a:solidFill>
@@ -16575,8 +16619,8 @@
         </p:blipFill>
         <p:spPr>
           <a:xfrm>
-            <a:off x="928499" y="2706624"/>
-            <a:ext cx="7287003" cy="914400"/>
+            <a:off x="576072" y="3104138"/>
+            <a:ext cx="7991856" cy="516886"/>
           </a:xfrm>
           <a:prstGeom prst="rect">
             <a:avLst/>

--- a/第五週(10-08)/第五週_第2節_簡報.pptx
+++ b/第五週(10-08)/第五週_第2節_簡報.pptx
@@ -3026,7 +3026,7 @@
                 <a:ea typeface="Arial Unicode MS"/>
                 <a:cs typeface="Arial Unicode MS"/>
               </a:rPr>
-              <a:t>，而且全車用同一個時鐘。高階一點的做法是讓光達的轉動跟相機的快門</a:t>
+              <a:t>，而且全車用同一個時鐘。高階一點的做法，是讓光達轉到某個角度的時候，剛好跟相機的快門</a:t>
             </a:r>
             <a:r>
               <a:rPr sz="850" b="1" lang="zh-TW" dirty="0">
@@ -3037,7 +3037,7 @@
                 <a:ea typeface="Arial Unicode MS"/>
                 <a:cs typeface="Arial Unicode MS"/>
               </a:rPr>
-              <a:t>對齊</a:t>
+              <a:t>對在一起</a:t>
             </a:r>
             <a:r>
               <a:rPr sz="850" lang="zh-TW" dirty="0">
@@ -3048,7 +3048,7 @@
                 <a:ea typeface="Arial Unicode MS"/>
                 <a:cs typeface="Arial Unicode MS"/>
               </a:rPr>
-              <a:t>——OS1 規格表上 Additional Programmability 的</a:t>
+              <a:t>。OS1 規格表上 Additional Programmability 的</a:t>
             </a:r>
             <a:r>
               <a:rPr sz="850" b="1" lang="zh-TW" dirty="0">
@@ -3070,7 +3070,7 @@
                 <a:ea typeface="Arial Unicode MS"/>
                 <a:cs typeface="Arial Unicode MS"/>
               </a:rPr>
-              <a:t> multi-sensor phase lock，講的就是這件事。
+              <a:t>，multi-sensor phase lock，講的就是這件事。
 </a:t>
             </a:r>
           </a:p>
@@ -6964,7 +6964,7 @@
                 <a:ea typeface="Arial Unicode MS"/>
                 <a:cs typeface="Arial Unicode MS"/>
               </a:rPr>
-              <a:t>左邊這一塊是 OS1 datasheet 的 LASER 區塊，</a:t>
+              <a:t>左邊這一塊，是 OS1 datasheet 上 LASER 那一段。</a:t>
             </a:r>
             <a:r>
               <a:rPr sz="950" b="1" lang="zh-TW" dirty="0">
@@ -6986,7 +6986,7 @@
                 <a:ea typeface="Arial Unicode MS"/>
                 <a:cs typeface="Arial Unicode MS"/>
               </a:rPr>
-              <a:t>，剛剛講的波長在它下面一行。
+              <a:t>，剛剛講的波長排在它下面。
 </a:t>
             </a:r>
           </a:p>
@@ -7162,7 +7162,7 @@
                 <a:ea typeface="Arial Unicode MS"/>
                 <a:cs typeface="Arial Unicode MS"/>
               </a:rPr>
-              <a:t>所以這一行不是加分項，是</a:t>
+              <a:t>所以這一行不是拿來加分的，是</a:t>
             </a:r>
             <a:r>
               <a:rPr sz="950" b="1" lang="zh-TW" dirty="0">
@@ -7184,7 +7184,7 @@
                 <a:ea typeface="Arial Unicode MS"/>
                 <a:cs typeface="Arial Unicode MS"/>
               </a:rPr>
-              <a:t>。沒有這一行的產品，不管規格多漂亮，你都不能考慮。
+              <a:t>。沒有這一行的產品，不管規格寫得多漂亮，你都不能考慮。
 </a:t>
             </a:r>
           </a:p>
@@ -7822,7 +7822,7 @@
                 <a:ea typeface="Arial Unicode MS"/>
                 <a:cs typeface="Arial Unicode MS"/>
               </a:rPr>
-              <a:t>下面那一行 </a:t>
+              <a:t>下面那一行叫 </a:t>
             </a:r>
             <a:r>
               <a:rPr sz="850" b="1" lang="zh-TW" dirty="0">
@@ -7844,7 +7844,7 @@
                 <a:ea typeface="Arial Unicode MS"/>
                 <a:cs typeface="Arial Unicode MS"/>
               </a:rPr>
-              <a:t> 是回波的順序怎麼排，OS1 寫了三種：最強排到最弱、最遠排到最近、最近排到最遠。這是給寫演算法的人選的。
+              <a:t>，講的是回波要照什麼順序排。OS1 給了三種排法：最強排到最弱、最遠排到最近、最近排到最遠。這是給寫演算法的人挑的。
 </a:t>
             </a:r>
           </a:p>

--- a/第五週(10-08)/第五週_第2節_簡報.pptx
+++ b/第五週(10-08)/第五週_第2節_簡報.pptx
@@ -1145,7 +1145,7 @@
                 <a:ea typeface="Arial Unicode MS"/>
                 <a:cs typeface="Arial Unicode MS"/>
               </a:rPr>
-              <a:t>請打開工具，看右邊第二個小工具，「每秒點數 ↔ 角解析度」。
+              <a:t>請打開規格判讀台，找第二個小工具，「每秒點數 ↔ 角解析度」。
 </a:t>
             </a:r>
           </a:p>
@@ -5149,7 +5149,29 @@
                 <a:ea typeface="Arial Unicode MS"/>
                 <a:cs typeface="Arial Unicode MS"/>
               </a:rPr>
-              <a:t>第三週我們在工具上按「逆光眩光」，相機的有效距離從八十公尺掉到十八公尺。那一顆的動態範圍就是不夠。動態範圍愈高的相機，那個按鈕對它的傷害就愈小。</a:t>
+              <a:t>第三週我們在</a:t>
+            </a:r>
+            <a:r>
+              <a:rPr sz="800" b="1" lang="zh-TW" dirty="0">
+                <a:solidFill>
+                  <a:srgbClr val="000000"/>
+                </a:solidFill>
+                <a:latin typeface="Arial Unicode MS"/>
+                <a:ea typeface="Arial Unicode MS"/>
+                <a:cs typeface="Arial Unicode MS"/>
+              </a:rPr>
+              <a:t>感測器實驗室</a:t>
+            </a:r>
+            <a:r>
+              <a:rPr sz="800" lang="zh-TW" dirty="0">
+                <a:solidFill>
+                  <a:srgbClr val="000000"/>
+                </a:solidFill>
+                <a:latin typeface="Arial Unicode MS"/>
+                <a:ea typeface="Arial Unicode MS"/>
+                <a:cs typeface="Arial Unicode MS"/>
+              </a:rPr>
+              <a:t>上按「逆光眩光」——那是上上禮拜那支網頁，不是今天這支——相機的有效距離從八十公尺掉到十八公尺。那一顆的動態範圍就是不夠。動態範圍愈高的相機，那個按鈕對它的傷害就愈小。</a:t>
             </a:r>
           </a:p>
         </p:txBody>

--- a/第五週(10-08)/第五週_第2節_簡報.pptx
+++ b/第五週(10-08)/第五週_第2節_簡報.pptx
@@ -5,7 +5,7 @@
     <p:sldMasterId id="2147483648" r:id="rId1"/>
   </p:sldMasterIdLst>
   <p:notesMasterIdLst>
-    <p:notesMasterId r:id="rId16"/>
+    <p:notesMasterId r:id="rId17"/>
   </p:notesMasterIdLst>
   <p:sldIdLst>
     <p:sldId id="256" r:id="rId2"/>
@@ -22,6 +22,7 @@
     <p:sldId id="267" r:id="rId13"/>
     <p:sldId id="268" r:id="rId14"/>
     <p:sldId id="269" r:id="rId15"/>
+    <p:sldId id="270" r:id="rId16"/>
   </p:sldIdLst>
   <p:sldSz cx="9144000" cy="5143500"/>
   <p:notesSz cx="7560000" cy="10692000"/>
@@ -968,11 +969,11 @@
                 <a:spcPts val="0"/>
               </a:spcBef>
               <a:spcAft>
-                <a:spcPts val="133"/>
-              </a:spcAft>
-            </a:pPr>
-            <a:r>
-              <a:rPr sz="800" b="1" lang="zh-TW" dirty="0">
+                <a:spcPts val="142"/>
+              </a:spcAft>
+            </a:pPr>
+            <a:r>
+              <a:rPr sz="850" b="1" lang="zh-TW" dirty="0">
                 <a:solidFill>
                   <a:srgbClr val="000000"/>
                 </a:solidFill>
@@ -983,7 +984,7 @@
               <a:t>▍這一張要做什麼</a:t>
             </a:r>
             <a:r>
-              <a:rPr sz="800" lang="zh-TW" dirty="0">
+              <a:rPr sz="850" lang="zh-TW" dirty="0">
                 <a:solidFill>
                   <a:srgbClr val="000000"/>
                 </a:solidFill>
@@ -1001,19 +1002,19 @@
                 <a:spcPts val="0"/>
               </a:spcBef>
               <a:spcAft>
-                <a:spcPts val="133"/>
-              </a:spcAft>
-            </a:pPr>
-            <a:r>
-              <a:rPr sz="800" lang="zh-TW" dirty="0">
-                <a:solidFill>
-                  <a:srgbClr val="000000"/>
-                </a:solidFill>
-                <a:latin typeface="Arial Unicode MS"/>
-                <a:ea typeface="Arial Unicode MS"/>
-                <a:cs typeface="Arial Unicode MS"/>
-              </a:rPr>
-              <a:t>三分鐘的小練習，讓學生自己把每秒點數換算成角度。
+                <a:spcPts val="142"/>
+              </a:spcAft>
+            </a:pPr>
+            <a:r>
+              <a:rPr sz="850" lang="zh-TW" dirty="0">
+                <a:solidFill>
+                  <a:srgbClr val="000000"/>
+                </a:solidFill>
+                <a:latin typeface="Arial Unicode MS"/>
+                <a:ea typeface="Arial Unicode MS"/>
+                <a:cs typeface="Arial Unicode MS"/>
+              </a:rPr>
+              <a:t>剛剛那一行「最多兩次回波」最常救的不是雨滴，是鏡面。鏡面是光達最難處理的一種表面。
 </a:t>
             </a:r>
           </a:p>
@@ -1023,11 +1024,11 @@
                 <a:spcPts val="0"/>
               </a:spcBef>
               <a:spcAft>
-                <a:spcPts val="133"/>
-              </a:spcAft>
-            </a:pPr>
-            <a:r>
-              <a:rPr sz="800" b="1" lang="zh-TW" dirty="0">
+                <a:spcPts val="142"/>
+              </a:spcAft>
+            </a:pPr>
+            <a:r>
+              <a:rPr sz="850" b="1" lang="zh-TW" dirty="0">
                 <a:solidFill>
                   <a:srgbClr val="000000"/>
                 </a:solidFill>
@@ -1038,7 +1039,7 @@
               <a:t>▍畫面上圈這裡</a:t>
             </a:r>
             <a:r>
-              <a:rPr sz="800" lang="zh-TW" dirty="0">
+              <a:rPr sz="850" lang="zh-TW" dirty="0">
                 <a:solidFill>
                   <a:srgbClr val="000000"/>
                 </a:solidFill>
@@ -1056,19 +1057,19 @@
                 <a:spcPts val="0"/>
               </a:spcBef>
               <a:spcAft>
-                <a:spcPts val="133"/>
-              </a:spcAft>
-            </a:pPr>
-            <a:r>
-              <a:rPr sz="800" lang="zh-TW" dirty="0">
-                <a:solidFill>
-                  <a:srgbClr val="000000"/>
-                </a:solidFill>
-                <a:latin typeface="Arial Unicode MS"/>
-                <a:ea typeface="Arial Unicode MS"/>
-                <a:cs typeface="Arial Unicode MS"/>
-              </a:rPr>
-              <a:t>圈題目指定的第②個小工具。巡堂確認每個人都真的按過一次。
+                <a:spcPts val="142"/>
+              </a:spcAft>
+            </a:pPr>
+            <a:r>
+              <a:rPr sz="850" lang="zh-TW" dirty="0">
+                <a:solidFill>
+                  <a:srgbClr val="000000"/>
+                </a:solidFill>
+                <a:latin typeface="Arial Unicode MS"/>
+                <a:ea typeface="Arial Unicode MS"/>
+                <a:cs typeface="Arial Unicode MS"/>
+              </a:rPr>
+              <a:t>一列一列圈。第一列特別停一下，問他們「下雨的晚上，路面是什麼？」第三列圈「反光背心」，把上一節那個例子收回來。
 </a:t>
             </a:r>
           </a:p>
@@ -1078,11 +1079,11 @@
                 <a:spcPts val="0"/>
               </a:spcBef>
               <a:spcAft>
-                <a:spcPts val="133"/>
-              </a:spcAft>
-            </a:pPr>
-            <a:r>
-              <a:rPr sz="800" b="1" lang="zh-TW" dirty="0">
+                <a:spcPts val="142"/>
+              </a:spcAft>
+            </a:pPr>
+            <a:r>
+              <a:rPr sz="850" b="1" lang="zh-TW" dirty="0">
                 <a:solidFill>
                   <a:srgbClr val="000000"/>
                 </a:solidFill>
@@ -1093,7 +1094,7 @@
               <a:t>▍以下照著唸</a:t>
             </a:r>
             <a:r>
-              <a:rPr sz="800" lang="zh-TW" dirty="0">
+              <a:rPr sz="850" lang="zh-TW" dirty="0">
                 <a:solidFill>
                   <a:srgbClr val="000000"/>
                 </a:solidFill>
@@ -1111,77 +1112,33 @@
                 <a:spcPts val="0"/>
               </a:spcBef>
               <a:spcAft>
-                <a:spcPts val="133"/>
-              </a:spcAft>
-            </a:pPr>
-            <a:r>
-              <a:rPr sz="800" lang="zh-TW" dirty="0">
-                <a:solidFill>
-                  <a:srgbClr val="000000"/>
-                </a:solidFill>
-                <a:latin typeface="Arial Unicode MS"/>
-                <a:ea typeface="Arial Unicode MS"/>
-                <a:cs typeface="Arial Unicode MS"/>
-              </a:rPr>
-              <a:t>這裡停三分鐘，讓大家動手算一次。
-</a:t>
-            </a:r>
-          </a:p>
-          <a:p>
-            <a:pPr algn="l">
-              <a:spcBef>
-                <a:spcPts val="0"/>
-              </a:spcBef>
-              <a:spcAft>
-                <a:spcPts val="133"/>
-              </a:spcAft>
-            </a:pPr>
-            <a:r>
-              <a:rPr sz="800" lang="zh-TW" dirty="0">
-                <a:solidFill>
-                  <a:srgbClr val="000000"/>
-                </a:solidFill>
-                <a:latin typeface="Arial Unicode MS"/>
-                <a:ea typeface="Arial Unicode MS"/>
-                <a:cs typeface="Arial Unicode MS"/>
-              </a:rPr>
-              <a:t>請打開規格判讀台，找第二個小工具，「每秒點數 ↔ 角解析度」。
-</a:t>
-            </a:r>
-          </a:p>
-          <a:p>
-            <a:pPr algn="l">
-              <a:spcBef>
-                <a:spcPts val="0"/>
-              </a:spcBef>
-              <a:spcAft>
-                <a:spcPts val="133"/>
-              </a:spcAft>
-            </a:pPr>
-            <a:r>
-              <a:rPr sz="800" lang="zh-TW" dirty="0">
-                <a:solidFill>
-                  <a:srgbClr val="000000"/>
-                </a:solidFill>
-                <a:latin typeface="Arial Unicode MS"/>
-                <a:ea typeface="Arial Unicode MS"/>
-                <a:cs typeface="Arial Unicode MS"/>
-              </a:rPr>
-              <a:t>請把三個滑桿設成：</a:t>
-            </a:r>
-            <a:r>
-              <a:rPr sz="800" b="1" lang="zh-TW" dirty="0">
-                <a:solidFill>
-                  <a:srgbClr val="000000"/>
-                </a:solidFill>
-                <a:latin typeface="Arial Unicode MS"/>
-                <a:ea typeface="Arial Unicode MS"/>
-                <a:cs typeface="Arial Unicode MS"/>
-              </a:rPr>
-              <a:t>64 線、每圈 1024 點、10 赫茲</a:t>
-            </a:r>
-            <a:r>
-              <a:rPr sz="800" lang="zh-TW" dirty="0">
+                <a:spcPts val="142"/>
+              </a:spcAft>
+            </a:pPr>
+            <a:r>
+              <a:rPr sz="850" lang="zh-TW" dirty="0">
+                <a:solidFill>
+                  <a:srgbClr val="000000"/>
+                </a:solidFill>
+                <a:latin typeface="Arial Unicode MS"/>
+                <a:ea typeface="Arial Unicode MS"/>
+                <a:cs typeface="Arial Unicode MS"/>
+              </a:rPr>
+              <a:t>剛剛那一行「最多兩次回波」，我說是為了雨和灰塵。其實它最常救的，是另一種東西——</a:t>
+            </a:r>
+            <a:r>
+              <a:rPr sz="850" b="1" lang="zh-TW" dirty="0">
+                <a:solidFill>
+                  <a:srgbClr val="000000"/>
+                </a:solidFill>
+                <a:latin typeface="Arial Unicode MS"/>
+                <a:ea typeface="Arial Unicode MS"/>
+                <a:cs typeface="Arial Unicode MS"/>
+              </a:rPr>
+              <a:t>鏡面</a:t>
+            </a:r>
+            <a:r>
+              <a:rPr sz="850" lang="zh-TW" dirty="0">
                 <a:solidFill>
                   <a:srgbClr val="000000"/>
                 </a:solidFill>
@@ -1199,33 +1156,33 @@
                 <a:spcPts val="0"/>
               </a:spcBef>
               <a:spcAft>
-                <a:spcPts val="133"/>
-              </a:spcAft>
-            </a:pPr>
-            <a:r>
-              <a:rPr sz="800" lang="zh-TW" dirty="0">
-                <a:solidFill>
-                  <a:srgbClr val="000000"/>
-                </a:solidFill>
-                <a:latin typeface="Arial Unicode MS"/>
-                <a:ea typeface="Arial Unicode MS"/>
-                <a:cs typeface="Arial Unicode MS"/>
-              </a:rPr>
-              <a:t>現在看它算出來的每秒點數。六十四乘一千零二十四乘十，等於</a:t>
-            </a:r>
-            <a:r>
-              <a:rPr sz="800" b="1" lang="zh-TW" dirty="0">
-                <a:solidFill>
-                  <a:srgbClr val="000000"/>
-                </a:solidFill>
-                <a:latin typeface="Arial Unicode MS"/>
-                <a:ea typeface="Arial Unicode MS"/>
-                <a:cs typeface="Arial Unicode MS"/>
-              </a:rPr>
-              <a:t>六十五萬五千三百六十</a:t>
-            </a:r>
-            <a:r>
-              <a:rPr sz="800" lang="zh-TW" dirty="0">
+                <a:spcPts val="142"/>
+              </a:spcAft>
+            </a:pPr>
+            <a:r>
+              <a:rPr sz="850" lang="zh-TW" dirty="0">
+                <a:solidFill>
+                  <a:srgbClr val="000000"/>
+                </a:solidFill>
+                <a:latin typeface="Arial Unicode MS"/>
+                <a:ea typeface="Arial Unicode MS"/>
+                <a:cs typeface="Arial Unicode MS"/>
+              </a:rPr>
+              <a:t>光達的前提很簡單：打出去的光，會從對面散一點回來。上一節我們講反射率，80% 和 10% 都是在講「散回來多少」。可是鏡面不散，它把</a:t>
+            </a:r>
+            <a:r>
+              <a:rPr sz="850" b="1" lang="zh-TW" dirty="0">
+                <a:solidFill>
+                  <a:srgbClr val="000000"/>
+                </a:solidFill>
+                <a:latin typeface="Arial Unicode MS"/>
+                <a:ea typeface="Arial Unicode MS"/>
+                <a:cs typeface="Arial Unicode MS"/>
+              </a:rPr>
+              <a:t>整束光反射到別的地方去</a:t>
+            </a:r>
+            <a:r>
+              <a:rPr sz="850" lang="zh-TW" dirty="0">
                 <a:solidFill>
                   <a:srgbClr val="000000"/>
                 </a:solidFill>
@@ -1243,41 +1200,41 @@
                 <a:spcPts val="0"/>
               </a:spcBef>
               <a:spcAft>
-                <a:spcPts val="133"/>
-              </a:spcAft>
-            </a:pPr>
-            <a:r>
-              <a:rPr sz="800" lang="zh-TW" dirty="0">
-                <a:solidFill>
-                  <a:srgbClr val="000000"/>
-                </a:solidFill>
-                <a:latin typeface="Arial Unicode MS"/>
-                <a:ea typeface="Arial Unicode MS"/>
-                <a:cs typeface="Arial Unicode MS"/>
-              </a:rPr>
-              <a:t>規格表上的廠商最喜歡寫這個數字，因為它看起來很大、很厲害。可是這個數字</a:t>
-            </a:r>
-            <a:r>
-              <a:rPr sz="800" b="1" lang="zh-TW" dirty="0">
-                <a:solidFill>
-                  <a:srgbClr val="000000"/>
-                </a:solidFill>
-                <a:latin typeface="Arial Unicode MS"/>
-                <a:ea typeface="Arial Unicode MS"/>
-                <a:cs typeface="Arial Unicode MS"/>
-              </a:rPr>
-              <a:t>不能直接拿來用</a:t>
-            </a:r>
-            <a:r>
-              <a:rPr sz="800" lang="zh-TW" dirty="0">
-                <a:solidFill>
-                  <a:srgbClr val="000000"/>
-                </a:solidFill>
-                <a:latin typeface="Arial Unicode MS"/>
-                <a:ea typeface="Arial Unicode MS"/>
-                <a:cs typeface="Arial Unicode MS"/>
-              </a:rPr>
-              <a:t>，它沒有辦法告訴你「四十公尺外的人身上有幾個點」。
+                <a:spcPts val="142"/>
+              </a:spcAft>
+            </a:pPr>
+            <a:r>
+              <a:rPr sz="850" lang="zh-TW" dirty="0">
+                <a:solidFill>
+                  <a:srgbClr val="000000"/>
+                </a:solidFill>
+                <a:latin typeface="Arial Unicode MS"/>
+                <a:ea typeface="Arial Unicode MS"/>
+                <a:cs typeface="Arial Unicode MS"/>
+              </a:rPr>
+              <a:t>所以第一種狀況是：</a:t>
+            </a:r>
+            <a:r>
+              <a:rPr sz="850" b="1" lang="zh-TW" dirty="0">
+                <a:solidFill>
+                  <a:srgbClr val="000000"/>
+                </a:solidFill>
+                <a:latin typeface="Arial Unicode MS"/>
+                <a:ea typeface="Arial Unicode MS"/>
+                <a:cs typeface="Arial Unicode MS"/>
+              </a:rPr>
+              <a:t>什麼都收不到。</a:t>
+            </a:r>
+            <a:r>
+              <a:rPr sz="850" lang="zh-TW" dirty="0">
+                <a:solidFill>
+                  <a:srgbClr val="000000"/>
+                </a:solidFill>
+                <a:latin typeface="Arial Unicode MS"/>
+                <a:ea typeface="Arial Unicode MS"/>
+                <a:cs typeface="Arial Unicode MS"/>
+              </a:rPr>
+              <a:t>雷射斜斜打到玻璃帷幕、打到鍍鉻的保險桿，整束彈走，那一塊在點雲上就是一個洞。
 </a:t>
             </a:r>
           </a:p>
@@ -1287,41 +1244,41 @@
                 <a:spcPts val="0"/>
               </a:spcBef>
               <a:spcAft>
-                <a:spcPts val="133"/>
-              </a:spcAft>
-            </a:pPr>
-            <a:r>
-              <a:rPr sz="800" lang="zh-TW" dirty="0">
-                <a:solidFill>
-                  <a:srgbClr val="000000"/>
-                </a:solidFill>
-                <a:latin typeface="Arial Unicode MS"/>
-                <a:ea typeface="Arial Unicode MS"/>
-                <a:cs typeface="Arial Unicode MS"/>
-              </a:rPr>
-              <a:t>要回答那個問題，必須先換成角度。三百六十度除以每圈一千零二十四個點，等於</a:t>
-            </a:r>
-            <a:r>
-              <a:rPr sz="800" b="1" lang="zh-TW" dirty="0">
-                <a:solidFill>
-                  <a:srgbClr val="000000"/>
-                </a:solidFill>
-                <a:latin typeface="Arial Unicode MS"/>
-                <a:ea typeface="Arial Unicode MS"/>
-                <a:cs typeface="Arial Unicode MS"/>
-              </a:rPr>
-              <a:t>零點三五度</a:t>
-            </a:r>
-            <a:r>
-              <a:rPr sz="800" lang="zh-TW" dirty="0">
-                <a:solidFill>
-                  <a:srgbClr val="000000"/>
-                </a:solidFill>
-                <a:latin typeface="Arial Unicode MS"/>
-                <a:ea typeface="Arial Unicode MS"/>
-                <a:cs typeface="Arial Unicode MS"/>
-              </a:rPr>
-              <a:t>。工具上就寫著這個數字。
+                <a:spcPts val="142"/>
+              </a:spcAft>
+            </a:pPr>
+            <a:r>
+              <a:rPr sz="850" lang="zh-TW" dirty="0">
+                <a:solidFill>
+                  <a:srgbClr val="000000"/>
+                </a:solidFill>
+                <a:latin typeface="Arial Unicode MS"/>
+                <a:ea typeface="Arial Unicode MS"/>
+                <a:cs typeface="Arial Unicode MS"/>
+              </a:rPr>
+              <a:t>這裡我要各位特別想一件事：</a:t>
+            </a:r>
+            <a:r>
+              <a:rPr sz="850" b="1" lang="zh-TW" dirty="0">
+                <a:solidFill>
+                  <a:srgbClr val="000000"/>
+                </a:solidFill>
+                <a:latin typeface="Arial Unicode MS"/>
+                <a:ea typeface="Arial Unicode MS"/>
+                <a:cs typeface="Arial Unicode MS"/>
+              </a:rPr>
+              <a:t>下雨的晚上，路面是什麼？</a:t>
+            </a:r>
+            <a:r>
+              <a:rPr sz="850" lang="zh-TW" dirty="0">
+                <a:solidFill>
+                  <a:srgbClr val="000000"/>
+                </a:solidFill>
+                <a:latin typeface="Arial Unicode MS"/>
+                <a:ea typeface="Arial Unicode MS"/>
+                <a:cs typeface="Arial Unicode MS"/>
+              </a:rPr>
+              <a:t>水膜會把粗糙的柏油變成一面鏡子。所以雨夜的路面在點雲上常常是破的，連車道邊界都量不到。這不是感測器壞了，是物理。
 </a:t>
             </a:r>
           </a:p>
@@ -1331,41 +1288,63 @@
                 <a:spcPts val="0"/>
               </a:spcBef>
               <a:spcAft>
-                <a:spcPts val="133"/>
-              </a:spcAft>
-            </a:pPr>
-            <a:r>
-              <a:rPr sz="800" lang="zh-TW" dirty="0">
-                <a:solidFill>
-                  <a:srgbClr val="000000"/>
-                </a:solidFill>
-                <a:latin typeface="Arial Unicode MS"/>
-                <a:ea typeface="Arial Unicode MS"/>
-                <a:cs typeface="Arial Unicode MS"/>
-              </a:rPr>
-              <a:t>再往下一行：零點三五度在四十公尺處，張開</a:t>
-            </a:r>
-            <a:r>
-              <a:rPr sz="800" b="1" lang="zh-TW" dirty="0">
-                <a:solidFill>
-                  <a:srgbClr val="000000"/>
-                </a:solidFill>
-                <a:latin typeface="Arial Unicode MS"/>
-                <a:ea typeface="Arial Unicode MS"/>
-                <a:cs typeface="Arial Unicode MS"/>
-              </a:rPr>
-              <a:t>零點二五公尺</a:t>
-            </a:r>
-            <a:r>
-              <a:rPr sz="800" lang="zh-TW" dirty="0">
-                <a:solidFill>
-                  <a:srgbClr val="000000"/>
-                </a:solidFill>
-                <a:latin typeface="Arial Unicode MS"/>
-                <a:ea typeface="Arial Unicode MS"/>
-                <a:cs typeface="Arial Unicode MS"/>
-              </a:rPr>
-              <a:t>，也就是二十五公分。一個人的肩膀大概五十公分寬，所以左右大概打得到兩個點。
+                <a:spcPts val="142"/>
+              </a:spcAft>
+            </a:pPr>
+            <a:r>
+              <a:rPr sz="850" lang="zh-TW" dirty="0">
+                <a:solidFill>
+                  <a:srgbClr val="000000"/>
+                </a:solidFill>
+                <a:latin typeface="Arial Unicode MS"/>
+                <a:ea typeface="Arial Unicode MS"/>
+                <a:cs typeface="Arial Unicode MS"/>
+              </a:rPr>
+              <a:t>第二種更麻煩：光束打到鏡面，</a:t>
+            </a:r>
+            <a:r>
+              <a:rPr sz="850" b="1" lang="zh-TW" dirty="0">
+                <a:solidFill>
+                  <a:srgbClr val="000000"/>
+                </a:solidFill>
+                <a:latin typeface="Arial Unicode MS"/>
+                <a:ea typeface="Arial Unicode MS"/>
+                <a:cs typeface="Arial Unicode MS"/>
+              </a:rPr>
+              <a:t>彈到旁邊的真東西，再原路回來</a:t>
+            </a:r>
+            <a:r>
+              <a:rPr sz="850" lang="zh-TW" dirty="0">
+                <a:solidFill>
+                  <a:srgbClr val="000000"/>
+                </a:solidFill>
+                <a:latin typeface="Arial Unicode MS"/>
+                <a:ea typeface="Arial Unicode MS"/>
+                <a:cs typeface="Arial Unicode MS"/>
+              </a:rPr>
+              <a:t>。光達只知道來回飛了多久，於是把那個東西標在鏡子後面。玻璃帷幕大樓旁邊，點雲上會憑空長出一整排不存在的車。這個叫</a:t>
+            </a:r>
+            <a:r>
+              <a:rPr sz="850" b="1" lang="zh-TW" dirty="0">
+                <a:solidFill>
+                  <a:srgbClr val="000000"/>
+                </a:solidFill>
+                <a:latin typeface="Arial Unicode MS"/>
+                <a:ea typeface="Arial Unicode MS"/>
+                <a:cs typeface="Arial Unicode MS"/>
+              </a:rPr>
+              <a:t>鬼點</a:t>
+            </a:r>
+            <a:r>
+              <a:rPr sz="850" lang="zh-TW" dirty="0">
+                <a:solidFill>
+                  <a:srgbClr val="000000"/>
+                </a:solidFill>
+                <a:latin typeface="Arial Unicode MS"/>
+                <a:ea typeface="Arial Unicode MS"/>
+                <a:cs typeface="Arial Unicode MS"/>
+              </a:rPr>
+              <a:t>。二〇二五年有研究把鏡子貼在三角錐上，就讓自駕車對著不存在的東西急煞。
 </a:t>
             </a:r>
           </a:p>
@@ -1375,41 +1354,41 @@
                 <a:spcPts val="0"/>
               </a:spcBef>
               <a:spcAft>
-                <a:spcPts val="133"/>
-              </a:spcAft>
-            </a:pPr>
-            <a:r>
-              <a:rPr sz="800" lang="zh-TW" dirty="0">
-                <a:solidFill>
-                  <a:srgbClr val="000000"/>
-                </a:solidFill>
-                <a:latin typeface="Arial Unicode MS"/>
-                <a:ea typeface="Arial Unicode MS"/>
-                <a:cs typeface="Arial Unicode MS"/>
-              </a:rPr>
-              <a:t>現在請大家把每圈點數改成 </a:t>
-            </a:r>
-            <a:r>
-              <a:rPr sz="800" b="1" lang="zh-TW" dirty="0">
-                <a:solidFill>
-                  <a:srgbClr val="000000"/>
-                </a:solidFill>
-                <a:latin typeface="Arial Unicode MS"/>
-                <a:ea typeface="Arial Unicode MS"/>
-                <a:cs typeface="Arial Unicode MS"/>
-              </a:rPr>
-              <a:t>2048</a:t>
-            </a:r>
-            <a:r>
-              <a:rPr sz="800" lang="zh-TW" dirty="0">
-                <a:solidFill>
-                  <a:srgbClr val="000000"/>
-                </a:solidFill>
-                <a:latin typeface="Arial Unicode MS"/>
-                <a:ea typeface="Arial Unicode MS"/>
-                <a:cs typeface="Arial Unicode MS"/>
-              </a:rPr>
-              <a:t>，看兩個數字怎麼變。
+                <a:spcPts val="142"/>
+              </a:spcAft>
+            </a:pPr>
+            <a:r>
+              <a:rPr sz="850" lang="zh-TW" dirty="0">
+                <a:solidFill>
+                  <a:srgbClr val="000000"/>
+                </a:solidFill>
+                <a:latin typeface="Arial Unicode MS"/>
+                <a:ea typeface="Arial Unicode MS"/>
+                <a:cs typeface="Arial Unicode MS"/>
+              </a:rPr>
+              <a:t>第三種各位上一節聽過：</a:t>
+            </a:r>
+            <a:r>
+              <a:rPr sz="850" b="1" lang="zh-TW" dirty="0">
+                <a:solidFill>
+                  <a:srgbClr val="000000"/>
+                </a:solidFill>
+                <a:latin typeface="Arial Unicode MS"/>
+                <a:ea typeface="Arial Unicode MS"/>
+                <a:cs typeface="Arial Unicode MS"/>
+              </a:rPr>
+              <a:t>回歸反射</a:t>
+            </a:r>
+            <a:r>
+              <a:rPr sz="850" lang="zh-TW" dirty="0">
+                <a:solidFill>
+                  <a:srgbClr val="000000"/>
+                </a:solidFill>
+                <a:latin typeface="Arial Unicode MS"/>
+                <a:ea typeface="Arial Unicode MS"/>
+                <a:cs typeface="Arial Unicode MS"/>
+              </a:rPr>
+              <a:t>。反光背心和路牌會把光原路送回來，亮到爆表，在點雲上糊成一團光暈。所以上一節我才把反光背心從 80% 那一格拿掉——它根本不是同一類。
 </a:t>
             </a:r>
           </a:p>
@@ -1419,19 +1398,63 @@
                 <a:spcPts val="0"/>
               </a:spcBef>
               <a:spcAft>
-                <a:spcPts val="133"/>
-              </a:spcAft>
-            </a:pPr>
-            <a:r>
-              <a:rPr sz="800" lang="zh-TW" dirty="0">
-                <a:solidFill>
-                  <a:srgbClr val="000000"/>
-                </a:solidFill>
-                <a:latin typeface="Arial Unicode MS"/>
-                <a:ea typeface="Arial Unicode MS"/>
-                <a:cs typeface="Arial Unicode MS"/>
-              </a:rPr>
-              <a:t>角度變成一半，零點一七六度；四十公尺處的間距也變成一半，十二公分。所以同一個人身上的點數就加倍了。
+                <a:spcPts val="142"/>
+              </a:spcAft>
+            </a:pPr>
+            <a:r>
+              <a:rPr sz="850" lang="zh-TW" dirty="0">
+                <a:solidFill>
+                  <a:srgbClr val="000000"/>
+                </a:solidFill>
+                <a:latin typeface="Arial Unicode MS"/>
+                <a:ea typeface="Arial Unicode MS"/>
+                <a:cs typeface="Arial Unicode MS"/>
+              </a:rPr>
+              <a:t>那怎麼辦？請看最右邊那一欄。</a:t>
+            </a:r>
+            <a:r>
+              <a:rPr sz="850" b="1" lang="zh-TW" dirty="0">
+                <a:solidFill>
+                  <a:srgbClr val="000000"/>
+                </a:solidFill>
+                <a:latin typeface="Arial Unicode MS"/>
+                <a:ea typeface="Arial Unicode MS"/>
+                <a:cs typeface="Arial Unicode MS"/>
+              </a:rPr>
+              <a:t>沒有一招擋得住全部</a:t>
+            </a:r>
+            <a:r>
+              <a:rPr sz="850" lang="zh-TW" dirty="0">
+                <a:solidFill>
+                  <a:srgbClr val="000000"/>
+                </a:solidFill>
+                <a:latin typeface="Arial Unicode MS"/>
+                <a:ea typeface="Arial Unicode MS"/>
+                <a:cs typeface="Arial Unicode MS"/>
+              </a:rPr>
+              <a:t>，現在是四層疊起來：多次回波把玻璃和玻璃後面的東西都收回來；看反射強度，太弱和太強都是警訊；高精地圖把已知的玻璃帷幕路段標成風險區；最後也是最重要的——</a:t>
+            </a:r>
+            <a:r>
+              <a:rPr sz="850" b="1" lang="zh-TW" dirty="0">
+                <a:solidFill>
+                  <a:srgbClr val="000000"/>
+                </a:solidFill>
+                <a:latin typeface="Arial Unicode MS"/>
+                <a:ea typeface="Arial Unicode MS"/>
+                <a:cs typeface="Arial Unicode MS"/>
+              </a:rPr>
+              <a:t>雷達</a:t>
+            </a:r>
+            <a:r>
+              <a:rPr sz="850" lang="zh-TW" dirty="0">
+                <a:solidFill>
+                  <a:srgbClr val="000000"/>
+                </a:solidFill>
+                <a:latin typeface="Arial Unicode MS"/>
+                <a:ea typeface="Arial Unicode MS"/>
+                <a:cs typeface="Arial Unicode MS"/>
+              </a:rPr>
+              <a:t>。毫米波碰到鏡面的行為跟雷射完全不一樣。
 </a:t>
             </a:r>
           </a:p>
@@ -1441,63 +1464,30 @@
                 <a:spcPts val="0"/>
               </a:spcBef>
               <a:spcAft>
-                <a:spcPts val="133"/>
-              </a:spcAft>
-            </a:pPr>
-            <a:r>
-              <a:rPr sz="800" lang="zh-TW" dirty="0">
-                <a:solidFill>
-                  <a:srgbClr val="000000"/>
-                </a:solidFill>
-                <a:latin typeface="Arial Unicode MS"/>
-                <a:ea typeface="Arial Unicode MS"/>
-                <a:cs typeface="Arial Unicode MS"/>
-              </a:rPr>
-              <a:t>這就是我要各位記住的動作：</a:t>
-            </a:r>
-            <a:r>
-              <a:rPr sz="800" b="1" lang="zh-TW" dirty="0">
-                <a:solidFill>
-                  <a:srgbClr val="000000"/>
-                </a:solidFill>
-                <a:latin typeface="Arial Unicode MS"/>
-                <a:ea typeface="Arial Unicode MS"/>
-                <a:cs typeface="Arial Unicode MS"/>
-              </a:rPr>
-              <a:t>看到「每秒幾百萬點」，先把它換算成角度，再換算成你關心的那個距離上的公分數。</a:t>
-            </a:r>
-            <a:r>
-              <a:rPr sz="800" lang="zh-TW" dirty="0">
-                <a:solidFill>
-                  <a:srgbClr val="000000"/>
-                </a:solidFill>
-                <a:latin typeface="Arial Unicode MS"/>
-                <a:ea typeface="Arial Unicode MS"/>
-                <a:cs typeface="Arial Unicode MS"/>
-              </a:rPr>
-              <a:t>沒換算之前，那個數字只是廣告。
-</a:t>
-            </a:r>
-          </a:p>
-          <a:p>
-            <a:pPr algn="l">
-              <a:spcBef>
-                <a:spcPts val="0"/>
-              </a:spcBef>
-              <a:spcAft>
-                <a:spcPts val="133"/>
-              </a:spcAft>
-            </a:pPr>
-            <a:r>
-              <a:rPr sz="800" lang="zh-TW" dirty="0">
-                <a:solidFill>
-                  <a:srgbClr val="000000"/>
-                </a:solidFill>
-                <a:latin typeface="Arial Unicode MS"/>
-                <a:ea typeface="Arial Unicode MS"/>
-                <a:cs typeface="Arial Unicode MS"/>
-              </a:rPr>
-              <a:t>好，收。最後一段。</a:t>
+                <a:spcPts val="142"/>
+              </a:spcAft>
+            </a:pPr>
+            <a:r>
+              <a:rPr sz="850" lang="zh-TW" dirty="0">
+                <a:solidFill>
+                  <a:srgbClr val="000000"/>
+                </a:solidFill>
+                <a:latin typeface="Arial Unicode MS"/>
+                <a:ea typeface="Arial Unicode MS"/>
+                <a:cs typeface="Arial Unicode MS"/>
+              </a:rPr>
+              <a:t>所以這張的結論，其實就是下一段要講的事：</a:t>
+            </a:r>
+            <a:r>
+              <a:rPr sz="850" b="1" lang="zh-TW" dirty="0">
+                <a:solidFill>
+                  <a:srgbClr val="000000"/>
+                </a:solidFill>
+                <a:latin typeface="Arial Unicode MS"/>
+                <a:ea typeface="Arial Unicode MS"/>
+                <a:cs typeface="Arial Unicode MS"/>
+              </a:rPr>
+              <a:t>選感測器不是挑最強的那一顆，是湊一組弱點不一樣的。</a:t>
             </a:r>
           </a:p>
         </p:txBody>
@@ -1606,11 +1596,11 @@
                 <a:spcPts val="0"/>
               </a:spcBef>
               <a:spcAft>
-                <a:spcPts val="200"/>
-              </a:spcAft>
-            </a:pPr>
-            <a:r>
-              <a:rPr sz="1200" b="1" lang="zh-TW" dirty="0">
+                <a:spcPts val="133"/>
+              </a:spcAft>
+            </a:pPr>
+            <a:r>
+              <a:rPr sz="800" b="1" lang="zh-TW" dirty="0">
                 <a:solidFill>
                   <a:srgbClr val="000000"/>
                 </a:solidFill>
@@ -1621,7 +1611,7 @@
               <a:t>▍這一張要做什麼</a:t>
             </a:r>
             <a:r>
-              <a:rPr sz="1200" lang="zh-TW" dirty="0">
+              <a:rPr sz="800" lang="zh-TW" dirty="0">
                 <a:solidFill>
                   <a:srgbClr val="000000"/>
                 </a:solidFill>
@@ -1639,19 +1629,19 @@
                 <a:spcPts val="0"/>
               </a:spcBef>
               <a:spcAft>
-                <a:spcPts val="200"/>
-              </a:spcAft>
-            </a:pPr>
-            <a:r>
-              <a:rPr sz="1200" lang="zh-TW" dirty="0">
-                <a:solidFill>
-                  <a:srgbClr val="000000"/>
-                </a:solidFill>
-                <a:latin typeface="Arial Unicode MS"/>
-                <a:ea typeface="Arial Unicode MS"/>
-                <a:cs typeface="Arial Unicode MS"/>
-              </a:rPr>
-              <a:t>段落分隔。丟出第二節的收尾問題：兩顆都好的感測器合起來可能還是錯的。
+                <a:spcPts val="133"/>
+              </a:spcAft>
+            </a:pPr>
+            <a:r>
+              <a:rPr sz="800" lang="zh-TW" dirty="0">
+                <a:solidFill>
+                  <a:srgbClr val="000000"/>
+                </a:solidFill>
+                <a:latin typeface="Arial Unicode MS"/>
+                <a:ea typeface="Arial Unicode MS"/>
+                <a:cs typeface="Arial Unicode MS"/>
+              </a:rPr>
+              <a:t>三分鐘的小練習，讓學生自己把每秒點數換算成角度。
 </a:t>
             </a:r>
           </a:p>
@@ -1661,11 +1651,11 @@
                 <a:spcPts val="0"/>
               </a:spcBef>
               <a:spcAft>
-                <a:spcPts val="200"/>
-              </a:spcAft>
-            </a:pPr>
-            <a:r>
-              <a:rPr sz="1200" b="1" lang="zh-TW" dirty="0">
+                <a:spcPts val="133"/>
+              </a:spcAft>
+            </a:pPr>
+            <a:r>
+              <a:rPr sz="800" b="1" lang="zh-TW" dirty="0">
                 <a:solidFill>
                   <a:srgbClr val="000000"/>
                 </a:solidFill>
@@ -1676,7 +1666,7 @@
               <a:t>▍畫面上圈這裡</a:t>
             </a:r>
             <a:r>
-              <a:rPr sz="1200" lang="zh-TW" dirty="0">
+              <a:rPr sz="800" lang="zh-TW" dirty="0">
                 <a:solidFill>
                   <a:srgbClr val="000000"/>
                 </a:solidFill>
@@ -1694,19 +1684,19 @@
                 <a:spcPts val="0"/>
               </a:spcBef>
               <a:spcAft>
-                <a:spcPts val="200"/>
-              </a:spcAft>
-            </a:pPr>
-            <a:r>
-              <a:rPr sz="1200" lang="zh-TW" dirty="0">
-                <a:solidFill>
-                  <a:srgbClr val="000000"/>
-                </a:solidFill>
-                <a:latin typeface="Arial Unicode MS"/>
-                <a:ea typeface="Arial Unicode MS"/>
-                <a:cs typeface="Arial Unicode MS"/>
-              </a:rPr>
-              <a:t>不用圈。這一句停兩秒再翻頁。
+                <a:spcPts val="133"/>
+              </a:spcAft>
+            </a:pPr>
+            <a:r>
+              <a:rPr sz="800" lang="zh-TW" dirty="0">
+                <a:solidFill>
+                  <a:srgbClr val="000000"/>
+                </a:solidFill>
+                <a:latin typeface="Arial Unicode MS"/>
+                <a:ea typeface="Arial Unicode MS"/>
+                <a:cs typeface="Arial Unicode MS"/>
+              </a:rPr>
+              <a:t>圈題目指定的第②個小工具。巡堂確認每個人都真的按過一次。
 </a:t>
             </a:r>
           </a:p>
@@ -1716,11 +1706,11 @@
                 <a:spcPts val="0"/>
               </a:spcBef>
               <a:spcAft>
-                <a:spcPts val="200"/>
-              </a:spcAft>
-            </a:pPr>
-            <a:r>
-              <a:rPr sz="1200" b="1" lang="zh-TW" dirty="0">
+                <a:spcPts val="133"/>
+              </a:spcAft>
+            </a:pPr>
+            <a:r>
+              <a:rPr sz="800" b="1" lang="zh-TW" dirty="0">
                 <a:solidFill>
                   <a:srgbClr val="000000"/>
                 </a:solidFill>
@@ -1731,7 +1721,7 @@
               <a:t>▍以下照著唸</a:t>
             </a:r>
             <a:r>
-              <a:rPr sz="1200" lang="zh-TW" dirty="0">
+              <a:rPr sz="800" lang="zh-TW" dirty="0">
                 <a:solidFill>
                   <a:srgbClr val="000000"/>
                 </a:solidFill>
@@ -1749,19 +1739,393 @@
                 <a:spcPts val="0"/>
               </a:spcBef>
               <a:spcAft>
-                <a:spcPts val="200"/>
-              </a:spcAft>
-            </a:pPr>
-            <a:r>
-              <a:rPr sz="1200" lang="zh-TW" dirty="0">
-                <a:solidFill>
-                  <a:srgbClr val="000000"/>
-                </a:solidFill>
-                <a:latin typeface="Arial Unicode MS"/>
-                <a:ea typeface="Arial Unicode MS"/>
-                <a:cs typeface="Arial Unicode MS"/>
-              </a:rPr>
-              <a:t>第三組，這一組規格表上常常找不到，但它決定了你的系統能不能用。</a:t>
+                <a:spcPts val="133"/>
+              </a:spcAft>
+            </a:pPr>
+            <a:r>
+              <a:rPr sz="800" lang="zh-TW" dirty="0">
+                <a:solidFill>
+                  <a:srgbClr val="000000"/>
+                </a:solidFill>
+                <a:latin typeface="Arial Unicode MS"/>
+                <a:ea typeface="Arial Unicode MS"/>
+                <a:cs typeface="Arial Unicode MS"/>
+              </a:rPr>
+              <a:t>這裡停三分鐘，讓大家動手算一次。
+</a:t>
+            </a:r>
+          </a:p>
+          <a:p>
+            <a:pPr algn="l">
+              <a:spcBef>
+                <a:spcPts val="0"/>
+              </a:spcBef>
+              <a:spcAft>
+                <a:spcPts val="133"/>
+              </a:spcAft>
+            </a:pPr>
+            <a:r>
+              <a:rPr sz="800" lang="zh-TW" dirty="0">
+                <a:solidFill>
+                  <a:srgbClr val="000000"/>
+                </a:solidFill>
+                <a:latin typeface="Arial Unicode MS"/>
+                <a:ea typeface="Arial Unicode MS"/>
+                <a:cs typeface="Arial Unicode MS"/>
+              </a:rPr>
+              <a:t>請打開規格判讀台，找第二個小工具，「每秒點數 ↔ 角解析度」。
+</a:t>
+            </a:r>
+          </a:p>
+          <a:p>
+            <a:pPr algn="l">
+              <a:spcBef>
+                <a:spcPts val="0"/>
+              </a:spcBef>
+              <a:spcAft>
+                <a:spcPts val="133"/>
+              </a:spcAft>
+            </a:pPr>
+            <a:r>
+              <a:rPr sz="800" lang="zh-TW" dirty="0">
+                <a:solidFill>
+                  <a:srgbClr val="000000"/>
+                </a:solidFill>
+                <a:latin typeface="Arial Unicode MS"/>
+                <a:ea typeface="Arial Unicode MS"/>
+                <a:cs typeface="Arial Unicode MS"/>
+              </a:rPr>
+              <a:t>請把三個滑桿設成：</a:t>
+            </a:r>
+            <a:r>
+              <a:rPr sz="800" b="1" lang="zh-TW" dirty="0">
+                <a:solidFill>
+                  <a:srgbClr val="000000"/>
+                </a:solidFill>
+                <a:latin typeface="Arial Unicode MS"/>
+                <a:ea typeface="Arial Unicode MS"/>
+                <a:cs typeface="Arial Unicode MS"/>
+              </a:rPr>
+              <a:t>64 線、每圈 1024 點、10 赫茲</a:t>
+            </a:r>
+            <a:r>
+              <a:rPr sz="800" lang="zh-TW" dirty="0">
+                <a:solidFill>
+                  <a:srgbClr val="000000"/>
+                </a:solidFill>
+                <a:latin typeface="Arial Unicode MS"/>
+                <a:ea typeface="Arial Unicode MS"/>
+                <a:cs typeface="Arial Unicode MS"/>
+              </a:rPr>
+              <a:t>。
+</a:t>
+            </a:r>
+          </a:p>
+          <a:p>
+            <a:pPr algn="l">
+              <a:spcBef>
+                <a:spcPts val="0"/>
+              </a:spcBef>
+              <a:spcAft>
+                <a:spcPts val="133"/>
+              </a:spcAft>
+            </a:pPr>
+            <a:r>
+              <a:rPr sz="800" lang="zh-TW" dirty="0">
+                <a:solidFill>
+                  <a:srgbClr val="000000"/>
+                </a:solidFill>
+                <a:latin typeface="Arial Unicode MS"/>
+                <a:ea typeface="Arial Unicode MS"/>
+                <a:cs typeface="Arial Unicode MS"/>
+              </a:rPr>
+              <a:t>現在看它算出來的每秒點數。六十四乘一千零二十四乘十，等於</a:t>
+            </a:r>
+            <a:r>
+              <a:rPr sz="800" b="1" lang="zh-TW" dirty="0">
+                <a:solidFill>
+                  <a:srgbClr val="000000"/>
+                </a:solidFill>
+                <a:latin typeface="Arial Unicode MS"/>
+                <a:ea typeface="Arial Unicode MS"/>
+                <a:cs typeface="Arial Unicode MS"/>
+              </a:rPr>
+              <a:t>六十五萬五千三百六十</a:t>
+            </a:r>
+            <a:r>
+              <a:rPr sz="800" lang="zh-TW" dirty="0">
+                <a:solidFill>
+                  <a:srgbClr val="000000"/>
+                </a:solidFill>
+                <a:latin typeface="Arial Unicode MS"/>
+                <a:ea typeface="Arial Unicode MS"/>
+                <a:cs typeface="Arial Unicode MS"/>
+              </a:rPr>
+              <a:t>。
+</a:t>
+            </a:r>
+          </a:p>
+          <a:p>
+            <a:pPr algn="l">
+              <a:spcBef>
+                <a:spcPts val="0"/>
+              </a:spcBef>
+              <a:spcAft>
+                <a:spcPts val="133"/>
+              </a:spcAft>
+            </a:pPr>
+            <a:r>
+              <a:rPr sz="800" lang="zh-TW" dirty="0">
+                <a:solidFill>
+                  <a:srgbClr val="000000"/>
+                </a:solidFill>
+                <a:latin typeface="Arial Unicode MS"/>
+                <a:ea typeface="Arial Unicode MS"/>
+                <a:cs typeface="Arial Unicode MS"/>
+              </a:rPr>
+              <a:t>規格表上的廠商最喜歡寫這個數字，因為它看起來很大、很厲害。可是這個數字</a:t>
+            </a:r>
+            <a:r>
+              <a:rPr sz="800" b="1" lang="zh-TW" dirty="0">
+                <a:solidFill>
+                  <a:srgbClr val="000000"/>
+                </a:solidFill>
+                <a:latin typeface="Arial Unicode MS"/>
+                <a:ea typeface="Arial Unicode MS"/>
+                <a:cs typeface="Arial Unicode MS"/>
+              </a:rPr>
+              <a:t>不能直接拿來用</a:t>
+            </a:r>
+            <a:r>
+              <a:rPr sz="800" lang="zh-TW" dirty="0">
+                <a:solidFill>
+                  <a:srgbClr val="000000"/>
+                </a:solidFill>
+                <a:latin typeface="Arial Unicode MS"/>
+                <a:ea typeface="Arial Unicode MS"/>
+                <a:cs typeface="Arial Unicode MS"/>
+              </a:rPr>
+              <a:t>，它沒有辦法告訴你「四十公尺外的人身上有幾個點」。
+</a:t>
+            </a:r>
+          </a:p>
+          <a:p>
+            <a:pPr algn="l">
+              <a:spcBef>
+                <a:spcPts val="0"/>
+              </a:spcBef>
+              <a:spcAft>
+                <a:spcPts val="133"/>
+              </a:spcAft>
+            </a:pPr>
+            <a:r>
+              <a:rPr sz="800" lang="zh-TW" dirty="0">
+                <a:solidFill>
+                  <a:srgbClr val="000000"/>
+                </a:solidFill>
+                <a:latin typeface="Arial Unicode MS"/>
+                <a:ea typeface="Arial Unicode MS"/>
+                <a:cs typeface="Arial Unicode MS"/>
+              </a:rPr>
+              <a:t>要回答那個問題，必須先換成角度。三百六十度除以每圈一千零二十四個點，等於</a:t>
+            </a:r>
+            <a:r>
+              <a:rPr sz="800" b="1" lang="zh-TW" dirty="0">
+                <a:solidFill>
+                  <a:srgbClr val="000000"/>
+                </a:solidFill>
+                <a:latin typeface="Arial Unicode MS"/>
+                <a:ea typeface="Arial Unicode MS"/>
+                <a:cs typeface="Arial Unicode MS"/>
+              </a:rPr>
+              <a:t>零點三五度</a:t>
+            </a:r>
+            <a:r>
+              <a:rPr sz="800" lang="zh-TW" dirty="0">
+                <a:solidFill>
+                  <a:srgbClr val="000000"/>
+                </a:solidFill>
+                <a:latin typeface="Arial Unicode MS"/>
+                <a:ea typeface="Arial Unicode MS"/>
+                <a:cs typeface="Arial Unicode MS"/>
+              </a:rPr>
+              <a:t>。工具上就寫著這個數字。
+</a:t>
+            </a:r>
+          </a:p>
+          <a:p>
+            <a:pPr algn="l">
+              <a:spcBef>
+                <a:spcPts val="0"/>
+              </a:spcBef>
+              <a:spcAft>
+                <a:spcPts val="133"/>
+              </a:spcAft>
+            </a:pPr>
+            <a:r>
+              <a:rPr sz="800" lang="zh-TW" dirty="0">
+                <a:solidFill>
+                  <a:srgbClr val="000000"/>
+                </a:solidFill>
+                <a:latin typeface="Arial Unicode MS"/>
+                <a:ea typeface="Arial Unicode MS"/>
+                <a:cs typeface="Arial Unicode MS"/>
+              </a:rPr>
+              <a:t>再往下一行：零點三五度在四十公尺處，張開</a:t>
+            </a:r>
+            <a:r>
+              <a:rPr sz="800" b="1" lang="zh-TW" dirty="0">
+                <a:solidFill>
+                  <a:srgbClr val="000000"/>
+                </a:solidFill>
+                <a:latin typeface="Arial Unicode MS"/>
+                <a:ea typeface="Arial Unicode MS"/>
+                <a:cs typeface="Arial Unicode MS"/>
+              </a:rPr>
+              <a:t>零點二五公尺</a:t>
+            </a:r>
+            <a:r>
+              <a:rPr sz="800" lang="zh-TW" dirty="0">
+                <a:solidFill>
+                  <a:srgbClr val="000000"/>
+                </a:solidFill>
+                <a:latin typeface="Arial Unicode MS"/>
+                <a:ea typeface="Arial Unicode MS"/>
+                <a:cs typeface="Arial Unicode MS"/>
+              </a:rPr>
+              <a:t>，也就是二十五公分。一個人的肩膀大概五十公分寬，所以左右大概打得到兩個點。
+</a:t>
+            </a:r>
+          </a:p>
+          <a:p>
+            <a:pPr algn="l">
+              <a:spcBef>
+                <a:spcPts val="0"/>
+              </a:spcBef>
+              <a:spcAft>
+                <a:spcPts val="133"/>
+              </a:spcAft>
+            </a:pPr>
+            <a:r>
+              <a:rPr sz="800" lang="zh-TW" dirty="0">
+                <a:solidFill>
+                  <a:srgbClr val="000000"/>
+                </a:solidFill>
+                <a:latin typeface="Arial Unicode MS"/>
+                <a:ea typeface="Arial Unicode MS"/>
+                <a:cs typeface="Arial Unicode MS"/>
+              </a:rPr>
+              <a:t>現在請大家把每圈點數改成 </a:t>
+            </a:r>
+            <a:r>
+              <a:rPr sz="800" b="1" lang="zh-TW" dirty="0">
+                <a:solidFill>
+                  <a:srgbClr val="000000"/>
+                </a:solidFill>
+                <a:latin typeface="Arial Unicode MS"/>
+                <a:ea typeface="Arial Unicode MS"/>
+                <a:cs typeface="Arial Unicode MS"/>
+              </a:rPr>
+              <a:t>2048</a:t>
+            </a:r>
+            <a:r>
+              <a:rPr sz="800" lang="zh-TW" dirty="0">
+                <a:solidFill>
+                  <a:srgbClr val="000000"/>
+                </a:solidFill>
+                <a:latin typeface="Arial Unicode MS"/>
+                <a:ea typeface="Arial Unicode MS"/>
+                <a:cs typeface="Arial Unicode MS"/>
+              </a:rPr>
+              <a:t>，看兩個數字怎麼變。
+</a:t>
+            </a:r>
+          </a:p>
+          <a:p>
+            <a:pPr algn="l">
+              <a:spcBef>
+                <a:spcPts val="0"/>
+              </a:spcBef>
+              <a:spcAft>
+                <a:spcPts val="133"/>
+              </a:spcAft>
+            </a:pPr>
+            <a:r>
+              <a:rPr sz="800" lang="zh-TW" dirty="0">
+                <a:solidFill>
+                  <a:srgbClr val="000000"/>
+                </a:solidFill>
+                <a:latin typeface="Arial Unicode MS"/>
+                <a:ea typeface="Arial Unicode MS"/>
+                <a:cs typeface="Arial Unicode MS"/>
+              </a:rPr>
+              <a:t>角度變成一半，零點一七六度；四十公尺處的間距也變成一半，十二公分。所以同一個人身上的點數就加倍了。
+</a:t>
+            </a:r>
+          </a:p>
+          <a:p>
+            <a:pPr algn="l">
+              <a:spcBef>
+                <a:spcPts val="0"/>
+              </a:spcBef>
+              <a:spcAft>
+                <a:spcPts val="133"/>
+              </a:spcAft>
+            </a:pPr>
+            <a:r>
+              <a:rPr sz="800" lang="zh-TW" dirty="0">
+                <a:solidFill>
+                  <a:srgbClr val="000000"/>
+                </a:solidFill>
+                <a:latin typeface="Arial Unicode MS"/>
+                <a:ea typeface="Arial Unicode MS"/>
+                <a:cs typeface="Arial Unicode MS"/>
+              </a:rPr>
+              <a:t>這就是我要各位記住的動作：</a:t>
+            </a:r>
+            <a:r>
+              <a:rPr sz="800" b="1" lang="zh-TW" dirty="0">
+                <a:solidFill>
+                  <a:srgbClr val="000000"/>
+                </a:solidFill>
+                <a:latin typeface="Arial Unicode MS"/>
+                <a:ea typeface="Arial Unicode MS"/>
+                <a:cs typeface="Arial Unicode MS"/>
+              </a:rPr>
+              <a:t>看到「每秒幾百萬點」，先把它換算成角度，再換算成你關心的那個距離上的公分數。</a:t>
+            </a:r>
+            <a:r>
+              <a:rPr sz="800" lang="zh-TW" dirty="0">
+                <a:solidFill>
+                  <a:srgbClr val="000000"/>
+                </a:solidFill>
+                <a:latin typeface="Arial Unicode MS"/>
+                <a:ea typeface="Arial Unicode MS"/>
+                <a:cs typeface="Arial Unicode MS"/>
+              </a:rPr>
+              <a:t>沒換算之前，那個數字只是廣告。
+</a:t>
+            </a:r>
+          </a:p>
+          <a:p>
+            <a:pPr algn="l">
+              <a:spcBef>
+                <a:spcPts val="0"/>
+              </a:spcBef>
+              <a:spcAft>
+                <a:spcPts val="133"/>
+              </a:spcAft>
+            </a:pPr>
+            <a:r>
+              <a:rPr sz="800" lang="zh-TW" dirty="0">
+                <a:solidFill>
+                  <a:srgbClr val="000000"/>
+                </a:solidFill>
+                <a:latin typeface="Arial Unicode MS"/>
+                <a:ea typeface="Arial Unicode MS"/>
+                <a:cs typeface="Arial Unicode MS"/>
+              </a:rPr>
+              <a:t>好，收。最後一段。</a:t>
             </a:r>
           </a:p>
         </p:txBody>
@@ -1870,11 +2234,11 @@
                 <a:spcPts val="0"/>
               </a:spcBef>
               <a:spcAft>
-                <a:spcPts val="133"/>
-              </a:spcAft>
-            </a:pPr>
-            <a:r>
-              <a:rPr sz="800" b="1" lang="zh-TW" dirty="0">
+                <a:spcPts val="200"/>
+              </a:spcAft>
+            </a:pPr>
+            <a:r>
+              <a:rPr sz="1200" b="1" lang="zh-TW" dirty="0">
                 <a:solidFill>
                   <a:srgbClr val="000000"/>
                 </a:solidFill>
@@ -1885,7 +2249,7 @@
               <a:t>▍這一張要做什麼</a:t>
             </a:r>
             <a:r>
-              <a:rPr sz="800" lang="zh-TW" dirty="0">
+              <a:rPr sz="1200" lang="zh-TW" dirty="0">
                 <a:solidFill>
                   <a:srgbClr val="000000"/>
                 </a:solidFill>
@@ -1903,19 +2267,19 @@
                 <a:spcPts val="0"/>
               </a:spcBef>
               <a:spcAft>
-                <a:spcPts val="133"/>
-              </a:spcAft>
-            </a:pPr>
-            <a:r>
-              <a:rPr sz="800" lang="zh-TW" dirty="0">
-                <a:solidFill>
-                  <a:srgbClr val="000000"/>
-                </a:solidFill>
-                <a:latin typeface="Arial Unicode MS"/>
-                <a:ea typeface="Arial Unicode MS"/>
-                <a:cs typeface="Arial Unicode MS"/>
-              </a:rPr>
-              <a:t>標定：告訴車子每一隻眼睛裝在哪、朝哪看。
+                <a:spcPts val="200"/>
+              </a:spcAft>
+            </a:pPr>
+            <a:r>
+              <a:rPr sz="1200" lang="zh-TW" dirty="0">
+                <a:solidFill>
+                  <a:srgbClr val="000000"/>
+                </a:solidFill>
+                <a:latin typeface="Arial Unicode MS"/>
+                <a:ea typeface="Arial Unicode MS"/>
+                <a:cs typeface="Arial Unicode MS"/>
+              </a:rPr>
+              <a:t>段落分隔。丟出第二節的收尾問題：兩顆都好的感測器合起來可能還是錯的。
 </a:t>
             </a:r>
           </a:p>
@@ -1925,11 +2289,11 @@
                 <a:spcPts val="0"/>
               </a:spcBef>
               <a:spcAft>
-                <a:spcPts val="133"/>
-              </a:spcAft>
-            </a:pPr>
-            <a:r>
-              <a:rPr sz="800" b="1" lang="zh-TW" dirty="0">
+                <a:spcPts val="200"/>
+              </a:spcAft>
+            </a:pPr>
+            <a:r>
+              <a:rPr sz="1200" b="1" lang="zh-TW" dirty="0">
                 <a:solidFill>
                   <a:srgbClr val="000000"/>
                 </a:solidFill>
@@ -1940,7 +2304,7 @@
               <a:t>▍畫面上圈這裡</a:t>
             </a:r>
             <a:r>
-              <a:rPr sz="800" lang="zh-TW" dirty="0">
+              <a:rPr sz="1200" lang="zh-TW" dirty="0">
                 <a:solidFill>
                   <a:srgbClr val="000000"/>
                 </a:solidFill>
@@ -1958,19 +2322,19 @@
                 <a:spcPts val="0"/>
               </a:spcBef>
               <a:spcAft>
-                <a:spcPts val="133"/>
-              </a:spcAft>
-            </a:pPr>
-            <a:r>
-              <a:rPr sz="800" lang="zh-TW" dirty="0">
-                <a:solidFill>
-                  <a:srgbClr val="000000"/>
-                </a:solidFill>
-                <a:latin typeface="Arial Unicode MS"/>
-                <a:ea typeface="Arial Unicode MS"/>
-                <a:cs typeface="Arial Unicode MS"/>
-              </a:rPr>
-              <a:t>一步一步圈，最後圈偏差角度造成的位置誤差那個數字。
+                <a:spcPts val="200"/>
+              </a:spcAft>
+            </a:pPr>
+            <a:r>
+              <a:rPr sz="1200" lang="zh-TW" dirty="0">
+                <a:solidFill>
+                  <a:srgbClr val="000000"/>
+                </a:solidFill>
+                <a:latin typeface="Arial Unicode MS"/>
+                <a:ea typeface="Arial Unicode MS"/>
+                <a:cs typeface="Arial Unicode MS"/>
+              </a:rPr>
+              <a:t>不用圈。這一句停兩秒再翻頁。
 </a:t>
             </a:r>
           </a:p>
@@ -1980,11 +2344,11 @@
                 <a:spcPts val="0"/>
               </a:spcBef>
               <a:spcAft>
-                <a:spcPts val="133"/>
-              </a:spcAft>
-            </a:pPr>
-            <a:r>
-              <a:rPr sz="800" b="1" lang="zh-TW" dirty="0">
+                <a:spcPts val="200"/>
+              </a:spcAft>
+            </a:pPr>
+            <a:r>
+              <a:rPr sz="1200" b="1" lang="zh-TW" dirty="0">
                 <a:solidFill>
                   <a:srgbClr val="000000"/>
                 </a:solidFill>
@@ -1995,7 +2359,7 @@
               <a:t>▍以下照著唸</a:t>
             </a:r>
             <a:r>
-              <a:rPr sz="800" lang="zh-TW" dirty="0">
+              <a:rPr sz="1200" lang="zh-TW" dirty="0">
                 <a:solidFill>
                   <a:srgbClr val="000000"/>
                 </a:solidFill>
@@ -2013,492 +2377,19 @@
                 <a:spcPts val="0"/>
               </a:spcBef>
               <a:spcAft>
-                <a:spcPts val="133"/>
-              </a:spcAft>
-            </a:pPr>
-            <a:r>
-              <a:rPr sz="800" lang="zh-TW" dirty="0">
-                <a:solidFill>
-                  <a:srgbClr val="000000"/>
-                </a:solidFill>
-                <a:latin typeface="Arial Unicode MS"/>
-                <a:ea typeface="Arial Unicode MS"/>
-                <a:cs typeface="Arial Unicode MS"/>
-              </a:rPr>
-              <a:t>現在講一件規格表上</a:t>
-            </a:r>
-            <a:r>
-              <a:rPr sz="800" b="1" lang="zh-TW" dirty="0">
-                <a:solidFill>
-                  <a:srgbClr val="000000"/>
-                </a:solidFill>
-                <a:latin typeface="Arial Unicode MS"/>
-                <a:ea typeface="Arial Unicode MS"/>
-                <a:cs typeface="Arial Unicode MS"/>
-              </a:rPr>
-              <a:t>常常找不到</a:t>
-            </a:r>
-            <a:r>
-              <a:rPr sz="800" lang="zh-TW" dirty="0">
-                <a:solidFill>
-                  <a:srgbClr val="000000"/>
-                </a:solidFill>
-                <a:latin typeface="Arial Unicode MS"/>
-                <a:ea typeface="Arial Unicode MS"/>
-                <a:cs typeface="Arial Unicode MS"/>
-              </a:rPr>
-              <a:t>，但是害人最慘的事：</a:t>
-            </a:r>
-            <a:r>
-              <a:rPr sz="800" b="1" lang="zh-TW" dirty="0">
-                <a:solidFill>
-                  <a:srgbClr val="000000"/>
-                </a:solidFill>
-                <a:latin typeface="Arial Unicode MS"/>
-                <a:ea typeface="Arial Unicode MS"/>
-                <a:cs typeface="Arial Unicode MS"/>
-              </a:rPr>
-              <a:t>標定</a:t>
-            </a:r>
-            <a:r>
-              <a:rPr sz="800" lang="zh-TW" dirty="0">
-                <a:solidFill>
-                  <a:srgbClr val="000000"/>
-                </a:solidFill>
-                <a:latin typeface="Arial Unicode MS"/>
-                <a:ea typeface="Arial Unicode MS"/>
-                <a:cs typeface="Arial Unicode MS"/>
-              </a:rPr>
-              <a:t>。
-</a:t>
-            </a:r>
-          </a:p>
-          <a:p>
-            <a:pPr algn="l">
-              <a:spcBef>
-                <a:spcPts val="0"/>
-              </a:spcBef>
-              <a:spcAft>
-                <a:spcPts val="133"/>
-              </a:spcAft>
-            </a:pPr>
-            <a:r>
-              <a:rPr sz="800" lang="zh-TW" dirty="0">
-                <a:solidFill>
-                  <a:srgbClr val="000000"/>
-                </a:solidFill>
-                <a:latin typeface="Arial Unicode MS"/>
-                <a:ea typeface="Arial Unicode MS"/>
-                <a:cs typeface="Arial Unicode MS"/>
-              </a:rPr>
-              <a:t>先講問題。一台車上有相機、有光達。相機說「前面有一個人」，光達說「前面三十公尺有一團東西」。要把這兩句話</a:t>
-            </a:r>
-            <a:r>
-              <a:rPr sz="800" b="1" lang="zh-TW" dirty="0">
-                <a:solidFill>
-                  <a:srgbClr val="000000"/>
-                </a:solidFill>
-                <a:latin typeface="Arial Unicode MS"/>
-                <a:ea typeface="Arial Unicode MS"/>
-                <a:cs typeface="Arial Unicode MS"/>
-              </a:rPr>
-              <a:t>合成一句</a:t>
-            </a:r>
-            <a:r>
-              <a:rPr sz="800" lang="zh-TW" dirty="0">
-                <a:solidFill>
-                  <a:srgbClr val="000000"/>
-                </a:solidFill>
-                <a:latin typeface="Arial Unicode MS"/>
-                <a:ea typeface="Arial Unicode MS"/>
-                <a:cs typeface="Arial Unicode MS"/>
-              </a:rPr>
-              <a:t>——「那個人在三十公尺外」——車子必須知道一件事：
-</a:t>
-            </a:r>
-          </a:p>
-          <a:p>
-            <a:pPr algn="l">
-              <a:spcBef>
-                <a:spcPts val="0"/>
-              </a:spcBef>
-              <a:spcAft>
-                <a:spcPts val="133"/>
-              </a:spcAft>
-            </a:pPr>
-            <a:r>
-              <a:rPr sz="800" b="1" lang="zh-TW" dirty="0">
-                <a:solidFill>
-                  <a:srgbClr val="000000"/>
-                </a:solidFill>
-                <a:latin typeface="Arial Unicode MS"/>
-                <a:ea typeface="Arial Unicode MS"/>
-                <a:cs typeface="Arial Unicode MS"/>
-              </a:rPr>
-              <a:t>相機和光達，到底差多遠、差幾度？</a:t>
-            </a:r>
-            <a:r>
-              <a:rPr sz="800" lang="zh-TW" dirty="0">
-                <a:solidFill>
-                  <a:srgbClr val="000000"/>
-                </a:solidFill>
-                <a:latin typeface="Arial Unicode MS"/>
-                <a:ea typeface="Arial Unicode MS"/>
-                <a:cs typeface="Arial Unicode MS"/>
-              </a:rPr>
-              <a:t>
-</a:t>
-            </a:r>
-          </a:p>
-          <a:p>
-            <a:pPr algn="l">
-              <a:spcBef>
-                <a:spcPts val="0"/>
-              </a:spcBef>
-              <a:spcAft>
-                <a:spcPts val="133"/>
-              </a:spcAft>
-            </a:pPr>
-            <a:r>
-              <a:rPr sz="800" lang="zh-TW" dirty="0">
-                <a:solidFill>
-                  <a:srgbClr val="000000"/>
-                </a:solidFill>
-                <a:latin typeface="Arial Unicode MS"/>
-                <a:ea typeface="Arial Unicode MS"/>
-                <a:cs typeface="Arial Unicode MS"/>
-              </a:rPr>
-              <a:t>這就是標定。分成兩種。
-</a:t>
-            </a:r>
-          </a:p>
-          <a:p>
-            <a:pPr algn="l">
-              <a:spcBef>
-                <a:spcPts val="0"/>
-              </a:spcBef>
-              <a:spcAft>
-                <a:spcPts val="133"/>
-              </a:spcAft>
-            </a:pPr>
-            <a:r>
-              <a:rPr sz="800" b="1" lang="zh-TW" dirty="0">
-                <a:solidFill>
-                  <a:srgbClr val="000000"/>
-                </a:solidFill>
-                <a:latin typeface="Arial Unicode MS"/>
-                <a:ea typeface="Arial Unicode MS"/>
-                <a:cs typeface="Arial Unicode MS"/>
-              </a:rPr>
-              <a:t>第一種叫內參，intrinsic。</a:t>
-            </a:r>
-            <a:r>
-              <a:rPr sz="800" lang="zh-TW" dirty="0">
-                <a:solidFill>
-                  <a:srgbClr val="000000"/>
-                </a:solidFill>
-                <a:latin typeface="Arial Unicode MS"/>
-                <a:ea typeface="Arial Unicode MS"/>
-                <a:cs typeface="Arial Unicode MS"/>
-              </a:rPr>
-              <a:t>講的是感測器自己內部的事：鏡頭有多扭曲、畫面的正中心到底在哪一個像素。各位拍照的時候有沒有發現，廣角鏡頭拍出來的直線會變成彎的？那個彎要先算出來、修掉，後面的計算才會對。
-</a:t>
-            </a:r>
-          </a:p>
-          <a:p>
-            <a:pPr algn="l">
-              <a:spcBef>
-                <a:spcPts val="0"/>
-              </a:spcBef>
-              <a:spcAft>
-                <a:spcPts val="133"/>
-              </a:spcAft>
-            </a:pPr>
-            <a:r>
-              <a:rPr sz="800" b="1" lang="zh-TW" dirty="0">
-                <a:solidFill>
-                  <a:srgbClr val="000000"/>
-                </a:solidFill>
-                <a:latin typeface="Arial Unicode MS"/>
-                <a:ea typeface="Arial Unicode MS"/>
-                <a:cs typeface="Arial Unicode MS"/>
-              </a:rPr>
-              <a:t>第二種叫外參，extrinsic。</a:t>
-            </a:r>
-            <a:r>
-              <a:rPr sz="800" lang="zh-TW" dirty="0">
-                <a:solidFill>
-                  <a:srgbClr val="000000"/>
-                </a:solidFill>
-                <a:latin typeface="Arial Unicode MS"/>
-                <a:ea typeface="Arial Unicode MS"/>
-                <a:cs typeface="Arial Unicode MS"/>
-              </a:rPr>
-              <a:t>講的是感測器彼此之間的關係：光達裝在車頂，相機裝在擋風玻璃後面，兩者相距六十公分、角度差三度。這六十公分和三度，要量得很準。
-</a:t>
-            </a:r>
-          </a:p>
-          <a:p>
-            <a:pPr algn="l">
-              <a:spcBef>
-                <a:spcPts val="0"/>
-              </a:spcBef>
-              <a:spcAft>
-                <a:spcPts val="133"/>
-              </a:spcAft>
-            </a:pPr>
-            <a:r>
-              <a:rPr sz="800" lang="zh-TW" dirty="0">
-                <a:solidFill>
-                  <a:srgbClr val="000000"/>
-                </a:solidFill>
-                <a:latin typeface="Arial Unicode MS"/>
-                <a:ea typeface="Arial Unicode MS"/>
-                <a:cs typeface="Arial Unicode MS"/>
-              </a:rPr>
-              <a:t>那不準會怎樣？我們算一下。
-</a:t>
-            </a:r>
-          </a:p>
-          <a:p>
-            <a:pPr algn="l">
-              <a:spcBef>
-                <a:spcPts val="0"/>
-              </a:spcBef>
-              <a:spcAft>
-                <a:spcPts val="133"/>
-              </a:spcAft>
-            </a:pPr>
-            <a:r>
-              <a:rPr sz="800" lang="zh-TW" dirty="0">
-                <a:solidFill>
-                  <a:srgbClr val="000000"/>
-                </a:solidFill>
-                <a:latin typeface="Arial Unicode MS"/>
-                <a:ea typeface="Arial Unicode MS"/>
-                <a:cs typeface="Arial Unicode MS"/>
-              </a:rPr>
-              <a:t>假設角度只差了</a:t>
-            </a:r>
-            <a:r>
-              <a:rPr sz="800" b="1" lang="zh-TW" dirty="0">
-                <a:solidFill>
-                  <a:srgbClr val="000000"/>
-                </a:solidFill>
-                <a:latin typeface="Arial Unicode MS"/>
-                <a:ea typeface="Arial Unicode MS"/>
-                <a:cs typeface="Arial Unicode MS"/>
-              </a:rPr>
-              <a:t>一度</a:t>
-            </a:r>
-            <a:r>
-              <a:rPr sz="800" lang="zh-TW" dirty="0">
-                <a:solidFill>
-                  <a:srgbClr val="000000"/>
-                </a:solidFill>
-                <a:latin typeface="Arial Unicode MS"/>
-                <a:ea typeface="Arial Unicode MS"/>
-                <a:cs typeface="Arial Unicode MS"/>
-              </a:rPr>
-              <a:t>。一度聽起來很小對不對？
-</a:t>
-            </a:r>
-          </a:p>
-          <a:p>
-            <a:pPr algn="l">
-              <a:spcBef>
-                <a:spcPts val="0"/>
-              </a:spcBef>
-              <a:spcAft>
-                <a:spcPts val="133"/>
-              </a:spcAft>
-            </a:pPr>
-            <a:r>
-              <a:rPr sz="800" lang="zh-TW" dirty="0">
-                <a:solidFill>
-                  <a:srgbClr val="000000"/>
-                </a:solidFill>
-                <a:latin typeface="Arial Unicode MS"/>
-                <a:ea typeface="Arial Unicode MS"/>
-                <a:cs typeface="Arial Unicode MS"/>
-              </a:rPr>
-              <a:t>在五十公尺外，一度張開的距離是：五十乘以一度的弧度，大約</a:t>
-            </a:r>
-            <a:r>
-              <a:rPr sz="800" b="1" lang="zh-TW" dirty="0">
-                <a:solidFill>
-                  <a:srgbClr val="000000"/>
-                </a:solidFill>
-                <a:latin typeface="Arial Unicode MS"/>
-                <a:ea typeface="Arial Unicode MS"/>
-                <a:cs typeface="Arial Unicode MS"/>
-              </a:rPr>
-              <a:t>零點八七公尺</a:t>
-            </a:r>
-            <a:r>
-              <a:rPr sz="800" lang="zh-TW" dirty="0">
-                <a:solidFill>
-                  <a:srgbClr val="000000"/>
-                </a:solidFill>
-                <a:latin typeface="Arial Unicode MS"/>
-                <a:ea typeface="Arial Unicode MS"/>
-                <a:cs typeface="Arial Unicode MS"/>
-              </a:rPr>
-              <a:t>。
-</a:t>
-            </a:r>
-          </a:p>
-          <a:p>
-            <a:pPr algn="l">
-              <a:spcBef>
-                <a:spcPts val="0"/>
-              </a:spcBef>
-              <a:spcAft>
-                <a:spcPts val="133"/>
-              </a:spcAft>
-            </a:pPr>
-            <a:r>
-              <a:rPr sz="800" lang="zh-TW" dirty="0">
-                <a:solidFill>
-                  <a:srgbClr val="000000"/>
-                </a:solidFill>
-                <a:latin typeface="Arial Unicode MS"/>
-                <a:ea typeface="Arial Unicode MS"/>
-                <a:cs typeface="Arial Unicode MS"/>
-              </a:rPr>
-              <a:t>我把這個數字寫在白板上：</a:t>
-            </a:r>
-            <a:r>
-              <a:rPr sz="800" b="1" lang="zh-TW" dirty="0">
-                <a:solidFill>
-                  <a:srgbClr val="000000"/>
-                </a:solidFill>
-                <a:latin typeface="Arial Unicode MS"/>
-                <a:ea typeface="Arial Unicode MS"/>
-                <a:cs typeface="Arial Unicode MS"/>
-              </a:rPr>
-              <a:t>差一度，五十公尺外就差了將近一公尺。</a:t>
-            </a:r>
-            <a:r>
-              <a:rPr sz="800" lang="zh-TW" dirty="0">
-                <a:solidFill>
-                  <a:srgbClr val="000000"/>
-                </a:solidFill>
-                <a:latin typeface="Arial Unicode MS"/>
-                <a:ea typeface="Arial Unicode MS"/>
-                <a:cs typeface="Arial Unicode MS"/>
-              </a:rPr>
-              <a:t>
-</a:t>
-            </a:r>
-          </a:p>
-          <a:p>
-            <a:pPr algn="l">
-              <a:spcBef>
-                <a:spcPts val="0"/>
-              </a:spcBef>
-              <a:spcAft>
-                <a:spcPts val="133"/>
-              </a:spcAft>
-            </a:pPr>
-            <a:r>
-              <a:rPr sz="800" lang="zh-TW" dirty="0">
-                <a:solidFill>
-                  <a:srgbClr val="000000"/>
-                </a:solidFill>
-                <a:latin typeface="Arial Unicode MS"/>
-                <a:ea typeface="Arial Unicode MS"/>
-                <a:cs typeface="Arial Unicode MS"/>
-              </a:rPr>
-              <a:t>一公尺是什麼概念？車道寬三點五公尺。差一公尺，你可能就把隔壁車道的車，當成自己車道上的車，然後急煞。
-</a:t>
-            </a:r>
-          </a:p>
-          <a:p>
-            <a:pPr algn="l">
-              <a:spcBef>
-                <a:spcPts val="0"/>
-              </a:spcBef>
-              <a:spcAft>
-                <a:spcPts val="133"/>
-              </a:spcAft>
-            </a:pPr>
-            <a:r>
-              <a:rPr sz="800" lang="zh-TW" dirty="0">
-                <a:solidFill>
-                  <a:srgbClr val="000000"/>
-                </a:solidFill>
-                <a:latin typeface="Arial Unicode MS"/>
-                <a:ea typeface="Arial Unicode MS"/>
-                <a:cs typeface="Arial Unicode MS"/>
-              </a:rPr>
-              <a:t>更麻煩的是：標定</a:t>
-            </a:r>
-            <a:r>
-              <a:rPr sz="800" b="1" lang="zh-TW" dirty="0">
-                <a:solidFill>
-                  <a:srgbClr val="000000"/>
-                </a:solidFill>
-                <a:latin typeface="Arial Unicode MS"/>
-                <a:ea typeface="Arial Unicode MS"/>
-                <a:cs typeface="Arial Unicode MS"/>
-              </a:rPr>
-              <a:t>會跑掉</a:t>
-            </a:r>
-            <a:r>
-              <a:rPr sz="800" lang="zh-TW" dirty="0">
-                <a:solidFill>
-                  <a:srgbClr val="000000"/>
-                </a:solidFill>
-                <a:latin typeface="Arial Unicode MS"/>
-                <a:ea typeface="Arial Unicode MS"/>
-                <a:cs typeface="Arial Unicode MS"/>
-              </a:rPr>
-              <a:t>。車子每天在路上震動，過了一個坑洞，或者擋風玻璃換過一次，外參就變了。所以真正在營運的自駕車隊，要</a:t>
-            </a:r>
-            <a:r>
-              <a:rPr sz="800" b="1" lang="zh-TW" dirty="0">
-                <a:solidFill>
-                  <a:srgbClr val="000000"/>
-                </a:solidFill>
-                <a:latin typeface="Arial Unicode MS"/>
-                <a:ea typeface="Arial Unicode MS"/>
-                <a:cs typeface="Arial Unicode MS"/>
-              </a:rPr>
-              <a:t>定期重新標定</a:t>
-            </a:r>
-            <a:r>
-              <a:rPr sz="800" lang="zh-TW" dirty="0">
-                <a:solidFill>
-                  <a:srgbClr val="000000"/>
-                </a:solidFill>
-                <a:latin typeface="Arial Unicode MS"/>
-                <a:ea typeface="Arial Unicode MS"/>
-                <a:cs typeface="Arial Unicode MS"/>
-              </a:rPr>
-              <a:t>，有些車還會自己在行駛中偷偷校正。
-</a:t>
-            </a:r>
-          </a:p>
-          <a:p>
-            <a:pPr algn="l">
-              <a:spcBef>
-                <a:spcPts val="0"/>
-              </a:spcBef>
-              <a:spcAft>
-                <a:spcPts val="133"/>
-              </a:spcAft>
-            </a:pPr>
-            <a:r>
-              <a:rPr sz="800" lang="zh-TW" dirty="0">
-                <a:solidFill>
-                  <a:srgbClr val="000000"/>
-                </a:solidFill>
-                <a:latin typeface="Arial Unicode MS"/>
-                <a:ea typeface="Arial Unicode MS"/>
-                <a:cs typeface="Arial Unicode MS"/>
-              </a:rPr>
-              <a:t>這也是為什麼期末專題如果各位要做感測器融合，第一個卡住你們的一定是標定，不是演算法。</a:t>
+                <a:spcPts val="200"/>
+              </a:spcAft>
+            </a:pPr>
+            <a:r>
+              <a:rPr sz="1200" lang="zh-TW" dirty="0">
+                <a:solidFill>
+                  <a:srgbClr val="000000"/>
+                </a:solidFill>
+                <a:latin typeface="Arial Unicode MS"/>
+                <a:ea typeface="Arial Unicode MS"/>
+                <a:cs typeface="Arial Unicode MS"/>
+              </a:rPr>
+              <a:t>第三組，這一組規格表上常常找不到，但它決定了你的系統能不能用。</a:t>
             </a:r>
           </a:p>
         </p:txBody>
@@ -2607,11 +2498,11 @@
                 <a:spcPts val="0"/>
               </a:spcBef>
               <a:spcAft>
-                <a:spcPts val="142"/>
-              </a:spcAft>
-            </a:pPr>
-            <a:r>
-              <a:rPr sz="850" b="1" lang="zh-TW" dirty="0">
+                <a:spcPts val="133"/>
+              </a:spcAft>
+            </a:pPr>
+            <a:r>
+              <a:rPr sz="800" b="1" lang="zh-TW" dirty="0">
                 <a:solidFill>
                   <a:srgbClr val="000000"/>
                 </a:solidFill>
@@ -2622,7 +2513,7 @@
               <a:t>▍這一張要做什麼</a:t>
             </a:r>
             <a:r>
-              <a:rPr sz="850" lang="zh-TW" dirty="0">
+              <a:rPr sz="800" lang="zh-TW" dirty="0">
                 <a:solidFill>
                   <a:srgbClr val="000000"/>
                 </a:solidFill>
@@ -2640,19 +2531,19 @@
                 <a:spcPts val="0"/>
               </a:spcBef>
               <a:spcAft>
-                <a:spcPts val="142"/>
-              </a:spcAft>
-            </a:pPr>
-            <a:r>
-              <a:rPr sz="850" lang="zh-TW" dirty="0">
-                <a:solidFill>
-                  <a:srgbClr val="000000"/>
-                </a:solidFill>
-                <a:latin typeface="Arial Unicode MS"/>
-                <a:ea typeface="Arial Unicode MS"/>
-                <a:cs typeface="Arial Unicode MS"/>
-              </a:rPr>
-              <a:t>時間同步：兩隻眼睛要看的是同一個瞬間。
+                <a:spcPts val="133"/>
+              </a:spcAft>
+            </a:pPr>
+            <a:r>
+              <a:rPr sz="800" lang="zh-TW" dirty="0">
+                <a:solidFill>
+                  <a:srgbClr val="000000"/>
+                </a:solidFill>
+                <a:latin typeface="Arial Unicode MS"/>
+                <a:ea typeface="Arial Unicode MS"/>
+                <a:cs typeface="Arial Unicode MS"/>
+              </a:rPr>
+              <a:t>標定：告訴車子每一隻眼睛裝在哪、朝哪看。
 </a:t>
             </a:r>
           </a:p>
@@ -2662,11 +2553,11 @@
                 <a:spcPts val="0"/>
               </a:spcBef>
               <a:spcAft>
-                <a:spcPts val="142"/>
-              </a:spcAft>
-            </a:pPr>
-            <a:r>
-              <a:rPr sz="850" b="1" lang="zh-TW" dirty="0">
+                <a:spcPts val="133"/>
+              </a:spcAft>
+            </a:pPr>
+            <a:r>
+              <a:rPr sz="800" b="1" lang="zh-TW" dirty="0">
                 <a:solidFill>
                   <a:srgbClr val="000000"/>
                 </a:solidFill>
@@ -2677,7 +2568,7 @@
               <a:t>▍畫面上圈這裡</a:t>
             </a:r>
             <a:r>
-              <a:rPr sz="850" lang="zh-TW" dirty="0">
+              <a:rPr sz="800" lang="zh-TW" dirty="0">
                 <a:solidFill>
                   <a:srgbClr val="000000"/>
                 </a:solidFill>
@@ -2695,19 +2586,19 @@
                 <a:spcPts val="0"/>
               </a:spcBef>
               <a:spcAft>
-                <a:spcPts val="142"/>
-              </a:spcAft>
-            </a:pPr>
-            <a:r>
-              <a:rPr sz="850" lang="zh-TW" dirty="0">
-                <a:solidFill>
-                  <a:srgbClr val="000000"/>
-                </a:solidFill>
-                <a:latin typeface="Arial Unicode MS"/>
-                <a:ea typeface="Arial Unicode MS"/>
-                <a:cs typeface="Arial Unicode MS"/>
-              </a:rPr>
-              <a:t>圈上面算出來的 50 毫秒與半公尺，再指圖裡 Additional Programmability 的 Multi-sensor phase lock。
+                <a:spcPts val="133"/>
+              </a:spcAft>
+            </a:pPr>
+            <a:r>
+              <a:rPr sz="800" lang="zh-TW" dirty="0">
+                <a:solidFill>
+                  <a:srgbClr val="000000"/>
+                </a:solidFill>
+                <a:latin typeface="Arial Unicode MS"/>
+                <a:ea typeface="Arial Unicode MS"/>
+                <a:cs typeface="Arial Unicode MS"/>
+              </a:rPr>
+              <a:t>一步一步圈，最後圈偏差角度造成的位置誤差那個數字。
 </a:t>
             </a:r>
           </a:p>
@@ -2717,11 +2608,11 @@
                 <a:spcPts val="0"/>
               </a:spcBef>
               <a:spcAft>
-                <a:spcPts val="142"/>
-              </a:spcAft>
-            </a:pPr>
-            <a:r>
-              <a:rPr sz="850" b="1" lang="zh-TW" dirty="0">
+                <a:spcPts val="133"/>
+              </a:spcAft>
+            </a:pPr>
+            <a:r>
+              <a:rPr sz="800" b="1" lang="zh-TW" dirty="0">
                 <a:solidFill>
                   <a:srgbClr val="000000"/>
                 </a:solidFill>
@@ -2732,7 +2623,7 @@
               <a:t>▍以下照著唸</a:t>
             </a:r>
             <a:r>
-              <a:rPr sz="850" lang="zh-TW" dirty="0">
+              <a:rPr sz="800" lang="zh-TW" dirty="0">
                 <a:solidFill>
                   <a:srgbClr val="000000"/>
                 </a:solidFill>
@@ -2750,33 +2641,55 @@
                 <a:spcPts val="0"/>
               </a:spcBef>
               <a:spcAft>
-                <a:spcPts val="142"/>
-              </a:spcAft>
-            </a:pPr>
-            <a:r>
-              <a:rPr sz="850" lang="zh-TW" dirty="0">
-                <a:solidFill>
-                  <a:srgbClr val="000000"/>
-                </a:solidFill>
-                <a:latin typeface="Arial Unicode MS"/>
-                <a:ea typeface="Arial Unicode MS"/>
-                <a:cs typeface="Arial Unicode MS"/>
-              </a:rPr>
-              <a:t>最後一件事是</a:t>
-            </a:r>
-            <a:r>
-              <a:rPr sz="850" b="1" lang="zh-TW" dirty="0">
-                <a:solidFill>
-                  <a:srgbClr val="000000"/>
-                </a:solidFill>
-                <a:latin typeface="Arial Unicode MS"/>
-                <a:ea typeface="Arial Unicode MS"/>
-                <a:cs typeface="Arial Unicode MS"/>
-              </a:rPr>
-              <a:t>時間同步</a:t>
-            </a:r>
-            <a:r>
-              <a:rPr sz="850" lang="zh-TW" dirty="0">
+                <a:spcPts val="133"/>
+              </a:spcAft>
+            </a:pPr>
+            <a:r>
+              <a:rPr sz="800" lang="zh-TW" dirty="0">
+                <a:solidFill>
+                  <a:srgbClr val="000000"/>
+                </a:solidFill>
+                <a:latin typeface="Arial Unicode MS"/>
+                <a:ea typeface="Arial Unicode MS"/>
+                <a:cs typeface="Arial Unicode MS"/>
+              </a:rPr>
+              <a:t>現在講一件規格表上</a:t>
+            </a:r>
+            <a:r>
+              <a:rPr sz="800" b="1" lang="zh-TW" dirty="0">
+                <a:solidFill>
+                  <a:srgbClr val="000000"/>
+                </a:solidFill>
+                <a:latin typeface="Arial Unicode MS"/>
+                <a:ea typeface="Arial Unicode MS"/>
+                <a:cs typeface="Arial Unicode MS"/>
+              </a:rPr>
+              <a:t>常常找不到</a:t>
+            </a:r>
+            <a:r>
+              <a:rPr sz="800" lang="zh-TW" dirty="0">
+                <a:solidFill>
+                  <a:srgbClr val="000000"/>
+                </a:solidFill>
+                <a:latin typeface="Arial Unicode MS"/>
+                <a:ea typeface="Arial Unicode MS"/>
+                <a:cs typeface="Arial Unicode MS"/>
+              </a:rPr>
+              <a:t>，但是害人最慘的事：</a:t>
+            </a:r>
+            <a:r>
+              <a:rPr sz="800" b="1" lang="zh-TW" dirty="0">
+                <a:solidFill>
+                  <a:srgbClr val="000000"/>
+                </a:solidFill>
+                <a:latin typeface="Arial Unicode MS"/>
+                <a:ea typeface="Arial Unicode MS"/>
+                <a:cs typeface="Arial Unicode MS"/>
+              </a:rPr>
+              <a:t>標定</a:t>
+            </a:r>
+            <a:r>
+              <a:rPr sz="800" lang="zh-TW" dirty="0">
                 <a:solidFill>
                   <a:srgbClr val="000000"/>
                 </a:solidFill>
@@ -2794,19 +2707,41 @@
                 <a:spcPts val="0"/>
               </a:spcBef>
               <a:spcAft>
-                <a:spcPts val="142"/>
-              </a:spcAft>
-            </a:pPr>
-            <a:r>
-              <a:rPr sz="850" lang="zh-TW" dirty="0">
-                <a:solidFill>
-                  <a:srgbClr val="000000"/>
-                </a:solidFill>
-                <a:latin typeface="Arial Unicode MS"/>
-                <a:ea typeface="Arial Unicode MS"/>
-                <a:cs typeface="Arial Unicode MS"/>
-              </a:rPr>
-              <a:t>剛剛講的標定是「空間」上要對準。這一件是「時間」上要對準。
+                <a:spcPts val="133"/>
+              </a:spcAft>
+            </a:pPr>
+            <a:r>
+              <a:rPr sz="800" lang="zh-TW" dirty="0">
+                <a:solidFill>
+                  <a:srgbClr val="000000"/>
+                </a:solidFill>
+                <a:latin typeface="Arial Unicode MS"/>
+                <a:ea typeface="Arial Unicode MS"/>
+                <a:cs typeface="Arial Unicode MS"/>
+              </a:rPr>
+              <a:t>先講問題。一台車上有相機、有光達。相機說「前面有一個人」，光達說「前面三十公尺有一團東西」。要把這兩句話</a:t>
+            </a:r>
+            <a:r>
+              <a:rPr sz="800" b="1" lang="zh-TW" dirty="0">
+                <a:solidFill>
+                  <a:srgbClr val="000000"/>
+                </a:solidFill>
+                <a:latin typeface="Arial Unicode MS"/>
+                <a:ea typeface="Arial Unicode MS"/>
+                <a:cs typeface="Arial Unicode MS"/>
+              </a:rPr>
+              <a:t>合成一句</a:t>
+            </a:r>
+            <a:r>
+              <a:rPr sz="800" lang="zh-TW" dirty="0">
+                <a:solidFill>
+                  <a:srgbClr val="000000"/>
+                </a:solidFill>
+                <a:latin typeface="Arial Unicode MS"/>
+                <a:ea typeface="Arial Unicode MS"/>
+                <a:cs typeface="Arial Unicode MS"/>
+              </a:rPr>
+              <a:t>——「那個人在三十公尺外」——車子必須知道一件事：
 </a:t>
             </a:r>
           </a:p>
@@ -2816,55 +2751,22 @@
                 <a:spcPts val="0"/>
               </a:spcBef>
               <a:spcAft>
-                <a:spcPts val="142"/>
-              </a:spcAft>
-            </a:pPr>
-            <a:r>
-              <a:rPr sz="850" lang="zh-TW" dirty="0">
-                <a:solidFill>
-                  <a:srgbClr val="000000"/>
-                </a:solidFill>
-                <a:latin typeface="Arial Unicode MS"/>
-                <a:ea typeface="Arial Unicode MS"/>
-                <a:cs typeface="Arial Unicode MS"/>
-              </a:rPr>
-              <a:t>想想看：光達一秒轉十圈，相機一秒拍六十張。這兩個東西的節奏完全不一樣。
-</a:t>
-            </a:r>
-          </a:p>
-          <a:p>
-            <a:pPr algn="l">
-              <a:spcBef>
-                <a:spcPts val="0"/>
-              </a:spcBef>
-              <a:spcAft>
-                <a:spcPts val="142"/>
-              </a:spcAft>
-            </a:pPr>
-            <a:r>
-              <a:rPr sz="850" lang="zh-TW" dirty="0">
-                <a:solidFill>
-                  <a:srgbClr val="000000"/>
-                </a:solidFill>
-                <a:latin typeface="Arial Unicode MS"/>
-                <a:ea typeface="Arial Unicode MS"/>
-                <a:cs typeface="Arial Unicode MS"/>
-              </a:rPr>
-              <a:t>假設車子現在收到一張相機的畫面，還有一圈光達的點雲，要把它們合起來。問題是——</a:t>
-            </a:r>
-            <a:r>
-              <a:rPr sz="850" b="1" lang="zh-TW" dirty="0">
-                <a:solidFill>
-                  <a:srgbClr val="000000"/>
-                </a:solidFill>
-                <a:latin typeface="Arial Unicode MS"/>
-                <a:ea typeface="Arial Unicode MS"/>
-                <a:cs typeface="Arial Unicode MS"/>
-              </a:rPr>
-              <a:t>這兩份資料是同一個瞬間的嗎？</a:t>
-            </a:r>
-            <a:r>
-              <a:rPr sz="850" lang="zh-TW" dirty="0">
+                <a:spcPts val="133"/>
+              </a:spcAft>
+            </a:pPr>
+            <a:r>
+              <a:rPr sz="800" b="1" lang="zh-TW" dirty="0">
+                <a:solidFill>
+                  <a:srgbClr val="000000"/>
+                </a:solidFill>
+                <a:latin typeface="Arial Unicode MS"/>
+                <a:ea typeface="Arial Unicode MS"/>
+                <a:cs typeface="Arial Unicode MS"/>
+              </a:rPr>
+              <a:t>相機和光達，到底差多遠、差幾度？</a:t>
+            </a:r>
+            <a:r>
+              <a:rPr sz="800" lang="zh-TW" dirty="0">
                 <a:solidFill>
                   <a:srgbClr val="000000"/>
                 </a:solidFill>
@@ -2882,33 +2784,187 @@
                 <a:spcPts val="0"/>
               </a:spcBef>
               <a:spcAft>
-                <a:spcPts val="142"/>
-              </a:spcAft>
-            </a:pPr>
-            <a:r>
-              <a:rPr sz="850" lang="zh-TW" dirty="0">
-                <a:solidFill>
-                  <a:srgbClr val="000000"/>
-                </a:solidFill>
-                <a:latin typeface="Arial Unicode MS"/>
-                <a:ea typeface="Arial Unicode MS"/>
-                <a:cs typeface="Arial Unicode MS"/>
-              </a:rPr>
-              <a:t>如果沒有處理，它們可能差到五十毫秒。時速四十的時候，五十毫秒車子走了</a:t>
-            </a:r>
-            <a:r>
-              <a:rPr sz="850" b="1" lang="zh-TW" dirty="0">
-                <a:solidFill>
-                  <a:srgbClr val="000000"/>
-                </a:solidFill>
-                <a:latin typeface="Arial Unicode MS"/>
-                <a:ea typeface="Arial Unicode MS"/>
-                <a:cs typeface="Arial Unicode MS"/>
-              </a:rPr>
-              <a:t>零點五六公尺</a:t>
-            </a:r>
-            <a:r>
-              <a:rPr sz="850" lang="zh-TW" dirty="0">
+                <a:spcPts val="133"/>
+              </a:spcAft>
+            </a:pPr>
+            <a:r>
+              <a:rPr sz="800" lang="zh-TW" dirty="0">
+                <a:solidFill>
+                  <a:srgbClr val="000000"/>
+                </a:solidFill>
+                <a:latin typeface="Arial Unicode MS"/>
+                <a:ea typeface="Arial Unicode MS"/>
+                <a:cs typeface="Arial Unicode MS"/>
+              </a:rPr>
+              <a:t>這就是標定。分成兩種。
+</a:t>
+            </a:r>
+          </a:p>
+          <a:p>
+            <a:pPr algn="l">
+              <a:spcBef>
+                <a:spcPts val="0"/>
+              </a:spcBef>
+              <a:spcAft>
+                <a:spcPts val="133"/>
+              </a:spcAft>
+            </a:pPr>
+            <a:r>
+              <a:rPr sz="800" b="1" lang="zh-TW" dirty="0">
+                <a:solidFill>
+                  <a:srgbClr val="000000"/>
+                </a:solidFill>
+                <a:latin typeface="Arial Unicode MS"/>
+                <a:ea typeface="Arial Unicode MS"/>
+                <a:cs typeface="Arial Unicode MS"/>
+              </a:rPr>
+              <a:t>第一種叫內參，intrinsic。</a:t>
+            </a:r>
+            <a:r>
+              <a:rPr sz="800" lang="zh-TW" dirty="0">
+                <a:solidFill>
+                  <a:srgbClr val="000000"/>
+                </a:solidFill>
+                <a:latin typeface="Arial Unicode MS"/>
+                <a:ea typeface="Arial Unicode MS"/>
+                <a:cs typeface="Arial Unicode MS"/>
+              </a:rPr>
+              <a:t>講的是感測器自己內部的事：鏡頭有多扭曲、畫面的正中心到底在哪一個像素。各位拍照的時候有沒有發現，廣角鏡頭拍出來的直線會變成彎的？那個彎要先算出來、修掉，後面的計算才會對。
+</a:t>
+            </a:r>
+          </a:p>
+          <a:p>
+            <a:pPr algn="l">
+              <a:spcBef>
+                <a:spcPts val="0"/>
+              </a:spcBef>
+              <a:spcAft>
+                <a:spcPts val="133"/>
+              </a:spcAft>
+            </a:pPr>
+            <a:r>
+              <a:rPr sz="800" b="1" lang="zh-TW" dirty="0">
+                <a:solidFill>
+                  <a:srgbClr val="000000"/>
+                </a:solidFill>
+                <a:latin typeface="Arial Unicode MS"/>
+                <a:ea typeface="Arial Unicode MS"/>
+                <a:cs typeface="Arial Unicode MS"/>
+              </a:rPr>
+              <a:t>第二種叫外參，extrinsic。</a:t>
+            </a:r>
+            <a:r>
+              <a:rPr sz="800" lang="zh-TW" dirty="0">
+                <a:solidFill>
+                  <a:srgbClr val="000000"/>
+                </a:solidFill>
+                <a:latin typeface="Arial Unicode MS"/>
+                <a:ea typeface="Arial Unicode MS"/>
+                <a:cs typeface="Arial Unicode MS"/>
+              </a:rPr>
+              <a:t>講的是感測器彼此之間的關係：光達裝在車頂，相機裝在擋風玻璃後面，兩者相距六十公分、角度差三度。這六十公分和三度，要量得很準。
+</a:t>
+            </a:r>
+          </a:p>
+          <a:p>
+            <a:pPr algn="l">
+              <a:spcBef>
+                <a:spcPts val="0"/>
+              </a:spcBef>
+              <a:spcAft>
+                <a:spcPts val="133"/>
+              </a:spcAft>
+            </a:pPr>
+            <a:r>
+              <a:rPr sz="800" lang="zh-TW" dirty="0">
+                <a:solidFill>
+                  <a:srgbClr val="000000"/>
+                </a:solidFill>
+                <a:latin typeface="Arial Unicode MS"/>
+                <a:ea typeface="Arial Unicode MS"/>
+                <a:cs typeface="Arial Unicode MS"/>
+              </a:rPr>
+              <a:t>那不準會怎樣？我們算一下。
+</a:t>
+            </a:r>
+          </a:p>
+          <a:p>
+            <a:pPr algn="l">
+              <a:spcBef>
+                <a:spcPts val="0"/>
+              </a:spcBef>
+              <a:spcAft>
+                <a:spcPts val="133"/>
+              </a:spcAft>
+            </a:pPr>
+            <a:r>
+              <a:rPr sz="800" lang="zh-TW" dirty="0">
+                <a:solidFill>
+                  <a:srgbClr val="000000"/>
+                </a:solidFill>
+                <a:latin typeface="Arial Unicode MS"/>
+                <a:ea typeface="Arial Unicode MS"/>
+                <a:cs typeface="Arial Unicode MS"/>
+              </a:rPr>
+              <a:t>假設角度只差了</a:t>
+            </a:r>
+            <a:r>
+              <a:rPr sz="800" b="1" lang="zh-TW" dirty="0">
+                <a:solidFill>
+                  <a:srgbClr val="000000"/>
+                </a:solidFill>
+                <a:latin typeface="Arial Unicode MS"/>
+                <a:ea typeface="Arial Unicode MS"/>
+                <a:cs typeface="Arial Unicode MS"/>
+              </a:rPr>
+              <a:t>一度</a:t>
+            </a:r>
+            <a:r>
+              <a:rPr sz="800" lang="zh-TW" dirty="0">
+                <a:solidFill>
+                  <a:srgbClr val="000000"/>
+                </a:solidFill>
+                <a:latin typeface="Arial Unicode MS"/>
+                <a:ea typeface="Arial Unicode MS"/>
+                <a:cs typeface="Arial Unicode MS"/>
+              </a:rPr>
+              <a:t>。一度聽起來很小對不對？
+</a:t>
+            </a:r>
+          </a:p>
+          <a:p>
+            <a:pPr algn="l">
+              <a:spcBef>
+                <a:spcPts val="0"/>
+              </a:spcBef>
+              <a:spcAft>
+                <a:spcPts val="133"/>
+              </a:spcAft>
+            </a:pPr>
+            <a:r>
+              <a:rPr sz="800" lang="zh-TW" dirty="0">
+                <a:solidFill>
+                  <a:srgbClr val="000000"/>
+                </a:solidFill>
+                <a:latin typeface="Arial Unicode MS"/>
+                <a:ea typeface="Arial Unicode MS"/>
+                <a:cs typeface="Arial Unicode MS"/>
+              </a:rPr>
+              <a:t>在五十公尺外，一度張開的距離是：五十乘以一度的弧度，大約</a:t>
+            </a:r>
+            <a:r>
+              <a:rPr sz="800" b="1" lang="zh-TW" dirty="0">
+                <a:solidFill>
+                  <a:srgbClr val="000000"/>
+                </a:solidFill>
+                <a:latin typeface="Arial Unicode MS"/>
+                <a:ea typeface="Arial Unicode MS"/>
+                <a:cs typeface="Arial Unicode MS"/>
+              </a:rPr>
+              <a:t>零點八七公尺</a:t>
+            </a:r>
+            <a:r>
+              <a:rPr sz="800" lang="zh-TW" dirty="0">
                 <a:solidFill>
                   <a:srgbClr val="000000"/>
                 </a:solidFill>
@@ -2926,41 +2982,41 @@
                 <a:spcPts val="0"/>
               </a:spcBef>
               <a:spcAft>
-                <a:spcPts val="142"/>
-              </a:spcAft>
-            </a:pPr>
-            <a:r>
-              <a:rPr sz="850" lang="zh-TW" dirty="0">
-                <a:solidFill>
-                  <a:srgbClr val="000000"/>
-                </a:solidFill>
-                <a:latin typeface="Arial Unicode MS"/>
-                <a:ea typeface="Arial Unicode MS"/>
-                <a:cs typeface="Arial Unicode MS"/>
-              </a:rPr>
-              <a:t>所以你會把相機在 A 點看到的人，跟光達在 B 點量到的距離配在一起，得到一個</a:t>
-            </a:r>
-            <a:r>
-              <a:rPr sz="850" b="1" lang="zh-TW" dirty="0">
-                <a:solidFill>
-                  <a:srgbClr val="000000"/>
-                </a:solidFill>
-                <a:latin typeface="Arial Unicode MS"/>
-                <a:ea typeface="Arial Unicode MS"/>
-                <a:cs typeface="Arial Unicode MS"/>
-              </a:rPr>
-              <a:t>根本不存在的位置</a:t>
-            </a:r>
-            <a:r>
-              <a:rPr sz="850" lang="zh-TW" dirty="0">
-                <a:solidFill>
-                  <a:srgbClr val="000000"/>
-                </a:solidFill>
-                <a:latin typeface="Arial Unicode MS"/>
-                <a:ea typeface="Arial Unicode MS"/>
-                <a:cs typeface="Arial Unicode MS"/>
-              </a:rPr>
-              <a:t>。
+                <a:spcPts val="133"/>
+              </a:spcAft>
+            </a:pPr>
+            <a:r>
+              <a:rPr sz="800" lang="zh-TW" dirty="0">
+                <a:solidFill>
+                  <a:srgbClr val="000000"/>
+                </a:solidFill>
+                <a:latin typeface="Arial Unicode MS"/>
+                <a:ea typeface="Arial Unicode MS"/>
+                <a:cs typeface="Arial Unicode MS"/>
+              </a:rPr>
+              <a:t>我把這個數字寫在白板上：</a:t>
+            </a:r>
+            <a:r>
+              <a:rPr sz="800" b="1" lang="zh-TW" dirty="0">
+                <a:solidFill>
+                  <a:srgbClr val="000000"/>
+                </a:solidFill>
+                <a:latin typeface="Arial Unicode MS"/>
+                <a:ea typeface="Arial Unicode MS"/>
+                <a:cs typeface="Arial Unicode MS"/>
+              </a:rPr>
+              <a:t>差一度，五十公尺外就差了將近一公尺。</a:t>
+            </a:r>
+            <a:r>
+              <a:rPr sz="800" lang="zh-TW" dirty="0">
+                <a:solidFill>
+                  <a:srgbClr val="000000"/>
+                </a:solidFill>
+                <a:latin typeface="Arial Unicode MS"/>
+                <a:ea typeface="Arial Unicode MS"/>
+                <a:cs typeface="Arial Unicode MS"/>
+              </a:rPr>
+              <a:t>
 </a:t>
             </a:r>
           </a:p>
@@ -2970,19 +3026,19 @@
                 <a:spcPts val="0"/>
               </a:spcBef>
               <a:spcAft>
-                <a:spcPts val="142"/>
-              </a:spcAft>
-            </a:pPr>
-            <a:r>
-              <a:rPr sz="850" lang="zh-TW" dirty="0">
-                <a:solidFill>
-                  <a:srgbClr val="000000"/>
-                </a:solidFill>
-                <a:latin typeface="Arial Unicode MS"/>
-                <a:ea typeface="Arial Unicode MS"/>
-                <a:cs typeface="Arial Unicode MS"/>
-              </a:rPr>
-              <a:t>而且這個誤差會跟剛剛的標定誤差疊加，兩個加起來就很可觀。
+                <a:spcPts val="133"/>
+              </a:spcAft>
+            </a:pPr>
+            <a:r>
+              <a:rPr sz="800" lang="zh-TW" dirty="0">
+                <a:solidFill>
+                  <a:srgbClr val="000000"/>
+                </a:solidFill>
+                <a:latin typeface="Arial Unicode MS"/>
+                <a:ea typeface="Arial Unicode MS"/>
+                <a:cs typeface="Arial Unicode MS"/>
+              </a:rPr>
+              <a:t>一公尺是什麼概念？車道寬三點五公尺。差一公尺，你可能就把隔壁車道的車，當成自己車道上的車，然後急煞。
 </a:t>
             </a:r>
           </a:p>
@@ -2992,85 +3048,63 @@
                 <a:spcPts val="0"/>
               </a:spcBef>
               <a:spcAft>
-                <a:spcPts val="142"/>
-              </a:spcAft>
-            </a:pPr>
-            <a:r>
-              <a:rPr sz="850" lang="zh-TW" dirty="0">
-                <a:solidFill>
-                  <a:srgbClr val="000000"/>
-                </a:solidFill>
-                <a:latin typeface="Arial Unicode MS"/>
-                <a:ea typeface="Arial Unicode MS"/>
-                <a:cs typeface="Arial Unicode MS"/>
-              </a:rPr>
-              <a:t>解法是讓每一顆感測器都在資料上蓋一個</a:t>
-            </a:r>
-            <a:r>
-              <a:rPr sz="850" b="1" lang="zh-TW" dirty="0">
-                <a:solidFill>
-                  <a:srgbClr val="000000"/>
-                </a:solidFill>
-                <a:latin typeface="Arial Unicode MS"/>
-                <a:ea typeface="Arial Unicode MS"/>
-                <a:cs typeface="Arial Unicode MS"/>
-              </a:rPr>
-              <a:t>時間戳</a:t>
-            </a:r>
-            <a:r>
-              <a:rPr sz="850" lang="zh-TW" dirty="0">
-                <a:solidFill>
-                  <a:srgbClr val="000000"/>
-                </a:solidFill>
-                <a:latin typeface="Arial Unicode MS"/>
-                <a:ea typeface="Arial Unicode MS"/>
-                <a:cs typeface="Arial Unicode MS"/>
-              </a:rPr>
-              <a:t>，而且全車用同一個時鐘。高階一點的做法，是讓光達轉到某個角度的時候，剛好跟相機的快門</a:t>
-            </a:r>
-            <a:r>
-              <a:rPr sz="850" b="1" lang="zh-TW" dirty="0">
-                <a:solidFill>
-                  <a:srgbClr val="000000"/>
-                </a:solidFill>
-                <a:latin typeface="Arial Unicode MS"/>
-                <a:ea typeface="Arial Unicode MS"/>
-                <a:cs typeface="Arial Unicode MS"/>
-              </a:rPr>
-              <a:t>對在一起</a:t>
-            </a:r>
-            <a:r>
-              <a:rPr sz="850" lang="zh-TW" dirty="0">
-                <a:solidFill>
-                  <a:srgbClr val="000000"/>
-                </a:solidFill>
-                <a:latin typeface="Arial Unicode MS"/>
-                <a:ea typeface="Arial Unicode MS"/>
-                <a:cs typeface="Arial Unicode MS"/>
-              </a:rPr>
-              <a:t>。OS1 規格表上 Additional Programmability 的</a:t>
-            </a:r>
-            <a:r>
-              <a:rPr sz="850" b="1" lang="zh-TW" dirty="0">
-                <a:solidFill>
-                  <a:srgbClr val="000000"/>
-                </a:solidFill>
-                <a:latin typeface="Arial Unicode MS"/>
-                <a:ea typeface="Arial Unicode MS"/>
-                <a:cs typeface="Arial Unicode MS"/>
-              </a:rPr>
-              <a:t>第一條</a:t>
-            </a:r>
-            <a:r>
-              <a:rPr sz="850" lang="zh-TW" dirty="0">
-                <a:solidFill>
-                  <a:srgbClr val="000000"/>
-                </a:solidFill>
-                <a:latin typeface="Arial Unicode MS"/>
-                <a:ea typeface="Arial Unicode MS"/>
-                <a:cs typeface="Arial Unicode MS"/>
-              </a:rPr>
-              <a:t>，multi-sensor phase lock，講的就是這件事。
+                <a:spcPts val="133"/>
+              </a:spcAft>
+            </a:pPr>
+            <a:r>
+              <a:rPr sz="800" lang="zh-TW" dirty="0">
+                <a:solidFill>
+                  <a:srgbClr val="000000"/>
+                </a:solidFill>
+                <a:latin typeface="Arial Unicode MS"/>
+                <a:ea typeface="Arial Unicode MS"/>
+                <a:cs typeface="Arial Unicode MS"/>
+              </a:rPr>
+              <a:t>更麻煩的是：標定</a:t>
+            </a:r>
+            <a:r>
+              <a:rPr sz="800" b="1" lang="zh-TW" dirty="0">
+                <a:solidFill>
+                  <a:srgbClr val="000000"/>
+                </a:solidFill>
+                <a:latin typeface="Arial Unicode MS"/>
+                <a:ea typeface="Arial Unicode MS"/>
+                <a:cs typeface="Arial Unicode MS"/>
+              </a:rPr>
+              <a:t>會跑掉</a:t>
+            </a:r>
+            <a:r>
+              <a:rPr sz="800" lang="zh-TW" dirty="0">
+                <a:solidFill>
+                  <a:srgbClr val="000000"/>
+                </a:solidFill>
+                <a:latin typeface="Arial Unicode MS"/>
+                <a:ea typeface="Arial Unicode MS"/>
+                <a:cs typeface="Arial Unicode MS"/>
+              </a:rPr>
+              <a:t>。車子每天在路上震動，過了一個坑洞，或者擋風玻璃換過一次，外參就變了。所以真正在營運的自駕車隊，要</a:t>
+            </a:r>
+            <a:r>
+              <a:rPr sz="800" b="1" lang="zh-TW" dirty="0">
+                <a:solidFill>
+                  <a:srgbClr val="000000"/>
+                </a:solidFill>
+                <a:latin typeface="Arial Unicode MS"/>
+                <a:ea typeface="Arial Unicode MS"/>
+                <a:cs typeface="Arial Unicode MS"/>
+              </a:rPr>
+              <a:t>定期重新標定</a:t>
+            </a:r>
+            <a:r>
+              <a:rPr sz="800" lang="zh-TW" dirty="0">
+                <a:solidFill>
+                  <a:srgbClr val="000000"/>
+                </a:solidFill>
+                <a:latin typeface="Arial Unicode MS"/>
+                <a:ea typeface="Arial Unicode MS"/>
+                <a:cs typeface="Arial Unicode MS"/>
+              </a:rPr>
+              <a:t>，有些車還會自己在行駛中偷偷校正。
 </a:t>
             </a:r>
           </a:p>
@@ -3080,107 +3114,19 @@
                 <a:spcPts val="0"/>
               </a:spcBef>
               <a:spcAft>
-                <a:spcPts val="142"/>
-              </a:spcAft>
-            </a:pPr>
-            <a:r>
-              <a:rPr sz="850" lang="zh-TW" dirty="0">
-                <a:solidFill>
-                  <a:srgbClr val="000000"/>
-                </a:solidFill>
-                <a:latin typeface="Arial Unicode MS"/>
-                <a:ea typeface="Arial Unicode MS"/>
-                <a:cs typeface="Arial Unicode MS"/>
-              </a:rPr>
-              <a:t>所以請各位記住：</a:t>
-            </a:r>
-            <a:r>
-              <a:rPr sz="850" b="1" lang="zh-TW" dirty="0">
-                <a:solidFill>
-                  <a:srgbClr val="000000"/>
-                </a:solidFill>
-                <a:latin typeface="Arial Unicode MS"/>
-                <a:ea typeface="Arial Unicode MS"/>
-                <a:cs typeface="Arial Unicode MS"/>
-              </a:rPr>
-              <a:t>兩顆感測器各自都是好的，不代表合起來是對的。</a:t>
-            </a:r>
-            <a:r>
-              <a:rPr sz="850" lang="zh-TW" dirty="0">
-                <a:solidFill>
-                  <a:srgbClr val="000000"/>
-                </a:solidFill>
-                <a:latin typeface="Arial Unicode MS"/>
-                <a:ea typeface="Arial Unicode MS"/>
-                <a:cs typeface="Arial Unicode MS"/>
-              </a:rPr>
-              <a:t>中間還有標定和同步這兩關。
-</a:t>
-            </a:r>
-          </a:p>
-          <a:p>
-            <a:pPr algn="l">
-              <a:spcBef>
-                <a:spcPts val="0"/>
-              </a:spcBef>
-              <a:spcAft>
-                <a:spcPts val="142"/>
-              </a:spcAft>
-            </a:pPr>
-            <a:r>
-              <a:rPr sz="850" lang="zh-TW" dirty="0">
-                <a:solidFill>
-                  <a:srgbClr val="000000"/>
-                </a:solidFill>
-                <a:latin typeface="Arial Unicode MS"/>
-                <a:ea typeface="Arial Unicode MS"/>
-                <a:cs typeface="Arial Unicode MS"/>
-              </a:rPr>
-              <a:t>這兩關在規格表上常常只有一兩行，甚至完全沒有，可是實際做系統的時候，它們吃掉的時間比選型還多。
-</a:t>
-            </a:r>
-          </a:p>
-          <a:p>
-            <a:pPr algn="l">
-              <a:spcBef>
-                <a:spcPts val="0"/>
-              </a:spcBef>
-              <a:spcAft>
-                <a:spcPts val="142"/>
-              </a:spcAft>
-            </a:pPr>
-            <a:r>
-              <a:rPr sz="850" lang="zh-TW" dirty="0">
-                <a:solidFill>
-                  <a:srgbClr val="000000"/>
-                </a:solidFill>
-                <a:latin typeface="Arial Unicode MS"/>
-                <a:ea typeface="Arial Unicode MS"/>
-                <a:cs typeface="Arial Unicode MS"/>
-              </a:rPr>
-              <a:t>下一節我們回到工具上，把今天和上一節講的東西，全部用在一件事上：</a:t>
-            </a:r>
-            <a:r>
-              <a:rPr sz="850" b="1" lang="zh-TW" dirty="0">
-                <a:solidFill>
-                  <a:srgbClr val="000000"/>
-                </a:solidFill>
-                <a:latin typeface="Arial Unicode MS"/>
-                <a:ea typeface="Arial Unicode MS"/>
-                <a:cs typeface="Arial Unicode MS"/>
-              </a:rPr>
-              <a:t>幫一個指定的情境選一顆感測器</a:t>
-            </a:r>
-            <a:r>
-              <a:rPr sz="850" lang="zh-TW" dirty="0">
-                <a:solidFill>
-                  <a:srgbClr val="000000"/>
-                </a:solidFill>
-                <a:latin typeface="Arial Unicode MS"/>
-                <a:ea typeface="Arial Unicode MS"/>
-                <a:cs typeface="Arial Unicode MS"/>
-              </a:rPr>
-              <a:t>，而且要說得出是卡在哪一行。</a:t>
+                <a:spcPts val="133"/>
+              </a:spcAft>
+            </a:pPr>
+            <a:r>
+              <a:rPr sz="800" lang="zh-TW" dirty="0">
+                <a:solidFill>
+                  <a:srgbClr val="000000"/>
+                </a:solidFill>
+                <a:latin typeface="Arial Unicode MS"/>
+                <a:ea typeface="Arial Unicode MS"/>
+                <a:cs typeface="Arial Unicode MS"/>
+              </a:rPr>
+              <a:t>這也是為什麼期末專題如果各位要做感測器融合，第一個卡住你們的一定是標定，不是演算法。</a:t>
             </a:r>
           </a:p>
         </p:txBody>
@@ -3289,11 +3235,11 @@
                 <a:spcPts val="0"/>
               </a:spcBef>
               <a:spcAft>
-                <a:spcPts val="167"/>
-              </a:spcAft>
-            </a:pPr>
-            <a:r>
-              <a:rPr sz="1000" b="1" lang="zh-TW" dirty="0">
+                <a:spcPts val="142"/>
+              </a:spcAft>
+            </a:pPr>
+            <a:r>
+              <a:rPr sz="850" b="1" lang="zh-TW" dirty="0">
                 <a:solidFill>
                   <a:srgbClr val="000000"/>
                 </a:solidFill>
@@ -3304,7 +3250,7 @@
               <a:t>▍這一張要做什麼</a:t>
             </a:r>
             <a:r>
-              <a:rPr sz="1000" lang="zh-TW" dirty="0">
+              <a:rPr sz="850" lang="zh-TW" dirty="0">
                 <a:solidFill>
                   <a:srgbClr val="000000"/>
                 </a:solidFill>
@@ -3322,19 +3268,19 @@
                 <a:spcPts val="0"/>
               </a:spcBef>
               <a:spcAft>
-                <a:spcPts val="167"/>
-              </a:spcAft>
-            </a:pPr>
-            <a:r>
-              <a:rPr sz="1000" lang="zh-TW" dirty="0">
-                <a:solidFill>
-                  <a:srgbClr val="000000"/>
-                </a:solidFill>
-                <a:latin typeface="Arial Unicode MS"/>
-                <a:ea typeface="Arial Unicode MS"/>
-                <a:cs typeface="Arial Unicode MS"/>
-              </a:rPr>
-              <a:t>第二節小結，三句話帶上機。
+                <a:spcPts val="142"/>
+              </a:spcAft>
+            </a:pPr>
+            <a:r>
+              <a:rPr sz="850" lang="zh-TW" dirty="0">
+                <a:solidFill>
+                  <a:srgbClr val="000000"/>
+                </a:solidFill>
+                <a:latin typeface="Arial Unicode MS"/>
+                <a:ea typeface="Arial Unicode MS"/>
+                <a:cs typeface="Arial Unicode MS"/>
+              </a:rPr>
+              <a:t>時間同步：兩隻眼睛要看的是同一個瞬間。
 </a:t>
             </a:r>
           </a:p>
@@ -3344,11 +3290,11 @@
                 <a:spcPts val="0"/>
               </a:spcBef>
               <a:spcAft>
-                <a:spcPts val="167"/>
-              </a:spcAft>
-            </a:pPr>
-            <a:r>
-              <a:rPr sz="1000" b="1" lang="zh-TW" dirty="0">
+                <a:spcPts val="142"/>
+              </a:spcAft>
+            </a:pPr>
+            <a:r>
+              <a:rPr sz="850" b="1" lang="zh-TW" dirty="0">
                 <a:solidFill>
                   <a:srgbClr val="000000"/>
                 </a:solidFill>
@@ -3359,7 +3305,7 @@
               <a:t>▍畫面上圈這裡</a:t>
             </a:r>
             <a:r>
-              <a:rPr sz="1000" lang="zh-TW" dirty="0">
+              <a:rPr sz="850" lang="zh-TW" dirty="0">
                 <a:solidFill>
                   <a:srgbClr val="000000"/>
                 </a:solidFill>
@@ -3377,19 +3323,19 @@
                 <a:spcPts val="0"/>
               </a:spcBef>
               <a:spcAft>
-                <a:spcPts val="167"/>
-              </a:spcAft>
-            </a:pPr>
-            <a:r>
-              <a:rPr sz="1000" lang="zh-TW" dirty="0">
-                <a:solidFill>
-                  <a:srgbClr val="000000"/>
-                </a:solidFill>
-                <a:latin typeface="Arial Unicode MS"/>
-                <a:ea typeface="Arial Unicode MS"/>
-                <a:cs typeface="Arial Unicode MS"/>
-              </a:rPr>
-              <a:t>三條一條一條圈。第三條「合起來不一定對」是明天做專題時最常忘的。
+                <a:spcPts val="142"/>
+              </a:spcAft>
+            </a:pPr>
+            <a:r>
+              <a:rPr sz="850" lang="zh-TW" dirty="0">
+                <a:solidFill>
+                  <a:srgbClr val="000000"/>
+                </a:solidFill>
+                <a:latin typeface="Arial Unicode MS"/>
+                <a:ea typeface="Arial Unicode MS"/>
+                <a:cs typeface="Arial Unicode MS"/>
+              </a:rPr>
+              <a:t>圈上面算出來的 50 毫秒與半公尺，再指圖裡 Additional Programmability 的 Multi-sensor phase lock。
 </a:t>
             </a:r>
           </a:p>
@@ -3399,11 +3345,11 @@
                 <a:spcPts val="0"/>
               </a:spcBef>
               <a:spcAft>
-                <a:spcPts val="167"/>
-              </a:spcAft>
-            </a:pPr>
-            <a:r>
-              <a:rPr sz="1000" b="1" lang="zh-TW" dirty="0">
+                <a:spcPts val="142"/>
+              </a:spcAft>
+            </a:pPr>
+            <a:r>
+              <a:rPr sz="850" b="1" lang="zh-TW" dirty="0">
                 <a:solidFill>
                   <a:srgbClr val="000000"/>
                 </a:solidFill>
@@ -3414,7 +3360,7 @@
               <a:t>▍以下照著唸</a:t>
             </a:r>
             <a:r>
-              <a:rPr sz="1000" lang="zh-TW" dirty="0">
+              <a:rPr sz="850" lang="zh-TW" dirty="0">
                 <a:solidFill>
                   <a:srgbClr val="000000"/>
                 </a:solidFill>
@@ -3432,154 +3378,33 @@
                 <a:spcPts val="0"/>
               </a:spcBef>
               <a:spcAft>
-                <a:spcPts val="167"/>
-              </a:spcAft>
-            </a:pPr>
-            <a:r>
-              <a:rPr sz="1000" lang="zh-TW" dirty="0">
-                <a:solidFill>
-                  <a:srgbClr val="000000"/>
-                </a:solidFill>
-                <a:latin typeface="Arial Unicode MS"/>
-                <a:ea typeface="Arial Unicode MS"/>
-                <a:cs typeface="Arial Unicode MS"/>
-              </a:rPr>
-              <a:t>第二節收起來，三句話。
-</a:t>
-            </a:r>
-          </a:p>
-          <a:p>
-            <a:pPr algn="l">
-              <a:spcBef>
-                <a:spcPts val="0"/>
-              </a:spcBef>
-              <a:spcAft>
-                <a:spcPts val="167"/>
-              </a:spcAft>
-            </a:pPr>
-            <a:r>
-              <a:rPr sz="1000" b="1" lang="zh-TW" dirty="0">
-                <a:solidFill>
-                  <a:srgbClr val="000000"/>
-                </a:solidFill>
-                <a:latin typeface="Arial Unicode MS"/>
-                <a:ea typeface="Arial Unicode MS"/>
-                <a:cs typeface="Arial Unicode MS"/>
-              </a:rPr>
-              <a:t>第一句，相機的三行。</a:t>
-            </a:r>
-            <a:r>
-              <a:rPr sz="1000" lang="zh-TW" dirty="0">
-                <a:solidFill>
-                  <a:srgbClr val="000000"/>
-                </a:solidFill>
-                <a:latin typeface="Arial Unicode MS"/>
-                <a:ea typeface="Arial Unicode MS"/>
-                <a:cs typeface="Arial Unicode MS"/>
-              </a:rPr>
-              <a:t>捲簾快門會把移動中的東西扭掉；動態範圍不夠，隧道裡面黑掉或者外面白掉；沒有 LED 閃爍抑制，紅燈可能被拍成沒亮。
-</a:t>
-            </a:r>
-          </a:p>
-          <a:p>
-            <a:pPr algn="l">
-              <a:spcBef>
-                <a:spcPts val="0"/>
-              </a:spcBef>
-              <a:spcAft>
-                <a:spcPts val="167"/>
-              </a:spcAft>
-            </a:pPr>
-            <a:r>
-              <a:rPr sz="1000" b="1" lang="zh-TW" dirty="0">
-                <a:solidFill>
-                  <a:srgbClr val="000000"/>
-                </a:solidFill>
-                <a:latin typeface="Arial Unicode MS"/>
-                <a:ea typeface="Arial Unicode MS"/>
-                <a:cs typeface="Arial Unicode MS"/>
-              </a:rPr>
-              <a:t>第二句，光達的三行。</a:t>
-            </a:r>
-            <a:r>
-              <a:rPr sz="1000" lang="zh-TW" dirty="0">
-                <a:solidFill>
-                  <a:srgbClr val="000000"/>
-                </a:solidFill>
-                <a:latin typeface="Arial Unicode MS"/>
-                <a:ea typeface="Arial Unicode MS"/>
-                <a:cs typeface="Arial Unicode MS"/>
-              </a:rPr>
-              <a:t>波長決定法規允許你打多強，也就決定看多遠；Class 1 對眼睛安全是門檻，不是加分；多次回波決定它在雨和灰塵裡好不好用。
-</a:t>
-            </a:r>
-          </a:p>
-          <a:p>
-            <a:pPr algn="l">
-              <a:spcBef>
-                <a:spcPts val="0"/>
-              </a:spcBef>
-              <a:spcAft>
-                <a:spcPts val="167"/>
-              </a:spcAft>
-            </a:pPr>
-            <a:r>
-              <a:rPr sz="1000" b="1" lang="zh-TW" dirty="0">
-                <a:solidFill>
-                  <a:srgbClr val="000000"/>
-                </a:solidFill>
-                <a:latin typeface="Arial Unicode MS"/>
-                <a:ea typeface="Arial Unicode MS"/>
-                <a:cs typeface="Arial Unicode MS"/>
-              </a:rPr>
-              <a:t>第三句，兩顆好的感測器合起來不一定對。</a:t>
-            </a:r>
-            <a:r>
-              <a:rPr sz="1000" lang="zh-TW" dirty="0">
-                <a:solidFill>
-                  <a:srgbClr val="000000"/>
-                </a:solidFill>
-                <a:latin typeface="Arial Unicode MS"/>
-                <a:ea typeface="Arial Unicode MS"/>
-                <a:cs typeface="Arial Unicode MS"/>
-              </a:rPr>
-              <a:t>空間要標定，差一度在五十公尺外就差快一公尺；時間要同步，差五十毫秒在時速四十下就差半公尺以上。
-</a:t>
-            </a:r>
-          </a:p>
-          <a:p>
-            <a:pPr algn="l">
-              <a:spcBef>
-                <a:spcPts val="0"/>
-              </a:spcBef>
-              <a:spcAft>
-                <a:spcPts val="167"/>
-              </a:spcAft>
-            </a:pPr>
-            <a:r>
-              <a:rPr sz="1000" lang="zh-TW" dirty="0">
-                <a:solidFill>
-                  <a:srgbClr val="000000"/>
-                </a:solidFill>
-                <a:latin typeface="Arial Unicode MS"/>
-                <a:ea typeface="Arial Unicode MS"/>
-                <a:cs typeface="Arial Unicode MS"/>
-              </a:rPr>
-              <a:t>下一節整節都在電腦上。各位要做的事是：拿四個型號、三個情境，自己判斷哪一顆能用、哪一顆不行，而且要講得出</a:t>
-            </a:r>
-            <a:r>
-              <a:rPr sz="1000" b="1" lang="zh-TW" dirty="0">
-                <a:solidFill>
-                  <a:srgbClr val="000000"/>
-                </a:solidFill>
-                <a:latin typeface="Arial Unicode MS"/>
-                <a:ea typeface="Arial Unicode MS"/>
-                <a:cs typeface="Arial Unicode MS"/>
-              </a:rPr>
-              <a:t>卡在哪一行</a:t>
-            </a:r>
-            <a:r>
-              <a:rPr sz="1000" lang="zh-TW" dirty="0">
+                <a:spcPts val="142"/>
+              </a:spcAft>
+            </a:pPr>
+            <a:r>
+              <a:rPr sz="850" lang="zh-TW" dirty="0">
+                <a:solidFill>
+                  <a:srgbClr val="000000"/>
+                </a:solidFill>
+                <a:latin typeface="Arial Unicode MS"/>
+                <a:ea typeface="Arial Unicode MS"/>
+                <a:cs typeface="Arial Unicode MS"/>
+              </a:rPr>
+              <a:t>最後一件事是</a:t>
+            </a:r>
+            <a:r>
+              <a:rPr sz="850" b="1" lang="zh-TW" dirty="0">
+                <a:solidFill>
+                  <a:srgbClr val="000000"/>
+                </a:solidFill>
+                <a:latin typeface="Arial Unicode MS"/>
+                <a:ea typeface="Arial Unicode MS"/>
+                <a:cs typeface="Arial Unicode MS"/>
+              </a:rPr>
+              <a:t>時間同步</a:t>
+            </a:r>
+            <a:r>
+              <a:rPr sz="850" lang="zh-TW" dirty="0">
                 <a:solidFill>
                   <a:srgbClr val="000000"/>
                 </a:solidFill>
@@ -3597,19 +3422,19 @@
                 <a:spcPts val="0"/>
               </a:spcBef>
               <a:spcAft>
-                <a:spcPts val="167"/>
-              </a:spcAft>
-            </a:pPr>
-            <a:r>
-              <a:rPr sz="1000" lang="zh-TW" dirty="0">
-                <a:solidFill>
-                  <a:srgbClr val="000000"/>
-                </a:solidFill>
-                <a:latin typeface="Arial Unicode MS"/>
-                <a:ea typeface="Arial Unicode MS"/>
-                <a:cs typeface="Arial Unicode MS"/>
-              </a:rPr>
-              <a:t>這份東西第三節結束前要交，是個人作業。
+                <a:spcPts val="142"/>
+              </a:spcAft>
+            </a:pPr>
+            <a:r>
+              <a:rPr sz="850" lang="zh-TW" dirty="0">
+                <a:solidFill>
+                  <a:srgbClr val="000000"/>
+                </a:solidFill>
+                <a:latin typeface="Arial Unicode MS"/>
+                <a:ea typeface="Arial Unicode MS"/>
+                <a:cs typeface="Arial Unicode MS"/>
+              </a:rPr>
+              <a:t>剛剛講的標定是「空間」上要對準。這一件是「時間」上要對準。
 </a:t>
             </a:r>
           </a:p>
@@ -3619,19 +3444,371 @@
                 <a:spcPts val="0"/>
               </a:spcBef>
               <a:spcAft>
-                <a:spcPts val="167"/>
-              </a:spcAft>
-            </a:pPr>
-            <a:r>
-              <a:rPr sz="1000" lang="zh-TW" dirty="0">
-                <a:solidFill>
-                  <a:srgbClr val="000000"/>
-                </a:solidFill>
-                <a:latin typeface="Arial Unicode MS"/>
-                <a:ea typeface="Arial Unicode MS"/>
-                <a:cs typeface="Arial Unicode MS"/>
-              </a:rPr>
-              <a:t>休息十分鐘。</a:t>
+                <a:spcPts val="142"/>
+              </a:spcAft>
+            </a:pPr>
+            <a:r>
+              <a:rPr sz="850" lang="zh-TW" dirty="0">
+                <a:solidFill>
+                  <a:srgbClr val="000000"/>
+                </a:solidFill>
+                <a:latin typeface="Arial Unicode MS"/>
+                <a:ea typeface="Arial Unicode MS"/>
+                <a:cs typeface="Arial Unicode MS"/>
+              </a:rPr>
+              <a:t>想想看：光達一秒轉十圈，相機一秒拍六十張。這兩個東西的節奏完全不一樣。
+</a:t>
+            </a:r>
+          </a:p>
+          <a:p>
+            <a:pPr algn="l">
+              <a:spcBef>
+                <a:spcPts val="0"/>
+              </a:spcBef>
+              <a:spcAft>
+                <a:spcPts val="142"/>
+              </a:spcAft>
+            </a:pPr>
+            <a:r>
+              <a:rPr sz="850" lang="zh-TW" dirty="0">
+                <a:solidFill>
+                  <a:srgbClr val="000000"/>
+                </a:solidFill>
+                <a:latin typeface="Arial Unicode MS"/>
+                <a:ea typeface="Arial Unicode MS"/>
+                <a:cs typeface="Arial Unicode MS"/>
+              </a:rPr>
+              <a:t>假設車子現在收到一張相機的畫面，還有一圈光達的點雲，要把它們合起來。問題是——</a:t>
+            </a:r>
+            <a:r>
+              <a:rPr sz="850" b="1" lang="zh-TW" dirty="0">
+                <a:solidFill>
+                  <a:srgbClr val="000000"/>
+                </a:solidFill>
+                <a:latin typeface="Arial Unicode MS"/>
+                <a:ea typeface="Arial Unicode MS"/>
+                <a:cs typeface="Arial Unicode MS"/>
+              </a:rPr>
+              <a:t>這兩份資料是同一個瞬間的嗎？</a:t>
+            </a:r>
+            <a:r>
+              <a:rPr sz="850" lang="zh-TW" dirty="0">
+                <a:solidFill>
+                  <a:srgbClr val="000000"/>
+                </a:solidFill>
+                <a:latin typeface="Arial Unicode MS"/>
+                <a:ea typeface="Arial Unicode MS"/>
+                <a:cs typeface="Arial Unicode MS"/>
+              </a:rPr>
+              <a:t>
+</a:t>
+            </a:r>
+          </a:p>
+          <a:p>
+            <a:pPr algn="l">
+              <a:spcBef>
+                <a:spcPts val="0"/>
+              </a:spcBef>
+              <a:spcAft>
+                <a:spcPts val="142"/>
+              </a:spcAft>
+            </a:pPr>
+            <a:r>
+              <a:rPr sz="850" lang="zh-TW" dirty="0">
+                <a:solidFill>
+                  <a:srgbClr val="000000"/>
+                </a:solidFill>
+                <a:latin typeface="Arial Unicode MS"/>
+                <a:ea typeface="Arial Unicode MS"/>
+                <a:cs typeface="Arial Unicode MS"/>
+              </a:rPr>
+              <a:t>如果沒有處理，它們可能差到五十毫秒。時速四十的時候，五十毫秒車子走了</a:t>
+            </a:r>
+            <a:r>
+              <a:rPr sz="850" b="1" lang="zh-TW" dirty="0">
+                <a:solidFill>
+                  <a:srgbClr val="000000"/>
+                </a:solidFill>
+                <a:latin typeface="Arial Unicode MS"/>
+                <a:ea typeface="Arial Unicode MS"/>
+                <a:cs typeface="Arial Unicode MS"/>
+              </a:rPr>
+              <a:t>零點五六公尺</a:t>
+            </a:r>
+            <a:r>
+              <a:rPr sz="850" lang="zh-TW" dirty="0">
+                <a:solidFill>
+                  <a:srgbClr val="000000"/>
+                </a:solidFill>
+                <a:latin typeface="Arial Unicode MS"/>
+                <a:ea typeface="Arial Unicode MS"/>
+                <a:cs typeface="Arial Unicode MS"/>
+              </a:rPr>
+              <a:t>。
+</a:t>
+            </a:r>
+          </a:p>
+          <a:p>
+            <a:pPr algn="l">
+              <a:spcBef>
+                <a:spcPts val="0"/>
+              </a:spcBef>
+              <a:spcAft>
+                <a:spcPts val="142"/>
+              </a:spcAft>
+            </a:pPr>
+            <a:r>
+              <a:rPr sz="850" lang="zh-TW" dirty="0">
+                <a:solidFill>
+                  <a:srgbClr val="000000"/>
+                </a:solidFill>
+                <a:latin typeface="Arial Unicode MS"/>
+                <a:ea typeface="Arial Unicode MS"/>
+                <a:cs typeface="Arial Unicode MS"/>
+              </a:rPr>
+              <a:t>所以你會把相機在 A 點看到的人，跟光達在 B 點量到的距離配在一起，得到一個</a:t>
+            </a:r>
+            <a:r>
+              <a:rPr sz="850" b="1" lang="zh-TW" dirty="0">
+                <a:solidFill>
+                  <a:srgbClr val="000000"/>
+                </a:solidFill>
+                <a:latin typeface="Arial Unicode MS"/>
+                <a:ea typeface="Arial Unicode MS"/>
+                <a:cs typeface="Arial Unicode MS"/>
+              </a:rPr>
+              <a:t>根本不存在的位置</a:t>
+            </a:r>
+            <a:r>
+              <a:rPr sz="850" lang="zh-TW" dirty="0">
+                <a:solidFill>
+                  <a:srgbClr val="000000"/>
+                </a:solidFill>
+                <a:latin typeface="Arial Unicode MS"/>
+                <a:ea typeface="Arial Unicode MS"/>
+                <a:cs typeface="Arial Unicode MS"/>
+              </a:rPr>
+              <a:t>。
+</a:t>
+            </a:r>
+          </a:p>
+          <a:p>
+            <a:pPr algn="l">
+              <a:spcBef>
+                <a:spcPts val="0"/>
+              </a:spcBef>
+              <a:spcAft>
+                <a:spcPts val="142"/>
+              </a:spcAft>
+            </a:pPr>
+            <a:r>
+              <a:rPr sz="850" lang="zh-TW" dirty="0">
+                <a:solidFill>
+                  <a:srgbClr val="000000"/>
+                </a:solidFill>
+                <a:latin typeface="Arial Unicode MS"/>
+                <a:ea typeface="Arial Unicode MS"/>
+                <a:cs typeface="Arial Unicode MS"/>
+              </a:rPr>
+              <a:t>而且這個誤差會跟剛剛的標定誤差疊加，兩個加起來就很可觀。
+</a:t>
+            </a:r>
+          </a:p>
+          <a:p>
+            <a:pPr algn="l">
+              <a:spcBef>
+                <a:spcPts val="0"/>
+              </a:spcBef>
+              <a:spcAft>
+                <a:spcPts val="142"/>
+              </a:spcAft>
+            </a:pPr>
+            <a:r>
+              <a:rPr sz="850" lang="zh-TW" dirty="0">
+                <a:solidFill>
+                  <a:srgbClr val="000000"/>
+                </a:solidFill>
+                <a:latin typeface="Arial Unicode MS"/>
+                <a:ea typeface="Arial Unicode MS"/>
+                <a:cs typeface="Arial Unicode MS"/>
+              </a:rPr>
+              <a:t>解法是讓每一顆感測器都在資料上蓋一個</a:t>
+            </a:r>
+            <a:r>
+              <a:rPr sz="850" b="1" lang="zh-TW" dirty="0">
+                <a:solidFill>
+                  <a:srgbClr val="000000"/>
+                </a:solidFill>
+                <a:latin typeface="Arial Unicode MS"/>
+                <a:ea typeface="Arial Unicode MS"/>
+                <a:cs typeface="Arial Unicode MS"/>
+              </a:rPr>
+              <a:t>時間戳</a:t>
+            </a:r>
+            <a:r>
+              <a:rPr sz="850" lang="zh-TW" dirty="0">
+                <a:solidFill>
+                  <a:srgbClr val="000000"/>
+                </a:solidFill>
+                <a:latin typeface="Arial Unicode MS"/>
+                <a:ea typeface="Arial Unicode MS"/>
+                <a:cs typeface="Arial Unicode MS"/>
+              </a:rPr>
+              <a:t>，而且全車用同一個時鐘。高階一點的做法，是讓光達轉到某個角度的時候，剛好跟相機的快門</a:t>
+            </a:r>
+            <a:r>
+              <a:rPr sz="850" b="1" lang="zh-TW" dirty="0">
+                <a:solidFill>
+                  <a:srgbClr val="000000"/>
+                </a:solidFill>
+                <a:latin typeface="Arial Unicode MS"/>
+                <a:ea typeface="Arial Unicode MS"/>
+                <a:cs typeface="Arial Unicode MS"/>
+              </a:rPr>
+              <a:t>對在一起</a:t>
+            </a:r>
+            <a:r>
+              <a:rPr sz="850" lang="zh-TW" dirty="0">
+                <a:solidFill>
+                  <a:srgbClr val="000000"/>
+                </a:solidFill>
+                <a:latin typeface="Arial Unicode MS"/>
+                <a:ea typeface="Arial Unicode MS"/>
+                <a:cs typeface="Arial Unicode MS"/>
+              </a:rPr>
+              <a:t>。OS1 規格表上 Additional Programmability 的</a:t>
+            </a:r>
+            <a:r>
+              <a:rPr sz="850" b="1" lang="zh-TW" dirty="0">
+                <a:solidFill>
+                  <a:srgbClr val="000000"/>
+                </a:solidFill>
+                <a:latin typeface="Arial Unicode MS"/>
+                <a:ea typeface="Arial Unicode MS"/>
+                <a:cs typeface="Arial Unicode MS"/>
+              </a:rPr>
+              <a:t>第一條</a:t>
+            </a:r>
+            <a:r>
+              <a:rPr sz="850" lang="zh-TW" dirty="0">
+                <a:solidFill>
+                  <a:srgbClr val="000000"/>
+                </a:solidFill>
+                <a:latin typeface="Arial Unicode MS"/>
+                <a:ea typeface="Arial Unicode MS"/>
+                <a:cs typeface="Arial Unicode MS"/>
+              </a:rPr>
+              <a:t>，multi-sensor phase lock，講的就是這件事。
+</a:t>
+            </a:r>
+          </a:p>
+          <a:p>
+            <a:pPr algn="l">
+              <a:spcBef>
+                <a:spcPts val="0"/>
+              </a:spcBef>
+              <a:spcAft>
+                <a:spcPts val="142"/>
+              </a:spcAft>
+            </a:pPr>
+            <a:r>
+              <a:rPr sz="850" lang="zh-TW" dirty="0">
+                <a:solidFill>
+                  <a:srgbClr val="000000"/>
+                </a:solidFill>
+                <a:latin typeface="Arial Unicode MS"/>
+                <a:ea typeface="Arial Unicode MS"/>
+                <a:cs typeface="Arial Unicode MS"/>
+              </a:rPr>
+              <a:t>所以請各位記住：</a:t>
+            </a:r>
+            <a:r>
+              <a:rPr sz="850" b="1" lang="zh-TW" dirty="0">
+                <a:solidFill>
+                  <a:srgbClr val="000000"/>
+                </a:solidFill>
+                <a:latin typeface="Arial Unicode MS"/>
+                <a:ea typeface="Arial Unicode MS"/>
+                <a:cs typeface="Arial Unicode MS"/>
+              </a:rPr>
+              <a:t>兩顆感測器各自都是好的，不代表合起來是對的。</a:t>
+            </a:r>
+            <a:r>
+              <a:rPr sz="850" lang="zh-TW" dirty="0">
+                <a:solidFill>
+                  <a:srgbClr val="000000"/>
+                </a:solidFill>
+                <a:latin typeface="Arial Unicode MS"/>
+                <a:ea typeface="Arial Unicode MS"/>
+                <a:cs typeface="Arial Unicode MS"/>
+              </a:rPr>
+              <a:t>中間還有標定和同步這兩關。
+</a:t>
+            </a:r>
+          </a:p>
+          <a:p>
+            <a:pPr algn="l">
+              <a:spcBef>
+                <a:spcPts val="0"/>
+              </a:spcBef>
+              <a:spcAft>
+                <a:spcPts val="142"/>
+              </a:spcAft>
+            </a:pPr>
+            <a:r>
+              <a:rPr sz="850" lang="zh-TW" dirty="0">
+                <a:solidFill>
+                  <a:srgbClr val="000000"/>
+                </a:solidFill>
+                <a:latin typeface="Arial Unicode MS"/>
+                <a:ea typeface="Arial Unicode MS"/>
+                <a:cs typeface="Arial Unicode MS"/>
+              </a:rPr>
+              <a:t>這兩關在規格表上常常只有一兩行，甚至完全沒有，可是實際做系統的時候，它們吃掉的時間比選型還多。
+</a:t>
+            </a:r>
+          </a:p>
+          <a:p>
+            <a:pPr algn="l">
+              <a:spcBef>
+                <a:spcPts val="0"/>
+              </a:spcBef>
+              <a:spcAft>
+                <a:spcPts val="142"/>
+              </a:spcAft>
+            </a:pPr>
+            <a:r>
+              <a:rPr sz="850" lang="zh-TW" dirty="0">
+                <a:solidFill>
+                  <a:srgbClr val="000000"/>
+                </a:solidFill>
+                <a:latin typeface="Arial Unicode MS"/>
+                <a:ea typeface="Arial Unicode MS"/>
+                <a:cs typeface="Arial Unicode MS"/>
+              </a:rPr>
+              <a:t>下一節我們回到工具上，把今天和上一節講的東西，全部用在一件事上：</a:t>
+            </a:r>
+            <a:r>
+              <a:rPr sz="850" b="1" lang="zh-TW" dirty="0">
+                <a:solidFill>
+                  <a:srgbClr val="000000"/>
+                </a:solidFill>
+                <a:latin typeface="Arial Unicode MS"/>
+                <a:ea typeface="Arial Unicode MS"/>
+                <a:cs typeface="Arial Unicode MS"/>
+              </a:rPr>
+              <a:t>幫一個指定的情境選一顆感測器</a:t>
+            </a:r>
+            <a:r>
+              <a:rPr sz="850" lang="zh-TW" dirty="0">
+                <a:solidFill>
+                  <a:srgbClr val="000000"/>
+                </a:solidFill>
+                <a:latin typeface="Arial Unicode MS"/>
+                <a:ea typeface="Arial Unicode MS"/>
+                <a:cs typeface="Arial Unicode MS"/>
+              </a:rPr>
+              <a:t>，而且要說得出是卡在哪一行。</a:t>
             </a:r>
           </a:p>
         </p:txBody>
@@ -3674,6 +3851,457 @@
                 <a:cs typeface="Arial Unicode MS"/>
               </a:rPr>
               <a:t>14</a:t>
+            </a:r>
+          </a:p>
+        </p:txBody>
+      </p:sp>
+    </p:spTree>
+  </p:cSld>
+  <p:clrMapOvr>
+    <a:masterClrMapping/>
+  </p:clrMapOvr>
+</p:notes>
+</file>
+
+<file path=ppt/notesSlides/notesSlide15.xml><?xml version="1.0" encoding="utf-8"?>
+<p:notes xmlns:a="http://schemas.openxmlformats.org/drawingml/2006/main" xmlns:p="http://schemas.openxmlformats.org/presentationml/2006/main">
+  <p:cSld>
+    <p:spTree>
+      <p:nvGrpSpPr>
+        <p:cNvPr id="1" name=""/>
+        <p:cNvGrpSpPr/>
+        <p:nvPr/>
+      </p:nvGrpSpPr>
+      <p:grpSpPr>
+        <a:xfrm/>
+      </p:grpSpPr>
+      <p:sp>
+        <p:nvSpPr>
+          <p:cNvPr id="2" name="Slide Image Placeholder 1"/>
+          <p:cNvSpPr>
+            <a:spLocks noGrp="1"/>
+          </p:cNvSpPr>
+          <p:nvPr>
+            <p:ph type="sldImg" idx="2"/>
+          </p:nvPr>
+        </p:nvSpPr>
+        <p:spPr>
+          <a:xfrm>
+            <a:off x="540000" y="540000"/>
+            <a:ext cx="6480000" cy="3645000"/>
+          </a:xfrm>
+        </p:spPr>
+      </p:sp>
+      <p:sp>
+        <p:nvSpPr>
+          <p:cNvPr id="3" name="Notes Placeholder 2"/>
+          <p:cNvSpPr>
+            <a:spLocks noGrp="1"/>
+          </p:cNvSpPr>
+          <p:nvPr>
+            <p:ph type="body" idx="3"/>
+          </p:nvPr>
+        </p:nvSpPr>
+        <p:spPr>
+          <a:xfrm>
+            <a:off x="540000" y="4440000"/>
+            <a:ext cx="6480000" cy="5500000"/>
+          </a:xfrm>
+        </p:spPr>
+        <p:txBody>
+          <a:bodyPr vert="horz" wrap="square" anchor="t" lIns="91440" rIns="91440" tIns="45720" bIns="45720"/>
+          <a:lstStyle/>
+          <a:p>
+            <a:pPr algn="l">
+              <a:spcBef>
+                <a:spcPts val="0"/>
+              </a:spcBef>
+              <a:spcAft>
+                <a:spcPts val="167"/>
+              </a:spcAft>
+            </a:pPr>
+            <a:r>
+              <a:rPr sz="1000" b="1" lang="zh-TW" dirty="0">
+                <a:solidFill>
+                  <a:srgbClr val="000000"/>
+                </a:solidFill>
+                <a:latin typeface="Arial Unicode MS"/>
+                <a:ea typeface="Arial Unicode MS"/>
+                <a:cs typeface="Arial Unicode MS"/>
+              </a:rPr>
+              <a:t>▍這一張要做什麼</a:t>
+            </a:r>
+            <a:r>
+              <a:rPr sz="1000" lang="zh-TW" dirty="0">
+                <a:solidFill>
+                  <a:srgbClr val="000000"/>
+                </a:solidFill>
+                <a:latin typeface="Arial Unicode MS"/>
+                <a:ea typeface="Arial Unicode MS"/>
+                <a:cs typeface="Arial Unicode MS"/>
+              </a:rPr>
+              <a:t>
+</a:t>
+            </a:r>
+          </a:p>
+          <a:p>
+            <a:pPr algn="l">
+              <a:spcBef>
+                <a:spcPts val="0"/>
+              </a:spcBef>
+              <a:spcAft>
+                <a:spcPts val="167"/>
+              </a:spcAft>
+            </a:pPr>
+            <a:r>
+              <a:rPr sz="1000" lang="zh-TW" dirty="0">
+                <a:solidFill>
+                  <a:srgbClr val="000000"/>
+                </a:solidFill>
+                <a:latin typeface="Arial Unicode MS"/>
+                <a:ea typeface="Arial Unicode MS"/>
+                <a:cs typeface="Arial Unicode MS"/>
+              </a:rPr>
+              <a:t>第二節小結，三句話帶上機。
+</a:t>
+            </a:r>
+          </a:p>
+          <a:p>
+            <a:pPr algn="l">
+              <a:spcBef>
+                <a:spcPts val="0"/>
+              </a:spcBef>
+              <a:spcAft>
+                <a:spcPts val="167"/>
+              </a:spcAft>
+            </a:pPr>
+            <a:r>
+              <a:rPr sz="1000" b="1" lang="zh-TW" dirty="0">
+                <a:solidFill>
+                  <a:srgbClr val="000000"/>
+                </a:solidFill>
+                <a:latin typeface="Arial Unicode MS"/>
+                <a:ea typeface="Arial Unicode MS"/>
+                <a:cs typeface="Arial Unicode MS"/>
+              </a:rPr>
+              <a:t>▍畫面上圈這裡</a:t>
+            </a:r>
+            <a:r>
+              <a:rPr sz="1000" lang="zh-TW" dirty="0">
+                <a:solidFill>
+                  <a:srgbClr val="000000"/>
+                </a:solidFill>
+                <a:latin typeface="Arial Unicode MS"/>
+                <a:ea typeface="Arial Unicode MS"/>
+                <a:cs typeface="Arial Unicode MS"/>
+              </a:rPr>
+              <a:t>
+</a:t>
+            </a:r>
+          </a:p>
+          <a:p>
+            <a:pPr algn="l">
+              <a:spcBef>
+                <a:spcPts val="0"/>
+              </a:spcBef>
+              <a:spcAft>
+                <a:spcPts val="167"/>
+              </a:spcAft>
+            </a:pPr>
+            <a:r>
+              <a:rPr sz="1000" lang="zh-TW" dirty="0">
+                <a:solidFill>
+                  <a:srgbClr val="000000"/>
+                </a:solidFill>
+                <a:latin typeface="Arial Unicode MS"/>
+                <a:ea typeface="Arial Unicode MS"/>
+                <a:cs typeface="Arial Unicode MS"/>
+              </a:rPr>
+              <a:t>三條一條一條圈。第三條「合起來不一定對」是明天做專題時最常忘的。
+</a:t>
+            </a:r>
+          </a:p>
+          <a:p>
+            <a:pPr algn="l">
+              <a:spcBef>
+                <a:spcPts val="0"/>
+              </a:spcBef>
+              <a:spcAft>
+                <a:spcPts val="167"/>
+              </a:spcAft>
+            </a:pPr>
+            <a:r>
+              <a:rPr sz="1000" b="1" lang="zh-TW" dirty="0">
+                <a:solidFill>
+                  <a:srgbClr val="000000"/>
+                </a:solidFill>
+                <a:latin typeface="Arial Unicode MS"/>
+                <a:ea typeface="Arial Unicode MS"/>
+                <a:cs typeface="Arial Unicode MS"/>
+              </a:rPr>
+              <a:t>▍以下照著唸</a:t>
+            </a:r>
+            <a:r>
+              <a:rPr sz="1000" lang="zh-TW" dirty="0">
+                <a:solidFill>
+                  <a:srgbClr val="000000"/>
+                </a:solidFill>
+                <a:latin typeface="Arial Unicode MS"/>
+                <a:ea typeface="Arial Unicode MS"/>
+                <a:cs typeface="Arial Unicode MS"/>
+              </a:rPr>
+              <a:t>
+</a:t>
+            </a:r>
+          </a:p>
+          <a:p>
+            <a:pPr algn="l">
+              <a:spcBef>
+                <a:spcPts val="0"/>
+              </a:spcBef>
+              <a:spcAft>
+                <a:spcPts val="167"/>
+              </a:spcAft>
+            </a:pPr>
+            <a:r>
+              <a:rPr sz="1000" lang="zh-TW" dirty="0">
+                <a:solidFill>
+                  <a:srgbClr val="000000"/>
+                </a:solidFill>
+                <a:latin typeface="Arial Unicode MS"/>
+                <a:ea typeface="Arial Unicode MS"/>
+                <a:cs typeface="Arial Unicode MS"/>
+              </a:rPr>
+              <a:t>第二節收起來，三句話。
+</a:t>
+            </a:r>
+          </a:p>
+          <a:p>
+            <a:pPr algn="l">
+              <a:spcBef>
+                <a:spcPts val="0"/>
+              </a:spcBef>
+              <a:spcAft>
+                <a:spcPts val="167"/>
+              </a:spcAft>
+            </a:pPr>
+            <a:r>
+              <a:rPr sz="1000" b="1" lang="zh-TW" dirty="0">
+                <a:solidFill>
+                  <a:srgbClr val="000000"/>
+                </a:solidFill>
+                <a:latin typeface="Arial Unicode MS"/>
+                <a:ea typeface="Arial Unicode MS"/>
+                <a:cs typeface="Arial Unicode MS"/>
+              </a:rPr>
+              <a:t>第一句，相機的三行。</a:t>
+            </a:r>
+            <a:r>
+              <a:rPr sz="1000" lang="zh-TW" dirty="0">
+                <a:solidFill>
+                  <a:srgbClr val="000000"/>
+                </a:solidFill>
+                <a:latin typeface="Arial Unicode MS"/>
+                <a:ea typeface="Arial Unicode MS"/>
+                <a:cs typeface="Arial Unicode MS"/>
+              </a:rPr>
+              <a:t>捲簾快門會把移動中的東西扭掉；動態範圍不夠，隧道裡面黑掉或者外面白掉；沒有 LED 閃爍抑制，紅燈可能被拍成沒亮。
+</a:t>
+            </a:r>
+          </a:p>
+          <a:p>
+            <a:pPr algn="l">
+              <a:spcBef>
+                <a:spcPts val="0"/>
+              </a:spcBef>
+              <a:spcAft>
+                <a:spcPts val="167"/>
+              </a:spcAft>
+            </a:pPr>
+            <a:r>
+              <a:rPr sz="1000" b="1" lang="zh-TW" dirty="0">
+                <a:solidFill>
+                  <a:srgbClr val="000000"/>
+                </a:solidFill>
+                <a:latin typeface="Arial Unicode MS"/>
+                <a:ea typeface="Arial Unicode MS"/>
+                <a:cs typeface="Arial Unicode MS"/>
+              </a:rPr>
+              <a:t>第二句，光達的三行。</a:t>
+            </a:r>
+            <a:r>
+              <a:rPr sz="1000" lang="zh-TW" dirty="0">
+                <a:solidFill>
+                  <a:srgbClr val="000000"/>
+                </a:solidFill>
+                <a:latin typeface="Arial Unicode MS"/>
+                <a:ea typeface="Arial Unicode MS"/>
+                <a:cs typeface="Arial Unicode MS"/>
+              </a:rPr>
+              <a:t>波長決定法規允許你打多強，也就決定看多遠；Class 1 對眼睛安全是門檻，不是加分；多次回波決定它在雨和灰塵裡好不好用。
+</a:t>
+            </a:r>
+          </a:p>
+          <a:p>
+            <a:pPr algn="l">
+              <a:spcBef>
+                <a:spcPts val="0"/>
+              </a:spcBef>
+              <a:spcAft>
+                <a:spcPts val="167"/>
+              </a:spcAft>
+            </a:pPr>
+            <a:r>
+              <a:rPr sz="1000" b="1" lang="zh-TW" dirty="0">
+                <a:solidFill>
+                  <a:srgbClr val="000000"/>
+                </a:solidFill>
+                <a:latin typeface="Arial Unicode MS"/>
+                <a:ea typeface="Arial Unicode MS"/>
+                <a:cs typeface="Arial Unicode MS"/>
+              </a:rPr>
+              <a:t>第三句，兩顆好的感測器合起來不一定對。</a:t>
+            </a:r>
+            <a:r>
+              <a:rPr sz="1000" lang="zh-TW" dirty="0">
+                <a:solidFill>
+                  <a:srgbClr val="000000"/>
+                </a:solidFill>
+                <a:latin typeface="Arial Unicode MS"/>
+                <a:ea typeface="Arial Unicode MS"/>
+                <a:cs typeface="Arial Unicode MS"/>
+              </a:rPr>
+              <a:t>空間要標定，差一度在五十公尺外就差快一公尺；時間要同步，差五十毫秒在時速四十下就差半公尺以上。
+</a:t>
+            </a:r>
+          </a:p>
+          <a:p>
+            <a:pPr algn="l">
+              <a:spcBef>
+                <a:spcPts val="0"/>
+              </a:spcBef>
+              <a:spcAft>
+                <a:spcPts val="167"/>
+              </a:spcAft>
+            </a:pPr>
+            <a:r>
+              <a:rPr sz="1000" lang="zh-TW" dirty="0">
+                <a:solidFill>
+                  <a:srgbClr val="000000"/>
+                </a:solidFill>
+                <a:latin typeface="Arial Unicode MS"/>
+                <a:ea typeface="Arial Unicode MS"/>
+                <a:cs typeface="Arial Unicode MS"/>
+              </a:rPr>
+              <a:t>下一節整節都在電腦上。各位要做的事是：拿四個型號、三個情境，自己判斷哪一顆能用、哪一顆不行，而且要講得出</a:t>
+            </a:r>
+            <a:r>
+              <a:rPr sz="1000" b="1" lang="zh-TW" dirty="0">
+                <a:solidFill>
+                  <a:srgbClr val="000000"/>
+                </a:solidFill>
+                <a:latin typeface="Arial Unicode MS"/>
+                <a:ea typeface="Arial Unicode MS"/>
+                <a:cs typeface="Arial Unicode MS"/>
+              </a:rPr>
+              <a:t>卡在哪一行</a:t>
+            </a:r>
+            <a:r>
+              <a:rPr sz="1000" lang="zh-TW" dirty="0">
+                <a:solidFill>
+                  <a:srgbClr val="000000"/>
+                </a:solidFill>
+                <a:latin typeface="Arial Unicode MS"/>
+                <a:ea typeface="Arial Unicode MS"/>
+                <a:cs typeface="Arial Unicode MS"/>
+              </a:rPr>
+              <a:t>。
+</a:t>
+            </a:r>
+          </a:p>
+          <a:p>
+            <a:pPr algn="l">
+              <a:spcBef>
+                <a:spcPts val="0"/>
+              </a:spcBef>
+              <a:spcAft>
+                <a:spcPts val="167"/>
+              </a:spcAft>
+            </a:pPr>
+            <a:r>
+              <a:rPr sz="1000" lang="zh-TW" dirty="0">
+                <a:solidFill>
+                  <a:srgbClr val="000000"/>
+                </a:solidFill>
+                <a:latin typeface="Arial Unicode MS"/>
+                <a:ea typeface="Arial Unicode MS"/>
+                <a:cs typeface="Arial Unicode MS"/>
+              </a:rPr>
+              <a:t>這份東西第三節結束前要交，是個人作業。
+</a:t>
+            </a:r>
+          </a:p>
+          <a:p>
+            <a:pPr algn="l">
+              <a:spcBef>
+                <a:spcPts val="0"/>
+              </a:spcBef>
+              <a:spcAft>
+                <a:spcPts val="167"/>
+              </a:spcAft>
+            </a:pPr>
+            <a:r>
+              <a:rPr sz="1000" lang="zh-TW" dirty="0">
+                <a:solidFill>
+                  <a:srgbClr val="000000"/>
+                </a:solidFill>
+                <a:latin typeface="Arial Unicode MS"/>
+                <a:ea typeface="Arial Unicode MS"/>
+                <a:cs typeface="Arial Unicode MS"/>
+              </a:rPr>
+              <a:t>休息十分鐘。</a:t>
+            </a:r>
+          </a:p>
+        </p:txBody>
+      </p:sp>
+      <p:sp>
+        <p:nvSpPr>
+          <p:cNvPr id="4" name="Slide Number Placeholder 3"/>
+          <p:cNvSpPr>
+            <a:spLocks noGrp="1"/>
+          </p:cNvSpPr>
+          <p:nvPr>
+            <p:ph type="sldNum" idx="5"/>
+          </p:nvPr>
+        </p:nvSpPr>
+        <p:spPr>
+          <a:xfrm>
+            <a:off x="6500000" y="10200000"/>
+            <a:ext cx="500000" cy="300000"/>
+          </a:xfrm>
+        </p:spPr>
+        <p:txBody>
+          <a:bodyPr vert="horz" wrap="square" anchor="t" lIns="91440" rIns="91440" tIns="45720" bIns="45720"/>
+          <a:lstStyle/>
+          <a:p>
+            <a:pPr algn="l">
+              <a:spcBef>
+                <a:spcPts val="0"/>
+              </a:spcBef>
+              <a:spcAft>
+                <a:spcPts val="167"/>
+              </a:spcAft>
+            </a:pPr>
+            <a:r>
+              <a:rPr sz="1000" lang="zh-TW" dirty="0">
+                <a:solidFill>
+                  <a:srgbClr val="000000"/>
+                </a:solidFill>
+                <a:latin typeface="Arial Unicode MS"/>
+                <a:ea typeface="Arial Unicode MS"/>
+                <a:cs typeface="Arial Unicode MS"/>
+              </a:rPr>
+              <a:t>15</a:t>
             </a:r>
           </a:p>
         </p:txBody>
@@ -8705,13 +9333,6 @@
 <file path=ppt/slides/slide10.xml><?xml version="1.0" encoding="utf-8"?>
 <p:sld xmlns:a="http://schemas.openxmlformats.org/drawingml/2006/main" xmlns:r="http://schemas.openxmlformats.org/officeDocument/2006/relationships" xmlns:p="http://schemas.openxmlformats.org/presentationml/2006/main">
   <p:cSld name="Slide 10">
-    <p:bg>
-      <p:bgPr>
-        <a:solidFill>
-          <a:srgbClr val="0B1F3A"/>
-        </a:solidFill>
-      </p:bgPr>
-    </p:bg>
     <p:spTree>
       <p:nvGrpSpPr>
         <p:cNvPr id="1" name=""/>
@@ -8728,61 +9349,14 @@
       </p:grpSpPr>
       <p:sp>
         <p:nvSpPr>
-          <p:cNvPr id="2" name="Shape 0"/>
-          <p:cNvSpPr/>
-          <p:nvPr/>
-        </p:nvSpPr>
-        <p:spPr>
-          <a:xfrm>
-            <a:off x="6766560" y="-1371600"/>
-            <a:ext cx="4206240" cy="4206240"/>
-          </a:xfrm>
-          <a:prstGeom prst="ellipse">
-            <a:avLst/>
-          </a:prstGeom>
-          <a:solidFill>
-            <a:srgbClr val="13314F"/>
-          </a:solidFill>
-          <a:ln w="12700">
-            <a:solidFill>
-              <a:srgbClr val="13314F"/>
-            </a:solidFill>
-            <a:prstDash val="solid"/>
-          </a:ln>
-        </p:spPr>
-      </p:sp>
-      <p:sp>
-        <p:nvSpPr>
-          <p:cNvPr id="3" name="Shape 1"/>
-          <p:cNvSpPr/>
-          <p:nvPr/>
-        </p:nvSpPr>
-        <p:spPr>
-          <a:xfrm>
-            <a:off x="8138160" y="2103120"/>
-            <a:ext cx="2377440" cy="2377440"/>
-          </a:xfrm>
-          <a:prstGeom prst="ellipse">
-            <a:avLst/>
-          </a:prstGeom>
-          <a:solidFill>
-            <a:srgbClr val="007F72">
-              <a:alpha val="28000"/>
-            </a:srgbClr>
-          </a:solidFill>
-          <a:ln/>
-        </p:spPr>
-      </p:sp>
-      <p:sp>
-        <p:nvSpPr>
-          <p:cNvPr id="4" name="Text 2"/>
+          <p:cNvPr id="2" name="Text 0"/>
           <p:cNvSpPr txBox="1"/>
           <p:nvPr/>
         </p:nvSpPr>
         <p:spPr>
           <a:xfrm>
-            <a:off x="502920" y="475488"/>
-            <a:ext cx="6766560" cy="274320"/>
+            <a:off x="502920" y="292608"/>
+            <a:ext cx="8138160" cy="841248"/>
           </a:xfrm>
           <a:prstGeom prst="rect">
             <a:avLst/>
@@ -8791,37 +9365,1044 @@
           <a:ln/>
         </p:spPr>
         <p:txBody>
-          <a:bodyPr wrap="square" lIns="0" tIns="0" rIns="0" bIns="0" rtlCol="0" anchor="ctr"/>
+          <a:bodyPr wrap="square" lIns="0" tIns="0" rIns="0" bIns="0" rtlCol="0" anchor="t"/>
           <a:lstStyle/>
           <a:p>
             <a:pPr indent="0" marL="0">
+              <a:lnSpc>
+                <a:spcPct val="116000"/>
+              </a:lnSpc>
               <a:buNone/>
             </a:pPr>
             <a:r>
-              <a:rPr lang="en-US" sz="1250" b="1" dirty="0">
-                <a:solidFill>
-                  <a:srgbClr val="FFB020"/>
+              <a:rPr lang="en-US" sz="2200" b="1" dirty="0">
+                <a:solidFill>
+                  <a:srgbClr val="0B1F3A"/>
                 </a:solidFill>
                 <a:latin typeface="Arial" pitchFamily="34" charset="0"/>
                 <a:ea typeface="Arial" pitchFamily="34" charset="-122"/>
                 <a:cs typeface="Arial" pitchFamily="34" charset="-120"/>
               </a:rPr>
-              <a:t>Thử nhanh · 小練習（3 分鐘動手）</a:t>
-            </a:r>
-            <a:endParaRPr lang="en-US" sz="1250" dirty="0"/>
+              <a:t>Mặt gương: thứ khó nhất với lidar</a:t>
+            </a:r>
+            <a:endParaRPr lang="en-US" sz="2200" dirty="0"/>
+          </a:p>
+          <a:p>
+            <a:pPr indent="0" marL="0">
+              <a:lnSpc>
+                <a:spcPct val="116000"/>
+              </a:lnSpc>
+              <a:buNone/>
+            </a:pPr>
+            <a:r>
+              <a:rPr lang="en-US" sz="1350" dirty="0">
+                <a:solidFill>
+                  <a:srgbClr val="5F7183"/>
+                </a:solidFill>
+                <a:latin typeface="微軟正黑體" pitchFamily="34" charset="0"/>
+                <a:ea typeface="微軟正黑體" pitchFamily="34" charset="-122"/>
+                <a:cs typeface="微軟正黑體" pitchFamily="34" charset="-120"/>
+              </a:rPr>
+              <a:t>鏡面：光達最難處理的一種表面</a:t>
+            </a:r>
+            <a:endParaRPr lang="en-US" sz="2200" dirty="0"/>
           </a:p>
         </p:txBody>
       </p:sp>
-      <p:sp>
-        <p:nvSpPr>
-          <p:cNvPr id="5" name="Text 3"/>
+      <p:graphicFrame>
+        <p:nvGraphicFramePr>
+          <p:cNvPr id="11" name="Table 0"/>
+          <p:cNvGraphicFramePr>
+            <a:graphicFrameLocks noGrp="1"/>
+          </p:cNvGraphicFramePr>
+          <p:nvPr>
+            <p:extLst>
+              <p:ext uri="{D42A27DB-BD31-4B8C-83A1-F6EECF244321}">
+                <p14:modId xmlns:p14="http://schemas.microsoft.com/office/powerpoint/2010/main" val="1579011935"/>
+              </p:ext>
+            </p:extLst>
+          </p:nvPr>
+        </p:nvGraphicFramePr>
+        <p:xfrm>
+          <a:off x="502920" y="1133856"/>
+          <a:ext cx="8138160" cy="914400"/>
+        </p:xfrm>
+        <a:graphic>
+          <a:graphicData uri="http://schemas.openxmlformats.org/drawingml/2006/table">
+            <a:tbl>
+              <a:tblPr/>
+              <a:tblGrid>
+                <a:gridCol w="2712720"/>
+                <a:gridCol w="2712720"/>
+                <a:gridCol w="2712720"/>
+              </a:tblGrid>
+              <a:tr h="347472">
+                <a:tc>
+                  <a:txBody>
+                    <a:bodyPr/>
+                    <a:lstStyle/>
+                    <a:p>
+                      <a:pPr algn="l" indent="0" marL="0">
+                        <a:buNone/>
+                      </a:pPr>
+                      <a:r>
+                        <a:rPr lang="en-US" sz="1050" b="1" dirty="0">
+                          <a:solidFill>
+                            <a:srgbClr val="FFFFFF"/>
+                          </a:solidFill>
+                          <a:latin typeface="Arial" pitchFamily="34" charset="0"/>
+                          <a:ea typeface="Arial" pitchFamily="34" charset="-122"/>
+                          <a:cs typeface="Arial" pitchFamily="34" charset="-120"/>
+                        </a:rPr>
+                        <a:t>Gương làm gì</a:t>
+                      </a:r>
+                      <a:endParaRPr lang="en-US" sz="1200" dirty="0"/>
+                    </a:p>
+                    <a:p>
+                      <a:pPr algn="l" indent="0" marL="0">
+                        <a:buNone/>
+                      </a:pPr>
+                      <a:r>
+                        <a:rPr lang="en-US" sz="900" dirty="0">
+                          <a:solidFill>
+                            <a:srgbClr val="CFE0EC"/>
+                          </a:solidFill>
+                          <a:latin typeface="微軟正黑體" pitchFamily="34" charset="0"/>
+                          <a:ea typeface="微軟正黑體" pitchFamily="34" charset="-122"/>
+                          <a:cs typeface="微軟正黑體" pitchFamily="34" charset="-120"/>
+                        </a:rPr>
+                        <a:t>鏡面做了什麼</a:t>
+                      </a:r>
+                      <a:endParaRPr lang="en-US" sz="1200" dirty="0"/>
+                    </a:p>
+                  </a:txBody>
+                  <a:tcPr marL="63500" marR="63500" marT="38100" marB="38100" anchor="ctr">
+                    <a:lnL w="6350" cap="flat" cmpd="sng" algn="ctr">
+                      <a:solidFill>
+                        <a:srgbClr val="DBE3EA"/>
+                      </a:solidFill>
+                      <a:prstDash val="solid"/>
+                      <a:round/>
+                      <a:headEnd type="none" w="med" len="med"/>
+                      <a:tailEnd type="none" w="med" len="med"/>
+                    </a:lnL>
+                    <a:lnR w="6350" cap="flat" cmpd="sng" algn="ctr">
+                      <a:solidFill>
+                        <a:srgbClr val="DBE3EA"/>
+                      </a:solidFill>
+                      <a:prstDash val="solid"/>
+                      <a:round/>
+                      <a:headEnd type="none" w="med" len="med"/>
+                      <a:tailEnd type="none" w="med" len="med"/>
+                    </a:lnR>
+                    <a:lnT w="6350" cap="flat" cmpd="sng" algn="ctr">
+                      <a:solidFill>
+                        <a:srgbClr val="DBE3EA"/>
+                      </a:solidFill>
+                      <a:prstDash val="solid"/>
+                      <a:round/>
+                      <a:headEnd type="none" w="med" len="med"/>
+                      <a:tailEnd type="none" w="med" len="med"/>
+                    </a:lnT>
+                    <a:lnB w="6350" cap="flat" cmpd="sng" algn="ctr">
+                      <a:solidFill>
+                        <a:srgbClr val="DBE3EA"/>
+                      </a:solidFill>
+                      <a:prstDash val="solid"/>
+                      <a:round/>
+                      <a:headEnd type="none" w="med" len="med"/>
+                      <a:tailEnd type="none" w="med" len="med"/>
+                    </a:lnB>
+                    <a:solidFill>
+                      <a:srgbClr val="0B1F3A"/>
+                    </a:solidFill>
+                  </a:tcPr>
+                </a:tc>
+                <a:tc>
+                  <a:txBody>
+                    <a:bodyPr/>
+                    <a:lstStyle/>
+                    <a:p>
+                      <a:pPr algn="l" indent="0" marL="0">
+                        <a:buNone/>
+                      </a:pPr>
+                      <a:r>
+                        <a:rPr lang="en-US" sz="1050" b="1" dirty="0">
+                          <a:solidFill>
+                            <a:srgbClr val="FFFFFF"/>
+                          </a:solidFill>
+                          <a:latin typeface="Arial" pitchFamily="34" charset="0"/>
+                          <a:ea typeface="Arial" pitchFamily="34" charset="-122"/>
+                          <a:cs typeface="Arial" pitchFamily="34" charset="-120"/>
+                        </a:rPr>
+                        <a:t>Thấy gì trên point cloud</a:t>
+                      </a:r>
+                      <a:endParaRPr lang="en-US" sz="1200" dirty="0"/>
+                    </a:p>
+                    <a:p>
+                      <a:pPr algn="l" indent="0" marL="0">
+                        <a:buNone/>
+                      </a:pPr>
+                      <a:r>
+                        <a:rPr lang="en-US" sz="900" dirty="0">
+                          <a:solidFill>
+                            <a:srgbClr val="CFE0EC"/>
+                          </a:solidFill>
+                          <a:latin typeface="微軟正黑體" pitchFamily="34" charset="0"/>
+                          <a:ea typeface="微軟正黑體" pitchFamily="34" charset="-122"/>
+                          <a:cs typeface="微軟正黑體" pitchFamily="34" charset="-120"/>
+                        </a:rPr>
+                        <a:t>點雲上看到什麼</a:t>
+                      </a:r>
+                      <a:endParaRPr lang="en-US" sz="1200" dirty="0"/>
+                    </a:p>
+                  </a:txBody>
+                  <a:tcPr marL="63500" marR="63500" marT="38100" marB="38100" anchor="ctr">
+                    <a:lnL w="6350" cap="flat" cmpd="sng" algn="ctr">
+                      <a:solidFill>
+                        <a:srgbClr val="DBE3EA"/>
+                      </a:solidFill>
+                      <a:prstDash val="solid"/>
+                      <a:round/>
+                      <a:headEnd type="none" w="med" len="med"/>
+                      <a:tailEnd type="none" w="med" len="med"/>
+                    </a:lnL>
+                    <a:lnR w="6350" cap="flat" cmpd="sng" algn="ctr">
+                      <a:solidFill>
+                        <a:srgbClr val="DBE3EA"/>
+                      </a:solidFill>
+                      <a:prstDash val="solid"/>
+                      <a:round/>
+                      <a:headEnd type="none" w="med" len="med"/>
+                      <a:tailEnd type="none" w="med" len="med"/>
+                    </a:lnR>
+                    <a:lnT w="6350" cap="flat" cmpd="sng" algn="ctr">
+                      <a:solidFill>
+                        <a:srgbClr val="DBE3EA"/>
+                      </a:solidFill>
+                      <a:prstDash val="solid"/>
+                      <a:round/>
+                      <a:headEnd type="none" w="med" len="med"/>
+                      <a:tailEnd type="none" w="med" len="med"/>
+                    </a:lnT>
+                    <a:lnB w="6350" cap="flat" cmpd="sng" algn="ctr">
+                      <a:solidFill>
+                        <a:srgbClr val="DBE3EA"/>
+                      </a:solidFill>
+                      <a:prstDash val="solid"/>
+                      <a:round/>
+                      <a:headEnd type="none" w="med" len="med"/>
+                      <a:tailEnd type="none" w="med" len="med"/>
+                    </a:lnB>
+                    <a:solidFill>
+                      <a:srgbClr val="0B1F3A"/>
+                    </a:solidFill>
+                  </a:tcPr>
+                </a:tc>
+                <a:tc>
+                  <a:txBody>
+                    <a:bodyPr/>
+                    <a:lstStyle/>
+                    <a:p>
+                      <a:pPr algn="l" indent="0" marL="0">
+                        <a:buNone/>
+                      </a:pPr>
+                      <a:r>
+                        <a:rPr lang="en-US" sz="1050" b="1" dirty="0">
+                          <a:solidFill>
+                            <a:srgbClr val="FFFFFF"/>
+                          </a:solidFill>
+                          <a:latin typeface="Arial" pitchFamily="34" charset="0"/>
+                          <a:ea typeface="Arial" pitchFamily="34" charset="-122"/>
+                          <a:cs typeface="Arial" pitchFamily="34" charset="-120"/>
+                        </a:rPr>
+                        <a:t>Hiện xử lý thế nào</a:t>
+                      </a:r>
+                      <a:endParaRPr lang="en-US" sz="1200" dirty="0"/>
+                    </a:p>
+                    <a:p>
+                      <a:pPr algn="l" indent="0" marL="0">
+                        <a:buNone/>
+                      </a:pPr>
+                      <a:r>
+                        <a:rPr lang="en-US" sz="900" dirty="0">
+                          <a:solidFill>
+                            <a:srgbClr val="CFE0EC"/>
+                          </a:solidFill>
+                          <a:latin typeface="微軟正黑體" pitchFamily="34" charset="0"/>
+                          <a:ea typeface="微軟正黑體" pitchFamily="34" charset="-122"/>
+                          <a:cs typeface="微軟正黑體" pitchFamily="34" charset="-120"/>
+                        </a:rPr>
+                        <a:t>目前怎麼處理</a:t>
+                      </a:r>
+                      <a:endParaRPr lang="en-US" sz="1200" dirty="0"/>
+                    </a:p>
+                  </a:txBody>
+                  <a:tcPr marL="63500" marR="63500" marT="38100" marB="38100" anchor="ctr">
+                    <a:lnL w="6350" cap="flat" cmpd="sng" algn="ctr">
+                      <a:solidFill>
+                        <a:srgbClr val="DBE3EA"/>
+                      </a:solidFill>
+                      <a:prstDash val="solid"/>
+                      <a:round/>
+                      <a:headEnd type="none" w="med" len="med"/>
+                      <a:tailEnd type="none" w="med" len="med"/>
+                    </a:lnL>
+                    <a:lnR w="6350" cap="flat" cmpd="sng" algn="ctr">
+                      <a:solidFill>
+                        <a:srgbClr val="DBE3EA"/>
+                      </a:solidFill>
+                      <a:prstDash val="solid"/>
+                      <a:round/>
+                      <a:headEnd type="none" w="med" len="med"/>
+                      <a:tailEnd type="none" w="med" len="med"/>
+                    </a:lnR>
+                    <a:lnT w="6350" cap="flat" cmpd="sng" algn="ctr">
+                      <a:solidFill>
+                        <a:srgbClr val="DBE3EA"/>
+                      </a:solidFill>
+                      <a:prstDash val="solid"/>
+                      <a:round/>
+                      <a:headEnd type="none" w="med" len="med"/>
+                      <a:tailEnd type="none" w="med" len="med"/>
+                    </a:lnT>
+                    <a:lnB w="6350" cap="flat" cmpd="sng" algn="ctr">
+                      <a:solidFill>
+                        <a:srgbClr val="DBE3EA"/>
+                      </a:solidFill>
+                      <a:prstDash val="solid"/>
+                      <a:round/>
+                      <a:headEnd type="none" w="med" len="med"/>
+                      <a:tailEnd type="none" w="med" len="med"/>
+                    </a:lnB>
+                    <a:solidFill>
+                      <a:srgbClr val="0B1F3A"/>
+                    </a:solidFill>
+                  </a:tcPr>
+                </a:tc>
+              </a:tr>
+              <a:tr h="347472">
+                <a:tc>
+                  <a:txBody>
+                    <a:bodyPr/>
+                    <a:lstStyle/>
+                    <a:p>
+                      <a:pPr algn="l" indent="0" marL="0">
+                        <a:buNone/>
+                      </a:pPr>
+                      <a:r>
+                        <a:rPr lang="en-US" sz="1050" b="1" dirty="0">
+                          <a:solidFill>
+                            <a:srgbClr val="0B1F3A"/>
+                          </a:solidFill>
+                          <a:latin typeface="Arial" pitchFamily="34" charset="0"/>
+                          <a:ea typeface="Arial" pitchFamily="34" charset="-122"/>
+                          <a:cs typeface="Arial" pitchFamily="34" charset="-120"/>
+                        </a:rPr>
+                        <a:t>Hắt cả chùm đi, không về</a:t>
+                      </a:r>
+                      <a:endParaRPr lang="en-US" sz="1200" dirty="0"/>
+                    </a:p>
+                    <a:p>
+                      <a:pPr algn="l" indent="0" marL="0">
+                        <a:buNone/>
+                      </a:pPr>
+                      <a:r>
+                        <a:rPr lang="en-US" sz="900" dirty="0">
+                          <a:solidFill>
+                            <a:srgbClr val="5F7183"/>
+                          </a:solidFill>
+                          <a:latin typeface="微軟正黑體" pitchFamily="34" charset="0"/>
+                          <a:ea typeface="微軟正黑體" pitchFamily="34" charset="-122"/>
+                          <a:cs typeface="微軟正黑體" pitchFamily="34" charset="-120"/>
+                        </a:rPr>
+                        <a:t>整束反射走，一點都不回來</a:t>
+                      </a:r>
+                      <a:endParaRPr lang="en-US" sz="1200" dirty="0"/>
+                    </a:p>
+                  </a:txBody>
+                  <a:tcPr marL="63500" marR="63500" marT="38100" marB="38100" anchor="ctr">
+                    <a:lnL w="6350" cap="flat" cmpd="sng" algn="ctr">
+                      <a:solidFill>
+                        <a:srgbClr val="DBE3EA"/>
+                      </a:solidFill>
+                      <a:prstDash val="solid"/>
+                      <a:round/>
+                      <a:headEnd type="none" w="med" len="med"/>
+                      <a:tailEnd type="none" w="med" len="med"/>
+                    </a:lnL>
+                    <a:lnR w="6350" cap="flat" cmpd="sng" algn="ctr">
+                      <a:solidFill>
+                        <a:srgbClr val="DBE3EA"/>
+                      </a:solidFill>
+                      <a:prstDash val="solid"/>
+                      <a:round/>
+                      <a:headEnd type="none" w="med" len="med"/>
+                      <a:tailEnd type="none" w="med" len="med"/>
+                    </a:lnR>
+                    <a:lnT w="6350" cap="flat" cmpd="sng" algn="ctr">
+                      <a:solidFill>
+                        <a:srgbClr val="DBE3EA"/>
+                      </a:solidFill>
+                      <a:prstDash val="solid"/>
+                      <a:round/>
+                      <a:headEnd type="none" w="med" len="med"/>
+                      <a:tailEnd type="none" w="med" len="med"/>
+                    </a:lnT>
+                    <a:lnB w="6350" cap="flat" cmpd="sng" algn="ctr">
+                      <a:solidFill>
+                        <a:srgbClr val="DBE3EA"/>
+                      </a:solidFill>
+                      <a:prstDash val="solid"/>
+                      <a:round/>
+                      <a:headEnd type="none" w="med" len="med"/>
+                      <a:tailEnd type="none" w="med" len="med"/>
+                    </a:lnB>
+                  </a:tcPr>
+                </a:tc>
+                <a:tc>
+                  <a:txBody>
+                    <a:bodyPr/>
+                    <a:lstStyle/>
+                    <a:p>
+                      <a:pPr algn="l" indent="0" marL="0">
+                        <a:buNone/>
+                      </a:pPr>
+                      <a:r>
+                        <a:rPr lang="en-US" sz="1050" dirty="0">
+                          <a:solidFill>
+                            <a:srgbClr val="1A2733"/>
+                          </a:solidFill>
+                          <a:latin typeface="Arial" pitchFamily="34" charset="0"/>
+                          <a:ea typeface="Arial" pitchFamily="34" charset="-122"/>
+                          <a:cs typeface="Arial" pitchFamily="34" charset="-120"/>
+                        </a:rPr>
+                        <a:t>Thành lỗ: kính toà nhà, cản mạ crôm, đường ướt</a:t>
+                      </a:r>
+                      <a:endParaRPr lang="en-US" sz="1200" dirty="0"/>
+                    </a:p>
+                    <a:p>
+                      <a:pPr algn="l" indent="0" marL="0">
+                        <a:buNone/>
+                      </a:pPr>
+                      <a:r>
+                        <a:rPr lang="en-US" sz="900" dirty="0">
+                          <a:solidFill>
+                            <a:srgbClr val="5F7183"/>
+                          </a:solidFill>
+                          <a:latin typeface="微軟正黑體" pitchFamily="34" charset="0"/>
+                          <a:ea typeface="微軟正黑體" pitchFamily="34" charset="-122"/>
+                          <a:cs typeface="微軟正黑體" pitchFamily="34" charset="-120"/>
+                        </a:rPr>
+                        <a:t>那一塊變成洞：玻璃帷幕、鍍鉻保險桿、濕路面</a:t>
+                      </a:r>
+                      <a:endParaRPr lang="en-US" sz="1200" dirty="0"/>
+                    </a:p>
+                  </a:txBody>
+                  <a:tcPr marL="63500" marR="63500" marT="38100" marB="38100" anchor="ctr">
+                    <a:lnL w="6350" cap="flat" cmpd="sng" algn="ctr">
+                      <a:solidFill>
+                        <a:srgbClr val="DBE3EA"/>
+                      </a:solidFill>
+                      <a:prstDash val="solid"/>
+                      <a:round/>
+                      <a:headEnd type="none" w="med" len="med"/>
+                      <a:tailEnd type="none" w="med" len="med"/>
+                    </a:lnL>
+                    <a:lnR w="6350" cap="flat" cmpd="sng" algn="ctr">
+                      <a:solidFill>
+                        <a:srgbClr val="DBE3EA"/>
+                      </a:solidFill>
+                      <a:prstDash val="solid"/>
+                      <a:round/>
+                      <a:headEnd type="none" w="med" len="med"/>
+                      <a:tailEnd type="none" w="med" len="med"/>
+                    </a:lnR>
+                    <a:lnT w="6350" cap="flat" cmpd="sng" algn="ctr">
+                      <a:solidFill>
+                        <a:srgbClr val="DBE3EA"/>
+                      </a:solidFill>
+                      <a:prstDash val="solid"/>
+                      <a:round/>
+                      <a:headEnd type="none" w="med" len="med"/>
+                      <a:tailEnd type="none" w="med" len="med"/>
+                    </a:lnT>
+                    <a:lnB w="6350" cap="flat" cmpd="sng" algn="ctr">
+                      <a:solidFill>
+                        <a:srgbClr val="DBE3EA"/>
+                      </a:solidFill>
+                      <a:prstDash val="solid"/>
+                      <a:round/>
+                      <a:headEnd type="none" w="med" len="med"/>
+                      <a:tailEnd type="none" w="med" len="med"/>
+                    </a:lnB>
+                  </a:tcPr>
+                </a:tc>
+                <a:tc>
+                  <a:txBody>
+                    <a:bodyPr/>
+                    <a:lstStyle/>
+                    <a:p>
+                      <a:pPr algn="l" indent="0" marL="0">
+                        <a:buNone/>
+                      </a:pPr>
+                      <a:r>
+                        <a:rPr lang="en-US" sz="1050" dirty="0">
+                          <a:solidFill>
+                            <a:srgbClr val="1A2733"/>
+                          </a:solidFill>
+                          <a:latin typeface="Arial" pitchFamily="34" charset="0"/>
+                          <a:ea typeface="Arial" pitchFamily="34" charset="-122"/>
+                          <a:cs typeface="Arial" pitchFamily="34" charset="-120"/>
+                        </a:rPr>
+                        <a:t>Radar bù: sóng mm gặp gương khác hẳn</a:t>
+                      </a:r>
+                      <a:endParaRPr lang="en-US" sz="1200" dirty="0"/>
+                    </a:p>
+                    <a:p>
+                      <a:pPr algn="l" indent="0" marL="0">
+                        <a:buNone/>
+                      </a:pPr>
+                      <a:r>
+                        <a:rPr lang="en-US" sz="900" dirty="0">
+                          <a:solidFill>
+                            <a:srgbClr val="5F7183"/>
+                          </a:solidFill>
+                          <a:latin typeface="微軟正黑體" pitchFamily="34" charset="0"/>
+                          <a:ea typeface="微軟正黑體" pitchFamily="34" charset="-122"/>
+                          <a:cs typeface="微軟正黑體" pitchFamily="34" charset="-120"/>
+                        </a:rPr>
+                        <a:t>靠雷達補：毫米波碰鏡面的行為不一樣</a:t>
+                      </a:r>
+                      <a:endParaRPr lang="en-US" sz="1200" dirty="0"/>
+                    </a:p>
+                  </a:txBody>
+                  <a:tcPr marL="63500" marR="63500" marT="38100" marB="38100" anchor="ctr">
+                    <a:lnL w="6350" cap="flat" cmpd="sng" algn="ctr">
+                      <a:solidFill>
+                        <a:srgbClr val="DBE3EA"/>
+                      </a:solidFill>
+                      <a:prstDash val="solid"/>
+                      <a:round/>
+                      <a:headEnd type="none" w="med" len="med"/>
+                      <a:tailEnd type="none" w="med" len="med"/>
+                    </a:lnL>
+                    <a:lnR w="6350" cap="flat" cmpd="sng" algn="ctr">
+                      <a:solidFill>
+                        <a:srgbClr val="DBE3EA"/>
+                      </a:solidFill>
+                      <a:prstDash val="solid"/>
+                      <a:round/>
+                      <a:headEnd type="none" w="med" len="med"/>
+                      <a:tailEnd type="none" w="med" len="med"/>
+                    </a:lnR>
+                    <a:lnT w="6350" cap="flat" cmpd="sng" algn="ctr">
+                      <a:solidFill>
+                        <a:srgbClr val="DBE3EA"/>
+                      </a:solidFill>
+                      <a:prstDash val="solid"/>
+                      <a:round/>
+                      <a:headEnd type="none" w="med" len="med"/>
+                      <a:tailEnd type="none" w="med" len="med"/>
+                    </a:lnT>
+                    <a:lnB w="6350" cap="flat" cmpd="sng" algn="ctr">
+                      <a:solidFill>
+                        <a:srgbClr val="DBE3EA"/>
+                      </a:solidFill>
+                      <a:prstDash val="solid"/>
+                      <a:round/>
+                      <a:headEnd type="none" w="med" len="med"/>
+                      <a:tailEnd type="none" w="med" len="med"/>
+                    </a:lnB>
+                  </a:tcPr>
+                </a:tc>
+              </a:tr>
+              <a:tr h="347472">
+                <a:tc>
+                  <a:txBody>
+                    <a:bodyPr/>
+                    <a:lstStyle/>
+                    <a:p>
+                      <a:pPr algn="l" indent="0" marL="0">
+                        <a:buNone/>
+                      </a:pPr>
+                      <a:r>
+                        <a:rPr lang="en-US" sz="1050" b="1" dirty="0">
+                          <a:solidFill>
+                            <a:srgbClr val="0B1F3A"/>
+                          </a:solidFill>
+                          <a:latin typeface="Arial" pitchFamily="34" charset="0"/>
+                          <a:ea typeface="Arial" pitchFamily="34" charset="-122"/>
+                          <a:cs typeface="Arial" pitchFamily="34" charset="-120"/>
+                        </a:rPr>
+                        <a:t>Dội sang vật bên cạnh rồi mới về</a:t>
+                      </a:r>
+                      <a:endParaRPr lang="en-US" sz="1200" dirty="0"/>
+                    </a:p>
+                    <a:p>
+                      <a:pPr algn="l" indent="0" marL="0">
+                        <a:buNone/>
+                      </a:pPr>
+                      <a:r>
+                        <a:rPr lang="en-US" sz="900" dirty="0">
+                          <a:solidFill>
+                            <a:srgbClr val="5F7183"/>
+                          </a:solidFill>
+                          <a:latin typeface="微軟正黑體" pitchFamily="34" charset="0"/>
+                          <a:ea typeface="微軟正黑體" pitchFamily="34" charset="-122"/>
+                          <a:cs typeface="微軟正黑體" pitchFamily="34" charset="-120"/>
+                        </a:rPr>
+                        <a:t>先彈到旁邊的東西，再原路回來</a:t>
+                      </a:r>
+                      <a:endParaRPr lang="en-US" sz="1200" dirty="0"/>
+                    </a:p>
+                  </a:txBody>
+                  <a:tcPr marL="63500" marR="63500" marT="38100" marB="38100" anchor="ctr">
+                    <a:lnL w="6350" cap="flat" cmpd="sng" algn="ctr">
+                      <a:solidFill>
+                        <a:srgbClr val="DBE3EA"/>
+                      </a:solidFill>
+                      <a:prstDash val="solid"/>
+                      <a:round/>
+                      <a:headEnd type="none" w="med" len="med"/>
+                      <a:tailEnd type="none" w="med" len="med"/>
+                    </a:lnL>
+                    <a:lnR w="6350" cap="flat" cmpd="sng" algn="ctr">
+                      <a:solidFill>
+                        <a:srgbClr val="DBE3EA"/>
+                      </a:solidFill>
+                      <a:prstDash val="solid"/>
+                      <a:round/>
+                      <a:headEnd type="none" w="med" len="med"/>
+                      <a:tailEnd type="none" w="med" len="med"/>
+                    </a:lnR>
+                    <a:lnT w="6350" cap="flat" cmpd="sng" algn="ctr">
+                      <a:solidFill>
+                        <a:srgbClr val="DBE3EA"/>
+                      </a:solidFill>
+                      <a:prstDash val="solid"/>
+                      <a:round/>
+                      <a:headEnd type="none" w="med" len="med"/>
+                      <a:tailEnd type="none" w="med" len="med"/>
+                    </a:lnT>
+                    <a:lnB w="6350" cap="flat" cmpd="sng" algn="ctr">
+                      <a:solidFill>
+                        <a:srgbClr val="DBE3EA"/>
+                      </a:solidFill>
+                      <a:prstDash val="solid"/>
+                      <a:round/>
+                      <a:headEnd type="none" w="med" len="med"/>
+                      <a:tailEnd type="none" w="med" len="med"/>
+                    </a:lnB>
+                  </a:tcPr>
+                </a:tc>
+                <a:tc>
+                  <a:txBody>
+                    <a:bodyPr/>
+                    <a:lstStyle/>
+                    <a:p>
+                      <a:pPr algn="l" indent="0" marL="0">
+                        <a:buNone/>
+                      </a:pPr>
+                      <a:r>
+                        <a:rPr lang="en-US" sz="1050" dirty="0">
+                          <a:solidFill>
+                            <a:srgbClr val="1A2733"/>
+                          </a:solidFill>
+                          <a:latin typeface="Arial" pitchFamily="34" charset="0"/>
+                          <a:ea typeface="Arial" pitchFamily="34" charset="-122"/>
+                          <a:cs typeface="Arial" pitchFamily="34" charset="-120"/>
+                        </a:rPr>
+                        <a:t>Mọc ra xe không tồn tại ở phía sau gương (ghost point)</a:t>
+                      </a:r>
+                      <a:endParaRPr lang="en-US" sz="1200" dirty="0"/>
+                    </a:p>
+                    <a:p>
+                      <a:pPr algn="l" indent="0" marL="0">
+                        <a:buNone/>
+                      </a:pPr>
+                      <a:r>
+                        <a:rPr lang="en-US" sz="900" dirty="0">
+                          <a:solidFill>
+                            <a:srgbClr val="5F7183"/>
+                          </a:solidFill>
+                          <a:latin typeface="微軟正黑體" pitchFamily="34" charset="0"/>
+                          <a:ea typeface="微軟正黑體" pitchFamily="34" charset="-122"/>
+                          <a:cs typeface="微軟正黑體" pitchFamily="34" charset="-120"/>
+                        </a:rPr>
+                        <a:t>鏡子後面長出不存在的車（鬼點）</a:t>
+                      </a:r>
+                      <a:endParaRPr lang="en-US" sz="1200" dirty="0"/>
+                    </a:p>
+                  </a:txBody>
+                  <a:tcPr marL="63500" marR="63500" marT="38100" marB="38100" anchor="ctr">
+                    <a:lnL w="6350" cap="flat" cmpd="sng" algn="ctr">
+                      <a:solidFill>
+                        <a:srgbClr val="DBE3EA"/>
+                      </a:solidFill>
+                      <a:prstDash val="solid"/>
+                      <a:round/>
+                      <a:headEnd type="none" w="med" len="med"/>
+                      <a:tailEnd type="none" w="med" len="med"/>
+                    </a:lnL>
+                    <a:lnR w="6350" cap="flat" cmpd="sng" algn="ctr">
+                      <a:solidFill>
+                        <a:srgbClr val="DBE3EA"/>
+                      </a:solidFill>
+                      <a:prstDash val="solid"/>
+                      <a:round/>
+                      <a:headEnd type="none" w="med" len="med"/>
+                      <a:tailEnd type="none" w="med" len="med"/>
+                    </a:lnR>
+                    <a:lnT w="6350" cap="flat" cmpd="sng" algn="ctr">
+                      <a:solidFill>
+                        <a:srgbClr val="DBE3EA"/>
+                      </a:solidFill>
+                      <a:prstDash val="solid"/>
+                      <a:round/>
+                      <a:headEnd type="none" w="med" len="med"/>
+                      <a:tailEnd type="none" w="med" len="med"/>
+                    </a:lnT>
+                    <a:lnB w="6350" cap="flat" cmpd="sng" algn="ctr">
+                      <a:solidFill>
+                        <a:srgbClr val="DBE3EA"/>
+                      </a:solidFill>
+                      <a:prstDash val="solid"/>
+                      <a:round/>
+                      <a:headEnd type="none" w="med" len="med"/>
+                      <a:tailEnd type="none" w="med" len="med"/>
+                    </a:lnB>
+                  </a:tcPr>
+                </a:tc>
+                <a:tc>
+                  <a:txBody>
+                    <a:bodyPr/>
+                    <a:lstStyle/>
+                    <a:p>
+                      <a:pPr algn="l" indent="0" marL="0">
+                        <a:buNone/>
+                      </a:pPr>
+                      <a:r>
+                        <a:rPr lang="en-US" sz="1050" dirty="0">
+                          <a:solidFill>
+                            <a:srgbClr val="1A2733"/>
+                          </a:solidFill>
+                          <a:latin typeface="Arial" pitchFamily="34" charset="0"/>
+                          <a:ea typeface="Arial" pitchFamily="34" charset="-122"/>
+                          <a:cs typeface="Arial" pitchFamily="34" charset="-120"/>
+                        </a:rPr>
+                        <a:t>Nhiều lần phản hồi + lọc thời gian: ghost không ổn định</a:t>
+                      </a:r>
+                      <a:endParaRPr lang="en-US" sz="1200" dirty="0"/>
+                    </a:p>
+                    <a:p>
+                      <a:pPr algn="l" indent="0" marL="0">
+                        <a:buNone/>
+                      </a:pPr>
+                      <a:r>
+                        <a:rPr lang="en-US" sz="900" dirty="0">
+                          <a:solidFill>
+                            <a:srgbClr val="5F7183"/>
+                          </a:solidFill>
+                          <a:latin typeface="微軟正黑體" pitchFamily="34" charset="0"/>
+                          <a:ea typeface="微軟正黑體" pitchFamily="34" charset="-122"/>
+                          <a:cs typeface="微軟正黑體" pitchFamily="34" charset="-120"/>
+                        </a:rPr>
+                        <a:t>多次回波＋時間比對：鬼點不會穩定移動</a:t>
+                      </a:r>
+                      <a:endParaRPr lang="en-US" sz="1200" dirty="0"/>
+                    </a:p>
+                  </a:txBody>
+                  <a:tcPr marL="63500" marR="63500" marT="38100" marB="38100" anchor="ctr">
+                    <a:lnL w="6350" cap="flat" cmpd="sng" algn="ctr">
+                      <a:solidFill>
+                        <a:srgbClr val="DBE3EA"/>
+                      </a:solidFill>
+                      <a:prstDash val="solid"/>
+                      <a:round/>
+                      <a:headEnd type="none" w="med" len="med"/>
+                      <a:tailEnd type="none" w="med" len="med"/>
+                    </a:lnL>
+                    <a:lnR w="6350" cap="flat" cmpd="sng" algn="ctr">
+                      <a:solidFill>
+                        <a:srgbClr val="DBE3EA"/>
+                      </a:solidFill>
+                      <a:prstDash val="solid"/>
+                      <a:round/>
+                      <a:headEnd type="none" w="med" len="med"/>
+                      <a:tailEnd type="none" w="med" len="med"/>
+                    </a:lnR>
+                    <a:lnT w="6350" cap="flat" cmpd="sng" algn="ctr">
+                      <a:solidFill>
+                        <a:srgbClr val="DBE3EA"/>
+                      </a:solidFill>
+                      <a:prstDash val="solid"/>
+                      <a:round/>
+                      <a:headEnd type="none" w="med" len="med"/>
+                      <a:tailEnd type="none" w="med" len="med"/>
+                    </a:lnT>
+                    <a:lnB w="6350" cap="flat" cmpd="sng" algn="ctr">
+                      <a:solidFill>
+                        <a:srgbClr val="DBE3EA"/>
+                      </a:solidFill>
+                      <a:prstDash val="solid"/>
+                      <a:round/>
+                      <a:headEnd type="none" w="med" len="med"/>
+                      <a:tailEnd type="none" w="med" len="med"/>
+                    </a:lnB>
+                  </a:tcPr>
+                </a:tc>
+              </a:tr>
+              <a:tr h="347472">
+                <a:tc>
+                  <a:txBody>
+                    <a:bodyPr/>
+                    <a:lstStyle/>
+                    <a:p>
+                      <a:pPr algn="l" indent="0" marL="0">
+                        <a:buNone/>
+                      </a:pPr>
+                      <a:r>
+                        <a:rPr lang="en-US" sz="1050" b="1" dirty="0">
+                          <a:solidFill>
+                            <a:srgbClr val="0B1F3A"/>
+                          </a:solidFill>
+                          <a:latin typeface="Arial" pitchFamily="34" charset="0"/>
+                          <a:ea typeface="Arial" pitchFamily="34" charset="-122"/>
+                          <a:cs typeface="Arial" pitchFamily="34" charset="-120"/>
+                        </a:rPr>
+                        <a:t>Phản xạ ngược (áo phản quang, biển báo)</a:t>
+                      </a:r>
+                      <a:endParaRPr lang="en-US" sz="1200" dirty="0"/>
+                    </a:p>
+                    <a:p>
+                      <a:pPr algn="l" indent="0" marL="0">
+                        <a:buNone/>
+                      </a:pPr>
+                      <a:r>
+                        <a:rPr lang="en-US" sz="900" dirty="0">
+                          <a:solidFill>
+                            <a:srgbClr val="5F7183"/>
+                          </a:solidFill>
+                          <a:latin typeface="微軟正黑體" pitchFamily="34" charset="0"/>
+                          <a:ea typeface="微軟正黑體" pitchFamily="34" charset="-122"/>
+                          <a:cs typeface="微軟正黑體" pitchFamily="34" charset="-120"/>
+                        </a:rPr>
+                        <a:t>回歸反射（反光背心、路牌）</a:t>
+                      </a:r>
+                      <a:endParaRPr lang="en-US" sz="1200" dirty="0"/>
+                    </a:p>
+                  </a:txBody>
+                  <a:tcPr marL="63500" marR="63500" marT="38100" marB="38100" anchor="ctr">
+                    <a:lnL w="6350" cap="flat" cmpd="sng" algn="ctr">
+                      <a:solidFill>
+                        <a:srgbClr val="DBE3EA"/>
+                      </a:solidFill>
+                      <a:prstDash val="solid"/>
+                      <a:round/>
+                      <a:headEnd type="none" w="med" len="med"/>
+                      <a:tailEnd type="none" w="med" len="med"/>
+                    </a:lnL>
+                    <a:lnR w="6350" cap="flat" cmpd="sng" algn="ctr">
+                      <a:solidFill>
+                        <a:srgbClr val="DBE3EA"/>
+                      </a:solidFill>
+                      <a:prstDash val="solid"/>
+                      <a:round/>
+                      <a:headEnd type="none" w="med" len="med"/>
+                      <a:tailEnd type="none" w="med" len="med"/>
+                    </a:lnR>
+                    <a:lnT w="6350" cap="flat" cmpd="sng" algn="ctr">
+                      <a:solidFill>
+                        <a:srgbClr val="DBE3EA"/>
+                      </a:solidFill>
+                      <a:prstDash val="solid"/>
+                      <a:round/>
+                      <a:headEnd type="none" w="med" len="med"/>
+                      <a:tailEnd type="none" w="med" len="med"/>
+                    </a:lnT>
+                    <a:lnB w="6350" cap="flat" cmpd="sng" algn="ctr">
+                      <a:solidFill>
+                        <a:srgbClr val="DBE3EA"/>
+                      </a:solidFill>
+                      <a:prstDash val="solid"/>
+                      <a:round/>
+                      <a:headEnd type="none" w="med" len="med"/>
+                      <a:tailEnd type="none" w="med" len="med"/>
+                    </a:lnB>
+                  </a:tcPr>
+                </a:tc>
+                <a:tc>
+                  <a:txBody>
+                    <a:bodyPr/>
+                    <a:lstStyle/>
+                    <a:p>
+                      <a:pPr algn="l" indent="0" marL="0">
+                        <a:buNone/>
+                      </a:pPr>
+                      <a:r>
+                        <a:rPr lang="en-US" sz="1050" dirty="0">
+                          <a:solidFill>
+                            <a:srgbClr val="1A2733"/>
+                          </a:solidFill>
+                          <a:latin typeface="Arial" pitchFamily="34" charset="0"/>
+                          <a:ea typeface="Arial" pitchFamily="34" charset="-122"/>
+                          <a:cs typeface="Arial" pitchFamily="34" charset="-120"/>
+                        </a:rPr>
+                        <a:t>Sáng quá mức, thành một quầng sáng</a:t>
+                      </a:r>
+                      <a:endParaRPr lang="en-US" sz="1200" dirty="0"/>
+                    </a:p>
+                    <a:p>
+                      <a:pPr algn="l" indent="0" marL="0">
+                        <a:buNone/>
+                      </a:pPr>
+                      <a:r>
+                        <a:rPr lang="en-US" sz="900" dirty="0">
+                          <a:solidFill>
+                            <a:srgbClr val="5F7183"/>
+                          </a:solidFill>
+                          <a:latin typeface="微軟正黑體" pitchFamily="34" charset="0"/>
+                          <a:ea typeface="微軟正黑體" pitchFamily="34" charset="-122"/>
+                          <a:cs typeface="微軟正黑體" pitchFamily="34" charset="-120"/>
+                        </a:rPr>
+                        <a:t>亮到爆表，變成一團光暈</a:t>
+                      </a:r>
+                      <a:endParaRPr lang="en-US" sz="1200" dirty="0"/>
+                    </a:p>
+                  </a:txBody>
+                  <a:tcPr marL="63500" marR="63500" marT="38100" marB="38100" anchor="ctr">
+                    <a:lnL w="6350" cap="flat" cmpd="sng" algn="ctr">
+                      <a:solidFill>
+                        <a:srgbClr val="DBE3EA"/>
+                      </a:solidFill>
+                      <a:prstDash val="solid"/>
+                      <a:round/>
+                      <a:headEnd type="none" w="med" len="med"/>
+                      <a:tailEnd type="none" w="med" len="med"/>
+                    </a:lnL>
+                    <a:lnR w="6350" cap="flat" cmpd="sng" algn="ctr">
+                      <a:solidFill>
+                        <a:srgbClr val="DBE3EA"/>
+                      </a:solidFill>
+                      <a:prstDash val="solid"/>
+                      <a:round/>
+                      <a:headEnd type="none" w="med" len="med"/>
+                      <a:tailEnd type="none" w="med" len="med"/>
+                    </a:lnR>
+                    <a:lnT w="6350" cap="flat" cmpd="sng" algn="ctr">
+                      <a:solidFill>
+                        <a:srgbClr val="DBE3EA"/>
+                      </a:solidFill>
+                      <a:prstDash val="solid"/>
+                      <a:round/>
+                      <a:headEnd type="none" w="med" len="med"/>
+                      <a:tailEnd type="none" w="med" len="med"/>
+                    </a:lnT>
+                    <a:lnB w="6350" cap="flat" cmpd="sng" algn="ctr">
+                      <a:solidFill>
+                        <a:srgbClr val="DBE3EA"/>
+                      </a:solidFill>
+                      <a:prstDash val="solid"/>
+                      <a:round/>
+                      <a:headEnd type="none" w="med" len="med"/>
+                      <a:tailEnd type="none" w="med" len="med"/>
+                    </a:lnB>
+                  </a:tcPr>
+                </a:tc>
+                <a:tc>
+                  <a:txBody>
+                    <a:bodyPr/>
+                    <a:lstStyle/>
+                    <a:p>
+                      <a:pPr algn="l" indent="0" marL="0">
+                        <a:buNone/>
+                      </a:pPr>
+                      <a:r>
+                        <a:rPr lang="en-US" sz="1050" dirty="0">
+                          <a:solidFill>
+                            <a:srgbClr val="1A2733"/>
+                          </a:solidFill>
+                          <a:latin typeface="Arial" pitchFamily="34" charset="0"/>
+                          <a:ea typeface="Arial" pitchFamily="34" charset="-122"/>
+                          <a:cs typeface="Arial" pitchFamily="34" charset="-120"/>
+                        </a:rPr>
+                        <a:t>Xem cường độ: phân bố khác hẳn</a:t>
+                      </a:r>
+                      <a:endParaRPr lang="en-US" sz="1200" dirty="0"/>
+                    </a:p>
+                    <a:p>
+                      <a:pPr algn="l" indent="0" marL="0">
+                        <a:buNone/>
+                      </a:pPr>
+                      <a:r>
+                        <a:rPr lang="en-US" sz="900" dirty="0">
+                          <a:solidFill>
+                            <a:srgbClr val="5F7183"/>
+                          </a:solidFill>
+                          <a:latin typeface="微軟正黑體" pitchFamily="34" charset="0"/>
+                          <a:ea typeface="微軟正黑體" pitchFamily="34" charset="-122"/>
+                          <a:cs typeface="微軟正黑體" pitchFamily="34" charset="-120"/>
+                        </a:rPr>
+                        <a:t>看反射強度：分布和漫反射差很多</a:t>
+                      </a:r>
+                      <a:endParaRPr lang="en-US" sz="1200" dirty="0"/>
+                    </a:p>
+                  </a:txBody>
+                  <a:tcPr marL="63500" marR="63500" marT="38100" marB="38100" anchor="ctr">
+                    <a:lnL w="6350" cap="flat" cmpd="sng" algn="ctr">
+                      <a:solidFill>
+                        <a:srgbClr val="DBE3EA"/>
+                      </a:solidFill>
+                      <a:prstDash val="solid"/>
+                      <a:round/>
+                      <a:headEnd type="none" w="med" len="med"/>
+                      <a:tailEnd type="none" w="med" len="med"/>
+                    </a:lnL>
+                    <a:lnR w="6350" cap="flat" cmpd="sng" algn="ctr">
+                      <a:solidFill>
+                        <a:srgbClr val="DBE3EA"/>
+                      </a:solidFill>
+                      <a:prstDash val="solid"/>
+                      <a:round/>
+                      <a:headEnd type="none" w="med" len="med"/>
+                      <a:tailEnd type="none" w="med" len="med"/>
+                    </a:lnR>
+                    <a:lnT w="6350" cap="flat" cmpd="sng" algn="ctr">
+                      <a:solidFill>
+                        <a:srgbClr val="DBE3EA"/>
+                      </a:solidFill>
+                      <a:prstDash val="solid"/>
+                      <a:round/>
+                      <a:headEnd type="none" w="med" len="med"/>
+                      <a:tailEnd type="none" w="med" len="med"/>
+                    </a:lnT>
+                    <a:lnB w="6350" cap="flat" cmpd="sng" algn="ctr">
+                      <a:solidFill>
+                        <a:srgbClr val="DBE3EA"/>
+                      </a:solidFill>
+                      <a:prstDash val="solid"/>
+                      <a:round/>
+                      <a:headEnd type="none" w="med" len="med"/>
+                      <a:tailEnd type="none" w="med" len="med"/>
+                    </a:lnB>
+                  </a:tcPr>
+                </a:tc>
+              </a:tr>
+            </a:tbl>
+          </a:graphicData>
+        </a:graphic>
+      </p:graphicFrame>
+      <p:sp>
+        <p:nvSpPr>
+          <p:cNvPr id="4" name="Text 1"/>
           <p:cNvSpPr txBox="1"/>
           <p:nvPr/>
         </p:nvSpPr>
         <p:spPr>
           <a:xfrm>
-            <a:off x="502920" y="786384"/>
-            <a:ext cx="8046720" cy="1225296"/>
+            <a:off x="502920" y="3490659"/>
+            <a:ext cx="8138160" cy="457200"/>
           </a:xfrm>
           <a:prstGeom prst="rect">
             <a:avLst/>
@@ -8835,97 +10416,79 @@
           <a:p>
             <a:pPr indent="0" marL="0">
               <a:lnSpc>
-                <a:spcPct val="120000"/>
+                <a:spcPct val="116000"/>
               </a:lnSpc>
               <a:buNone/>
             </a:pPr>
             <a:r>
-              <a:rPr lang="en-US" sz="2300" b="1" dirty="0">
-                <a:solidFill>
-                  <a:srgbClr val="FFFFFF"/>
+              <a:rPr lang="en-US" sz="1200" b="1" dirty="0">
+                <a:solidFill>
+                  <a:srgbClr val="007F72"/>
                 </a:solidFill>
                 <a:latin typeface="Arial" pitchFamily="34" charset="0"/>
                 <a:ea typeface="Arial" pitchFamily="34" charset="-122"/>
                 <a:cs typeface="Arial" pitchFamily="34" charset="-120"/>
               </a:rPr>
-              <a:t>Mở công cụ, dùng công cụ nhỏ số ② để đổi «điểm mỗi giây» thành góc.</a:t>
-            </a:r>
-            <a:endParaRPr lang="en-US" sz="2300" dirty="0"/>
+              <a:t>Không chiêu nào chặn được hết. Cách thật là ghép một tổ cảm biến yếu ở chỗ khác nhau.</a:t>
+            </a:r>
+            <a:endParaRPr lang="en-US" sz="1200" dirty="0"/>
           </a:p>
           <a:p>
             <a:pPr indent="0" marL="0">
               <a:lnSpc>
-                <a:spcPct val="120000"/>
+                <a:spcPct val="116000"/>
               </a:lnSpc>
               <a:buNone/>
             </a:pPr>
             <a:r>
-              <a:rPr lang="en-US" sz="1500" dirty="0">
-                <a:solidFill>
-                  <a:srgbClr val="AFC3D4"/>
+              <a:rPr lang="en-US" sz="1100" dirty="0">
+                <a:solidFill>
+                  <a:srgbClr val="007F72"/>
                 </a:solidFill>
                 <a:latin typeface="微軟正黑體" pitchFamily="34" charset="0"/>
                 <a:ea typeface="微軟正黑體" pitchFamily="34" charset="-122"/>
                 <a:cs typeface="微軟正黑體" pitchFamily="34" charset="-120"/>
               </a:rPr>
-              <a:t>打開工具，用第②個小工具，把「每秒幾點」換算成角度。</a:t>
-            </a:r>
-            <a:endParaRPr lang="en-US" sz="2300" dirty="0"/>
+              <a:t>沒有一招擋得住全部。真正的解法是湊一組「弱點不一樣」的感測器。</a:t>
+            </a:r>
+            <a:endParaRPr lang="en-US" sz="1200" dirty="0"/>
           </a:p>
         </p:txBody>
       </p:sp>
-      <p:sp>
-        <p:nvSpPr>
-          <p:cNvPr id="6" name="Shape 4"/>
-          <p:cNvSpPr/>
+      <p:pic>
+        <p:nvPicPr>
+          <p:cNvPr id="6" name="Image 0" descr="/Users/tsengchenghsun/Class/carClass/Claude outputs/第五週(10-8)/src/logo.png">    </p:cNvPr>
+          <p:cNvPicPr>
+            <a:picLocks noChangeAspect="1"/>
+          </p:cNvPicPr>
           <p:nvPr/>
-        </p:nvSpPr>
-        <p:spPr>
-          <a:xfrm>
-            <a:off x="502920" y="1880384"/>
-            <a:ext cx="8138160" cy="621792"/>
-          </a:xfrm>
-          <a:prstGeom prst="roundRect">
-            <a:avLst>
-              <a:gd name="adj" fmla="val 11765"/>
-            </a:avLst>
-          </a:prstGeom>
-          <a:solidFill>
-            <a:srgbClr val="13314F"/>
-          </a:solidFill>
-          <a:ln/>
-        </p:spPr>
-      </p:sp>
-      <p:sp>
-        <p:nvSpPr>
-          <p:cNvPr id="7" name="Shape 5"/>
-          <p:cNvSpPr/>
-          <p:nvPr/>
-        </p:nvSpPr>
-        <p:spPr>
-          <a:xfrm>
-            <a:off x="667512" y="2026688"/>
-            <a:ext cx="329184" cy="329184"/>
-          </a:xfrm>
-          <a:prstGeom prst="ellipse">
+        </p:nvPicPr>
+        <p:blipFill>
+          <a:blip r:embed="rId1"/>
+          <a:stretch>
+            <a:fillRect/>
+          </a:stretch>
+        </p:blipFill>
+        <p:spPr>
+          <a:xfrm>
+            <a:off x="7882128" y="109728"/>
+            <a:ext cx="1097280" cy="242439"/>
+          </a:xfrm>
+          <a:prstGeom prst="rect">
             <a:avLst/>
           </a:prstGeom>
-          <a:solidFill>
-            <a:srgbClr val="00A896"/>
-          </a:solidFill>
-          <a:ln/>
-        </p:spPr>
-      </p:sp>
-      <p:sp>
-        <p:nvSpPr>
-          <p:cNvPr id="8" name="Text 6"/>
+        </p:spPr>
+      </p:pic>
+      <p:sp>
+        <p:nvSpPr>
+          <p:cNvPr id="7" name="Text 2"/>
           <p:cNvSpPr txBox="1"/>
           <p:nvPr/>
         </p:nvSpPr>
         <p:spPr>
           <a:xfrm>
-            <a:off x="667512" y="2054120"/>
-            <a:ext cx="329184" cy="274320"/>
+            <a:off x="109728" y="128016"/>
+            <a:ext cx="822960" cy="256032"/>
           </a:xfrm>
           <a:prstGeom prst="rect">
             <a:avLst/>
@@ -8937,34 +10500,34 @@
           <a:bodyPr wrap="square" lIns="0" tIns="0" rIns="0" bIns="0" rtlCol="0" anchor="ctr"/>
           <a:lstStyle/>
           <a:p>
-            <a:pPr algn="ctr" indent="0" marL="0">
+            <a:pPr indent="0" marL="0">
               <a:buNone/>
             </a:pPr>
             <a:r>
-              <a:rPr lang="en-US" sz="1200" b="1" dirty="0">
-                <a:solidFill>
-                  <a:srgbClr val="FFFFFF"/>
+              <a:rPr lang="en-US" sz="900" dirty="0">
+                <a:solidFill>
+                  <a:srgbClr val="5F7183"/>
                 </a:solidFill>
                 <a:latin typeface="Arial" pitchFamily="34" charset="0"/>
                 <a:ea typeface="Arial" pitchFamily="34" charset="-122"/>
                 <a:cs typeface="Arial" pitchFamily="34" charset="-120"/>
               </a:rPr>
-              <a:t>1</a:t>
-            </a:r>
-            <a:endParaRPr lang="en-US" sz="1200" dirty="0"/>
+              <a:t>10 / 15</a:t>
+            </a:r>
+            <a:endParaRPr lang="en-US" sz="900" dirty="0"/>
           </a:p>
         </p:txBody>
       </p:sp>
       <p:sp>
         <p:nvSpPr>
-          <p:cNvPr id="9" name="Text 7"/>
+          <p:cNvPr id="8" name="Text 3"/>
           <p:cNvSpPr txBox="1"/>
           <p:nvPr/>
         </p:nvSpPr>
         <p:spPr>
           <a:xfrm>
-            <a:off x="1161288" y="1926104"/>
-            <a:ext cx="7296912" cy="548640"/>
+            <a:off x="960120" y="128016"/>
+            <a:ext cx="2011680" cy="256032"/>
           </a:xfrm>
           <a:prstGeom prst="rect">
             <a:avLst/>
@@ -8973,465 +10536,16 @@
           <a:ln/>
         </p:spPr>
         <p:txBody>
-          <a:bodyPr wrap="square" lIns="0" tIns="0" rIns="0" bIns="0" rtlCol="0" anchor="t"/>
-          <a:lstStyle/>
-          <a:p>
-            <a:pPr indent="0" marL="0">
-              <a:lnSpc>
-                <a:spcPct val="114000"/>
-              </a:lnSpc>
-              <a:buNone/>
-            </a:pPr>
-            <a:r>
-              <a:rPr lang="en-US" sz="1250" b="1" dirty="0">
-                <a:solidFill>
-                  <a:srgbClr val="FFFFFF"/>
-                </a:solidFill>
-                <a:latin typeface="Arial" pitchFamily="34" charset="0"/>
-                <a:ea typeface="Arial" pitchFamily="34" charset="-122"/>
-                <a:cs typeface="Arial" pitchFamily="34" charset="-120"/>
-              </a:rPr>
-              <a:t>Đặt 64 kênh, 1024 điểm mỗi vòng, 10 Hz — số điểm mỗi giây là bao nhiêu?</a:t>
-            </a:r>
-            <a:endParaRPr lang="en-US" sz="1250" dirty="0"/>
-          </a:p>
-          <a:p>
-            <a:pPr indent="0" marL="0">
-              <a:lnSpc>
-                <a:spcPct val="114000"/>
-              </a:lnSpc>
-              <a:buNone/>
-            </a:pPr>
-            <a:r>
-              <a:rPr lang="en-US" sz="1150" dirty="0">
-                <a:solidFill>
-                  <a:srgbClr val="AFC3D4"/>
-                </a:solidFill>
-                <a:latin typeface="微軟正黑體" pitchFamily="34" charset="0"/>
-                <a:ea typeface="微軟正黑體" pitchFamily="34" charset="-122"/>
-                <a:cs typeface="微軟正黑體" pitchFamily="34" charset="-120"/>
-              </a:rPr>
-              <a:t>設成 64 線、每圈 1024 點、10 Hz——每秒點數是多少？</a:t>
-            </a:r>
-            <a:endParaRPr lang="en-US" sz="1250" dirty="0"/>
-          </a:p>
-        </p:txBody>
-      </p:sp>
-      <p:sp>
-        <p:nvSpPr>
-          <p:cNvPr id="10" name="Shape 8"/>
-          <p:cNvSpPr/>
-          <p:nvPr/>
-        </p:nvSpPr>
-        <p:spPr>
-          <a:xfrm>
-            <a:off x="502920" y="2593616"/>
-            <a:ext cx="8138160" cy="621792"/>
-          </a:xfrm>
-          <a:prstGeom prst="roundRect">
-            <a:avLst>
-              <a:gd name="adj" fmla="val 11765"/>
-            </a:avLst>
-          </a:prstGeom>
-          <a:solidFill>
-            <a:srgbClr val="13314F"/>
-          </a:solidFill>
-          <a:ln/>
-        </p:spPr>
-      </p:sp>
-      <p:sp>
-        <p:nvSpPr>
-          <p:cNvPr id="11" name="Shape 9"/>
-          <p:cNvSpPr/>
-          <p:nvPr/>
-        </p:nvSpPr>
-        <p:spPr>
-          <a:xfrm>
-            <a:off x="667512" y="2739920"/>
-            <a:ext cx="329184" cy="329184"/>
-          </a:xfrm>
-          <a:prstGeom prst="ellipse">
-            <a:avLst/>
-          </a:prstGeom>
-          <a:solidFill>
-            <a:srgbClr val="00A896"/>
-          </a:solidFill>
-          <a:ln/>
-        </p:spPr>
-      </p:sp>
-      <p:sp>
-        <p:nvSpPr>
-          <p:cNvPr id="12" name="Text 10"/>
-          <p:cNvSpPr txBox="1"/>
-          <p:nvPr/>
-        </p:nvSpPr>
-        <p:spPr>
-          <a:xfrm>
-            <a:off x="667512" y="2767352"/>
-            <a:ext cx="329184" cy="274320"/>
-          </a:xfrm>
-          <a:prstGeom prst="rect">
-            <a:avLst/>
-          </a:prstGeom>
-          <a:noFill/>
-          <a:ln/>
-        </p:spPr>
-        <p:txBody>
           <a:bodyPr wrap="square" lIns="0" tIns="0" rIns="0" bIns="0" rtlCol="0" anchor="ctr"/>
           <a:lstStyle/>
           <a:p>
-            <a:pPr algn="ctr" indent="0" marL="0">
-              <a:buNone/>
-            </a:pPr>
-            <a:r>
-              <a:rPr lang="en-US" sz="1200" b="1" dirty="0">
-                <a:solidFill>
-                  <a:srgbClr val="FFFFFF"/>
-                </a:solidFill>
-                <a:latin typeface="Arial" pitchFamily="34" charset="0"/>
-                <a:ea typeface="Arial" pitchFamily="34" charset="-122"/>
-                <a:cs typeface="Arial" pitchFamily="34" charset="-120"/>
-              </a:rPr>
-              <a:t>2</a:t>
-            </a:r>
-            <a:endParaRPr lang="en-US" sz="1200" dirty="0"/>
-          </a:p>
-        </p:txBody>
-      </p:sp>
-      <p:sp>
-        <p:nvSpPr>
-          <p:cNvPr id="13" name="Text 11"/>
-          <p:cNvSpPr txBox="1"/>
-          <p:nvPr/>
-        </p:nvSpPr>
-        <p:spPr>
-          <a:xfrm>
-            <a:off x="1161288" y="2639336"/>
-            <a:ext cx="7296912" cy="548640"/>
-          </a:xfrm>
-          <a:prstGeom prst="rect">
-            <a:avLst/>
-          </a:prstGeom>
-          <a:noFill/>
-          <a:ln/>
-        </p:spPr>
-        <p:txBody>
-          <a:bodyPr wrap="square" lIns="0" tIns="0" rIns="0" bIns="0" rtlCol="0" anchor="t"/>
-          <a:lstStyle/>
-          <a:p>
-            <a:pPr indent="0" marL="0">
-              <a:lnSpc>
-                <a:spcPct val="114000"/>
-              </a:lnSpc>
-              <a:buNone/>
-            </a:pPr>
-            <a:r>
-              <a:rPr lang="en-US" sz="1250" b="1" dirty="0">
-                <a:solidFill>
-                  <a:srgbClr val="FFFFFF"/>
-                </a:solidFill>
-                <a:latin typeface="Arial" pitchFamily="34" charset="0"/>
-                <a:ea typeface="Arial" pitchFamily="34" charset="-122"/>
-                <a:cs typeface="Arial" pitchFamily="34" charset="-120"/>
-              </a:rPr>
-              <a:t>Phân giải ngang lúc đó là bao nhiêu độ? Ở 40 m hai điểm cách nhau mấy centimet?</a:t>
-            </a:r>
-            <a:endParaRPr lang="en-US" sz="1250" dirty="0"/>
-          </a:p>
-          <a:p>
-            <a:pPr indent="0" marL="0">
-              <a:lnSpc>
-                <a:spcPct val="114000"/>
-              </a:lnSpc>
-              <a:buNone/>
-            </a:pPr>
-            <a:r>
-              <a:rPr lang="en-US" sz="1150" dirty="0">
-                <a:solidFill>
-                  <a:srgbClr val="AFC3D4"/>
-                </a:solidFill>
-                <a:latin typeface="微軟正黑體" pitchFamily="34" charset="0"/>
-                <a:ea typeface="微軟正黑體" pitchFamily="34" charset="-122"/>
-                <a:cs typeface="微軟正黑體" pitchFamily="34" charset="-120"/>
-              </a:rPr>
-              <a:t>這時候水平角解析度是幾度？40 公尺處兩個點相距幾公分？</a:t>
-            </a:r>
-            <a:endParaRPr lang="en-US" sz="1250" dirty="0"/>
-          </a:p>
-        </p:txBody>
-      </p:sp>
-      <p:sp>
-        <p:nvSpPr>
-          <p:cNvPr id="14" name="Shape 12"/>
-          <p:cNvSpPr/>
-          <p:nvPr/>
-        </p:nvSpPr>
-        <p:spPr>
-          <a:xfrm>
-            <a:off x="502920" y="3306848"/>
-            <a:ext cx="8138160" cy="621792"/>
-          </a:xfrm>
-          <a:prstGeom prst="roundRect">
-            <a:avLst>
-              <a:gd name="adj" fmla="val 11765"/>
-            </a:avLst>
-          </a:prstGeom>
-          <a:solidFill>
-            <a:srgbClr val="13314F"/>
-          </a:solidFill>
-          <a:ln/>
-        </p:spPr>
-      </p:sp>
-      <p:sp>
-        <p:nvSpPr>
-          <p:cNvPr id="15" name="Shape 13"/>
-          <p:cNvSpPr/>
-          <p:nvPr/>
-        </p:nvSpPr>
-        <p:spPr>
-          <a:xfrm>
-            <a:off x="667512" y="3453152"/>
-            <a:ext cx="329184" cy="329184"/>
-          </a:xfrm>
-          <a:prstGeom prst="ellipse">
-            <a:avLst/>
-          </a:prstGeom>
-          <a:solidFill>
-            <a:srgbClr val="00A896"/>
-          </a:solidFill>
-          <a:ln/>
-        </p:spPr>
-      </p:sp>
-      <p:sp>
-        <p:nvSpPr>
-          <p:cNvPr id="16" name="Text 14"/>
-          <p:cNvSpPr txBox="1"/>
-          <p:nvPr/>
-        </p:nvSpPr>
-        <p:spPr>
-          <a:xfrm>
-            <a:off x="667512" y="3480584"/>
-            <a:ext cx="329184" cy="274320"/>
-          </a:xfrm>
-          <a:prstGeom prst="rect">
-            <a:avLst/>
-          </a:prstGeom>
-          <a:noFill/>
-          <a:ln/>
-        </p:spPr>
-        <p:txBody>
-          <a:bodyPr wrap="square" lIns="0" tIns="0" rIns="0" bIns="0" rtlCol="0" anchor="ctr"/>
-          <a:lstStyle/>
-          <a:p>
-            <a:pPr algn="ctr" indent="0" marL="0">
-              <a:buNone/>
-            </a:pPr>
-            <a:r>
-              <a:rPr lang="en-US" sz="1200" b="1" dirty="0">
-                <a:solidFill>
-                  <a:srgbClr val="FFFFFF"/>
-                </a:solidFill>
-                <a:latin typeface="Arial" pitchFamily="34" charset="0"/>
-                <a:ea typeface="Arial" pitchFamily="34" charset="-122"/>
-                <a:cs typeface="Arial" pitchFamily="34" charset="-120"/>
-              </a:rPr>
-              <a:t>3</a:t>
-            </a:r>
-            <a:endParaRPr lang="en-US" sz="1200" dirty="0"/>
-          </a:p>
-        </p:txBody>
-      </p:sp>
-      <p:sp>
-        <p:nvSpPr>
-          <p:cNvPr id="17" name="Text 15"/>
-          <p:cNvSpPr txBox="1"/>
-          <p:nvPr/>
-        </p:nvSpPr>
-        <p:spPr>
-          <a:xfrm>
-            <a:off x="1161288" y="3352568"/>
-            <a:ext cx="7296912" cy="548640"/>
-          </a:xfrm>
-          <a:prstGeom prst="rect">
-            <a:avLst/>
-          </a:prstGeom>
-          <a:noFill/>
-          <a:ln/>
-        </p:spPr>
-        <p:txBody>
-          <a:bodyPr wrap="square" lIns="0" tIns="0" rIns="0" bIns="0" rtlCol="0" anchor="t"/>
-          <a:lstStyle/>
-          <a:p>
-            <a:pPr indent="0" marL="0">
-              <a:lnSpc>
-                <a:spcPct val="114000"/>
-              </a:lnSpc>
-              <a:buNone/>
-            </a:pPr>
-            <a:r>
-              <a:rPr lang="en-US" sz="1250" b="1" dirty="0">
-                <a:solidFill>
-                  <a:srgbClr val="FFFFFF"/>
-                </a:solidFill>
-                <a:latin typeface="Arial" pitchFamily="34" charset="0"/>
-                <a:ea typeface="Arial" pitchFamily="34" charset="-122"/>
-                <a:cs typeface="Arial" pitchFamily="34" charset="-120"/>
-              </a:rPr>
-              <a:t>Đổi sang 2048 điểm mỗi vòng: hai con số đó đổi thế nào?</a:t>
-            </a:r>
-            <a:endParaRPr lang="en-US" sz="1250" dirty="0"/>
-          </a:p>
-          <a:p>
-            <a:pPr indent="0" marL="0">
-              <a:lnSpc>
-                <a:spcPct val="114000"/>
-              </a:lnSpc>
-              <a:buNone/>
-            </a:pPr>
-            <a:r>
-              <a:rPr lang="en-US" sz="1150" dirty="0">
-                <a:solidFill>
-                  <a:srgbClr val="AFC3D4"/>
-                </a:solidFill>
-                <a:latin typeface="微軟正黑體" pitchFamily="34" charset="0"/>
-                <a:ea typeface="微軟正黑體" pitchFamily="34" charset="-122"/>
-                <a:cs typeface="微軟正黑體" pitchFamily="34" charset="-120"/>
-              </a:rPr>
-              <a:t>改成每圈 2048 點：這兩個數字怎麼變？</a:t>
-            </a:r>
-            <a:endParaRPr lang="en-US" sz="1250" dirty="0"/>
-          </a:p>
-        </p:txBody>
-      </p:sp>
-      <p:sp>
-        <p:nvSpPr>
-          <p:cNvPr id="18" name="Text 16"/>
-          <p:cNvSpPr txBox="1"/>
-          <p:nvPr/>
-        </p:nvSpPr>
-        <p:spPr>
-          <a:xfrm>
-            <a:off x="502920" y="4056656"/>
-            <a:ext cx="8046720" cy="457200"/>
-          </a:xfrm>
-          <a:prstGeom prst="rect">
-            <a:avLst/>
-          </a:prstGeom>
-          <a:noFill/>
-          <a:ln/>
-        </p:spPr>
-        <p:txBody>
-          <a:bodyPr wrap="square" lIns="0" tIns="0" rIns="0" bIns="0" rtlCol="0" anchor="t"/>
-          <a:lstStyle/>
-          <a:p>
-            <a:pPr indent="0" marL="0">
-              <a:lnSpc>
-                <a:spcPct val="116000"/>
-              </a:lnSpc>
-              <a:buNone/>
-            </a:pPr>
-            <a:r>
-              <a:rPr lang="en-US" sz="1250" b="1" dirty="0">
-                <a:solidFill>
-                  <a:srgbClr val="FFB020"/>
-                </a:solidFill>
-                <a:latin typeface="Arial" pitchFamily="34" charset="0"/>
-                <a:ea typeface="Arial" pitchFamily="34" charset="-122"/>
-                <a:cs typeface="Arial" pitchFamily="34" charset="-120"/>
-              </a:rPr>
-              <a:t>Datasheet hay chỉ ghi «điểm mỗi giây» — con số oai nhất, nhưng không dùng thẳng được.</a:t>
-            </a:r>
-            <a:endParaRPr lang="en-US" sz="1250" dirty="0"/>
-          </a:p>
-          <a:p>
-            <a:pPr indent="0" marL="0">
-              <a:lnSpc>
-                <a:spcPct val="116000"/>
-              </a:lnSpc>
-              <a:buNone/>
-            </a:pPr>
-            <a:r>
-              <a:rPr lang="en-US" sz="1150" dirty="0">
-                <a:solidFill>
-                  <a:srgbClr val="FFB020"/>
-                </a:solidFill>
-                <a:latin typeface="微軟正黑體" pitchFamily="34" charset="0"/>
-                <a:ea typeface="微軟正黑體" pitchFamily="34" charset="-122"/>
-                <a:cs typeface="微軟正黑體" pitchFamily="34" charset="-120"/>
-              </a:rPr>
-              <a:t>規格表常常只寫「每秒幾點」——那是最威風的數字，可是不能直接拿來用。</a:t>
-            </a:r>
-            <a:endParaRPr lang="en-US" sz="1250" dirty="0"/>
-          </a:p>
-        </p:txBody>
-      </p:sp>
-      <p:sp>
-        <p:nvSpPr>
-          <p:cNvPr id="20" name="Text 17"/>
-          <p:cNvSpPr txBox="1"/>
-          <p:nvPr/>
-        </p:nvSpPr>
-        <p:spPr>
-          <a:xfrm>
-            <a:off x="109728" y="128016"/>
-            <a:ext cx="822960" cy="256032"/>
-          </a:xfrm>
-          <a:prstGeom prst="rect">
-            <a:avLst/>
-          </a:prstGeom>
-          <a:noFill/>
-          <a:ln/>
-        </p:spPr>
-        <p:txBody>
-          <a:bodyPr wrap="square" lIns="0" tIns="0" rIns="0" bIns="0" rtlCol="0" anchor="ctr"/>
-          <a:lstStyle/>
-          <a:p>
             <a:pPr indent="0" marL="0">
               <a:buNone/>
             </a:pPr>
             <a:r>
               <a:rPr lang="en-US" sz="900" dirty="0">
                 <a:solidFill>
-                  <a:srgbClr val="9FB3C8"/>
-                </a:solidFill>
-                <a:latin typeface="Arial" pitchFamily="34" charset="0"/>
-                <a:ea typeface="Arial" pitchFamily="34" charset="-122"/>
-                <a:cs typeface="Arial" pitchFamily="34" charset="-120"/>
-              </a:rPr>
-              <a:t>10 / 14</a:t>
-            </a:r>
-            <a:endParaRPr lang="en-US" sz="900" dirty="0"/>
-          </a:p>
-        </p:txBody>
-      </p:sp>
-      <p:sp>
-        <p:nvSpPr>
-          <p:cNvPr id="21" name="Text 18"/>
-          <p:cNvSpPr txBox="1"/>
-          <p:nvPr/>
-        </p:nvSpPr>
-        <p:spPr>
-          <a:xfrm>
-            <a:off x="960120" y="128016"/>
-            <a:ext cx="2011680" cy="256032"/>
-          </a:xfrm>
-          <a:prstGeom prst="rect">
-            <a:avLst/>
-          </a:prstGeom>
-          <a:noFill/>
-          <a:ln/>
-        </p:spPr>
-        <p:txBody>
-          <a:bodyPr wrap="square" lIns="0" tIns="0" rIns="0" bIns="0" rtlCol="0" anchor="ctr"/>
-          <a:lstStyle/>
-          <a:p>
-            <a:pPr indent="0" marL="0">
-              <a:buNone/>
-            </a:pPr>
-            <a:r>
-              <a:rPr lang="en-US" sz="900" dirty="0">
-                <a:solidFill>
-                  <a:srgbClr val="9FB3C8"/>
+                  <a:srgbClr val="5F7183"/>
                 </a:solidFill>
                 <a:latin typeface="Arial" pitchFamily="34" charset="0"/>
                 <a:ea typeface="Arial" pitchFamily="34" charset="-122"/>
@@ -9530,8 +10644,8 @@
         </p:nvSpPr>
         <p:spPr>
           <a:xfrm>
-            <a:off x="502920" y="1691640"/>
-            <a:ext cx="4572000" cy="310896"/>
+            <a:off x="502920" y="475488"/>
+            <a:ext cx="6766560" cy="274320"/>
           </a:xfrm>
           <a:prstGeom prst="rect">
             <a:avLst/>
@@ -9547,7 +10661,7 @@
               <a:buNone/>
             </a:pPr>
             <a:r>
-              <a:rPr lang="en-US" sz="1350" b="1" dirty="0">
+              <a:rPr lang="en-US" sz="1250" b="1" dirty="0">
                 <a:solidFill>
                   <a:srgbClr val="FFB020"/>
                 </a:solidFill>
@@ -9555,9 +10669,9 @@
                 <a:ea typeface="Arial" pitchFamily="34" charset="-122"/>
                 <a:cs typeface="Arial" pitchFamily="34" charset="-120"/>
               </a:rPr>
-              <a:t>Phần 3 / 3</a:t>
-            </a:r>
-            <a:endParaRPr lang="en-US" sz="1350" dirty="0"/>
+              <a:t>Thử nhanh · 小練習（3 分鐘動手）</a:t>
+            </a:r>
+            <a:endParaRPr lang="en-US" sz="1250" dirty="0"/>
           </a:p>
         </p:txBody>
       </p:sp>
@@ -9569,8 +10683,8 @@
         </p:nvSpPr>
         <p:spPr>
           <a:xfrm>
-            <a:off x="502920" y="2048256"/>
-            <a:ext cx="7315200" cy="1188720"/>
+            <a:off x="502920" y="786384"/>
+            <a:ext cx="8046720" cy="1225296"/>
           </a:xfrm>
           <a:prstGeom prst="rect">
             <a:avLst/>
@@ -9584,12 +10698,12 @@
           <a:p>
             <a:pPr indent="0" marL="0">
               <a:lnSpc>
-                <a:spcPct val="118000"/>
+                <a:spcPct val="120000"/>
               </a:lnSpc>
               <a:buNone/>
             </a:pPr>
             <a:r>
-              <a:rPr lang="en-US" sz="2900" b="1" dirty="0">
+              <a:rPr lang="en-US" sz="2300" b="1" dirty="0">
                 <a:solidFill>
                   <a:srgbClr val="FFFFFF"/>
                 </a:solidFill>
@@ -9597,19 +10711,19 @@
                 <a:ea typeface="Arial" pitchFamily="34" charset="-122"/>
                 <a:cs typeface="Arial" pitchFamily="34" charset="-120"/>
               </a:rPr>
-              <a:t>Hai cảm biến tốt, ghép lại vẫn sai</a:t>
-            </a:r>
-            <a:endParaRPr lang="en-US" sz="2900" dirty="0"/>
+              <a:t>Mở công cụ, dùng công cụ nhỏ số ② để đổi «điểm mỗi giây» thành góc.</a:t>
+            </a:r>
+            <a:endParaRPr lang="en-US" sz="2300" dirty="0"/>
           </a:p>
           <a:p>
             <a:pPr indent="0" marL="0">
               <a:lnSpc>
-                <a:spcPct val="118000"/>
+                <a:spcPct val="120000"/>
               </a:lnSpc>
               <a:buNone/>
             </a:pPr>
             <a:r>
-              <a:rPr lang="en-US" sz="1700" dirty="0">
+              <a:rPr lang="en-US" sz="1500" dirty="0">
                 <a:solidFill>
                   <a:srgbClr val="AFC3D4"/>
                 </a:solidFill>
@@ -9617,22 +10731,64 @@
                 <a:ea typeface="微軟正黑體" pitchFamily="34" charset="-122"/>
                 <a:cs typeface="微軟正黑體" pitchFamily="34" charset="-120"/>
               </a:rPr>
-              <a:t>兩顆都是好的，合起來還是錯的</a:t>
-            </a:r>
-            <a:endParaRPr lang="en-US" sz="2900" dirty="0"/>
+              <a:t>打開工具，用第②個小工具，把「每秒幾點」換算成角度。</a:t>
+            </a:r>
+            <a:endParaRPr lang="en-US" sz="2300" dirty="0"/>
           </a:p>
         </p:txBody>
       </p:sp>
       <p:sp>
         <p:nvSpPr>
-          <p:cNvPr id="6" name="Text 4"/>
+          <p:cNvPr id="6" name="Shape 4"/>
+          <p:cNvSpPr/>
+          <p:nvPr/>
+        </p:nvSpPr>
+        <p:spPr>
+          <a:xfrm>
+            <a:off x="502920" y="1880384"/>
+            <a:ext cx="8138160" cy="621792"/>
+          </a:xfrm>
+          <a:prstGeom prst="roundRect">
+            <a:avLst>
+              <a:gd name="adj" fmla="val 11765"/>
+            </a:avLst>
+          </a:prstGeom>
+          <a:solidFill>
+            <a:srgbClr val="13314F"/>
+          </a:solidFill>
+          <a:ln/>
+        </p:spPr>
+      </p:sp>
+      <p:sp>
+        <p:nvSpPr>
+          <p:cNvPr id="7" name="Shape 5"/>
+          <p:cNvSpPr/>
+          <p:nvPr/>
+        </p:nvSpPr>
+        <p:spPr>
+          <a:xfrm>
+            <a:off x="667512" y="2026688"/>
+            <a:ext cx="329184" cy="329184"/>
+          </a:xfrm>
+          <a:prstGeom prst="ellipse">
+            <a:avLst/>
+          </a:prstGeom>
+          <a:solidFill>
+            <a:srgbClr val="00A896"/>
+          </a:solidFill>
+          <a:ln/>
+        </p:spPr>
+      </p:sp>
+      <p:sp>
+        <p:nvSpPr>
+          <p:cNvPr id="8" name="Text 6"/>
           <p:cNvSpPr txBox="1"/>
           <p:nvPr/>
         </p:nvSpPr>
         <p:spPr>
           <a:xfrm>
-            <a:off x="502920" y="3346704"/>
-            <a:ext cx="7315200" cy="640080"/>
+            <a:off x="667512" y="2054120"/>
+            <a:ext cx="329184" cy="274320"/>
           </a:xfrm>
           <a:prstGeom prst="rect">
             <a:avLst/>
@@ -9641,60 +10797,37 @@
           <a:ln/>
         </p:spPr>
         <p:txBody>
-          <a:bodyPr wrap="square" lIns="0" tIns="0" rIns="0" bIns="0" rtlCol="0" anchor="t"/>
+          <a:bodyPr wrap="square" lIns="0" tIns="0" rIns="0" bIns="0" rtlCol="0" anchor="ctr"/>
           <a:lstStyle/>
           <a:p>
-            <a:pPr indent="0" marL="0">
-              <a:lnSpc>
-                <a:spcPct val="120000"/>
-              </a:lnSpc>
+            <a:pPr algn="ctr" indent="0" marL="0">
               <a:buNone/>
             </a:pPr>
             <a:r>
-              <a:rPr lang="en-US" sz="1350" dirty="0">
-                <a:solidFill>
-                  <a:srgbClr val="AFC3D4"/>
+              <a:rPr lang="en-US" sz="1200" b="1" dirty="0">
+                <a:solidFill>
+                  <a:srgbClr val="FFFFFF"/>
                 </a:solidFill>
                 <a:latin typeface="Arial" pitchFamily="34" charset="0"/>
                 <a:ea typeface="Arial" pitchFamily="34" charset="-122"/>
                 <a:cs typeface="Arial" pitchFamily="34" charset="-120"/>
               </a:rPr>
-              <a:t>Hiệu chuẩn và đồng bộ thời gian</a:t>
-            </a:r>
-            <a:endParaRPr lang="en-US" sz="1350" dirty="0"/>
-          </a:p>
-          <a:p>
-            <a:pPr indent="0" marL="0">
-              <a:lnSpc>
-                <a:spcPct val="120000"/>
-              </a:lnSpc>
-              <a:buNone/>
-            </a:pPr>
-            <a:r>
-              <a:rPr lang="en-US" sz="1200" dirty="0">
-                <a:solidFill>
-                  <a:srgbClr val="8AA0B4"/>
-                </a:solidFill>
-                <a:latin typeface="微軟正黑體" pitchFamily="34" charset="0"/>
-                <a:ea typeface="微軟正黑體" pitchFamily="34" charset="-122"/>
-                <a:cs typeface="微軟正黑體" pitchFamily="34" charset="-120"/>
-              </a:rPr>
-              <a:t>標定與時間同步</a:t>
-            </a:r>
-            <a:endParaRPr lang="en-US" sz="1350" dirty="0"/>
+              <a:t>1</a:t>
+            </a:r>
+            <a:endParaRPr lang="en-US" sz="1200" dirty="0"/>
           </a:p>
         </p:txBody>
       </p:sp>
       <p:sp>
         <p:nvSpPr>
-          <p:cNvPr id="8" name="Text 5"/>
+          <p:cNvPr id="9" name="Text 7"/>
           <p:cNvSpPr txBox="1"/>
           <p:nvPr/>
         </p:nvSpPr>
         <p:spPr>
           <a:xfrm>
-            <a:off x="109728" y="128016"/>
-            <a:ext cx="822960" cy="256032"/>
+            <a:off x="1161288" y="1926104"/>
+            <a:ext cx="7296912" cy="548640"/>
           </a:xfrm>
           <a:prstGeom prst="rect">
             <a:avLst/>
@@ -9703,22 +10836,432 @@
           <a:ln/>
         </p:spPr>
         <p:txBody>
-          <a:bodyPr wrap="square" lIns="0" tIns="0" rIns="0" bIns="0" rtlCol="0" anchor="ctr"/>
+          <a:bodyPr wrap="square" lIns="0" tIns="0" rIns="0" bIns="0" rtlCol="0" anchor="t"/>
           <a:lstStyle/>
           <a:p>
             <a:pPr indent="0" marL="0">
+              <a:lnSpc>
+                <a:spcPct val="114000"/>
+              </a:lnSpc>
               <a:buNone/>
             </a:pPr>
             <a:r>
-              <a:rPr lang="en-US" sz="900" dirty="0">
-                <a:solidFill>
-                  <a:srgbClr val="9FB3C8"/>
+              <a:rPr lang="en-US" sz="1250" b="1" dirty="0">
+                <a:solidFill>
+                  <a:srgbClr val="FFFFFF"/>
                 </a:solidFill>
                 <a:latin typeface="Arial" pitchFamily="34" charset="0"/>
                 <a:ea typeface="Arial" pitchFamily="34" charset="-122"/>
                 <a:cs typeface="Arial" pitchFamily="34" charset="-120"/>
               </a:rPr>
-              <a:t>11 / 14</a:t>
+              <a:t>Đặt 64 kênh, 1024 điểm mỗi vòng, 10 Hz — số điểm mỗi giây là bao nhiêu?</a:t>
+            </a:r>
+            <a:endParaRPr lang="en-US" sz="1250" dirty="0"/>
+          </a:p>
+          <a:p>
+            <a:pPr indent="0" marL="0">
+              <a:lnSpc>
+                <a:spcPct val="114000"/>
+              </a:lnSpc>
+              <a:buNone/>
+            </a:pPr>
+            <a:r>
+              <a:rPr lang="en-US" sz="1150" dirty="0">
+                <a:solidFill>
+                  <a:srgbClr val="AFC3D4"/>
+                </a:solidFill>
+                <a:latin typeface="微軟正黑體" pitchFamily="34" charset="0"/>
+                <a:ea typeface="微軟正黑體" pitchFamily="34" charset="-122"/>
+                <a:cs typeface="微軟正黑體" pitchFamily="34" charset="-120"/>
+              </a:rPr>
+              <a:t>設成 64 線、每圈 1024 點、10 Hz——每秒點數是多少？</a:t>
+            </a:r>
+            <a:endParaRPr lang="en-US" sz="1250" dirty="0"/>
+          </a:p>
+        </p:txBody>
+      </p:sp>
+      <p:sp>
+        <p:nvSpPr>
+          <p:cNvPr id="10" name="Shape 8"/>
+          <p:cNvSpPr/>
+          <p:nvPr/>
+        </p:nvSpPr>
+        <p:spPr>
+          <a:xfrm>
+            <a:off x="502920" y="2593616"/>
+            <a:ext cx="8138160" cy="621792"/>
+          </a:xfrm>
+          <a:prstGeom prst="roundRect">
+            <a:avLst>
+              <a:gd name="adj" fmla="val 11765"/>
+            </a:avLst>
+          </a:prstGeom>
+          <a:solidFill>
+            <a:srgbClr val="13314F"/>
+          </a:solidFill>
+          <a:ln/>
+        </p:spPr>
+      </p:sp>
+      <p:sp>
+        <p:nvSpPr>
+          <p:cNvPr id="11" name="Shape 9"/>
+          <p:cNvSpPr/>
+          <p:nvPr/>
+        </p:nvSpPr>
+        <p:spPr>
+          <a:xfrm>
+            <a:off x="667512" y="2739920"/>
+            <a:ext cx="329184" cy="329184"/>
+          </a:xfrm>
+          <a:prstGeom prst="ellipse">
+            <a:avLst/>
+          </a:prstGeom>
+          <a:solidFill>
+            <a:srgbClr val="00A896"/>
+          </a:solidFill>
+          <a:ln/>
+        </p:spPr>
+      </p:sp>
+      <p:sp>
+        <p:nvSpPr>
+          <p:cNvPr id="12" name="Text 10"/>
+          <p:cNvSpPr txBox="1"/>
+          <p:nvPr/>
+        </p:nvSpPr>
+        <p:spPr>
+          <a:xfrm>
+            <a:off x="667512" y="2767352"/>
+            <a:ext cx="329184" cy="274320"/>
+          </a:xfrm>
+          <a:prstGeom prst="rect">
+            <a:avLst/>
+          </a:prstGeom>
+          <a:noFill/>
+          <a:ln/>
+        </p:spPr>
+        <p:txBody>
+          <a:bodyPr wrap="square" lIns="0" tIns="0" rIns="0" bIns="0" rtlCol="0" anchor="ctr"/>
+          <a:lstStyle/>
+          <a:p>
+            <a:pPr algn="ctr" indent="0" marL="0">
+              <a:buNone/>
+            </a:pPr>
+            <a:r>
+              <a:rPr lang="en-US" sz="1200" b="1" dirty="0">
+                <a:solidFill>
+                  <a:srgbClr val="FFFFFF"/>
+                </a:solidFill>
+                <a:latin typeface="Arial" pitchFamily="34" charset="0"/>
+                <a:ea typeface="Arial" pitchFamily="34" charset="-122"/>
+                <a:cs typeface="Arial" pitchFamily="34" charset="-120"/>
+              </a:rPr>
+              <a:t>2</a:t>
+            </a:r>
+            <a:endParaRPr lang="en-US" sz="1200" dirty="0"/>
+          </a:p>
+        </p:txBody>
+      </p:sp>
+      <p:sp>
+        <p:nvSpPr>
+          <p:cNvPr id="13" name="Text 11"/>
+          <p:cNvSpPr txBox="1"/>
+          <p:nvPr/>
+        </p:nvSpPr>
+        <p:spPr>
+          <a:xfrm>
+            <a:off x="1161288" y="2639336"/>
+            <a:ext cx="7296912" cy="548640"/>
+          </a:xfrm>
+          <a:prstGeom prst="rect">
+            <a:avLst/>
+          </a:prstGeom>
+          <a:noFill/>
+          <a:ln/>
+        </p:spPr>
+        <p:txBody>
+          <a:bodyPr wrap="square" lIns="0" tIns="0" rIns="0" bIns="0" rtlCol="0" anchor="t"/>
+          <a:lstStyle/>
+          <a:p>
+            <a:pPr indent="0" marL="0">
+              <a:lnSpc>
+                <a:spcPct val="114000"/>
+              </a:lnSpc>
+              <a:buNone/>
+            </a:pPr>
+            <a:r>
+              <a:rPr lang="en-US" sz="1250" b="1" dirty="0">
+                <a:solidFill>
+                  <a:srgbClr val="FFFFFF"/>
+                </a:solidFill>
+                <a:latin typeface="Arial" pitchFamily="34" charset="0"/>
+                <a:ea typeface="Arial" pitchFamily="34" charset="-122"/>
+                <a:cs typeface="Arial" pitchFamily="34" charset="-120"/>
+              </a:rPr>
+              <a:t>Phân giải ngang lúc đó là bao nhiêu độ? Ở 40 m hai điểm cách nhau mấy centimet?</a:t>
+            </a:r>
+            <a:endParaRPr lang="en-US" sz="1250" dirty="0"/>
+          </a:p>
+          <a:p>
+            <a:pPr indent="0" marL="0">
+              <a:lnSpc>
+                <a:spcPct val="114000"/>
+              </a:lnSpc>
+              <a:buNone/>
+            </a:pPr>
+            <a:r>
+              <a:rPr lang="en-US" sz="1150" dirty="0">
+                <a:solidFill>
+                  <a:srgbClr val="AFC3D4"/>
+                </a:solidFill>
+                <a:latin typeface="微軟正黑體" pitchFamily="34" charset="0"/>
+                <a:ea typeface="微軟正黑體" pitchFamily="34" charset="-122"/>
+                <a:cs typeface="微軟正黑體" pitchFamily="34" charset="-120"/>
+              </a:rPr>
+              <a:t>這時候水平角解析度是幾度？40 公尺處兩個點相距幾公分？</a:t>
+            </a:r>
+            <a:endParaRPr lang="en-US" sz="1250" dirty="0"/>
+          </a:p>
+        </p:txBody>
+      </p:sp>
+      <p:sp>
+        <p:nvSpPr>
+          <p:cNvPr id="14" name="Shape 12"/>
+          <p:cNvSpPr/>
+          <p:nvPr/>
+        </p:nvSpPr>
+        <p:spPr>
+          <a:xfrm>
+            <a:off x="502920" y="3306848"/>
+            <a:ext cx="8138160" cy="621792"/>
+          </a:xfrm>
+          <a:prstGeom prst="roundRect">
+            <a:avLst>
+              <a:gd name="adj" fmla="val 11765"/>
+            </a:avLst>
+          </a:prstGeom>
+          <a:solidFill>
+            <a:srgbClr val="13314F"/>
+          </a:solidFill>
+          <a:ln/>
+        </p:spPr>
+      </p:sp>
+      <p:sp>
+        <p:nvSpPr>
+          <p:cNvPr id="15" name="Shape 13"/>
+          <p:cNvSpPr/>
+          <p:nvPr/>
+        </p:nvSpPr>
+        <p:spPr>
+          <a:xfrm>
+            <a:off x="667512" y="3453152"/>
+            <a:ext cx="329184" cy="329184"/>
+          </a:xfrm>
+          <a:prstGeom prst="ellipse">
+            <a:avLst/>
+          </a:prstGeom>
+          <a:solidFill>
+            <a:srgbClr val="00A896"/>
+          </a:solidFill>
+          <a:ln/>
+        </p:spPr>
+      </p:sp>
+      <p:sp>
+        <p:nvSpPr>
+          <p:cNvPr id="16" name="Text 14"/>
+          <p:cNvSpPr txBox="1"/>
+          <p:nvPr/>
+        </p:nvSpPr>
+        <p:spPr>
+          <a:xfrm>
+            <a:off x="667512" y="3480584"/>
+            <a:ext cx="329184" cy="274320"/>
+          </a:xfrm>
+          <a:prstGeom prst="rect">
+            <a:avLst/>
+          </a:prstGeom>
+          <a:noFill/>
+          <a:ln/>
+        </p:spPr>
+        <p:txBody>
+          <a:bodyPr wrap="square" lIns="0" tIns="0" rIns="0" bIns="0" rtlCol="0" anchor="ctr"/>
+          <a:lstStyle/>
+          <a:p>
+            <a:pPr algn="ctr" indent="0" marL="0">
+              <a:buNone/>
+            </a:pPr>
+            <a:r>
+              <a:rPr lang="en-US" sz="1200" b="1" dirty="0">
+                <a:solidFill>
+                  <a:srgbClr val="FFFFFF"/>
+                </a:solidFill>
+                <a:latin typeface="Arial" pitchFamily="34" charset="0"/>
+                <a:ea typeface="Arial" pitchFamily="34" charset="-122"/>
+                <a:cs typeface="Arial" pitchFamily="34" charset="-120"/>
+              </a:rPr>
+              <a:t>3</a:t>
+            </a:r>
+            <a:endParaRPr lang="en-US" sz="1200" dirty="0"/>
+          </a:p>
+        </p:txBody>
+      </p:sp>
+      <p:sp>
+        <p:nvSpPr>
+          <p:cNvPr id="17" name="Text 15"/>
+          <p:cNvSpPr txBox="1"/>
+          <p:nvPr/>
+        </p:nvSpPr>
+        <p:spPr>
+          <a:xfrm>
+            <a:off x="1161288" y="3352568"/>
+            <a:ext cx="7296912" cy="548640"/>
+          </a:xfrm>
+          <a:prstGeom prst="rect">
+            <a:avLst/>
+          </a:prstGeom>
+          <a:noFill/>
+          <a:ln/>
+        </p:spPr>
+        <p:txBody>
+          <a:bodyPr wrap="square" lIns="0" tIns="0" rIns="0" bIns="0" rtlCol="0" anchor="t"/>
+          <a:lstStyle/>
+          <a:p>
+            <a:pPr indent="0" marL="0">
+              <a:lnSpc>
+                <a:spcPct val="114000"/>
+              </a:lnSpc>
+              <a:buNone/>
+            </a:pPr>
+            <a:r>
+              <a:rPr lang="en-US" sz="1250" b="1" dirty="0">
+                <a:solidFill>
+                  <a:srgbClr val="FFFFFF"/>
+                </a:solidFill>
+                <a:latin typeface="Arial" pitchFamily="34" charset="0"/>
+                <a:ea typeface="Arial" pitchFamily="34" charset="-122"/>
+                <a:cs typeface="Arial" pitchFamily="34" charset="-120"/>
+              </a:rPr>
+              <a:t>Đổi sang 2048 điểm mỗi vòng: hai con số đó đổi thế nào?</a:t>
+            </a:r>
+            <a:endParaRPr lang="en-US" sz="1250" dirty="0"/>
+          </a:p>
+          <a:p>
+            <a:pPr indent="0" marL="0">
+              <a:lnSpc>
+                <a:spcPct val="114000"/>
+              </a:lnSpc>
+              <a:buNone/>
+            </a:pPr>
+            <a:r>
+              <a:rPr lang="en-US" sz="1150" dirty="0">
+                <a:solidFill>
+                  <a:srgbClr val="AFC3D4"/>
+                </a:solidFill>
+                <a:latin typeface="微軟正黑體" pitchFamily="34" charset="0"/>
+                <a:ea typeface="微軟正黑體" pitchFamily="34" charset="-122"/>
+                <a:cs typeface="微軟正黑體" pitchFamily="34" charset="-120"/>
+              </a:rPr>
+              <a:t>改成每圈 2048 點：這兩個數字怎麼變？</a:t>
+            </a:r>
+            <a:endParaRPr lang="en-US" sz="1250" dirty="0"/>
+          </a:p>
+        </p:txBody>
+      </p:sp>
+      <p:sp>
+        <p:nvSpPr>
+          <p:cNvPr id="18" name="Text 16"/>
+          <p:cNvSpPr txBox="1"/>
+          <p:nvPr/>
+        </p:nvSpPr>
+        <p:spPr>
+          <a:xfrm>
+            <a:off x="502920" y="4056656"/>
+            <a:ext cx="8046720" cy="457200"/>
+          </a:xfrm>
+          <a:prstGeom prst="rect">
+            <a:avLst/>
+          </a:prstGeom>
+          <a:noFill/>
+          <a:ln/>
+        </p:spPr>
+        <p:txBody>
+          <a:bodyPr wrap="square" lIns="0" tIns="0" rIns="0" bIns="0" rtlCol="0" anchor="t"/>
+          <a:lstStyle/>
+          <a:p>
+            <a:pPr indent="0" marL="0">
+              <a:lnSpc>
+                <a:spcPct val="116000"/>
+              </a:lnSpc>
+              <a:buNone/>
+            </a:pPr>
+            <a:r>
+              <a:rPr lang="en-US" sz="1250" b="1" dirty="0">
+                <a:solidFill>
+                  <a:srgbClr val="FFB020"/>
+                </a:solidFill>
+                <a:latin typeface="Arial" pitchFamily="34" charset="0"/>
+                <a:ea typeface="Arial" pitchFamily="34" charset="-122"/>
+                <a:cs typeface="Arial" pitchFamily="34" charset="-120"/>
+              </a:rPr>
+              <a:t>Datasheet hay chỉ ghi «điểm mỗi giây» — con số oai nhất, nhưng không dùng thẳng được.</a:t>
+            </a:r>
+            <a:endParaRPr lang="en-US" sz="1250" dirty="0"/>
+          </a:p>
+          <a:p>
+            <a:pPr indent="0" marL="0">
+              <a:lnSpc>
+                <a:spcPct val="116000"/>
+              </a:lnSpc>
+              <a:buNone/>
+            </a:pPr>
+            <a:r>
+              <a:rPr lang="en-US" sz="1150" dirty="0">
+                <a:solidFill>
+                  <a:srgbClr val="FFB020"/>
+                </a:solidFill>
+                <a:latin typeface="微軟正黑體" pitchFamily="34" charset="0"/>
+                <a:ea typeface="微軟正黑體" pitchFamily="34" charset="-122"/>
+                <a:cs typeface="微軟正黑體" pitchFamily="34" charset="-120"/>
+              </a:rPr>
+              <a:t>規格表常常只寫「每秒幾點」——那是最威風的數字，可是不能直接拿來用。</a:t>
+            </a:r>
+            <a:endParaRPr lang="en-US" sz="1250" dirty="0"/>
+          </a:p>
+        </p:txBody>
+      </p:sp>
+      <p:sp>
+        <p:nvSpPr>
+          <p:cNvPr id="20" name="Text 17"/>
+          <p:cNvSpPr txBox="1"/>
+          <p:nvPr/>
+        </p:nvSpPr>
+        <p:spPr>
+          <a:xfrm>
+            <a:off x="109728" y="128016"/>
+            <a:ext cx="822960" cy="256032"/>
+          </a:xfrm>
+          <a:prstGeom prst="rect">
+            <a:avLst/>
+          </a:prstGeom>
+          <a:noFill/>
+          <a:ln/>
+        </p:spPr>
+        <p:txBody>
+          <a:bodyPr wrap="square" lIns="0" tIns="0" rIns="0" bIns="0" rtlCol="0" anchor="ctr"/>
+          <a:lstStyle/>
+          <a:p>
+            <a:pPr indent="0" marL="0">
+              <a:buNone/>
+            </a:pPr>
+            <a:r>
+              <a:rPr lang="en-US" sz="900" dirty="0">
+                <a:solidFill>
+                  <a:srgbClr val="9FB3C8"/>
+                </a:solidFill>
+                <a:latin typeface="Arial" pitchFamily="34" charset="0"/>
+                <a:ea typeface="Arial" pitchFamily="34" charset="-122"/>
+                <a:cs typeface="Arial" pitchFamily="34" charset="-120"/>
+              </a:rPr>
+              <a:t>11 / 15</a:t>
             </a:r>
             <a:endParaRPr lang="en-US" sz="900" dirty="0"/>
           </a:p>
@@ -9726,7 +11269,7 @@
       </p:sp>
       <p:sp>
         <p:nvSpPr>
-          <p:cNvPr id="9" name="Text 6"/>
+          <p:cNvPr id="21" name="Text 18"/>
           <p:cNvSpPr txBox="1"/>
           <p:nvPr/>
         </p:nvSpPr>
@@ -9774,6 +11317,326 @@
 <file path=ppt/slides/slide12.xml><?xml version="1.0" encoding="utf-8"?>
 <p:sld xmlns:a="http://schemas.openxmlformats.org/drawingml/2006/main" xmlns:r="http://schemas.openxmlformats.org/officeDocument/2006/relationships" xmlns:p="http://schemas.openxmlformats.org/presentationml/2006/main">
   <p:cSld name="Slide 12">
+    <p:bg>
+      <p:bgPr>
+        <a:solidFill>
+          <a:srgbClr val="0B1F3A"/>
+        </a:solidFill>
+      </p:bgPr>
+    </p:bg>
+    <p:spTree>
+      <p:nvGrpSpPr>
+        <p:cNvPr id="1" name=""/>
+        <p:cNvGrpSpPr/>
+        <p:nvPr/>
+      </p:nvGrpSpPr>
+      <p:grpSpPr>
+        <a:xfrm>
+          <a:off x="0" y="0"/>
+          <a:ext cx="1" cy="1"/>
+          <a:chOff x="0" y="0"/>
+          <a:chExt cx="0" cy="0"/>
+        </a:xfrm>
+      </p:grpSpPr>
+      <p:sp>
+        <p:nvSpPr>
+          <p:cNvPr id="2" name="Shape 0"/>
+          <p:cNvSpPr/>
+          <p:nvPr/>
+        </p:nvSpPr>
+        <p:spPr>
+          <a:xfrm>
+            <a:off x="6766560" y="-1371600"/>
+            <a:ext cx="4206240" cy="4206240"/>
+          </a:xfrm>
+          <a:prstGeom prst="ellipse">
+            <a:avLst/>
+          </a:prstGeom>
+          <a:solidFill>
+            <a:srgbClr val="13314F"/>
+          </a:solidFill>
+          <a:ln w="12700">
+            <a:solidFill>
+              <a:srgbClr val="13314F"/>
+            </a:solidFill>
+            <a:prstDash val="solid"/>
+          </a:ln>
+        </p:spPr>
+      </p:sp>
+      <p:sp>
+        <p:nvSpPr>
+          <p:cNvPr id="3" name="Shape 1"/>
+          <p:cNvSpPr/>
+          <p:nvPr/>
+        </p:nvSpPr>
+        <p:spPr>
+          <a:xfrm>
+            <a:off x="8138160" y="2103120"/>
+            <a:ext cx="2377440" cy="2377440"/>
+          </a:xfrm>
+          <a:prstGeom prst="ellipse">
+            <a:avLst/>
+          </a:prstGeom>
+          <a:solidFill>
+            <a:srgbClr val="007F72">
+              <a:alpha val="28000"/>
+            </a:srgbClr>
+          </a:solidFill>
+          <a:ln/>
+        </p:spPr>
+      </p:sp>
+      <p:sp>
+        <p:nvSpPr>
+          <p:cNvPr id="4" name="Text 2"/>
+          <p:cNvSpPr txBox="1"/>
+          <p:nvPr/>
+        </p:nvSpPr>
+        <p:spPr>
+          <a:xfrm>
+            <a:off x="502920" y="1691640"/>
+            <a:ext cx="4572000" cy="310896"/>
+          </a:xfrm>
+          <a:prstGeom prst="rect">
+            <a:avLst/>
+          </a:prstGeom>
+          <a:noFill/>
+          <a:ln/>
+        </p:spPr>
+        <p:txBody>
+          <a:bodyPr wrap="square" lIns="0" tIns="0" rIns="0" bIns="0" rtlCol="0" anchor="ctr"/>
+          <a:lstStyle/>
+          <a:p>
+            <a:pPr indent="0" marL="0">
+              <a:buNone/>
+            </a:pPr>
+            <a:r>
+              <a:rPr lang="en-US" sz="1350" b="1" dirty="0">
+                <a:solidFill>
+                  <a:srgbClr val="FFB020"/>
+                </a:solidFill>
+                <a:latin typeface="Arial" pitchFamily="34" charset="0"/>
+                <a:ea typeface="Arial" pitchFamily="34" charset="-122"/>
+                <a:cs typeface="Arial" pitchFamily="34" charset="-120"/>
+              </a:rPr>
+              <a:t>Phần 3 / 3</a:t>
+            </a:r>
+            <a:endParaRPr lang="en-US" sz="1350" dirty="0"/>
+          </a:p>
+        </p:txBody>
+      </p:sp>
+      <p:sp>
+        <p:nvSpPr>
+          <p:cNvPr id="5" name="Text 3"/>
+          <p:cNvSpPr txBox="1"/>
+          <p:nvPr/>
+        </p:nvSpPr>
+        <p:spPr>
+          <a:xfrm>
+            <a:off x="502920" y="2048256"/>
+            <a:ext cx="7315200" cy="1188720"/>
+          </a:xfrm>
+          <a:prstGeom prst="rect">
+            <a:avLst/>
+          </a:prstGeom>
+          <a:noFill/>
+          <a:ln/>
+        </p:spPr>
+        <p:txBody>
+          <a:bodyPr wrap="square" lIns="0" tIns="0" rIns="0" bIns="0" rtlCol="0" anchor="t"/>
+          <a:lstStyle/>
+          <a:p>
+            <a:pPr indent="0" marL="0">
+              <a:lnSpc>
+                <a:spcPct val="118000"/>
+              </a:lnSpc>
+              <a:buNone/>
+            </a:pPr>
+            <a:r>
+              <a:rPr lang="en-US" sz="2900" b="1" dirty="0">
+                <a:solidFill>
+                  <a:srgbClr val="FFFFFF"/>
+                </a:solidFill>
+                <a:latin typeface="Arial" pitchFamily="34" charset="0"/>
+                <a:ea typeface="Arial" pitchFamily="34" charset="-122"/>
+                <a:cs typeface="Arial" pitchFamily="34" charset="-120"/>
+              </a:rPr>
+              <a:t>Hai cảm biến tốt, ghép lại vẫn sai</a:t>
+            </a:r>
+            <a:endParaRPr lang="en-US" sz="2900" dirty="0"/>
+          </a:p>
+          <a:p>
+            <a:pPr indent="0" marL="0">
+              <a:lnSpc>
+                <a:spcPct val="118000"/>
+              </a:lnSpc>
+              <a:buNone/>
+            </a:pPr>
+            <a:r>
+              <a:rPr lang="en-US" sz="1700" dirty="0">
+                <a:solidFill>
+                  <a:srgbClr val="AFC3D4"/>
+                </a:solidFill>
+                <a:latin typeface="微軟正黑體" pitchFamily="34" charset="0"/>
+                <a:ea typeface="微軟正黑體" pitchFamily="34" charset="-122"/>
+                <a:cs typeface="微軟正黑體" pitchFamily="34" charset="-120"/>
+              </a:rPr>
+              <a:t>兩顆都是好的，合起來還是錯的</a:t>
+            </a:r>
+            <a:endParaRPr lang="en-US" sz="2900" dirty="0"/>
+          </a:p>
+        </p:txBody>
+      </p:sp>
+      <p:sp>
+        <p:nvSpPr>
+          <p:cNvPr id="6" name="Text 4"/>
+          <p:cNvSpPr txBox="1"/>
+          <p:nvPr/>
+        </p:nvSpPr>
+        <p:spPr>
+          <a:xfrm>
+            <a:off x="502920" y="3346704"/>
+            <a:ext cx="7315200" cy="640080"/>
+          </a:xfrm>
+          <a:prstGeom prst="rect">
+            <a:avLst/>
+          </a:prstGeom>
+          <a:noFill/>
+          <a:ln/>
+        </p:spPr>
+        <p:txBody>
+          <a:bodyPr wrap="square" lIns="0" tIns="0" rIns="0" bIns="0" rtlCol="0" anchor="t"/>
+          <a:lstStyle/>
+          <a:p>
+            <a:pPr indent="0" marL="0">
+              <a:lnSpc>
+                <a:spcPct val="120000"/>
+              </a:lnSpc>
+              <a:buNone/>
+            </a:pPr>
+            <a:r>
+              <a:rPr lang="en-US" sz="1350" dirty="0">
+                <a:solidFill>
+                  <a:srgbClr val="AFC3D4"/>
+                </a:solidFill>
+                <a:latin typeface="Arial" pitchFamily="34" charset="0"/>
+                <a:ea typeface="Arial" pitchFamily="34" charset="-122"/>
+                <a:cs typeface="Arial" pitchFamily="34" charset="-120"/>
+              </a:rPr>
+              <a:t>Hiệu chuẩn và đồng bộ thời gian</a:t>
+            </a:r>
+            <a:endParaRPr lang="en-US" sz="1350" dirty="0"/>
+          </a:p>
+          <a:p>
+            <a:pPr indent="0" marL="0">
+              <a:lnSpc>
+                <a:spcPct val="120000"/>
+              </a:lnSpc>
+              <a:buNone/>
+            </a:pPr>
+            <a:r>
+              <a:rPr lang="en-US" sz="1200" dirty="0">
+                <a:solidFill>
+                  <a:srgbClr val="8AA0B4"/>
+                </a:solidFill>
+                <a:latin typeface="微軟正黑體" pitchFamily="34" charset="0"/>
+                <a:ea typeface="微軟正黑體" pitchFamily="34" charset="-122"/>
+                <a:cs typeface="微軟正黑體" pitchFamily="34" charset="-120"/>
+              </a:rPr>
+              <a:t>標定與時間同步</a:t>
+            </a:r>
+            <a:endParaRPr lang="en-US" sz="1350" dirty="0"/>
+          </a:p>
+        </p:txBody>
+      </p:sp>
+      <p:sp>
+        <p:nvSpPr>
+          <p:cNvPr id="8" name="Text 5"/>
+          <p:cNvSpPr txBox="1"/>
+          <p:nvPr/>
+        </p:nvSpPr>
+        <p:spPr>
+          <a:xfrm>
+            <a:off x="109728" y="128016"/>
+            <a:ext cx="822960" cy="256032"/>
+          </a:xfrm>
+          <a:prstGeom prst="rect">
+            <a:avLst/>
+          </a:prstGeom>
+          <a:noFill/>
+          <a:ln/>
+        </p:spPr>
+        <p:txBody>
+          <a:bodyPr wrap="square" lIns="0" tIns="0" rIns="0" bIns="0" rtlCol="0" anchor="ctr"/>
+          <a:lstStyle/>
+          <a:p>
+            <a:pPr indent="0" marL="0">
+              <a:buNone/>
+            </a:pPr>
+            <a:r>
+              <a:rPr lang="en-US" sz="900" dirty="0">
+                <a:solidFill>
+                  <a:srgbClr val="9FB3C8"/>
+                </a:solidFill>
+                <a:latin typeface="Arial" pitchFamily="34" charset="0"/>
+                <a:ea typeface="Arial" pitchFamily="34" charset="-122"/>
+                <a:cs typeface="Arial" pitchFamily="34" charset="-120"/>
+              </a:rPr>
+              <a:t>12 / 15</a:t>
+            </a:r>
+            <a:endParaRPr lang="en-US" sz="900" dirty="0"/>
+          </a:p>
+        </p:txBody>
+      </p:sp>
+      <p:sp>
+        <p:nvSpPr>
+          <p:cNvPr id="9" name="Text 6"/>
+          <p:cNvSpPr txBox="1"/>
+          <p:nvPr/>
+        </p:nvSpPr>
+        <p:spPr>
+          <a:xfrm>
+            <a:off x="960120" y="128016"/>
+            <a:ext cx="2011680" cy="256032"/>
+          </a:xfrm>
+          <a:prstGeom prst="rect">
+            <a:avLst/>
+          </a:prstGeom>
+          <a:noFill/>
+          <a:ln/>
+        </p:spPr>
+        <p:txBody>
+          <a:bodyPr wrap="square" lIns="0" tIns="0" rIns="0" bIns="0" rtlCol="0" anchor="ctr"/>
+          <a:lstStyle/>
+          <a:p>
+            <a:pPr indent="0" marL="0">
+              <a:buNone/>
+            </a:pPr>
+            <a:r>
+              <a:rPr lang="en-US" sz="900" dirty="0">
+                <a:solidFill>
+                  <a:srgbClr val="9FB3C8"/>
+                </a:solidFill>
+                <a:latin typeface="Arial" pitchFamily="34" charset="0"/>
+                <a:ea typeface="Arial" pitchFamily="34" charset="-122"/>
+                <a:cs typeface="Arial" pitchFamily="34" charset="-120"/>
+              </a:rPr>
+              <a:t>Tiết 2 · 第 2 節</a:t>
+            </a:r>
+            <a:endParaRPr lang="en-US" sz="900" dirty="0"/>
+          </a:p>
+        </p:txBody>
+      </p:sp>
+    </p:spTree>
+  </p:cSld>
+  <p:clrMapOvr>
+    <a:masterClrMapping/>
+  </p:clrMapOvr>
+</p:sld>
+</file>
+
+<file path=ppt/slides/slide13.xml><?xml version="1.0" encoding="utf-8"?>
+<p:sld xmlns:a="http://schemas.openxmlformats.org/drawingml/2006/main" xmlns:r="http://schemas.openxmlformats.org/officeDocument/2006/relationships" xmlns:p="http://schemas.openxmlformats.org/presentationml/2006/main">
+  <p:cSld name="Slide 13">
     <p:spTree>
       <p:nvGrpSpPr>
         <p:cNvPr id="1" name=""/>
@@ -10818,7 +12681,7 @@
                 <a:ea typeface="Arial" pitchFamily="34" charset="-122"/>
                 <a:cs typeface="Arial" pitchFamily="34" charset="-120"/>
               </a:rPr>
-              <a:t>12 / 14</a:t>
+              <a:t>13 / 15</a:t>
             </a:r>
             <a:endParaRPr lang="en-US" sz="880" dirty="0"/>
           </a:p>
@@ -10871,9 +12734,9 @@
 </p:sld>
 </file>
 
-<file path=ppt/slides/slide13.xml><?xml version="1.0" encoding="utf-8"?>
+<file path=ppt/slides/slide14.xml><?xml version="1.0" encoding="utf-8"?>
 <p:sld xmlns:a="http://schemas.openxmlformats.org/drawingml/2006/main" xmlns:r="http://schemas.openxmlformats.org/officeDocument/2006/relationships" xmlns:p="http://schemas.openxmlformats.org/presentationml/2006/main">
-  <p:cSld name="Slide 13">
+  <p:cSld name="Slide 14">
     <p:spTree>
       <p:nvGrpSpPr>
         <p:cNvPr id="1" name=""/>
@@ -11287,7 +13150,7 @@
                 <a:ea typeface="Arial" pitchFamily="34" charset="-122"/>
                 <a:cs typeface="Arial" pitchFamily="34" charset="-120"/>
               </a:rPr>
-              <a:t>13 / 14</a:t>
+              <a:t>14 / 15</a:t>
             </a:r>
             <a:endParaRPr lang="en-US" sz="900" dirty="0"/>
           </a:p>
@@ -11340,9 +13203,9 @@
 </p:sld>
 </file>
 
-<file path=ppt/slides/slide14.xml><?xml version="1.0" encoding="utf-8"?>
+<file path=ppt/slides/slide15.xml><?xml version="1.0" encoding="utf-8"?>
 <p:sld xmlns:a="http://schemas.openxmlformats.org/drawingml/2006/main" xmlns:r="http://schemas.openxmlformats.org/officeDocument/2006/relationships" xmlns:p="http://schemas.openxmlformats.org/presentationml/2006/main">
-  <p:cSld name="Slide 14">
+  <p:cSld name="Slide 15">
     <p:bg>
       <p:bgPr>
         <a:solidFill>
@@ -11791,7 +13654,7 @@
                 <a:ea typeface="Arial" pitchFamily="34" charset="-122"/>
                 <a:cs typeface="Arial" pitchFamily="34" charset="-120"/>
               </a:rPr>
-              <a:t>14 / 14</a:t>
+              <a:t>15 / 15</a:t>
             </a:r>
             <a:endParaRPr lang="en-US" sz="900" dirty="0"/>
           </a:p>
@@ -12111,7 +13974,7 @@
                 <a:ea typeface="Arial" pitchFamily="34" charset="-122"/>
                 <a:cs typeface="Arial" pitchFamily="34" charset="-120"/>
               </a:rPr>
-              <a:t>2 / 14</a:t>
+              <a:t>2 / 15</a:t>
             </a:r>
             <a:endParaRPr lang="en-US" sz="900" dirty="0"/>
           </a:p>
@@ -12726,7 +14589,7 @@
                 <a:ea typeface="Arial" pitchFamily="34" charset="-122"/>
                 <a:cs typeface="Arial" pitchFamily="34" charset="-120"/>
               </a:rPr>
-              <a:t>3 / 14</a:t>
+              <a:t>3 / 15</a:t>
             </a:r>
             <a:endParaRPr lang="en-US" sz="900" dirty="0"/>
           </a:p>
@@ -13388,7 +15251,7 @@
                 <a:ea typeface="Arial" pitchFamily="34" charset="-122"/>
                 <a:cs typeface="Arial" pitchFamily="34" charset="-120"/>
               </a:rPr>
-              <a:t>4 / 14</a:t>
+              <a:t>4 / 15</a:t>
             </a:r>
             <a:endParaRPr lang="en-US" sz="900" dirty="0"/>
           </a:p>
@@ -13941,7 +15804,7 @@
                 <a:ea typeface="Arial" pitchFamily="34" charset="-122"/>
                 <a:cs typeface="Arial" pitchFamily="34" charset="-120"/>
               </a:rPr>
-              <a:t>5 / 14</a:t>
+              <a:t>5 / 15</a:t>
             </a:r>
             <a:endParaRPr lang="en-US" sz="900" dirty="0"/>
           </a:p>
@@ -14261,7 +16124,7 @@
                 <a:ea typeface="Arial" pitchFamily="34" charset="-122"/>
                 <a:cs typeface="Arial" pitchFamily="34" charset="-120"/>
               </a:rPr>
-              <a:t>6 / 14</a:t>
+              <a:t>6 / 15</a:t>
             </a:r>
             <a:endParaRPr lang="en-US" sz="900" dirty="0"/>
           </a:p>
@@ -15896,7 +17759,7 @@
                 <a:ea typeface="Arial" pitchFamily="34" charset="-122"/>
                 <a:cs typeface="Arial" pitchFamily="34" charset="-120"/>
               </a:rPr>
-              <a:t>7 / 14</a:t>
+              <a:t>7 / 15</a:t>
             </a:r>
             <a:endParaRPr lang="en-US" sz="880" dirty="0"/>
           </a:p>
@@ -16365,7 +18228,7 @@
                 <a:ea typeface="Arial" pitchFamily="34" charset="-122"/>
                 <a:cs typeface="Arial" pitchFamily="34" charset="-120"/>
               </a:rPr>
-              <a:t>8 / 14</a:t>
+              <a:t>8 / 15</a:t>
             </a:r>
             <a:endParaRPr lang="en-US" sz="900" dirty="0"/>
           </a:p>
@@ -16834,7 +18697,7 @@
                 <a:ea typeface="Arial" pitchFamily="34" charset="-122"/>
                 <a:cs typeface="Arial" pitchFamily="34" charset="-120"/>
               </a:rPr>
-              <a:t>9 / 14</a:t>
+              <a:t>9 / 15</a:t>
             </a:r>
             <a:endParaRPr lang="en-US" sz="900" dirty="0"/>
           </a:p>

--- a/第五週(10-08)/第五週_第2節_簡報.pptx
+++ b/第五週(10-08)/第五週_第2節_簡報.pptx
@@ -750,7 +750,7 @@
                 <a:ea typeface="Arial Unicode MS"/>
                 <a:cs typeface="Arial Unicode MS"/>
               </a:rPr>
-              <a:t>。這三行決定了你的相機在隧道口和紅綠燈前面會不會瞎掉。
+              <a:t>。這三件事決定了你的相機在隧道口和紅綠燈前面會不會瞎掉。
 </a:t>
             </a:r>
           </a:p>
@@ -4094,7 +4094,7 @@
                 <a:ea typeface="Arial Unicode MS"/>
                 <a:cs typeface="Arial Unicode MS"/>
               </a:rPr>
-              <a:t>第一句，相機的三行。</a:t>
+              <a:t>第一句，相機的三件事。</a:t>
             </a:r>
             <a:r>
               <a:rPr sz="1000" lang="zh-TW" dirty="0">
@@ -4413,7 +4413,7 @@
                 <a:ea typeface="Arial Unicode MS"/>
                 <a:cs typeface="Arial Unicode MS"/>
               </a:rPr>
-              <a:t>段落分隔。宣告接下來三行決定逆光與進隧道會發生什麼事。
+              <a:t>段落分隔。宣告接下來三件事決定逆光與進隧道會發生什麼事；順便講明快門方式不在那份兩頁的 preview 上。
 </a:t>
             </a:r>
           </a:p>
@@ -4523,7 +4523,95 @@
                 <a:ea typeface="Arial Unicode MS"/>
                 <a:cs typeface="Arial Unicode MS"/>
               </a:rPr>
-              <a:t>第一組，相機的三行。</a:t>
+              <a:t>第一組是相機，三件事：</a:t>
+            </a:r>
+            <a:r>
+              <a:rPr sz="1200" b="1" lang="zh-TW" dirty="0">
+                <a:solidFill>
+                  <a:srgbClr val="000000"/>
+                </a:solidFill>
+                <a:latin typeface="Arial Unicode MS"/>
+                <a:ea typeface="Arial Unicode MS"/>
+                <a:cs typeface="Arial Unicode MS"/>
+              </a:rPr>
+              <a:t>快門方式、動態範圍、LED 閃爍抑制</a:t>
+            </a:r>
+            <a:r>
+              <a:rPr sz="1200" lang="zh-TW" dirty="0">
+                <a:solidFill>
+                  <a:srgbClr val="000000"/>
+                </a:solidFill>
+                <a:latin typeface="Arial Unicode MS"/>
+                <a:ea typeface="Arial Unicode MS"/>
+                <a:cs typeface="Arial Unicode MS"/>
+              </a:rPr>
+              <a:t>。
+</a:t>
+            </a:r>
+          </a:p>
+          <a:p>
+            <a:pPr algn="l">
+              <a:spcBef>
+                <a:spcPts val="0"/>
+              </a:spcBef>
+              <a:spcAft>
+                <a:spcPts val="200"/>
+              </a:spcAft>
+            </a:pPr>
+            <a:r>
+              <a:rPr sz="1200" lang="zh-TW" dirty="0">
+                <a:solidFill>
+                  <a:srgbClr val="000000"/>
+                </a:solidFill>
+                <a:latin typeface="Arial Unicode MS"/>
+                <a:ea typeface="Arial Unicode MS"/>
+                <a:cs typeface="Arial Unicode MS"/>
+              </a:rPr>
+              <a:t>先說一件事，免得各位等一下找不到：動態範圍和 LED 閃爍，第九張那張 AR0233AT 的表上都有。</a:t>
+            </a:r>
+            <a:r>
+              <a:rPr sz="1200" b="1" lang="zh-TW" dirty="0">
+                <a:solidFill>
+                  <a:srgbClr val="000000"/>
+                </a:solidFill>
+                <a:latin typeface="Arial Unicode MS"/>
+                <a:ea typeface="Arial Unicode MS"/>
+                <a:cs typeface="Arial Unicode MS"/>
+              </a:rPr>
+              <a:t>快門方式沒有</a:t>
+            </a:r>
+            <a:r>
+              <a:rPr sz="1200" lang="zh-TW" dirty="0">
+                <a:solidFill>
+                  <a:srgbClr val="000000"/>
+                </a:solidFill>
+                <a:latin typeface="Arial Unicode MS"/>
+                <a:ea typeface="Arial Unicode MS"/>
+                <a:cs typeface="Arial Unicode MS"/>
+              </a:rPr>
+              <a:t>——那份是兩頁的 product preview，短版文件會省東西。要看快門方式，得去 onsemi 的產品頁。
+</a:t>
+            </a:r>
+          </a:p>
+          <a:p>
+            <a:pPr algn="l">
+              <a:spcBef>
+                <a:spcPts val="0"/>
+              </a:spcBef>
+              <a:spcAft>
+                <a:spcPts val="200"/>
+              </a:spcAft>
+            </a:pPr>
+            <a:r>
+              <a:rPr sz="1200" lang="zh-TW" dirty="0">
+                <a:solidFill>
+                  <a:srgbClr val="000000"/>
+                </a:solidFill>
+                <a:latin typeface="Arial Unicode MS"/>
+                <a:ea typeface="Arial Unicode MS"/>
+                <a:cs typeface="Arial Unicode MS"/>
+              </a:rPr>
+              <a:t>判讀台上我幫各位把那一行補進去了，等一下可以對照。</a:t>
             </a:r>
           </a:p>
         </p:txBody>
@@ -4787,7 +4875,7 @@
                 <a:ea typeface="Arial Unicode MS"/>
                 <a:cs typeface="Arial Unicode MS"/>
               </a:rPr>
-              <a:t>先講第一行，</a:t>
+              <a:t>先講第一件，</a:t>
             </a:r>
             <a:r>
               <a:rPr sz="800" b="1" lang="zh-TW" dirty="0">
@@ -4809,7 +4897,29 @@
                 <a:ea typeface="Arial Unicode MS"/>
                 <a:cs typeface="Arial Unicode MS"/>
               </a:rPr>
-              <a:t>。規格表上寫 rolling shutter 或者 global shutter。
+              <a:t>。規格表上會寫 rolling shutter 或者 global shutter——AR0233AT 是 </a:t>
+            </a:r>
+            <a:r>
+              <a:rPr sz="800" b="1" lang="zh-TW" dirty="0">
+                <a:solidFill>
+                  <a:srgbClr val="000000"/>
+                </a:solidFill>
+                <a:latin typeface="Arial Unicode MS"/>
+                <a:ea typeface="Arial Unicode MS"/>
+                <a:cs typeface="Arial Unicode MS"/>
+              </a:rPr>
+              <a:t>electronic rolling shutter</a:t>
+            </a:r>
+            <a:r>
+              <a:rPr sz="800" lang="zh-TW" dirty="0">
+                <a:solidFill>
+                  <a:srgbClr val="000000"/>
+                </a:solidFill>
+                <a:latin typeface="Arial Unicode MS"/>
+                <a:ea typeface="Arial Unicode MS"/>
+                <a:cs typeface="Arial Unicode MS"/>
+              </a:rPr>
+              <a:t>，電子捲簾。
 </a:t>
             </a:r>
           </a:p>
@@ -5117,7 +5227,7 @@
                 <a:ea typeface="Arial Unicode MS"/>
                 <a:cs typeface="Arial Unicode MS"/>
               </a:rPr>
-              <a:t>所以規格表上這一行不是文字遊戲，它決定了你的感知演算法要不要另外寫一段程式去補償。
+              <a:t>所以快門方式這一行不是文字遊戲，它決定了你的感知演算法要不要另外寫一段程式去補償。
 </a:t>
             </a:r>
           </a:p>
@@ -5161,7 +5271,7 @@
                 <a:ea typeface="Arial Unicode MS"/>
                 <a:cs typeface="Arial Unicode MS"/>
               </a:rPr>
-              <a:t>——像我們昨天看的 AR0233AT，一秒六十張，讀一張只要十六毫秒左右，扭曲就小一點。
+              <a:t>——像上一節看的 AR0233AT，一秒六十張，讀一張只要十六毫秒左右，扭曲就小一點。
 </a:t>
             </a:r>
           </a:p>
@@ -5667,7 +5777,7 @@
                 <a:ea typeface="Arial Unicode MS"/>
                 <a:cs typeface="Arial Unicode MS"/>
               </a:rPr>
-              <a:t>人的眼睛大概可以處理 120 dB 左右。我們昨天那顆 AR0233AT，規格表上寫 </a:t>
+              <a:t>人的眼睛大概可以處理 120 dB 左右。上一節那顆 AR0233AT，規格表上寫 </a:t>
             </a:r>
             <a:r>
               <a:rPr sz="800" b="1" lang="zh-TW" dirty="0">
@@ -13873,7 +13983,7 @@
                 <a:ea typeface="微軟正黑體" pitchFamily="34" charset="-122"/>
                 <a:cs typeface="微軟正黑體" pitchFamily="34" charset="-120"/>
               </a:rPr>
-              <a:t>相機：決定逆光與進隧道的那三行</a:t>
+              <a:t>相機：決定逆光與進隧道的那三件事</a:t>
             </a:r>
             <a:endParaRPr lang="en-US" sz="2900" dirty="0"/>
           </a:p>

--- a/第五週(10-08)/第五週_第2節_簡報.pptx
+++ b/第五週(10-08)/第五週_第2節_簡報.pptx
@@ -4567,7 +4567,7 @@
                 <a:ea typeface="Arial Unicode MS"/>
                 <a:cs typeface="Arial Unicode MS"/>
               </a:rPr>
-              <a:t>先說一件事，免得各位等一下找不到：動態範圍和 LED 閃爍，第九張那張 AR0233AT 的表上都有。</a:t>
+              <a:t>先說一件事，免得各位等一下找不到：動態範圍和 LED 閃爍，第一節第十張那張 AR0233AT 的表上都有。</a:t>
             </a:r>
             <a:r>
               <a:rPr sz="1200" b="1" lang="zh-TW" dirty="0">

--- a/第五週(10-08)/第五週_第2節_簡報.pptx
+++ b/第五週(10-08)/第五週_第2節_簡報.pptx
@@ -5524,7 +5524,7 @@
                 <a:ea typeface="Arial Unicode MS"/>
                 <a:cs typeface="Arial Unicode MS"/>
               </a:rPr>
-              <a:t>圈 dB 那個數字，再圈隧道口那個例子。這一條學生最有感。
+              <a:t>先重播上一節那支影片的隧道段（youtu.be/OkV0Lj-uATE，約 0:28 起），只看下面那一格；再圈 dB 那個數字和隧道口的例子。
 </a:t>
             </a:r>
           </a:p>
@@ -5624,6 +5624,50 @@
                 <a:cs typeface="Arial Unicode MS"/>
               </a:rPr>
               <a:t>這一行在講：同一張畫面裡，它能同時處理多亮和多暗。
+</a:t>
+            </a:r>
+          </a:p>
+          <a:p>
+            <a:pPr algn="l">
+              <a:spcBef>
+                <a:spcPts val="0"/>
+              </a:spcBef>
+              <a:spcAft>
+                <a:spcPts val="133"/>
+              </a:spcAft>
+            </a:pPr>
+            <a:r>
+              <a:rPr sz="800" lang="zh-TW" dirty="0">
+                <a:solidFill>
+                  <a:srgbClr val="000000"/>
+                </a:solidFill>
+                <a:latin typeface="Arial Unicode MS"/>
+                <a:ea typeface="Arial Unicode MS"/>
+                <a:cs typeface="Arial Unicode MS"/>
+              </a:rPr>
+              <a:t>各位還記得上一節最後那支影片嗎？最後一個情境 Vehicle Exiting Tunnel——下面的相機，隧道出口一片死白，前面那幾台車完全看不到；上面的點雲卻清清楚楚。</a:t>
+            </a:r>
+            <a:r>
+              <a:rPr sz="800" b="1" lang="zh-TW" dirty="0">
+                <a:solidFill>
+                  <a:srgbClr val="000000"/>
+                </a:solidFill>
+                <a:latin typeface="Arial Unicode MS"/>
+                <a:ea typeface="Arial Unicode MS"/>
+                <a:cs typeface="Arial Unicode MS"/>
+              </a:rPr>
+              <a:t>那就是動態範圍不夠的樣子。</a:t>
+            </a:r>
+            <a:r>
+              <a:rPr sz="800" lang="zh-TW" dirty="0">
+                <a:solidFill>
+                  <a:srgbClr val="000000"/>
+                </a:solidFill>
+                <a:latin typeface="Arial Unicode MS"/>
+                <a:ea typeface="Arial Unicode MS"/>
+                <a:cs typeface="Arial Unicode MS"/>
+              </a:rPr>
+              <a:t>我現在把那十秒再播一次，這次各位只看下面那一格。
 </a:t>
             </a:r>
           </a:p>

--- a/第五週(10-08)/第五週_第2節_簡報.pptx
+++ b/第五週(10-08)/第五週_第2節_簡報.pptx
@@ -2015,6 +2015,72 @@
                 <a:ea typeface="Arial Unicode MS"/>
                 <a:cs typeface="Arial Unicode MS"/>
               </a:rPr>
+              <a:t>滑桿下面還有一張圖：</a:t>
+            </a:r>
+            <a:r>
+              <a:rPr sz="800" b="1" lang="zh-TW" dirty="0">
+                <a:solidFill>
+                  <a:srgbClr val="000000"/>
+                </a:solidFill>
+                <a:latin typeface="Arial Unicode MS"/>
+                <a:ea typeface="Arial Unicode MS"/>
+                <a:cs typeface="Arial Unicode MS"/>
+              </a:rPr>
+              <a:t>四十公尺外那台機車，落到幾個點</a:t>
+            </a:r>
+            <a:r>
+              <a:rPr sz="800" lang="zh-TW" dirty="0">
+                <a:solidFill>
+                  <a:srgbClr val="000000"/>
+                </a:solidFill>
+                <a:latin typeface="Arial Unicode MS"/>
+                <a:ea typeface="Arial Unicode MS"/>
+                <a:cs typeface="Arial Unicode MS"/>
+              </a:rPr>
+              <a:t>。現在上面寫著 </a:t>
+            </a:r>
+            <a:r>
+              <a:rPr sz="800" b="1" lang="zh-TW" dirty="0">
+                <a:solidFill>
+                  <a:srgbClr val="000000"/>
+                </a:solidFill>
+                <a:latin typeface="Arial Unicode MS"/>
+                <a:ea typeface="Arial Unicode MS"/>
+                <a:cs typeface="Arial Unicode MS"/>
+              </a:rPr>
+              <a:t>9 個點</a:t>
+            </a:r>
+            <a:r>
+              <a:rPr sz="800" lang="zh-TW" dirty="0">
+                <a:solidFill>
+                  <a:srgbClr val="000000"/>
+                </a:solidFill>
+                <a:latin typeface="Arial Unicode MS"/>
+                <a:ea typeface="Arial Unicode MS"/>
+                <a:cs typeface="Arial Unicode MS"/>
+              </a:rPr>
+              <a:t>——這就是第一節第六張那張表裡，OS1 那一欄的九。各位看那九個點的分布，就知道為什麼光靠它認不出那是一台機車。
+</a:t>
+            </a:r>
+          </a:p>
+          <a:p>
+            <a:pPr algn="l">
+              <a:spcBef>
+                <a:spcPts val="0"/>
+              </a:spcBef>
+              <a:spcAft>
+                <a:spcPts val="133"/>
+              </a:spcAft>
+            </a:pPr>
+            <a:r>
+              <a:rPr sz="800" lang="zh-TW" dirty="0">
+                <a:solidFill>
+                  <a:srgbClr val="000000"/>
+                </a:solidFill>
+                <a:latin typeface="Arial Unicode MS"/>
+                <a:ea typeface="Arial Unicode MS"/>
+                <a:cs typeface="Arial Unicode MS"/>
+              </a:rPr>
               <a:t>現在請大家把每圈點數改成 </a:t>
             </a:r>
             <a:r>
@@ -2037,7 +2103,7 @@
                 <a:ea typeface="Arial Unicode MS"/>
                 <a:cs typeface="Arial Unicode MS"/>
               </a:rPr>
-              <a:t>，看兩個數字怎麼變。
+              <a:t>，看兩個數字怎麼變，順便看那張圖上的點數跳到多少。
 </a:t>
             </a:r>
           </a:p>
@@ -2059,7 +2125,29 @@
                 <a:ea typeface="Arial Unicode MS"/>
                 <a:cs typeface="Arial Unicode MS"/>
               </a:rPr>
-              <a:t>角度變成一半，零點一七六度；四十公尺處的間距也變成一半，十二公分。所以同一個人身上的點數就加倍了。
+              <a:t>角度變成一半，零點一七六度；四十公尺處的間距也變成一半，十二公分。圖上的點數從九個變成 </a:t>
+            </a:r>
+            <a:r>
+              <a:rPr sz="800" b="1" lang="zh-TW" dirty="0">
+                <a:solidFill>
+                  <a:srgbClr val="000000"/>
+                </a:solidFill>
+                <a:latin typeface="Arial Unicode MS"/>
+                <a:ea typeface="Arial Unicode MS"/>
+                <a:cs typeface="Arial Unicode MS"/>
+              </a:rPr>
+              <a:t>18 個</a:t>
+            </a:r>
+            <a:r>
+              <a:rPr sz="800" lang="zh-TW" dirty="0">
+                <a:solidFill>
+                  <a:srgbClr val="000000"/>
+                </a:solidFill>
+                <a:latin typeface="Arial Unicode MS"/>
+                <a:ea typeface="Arial Unicode MS"/>
+                <a:cs typeface="Arial Unicode MS"/>
+              </a:rPr>
+              <a:t>，同一台機車、同一個距離，只是換了一個模式。這一格第三節上機還會再碰到一次。
 </a:t>
             </a:r>
           </a:p>

--- a/第五週(10-08)/第五週_第2節_簡報.pptx
+++ b/第五週(10-08)/第五週_第2節_簡報.pptx
@@ -2148,6 +2148,94 @@
                 <a:cs typeface="Arial Unicode MS"/>
               </a:rPr>
               <a:t>，同一台機車、同一個距離，只是換了一個模式。這一格第三節上機還會再碰到一次。
+</a:t>
+            </a:r>
+          </a:p>
+          <a:p>
+            <a:pPr algn="l">
+              <a:spcBef>
+                <a:spcPts val="0"/>
+              </a:spcBef>
+              <a:spcAft>
+                <a:spcPts val="133"/>
+              </a:spcAft>
+            </a:pPr>
+            <a:r>
+              <a:rPr sz="800" lang="zh-TW" dirty="0">
+                <a:solidFill>
+                  <a:srgbClr val="000000"/>
+                </a:solidFill>
+                <a:latin typeface="Arial Unicode MS"/>
+                <a:ea typeface="Arial Unicode MS"/>
+                <a:cs typeface="Arial Unicode MS"/>
+              </a:rPr>
+              <a:t>最後順便試一件事：把</a:t>
+            </a:r>
+            <a:r>
+              <a:rPr sz="800" b="1" lang="zh-TW" dirty="0">
+                <a:solidFill>
+                  <a:srgbClr val="000000"/>
+                </a:solidFill>
+                <a:latin typeface="Arial Unicode MS"/>
+                <a:ea typeface="Arial Unicode MS"/>
+                <a:cs typeface="Arial Unicode MS"/>
+              </a:rPr>
+              <a:t>轉速</a:t>
+            </a:r>
+            <a:r>
+              <a:rPr sz="800" lang="zh-TW" dirty="0">
+                <a:solidFill>
+                  <a:srgbClr val="000000"/>
+                </a:solidFill>
+                <a:latin typeface="Arial Unicode MS"/>
+                <a:ea typeface="Arial Unicode MS"/>
+                <a:cs typeface="Arial Unicode MS"/>
+              </a:rPr>
+              <a:t>從 10 改成 20。每秒點數加倍了，從六十五萬變一百三十萬——可是</a:t>
+            </a:r>
+            <a:r>
+              <a:rPr sz="800" b="1" lang="zh-TW" dirty="0">
+                <a:solidFill>
+                  <a:srgbClr val="000000"/>
+                </a:solidFill>
+                <a:latin typeface="Arial Unicode MS"/>
+                <a:ea typeface="Arial Unicode MS"/>
+                <a:cs typeface="Arial Unicode MS"/>
+              </a:rPr>
+              <a:t>上面那張圖一個點都沒變</a:t>
+            </a:r>
+            <a:r>
+              <a:rPr sz="800" lang="zh-TW" dirty="0">
+                <a:solidFill>
+                  <a:srgbClr val="000000"/>
+                </a:solidFill>
+                <a:latin typeface="Arial Unicode MS"/>
+                <a:ea typeface="Arial Unicode MS"/>
+                <a:cs typeface="Arial Unicode MS"/>
+              </a:rPr>
+              <a:t>。為什麼？因為轉速改的是「一秒給你幾張這樣的圖」，不是「同一張圖裡有幾個點」。同一圈裡的點距，只由線束數和每圈點數決定。</a:t>
+            </a:r>
+            <a:r>
+              <a:rPr sz="800" b="1" lang="zh-TW" dirty="0">
+                <a:solidFill>
+                  <a:srgbClr val="000000"/>
+                </a:solidFill>
+                <a:latin typeface="Arial Unicode MS"/>
+                <a:ea typeface="Arial Unicode MS"/>
+                <a:cs typeface="Arial Unicode MS"/>
+              </a:rPr>
+              <a:t>所以每秒點數真的不能直接拿來比</a:t>
+            </a:r>
+            <a:r>
+              <a:rPr sz="800" lang="zh-TW" dirty="0">
+                <a:solidFill>
+                  <a:srgbClr val="000000"/>
+                </a:solidFill>
+                <a:latin typeface="Arial Unicode MS"/>
+                <a:ea typeface="Arial Unicode MS"/>
+                <a:cs typeface="Arial Unicode MS"/>
+              </a:rPr>
+              <a:t>，它把兩件不同的事乘在一起了。
 </a:t>
             </a:r>
           </a:p>

--- a/第五週(10-08)/第五週_第2節_簡報.pptx
+++ b/第五週(10-08)/第五週_第2節_簡報.pptx
@@ -13128,8 +13128,8 @@
         </p:nvSpPr>
         <p:spPr>
           <a:xfrm>
-            <a:off x="502920" y="1103050"/>
-            <a:ext cx="8138160" cy="563762"/>
+            <a:off x="502920" y="914400"/>
+            <a:ext cx="8138160" cy="1625698"/>
           </a:xfrm>
           <a:prstGeom prst="rect">
             <a:avLst/>
@@ -13138,7 +13138,7 @@
           <a:ln/>
         </p:spPr>
         <p:txBody>
-          <a:bodyPr wrap="square" lIns="0" tIns="0" rIns="0" bIns="0" rtlCol="0" anchor="t"/>
+          <a:bodyPr wrap="square" lIns="0" tIns="0" rIns="0" bIns="0" rtlCol="0" anchor="ctr"/>
           <a:lstStyle/>
           <a:p>
             <a:pPr indent="0" marL="0">
@@ -13168,7 +13168,7 @@
               <a:buNone/>
             </a:pPr>
             <a:r>
-              <a:rPr lang="en-US" sz="1200" dirty="0">
+              <a:rPr lang="en-US" sz="1200" b="1" dirty="0">
                 <a:solidFill>
                   <a:srgbClr val="007F72"/>
                 </a:solidFill>
@@ -13180,33 +13180,14 @@
             </a:r>
             <a:endParaRPr lang="en-US" sz="1900" dirty="0"/>
           </a:p>
-        </p:txBody>
-      </p:sp>
-      <p:sp>
-        <p:nvSpPr>
-          <p:cNvPr id="4" name="Text 2"/>
-          <p:cNvSpPr txBox="1"/>
-          <p:nvPr/>
-        </p:nvSpPr>
-        <p:spPr>
-          <a:xfrm>
-            <a:off x="502920" y="1758252"/>
-            <a:ext cx="8138160" cy="684636"/>
-          </a:xfrm>
-          <a:prstGeom prst="rect">
-            <a:avLst/>
-          </a:prstGeom>
-          <a:noFill/>
-          <a:ln/>
-        </p:spPr>
-        <p:txBody>
-          <a:bodyPr wrap="square" lIns="0" tIns="0" rIns="0" bIns="0" rtlCol="0" anchor="t"/>
-          <a:lstStyle/>
           <a:p>
             <a:pPr indent="0" marL="0">
               <a:lnSpc>
-                <a:spcPct val="128000"/>
+                <a:spcPct val="120000"/>
               </a:lnSpc>
+              <a:spcBef>
+                <a:spcPts val="1440"/>
+              </a:spcBef>
               <a:buNone/>
             </a:pPr>
             <a:r>
@@ -13220,12 +13201,12 @@
               </a:rPr>
               <a:t>Lidar 10 Hz, camera 60 fps. Không có dấu thời gian chung thì lệch tới 50 ms — 40 km/h là hơn nửa mét.</a:t>
             </a:r>
-            <a:endParaRPr lang="en-US" sz="1250" dirty="0"/>
+            <a:endParaRPr lang="en-US" sz="1900" dirty="0"/>
           </a:p>
           <a:p>
             <a:pPr indent="0" marL="0">
               <a:lnSpc>
-                <a:spcPct val="128000"/>
+                <a:spcPct val="120000"/>
               </a:lnSpc>
               <a:buNone/>
             </a:pPr>
@@ -13240,13 +13221,13 @@
               </a:rPr>
               <a:t>光達 10 Hz、相機 60 fps。沒有共同時間戳，兩邊可能差 50 毫秒——時速 40 就超過半公尺。</a:t>
             </a:r>
-            <a:endParaRPr lang="en-US" sz="1250" dirty="0"/>
+            <a:endParaRPr lang="en-US" sz="1900" dirty="0"/>
           </a:p>
         </p:txBody>
       </p:sp>
       <p:sp>
         <p:nvSpPr>
-          <p:cNvPr id="5" name="Shape 3"/>
+          <p:cNvPr id="4" name="Shape 2"/>
           <p:cNvSpPr/>
           <p:nvPr/>
         </p:nvSpPr>
@@ -13273,7 +13254,7 @@
       </p:sp>
       <p:pic>
         <p:nvPicPr>
-          <p:cNvPr id="6" name="Image 0" descr="/Users/tsengchenghsun/Class/carClass/Claude outputs/第五週(10-8)/src/img/w5_os1_phase.png">    </p:cNvPr>
+          <p:cNvPr id="5" name="Image 0" descr="/Users/tsengchenghsun/Class/carClass/Claude outputs/第五週(10-8)/src/img/w5_os1_phase.png">    </p:cNvPr>
           <p:cNvPicPr>
             <a:picLocks noChangeAspect="1"/>
           </p:cNvPicPr>
@@ -13297,7 +13278,7 @@
       </p:pic>
       <p:sp>
         <p:nvSpPr>
-          <p:cNvPr id="7" name="Text 4"/>
+          <p:cNvPr id="6" name="Text 3"/>
           <p:cNvSpPr txBox="1"/>
           <p:nvPr/>
         </p:nvSpPr>
@@ -13336,7 +13317,7 @@
       </p:sp>
       <p:sp>
         <p:nvSpPr>
-          <p:cNvPr id="8" name="Shape 5"/>
+          <p:cNvPr id="7" name="Shape 4"/>
           <p:cNvSpPr/>
           <p:nvPr/>
         </p:nvSpPr>
@@ -13363,7 +13344,7 @@
       </p:sp>
       <p:sp>
         <p:nvSpPr>
-          <p:cNvPr id="9" name="Text 6"/>
+          <p:cNvPr id="8" name="Text 5"/>
           <p:cNvSpPr txBox="1"/>
           <p:nvPr/>
         </p:nvSpPr>
@@ -13425,7 +13406,7 @@
       </p:sp>
       <p:pic>
         <p:nvPicPr>
-          <p:cNvPr id="11" name="Image 1" descr="/Users/tsengchenghsun/Class/carClass/Claude outputs/第五週(10-8)/src/logo.png">    </p:cNvPr>
+          <p:cNvPr id="10" name="Image 1" descr="/Users/tsengchenghsun/Class/carClass/Claude outputs/第五週(10-8)/src/logo.png">    </p:cNvPr>
           <p:cNvPicPr>
             <a:picLocks noChangeAspect="1"/>
           </p:cNvPicPr>
@@ -13449,7 +13430,7 @@
       </p:pic>
       <p:sp>
         <p:nvSpPr>
-          <p:cNvPr id="12" name="Text 7"/>
+          <p:cNvPr id="11" name="Text 6"/>
           <p:cNvSpPr txBox="1"/>
           <p:nvPr/>
         </p:nvSpPr>
@@ -13488,7 +13469,7 @@
       </p:sp>
       <p:sp>
         <p:nvSpPr>
-          <p:cNvPr id="13" name="Text 8"/>
+          <p:cNvPr id="12" name="Text 7"/>
           <p:cNvSpPr txBox="1"/>
           <p:nvPr/>
         </p:nvSpPr>
@@ -14657,8 +14638,8 @@
         </p:nvSpPr>
         <p:spPr>
           <a:xfrm>
-            <a:off x="3429000" y="1143789"/>
-            <a:ext cx="5212080" cy="1356044"/>
+            <a:off x="3429000" y="914400"/>
+            <a:ext cx="5212080" cy="2889504"/>
           </a:xfrm>
           <a:prstGeom prst="rect">
             <a:avLst/>
@@ -14667,7 +14648,7 @@
           <a:ln/>
         </p:spPr>
         <p:txBody>
-          <a:bodyPr wrap="square" lIns="0" tIns="0" rIns="0" bIns="0" rtlCol="0" anchor="t"/>
+          <a:bodyPr wrap="square" lIns="0" tIns="0" rIns="0" bIns="0" rtlCol="0" anchor="ctr"/>
           <a:lstStyle/>
           <a:p>
             <a:pPr indent="0" marL="0">
@@ -14697,7 +14678,7 @@
               <a:buNone/>
             </a:pPr>
             <a:r>
-              <a:rPr lang="en-US" sz="1400" dirty="0">
+              <a:rPr lang="en-US" sz="1400" b="1" dirty="0">
                 <a:solidFill>
                   <a:srgbClr val="007F72"/>
                 </a:solidFill>
@@ -14709,33 +14690,14 @@
             </a:r>
             <a:endParaRPr lang="en-US" sz="2300" dirty="0"/>
           </a:p>
-        </p:txBody>
-      </p:sp>
-      <p:sp>
-        <p:nvSpPr>
-          <p:cNvPr id="14" name="Text 12"/>
-          <p:cNvSpPr txBox="1"/>
-          <p:nvPr/>
-        </p:nvSpPr>
-        <p:spPr>
-          <a:xfrm>
-            <a:off x="3429000" y="2591273"/>
-            <a:ext cx="5212080" cy="1074682"/>
-          </a:xfrm>
-          <a:prstGeom prst="rect">
-            <a:avLst/>
-          </a:prstGeom>
-          <a:noFill/>
-          <a:ln/>
-        </p:spPr>
-        <p:txBody>
-          <a:bodyPr wrap="square" lIns="0" tIns="0" rIns="0" bIns="0" rtlCol="0" anchor="t"/>
-          <a:lstStyle/>
           <a:p>
             <a:pPr indent="0" marL="0">
               <a:lnSpc>
-                <a:spcPct val="128000"/>
+                <a:spcPct val="120000"/>
               </a:lnSpc>
+              <a:spcBef>
+                <a:spcPts val="1440"/>
+              </a:spcBef>
               <a:buNone/>
             </a:pPr>
             <a:r>
@@ -14749,12 +14711,12 @@
               </a:rPr>
               <a:t>Cảm biến đọc từng hàng, hàng cuối chậm hơn hàng đầu vài chục mili giây. Trong khoảng đó xe và vật đều đã di chuyển, nên cột điện bị nghiêng, cánh quạt bị cong.</a:t>
             </a:r>
-            <a:endParaRPr lang="en-US" sz="1250" dirty="0"/>
+            <a:endParaRPr lang="en-US" sz="2300" dirty="0"/>
           </a:p>
           <a:p>
             <a:pPr indent="0" marL="0">
               <a:lnSpc>
-                <a:spcPct val="128000"/>
+                <a:spcPct val="120000"/>
               </a:lnSpc>
               <a:buNone/>
             </a:pPr>
@@ -14769,13 +14731,13 @@
               </a:rPr>
               <a:t>感光元件是一列一列讀出來的，最後一列比第一列晚了幾十毫秒。這段時間裡車子和目標都在動，所以電線桿會歪、螺旋槳會彎。</a:t>
             </a:r>
-            <a:endParaRPr lang="en-US" sz="1250" dirty="0"/>
+            <a:endParaRPr lang="en-US" sz="2300" dirty="0"/>
           </a:p>
         </p:txBody>
       </p:sp>
       <p:sp>
         <p:nvSpPr>
-          <p:cNvPr id="15" name="Shape 13"/>
+          <p:cNvPr id="14" name="Shape 12"/>
           <p:cNvSpPr/>
           <p:nvPr/>
         </p:nvSpPr>
@@ -14802,7 +14764,7 @@
       </p:sp>
       <p:sp>
         <p:nvSpPr>
-          <p:cNvPr id="16" name="Text 14"/>
+          <p:cNvPr id="15" name="Text 13"/>
           <p:cNvSpPr txBox="1"/>
           <p:nvPr/>
         </p:nvSpPr>
@@ -14864,7 +14826,7 @@
       </p:sp>
       <p:pic>
         <p:nvPicPr>
-          <p:cNvPr id="18" name="Image 0" descr="/Users/tsengchenghsun/Class/carClass/Claude outputs/第五週(10-8)/src/logo.png">    </p:cNvPr>
+          <p:cNvPr id="17" name="Image 0" descr="/Users/tsengchenghsun/Class/carClass/Claude outputs/第五週(10-8)/src/logo.png">    </p:cNvPr>
           <p:cNvPicPr>
             <a:picLocks noChangeAspect="1"/>
           </p:cNvPicPr>
@@ -14888,7 +14850,7 @@
       </p:pic>
       <p:sp>
         <p:nvSpPr>
-          <p:cNvPr id="19" name="Text 15"/>
+          <p:cNvPr id="18" name="Text 14"/>
           <p:cNvSpPr txBox="1"/>
           <p:nvPr/>
         </p:nvSpPr>
@@ -14927,7 +14889,7 @@
       </p:sp>
       <p:sp>
         <p:nvSpPr>
-          <p:cNvPr id="20" name="Text 16"/>
+          <p:cNvPr id="19" name="Text 15"/>
           <p:cNvSpPr txBox="1"/>
           <p:nvPr/>
         </p:nvSpPr>
@@ -15319,8 +15281,8 @@
         </p:nvSpPr>
         <p:spPr>
           <a:xfrm>
-            <a:off x="3429000" y="1319005"/>
-            <a:ext cx="5212080" cy="1005611"/>
+            <a:off x="3429000" y="914400"/>
+            <a:ext cx="5212080" cy="2889504"/>
           </a:xfrm>
           <a:prstGeom prst="rect">
             <a:avLst/>
@@ -15329,7 +15291,7 @@
           <a:ln/>
         </p:spPr>
         <p:txBody>
-          <a:bodyPr wrap="square" lIns="0" tIns="0" rIns="0" bIns="0" rtlCol="0" anchor="t"/>
+          <a:bodyPr wrap="square" lIns="0" tIns="0" rIns="0" bIns="0" rtlCol="0" anchor="ctr"/>
           <a:lstStyle/>
           <a:p>
             <a:pPr indent="0" marL="0">
@@ -15359,7 +15321,7 @@
               <a:buNone/>
             </a:pPr>
             <a:r>
-              <a:rPr lang="en-US" sz="1400" dirty="0">
+              <a:rPr lang="en-US" sz="1400" b="1" dirty="0">
                 <a:solidFill>
                   <a:srgbClr val="007F72"/>
                 </a:solidFill>
@@ -15371,33 +15333,14 @@
             </a:r>
             <a:endParaRPr lang="en-US" sz="2300" dirty="0"/>
           </a:p>
-        </p:txBody>
-      </p:sp>
-      <p:sp>
-        <p:nvSpPr>
-          <p:cNvPr id="15" name="Text 13"/>
-          <p:cNvSpPr txBox="1"/>
-          <p:nvPr/>
-        </p:nvSpPr>
-        <p:spPr>
-          <a:xfrm>
-            <a:off x="3429000" y="2416057"/>
-            <a:ext cx="5212080" cy="1074682"/>
-          </a:xfrm>
-          <a:prstGeom prst="rect">
-            <a:avLst/>
-          </a:prstGeom>
-          <a:noFill/>
-          <a:ln/>
-        </p:spPr>
-        <p:txBody>
-          <a:bodyPr wrap="square" lIns="0" tIns="0" rIns="0" bIns="0" rtlCol="0" anchor="t"/>
-          <a:lstStyle/>
           <a:p>
             <a:pPr indent="0" marL="0">
               <a:lnSpc>
-                <a:spcPct val="128000"/>
+                <a:spcPct val="120000"/>
               </a:lnSpc>
+              <a:spcBef>
+                <a:spcPts val="1440"/>
+              </a:spcBef>
               <a:buNone/>
             </a:pPr>
             <a:r>
@@ -15411,12 +15354,12 @@
               </a:rPr>
               <a:t>Ra khỏi đường hầm giữa trưa: trong hầm tối, ngoài hầm chói. Mắt người xử lý được khoảng 120 dB; AR0233AT ghi trên 140 dB, đó là lý do nó đắt.</a:t>
             </a:r>
-            <a:endParaRPr lang="en-US" sz="1250" dirty="0"/>
+            <a:endParaRPr lang="en-US" sz="2300" dirty="0"/>
           </a:p>
           <a:p>
             <a:pPr indent="0" marL="0">
               <a:lnSpc>
-                <a:spcPct val="128000"/>
+                <a:spcPct val="120000"/>
               </a:lnSpc>
               <a:buNone/>
             </a:pPr>
@@ -15431,13 +15374,13 @@
               </a:rPr>
               <a:t>中午開出隧道口：裡面很暗，外面很亮。人眼大約能處理 120 dB；AR0233AT 寫的是 140 dB 以上，這就是它貴的原因。</a:t>
             </a:r>
-            <a:endParaRPr lang="en-US" sz="1250" dirty="0"/>
+            <a:endParaRPr lang="en-US" sz="2300" dirty="0"/>
           </a:p>
         </p:txBody>
       </p:sp>
       <p:sp>
         <p:nvSpPr>
-          <p:cNvPr id="16" name="Shape 14"/>
+          <p:cNvPr id="15" name="Shape 13"/>
           <p:cNvSpPr/>
           <p:nvPr/>
         </p:nvSpPr>
@@ -15464,7 +15407,7 @@
       </p:sp>
       <p:sp>
         <p:nvSpPr>
-          <p:cNvPr id="17" name="Text 15"/>
+          <p:cNvPr id="16" name="Text 14"/>
           <p:cNvSpPr txBox="1"/>
           <p:nvPr/>
         </p:nvSpPr>
@@ -15526,7 +15469,7 @@
       </p:sp>
       <p:pic>
         <p:nvPicPr>
-          <p:cNvPr id="19" name="Image 0" descr="/Users/tsengchenghsun/Class/carClass/Claude outputs/第五週(10-8)/src/logo.png">    </p:cNvPr>
+          <p:cNvPr id="18" name="Image 0" descr="/Users/tsengchenghsun/Class/carClass/Claude outputs/第五週(10-8)/src/logo.png">    </p:cNvPr>
           <p:cNvPicPr>
             <a:picLocks noChangeAspect="1"/>
           </p:cNvPicPr>
@@ -15550,7 +15493,7 @@
       </p:pic>
       <p:sp>
         <p:nvSpPr>
-          <p:cNvPr id="20" name="Text 16"/>
+          <p:cNvPr id="19" name="Text 15"/>
           <p:cNvSpPr txBox="1"/>
           <p:nvPr/>
         </p:nvSpPr>
@@ -15589,7 +15532,7 @@
       </p:sp>
       <p:sp>
         <p:nvSpPr>
-          <p:cNvPr id="21" name="Text 17"/>
+          <p:cNvPr id="20" name="Text 16"/>
           <p:cNvSpPr txBox="1"/>
           <p:nvPr/>
         </p:nvSpPr>
@@ -15872,8 +15815,8 @@
         </p:nvSpPr>
         <p:spPr>
           <a:xfrm>
-            <a:off x="3429000" y="1319005"/>
-            <a:ext cx="5212080" cy="1005611"/>
+            <a:off x="3429000" y="914400"/>
+            <a:ext cx="5212080" cy="2889504"/>
           </a:xfrm>
           <a:prstGeom prst="rect">
             <a:avLst/>
@@ -15882,7 +15825,7 @@
           <a:ln/>
         </p:spPr>
         <p:txBody>
-          <a:bodyPr wrap="square" lIns="0" tIns="0" rIns="0" bIns="0" rtlCol="0" anchor="t"/>
+          <a:bodyPr wrap="square" lIns="0" tIns="0" rIns="0" bIns="0" rtlCol="0" anchor="ctr"/>
           <a:lstStyle/>
           <a:p>
             <a:pPr indent="0" marL="0">
@@ -15912,7 +15855,7 @@
               <a:buNone/>
             </a:pPr>
             <a:r>
-              <a:rPr lang="en-US" sz="1400" dirty="0">
+              <a:rPr lang="en-US" sz="1400" b="1" dirty="0">
                 <a:solidFill>
                   <a:srgbClr val="007F72"/>
                 </a:solidFill>
@@ -15924,33 +15867,14 @@
             </a:r>
             <a:endParaRPr lang="en-US" sz="2300" dirty="0"/>
           </a:p>
-        </p:txBody>
-      </p:sp>
-      <p:sp>
-        <p:nvSpPr>
-          <p:cNvPr id="10" name="Text 8"/>
-          <p:cNvSpPr txBox="1"/>
-          <p:nvPr/>
-        </p:nvSpPr>
-        <p:spPr>
-          <a:xfrm>
-            <a:off x="3429000" y="2416057"/>
-            <a:ext cx="5212080" cy="1074682"/>
-          </a:xfrm>
-          <a:prstGeom prst="rect">
-            <a:avLst/>
-          </a:prstGeom>
-          <a:noFill/>
-          <a:ln/>
-        </p:spPr>
-        <p:txBody>
-          <a:bodyPr wrap="square" lIns="0" tIns="0" rIns="0" bIns="0" rtlCol="0" anchor="t"/>
-          <a:lstStyle/>
           <a:p>
             <a:pPr indent="0" marL="0">
               <a:lnSpc>
-                <a:spcPct val="128000"/>
+                <a:spcPct val="120000"/>
               </a:lnSpc>
+              <a:spcBef>
+                <a:spcPts val="1440"/>
+              </a:spcBef>
               <a:buNone/>
             </a:pPr>
             <a:r>
@@ -15964,12 +15888,12 @@
               </a:rPr>
               <a:t>Đèn tín hiệu và đèn hậu LED nháy mấy trăm lần mỗi giây. Nếu khung hình rơi đúng lúc đèn tắt, camera chụp được một cái đèn đỏ đang «tắt».</a:t>
             </a:r>
-            <a:endParaRPr lang="en-US" sz="1250" dirty="0"/>
+            <a:endParaRPr lang="en-US" sz="2300" dirty="0"/>
           </a:p>
           <a:p>
             <a:pPr indent="0" marL="0">
               <a:lnSpc>
-                <a:spcPct val="128000"/>
+                <a:spcPct val="120000"/>
               </a:lnSpc>
               <a:buNone/>
             </a:pPr>
@@ -15984,13 +15908,13 @@
               </a:rPr>
               <a:t>紅綠燈和 LED 尾燈每秒閃好幾百次。如果剛好在燈暗的那一瞬間拍，相機就拍到一個「沒亮」的紅燈。</a:t>
             </a:r>
-            <a:endParaRPr lang="en-US" sz="1250" dirty="0"/>
+            <a:endParaRPr lang="en-US" sz="2300" dirty="0"/>
           </a:p>
         </p:txBody>
       </p:sp>
       <p:sp>
         <p:nvSpPr>
-          <p:cNvPr id="11" name="Shape 9"/>
+          <p:cNvPr id="10" name="Shape 8"/>
           <p:cNvSpPr/>
           <p:nvPr/>
         </p:nvSpPr>
@@ -16017,7 +15941,7 @@
       </p:sp>
       <p:sp>
         <p:nvSpPr>
-          <p:cNvPr id="12" name="Text 10"/>
+          <p:cNvPr id="11" name="Text 9"/>
           <p:cNvSpPr txBox="1"/>
           <p:nvPr/>
         </p:nvSpPr>
@@ -16079,7 +16003,7 @@
       </p:sp>
       <p:pic>
         <p:nvPicPr>
-          <p:cNvPr id="14" name="Image 0" descr="/Users/tsengchenghsun/Class/carClass/Claude outputs/第五週(10-8)/src/logo.png">    </p:cNvPr>
+          <p:cNvPr id="13" name="Image 0" descr="/Users/tsengchenghsun/Class/carClass/Claude outputs/第五週(10-8)/src/logo.png">    </p:cNvPr>
           <p:cNvPicPr>
             <a:picLocks noChangeAspect="1"/>
           </p:cNvPicPr>
@@ -16103,7 +16027,7 @@
       </p:pic>
       <p:sp>
         <p:nvSpPr>
-          <p:cNvPr id="15" name="Text 11"/>
+          <p:cNvPr id="14" name="Text 10"/>
           <p:cNvSpPr txBox="1"/>
           <p:nvPr/>
         </p:nvSpPr>
@@ -16142,7 +16066,7 @@
       </p:sp>
       <p:sp>
         <p:nvSpPr>
-          <p:cNvPr id="16" name="Text 12"/>
+          <p:cNvPr id="15" name="Text 11"/>
           <p:cNvSpPr txBox="1"/>
           <p:nvPr/>
         </p:nvSpPr>
@@ -18206,8 +18130,8 @@
         </p:nvSpPr>
         <p:spPr>
           <a:xfrm>
-            <a:off x="502920" y="1178160"/>
-            <a:ext cx="8138160" cy="563762"/>
+            <a:off x="502920" y="914400"/>
+            <a:ext cx="8138160" cy="1572768"/>
           </a:xfrm>
           <a:prstGeom prst="rect">
             <a:avLst/>
@@ -18216,7 +18140,7 @@
           <a:ln/>
         </p:spPr>
         <p:txBody>
-          <a:bodyPr wrap="square" lIns="0" tIns="0" rIns="0" bIns="0" rtlCol="0" anchor="t"/>
+          <a:bodyPr wrap="square" lIns="0" tIns="0" rIns="0" bIns="0" rtlCol="0" anchor="ctr"/>
           <a:lstStyle/>
           <a:p>
             <a:pPr indent="0" marL="0">
@@ -18246,7 +18170,7 @@
               <a:buNone/>
             </a:pPr>
             <a:r>
-              <a:rPr lang="en-US" sz="1200" dirty="0">
+              <a:rPr lang="en-US" sz="1200" b="1" dirty="0">
                 <a:solidFill>
                   <a:srgbClr val="007F72"/>
                 </a:solidFill>
@@ -18258,33 +18182,14 @@
             </a:r>
             <a:endParaRPr lang="en-US" sz="1900" dirty="0"/>
           </a:p>
-        </p:txBody>
-      </p:sp>
-      <p:sp>
-        <p:nvSpPr>
-          <p:cNvPr id="4" name="Text 2"/>
-          <p:cNvSpPr txBox="1"/>
-          <p:nvPr/>
-        </p:nvSpPr>
-        <p:spPr>
-          <a:xfrm>
-            <a:off x="502920" y="1833362"/>
-            <a:ext cx="8138160" cy="481486"/>
-          </a:xfrm>
-          <a:prstGeom prst="rect">
-            <a:avLst/>
-          </a:prstGeom>
-          <a:noFill/>
-          <a:ln/>
-        </p:spPr>
-        <p:txBody>
-          <a:bodyPr wrap="square" lIns="0" tIns="0" rIns="0" bIns="0" rtlCol="0" anchor="t"/>
-          <a:lstStyle/>
           <a:p>
             <a:pPr indent="0" marL="0">
               <a:lnSpc>
-                <a:spcPct val="128000"/>
+                <a:spcPct val="120000"/>
               </a:lnSpc>
+              <a:spcBef>
+                <a:spcPts val="1440"/>
+              </a:spcBef>
               <a:buNone/>
             </a:pPr>
             <a:r>
@@ -18298,12 +18203,12 @@
               </a:rPr>
               <a:t>Nghĩa là dùng bình thường, nhìn thẳng vào nó cũng không hại mắt.</a:t>
             </a:r>
-            <a:endParaRPr lang="en-US" sz="1250" dirty="0"/>
+            <a:endParaRPr lang="en-US" sz="1900" dirty="0"/>
           </a:p>
           <a:p>
             <a:pPr indent="0" marL="0">
               <a:lnSpc>
-                <a:spcPct val="128000"/>
+                <a:spcPct val="120000"/>
               </a:lnSpc>
               <a:buNone/>
             </a:pPr>
@@ -18318,13 +18223,13 @@
               </a:rPr>
               <a:t>意思是在正常使用的情況下，就算直視它也不會傷到眼睛。</a:t>
             </a:r>
-            <a:endParaRPr lang="en-US" sz="1250" dirty="0"/>
+            <a:endParaRPr lang="en-US" sz="1900" dirty="0"/>
           </a:p>
         </p:txBody>
       </p:sp>
       <p:sp>
         <p:nvSpPr>
-          <p:cNvPr id="5" name="Shape 3"/>
+          <p:cNvPr id="4" name="Shape 2"/>
           <p:cNvSpPr/>
           <p:nvPr/>
         </p:nvSpPr>
@@ -18351,7 +18256,7 @@
       </p:sp>
       <p:pic>
         <p:nvPicPr>
-          <p:cNvPr id="6" name="Image 0" descr="/Users/tsengchenghsun/Class/carClass/Claude outputs/第五週(10-8)/src/img/w5_os1_laser.png">    </p:cNvPr>
+          <p:cNvPr id="5" name="Image 0" descr="/Users/tsengchenghsun/Class/carClass/Claude outputs/第五週(10-8)/src/img/w5_os1_laser.png">    </p:cNvPr>
           <p:cNvPicPr>
             <a:picLocks noChangeAspect="1"/>
           </p:cNvPicPr>
@@ -18375,7 +18280,7 @@
       </p:pic>
       <p:sp>
         <p:nvSpPr>
-          <p:cNvPr id="7" name="Text 4"/>
+          <p:cNvPr id="6" name="Text 3"/>
           <p:cNvSpPr txBox="1"/>
           <p:nvPr/>
         </p:nvSpPr>
@@ -18414,7 +18319,7 @@
       </p:sp>
       <p:sp>
         <p:nvSpPr>
-          <p:cNvPr id="8" name="Shape 5"/>
+          <p:cNvPr id="7" name="Shape 4"/>
           <p:cNvSpPr/>
           <p:nvPr/>
         </p:nvSpPr>
@@ -18441,7 +18346,7 @@
       </p:sp>
       <p:sp>
         <p:nvSpPr>
-          <p:cNvPr id="9" name="Text 6"/>
+          <p:cNvPr id="8" name="Text 5"/>
           <p:cNvSpPr txBox="1"/>
           <p:nvPr/>
         </p:nvSpPr>
@@ -18503,7 +18408,7 @@
       </p:sp>
       <p:pic>
         <p:nvPicPr>
-          <p:cNvPr id="11" name="Image 1" descr="/Users/tsengchenghsun/Class/carClass/Claude outputs/第五週(10-8)/src/logo.png">    </p:cNvPr>
+          <p:cNvPr id="10" name="Image 1" descr="/Users/tsengchenghsun/Class/carClass/Claude outputs/第五週(10-8)/src/logo.png">    </p:cNvPr>
           <p:cNvPicPr>
             <a:picLocks noChangeAspect="1"/>
           </p:cNvPicPr>
@@ -18527,7 +18432,7 @@
       </p:pic>
       <p:sp>
         <p:nvSpPr>
-          <p:cNvPr id="12" name="Text 7"/>
+          <p:cNvPr id="11" name="Text 6"/>
           <p:cNvSpPr txBox="1"/>
           <p:nvPr/>
         </p:nvSpPr>
@@ -18566,7 +18471,7 @@
       </p:sp>
       <p:sp>
         <p:nvSpPr>
-          <p:cNvPr id="13" name="Text 8"/>
+          <p:cNvPr id="12" name="Text 7"/>
           <p:cNvSpPr txBox="1"/>
           <p:nvPr/>
         </p:nvSpPr>
@@ -18675,8 +18580,8 @@
         </p:nvSpPr>
         <p:spPr>
           <a:xfrm>
-            <a:off x="502920" y="1275342"/>
-            <a:ext cx="8138160" cy="563762"/>
+            <a:off x="502920" y="914400"/>
+            <a:ext cx="8138160" cy="1970282"/>
           </a:xfrm>
           <a:prstGeom prst="rect">
             <a:avLst/>
@@ -18685,7 +18590,7 @@
           <a:ln/>
         </p:spPr>
         <p:txBody>
-          <a:bodyPr wrap="square" lIns="0" tIns="0" rIns="0" bIns="0" rtlCol="0" anchor="t"/>
+          <a:bodyPr wrap="square" lIns="0" tIns="0" rIns="0" bIns="0" rtlCol="0" anchor="ctr"/>
           <a:lstStyle/>
           <a:p>
             <a:pPr indent="0" marL="0">
@@ -18715,7 +18620,7 @@
               <a:buNone/>
             </a:pPr>
             <a:r>
-              <a:rPr lang="en-US" sz="1200" dirty="0">
+              <a:rPr lang="en-US" sz="1200" b="1" dirty="0">
                 <a:solidFill>
                   <a:srgbClr val="007F72"/>
                 </a:solidFill>
@@ -18727,33 +18632,14 @@
             </a:r>
             <a:endParaRPr lang="en-US" sz="1900" dirty="0"/>
           </a:p>
-        </p:txBody>
-      </p:sp>
-      <p:sp>
-        <p:nvSpPr>
-          <p:cNvPr id="4" name="Text 2"/>
-          <p:cNvSpPr txBox="1"/>
-          <p:nvPr/>
-        </p:nvSpPr>
-        <p:spPr>
-          <a:xfrm>
-            <a:off x="502920" y="1930544"/>
-            <a:ext cx="8138160" cy="684636"/>
-          </a:xfrm>
-          <a:prstGeom prst="rect">
-            <a:avLst/>
-          </a:prstGeom>
-          <a:noFill/>
-          <a:ln/>
-        </p:spPr>
-        <p:txBody>
-          <a:bodyPr wrap="square" lIns="0" tIns="0" rIns="0" bIns="0" rtlCol="0" anchor="t"/>
-          <a:lstStyle/>
           <a:p>
             <a:pPr indent="0" marL="0">
               <a:lnSpc>
-                <a:spcPct val="128000"/>
+                <a:spcPct val="120000"/>
               </a:lnSpc>
+              <a:spcBef>
+                <a:spcPts val="1440"/>
+              </a:spcBef>
               <a:buNone/>
             </a:pPr>
             <a:r>
@@ -18767,12 +18653,12 @@
               </a:rPr>
               <a:t>Tia xuyên mưa, lá cây, khói bụi rồi mới chạm vật thật. Chỉ nhận một lần vọng thì hạt mưa thành vật cản.</a:t>
             </a:r>
-            <a:endParaRPr lang="en-US" sz="1250" dirty="0"/>
+            <a:endParaRPr lang="en-US" sz="1900" dirty="0"/>
           </a:p>
           <a:p>
             <a:pPr indent="0" marL="0">
               <a:lnSpc>
-                <a:spcPct val="128000"/>
+                <a:spcPct val="120000"/>
               </a:lnSpc>
               <a:buNone/>
             </a:pPr>
@@ -18787,13 +18673,13 @@
               </a:rPr>
               <a:t>雷射穿過雨幕、樹葉、煙塵才打到真正的東西。只收第一次回波，就可能把雨滴當成障礙物。</a:t>
             </a:r>
-            <a:endParaRPr lang="en-US" sz="1250" dirty="0"/>
+            <a:endParaRPr lang="en-US" sz="1900" dirty="0"/>
           </a:p>
         </p:txBody>
       </p:sp>
       <p:sp>
         <p:nvSpPr>
-          <p:cNvPr id="5" name="Shape 3"/>
+          <p:cNvPr id="4" name="Shape 2"/>
           <p:cNvSpPr/>
           <p:nvPr/>
         </p:nvSpPr>
@@ -18820,7 +18706,7 @@
       </p:sp>
       <p:pic>
         <p:nvPicPr>
-          <p:cNvPr id="6" name="Image 0" descr="/Users/tsengchenghsun/Class/carClass/Claude outputs/第五週(10-8)/src/img/w5_os1_returns.png">    </p:cNvPr>
+          <p:cNvPr id="5" name="Image 0" descr="/Users/tsengchenghsun/Class/carClass/Claude outputs/第五週(10-8)/src/img/w5_os1_returns.png">    </p:cNvPr>
           <p:cNvPicPr>
             <a:picLocks noChangeAspect="1"/>
           </p:cNvPicPr>
@@ -18844,7 +18730,7 @@
       </p:pic>
       <p:sp>
         <p:nvSpPr>
-          <p:cNvPr id="7" name="Text 4"/>
+          <p:cNvPr id="6" name="Text 3"/>
           <p:cNvSpPr txBox="1"/>
           <p:nvPr/>
         </p:nvSpPr>
@@ -18883,7 +18769,7 @@
       </p:sp>
       <p:sp>
         <p:nvSpPr>
-          <p:cNvPr id="8" name="Shape 5"/>
+          <p:cNvPr id="7" name="Shape 4"/>
           <p:cNvSpPr/>
           <p:nvPr/>
         </p:nvSpPr>
@@ -18910,7 +18796,7 @@
       </p:sp>
       <p:sp>
         <p:nvSpPr>
-          <p:cNvPr id="9" name="Text 6"/>
+          <p:cNvPr id="8" name="Text 5"/>
           <p:cNvSpPr txBox="1"/>
           <p:nvPr/>
         </p:nvSpPr>
@@ -18972,7 +18858,7 @@
       </p:sp>
       <p:pic>
         <p:nvPicPr>
-          <p:cNvPr id="11" name="Image 1" descr="/Users/tsengchenghsun/Class/carClass/Claude outputs/第五週(10-8)/src/logo.png">    </p:cNvPr>
+          <p:cNvPr id="10" name="Image 1" descr="/Users/tsengchenghsun/Class/carClass/Claude outputs/第五週(10-8)/src/logo.png">    </p:cNvPr>
           <p:cNvPicPr>
             <a:picLocks noChangeAspect="1"/>
           </p:cNvPicPr>
@@ -18996,7 +18882,7 @@
       </p:pic>
       <p:sp>
         <p:nvSpPr>
-          <p:cNvPr id="12" name="Text 7"/>
+          <p:cNvPr id="11" name="Text 6"/>
           <p:cNvSpPr txBox="1"/>
           <p:nvPr/>
         </p:nvSpPr>
@@ -19035,7 +18921,7 @@
       </p:sp>
       <p:sp>
         <p:nvSpPr>
-          <p:cNvPr id="13" name="Text 8"/>
+          <p:cNvPr id="12" name="Text 7"/>
           <p:cNvSpPr txBox="1"/>
           <p:nvPr/>
         </p:nvSpPr>

--- a/第五週(10-08)/第五週_第2節_簡報.pptx
+++ b/第五週(10-08)/第五週_第2節_簡報.pptx
@@ -4996,7 +4996,7 @@
                 <a:ea typeface="Arial Unicode MS"/>
                 <a:cs typeface="Arial Unicode MS"/>
               </a:rPr>
-              <a:t>圈示意圖上時間差那個箭頭，再圈下方高速物體被拉歪的例子。
+              <a:t>等動圖掃完，指著那根斜掉的電線桿和下面那個箭頭說「它本來是直的」，再圈結論條。
 </a:t>
             </a:r>
           </a:p>
@@ -5293,7 +5293,51 @@
                 <a:ea typeface="Arial Unicode MS"/>
                 <a:cs typeface="Arial Unicode MS"/>
               </a:rPr>
-              <a:t>我在白板上把一張照片畫成三條，標上第零毫秒、第十五毫秒、第三十毫秒——同一張照片，三個不同的時間。
+              <a:t>左邊這張動圖就是在演這件事，它會一直循環播，各位邊聽邊看。一開始那根電線桿是</a:t>
+            </a:r>
+            <a:r>
+              <a:rPr sz="800" b="1" lang="zh-TW" dirty="0">
+                <a:solidFill>
+                  <a:srgbClr val="000000"/>
+                </a:solidFill>
+                <a:latin typeface="Arial Unicode MS"/>
+                <a:ea typeface="Arial Unicode MS"/>
+                <a:cs typeface="Arial Unicode MS"/>
+              </a:rPr>
+              <a:t>直的</a:t>
+            </a:r>
+            <a:r>
+              <a:rPr sz="800" lang="zh-TW" dirty="0">
+                <a:solidFill>
+                  <a:srgbClr val="000000"/>
+                </a:solidFill>
+                <a:latin typeface="Arial Unicode MS"/>
+                <a:ea typeface="Arial Unicode MS"/>
+                <a:cs typeface="Arial Unicode MS"/>
+              </a:rPr>
+              <a:t>，這是它本來的樣子。然後黃色那條線從上往下掃，掃到哪一列，那一列才拍下來。左邊標的是時間：最上面那一列是第零毫秒，中間是第十五毫秒，最下面是第三十毫秒。這三十毫秒裡面車子一直在走，所以每一列拍到的電線桿都在不同的地方。掃完各位看結果——</a:t>
+            </a:r>
+            <a:r>
+              <a:rPr sz="800" b="1" lang="zh-TW" dirty="0">
+                <a:solidFill>
+                  <a:srgbClr val="000000"/>
+                </a:solidFill>
+                <a:latin typeface="Arial Unicode MS"/>
+                <a:ea typeface="Arial Unicode MS"/>
+                <a:cs typeface="Arial Unicode MS"/>
+              </a:rPr>
+              <a:t>那根直的電線桿，在照片裡變成斜的</a:t>
+            </a:r>
+            <a:r>
+              <a:rPr sz="800" lang="zh-TW" dirty="0">
+                <a:solidFill>
+                  <a:srgbClr val="000000"/>
+                </a:solidFill>
+                <a:latin typeface="Arial Unicode MS"/>
+                <a:ea typeface="Arial Unicode MS"/>
+                <a:cs typeface="Arial Unicode MS"/>
+              </a:rPr>
+              <a:t>。下面那個箭頭就是上下差了多少。
 </a:t>
             </a:r>
           </a:p>
@@ -14403,15 +14447,15 @@
         <p:spPr>
           <a:xfrm>
             <a:off x="502920" y="1101852"/>
-            <a:ext cx="2468880" cy="2514600"/>
+            <a:ext cx="3200400" cy="2514600"/>
           </a:xfrm>
           <a:prstGeom prst="roundRect">
             <a:avLst>
-              <a:gd name="adj" fmla="val 4444"/>
+              <a:gd name="adj" fmla="val 4364"/>
             </a:avLst>
           </a:prstGeom>
           <a:solidFill>
-            <a:srgbClr val="F4F7FA"/>
+            <a:srgbClr val="FFFFFF"/>
           </a:solidFill>
           <a:ln w="12700">
             <a:solidFill>
@@ -14421,225 +14465,40 @@
           </a:ln>
         </p:spPr>
       </p:sp>
-      <p:sp>
-        <p:nvSpPr>
-          <p:cNvPr id="4" name="Shape 2"/>
-          <p:cNvSpPr/>
+      <p:pic>
+        <p:nvPicPr>
+          <p:cNvPr id="4" name="Image 0" descr="/Users/tsengchenghsun/Class/carClass/Claude outputs/第五週(10-8)/src/img/w5_s03_rolling.gif">    </p:cNvPr>
+          <p:cNvPicPr>
+            <a:picLocks noChangeAspect="1"/>
+          </p:cNvPicPr>
           <p:nvPr/>
-        </p:nvSpPr>
-        <p:spPr>
-          <a:xfrm>
-            <a:off x="896478" y="2003633"/>
-            <a:ext cx="1681764" cy="1"/>
-          </a:xfrm>
-          <a:prstGeom prst="line">
+        </p:nvPicPr>
+        <p:blipFill>
+          <a:blip r:embed="rId1"/>
+          <a:stretch>
+            <a:fillRect/>
+          </a:stretch>
+        </p:blipFill>
+        <p:spPr>
+          <a:xfrm>
+            <a:off x="576072" y="1249680"/>
+            <a:ext cx="3054096" cy="2036064"/>
+          </a:xfrm>
+          <a:prstGeom prst="rect">
             <a:avLst/>
           </a:prstGeom>
-          <a:noFill/>
-          <a:ln w="12700">
-            <a:solidFill>
-              <a:srgbClr val="9AA6B0"/>
-            </a:solidFill>
-            <a:prstDash val="dash"/>
-          </a:ln>
-        </p:spPr>
-      </p:sp>
-      <p:sp>
-        <p:nvSpPr>
-          <p:cNvPr id="5" name="Shape 3"/>
-          <p:cNvSpPr/>
-          <p:nvPr/>
-        </p:nvSpPr>
-        <p:spPr>
-          <a:xfrm>
-            <a:off x="896478" y="2270272"/>
-            <a:ext cx="1681764" cy="1"/>
-          </a:xfrm>
-          <a:prstGeom prst="line">
-            <a:avLst/>
-          </a:prstGeom>
-          <a:noFill/>
-          <a:ln w="12700">
-            <a:solidFill>
-              <a:srgbClr val="9AA6B0"/>
-            </a:solidFill>
-            <a:prstDash val="dash"/>
-          </a:ln>
-        </p:spPr>
-      </p:sp>
-      <p:sp>
-        <p:nvSpPr>
-          <p:cNvPr id="6" name="Shape 4"/>
-          <p:cNvSpPr/>
-          <p:nvPr/>
-        </p:nvSpPr>
-        <p:spPr>
-          <a:xfrm>
-            <a:off x="896478" y="2136953"/>
-            <a:ext cx="1548994" cy="1"/>
-          </a:xfrm>
-          <a:prstGeom prst="line">
-            <a:avLst/>
-          </a:prstGeom>
-          <a:noFill/>
-          <a:ln w="25400">
-            <a:solidFill>
-              <a:srgbClr val="1F4E79"/>
-            </a:solidFill>
-            <a:prstDash val="solid"/>
-            <a:tailEnd type="triangle"/>
-          </a:ln>
-        </p:spPr>
-      </p:sp>
-      <p:sp>
-        <p:nvSpPr>
-          <p:cNvPr id="7" name="Shape 5"/>
-          <p:cNvSpPr/>
-          <p:nvPr/>
-        </p:nvSpPr>
-        <p:spPr>
-          <a:xfrm>
-            <a:off x="896478" y="2847990"/>
-            <a:ext cx="1681764" cy="1"/>
-          </a:xfrm>
-          <a:prstGeom prst="line">
-            <a:avLst/>
-          </a:prstGeom>
-          <a:noFill/>
-          <a:ln w="12700">
-            <a:solidFill>
-              <a:srgbClr val="9AA6B0"/>
-            </a:solidFill>
-            <a:prstDash val="dash"/>
-          </a:ln>
-        </p:spPr>
-      </p:sp>
-      <p:sp>
-        <p:nvSpPr>
-          <p:cNvPr id="8" name="Shape 6"/>
-          <p:cNvSpPr/>
-          <p:nvPr/>
-        </p:nvSpPr>
-        <p:spPr>
-          <a:xfrm>
-            <a:off x="896478" y="3114629"/>
-            <a:ext cx="1681764" cy="1"/>
-          </a:xfrm>
-          <a:prstGeom prst="line">
-            <a:avLst/>
-          </a:prstGeom>
-          <a:noFill/>
-          <a:ln w="12700">
-            <a:solidFill>
-              <a:srgbClr val="9AA6B0"/>
-            </a:solidFill>
-            <a:prstDash val="dash"/>
-          </a:ln>
-        </p:spPr>
-      </p:sp>
-      <p:sp>
-        <p:nvSpPr>
-          <p:cNvPr id="9" name="Shape 7"/>
-          <p:cNvSpPr/>
-          <p:nvPr/>
-        </p:nvSpPr>
-        <p:spPr>
-          <a:xfrm flipV="1">
-            <a:off x="896478" y="2892430"/>
-            <a:ext cx="420441" cy="177759"/>
-          </a:xfrm>
-          <a:prstGeom prst="line">
-            <a:avLst/>
-          </a:prstGeom>
-          <a:noFill/>
-          <a:ln w="25400">
-            <a:solidFill>
-              <a:srgbClr val="D9463E"/>
-            </a:solidFill>
-            <a:prstDash val="solid"/>
-          </a:ln>
-        </p:spPr>
-      </p:sp>
-      <p:sp>
-        <p:nvSpPr>
-          <p:cNvPr id="10" name="Shape 8"/>
-          <p:cNvSpPr/>
-          <p:nvPr/>
-        </p:nvSpPr>
-        <p:spPr>
-          <a:xfrm>
-            <a:off x="1316919" y="2892430"/>
-            <a:ext cx="420441" cy="199979"/>
-          </a:xfrm>
-          <a:prstGeom prst="line">
-            <a:avLst/>
-          </a:prstGeom>
-          <a:noFill/>
-          <a:ln w="25400">
-            <a:solidFill>
-              <a:srgbClr val="D9463E"/>
-            </a:solidFill>
-            <a:prstDash val="solid"/>
-          </a:ln>
-        </p:spPr>
-      </p:sp>
-      <p:sp>
-        <p:nvSpPr>
-          <p:cNvPr id="11" name="Shape 9"/>
-          <p:cNvSpPr/>
-          <p:nvPr/>
-        </p:nvSpPr>
-        <p:spPr>
-          <a:xfrm flipV="1">
-            <a:off x="1737360" y="2803550"/>
-            <a:ext cx="420441" cy="288859"/>
-          </a:xfrm>
-          <a:prstGeom prst="line">
-            <a:avLst/>
-          </a:prstGeom>
-          <a:noFill/>
-          <a:ln w="25400">
-            <a:solidFill>
-              <a:srgbClr val="D9463E"/>
-            </a:solidFill>
-            <a:prstDash val="solid"/>
-          </a:ln>
-        </p:spPr>
-      </p:sp>
-      <p:sp>
-        <p:nvSpPr>
-          <p:cNvPr id="12" name="Shape 10"/>
-          <p:cNvSpPr/>
-          <p:nvPr/>
-        </p:nvSpPr>
-        <p:spPr>
-          <a:xfrm>
-            <a:off x="2157801" y="2803550"/>
-            <a:ext cx="287670" cy="177759"/>
-          </a:xfrm>
-          <a:prstGeom prst="line">
-            <a:avLst/>
-          </a:prstGeom>
-          <a:noFill/>
-          <a:ln w="25400">
-            <a:solidFill>
-              <a:srgbClr val="D9463E"/>
-            </a:solidFill>
-            <a:prstDash val="solid"/>
-            <a:tailEnd type="triangle"/>
-          </a:ln>
-        </p:spPr>
-      </p:sp>
-      <p:sp>
-        <p:nvSpPr>
-          <p:cNvPr id="13" name="Text 11"/>
+        </p:spPr>
+      </p:pic>
+      <p:sp>
+        <p:nvSpPr>
+          <p:cNvPr id="5" name="Text 2"/>
           <p:cNvSpPr txBox="1"/>
           <p:nvPr/>
         </p:nvSpPr>
         <p:spPr>
           <a:xfrm>
-            <a:off x="3429000" y="914400"/>
-            <a:ext cx="5212080" cy="2889504"/>
+            <a:off x="576072" y="3396996"/>
+            <a:ext cx="3054096" cy="182880"/>
           </a:xfrm>
           <a:prstGeom prst="rect">
             <a:avLst/>
@@ -14651,6 +14510,45 @@
           <a:bodyPr wrap="square" lIns="0" tIns="0" rIns="0" bIns="0" rtlCol="0" anchor="ctr"/>
           <a:lstStyle/>
           <a:p>
+            <a:pPr algn="ctr" indent="0" marL="0">
+              <a:buNone/>
+            </a:pPr>
+            <a:r>
+              <a:rPr lang="en-US" sz="700" dirty="0">
+                <a:solidFill>
+                  <a:srgbClr val="5F7183"/>
+                </a:solidFill>
+                <a:latin typeface="Arial" pitchFamily="34" charset="0"/>
+                <a:ea typeface="Arial" pitchFamily="34" charset="-122"/>
+                <a:cs typeface="Arial" pitchFamily="34" charset="-120"/>
+              </a:rPr>
+              <a:t>示意圖：課程自製（src/tools_make_rs_gif.py）</a:t>
+            </a:r>
+            <a:endParaRPr lang="en-US" sz="700" dirty="0"/>
+          </a:p>
+        </p:txBody>
+      </p:sp>
+      <p:sp>
+        <p:nvSpPr>
+          <p:cNvPr id="6" name="Text 3"/>
+          <p:cNvSpPr txBox="1"/>
+          <p:nvPr/>
+        </p:nvSpPr>
+        <p:spPr>
+          <a:xfrm>
+            <a:off x="4014216" y="914400"/>
+            <a:ext cx="4626864" cy="2889504"/>
+          </a:xfrm>
+          <a:prstGeom prst="rect">
+            <a:avLst/>
+          </a:prstGeom>
+          <a:noFill/>
+          <a:ln/>
+        </p:spPr>
+        <p:txBody>
+          <a:bodyPr wrap="square" lIns="0" tIns="0" rIns="0" bIns="0" rtlCol="0" anchor="ctr"/>
+          <a:lstStyle/>
+          <a:p>
             <a:pPr indent="0" marL="0">
               <a:lnSpc>
                 <a:spcPct val="120000"/>
@@ -14737,7 +14635,7 @@
       </p:sp>
       <p:sp>
         <p:nvSpPr>
-          <p:cNvPr id="14" name="Shape 12"/>
+          <p:cNvPr id="7" name="Shape 4"/>
           <p:cNvSpPr/>
           <p:nvPr/>
         </p:nvSpPr>
@@ -14764,7 +14662,7 @@
       </p:sp>
       <p:sp>
         <p:nvSpPr>
-          <p:cNvPr id="15" name="Text 13"/>
+          <p:cNvPr id="8" name="Text 5"/>
           <p:cNvSpPr txBox="1"/>
           <p:nvPr/>
         </p:nvSpPr>
@@ -14826,14 +14724,14 @@
       </p:sp>
       <p:pic>
         <p:nvPicPr>
-          <p:cNvPr id="17" name="Image 0" descr="/Users/tsengchenghsun/Class/carClass/Claude outputs/第五週(10-8)/src/logo.png">    </p:cNvPr>
+          <p:cNvPr id="10" name="Image 1" descr="/Users/tsengchenghsun/Class/carClass/Claude outputs/第五週(10-8)/src/logo.png">    </p:cNvPr>
           <p:cNvPicPr>
             <a:picLocks noChangeAspect="1"/>
           </p:cNvPicPr>
           <p:nvPr/>
         </p:nvPicPr>
         <p:blipFill>
-          <a:blip r:embed="rId1"/>
+          <a:blip r:embed="rId2"/>
           <a:stretch>
             <a:fillRect/>
           </a:stretch>
@@ -14850,7 +14748,7 @@
       </p:pic>
       <p:sp>
         <p:nvSpPr>
-          <p:cNvPr id="18" name="Text 14"/>
+          <p:cNvPr id="11" name="Text 6"/>
           <p:cNvSpPr txBox="1"/>
           <p:nvPr/>
         </p:nvSpPr>
@@ -14889,7 +14787,7 @@
       </p:sp>
       <p:sp>
         <p:nvSpPr>
-          <p:cNvPr id="19" name="Text 15"/>
+          <p:cNvPr id="12" name="Text 7"/>
           <p:cNvSpPr txBox="1"/>
           <p:nvPr/>
         </p:nvSpPr>

--- a/第五週(10-08)/第五週_第2節_簡報.pptx
+++ b/第五週(10-08)/第五週_第2節_簡報.pptx
@@ -5744,7 +5744,7 @@
                 <a:ea typeface="Arial Unicode MS"/>
                 <a:cs typeface="Arial Unicode MS"/>
               </a:rPr>
-              <a:t>先重播上一節那支影片的隧道段（youtu.be/OkV0Lj-uATE，約 0:28 起），只看下面那一格；再圈 dB 那個數字和隧道口的例子。
+              <a:t>先重播上一節那支影片的隧道段（youtu.be/OkV0Lj-uATE，約 0:28 起），只看下面那一格；再讓左邊的動圖跑一輪，圈 dB 那個數字。
 </a:t>
             </a:r>
           </a:p>
@@ -5888,6 +5888,138 @@
                 <a:cs typeface="Arial Unicode MS"/>
               </a:rPr>
               <a:t>我現在把那十秒再播一次，這次各位只看下面那一格。
+</a:t>
+            </a:r>
+          </a:p>
+          <a:p>
+            <a:pPr algn="l">
+              <a:spcBef>
+                <a:spcPts val="0"/>
+              </a:spcBef>
+              <a:spcAft>
+                <a:spcPts val="133"/>
+              </a:spcAft>
+            </a:pPr>
+            <a:r>
+              <a:rPr sz="800" lang="zh-TW" dirty="0">
+                <a:solidFill>
+                  <a:srgbClr val="000000"/>
+                </a:solidFill>
+                <a:latin typeface="Arial Unicode MS"/>
+                <a:ea typeface="Arial Unicode MS"/>
+                <a:cs typeface="Arial Unicode MS"/>
+              </a:rPr>
+              <a:t>左邊這張動圖在演的就是這件事，它會一直循環播。先看右上角寫的是</a:t>
+            </a:r>
+            <a:r>
+              <a:rPr sz="800" b="1" lang="zh-TW" dirty="0">
+                <a:solidFill>
+                  <a:srgbClr val="000000"/>
+                </a:solidFill>
+                <a:latin typeface="Arial Unicode MS"/>
+                <a:ea typeface="Arial Unicode MS"/>
+                <a:cs typeface="Arial Unicode MS"/>
+              </a:rPr>
+              <a:t>感測器 60 dB</a:t>
+            </a:r>
+            <a:r>
+              <a:rPr sz="800" lang="zh-TW" dirty="0">
+                <a:solidFill>
+                  <a:srgbClr val="000000"/>
+                </a:solidFill>
+                <a:latin typeface="Arial Unicode MS"/>
+                <a:ea typeface="Arial Unicode MS"/>
+                <a:cs typeface="Arial Unicode MS"/>
+              </a:rPr>
+              <a:t>。一開始曝光對準外面：隧道外看得清清楚楚，可是隧道裡</a:t>
+            </a:r>
+            <a:r>
+              <a:rPr sz="800" b="1" lang="zh-TW" dirty="0">
+                <a:solidFill>
+                  <a:srgbClr val="000000"/>
+                </a:solidFill>
+                <a:latin typeface="Arial Unicode MS"/>
+                <a:ea typeface="Arial Unicode MS"/>
+                <a:cs typeface="Arial Unicode MS"/>
+              </a:rPr>
+              <a:t>整片黑</a:t>
+            </a:r>
+            <a:r>
+              <a:rPr sz="800" lang="zh-TW" dirty="0">
+                <a:solidFill>
+                  <a:srgbClr val="000000"/>
+                </a:solidFill>
+                <a:latin typeface="Arial Unicode MS"/>
+                <a:ea typeface="Arial Unicode MS"/>
+                <a:cs typeface="Arial Unicode MS"/>
+              </a:rPr>
+              <a:t>——那裡面其實停著一台車，你完全看不到。接下來曝光慢慢拉長，裡面那台車浮出來了，但是同一個時間，隧道外變成</a:t>
+            </a:r>
+            <a:r>
+              <a:rPr sz="800" b="1" lang="zh-TW" dirty="0">
+                <a:solidFill>
+                  <a:srgbClr val="000000"/>
+                </a:solidFill>
+                <a:latin typeface="Arial Unicode MS"/>
+                <a:ea typeface="Arial Unicode MS"/>
+                <a:cs typeface="Arial Unicode MS"/>
+              </a:rPr>
+              <a:t>整片死白</a:t>
+            </a:r>
+            <a:r>
+              <a:rPr sz="800" lang="zh-TW" dirty="0">
+                <a:solidFill>
+                  <a:srgbClr val="000000"/>
+                </a:solidFill>
+                <a:latin typeface="Arial Unicode MS"/>
+                <a:ea typeface="Arial Unicode MS"/>
+                <a:cs typeface="Arial Unicode MS"/>
+              </a:rPr>
+              <a:t>，外面那台車換它不見了。</a:t>
+            </a:r>
+            <a:r>
+              <a:rPr sz="800" b="1" lang="zh-TW" dirty="0">
+                <a:solidFill>
+                  <a:srgbClr val="000000"/>
+                </a:solidFill>
+                <a:latin typeface="Arial Unicode MS"/>
+                <a:ea typeface="Arial Unicode MS"/>
+                <a:cs typeface="Arial Unicode MS"/>
+              </a:rPr>
+              <a:t>只能選一個。</a:t>
+            </a:r>
+            <a:r>
+              <a:rPr sz="800" lang="zh-TW" dirty="0">
+                <a:solidFill>
+                  <a:srgbClr val="000000"/>
+                </a:solidFill>
+                <a:latin typeface="Arial Unicode MS"/>
+                <a:ea typeface="Arial Unicode MS"/>
+                <a:cs typeface="Arial Unicode MS"/>
+              </a:rPr>
+              <a:t>最後換成 </a:t>
+            </a:r>
+            <a:r>
+              <a:rPr sz="800" b="1" lang="zh-TW" dirty="0">
+                <a:solidFill>
+                  <a:srgbClr val="000000"/>
+                </a:solidFill>
+                <a:latin typeface="Arial Unicode MS"/>
+                <a:ea typeface="Arial Unicode MS"/>
+                <a:cs typeface="Arial Unicode MS"/>
+              </a:rPr>
+              <a:t>140 dB</a:t>
+            </a:r>
+            <a:r>
+              <a:rPr sz="800" lang="zh-TW" dirty="0">
+                <a:solidFill>
+                  <a:srgbClr val="000000"/>
+                </a:solidFill>
+                <a:latin typeface="Arial Unicode MS"/>
+                <a:ea typeface="Arial Unicode MS"/>
+                <a:cs typeface="Arial Unicode MS"/>
+              </a:rPr>
+              <a:t> 的感測器，同一個場景、同一個曝光，兩台車同時看得到。
 </a:t>
             </a:r>
           </a:p>
@@ -14897,15 +15029,15 @@
         <p:spPr>
           <a:xfrm>
             <a:off x="502920" y="1101852"/>
-            <a:ext cx="2468880" cy="2514600"/>
+            <a:ext cx="3017520" cy="2514600"/>
           </a:xfrm>
           <a:prstGeom prst="roundRect">
             <a:avLst>
-              <a:gd name="adj" fmla="val 4444"/>
+              <a:gd name="adj" fmla="val 4364"/>
             </a:avLst>
           </a:prstGeom>
           <a:solidFill>
-            <a:srgbClr val="F4F7FA"/>
+            <a:srgbClr val="FFFFFF"/>
           </a:solidFill>
           <a:ln w="12700">
             <a:solidFill>
@@ -14915,16 +15047,40 @@
           </a:ln>
         </p:spPr>
       </p:sp>
+      <p:pic>
+        <p:nvPicPr>
+          <p:cNvPr id="4" name="Image 0" descr="/Users/tsengchenghsun/Class/carClass/Claude outputs/第五週(10-8)/src/img/w5_s04_dynrange.gif">    </p:cNvPr>
+          <p:cNvPicPr>
+            <a:picLocks noChangeAspect="1"/>
+          </p:cNvPicPr>
+          <p:nvPr/>
+        </p:nvPicPr>
+        <p:blipFill>
+          <a:blip r:embed="rId1"/>
+          <a:stretch>
+            <a:fillRect/>
+          </a:stretch>
+        </p:blipFill>
+        <p:spPr>
+          <a:xfrm>
+            <a:off x="576072" y="1310640"/>
+            <a:ext cx="2871216" cy="1914144"/>
+          </a:xfrm>
+          <a:prstGeom prst="rect">
+            <a:avLst/>
+          </a:prstGeom>
+        </p:spPr>
+      </p:pic>
       <p:sp>
         <p:nvSpPr>
-          <p:cNvPr id="4" name="Text 2"/>
+          <p:cNvPr id="5" name="Text 2"/>
           <p:cNvSpPr txBox="1"/>
           <p:nvPr/>
         </p:nvSpPr>
         <p:spPr>
           <a:xfrm>
-            <a:off x="807964" y="1603675"/>
-            <a:ext cx="663854" cy="311079"/>
+            <a:off x="576072" y="3396996"/>
+            <a:ext cx="2871216" cy="182880"/>
           </a:xfrm>
           <a:prstGeom prst="rect">
             <a:avLst/>
@@ -14936,123 +15092,34 @@
           <a:bodyPr wrap="square" lIns="0" tIns="0" rIns="0" bIns="0" rtlCol="0" anchor="ctr"/>
           <a:lstStyle/>
           <a:p>
-            <a:pPr algn="l" indent="0" marL="0">
+            <a:pPr algn="ctr" indent="0" marL="0">
               <a:buNone/>
             </a:pPr>
             <a:r>
-              <a:rPr lang="en-US" sz="900" b="1" dirty="0">
-                <a:solidFill>
-                  <a:srgbClr val="6FA8DC"/>
+              <a:rPr lang="en-US" sz="700" dirty="0">
+                <a:solidFill>
+                  <a:srgbClr val="5F7183"/>
                 </a:solidFill>
                 <a:latin typeface="Arial" pitchFamily="34" charset="0"/>
                 <a:ea typeface="Arial" pitchFamily="34" charset="-122"/>
                 <a:cs typeface="Arial" pitchFamily="34" charset="-120"/>
               </a:rPr>
-              <a:t>khô  乾</a:t>
-            </a:r>
-            <a:endParaRPr lang="en-US" sz="900" dirty="0"/>
+              <a:t>示意圖：課程自製（src/tools_make_dr_gif.py）</a:t>
+            </a:r>
+            <a:endParaRPr lang="en-US" sz="700" dirty="0"/>
           </a:p>
         </p:txBody>
       </p:sp>
       <p:sp>
         <p:nvSpPr>
-          <p:cNvPr id="5" name="Shape 3"/>
-          <p:cNvSpPr/>
-          <p:nvPr/>
-        </p:nvSpPr>
-        <p:spPr>
-          <a:xfrm>
-            <a:off x="807964" y="2000901"/>
-            <a:ext cx="398313" cy="183224"/>
-          </a:xfrm>
-          <a:prstGeom prst="roundRect">
-            <a:avLst>
-              <a:gd name="adj" fmla="val 22000"/>
-            </a:avLst>
-          </a:prstGeom>
-          <a:solidFill>
-            <a:srgbClr val="8FA3B5"/>
-          </a:solidFill>
-          <a:ln/>
-        </p:spPr>
-      </p:sp>
-      <p:sp>
-        <p:nvSpPr>
-          <p:cNvPr id="6" name="Shape 4"/>
-          <p:cNvSpPr/>
-          <p:nvPr/>
-        </p:nvSpPr>
-        <p:spPr>
-          <a:xfrm>
-            <a:off x="959323" y="2037546"/>
-            <a:ext cx="135426" cy="109934"/>
-          </a:xfrm>
-          <a:prstGeom prst="roundRect">
-            <a:avLst>
-              <a:gd name="adj" fmla="val 23333"/>
-            </a:avLst>
-          </a:prstGeom>
-          <a:solidFill>
-            <a:srgbClr val="FFFFFF"/>
-          </a:solidFill>
-          <a:ln/>
-        </p:spPr>
-      </p:sp>
-      <p:sp>
-        <p:nvSpPr>
-          <p:cNvPr id="7" name="Shape 5"/>
-          <p:cNvSpPr/>
-          <p:nvPr/>
-        </p:nvSpPr>
-        <p:spPr>
-          <a:xfrm>
-            <a:off x="1250533" y="2092513"/>
-            <a:ext cx="840882" cy="1"/>
-          </a:xfrm>
-          <a:prstGeom prst="line">
-            <a:avLst/>
-          </a:prstGeom>
-          <a:noFill/>
-          <a:ln w="63500">
-            <a:solidFill>
-              <a:srgbClr val="6FA8DC"/>
-            </a:solidFill>
-            <a:prstDash val="solid"/>
-          </a:ln>
-        </p:spPr>
-      </p:sp>
-      <p:sp>
-        <p:nvSpPr>
-          <p:cNvPr id="8" name="Shape 6"/>
-          <p:cNvSpPr/>
-          <p:nvPr/>
-        </p:nvSpPr>
-        <p:spPr>
-          <a:xfrm>
-            <a:off x="2091416" y="1892534"/>
-            <a:ext cx="77450" cy="399959"/>
-          </a:xfrm>
-          <a:prstGeom prst="roundRect">
-            <a:avLst>
-              <a:gd name="adj" fmla="val 34286"/>
-            </a:avLst>
-          </a:prstGeom>
-          <a:solidFill>
-            <a:srgbClr val="3A4650"/>
-          </a:solidFill>
-          <a:ln/>
-        </p:spPr>
-      </p:sp>
-      <p:sp>
-        <p:nvSpPr>
-          <p:cNvPr id="9" name="Text 7"/>
+          <p:cNvPr id="6" name="Text 3"/>
           <p:cNvSpPr txBox="1"/>
           <p:nvPr/>
         </p:nvSpPr>
         <p:spPr>
           <a:xfrm>
-            <a:off x="807964" y="2403592"/>
-            <a:ext cx="663854" cy="311079"/>
+            <a:off x="3831336" y="914400"/>
+            <a:ext cx="4809744" cy="2889504"/>
           </a:xfrm>
           <a:prstGeom prst="rect">
             <a:avLst/>
@@ -15064,134 +15131,6 @@
           <a:bodyPr wrap="square" lIns="0" tIns="0" rIns="0" bIns="0" rtlCol="0" anchor="ctr"/>
           <a:lstStyle/>
           <a:p>
-            <a:pPr algn="l" indent="0" marL="0">
-              <a:buNone/>
-            </a:pPr>
-            <a:r>
-              <a:rPr lang="en-US" sz="900" b="1" dirty="0">
-                <a:solidFill>
-                  <a:srgbClr val="D9463E"/>
-                </a:solidFill>
-                <a:latin typeface="Arial" pitchFamily="34" charset="0"/>
-                <a:ea typeface="Arial" pitchFamily="34" charset="-122"/>
-                <a:cs typeface="Arial" pitchFamily="34" charset="-120"/>
-              </a:rPr>
-              <a:t>ướt  濕</a:t>
-            </a:r>
-            <a:endParaRPr lang="en-US" sz="900" dirty="0"/>
-          </a:p>
-        </p:txBody>
-      </p:sp>
-      <p:sp>
-        <p:nvSpPr>
-          <p:cNvPr id="10" name="Shape 8"/>
-          <p:cNvSpPr/>
-          <p:nvPr/>
-        </p:nvSpPr>
-        <p:spPr>
-          <a:xfrm>
-            <a:off x="807964" y="2800818"/>
-            <a:ext cx="398313" cy="183224"/>
-          </a:xfrm>
-          <a:prstGeom prst="roundRect">
-            <a:avLst>
-              <a:gd name="adj" fmla="val 22000"/>
-            </a:avLst>
-          </a:prstGeom>
-          <a:solidFill>
-            <a:srgbClr val="8FA3B5"/>
-          </a:solidFill>
-          <a:ln/>
-        </p:spPr>
-      </p:sp>
-      <p:sp>
-        <p:nvSpPr>
-          <p:cNvPr id="11" name="Shape 9"/>
-          <p:cNvSpPr/>
-          <p:nvPr/>
-        </p:nvSpPr>
-        <p:spPr>
-          <a:xfrm>
-            <a:off x="959323" y="2837463"/>
-            <a:ext cx="135426" cy="109934"/>
-          </a:xfrm>
-          <a:prstGeom prst="roundRect">
-            <a:avLst>
-              <a:gd name="adj" fmla="val 23333"/>
-            </a:avLst>
-          </a:prstGeom>
-          <a:solidFill>
-            <a:srgbClr val="FFFFFF"/>
-          </a:solidFill>
-          <a:ln/>
-        </p:spPr>
-      </p:sp>
-      <p:sp>
-        <p:nvSpPr>
-          <p:cNvPr id="12" name="Shape 10"/>
-          <p:cNvSpPr/>
-          <p:nvPr/>
-        </p:nvSpPr>
-        <p:spPr>
-          <a:xfrm>
-            <a:off x="1250533" y="2892430"/>
-            <a:ext cx="1371966" cy="1"/>
-          </a:xfrm>
-          <a:prstGeom prst="line">
-            <a:avLst/>
-          </a:prstGeom>
-          <a:noFill/>
-          <a:ln w="63500">
-            <a:solidFill>
-              <a:srgbClr val="D9463E"/>
-            </a:solidFill>
-            <a:prstDash val="solid"/>
-          </a:ln>
-        </p:spPr>
-      </p:sp>
-      <p:sp>
-        <p:nvSpPr>
-          <p:cNvPr id="13" name="Shape 11"/>
-          <p:cNvSpPr/>
-          <p:nvPr/>
-        </p:nvSpPr>
-        <p:spPr>
-          <a:xfrm>
-            <a:off x="2622499" y="2692451"/>
-            <a:ext cx="77450" cy="399959"/>
-          </a:xfrm>
-          <a:prstGeom prst="roundRect">
-            <a:avLst>
-              <a:gd name="adj" fmla="val 34286"/>
-            </a:avLst>
-          </a:prstGeom>
-          <a:solidFill>
-            <a:srgbClr val="3A4650"/>
-          </a:solidFill>
-          <a:ln/>
-        </p:spPr>
-      </p:sp>
-      <p:sp>
-        <p:nvSpPr>
-          <p:cNvPr id="14" name="Text 12"/>
-          <p:cNvSpPr txBox="1"/>
-          <p:nvPr/>
-        </p:nvSpPr>
-        <p:spPr>
-          <a:xfrm>
-            <a:off x="3429000" y="914400"/>
-            <a:ext cx="5212080" cy="2889504"/>
-          </a:xfrm>
-          <a:prstGeom prst="rect">
-            <a:avLst/>
-          </a:prstGeom>
-          <a:noFill/>
-          <a:ln/>
-        </p:spPr>
-        <p:txBody>
-          <a:bodyPr wrap="square" lIns="0" tIns="0" rIns="0" bIns="0" rtlCol="0" anchor="ctr"/>
-          <a:lstStyle/>
-          <a:p>
             <a:pPr indent="0" marL="0">
               <a:lnSpc>
                 <a:spcPct val="120000"/>
@@ -15278,7 +15217,7 @@
       </p:sp>
       <p:sp>
         <p:nvSpPr>
-          <p:cNvPr id="15" name="Shape 13"/>
+          <p:cNvPr id="7" name="Shape 4"/>
           <p:cNvSpPr/>
           <p:nvPr/>
         </p:nvSpPr>
@@ -15305,7 +15244,7 @@
       </p:sp>
       <p:sp>
         <p:nvSpPr>
-          <p:cNvPr id="16" name="Text 14"/>
+          <p:cNvPr id="8" name="Text 5"/>
           <p:cNvSpPr txBox="1"/>
           <p:nvPr/>
         </p:nvSpPr>
@@ -15367,14 +15306,14 @@
       </p:sp>
       <p:pic>
         <p:nvPicPr>
-          <p:cNvPr id="18" name="Image 0" descr="/Users/tsengchenghsun/Class/carClass/Claude outputs/第五週(10-8)/src/logo.png">    </p:cNvPr>
+          <p:cNvPr id="10" name="Image 1" descr="/Users/tsengchenghsun/Class/carClass/Claude outputs/第五週(10-8)/src/logo.png">    </p:cNvPr>
           <p:cNvPicPr>
             <a:picLocks noChangeAspect="1"/>
           </p:cNvPicPr>
           <p:nvPr/>
         </p:nvPicPr>
         <p:blipFill>
-          <a:blip r:embed="rId1"/>
+          <a:blip r:embed="rId2"/>
           <a:stretch>
             <a:fillRect/>
           </a:stretch>
@@ -15391,7 +15330,7 @@
       </p:pic>
       <p:sp>
         <p:nvSpPr>
-          <p:cNvPr id="19" name="Text 15"/>
+          <p:cNvPr id="11" name="Text 6"/>
           <p:cNvSpPr txBox="1"/>
           <p:nvPr/>
         </p:nvSpPr>
@@ -15430,7 +15369,7 @@
       </p:sp>
       <p:sp>
         <p:nvSpPr>
-          <p:cNvPr id="20" name="Text 16"/>
+          <p:cNvPr id="12" name="Text 7"/>
           <p:cNvSpPr txBox="1"/>
           <p:nvPr/>
         </p:nvSpPr>

--- a/第五週(10-08)/第五週_第2節_簡報.pptx
+++ b/第五週(10-08)/第五週_第2節_簡報.pptx
@@ -6514,7 +6514,7 @@
                 <a:ea typeface="Arial Unicode MS"/>
                 <a:cs typeface="Arial Unicode MS"/>
               </a:rPr>
-              <a:t>圈「人眼看不出來」與「相機看得出來」，兩邊各指一次。
+              <a:t>白板上寫 10 ms 一個週期、只亮 1 ms；再寫「曝光要 ≥ 10 ms」。學生最常誤會成把曝光剪碎。
 </a:t>
             </a:r>
           </a:p>
@@ -6800,7 +6800,7 @@
                 <a:ea typeface="Arial Unicode MS"/>
                 <a:cs typeface="Arial Unicode MS"/>
               </a:rPr>
-              <a:t>所以車用的影像感測器要特別處理這件事，作法是</a:t>
+              <a:t>所以車用的影像感測器要特別處理這件事。先想清楚為什麼會拍到暗的紅燈：白天太亮，為了不讓畫面過曝，快門會</a:t>
             </a:r>
             <a:r>
               <a:rPr sz="800" b="1" lang="zh-TW" dirty="0">
@@ -6811,7 +6811,7 @@
                 <a:ea typeface="Arial Unicode MS"/>
                 <a:cs typeface="Arial Unicode MS"/>
               </a:rPr>
-              <a:t>把曝光拆成好幾段</a:t>
+              <a:t>縮得很短</a:t>
             </a:r>
             <a:r>
               <a:rPr sz="800" lang="zh-TW" dirty="0">
@@ -6822,7 +6822,117 @@
                 <a:ea typeface="Arial Unicode MS"/>
                 <a:cs typeface="Arial Unicode MS"/>
               </a:rPr>
-              <a:t>，讓每一張畫面一定會涵蓋到 LED 亮著的時候。
+              <a:t>，可能只有一兩毫秒。而 LED 一秒閃一百次，每次只亮十分之一的時間——十毫秒裡面只亮一毫秒。用一兩毫秒的快門去抓那一毫秒，當然常常抓不到。
+</a:t>
+            </a:r>
+          </a:p>
+          <a:p>
+            <a:pPr algn="l">
+              <a:spcBef>
+                <a:spcPts val="0"/>
+              </a:spcBef>
+              <a:spcAft>
+                <a:spcPts val="133"/>
+              </a:spcAft>
+            </a:pPr>
+            <a:r>
+              <a:rPr sz="800" lang="zh-TW" dirty="0">
+                <a:solidFill>
+                  <a:srgbClr val="000000"/>
+                </a:solidFill>
+                <a:latin typeface="Arial Unicode MS"/>
+                <a:ea typeface="Arial Unicode MS"/>
+                <a:cs typeface="Arial Unicode MS"/>
+              </a:rPr>
+              <a:t>LFM 的作法剛好相反：</a:t>
+            </a:r>
+            <a:r>
+              <a:rPr sz="800" b="1" lang="zh-TW" dirty="0">
+                <a:solidFill>
+                  <a:srgbClr val="000000"/>
+                </a:solidFill>
+                <a:latin typeface="Arial Unicode MS"/>
+                <a:ea typeface="Arial Unicode MS"/>
+                <a:cs typeface="Arial Unicode MS"/>
+              </a:rPr>
+              <a:t>不要縮短曝光，要讓曝光長到至少蓋住 LED 的一整個閃爍週期</a:t>
+            </a:r>
+            <a:r>
+              <a:rPr sz="800" lang="zh-TW" dirty="0">
+                <a:solidFill>
+                  <a:srgbClr val="000000"/>
+                </a:solidFill>
+                <a:latin typeface="Arial Unicode MS"/>
+                <a:ea typeface="Arial Unicode MS"/>
+                <a:cs typeface="Arial Unicode MS"/>
+              </a:rPr>
+              <a:t>，一百赫茲就是十毫秒。一秒三十張、一張有三十三毫秒，時間上放得下。問題是會過曝，所以真正的功夫在</a:t>
+            </a:r>
+            <a:r>
+              <a:rPr sz="800" b="1" lang="zh-TW" dirty="0">
+                <a:solidFill>
+                  <a:srgbClr val="000000"/>
+                </a:solidFill>
+                <a:latin typeface="Arial Unicode MS"/>
+                <a:ea typeface="Arial Unicode MS"/>
+                <a:cs typeface="Arial Unicode MS"/>
+              </a:rPr>
+              <a:t>像素裡面</a:t>
+            </a:r>
+            <a:r>
+              <a:rPr sz="800" lang="zh-TW" dirty="0">
+                <a:solidFill>
+                  <a:srgbClr val="000000"/>
+                </a:solidFill>
+                <a:latin typeface="Arial Unicode MS"/>
+                <a:ea typeface="Arial Unicode MS"/>
+                <a:cs typeface="Arial Unicode MS"/>
+              </a:rPr>
+              <a:t>：AR0233AT 用的叫 super exposure，每個像素裡做一個很大的儲存槽，電荷滿出來會流進那個槽，所以可以一直曝光也不怕爆掉。
+</a:t>
+            </a:r>
+          </a:p>
+          <a:p>
+            <a:pPr algn="l">
+              <a:spcBef>
+                <a:spcPts val="0"/>
+              </a:spcBef>
+              <a:spcAft>
+                <a:spcPts val="133"/>
+              </a:spcAft>
+            </a:pPr>
+            <a:r>
+              <a:rPr sz="800" lang="zh-TW" dirty="0">
+                <a:solidFill>
+                  <a:srgbClr val="000000"/>
+                </a:solidFill>
+                <a:latin typeface="Arial Unicode MS"/>
+                <a:ea typeface="Arial Unicode MS"/>
+                <a:cs typeface="Arial Unicode MS"/>
+              </a:rPr>
+              <a:t>我強調一下，</a:t>
+            </a:r>
+            <a:r>
+              <a:rPr sz="800" b="1" lang="zh-TW" dirty="0">
+                <a:solidFill>
+                  <a:srgbClr val="000000"/>
+                </a:solidFill>
+                <a:latin typeface="Arial Unicode MS"/>
+                <a:ea typeface="Arial Unicode MS"/>
+                <a:cs typeface="Arial Unicode MS"/>
+              </a:rPr>
+              <a:t>把曝光剪成好幾段反而是錯的</a:t>
+            </a:r>
+            <a:r>
+              <a:rPr sz="800" lang="zh-TW" dirty="0">
+                <a:solidFill>
+                  <a:srgbClr val="000000"/>
+                </a:solidFill>
+                <a:latin typeface="Arial Unicode MS"/>
+                <a:ea typeface="Arial Unicode MS"/>
+                <a:cs typeface="Arial Unicode MS"/>
+              </a:rPr>
+              <a:t>。那叫多重曝光 HDR，短的那幾段照樣會錯過 LED，而且車在動，幾段拼起來還會糊掉。LFM 就是為了取代那種作法。
 </a:t>
             </a:r>
           </a:p>
@@ -15723,7 +15833,7 @@
                 <a:ea typeface="Arial" pitchFamily="34" charset="-122"/>
                 <a:cs typeface="Arial" pitchFamily="34" charset="-120"/>
               </a:rPr>
-              <a:t>Đèn tín hiệu và đèn hậu LED nháy mấy trăm lần mỗi giây. Nếu khung hình rơi đúng lúc đèn tắt, camera chụp được một cái đèn đỏ đang «tắt».</a:t>
+              <a:t>Đèn tín hiệu và đèn hậu LED nháy hơn một trăm lần mỗi giây, mỗi lần chỉ sáng 1/10 thời gian. Ban ngày phơi sáng rất ngắn nên camera hay bắt trượt.</a:t>
             </a:r>
             <a:endParaRPr lang="en-US" sz="2300" dirty="0"/>
           </a:p>
@@ -15743,7 +15853,7 @@
                 <a:ea typeface="微軟正黑體" pitchFamily="34" charset="-122"/>
                 <a:cs typeface="微軟正黑體" pitchFamily="34" charset="-120"/>
               </a:rPr>
-              <a:t>紅綠燈和 LED 尾燈每秒閃好幾百次。如果剛好在燈暗的那一瞬間拍，相機就拍到一個「沒亮」的紅燈。</a:t>
+              <a:t>紅綠燈和 LED 尾燈每秒閃一百次以上，而且一次只亮十分之一的時間。白天為了不過曝，快門很短，常常就剛好錯過。</a:t>
             </a:r>
             <a:endParaRPr lang="en-US" sz="2300" dirty="0"/>
           </a:p>

--- a/第五週(10-08)/第五週_第2節_簡報.pptx
+++ b/第五週(10-08)/第五週_第2節_簡報.pptx
@@ -5843,7 +5843,51 @@
                 <a:ea typeface="Arial Unicode MS"/>
                 <a:cs typeface="Arial Unicode MS"/>
               </a:rPr>
-              <a:t>這一行在講：同一張畫面裡，它能同時處理多亮和多暗。
+              <a:t>這一行在講：同一張畫面裡，它能同時處理多亮和多暗。dB 這個單位要先講清楚，不然後面整張都聽不懂。規則只有一條：</a:t>
+            </a:r>
+            <a:r>
+              <a:rPr sz="800" b="1" lang="zh-TW" dirty="0">
+                <a:solidFill>
+                  <a:srgbClr val="000000"/>
+                </a:solidFill>
+                <a:latin typeface="Arial Unicode MS"/>
+                <a:ea typeface="Arial Unicode MS"/>
+                <a:cs typeface="Arial Unicode MS"/>
+              </a:rPr>
+              <a:t>每多 20 dB，就是再乘以十倍。</a:t>
+            </a:r>
+            <a:r>
+              <a:rPr sz="800" lang="zh-TW" dirty="0">
+                <a:solidFill>
+                  <a:srgbClr val="000000"/>
+                </a:solidFill>
+                <a:latin typeface="Arial Unicode MS"/>
+                <a:ea typeface="Arial Unicode MS"/>
+                <a:cs typeface="Arial Unicode MS"/>
+              </a:rPr>
+              <a:t>各位跟我數五個數字——60 dB 是一千倍，80 dB 是一萬倍，100 dB 是十萬倍，120 dB 是一百萬倍，140 dB 是一千萬倍。所以 dB 不是「多幾分」，是</a:t>
+            </a:r>
+            <a:r>
+              <a:rPr sz="800" b="1" lang="zh-TW" dirty="0">
+                <a:solidFill>
+                  <a:srgbClr val="000000"/>
+                </a:solidFill>
+                <a:latin typeface="Arial Unicode MS"/>
+                <a:ea typeface="Arial Unicode MS"/>
+                <a:cs typeface="Arial Unicode MS"/>
+              </a:rPr>
+              <a:t>多幾個零</a:t>
+            </a:r>
+            <a:r>
+              <a:rPr sz="800" lang="zh-TW" dirty="0">
+                <a:solidFill>
+                  <a:srgbClr val="000000"/>
+                </a:solidFill>
+                <a:latin typeface="Arial Unicode MS"/>
+                <a:ea typeface="Arial Unicode MS"/>
+                <a:cs typeface="Arial Unicode MS"/>
+              </a:rPr>
+              <a:t>。
 </a:t>
             </a:r>
           </a:p>
@@ -5931,7 +5975,29 @@
                 <a:ea typeface="Arial Unicode MS"/>
                 <a:cs typeface="Arial Unicode MS"/>
               </a:rPr>
-              <a:t>。一開始曝光對準外面：隧道外看得清清楚楚，可是隧道裡</a:t>
+              <a:t>——照剛剛那個規則，就是最亮和最暗只能差一千倍。可是動圖裡那個隧道口，從隧道裡那台深色車到外面的天空差一萬倍，也就是 </a:t>
+            </a:r>
+            <a:r>
+              <a:rPr sz="800" b="1" lang="zh-TW" dirty="0">
+                <a:solidFill>
+                  <a:srgbClr val="000000"/>
+                </a:solidFill>
+                <a:latin typeface="Arial Unicode MS"/>
+                <a:ea typeface="Arial Unicode MS"/>
+                <a:cs typeface="Arial Unicode MS"/>
+              </a:rPr>
+              <a:t>80 dB</a:t>
+            </a:r>
+            <a:r>
+              <a:rPr sz="800" lang="zh-TW" dirty="0">
+                <a:solidFill>
+                  <a:srgbClr val="000000"/>
+                </a:solidFill>
+                <a:latin typeface="Arial Unicode MS"/>
+                <a:ea typeface="Arial Unicode MS"/>
+                <a:cs typeface="Arial Unicode MS"/>
+              </a:rPr>
+              <a:t>。一千倍裝不下一萬倍，所以一定會掉一端。一開始曝光對準外面：隧道外看得清清楚楚，可是隧道裡</a:t>
             </a:r>
             <a:r>
               <a:rPr sz="800" b="1" lang="zh-TW" dirty="0">
@@ -6217,7 +6283,29 @@
                 <a:ea typeface="Arial Unicode MS"/>
                 <a:cs typeface="Arial Unicode MS"/>
               </a:rPr>
-              <a:t>dB 是對數的單位，每 20 dB 差十倍。140 減 120 是 20，所以它比人眼還多十倍的餘裕。這就是為什麼一顆車用的感測器可以賣得比手機的貴。
+              <a:t>140 減 120 是 20，照剛剛那條規則，就是</a:t>
+            </a:r>
+            <a:r>
+              <a:rPr sz="800" b="1" lang="zh-TW" dirty="0">
+                <a:solidFill>
+                  <a:srgbClr val="000000"/>
+                </a:solidFill>
+                <a:latin typeface="Arial Unicode MS"/>
+                <a:ea typeface="Arial Unicode MS"/>
+                <a:cs typeface="Arial Unicode MS"/>
+              </a:rPr>
+              <a:t>比人眼還多十倍的餘裕</a:t>
+            </a:r>
+            <a:r>
+              <a:rPr sz="800" lang="zh-TW" dirty="0">
+                <a:solidFill>
+                  <a:srgbClr val="000000"/>
+                </a:solidFill>
+                <a:latin typeface="Arial Unicode MS"/>
+                <a:ea typeface="Arial Unicode MS"/>
+                <a:cs typeface="Arial Unicode MS"/>
+              </a:rPr>
+              <a:t>。這就是為什麼一顆車用的感測器可以賣得比手機的貴。
 </a:t>
             </a:r>
           </a:p>

--- a/第五週(10-08)/第五週_第2節_簡報.pptx
+++ b/第五週(10-08)/第五週_第2節_簡報.pptx
@@ -5821,7 +5821,29 @@
                 <a:ea typeface="Arial Unicode MS"/>
                 <a:cs typeface="Arial Unicode MS"/>
               </a:rPr>
-              <a:t>，Dynamic Range，單位是 dB。
+              <a:t>，Dynamic Range，單位是 dB，中文唸「</a:t>
+            </a:r>
+            <a:r>
+              <a:rPr sz="800" b="1" lang="zh-TW" dirty="0">
+                <a:solidFill>
+                  <a:srgbClr val="000000"/>
+                </a:solidFill>
+                <a:latin typeface="Arial Unicode MS"/>
+                <a:ea typeface="Arial Unicode MS"/>
+                <a:cs typeface="Arial Unicode MS"/>
+              </a:rPr>
+              <a:t>分貝</a:t>
+            </a:r>
+            <a:r>
+              <a:rPr sz="800" lang="zh-TW" dirty="0">
+                <a:solidFill>
+                  <a:srgbClr val="000000"/>
+                </a:solidFill>
+                <a:latin typeface="Arial Unicode MS"/>
+                <a:ea typeface="Arial Unicode MS"/>
+                <a:cs typeface="Arial Unicode MS"/>
+              </a:rPr>
+              <a:t>」——分是十分之一，貝是貝爾，人名。後面我都直接唸 dB。
 </a:t>
             </a:r>
           </a:p>

--- a/第五週(10-08)/第五週_第2節_簡報.pptx
+++ b/第五週(10-08)/第五週_第2節_簡報.pptx
@@ -5909,7 +5909,29 @@
                 <a:ea typeface="Arial Unicode MS"/>
                 <a:cs typeface="Arial Unicode MS"/>
               </a:rPr>
-              <a:t>。
+              <a:t>。會有同學問：分貝不是聲音的單位嗎？</a:t>
+            </a:r>
+            <a:r>
+              <a:rPr sz="800" b="1" lang="zh-TW" dirty="0">
+                <a:solidFill>
+                  <a:srgbClr val="000000"/>
+                </a:solidFill>
+                <a:latin typeface="Arial Unicode MS"/>
+                <a:ea typeface="Arial Unicode MS"/>
+                <a:cs typeface="Arial Unicode MS"/>
+              </a:rPr>
+              <a:t>dB 本身不是任何東西的單位</a:t>
+            </a:r>
+            <a:r>
+              <a:rPr sz="800" lang="zh-TW" dirty="0">
+                <a:solidFill>
+                  <a:srgbClr val="000000"/>
+                </a:solidFill>
+                <a:latin typeface="Arial Unicode MS"/>
+                <a:ea typeface="Arial Unicode MS"/>
+                <a:cs typeface="Arial Unicode MS"/>
+              </a:rPr>
+              <a:t>，它只是「兩個東西差幾倍」的寫法。聲音是它最有名的用法，但放大器、訊號雜訊比、電纜衰減、動態範圍，全都在用同一套。
 </a:t>
             </a:r>
           </a:p>
@@ -5931,7 +5953,7 @@
                 <a:ea typeface="Arial Unicode MS"/>
                 <a:cs typeface="Arial Unicode MS"/>
               </a:rPr>
-              <a:t>各位還記得上一節最後那支影片嗎？最後一個情境 Vehicle Exiting Tunnel——下面的相機，隧道出口一片死白，前面那幾台車完全看不到；上面的點雲卻清清楚楚。</a:t>
+              <a:t>各位還記得上一節最後那支影片嗎？最後一個情境 Vehicle Exiting Tunnel——下面的相機，隧道出口一片死白，前面那幾台車完全看不到。</a:t>
             </a:r>
             <a:r>
               <a:rPr sz="800" b="1" lang="zh-TW" dirty="0">
@@ -5953,7 +5975,7 @@
                 <a:ea typeface="Arial Unicode MS"/>
                 <a:cs typeface="Arial Unicode MS"/>
               </a:rPr>
-              <a:t>我現在把那十秒再播一次，這次各位只看下面那一格。
+              <a:t>我現在把那十秒再播一次，各位只看下面那一格。
 </a:t>
             </a:r>
           </a:p>
@@ -6173,7 +6195,7 @@
                 <a:ea typeface="Arial Unicode MS"/>
                 <a:cs typeface="Arial Unicode MS"/>
               </a:rPr>
-              <a:t>相機也一樣，而且它沒有兩秒可以適應。隧道裡面很暗，出口外面很亮，這兩個亮度差可能是好幾萬倍。如果相機的動態範圍不夠，它只能選一邊：</a:t>
+              <a:t>相機也一樣，而且它沒有兩秒可以適應。隧道裡面很暗，出口外面很亮，這兩個亮度差一萬倍以上。如果相機的動態範圍不夠，它只能選一邊：</a:t>
             </a:r>
             <a:r>
               <a:rPr sz="800" b="1" lang="zh-TW" dirty="0">
@@ -6217,29 +6239,7 @@
                 <a:ea typeface="Arial Unicode MS"/>
                 <a:cs typeface="Arial Unicode MS"/>
               </a:rPr>
-              <a:t>那個整片白或整片黑的地方，如果剛好有一台停在路邊的車，你就看不到它。
-</a:t>
-            </a:r>
-          </a:p>
-          <a:p>
-            <a:pPr algn="l">
-              <a:spcBef>
-                <a:spcPts val="0"/>
-              </a:spcBef>
-              <a:spcAft>
-                <a:spcPts val="133"/>
-              </a:spcAft>
-            </a:pPr>
-            <a:r>
-              <a:rPr sz="800" lang="zh-TW" dirty="0">
-                <a:solidFill>
-                  <a:srgbClr val="000000"/>
-                </a:solidFill>
-                <a:latin typeface="Arial Unicode MS"/>
-                <a:ea typeface="Arial Unicode MS"/>
-                <a:cs typeface="Arial Unicode MS"/>
-              </a:rPr>
-              <a:t>這是真實事故的成因之一，各位記一下。
+              <a:t>那個整片白或整片黑的地方，如果剛好有一台停在路邊的車，你就看不到它。這是真實事故的成因之一，各位記一下。
 </a:t>
             </a:r>
           </a:p>

--- a/第五週(10-08)/第五週_第2節_簡報.pptx
+++ b/第五週(10-08)/第五週_第2節_簡報.pptx
@@ -6976,7 +6976,29 @@
                 <a:ea typeface="Arial Unicode MS"/>
                 <a:cs typeface="Arial Unicode MS"/>
               </a:rPr>
-              <a:t>，一百赫茲就是十毫秒。一秒三十張、一張有三十三毫秒，時間上放得下。問題是會過曝，所以真正的功夫在</a:t>
+              <a:t>，一百赫茲就是十毫秒。那一張畫面有多少時間可以用？</a:t>
+            </a:r>
+            <a:r>
+              <a:rPr sz="800" b="1" lang="zh-TW" dirty="0">
+                <a:solidFill>
+                  <a:srgbClr val="000000"/>
+                </a:solidFill>
+                <a:latin typeface="Arial Unicode MS"/>
+                <a:ea typeface="Arial Unicode MS"/>
+                <a:cs typeface="Arial Unicode MS"/>
+              </a:rPr>
+              <a:t>一千毫秒除以一秒拍幾張</a:t>
+            </a:r>
+            <a:r>
+              <a:rPr sz="800" lang="zh-TW" dirty="0">
+                <a:solidFill>
+                  <a:srgbClr val="000000"/>
+                </a:solidFill>
+                <a:latin typeface="Arial Unicode MS"/>
+                <a:ea typeface="Arial Unicode MS"/>
+                <a:cs typeface="Arial Unicode MS"/>
+              </a:rPr>
+              <a:t>——一秒三十張就是一千除以三十，一張三十三毫秒；就算跑到一秒六十張，一張也還有十六點七毫秒。十毫秒兩種都塞得下，所以問題從來不是時間不夠。問題是會過曝，所以真正的功夫在</a:t>
             </a:r>
             <a:r>
               <a:rPr sz="800" b="1" lang="zh-TW" dirty="0">

--- a/第五週(10-08)/第五週_第2節_簡報.pptx
+++ b/第五週(10-08)/第五週_第2節_簡報.pptx
@@ -6624,7 +6624,7 @@
                 <a:ea typeface="Arial Unicode MS"/>
                 <a:cs typeface="Arial Unicode MS"/>
               </a:rPr>
-              <a:t>白板上寫 10 ms 一個週期、只亮 1 ms；再寫「曝光要 ≥ 10 ms」。學生最常誤會成把曝光剪碎。
+              <a:t>先讓左邊的動圖跑完兩輪；白板上寫 10 ms 一個週期、只亮 1 ms，再寫「曝光要 ≥ 10 ms」。學生最常誤會成把曝光剪碎。
 </a:t>
             </a:r>
           </a:p>
@@ -6701,7 +6701,7 @@
                 <a:ea typeface="Arial Unicode MS"/>
                 <a:cs typeface="Arial Unicode MS"/>
               </a:rPr>
-              <a:t>，規格表上寫 LFM，LED Flicker Mitigation。
+              <a:t>，規格表上寫 LFM，LED Flicker Mitigation。這一行大部分的人看不懂在幹嘛，可是它非常重要。
 </a:t>
             </a:r>
           </a:p>
@@ -6723,19 +6723,19 @@
                 <a:ea typeface="Arial Unicode MS"/>
                 <a:cs typeface="Arial Unicode MS"/>
               </a:rPr>
-              <a:t>這一行大部分的人看不懂在幹嘛，可是它非常重要。
-</a:t>
-            </a:r>
-          </a:p>
-          <a:p>
-            <a:pPr algn="l">
-              <a:spcBef>
-                <a:spcPts val="0"/>
-              </a:spcBef>
-              <a:spcAft>
-                <a:spcPts val="133"/>
-              </a:spcAft>
-            </a:pPr>
+              <a:t>現在路上的紅綠燈、車子的尾燈，幾乎全部換成 LED 了。LED 不是一直亮著的，它是</a:t>
+            </a:r>
+            <a:r>
+              <a:rPr sz="800" b="1" lang="zh-TW" dirty="0">
+                <a:solidFill>
+                  <a:srgbClr val="000000"/>
+                </a:solidFill>
+                <a:latin typeface="Arial Unicode MS"/>
+                <a:ea typeface="Arial Unicode MS"/>
+                <a:cs typeface="Arial Unicode MS"/>
+              </a:rPr>
+              <a:t>用很快的速度在閃</a:t>
+            </a:r>
             <a:r>
               <a:rPr sz="800" lang="zh-TW" dirty="0">
                 <a:solidFill>
@@ -6745,29 +6745,7 @@
                 <a:ea typeface="Arial Unicode MS"/>
                 <a:cs typeface="Arial Unicode MS"/>
               </a:rPr>
-              <a:t>現在路上的紅綠燈、車子的尾燈，幾乎全部換成 LED 了。LED 不是一直亮著的，它是</a:t>
-            </a:r>
-            <a:r>
-              <a:rPr sz="800" b="1" lang="zh-TW" dirty="0">
-                <a:solidFill>
-                  <a:srgbClr val="000000"/>
-                </a:solidFill>
-                <a:latin typeface="Arial Unicode MS"/>
-                <a:ea typeface="Arial Unicode MS"/>
-                <a:cs typeface="Arial Unicode MS"/>
-              </a:rPr>
-              <a:t>用很快的速度在閃</a:t>
-            </a:r>
-            <a:r>
-              <a:rPr sz="800" lang="zh-TW" dirty="0">
-                <a:solidFill>
-                  <a:srgbClr val="000000"/>
-                </a:solidFill>
-                <a:latin typeface="Arial Unicode MS"/>
-                <a:ea typeface="Arial Unicode MS"/>
-                <a:cs typeface="Arial Unicode MS"/>
-              </a:rPr>
-              <a:t>，一秒鐘閃好幾百次。因為閃得太快，人的眼睛看起來就是連續亮著。
+              <a:t>，一秒鐘閃一百次以上，而且一次只亮十分之一的時間。因為閃得太快，人的眼睛看起來就是連續亮著。
 </a:t>
             </a:r>
           </a:p>
@@ -6844,29 +6822,7 @@
                 <a:ea typeface="Arial Unicode MS"/>
                 <a:cs typeface="Arial Unicode MS"/>
               </a:rPr>
-              <a:t>大家想一下這件事有多可怕。
-</a:t>
-            </a:r>
-          </a:p>
-          <a:p>
-            <a:pPr algn="l">
-              <a:spcBef>
-                <a:spcPts val="0"/>
-              </a:spcBef>
-              <a:spcAft>
-                <a:spcPts val="133"/>
-              </a:spcAft>
-            </a:pPr>
-            <a:r>
-              <a:rPr sz="800" lang="zh-TW" dirty="0">
-                <a:solidFill>
-                  <a:srgbClr val="000000"/>
-                </a:solidFill>
-                <a:latin typeface="Arial Unicode MS"/>
-                <a:ea typeface="Arial Unicode MS"/>
-                <a:cs typeface="Arial Unicode MS"/>
-              </a:rPr>
-              <a:t>一台自駕車，前面是紅燈，相機拍回來的畫面上那個燈是暗的。演算法會怎麼判斷？它可能認為那個號誌壞掉了，或者根本沒看到號誌。
+              <a:t>大家想一下這件事有多可怕。一台自駕車，前面是紅燈，相機拍回來的畫面上那個燈是暗的。演算法會怎麼判斷？它可能認為那個號誌壞掉了，或者根本沒看到號誌。
 </a:t>
             </a:r>
           </a:p>
@@ -6933,6 +6889,50 @@
                 <a:cs typeface="Arial Unicode MS"/>
               </a:rPr>
               <a:t>，可能只有一兩毫秒。而 LED 一秒閃一百次，每次只亮十分之一的時間——十毫秒裡面只亮一毫秒。用一兩毫秒的快門去抓那一毫秒，當然常常抓不到。
+</a:t>
+            </a:r>
+          </a:p>
+          <a:p>
+            <a:pPr algn="l">
+              <a:spcBef>
+                <a:spcPts val="0"/>
+              </a:spcBef>
+              <a:spcAft>
+                <a:spcPts val="133"/>
+              </a:spcAft>
+            </a:pPr>
+            <a:r>
+              <a:rPr sz="800" lang="zh-TW" dirty="0">
+                <a:solidFill>
+                  <a:srgbClr val="000000"/>
+                </a:solidFill>
+                <a:latin typeface="Arial Unicode MS"/>
+                <a:ea typeface="Arial Unicode MS"/>
+                <a:cs typeface="Arial Unicode MS"/>
+              </a:rPr>
+              <a:t>左邊這張動圖就是在演這件事。上面那條是 LED 的亮滅——每十毫秒只亮一毫秒；下面那排是相機真的拍到什麼。短曝光那一輪，</a:t>
+            </a:r>
+            <a:r>
+              <a:rPr sz="800" b="1" lang="zh-TW" dirty="0">
+                <a:solidFill>
+                  <a:srgbClr val="000000"/>
+                </a:solidFill>
+                <a:latin typeface="Arial Unicode MS"/>
+                <a:ea typeface="Arial Unicode MS"/>
+                <a:cs typeface="Arial Unicode MS"/>
+              </a:rPr>
+              <a:t>三張只抓到一張</a:t>
+            </a:r>
+            <a:r>
+              <a:rPr sz="800" lang="zh-TW" dirty="0">
+                <a:solidFill>
+                  <a:srgbClr val="000000"/>
+                </a:solidFill>
+                <a:latin typeface="Arial Unicode MS"/>
+                <a:ea typeface="Arial Unicode MS"/>
+                <a:cs typeface="Arial Unicode MS"/>
+              </a:rPr>
+              <a:t>，燈就在那邊閃；換成十毫秒的曝光，六張全部抓到。
 </a:t>
             </a:r>
           </a:p>
@@ -15721,15 +15721,15 @@
         <p:spPr>
           <a:xfrm>
             <a:off x="502920" y="1101852"/>
-            <a:ext cx="2468880" cy="2514600"/>
+            <a:ext cx="3017520" cy="2514600"/>
           </a:xfrm>
           <a:prstGeom prst="roundRect">
             <a:avLst>
-              <a:gd name="adj" fmla="val 4444"/>
+              <a:gd name="adj" fmla="val 4364"/>
             </a:avLst>
           </a:prstGeom>
           <a:solidFill>
-            <a:srgbClr val="F4F7FA"/>
+            <a:srgbClr val="FFFFFF"/>
           </a:solidFill>
           <a:ln w="12700">
             <a:solidFill>
@@ -15739,124 +15739,40 @@
           </a:ln>
         </p:spPr>
       </p:sp>
+      <p:pic>
+        <p:nvPicPr>
+          <p:cNvPr id="4" name="Image 0" descr="/Users/tsengchenghsun/Class/carClass/Claude outputs/第五週(10-8)/src/img/w5_s05_ledflicker.gif">    </p:cNvPr>
+          <p:cNvPicPr>
+            <a:picLocks noChangeAspect="1"/>
+          </p:cNvPicPr>
+          <p:nvPr/>
+        </p:nvPicPr>
+        <p:blipFill>
+          <a:blip r:embed="rId1"/>
+          <a:stretch>
+            <a:fillRect/>
+          </a:stretch>
+        </p:blipFill>
+        <p:spPr>
+          <a:xfrm>
+            <a:off x="576072" y="1310640"/>
+            <a:ext cx="2871216" cy="1914144"/>
+          </a:xfrm>
+          <a:prstGeom prst="rect">
+            <a:avLst/>
+          </a:prstGeom>
+        </p:spPr>
+      </p:pic>
       <p:sp>
         <p:nvSpPr>
-          <p:cNvPr id="4" name="Shape 2"/>
-          <p:cNvSpPr/>
-          <p:nvPr/>
-        </p:nvSpPr>
-        <p:spPr>
-          <a:xfrm>
-            <a:off x="1493947" y="2203613"/>
-            <a:ext cx="929396" cy="755477"/>
-          </a:xfrm>
-          <a:prstGeom prst="roundRect">
-            <a:avLst>
-              <a:gd name="adj" fmla="val 6052"/>
-            </a:avLst>
-          </a:prstGeom>
-          <a:solidFill>
-            <a:srgbClr val="C8D3DE"/>
-          </a:solidFill>
-          <a:ln w="15240">
-            <a:solidFill>
-              <a:srgbClr val="F4F7FA"/>
-            </a:solidFill>
-            <a:prstDash val="solid"/>
-          </a:ln>
-        </p:spPr>
-      </p:sp>
-      <p:sp>
-        <p:nvSpPr>
-          <p:cNvPr id="5" name="Shape 3"/>
-          <p:cNvSpPr/>
-          <p:nvPr/>
-        </p:nvSpPr>
-        <p:spPr>
-          <a:xfrm>
-            <a:off x="1339047" y="2048073"/>
-            <a:ext cx="929396" cy="755477"/>
-          </a:xfrm>
-          <a:prstGeom prst="roundRect">
-            <a:avLst>
-              <a:gd name="adj" fmla="val 6052"/>
-            </a:avLst>
-          </a:prstGeom>
-          <a:solidFill>
-            <a:srgbClr val="C8D3DE"/>
-          </a:solidFill>
-          <a:ln w="15240">
-            <a:solidFill>
-              <a:srgbClr val="F4F7FA"/>
-            </a:solidFill>
-            <a:prstDash val="solid"/>
-          </a:ln>
-        </p:spPr>
-      </p:sp>
-      <p:sp>
-        <p:nvSpPr>
-          <p:cNvPr id="6" name="Shape 4"/>
-          <p:cNvSpPr/>
-          <p:nvPr/>
-        </p:nvSpPr>
-        <p:spPr>
-          <a:xfrm>
-            <a:off x="1184148" y="1892534"/>
-            <a:ext cx="929396" cy="755477"/>
-          </a:xfrm>
-          <a:prstGeom prst="roundRect">
-            <a:avLst>
-              <a:gd name="adj" fmla="val 6052"/>
-            </a:avLst>
-          </a:prstGeom>
-          <a:solidFill>
-            <a:srgbClr val="C8D3DE"/>
-          </a:solidFill>
-          <a:ln w="15240">
-            <a:solidFill>
-              <a:srgbClr val="F4F7FA"/>
-            </a:solidFill>
-            <a:prstDash val="solid"/>
-          </a:ln>
-        </p:spPr>
-      </p:sp>
-      <p:sp>
-        <p:nvSpPr>
-          <p:cNvPr id="7" name="Shape 5"/>
-          <p:cNvSpPr/>
-          <p:nvPr/>
-        </p:nvSpPr>
-        <p:spPr>
-          <a:xfrm>
-            <a:off x="1029249" y="1736994"/>
-            <a:ext cx="929396" cy="755477"/>
-          </a:xfrm>
-          <a:prstGeom prst="roundRect">
-            <a:avLst>
-              <a:gd name="adj" fmla="val 6052"/>
-            </a:avLst>
-          </a:prstGeom>
-          <a:solidFill>
-            <a:srgbClr val="A3382F"/>
-          </a:solidFill>
-          <a:ln w="15240">
-            <a:solidFill>
-              <a:srgbClr val="F4F7FA"/>
-            </a:solidFill>
-            <a:prstDash val="solid"/>
-          </a:ln>
-        </p:spPr>
-      </p:sp>
-      <p:sp>
-        <p:nvSpPr>
-          <p:cNvPr id="8" name="Text 6"/>
+          <p:cNvPr id="5" name="Text 2"/>
           <p:cNvSpPr txBox="1"/>
           <p:nvPr/>
         </p:nvSpPr>
         <p:spPr>
           <a:xfrm>
-            <a:off x="630936" y="2892430"/>
-            <a:ext cx="2212848" cy="399959"/>
+            <a:off x="576072" y="3396996"/>
+            <a:ext cx="2871216" cy="182880"/>
           </a:xfrm>
           <a:prstGeom prst="rect">
             <a:avLst/>
@@ -15872,30 +15788,30 @@
               <a:buNone/>
             </a:pPr>
             <a:r>
-              <a:rPr lang="en-US" sz="1100" b="1" dirty="0">
-                <a:solidFill>
-                  <a:srgbClr val="A3382F"/>
+              <a:rPr lang="en-US" sz="700" dirty="0">
+                <a:solidFill>
+                  <a:srgbClr val="5F7183"/>
                 </a:solidFill>
                 <a:latin typeface="Arial" pitchFamily="34" charset="0"/>
                 <a:ea typeface="Arial" pitchFamily="34" charset="-122"/>
                 <a:cs typeface="Arial" pitchFamily="34" charset="-120"/>
               </a:rPr>
-              <a:t>× 10 000</a:t>
-            </a:r>
-            <a:endParaRPr lang="en-US" sz="1100" dirty="0"/>
+              <a:t>示意圖：課程自製（src/tools_make_lfm_gif.py）</a:t>
+            </a:r>
+            <a:endParaRPr lang="en-US" sz="700" dirty="0"/>
           </a:p>
         </p:txBody>
       </p:sp>
       <p:sp>
         <p:nvSpPr>
-          <p:cNvPr id="9" name="Text 7"/>
+          <p:cNvPr id="6" name="Text 3"/>
           <p:cNvSpPr txBox="1"/>
           <p:nvPr/>
         </p:nvSpPr>
         <p:spPr>
           <a:xfrm>
-            <a:off x="3429000" y="914400"/>
-            <a:ext cx="5212080" cy="2889504"/>
+            <a:off x="3831336" y="914400"/>
+            <a:ext cx="4809744" cy="2889504"/>
           </a:xfrm>
           <a:prstGeom prst="rect">
             <a:avLst/>
@@ -15993,7 +15909,7 @@
       </p:sp>
       <p:sp>
         <p:nvSpPr>
-          <p:cNvPr id="10" name="Shape 8"/>
+          <p:cNvPr id="7" name="Shape 4"/>
           <p:cNvSpPr/>
           <p:nvPr/>
         </p:nvSpPr>
@@ -16020,7 +15936,7 @@
       </p:sp>
       <p:sp>
         <p:nvSpPr>
-          <p:cNvPr id="11" name="Text 9"/>
+          <p:cNvPr id="8" name="Text 5"/>
           <p:cNvSpPr txBox="1"/>
           <p:nvPr/>
         </p:nvSpPr>
@@ -16082,14 +15998,14 @@
       </p:sp>
       <p:pic>
         <p:nvPicPr>
-          <p:cNvPr id="13" name="Image 0" descr="/Users/tsengchenghsun/Class/carClass/Claude outputs/第五週(10-8)/src/logo.png">    </p:cNvPr>
+          <p:cNvPr id="10" name="Image 1" descr="/Users/tsengchenghsun/Class/carClass/Claude outputs/第五週(10-8)/src/logo.png">    </p:cNvPr>
           <p:cNvPicPr>
             <a:picLocks noChangeAspect="1"/>
           </p:cNvPicPr>
           <p:nvPr/>
         </p:nvPicPr>
         <p:blipFill>
-          <a:blip r:embed="rId1"/>
+          <a:blip r:embed="rId2"/>
           <a:stretch>
             <a:fillRect/>
           </a:stretch>
@@ -16106,7 +16022,7 @@
       </p:pic>
       <p:sp>
         <p:nvSpPr>
-          <p:cNvPr id="14" name="Text 10"/>
+          <p:cNvPr id="11" name="Text 6"/>
           <p:cNvSpPr txBox="1"/>
           <p:nvPr/>
         </p:nvSpPr>
@@ -16145,7 +16061,7 @@
       </p:sp>
       <p:sp>
         <p:nvSpPr>
-          <p:cNvPr id="15" name="Text 11"/>
+          <p:cNvPr id="12" name="Text 7"/>
           <p:cNvSpPr txBox="1"/>
           <p:nvPr/>
         </p:nvSpPr>

--- a/第五週(10-08)/第五週_第2節_簡報.pptx
+++ b/第五週(10-08)/第五週_第2節_簡報.pptx
@@ -7394,7 +7394,139 @@
                 <a:ea typeface="Arial Unicode MS"/>
                 <a:cs typeface="Arial Unicode MS"/>
               </a:rPr>
-              <a:t>第二組，光達的三行。</a:t>
+              <a:t>相機那三行講完了，換光達。一樣三行：</a:t>
+            </a:r>
+            <a:r>
+              <a:rPr sz="1200" b="1" lang="zh-TW" dirty="0">
+                <a:solidFill>
+                  <a:srgbClr val="000000"/>
+                </a:solidFill>
+                <a:latin typeface="Arial Unicode MS"/>
+                <a:ea typeface="Arial Unicode MS"/>
+                <a:cs typeface="Arial Unicode MS"/>
+              </a:rPr>
+              <a:t>波長、眼睛安全、回波次數</a:t>
+            </a:r>
+            <a:r>
+              <a:rPr sz="1200" lang="zh-TW" dirty="0">
+                <a:solidFill>
+                  <a:srgbClr val="000000"/>
+                </a:solidFill>
+                <a:latin typeface="Arial Unicode MS"/>
+                <a:ea typeface="Arial Unicode MS"/>
+                <a:cs typeface="Arial Unicode MS"/>
+              </a:rPr>
+              <a:t>。
+</a:t>
+            </a:r>
+          </a:p>
+          <a:p>
+            <a:pPr algn="l">
+              <a:spcBef>
+                <a:spcPts val="0"/>
+              </a:spcBef>
+              <a:spcAft>
+                <a:spcPts val="200"/>
+              </a:spcAft>
+            </a:pPr>
+            <a:r>
+              <a:rPr sz="1200" lang="zh-TW" dirty="0">
+                <a:solidFill>
+                  <a:srgbClr val="000000"/>
+                </a:solidFill>
+                <a:latin typeface="Arial Unicode MS"/>
+                <a:ea typeface="Arial Unicode MS"/>
+                <a:cs typeface="Arial Unicode MS"/>
+              </a:rPr>
+              <a:t>差別在這裡：相機那三行在講</a:t>
+            </a:r>
+            <a:r>
+              <a:rPr sz="1200" b="1" lang="zh-TW" dirty="0">
+                <a:solidFill>
+                  <a:srgbClr val="000000"/>
+                </a:solidFill>
+                <a:latin typeface="Arial Unicode MS"/>
+                <a:ea typeface="Arial Unicode MS"/>
+                <a:cs typeface="Arial Unicode MS"/>
+              </a:rPr>
+              <a:t>畫面會不會壞掉</a:t>
+            </a:r>
+            <a:r>
+              <a:rPr sz="1200" lang="zh-TW" dirty="0">
+                <a:solidFill>
+                  <a:srgbClr val="000000"/>
+                </a:solidFill>
+                <a:latin typeface="Arial Unicode MS"/>
+                <a:ea typeface="Arial Unicode MS"/>
+                <a:cs typeface="Arial Unicode MS"/>
+              </a:rPr>
+              <a:t>，光達這三行在講</a:t>
+            </a:r>
+            <a:r>
+              <a:rPr sz="1200" b="1" lang="zh-TW" dirty="0">
+                <a:solidFill>
+                  <a:srgbClr val="000000"/>
+                </a:solidFill>
+                <a:latin typeface="Arial Unicode MS"/>
+                <a:ea typeface="Arial Unicode MS"/>
+                <a:cs typeface="Arial Unicode MS"/>
+              </a:rPr>
+              <a:t>這顆東西能不能裝上車</a:t>
+            </a:r>
+            <a:r>
+              <a:rPr sz="1200" lang="zh-TW" dirty="0">
+                <a:solidFill>
+                  <a:srgbClr val="000000"/>
+                </a:solidFill>
+                <a:latin typeface="Arial Unicode MS"/>
+                <a:ea typeface="Arial Unicode MS"/>
+                <a:cs typeface="Arial Unicode MS"/>
+              </a:rPr>
+              <a:t>。少了其中一行，整顆就不要裝。
+</a:t>
+            </a:r>
+          </a:p>
+          <a:p>
+            <a:pPr algn="l">
+              <a:spcBef>
+                <a:spcPts val="0"/>
+              </a:spcBef>
+              <a:spcAft>
+                <a:spcPts val="200"/>
+              </a:spcAft>
+            </a:pPr>
+            <a:r>
+              <a:rPr sz="1200" lang="zh-TW" dirty="0">
+                <a:solidFill>
+                  <a:srgbClr val="000000"/>
+                </a:solidFill>
+                <a:latin typeface="Arial Unicode MS"/>
+                <a:ea typeface="Arial Unicode MS"/>
+                <a:cs typeface="Arial Unicode MS"/>
+              </a:rPr>
+              <a:t>還有，第二張我說過相機的快門方式規格表上找不到；光達這三行，在 OS1 那張表上</a:t>
+            </a:r>
+            <a:r>
+              <a:rPr sz="1200" b="1" lang="zh-TW" dirty="0">
+                <a:solidFill>
+                  <a:srgbClr val="000000"/>
+                </a:solidFill>
+                <a:latin typeface="Arial Unicode MS"/>
+                <a:ea typeface="Arial Unicode MS"/>
+                <a:cs typeface="Arial Unicode MS"/>
+              </a:rPr>
+              <a:t>一行都不缺</a:t>
+            </a:r>
+            <a:r>
+              <a:rPr sz="1200" lang="zh-TW" dirty="0">
+                <a:solidFill>
+                  <a:srgbClr val="000000"/>
+                </a:solidFill>
+                <a:latin typeface="Arial Unicode MS"/>
+                <a:ea typeface="Arial Unicode MS"/>
+                <a:cs typeface="Arial Unicode MS"/>
+              </a:rPr>
+              <a:t>。</a:t>
             </a:r>
           </a:p>
         </p:txBody>

--- a/第五週(10-08)/第五週_第2節_簡報.pptx
+++ b/第五週(10-08)/第五週_第2節_簡報.pptx
@@ -2510,7 +2510,7 @@
                 <a:ea typeface="Arial Unicode MS"/>
                 <a:cs typeface="Arial Unicode MS"/>
               </a:rPr>
-              <a:t>不用圈。這一句停兩秒再翻頁。
+              <a:t>不用圈。最後那句「看的是不是同一個瞬間」停兩秒再翻頁。
 </a:t>
             </a:r>
           </a:p>
@@ -2565,7 +2565,117 @@
                 <a:ea typeface="Arial Unicode MS"/>
                 <a:cs typeface="Arial Unicode MS"/>
               </a:rPr>
-              <a:t>第三組，這一組規格表上常常找不到，但它決定了你的系統能不能用。</a:t>
+              <a:t>第三組，這一組規格表上常常找不到，但它決定了你的系統能不能用。
+</a:t>
+            </a:r>
+          </a:p>
+          <a:p>
+            <a:pPr algn="l">
+              <a:spcBef>
+                <a:spcPts val="0"/>
+              </a:spcBef>
+              <a:spcAft>
+                <a:spcPts val="200"/>
+              </a:spcAft>
+            </a:pPr>
+            <a:r>
+              <a:rPr sz="1200" lang="zh-TW" dirty="0">
+                <a:solidFill>
+                  <a:srgbClr val="000000"/>
+                </a:solidFill>
+                <a:latin typeface="Arial Unicode MS"/>
+                <a:ea typeface="Arial Unicode MS"/>
+                <a:cs typeface="Arial Unicode MS"/>
+              </a:rPr>
+              <a:t>前面一行一行挑的，都是</a:t>
+            </a:r>
+            <a:r>
+              <a:rPr sz="1200" b="1" lang="zh-TW" dirty="0">
+                <a:solidFill>
+                  <a:srgbClr val="000000"/>
+                </a:solidFill>
+                <a:latin typeface="Arial Unicode MS"/>
+                <a:ea typeface="Arial Unicode MS"/>
+                <a:cs typeface="Arial Unicode MS"/>
+              </a:rPr>
+              <a:t>單一顆</a:t>
+            </a:r>
+            <a:r>
+              <a:rPr sz="1200" lang="zh-TW" dirty="0">
+                <a:solidFill>
+                  <a:srgbClr val="000000"/>
+                </a:solidFill>
+                <a:latin typeface="Arial Unicode MS"/>
+                <a:ea typeface="Arial Unicode MS"/>
+                <a:cs typeface="Arial Unicode MS"/>
+              </a:rPr>
+              <a:t>感測器的規格。可是車上不會只有一顆。相機一顆、光達一顆，兩顆都挑得很好，裝上車還是可能看錯。
+</a:t>
+            </a:r>
+          </a:p>
+          <a:p>
+            <a:pPr algn="l">
+              <a:spcBef>
+                <a:spcPts val="0"/>
+              </a:spcBef>
+              <a:spcAft>
+                <a:spcPts val="200"/>
+              </a:spcAft>
+            </a:pPr>
+            <a:r>
+              <a:rPr sz="1200" lang="zh-TW" dirty="0">
+                <a:solidFill>
+                  <a:srgbClr val="000000"/>
+                </a:solidFill>
+                <a:latin typeface="Arial Unicode MS"/>
+                <a:ea typeface="Arial Unicode MS"/>
+                <a:cs typeface="Arial Unicode MS"/>
+              </a:rPr>
+              <a:t>為什麼？因為還有兩件事：</a:t>
+            </a:r>
+            <a:r>
+              <a:rPr sz="1200" b="1" lang="zh-TW" dirty="0">
+                <a:solidFill>
+                  <a:srgbClr val="000000"/>
+                </a:solidFill>
+                <a:latin typeface="Arial Unicode MS"/>
+                <a:ea typeface="Arial Unicode MS"/>
+                <a:cs typeface="Arial Unicode MS"/>
+              </a:rPr>
+              <a:t>它們有沒有對準</a:t>
+            </a:r>
+            <a:r>
+              <a:rPr sz="1200" lang="zh-TW" dirty="0">
+                <a:solidFill>
+                  <a:srgbClr val="000000"/>
+                </a:solidFill>
+                <a:latin typeface="Arial Unicode MS"/>
+                <a:ea typeface="Arial Unicode MS"/>
+                <a:cs typeface="Arial Unicode MS"/>
+              </a:rPr>
+              <a:t>，還有</a:t>
+            </a:r>
+            <a:r>
+              <a:rPr sz="1200" b="1" lang="zh-TW" dirty="0">
+                <a:solidFill>
+                  <a:srgbClr val="000000"/>
+                </a:solidFill>
+                <a:latin typeface="Arial Unicode MS"/>
+                <a:ea typeface="Arial Unicode MS"/>
+                <a:cs typeface="Arial Unicode MS"/>
+              </a:rPr>
+              <a:t>它們看的是不是同一個瞬間</a:t>
+            </a:r>
+            <a:r>
+              <a:rPr sz="1200" lang="zh-TW" dirty="0">
+                <a:solidFill>
+                  <a:srgbClr val="000000"/>
+                </a:solidFill>
+                <a:latin typeface="Arial Unicode MS"/>
+                <a:ea typeface="Arial Unicode MS"/>
+                <a:cs typeface="Arial Unicode MS"/>
+              </a:rPr>
+              <a:t>。接下來兩張就在講這兩件事。</a:t>
             </a:r>
           </a:p>
         </p:txBody>

--- a/第五週(10-08)/第五週_第2節_簡報.pptx
+++ b/第五週(10-08)/第五週_第2節_簡報.pptx
@@ -7394,7 +7394,7 @@
                 <a:ea typeface="Arial Unicode MS"/>
                 <a:cs typeface="Arial Unicode MS"/>
               </a:rPr>
-              <a:t>段落分隔。切到光達的三行：波長、眼睛安全、回波次數。
+              <a:t>段落分隔。切到光達的三行：Laser Wavelength、Laser Product Class、# of Returns。
 </a:t>
             </a:r>
           </a:p>
@@ -7570,7 +7570,7 @@
                 <a:ea typeface="Arial Unicode MS"/>
                 <a:cs typeface="Arial Unicode MS"/>
               </a:rPr>
-              <a:t>，光達這三行在講</a:t>
+              <a:t>；光達這三行在講</a:t>
             </a:r>
             <a:r>
               <a:rPr sz="1200" b="1" lang="zh-TW" dirty="0">
@@ -7581,7 +7581,7 @@
                 <a:ea typeface="Arial Unicode MS"/>
                 <a:cs typeface="Arial Unicode MS"/>
               </a:rPr>
-              <a:t>這顆東西能不能裝上車</a:t>
+              <a:t>那道雷射本身</a:t>
             </a:r>
             <a:r>
               <a:rPr sz="1200" lang="zh-TW" dirty="0">
@@ -7592,7 +7592,7 @@
                 <a:ea typeface="Arial Unicode MS"/>
                 <a:cs typeface="Arial Unicode MS"/>
               </a:rPr>
-              <a:t>。少了其中一行，整顆就不要裝。
+              <a:t>——它是哪一種光、會不會傷眼睛、打出去會彈回幾次。標題上我寫成白話：用哪種雷射、傷不傷眼睛、能不能看穿雨。等一下各位會看到，少了其中一行，整顆就不要裝上車。
 </a:t>
             </a:r>
           </a:p>
@@ -16494,7 +16494,7 @@
                 <a:ea typeface="Arial" pitchFamily="34" charset="-122"/>
                 <a:cs typeface="Arial" pitchFamily="34" charset="-120"/>
               </a:rPr>
-              <a:t>Lidar: bước sóng, an toàn mắt, và mấy lần phản hồi</a:t>
+              <a:t>Lidar: laser loại nào, có hại mắt không, có xuyên mưa không</a:t>
             </a:r>
             <a:endParaRPr lang="en-US" sz="2900" dirty="0"/>
           </a:p>
@@ -16514,7 +16514,7 @@
                 <a:ea typeface="微軟正黑體" pitchFamily="34" charset="-122"/>
                 <a:cs typeface="微軟正黑體" pitchFamily="34" charset="-120"/>
               </a:rPr>
-              <a:t>光達：波長、眼睛安全，還有幾次回波</a:t>
+              <a:t>光達：雷射用哪一種、傷不傷眼睛、能不能看穿雨</a:t>
             </a:r>
             <a:endParaRPr lang="en-US" sz="2900" dirty="0"/>
           </a:p>

--- a/第五週(10-08)/第五週_第2節_簡報.pptx
+++ b/第五週(10-08)/第五週_第2節_簡報.pptx
@@ -4699,7 +4699,7 @@
                 <a:ea typeface="Arial Unicode MS"/>
                 <a:cs typeface="Arial Unicode MS"/>
               </a:rPr>
-              <a:t>段落分隔。宣告接下來三件事決定逆光與進隧道會發生什麼事；順便講明快門方式不在那份兩頁的 preview 上。
+              <a:t>段落分隔。標題寫三種會壞掉的樣子，副標才是三個術語；順便講明快門方式不在那份兩頁的 preview 上。
 </a:t>
             </a:r>
           </a:p>
@@ -7504,7 +7504,7 @@
                 <a:ea typeface="Arial Unicode MS"/>
                 <a:cs typeface="Arial Unicode MS"/>
               </a:rPr>
-              <a:t>相機那三行講完了，換光達。一樣三行：</a:t>
+              <a:t>相機那三行講完了，換光達。一樣三行，一樣很少人讀：</a:t>
             </a:r>
             <a:r>
               <a:rPr sz="1200" b="1" lang="zh-TW" dirty="0">
@@ -7515,7 +7515,7 @@
                 <a:ea typeface="Arial Unicode MS"/>
                 <a:cs typeface="Arial Unicode MS"/>
               </a:rPr>
-              <a:t>波長、眼睛安全、回波次數</a:t>
+              <a:t>波長、雷射安全等級、回波次數</a:t>
             </a:r>
             <a:r>
               <a:rPr sz="1200" lang="zh-TW" dirty="0">
@@ -14824,7 +14824,7 @@
                 <a:ea typeface="Arial" pitchFamily="34" charset="-122"/>
                 <a:cs typeface="Arial" pitchFamily="34" charset="-120"/>
               </a:rPr>
-              <a:t>Camera: ba dòng quyết định lúc chói sáng và lúc vào hầm</a:t>
+              <a:t>Camera: ảnh bị méo, bị đen hoặc trắng xoá, đèn đỏ thành tắt</a:t>
             </a:r>
             <a:endParaRPr lang="en-US" sz="2900" dirty="0"/>
           </a:p>
@@ -14844,7 +14844,7 @@
                 <a:ea typeface="微軟正黑體" pitchFamily="34" charset="-122"/>
                 <a:cs typeface="微軟正黑體" pitchFamily="34" charset="-120"/>
               </a:rPr>
-              <a:t>相機：決定逆光與進隧道的那三件事</a:t>
+              <a:t>相機：畫面會歪、會黑掉或白掉、紅燈會拍成沒亮</a:t>
             </a:r>
             <a:endParaRPr lang="en-US" sz="2900" dirty="0"/>
           </a:p>
@@ -16556,7 +16556,7 @@
                 <a:ea typeface="Arial" pitchFamily="34" charset="-122"/>
                 <a:cs typeface="Arial" pitchFamily="34" charset="-120"/>
               </a:rPr>
-              <a:t>Ba dòng nữa, ít người đọc</a:t>
+              <a:t>Bước sóng · cấp an toàn laser · số lần phản hồi</a:t>
             </a:r>
             <a:endParaRPr lang="en-US" sz="1350" dirty="0"/>
           </a:p>
@@ -16576,7 +16576,7 @@
                 <a:ea typeface="微軟正黑體" pitchFamily="34" charset="-122"/>
                 <a:cs typeface="微軟正黑體" pitchFamily="34" charset="-120"/>
               </a:rPr>
-              <a:t>另外三行，一樣很少人讀</a:t>
+              <a:t>波長・雷射安全等級・回波次數</a:t>
             </a:r>
             <a:endParaRPr lang="en-US" sz="1350" dirty="0"/>
           </a:p>

--- a/第五週(10-08)/第五週_第2節_簡報.pptx
+++ b/第五週(10-08)/第五週_第2節_簡報.pptx
@@ -7845,7 +7845,7 @@
                 <a:ea typeface="Arial Unicode MS"/>
                 <a:cs typeface="Arial Unicode MS"/>
               </a:rPr>
-              <a:t>一列一列圈，每圈一列念一次它的代價。
+              <a:t>一列一列圈，每圈一列念一次它的代價。學生會拿第三週的竹竿來問「波長愈長不是愈會穿透嗎」——繞射和吸收是兩回事，口白裡有。
 </a:t>
             </a:r>
           </a:p>
@@ -8230,6 +8230,138 @@
                 <a:ea typeface="Arial Unicode MS"/>
                 <a:cs typeface="Arial Unicode MS"/>
               </a:rPr>
+              <a:t>這裡要先擋一個誤會。第三週我們用竹竿講過：</a:t>
+            </a:r>
+            <a:r>
+              <a:rPr sz="800" b="1" lang="zh-TW" dirty="0">
+                <a:solidFill>
+                  <a:srgbClr val="000000"/>
+                </a:solidFill>
+                <a:latin typeface="Arial Unicode MS"/>
+                <a:ea typeface="Arial Unicode MS"/>
+                <a:cs typeface="Arial Unicode MS"/>
+              </a:rPr>
+              <a:t>波長比障礙物大就繞過去，比障礙物小就被擋住。</a:t>
+            </a:r>
+            <a:r>
+              <a:rPr sz="800" lang="zh-TW" dirty="0">
+                <a:solidFill>
+                  <a:srgbClr val="000000"/>
+                </a:solidFill>
+                <a:latin typeface="Arial Unicode MS"/>
+                <a:ea typeface="Arial Unicode MS"/>
+                <a:cs typeface="Arial Unicode MS"/>
+              </a:rPr>
+              <a:t>那條規則講的是「會不會被擋住、被散開」，比的是</a:t>
+            </a:r>
+            <a:r>
+              <a:rPr sz="800" b="1" lang="zh-TW" dirty="0">
+                <a:solidFill>
+                  <a:srgbClr val="000000"/>
+                </a:solidFill>
+                <a:latin typeface="Arial Unicode MS"/>
+                <a:ea typeface="Arial Unicode MS"/>
+                <a:cs typeface="Arial Unicode MS"/>
+              </a:rPr>
+              <a:t>波長和障礙物的大小</a:t>
+            </a:r>
+            <a:r>
+              <a:rPr sz="800" lang="zh-TW" dirty="0">
+                <a:solidFill>
+                  <a:srgbClr val="000000"/>
+                </a:solidFill>
+                <a:latin typeface="Arial Unicode MS"/>
+                <a:ea typeface="Arial Unicode MS"/>
+                <a:cs typeface="Arial Unicode MS"/>
+              </a:rPr>
+              <a:t>。今天講的是另一件事——</a:t>
+            </a:r>
+            <a:r>
+              <a:rPr sz="800" b="1" lang="zh-TW" dirty="0">
+                <a:solidFill>
+                  <a:srgbClr val="000000"/>
+                </a:solidFill>
+                <a:latin typeface="Arial Unicode MS"/>
+                <a:ea typeface="Arial Unicode MS"/>
+                <a:cs typeface="Arial Unicode MS"/>
+              </a:rPr>
+              <a:t>材料會不會把光吃掉</a:t>
+            </a:r>
+            <a:r>
+              <a:rPr sz="800" lang="zh-TW" dirty="0">
+                <a:solidFill>
+                  <a:srgbClr val="000000"/>
+                </a:solidFill>
+                <a:latin typeface="Arial Unicode MS"/>
+                <a:ea typeface="Arial Unicode MS"/>
+                <a:cs typeface="Arial Unicode MS"/>
+              </a:rPr>
+              <a:t>。那跟大小沒關係，跟水這種分子吃哪些波長有關。而且水吸光的曲線不是一條斜線，是</a:t>
+            </a:r>
+            <a:r>
+              <a:rPr sz="800" b="1" lang="zh-TW" dirty="0">
+                <a:solidFill>
+                  <a:srgbClr val="000000"/>
+                </a:solidFill>
+                <a:latin typeface="Arial Unicode MS"/>
+                <a:ea typeface="Arial Unicode MS"/>
+                <a:cs typeface="Arial Unicode MS"/>
+              </a:rPr>
+              <a:t>高高低低的</a:t>
+            </a:r>
+            <a:r>
+              <a:rPr sz="800" lang="zh-TW" dirty="0">
+                <a:solidFill>
+                  <a:srgbClr val="000000"/>
+                </a:solidFill>
+                <a:latin typeface="Arial Unicode MS"/>
+                <a:ea typeface="Arial Unicode MS"/>
+                <a:cs typeface="Arial Unicode MS"/>
+              </a:rPr>
+              <a:t>：九百奈米附近水幾乎不吸，到一千五百五就變得很會吸。所以 1550 </a:t>
+            </a:r>
+            <a:r>
+              <a:rPr sz="800" b="1" lang="zh-TW" dirty="0">
+                <a:solidFill>
+                  <a:srgbClr val="000000"/>
+                </a:solidFill>
+                <a:latin typeface="Arial Unicode MS"/>
+                <a:ea typeface="Arial Unicode MS"/>
+                <a:cs typeface="Arial Unicode MS"/>
+              </a:rPr>
+              <a:t>不是比較會穿透，是剛好踩在水的吸收帶上</a:t>
+            </a:r>
+            <a:r>
+              <a:rPr sz="800" lang="zh-TW" dirty="0">
+                <a:solidFill>
+                  <a:srgbClr val="000000"/>
+                </a:solidFill>
+                <a:latin typeface="Arial Unicode MS"/>
+                <a:ea typeface="Arial Unicode MS"/>
+                <a:cs typeface="Arial Unicode MS"/>
+              </a:rPr>
+              <a:t>。
+</a:t>
+            </a:r>
+          </a:p>
+          <a:p>
+            <a:pPr algn="l">
+              <a:spcBef>
+                <a:spcPts val="0"/>
+              </a:spcBef>
+              <a:spcAft>
+                <a:spcPts val="133"/>
+              </a:spcAft>
+            </a:pPr>
+            <a:r>
+              <a:rPr sz="800" lang="zh-TW" dirty="0">
+                <a:solidFill>
+                  <a:srgbClr val="000000"/>
+                </a:solidFill>
+                <a:latin typeface="Arial Unicode MS"/>
+                <a:ea typeface="Arial Unicode MS"/>
+                <a:cs typeface="Arial Unicode MS"/>
+              </a:rPr>
               <a:t>打得強，就看得遠。這就是為什麼高階的長距光達用 1550。
 </a:t>
             </a:r>
@@ -8340,7 +8472,29 @@
                 <a:ea typeface="Arial Unicode MS"/>
                 <a:cs typeface="Arial Unicode MS"/>
               </a:rPr>
-              <a:t>還有一件事：波長也影響雨霧。第三週我們用那張波長圖講過——光達的波長比霧滴小，所以會被散射。865 和 1550 在這件事上差別不大，因為兩個都遠小於霧滴。</a:t>
+              <a:t>那竹竿那條規則在今天這張還算不算數？算，但它把 905 和 1550 歸在</a:t>
+            </a:r>
+            <a:r>
+              <a:rPr sz="800" b="1" lang="zh-TW" dirty="0">
+                <a:solidFill>
+                  <a:srgbClr val="000000"/>
+                </a:solidFill>
+                <a:latin typeface="Arial Unicode MS"/>
+                <a:ea typeface="Arial Unicode MS"/>
+                <a:cs typeface="Arial Unicode MS"/>
+              </a:rPr>
+              <a:t>同一類</a:t>
+            </a:r>
+            <a:r>
+              <a:rPr sz="800" lang="zh-TW" dirty="0">
+                <a:solidFill>
+                  <a:srgbClr val="000000"/>
+                </a:solidFill>
+                <a:latin typeface="Arial Unicode MS"/>
+                <a:ea typeface="Arial Unicode MS"/>
+                <a:cs typeface="Arial Unicode MS"/>
+              </a:rPr>
+              <a:t>。兩個只差一點七倍，而霧滴有幾十微米——它們都比霧滴小一千倍左右，所以在竹竿那條規則裡誰也沒有比較會繞過去，兩個一樣會被雨霧散射。</a:t>
             </a:r>
           </a:p>
         </p:txBody>

--- a/第五週(10-08)/第五週_第2節_簡報.pptx
+++ b/第五週(10-08)/第五週_第2節_簡報.pptx
@@ -8032,29 +8032,7 @@
                 <a:ea typeface="Arial Unicode MS"/>
                 <a:cs typeface="Arial Unicode MS"/>
               </a:rPr>
-              <a:t>為什麼要分這些？這裡有一個很有意思的物理。
-</a:t>
-            </a:r>
-          </a:p>
-          <a:p>
-            <a:pPr algn="l">
-              <a:spcBef>
-                <a:spcPts val="0"/>
-              </a:spcBef>
-              <a:spcAft>
-                <a:spcPts val="133"/>
-              </a:spcAft>
-            </a:pPr>
-            <a:r>
-              <a:rPr sz="800" lang="zh-TW" dirty="0">
-                <a:solidFill>
-                  <a:srgbClr val="000000"/>
-                </a:solidFill>
-                <a:latin typeface="Arial Unicode MS"/>
-                <a:ea typeface="Arial Unicode MS"/>
-                <a:cs typeface="Arial Unicode MS"/>
-              </a:rPr>
-              <a:t>各位還記得第三週講的：光達打的是紅外線雷射，人眼看不到。看不到的東西打到眼睛裡，人不會眨眼、也不會閃避，所以</a:t>
+              <a:t>為什麼要分這些？這裡有一個很有意思的物理。各位還記得第三週講的：光達打的是紅外線雷射，人眼看不到。看不到的東西打到眼睛裡，人不會眨眼、也不會閃避，所以</a:t>
             </a:r>
             <a:r>
               <a:rPr sz="800" b="1" lang="zh-TW" dirty="0">
@@ -8098,29 +8076,7 @@
                 <a:ea typeface="Arial Unicode MS"/>
                 <a:cs typeface="Arial Unicode MS"/>
               </a:rPr>
-              <a:t>功率愈大，看得愈遠。可是法規不准你亂加。
-</a:t>
-            </a:r>
-          </a:p>
-          <a:p>
-            <a:pPr algn="l">
-              <a:spcBef>
-                <a:spcPts val="0"/>
-              </a:spcBef>
-              <a:spcAft>
-                <a:spcPts val="133"/>
-              </a:spcAft>
-            </a:pPr>
-            <a:r>
-              <a:rPr sz="800" lang="zh-TW" dirty="0">
-                <a:solidFill>
-                  <a:srgbClr val="000000"/>
-                </a:solidFill>
-                <a:latin typeface="Arial Unicode MS"/>
-                <a:ea typeface="Arial Unicode MS"/>
-                <a:cs typeface="Arial Unicode MS"/>
-              </a:rPr>
-              <a:t>關鍵在這裡：</a:t>
+              <a:t>功率愈大看得愈遠，可是法規不准你亂加。關鍵在這裡：</a:t>
             </a:r>
             <a:r>
               <a:rPr sz="800" b="1" lang="zh-TW" dirty="0">
@@ -8230,7 +8186,7 @@
                 <a:ea typeface="Arial Unicode MS"/>
                 <a:cs typeface="Arial Unicode MS"/>
               </a:rPr>
-              <a:t>這裡要先擋一個誤會。第三週我們用竹竿講過：</a:t>
+              <a:t>這裡要擋一個誤會。第三週我們用竹竿講過：</a:t>
             </a:r>
             <a:r>
               <a:rPr sz="800" b="1" lang="zh-TW" dirty="0">
@@ -8252,7 +8208,7 @@
                 <a:ea typeface="Arial Unicode MS"/>
                 <a:cs typeface="Arial Unicode MS"/>
               </a:rPr>
-              <a:t>那條規則講的是「會不會被擋住、被散開」，比的是</a:t>
+              <a:t>那條規則講的是「會不會被擋住、被散開」，比的是波長和</a:t>
             </a:r>
             <a:r>
               <a:rPr sz="800" b="1" lang="zh-TW" dirty="0">
@@ -8263,7 +8219,7 @@
                 <a:ea typeface="Arial Unicode MS"/>
                 <a:cs typeface="Arial Unicode MS"/>
               </a:rPr>
-              <a:t>波長和障礙物的大小</a:t>
+              <a:t>障礙物的大小</a:t>
             </a:r>
             <a:r>
               <a:rPr sz="800" lang="zh-TW" dirty="0">
@@ -8296,7 +8252,7 @@
                 <a:ea typeface="Arial Unicode MS"/>
                 <a:cs typeface="Arial Unicode MS"/>
               </a:rPr>
-              <a:t>。那跟大小沒關係，跟水這種分子吃哪些波長有關。而且水吸光的曲線不是一條斜線，是</a:t>
+              <a:t>，那跟大小沒關係，跟水分子吃哪些波長有關。而且水吸光的曲線不是斜線，是</a:t>
             </a:r>
             <a:r>
               <a:rPr sz="800" b="1" lang="zh-TW" dirty="0">
@@ -8318,7 +8274,7 @@
                 <a:ea typeface="Arial Unicode MS"/>
                 <a:cs typeface="Arial Unicode MS"/>
               </a:rPr>
-              <a:t>：九百奈米附近水幾乎不吸，到一千五百五就變得很會吸。所以 1550 </a:t>
+              <a:t>：九百奈米附近幾乎不吸，到一千五百五就很會吸。所以 1550 </a:t>
             </a:r>
             <a:r>
               <a:rPr sz="800" b="1" lang="zh-TW" dirty="0">
@@ -8362,7 +8318,7 @@
                 <a:ea typeface="Arial Unicode MS"/>
                 <a:cs typeface="Arial Unicode MS"/>
               </a:rPr>
-              <a:t>打得強，就看得遠。這就是為什麼高階的長距光達用 1550。
+              <a:t>所以高階的長距光達用 1550。
 </a:t>
             </a:r>
           </a:p>
@@ -8395,7 +8351,7 @@
                 <a:ea typeface="Arial Unicode MS"/>
                 <a:cs typeface="Arial Unicode MS"/>
               </a:rPr>
-              <a:t>貴</a:t>
+              <a:t>接收端要換材料</a:t>
             </a:r>
             <a:r>
               <a:rPr sz="800" lang="zh-TW" dirty="0">
@@ -8406,7 +8362,161 @@
                 <a:ea typeface="Arial Unicode MS"/>
                 <a:cs typeface="Arial Unicode MS"/>
               </a:rPr>
-              <a:t>。905 可以用便宜的矽做接收器，1550 要用銦鎵砷，一顆貴好幾倍。
+              <a:t>，而那個材料很貴。
+</a:t>
+            </a:r>
+          </a:p>
+          <a:p>
+            <a:pPr algn="l">
+              <a:spcBef>
+                <a:spcPts val="0"/>
+              </a:spcBef>
+              <a:spcAft>
+                <a:spcPts val="133"/>
+              </a:spcAft>
+            </a:pPr>
+            <a:r>
+              <a:rPr sz="800" lang="zh-TW" dirty="0">
+                <a:solidFill>
+                  <a:srgbClr val="000000"/>
+                </a:solidFill>
+                <a:latin typeface="Arial Unicode MS"/>
+                <a:ea typeface="Arial Unicode MS"/>
+                <a:cs typeface="Arial Unicode MS"/>
+              </a:rPr>
+              <a:t>先講光達怎麼「收到」光。光打在半導體上，光子的能量夠大就撞出一個電子，變成電流——那就是訊號。能量夠不夠有一個門檻，叫</a:t>
+            </a:r>
+            <a:r>
+              <a:rPr sz="800" b="1" lang="zh-TW" dirty="0">
+                <a:solidFill>
+                  <a:srgbClr val="000000"/>
+                </a:solidFill>
+                <a:latin typeface="Arial Unicode MS"/>
+                <a:ea typeface="Arial Unicode MS"/>
+                <a:cs typeface="Arial Unicode MS"/>
+              </a:rPr>
+              <a:t>能隙</a:t>
+            </a:r>
+            <a:r>
+              <a:rPr sz="800" lang="zh-TW" dirty="0">
+                <a:solidFill>
+                  <a:srgbClr val="000000"/>
+                </a:solidFill>
+                <a:latin typeface="Arial Unicode MS"/>
+                <a:ea typeface="Arial Unicode MS"/>
+                <a:cs typeface="Arial Unicode MS"/>
+              </a:rPr>
+              <a:t>，每種材料不一樣；波長愈長，光子的能量愈小。</a:t>
+            </a:r>
+            <a:r>
+              <a:rPr sz="800" b="1" lang="zh-TW" dirty="0">
+                <a:solidFill>
+                  <a:srgbClr val="000000"/>
+                </a:solidFill>
+                <a:latin typeface="Arial Unicode MS"/>
+                <a:ea typeface="Arial Unicode MS"/>
+                <a:cs typeface="Arial Unicode MS"/>
+              </a:rPr>
+              <a:t>矽的門檻剛好卡在一千一百奈米</a:t>
+            </a:r>
+            <a:r>
+              <a:rPr sz="800" lang="zh-TW" dirty="0">
+                <a:solidFill>
+                  <a:srgbClr val="000000"/>
+                </a:solidFill>
+                <a:latin typeface="Arial Unicode MS"/>
+                <a:ea typeface="Arial Unicode MS"/>
+                <a:cs typeface="Arial Unicode MS"/>
+              </a:rPr>
+              <a:t>：905、865 過得了，1550 過不了。所以</a:t>
+            </a:r>
+            <a:r>
+              <a:rPr sz="800" b="1" lang="zh-TW" dirty="0">
+                <a:solidFill>
+                  <a:srgbClr val="000000"/>
+                </a:solidFill>
+                <a:latin typeface="Arial Unicode MS"/>
+                <a:ea typeface="Arial Unicode MS"/>
+                <a:cs typeface="Arial Unicode MS"/>
+              </a:rPr>
+              <a:t>矽對 1550 等於全盲</a:t>
+            </a:r>
+            <a:r>
+              <a:rPr sz="800" lang="zh-TW" dirty="0">
+                <a:solidFill>
+                  <a:srgbClr val="000000"/>
+                </a:solidFill>
+                <a:latin typeface="Arial Unicode MS"/>
+                <a:ea typeface="Arial Unicode MS"/>
+                <a:cs typeface="Arial Unicode MS"/>
+              </a:rPr>
+              <a:t>，不是看不清楚，是一點訊號都沒有。
+</a:t>
+            </a:r>
+          </a:p>
+          <a:p>
+            <a:pPr algn="l">
+              <a:spcBef>
+                <a:spcPts val="0"/>
+              </a:spcBef>
+              <a:spcAft>
+                <a:spcPts val="133"/>
+              </a:spcAft>
+            </a:pPr>
+            <a:r>
+              <a:rPr sz="800" lang="zh-TW" dirty="0">
+                <a:solidFill>
+                  <a:srgbClr val="000000"/>
+                </a:solidFill>
+                <a:latin typeface="Arial Unicode MS"/>
+                <a:ea typeface="Arial Unicode MS"/>
+                <a:cs typeface="Arial Unicode MS"/>
+              </a:rPr>
+              <a:t>所以 1550 只能換</a:t>
+            </a:r>
+            <a:r>
+              <a:rPr sz="800" b="1" lang="zh-TW" dirty="0">
+                <a:solidFill>
+                  <a:srgbClr val="000000"/>
+                </a:solidFill>
+                <a:latin typeface="Arial Unicode MS"/>
+                <a:ea typeface="Arial Unicode MS"/>
+                <a:cs typeface="Arial Unicode MS"/>
+              </a:rPr>
+              <a:t>銦鎵砷</a:t>
+            </a:r>
+            <a:r>
+              <a:rPr sz="800" lang="zh-TW" dirty="0">
+                <a:solidFill>
+                  <a:srgbClr val="000000"/>
+                </a:solidFill>
+                <a:latin typeface="Arial Unicode MS"/>
+                <a:ea typeface="Arial Unicode MS"/>
+                <a:cs typeface="Arial Unicode MS"/>
+              </a:rPr>
+              <a:t>——銦、鎵、砷做的半導體，英文縮寫 InGaAs，門檻低到一千七百奈米都看得見。貴在哪？矽是全世界最成熟最便宜的材料，整個晶片工業都在做它；銦鎵砷的晶圓小、材料稀有，而且感光的部分和讀取電路是</a:t>
+            </a:r>
+            <a:r>
+              <a:rPr sz="800" b="1" lang="zh-TW" dirty="0">
+                <a:solidFill>
+                  <a:srgbClr val="000000"/>
+                </a:solidFill>
+                <a:latin typeface="Arial Unicode MS"/>
+                <a:ea typeface="Arial Unicode MS"/>
+                <a:cs typeface="Arial Unicode MS"/>
+              </a:rPr>
+              <a:t>兩顆晶片，要一顆一顆對準黏起來</a:t>
+            </a:r>
+            <a:r>
+              <a:rPr sz="800" lang="zh-TW" dirty="0">
+                <a:solidFill>
+                  <a:srgbClr val="000000"/>
+                </a:solidFill>
+                <a:latin typeface="Arial Unicode MS"/>
+                <a:ea typeface="Arial Unicode MS"/>
+                <a:cs typeface="Arial Unicode MS"/>
+              </a:rPr>
+              <a:t>。
 </a:t>
             </a:r>
           </a:p>
@@ -8472,7 +8582,7 @@
                 <a:ea typeface="Arial Unicode MS"/>
                 <a:cs typeface="Arial Unicode MS"/>
               </a:rPr>
-              <a:t>那竹竿那條規則在今天這張還算不算數？算，但它把 905 和 1550 歸在</a:t>
+              <a:t>那竹竿那條規則在今天還算不算數？算，但它把 905 和 1550 歸在</a:t>
             </a:r>
             <a:r>
               <a:rPr sz="800" b="1" lang="zh-TW" dirty="0">
@@ -8494,7 +8604,7 @@
                 <a:ea typeface="Arial Unicode MS"/>
                 <a:cs typeface="Arial Unicode MS"/>
               </a:rPr>
-              <a:t>。兩個只差一點七倍，而霧滴有幾十微米——它們都比霧滴小一千倍左右，所以在竹竿那條規則裡誰也沒有比較會繞過去，兩個一樣會被雨霧散射。</a:t>
+              <a:t>：兩個只差一點七倍，都比霧滴小一千倍左右，所以一樣會被雨霧散射，誰也沒有比較會繞過去。</a:t>
             </a:r>
           </a:p>
         </p:txBody>

--- a/第五週(10-08)/第五週_第2節_簡報.pptx
+++ b/第五週(10-08)/第五週_第2節_簡報.pptx
@@ -8494,7 +8494,29 @@
                 <a:ea typeface="Arial Unicode MS"/>
                 <a:cs typeface="Arial Unicode MS"/>
               </a:rPr>
-              <a:t>——銦、鎵、砷做的半導體，英文縮寫 InGaAs，門檻低到一千七百奈米都看得見。貴在哪？矽是全世界最成熟最便宜的材料，整個晶片工業都在做它；銦鎵砷的晶圓小、材料稀有，而且感光的部分和讀取電路是</a:t>
+              <a:t>，唸起來像「因、家、申」——銦、鎵、砷三種元素做的半導體。規格表上寫的是英文 </a:t>
+            </a:r>
+            <a:r>
+              <a:rPr sz="800" b="1" lang="zh-TW" dirty="0">
+                <a:solidFill>
+                  <a:srgbClr val="000000"/>
+                </a:solidFill>
+                <a:latin typeface="Arial Unicode MS"/>
+                <a:ea typeface="Arial Unicode MS"/>
+                <a:cs typeface="Arial Unicode MS"/>
+              </a:rPr>
+              <a:t>InGaAs</a:t>
+            </a:r>
+            <a:r>
+              <a:rPr sz="800" lang="zh-TW" dirty="0">
+                <a:solidFill>
+                  <a:srgbClr val="000000"/>
+                </a:solidFill>
+                <a:latin typeface="Arial Unicode MS"/>
+                <a:ea typeface="Arial Unicode MS"/>
+                <a:cs typeface="Arial Unicode MS"/>
+              </a:rPr>
+              <a:t>，業界直接唸「in-gas」，各位記這個就好。它的門檻低到一千七百奈米都看得見。貴在哪？矽是全世界最成熟最便宜的材料，整個晶片工業都在做它；銦鎵砷的晶圓小、材料稀有，而且感光的部分和讀取電路是</a:t>
             </a:r>
             <a:r>
               <a:rPr sz="800" b="1" lang="zh-TW" dirty="0">

--- a/第五週(10-08)/第五週_第2節_簡報.pptx
+++ b/第五週(10-08)/第五週_第2節_簡報.pptx
@@ -8735,11 +8735,11 @@
                 <a:spcPts val="0"/>
               </a:spcBef>
               <a:spcAft>
-                <a:spcPts val="158"/>
-              </a:spcAft>
-            </a:pPr>
-            <a:r>
-              <a:rPr sz="950" b="1" lang="zh-TW" dirty="0">
+                <a:spcPts val="133"/>
+              </a:spcAft>
+            </a:pPr>
+            <a:r>
+              <a:rPr sz="800" b="1" lang="zh-TW" dirty="0">
                 <a:solidFill>
                   <a:srgbClr val="000000"/>
                 </a:solidFill>
@@ -8750,7 +8750,7 @@
               <a:t>▍這一張要做什麼</a:t>
             </a:r>
             <a:r>
-              <a:rPr sz="950" lang="zh-TW" dirty="0">
+              <a:rPr sz="800" lang="zh-TW" dirty="0">
                 <a:solidFill>
                   <a:srgbClr val="000000"/>
                 </a:solidFill>
@@ -8768,11 +8768,11 @@
                 <a:spcPts val="0"/>
               </a:spcBef>
               <a:spcAft>
-                <a:spcPts val="158"/>
-              </a:spcAft>
-            </a:pPr>
-            <a:r>
-              <a:rPr sz="950" lang="zh-TW" dirty="0">
+                <a:spcPts val="133"/>
+              </a:spcAft>
+            </a:pPr>
+            <a:r>
+              <a:rPr sz="800" lang="zh-TW" dirty="0">
                 <a:solidFill>
                   <a:srgbClr val="000000"/>
                 </a:solidFill>
@@ -8790,11 +8790,11 @@
                 <a:spcPts val="0"/>
               </a:spcBef>
               <a:spcAft>
-                <a:spcPts val="158"/>
-              </a:spcAft>
-            </a:pPr>
-            <a:r>
-              <a:rPr sz="950" b="1" lang="zh-TW" dirty="0">
+                <a:spcPts val="133"/>
+              </a:spcAft>
+            </a:pPr>
+            <a:r>
+              <a:rPr sz="800" b="1" lang="zh-TW" dirty="0">
                 <a:solidFill>
                   <a:srgbClr val="000000"/>
                 </a:solidFill>
@@ -8805,7 +8805,7 @@
               <a:t>▍畫面上圈這裡</a:t>
             </a:r>
             <a:r>
-              <a:rPr sz="950" lang="zh-TW" dirty="0">
+              <a:rPr sz="800" lang="zh-TW" dirty="0">
                 <a:solidFill>
                   <a:srgbClr val="000000"/>
                 </a:solidFill>
@@ -8823,19 +8823,19 @@
                 <a:spcPts val="0"/>
               </a:spcBef>
               <a:spcAft>
-                <a:spcPts val="158"/>
-              </a:spcAft>
-            </a:pPr>
-            <a:r>
-              <a:rPr sz="950" lang="zh-TW" dirty="0">
-                <a:solidFill>
-                  <a:srgbClr val="000000"/>
-                </a:solidFill>
-                <a:latin typeface="Arial Unicode MS"/>
-                <a:ea typeface="Arial Unicode MS"/>
-                <a:cs typeface="Arial Unicode MS"/>
-              </a:rPr>
-              <a:t>在圖上圈 Laser Product Class 那一行的 Class 1 與 IEC/EN 60825-1，再圈下一行的 865 nm。語氣要重。
+                <a:spcPts val="133"/>
+              </a:spcAft>
+            </a:pPr>
+            <a:r>
+              <a:rPr sz="800" lang="zh-TW" dirty="0">
+                <a:solidFill>
+                  <a:srgbClr val="000000"/>
+                </a:solidFill>
+                <a:latin typeface="Arial Unicode MS"/>
+                <a:ea typeface="Arial Unicode MS"/>
+                <a:cs typeface="Arial Unicode MS"/>
+              </a:rPr>
+              <a:t>先圈 Class 1 與 IEC/EN 60825-1，語氣要重；再圈 865 nm。最後圈 Beam Divergence 0.18°，在白板上算一次 100 m → 31 cm。
 </a:t>
             </a:r>
           </a:p>
@@ -8845,11 +8845,11 @@
                 <a:spcPts val="0"/>
               </a:spcBef>
               <a:spcAft>
-                <a:spcPts val="158"/>
-              </a:spcAft>
-            </a:pPr>
-            <a:r>
-              <a:rPr sz="950" b="1" lang="zh-TW" dirty="0">
+                <a:spcPts val="133"/>
+              </a:spcAft>
+            </a:pPr>
+            <a:r>
+              <a:rPr sz="800" b="1" lang="zh-TW" dirty="0">
                 <a:solidFill>
                   <a:srgbClr val="000000"/>
                 </a:solidFill>
@@ -8860,7 +8860,7 @@
               <a:t>▍以下照著唸</a:t>
             </a:r>
             <a:r>
-              <a:rPr sz="950" lang="zh-TW" dirty="0">
+              <a:rPr sz="800" lang="zh-TW" dirty="0">
                 <a:solidFill>
                   <a:srgbClr val="000000"/>
                 </a:solidFill>
@@ -8878,11 +8878,11 @@
                 <a:spcPts val="0"/>
               </a:spcBef>
               <a:spcAft>
-                <a:spcPts val="158"/>
-              </a:spcAft>
-            </a:pPr>
-            <a:r>
-              <a:rPr sz="950" lang="zh-TW" dirty="0">
+                <a:spcPts val="133"/>
+              </a:spcAft>
+            </a:pPr>
+            <a:r>
+              <a:rPr sz="800" lang="zh-TW" dirty="0">
                 <a:solidFill>
                   <a:srgbClr val="000000"/>
                 </a:solidFill>
@@ -8893,7 +8893,7 @@
               <a:t>左邊這一塊，是 OS1 datasheet 上 LASER 那一段。</a:t>
             </a:r>
             <a:r>
-              <a:rPr sz="950" b="1" lang="zh-TW" dirty="0">
+              <a:rPr sz="800" b="1" lang="zh-TW" dirty="0">
                 <a:solidFill>
                   <a:srgbClr val="000000"/>
                 </a:solidFill>
@@ -8904,7 +8904,7 @@
               <a:t>第一行就是眼睛安全等級</a:t>
             </a:r>
             <a:r>
-              <a:rPr sz="950" lang="zh-TW" dirty="0">
+              <a:rPr sz="800" lang="zh-TW" dirty="0">
                 <a:solidFill>
                   <a:srgbClr val="000000"/>
                 </a:solidFill>
@@ -8922,11 +8922,11 @@
                 <a:spcPts val="0"/>
               </a:spcBef>
               <a:spcAft>
-                <a:spcPts val="158"/>
-              </a:spcAft>
-            </a:pPr>
-            <a:r>
-              <a:rPr sz="950" lang="zh-TW" dirty="0">
+                <a:spcPts val="133"/>
+              </a:spcAft>
+            </a:pPr>
+            <a:r>
+              <a:rPr sz="800" lang="zh-TW" dirty="0">
                 <a:solidFill>
                   <a:srgbClr val="000000"/>
                 </a:solidFill>
@@ -8937,7 +8937,7 @@
               <a:t>上面寫的是：</a:t>
             </a:r>
             <a:r>
-              <a:rPr sz="950" b="1" lang="zh-TW" dirty="0">
+              <a:rPr sz="800" b="1" lang="zh-TW" dirty="0">
                 <a:solidFill>
                   <a:srgbClr val="000000"/>
                 </a:solidFill>
@@ -8948,7 +8948,7 @@
               <a:t>Class 1 eye-safe per IEC/EN 60825-1: 2014</a:t>
             </a:r>
             <a:r>
-              <a:rPr sz="950" lang="zh-TW" dirty="0">
+              <a:rPr sz="800" lang="zh-TW" dirty="0">
                 <a:solidFill>
                   <a:srgbClr val="000000"/>
                 </a:solidFill>
@@ -8966,11 +8966,11 @@
                 <a:spcPts val="0"/>
               </a:spcBef>
               <a:spcAft>
-                <a:spcPts val="158"/>
-              </a:spcAft>
-            </a:pPr>
-            <a:r>
-              <a:rPr sz="950" lang="zh-TW" dirty="0">
+                <a:spcPts val="133"/>
+              </a:spcAft>
+            </a:pPr>
+            <a:r>
+              <a:rPr sz="800" lang="zh-TW" dirty="0">
                 <a:solidFill>
                   <a:srgbClr val="000000"/>
                 </a:solidFill>
@@ -8981,7 +8981,7 @@
               <a:t>這一行在講什麼？IEC 60825 是雷射產品的國際安全標準，把雷射分成好幾級。Class 1 是最安全的那一級，意思是：</a:t>
             </a:r>
             <a:r>
-              <a:rPr sz="950" b="1" lang="zh-TW" dirty="0">
+              <a:rPr sz="800" b="1" lang="zh-TW" dirty="0">
                 <a:solidFill>
                   <a:srgbClr val="000000"/>
                 </a:solidFill>
@@ -8992,7 +8992,7 @@
               <a:t>在正常使用的情況下，就算有人直直盯著它看，也不會傷到眼睛。</a:t>
             </a:r>
             <a:r>
-              <a:rPr sz="950" lang="zh-TW" dirty="0">
+              <a:rPr sz="800" lang="zh-TW" dirty="0">
                 <a:solidFill>
                   <a:srgbClr val="000000"/>
                 </a:solidFill>
@@ -9010,11 +9010,11 @@
                 <a:spcPts val="0"/>
               </a:spcBef>
               <a:spcAft>
-                <a:spcPts val="158"/>
-              </a:spcAft>
-            </a:pPr>
-            <a:r>
-              <a:rPr sz="950" lang="zh-TW" dirty="0">
+                <a:spcPts val="133"/>
+              </a:spcAft>
+            </a:pPr>
+            <a:r>
+              <a:rPr sz="800" lang="zh-TW" dirty="0">
                 <a:solidFill>
                   <a:srgbClr val="000000"/>
                 </a:solidFill>
@@ -9032,11 +9032,11 @@
                 <a:spcPts val="0"/>
               </a:spcBef>
               <a:spcAft>
-                <a:spcPts val="158"/>
-              </a:spcAft>
-            </a:pPr>
-            <a:r>
-              <a:rPr sz="950" lang="zh-TW" dirty="0">
+                <a:spcPts val="133"/>
+              </a:spcAft>
+            </a:pPr>
+            <a:r>
+              <a:rPr sz="800" lang="zh-TW" dirty="0">
                 <a:solidFill>
                   <a:srgbClr val="000000"/>
                 </a:solidFill>
@@ -9047,7 +9047,7 @@
               <a:t>因為光達是裝在</a:t>
             </a:r>
             <a:r>
-              <a:rPr sz="950" b="1" lang="zh-TW" dirty="0">
+              <a:rPr sz="800" b="1" lang="zh-TW" dirty="0">
                 <a:solidFill>
                   <a:srgbClr val="000000"/>
                 </a:solidFill>
@@ -9058,7 +9058,7 @@
               <a:t>馬路上跑的車</a:t>
             </a:r>
             <a:r>
-              <a:rPr sz="950" lang="zh-TW" dirty="0">
+              <a:rPr sz="800" lang="zh-TW" dirty="0">
                 <a:solidFill>
                   <a:srgbClr val="000000"/>
                 </a:solidFill>
@@ -9076,11 +9076,11 @@
                 <a:spcPts val="0"/>
               </a:spcBef>
               <a:spcAft>
-                <a:spcPts val="158"/>
-              </a:spcAft>
-            </a:pPr>
-            <a:r>
-              <a:rPr sz="950" lang="zh-TW" dirty="0">
+                <a:spcPts val="133"/>
+              </a:spcAft>
+            </a:pPr>
+            <a:r>
+              <a:rPr sz="800" lang="zh-TW" dirty="0">
                 <a:solidFill>
                   <a:srgbClr val="000000"/>
                 </a:solidFill>
@@ -9091,7 +9091,7 @@
               <a:t>所以這一行不是拿來加分的，是</a:t>
             </a:r>
             <a:r>
-              <a:rPr sz="950" b="1" lang="zh-TW" dirty="0">
+              <a:rPr sz="800" b="1" lang="zh-TW" dirty="0">
                 <a:solidFill>
                   <a:srgbClr val="000000"/>
                 </a:solidFill>
@@ -9102,7 +9102,7 @@
               <a:t>門檻</a:t>
             </a:r>
             <a:r>
-              <a:rPr sz="950" lang="zh-TW" dirty="0">
+              <a:rPr sz="800" lang="zh-TW" dirty="0">
                 <a:solidFill>
                   <a:srgbClr val="000000"/>
                 </a:solidFill>
@@ -9120,19 +9120,41 @@
                 <a:spcPts val="0"/>
               </a:spcBef>
               <a:spcAft>
-                <a:spcPts val="158"/>
-              </a:spcAft>
-            </a:pPr>
-            <a:r>
-              <a:rPr sz="950" lang="zh-TW" dirty="0">
-                <a:solidFill>
-                  <a:srgbClr val="000000"/>
-                </a:solidFill>
-                <a:latin typeface="Arial Unicode MS"/>
-                <a:ea typeface="Arial Unicode MS"/>
-                <a:cs typeface="Arial Unicode MS"/>
-              </a:rPr>
-              <a:t>這裡也牽涉到剛剛講的波長。1550 奈米之所以可以打比較強，就是因為在同樣的 Class 1 限制下，它的功率上限高很多。
+                <a:spcPts val="133"/>
+              </a:spcAft>
+            </a:pPr>
+            <a:r>
+              <a:rPr sz="800" lang="zh-TW" dirty="0">
+                <a:solidFill>
+                  <a:srgbClr val="000000"/>
+                </a:solidFill>
+                <a:latin typeface="Arial Unicode MS"/>
+                <a:ea typeface="Arial Unicode MS"/>
+                <a:cs typeface="Arial Unicode MS"/>
+              </a:rPr>
+              <a:t>這裡也牽涉到剛剛講的波長。</a:t>
+            </a:r>
+            <a:r>
+              <a:rPr sz="800" b="1" lang="zh-TW" dirty="0">
+                <a:solidFill>
+                  <a:srgbClr val="000000"/>
+                </a:solidFill>
+                <a:latin typeface="Arial Unicode MS"/>
+                <a:ea typeface="Arial Unicode MS"/>
+                <a:cs typeface="Arial Unicode MS"/>
+              </a:rPr>
+              <a:t>第二行 Laser Wavelength，865 奈米</a:t>
+            </a:r>
+            <a:r>
+              <a:rPr sz="800" lang="zh-TW" dirty="0">
+                <a:solidFill>
+                  <a:srgbClr val="000000"/>
+                </a:solidFill>
+                <a:latin typeface="Arial Unicode MS"/>
+                <a:ea typeface="Arial Unicode MS"/>
+                <a:cs typeface="Arial Unicode MS"/>
+              </a:rPr>
+              <a:t>，就是上一張講的那個數字。1550 之所以可以打比較強，就是因為在同樣的 Class 1 限制下，它的功率上限高很多。
 </a:t>
             </a:r>
           </a:p>
@@ -9142,11 +9164,176 @@
                 <a:spcPts val="0"/>
               </a:spcBef>
               <a:spcAft>
-                <a:spcPts val="158"/>
-              </a:spcAft>
-            </a:pPr>
-            <a:r>
-              <a:rPr sz="950" lang="zh-TW" dirty="0">
+                <a:spcPts val="133"/>
+              </a:spcAft>
+            </a:pPr>
+            <a:r>
+              <a:rPr sz="800" lang="zh-TW" dirty="0">
+                <a:solidFill>
+                  <a:srgbClr val="000000"/>
+                </a:solidFill>
+                <a:latin typeface="Arial Unicode MS"/>
+                <a:ea typeface="Arial Unicode MS"/>
+                <a:cs typeface="Arial Unicode MS"/>
+              </a:rPr>
+              <a:t>下面兩行順便看一下，它們其實也在講同一件事。</a:t>
+            </a:r>
+            <a:r>
+              <a:rPr sz="800" b="1" lang="zh-TW" dirty="0">
+                <a:solidFill>
+                  <a:srgbClr val="000000"/>
+                </a:solidFill>
+                <a:latin typeface="Arial Unicode MS"/>
+                <a:ea typeface="Arial Unicode MS"/>
+                <a:cs typeface="Arial Unicode MS"/>
+              </a:rPr>
+              <a:t>Beam Diameter Exiting Sensor，9.5 公釐</a:t>
+            </a:r>
+            <a:r>
+              <a:rPr sz="800" lang="zh-TW" dirty="0">
+                <a:solidFill>
+                  <a:srgbClr val="000000"/>
+                </a:solidFill>
+                <a:latin typeface="Arial Unicode MS"/>
+                <a:ea typeface="Arial Unicode MS"/>
+                <a:cs typeface="Arial Unicode MS"/>
+              </a:rPr>
+              <a:t>——雷射離開感測器的時候，光束有 9.5 公釐寬。為什麼要列這個？因為同樣的功率，</a:t>
+            </a:r>
+            <a:r>
+              <a:rPr sz="800" b="1" lang="zh-TW" dirty="0">
+                <a:solidFill>
+                  <a:srgbClr val="000000"/>
+                </a:solidFill>
+                <a:latin typeface="Arial Unicode MS"/>
+                <a:ea typeface="Arial Unicode MS"/>
+                <a:cs typeface="Arial Unicode MS"/>
+              </a:rPr>
+              <a:t>光束愈寬，攤在眼睛上的能量密度就愈低</a:t>
+            </a:r>
+            <a:r>
+              <a:rPr sz="800" lang="zh-TW" dirty="0">
+                <a:solidFill>
+                  <a:srgbClr val="000000"/>
+                </a:solidFill>
+                <a:latin typeface="Arial Unicode MS"/>
+                <a:ea typeface="Arial Unicode MS"/>
+                <a:cs typeface="Arial Unicode MS"/>
+              </a:rPr>
+              <a:t>。把光束做寬，本來就是達到 Class 1 的手段之一。
+</a:t>
+            </a:r>
+          </a:p>
+          <a:p>
+            <a:pPr algn="l">
+              <a:spcBef>
+                <a:spcPts val="0"/>
+              </a:spcBef>
+              <a:spcAft>
+                <a:spcPts val="133"/>
+              </a:spcAft>
+            </a:pPr>
+            <a:r>
+              <a:rPr sz="800" b="1" lang="zh-TW" dirty="0">
+                <a:solidFill>
+                  <a:srgbClr val="000000"/>
+                </a:solidFill>
+                <a:latin typeface="Arial Unicode MS"/>
+                <a:ea typeface="Arial Unicode MS"/>
+                <a:cs typeface="Arial Unicode MS"/>
+              </a:rPr>
+              <a:t>Beam Divergence，0.18 度</a:t>
+            </a:r>
+            <a:r>
+              <a:rPr sz="800" lang="zh-TW" dirty="0">
+                <a:solidFill>
+                  <a:srgbClr val="000000"/>
+                </a:solidFill>
+                <a:latin typeface="Arial Unicode MS"/>
+                <a:ea typeface="Arial Unicode MS"/>
+                <a:cs typeface="Arial Unicode MS"/>
+              </a:rPr>
+              <a:t>——光束飛出去會愈來愈寬。括號裡的 FWHM 是量法：從最亮的地方往兩邊量到剩一半亮度的寬度。各位算一下：0.18 度，到一百公尺外，光點大概 </a:t>
+            </a:r>
+            <a:r>
+              <a:rPr sz="800" b="1" lang="zh-TW" dirty="0">
+                <a:solidFill>
+                  <a:srgbClr val="000000"/>
+                </a:solidFill>
+                <a:latin typeface="Arial Unicode MS"/>
+                <a:ea typeface="Arial Unicode MS"/>
+                <a:cs typeface="Arial Unicode MS"/>
+              </a:rPr>
+              <a:t>31 公分寬</a:t>
+            </a:r>
+            <a:r>
+              <a:rPr sz="800" lang="zh-TW" dirty="0">
+                <a:solidFill>
+                  <a:srgbClr val="000000"/>
+                </a:solidFill>
+                <a:latin typeface="Arial Unicode MS"/>
+                <a:ea typeface="Arial Unicode MS"/>
+                <a:cs typeface="Arial Unicode MS"/>
+              </a:rPr>
+              <a:t>；四十公尺外大概 12 公分。
+</a:t>
+            </a:r>
+          </a:p>
+          <a:p>
+            <a:pPr algn="l">
+              <a:spcBef>
+                <a:spcPts val="0"/>
+              </a:spcBef>
+              <a:spcAft>
+                <a:spcPts val="133"/>
+              </a:spcAft>
+            </a:pPr>
+            <a:r>
+              <a:rPr sz="800" lang="zh-TW" dirty="0">
+                <a:solidFill>
+                  <a:srgbClr val="000000"/>
+                </a:solidFill>
+                <a:latin typeface="Arial Unicode MS"/>
+                <a:ea typeface="Arial Unicode MS"/>
+                <a:cs typeface="Arial Unicode MS"/>
+              </a:rPr>
+              <a:t>所以請記住一件事：</a:t>
+            </a:r>
+            <a:r>
+              <a:rPr sz="800" b="1" lang="zh-TW" dirty="0">
+                <a:solidFill>
+                  <a:srgbClr val="000000"/>
+                </a:solidFill>
+                <a:latin typeface="Arial Unicode MS"/>
+                <a:ea typeface="Arial Unicode MS"/>
+                <a:cs typeface="Arial Unicode MS"/>
+              </a:rPr>
+              <a:t>光達的「一個點」，在遠處根本不是一個點。</a:t>
+            </a:r>
+            <a:r>
+              <a:rPr sz="800" lang="zh-TW" dirty="0">
+                <a:solidFill>
+                  <a:srgbClr val="000000"/>
+                </a:solidFill>
+                <a:latin typeface="Arial Unicode MS"/>
+                <a:ea typeface="Arial Unicode MS"/>
+                <a:cs typeface="Arial Unicode MS"/>
+              </a:rPr>
+              <a:t>遠處那個點量到的，是那三十公分範圍裡的東西。下一張講「一道雷射可以彈回來兩次」，就是因為這道光夠寬，寬到可以同時打到兩個東西。
+</a:t>
+            </a:r>
+          </a:p>
+          <a:p>
+            <a:pPr algn="l">
+              <a:spcBef>
+                <a:spcPts val="0"/>
+              </a:spcBef>
+              <a:spcAft>
+                <a:spcPts val="133"/>
+              </a:spcAft>
+            </a:pPr>
+            <a:r>
+              <a:rPr sz="800" lang="zh-TW" dirty="0">
                 <a:solidFill>
                   <a:srgbClr val="000000"/>
                 </a:solidFill>

--- a/第五週(10-08)/第五週_第2節_簡報.pptx
+++ b/第五週(10-08)/第五週_第2節_簡報.pptx
@@ -969,11 +969,11 @@
                 <a:spcPts val="0"/>
               </a:spcBef>
               <a:spcAft>
-                <a:spcPts val="142"/>
-              </a:spcAft>
-            </a:pPr>
-            <a:r>
-              <a:rPr sz="850" b="1" lang="zh-TW" dirty="0">
+                <a:spcPts val="133"/>
+              </a:spcAft>
+            </a:pPr>
+            <a:r>
+              <a:rPr sz="800" b="1" lang="zh-TW" dirty="0">
                 <a:solidFill>
                   <a:srgbClr val="000000"/>
                 </a:solidFill>
@@ -984,7 +984,7 @@
               <a:t>▍這一張要做什麼</a:t>
             </a:r>
             <a:r>
-              <a:rPr sz="850" lang="zh-TW" dirty="0">
+              <a:rPr sz="800" lang="zh-TW" dirty="0">
                 <a:solidFill>
                   <a:srgbClr val="000000"/>
                 </a:solidFill>
@@ -1002,11 +1002,11 @@
                 <a:spcPts val="0"/>
               </a:spcBef>
               <a:spcAft>
-                <a:spcPts val="142"/>
-              </a:spcAft>
-            </a:pPr>
-            <a:r>
-              <a:rPr sz="850" lang="zh-TW" dirty="0">
+                <a:spcPts val="133"/>
+              </a:spcAft>
+            </a:pPr>
+            <a:r>
+              <a:rPr sz="800" lang="zh-TW" dirty="0">
                 <a:solidFill>
                   <a:srgbClr val="000000"/>
                 </a:solidFill>
@@ -1024,11 +1024,11 @@
                 <a:spcPts val="0"/>
               </a:spcBef>
               <a:spcAft>
-                <a:spcPts val="142"/>
-              </a:spcAft>
-            </a:pPr>
-            <a:r>
-              <a:rPr sz="850" b="1" lang="zh-TW" dirty="0">
+                <a:spcPts val="133"/>
+              </a:spcAft>
+            </a:pPr>
+            <a:r>
+              <a:rPr sz="800" b="1" lang="zh-TW" dirty="0">
                 <a:solidFill>
                   <a:srgbClr val="000000"/>
                 </a:solidFill>
@@ -1039,7 +1039,7 @@
               <a:t>▍畫面上圈這裡</a:t>
             </a:r>
             <a:r>
-              <a:rPr sz="850" lang="zh-TW" dirty="0">
+              <a:rPr sz="800" lang="zh-TW" dirty="0">
                 <a:solidFill>
                   <a:srgbClr val="000000"/>
                 </a:solidFill>
@@ -1057,19 +1057,19 @@
                 <a:spcPts val="0"/>
               </a:spcBef>
               <a:spcAft>
-                <a:spcPts val="142"/>
-              </a:spcAft>
-            </a:pPr>
-            <a:r>
-              <a:rPr sz="850" lang="zh-TW" dirty="0">
-                <a:solidFill>
-                  <a:srgbClr val="000000"/>
-                </a:solidFill>
-                <a:latin typeface="Arial Unicode MS"/>
-                <a:ea typeface="Arial Unicode MS"/>
-                <a:cs typeface="Arial Unicode MS"/>
-              </a:rPr>
-              <a:t>一列一列圈。第一列特別停一下，問他們「下雨的晚上，路面是什麼？」第三列圈「反光背心」，把上一節那個例子收回來。
+                <a:spcPts val="133"/>
+              </a:spcAft>
+            </a:pPr>
+            <a:r>
+              <a:rPr sz="800" lang="zh-TW" dirty="0">
+                <a:solidFill>
+                  <a:srgbClr val="000000"/>
+                </a:solidFill>
+                <a:latin typeface="Arial Unicode MS"/>
+                <a:ea typeface="Arial Unicode MS"/>
+                <a:cs typeface="Arial Unicode MS"/>
+              </a:rPr>
+              <a:t>一列一列圈。第一列特別停一下，問他們「下雨的晚上，路面是什麼？」第三列圈「反光背心」，把上一節那個例子收回來。最後四層要在白板上編號一到四，學生要數得出來。
 </a:t>
             </a:r>
           </a:p>
@@ -1079,11 +1079,11 @@
                 <a:spcPts val="0"/>
               </a:spcBef>
               <a:spcAft>
-                <a:spcPts val="142"/>
-              </a:spcAft>
-            </a:pPr>
-            <a:r>
-              <a:rPr sz="850" b="1" lang="zh-TW" dirty="0">
+                <a:spcPts val="133"/>
+              </a:spcAft>
+            </a:pPr>
+            <a:r>
+              <a:rPr sz="800" b="1" lang="zh-TW" dirty="0">
                 <a:solidFill>
                   <a:srgbClr val="000000"/>
                 </a:solidFill>
@@ -1094,7 +1094,7 @@
               <a:t>▍以下照著唸</a:t>
             </a:r>
             <a:r>
-              <a:rPr sz="850" lang="zh-TW" dirty="0">
+              <a:rPr sz="800" lang="zh-TW" dirty="0">
                 <a:solidFill>
                   <a:srgbClr val="000000"/>
                 </a:solidFill>
@@ -1112,11 +1112,11 @@
                 <a:spcPts val="0"/>
               </a:spcBef>
               <a:spcAft>
-                <a:spcPts val="142"/>
-              </a:spcAft>
-            </a:pPr>
-            <a:r>
-              <a:rPr sz="850" lang="zh-TW" dirty="0">
+                <a:spcPts val="133"/>
+              </a:spcAft>
+            </a:pPr>
+            <a:r>
+              <a:rPr sz="800" lang="zh-TW" dirty="0">
                 <a:solidFill>
                   <a:srgbClr val="000000"/>
                 </a:solidFill>
@@ -1127,7 +1127,7 @@
               <a:t>剛剛那一行「最多兩次回波」，我說是為了雨和灰塵。其實它最常救的，是另一種東西——</a:t>
             </a:r>
             <a:r>
-              <a:rPr sz="850" b="1" lang="zh-TW" dirty="0">
+              <a:rPr sz="800" b="1" lang="zh-TW" dirty="0">
                 <a:solidFill>
                   <a:srgbClr val="000000"/>
                 </a:solidFill>
@@ -1138,7 +1138,7 @@
               <a:t>鏡面</a:t>
             </a:r>
             <a:r>
-              <a:rPr sz="850" lang="zh-TW" dirty="0">
+              <a:rPr sz="800" lang="zh-TW" dirty="0">
                 <a:solidFill>
                   <a:srgbClr val="000000"/>
                 </a:solidFill>
@@ -1156,11 +1156,11 @@
                 <a:spcPts val="0"/>
               </a:spcBef>
               <a:spcAft>
-                <a:spcPts val="142"/>
-              </a:spcAft>
-            </a:pPr>
-            <a:r>
-              <a:rPr sz="850" lang="zh-TW" dirty="0">
+                <a:spcPts val="133"/>
+              </a:spcAft>
+            </a:pPr>
+            <a:r>
+              <a:rPr sz="800" lang="zh-TW" dirty="0">
                 <a:solidFill>
                   <a:srgbClr val="000000"/>
                 </a:solidFill>
@@ -1171,7 +1171,7 @@
               <a:t>光達的前提很簡單：打出去的光，會從對面散一點回來。上一節我們講反射率，80% 和 10% 都是在講「散回來多少」。可是鏡面不散，它把</a:t>
             </a:r>
             <a:r>
-              <a:rPr sz="850" b="1" lang="zh-TW" dirty="0">
+              <a:rPr sz="800" b="1" lang="zh-TW" dirty="0">
                 <a:solidFill>
                   <a:srgbClr val="000000"/>
                 </a:solidFill>
@@ -1182,7 +1182,7 @@
               <a:t>整束光反射到別的地方去</a:t>
             </a:r>
             <a:r>
-              <a:rPr sz="850" lang="zh-TW" dirty="0">
+              <a:rPr sz="800" lang="zh-TW" dirty="0">
                 <a:solidFill>
                   <a:srgbClr val="000000"/>
                 </a:solidFill>
@@ -1200,11 +1200,11 @@
                 <a:spcPts val="0"/>
               </a:spcBef>
               <a:spcAft>
-                <a:spcPts val="142"/>
-              </a:spcAft>
-            </a:pPr>
-            <a:r>
-              <a:rPr sz="850" lang="zh-TW" dirty="0">
+                <a:spcPts val="133"/>
+              </a:spcAft>
+            </a:pPr>
+            <a:r>
+              <a:rPr sz="800" lang="zh-TW" dirty="0">
                 <a:solidFill>
                   <a:srgbClr val="000000"/>
                 </a:solidFill>
@@ -1215,7 +1215,7 @@
               <a:t>所以第一種狀況是：</a:t>
             </a:r>
             <a:r>
-              <a:rPr sz="850" b="1" lang="zh-TW" dirty="0">
+              <a:rPr sz="800" b="1" lang="zh-TW" dirty="0">
                 <a:solidFill>
                   <a:srgbClr val="000000"/>
                 </a:solidFill>
@@ -1226,15 +1226,37 @@
               <a:t>什麼都收不到。</a:t>
             </a:r>
             <a:r>
-              <a:rPr sz="850" lang="zh-TW" dirty="0">
-                <a:solidFill>
-                  <a:srgbClr val="000000"/>
-                </a:solidFill>
-                <a:latin typeface="Arial Unicode MS"/>
-                <a:ea typeface="Arial Unicode MS"/>
-                <a:cs typeface="Arial Unicode MS"/>
-              </a:rPr>
-              <a:t>雷射斜斜打到玻璃帷幕、打到鍍鉻的保險桿，整束彈走，那一塊在點雲上就是一個洞。
+              <a:rPr sz="800" lang="zh-TW" dirty="0">
+                <a:solidFill>
+                  <a:srgbClr val="000000"/>
+                </a:solidFill>
+                <a:latin typeface="Arial Unicode MS"/>
+                <a:ea typeface="Arial Unicode MS"/>
+                <a:cs typeface="Arial Unicode MS"/>
+              </a:rPr>
+              <a:t>雷射斜斜打到玻璃帷幕、打到鍍鉻的保險桿，整束彈走，那一塊在點雲上就是一個洞。</a:t>
+            </a:r>
+            <a:r>
+              <a:rPr sz="800" b="1" lang="zh-TW" dirty="0">
+                <a:solidFill>
+                  <a:srgbClr val="000000"/>
+                </a:solidFill>
+                <a:latin typeface="Arial Unicode MS"/>
+                <a:ea typeface="Arial Unicode MS"/>
+                <a:cs typeface="Arial Unicode MS"/>
+              </a:rPr>
+              <a:t>對車子來說，洞就等於「那裡是空的」。</a:t>
+            </a:r>
+            <a:r>
+              <a:rPr sz="800" lang="zh-TW" dirty="0">
+                <a:solidFill>
+                  <a:srgbClr val="000000"/>
+                </a:solidFill>
+                <a:latin typeface="Arial Unicode MS"/>
+                <a:ea typeface="Arial Unicode MS"/>
+                <a:cs typeface="Arial Unicode MS"/>
+              </a:rPr>
+              <a:t>規劃路徑的時候，它可能把那一塊當成可以走的空間。
 </a:t>
             </a:r>
           </a:p>
@@ -1244,11 +1266,11 @@
                 <a:spcPts val="0"/>
               </a:spcBef>
               <a:spcAft>
-                <a:spcPts val="142"/>
-              </a:spcAft>
-            </a:pPr>
-            <a:r>
-              <a:rPr sz="850" lang="zh-TW" dirty="0">
+                <a:spcPts val="133"/>
+              </a:spcAft>
+            </a:pPr>
+            <a:r>
+              <a:rPr sz="800" lang="zh-TW" dirty="0">
                 <a:solidFill>
                   <a:srgbClr val="000000"/>
                 </a:solidFill>
@@ -1259,7 +1281,7 @@
               <a:t>這裡我要各位特別想一件事：</a:t>
             </a:r>
             <a:r>
-              <a:rPr sz="850" b="1" lang="zh-TW" dirty="0">
+              <a:rPr sz="800" b="1" lang="zh-TW" dirty="0">
                 <a:solidFill>
                   <a:srgbClr val="000000"/>
                 </a:solidFill>
@@ -1270,15 +1292,37 @@
               <a:t>下雨的晚上，路面是什麼？</a:t>
             </a:r>
             <a:r>
-              <a:rPr sz="850" lang="zh-TW" dirty="0">
-                <a:solidFill>
-                  <a:srgbClr val="000000"/>
-                </a:solidFill>
-                <a:latin typeface="Arial Unicode MS"/>
-                <a:ea typeface="Arial Unicode MS"/>
-                <a:cs typeface="Arial Unicode MS"/>
-              </a:rPr>
-              <a:t>水膜會把粗糙的柏油變成一面鏡子。所以雨夜的路面在點雲上常常是破的，連車道邊界都量不到。這不是感測器壞了，是物理。
+              <a:rPr sz="800" lang="zh-TW" dirty="0">
+                <a:solidFill>
+                  <a:srgbClr val="000000"/>
+                </a:solidFill>
+                <a:latin typeface="Arial Unicode MS"/>
+                <a:ea typeface="Arial Unicode MS"/>
+                <a:cs typeface="Arial Unicode MS"/>
+              </a:rPr>
+              <a:t>水膜會把粗糙的柏油變成一面鏡子。所以雨夜的路面在點雲上常常是破的，連車道邊界都量不到。這不是感測器壞了，是物理。</a:t>
+            </a:r>
+            <a:r>
+              <a:rPr sz="800" b="1" lang="zh-TW" dirty="0">
+                <a:solidFill>
+                  <a:srgbClr val="000000"/>
+                </a:solidFill>
+                <a:latin typeface="Arial Unicode MS"/>
+                <a:ea typeface="Arial Unicode MS"/>
+                <a:cs typeface="Arial Unicode MS"/>
+              </a:rPr>
+              <a:t>車道邊界量不到，循跡就只能完全靠相機</a:t>
+            </a:r>
+            <a:r>
+              <a:rPr sz="800" lang="zh-TW" dirty="0">
+                <a:solidFill>
+                  <a:srgbClr val="000000"/>
+                </a:solidFill>
+                <a:latin typeface="Arial Unicode MS"/>
+                <a:ea typeface="Arial Unicode MS"/>
+                <a:cs typeface="Arial Unicode MS"/>
+              </a:rPr>
+              <a:t>——可是雨夜正好也是相機最弱的時候。
 </a:t>
             </a:r>
           </a:p>
@@ -1288,11 +1332,11 @@
                 <a:spcPts val="0"/>
               </a:spcBef>
               <a:spcAft>
-                <a:spcPts val="142"/>
-              </a:spcAft>
-            </a:pPr>
-            <a:r>
-              <a:rPr sz="850" lang="zh-TW" dirty="0">
+                <a:spcPts val="133"/>
+              </a:spcAft>
+            </a:pPr>
+            <a:r>
+              <a:rPr sz="800" lang="zh-TW" dirty="0">
                 <a:solidFill>
                   <a:srgbClr val="000000"/>
                 </a:solidFill>
@@ -1303,7 +1347,7 @@
               <a:t>第二種更麻煩：光束打到鏡面，</a:t>
             </a:r>
             <a:r>
-              <a:rPr sz="850" b="1" lang="zh-TW" dirty="0">
+              <a:rPr sz="800" b="1" lang="zh-TW" dirty="0">
                 <a:solidFill>
                   <a:srgbClr val="000000"/>
                 </a:solidFill>
@@ -1314,7 +1358,7 @@
               <a:t>彈到旁邊的真東西，再原路回來</a:t>
             </a:r>
             <a:r>
-              <a:rPr sz="850" lang="zh-TW" dirty="0">
+              <a:rPr sz="800" lang="zh-TW" dirty="0">
                 <a:solidFill>
                   <a:srgbClr val="000000"/>
                 </a:solidFill>
@@ -1325,7 +1369,7 @@
               <a:t>。光達只知道來回飛了多久，於是把那個東西標在鏡子後面。玻璃帷幕大樓旁邊，點雲上會憑空長出一整排不存在的車。這個叫</a:t>
             </a:r>
             <a:r>
-              <a:rPr sz="850" b="1" lang="zh-TW" dirty="0">
+              <a:rPr sz="800" b="1" lang="zh-TW" dirty="0">
                 <a:solidFill>
                   <a:srgbClr val="000000"/>
                 </a:solidFill>
@@ -1336,7 +1380,7 @@
               <a:t>鬼點</a:t>
             </a:r>
             <a:r>
-              <a:rPr sz="850" lang="zh-TW" dirty="0">
+              <a:rPr sz="800" lang="zh-TW" dirty="0">
                 <a:solidFill>
                   <a:srgbClr val="000000"/>
                 </a:solidFill>
@@ -1354,11 +1398,11 @@
                 <a:spcPts val="0"/>
               </a:spcBef>
               <a:spcAft>
-                <a:spcPts val="142"/>
-              </a:spcAft>
-            </a:pPr>
-            <a:r>
-              <a:rPr sz="850" lang="zh-TW" dirty="0">
+                <a:spcPts val="133"/>
+              </a:spcAft>
+            </a:pPr>
+            <a:r>
+              <a:rPr sz="800" lang="zh-TW" dirty="0">
                 <a:solidFill>
                   <a:srgbClr val="000000"/>
                 </a:solidFill>
@@ -1369,7 +1413,7 @@
               <a:t>第三種各位上一節聽過：</a:t>
             </a:r>
             <a:r>
-              <a:rPr sz="850" b="1" lang="zh-TW" dirty="0">
+              <a:rPr sz="800" b="1" lang="zh-TW" dirty="0">
                 <a:solidFill>
                   <a:srgbClr val="000000"/>
                 </a:solidFill>
@@ -1380,15 +1424,37 @@
               <a:t>回歸反射</a:t>
             </a:r>
             <a:r>
-              <a:rPr sz="850" lang="zh-TW" dirty="0">
-                <a:solidFill>
-                  <a:srgbClr val="000000"/>
-                </a:solidFill>
-                <a:latin typeface="Arial Unicode MS"/>
-                <a:ea typeface="Arial Unicode MS"/>
-                <a:cs typeface="Arial Unicode MS"/>
-              </a:rPr>
-              <a:t>。反光背心和路牌會把光原路送回來，亮到爆表，在點雲上糊成一團光暈。所以上一節我才把反光背心從 80% 那一格拿掉——它根本不是同一類。
+              <a:rPr sz="800" lang="zh-TW" dirty="0">
+                <a:solidFill>
+                  <a:srgbClr val="000000"/>
+                </a:solidFill>
+                <a:latin typeface="Arial Unicode MS"/>
+                <a:ea typeface="Arial Unicode MS"/>
+                <a:cs typeface="Arial Unicode MS"/>
+              </a:rPr>
+              <a:t>。反光背心和路牌會把光原路送回來，亮到爆表，在點雲上糊成一團光暈。</a:t>
+            </a:r>
+            <a:r>
+              <a:rPr sz="800" b="1" lang="zh-TW" dirty="0">
+                <a:solidFill>
+                  <a:srgbClr val="000000"/>
+                </a:solidFill>
+                <a:latin typeface="Arial Unicode MS"/>
+                <a:ea typeface="Arial Unicode MS"/>
+                <a:cs typeface="Arial Unicode MS"/>
+              </a:rPr>
+              <a:t>對車子來說，那是一個形狀不明的東西</a:t>
+            </a:r>
+            <a:r>
+              <a:rPr sz="800" lang="zh-TW" dirty="0">
+                <a:solidFill>
+                  <a:srgbClr val="000000"/>
+                </a:solidFill>
+                <a:latin typeface="Arial Unicode MS"/>
+                <a:ea typeface="Arial Unicode MS"/>
+                <a:cs typeface="Arial Unicode MS"/>
+              </a:rPr>
+              <a:t>——一個穿反光背心的交管人員，可能糊成一塊分不出是什麼的亮斑，演算法認不出那是人。所以上一節我才把反光背心從 80% 那一格拿掉——它根本不是同一類。
 </a:t>
             </a:r>
           </a:p>
@@ -1398,11 +1464,11 @@
                 <a:spcPts val="0"/>
               </a:spcBef>
               <a:spcAft>
-                <a:spcPts val="142"/>
-              </a:spcAft>
-            </a:pPr>
-            <a:r>
-              <a:rPr sz="850" lang="zh-TW" dirty="0">
+                <a:spcPts val="133"/>
+              </a:spcAft>
+            </a:pPr>
+            <a:r>
+              <a:rPr sz="800" lang="zh-TW" dirty="0">
                 <a:solidFill>
                   <a:srgbClr val="000000"/>
                 </a:solidFill>
@@ -1413,7 +1479,7 @@
               <a:t>那怎麼辦？請看最右邊那一欄。</a:t>
             </a:r>
             <a:r>
-              <a:rPr sz="850" b="1" lang="zh-TW" dirty="0">
+              <a:rPr sz="800" b="1" lang="zh-TW" dirty="0">
                 <a:solidFill>
                   <a:srgbClr val="000000"/>
                 </a:solidFill>
@@ -1424,37 +1490,15 @@
               <a:t>沒有一招擋得住全部</a:t>
             </a:r>
             <a:r>
-              <a:rPr sz="850" lang="zh-TW" dirty="0">
-                <a:solidFill>
-                  <a:srgbClr val="000000"/>
-                </a:solidFill>
-                <a:latin typeface="Arial Unicode MS"/>
-                <a:ea typeface="Arial Unicode MS"/>
-                <a:cs typeface="Arial Unicode MS"/>
-              </a:rPr>
-              <a:t>，現在是四層疊起來：多次回波把玻璃和玻璃後面的東西都收回來；看反射強度，太弱和太強都是警訊；高精地圖把已知的玻璃帷幕路段標成風險區；最後也是最重要的——</a:t>
-            </a:r>
-            <a:r>
-              <a:rPr sz="850" b="1" lang="zh-TW" dirty="0">
-                <a:solidFill>
-                  <a:srgbClr val="000000"/>
-                </a:solidFill>
-                <a:latin typeface="Arial Unicode MS"/>
-                <a:ea typeface="Arial Unicode MS"/>
-                <a:cs typeface="Arial Unicode MS"/>
-              </a:rPr>
-              <a:t>雷達</a:t>
-            </a:r>
-            <a:r>
-              <a:rPr sz="850" lang="zh-TW" dirty="0">
-                <a:solidFill>
-                  <a:srgbClr val="000000"/>
-                </a:solidFill>
-                <a:latin typeface="Arial Unicode MS"/>
-                <a:ea typeface="Arial Unicode MS"/>
-                <a:cs typeface="Arial Unicode MS"/>
-              </a:rPr>
-              <a:t>。毫米波碰到鏡面的行為跟雷射完全不一樣。
+              <a:rPr sz="800" lang="zh-TW" dirty="0">
+                <a:solidFill>
+                  <a:srgbClr val="000000"/>
+                </a:solidFill>
+                <a:latin typeface="Arial Unicode MS"/>
+                <a:ea typeface="Arial Unicode MS"/>
+                <a:cs typeface="Arial Unicode MS"/>
+              </a:rPr>
+              <a:t>，現在是四層疊起來。我一層一層講，各位數一下。
 </a:t>
             </a:r>
           </a:p>
@@ -1464,11 +1508,143 @@
                 <a:spcPts val="0"/>
               </a:spcBef>
               <a:spcAft>
-                <a:spcPts val="142"/>
-              </a:spcAft>
-            </a:pPr>
-            <a:r>
-              <a:rPr sz="850" lang="zh-TW" dirty="0">
+                <a:spcPts val="133"/>
+              </a:spcAft>
+            </a:pPr>
+            <a:r>
+              <a:rPr sz="800" b="1" lang="zh-TW" dirty="0">
+                <a:solidFill>
+                  <a:srgbClr val="000000"/>
+                </a:solidFill>
+                <a:latin typeface="Arial Unicode MS"/>
+                <a:ea typeface="Arial Unicode MS"/>
+                <a:cs typeface="Arial Unicode MS"/>
+              </a:rPr>
+              <a:t>第一層，多次回波。</a:t>
+            </a:r>
+            <a:r>
+              <a:rPr sz="800" lang="zh-TW" dirty="0">
+                <a:solidFill>
+                  <a:srgbClr val="000000"/>
+                </a:solidFill>
+                <a:latin typeface="Arial Unicode MS"/>
+                <a:ea typeface="Arial Unicode MS"/>
+                <a:cs typeface="Arial Unicode MS"/>
+              </a:rPr>
+              <a:t>玻璃本身和玻璃後面的東西都收回來，兩個都留著，後面再決定要信哪一個。
+</a:t>
+            </a:r>
+          </a:p>
+          <a:p>
+            <a:pPr algn="l">
+              <a:spcBef>
+                <a:spcPts val="0"/>
+              </a:spcBef>
+              <a:spcAft>
+                <a:spcPts val="133"/>
+              </a:spcAft>
+            </a:pPr>
+            <a:r>
+              <a:rPr sz="800" b="1" lang="zh-TW" dirty="0">
+                <a:solidFill>
+                  <a:srgbClr val="000000"/>
+                </a:solidFill>
+                <a:latin typeface="Arial Unicode MS"/>
+                <a:ea typeface="Arial Unicode MS"/>
+                <a:cs typeface="Arial Unicode MS"/>
+              </a:rPr>
+              <a:t>第二層，看反射強度。</a:t>
+            </a:r>
+            <a:r>
+              <a:rPr sz="800" lang="zh-TW" dirty="0">
+                <a:solidFill>
+                  <a:srgbClr val="000000"/>
+                </a:solidFill>
+                <a:latin typeface="Arial Unicode MS"/>
+                <a:ea typeface="Arial Unicode MS"/>
+                <a:cs typeface="Arial Unicode MS"/>
+              </a:rPr>
+              <a:t>太弱和太強都是警訊——太弱可能是光被鏡面彈走了，太強可能是回歸反射。
+</a:t>
+            </a:r>
+          </a:p>
+          <a:p>
+            <a:pPr algn="l">
+              <a:spcBef>
+                <a:spcPts val="0"/>
+              </a:spcBef>
+              <a:spcAft>
+                <a:spcPts val="133"/>
+              </a:spcAft>
+            </a:pPr>
+            <a:r>
+              <a:rPr sz="800" b="1" lang="zh-TW" dirty="0">
+                <a:solidFill>
+                  <a:srgbClr val="000000"/>
+                </a:solidFill>
+                <a:latin typeface="Arial Unicode MS"/>
+                <a:ea typeface="Arial Unicode MS"/>
+                <a:cs typeface="Arial Unicode MS"/>
+              </a:rPr>
+              <a:t>第三層，高精地圖。</a:t>
+            </a:r>
+            <a:r>
+              <a:rPr sz="800" lang="zh-TW" dirty="0">
+                <a:solidFill>
+                  <a:srgbClr val="000000"/>
+                </a:solidFill>
+                <a:latin typeface="Arial Unicode MS"/>
+                <a:ea typeface="Arial Unicode MS"/>
+                <a:cs typeface="Arial Unicode MS"/>
+              </a:rPr>
+              <a:t>哪一段路有玻璃帷幕大樓、哪個路口容易積水，事先標成風險區，開到那裡就把光達的權重調低。
+</a:t>
+            </a:r>
+          </a:p>
+          <a:p>
+            <a:pPr algn="l">
+              <a:spcBef>
+                <a:spcPts val="0"/>
+              </a:spcBef>
+              <a:spcAft>
+                <a:spcPts val="133"/>
+              </a:spcAft>
+            </a:pPr>
+            <a:r>
+              <a:rPr sz="800" b="1" lang="zh-TW" dirty="0">
+                <a:solidFill>
+                  <a:srgbClr val="000000"/>
+                </a:solidFill>
+                <a:latin typeface="Arial Unicode MS"/>
+                <a:ea typeface="Arial Unicode MS"/>
+                <a:cs typeface="Arial Unicode MS"/>
+              </a:rPr>
+              <a:t>第四層，也是最重要的——雷達。</a:t>
+            </a:r>
+            <a:r>
+              <a:rPr sz="800" lang="zh-TW" dirty="0">
+                <a:solidFill>
+                  <a:srgbClr val="000000"/>
+                </a:solidFill>
+                <a:latin typeface="Arial Unicode MS"/>
+                <a:ea typeface="Arial Unicode MS"/>
+                <a:cs typeface="Arial Unicode MS"/>
+              </a:rPr>
+              <a:t>毫米波碰到鏡面的行為跟雷射完全不一樣，光達看不到的那一塊，雷達常常還看得到。
+</a:t>
+            </a:r>
+          </a:p>
+          <a:p>
+            <a:pPr algn="l">
+              <a:spcBef>
+                <a:spcPts val="0"/>
+              </a:spcBef>
+              <a:spcAft>
+                <a:spcPts val="133"/>
+              </a:spcAft>
+            </a:pPr>
+            <a:r>
+              <a:rPr sz="800" lang="zh-TW" dirty="0">
                 <a:solidFill>
                   <a:srgbClr val="000000"/>
                 </a:solidFill>
@@ -1479,7 +1655,7 @@
               <a:t>所以這張的結論，其實就是下一段要講的事：</a:t>
             </a:r>
             <a:r>
-              <a:rPr sz="850" b="1" lang="zh-TW" dirty="0">
+              <a:rPr sz="800" b="1" lang="zh-TW" dirty="0">
                 <a:solidFill>
                   <a:srgbClr val="000000"/>
                 </a:solidFill>

--- a/第五週(10-08)/第五週_第2節_簡報.pptx
+++ b/第五週(10-08)/第五週_第2節_簡報.pptx
@@ -1498,7 +1498,29 @@
                 <a:ea typeface="Arial Unicode MS"/>
                 <a:cs typeface="Arial Unicode MS"/>
               </a:rPr>
-              <a:t>，現在是四層疊起來。我一層一層講，各位數一下。
+              <a:t>——而且要注意，</a:t>
+            </a:r>
+            <a:r>
+              <a:rPr sz="800" b="1" lang="zh-TW" dirty="0">
+                <a:solidFill>
+                  <a:srgbClr val="000000"/>
+                </a:solidFill>
+                <a:latin typeface="Arial Unicode MS"/>
+                <a:ea typeface="Arial Unicode MS"/>
+                <a:cs typeface="Arial Unicode MS"/>
+              </a:rPr>
+              <a:t>每一招能救的是不同的那一種</a:t>
+            </a:r>
+            <a:r>
+              <a:rPr sz="800" lang="zh-TW" dirty="0">
+                <a:solidFill>
+                  <a:srgbClr val="000000"/>
+                </a:solidFill>
+                <a:latin typeface="Arial Unicode MS"/>
+                <a:ea typeface="Arial Unicode MS"/>
+                <a:cs typeface="Arial Unicode MS"/>
+              </a:rPr>
+              <a:t>。現在是四層疊起來，我一層一層講，各位數一下，順便對照表上同一列。
 </a:t>
             </a:r>
           </a:p>
@@ -1531,7 +1553,51 @@
                 <a:ea typeface="Arial Unicode MS"/>
                 <a:cs typeface="Arial Unicode MS"/>
               </a:rPr>
-              <a:t>玻璃本身和玻璃後面的東西都收回來，兩個都留著，後面再決定要信哪一個。
+              <a:t>它救的是</a:t>
+            </a:r>
+            <a:r>
+              <a:rPr sz="800" b="1" lang="zh-TW" dirty="0">
+                <a:solidFill>
+                  <a:srgbClr val="000000"/>
+                </a:solidFill>
+                <a:latin typeface="Arial Unicode MS"/>
+                <a:ea typeface="Arial Unicode MS"/>
+                <a:cs typeface="Arial Unicode MS"/>
+              </a:rPr>
+              <a:t>第二種，鬼點</a:t>
+            </a:r>
+            <a:r>
+              <a:rPr sz="800" lang="zh-TW" dirty="0">
+                <a:solidFill>
+                  <a:srgbClr val="000000"/>
+                </a:solidFill>
+                <a:latin typeface="Arial Unicode MS"/>
+                <a:ea typeface="Arial Unicode MS"/>
+                <a:cs typeface="Arial Unicode MS"/>
+              </a:rPr>
+              <a:t>。玻璃本身會回來一點點，被彈到旁邊再回來的是另一個，兩個都收下來；再比對前後幾張，不會穩定移動的那個就是鬼點。這裡要講清楚：</a:t>
+            </a:r>
+            <a:r>
+              <a:rPr sz="800" b="1" lang="zh-TW" dirty="0">
+                <a:solidFill>
+                  <a:srgbClr val="000000"/>
+                </a:solidFill>
+                <a:latin typeface="Arial Unicode MS"/>
+                <a:ea typeface="Arial Unicode MS"/>
+                <a:cs typeface="Arial Unicode MS"/>
+              </a:rPr>
+              <a:t>多次回波對第一種沒有用</a:t>
+            </a:r>
+            <a:r>
+              <a:rPr sz="800" lang="zh-TW" dirty="0">
+                <a:solidFill>
+                  <a:srgbClr val="000000"/>
+                </a:solidFill>
+                <a:latin typeface="Arial Unicode MS"/>
+                <a:ea typeface="Arial Unicode MS"/>
+                <a:cs typeface="Arial Unicode MS"/>
+              </a:rPr>
+              <a:t>——那一種根本沒有光回來，要收什麼？
 </a:t>
             </a:r>
           </a:p>
@@ -1564,7 +1630,29 @@
                 <a:ea typeface="Arial Unicode MS"/>
                 <a:cs typeface="Arial Unicode MS"/>
               </a:rPr>
-              <a:t>太弱和太強都是警訊——太弱可能是光被鏡面彈走了，太強可能是回歸反射。
+              <a:t>它救的是</a:t>
+            </a:r>
+            <a:r>
+              <a:rPr sz="800" b="1" lang="zh-TW" dirty="0">
+                <a:solidFill>
+                  <a:srgbClr val="000000"/>
+                </a:solidFill>
+                <a:latin typeface="Arial Unicode MS"/>
+                <a:ea typeface="Arial Unicode MS"/>
+                <a:cs typeface="Arial Unicode MS"/>
+              </a:rPr>
+              <a:t>第三種，回歸反射</a:t>
+            </a:r>
+            <a:r>
+              <a:rPr sz="800" lang="zh-TW" dirty="0">
+                <a:solidFill>
+                  <a:srgbClr val="000000"/>
+                </a:solidFill>
+                <a:latin typeface="Arial Unicode MS"/>
+                <a:ea typeface="Arial Unicode MS"/>
+                <a:cs typeface="Arial Unicode MS"/>
+              </a:rPr>
+              <a:t>。反光背心那種亮到爆表的，用強度一看就知道和漫反射不是同一類。順帶一提，強度異常地弱也是警訊。
 </a:t>
             </a:r>
           </a:p>
@@ -1597,7 +1685,29 @@
                 <a:ea typeface="Arial Unicode MS"/>
                 <a:cs typeface="Arial Unicode MS"/>
               </a:rPr>
-              <a:t>哪一段路有玻璃帷幕大樓、哪個路口容易積水，事先標成風險區，開到那裡就把光達的權重調低。
+              <a:t>哪一段路有玻璃帷幕大樓、哪個路口容易積水，事先標成風險區，開到那裡就把光達的權重調低。這一層</a:t>
+            </a:r>
+            <a:r>
+              <a:rPr sz="800" b="1" lang="zh-TW" dirty="0">
+                <a:solidFill>
+                  <a:srgbClr val="000000"/>
+                </a:solidFill>
+                <a:latin typeface="Arial Unicode MS"/>
+                <a:ea typeface="Arial Unicode MS"/>
+                <a:cs typeface="Arial Unicode MS"/>
+              </a:rPr>
+              <a:t>三種都幫得上</a:t>
+            </a:r>
+            <a:r>
+              <a:rPr sz="800" lang="zh-TW" dirty="0">
+                <a:solidFill>
+                  <a:srgbClr val="000000"/>
+                </a:solidFill>
+                <a:latin typeface="Arial Unicode MS"/>
+                <a:ea typeface="Arial Unicode MS"/>
+                <a:cs typeface="Arial Unicode MS"/>
+              </a:rPr>
+              <a:t>，因為它做的事是「事先知道這裡危險」。
 </a:t>
             </a:r>
           </a:p>
@@ -1630,7 +1740,29 @@
                 <a:ea typeface="Arial Unicode MS"/>
                 <a:cs typeface="Arial Unicode MS"/>
               </a:rPr>
-              <a:t>毫米波碰到鏡面的行為跟雷射完全不一樣，光達看不到的那一塊，雷達常常還看得到。
+              <a:t>它救的正是</a:t>
+            </a:r>
+            <a:r>
+              <a:rPr sz="800" b="1" lang="zh-TW" dirty="0">
+                <a:solidFill>
+                  <a:srgbClr val="000000"/>
+                </a:solidFill>
+                <a:latin typeface="Arial Unicode MS"/>
+                <a:ea typeface="Arial Unicode MS"/>
+                <a:cs typeface="Arial Unicode MS"/>
+              </a:rPr>
+              <a:t>第一種：什麼都收不到</a:t>
+            </a:r>
+            <a:r>
+              <a:rPr sz="800" lang="zh-TW" dirty="0">
+                <a:solidFill>
+                  <a:srgbClr val="000000"/>
+                </a:solidFill>
+                <a:latin typeface="Arial Unicode MS"/>
+                <a:ea typeface="Arial Unicode MS"/>
+                <a:cs typeface="Arial Unicode MS"/>
+              </a:rPr>
+              <a:t>。毫米波碰到鏡面的行為跟雷射完全不一樣，光達是洞的那一塊，雷達常常還看得到。
 </a:t>
             </a:r>
           </a:p>

--- a/第五週(10-08)/第五週_第2節_簡報.pptx
+++ b/第五週(10-08)/第五週_第2節_簡報.pptx
@@ -1146,6 +1146,50 @@
                 <a:ea typeface="Arial Unicode MS"/>
                 <a:cs typeface="Arial Unicode MS"/>
               </a:rPr>
+              <a:t>。光達的前提很簡單：打出去的光，會從對面</a:t>
+            </a:r>
+            <a:r>
+              <a:rPr sz="800" b="1" lang="zh-TW" dirty="0">
+                <a:solidFill>
+                  <a:srgbClr val="000000"/>
+                </a:solidFill>
+                <a:latin typeface="Arial Unicode MS"/>
+                <a:ea typeface="Arial Unicode MS"/>
+                <a:cs typeface="Arial Unicode MS"/>
+              </a:rPr>
+              <a:t>散一點</a:t>
+            </a:r>
+            <a:r>
+              <a:rPr sz="800" lang="zh-TW" dirty="0">
+                <a:solidFill>
+                  <a:srgbClr val="000000"/>
+                </a:solidFill>
+                <a:latin typeface="Arial Unicode MS"/>
+                <a:ea typeface="Arial Unicode MS"/>
+                <a:cs typeface="Arial Unicode MS"/>
+              </a:rPr>
+              <a:t>回來。上一節講的 80% 和 10%，都是在講「散回來多少」。表上這三列的共同點，就是</a:t>
+            </a:r>
+            <a:r>
+              <a:rPr sz="800" b="1" lang="zh-TW" dirty="0">
+                <a:solidFill>
+                  <a:srgbClr val="000000"/>
+                </a:solidFill>
+                <a:latin typeface="Arial Unicode MS"/>
+                <a:ea typeface="Arial Unicode MS"/>
+                <a:cs typeface="Arial Unicode MS"/>
+              </a:rPr>
+              <a:t>這個前提不成立</a:t>
+            </a:r>
+            <a:r>
+              <a:rPr sz="800" lang="zh-TW" dirty="0">
+                <a:solidFill>
+                  <a:srgbClr val="000000"/>
+                </a:solidFill>
+                <a:latin typeface="Arial Unicode MS"/>
+                <a:ea typeface="Arial Unicode MS"/>
+                <a:cs typeface="Arial Unicode MS"/>
+              </a:rPr>
               <a:t>。
 </a:t>
             </a:r>
@@ -1168,7 +1212,7 @@
                 <a:ea typeface="Arial Unicode MS"/>
                 <a:cs typeface="Arial Unicode MS"/>
               </a:rPr>
-              <a:t>光達的前提很簡單：打出去的光，會從對面散一點回來。上一節我們講反射率，80% 和 10% 都是在講「散回來多少」。可是鏡面不散，它把</a:t>
+              <a:t>但三列不是三種鏡面。</a:t>
             </a:r>
             <a:r>
               <a:rPr sz="800" b="1" lang="zh-TW" dirty="0">
@@ -1179,18 +1223,62 @@
                 <a:ea typeface="Arial Unicode MS"/>
                 <a:cs typeface="Arial Unicode MS"/>
               </a:rPr>
-              <a:t>整束光反射到別的地方去</a:t>
-            </a:r>
-            <a:r>
-              <a:rPr sz="800" lang="zh-TW" dirty="0">
-                <a:solidFill>
-                  <a:srgbClr val="000000"/>
-                </a:solidFill>
-                <a:latin typeface="Arial Unicode MS"/>
-                <a:ea typeface="Arial Unicode MS"/>
-                <a:cs typeface="Arial Unicode MS"/>
-              </a:rPr>
-              <a:t>。
+              <a:t>前兩列是同一種表面——鏡面，差在幾何</a:t>
+            </a:r>
+            <a:r>
+              <a:rPr sz="800" lang="zh-TW" dirty="0">
+                <a:solidFill>
+                  <a:srgbClr val="000000"/>
+                </a:solidFill>
+                <a:latin typeface="Arial Unicode MS"/>
+                <a:ea typeface="Arial Unicode MS"/>
+                <a:cs typeface="Arial Unicode MS"/>
+              </a:rPr>
+              <a:t>：彈出去的方向什麼都沒有就什麼都收不到，那個方向剛好有東西就收到一個鬼點。</a:t>
+            </a:r>
+            <a:r>
+              <a:rPr sz="800" b="1" lang="zh-TW" dirty="0">
+                <a:solidFill>
+                  <a:srgbClr val="000000"/>
+                </a:solidFill>
+                <a:latin typeface="Arial Unicode MS"/>
+                <a:ea typeface="Arial Unicode MS"/>
+                <a:cs typeface="Arial Unicode MS"/>
+              </a:rPr>
+              <a:t>第三列根本不是鏡面</a:t>
+            </a:r>
+            <a:r>
+              <a:rPr sz="800" lang="zh-TW" dirty="0">
+                <a:solidFill>
+                  <a:srgbClr val="000000"/>
+                </a:solidFill>
+                <a:latin typeface="Arial Unicode MS"/>
+                <a:ea typeface="Arial Unicode MS"/>
+                <a:cs typeface="Arial Unicode MS"/>
+              </a:rPr>
+              <a:t>，是</a:t>
+            </a:r>
+            <a:r>
+              <a:rPr sz="800" b="1" lang="zh-TW" dirty="0">
+                <a:solidFill>
+                  <a:srgbClr val="000000"/>
+                </a:solidFill>
+                <a:latin typeface="Arial Unicode MS"/>
+                <a:ea typeface="Arial Unicode MS"/>
+                <a:cs typeface="Arial Unicode MS"/>
+              </a:rPr>
+              <a:t>回歸反射</a:t>
+            </a:r>
+            <a:r>
+              <a:rPr sz="800" lang="zh-TW" dirty="0">
+                <a:solidFill>
+                  <a:srgbClr val="000000"/>
+                </a:solidFill>
+                <a:latin typeface="Arial Unicode MS"/>
+                <a:ea typeface="Arial Unicode MS"/>
+                <a:cs typeface="Arial Unicode MS"/>
+              </a:rPr>
+              <a:t>——鏡面守「入射角等於反射角」，回歸反射不守，不管從哪個角度打都原路送回去。
 </a:t>
             </a:r>
           </a:p>
@@ -1234,7 +1322,7 @@
                 <a:ea typeface="Arial Unicode MS"/>
                 <a:cs typeface="Arial Unicode MS"/>
               </a:rPr>
-              <a:t>雷射斜斜打到玻璃帷幕、打到鍍鉻的保險桿，整束彈走，那一塊在點雲上就是一個洞。</a:t>
+              <a:t>雷射斜斜打到玻璃帷幕、打到鍍鉻保險桿，整束彈走，那一塊在點雲上就是一個洞。</a:t>
             </a:r>
             <a:r>
               <a:rPr sz="800" b="1" lang="zh-TW" dirty="0">
@@ -1245,18 +1333,18 @@
                 <a:ea typeface="Arial Unicode MS"/>
                 <a:cs typeface="Arial Unicode MS"/>
               </a:rPr>
-              <a:t>對車子來說，洞就等於「那裡是空的」。</a:t>
-            </a:r>
-            <a:r>
-              <a:rPr sz="800" lang="zh-TW" dirty="0">
-                <a:solidFill>
-                  <a:srgbClr val="000000"/>
-                </a:solidFill>
-                <a:latin typeface="Arial Unicode MS"/>
-                <a:ea typeface="Arial Unicode MS"/>
-                <a:cs typeface="Arial Unicode MS"/>
-              </a:rPr>
-              <a:t>規劃路徑的時候，它可能把那一塊當成可以走的空間。
+              <a:t>對車子來說，洞就等於「那裡是空的」</a:t>
+            </a:r>
+            <a:r>
+              <a:rPr sz="800" lang="zh-TW" dirty="0">
+                <a:solidFill>
+                  <a:srgbClr val="000000"/>
+                </a:solidFill>
+                <a:latin typeface="Arial Unicode MS"/>
+                <a:ea typeface="Arial Unicode MS"/>
+                <a:cs typeface="Arial Unicode MS"/>
+              </a:rPr>
+              <a:t>，規劃路徑時可能把它當成可以走的空間。
 </a:t>
             </a:r>
           </a:p>
@@ -1278,7 +1366,7 @@
                 <a:ea typeface="Arial Unicode MS"/>
                 <a:cs typeface="Arial Unicode MS"/>
               </a:rPr>
-              <a:t>這裡我要各位特別想一件事：</a:t>
+              <a:t>這裡特別想一件事：</a:t>
             </a:r>
             <a:r>
               <a:rPr sz="800" b="1" lang="zh-TW" dirty="0">
@@ -1300,7 +1388,7 @@
                 <a:ea typeface="Arial Unicode MS"/>
                 <a:cs typeface="Arial Unicode MS"/>
               </a:rPr>
-              <a:t>水膜會把粗糙的柏油變成一面鏡子。所以雨夜的路面在點雲上常常是破的，連車道邊界都量不到。這不是感測器壞了，是物理。</a:t>
+              <a:t>水膜把粗糙的柏油變成一面鏡子，所以雨夜的路面在點雲上常常是破的，連車道邊界都量不到。這不是感測器壞了，是物理。</a:t>
             </a:r>
             <a:r>
               <a:rPr sz="800" b="1" lang="zh-TW" dirty="0">
@@ -1311,7 +1399,7 @@
                 <a:ea typeface="Arial Unicode MS"/>
                 <a:cs typeface="Arial Unicode MS"/>
               </a:rPr>
-              <a:t>車道邊界量不到，循跡就只能完全靠相機</a:t>
+              <a:t>邊界量不到，循跡就只能靠相機</a:t>
             </a:r>
             <a:r>
               <a:rPr sz="800" lang="zh-TW" dirty="0">
@@ -1366,7 +1454,7 @@
                 <a:ea typeface="Arial Unicode MS"/>
                 <a:cs typeface="Arial Unicode MS"/>
               </a:rPr>
-              <a:t>。光達只知道來回飛了多久，於是把那個東西標在鏡子後面。玻璃帷幕大樓旁邊，點雲上會憑空長出一整排不存在的車。這個叫</a:t>
+              <a:t>。光達只知道來回飛了多久，於是把那個東西標在鏡子後面。玻璃帷幕大樓旁邊，點雲上會憑空長出一整排不存在的車，這叫</a:t>
             </a:r>
             <a:r>
               <a:rPr sz="800" b="1" lang="zh-TW" dirty="0">
@@ -1432,7 +1520,7 @@
                 <a:ea typeface="Arial Unicode MS"/>
                 <a:cs typeface="Arial Unicode MS"/>
               </a:rPr>
-              <a:t>。反光背心和路牌會把光原路送回來，亮到爆表，在點雲上糊成一團光暈。</a:t>
+              <a:t>。反光背心和路牌把光原路送回來，亮到爆表，在點雲上糊成一團光暈。</a:t>
             </a:r>
             <a:r>
               <a:rPr sz="800" b="1" lang="zh-TW" dirty="0">
@@ -1443,18 +1531,18 @@
                 <a:ea typeface="Arial Unicode MS"/>
                 <a:cs typeface="Arial Unicode MS"/>
               </a:rPr>
-              <a:t>對車子來說，那是一個形狀不明的東西</a:t>
-            </a:r>
-            <a:r>
-              <a:rPr sz="800" lang="zh-TW" dirty="0">
-                <a:solidFill>
-                  <a:srgbClr val="000000"/>
-                </a:solidFill>
-                <a:latin typeface="Arial Unicode MS"/>
-                <a:ea typeface="Arial Unicode MS"/>
-                <a:cs typeface="Arial Unicode MS"/>
-              </a:rPr>
-              <a:t>——一個穿反光背心的交管人員，可能糊成一塊分不出是什麼的亮斑，演算法認不出那是人。所以上一節我才把反光背心從 80% 那一格拿掉——它根本不是同一類。
+              <a:t>對車子來說那是一個形狀不明的東西</a:t>
+            </a:r>
+            <a:r>
+              <a:rPr sz="800" lang="zh-TW" dirty="0">
+                <a:solidFill>
+                  <a:srgbClr val="000000"/>
+                </a:solidFill>
+                <a:latin typeface="Arial Unicode MS"/>
+                <a:ea typeface="Arial Unicode MS"/>
+                <a:cs typeface="Arial Unicode MS"/>
+              </a:rPr>
+              <a:t>——穿反光背心的交管人員可能糊成一塊亮斑，演算法認不出那是人。所以上一節我才把反光背心從 80% 那一格拿掉。
 </a:t>
             </a:r>
           </a:p>
@@ -1487,19 +1575,30 @@
                 <a:ea typeface="Arial Unicode MS"/>
                 <a:cs typeface="Arial Unicode MS"/>
               </a:rPr>
-              <a:t>沒有一招擋得住全部</a:t>
-            </a:r>
-            <a:r>
-              <a:rPr sz="800" lang="zh-TW" dirty="0">
-                <a:solidFill>
-                  <a:srgbClr val="000000"/>
-                </a:solidFill>
-                <a:latin typeface="Arial Unicode MS"/>
-                <a:ea typeface="Arial Unicode MS"/>
-                <a:cs typeface="Arial Unicode MS"/>
-              </a:rPr>
-              <a:t>——而且要注意，</a:t>
-            </a:r>
+              <a:t>沒有一招擋得住全部，而且每一招救的是不同的那一種。</a:t>
+            </a:r>
+            <a:r>
+              <a:rPr sz="800" lang="zh-TW" dirty="0">
+                <a:solidFill>
+                  <a:srgbClr val="000000"/>
+                </a:solidFill>
+                <a:latin typeface="Arial Unicode MS"/>
+                <a:ea typeface="Arial Unicode MS"/>
+                <a:cs typeface="Arial Unicode MS"/>
+              </a:rPr>
+              <a:t>四層，各位數一下，順便對照表上同一列。
+</a:t>
+            </a:r>
+          </a:p>
+          <a:p>
+            <a:pPr algn="l">
+              <a:spcBef>
+                <a:spcPts val="0"/>
+              </a:spcBef>
+              <a:spcAft>
+                <a:spcPts val="133"/>
+              </a:spcAft>
+            </a:pPr>
             <a:r>
               <a:rPr sz="800" b="1" lang="zh-TW" dirty="0">
                 <a:solidFill>
@@ -1509,30 +1608,19 @@
                 <a:ea typeface="Arial Unicode MS"/>
                 <a:cs typeface="Arial Unicode MS"/>
               </a:rPr>
-              <a:t>每一招能救的是不同的那一種</a:t>
-            </a:r>
-            <a:r>
-              <a:rPr sz="800" lang="zh-TW" dirty="0">
-                <a:solidFill>
-                  <a:srgbClr val="000000"/>
-                </a:solidFill>
-                <a:latin typeface="Arial Unicode MS"/>
-                <a:ea typeface="Arial Unicode MS"/>
-                <a:cs typeface="Arial Unicode MS"/>
-              </a:rPr>
-              <a:t>。現在是四層疊起來，我一層一層講，各位數一下，順便對照表上同一列。
-</a:t>
-            </a:r>
-          </a:p>
-          <a:p>
-            <a:pPr algn="l">
-              <a:spcBef>
-                <a:spcPts val="0"/>
-              </a:spcBef>
-              <a:spcAft>
-                <a:spcPts val="133"/>
-              </a:spcAft>
-            </a:pPr>
+              <a:t>第一層，多次回波。</a:t>
+            </a:r>
+            <a:r>
+              <a:rPr sz="800" lang="zh-TW" dirty="0">
+                <a:solidFill>
+                  <a:srgbClr val="000000"/>
+                </a:solidFill>
+                <a:latin typeface="Arial Unicode MS"/>
+                <a:ea typeface="Arial Unicode MS"/>
+                <a:cs typeface="Arial Unicode MS"/>
+              </a:rPr>
+              <a:t>救的是</a:t>
+            </a:r>
             <a:r>
               <a:rPr sz="800" b="1" lang="zh-TW" dirty="0">
                 <a:solidFill>
@@ -1542,28 +1630,6 @@
                 <a:ea typeface="Arial Unicode MS"/>
                 <a:cs typeface="Arial Unicode MS"/>
               </a:rPr>
-              <a:t>第一層，多次回波。</a:t>
-            </a:r>
-            <a:r>
-              <a:rPr sz="800" lang="zh-TW" dirty="0">
-                <a:solidFill>
-                  <a:srgbClr val="000000"/>
-                </a:solidFill>
-                <a:latin typeface="Arial Unicode MS"/>
-                <a:ea typeface="Arial Unicode MS"/>
-                <a:cs typeface="Arial Unicode MS"/>
-              </a:rPr>
-              <a:t>它救的是</a:t>
-            </a:r>
-            <a:r>
-              <a:rPr sz="800" b="1" lang="zh-TW" dirty="0">
-                <a:solidFill>
-                  <a:srgbClr val="000000"/>
-                </a:solidFill>
-                <a:latin typeface="Arial Unicode MS"/>
-                <a:ea typeface="Arial Unicode MS"/>
-                <a:cs typeface="Arial Unicode MS"/>
-              </a:rPr>
               <a:t>第二種，鬼點</a:t>
             </a:r>
             <a:r>
@@ -1575,7 +1641,7 @@
                 <a:ea typeface="Arial Unicode MS"/>
                 <a:cs typeface="Arial Unicode MS"/>
               </a:rPr>
-              <a:t>。玻璃本身會回來一點點，被彈到旁邊再回來的是另一個，兩個都收下來；再比對前後幾張，不會穩定移動的那個就是鬼點。這裡要講清楚：</a:t>
+              <a:t>：玻璃本身回來一點點，被彈到旁邊再回來的是另一個，兩個都收下來，再比對前後幾張，不會穩定移動的就是鬼點。注意，</a:t>
             </a:r>
             <a:r>
               <a:rPr sz="800" b="1" lang="zh-TW" dirty="0">
@@ -1685,7 +1751,7 @@
                 <a:ea typeface="Arial Unicode MS"/>
                 <a:cs typeface="Arial Unicode MS"/>
               </a:rPr>
-              <a:t>哪一段路有玻璃帷幕大樓、哪個路口容易積水，事先標成風險區，開到那裡就把光達的權重調低。這一層</a:t>
+              <a:t>哪裡有玻璃帷幕、哪個路口容易積水，事先標成風險區，開到那裡就把光達的權重調低。這一層</a:t>
             </a:r>
             <a:r>
               <a:rPr sz="800" b="1" lang="zh-TW" dirty="0">
@@ -1707,7 +1773,7 @@
                 <a:ea typeface="Arial Unicode MS"/>
                 <a:cs typeface="Arial Unicode MS"/>
               </a:rPr>
-              <a:t>，因為它做的事是「事先知道這裡危險」。
+              <a:t>，因為它做的是「事先知道這裡危險」。
 </a:t>
             </a:r>
           </a:p>
@@ -11154,7 +11220,7 @@
                 <a:ea typeface="Arial" pitchFamily="34" charset="-122"/>
                 <a:cs typeface="Arial" pitchFamily="34" charset="-120"/>
               </a:rPr>
-              <a:t>Mặt gương: thứ khó nhất với lidar</a:t>
+              <a:t>Mặt gương và vật phản quang: không về, về sai chỗ, hoặc quá chói</a:t>
             </a:r>
             <a:endParaRPr lang="en-US" sz="2200" dirty="0"/>
           </a:p>
@@ -11174,7 +11240,7 @@
                 <a:ea typeface="微軟正黑體" pitchFamily="34" charset="-122"/>
                 <a:cs typeface="微軟正黑體" pitchFamily="34" charset="-120"/>
               </a:rPr>
-              <a:t>鏡面：光達最難處理的一種表面</a:t>
+              <a:t>鏡面與反光材質：光回不來、回錯地方、或太亮</a:t>
             </a:r>
             <a:endParaRPr lang="en-US" sz="2200" dirty="0"/>
           </a:p>
@@ -11195,7 +11261,7 @@
           </p:nvPr>
         </p:nvGraphicFramePr>
         <p:xfrm>
-          <a:off x="502920" y="1133856"/>
+          <a:off x="502920" y="1322366"/>
           <a:ext cx="8138160" cy="914400"/>
         </p:xfrm>
         <a:graphic>
@@ -11225,7 +11291,7 @@
                           <a:ea typeface="Arial" pitchFamily="34" charset="-122"/>
                           <a:cs typeface="Arial" pitchFamily="34" charset="-120"/>
                         </a:rPr>
-                        <a:t>Gương làm gì</a:t>
+                        <a:t>Bề mặt này làm gì</a:t>
                       </a:r>
                       <a:endParaRPr lang="en-US" sz="1200" dirty="0"/>
                     </a:p>
@@ -11242,7 +11308,7 @@
                           <a:ea typeface="微軟正黑體" pitchFamily="34" charset="-122"/>
                           <a:cs typeface="微軟正黑體" pitchFamily="34" charset="-120"/>
                         </a:rPr>
-                        <a:t>鏡面做了什麼</a:t>
+                        <a:t>這個表面做了什麼</a:t>
                       </a:r>
                       <a:endParaRPr lang="en-US" sz="1200" dirty="0"/>
                     </a:p>
@@ -12172,7 +12238,7 @@
         </p:nvSpPr>
         <p:spPr>
           <a:xfrm>
-            <a:off x="502920" y="3490659"/>
+            <a:off x="502920" y="3679169"/>
             <a:ext cx="8138160" cy="457200"/>
           </a:xfrm>
           <a:prstGeom prst="rect">

--- a/第五週(10-08)/第五週_第2節_簡報.pptx
+++ b/第五週(10-08)/第五週_第2節_簡報.pptx
@@ -3610,7 +3610,7 @@
                 <a:ea typeface="Arial Unicode MS"/>
                 <a:cs typeface="Arial Unicode MS"/>
               </a:rPr>
-              <a:t>在五十公尺外，一度張開的距離是：五十乘以一度的弧度，大約</a:t>
+              <a:t>在五十公尺外，差一度會差多少？</a:t>
             </a:r>
             <a:r>
               <a:rPr sz="800" b="1" lang="zh-TW" dirty="0">
@@ -3621,18 +3621,18 @@
                 <a:ea typeface="Arial Unicode MS"/>
                 <a:cs typeface="Arial Unicode MS"/>
               </a:rPr>
-              <a:t>零點八七公尺</a:t>
-            </a:r>
-            <a:r>
-              <a:rPr sz="800" lang="zh-TW" dirty="0">
-                <a:solidFill>
-                  <a:srgbClr val="000000"/>
-                </a:solidFill>
-                <a:latin typeface="Arial Unicode MS"/>
-                <a:ea typeface="Arial Unicode MS"/>
-                <a:cs typeface="Arial Unicode MS"/>
-              </a:rPr>
-              <a:t>。
+              <a:t>五十公尺 × tan(一度) ＝ 零點八七公尺</a:t>
+            </a:r>
+            <a:r>
+              <a:rPr sz="800" lang="zh-TW" dirty="0">
+                <a:solidFill>
+                  <a:srgbClr val="000000"/>
+                </a:solidFill>
+                <a:latin typeface="Arial Unicode MS"/>
+                <a:ea typeface="Arial Unicode MS"/>
+                <a:cs typeface="Arial Unicode MS"/>
+              </a:rPr>
+              <a:t>，將近一公尺。
 </a:t>
             </a:r>
           </a:p>
@@ -3654,7 +3654,7 @@
                 <a:ea typeface="Arial Unicode MS"/>
                 <a:cs typeface="Arial Unicode MS"/>
               </a:rPr>
-              <a:t>我把這個數字寫在白板上：</a:t>
+              <a:t>這一公尺是</a:t>
             </a:r>
             <a:r>
               <a:rPr sz="800" b="1" lang="zh-TW" dirty="0">
@@ -3665,18 +3665,40 @@
                 <a:ea typeface="Arial Unicode MS"/>
                 <a:cs typeface="Arial Unicode MS"/>
               </a:rPr>
-              <a:t>差一度，五十公尺外就差了將近一公尺。</a:t>
-            </a:r>
-            <a:r>
-              <a:rPr sz="800" lang="zh-TW" dirty="0">
-                <a:solidFill>
-                  <a:srgbClr val="000000"/>
-                </a:solidFill>
-                <a:latin typeface="Arial Unicode MS"/>
-                <a:ea typeface="Arial Unicode MS"/>
-                <a:cs typeface="Arial Unicode MS"/>
-              </a:rPr>
-              <a:t>
+              <a:t>橫向的</a:t>
+            </a:r>
+            <a:r>
+              <a:rPr sz="800" lang="zh-TW" dirty="0">
+                <a:solidFill>
+                  <a:srgbClr val="000000"/>
+                </a:solidFill>
+                <a:latin typeface="Arial Unicode MS"/>
+                <a:ea typeface="Arial Unicode MS"/>
+                <a:cs typeface="Arial Unicode MS"/>
+              </a:rPr>
+              <a:t>，各位不要想成「線變斜了」。意思是：</a:t>
+            </a:r>
+            <a:r>
+              <a:rPr sz="800" b="1" lang="zh-TW" dirty="0">
+                <a:solidFill>
+                  <a:srgbClr val="000000"/>
+                </a:solidFill>
+                <a:latin typeface="Arial Unicode MS"/>
+                <a:ea typeface="Arial Unicode MS"/>
+                <a:cs typeface="Arial Unicode MS"/>
+              </a:rPr>
+              <a:t>光達說那個人在這裡，相機說他在旁邊零點八七公尺的地方。</a:t>
+            </a:r>
+            <a:r>
+              <a:rPr sz="800" lang="zh-TW" dirty="0">
+                <a:solidFill>
+                  <a:srgbClr val="000000"/>
+                </a:solidFill>
+                <a:latin typeface="Arial Unicode MS"/>
+                <a:ea typeface="Arial Unicode MS"/>
+                <a:cs typeface="Arial Unicode MS"/>
+              </a:rPr>
+              <a:t>兩隻眼睛各自都沒有看錯，錯的是車子以為它們朝同一個方向看——其實差了一度。
 </a:t>
             </a:r>
           </a:p>
@@ -14333,7 +14355,7 @@
                 <a:ea typeface="Arial" pitchFamily="34" charset="-122"/>
                 <a:cs typeface="Arial" pitchFamily="34" charset="-120"/>
               </a:rPr>
-              <a:t>Ở 50 m lệch gần 0,9 m</a:t>
+              <a:t>Ở 50 m lệch ngang gần 0,9 m</a:t>
             </a:r>
             <a:endParaRPr lang="en-US" sz="1120" dirty="0"/>
           </a:p>
@@ -14373,7 +14395,7 @@
                 <a:ea typeface="微軟正黑體" pitchFamily="34" charset="-122"/>
                 <a:cs typeface="微軟正黑體" pitchFamily="34" charset="-120"/>
               </a:rPr>
-              <a:t>50 公尺處差 0.9 公尺</a:t>
+              <a:t>50 公尺處橫向差 0.9 公尺</a:t>
             </a:r>
             <a:endParaRPr lang="en-US" sz="1120" dirty="0"/>
           </a:p>

--- a/第五週(10-08)/第五週_第2節_簡報.pptx
+++ b/第五週(10-08)/第五週_第2節_簡報.pptx
@@ -3566,7 +3566,7 @@
                 <a:ea typeface="Arial Unicode MS"/>
                 <a:cs typeface="Arial Unicode MS"/>
               </a:rPr>
-              <a:t>假設角度只差了</a:t>
+              <a:t>假設它們之間的角度差了</a:t>
             </a:r>
             <a:r>
               <a:rPr sz="800" b="1" lang="zh-TW" dirty="0">
@@ -3588,7 +3588,51 @@
                 <a:ea typeface="Arial Unicode MS"/>
                 <a:cs typeface="Arial Unicode MS"/>
               </a:rPr>
-              <a:t>。一度聽起來很小對不對？
+              <a:t>。有人會問：是相機歪了還是光達歪了？</a:t>
+            </a:r>
+            <a:r>
+              <a:rPr sz="800" b="1" lang="zh-TW" dirty="0">
+                <a:solidFill>
+                  <a:srgbClr val="000000"/>
+                </a:solidFill>
+                <a:latin typeface="Arial Unicode MS"/>
+                <a:ea typeface="Arial Unicode MS"/>
+                <a:cs typeface="Arial Unicode MS"/>
+              </a:rPr>
+              <a:t>都可以，而且不重要</a:t>
+            </a:r>
+            <a:r>
+              <a:rPr sz="800" lang="zh-TW" dirty="0">
+                <a:solidFill>
+                  <a:srgbClr val="000000"/>
+                </a:solidFill>
+                <a:latin typeface="Arial Unicode MS"/>
+                <a:ea typeface="Arial Unicode MS"/>
+                <a:cs typeface="Arial Unicode MS"/>
+              </a:rPr>
+              <a:t>——外參講的是</a:t>
+            </a:r>
+            <a:r>
+              <a:rPr sz="800" b="1" lang="zh-TW" dirty="0">
+                <a:solidFill>
+                  <a:srgbClr val="000000"/>
+                </a:solidFill>
+                <a:latin typeface="Arial Unicode MS"/>
+                <a:ea typeface="Arial Unicode MS"/>
+                <a:cs typeface="Arial Unicode MS"/>
+              </a:rPr>
+              <a:t>兩者之間的關係</a:t>
+            </a:r>
+            <a:r>
+              <a:rPr sz="800" lang="zh-TW" dirty="0">
+                <a:solidFill>
+                  <a:srgbClr val="000000"/>
+                </a:solidFill>
+                <a:latin typeface="Arial Unicode MS"/>
+                <a:ea typeface="Arial Unicode MS"/>
+                <a:cs typeface="Arial Unicode MS"/>
+              </a:rPr>
+              <a:t>，只要這個關係和車子記在檔案裡的那組數字差一度，結果都一樣。我們就拿最常見的那個情況：擋風玻璃換過一次，相機裝回去的時候差了一度。一度聽起來很小對不對？
 </a:t>
             </a:r>
           </a:p>

--- a/第五週(10-08)/第五週_第2節_簡報.pptx
+++ b/第五週(10-08)/第五週_第2節_簡報.pptx
@@ -3961,11 +3961,11 @@
                 <a:spcPts val="0"/>
               </a:spcBef>
               <a:spcAft>
-                <a:spcPts val="142"/>
-              </a:spcAft>
-            </a:pPr>
-            <a:r>
-              <a:rPr sz="850" b="1" lang="zh-TW" dirty="0">
+                <a:spcPts val="133"/>
+              </a:spcAft>
+            </a:pPr>
+            <a:r>
+              <a:rPr sz="800" b="1" lang="zh-TW" dirty="0">
                 <a:solidFill>
                   <a:srgbClr val="000000"/>
                 </a:solidFill>
@@ -3976,7 +3976,7 @@
               <a:t>▍這一張要做什麼</a:t>
             </a:r>
             <a:r>
-              <a:rPr sz="850" lang="zh-TW" dirty="0">
+              <a:rPr sz="800" lang="zh-TW" dirty="0">
                 <a:solidFill>
                   <a:srgbClr val="000000"/>
                 </a:solidFill>
@@ -3994,11 +3994,11 @@
                 <a:spcPts val="0"/>
               </a:spcBef>
               <a:spcAft>
-                <a:spcPts val="142"/>
-              </a:spcAft>
-            </a:pPr>
-            <a:r>
-              <a:rPr sz="850" lang="zh-TW" dirty="0">
+                <a:spcPts val="133"/>
+              </a:spcAft>
+            </a:pPr>
+            <a:r>
+              <a:rPr sz="800" lang="zh-TW" dirty="0">
                 <a:solidFill>
                   <a:srgbClr val="000000"/>
                 </a:solidFill>
@@ -4016,11 +4016,11 @@
                 <a:spcPts val="0"/>
               </a:spcBef>
               <a:spcAft>
-                <a:spcPts val="142"/>
-              </a:spcAft>
-            </a:pPr>
-            <a:r>
-              <a:rPr sz="850" b="1" lang="zh-TW" dirty="0">
+                <a:spcPts val="133"/>
+              </a:spcAft>
+            </a:pPr>
+            <a:r>
+              <a:rPr sz="800" b="1" lang="zh-TW" dirty="0">
                 <a:solidFill>
                   <a:srgbClr val="000000"/>
                 </a:solidFill>
@@ -4031,7 +4031,7 @@
               <a:t>▍畫面上圈這裡</a:t>
             </a:r>
             <a:r>
-              <a:rPr sz="850" lang="zh-TW" dirty="0">
+              <a:rPr sz="800" lang="zh-TW" dirty="0">
                 <a:solidFill>
                   <a:srgbClr val="000000"/>
                 </a:solidFill>
@@ -4049,19 +4049,19 @@
                 <a:spcPts val="0"/>
               </a:spcBef>
               <a:spcAft>
-                <a:spcPts val="142"/>
-              </a:spcAft>
-            </a:pPr>
-            <a:r>
-              <a:rPr sz="850" lang="zh-TW" dirty="0">
-                <a:solidFill>
-                  <a:srgbClr val="000000"/>
-                </a:solidFill>
-                <a:latin typeface="Arial Unicode MS"/>
-                <a:ea typeface="Arial Unicode MS"/>
-                <a:cs typeface="Arial Unicode MS"/>
-              </a:rPr>
-              <a:t>圈上面算出來的 50 毫秒與半公尺，再指圖裡 Additional Programmability 的 Multi-sensor phase lock。
+                <a:spcPts val="133"/>
+              </a:spcAft>
+            </a:pPr>
+            <a:r>
+              <a:rPr sz="800" lang="zh-TW" dirty="0">
+                <a:solidFill>
+                  <a:srgbClr val="000000"/>
+                </a:solidFill>
+                <a:latin typeface="Arial Unicode MS"/>
+                <a:ea typeface="Arial Unicode MS"/>
+                <a:cs typeface="Arial Unicode MS"/>
+              </a:rPr>
+              <a:t>圈上面算出來的 50 毫秒與半公尺，再指圖裡的 Multi-sensor phase lock。其餘六行一行一行點過去，每一行都回扣今天講過的一張。
 </a:t>
             </a:r>
           </a:p>
@@ -4071,11 +4071,11 @@
                 <a:spcPts val="0"/>
               </a:spcBef>
               <a:spcAft>
-                <a:spcPts val="142"/>
-              </a:spcAft>
-            </a:pPr>
-            <a:r>
-              <a:rPr sz="850" b="1" lang="zh-TW" dirty="0">
+                <a:spcPts val="133"/>
+              </a:spcAft>
+            </a:pPr>
+            <a:r>
+              <a:rPr sz="800" b="1" lang="zh-TW" dirty="0">
                 <a:solidFill>
                   <a:srgbClr val="000000"/>
                 </a:solidFill>
@@ -4086,7 +4086,7 @@
               <a:t>▍以下照著唸</a:t>
             </a:r>
             <a:r>
-              <a:rPr sz="850" lang="zh-TW" dirty="0">
+              <a:rPr sz="800" lang="zh-TW" dirty="0">
                 <a:solidFill>
                   <a:srgbClr val="000000"/>
                 </a:solidFill>
@@ -4104,11 +4104,11 @@
                 <a:spcPts val="0"/>
               </a:spcBef>
               <a:spcAft>
-                <a:spcPts val="142"/>
-              </a:spcAft>
-            </a:pPr>
-            <a:r>
-              <a:rPr sz="850" lang="zh-TW" dirty="0">
+                <a:spcPts val="133"/>
+              </a:spcAft>
+            </a:pPr>
+            <a:r>
+              <a:rPr sz="800" lang="zh-TW" dirty="0">
                 <a:solidFill>
                   <a:srgbClr val="000000"/>
                 </a:solidFill>
@@ -4119,7 +4119,7 @@
               <a:t>最後一件事是</a:t>
             </a:r>
             <a:r>
-              <a:rPr sz="850" b="1" lang="zh-TW" dirty="0">
+              <a:rPr sz="800" b="1" lang="zh-TW" dirty="0">
                 <a:solidFill>
                   <a:srgbClr val="000000"/>
                 </a:solidFill>
@@ -4130,7 +4130,117 @@
               <a:t>時間同步</a:t>
             </a:r>
             <a:r>
-              <a:rPr sz="850" lang="zh-TW" dirty="0">
+              <a:rPr sz="800" lang="zh-TW" dirty="0">
+                <a:solidFill>
+                  <a:srgbClr val="000000"/>
+                </a:solidFill>
+                <a:latin typeface="Arial Unicode MS"/>
+                <a:ea typeface="Arial Unicode MS"/>
+                <a:cs typeface="Arial Unicode MS"/>
+              </a:rPr>
+              <a:t>。剛剛講的標定是「空間」上要對準，這一件是「時間」上要對準。
+</a:t>
+            </a:r>
+          </a:p>
+          <a:p>
+            <a:pPr algn="l">
+              <a:spcBef>
+                <a:spcPts val="0"/>
+              </a:spcBef>
+              <a:spcAft>
+                <a:spcPts val="133"/>
+              </a:spcAft>
+            </a:pPr>
+            <a:r>
+              <a:rPr sz="800" lang="zh-TW" dirty="0">
+                <a:solidFill>
+                  <a:srgbClr val="000000"/>
+                </a:solidFill>
+                <a:latin typeface="Arial Unicode MS"/>
+                <a:ea typeface="Arial Unicode MS"/>
+                <a:cs typeface="Arial Unicode MS"/>
+              </a:rPr>
+              <a:t>想想看：光達一秒轉十圈，相機一秒拍六十張。這兩個東西的節奏完全不一樣。
+</a:t>
+            </a:r>
+          </a:p>
+          <a:p>
+            <a:pPr algn="l">
+              <a:spcBef>
+                <a:spcPts val="0"/>
+              </a:spcBef>
+              <a:spcAft>
+                <a:spcPts val="133"/>
+              </a:spcAft>
+            </a:pPr>
+            <a:r>
+              <a:rPr sz="800" lang="zh-TW" dirty="0">
+                <a:solidFill>
+                  <a:srgbClr val="000000"/>
+                </a:solidFill>
+                <a:latin typeface="Arial Unicode MS"/>
+                <a:ea typeface="Arial Unicode MS"/>
+                <a:cs typeface="Arial Unicode MS"/>
+              </a:rPr>
+              <a:t>假設車子現在收到一張相機的畫面，還有一圈光達的點雲，要把它們合起來。問題是——</a:t>
+            </a:r>
+            <a:r>
+              <a:rPr sz="800" b="1" lang="zh-TW" dirty="0">
+                <a:solidFill>
+                  <a:srgbClr val="000000"/>
+                </a:solidFill>
+                <a:latin typeface="Arial Unicode MS"/>
+                <a:ea typeface="Arial Unicode MS"/>
+                <a:cs typeface="Arial Unicode MS"/>
+              </a:rPr>
+              <a:t>這兩份資料是同一個瞬間的嗎？</a:t>
+            </a:r>
+            <a:r>
+              <a:rPr sz="800" lang="zh-TW" dirty="0">
+                <a:solidFill>
+                  <a:srgbClr val="000000"/>
+                </a:solidFill>
+                <a:latin typeface="Arial Unicode MS"/>
+                <a:ea typeface="Arial Unicode MS"/>
+                <a:cs typeface="Arial Unicode MS"/>
+              </a:rPr>
+              <a:t>
+</a:t>
+            </a:r>
+          </a:p>
+          <a:p>
+            <a:pPr algn="l">
+              <a:spcBef>
+                <a:spcPts val="0"/>
+              </a:spcBef>
+              <a:spcAft>
+                <a:spcPts val="133"/>
+              </a:spcAft>
+            </a:pPr>
+            <a:r>
+              <a:rPr sz="800" lang="zh-TW" dirty="0">
+                <a:solidFill>
+                  <a:srgbClr val="000000"/>
+                </a:solidFill>
+                <a:latin typeface="Arial Unicode MS"/>
+                <a:ea typeface="Arial Unicode MS"/>
+                <a:cs typeface="Arial Unicode MS"/>
+              </a:rPr>
+              <a:t>如果沒有處理，它們可能差到五十毫秒。時速四十的時候，五十毫秒車子走了</a:t>
+            </a:r>
+            <a:r>
+              <a:rPr sz="800" b="1" lang="zh-TW" dirty="0">
+                <a:solidFill>
+                  <a:srgbClr val="000000"/>
+                </a:solidFill>
+                <a:latin typeface="Arial Unicode MS"/>
+                <a:ea typeface="Arial Unicode MS"/>
+                <a:cs typeface="Arial Unicode MS"/>
+              </a:rPr>
+              <a:t>零點五六公尺</a:t>
+            </a:r>
+            <a:r>
+              <a:rPr sz="800" lang="zh-TW" dirty="0">
                 <a:solidFill>
                   <a:srgbClr val="000000"/>
                 </a:solidFill>
@@ -4148,19 +4258,41 @@
                 <a:spcPts val="0"/>
               </a:spcBef>
               <a:spcAft>
-                <a:spcPts val="142"/>
-              </a:spcAft>
-            </a:pPr>
-            <a:r>
-              <a:rPr sz="850" lang="zh-TW" dirty="0">
-                <a:solidFill>
-                  <a:srgbClr val="000000"/>
-                </a:solidFill>
-                <a:latin typeface="Arial Unicode MS"/>
-                <a:ea typeface="Arial Unicode MS"/>
-                <a:cs typeface="Arial Unicode MS"/>
-              </a:rPr>
-              <a:t>剛剛講的標定是「空間」上要對準。這一件是「時間」上要對準。
+                <a:spcPts val="133"/>
+              </a:spcAft>
+            </a:pPr>
+            <a:r>
+              <a:rPr sz="800" lang="zh-TW" dirty="0">
+                <a:solidFill>
+                  <a:srgbClr val="000000"/>
+                </a:solidFill>
+                <a:latin typeface="Arial Unicode MS"/>
+                <a:ea typeface="Arial Unicode MS"/>
+                <a:cs typeface="Arial Unicode MS"/>
+              </a:rPr>
+              <a:t>所以你會把相機在 A 點看到的人，跟光達在 B 點量到的距離配在一起，得到一個</a:t>
+            </a:r>
+            <a:r>
+              <a:rPr sz="800" b="1" lang="zh-TW" dirty="0">
+                <a:solidFill>
+                  <a:srgbClr val="000000"/>
+                </a:solidFill>
+                <a:latin typeface="Arial Unicode MS"/>
+                <a:ea typeface="Arial Unicode MS"/>
+                <a:cs typeface="Arial Unicode MS"/>
+              </a:rPr>
+              <a:t>根本不存在的位置</a:t>
+            </a:r>
+            <a:r>
+              <a:rPr sz="800" lang="zh-TW" dirty="0">
+                <a:solidFill>
+                  <a:srgbClr val="000000"/>
+                </a:solidFill>
+                <a:latin typeface="Arial Unicode MS"/>
+                <a:ea typeface="Arial Unicode MS"/>
+                <a:cs typeface="Arial Unicode MS"/>
+              </a:rPr>
+              <a:t>。
 </a:t>
             </a:r>
           </a:p>
@@ -4170,19 +4302,19 @@
                 <a:spcPts val="0"/>
               </a:spcBef>
               <a:spcAft>
-                <a:spcPts val="142"/>
-              </a:spcAft>
-            </a:pPr>
-            <a:r>
-              <a:rPr sz="850" lang="zh-TW" dirty="0">
-                <a:solidFill>
-                  <a:srgbClr val="000000"/>
-                </a:solidFill>
-                <a:latin typeface="Arial Unicode MS"/>
-                <a:ea typeface="Arial Unicode MS"/>
-                <a:cs typeface="Arial Unicode MS"/>
-              </a:rPr>
-              <a:t>想想看：光達一秒轉十圈，相機一秒拍六十張。這兩個東西的節奏完全不一樣。
+                <a:spcPts val="133"/>
+              </a:spcAft>
+            </a:pPr>
+            <a:r>
+              <a:rPr sz="800" lang="zh-TW" dirty="0">
+                <a:solidFill>
+                  <a:srgbClr val="000000"/>
+                </a:solidFill>
+                <a:latin typeface="Arial Unicode MS"/>
+                <a:ea typeface="Arial Unicode MS"/>
+                <a:cs typeface="Arial Unicode MS"/>
+              </a:rPr>
+              <a:t>而且這個誤差會跟剛剛的標定誤差疊加，兩個加起來就很可觀。
 </a:t>
             </a:r>
           </a:p>
@@ -4192,33 +4324,352 @@
                 <a:spcPts val="0"/>
               </a:spcBef>
               <a:spcAft>
-                <a:spcPts val="142"/>
-              </a:spcAft>
-            </a:pPr>
-            <a:r>
-              <a:rPr sz="850" lang="zh-TW" dirty="0">
-                <a:solidFill>
-                  <a:srgbClr val="000000"/>
-                </a:solidFill>
-                <a:latin typeface="Arial Unicode MS"/>
-                <a:ea typeface="Arial Unicode MS"/>
-                <a:cs typeface="Arial Unicode MS"/>
-              </a:rPr>
-              <a:t>假設車子現在收到一張相機的畫面，還有一圈光達的點雲，要把它們合起來。問題是——</a:t>
-            </a:r>
-            <a:r>
-              <a:rPr sz="850" b="1" lang="zh-TW" dirty="0">
-                <a:solidFill>
-                  <a:srgbClr val="000000"/>
-                </a:solidFill>
-                <a:latin typeface="Arial Unicode MS"/>
-                <a:ea typeface="Arial Unicode MS"/>
-                <a:cs typeface="Arial Unicode MS"/>
-              </a:rPr>
-              <a:t>這兩份資料是同一個瞬間的嗎？</a:t>
-            </a:r>
-            <a:r>
-              <a:rPr sz="850" lang="zh-TW" dirty="0">
+                <a:spcPts val="133"/>
+              </a:spcAft>
+            </a:pPr>
+            <a:r>
+              <a:rPr sz="800" lang="zh-TW" dirty="0">
+                <a:solidFill>
+                  <a:srgbClr val="000000"/>
+                </a:solidFill>
+                <a:latin typeface="Arial Unicode MS"/>
+                <a:ea typeface="Arial Unicode MS"/>
+                <a:cs typeface="Arial Unicode MS"/>
+              </a:rPr>
+              <a:t>解法是讓每一顆感測器都在資料上蓋一個</a:t>
+            </a:r>
+            <a:r>
+              <a:rPr sz="800" b="1" lang="zh-TW" dirty="0">
+                <a:solidFill>
+                  <a:srgbClr val="000000"/>
+                </a:solidFill>
+                <a:latin typeface="Arial Unicode MS"/>
+                <a:ea typeface="Arial Unicode MS"/>
+                <a:cs typeface="Arial Unicode MS"/>
+              </a:rPr>
+              <a:t>時間戳</a:t>
+            </a:r>
+            <a:r>
+              <a:rPr sz="800" lang="zh-TW" dirty="0">
+                <a:solidFill>
+                  <a:srgbClr val="000000"/>
+                </a:solidFill>
+                <a:latin typeface="Arial Unicode MS"/>
+                <a:ea typeface="Arial Unicode MS"/>
+                <a:cs typeface="Arial Unicode MS"/>
+              </a:rPr>
+              <a:t>，而且全車用同一個時鐘。高階一點的做法，是讓光達轉到某個角度的時候，剛好跟相機的快門</a:t>
+            </a:r>
+            <a:r>
+              <a:rPr sz="800" b="1" lang="zh-TW" dirty="0">
+                <a:solidFill>
+                  <a:srgbClr val="000000"/>
+                </a:solidFill>
+                <a:latin typeface="Arial Unicode MS"/>
+                <a:ea typeface="Arial Unicode MS"/>
+                <a:cs typeface="Arial Unicode MS"/>
+              </a:rPr>
+              <a:t>對在一起</a:t>
+            </a:r>
+            <a:r>
+              <a:rPr sz="800" lang="zh-TW" dirty="0">
+                <a:solidFill>
+                  <a:srgbClr val="000000"/>
+                </a:solidFill>
+                <a:latin typeface="Arial Unicode MS"/>
+                <a:ea typeface="Arial Unicode MS"/>
+                <a:cs typeface="Arial Unicode MS"/>
+              </a:rPr>
+              <a:t>。OS1 規格表上 Additional Programmability 的</a:t>
+            </a:r>
+            <a:r>
+              <a:rPr sz="800" b="1" lang="zh-TW" dirty="0">
+                <a:solidFill>
+                  <a:srgbClr val="000000"/>
+                </a:solidFill>
+                <a:latin typeface="Arial Unicode MS"/>
+                <a:ea typeface="Arial Unicode MS"/>
+                <a:cs typeface="Arial Unicode MS"/>
+              </a:rPr>
+              <a:t>第一條</a:t>
+            </a:r>
+            <a:r>
+              <a:rPr sz="800" lang="zh-TW" dirty="0">
+                <a:solidFill>
+                  <a:srgbClr val="000000"/>
+                </a:solidFill>
+                <a:latin typeface="Arial Unicode MS"/>
+                <a:ea typeface="Arial Unicode MS"/>
+                <a:cs typeface="Arial Unicode MS"/>
+              </a:rPr>
+              <a:t>，multi-sensor phase lock，講的就是這件事。
+</a:t>
+            </a:r>
+          </a:p>
+          <a:p>
+            <a:pPr algn="l">
+              <a:spcBef>
+                <a:spcPts val="0"/>
+              </a:spcBef>
+              <a:spcAft>
+                <a:spcPts val="133"/>
+              </a:spcAft>
+            </a:pPr>
+            <a:r>
+              <a:rPr sz="800" lang="zh-TW" dirty="0">
+                <a:solidFill>
+                  <a:srgbClr val="000000"/>
+                </a:solidFill>
+                <a:latin typeface="Arial Unicode MS"/>
+                <a:ea typeface="Arial Unicode MS"/>
+                <a:cs typeface="Arial Unicode MS"/>
+              </a:rPr>
+              <a:t>順便把這一格其他幾行看完。它們全部都是</a:t>
+            </a:r>
+            <a:r>
+              <a:rPr sz="800" b="1" lang="zh-TW" dirty="0">
+                <a:solidFill>
+                  <a:srgbClr val="000000"/>
+                </a:solidFill>
+                <a:latin typeface="Arial Unicode MS"/>
+                <a:ea typeface="Arial Unicode MS"/>
+                <a:cs typeface="Arial Unicode MS"/>
+              </a:rPr>
+              <a:t>可以設定的</a:t>
+            </a:r>
+            <a:r>
+              <a:rPr sz="800" lang="zh-TW" dirty="0">
+                <a:solidFill>
+                  <a:srgbClr val="000000"/>
+                </a:solidFill>
+                <a:latin typeface="Arial Unicode MS"/>
+                <a:ea typeface="Arial Unicode MS"/>
+                <a:cs typeface="Arial Unicode MS"/>
+              </a:rPr>
+              <a:t>，而且今天各位都聽過。
+</a:t>
+            </a:r>
+          </a:p>
+          <a:p>
+            <a:pPr algn="l">
+              <a:spcBef>
+                <a:spcPts val="0"/>
+              </a:spcBef>
+              <a:spcAft>
+                <a:spcPts val="133"/>
+              </a:spcAft>
+            </a:pPr>
+            <a:r>
+              <a:rPr sz="800" b="1" lang="zh-TW" dirty="0">
+                <a:solidFill>
+                  <a:srgbClr val="000000"/>
+                </a:solidFill>
+                <a:latin typeface="Arial Unicode MS"/>
+                <a:ea typeface="Arial Unicode MS"/>
+                <a:cs typeface="Arial Unicode MS"/>
+              </a:rPr>
+              <a:t>Queryable intrinsic calibration information</a:t>
+            </a:r>
+            <a:r>
+              <a:rPr sz="800" lang="zh-TW" dirty="0">
+                <a:solidFill>
+                  <a:srgbClr val="000000"/>
+                </a:solidFill>
+                <a:latin typeface="Arial Unicode MS"/>
+                <a:ea typeface="Arial Unicode MS"/>
+                <a:cs typeface="Arial Unicode MS"/>
+              </a:rPr>
+              <a:t>——還記得剛剛那個內參嗎？這一行是說你可以</a:t>
+            </a:r>
+            <a:r>
+              <a:rPr sz="800" b="1" lang="zh-TW" dirty="0">
+                <a:solidFill>
+                  <a:srgbClr val="000000"/>
+                </a:solidFill>
+                <a:latin typeface="Arial Unicode MS"/>
+                <a:ea typeface="Arial Unicode MS"/>
+                <a:cs typeface="Arial Unicode MS"/>
+              </a:rPr>
+              <a:t>直接問這顆光達要它自己的內參</a:t>
+            </a:r>
+            <a:r>
+              <a:rPr sz="800" lang="zh-TW" dirty="0">
+                <a:solidFill>
+                  <a:srgbClr val="000000"/>
+                </a:solidFill>
+                <a:latin typeface="Arial Unicode MS"/>
+                <a:ea typeface="Arial Unicode MS"/>
+                <a:cs typeface="Arial Unicode MS"/>
+              </a:rPr>
+              <a:t>。底下兩條：</a:t>
+            </a:r>
+            <a:r>
+              <a:rPr sz="800" b="1" lang="zh-TW" dirty="0">
+                <a:solidFill>
+                  <a:srgbClr val="000000"/>
+                </a:solidFill>
+                <a:latin typeface="Arial Unicode MS"/>
+                <a:ea typeface="Arial Unicode MS"/>
+                <a:cs typeface="Arial Unicode MS"/>
+              </a:rPr>
+              <a:t>Beam angles</a:t>
+            </a:r>
+            <a:r>
+              <a:rPr sz="800" lang="zh-TW" dirty="0">
+                <a:solidFill>
+                  <a:srgbClr val="000000"/>
+                </a:solidFill>
+                <a:latin typeface="Arial Unicode MS"/>
+                <a:ea typeface="Arial Unicode MS"/>
+                <a:cs typeface="Arial Unicode MS"/>
+              </a:rPr>
+              <a:t>，每一條線束實際的垂直角度，出廠一條一條量過，不是真的平均分布；</a:t>
+            </a:r>
+            <a:r>
+              <a:rPr sz="800" b="1" lang="zh-TW" dirty="0">
+                <a:solidFill>
+                  <a:srgbClr val="000000"/>
+                </a:solidFill>
+                <a:latin typeface="Arial Unicode MS"/>
+                <a:ea typeface="Arial Unicode MS"/>
+                <a:cs typeface="Arial Unicode MS"/>
+              </a:rPr>
+              <a:t>IMU pose correction matrix</a:t>
+            </a:r>
+            <a:r>
+              <a:rPr sz="800" lang="zh-TW" dirty="0">
+                <a:solidFill>
+                  <a:srgbClr val="000000"/>
+                </a:solidFill>
+                <a:latin typeface="Arial Unicode MS"/>
+                <a:ea typeface="Arial Unicode MS"/>
+                <a:cs typeface="Arial Unicode MS"/>
+              </a:rPr>
+              <a:t>，機器裡面那顆慣性感測器和光達本體之間的關係——等於原廠先幫你標定好的一組外參。
+</a:t>
+            </a:r>
+          </a:p>
+          <a:p>
+            <a:pPr algn="l">
+              <a:spcBef>
+                <a:spcPts val="0"/>
+              </a:spcBef>
+              <a:spcAft>
+                <a:spcPts val="133"/>
+              </a:spcAft>
+            </a:pPr>
+            <a:r>
+              <a:rPr sz="800" lang="zh-TW" dirty="0">
+                <a:solidFill>
+                  <a:srgbClr val="000000"/>
+                </a:solidFill>
+                <a:latin typeface="Arial Unicode MS"/>
+                <a:ea typeface="Arial Unicode MS"/>
+                <a:cs typeface="Arial Unicode MS"/>
+              </a:rPr>
+              <a:t>右邊那四條：</a:t>
+            </a:r>
+            <a:r>
+              <a:rPr sz="800" b="1" lang="zh-TW" dirty="0">
+                <a:solidFill>
+                  <a:srgbClr val="000000"/>
+                </a:solidFill>
+                <a:latin typeface="Arial Unicode MS"/>
+                <a:ea typeface="Arial Unicode MS"/>
+                <a:cs typeface="Arial Unicode MS"/>
+              </a:rPr>
+              <a:t>Return ordering</a:t>
+            </a:r>
+            <a:r>
+              <a:rPr sz="800" lang="zh-TW" dirty="0">
+                <a:solidFill>
+                  <a:srgbClr val="000000"/>
+                </a:solidFill>
+                <a:latin typeface="Arial Unicode MS"/>
+                <a:ea typeface="Arial Unicode MS"/>
+                <a:cs typeface="Arial Unicode MS"/>
+              </a:rPr>
+              <a:t>，就是第九張那個「最多兩次回波」，你可以選先給最強的、先給最遠的、還是先給最近的。</a:t>
+            </a:r>
+            <a:r>
+              <a:rPr sz="800" b="1" lang="zh-TW" dirty="0">
+                <a:solidFill>
+                  <a:srgbClr val="000000"/>
+                </a:solidFill>
+                <a:latin typeface="Arial Unicode MS"/>
+                <a:ea typeface="Arial Unicode MS"/>
+                <a:cs typeface="Arial Unicode MS"/>
+              </a:rPr>
+              <a:t>Minimum range</a:t>
+            </a:r>
+            <a:r>
+              <a:rPr sz="800" lang="zh-TW" dirty="0">
+                <a:solidFill>
+                  <a:srgbClr val="000000"/>
+                </a:solidFill>
+                <a:latin typeface="Arial Unicode MS"/>
+                <a:ea typeface="Arial Unicode MS"/>
+                <a:cs typeface="Arial Unicode MS"/>
+              </a:rPr>
+              <a:t>，可以設 0、30 或 50 公分，比這個近的點直接不回報，用來擋掉打到自己車身和支架的那些點。</a:t>
+            </a:r>
+            <a:r>
+              <a:rPr sz="800" b="1" lang="zh-TW" dirty="0">
+                <a:solidFill>
+                  <a:srgbClr val="000000"/>
+                </a:solidFill>
+                <a:latin typeface="Arial Unicode MS"/>
+                <a:ea typeface="Arial Unicode MS"/>
+                <a:cs typeface="Arial Unicode MS"/>
+              </a:rPr>
+              <a:t>Azimuth masking</a:t>
+            </a:r>
+            <a:r>
+              <a:rPr sz="800" lang="zh-TW" dirty="0">
+                <a:solidFill>
+                  <a:srgbClr val="000000"/>
+                </a:solidFill>
+                <a:latin typeface="Arial Unicode MS"/>
+                <a:ea typeface="Arial Unicode MS"/>
+                <a:cs typeface="Arial Unicode MS"/>
+              </a:rPr>
+              <a:t>，把 360 度裡不要的那一段關掉，例如對著車頂的那一塊。</a:t>
+            </a:r>
+            <a:r>
+              <a:rPr sz="800" b="1" lang="zh-TW" dirty="0">
+                <a:solidFill>
+                  <a:srgbClr val="000000"/>
+                </a:solidFill>
+                <a:latin typeface="Arial Unicode MS"/>
+                <a:ea typeface="Arial Unicode MS"/>
+                <a:cs typeface="Arial Unicode MS"/>
+              </a:rPr>
+              <a:t>Low-power standby mode</a:t>
+            </a:r>
+            <a:r>
+              <a:rPr sz="800" lang="zh-TW" dirty="0">
+                <a:solidFill>
+                  <a:srgbClr val="000000"/>
+                </a:solidFill>
+                <a:latin typeface="Arial Unicode MS"/>
+                <a:ea typeface="Arial Unicode MS"/>
+                <a:cs typeface="Arial Unicode MS"/>
+              </a:rPr>
+              <a:t>，停車的時候省電。第一節第十二張我說過「可設定」那三個字是模式不是數字——</a:t>
+            </a:r>
+            <a:r>
+              <a:rPr sz="800" b="1" lang="zh-TW" dirty="0">
+                <a:solidFill>
+                  <a:srgbClr val="000000"/>
+                </a:solidFill>
+                <a:latin typeface="Arial Unicode MS"/>
+                <a:ea typeface="Arial Unicode MS"/>
+                <a:cs typeface="Arial Unicode MS"/>
+              </a:rPr>
+              <a:t>這一整格就是最好的例子：同一顆硬體，設定不一樣，出來的資料就不一樣。</a:t>
+            </a:r>
+            <a:r>
+              <a:rPr sz="800" lang="zh-TW" dirty="0">
                 <a:solidFill>
                   <a:srgbClr val="000000"/>
                 </a:solidFill>
@@ -4236,209 +4687,11 @@
                 <a:spcPts val="0"/>
               </a:spcBef>
               <a:spcAft>
-                <a:spcPts val="142"/>
-              </a:spcAft>
-            </a:pPr>
-            <a:r>
-              <a:rPr sz="850" lang="zh-TW" dirty="0">
-                <a:solidFill>
-                  <a:srgbClr val="000000"/>
-                </a:solidFill>
-                <a:latin typeface="Arial Unicode MS"/>
-                <a:ea typeface="Arial Unicode MS"/>
-                <a:cs typeface="Arial Unicode MS"/>
-              </a:rPr>
-              <a:t>如果沒有處理，它們可能差到五十毫秒。時速四十的時候，五十毫秒車子走了</a:t>
-            </a:r>
-            <a:r>
-              <a:rPr sz="850" b="1" lang="zh-TW" dirty="0">
-                <a:solidFill>
-                  <a:srgbClr val="000000"/>
-                </a:solidFill>
-                <a:latin typeface="Arial Unicode MS"/>
-                <a:ea typeface="Arial Unicode MS"/>
-                <a:cs typeface="Arial Unicode MS"/>
-              </a:rPr>
-              <a:t>零點五六公尺</a:t>
-            </a:r>
-            <a:r>
-              <a:rPr sz="850" lang="zh-TW" dirty="0">
-                <a:solidFill>
-                  <a:srgbClr val="000000"/>
-                </a:solidFill>
-                <a:latin typeface="Arial Unicode MS"/>
-                <a:ea typeface="Arial Unicode MS"/>
-                <a:cs typeface="Arial Unicode MS"/>
-              </a:rPr>
-              <a:t>。
-</a:t>
-            </a:r>
-          </a:p>
-          <a:p>
-            <a:pPr algn="l">
-              <a:spcBef>
-                <a:spcPts val="0"/>
-              </a:spcBef>
-              <a:spcAft>
-                <a:spcPts val="142"/>
-              </a:spcAft>
-            </a:pPr>
-            <a:r>
-              <a:rPr sz="850" lang="zh-TW" dirty="0">
-                <a:solidFill>
-                  <a:srgbClr val="000000"/>
-                </a:solidFill>
-                <a:latin typeface="Arial Unicode MS"/>
-                <a:ea typeface="Arial Unicode MS"/>
-                <a:cs typeface="Arial Unicode MS"/>
-              </a:rPr>
-              <a:t>所以你會把相機在 A 點看到的人，跟光達在 B 點量到的距離配在一起，得到一個</a:t>
-            </a:r>
-            <a:r>
-              <a:rPr sz="850" b="1" lang="zh-TW" dirty="0">
-                <a:solidFill>
-                  <a:srgbClr val="000000"/>
-                </a:solidFill>
-                <a:latin typeface="Arial Unicode MS"/>
-                <a:ea typeface="Arial Unicode MS"/>
-                <a:cs typeface="Arial Unicode MS"/>
-              </a:rPr>
-              <a:t>根本不存在的位置</a:t>
-            </a:r>
-            <a:r>
-              <a:rPr sz="850" lang="zh-TW" dirty="0">
-                <a:solidFill>
-                  <a:srgbClr val="000000"/>
-                </a:solidFill>
-                <a:latin typeface="Arial Unicode MS"/>
-                <a:ea typeface="Arial Unicode MS"/>
-                <a:cs typeface="Arial Unicode MS"/>
-              </a:rPr>
-              <a:t>。
-</a:t>
-            </a:r>
-          </a:p>
-          <a:p>
-            <a:pPr algn="l">
-              <a:spcBef>
-                <a:spcPts val="0"/>
-              </a:spcBef>
-              <a:spcAft>
-                <a:spcPts val="142"/>
-              </a:spcAft>
-            </a:pPr>
-            <a:r>
-              <a:rPr sz="850" lang="zh-TW" dirty="0">
-                <a:solidFill>
-                  <a:srgbClr val="000000"/>
-                </a:solidFill>
-                <a:latin typeface="Arial Unicode MS"/>
-                <a:ea typeface="Arial Unicode MS"/>
-                <a:cs typeface="Arial Unicode MS"/>
-              </a:rPr>
-              <a:t>而且這個誤差會跟剛剛的標定誤差疊加，兩個加起來就很可觀。
-</a:t>
-            </a:r>
-          </a:p>
-          <a:p>
-            <a:pPr algn="l">
-              <a:spcBef>
-                <a:spcPts val="0"/>
-              </a:spcBef>
-              <a:spcAft>
-                <a:spcPts val="142"/>
-              </a:spcAft>
-            </a:pPr>
-            <a:r>
-              <a:rPr sz="850" lang="zh-TW" dirty="0">
-                <a:solidFill>
-                  <a:srgbClr val="000000"/>
-                </a:solidFill>
-                <a:latin typeface="Arial Unicode MS"/>
-                <a:ea typeface="Arial Unicode MS"/>
-                <a:cs typeface="Arial Unicode MS"/>
-              </a:rPr>
-              <a:t>解法是讓每一顆感測器都在資料上蓋一個</a:t>
-            </a:r>
-            <a:r>
-              <a:rPr sz="850" b="1" lang="zh-TW" dirty="0">
-                <a:solidFill>
-                  <a:srgbClr val="000000"/>
-                </a:solidFill>
-                <a:latin typeface="Arial Unicode MS"/>
-                <a:ea typeface="Arial Unicode MS"/>
-                <a:cs typeface="Arial Unicode MS"/>
-              </a:rPr>
-              <a:t>時間戳</a:t>
-            </a:r>
-            <a:r>
-              <a:rPr sz="850" lang="zh-TW" dirty="0">
-                <a:solidFill>
-                  <a:srgbClr val="000000"/>
-                </a:solidFill>
-                <a:latin typeface="Arial Unicode MS"/>
-                <a:ea typeface="Arial Unicode MS"/>
-                <a:cs typeface="Arial Unicode MS"/>
-              </a:rPr>
-              <a:t>，而且全車用同一個時鐘。高階一點的做法，是讓光達轉到某個角度的時候，剛好跟相機的快門</a:t>
-            </a:r>
-            <a:r>
-              <a:rPr sz="850" b="1" lang="zh-TW" dirty="0">
-                <a:solidFill>
-                  <a:srgbClr val="000000"/>
-                </a:solidFill>
-                <a:latin typeface="Arial Unicode MS"/>
-                <a:ea typeface="Arial Unicode MS"/>
-                <a:cs typeface="Arial Unicode MS"/>
-              </a:rPr>
-              <a:t>對在一起</a:t>
-            </a:r>
-            <a:r>
-              <a:rPr sz="850" lang="zh-TW" dirty="0">
-                <a:solidFill>
-                  <a:srgbClr val="000000"/>
-                </a:solidFill>
-                <a:latin typeface="Arial Unicode MS"/>
-                <a:ea typeface="Arial Unicode MS"/>
-                <a:cs typeface="Arial Unicode MS"/>
-              </a:rPr>
-              <a:t>。OS1 規格表上 Additional Programmability 的</a:t>
-            </a:r>
-            <a:r>
-              <a:rPr sz="850" b="1" lang="zh-TW" dirty="0">
-                <a:solidFill>
-                  <a:srgbClr val="000000"/>
-                </a:solidFill>
-                <a:latin typeface="Arial Unicode MS"/>
-                <a:ea typeface="Arial Unicode MS"/>
-                <a:cs typeface="Arial Unicode MS"/>
-              </a:rPr>
-              <a:t>第一條</a:t>
-            </a:r>
-            <a:r>
-              <a:rPr sz="850" lang="zh-TW" dirty="0">
-                <a:solidFill>
-                  <a:srgbClr val="000000"/>
-                </a:solidFill>
-                <a:latin typeface="Arial Unicode MS"/>
-                <a:ea typeface="Arial Unicode MS"/>
-                <a:cs typeface="Arial Unicode MS"/>
-              </a:rPr>
-              <a:t>，multi-sensor phase lock，講的就是這件事。
-</a:t>
-            </a:r>
-          </a:p>
-          <a:p>
-            <a:pPr algn="l">
-              <a:spcBef>
-                <a:spcPts val="0"/>
-              </a:spcBef>
-              <a:spcAft>
-                <a:spcPts val="142"/>
-              </a:spcAft>
-            </a:pPr>
-            <a:r>
-              <a:rPr sz="850" lang="zh-TW" dirty="0">
+                <a:spcPts val="133"/>
+              </a:spcAft>
+            </a:pPr>
+            <a:r>
+              <a:rPr sz="800" lang="zh-TW" dirty="0">
                 <a:solidFill>
                   <a:srgbClr val="000000"/>
                 </a:solidFill>
@@ -4449,7 +4702,7 @@
               <a:t>所以請各位記住：</a:t>
             </a:r>
             <a:r>
-              <a:rPr sz="850" b="1" lang="zh-TW" dirty="0">
+              <a:rPr sz="800" b="1" lang="zh-TW" dirty="0">
                 <a:solidFill>
                   <a:srgbClr val="000000"/>
                 </a:solidFill>
@@ -4460,7 +4713,7 @@
               <a:t>兩顆感測器各自都是好的，不代表合起來是對的。</a:t>
             </a:r>
             <a:r>
-              <a:rPr sz="850" lang="zh-TW" dirty="0">
+              <a:rPr sz="800" lang="zh-TW" dirty="0">
                 <a:solidFill>
                   <a:srgbClr val="000000"/>
                 </a:solidFill>
@@ -4478,11 +4731,11 @@
                 <a:spcPts val="0"/>
               </a:spcBef>
               <a:spcAft>
-                <a:spcPts val="142"/>
-              </a:spcAft>
-            </a:pPr>
-            <a:r>
-              <a:rPr sz="850" lang="zh-TW" dirty="0">
+                <a:spcPts val="133"/>
+              </a:spcAft>
+            </a:pPr>
+            <a:r>
+              <a:rPr sz="800" lang="zh-TW" dirty="0">
                 <a:solidFill>
                   <a:srgbClr val="000000"/>
                 </a:solidFill>
@@ -4500,11 +4753,11 @@
                 <a:spcPts val="0"/>
               </a:spcBef>
               <a:spcAft>
-                <a:spcPts val="142"/>
-              </a:spcAft>
-            </a:pPr>
-            <a:r>
-              <a:rPr sz="850" lang="zh-TW" dirty="0">
+                <a:spcPts val="133"/>
+              </a:spcAft>
+            </a:pPr>
+            <a:r>
+              <a:rPr sz="800" lang="zh-TW" dirty="0">
                 <a:solidFill>
                   <a:srgbClr val="000000"/>
                 </a:solidFill>
@@ -4515,7 +4768,7 @@
               <a:t>下一節我們回到工具上，把今天和上一節講的東西，全部用在一件事上：</a:t>
             </a:r>
             <a:r>
-              <a:rPr sz="850" b="1" lang="zh-TW" dirty="0">
+              <a:rPr sz="800" b="1" lang="zh-TW" dirty="0">
                 <a:solidFill>
                   <a:srgbClr val="000000"/>
                 </a:solidFill>
@@ -4526,7 +4779,7 @@
               <a:t>幫一個指定的情境選一顆感測器</a:t>
             </a:r>
             <a:r>
-              <a:rPr sz="850" lang="zh-TW" dirty="0">
+              <a:rPr sz="800" lang="zh-TW" dirty="0">
                 <a:solidFill>
                   <a:srgbClr val="000000"/>
                 </a:solidFill>

--- a/第五週(10-08)/第五週_第2節_簡報.pptx
+++ b/第五週(10-08)/第五週_第2節_簡報.pptx
@@ -4061,7 +4061,7 @@
                 <a:ea typeface="Arial Unicode MS"/>
                 <a:cs typeface="Arial Unicode MS"/>
               </a:rPr>
-              <a:t>圈上面算出來的 50 毫秒與半公尺，再指圖裡的 Multi-sensor phase lock。其餘六行一行一行點過去，每一行都回扣今天講過的一張。
+              <a:t>圈 50 毫秒與半公尺，再指圖裡的 Multi-sensor phase lock——七行裡只有這行在講同步，要講明。其餘六行快速點過，每一行都回扣今天講過的一張。
 </a:t>
             </a:r>
           </a:p>
@@ -4424,7 +4424,7 @@
                 <a:ea typeface="Arial Unicode MS"/>
                 <a:cs typeface="Arial Unicode MS"/>
               </a:rPr>
-              <a:t>順便把這一格其他幾行看完。它們全部都是</a:t>
+              <a:t>各位會問：這一格其他幾行跟同步有什麼關係？</a:t>
             </a:r>
             <a:r>
               <a:rPr sz="800" b="1" lang="zh-TW" dirty="0">
@@ -4435,18 +4435,62 @@
                 <a:ea typeface="Arial Unicode MS"/>
                 <a:cs typeface="Arial Unicode MS"/>
               </a:rPr>
-              <a:t>可以設定的</a:t>
-            </a:r>
-            <a:r>
-              <a:rPr sz="800" lang="zh-TW" dirty="0">
-                <a:solidFill>
-                  <a:srgbClr val="000000"/>
-                </a:solidFill>
-                <a:latin typeface="Arial Unicode MS"/>
-                <a:ea typeface="Arial Unicode MS"/>
-                <a:cs typeface="Arial Unicode MS"/>
-              </a:rPr>
-              <a:t>，而且今天各位都聽過。
+              <a:t>沒有關係。</a:t>
+            </a:r>
+            <a:r>
+              <a:rPr sz="800" lang="zh-TW" dirty="0">
+                <a:solidFill>
+                  <a:srgbClr val="000000"/>
+                </a:solidFill>
+                <a:latin typeface="Arial Unicode MS"/>
+                <a:ea typeface="Arial Unicode MS"/>
+                <a:cs typeface="Arial Unicode MS"/>
+              </a:rPr>
+              <a:t>這一格的標題是 Additional Programmability——「其他可以設定的項目」，</a:t>
+            </a:r>
+            <a:r>
+              <a:rPr sz="800" b="1" lang="zh-TW" dirty="0">
+                <a:solidFill>
+                  <a:srgbClr val="000000"/>
+                </a:solidFill>
+                <a:latin typeface="Arial Unicode MS"/>
+                <a:ea typeface="Arial Unicode MS"/>
+                <a:cs typeface="Arial Unicode MS"/>
+              </a:rPr>
+              <a:t>七行裡只有第一行在講同步</a:t>
+            </a:r>
+            <a:r>
+              <a:rPr sz="800" lang="zh-TW" dirty="0">
+                <a:solidFill>
+                  <a:srgbClr val="000000"/>
+                </a:solidFill>
+                <a:latin typeface="Arial Unicode MS"/>
+                <a:ea typeface="Arial Unicode MS"/>
+                <a:cs typeface="Arial Unicode MS"/>
+              </a:rPr>
+              <a:t>，其他是剛好印在同一格。這件事本身要學起來：</a:t>
+            </a:r>
+            <a:r>
+              <a:rPr sz="800" b="1" lang="zh-TW" dirty="0">
+                <a:solidFill>
+                  <a:srgbClr val="000000"/>
+                </a:solidFill>
+                <a:latin typeface="Arial Unicode MS"/>
+                <a:ea typeface="Arial Unicode MS"/>
+                <a:cs typeface="Arial Unicode MS"/>
+              </a:rPr>
+              <a:t>規格表上同一個框裡的東西，不一定是同一個主題。</a:t>
+            </a:r>
+            <a:r>
+              <a:rPr sz="800" lang="zh-TW" dirty="0">
+                <a:solidFill>
+                  <a:srgbClr val="000000"/>
+                </a:solidFill>
+                <a:latin typeface="Arial Unicode MS"/>
+                <a:ea typeface="Arial Unicode MS"/>
+                <a:cs typeface="Arial Unicode MS"/>
+              </a:rPr>
+              <a:t>
 </a:t>
             </a:r>
           </a:p>
@@ -4460,6 +4504,17 @@
               </a:spcAft>
             </a:pPr>
             <a:r>
+              <a:rPr sz="800" lang="zh-TW" dirty="0">
+                <a:solidFill>
+                  <a:srgbClr val="000000"/>
+                </a:solidFill>
+                <a:latin typeface="Arial Unicode MS"/>
+                <a:ea typeface="Arial Unicode MS"/>
+                <a:cs typeface="Arial Unicode MS"/>
+              </a:rPr>
+              <a:t>既然看到了，我一行一行帶過去，各位會發現每一行都是今天講過的。</a:t>
+            </a:r>
+            <a:r>
               <a:rPr sz="800" b="1" lang="zh-TW" dirty="0">
                 <a:solidFill>
                   <a:srgbClr val="000000"/>
@@ -4479,7 +4534,7 @@
                 <a:ea typeface="Arial Unicode MS"/>
                 <a:cs typeface="Arial Unicode MS"/>
               </a:rPr>
-              <a:t>——還記得剛剛那個內參嗎？這一行是說你可以</a:t>
+              <a:t>——可以直接問這顆光達要它自己的</a:t>
             </a:r>
             <a:r>
               <a:rPr sz="800" b="1" lang="zh-TW" dirty="0">
@@ -4490,18 +4545,18 @@
                 <a:ea typeface="Arial Unicode MS"/>
                 <a:cs typeface="Arial Unicode MS"/>
               </a:rPr>
-              <a:t>直接問這顆光達要它自己的內參</a:t>
-            </a:r>
-            <a:r>
-              <a:rPr sz="800" lang="zh-TW" dirty="0">
-                <a:solidFill>
-                  <a:srgbClr val="000000"/>
-                </a:solidFill>
-                <a:latin typeface="Arial Unicode MS"/>
-                <a:ea typeface="Arial Unicode MS"/>
-                <a:cs typeface="Arial Unicode MS"/>
-              </a:rPr>
-              <a:t>。底下兩條：</a:t>
+              <a:t>內參</a:t>
+            </a:r>
+            <a:r>
+              <a:rPr sz="800" lang="zh-TW" dirty="0">
+                <a:solidFill>
+                  <a:srgbClr val="000000"/>
+                </a:solidFill>
+                <a:latin typeface="Arial Unicode MS"/>
+                <a:ea typeface="Arial Unicode MS"/>
+                <a:cs typeface="Arial Unicode MS"/>
+              </a:rPr>
+              <a:t>，剛剛第十三張才講過；底下的 </a:t>
             </a:r>
             <a:r>
               <a:rPr sz="800" b="1" lang="zh-TW" dirty="0">
@@ -4523,7 +4578,7 @@
                 <a:ea typeface="Arial Unicode MS"/>
                 <a:cs typeface="Arial Unicode MS"/>
               </a:rPr>
-              <a:t>，每一條線束實際的垂直角度，出廠一條一條量過，不是真的平均分布；</a:t>
+              <a:t> 是每一條線束實際的垂直角度（出廠一條一條量過，不是真的平均分布），</a:t>
             </a:r>
             <a:r>
               <a:rPr sz="800" b="1" lang="zh-TW" dirty="0">
@@ -4545,7 +4600,117 @@
                 <a:ea typeface="Arial Unicode MS"/>
                 <a:cs typeface="Arial Unicode MS"/>
               </a:rPr>
-              <a:t>，機器裡面那顆慣性感測器和光達本體之間的關係——等於原廠先幫你標定好的一組外參。
+              <a:t> 是機內那顆慣性感測器和光達本體的關係，等於原廠先標好的一組</a:t>
+            </a:r>
+            <a:r>
+              <a:rPr sz="800" b="1" lang="zh-TW" dirty="0">
+                <a:solidFill>
+                  <a:srgbClr val="000000"/>
+                </a:solidFill>
+                <a:latin typeface="Arial Unicode MS"/>
+                <a:ea typeface="Arial Unicode MS"/>
+                <a:cs typeface="Arial Unicode MS"/>
+              </a:rPr>
+              <a:t>外參</a:t>
+            </a:r>
+            <a:r>
+              <a:rPr sz="800" lang="zh-TW" dirty="0">
+                <a:solidFill>
+                  <a:srgbClr val="000000"/>
+                </a:solidFill>
+                <a:latin typeface="Arial Unicode MS"/>
+                <a:ea typeface="Arial Unicode MS"/>
+                <a:cs typeface="Arial Unicode MS"/>
+              </a:rPr>
+              <a:t>。</a:t>
+            </a:r>
+            <a:r>
+              <a:rPr sz="800" b="1" lang="zh-TW" dirty="0">
+                <a:solidFill>
+                  <a:srgbClr val="000000"/>
+                </a:solidFill>
+                <a:latin typeface="Arial Unicode MS"/>
+                <a:ea typeface="Arial Unicode MS"/>
+                <a:cs typeface="Arial Unicode MS"/>
+              </a:rPr>
+              <a:t>Return ordering</a:t>
+            </a:r>
+            <a:r>
+              <a:rPr sz="800" lang="zh-TW" dirty="0">
+                <a:solidFill>
+                  <a:srgbClr val="000000"/>
+                </a:solidFill>
+                <a:latin typeface="Arial Unicode MS"/>
+                <a:ea typeface="Arial Unicode MS"/>
+                <a:cs typeface="Arial Unicode MS"/>
+              </a:rPr>
+              <a:t> 就是第九張的「最多兩次回波」，可以選先給最強的、最遠的還是最近的。</a:t>
+            </a:r>
+            <a:r>
+              <a:rPr sz="800" b="1" lang="zh-TW" dirty="0">
+                <a:solidFill>
+                  <a:srgbClr val="000000"/>
+                </a:solidFill>
+                <a:latin typeface="Arial Unicode MS"/>
+                <a:ea typeface="Arial Unicode MS"/>
+                <a:cs typeface="Arial Unicode MS"/>
+              </a:rPr>
+              <a:t>Minimum range</a:t>
+            </a:r>
+            <a:r>
+              <a:rPr sz="800" lang="zh-TW" dirty="0">
+                <a:solidFill>
+                  <a:srgbClr val="000000"/>
+                </a:solidFill>
+                <a:latin typeface="Arial Unicode MS"/>
+                <a:ea typeface="Arial Unicode MS"/>
+                <a:cs typeface="Arial Unicode MS"/>
+              </a:rPr>
+              <a:t> 設 0、30 或 50 公分，比這個近的直接不回報，擋掉打到自己車身和支架的點。</a:t>
+            </a:r>
+            <a:r>
+              <a:rPr sz="800" b="1" lang="zh-TW" dirty="0">
+                <a:solidFill>
+                  <a:srgbClr val="000000"/>
+                </a:solidFill>
+                <a:latin typeface="Arial Unicode MS"/>
+                <a:ea typeface="Arial Unicode MS"/>
+                <a:cs typeface="Arial Unicode MS"/>
+              </a:rPr>
+              <a:t>Azimuth masking</a:t>
+            </a:r>
+            <a:r>
+              <a:rPr sz="800" lang="zh-TW" dirty="0">
+                <a:solidFill>
+                  <a:srgbClr val="000000"/>
+                </a:solidFill>
+                <a:latin typeface="Arial Unicode MS"/>
+                <a:ea typeface="Arial Unicode MS"/>
+                <a:cs typeface="Arial Unicode MS"/>
+              </a:rPr>
+              <a:t> 把 360 度裡不要的那一段關掉——這一行其實和第一行沾得上邊，兩個都是在設「這一圈從哪裡開始、到哪裡結束」。</a:t>
+            </a:r>
+            <a:r>
+              <a:rPr sz="800" b="1" lang="zh-TW" dirty="0">
+                <a:solidFill>
+                  <a:srgbClr val="000000"/>
+                </a:solidFill>
+                <a:latin typeface="Arial Unicode MS"/>
+                <a:ea typeface="Arial Unicode MS"/>
+                <a:cs typeface="Arial Unicode MS"/>
+              </a:rPr>
+              <a:t>Low-power standby mode</a:t>
+            </a:r>
+            <a:r>
+              <a:rPr sz="800" lang="zh-TW" dirty="0">
+                <a:solidFill>
+                  <a:srgbClr val="000000"/>
+                </a:solidFill>
+                <a:latin typeface="Arial Unicode MS"/>
+                <a:ea typeface="Arial Unicode MS"/>
+                <a:cs typeface="Arial Unicode MS"/>
+              </a:rPr>
+              <a:t>，停車省電。
 </a:t>
             </a:r>
           </a:p>
@@ -4567,95 +4732,7 @@
                 <a:ea typeface="Arial Unicode MS"/>
                 <a:cs typeface="Arial Unicode MS"/>
               </a:rPr>
-              <a:t>右邊那四條：</a:t>
-            </a:r>
-            <a:r>
-              <a:rPr sz="800" b="1" lang="zh-TW" dirty="0">
-                <a:solidFill>
-                  <a:srgbClr val="000000"/>
-                </a:solidFill>
-                <a:latin typeface="Arial Unicode MS"/>
-                <a:ea typeface="Arial Unicode MS"/>
-                <a:cs typeface="Arial Unicode MS"/>
-              </a:rPr>
-              <a:t>Return ordering</a:t>
-            </a:r>
-            <a:r>
-              <a:rPr sz="800" lang="zh-TW" dirty="0">
-                <a:solidFill>
-                  <a:srgbClr val="000000"/>
-                </a:solidFill>
-                <a:latin typeface="Arial Unicode MS"/>
-                <a:ea typeface="Arial Unicode MS"/>
-                <a:cs typeface="Arial Unicode MS"/>
-              </a:rPr>
-              <a:t>，就是第九張那個「最多兩次回波」，你可以選先給最強的、先給最遠的、還是先給最近的。</a:t>
-            </a:r>
-            <a:r>
-              <a:rPr sz="800" b="1" lang="zh-TW" dirty="0">
-                <a:solidFill>
-                  <a:srgbClr val="000000"/>
-                </a:solidFill>
-                <a:latin typeface="Arial Unicode MS"/>
-                <a:ea typeface="Arial Unicode MS"/>
-                <a:cs typeface="Arial Unicode MS"/>
-              </a:rPr>
-              <a:t>Minimum range</a:t>
-            </a:r>
-            <a:r>
-              <a:rPr sz="800" lang="zh-TW" dirty="0">
-                <a:solidFill>
-                  <a:srgbClr val="000000"/>
-                </a:solidFill>
-                <a:latin typeface="Arial Unicode MS"/>
-                <a:ea typeface="Arial Unicode MS"/>
-                <a:cs typeface="Arial Unicode MS"/>
-              </a:rPr>
-              <a:t>，可以設 0、30 或 50 公分，比這個近的點直接不回報，用來擋掉打到自己車身和支架的那些點。</a:t>
-            </a:r>
-            <a:r>
-              <a:rPr sz="800" b="1" lang="zh-TW" dirty="0">
-                <a:solidFill>
-                  <a:srgbClr val="000000"/>
-                </a:solidFill>
-                <a:latin typeface="Arial Unicode MS"/>
-                <a:ea typeface="Arial Unicode MS"/>
-                <a:cs typeface="Arial Unicode MS"/>
-              </a:rPr>
-              <a:t>Azimuth masking</a:t>
-            </a:r>
-            <a:r>
-              <a:rPr sz="800" lang="zh-TW" dirty="0">
-                <a:solidFill>
-                  <a:srgbClr val="000000"/>
-                </a:solidFill>
-                <a:latin typeface="Arial Unicode MS"/>
-                <a:ea typeface="Arial Unicode MS"/>
-                <a:cs typeface="Arial Unicode MS"/>
-              </a:rPr>
-              <a:t>，把 360 度裡不要的那一段關掉，例如對著車頂的那一塊。</a:t>
-            </a:r>
-            <a:r>
-              <a:rPr sz="800" b="1" lang="zh-TW" dirty="0">
-                <a:solidFill>
-                  <a:srgbClr val="000000"/>
-                </a:solidFill>
-                <a:latin typeface="Arial Unicode MS"/>
-                <a:ea typeface="Arial Unicode MS"/>
-                <a:cs typeface="Arial Unicode MS"/>
-              </a:rPr>
-              <a:t>Low-power standby mode</a:t>
-            </a:r>
-            <a:r>
-              <a:rPr sz="800" lang="zh-TW" dirty="0">
-                <a:solidFill>
-                  <a:srgbClr val="000000"/>
-                </a:solidFill>
-                <a:latin typeface="Arial Unicode MS"/>
-                <a:ea typeface="Arial Unicode MS"/>
-                <a:cs typeface="Arial Unicode MS"/>
-              </a:rPr>
-              <a:t>，停車的時候省電。第一節第十二張我說過「可設定」那三個字是模式不是數字——</a:t>
+              <a:t>第一節第十二張我說過「可設定」那三個字是模式不是數字——</a:t>
             </a:r>
             <a:r>
               <a:rPr sz="800" b="1" lang="zh-TW" dirty="0">

--- a/第五週(10-08)/第五週_第2節_簡報.pptx
+++ b/第五週(10-08)/第五週_第2節_簡報.pptx
@@ -4160,29 +4160,7 @@
                 <a:ea typeface="Arial Unicode MS"/>
                 <a:cs typeface="Arial Unicode MS"/>
               </a:rPr>
-              <a:t>想想看：光達一秒轉十圈，相機一秒拍六十張。這兩個東西的節奏完全不一樣。
-</a:t>
-            </a:r>
-          </a:p>
-          <a:p>
-            <a:pPr algn="l">
-              <a:spcBef>
-                <a:spcPts val="0"/>
-              </a:spcBef>
-              <a:spcAft>
-                <a:spcPts val="133"/>
-              </a:spcAft>
-            </a:pPr>
-            <a:r>
-              <a:rPr sz="800" lang="zh-TW" dirty="0">
-                <a:solidFill>
-                  <a:srgbClr val="000000"/>
-                </a:solidFill>
-                <a:latin typeface="Arial Unicode MS"/>
-                <a:ea typeface="Arial Unicode MS"/>
-                <a:cs typeface="Arial Unicode MS"/>
-              </a:rPr>
-              <a:t>假設車子現在收到一張相機的畫面，還有一圈光達的點雲，要把它們合起來。問題是——</a:t>
+              <a:t>想想看：光達一秒轉十圈，相機一秒拍六十張，兩個的節奏完全不一樣。假設車子現在收到一張相機的畫面，還有一圈光達的點雲，要把它們合起來。問題是——</a:t>
             </a:r>
             <a:r>
               <a:rPr sz="800" b="1" lang="zh-TW" dirty="0">
@@ -4292,7 +4270,7 @@
                 <a:ea typeface="Arial Unicode MS"/>
                 <a:cs typeface="Arial Unicode MS"/>
               </a:rPr>
-              <a:t>。
+              <a:t>。而且這個誤差會跟剛剛的標定誤差疊加。
 </a:t>
             </a:r>
           </a:p>
@@ -4314,7 +4292,51 @@
                 <a:ea typeface="Arial Unicode MS"/>
                 <a:cs typeface="Arial Unicode MS"/>
               </a:rPr>
-              <a:t>而且這個誤差會跟剛剛的標定誤差疊加，兩個加起來就很可觀。
+              <a:t>解法有兩層。</a:t>
+            </a:r>
+            <a:r>
+              <a:rPr sz="800" b="1" lang="zh-TW" dirty="0">
+                <a:solidFill>
+                  <a:srgbClr val="000000"/>
+                </a:solidFill>
+                <a:latin typeface="Arial Unicode MS"/>
+                <a:ea typeface="Arial Unicode MS"/>
+                <a:cs typeface="Arial Unicode MS"/>
+              </a:rPr>
+              <a:t>第一層是共同時鐘</a:t>
+            </a:r>
+            <a:r>
+              <a:rPr sz="800" lang="zh-TW" dirty="0">
+                <a:solidFill>
+                  <a:srgbClr val="000000"/>
+                </a:solidFill>
+                <a:latin typeface="Arial Unicode MS"/>
+                <a:ea typeface="Arial Unicode MS"/>
+                <a:cs typeface="Arial Unicode MS"/>
+              </a:rPr>
+              <a:t>：每一顆感測器都在自己的資料上蓋</a:t>
+            </a:r>
+            <a:r>
+              <a:rPr sz="800" b="1" lang="zh-TW" dirty="0">
+                <a:solidFill>
+                  <a:srgbClr val="000000"/>
+                </a:solidFill>
+                <a:latin typeface="Arial Unicode MS"/>
+                <a:ea typeface="Arial Unicode MS"/>
+                <a:cs typeface="Arial Unicode MS"/>
+              </a:rPr>
+              <a:t>時間戳</a:t>
+            </a:r>
+            <a:r>
+              <a:rPr sz="800" lang="zh-TW" dirty="0">
+                <a:solidFill>
+                  <a:srgbClr val="000000"/>
+                </a:solidFill>
+                <a:latin typeface="Arial Unicode MS"/>
+                <a:ea typeface="Arial Unicode MS"/>
+                <a:cs typeface="Arial Unicode MS"/>
+              </a:rPr>
+              <a:t>，全車用同一個時鐘——車上通常用 PTP，一種跑在網路線上的對時協定。但這一層只讓你知道「各自是幾點拍的」，還沒有讓它們同時拍。
 </a:t>
             </a:r>
           </a:p>
@@ -4328,17 +4350,6 @@
               </a:spcAft>
             </a:pPr>
             <a:r>
-              <a:rPr sz="800" lang="zh-TW" dirty="0">
-                <a:solidFill>
-                  <a:srgbClr val="000000"/>
-                </a:solidFill>
-                <a:latin typeface="Arial Unicode MS"/>
-                <a:ea typeface="Arial Unicode MS"/>
-                <a:cs typeface="Arial Unicode MS"/>
-              </a:rPr>
-              <a:t>解法是讓每一顆感測器都在資料上蓋一個</a:t>
-            </a:r>
-            <a:r>
               <a:rPr sz="800" b="1" lang="zh-TW" dirty="0">
                 <a:solidFill>
                   <a:srgbClr val="000000"/>
@@ -4347,18 +4358,18 @@
                 <a:ea typeface="Arial Unicode MS"/>
                 <a:cs typeface="Arial Unicode MS"/>
               </a:rPr>
-              <a:t>時間戳</a:t>
-            </a:r>
-            <a:r>
-              <a:rPr sz="800" lang="zh-TW" dirty="0">
-                <a:solidFill>
-                  <a:srgbClr val="000000"/>
-                </a:solidFill>
-                <a:latin typeface="Arial Unicode MS"/>
-                <a:ea typeface="Arial Unicode MS"/>
-                <a:cs typeface="Arial Unicode MS"/>
-              </a:rPr>
-              <a:t>，而且全車用同一個時鐘。高階一點的做法，是讓光達轉到某個角度的時候，剛好跟相機的快門</a:t>
+              <a:t>第二層就是圖上那一行：multi-sensor phase lock。</a:t>
+            </a:r>
+            <a:r>
+              <a:rPr sz="800" lang="zh-TW" dirty="0">
+                <a:solidFill>
+                  <a:srgbClr val="000000"/>
+                </a:solidFill>
+                <a:latin typeface="Arial Unicode MS"/>
+                <a:ea typeface="Arial Unicode MS"/>
+                <a:cs typeface="Arial Unicode MS"/>
+              </a:rPr>
+              <a:t>光達是一直在轉的，一秒十圈，所以每一百毫秒經過正前方一次——</a:t>
             </a:r>
             <a:r>
               <a:rPr sz="800" b="1" lang="zh-TW" dirty="0">
@@ -4369,18 +4380,18 @@
                 <a:ea typeface="Arial Unicode MS"/>
                 <a:cs typeface="Arial Unicode MS"/>
               </a:rPr>
-              <a:t>對在一起</a:t>
-            </a:r>
-            <a:r>
-              <a:rPr sz="800" lang="zh-TW" dirty="0">
-                <a:solidFill>
-                  <a:srgbClr val="000000"/>
-                </a:solidFill>
-                <a:latin typeface="Arial Unicode MS"/>
-                <a:ea typeface="Arial Unicode MS"/>
-                <a:cs typeface="Arial Unicode MS"/>
-              </a:rPr>
-              <a:t>。OS1 規格表上 Additional Programmability 的</a:t>
+              <a:t>可是經過的那個時刻是隨機的</a:t>
+            </a:r>
+            <a:r>
+              <a:rPr sz="800" lang="zh-TW" dirty="0">
+                <a:solidFill>
+                  <a:srgbClr val="000000"/>
+                </a:solidFill>
+                <a:latin typeface="Arial Unicode MS"/>
+                <a:ea typeface="Arial Unicode MS"/>
+                <a:cs typeface="Arial Unicode MS"/>
+              </a:rPr>
+              <a:t>，開機的時候轉子從哪裡起步就決定了。Phase lock 做的事是：先對好時，再</a:t>
             </a:r>
             <a:r>
               <a:rPr sz="800" b="1" lang="zh-TW" dirty="0">
@@ -4391,18 +4402,84 @@
                 <a:ea typeface="Arial Unicode MS"/>
                 <a:cs typeface="Arial Unicode MS"/>
               </a:rPr>
-              <a:t>第一條</a:t>
-            </a:r>
-            <a:r>
-              <a:rPr sz="800" lang="zh-TW" dirty="0">
-                <a:solidFill>
-                  <a:srgbClr val="000000"/>
-                </a:solidFill>
-                <a:latin typeface="Arial Unicode MS"/>
-                <a:ea typeface="Arial Unicode MS"/>
-                <a:cs typeface="Arial Unicode MS"/>
-              </a:rPr>
-              <a:t>，multi-sensor phase lock，講的就是這件事。
+              <a:t>把轉子的相位鎖住</a:t>
+            </a:r>
+            <a:r>
+              <a:rPr sz="800" lang="zh-TW" dirty="0">
+                <a:solidFill>
+                  <a:srgbClr val="000000"/>
+                </a:solidFill>
+                <a:latin typeface="Arial Unicode MS"/>
+                <a:ea typeface="Arial Unicode MS"/>
+                <a:cs typeface="Arial Unicode MS"/>
+              </a:rPr>
+              <a:t>，讓它在每一個整十分之一秒的那個瞬間，剛好轉到你指定的角度。
+</a:t>
+            </a:r>
+          </a:p>
+          <a:p>
+            <a:pPr algn="l">
+              <a:spcBef>
+                <a:spcPts val="0"/>
+              </a:spcBef>
+              <a:spcAft>
+                <a:spcPts val="133"/>
+              </a:spcAft>
+            </a:pPr>
+            <a:r>
+              <a:rPr sz="800" lang="zh-TW" dirty="0">
+                <a:solidFill>
+                  <a:srgbClr val="000000"/>
+                </a:solidFill>
+                <a:latin typeface="Arial Unicode MS"/>
+                <a:ea typeface="Arial Unicode MS"/>
+                <a:cs typeface="Arial Unicode MS"/>
+              </a:rPr>
+              <a:t>所以你可以設成「每個十分之一秒的整點，光達剛好指著正前方」，再把相機的快門排在同一個時刻——</a:t>
+            </a:r>
+            <a:r>
+              <a:rPr sz="800" b="1" lang="zh-TW" dirty="0">
+                <a:solidFill>
+                  <a:srgbClr val="000000"/>
+                </a:solidFill>
+                <a:latin typeface="Arial Unicode MS"/>
+                <a:ea typeface="Arial Unicode MS"/>
+                <a:cs typeface="Arial Unicode MS"/>
+              </a:rPr>
+              <a:t>兩隻眼睛看的就是同一個瞬間的同一塊</a:t>
+            </a:r>
+            <a:r>
+              <a:rPr sz="800" lang="zh-TW" dirty="0">
+                <a:solidFill>
+                  <a:srgbClr val="000000"/>
+                </a:solidFill>
+                <a:latin typeface="Arial Unicode MS"/>
+                <a:ea typeface="Arial Unicode MS"/>
+                <a:cs typeface="Arial Unicode MS"/>
+              </a:rPr>
+              <a:t>。兩顆光達也一樣，鎖住相位就知道誰什麼時候掃到重疊區。這一行有一個前提要記住：</a:t>
+            </a:r>
+            <a:r>
+              <a:rPr sz="800" b="1" lang="zh-TW" dirty="0">
+                <a:solidFill>
+                  <a:srgbClr val="000000"/>
+                </a:solidFill>
+                <a:latin typeface="Arial Unicode MS"/>
+                <a:ea typeface="Arial Unicode MS"/>
+                <a:cs typeface="Arial Unicode MS"/>
+              </a:rPr>
+              <a:t>要先有外部時間來源</a:t>
+            </a:r>
+            <a:r>
+              <a:rPr sz="800" lang="zh-TW" dirty="0">
+                <a:solidFill>
+                  <a:srgbClr val="000000"/>
+                </a:solidFill>
+                <a:latin typeface="Arial Unicode MS"/>
+                <a:ea typeface="Arial Unicode MS"/>
+                <a:cs typeface="Arial Unicode MS"/>
+              </a:rPr>
+              <a:t>（PTP 或同步脈衝），沒有對時就鎖不住相位。
 </a:t>
             </a:r>
           </a:p>
@@ -4512,7 +4589,7 @@
                 <a:ea typeface="Arial Unicode MS"/>
                 <a:cs typeface="Arial Unicode MS"/>
               </a:rPr>
-              <a:t>既然看到了，我一行一行帶過去，各位會發現每一行都是今天講過的。</a:t>
+              <a:t>其他幾行快速帶過，各位會發現每一行都是今天講過的。</a:t>
             </a:r>
             <a:r>
               <a:rPr sz="800" b="1" lang="zh-TW" dirty="0">
@@ -4534,7 +4611,7 @@
                 <a:ea typeface="Arial Unicode MS"/>
                 <a:cs typeface="Arial Unicode MS"/>
               </a:rPr>
-              <a:t>——可以直接問這顆光達要它自己的</a:t>
+              <a:t>：可以直接問這顆光達要它自己的</a:t>
             </a:r>
             <a:r>
               <a:rPr sz="800" b="1" lang="zh-TW" dirty="0">
@@ -4556,7 +4633,7 @@
                 <a:ea typeface="Arial Unicode MS"/>
                 <a:cs typeface="Arial Unicode MS"/>
               </a:rPr>
-              <a:t>，剛剛第十三張才講過；底下的 </a:t>
+              <a:t>——底下的 </a:t>
             </a:r>
             <a:r>
               <a:rPr sz="800" b="1" lang="zh-TW" dirty="0">
@@ -4578,7 +4655,7 @@
                 <a:ea typeface="Arial Unicode MS"/>
                 <a:cs typeface="Arial Unicode MS"/>
               </a:rPr>
-              <a:t> 是每一條線束實際的垂直角度（出廠一條一條量過，不是真的平均分布），</a:t>
+              <a:t> 是每條線束實際的垂直角度（出廠量過，不是真的平均分布），</a:t>
             </a:r>
             <a:r>
               <a:rPr sz="800" b="1" lang="zh-TW" dirty="0">
@@ -4600,7 +4677,7 @@
                 <a:ea typeface="Arial Unicode MS"/>
                 <a:cs typeface="Arial Unicode MS"/>
               </a:rPr>
-              <a:t> 是機內那顆慣性感測器和光達本體的關係，等於原廠先標好的一組</a:t>
+              <a:t> 是機內那顆慣性感測器和光達本體的關係，等於原廠標好的</a:t>
             </a:r>
             <a:r>
               <a:rPr sz="800" b="1" lang="zh-TW" dirty="0">
@@ -4644,7 +4721,7 @@
                 <a:ea typeface="Arial Unicode MS"/>
                 <a:cs typeface="Arial Unicode MS"/>
               </a:rPr>
-              <a:t> 就是第九張的「最多兩次回波」，可以選先給最強的、最遠的還是最近的。</a:t>
+              <a:t> 就是第九張的兩次回波，可以選先給最強、最遠還是最近。</a:t>
             </a:r>
             <a:r>
               <a:rPr sz="800" b="1" lang="zh-TW" dirty="0">
@@ -4666,7 +4743,7 @@
                 <a:ea typeface="Arial Unicode MS"/>
                 <a:cs typeface="Arial Unicode MS"/>
               </a:rPr>
-              <a:t> 設 0、30 或 50 公分，比這個近的直接不回報，擋掉打到自己車身和支架的點。</a:t>
+              <a:t> 設 0、30 或 50 公分，比這個近的不回報。</a:t>
             </a:r>
             <a:r>
               <a:rPr sz="800" b="1" lang="zh-TW" dirty="0">
@@ -4688,7 +4765,7 @@
                 <a:ea typeface="Arial Unicode MS"/>
                 <a:cs typeface="Arial Unicode MS"/>
               </a:rPr>
-              <a:t> 把 360 度裡不要的那一段關掉——這一行其實和第一行沾得上邊，兩個都是在設「這一圈從哪裡開始、到哪裡結束」。</a:t>
+              <a:t> 把不要的那一段角度關掉——這一行和第一行是同一套東西，都在設「這一圈從哪裡開始、到哪裡結束」。</a:t>
             </a:r>
             <a:r>
               <a:rPr sz="800" b="1" lang="zh-TW" dirty="0">
@@ -4710,29 +4787,7 @@
                 <a:ea typeface="Arial Unicode MS"/>
                 <a:cs typeface="Arial Unicode MS"/>
               </a:rPr>
-              <a:t>，停車省電。
-</a:t>
-            </a:r>
-          </a:p>
-          <a:p>
-            <a:pPr algn="l">
-              <a:spcBef>
-                <a:spcPts val="0"/>
-              </a:spcBef>
-              <a:spcAft>
-                <a:spcPts val="133"/>
-              </a:spcAft>
-            </a:pPr>
-            <a:r>
-              <a:rPr sz="800" lang="zh-TW" dirty="0">
-                <a:solidFill>
-                  <a:srgbClr val="000000"/>
-                </a:solidFill>
-                <a:latin typeface="Arial Unicode MS"/>
-                <a:ea typeface="Arial Unicode MS"/>
-                <a:cs typeface="Arial Unicode MS"/>
-              </a:rPr>
-              <a:t>第一節第十二張我說過「可設定」那三個字是模式不是數字——</a:t>
+              <a:t> 停車省電。第一節第十二張我說過「可設定」是模式不是數字——</a:t>
             </a:r>
             <a:r>
               <a:rPr sz="800" b="1" lang="zh-TW" dirty="0">
@@ -4743,7 +4798,7 @@
                 <a:ea typeface="Arial Unicode MS"/>
                 <a:cs typeface="Arial Unicode MS"/>
               </a:rPr>
-              <a:t>這一整格就是最好的例子：同一顆硬體，設定不一樣，出來的資料就不一樣。</a:t>
+              <a:t>這一整格就是最好的例子。</a:t>
             </a:r>
             <a:r>
               <a:rPr sz="800" lang="zh-TW" dirty="0">
@@ -4798,29 +4853,7 @@
                 <a:ea typeface="Arial Unicode MS"/>
                 <a:cs typeface="Arial Unicode MS"/>
               </a:rPr>
-              <a:t>中間還有標定和同步這兩關。
-</a:t>
-            </a:r>
-          </a:p>
-          <a:p>
-            <a:pPr algn="l">
-              <a:spcBef>
-                <a:spcPts val="0"/>
-              </a:spcBef>
-              <a:spcAft>
-                <a:spcPts val="133"/>
-              </a:spcAft>
-            </a:pPr>
-            <a:r>
-              <a:rPr sz="800" lang="zh-TW" dirty="0">
-                <a:solidFill>
-                  <a:srgbClr val="000000"/>
-                </a:solidFill>
-                <a:latin typeface="Arial Unicode MS"/>
-                <a:ea typeface="Arial Unicode MS"/>
-                <a:cs typeface="Arial Unicode MS"/>
-              </a:rPr>
-              <a:t>這兩關在規格表上常常只有一兩行，甚至完全沒有，可是實際做系統的時候，它們吃掉的時間比選型還多。
+              <a:t>中間還有標定和同步這兩關，而它們在規格表上常常只有一兩行、甚至完全沒有，可是實際做系統的時候吃掉的時間比選型還多。
 </a:t>
             </a:r>
           </a:p>

--- a/第五週(10-08)/第五週_第2節_簡報.pptx
+++ b/第五週(10-08)/第五週_第2節_簡報.pptx
@@ -5,7 +5,7 @@
     <p:sldMasterId id="2147483648" r:id="rId1"/>
   </p:sldMasterIdLst>
   <p:notesMasterIdLst>
-    <p:notesMasterId r:id="rId17"/>
+    <p:notesMasterId r:id="rId18"/>
   </p:notesMasterIdLst>
   <p:sldIdLst>
     <p:sldId id="256" r:id="rId2"/>
@@ -23,6 +23,7 @@
     <p:sldId id="268" r:id="rId14"/>
     <p:sldId id="269" r:id="rId15"/>
     <p:sldId id="270" r:id="rId16"/>
+    <p:sldId id="271" r:id="rId17"/>
   </p:sldIdLst>
   <p:sldSz cx="9144000" cy="5143500"/>
   <p:notesSz cx="7560000" cy="10692000"/>
@@ -5391,6 +5392,336 @@
                 <a:cs typeface="Arial Unicode MS"/>
               </a:rPr>
               <a:t>15</a:t>
+            </a:r>
+          </a:p>
+        </p:txBody>
+      </p:sp>
+    </p:spTree>
+  </p:cSld>
+  <p:clrMapOvr>
+    <a:masterClrMapping/>
+  </p:clrMapOvr>
+</p:notes>
+</file>
+
+<file path=ppt/notesSlides/notesSlide16.xml><?xml version="1.0" encoding="utf-8"?>
+<p:notes xmlns:a="http://schemas.openxmlformats.org/drawingml/2006/main" xmlns:p="http://schemas.openxmlformats.org/presentationml/2006/main">
+  <p:cSld>
+    <p:spTree>
+      <p:nvGrpSpPr>
+        <p:cNvPr id="1" name=""/>
+        <p:cNvGrpSpPr/>
+        <p:nvPr/>
+      </p:nvGrpSpPr>
+      <p:grpSpPr>
+        <a:xfrm/>
+      </p:grpSpPr>
+      <p:sp>
+        <p:nvSpPr>
+          <p:cNvPr id="2" name="Slide Image Placeholder 1"/>
+          <p:cNvSpPr>
+            <a:spLocks noGrp="1"/>
+          </p:cNvSpPr>
+          <p:nvPr>
+            <p:ph type="sldImg" idx="2"/>
+          </p:nvPr>
+        </p:nvSpPr>
+        <p:spPr>
+          <a:xfrm>
+            <a:off x="540000" y="540000"/>
+            <a:ext cx="6480000" cy="3645000"/>
+          </a:xfrm>
+        </p:spPr>
+      </p:sp>
+      <p:sp>
+        <p:nvSpPr>
+          <p:cNvPr id="3" name="Notes Placeholder 2"/>
+          <p:cNvSpPr>
+            <a:spLocks noGrp="1"/>
+          </p:cNvSpPr>
+          <p:nvPr>
+            <p:ph type="body" idx="3"/>
+          </p:nvPr>
+        </p:nvSpPr>
+        <p:spPr>
+          <a:xfrm>
+            <a:off x="540000" y="4440000"/>
+            <a:ext cx="6480000" cy="5500000"/>
+          </a:xfrm>
+        </p:spPr>
+        <p:txBody>
+          <a:bodyPr vert="horz" wrap="square" anchor="t" lIns="91440" rIns="91440" tIns="45720" bIns="45720"/>
+          <a:lstStyle/>
+          <a:p>
+            <a:pPr algn="l">
+              <a:spcBef>
+                <a:spcPts val="0"/>
+              </a:spcBef>
+              <a:spcAft>
+                <a:spcPts val="200"/>
+              </a:spcAft>
+            </a:pPr>
+            <a:r>
+              <a:rPr sz="1200" b="1" lang="zh-TW" dirty="0">
+                <a:solidFill>
+                  <a:srgbClr val="000000"/>
+                </a:solidFill>
+                <a:latin typeface="Arial Unicode MS"/>
+                <a:ea typeface="Arial Unicode MS"/>
+                <a:cs typeface="Arial Unicode MS"/>
+              </a:rPr>
+              <a:t>▍這一張要做什麼</a:t>
+            </a:r>
+            <a:r>
+              <a:rPr sz="1200" lang="zh-TW" dirty="0">
+                <a:solidFill>
+                  <a:srgbClr val="000000"/>
+                </a:solidFill>
+                <a:latin typeface="Arial Unicode MS"/>
+                <a:ea typeface="Arial Unicode MS"/>
+                <a:cs typeface="Arial Unicode MS"/>
+              </a:rPr>
+              <a:t>
+</a:t>
+            </a:r>
+          </a:p>
+          <a:p>
+            <a:pPr algn="l">
+              <a:spcBef>
+                <a:spcPts val="0"/>
+              </a:spcBef>
+              <a:spcAft>
+                <a:spcPts val="200"/>
+              </a:spcAft>
+            </a:pPr>
+            <a:r>
+              <a:rPr sz="1200" lang="zh-TW" dirty="0">
+                <a:solidFill>
+                  <a:srgbClr val="000000"/>
+                </a:solidFill>
+                <a:latin typeface="Arial Unicode MS"/>
+                <a:ea typeface="Arial Unicode MS"/>
+                <a:cs typeface="Arial Unicode MS"/>
+              </a:rPr>
+              <a:t>附錄：光達那份規格書的完整原頁（規格那三頁），備查用。
+</a:t>
+            </a:r>
+          </a:p>
+          <a:p>
+            <a:pPr algn="l">
+              <a:spcBef>
+                <a:spcPts val="0"/>
+              </a:spcBef>
+              <a:spcAft>
+                <a:spcPts val="200"/>
+              </a:spcAft>
+            </a:pPr>
+            <a:r>
+              <a:rPr sz="1200" b="1" lang="zh-TW" dirty="0">
+                <a:solidFill>
+                  <a:srgbClr val="000000"/>
+                </a:solidFill>
+                <a:latin typeface="Arial Unicode MS"/>
+                <a:ea typeface="Arial Unicode MS"/>
+                <a:cs typeface="Arial Unicode MS"/>
+              </a:rPr>
+              <a:t>▍畫面上圈這裡</a:t>
+            </a:r>
+            <a:r>
+              <a:rPr sz="1200" lang="zh-TW" dirty="0">
+                <a:solidFill>
+                  <a:srgbClr val="000000"/>
+                </a:solidFill>
+                <a:latin typeface="Arial Unicode MS"/>
+                <a:ea typeface="Arial Unicode MS"/>
+                <a:cs typeface="Arial Unicode MS"/>
+              </a:rPr>
+              <a:t>
+</a:t>
+            </a:r>
+          </a:p>
+          <a:p>
+            <a:pPr algn="l">
+              <a:spcBef>
+                <a:spcPts val="0"/>
+              </a:spcBef>
+              <a:spcAft>
+                <a:spcPts val="200"/>
+              </a:spcAft>
+            </a:pPr>
+            <a:r>
+              <a:rPr sz="1200" lang="zh-TW" dirty="0">
+                <a:solidFill>
+                  <a:srgbClr val="000000"/>
+                </a:solidFill>
+                <a:latin typeface="Arial Unicode MS"/>
+                <a:ea typeface="Arial Unicode MS"/>
+                <a:cs typeface="Arial Unicode MS"/>
+              </a:rPr>
+              <a:t>上課不唸。學生問「你圈的那一行在哪」的時候翻到這裡，或放映時放大看。
+</a:t>
+            </a:r>
+          </a:p>
+          <a:p>
+            <a:pPr algn="l">
+              <a:spcBef>
+                <a:spcPts val="0"/>
+              </a:spcBef>
+              <a:spcAft>
+                <a:spcPts val="200"/>
+              </a:spcAft>
+            </a:pPr>
+            <a:r>
+              <a:rPr sz="1200" b="1" lang="zh-TW" dirty="0">
+                <a:solidFill>
+                  <a:srgbClr val="000000"/>
+                </a:solidFill>
+                <a:latin typeface="Arial Unicode MS"/>
+                <a:ea typeface="Arial Unicode MS"/>
+                <a:cs typeface="Arial Unicode MS"/>
+              </a:rPr>
+              <a:t>▍以下照著唸</a:t>
+            </a:r>
+            <a:r>
+              <a:rPr sz="1200" lang="zh-TW" dirty="0">
+                <a:solidFill>
+                  <a:srgbClr val="000000"/>
+                </a:solidFill>
+                <a:latin typeface="Arial Unicode MS"/>
+                <a:ea typeface="Arial Unicode MS"/>
+                <a:cs typeface="Arial Unicode MS"/>
+              </a:rPr>
+              <a:t>
+</a:t>
+            </a:r>
+          </a:p>
+          <a:p>
+            <a:pPr algn="l">
+              <a:spcBef>
+                <a:spcPts val="0"/>
+              </a:spcBef>
+              <a:spcAft>
+                <a:spcPts val="200"/>
+              </a:spcAft>
+            </a:pPr>
+            <a:r>
+              <a:rPr sz="1200" lang="zh-TW" dirty="0">
+                <a:solidFill>
+                  <a:srgbClr val="000000"/>
+                </a:solidFill>
+                <a:latin typeface="Arial Unicode MS"/>
+                <a:ea typeface="Arial Unicode MS"/>
+                <a:cs typeface="Arial Unicode MS"/>
+              </a:rPr>
+              <a:t>這一張也不唸，是附錄。
+</a:t>
+            </a:r>
+          </a:p>
+          <a:p>
+            <a:pPr algn="l">
+              <a:spcBef>
+                <a:spcPts val="0"/>
+              </a:spcBef>
+              <a:spcAft>
+                <a:spcPts val="200"/>
+              </a:spcAft>
+            </a:pPr>
+            <a:r>
+              <a:rPr sz="1200" lang="zh-TW" dirty="0">
+                <a:solidFill>
+                  <a:srgbClr val="000000"/>
+                </a:solidFill>
+                <a:latin typeface="Arial Unicode MS"/>
+                <a:ea typeface="Arial Unicode MS"/>
+                <a:cs typeface="Arial Unicode MS"/>
+              </a:rPr>
+              <a:t>今天兩節圈過的光達那幾行，全部都在這三頁上：第一頁是 HIGHLIGHTS 和 OPTICAL PERFORMANCE——測距、視野、通道數、每圈點數都在那裡；第二頁有 LASER 那一段，Class 1、865 奈米、光束寬度和發散角；第三頁有 Additional Programmability，multi-sensor phase lock 那一行。
+</a:t>
+            </a:r>
+          </a:p>
+          <a:p>
+            <a:pPr algn="l">
+              <a:spcBef>
+                <a:spcPts val="0"/>
+              </a:spcBef>
+              <a:spcAft>
+                <a:spcPts val="200"/>
+              </a:spcAft>
+            </a:pPr>
+            <a:r>
+              <a:rPr sz="1200" lang="zh-TW" dirty="0">
+                <a:solidFill>
+                  <a:srgbClr val="000000"/>
+                </a:solidFill>
+                <a:latin typeface="Arial Unicode MS"/>
+                <a:ea typeface="Arial Unicode MS"/>
+                <a:cs typeface="Arial Unicode MS"/>
+              </a:rPr>
+              <a:t>原始 PDF 總共八頁，後面五頁是外觀尺寸、配件和接線圖，和今天要讀的規格沒有關係，所以沒有放進來。
+</a:t>
+            </a:r>
+          </a:p>
+          <a:p>
+            <a:pPr algn="l">
+              <a:spcBef>
+                <a:spcPts val="0"/>
+              </a:spcBef>
+              <a:spcAft>
+                <a:spcPts val="200"/>
+              </a:spcAft>
+            </a:pPr>
+            <a:r>
+              <a:rPr sz="1200" lang="zh-TW" dirty="0">
+                <a:solidFill>
+                  <a:srgbClr val="000000"/>
+                </a:solidFill>
+                <a:latin typeface="Arial Unicode MS"/>
+                <a:ea typeface="Arial Unicode MS"/>
+                <a:cs typeface="Arial Unicode MS"/>
+              </a:rPr>
+              <a:t>放映的時候可以放大看；要看完整的八頁，到 Ouster 官網下載。</a:t>
+            </a:r>
+          </a:p>
+        </p:txBody>
+      </p:sp>
+      <p:sp>
+        <p:nvSpPr>
+          <p:cNvPr id="4" name="Slide Number Placeholder 3"/>
+          <p:cNvSpPr>
+            <a:spLocks noGrp="1"/>
+          </p:cNvSpPr>
+          <p:nvPr>
+            <p:ph type="sldNum" idx="5"/>
+          </p:nvPr>
+        </p:nvSpPr>
+        <p:spPr>
+          <a:xfrm>
+            <a:off x="6500000" y="10200000"/>
+            <a:ext cx="500000" cy="300000"/>
+          </a:xfrm>
+        </p:spPr>
+        <p:txBody>
+          <a:bodyPr vert="horz" wrap="square" anchor="t" lIns="91440" rIns="91440" tIns="45720" bIns="45720"/>
+          <a:lstStyle/>
+          <a:p>
+            <a:pPr algn="l">
+              <a:spcBef>
+                <a:spcPts val="0"/>
+              </a:spcBef>
+              <a:spcAft>
+                <a:spcPts val="167"/>
+              </a:spcAft>
+            </a:pPr>
+            <a:r>
+              <a:rPr sz="1000" lang="zh-TW" dirty="0">
+                <a:solidFill>
+                  <a:srgbClr val="000000"/>
+                </a:solidFill>
+                <a:latin typeface="Arial Unicode MS"/>
+                <a:ea typeface="Arial Unicode MS"/>
+                <a:cs typeface="Arial Unicode MS"/>
+              </a:rPr>
+              <a:t>16</a:t>
             </a:r>
           </a:p>
         </p:txBody>
@@ -12778,7 +13109,7 @@
                 <a:ea typeface="Arial" pitchFamily="34" charset="-122"/>
                 <a:cs typeface="Arial" pitchFamily="34" charset="-120"/>
               </a:rPr>
-              <a:t>10 / 15</a:t>
+              <a:t>10 / 16</a:t>
             </a:r>
             <a:endParaRPr lang="en-US" sz="900" dirty="0"/>
           </a:p>
@@ -13527,7 +13858,7 @@
                 <a:ea typeface="Arial" pitchFamily="34" charset="-122"/>
                 <a:cs typeface="Arial" pitchFamily="34" charset="-120"/>
               </a:rPr>
-              <a:t>11 / 15</a:t>
+              <a:t>11 / 16</a:t>
             </a:r>
             <a:endParaRPr lang="en-US" sz="900" dirty="0"/>
           </a:p>
@@ -13847,7 +14178,7 @@
                 <a:ea typeface="Arial" pitchFamily="34" charset="-122"/>
                 <a:cs typeface="Arial" pitchFamily="34" charset="-120"/>
               </a:rPr>
-              <a:t>12 / 15</a:t>
+              <a:t>12 / 16</a:t>
             </a:r>
             <a:endParaRPr lang="en-US" sz="900" dirty="0"/>
           </a:p>
@@ -14947,7 +15278,7 @@
                 <a:ea typeface="Arial" pitchFamily="34" charset="-122"/>
                 <a:cs typeface="Arial" pitchFamily="34" charset="-120"/>
               </a:rPr>
-              <a:t>13 / 15</a:t>
+              <a:t>13 / 16</a:t>
             </a:r>
             <a:endParaRPr lang="en-US" sz="880" dirty="0"/>
           </a:p>
@@ -15397,7 +15728,7 @@
                 <a:ea typeface="Arial" pitchFamily="34" charset="-122"/>
                 <a:cs typeface="Arial" pitchFamily="34" charset="-120"/>
               </a:rPr>
-              <a:t>14 / 15</a:t>
+              <a:t>14 / 16</a:t>
             </a:r>
             <a:endParaRPr lang="en-US" sz="900" dirty="0"/>
           </a:p>
@@ -15901,7 +16232,7 @@
                 <a:ea typeface="Arial" pitchFamily="34" charset="-122"/>
                 <a:cs typeface="Arial" pitchFamily="34" charset="-120"/>
               </a:rPr>
-              <a:t>15 / 15</a:t>
+              <a:t>15 / 16</a:t>
             </a:r>
             <a:endParaRPr lang="en-US" sz="900" dirty="0"/>
           </a:p>
@@ -15935,6 +16266,420 @@
               <a:rPr lang="en-US" sz="900" dirty="0">
                 <a:solidFill>
                   <a:srgbClr val="9FB3C8"/>
+                </a:solidFill>
+                <a:latin typeface="Arial" pitchFamily="34" charset="0"/>
+                <a:ea typeface="Arial" pitchFamily="34" charset="-122"/>
+                <a:cs typeface="Arial" pitchFamily="34" charset="-120"/>
+              </a:rPr>
+              <a:t>Tiết 2 · 第 2 節</a:t>
+            </a:r>
+            <a:endParaRPr lang="en-US" sz="900" dirty="0"/>
+          </a:p>
+        </p:txBody>
+      </p:sp>
+    </p:spTree>
+  </p:cSld>
+  <p:clrMapOvr>
+    <a:masterClrMapping/>
+  </p:clrMapOvr>
+</p:sld>
+</file>
+
+<file path=ppt/slides/slide16.xml><?xml version="1.0" encoding="utf-8"?>
+<p:sld xmlns:a="http://schemas.openxmlformats.org/drawingml/2006/main" xmlns:r="http://schemas.openxmlformats.org/officeDocument/2006/relationships" xmlns:p="http://schemas.openxmlformats.org/presentationml/2006/main">
+  <p:cSld name="Slide 16">
+    <p:spTree>
+      <p:nvGrpSpPr>
+        <p:cNvPr id="1" name=""/>
+        <p:cNvGrpSpPr/>
+        <p:nvPr/>
+      </p:nvGrpSpPr>
+      <p:grpSpPr>
+        <a:xfrm>
+          <a:off x="0" y="0"/>
+          <a:ext cx="1" cy="1"/>
+          <a:chOff x="0" y="0"/>
+          <a:chExt cx="0" cy="0"/>
+        </a:xfrm>
+      </p:grpSpPr>
+      <p:sp>
+        <p:nvSpPr>
+          <p:cNvPr id="2" name="Text 0"/>
+          <p:cNvSpPr txBox="1"/>
+          <p:nvPr/>
+        </p:nvSpPr>
+        <p:spPr>
+          <a:xfrm>
+            <a:off x="502920" y="420624"/>
+            <a:ext cx="8138160" cy="274320"/>
+          </a:xfrm>
+          <a:prstGeom prst="rect">
+            <a:avLst/>
+          </a:prstGeom>
+          <a:noFill/>
+          <a:ln/>
+        </p:spPr>
+        <p:txBody>
+          <a:bodyPr wrap="square" lIns="0" tIns="0" rIns="0" bIns="0" rtlCol="0" anchor="ctr"/>
+          <a:lstStyle/>
+          <a:p>
+            <a:pPr indent="0" marL="0">
+              <a:buNone/>
+            </a:pPr>
+            <a:r>
+              <a:rPr lang="en-US" sz="1250" b="1" dirty="0">
+                <a:solidFill>
+                  <a:srgbClr val="007F72"/>
+                </a:solidFill>
+                <a:latin typeface="Arial" pitchFamily="34" charset="0"/>
+                <a:ea typeface="Arial" pitchFamily="34" charset="-122"/>
+                <a:cs typeface="Arial" pitchFamily="34" charset="-120"/>
+              </a:rPr>
+              <a:t>Phụ lục · 附錄（不計時）</a:t>
+            </a:r>
+            <a:endParaRPr lang="en-US" sz="1250" dirty="0"/>
+          </a:p>
+        </p:txBody>
+      </p:sp>
+      <p:sp>
+        <p:nvSpPr>
+          <p:cNvPr id="3" name="Text 1"/>
+          <p:cNvSpPr txBox="1"/>
+          <p:nvPr/>
+        </p:nvSpPr>
+        <p:spPr>
+          <a:xfrm>
+            <a:off x="502920" y="731520"/>
+            <a:ext cx="8138160" cy="585216"/>
+          </a:xfrm>
+          <a:prstGeom prst="rect">
+            <a:avLst/>
+          </a:prstGeom>
+          <a:noFill/>
+          <a:ln/>
+        </p:spPr>
+        <p:txBody>
+          <a:bodyPr wrap="square" lIns="0" tIns="0" rIns="0" bIns="0" rtlCol="0" anchor="t"/>
+          <a:lstStyle/>
+          <a:p>
+            <a:pPr indent="0" marL="0">
+              <a:lnSpc>
+                <a:spcPct val="120000"/>
+              </a:lnSpc>
+              <a:buNone/>
+            </a:pPr>
+            <a:r>
+              <a:rPr lang="en-US" sz="1700" b="1" dirty="0">
+                <a:solidFill>
+                  <a:srgbClr val="0B1F3A"/>
+                </a:solidFill>
+                <a:latin typeface="Arial" pitchFamily="34" charset="0"/>
+                <a:ea typeface="Arial" pitchFamily="34" charset="-122"/>
+                <a:cs typeface="Arial" pitchFamily="34" charset="-120"/>
+              </a:rPr>
+              <a:t>Ouster OS1 — toàn bộ datasheet gốc (3 trang thông số)</a:t>
+            </a:r>
+            <a:endParaRPr lang="en-US" sz="1700" dirty="0"/>
+          </a:p>
+          <a:p>
+            <a:pPr indent="0" marL="0">
+              <a:lnSpc>
+                <a:spcPct val="120000"/>
+              </a:lnSpc>
+              <a:buNone/>
+            </a:pPr>
+            <a:r>
+              <a:rPr lang="en-US" sz="1300" dirty="0">
+                <a:solidFill>
+                  <a:srgbClr val="007F72"/>
+                </a:solidFill>
+                <a:latin typeface="微軟正黑體" pitchFamily="34" charset="0"/>
+                <a:ea typeface="微軟正黑體" pitchFamily="34" charset="-122"/>
+                <a:cs typeface="微軟正黑體" pitchFamily="34" charset="-120"/>
+              </a:rPr>
+              <a:t>Ouster OS1 — 廠商規格書原頁（規格那三頁）</a:t>
+            </a:r>
+            <a:endParaRPr lang="en-US" sz="1700" dirty="0"/>
+          </a:p>
+        </p:txBody>
+      </p:sp>
+      <p:sp>
+        <p:nvSpPr>
+          <p:cNvPr id="4" name="Shape 2"/>
+          <p:cNvSpPr/>
+          <p:nvPr/>
+        </p:nvSpPr>
+        <p:spPr>
+          <a:xfrm>
+            <a:off x="970511" y="1371600"/>
+            <a:ext cx="2340033" cy="3017520"/>
+          </a:xfrm>
+          <a:prstGeom prst="rect">
+            <a:avLst/>
+          </a:prstGeom>
+          <a:solidFill>
+            <a:srgbClr val="FFFFFF"/>
+          </a:solidFill>
+          <a:ln w="12700">
+            <a:solidFill>
+              <a:srgbClr val="DBE3EA"/>
+            </a:solidFill>
+            <a:prstDash val="solid"/>
+          </a:ln>
+        </p:spPr>
+      </p:sp>
+      <p:pic>
+        <p:nvPicPr>
+          <p:cNvPr id="5" name="Image 0" descr="/Users/tsengchenghsun/Class/carClass/Claude outputs/第五週(10-8)/src/img/w5_ds_os1_p1.png">    </p:cNvPr>
+          <p:cNvPicPr>
+            <a:picLocks noChangeAspect="1"/>
+          </p:cNvPicPr>
+          <p:nvPr/>
+        </p:nvPicPr>
+        <p:blipFill>
+          <a:blip r:embed="rId1"/>
+          <a:stretch>
+            <a:fillRect/>
+          </a:stretch>
+        </p:blipFill>
+        <p:spPr>
+          <a:xfrm>
+            <a:off x="988799" y="1389888"/>
+            <a:ext cx="2303457" cy="2980944"/>
+          </a:xfrm>
+          <a:prstGeom prst="rect">
+            <a:avLst/>
+          </a:prstGeom>
+        </p:spPr>
+      </p:pic>
+      <p:sp>
+        <p:nvSpPr>
+          <p:cNvPr id="6" name="Shape 3"/>
+          <p:cNvSpPr/>
+          <p:nvPr/>
+        </p:nvSpPr>
+        <p:spPr>
+          <a:xfrm>
+            <a:off x="3401984" y="1371600"/>
+            <a:ext cx="2340033" cy="3017520"/>
+          </a:xfrm>
+          <a:prstGeom prst="rect">
+            <a:avLst/>
+          </a:prstGeom>
+          <a:solidFill>
+            <a:srgbClr val="FFFFFF"/>
+          </a:solidFill>
+          <a:ln w="12700">
+            <a:solidFill>
+              <a:srgbClr val="DBE3EA"/>
+            </a:solidFill>
+            <a:prstDash val="solid"/>
+          </a:ln>
+        </p:spPr>
+      </p:sp>
+      <p:pic>
+        <p:nvPicPr>
+          <p:cNvPr id="7" name="Image 1" descr="/Users/tsengchenghsun/Class/carClass/Claude outputs/第五週(10-8)/src/img/w5_ds_os1_p2.png">    </p:cNvPr>
+          <p:cNvPicPr>
+            <a:picLocks noChangeAspect="1"/>
+          </p:cNvPicPr>
+          <p:nvPr/>
+        </p:nvPicPr>
+        <p:blipFill>
+          <a:blip r:embed="rId2"/>
+          <a:stretch>
+            <a:fillRect/>
+          </a:stretch>
+        </p:blipFill>
+        <p:spPr>
+          <a:xfrm>
+            <a:off x="3420272" y="1389888"/>
+            <a:ext cx="2303457" cy="2980944"/>
+          </a:xfrm>
+          <a:prstGeom prst="rect">
+            <a:avLst/>
+          </a:prstGeom>
+        </p:spPr>
+      </p:pic>
+      <p:sp>
+        <p:nvSpPr>
+          <p:cNvPr id="8" name="Shape 4"/>
+          <p:cNvSpPr/>
+          <p:nvPr/>
+        </p:nvSpPr>
+        <p:spPr>
+          <a:xfrm>
+            <a:off x="5833456" y="1371600"/>
+            <a:ext cx="2340033" cy="3017520"/>
+          </a:xfrm>
+          <a:prstGeom prst="rect">
+            <a:avLst/>
+          </a:prstGeom>
+          <a:solidFill>
+            <a:srgbClr val="FFFFFF"/>
+          </a:solidFill>
+          <a:ln w="12700">
+            <a:solidFill>
+              <a:srgbClr val="DBE3EA"/>
+            </a:solidFill>
+            <a:prstDash val="solid"/>
+          </a:ln>
+        </p:spPr>
+      </p:sp>
+      <p:pic>
+        <p:nvPicPr>
+          <p:cNvPr id="9" name="Image 2" descr="/Users/tsengchenghsun/Class/carClass/Claude outputs/第五週(10-8)/src/img/w5_ds_os1_p3.png">    </p:cNvPr>
+          <p:cNvPicPr>
+            <a:picLocks noChangeAspect="1"/>
+          </p:cNvPicPr>
+          <p:nvPr/>
+        </p:nvPicPr>
+        <p:blipFill>
+          <a:blip r:embed="rId3"/>
+          <a:stretch>
+            <a:fillRect/>
+          </a:stretch>
+        </p:blipFill>
+        <p:spPr>
+          <a:xfrm>
+            <a:off x="5851744" y="1389888"/>
+            <a:ext cx="2303457" cy="2980944"/>
+          </a:xfrm>
+          <a:prstGeom prst="rect">
+            <a:avLst/>
+          </a:prstGeom>
+        </p:spPr>
+      </p:pic>
+      <p:sp>
+        <p:nvSpPr>
+          <p:cNvPr id="10" name="Text 5"/>
+          <p:cNvSpPr txBox="1"/>
+          <p:nvPr/>
+        </p:nvSpPr>
+        <p:spPr>
+          <a:xfrm>
+            <a:off x="502920" y="4407408"/>
+            <a:ext cx="8138160" cy="201168"/>
+          </a:xfrm>
+          <a:prstGeom prst="rect">
+            <a:avLst/>
+          </a:prstGeom>
+          <a:noFill/>
+          <a:ln/>
+        </p:spPr>
+        <p:txBody>
+          <a:bodyPr wrap="square" lIns="0" tIns="0" rIns="0" bIns="0" rtlCol="0" anchor="ctr"/>
+          <a:lstStyle/>
+          <a:p>
+            <a:pPr algn="ctr" indent="0" marL="0">
+              <a:buNone/>
+            </a:pPr>
+            <a:r>
+              <a:rPr lang="en-US" sz="850" dirty="0">
+                <a:solidFill>
+                  <a:srgbClr val="5F7183"/>
+                </a:solidFill>
+                <a:latin typeface="Arial" pitchFamily="34" charset="0"/>
+                <a:ea typeface="Arial" pitchFamily="34" charset="-122"/>
+                <a:cs typeface="Arial" pitchFamily="34" charset="-120"/>
+              </a:rPr>
+              <a:t>Ouster OS1 datasheet, hardware Rev7 / firmware 3.2 · 官方 PDF 第 1–3 頁原頁全文 · 讀取 2026/10/02 · 版權歸 Ouster，課堂引用</a:t>
+            </a:r>
+            <a:endParaRPr lang="en-US" sz="850" dirty="0"/>
+          </a:p>
+        </p:txBody>
+      </p:sp>
+      <p:pic>
+        <p:nvPicPr>
+          <p:cNvPr id="12" name="Image 3" descr="/Users/tsengchenghsun/Class/carClass/Claude outputs/第五週(10-8)/src/logo.png">    </p:cNvPr>
+          <p:cNvPicPr>
+            <a:picLocks noChangeAspect="1"/>
+          </p:cNvPicPr>
+          <p:nvPr/>
+        </p:nvPicPr>
+        <p:blipFill>
+          <a:blip r:embed="rId4"/>
+          <a:stretch>
+            <a:fillRect/>
+          </a:stretch>
+        </p:blipFill>
+        <p:spPr>
+          <a:xfrm>
+            <a:off x="7882128" y="109728"/>
+            <a:ext cx="1097280" cy="242439"/>
+          </a:xfrm>
+          <a:prstGeom prst="rect">
+            <a:avLst/>
+          </a:prstGeom>
+        </p:spPr>
+      </p:pic>
+      <p:sp>
+        <p:nvSpPr>
+          <p:cNvPr id="13" name="Text 6"/>
+          <p:cNvSpPr txBox="1"/>
+          <p:nvPr/>
+        </p:nvSpPr>
+        <p:spPr>
+          <a:xfrm>
+            <a:off x="109728" y="128016"/>
+            <a:ext cx="822960" cy="256032"/>
+          </a:xfrm>
+          <a:prstGeom prst="rect">
+            <a:avLst/>
+          </a:prstGeom>
+          <a:noFill/>
+          <a:ln/>
+        </p:spPr>
+        <p:txBody>
+          <a:bodyPr wrap="square" lIns="0" tIns="0" rIns="0" bIns="0" rtlCol="0" anchor="ctr"/>
+          <a:lstStyle/>
+          <a:p>
+            <a:pPr indent="0" marL="0">
+              <a:buNone/>
+            </a:pPr>
+            <a:r>
+              <a:rPr lang="en-US" sz="900" dirty="0">
+                <a:solidFill>
+                  <a:srgbClr val="5F7183"/>
+                </a:solidFill>
+                <a:latin typeface="Arial" pitchFamily="34" charset="0"/>
+                <a:ea typeface="Arial" pitchFamily="34" charset="-122"/>
+                <a:cs typeface="Arial" pitchFamily="34" charset="-120"/>
+              </a:rPr>
+              <a:t>16 / 16</a:t>
+            </a:r>
+            <a:endParaRPr lang="en-US" sz="900" dirty="0"/>
+          </a:p>
+        </p:txBody>
+      </p:sp>
+      <p:sp>
+        <p:nvSpPr>
+          <p:cNvPr id="14" name="Text 7"/>
+          <p:cNvSpPr txBox="1"/>
+          <p:nvPr/>
+        </p:nvSpPr>
+        <p:spPr>
+          <a:xfrm>
+            <a:off x="960120" y="128016"/>
+            <a:ext cx="2011680" cy="256032"/>
+          </a:xfrm>
+          <a:prstGeom prst="rect">
+            <a:avLst/>
+          </a:prstGeom>
+          <a:noFill/>
+          <a:ln/>
+        </p:spPr>
+        <p:txBody>
+          <a:bodyPr wrap="square" lIns="0" tIns="0" rIns="0" bIns="0" rtlCol="0" anchor="ctr"/>
+          <a:lstStyle/>
+          <a:p>
+            <a:pPr indent="0" marL="0">
+              <a:buNone/>
+            </a:pPr>
+            <a:r>
+              <a:rPr lang="en-US" sz="900" dirty="0">
+                <a:solidFill>
+                  <a:srgbClr val="5F7183"/>
                 </a:solidFill>
                 <a:latin typeface="Arial" pitchFamily="34" charset="0"/>
                 <a:ea typeface="Arial" pitchFamily="34" charset="-122"/>
@@ -16221,7 +16966,7 @@
                 <a:ea typeface="Arial" pitchFamily="34" charset="-122"/>
                 <a:cs typeface="Arial" pitchFamily="34" charset="-120"/>
               </a:rPr>
-              <a:t>2 / 15</a:t>
+              <a:t>2 / 16</a:t>
             </a:r>
             <a:endParaRPr lang="en-US" sz="900" dirty="0"/>
           </a:p>
@@ -16671,7 +17416,7 @@
                 <a:ea typeface="Arial" pitchFamily="34" charset="-122"/>
                 <a:cs typeface="Arial" pitchFamily="34" charset="-120"/>
               </a:rPr>
-              <a:t>3 / 15</a:t>
+              <a:t>3 / 16</a:t>
             </a:r>
             <a:endParaRPr lang="en-US" sz="900" dirty="0"/>
           </a:p>
@@ -17121,7 +17866,7 @@
                 <a:ea typeface="Arial" pitchFamily="34" charset="-122"/>
                 <a:cs typeface="Arial" pitchFamily="34" charset="-120"/>
               </a:rPr>
-              <a:t>4 / 15</a:t>
+              <a:t>4 / 16</a:t>
             </a:r>
             <a:endParaRPr lang="en-US" sz="900" dirty="0"/>
           </a:p>
@@ -17571,7 +18316,7 @@
                 <a:ea typeface="Arial" pitchFamily="34" charset="-122"/>
                 <a:cs typeface="Arial" pitchFamily="34" charset="-120"/>
               </a:rPr>
-              <a:t>5 / 15</a:t>
+              <a:t>5 / 16</a:t>
             </a:r>
             <a:endParaRPr lang="en-US" sz="900" dirty="0"/>
           </a:p>
@@ -17891,7 +18636,7 @@
                 <a:ea typeface="Arial" pitchFamily="34" charset="-122"/>
                 <a:cs typeface="Arial" pitchFamily="34" charset="-120"/>
               </a:rPr>
-              <a:t>6 / 15</a:t>
+              <a:t>6 / 16</a:t>
             </a:r>
             <a:endParaRPr lang="en-US" sz="900" dirty="0"/>
           </a:p>
@@ -19526,7 +20271,7 @@
                 <a:ea typeface="Arial" pitchFamily="34" charset="-122"/>
                 <a:cs typeface="Arial" pitchFamily="34" charset="-120"/>
               </a:rPr>
-              <a:t>7 / 15</a:t>
+              <a:t>7 / 16</a:t>
             </a:r>
             <a:endParaRPr lang="en-US" sz="880" dirty="0"/>
           </a:p>
@@ -19976,7 +20721,7 @@
                 <a:ea typeface="Arial" pitchFamily="34" charset="-122"/>
                 <a:cs typeface="Arial" pitchFamily="34" charset="-120"/>
               </a:rPr>
-              <a:t>8 / 15</a:t>
+              <a:t>8 / 16</a:t>
             </a:r>
             <a:endParaRPr lang="en-US" sz="900" dirty="0"/>
           </a:p>
@@ -20426,7 +21171,7 @@
                 <a:ea typeface="Arial" pitchFamily="34" charset="-122"/>
                 <a:cs typeface="Arial" pitchFamily="34" charset="-120"/>
               </a:rPr>
-              <a:t>9 / 15</a:t>
+              <a:t>9 / 16</a:t>
             </a:r>
             <a:endParaRPr lang="en-US" sz="900" dirty="0"/>
           </a:p>

--- a/第五週(10-08)/第五週_第2節_簡報.pptx
+++ b/第五週(10-08)/第五週_第2節_簡報.pptx
@@ -9452,7 +9452,29 @@
                 <a:ea typeface="Arial Unicode MS"/>
                 <a:cs typeface="Arial Unicode MS"/>
               </a:rPr>
-              <a:t>所以高階的長距光達用 1550。
+              <a:t>而且 1550 還多一個好處，第一節第十三張那個 100 klx 的條件就是在講這件事：</a:t>
+            </a:r>
+            <a:r>
+              <a:rPr sz="800" b="1" lang="zh-TW" dirty="0">
+                <a:solidFill>
+                  <a:srgbClr val="000000"/>
+                </a:solidFill>
+                <a:latin typeface="Arial Unicode MS"/>
+                <a:ea typeface="Arial Unicode MS"/>
+                <a:cs typeface="Arial Unicode MS"/>
+              </a:rPr>
+              <a:t>太陽在 1550 這個波長的輻射本來就比較弱</a:t>
+            </a:r>
+            <a:r>
+              <a:rPr sz="800" lang="zh-TW" dirty="0">
+                <a:solidFill>
+                  <a:srgbClr val="000000"/>
+                </a:solidFill>
+                <a:latin typeface="Arial Unicode MS"/>
+                <a:ea typeface="Arial Unicode MS"/>
+                <a:cs typeface="Arial Unicode MS"/>
+              </a:rPr>
+              <a:t>，所以它要對付的背景噪音比 905 少。打得強、背景又少，這就是為什麼高階的長距光達用 1550。
 </a:t>
             </a:r>
           </a:p>

--- a/第五週(10-08)/第五週_第2節_簡報.pptx
+++ b/第五週(10-08)/第五週_第2節_簡報.pptx
@@ -2434,7 +2434,29 @@
                 <a:ea typeface="Arial Unicode MS"/>
                 <a:cs typeface="Arial Unicode MS"/>
               </a:rPr>
-              <a:t>——這就是第一節第六張那張表裡，OS1 那一欄的九。各位看那九個點的分布，就知道為什麼光靠它認不出那是一台機車。
+              <a:t>——這就是第一節第六張那張表裡，OS1 那一欄的九。第一節說過本課的門檻是</a:t>
+            </a:r>
+            <a:r>
+              <a:rPr sz="800" b="1" lang="zh-TW" dirty="0">
+                <a:solidFill>
+                  <a:srgbClr val="000000"/>
+                </a:solidFill>
+                <a:latin typeface="Arial Unicode MS"/>
+                <a:ea typeface="Arial Unicode MS"/>
+                <a:cs typeface="Arial Unicode MS"/>
+              </a:rPr>
+              <a:t>十個點</a:t>
+            </a:r>
+            <a:r>
+              <a:rPr sz="800" lang="zh-TW" dirty="0">
+                <a:solidFill>
+                  <a:srgbClr val="000000"/>
+                </a:solidFill>
+                <a:latin typeface="Arial Unicode MS"/>
+                <a:ea typeface="Arial Unicode MS"/>
+                <a:cs typeface="Arial Unicode MS"/>
+              </a:rPr>
+              <a:t>，所以九個點是差一個不及格。各位看那九個點的分布，就知道為什麼光靠它認不出那是一台機車。
 </a:t>
             </a:r>
           </a:p>

--- a/第五週(10-08)/第五週_第2節_簡報.pptx
+++ b/第五週(10-08)/第五週_第2節_簡報.pptx
@@ -7637,7 +7637,7 @@
                 <a:ea typeface="Arial Unicode MS"/>
                 <a:cs typeface="Arial Unicode MS"/>
               </a:rPr>
-              <a:t>。這一行是最容易被數字騙的一行。
+              <a:t>。這一行是最容易被數字誤導的一行。
 </a:t>
             </a:r>
           </a:p>

--- a/第五週(10-08)/第五週_第2節_簡報.pptx
+++ b/第五週(10-08)/第五週_第2節_簡報.pptx
@@ -6746,18 +6746,40 @@
                 <a:ea typeface="Arial Unicode MS"/>
                 <a:cs typeface="Arial Unicode MS"/>
               </a:rPr>
-              <a:t>讀得很快</a:t>
-            </a:r>
-            <a:r>
-              <a:rPr sz="800" lang="zh-TW" dirty="0">
-                <a:solidFill>
-                  <a:srgbClr val="000000"/>
-                </a:solidFill>
-                <a:latin typeface="Arial Unicode MS"/>
-                <a:ea typeface="Arial Unicode MS"/>
-                <a:cs typeface="Arial Unicode MS"/>
-              </a:rPr>
-              <a:t>——像上一節看的 AR0233AT，一秒六十張，讀一張只要十六毫秒左右，扭曲就小一點。
+              <a:t>讀得快一點</a:t>
+            </a:r>
+            <a:r>
+              <a:rPr sz="800" lang="zh-TW" dirty="0">
+                <a:solidFill>
+                  <a:srgbClr val="000000"/>
+                </a:solidFill>
+                <a:latin typeface="Arial Unicode MS"/>
+                <a:ea typeface="Arial Unicode MS"/>
+                <a:cs typeface="Arial Unicode MS"/>
+              </a:rPr>
+              <a:t>——像上一節看的 AR0233AT，一秒六十張，等於整張一定要在</a:t>
+            </a:r>
+            <a:r>
+              <a:rPr sz="800" b="1" lang="zh-TW" dirty="0">
+                <a:solidFill>
+                  <a:srgbClr val="000000"/>
+                </a:solidFill>
+                <a:latin typeface="Arial Unicode MS"/>
+                <a:ea typeface="Arial Unicode MS"/>
+                <a:cs typeface="Arial Unicode MS"/>
+              </a:rPr>
+              <a:t>十六點七毫秒</a:t>
+            </a:r>
+            <a:r>
+              <a:rPr sz="800" lang="zh-TW" dirty="0">
+                <a:solidFill>
+                  <a:srgbClr val="000000"/>
+                </a:solidFill>
+                <a:latin typeface="Arial Unicode MS"/>
+                <a:ea typeface="Arial Unicode MS"/>
+                <a:cs typeface="Arial Unicode MS"/>
+              </a:rPr>
+              <a:t>之內讀完。一秒三十張是三十三毫秒，差一倍；同一台車經過，歪掉的程度也差不多少一半。
 </a:t>
             </a:r>
           </a:p>
@@ -6779,7 +6801,7 @@
                 <a:ea typeface="Arial Unicode MS"/>
                 <a:cs typeface="Arial Unicode MS"/>
               </a:rPr>
-              <a:t>所以「更新率 60 fps」這一行，除了講即時性，它其實也在講</a:t>
+              <a:t>所以「更新率 60 fps」這一行，除了講即時性，也順便給了</a:t>
             </a:r>
             <a:r>
               <a:rPr sz="800" b="1" lang="zh-TW" dirty="0">
@@ -6790,18 +6812,62 @@
                 <a:ea typeface="Arial Unicode MS"/>
                 <a:cs typeface="Arial Unicode MS"/>
               </a:rPr>
-              <a:t>扭曲有多嚴重</a:t>
-            </a:r>
-            <a:r>
-              <a:rPr sz="800" lang="zh-TW" dirty="0">
-                <a:solidFill>
-                  <a:srgbClr val="000000"/>
-                </a:solidFill>
-                <a:latin typeface="Arial Unicode MS"/>
-                <a:ea typeface="Arial Unicode MS"/>
-                <a:cs typeface="Arial Unicode MS"/>
-              </a:rPr>
-              <a:t>。一個數字，兩個意義。</a:t>
+              <a:t>扭曲的上限</a:t>
+            </a:r>
+            <a:r>
+              <a:rPr sz="800" lang="zh-TW" dirty="0">
+                <a:solidFill>
+                  <a:srgbClr val="000000"/>
+                </a:solidFill>
+                <a:latin typeface="Arial Unicode MS"/>
+                <a:ea typeface="Arial Unicode MS"/>
+                <a:cs typeface="Arial Unicode MS"/>
+              </a:rPr>
+              <a:t>：fps 愈高，從第一列到最後一列的時間差一定愈短。一個數字，兩個意義。
+</a:t>
+            </a:r>
+          </a:p>
+          <a:p>
+            <a:pPr algn="l">
+              <a:spcBef>
+                <a:spcPts val="0"/>
+              </a:spcBef>
+              <a:spcAft>
+                <a:spcPts val="133"/>
+              </a:spcAft>
+            </a:pPr>
+            <a:r>
+              <a:rPr sz="800" lang="zh-TW" dirty="0">
+                <a:solidFill>
+                  <a:srgbClr val="000000"/>
+                </a:solidFill>
+                <a:latin typeface="Arial Unicode MS"/>
+                <a:ea typeface="Arial Unicode MS"/>
+                <a:cs typeface="Arial Unicode MS"/>
+              </a:rPr>
+              <a:t>要講精確一點：真正決定扭曲的是</a:t>
+            </a:r>
+            <a:r>
+              <a:rPr sz="800" b="1" lang="zh-TW" dirty="0">
+                <a:solidFill>
+                  <a:srgbClr val="000000"/>
+                </a:solidFill>
+                <a:latin typeface="Arial Unicode MS"/>
+                <a:ea typeface="Arial Unicode MS"/>
+                <a:cs typeface="Arial Unicode MS"/>
+              </a:rPr>
+              <a:t>整張讀完要多久</a:t>
+            </a:r>
+            <a:r>
+              <a:rPr sz="800" lang="zh-TW" dirty="0">
+                <a:solidFill>
+                  <a:srgbClr val="000000"/>
+                </a:solidFill>
+                <a:latin typeface="Arial Unicode MS"/>
+                <a:ea typeface="Arial Unicode MS"/>
+                <a:cs typeface="Arial Unicode MS"/>
+              </a:rPr>
+              <a:t>，英文叫 readout time。fps 給的是它的上限——一秒六十張，讀完不可能超過十六點七毫秒，但也可能只花五毫秒、剩下的時間在等。有些規格書會另外印 line time 或 readout time，那一行才是直接的答案。</a:t>
             </a:r>
           </a:p>
         </p:txBody>

--- a/第五週(10-08)/第五週_第2節_簡報.pptx
+++ b/第五週(10-08)/第五週_第2節_簡報.pptx
@@ -442,11 +442,11 @@
                 <a:spcPts val="0"/>
               </a:spcBef>
               <a:spcAft>
-                <a:spcPts val="158"/>
-              </a:spcAft>
-            </a:pPr>
-            <a:r>
-              <a:rPr sz="950" b="1" lang="zh-TW" dirty="0">
+                <a:spcPts val="150"/>
+              </a:spcAft>
+            </a:pPr>
+            <a:r>
+              <a:rPr sz="900" b="1" lang="zh-TW" dirty="0">
                 <a:solidFill>
                   <a:srgbClr val="000000"/>
                 </a:solidFill>
@@ -457,7 +457,7 @@
               <a:t>▍這一張要做什麼</a:t>
             </a:r>
             <a:r>
-              <a:rPr sz="950" lang="zh-TW" dirty="0">
+              <a:rPr sz="900" lang="zh-TW" dirty="0">
                 <a:solidFill>
                   <a:srgbClr val="000000"/>
                 </a:solidFill>
@@ -475,11 +475,11 @@
                 <a:spcPts val="0"/>
               </a:spcBef>
               <a:spcAft>
-                <a:spcPts val="158"/>
-              </a:spcAft>
-            </a:pPr>
-            <a:r>
-              <a:rPr sz="950" lang="zh-TW" dirty="0">
+                <a:spcPts val="150"/>
+              </a:spcAft>
+            </a:pPr>
+            <a:r>
+              <a:rPr sz="900" lang="zh-TW" dirty="0">
                 <a:solidFill>
                   <a:srgbClr val="000000"/>
                 </a:solidFill>
@@ -497,11 +497,11 @@
                 <a:spcPts val="0"/>
               </a:spcBef>
               <a:spcAft>
-                <a:spcPts val="158"/>
-              </a:spcAft>
-            </a:pPr>
-            <a:r>
-              <a:rPr sz="950" b="1" lang="zh-TW" dirty="0">
+                <a:spcPts val="150"/>
+              </a:spcAft>
+            </a:pPr>
+            <a:r>
+              <a:rPr sz="900" b="1" lang="zh-TW" dirty="0">
                 <a:solidFill>
                   <a:srgbClr val="000000"/>
                 </a:solidFill>
@@ -512,7 +512,7 @@
               <a:t>▍畫面上圈這裡</a:t>
             </a:r>
             <a:r>
-              <a:rPr sz="950" lang="zh-TW" dirty="0">
+              <a:rPr sz="900" lang="zh-TW" dirty="0">
                 <a:solidFill>
                   <a:srgbClr val="000000"/>
                 </a:solidFill>
@@ -530,19 +530,19 @@
                 <a:spcPts val="0"/>
               </a:spcBef>
               <a:spcAft>
-                <a:spcPts val="158"/>
-              </a:spcAft>
-            </a:pPr>
-            <a:r>
-              <a:rPr sz="950" lang="zh-TW" dirty="0">
-                <a:solidFill>
-                  <a:srgbClr val="000000"/>
-                </a:solidFill>
-                <a:latin typeface="Arial Unicode MS"/>
-                <a:ea typeface="Arial Unicode MS"/>
-                <a:cs typeface="Arial Unicode MS"/>
-              </a:rPr>
-              <a:t>圈主標「第二頁」，說明這些是上一節沒碰到的規格行。
+                <a:spcPts val="150"/>
+              </a:spcAft>
+            </a:pPr>
+            <a:r>
+              <a:rPr sz="900" lang="zh-TW" dirty="0">
+                <a:solidFill>
+                  <a:srgbClr val="000000"/>
+                </a:solidFill>
+                <a:latin typeface="Arial Unicode MS"/>
+                <a:ea typeface="Arial Unicode MS"/>
+                <a:cs typeface="Arial Unicode MS"/>
+              </a:rPr>
+              <a:t>圈主標「第二層」，講明那是我分的層次、不是 PDF 的頁碼，這些是上一節沒碰到的規格行。
 </a:t>
             </a:r>
           </a:p>
@@ -552,11 +552,11 @@
                 <a:spcPts val="0"/>
               </a:spcBef>
               <a:spcAft>
-                <a:spcPts val="158"/>
-              </a:spcAft>
-            </a:pPr>
-            <a:r>
-              <a:rPr sz="950" b="1" lang="zh-TW" dirty="0">
+                <a:spcPts val="150"/>
+              </a:spcAft>
+            </a:pPr>
+            <a:r>
+              <a:rPr sz="900" b="1" lang="zh-TW" dirty="0">
                 <a:solidFill>
                   <a:srgbClr val="000000"/>
                 </a:solidFill>
@@ -567,7 +567,7 @@
               <a:t>▍以下照著唸</a:t>
             </a:r>
             <a:r>
-              <a:rPr sz="950" lang="zh-TW" dirty="0">
+              <a:rPr sz="900" lang="zh-TW" dirty="0">
                 <a:solidFill>
                   <a:srgbClr val="000000"/>
                 </a:solidFill>
@@ -585,11 +585,11 @@
                 <a:spcPts val="0"/>
               </a:spcBef>
               <a:spcAft>
-                <a:spcPts val="158"/>
-              </a:spcAft>
-            </a:pPr>
-            <a:r>
-              <a:rPr sz="950" lang="zh-TW" dirty="0">
+                <a:spcPts val="150"/>
+              </a:spcAft>
+            </a:pPr>
+            <a:r>
+              <a:rPr sz="900" lang="zh-TW" dirty="0">
                 <a:solidFill>
                   <a:srgbClr val="000000"/>
                 </a:solidFill>
@@ -607,33 +607,33 @@
                 <a:spcPts val="0"/>
               </a:spcBef>
               <a:spcAft>
-                <a:spcPts val="158"/>
-              </a:spcAft>
-            </a:pPr>
-            <a:r>
-              <a:rPr sz="950" lang="zh-TW" dirty="0">
-                <a:solidFill>
-                  <a:srgbClr val="000000"/>
-                </a:solidFill>
-                <a:latin typeface="Arial Unicode MS"/>
-                <a:ea typeface="Arial Unicode MS"/>
-                <a:cs typeface="Arial Unicode MS"/>
-              </a:rPr>
-              <a:t>上一節我們找的四個數字，是規格表的</a:t>
-            </a:r>
-            <a:r>
-              <a:rPr sz="950" b="1" lang="zh-TW" dirty="0">
-                <a:solidFill>
-                  <a:srgbClr val="000000"/>
-                </a:solidFill>
-                <a:latin typeface="Arial Unicode MS"/>
-                <a:ea typeface="Arial Unicode MS"/>
-                <a:cs typeface="Arial Unicode MS"/>
-              </a:rPr>
-              <a:t>第一頁</a:t>
-            </a:r>
-            <a:r>
-              <a:rPr sz="950" lang="zh-TW" dirty="0">
+                <a:spcPts val="150"/>
+              </a:spcAft>
+            </a:pPr>
+            <a:r>
+              <a:rPr sz="900" lang="zh-TW" dirty="0">
+                <a:solidFill>
+                  <a:srgbClr val="000000"/>
+                </a:solidFill>
+                <a:latin typeface="Arial Unicode MS"/>
+                <a:ea typeface="Arial Unicode MS"/>
+                <a:cs typeface="Arial Unicode MS"/>
+              </a:rPr>
+              <a:t>上一節我們找的四個數字，我叫它</a:t>
+            </a:r>
+            <a:r>
+              <a:rPr sz="900" b="1" lang="zh-TW" dirty="0">
+                <a:solidFill>
+                  <a:srgbClr val="000000"/>
+                </a:solidFill>
+                <a:latin typeface="Arial Unicode MS"/>
+                <a:ea typeface="Arial Unicode MS"/>
+                <a:cs typeface="Arial Unicode MS"/>
+              </a:rPr>
+              <a:t>第一層</a:t>
+            </a:r>
+            <a:r>
+              <a:rPr sz="900" lang="zh-TW" dirty="0">
                 <a:solidFill>
                   <a:srgbClr val="000000"/>
                 </a:solidFill>
@@ -651,22 +651,44 @@
                 <a:spcPts val="0"/>
               </a:spcBef>
               <a:spcAft>
-                <a:spcPts val="158"/>
-              </a:spcAft>
-            </a:pPr>
-            <a:r>
-              <a:rPr sz="950" lang="zh-TW" dirty="0">
-                <a:solidFill>
-                  <a:srgbClr val="000000"/>
-                </a:solidFill>
-                <a:latin typeface="Arial Unicode MS"/>
-                <a:ea typeface="Arial Unicode MS"/>
-                <a:cs typeface="Arial Unicode MS"/>
-              </a:rPr>
-              <a:t>這一節我要帶各位往下翻。第二頁上還有一堆數字，大部分的人不看，可是</a:t>
-            </a:r>
-            <a:r>
-              <a:rPr sz="950" b="1" lang="zh-TW" dirty="0">
+                <a:spcPts val="150"/>
+              </a:spcAft>
+            </a:pPr>
+            <a:r>
+              <a:rPr sz="900" lang="zh-TW" dirty="0">
+                <a:solidFill>
+                  <a:srgbClr val="000000"/>
+                </a:solidFill>
+                <a:latin typeface="Arial Unicode MS"/>
+                <a:ea typeface="Arial Unicode MS"/>
+                <a:cs typeface="Arial Unicode MS"/>
+              </a:rPr>
+              <a:t>這一節我要帶各位往下翻。</a:t>
+            </a:r>
+            <a:r>
+              <a:rPr sz="900" b="1" lang="zh-TW" dirty="0">
+                <a:solidFill>
+                  <a:srgbClr val="000000"/>
+                </a:solidFill>
+                <a:latin typeface="Arial Unicode MS"/>
+                <a:ea typeface="Arial Unicode MS"/>
+                <a:cs typeface="Arial Unicode MS"/>
+              </a:rPr>
+              <a:t>第二層</a:t>
+            </a:r>
+            <a:r>
+              <a:rPr sz="900" lang="zh-TW" dirty="0">
+                <a:solidFill>
+                  <a:srgbClr val="000000"/>
+                </a:solidFill>
+                <a:latin typeface="Arial Unicode MS"/>
+                <a:ea typeface="Arial Unicode MS"/>
+                <a:cs typeface="Arial Unicode MS"/>
+              </a:rPr>
+              <a:t>還有一堆數字，大部分的人不看，可是</a:t>
+            </a:r>
+            <a:r>
+              <a:rPr sz="900" b="1" lang="zh-TW" dirty="0">
                 <a:solidFill>
                   <a:srgbClr val="000000"/>
                 </a:solidFill>
@@ -677,7 +699,7 @@
               <a:t>真的出事的時候，常常是出在那幾行</a:t>
             </a:r>
             <a:r>
-              <a:rPr sz="950" lang="zh-TW" dirty="0">
+              <a:rPr sz="900" lang="zh-TW" dirty="0">
                 <a:solidFill>
                   <a:srgbClr val="000000"/>
                 </a:solidFill>
@@ -695,11 +717,55 @@
                 <a:spcPts val="0"/>
               </a:spcBef>
               <a:spcAft>
-                <a:spcPts val="158"/>
-              </a:spcAft>
-            </a:pPr>
-            <a:r>
-              <a:rPr sz="950" lang="zh-TW" dirty="0">
+                <a:spcPts val="150"/>
+              </a:spcAft>
+            </a:pPr>
+            <a:r>
+              <a:rPr sz="900" lang="zh-TW" dirty="0">
+                <a:solidFill>
+                  <a:srgbClr val="000000"/>
+                </a:solidFill>
+                <a:latin typeface="Arial Unicode MS"/>
+                <a:ea typeface="Arial Unicode MS"/>
+                <a:cs typeface="Arial Unicode MS"/>
+              </a:rPr>
+              <a:t>先講清楚，免得各位拿著 PDF 對不上：</a:t>
+            </a:r>
+            <a:r>
+              <a:rPr sz="900" b="1" lang="zh-TW" dirty="0">
+                <a:solidFill>
+                  <a:srgbClr val="000000"/>
+                </a:solidFill>
+                <a:latin typeface="Arial Unicode MS"/>
+                <a:ea typeface="Arial Unicode MS"/>
+                <a:cs typeface="Arial Unicode MS"/>
+              </a:rPr>
+              <a:t>第一層、第二層是我分的，不是文件的頁碼。</a:t>
+            </a:r>
+            <a:r>
+              <a:rPr sz="900" lang="zh-TW" dirty="0">
+                <a:solidFill>
+                  <a:srgbClr val="000000"/>
+                </a:solidFill>
+                <a:latin typeface="Arial Unicode MS"/>
+                <a:ea typeface="Arial Unicode MS"/>
+                <a:cs typeface="Arial Unicode MS"/>
+              </a:rPr>
+              <a:t>這六行在真的文件上是散在好幾頁的——等一下會看到，OS1 的雷射那一段在官方 PDF 的第二頁，相機那三行則全擠在 AR0233AT 兩頁文件的第一頁。
+</a:t>
+            </a:r>
+          </a:p>
+          <a:p>
+            <a:pPr algn="l">
+              <a:spcBef>
+                <a:spcPts val="0"/>
+              </a:spcBef>
+              <a:spcAft>
+                <a:spcPts val="150"/>
+              </a:spcAft>
+            </a:pPr>
+            <a:r>
+              <a:rPr sz="900" lang="zh-TW" dirty="0">
                 <a:solidFill>
                   <a:srgbClr val="000000"/>
                 </a:solidFill>
@@ -717,11 +783,11 @@
                 <a:spcPts val="0"/>
               </a:spcBef>
               <a:spcAft>
-                <a:spcPts val="158"/>
-              </a:spcAft>
-            </a:pPr>
-            <a:r>
-              <a:rPr sz="950" lang="zh-TW" dirty="0">
+                <a:spcPts val="150"/>
+              </a:spcAft>
+            </a:pPr>
+            <a:r>
+              <a:rPr sz="900" lang="zh-TW" dirty="0">
                 <a:solidFill>
                   <a:srgbClr val="000000"/>
                 </a:solidFill>
@@ -732,7 +798,7 @@
               <a:t>第一組是相機的：</a:t>
             </a:r>
             <a:r>
-              <a:rPr sz="950" b="1" lang="zh-TW" dirty="0">
+              <a:rPr sz="900" b="1" lang="zh-TW" dirty="0">
                 <a:solidFill>
                   <a:srgbClr val="000000"/>
                 </a:solidFill>
@@ -743,7 +809,7 @@
               <a:t>快門怎麼掃、動態範圍多少、LED 閃爍怎麼處理</a:t>
             </a:r>
             <a:r>
-              <a:rPr sz="950" lang="zh-TW" dirty="0">
+              <a:rPr sz="900" lang="zh-TW" dirty="0">
                 <a:solidFill>
                   <a:srgbClr val="000000"/>
                 </a:solidFill>
@@ -761,11 +827,11 @@
                 <a:spcPts val="0"/>
               </a:spcBef>
               <a:spcAft>
-                <a:spcPts val="158"/>
-              </a:spcAft>
-            </a:pPr>
-            <a:r>
-              <a:rPr sz="950" lang="zh-TW" dirty="0">
+                <a:spcPts val="150"/>
+              </a:spcAft>
+            </a:pPr>
+            <a:r>
+              <a:rPr sz="900" lang="zh-TW" dirty="0">
                 <a:solidFill>
                   <a:srgbClr val="000000"/>
                 </a:solidFill>
@@ -776,7 +842,7 @@
               <a:t>第二組是光達的：</a:t>
             </a:r>
             <a:r>
-              <a:rPr sz="950" b="1" lang="zh-TW" dirty="0">
+              <a:rPr sz="900" b="1" lang="zh-TW" dirty="0">
                 <a:solidFill>
                   <a:srgbClr val="000000"/>
                 </a:solidFill>
@@ -787,7 +853,7 @@
               <a:t>波長、眼睛安全等級、幾次回波</a:t>
             </a:r>
             <a:r>
-              <a:rPr sz="950" lang="zh-TW" dirty="0">
+              <a:rPr sz="900" lang="zh-TW" dirty="0">
                 <a:solidFill>
                   <a:srgbClr val="000000"/>
                 </a:solidFill>
@@ -805,11 +871,11 @@
                 <a:spcPts val="0"/>
               </a:spcBef>
               <a:spcAft>
-                <a:spcPts val="158"/>
-              </a:spcAft>
-            </a:pPr>
-            <a:r>
-              <a:rPr sz="950" lang="zh-TW" dirty="0">
+                <a:spcPts val="150"/>
+              </a:spcAft>
+            </a:pPr>
+            <a:r>
+              <a:rPr sz="900" lang="zh-TW" dirty="0">
                 <a:solidFill>
                   <a:srgbClr val="000000"/>
                 </a:solidFill>
@@ -820,7 +886,7 @@
               <a:t>第三組是兩種都有的，而且是最多人忽略的：</a:t>
             </a:r>
             <a:r>
-              <a:rPr sz="950" b="1" lang="zh-TW" dirty="0">
+              <a:rPr sz="900" b="1" lang="zh-TW" dirty="0">
                 <a:solidFill>
                   <a:srgbClr val="000000"/>
                 </a:solidFill>
@@ -831,7 +897,7 @@
               <a:t>標定和時間同步</a:t>
             </a:r>
             <a:r>
-              <a:rPr sz="950" lang="zh-TW" dirty="0">
+              <a:rPr sz="900" lang="zh-TW" dirty="0">
                 <a:solidFill>
                   <a:srgbClr val="000000"/>
                 </a:solidFill>
@@ -849,11 +915,11 @@
                 <a:spcPts val="0"/>
               </a:spcBef>
               <a:spcAft>
-                <a:spcPts val="158"/>
-              </a:spcAft>
-            </a:pPr>
-            <a:r>
-              <a:rPr sz="950" lang="zh-TW" dirty="0">
+                <a:spcPts val="150"/>
+              </a:spcAft>
+            </a:pPr>
+            <a:r>
+              <a:rPr sz="900" lang="zh-TW" dirty="0">
                 <a:solidFill>
                   <a:srgbClr val="000000"/>
                 </a:solidFill>
@@ -5657,7 +5723,29 @@
                 <a:ea typeface="Arial Unicode MS"/>
                 <a:cs typeface="Arial Unicode MS"/>
               </a:rPr>
-              <a:t>今天兩節圈過的光達那幾行，全部都在這三頁上：第一頁是 HIGHLIGHTS 和 OPTICAL PERFORMANCE——測距、視野、通道數、每圈點數都在那裡；第二頁有 LASER 那一段，Class 1、865 奈米、光束寬度和發散角；第三頁有 Additional Programmability，multi-sensor phase lock 那一行。
+              <a:t>今天兩節圈過的光達那幾行，全部都在這三頁上。注意這裡講的是</a:t>
+            </a:r>
+            <a:r>
+              <a:rPr sz="1200" b="1" lang="zh-TW" dirty="0">
+                <a:solidFill>
+                  <a:srgbClr val="000000"/>
+                </a:solidFill>
+                <a:latin typeface="Arial Unicode MS"/>
+                <a:ea typeface="Arial Unicode MS"/>
+                <a:cs typeface="Arial Unicode MS"/>
+              </a:rPr>
+              <a:t>真的頁碼</a:t>
+            </a:r>
+            <a:r>
+              <a:rPr sz="1200" lang="zh-TW" dirty="0">
+                <a:solidFill>
+                  <a:srgbClr val="000000"/>
+                </a:solidFill>
+                <a:latin typeface="Arial Unicode MS"/>
+                <a:ea typeface="Arial Unicode MS"/>
+                <a:cs typeface="Arial Unicode MS"/>
+              </a:rPr>
+              <a:t>：PDF 第 1 頁是 HIGHLIGHTS 和 OPTICAL PERFORMANCE——測距、視野、通道數、每圈點數都在那裡；第 2 頁有 LASER 那一段，Class 1、865 奈米、光束寬度和發散角；第 3 頁有 Additional Programmability，multi-sensor phase lock 那一行。
 </a:t>
             </a:r>
           </a:p>
@@ -11795,7 +11883,7 @@
                 <a:ea typeface="微軟正黑體" pitchFamily="34" charset="-122"/>
                 <a:cs typeface="微軟正黑體" pitchFamily="34" charset="-120"/>
               </a:rPr>
-              <a:t>規格表的第二頁</a:t>
+              <a:t>規格表的第二層</a:t>
             </a:r>
             <a:endParaRPr lang="en-US" sz="3390" dirty="0"/>
           </a:p>

--- a/第五週(10-08)/第五週_第2節_簡報.pptx
+++ b/第五週(10-08)/第五週_第2節_簡報.pptx
@@ -5,7 +5,7 @@
     <p:sldMasterId id="2147483648" r:id="rId1"/>
   </p:sldMasterIdLst>
   <p:notesMasterIdLst>
-    <p:notesMasterId r:id="rId18"/>
+    <p:notesMasterId r:id="rId20"/>
   </p:notesMasterIdLst>
   <p:sldIdLst>
     <p:sldId id="256" r:id="rId2"/>
@@ -24,6 +24,8 @@
     <p:sldId id="269" r:id="rId15"/>
     <p:sldId id="270" r:id="rId16"/>
     <p:sldId id="271" r:id="rId17"/>
+    <p:sldId id="272" r:id="rId18"/>
+    <p:sldId id="273" r:id="rId19"/>
   </p:sldIdLst>
   <p:sldSz cx="9144000" cy="5143500"/>
   <p:notesSz cx="7560000" cy="10692000"/>
@@ -5701,7 +5703,7 @@
                 <a:ea typeface="Arial Unicode MS"/>
                 <a:cs typeface="Arial Unicode MS"/>
               </a:rPr>
-              <a:t>這一張也不唸，是附錄。
+              <a:t>這一張不唸，是附錄。
 </a:t>
             </a:r>
           </a:p>
@@ -5723,29 +5725,7 @@
                 <a:ea typeface="Arial Unicode MS"/>
                 <a:cs typeface="Arial Unicode MS"/>
               </a:rPr>
-              <a:t>今天兩節圈過的光達那幾行，全部都在這三頁上。注意這裡講的是</a:t>
-            </a:r>
-            <a:r>
-              <a:rPr sz="1200" b="1" lang="zh-TW" dirty="0">
-                <a:solidFill>
-                  <a:srgbClr val="000000"/>
-                </a:solidFill>
-                <a:latin typeface="Arial Unicode MS"/>
-                <a:ea typeface="Arial Unicode MS"/>
-                <a:cs typeface="Arial Unicode MS"/>
-              </a:rPr>
-              <a:t>真的頁碼</a:t>
-            </a:r>
-            <a:r>
-              <a:rPr sz="1200" lang="zh-TW" dirty="0">
-                <a:solidFill>
-                  <a:srgbClr val="000000"/>
-                </a:solidFill>
-                <a:latin typeface="Arial Unicode MS"/>
-                <a:ea typeface="Arial Unicode MS"/>
-                <a:cs typeface="Arial Unicode MS"/>
-              </a:rPr>
-              <a:t>：PDF 第 1 頁是 HIGHLIGHTS 和 OPTICAL PERFORMANCE——測距、視野、通道數、每圈點數都在那裡；第 2 頁有 LASER 那一段，Class 1、865 奈米、光束寬度和發散角；第 3 頁有 Additional Programmability，multi-sensor phase lock 那一行。
+              <a:t>今天圈過的光達那幾行，全部都在這三頁上：PDF 第 1 頁是 HIGHLIGHTS 和 OPTICAL PERFORMANCE——測距、視野、通道數、每圈點數都在那裡；第 2 頁有 LASER 那一段，Class 1、865 奈米、光束寬度和發散角；第 3 頁有 Additional Programmability，multi-sensor phase lock 那一行。
 </a:t>
             </a:r>
           </a:p>
@@ -5832,6 +5812,710 @@
                 <a:cs typeface="Arial Unicode MS"/>
               </a:rPr>
               <a:t>16</a:t>
+            </a:r>
+          </a:p>
+        </p:txBody>
+      </p:sp>
+    </p:spTree>
+  </p:cSld>
+  <p:clrMapOvr>
+    <a:masterClrMapping/>
+  </p:clrMapOvr>
+</p:notes>
+</file>
+
+<file path=ppt/notesSlides/notesSlide17.xml><?xml version="1.0" encoding="utf-8"?>
+<p:notes xmlns:a="http://schemas.openxmlformats.org/drawingml/2006/main" xmlns:p="http://schemas.openxmlformats.org/presentationml/2006/main">
+  <p:cSld>
+    <p:spTree>
+      <p:nvGrpSpPr>
+        <p:cNvPr id="1" name=""/>
+        <p:cNvGrpSpPr/>
+        <p:nvPr/>
+      </p:nvGrpSpPr>
+      <p:grpSpPr>
+        <a:xfrm/>
+      </p:grpSpPr>
+      <p:sp>
+        <p:nvSpPr>
+          <p:cNvPr id="2" name="Slide Image Placeholder 1"/>
+          <p:cNvSpPr>
+            <a:spLocks noGrp="1"/>
+          </p:cNvSpPr>
+          <p:nvPr>
+            <p:ph type="sldImg" idx="2"/>
+          </p:nvPr>
+        </p:nvSpPr>
+        <p:spPr>
+          <a:xfrm>
+            <a:off x="540000" y="540000"/>
+            <a:ext cx="6480000" cy="3645000"/>
+          </a:xfrm>
+        </p:spPr>
+      </p:sp>
+      <p:sp>
+        <p:nvSpPr>
+          <p:cNvPr id="3" name="Notes Placeholder 2"/>
+          <p:cNvSpPr>
+            <a:spLocks noGrp="1"/>
+          </p:cNvSpPr>
+          <p:nvPr>
+            <p:ph type="body" idx="3"/>
+          </p:nvPr>
+        </p:nvSpPr>
+        <p:spPr>
+          <a:xfrm>
+            <a:off x="540000" y="4440000"/>
+            <a:ext cx="6480000" cy="5500000"/>
+          </a:xfrm>
+        </p:spPr>
+        <p:txBody>
+          <a:bodyPr vert="horz" wrap="square" anchor="t" lIns="91440" rIns="91440" tIns="45720" bIns="45720"/>
+          <a:lstStyle/>
+          <a:p>
+            <a:pPr algn="l">
+              <a:spcBef>
+                <a:spcPts val="0"/>
+              </a:spcBef>
+              <a:spcAft>
+                <a:spcPts val="200"/>
+              </a:spcAft>
+            </a:pPr>
+            <a:r>
+              <a:rPr sz="1200" b="1" lang="zh-TW" dirty="0">
+                <a:solidFill>
+                  <a:srgbClr val="000000"/>
+                </a:solidFill>
+                <a:latin typeface="Arial Unicode MS"/>
+                <a:ea typeface="Arial Unicode MS"/>
+                <a:cs typeface="Arial Unicode MS"/>
+              </a:rPr>
+              <a:t>▍這一張要做什麼</a:t>
+            </a:r>
+            <a:r>
+              <a:rPr sz="1200" lang="zh-TW" dirty="0">
+                <a:solidFill>
+                  <a:srgbClr val="000000"/>
+                </a:solidFill>
+                <a:latin typeface="Arial Unicode MS"/>
+                <a:ea typeface="Arial Unicode MS"/>
+                <a:cs typeface="Arial Unicode MS"/>
+              </a:rPr>
+              <a:t>
+</a:t>
+            </a:r>
+          </a:p>
+          <a:p>
+            <a:pPr algn="l">
+              <a:spcBef>
+                <a:spcPts val="0"/>
+              </a:spcBef>
+              <a:spcAft>
+                <a:spcPts val="200"/>
+              </a:spcAft>
+            </a:pPr>
+            <a:r>
+              <a:rPr sz="1200" lang="zh-TW" dirty="0">
+                <a:solidFill>
+                  <a:srgbClr val="000000"/>
+                </a:solidFill>
+                <a:latin typeface="Arial Unicode MS"/>
+                <a:ea typeface="Arial Unicode MS"/>
+                <a:cs typeface="Arial Unicode MS"/>
+              </a:rPr>
+              <a:t>附錄：AT128P 使用手冊的規格那兩頁，備查用。
+</a:t>
+            </a:r>
+          </a:p>
+          <a:p>
+            <a:pPr algn="l">
+              <a:spcBef>
+                <a:spcPts val="0"/>
+              </a:spcBef>
+              <a:spcAft>
+                <a:spcPts val="200"/>
+              </a:spcAft>
+            </a:pPr>
+            <a:r>
+              <a:rPr sz="1200" b="1" lang="zh-TW" dirty="0">
+                <a:solidFill>
+                  <a:srgbClr val="000000"/>
+                </a:solidFill>
+                <a:latin typeface="Arial Unicode MS"/>
+                <a:ea typeface="Arial Unicode MS"/>
+                <a:cs typeface="Arial Unicode MS"/>
+              </a:rPr>
+              <a:t>▍畫面上圈這裡</a:t>
+            </a:r>
+            <a:r>
+              <a:rPr sz="1200" lang="zh-TW" dirty="0">
+                <a:solidFill>
+                  <a:srgbClr val="000000"/>
+                </a:solidFill>
+                <a:latin typeface="Arial Unicode MS"/>
+                <a:ea typeface="Arial Unicode MS"/>
+                <a:cs typeface="Arial Unicode MS"/>
+              </a:rPr>
+              <a:t>
+</a:t>
+            </a:r>
+          </a:p>
+          <a:p>
+            <a:pPr algn="l">
+              <a:spcBef>
+                <a:spcPts val="0"/>
+              </a:spcBef>
+              <a:spcAft>
+                <a:spcPts val="200"/>
+              </a:spcAft>
+            </a:pPr>
+            <a:r>
+              <a:rPr sz="1200" lang="zh-TW" dirty="0">
+                <a:solidFill>
+                  <a:srgbClr val="000000"/>
+                </a:solidFill>
+                <a:latin typeface="Arial Unicode MS"/>
+                <a:ea typeface="Arial Unicode MS"/>
+                <a:cs typeface="Arial Unicode MS"/>
+              </a:rPr>
+              <a:t>上課不唸。第 1 節第 5 張圈的 Far-field 與 (10 Hz)，原文就在左邊那一頁。
+</a:t>
+            </a:r>
+          </a:p>
+          <a:p>
+            <a:pPr algn="l">
+              <a:spcBef>
+                <a:spcPts val="0"/>
+              </a:spcBef>
+              <a:spcAft>
+                <a:spcPts val="200"/>
+              </a:spcAft>
+            </a:pPr>
+            <a:r>
+              <a:rPr sz="1200" b="1" lang="zh-TW" dirty="0">
+                <a:solidFill>
+                  <a:srgbClr val="000000"/>
+                </a:solidFill>
+                <a:latin typeface="Arial Unicode MS"/>
+                <a:ea typeface="Arial Unicode MS"/>
+                <a:cs typeface="Arial Unicode MS"/>
+              </a:rPr>
+              <a:t>▍以下照著唸</a:t>
+            </a:r>
+            <a:r>
+              <a:rPr sz="1200" lang="zh-TW" dirty="0">
+                <a:solidFill>
+                  <a:srgbClr val="000000"/>
+                </a:solidFill>
+                <a:latin typeface="Arial Unicode MS"/>
+                <a:ea typeface="Arial Unicode MS"/>
+                <a:cs typeface="Arial Unicode MS"/>
+              </a:rPr>
+              <a:t>
+</a:t>
+            </a:r>
+          </a:p>
+          <a:p>
+            <a:pPr algn="l">
+              <a:spcBef>
+                <a:spcPts val="0"/>
+              </a:spcBef>
+              <a:spcAft>
+                <a:spcPts val="200"/>
+              </a:spcAft>
+            </a:pPr>
+            <a:r>
+              <a:rPr sz="1200" lang="zh-TW" dirty="0">
+                <a:solidFill>
+                  <a:srgbClr val="000000"/>
+                </a:solidFill>
+                <a:latin typeface="Arial Unicode MS"/>
+                <a:ea typeface="Arial Unicode MS"/>
+                <a:cs typeface="Arial Unicode MS"/>
+              </a:rPr>
+              <a:t>這一張也不唸，是附錄。
+</a:t>
+            </a:r>
+          </a:p>
+          <a:p>
+            <a:pPr algn="l">
+              <a:spcBef>
+                <a:spcPts val="0"/>
+              </a:spcBef>
+              <a:spcAft>
+                <a:spcPts val="200"/>
+              </a:spcAft>
+            </a:pPr>
+            <a:r>
+              <a:rPr sz="1200" lang="zh-TW" dirty="0">
+                <a:solidFill>
+                  <a:srgbClr val="000000"/>
+                </a:solidFill>
+                <a:latin typeface="Arial Unicode MS"/>
+                <a:ea typeface="Arial Unicode MS"/>
+                <a:cs typeface="Arial Unicode MS"/>
+              </a:rPr>
+              <a:t>左邊那一頁是 §1.5 Specifications，第 1 節第 5 張圈過的東西都在上面：Number of channels 128、Horizontal FOV 120 度、Vertical FOV 25.4 度，還有那兩行寫著 Far-field 和 Near-field 的解析度。
+</a:t>
+            </a:r>
+          </a:p>
+          <a:p>
+            <a:pPr algn="l">
+              <a:spcBef>
+                <a:spcPts val="0"/>
+              </a:spcBef>
+              <a:spcAft>
+                <a:spcPts val="200"/>
+              </a:spcAft>
+            </a:pPr>
+            <a:r>
+              <a:rPr sz="1200" lang="zh-TW" dirty="0">
+                <a:solidFill>
+                  <a:srgbClr val="000000"/>
+                </a:solidFill>
+                <a:latin typeface="Arial Unicode MS"/>
+                <a:ea typeface="Arial Unicode MS"/>
+                <a:cs typeface="Arial Unicode MS"/>
+              </a:rPr>
+              <a:t>右邊那一頁是同一節的註解。註②就是遠近場的定義——遠場超過 7.2 公尺、近場 0.5 到 7.2 公尺；註①說量測範圍是由分配給每一條通道的飛行時間決定的；註⑥還把每秒點數怎麼算整個列出來，1200 乘 128 乘 10 等於一百五十三萬六千。
+</a:t>
+            </a:r>
+          </a:p>
+          <a:p>
+            <a:pPr algn="l">
+              <a:spcBef>
+                <a:spcPts val="0"/>
+              </a:spcBef>
+              <a:spcAft>
+                <a:spcPts val="200"/>
+              </a:spcAft>
+            </a:pPr>
+            <a:r>
+              <a:rPr sz="1200" lang="zh-TW" dirty="0">
+                <a:solidFill>
+                  <a:srgbClr val="000000"/>
+                </a:solidFill>
+                <a:latin typeface="Arial Unicode MS"/>
+                <a:ea typeface="Arial Unicode MS"/>
+                <a:cs typeface="Arial Unicode MS"/>
+              </a:rPr>
+              <a:t>各位如果對「那個 0.1 度為什麼有兩個條件」還有疑問，答案就在右邊那一頁。</a:t>
+            </a:r>
+          </a:p>
+        </p:txBody>
+      </p:sp>
+      <p:sp>
+        <p:nvSpPr>
+          <p:cNvPr id="4" name="Slide Number Placeholder 3"/>
+          <p:cNvSpPr>
+            <a:spLocks noGrp="1"/>
+          </p:cNvSpPr>
+          <p:nvPr>
+            <p:ph type="sldNum" idx="5"/>
+          </p:nvPr>
+        </p:nvSpPr>
+        <p:spPr>
+          <a:xfrm>
+            <a:off x="6500000" y="10200000"/>
+            <a:ext cx="500000" cy="300000"/>
+          </a:xfrm>
+        </p:spPr>
+        <p:txBody>
+          <a:bodyPr vert="horz" wrap="square" anchor="t" lIns="91440" rIns="91440" tIns="45720" bIns="45720"/>
+          <a:lstStyle/>
+          <a:p>
+            <a:pPr algn="l">
+              <a:spcBef>
+                <a:spcPts val="0"/>
+              </a:spcBef>
+              <a:spcAft>
+                <a:spcPts val="167"/>
+              </a:spcAft>
+            </a:pPr>
+            <a:r>
+              <a:rPr sz="1000" lang="zh-TW" dirty="0">
+                <a:solidFill>
+                  <a:srgbClr val="000000"/>
+                </a:solidFill>
+                <a:latin typeface="Arial Unicode MS"/>
+                <a:ea typeface="Arial Unicode MS"/>
+                <a:cs typeface="Arial Unicode MS"/>
+              </a:rPr>
+              <a:t>17</a:t>
+            </a:r>
+          </a:p>
+        </p:txBody>
+      </p:sp>
+    </p:spTree>
+  </p:cSld>
+  <p:clrMapOvr>
+    <a:masterClrMapping/>
+  </p:clrMapOvr>
+</p:notes>
+</file>
+
+<file path=ppt/notesSlides/notesSlide18.xml><?xml version="1.0" encoding="utf-8"?>
+<p:notes xmlns:a="http://schemas.openxmlformats.org/drawingml/2006/main" xmlns:p="http://schemas.openxmlformats.org/presentationml/2006/main">
+  <p:cSld>
+    <p:spTree>
+      <p:nvGrpSpPr>
+        <p:cNvPr id="1" name=""/>
+        <p:cNvGrpSpPr/>
+        <p:nvPr/>
+      </p:nvGrpSpPr>
+      <p:grpSpPr>
+        <a:xfrm/>
+      </p:grpSpPr>
+      <p:sp>
+        <p:nvSpPr>
+          <p:cNvPr id="2" name="Slide Image Placeholder 1"/>
+          <p:cNvSpPr>
+            <a:spLocks noGrp="1"/>
+          </p:cNvSpPr>
+          <p:nvPr>
+            <p:ph type="sldImg" idx="2"/>
+          </p:nvPr>
+        </p:nvSpPr>
+        <p:spPr>
+          <a:xfrm>
+            <a:off x="540000" y="540000"/>
+            <a:ext cx="6480000" cy="3645000"/>
+          </a:xfrm>
+        </p:spPr>
+      </p:sp>
+      <p:sp>
+        <p:nvSpPr>
+          <p:cNvPr id="3" name="Notes Placeholder 2"/>
+          <p:cNvSpPr>
+            <a:spLocks noGrp="1"/>
+          </p:cNvSpPr>
+          <p:nvPr>
+            <p:ph type="body" idx="3"/>
+          </p:nvPr>
+        </p:nvSpPr>
+        <p:spPr>
+          <a:xfrm>
+            <a:off x="540000" y="4440000"/>
+            <a:ext cx="6480000" cy="5500000"/>
+          </a:xfrm>
+        </p:spPr>
+        <p:txBody>
+          <a:bodyPr vert="horz" wrap="square" anchor="t" lIns="91440" rIns="91440" tIns="45720" bIns="45720"/>
+          <a:lstStyle/>
+          <a:p>
+            <a:pPr algn="l">
+              <a:spcBef>
+                <a:spcPts val="0"/>
+              </a:spcBef>
+              <a:spcAft>
+                <a:spcPts val="200"/>
+              </a:spcAft>
+            </a:pPr>
+            <a:r>
+              <a:rPr sz="1200" b="1" lang="zh-TW" dirty="0">
+                <a:solidFill>
+                  <a:srgbClr val="000000"/>
+                </a:solidFill>
+                <a:latin typeface="Arial Unicode MS"/>
+                <a:ea typeface="Arial Unicode MS"/>
+                <a:cs typeface="Arial Unicode MS"/>
+              </a:rPr>
+              <a:t>▍這一張要做什麼</a:t>
+            </a:r>
+            <a:r>
+              <a:rPr sz="1200" lang="zh-TW" dirty="0">
+                <a:solidFill>
+                  <a:srgbClr val="000000"/>
+                </a:solidFill>
+                <a:latin typeface="Arial Unicode MS"/>
+                <a:ea typeface="Arial Unicode MS"/>
+                <a:cs typeface="Arial Unicode MS"/>
+              </a:rPr>
+              <a:t>
+</a:t>
+            </a:r>
+          </a:p>
+          <a:p>
+            <a:pPr algn="l">
+              <a:spcBef>
+                <a:spcPts val="0"/>
+              </a:spcBef>
+              <a:spcAft>
+                <a:spcPts val="200"/>
+              </a:spcAft>
+            </a:pPr>
+            <a:r>
+              <a:rPr sz="1200" lang="zh-TW" dirty="0">
+                <a:solidFill>
+                  <a:srgbClr val="000000"/>
+                </a:solidFill>
+                <a:latin typeface="Arial Unicode MS"/>
+                <a:ea typeface="Arial Unicode MS"/>
+                <a:cs typeface="Arial Unicode MS"/>
+              </a:rPr>
+              <a:t>附錄：相機那份規格書的完整原頁，備查用。
+</a:t>
+            </a:r>
+          </a:p>
+          <a:p>
+            <a:pPr algn="l">
+              <a:spcBef>
+                <a:spcPts val="0"/>
+              </a:spcBef>
+              <a:spcAft>
+                <a:spcPts val="200"/>
+              </a:spcAft>
+            </a:pPr>
+            <a:r>
+              <a:rPr sz="1200" b="1" lang="zh-TW" dirty="0">
+                <a:solidFill>
+                  <a:srgbClr val="000000"/>
+                </a:solidFill>
+                <a:latin typeface="Arial Unicode MS"/>
+                <a:ea typeface="Arial Unicode MS"/>
+                <a:cs typeface="Arial Unicode MS"/>
+              </a:rPr>
+              <a:t>▍畫面上圈這裡</a:t>
+            </a:r>
+            <a:r>
+              <a:rPr sz="1200" lang="zh-TW" dirty="0">
+                <a:solidFill>
+                  <a:srgbClr val="000000"/>
+                </a:solidFill>
+                <a:latin typeface="Arial Unicode MS"/>
+                <a:ea typeface="Arial Unicode MS"/>
+                <a:cs typeface="Arial Unicode MS"/>
+              </a:rPr>
+              <a:t>
+</a:t>
+            </a:r>
+          </a:p>
+          <a:p>
+            <a:pPr algn="l">
+              <a:spcBef>
+                <a:spcPts val="0"/>
+              </a:spcBef>
+              <a:spcAft>
+                <a:spcPts val="200"/>
+              </a:spcAft>
+            </a:pPr>
+            <a:r>
+              <a:rPr sz="1200" lang="zh-TW" dirty="0">
+                <a:solidFill>
+                  <a:srgbClr val="000000"/>
+                </a:solidFill>
+                <a:latin typeface="Arial Unicode MS"/>
+                <a:ea typeface="Arial Unicode MS"/>
+                <a:cs typeface="Arial Unicode MS"/>
+              </a:rPr>
+              <a:t>上課不唸。學生問「你圈的那一行在哪」的時候翻到這裡，或放映時放大看。
+</a:t>
+            </a:r>
+          </a:p>
+          <a:p>
+            <a:pPr algn="l">
+              <a:spcBef>
+                <a:spcPts val="0"/>
+              </a:spcBef>
+              <a:spcAft>
+                <a:spcPts val="200"/>
+              </a:spcAft>
+            </a:pPr>
+            <a:r>
+              <a:rPr sz="1200" b="1" lang="zh-TW" dirty="0">
+                <a:solidFill>
+                  <a:srgbClr val="000000"/>
+                </a:solidFill>
+                <a:latin typeface="Arial Unicode MS"/>
+                <a:ea typeface="Arial Unicode MS"/>
+                <a:cs typeface="Arial Unicode MS"/>
+              </a:rPr>
+              <a:t>▍以下照著唸</a:t>
+            </a:r>
+            <a:r>
+              <a:rPr sz="1200" lang="zh-TW" dirty="0">
+                <a:solidFill>
+                  <a:srgbClr val="000000"/>
+                </a:solidFill>
+                <a:latin typeface="Arial Unicode MS"/>
+                <a:ea typeface="Arial Unicode MS"/>
+                <a:cs typeface="Arial Unicode MS"/>
+              </a:rPr>
+              <a:t>
+</a:t>
+            </a:r>
+          </a:p>
+          <a:p>
+            <a:pPr algn="l">
+              <a:spcBef>
+                <a:spcPts val="0"/>
+              </a:spcBef>
+              <a:spcAft>
+                <a:spcPts val="200"/>
+              </a:spcAft>
+            </a:pPr>
+            <a:r>
+              <a:rPr sz="1200" lang="zh-TW" dirty="0">
+                <a:solidFill>
+                  <a:srgbClr val="000000"/>
+                </a:solidFill>
+                <a:latin typeface="Arial Unicode MS"/>
+                <a:ea typeface="Arial Unicode MS"/>
+                <a:cs typeface="Arial Unicode MS"/>
+              </a:rPr>
+              <a:t>這一張也不唸，是附錄。
+</a:t>
+            </a:r>
+          </a:p>
+          <a:p>
+            <a:pPr algn="l">
+              <a:spcBef>
+                <a:spcPts val="0"/>
+              </a:spcBef>
+              <a:spcAft>
+                <a:spcPts val="200"/>
+              </a:spcAft>
+            </a:pPr>
+            <a:r>
+              <a:rPr sz="1200" lang="zh-TW" dirty="0">
+                <a:solidFill>
+                  <a:srgbClr val="000000"/>
+                </a:solidFill>
+                <a:latin typeface="Arial Unicode MS"/>
+                <a:ea typeface="Arial Unicode MS"/>
+                <a:cs typeface="Arial Unicode MS"/>
+              </a:rPr>
+              <a:t>今天圈過的那幾行——有效像素、像素尺寸、動態範圍、LED 閃爍抑制——全部都在左邊那一頁的 Specifications 那一欄上。右邊第二頁是封裝尺寸，整頁寫 TBD，那是因為這份是 </a:t>
+            </a:r>
+            <a:r>
+              <a:rPr sz="1200" b="1" lang="zh-TW" dirty="0">
+                <a:solidFill>
+                  <a:srgbClr val="000000"/>
+                </a:solidFill>
+                <a:latin typeface="Arial Unicode MS"/>
+                <a:ea typeface="Arial Unicode MS"/>
+                <a:cs typeface="Arial Unicode MS"/>
+              </a:rPr>
+              <a:t>Product Preview</a:t>
+            </a:r>
+            <a:r>
+              <a:rPr sz="1200" lang="zh-TW" dirty="0">
+                <a:solidFill>
+                  <a:srgbClr val="000000"/>
+                </a:solidFill>
+                <a:latin typeface="Arial Unicode MS"/>
+                <a:ea typeface="Arial Unicode MS"/>
+                <a:cs typeface="Arial Unicode MS"/>
+              </a:rPr>
+              <a:t>，還不是正式規格書。
+</a:t>
+            </a:r>
+          </a:p>
+          <a:p>
+            <a:pPr algn="l">
+              <a:spcBef>
+                <a:spcPts val="0"/>
+              </a:spcBef>
+              <a:spcAft>
+                <a:spcPts val="200"/>
+              </a:spcAft>
+            </a:pPr>
+            <a:r>
+              <a:rPr sz="1200" lang="zh-TW" dirty="0">
+                <a:solidFill>
+                  <a:srgbClr val="000000"/>
+                </a:solidFill>
+                <a:latin typeface="Arial Unicode MS"/>
+                <a:ea typeface="Arial Unicode MS"/>
+                <a:cs typeface="Arial Unicode MS"/>
+              </a:rPr>
+              <a:t>各位記得第 1 節第 2 張說過的：</a:t>
+            </a:r>
+            <a:r>
+              <a:rPr sz="1200" b="1" lang="zh-TW" dirty="0">
+                <a:solidFill>
+                  <a:srgbClr val="000000"/>
+                </a:solidFill>
+                <a:latin typeface="Arial Unicode MS"/>
+                <a:ea typeface="Arial Unicode MS"/>
+                <a:cs typeface="Arial Unicode MS"/>
+              </a:rPr>
+              <a:t>快門方式這一行，這兩頁上都沒有。</a:t>
+            </a:r>
+            <a:r>
+              <a:rPr sz="1200" lang="zh-TW" dirty="0">
+                <a:solidFill>
+                  <a:srgbClr val="000000"/>
+                </a:solidFill>
+                <a:latin typeface="Arial Unicode MS"/>
+                <a:ea typeface="Arial Unicode MS"/>
+                <a:cs typeface="Arial Unicode MS"/>
+              </a:rPr>
+              <a:t>現在可以自己確認一次。要看快門方式，得去 onsemi 的產品頁。
+</a:t>
+            </a:r>
+          </a:p>
+          <a:p>
+            <a:pPr algn="l">
+              <a:spcBef>
+                <a:spcPts val="0"/>
+              </a:spcBef>
+              <a:spcAft>
+                <a:spcPts val="200"/>
+              </a:spcAft>
+            </a:pPr>
+            <a:r>
+              <a:rPr sz="1200" lang="zh-TW" dirty="0">
+                <a:solidFill>
+                  <a:srgbClr val="000000"/>
+                </a:solidFill>
+                <a:latin typeface="Arial Unicode MS"/>
+                <a:ea typeface="Arial Unicode MS"/>
+                <a:cs typeface="Arial Unicode MS"/>
+              </a:rPr>
+              <a:t>放映的時候可以放大看；發下去的 PDF 也印得出來。</a:t>
+            </a:r>
+          </a:p>
+        </p:txBody>
+      </p:sp>
+      <p:sp>
+        <p:nvSpPr>
+          <p:cNvPr id="4" name="Slide Number Placeholder 3"/>
+          <p:cNvSpPr>
+            <a:spLocks noGrp="1"/>
+          </p:cNvSpPr>
+          <p:nvPr>
+            <p:ph type="sldNum" idx="5"/>
+          </p:nvPr>
+        </p:nvSpPr>
+        <p:spPr>
+          <a:xfrm>
+            <a:off x="6500000" y="10200000"/>
+            <a:ext cx="500000" cy="300000"/>
+          </a:xfrm>
+        </p:spPr>
+        <p:txBody>
+          <a:bodyPr vert="horz" wrap="square" anchor="t" lIns="91440" rIns="91440" tIns="45720" bIns="45720"/>
+          <a:lstStyle/>
+          <a:p>
+            <a:pPr algn="l">
+              <a:spcBef>
+                <a:spcPts val="0"/>
+              </a:spcBef>
+              <a:spcAft>
+                <a:spcPts val="167"/>
+              </a:spcAft>
+            </a:pPr>
+            <a:r>
+              <a:rPr sz="1000" lang="zh-TW" dirty="0">
+                <a:solidFill>
+                  <a:srgbClr val="000000"/>
+                </a:solidFill>
+                <a:latin typeface="Arial Unicode MS"/>
+                <a:ea typeface="Arial Unicode MS"/>
+                <a:cs typeface="Arial Unicode MS"/>
+              </a:rPr>
+              <a:t>18</a:t>
             </a:r>
           </a:p>
         </p:txBody>
@@ -13307,7 +13991,7 @@
                 <a:ea typeface="Arial" pitchFamily="34" charset="-122"/>
                 <a:cs typeface="Arial" pitchFamily="34" charset="-120"/>
               </a:rPr>
-              <a:t>10 / 16</a:t>
+              <a:t>10 / 18</a:t>
             </a:r>
             <a:endParaRPr lang="en-US" sz="900" dirty="0"/>
           </a:p>
@@ -14056,7 +14740,7 @@
                 <a:ea typeface="Arial" pitchFamily="34" charset="-122"/>
                 <a:cs typeface="Arial" pitchFamily="34" charset="-120"/>
               </a:rPr>
-              <a:t>11 / 16</a:t>
+              <a:t>11 / 18</a:t>
             </a:r>
             <a:endParaRPr lang="en-US" sz="900" dirty="0"/>
           </a:p>
@@ -14376,7 +15060,7 @@
                 <a:ea typeface="Arial" pitchFamily="34" charset="-122"/>
                 <a:cs typeface="Arial" pitchFamily="34" charset="-120"/>
               </a:rPr>
-              <a:t>12 / 16</a:t>
+              <a:t>12 / 18</a:t>
             </a:r>
             <a:endParaRPr lang="en-US" sz="900" dirty="0"/>
           </a:p>
@@ -15476,7 +16160,7 @@
                 <a:ea typeface="Arial" pitchFamily="34" charset="-122"/>
                 <a:cs typeface="Arial" pitchFamily="34" charset="-120"/>
               </a:rPr>
-              <a:t>13 / 16</a:t>
+              <a:t>13 / 18</a:t>
             </a:r>
             <a:endParaRPr lang="en-US" sz="880" dirty="0"/>
           </a:p>
@@ -15926,7 +16610,7 @@
                 <a:ea typeface="Arial" pitchFamily="34" charset="-122"/>
                 <a:cs typeface="Arial" pitchFamily="34" charset="-120"/>
               </a:rPr>
-              <a:t>14 / 16</a:t>
+              <a:t>14 / 18</a:t>
             </a:r>
             <a:endParaRPr lang="en-US" sz="900" dirty="0"/>
           </a:p>
@@ -16430,7 +17114,7 @@
                 <a:ea typeface="Arial" pitchFamily="34" charset="-122"/>
                 <a:cs typeface="Arial" pitchFamily="34" charset="-120"/>
               </a:rPr>
-              <a:t>15 / 16</a:t>
+              <a:t>15 / 18</a:t>
             </a:r>
             <a:endParaRPr lang="en-US" sz="900" dirty="0"/>
           </a:p>
@@ -16844,7 +17528,7 @@
                 <a:ea typeface="Arial" pitchFamily="34" charset="-122"/>
                 <a:cs typeface="Arial" pitchFamily="34" charset="-120"/>
               </a:rPr>
-              <a:t>16 / 16</a:t>
+              <a:t>16 / 18</a:t>
             </a:r>
             <a:endParaRPr lang="en-US" sz="900" dirty="0"/>
           </a:p>
@@ -16853,6 +17537,736 @@
       <p:sp>
         <p:nvSpPr>
           <p:cNvPr id="14" name="Text 7"/>
+          <p:cNvSpPr txBox="1"/>
+          <p:nvPr/>
+        </p:nvSpPr>
+        <p:spPr>
+          <a:xfrm>
+            <a:off x="960120" y="128016"/>
+            <a:ext cx="2011680" cy="256032"/>
+          </a:xfrm>
+          <a:prstGeom prst="rect">
+            <a:avLst/>
+          </a:prstGeom>
+          <a:noFill/>
+          <a:ln/>
+        </p:spPr>
+        <p:txBody>
+          <a:bodyPr wrap="square" lIns="0" tIns="0" rIns="0" bIns="0" rtlCol="0" anchor="ctr"/>
+          <a:lstStyle/>
+          <a:p>
+            <a:pPr indent="0" marL="0">
+              <a:buNone/>
+            </a:pPr>
+            <a:r>
+              <a:rPr lang="en-US" sz="900" dirty="0">
+                <a:solidFill>
+                  <a:srgbClr val="5F7183"/>
+                </a:solidFill>
+                <a:latin typeface="Arial" pitchFamily="34" charset="0"/>
+                <a:ea typeface="Arial" pitchFamily="34" charset="-122"/>
+                <a:cs typeface="Arial" pitchFamily="34" charset="-120"/>
+              </a:rPr>
+              <a:t>Tiết 2 · 第 2 節</a:t>
+            </a:r>
+            <a:endParaRPr lang="en-US" sz="900" dirty="0"/>
+          </a:p>
+        </p:txBody>
+      </p:sp>
+    </p:spTree>
+  </p:cSld>
+  <p:clrMapOvr>
+    <a:masterClrMapping/>
+  </p:clrMapOvr>
+</p:sld>
+</file>
+
+<file path=ppt/slides/slide17.xml><?xml version="1.0" encoding="utf-8"?>
+<p:sld xmlns:a="http://schemas.openxmlformats.org/drawingml/2006/main" xmlns:r="http://schemas.openxmlformats.org/officeDocument/2006/relationships" xmlns:p="http://schemas.openxmlformats.org/presentationml/2006/main">
+  <p:cSld name="Slide 17">
+    <p:spTree>
+      <p:nvGrpSpPr>
+        <p:cNvPr id="1" name=""/>
+        <p:cNvGrpSpPr/>
+        <p:nvPr/>
+      </p:nvGrpSpPr>
+      <p:grpSpPr>
+        <a:xfrm>
+          <a:off x="0" y="0"/>
+          <a:ext cx="1" cy="1"/>
+          <a:chOff x="0" y="0"/>
+          <a:chExt cx="0" cy="0"/>
+        </a:xfrm>
+      </p:grpSpPr>
+      <p:sp>
+        <p:nvSpPr>
+          <p:cNvPr id="2" name="Text 0"/>
+          <p:cNvSpPr txBox="1"/>
+          <p:nvPr/>
+        </p:nvSpPr>
+        <p:spPr>
+          <a:xfrm>
+            <a:off x="502920" y="420624"/>
+            <a:ext cx="8138160" cy="274320"/>
+          </a:xfrm>
+          <a:prstGeom prst="rect">
+            <a:avLst/>
+          </a:prstGeom>
+          <a:noFill/>
+          <a:ln/>
+        </p:spPr>
+        <p:txBody>
+          <a:bodyPr wrap="square" lIns="0" tIns="0" rIns="0" bIns="0" rtlCol="0" anchor="ctr"/>
+          <a:lstStyle/>
+          <a:p>
+            <a:pPr indent="0" marL="0">
+              <a:buNone/>
+            </a:pPr>
+            <a:r>
+              <a:rPr lang="en-US" sz="1250" b="1" dirty="0">
+                <a:solidFill>
+                  <a:srgbClr val="007F72"/>
+                </a:solidFill>
+                <a:latin typeface="Arial" pitchFamily="34" charset="0"/>
+                <a:ea typeface="Arial" pitchFamily="34" charset="-122"/>
+                <a:cs typeface="Arial" pitchFamily="34" charset="-120"/>
+              </a:rPr>
+              <a:t>Phụ lục · 附錄（不計時）</a:t>
+            </a:r>
+            <a:endParaRPr lang="en-US" sz="1250" dirty="0"/>
+          </a:p>
+        </p:txBody>
+      </p:sp>
+      <p:sp>
+        <p:nvSpPr>
+          <p:cNvPr id="3" name="Text 1"/>
+          <p:cNvSpPr txBox="1"/>
+          <p:nvPr/>
+        </p:nvSpPr>
+        <p:spPr>
+          <a:xfrm>
+            <a:off x="502920" y="731520"/>
+            <a:ext cx="8138160" cy="585216"/>
+          </a:xfrm>
+          <a:prstGeom prst="rect">
+            <a:avLst/>
+          </a:prstGeom>
+          <a:noFill/>
+          <a:ln/>
+        </p:spPr>
+        <p:txBody>
+          <a:bodyPr wrap="square" lIns="0" tIns="0" rIns="0" bIns="0" rtlCol="0" anchor="t"/>
+          <a:lstStyle/>
+          <a:p>
+            <a:pPr indent="0" marL="0">
+              <a:lnSpc>
+                <a:spcPct val="120000"/>
+              </a:lnSpc>
+              <a:buNone/>
+            </a:pPr>
+            <a:r>
+              <a:rPr lang="en-US" sz="1700" b="1" dirty="0">
+                <a:solidFill>
+                  <a:srgbClr val="0B1F3A"/>
+                </a:solidFill>
+                <a:latin typeface="Arial" pitchFamily="34" charset="0"/>
+                <a:ea typeface="Arial" pitchFamily="34" charset="-122"/>
+                <a:cs typeface="Arial" pitchFamily="34" charset="-120"/>
+              </a:rPr>
+              <a:t>Hesai AT128P — nguyên trang sổ tay (phần thông số)</a:t>
+            </a:r>
+            <a:endParaRPr lang="en-US" sz="1700" dirty="0"/>
+          </a:p>
+          <a:p>
+            <a:pPr indent="0" marL="0">
+              <a:lnSpc>
+                <a:spcPct val="120000"/>
+              </a:lnSpc>
+              <a:buNone/>
+            </a:pPr>
+            <a:r>
+              <a:rPr lang="en-US" sz="1300" dirty="0">
+                <a:solidFill>
+                  <a:srgbClr val="007F72"/>
+                </a:solidFill>
+                <a:latin typeface="微軟正黑體" pitchFamily="34" charset="0"/>
+                <a:ea typeface="微軟正黑體" pitchFamily="34" charset="-122"/>
+                <a:cs typeface="微軟正黑體" pitchFamily="34" charset="-120"/>
+              </a:rPr>
+              <a:t>Hesai AT128P — 使用手冊原頁（規格那兩頁）</a:t>
+            </a:r>
+            <a:endParaRPr lang="en-US" sz="1700" dirty="0"/>
+          </a:p>
+        </p:txBody>
+      </p:sp>
+      <p:sp>
+        <p:nvSpPr>
+          <p:cNvPr id="4" name="Shape 2"/>
+          <p:cNvSpPr/>
+          <p:nvPr/>
+        </p:nvSpPr>
+        <p:spPr>
+          <a:xfrm>
+            <a:off x="484632" y="1445999"/>
+            <a:ext cx="4041648" cy="2868722"/>
+          </a:xfrm>
+          <a:prstGeom prst="rect">
+            <a:avLst/>
+          </a:prstGeom>
+          <a:solidFill>
+            <a:srgbClr val="FFFFFF"/>
+          </a:solidFill>
+          <a:ln w="12700">
+            <a:solidFill>
+              <a:srgbClr val="DBE3EA"/>
+            </a:solidFill>
+            <a:prstDash val="solid"/>
+          </a:ln>
+        </p:spPr>
+      </p:sp>
+      <p:pic>
+        <p:nvPicPr>
+          <p:cNvPr id="5" name="Image 0" descr="/Users/tsengchenghsun/Class/carClass/Claude outputs/第五週(10-8)/src/img/w5_ds_at128p_p13.png">    </p:cNvPr>
+          <p:cNvPicPr>
+            <a:picLocks noChangeAspect="1"/>
+          </p:cNvPicPr>
+          <p:nvPr/>
+        </p:nvPicPr>
+        <p:blipFill>
+          <a:blip r:embed="rId1"/>
+          <a:stretch>
+            <a:fillRect/>
+          </a:stretch>
+        </p:blipFill>
+        <p:spPr>
+          <a:xfrm>
+            <a:off x="502920" y="1464287"/>
+            <a:ext cx="4005072" cy="2832146"/>
+          </a:xfrm>
+          <a:prstGeom prst="rect">
+            <a:avLst/>
+          </a:prstGeom>
+        </p:spPr>
+      </p:pic>
+      <p:sp>
+        <p:nvSpPr>
+          <p:cNvPr id="6" name="Shape 3"/>
+          <p:cNvSpPr/>
+          <p:nvPr/>
+        </p:nvSpPr>
+        <p:spPr>
+          <a:xfrm>
+            <a:off x="4617720" y="1445999"/>
+            <a:ext cx="4041648" cy="2868722"/>
+          </a:xfrm>
+          <a:prstGeom prst="rect">
+            <a:avLst/>
+          </a:prstGeom>
+          <a:solidFill>
+            <a:srgbClr val="FFFFFF"/>
+          </a:solidFill>
+          <a:ln w="12700">
+            <a:solidFill>
+              <a:srgbClr val="DBE3EA"/>
+            </a:solidFill>
+            <a:prstDash val="solid"/>
+          </a:ln>
+        </p:spPr>
+      </p:sp>
+      <p:pic>
+        <p:nvPicPr>
+          <p:cNvPr id="7" name="Image 1" descr="/Users/tsengchenghsun/Class/carClass/Claude outputs/第五週(10-8)/src/img/w5_ds_at128p_p15.png">    </p:cNvPr>
+          <p:cNvPicPr>
+            <a:picLocks noChangeAspect="1"/>
+          </p:cNvPicPr>
+          <p:nvPr/>
+        </p:nvPicPr>
+        <p:blipFill>
+          <a:blip r:embed="rId2"/>
+          <a:stretch>
+            <a:fillRect/>
+          </a:stretch>
+        </p:blipFill>
+        <p:spPr>
+          <a:xfrm>
+            <a:off x="4636008" y="1464287"/>
+            <a:ext cx="4005072" cy="2832146"/>
+          </a:xfrm>
+          <a:prstGeom prst="rect">
+            <a:avLst/>
+          </a:prstGeom>
+        </p:spPr>
+      </p:pic>
+      <p:sp>
+        <p:nvSpPr>
+          <p:cNvPr id="8" name="Text 4"/>
+          <p:cNvSpPr txBox="1"/>
+          <p:nvPr/>
+        </p:nvSpPr>
+        <p:spPr>
+          <a:xfrm>
+            <a:off x="502920" y="4407408"/>
+            <a:ext cx="8138160" cy="201168"/>
+          </a:xfrm>
+          <a:prstGeom prst="rect">
+            <a:avLst/>
+          </a:prstGeom>
+          <a:noFill/>
+          <a:ln/>
+        </p:spPr>
+        <p:txBody>
+          <a:bodyPr wrap="square" lIns="0" tIns="0" rIns="0" bIns="0" rtlCol="0" anchor="ctr"/>
+          <a:lstStyle/>
+          <a:p>
+            <a:pPr algn="ctr" indent="0" marL="0">
+              <a:buNone/>
+            </a:pPr>
+            <a:r>
+              <a:rPr lang="en-US" sz="850" dirty="0">
+                <a:solidFill>
+                  <a:srgbClr val="5F7183"/>
+                </a:solidFill>
+                <a:latin typeface="Arial" pitchFamily="34" charset="0"/>
+                <a:ea typeface="Arial" pitchFamily="34" charset="-122"/>
+                <a:cs typeface="Arial" pitchFamily="34" charset="-120"/>
+              </a:rPr>
+              <a:t>Hesai AT128P User Manual A02（en-250410）· §1.5 Specifications 第 13 頁與註解第 15 頁原頁全文 · 讀取 2026/10/02 · 版權歸 Hesai，課堂引用</a:t>
+            </a:r>
+            <a:endParaRPr lang="en-US" sz="850" dirty="0"/>
+          </a:p>
+        </p:txBody>
+      </p:sp>
+      <p:pic>
+        <p:nvPicPr>
+          <p:cNvPr id="10" name="Image 2" descr="/Users/tsengchenghsun/Class/carClass/Claude outputs/第五週(10-8)/src/logo.png">    </p:cNvPr>
+          <p:cNvPicPr>
+            <a:picLocks noChangeAspect="1"/>
+          </p:cNvPicPr>
+          <p:nvPr/>
+        </p:nvPicPr>
+        <p:blipFill>
+          <a:blip r:embed="rId3"/>
+          <a:stretch>
+            <a:fillRect/>
+          </a:stretch>
+        </p:blipFill>
+        <p:spPr>
+          <a:xfrm>
+            <a:off x="7882128" y="109728"/>
+            <a:ext cx="1097280" cy="242439"/>
+          </a:xfrm>
+          <a:prstGeom prst="rect">
+            <a:avLst/>
+          </a:prstGeom>
+        </p:spPr>
+      </p:pic>
+      <p:sp>
+        <p:nvSpPr>
+          <p:cNvPr id="11" name="Text 5"/>
+          <p:cNvSpPr txBox="1"/>
+          <p:nvPr/>
+        </p:nvSpPr>
+        <p:spPr>
+          <a:xfrm>
+            <a:off x="109728" y="128016"/>
+            <a:ext cx="822960" cy="256032"/>
+          </a:xfrm>
+          <a:prstGeom prst="rect">
+            <a:avLst/>
+          </a:prstGeom>
+          <a:noFill/>
+          <a:ln/>
+        </p:spPr>
+        <p:txBody>
+          <a:bodyPr wrap="square" lIns="0" tIns="0" rIns="0" bIns="0" rtlCol="0" anchor="ctr"/>
+          <a:lstStyle/>
+          <a:p>
+            <a:pPr indent="0" marL="0">
+              <a:buNone/>
+            </a:pPr>
+            <a:r>
+              <a:rPr lang="en-US" sz="900" dirty="0">
+                <a:solidFill>
+                  <a:srgbClr val="5F7183"/>
+                </a:solidFill>
+                <a:latin typeface="Arial" pitchFamily="34" charset="0"/>
+                <a:ea typeface="Arial" pitchFamily="34" charset="-122"/>
+                <a:cs typeface="Arial" pitchFamily="34" charset="-120"/>
+              </a:rPr>
+              <a:t>17 / 18</a:t>
+            </a:r>
+            <a:endParaRPr lang="en-US" sz="900" dirty="0"/>
+          </a:p>
+        </p:txBody>
+      </p:sp>
+      <p:sp>
+        <p:nvSpPr>
+          <p:cNvPr id="12" name="Text 6"/>
+          <p:cNvSpPr txBox="1"/>
+          <p:nvPr/>
+        </p:nvSpPr>
+        <p:spPr>
+          <a:xfrm>
+            <a:off x="960120" y="128016"/>
+            <a:ext cx="2011680" cy="256032"/>
+          </a:xfrm>
+          <a:prstGeom prst="rect">
+            <a:avLst/>
+          </a:prstGeom>
+          <a:noFill/>
+          <a:ln/>
+        </p:spPr>
+        <p:txBody>
+          <a:bodyPr wrap="square" lIns="0" tIns="0" rIns="0" bIns="0" rtlCol="0" anchor="ctr"/>
+          <a:lstStyle/>
+          <a:p>
+            <a:pPr indent="0" marL="0">
+              <a:buNone/>
+            </a:pPr>
+            <a:r>
+              <a:rPr lang="en-US" sz="900" dirty="0">
+                <a:solidFill>
+                  <a:srgbClr val="5F7183"/>
+                </a:solidFill>
+                <a:latin typeface="Arial" pitchFamily="34" charset="0"/>
+                <a:ea typeface="Arial" pitchFamily="34" charset="-122"/>
+                <a:cs typeface="Arial" pitchFamily="34" charset="-120"/>
+              </a:rPr>
+              <a:t>Tiết 2 · 第 2 節</a:t>
+            </a:r>
+            <a:endParaRPr lang="en-US" sz="900" dirty="0"/>
+          </a:p>
+        </p:txBody>
+      </p:sp>
+    </p:spTree>
+  </p:cSld>
+  <p:clrMapOvr>
+    <a:masterClrMapping/>
+  </p:clrMapOvr>
+</p:sld>
+</file>
+
+<file path=ppt/slides/slide18.xml><?xml version="1.0" encoding="utf-8"?>
+<p:sld xmlns:a="http://schemas.openxmlformats.org/drawingml/2006/main" xmlns:r="http://schemas.openxmlformats.org/officeDocument/2006/relationships" xmlns:p="http://schemas.openxmlformats.org/presentationml/2006/main">
+  <p:cSld name="Slide 18">
+    <p:spTree>
+      <p:nvGrpSpPr>
+        <p:cNvPr id="1" name=""/>
+        <p:cNvGrpSpPr/>
+        <p:nvPr/>
+      </p:nvGrpSpPr>
+      <p:grpSpPr>
+        <a:xfrm>
+          <a:off x="0" y="0"/>
+          <a:ext cx="1" cy="1"/>
+          <a:chOff x="0" y="0"/>
+          <a:chExt cx="0" cy="0"/>
+        </a:xfrm>
+      </p:grpSpPr>
+      <p:sp>
+        <p:nvSpPr>
+          <p:cNvPr id="2" name="Text 0"/>
+          <p:cNvSpPr txBox="1"/>
+          <p:nvPr/>
+        </p:nvSpPr>
+        <p:spPr>
+          <a:xfrm>
+            <a:off x="502920" y="420624"/>
+            <a:ext cx="8138160" cy="274320"/>
+          </a:xfrm>
+          <a:prstGeom prst="rect">
+            <a:avLst/>
+          </a:prstGeom>
+          <a:noFill/>
+          <a:ln/>
+        </p:spPr>
+        <p:txBody>
+          <a:bodyPr wrap="square" lIns="0" tIns="0" rIns="0" bIns="0" rtlCol="0" anchor="ctr"/>
+          <a:lstStyle/>
+          <a:p>
+            <a:pPr indent="0" marL="0">
+              <a:buNone/>
+            </a:pPr>
+            <a:r>
+              <a:rPr lang="en-US" sz="1250" b="1" dirty="0">
+                <a:solidFill>
+                  <a:srgbClr val="007F72"/>
+                </a:solidFill>
+                <a:latin typeface="Arial" pitchFamily="34" charset="0"/>
+                <a:ea typeface="Arial" pitchFamily="34" charset="-122"/>
+                <a:cs typeface="Arial" pitchFamily="34" charset="-120"/>
+              </a:rPr>
+              <a:t>Phụ lục · 附錄（不計時）</a:t>
+            </a:r>
+            <a:endParaRPr lang="en-US" sz="1250" dirty="0"/>
+          </a:p>
+        </p:txBody>
+      </p:sp>
+      <p:sp>
+        <p:nvSpPr>
+          <p:cNvPr id="3" name="Text 1"/>
+          <p:cNvSpPr txBox="1"/>
+          <p:nvPr/>
+        </p:nvSpPr>
+        <p:spPr>
+          <a:xfrm>
+            <a:off x="502920" y="731520"/>
+            <a:ext cx="8138160" cy="585216"/>
+          </a:xfrm>
+          <a:prstGeom prst="rect">
+            <a:avLst/>
+          </a:prstGeom>
+          <a:noFill/>
+          <a:ln/>
+        </p:spPr>
+        <p:txBody>
+          <a:bodyPr wrap="square" lIns="0" tIns="0" rIns="0" bIns="0" rtlCol="0" anchor="t"/>
+          <a:lstStyle/>
+          <a:p>
+            <a:pPr indent="0" marL="0">
+              <a:lnSpc>
+                <a:spcPct val="120000"/>
+              </a:lnSpc>
+              <a:buNone/>
+            </a:pPr>
+            <a:r>
+              <a:rPr lang="en-US" sz="1700" b="1" dirty="0">
+                <a:solidFill>
+                  <a:srgbClr val="0B1F3A"/>
+                </a:solidFill>
+                <a:latin typeface="Arial" pitchFamily="34" charset="0"/>
+                <a:ea typeface="Arial" pitchFamily="34" charset="-122"/>
+                <a:cs typeface="Arial" pitchFamily="34" charset="-120"/>
+              </a:rPr>
+              <a:t>onsemi AR0233AT — toàn bộ datasheet gốc (2 trang)</a:t>
+            </a:r>
+            <a:endParaRPr lang="en-US" sz="1700" dirty="0"/>
+          </a:p>
+          <a:p>
+            <a:pPr indent="0" marL="0">
+              <a:lnSpc>
+                <a:spcPct val="120000"/>
+              </a:lnSpc>
+              <a:buNone/>
+            </a:pPr>
+            <a:r>
+              <a:rPr lang="en-US" sz="1300" dirty="0">
+                <a:solidFill>
+                  <a:srgbClr val="007F72"/>
+                </a:solidFill>
+                <a:latin typeface="微軟正黑體" pitchFamily="34" charset="0"/>
+                <a:ea typeface="微軟正黑體" pitchFamily="34" charset="-122"/>
+                <a:cs typeface="微軟正黑體" pitchFamily="34" charset="-120"/>
+              </a:rPr>
+              <a:t>onsemi AR0233AT — 廠商規格書原頁（全兩頁）</a:t>
+            </a:r>
+            <a:endParaRPr lang="en-US" sz="1700" dirty="0"/>
+          </a:p>
+        </p:txBody>
+      </p:sp>
+      <p:sp>
+        <p:nvSpPr>
+          <p:cNvPr id="4" name="Shape 2"/>
+          <p:cNvSpPr/>
+          <p:nvPr/>
+        </p:nvSpPr>
+        <p:spPr>
+          <a:xfrm>
+            <a:off x="2186247" y="1371600"/>
+            <a:ext cx="2340033" cy="3017520"/>
+          </a:xfrm>
+          <a:prstGeom prst="rect">
+            <a:avLst/>
+          </a:prstGeom>
+          <a:solidFill>
+            <a:srgbClr val="FFFFFF"/>
+          </a:solidFill>
+          <a:ln w="12700">
+            <a:solidFill>
+              <a:srgbClr val="DBE3EA"/>
+            </a:solidFill>
+            <a:prstDash val="solid"/>
+          </a:ln>
+        </p:spPr>
+      </p:sp>
+      <p:pic>
+        <p:nvPicPr>
+          <p:cNvPr id="5" name="Image 0" descr="/Users/tsengchenghsun/Class/carClass/Claude outputs/第五週(10-8)/src/img/w5_ds_ar0233at_p1.png">    </p:cNvPr>
+          <p:cNvPicPr>
+            <a:picLocks noChangeAspect="1"/>
+          </p:cNvPicPr>
+          <p:nvPr/>
+        </p:nvPicPr>
+        <p:blipFill>
+          <a:blip r:embed="rId1"/>
+          <a:stretch>
+            <a:fillRect/>
+          </a:stretch>
+        </p:blipFill>
+        <p:spPr>
+          <a:xfrm>
+            <a:off x="2204535" y="1389888"/>
+            <a:ext cx="2303457" cy="2980944"/>
+          </a:xfrm>
+          <a:prstGeom prst="rect">
+            <a:avLst/>
+          </a:prstGeom>
+        </p:spPr>
+      </p:pic>
+      <p:sp>
+        <p:nvSpPr>
+          <p:cNvPr id="6" name="Shape 3"/>
+          <p:cNvSpPr/>
+          <p:nvPr/>
+        </p:nvSpPr>
+        <p:spPr>
+          <a:xfrm>
+            <a:off x="4617720" y="1371600"/>
+            <a:ext cx="2340033" cy="3017520"/>
+          </a:xfrm>
+          <a:prstGeom prst="rect">
+            <a:avLst/>
+          </a:prstGeom>
+          <a:solidFill>
+            <a:srgbClr val="FFFFFF"/>
+          </a:solidFill>
+          <a:ln w="12700">
+            <a:solidFill>
+              <a:srgbClr val="DBE3EA"/>
+            </a:solidFill>
+            <a:prstDash val="solid"/>
+          </a:ln>
+        </p:spPr>
+      </p:sp>
+      <p:pic>
+        <p:nvPicPr>
+          <p:cNvPr id="7" name="Image 1" descr="/Users/tsengchenghsun/Class/carClass/Claude outputs/第五週(10-8)/src/img/w5_ds_ar0233at_p2.png">    </p:cNvPr>
+          <p:cNvPicPr>
+            <a:picLocks noChangeAspect="1"/>
+          </p:cNvPicPr>
+          <p:nvPr/>
+        </p:nvPicPr>
+        <p:blipFill>
+          <a:blip r:embed="rId2"/>
+          <a:stretch>
+            <a:fillRect/>
+          </a:stretch>
+        </p:blipFill>
+        <p:spPr>
+          <a:xfrm>
+            <a:off x="4636008" y="1389888"/>
+            <a:ext cx="2303457" cy="2980944"/>
+          </a:xfrm>
+          <a:prstGeom prst="rect">
+            <a:avLst/>
+          </a:prstGeom>
+        </p:spPr>
+      </p:pic>
+      <p:sp>
+        <p:nvSpPr>
+          <p:cNvPr id="8" name="Text 4"/>
+          <p:cNvSpPr txBox="1"/>
+          <p:nvPr/>
+        </p:nvSpPr>
+        <p:spPr>
+          <a:xfrm>
+            <a:off x="502920" y="4407408"/>
+            <a:ext cx="8138160" cy="201168"/>
+          </a:xfrm>
+          <a:prstGeom prst="rect">
+            <a:avLst/>
+          </a:prstGeom>
+          <a:noFill/>
+          <a:ln/>
+        </p:spPr>
+        <p:txBody>
+          <a:bodyPr wrap="square" lIns="0" tIns="0" rIns="0" bIns="0" rtlCol="0" anchor="ctr"/>
+          <a:lstStyle/>
+          <a:p>
+            <a:pPr algn="ctr" indent="0" marL="0">
+              <a:buNone/>
+            </a:pPr>
+            <a:r>
+              <a:rPr lang="en-US" sz="850" dirty="0">
+                <a:solidFill>
+                  <a:srgbClr val="5F7183"/>
+                </a:solidFill>
+                <a:latin typeface="Arial" pitchFamily="34" charset="0"/>
+                <a:ea typeface="Arial" pitchFamily="34" charset="-122"/>
+                <a:cs typeface="Arial" pitchFamily="34" charset="-120"/>
+              </a:rPr>
+              <a:t>onsemi, AR0233AT Product Preview, Rev. P2, 11/2017（Publication Order Number AR0233AT/D）· 原頁全文 · 讀取 2026/10/02 · 版權歸 onsemi，課堂引用</a:t>
+            </a:r>
+            <a:endParaRPr lang="en-US" sz="850" dirty="0"/>
+          </a:p>
+        </p:txBody>
+      </p:sp>
+      <p:pic>
+        <p:nvPicPr>
+          <p:cNvPr id="10" name="Image 2" descr="/Users/tsengchenghsun/Class/carClass/Claude outputs/第五週(10-8)/src/logo.png">    </p:cNvPr>
+          <p:cNvPicPr>
+            <a:picLocks noChangeAspect="1"/>
+          </p:cNvPicPr>
+          <p:nvPr/>
+        </p:nvPicPr>
+        <p:blipFill>
+          <a:blip r:embed="rId3"/>
+          <a:stretch>
+            <a:fillRect/>
+          </a:stretch>
+        </p:blipFill>
+        <p:spPr>
+          <a:xfrm>
+            <a:off x="7882128" y="109728"/>
+            <a:ext cx="1097280" cy="242439"/>
+          </a:xfrm>
+          <a:prstGeom prst="rect">
+            <a:avLst/>
+          </a:prstGeom>
+        </p:spPr>
+      </p:pic>
+      <p:sp>
+        <p:nvSpPr>
+          <p:cNvPr id="11" name="Text 5"/>
+          <p:cNvSpPr txBox="1"/>
+          <p:nvPr/>
+        </p:nvSpPr>
+        <p:spPr>
+          <a:xfrm>
+            <a:off x="109728" y="128016"/>
+            <a:ext cx="822960" cy="256032"/>
+          </a:xfrm>
+          <a:prstGeom prst="rect">
+            <a:avLst/>
+          </a:prstGeom>
+          <a:noFill/>
+          <a:ln/>
+        </p:spPr>
+        <p:txBody>
+          <a:bodyPr wrap="square" lIns="0" tIns="0" rIns="0" bIns="0" rtlCol="0" anchor="ctr"/>
+          <a:lstStyle/>
+          <a:p>
+            <a:pPr indent="0" marL="0">
+              <a:buNone/>
+            </a:pPr>
+            <a:r>
+              <a:rPr lang="en-US" sz="900" dirty="0">
+                <a:solidFill>
+                  <a:srgbClr val="5F7183"/>
+                </a:solidFill>
+                <a:latin typeface="Arial" pitchFamily="34" charset="0"/>
+                <a:ea typeface="Arial" pitchFamily="34" charset="-122"/>
+                <a:cs typeface="Arial" pitchFamily="34" charset="-120"/>
+              </a:rPr>
+              <a:t>18 / 18</a:t>
+            </a:r>
+            <a:endParaRPr lang="en-US" sz="900" dirty="0"/>
+          </a:p>
+        </p:txBody>
+      </p:sp>
+      <p:sp>
+        <p:nvSpPr>
+          <p:cNvPr id="12" name="Text 6"/>
           <p:cNvSpPr txBox="1"/>
           <p:nvPr/>
         </p:nvSpPr>
@@ -17164,7 +18578,7 @@
                 <a:ea typeface="Arial" pitchFamily="34" charset="-122"/>
                 <a:cs typeface="Arial" pitchFamily="34" charset="-120"/>
               </a:rPr>
-              <a:t>2 / 16</a:t>
+              <a:t>2 / 18</a:t>
             </a:r>
             <a:endParaRPr lang="en-US" sz="900" dirty="0"/>
           </a:p>
@@ -17614,7 +19028,7 @@
                 <a:ea typeface="Arial" pitchFamily="34" charset="-122"/>
                 <a:cs typeface="Arial" pitchFamily="34" charset="-120"/>
               </a:rPr>
-              <a:t>3 / 16</a:t>
+              <a:t>3 / 18</a:t>
             </a:r>
             <a:endParaRPr lang="en-US" sz="900" dirty="0"/>
           </a:p>
@@ -18064,7 +19478,7 @@
                 <a:ea typeface="Arial" pitchFamily="34" charset="-122"/>
                 <a:cs typeface="Arial" pitchFamily="34" charset="-120"/>
               </a:rPr>
-              <a:t>4 / 16</a:t>
+              <a:t>4 / 18</a:t>
             </a:r>
             <a:endParaRPr lang="en-US" sz="900" dirty="0"/>
           </a:p>
@@ -18514,7 +19928,7 @@
                 <a:ea typeface="Arial" pitchFamily="34" charset="-122"/>
                 <a:cs typeface="Arial" pitchFamily="34" charset="-120"/>
               </a:rPr>
-              <a:t>5 / 16</a:t>
+              <a:t>5 / 18</a:t>
             </a:r>
             <a:endParaRPr lang="en-US" sz="900" dirty="0"/>
           </a:p>
@@ -18834,7 +20248,7 @@
                 <a:ea typeface="Arial" pitchFamily="34" charset="-122"/>
                 <a:cs typeface="Arial" pitchFamily="34" charset="-120"/>
               </a:rPr>
-              <a:t>6 / 16</a:t>
+              <a:t>6 / 18</a:t>
             </a:r>
             <a:endParaRPr lang="en-US" sz="900" dirty="0"/>
           </a:p>
@@ -20469,7 +21883,7 @@
                 <a:ea typeface="Arial" pitchFamily="34" charset="-122"/>
                 <a:cs typeface="Arial" pitchFamily="34" charset="-120"/>
               </a:rPr>
-              <a:t>7 / 16</a:t>
+              <a:t>7 / 18</a:t>
             </a:r>
             <a:endParaRPr lang="en-US" sz="880" dirty="0"/>
           </a:p>
@@ -20919,7 +22333,7 @@
                 <a:ea typeface="Arial" pitchFamily="34" charset="-122"/>
                 <a:cs typeface="Arial" pitchFamily="34" charset="-120"/>
               </a:rPr>
-              <a:t>8 / 16</a:t>
+              <a:t>8 / 18</a:t>
             </a:r>
             <a:endParaRPr lang="en-US" sz="900" dirty="0"/>
           </a:p>
@@ -21369,7 +22783,7 @@
                 <a:ea typeface="Arial" pitchFamily="34" charset="-122"/>
                 <a:cs typeface="Arial" pitchFamily="34" charset="-120"/>
               </a:rPr>
-              <a:t>9 / 16</a:t>
+              <a:t>9 / 18</a:t>
             </a:r>
             <a:endParaRPr lang="en-US" sz="900" dirty="0"/>
           </a:p>

--- a/第五週(10-08)/第五週_第2節_簡報.pptx
+++ b/第五週(10-08)/第五週_第2節_簡報.pptx
@@ -7034,7 +7034,7 @@
                 <a:ea typeface="Arial Unicode MS"/>
                 <a:cs typeface="Arial Unicode MS"/>
               </a:rPr>
-              <a:t>等動圖掃完，指著那根斜掉的電線桿和下面那個箭頭說「它本來是直的」，再圈結論條。
+              <a:t>等動圖掃完，指著那根斜掉的電線桿和下面那個箭頭說「它本來是直的」。再放 Sony 那支 32 秒的對照影片（youtu.be/YmEH8z1JWgc），叫他們只看主旋翼。最後圈結論條。
 </a:t>
             </a:r>
           </a:p>
@@ -7111,7 +7111,29 @@
                 <a:ea typeface="Arial Unicode MS"/>
                 <a:cs typeface="Arial Unicode MS"/>
               </a:rPr>
-              <a:t>。規格表上會寫 rolling shutter 或者 global shutter——AR0233AT 是 </a:t>
+              <a:t>。規格表上那一行的欄位名叫 </a:t>
+            </a:r>
+            <a:r>
+              <a:rPr sz="800" b="1" lang="zh-TW" dirty="0">
+                <a:solidFill>
+                  <a:srgbClr val="000000"/>
+                </a:solidFill>
+                <a:latin typeface="Arial Unicode MS"/>
+                <a:ea typeface="Arial Unicode MS"/>
+                <a:cs typeface="Arial Unicode MS"/>
+              </a:rPr>
+              <a:t>Shutter Type</a:t>
+            </a:r>
+            <a:r>
+              <a:rPr sz="800" lang="zh-TW" dirty="0">
+                <a:solidFill>
+                  <a:srgbClr val="000000"/>
+                </a:solidFill>
+                <a:latin typeface="Arial Unicode MS"/>
+                <a:ea typeface="Arial Unicode MS"/>
+                <a:cs typeface="Arial Unicode MS"/>
+              </a:rPr>
+              <a:t>，有的廠商只寫 Shutter；上面填的不是 rolling shutter 就是 global shutter。AR0233AT 填的是 </a:t>
             </a:r>
             <a:r>
               <a:rPr sz="800" b="1" lang="zh-TW" dirty="0">
@@ -7155,6 +7177,50 @@
                 <a:ea typeface="Arial Unicode MS"/>
                 <a:cs typeface="Arial Unicode MS"/>
               </a:rPr>
+              <a:t>這裡要提醒一次：</a:t>
+            </a:r>
+            <a:r>
+              <a:rPr sz="800" b="1" lang="zh-TW" dirty="0">
+                <a:solidFill>
+                  <a:srgbClr val="000000"/>
+                </a:solidFill>
+                <a:latin typeface="Arial Unicode MS"/>
+                <a:ea typeface="Arial Unicode MS"/>
+                <a:cs typeface="Arial Unicode MS"/>
+              </a:rPr>
+              <a:t>第二張說過，這一行不在那份兩頁的 Product Preview 上</a:t>
+            </a:r>
+            <a:r>
+              <a:rPr sz="800" lang="zh-TW" dirty="0">
+                <a:solidFill>
+                  <a:srgbClr val="000000"/>
+                </a:solidFill>
+                <a:latin typeface="Arial Unicode MS"/>
+                <a:ea typeface="Arial Unicode MS"/>
+                <a:cs typeface="Arial Unicode MS"/>
+              </a:rPr>
+              <a:t>——各位翻到最後的附錄去找也找不到。要看它得去 onsemi 的產品頁；判讀台上我已經幫各位把那一行補進去了，現在就可以切過去看。
+</a:t>
+            </a:r>
+          </a:p>
+          <a:p>
+            <a:pPr algn="l">
+              <a:spcBef>
+                <a:spcPts val="0"/>
+              </a:spcBef>
+              <a:spcAft>
+                <a:spcPts val="133"/>
+              </a:spcAft>
+            </a:pPr>
+            <a:r>
+              <a:rPr sz="800" lang="zh-TW" dirty="0">
+                <a:solidFill>
+                  <a:srgbClr val="000000"/>
+                </a:solidFill>
+                <a:latin typeface="Arial Unicode MS"/>
+                <a:ea typeface="Arial Unicode MS"/>
+                <a:cs typeface="Arial Unicode MS"/>
+              </a:rPr>
               <a:t>大部分的人以為，相機按一下就是一整張照片同時拍好。</a:t>
             </a:r>
             <a:r>
@@ -7168,28 +7234,6 @@
               </a:rPr>
               <a:t>大部分的車用相機不是這樣。</a:t>
             </a:r>
-            <a:r>
-              <a:rPr sz="800" lang="zh-TW" dirty="0">
-                <a:solidFill>
-                  <a:srgbClr val="000000"/>
-                </a:solidFill>
-                <a:latin typeface="Arial Unicode MS"/>
-                <a:ea typeface="Arial Unicode MS"/>
-                <a:cs typeface="Arial Unicode MS"/>
-              </a:rPr>
-              <a:t>
-</a:t>
-            </a:r>
-          </a:p>
-          <a:p>
-            <a:pPr algn="l">
-              <a:spcBef>
-                <a:spcPts val="0"/>
-              </a:spcBef>
-              <a:spcAft>
-                <a:spcPts val="133"/>
-              </a:spcAft>
-            </a:pPr>
             <a:r>
               <a:rPr sz="800" lang="zh-TW" dirty="0">
                 <a:solidFill>
@@ -7287,7 +7331,7 @@
                 <a:ea typeface="Arial Unicode MS"/>
                 <a:cs typeface="Arial Unicode MS"/>
               </a:rPr>
-              <a:t>。
+              <a:t>。這會怎樣？各位有沒有看過那種照片，車子開過去的時候路邊的電線桿是歪的？或者拍飛機的螺旋槳，葉片變成香蕉形？那就是捲簾快門。
 </a:t>
             </a:r>
           </a:p>
@@ -7309,7 +7353,73 @@
                 <a:ea typeface="Arial Unicode MS"/>
                 <a:cs typeface="Arial Unicode MS"/>
               </a:rPr>
-              <a:t>這會怎樣？各位有沒有看過那種照片，車子開過去的時候路邊的電線桿是歪的？或者拍飛機的螺旋槳，葉片變成香蕉形？那就是捲簾快門。
+              <a:t>我放一段三十二秒的影片，Sony 官方拍的，網址是 </a:t>
+            </a:r>
+            <a:r>
+              <a:rPr sz="800" b="1" lang="zh-TW" dirty="0">
+                <a:solidFill>
+                  <a:srgbClr val="000000"/>
+                </a:solidFill>
+                <a:latin typeface="Arial Unicode MS"/>
+                <a:ea typeface="Arial Unicode MS"/>
+                <a:cs typeface="Arial Unicode MS"/>
+              </a:rPr>
+              <a:t>youtu.be/YmEH8z1JWgc</a:t>
+            </a:r>
+            <a:r>
+              <a:rPr sz="800" lang="zh-TW" dirty="0">
+                <a:solidFill>
+                  <a:srgbClr val="000000"/>
+                </a:solidFill>
+                <a:latin typeface="Arial Unicode MS"/>
+                <a:ea typeface="Arial Unicode MS"/>
+                <a:cs typeface="Arial Unicode MS"/>
+              </a:rPr>
+              <a:t>。畫面分上下兩半，</a:t>
+            </a:r>
+            <a:r>
+              <a:rPr sz="800" b="1" lang="zh-TW" dirty="0">
+                <a:solidFill>
+                  <a:srgbClr val="000000"/>
+                </a:solidFill>
+                <a:latin typeface="Arial Unicode MS"/>
+                <a:ea typeface="Arial Unicode MS"/>
+                <a:cs typeface="Arial Unicode MS"/>
+              </a:rPr>
+              <a:t>上面標 Global Shutter、下面標 Rolling Shutter</a:t>
+            </a:r>
+            <a:r>
+              <a:rPr sz="800" lang="zh-TW" dirty="0">
+                <a:solidFill>
+                  <a:srgbClr val="000000"/>
+                </a:solidFill>
+                <a:latin typeface="Arial Unicode MS"/>
+                <a:ea typeface="Arial Unicode MS"/>
+                <a:cs typeface="Arial Unicode MS"/>
+              </a:rPr>
+              <a:t>——同一架直升機、同一個時間，兩種快門拍出來的樣子。各位只要看一件事：</a:t>
+            </a:r>
+            <a:r>
+              <a:rPr sz="800" b="1" lang="zh-TW" dirty="0">
+                <a:solidFill>
+                  <a:srgbClr val="000000"/>
+                </a:solidFill>
+                <a:latin typeface="Arial Unicode MS"/>
+                <a:ea typeface="Arial Unicode MS"/>
+                <a:cs typeface="Arial Unicode MS"/>
+              </a:rPr>
+              <a:t>主旋翼那兩片葉子</a:t>
+            </a:r>
+            <a:r>
+              <a:rPr sz="800" lang="zh-TW" dirty="0">
+                <a:solidFill>
+                  <a:srgbClr val="000000"/>
+                </a:solidFill>
+                <a:latin typeface="Arial Unicode MS"/>
+                <a:ea typeface="Arial Unicode MS"/>
+                <a:cs typeface="Arial Unicode MS"/>
+              </a:rPr>
+              <a:t>。上面那格是直的，下面那格彎成香蕉形，尾旋翼更誇張，整個扭掉。這就是剛剛那張動圖演的事情發生在真東西上的樣子。
 </a:t>
             </a:r>
           </a:p>
@@ -7463,29 +7573,51 @@
                 <a:ea typeface="Arial Unicode MS"/>
                 <a:cs typeface="Arial Unicode MS"/>
               </a:rPr>
-              <a:t>那 global shutter 呢？整張同時曝光，沒有這個問題，但是貴很多，而且同樣的價錢下感光度比較差。
-</a:t>
-            </a:r>
-          </a:p>
-          <a:p>
-            <a:pPr algn="l">
-              <a:spcBef>
-                <a:spcPts val="0"/>
-              </a:spcBef>
-              <a:spcAft>
-                <a:spcPts val="133"/>
-              </a:spcAft>
-            </a:pPr>
-            <a:r>
-              <a:rPr sz="800" lang="zh-TW" dirty="0">
-                <a:solidFill>
-                  <a:srgbClr val="000000"/>
-                </a:solidFill>
-                <a:latin typeface="Arial Unicode MS"/>
-                <a:ea typeface="Arial Unicode MS"/>
-                <a:cs typeface="Arial Unicode MS"/>
-              </a:rPr>
-              <a:t>所以快門方式這一行不是文字遊戲，它決定了你的感知演算法要不要另外寫一段程式去補償。
+              <a:t>那 </a:t>
+            </a:r>
+            <a:r>
+              <a:rPr sz="800" b="1" lang="zh-TW" dirty="0">
+                <a:solidFill>
+                  <a:srgbClr val="000000"/>
+                </a:solidFill>
+                <a:latin typeface="Arial Unicode MS"/>
+                <a:ea typeface="Arial Unicode MS"/>
+                <a:cs typeface="Arial Unicode MS"/>
+              </a:rPr>
+              <a:t>global shutter</a:t>
+            </a:r>
+            <a:r>
+              <a:rPr sz="800" lang="zh-TW" dirty="0">
+                <a:solidFill>
+                  <a:srgbClr val="000000"/>
+                </a:solidFill>
+                <a:latin typeface="Arial Unicode MS"/>
+                <a:ea typeface="Arial Unicode MS"/>
+                <a:cs typeface="Arial Unicode MS"/>
+              </a:rPr>
+              <a:t>——中文叫</a:t>
+            </a:r>
+            <a:r>
+              <a:rPr sz="800" b="1" lang="zh-TW" dirty="0">
+                <a:solidFill>
+                  <a:srgbClr val="000000"/>
+                </a:solidFill>
+                <a:latin typeface="Arial Unicode MS"/>
+                <a:ea typeface="Arial Unicode MS"/>
+                <a:cs typeface="Arial Unicode MS"/>
+              </a:rPr>
+              <a:t>全域快門</a:t>
+            </a:r>
+            <a:r>
+              <a:rPr sz="800" lang="zh-TW" dirty="0">
+                <a:solidFill>
+                  <a:srgbClr val="000000"/>
+                </a:solidFill>
+                <a:latin typeface="Arial Unicode MS"/>
+                <a:ea typeface="Arial Unicode MS"/>
+                <a:cs typeface="Arial Unicode MS"/>
+              </a:rPr>
+              <a:t>——呢？整張同時曝光，沒有這個問題，但是貴很多，而且同樣的價錢下感光度比較差。所以快門方式這一行不是文字遊戲，它決定了你的感知演算法要不要另外寫一段程式去補償。
 </a:t>
             </a:r>
           </a:p>
@@ -7595,29 +7727,7 @@
                 <a:ea typeface="Arial Unicode MS"/>
                 <a:cs typeface="Arial Unicode MS"/>
               </a:rPr>
-              <a:t>：fps 愈高，從第一列到最後一列的時間差一定愈短。一個數字，兩個意義。
-</a:t>
-            </a:r>
-          </a:p>
-          <a:p>
-            <a:pPr algn="l">
-              <a:spcBef>
-                <a:spcPts val="0"/>
-              </a:spcBef>
-              <a:spcAft>
-                <a:spcPts val="133"/>
-              </a:spcAft>
-            </a:pPr>
-            <a:r>
-              <a:rPr sz="800" lang="zh-TW" dirty="0">
-                <a:solidFill>
-                  <a:srgbClr val="000000"/>
-                </a:solidFill>
-                <a:latin typeface="Arial Unicode MS"/>
-                <a:ea typeface="Arial Unicode MS"/>
-                <a:cs typeface="Arial Unicode MS"/>
-              </a:rPr>
-              <a:t>要講精確一點：真正決定扭曲的是</a:t>
+              <a:t>：fps 愈高，從第一列到最後一列的時間差一定愈短。要講精確一點：真正決定扭曲的是</a:t>
             </a:r>
             <a:r>
               <a:rPr sz="800" b="1" lang="zh-TW" dirty="0">

--- a/第五週(10-08)/第五週_第2節_簡報.pptx
+++ b/第五週(10-08)/第五週_第2節_簡報.pptx
@@ -5,7 +5,7 @@
     <p:sldMasterId id="2147483648" r:id="rId1"/>
   </p:sldMasterIdLst>
   <p:notesMasterIdLst>
-    <p:notesMasterId r:id="rId23"/>
+    <p:notesMasterId r:id="rId24"/>
   </p:notesMasterIdLst>
   <p:sldIdLst>
     <p:sldId id="256" r:id="rId2"/>
@@ -29,6 +29,7 @@
     <p:sldId id="274" r:id="rId20"/>
     <p:sldId id="275" r:id="rId21"/>
     <p:sldId id="276" r:id="rId22"/>
+    <p:sldId id="277" r:id="rId23"/>
   </p:sldIdLst>
   <p:sldSz cx="9144000" cy="5143500"/>
   <p:notesSz cx="7560000" cy="10692000"/>
@@ -5090,7 +5091,7 @@
                 <a:ea typeface="Arial Unicode MS"/>
                 <a:cs typeface="Arial Unicode MS"/>
               </a:rPr>
-              <a:t>一步一步圈，最後圈偏差角度造成的位置誤差那個數字。
+              <a:t>一步一步圈，最後圈偏差角度造成的位置誤差那個數字。中間要切出去播兩支短片（內參 19 秒、外參 14 秒），網址在口白裡，先開好分頁。
 </a:t>
             </a:r>
           </a:p>
@@ -5233,7 +5234,29 @@
                 <a:ea typeface="Arial Unicode MS"/>
                 <a:cs typeface="Arial Unicode MS"/>
               </a:rPr>
-              <a:t>——「那個人在三十公尺外」——車子必須知道一件事：
+              <a:t>——「那個人在三十公尺外」——車子必須知道一件事：</a:t>
+            </a:r>
+            <a:r>
+              <a:rPr sz="800" b="1" lang="zh-TW" dirty="0">
+                <a:solidFill>
+                  <a:srgbClr val="000000"/>
+                </a:solidFill>
+                <a:latin typeface="Arial Unicode MS"/>
+                <a:ea typeface="Arial Unicode MS"/>
+                <a:cs typeface="Arial Unicode MS"/>
+              </a:rPr>
+              <a:t>相機和光達，到底差多遠、差幾度？</a:t>
+            </a:r>
+            <a:r>
+              <a:rPr sz="800" lang="zh-TW" dirty="0">
+                <a:solidFill>
+                  <a:srgbClr val="000000"/>
+                </a:solidFill>
+                <a:latin typeface="Arial Unicode MS"/>
+                <a:ea typeface="Arial Unicode MS"/>
+                <a:cs typeface="Arial Unicode MS"/>
+              </a:rPr>
+              <a:t>這就是標定，分成兩種。
 </a:t>
             </a:r>
           </a:p>
@@ -5255,7 +5278,7 @@
                 <a:ea typeface="Arial Unicode MS"/>
                 <a:cs typeface="Arial Unicode MS"/>
               </a:rPr>
-              <a:t>相機和光達，到底差多遠、差幾度？</a:t>
+              <a:t>第一種叫內參，intrinsic。</a:t>
             </a:r>
             <a:r>
               <a:rPr sz="800" lang="zh-TW" dirty="0">
@@ -5266,7 +5289,7 @@
                 <a:ea typeface="Arial Unicode MS"/>
                 <a:cs typeface="Arial Unicode MS"/>
               </a:rPr>
-              <a:t>
+              <a:t>講的是感測器自己內部的事：鏡頭有多扭曲、畫面的正中心到底在哪一個像素。各位拍照的時候有沒有發現，廣角鏡頭拍出來的直線會變成彎的？
 </a:t>
             </a:r>
           </a:p>
@@ -5288,19 +5311,8 @@
                 <a:ea typeface="Arial Unicode MS"/>
                 <a:cs typeface="Arial Unicode MS"/>
               </a:rPr>
-              <a:t>這就是標定。分成兩種。
-</a:t>
-            </a:r>
-          </a:p>
-          <a:p>
-            <a:pPr algn="l">
-              <a:spcBef>
-                <a:spcPts val="0"/>
-              </a:spcBef>
-              <a:spcAft>
-                <a:spcPts val="133"/>
-              </a:spcAft>
-            </a:pPr>
+              <a:t>我放十九秒給各位看。</a:t>
+            </a:r>
             <a:r>
               <a:rPr sz="800" b="1" lang="zh-TW" dirty="0">
                 <a:solidFill>
@@ -5310,7 +5322,7 @@
                 <a:ea typeface="Arial Unicode MS"/>
                 <a:cs typeface="Arial Unicode MS"/>
               </a:rPr>
-              <a:t>第一種叫內參，intrinsic。</a:t>
+              <a:t>（切出去播 youtu.be/J7hdrMn2RII）</a:t>
             </a:r>
             <a:r>
               <a:rPr sz="800" lang="zh-TW" dirty="0">
@@ -5321,7 +5333,51 @@
                 <a:ea typeface="Arial Unicode MS"/>
                 <a:cs typeface="Arial Unicode MS"/>
               </a:rPr>
-              <a:t>講的是感測器自己內部的事：鏡頭有多扭曲、畫面的正中心到底在哪一個像素。各位拍照的時候有沒有發現，廣角鏡頭拍出來的直線會變成彎的？那個彎要先算出來、修掉，後面的計算才會對。
+              <a:t>畫面上疊了一層格子線——各位看那些格子，</a:t>
+            </a:r>
+            <a:r>
+              <a:rPr sz="800" b="1" lang="zh-TW" dirty="0">
+                <a:solidFill>
+                  <a:srgbClr val="000000"/>
+                </a:solidFill>
+                <a:latin typeface="Arial Unicode MS"/>
+                <a:ea typeface="Arial Unicode MS"/>
+                <a:cs typeface="Arial Unicode MS"/>
+              </a:rPr>
+              <a:t>本來應該是直的，現在是彎的</a:t>
+            </a:r>
+            <a:r>
+              <a:rPr sz="800" lang="zh-TW" dirty="0">
+                <a:solidFill>
+                  <a:srgbClr val="000000"/>
+                </a:solidFill>
+                <a:latin typeface="Arial Unicode MS"/>
+                <a:ea typeface="Arial Unicode MS"/>
+                <a:cs typeface="Arial Unicode MS"/>
+              </a:rPr>
+              <a:t>。接著它套上修正，格子一條一條變直。</a:t>
+            </a:r>
+            <a:r>
+              <a:rPr sz="800" b="1" lang="zh-TW" dirty="0">
+                <a:solidFill>
+                  <a:srgbClr val="000000"/>
+                </a:solidFill>
+                <a:latin typeface="Arial Unicode MS"/>
+                <a:ea typeface="Arial Unicode MS"/>
+                <a:cs typeface="Arial Unicode MS"/>
+              </a:rPr>
+              <a:t>內參要算的就是這個彎</a:t>
+            </a:r>
+            <a:r>
+              <a:rPr sz="800" lang="zh-TW" dirty="0">
+                <a:solidFill>
+                  <a:srgbClr val="000000"/>
+                </a:solidFill>
+                <a:latin typeface="Arial Unicode MS"/>
+                <a:ea typeface="Arial Unicode MS"/>
+                <a:cs typeface="Arial Unicode MS"/>
+              </a:rPr>
+              <a:t>，算出來以後每一張照片都先修掉，後面的計算才會對。
 </a:t>
             </a:r>
           </a:p>
@@ -5376,7 +5432,51 @@
                 <a:ea typeface="Arial Unicode MS"/>
                 <a:cs typeface="Arial Unicode MS"/>
               </a:rPr>
-              <a:t>那不準會怎樣？我們算一下。
+              <a:t>外參對的時候長什麼樣？再給各位看十四秒。</a:t>
+            </a:r>
+            <a:r>
+              <a:rPr sz="800" b="1" lang="zh-TW" dirty="0">
+                <a:solidFill>
+                  <a:srgbClr val="000000"/>
+                </a:solidFill>
+                <a:latin typeface="Arial Unicode MS"/>
+                <a:ea typeface="Arial Unicode MS"/>
+                <a:cs typeface="Arial Unicode MS"/>
+              </a:rPr>
+              <a:t>（切出去播 youtu.be/yqRNU7EsHJY）</a:t>
+            </a:r>
+            <a:r>
+              <a:rPr sz="800" lang="zh-TW" dirty="0">
+                <a:solidFill>
+                  <a:srgbClr val="000000"/>
+                </a:solidFill>
+                <a:latin typeface="Arial Unicode MS"/>
+                <a:ea typeface="Arial Unicode MS"/>
+                <a:cs typeface="Arial Unicode MS"/>
+              </a:rPr>
+              <a:t>畫面是相機拍的街景，上面那些彩色的點是光達的點雲疊上去的。各位看那根路燈桿、那塊黃色的行人標誌、前面那台車——</a:t>
+            </a:r>
+            <a:r>
+              <a:rPr sz="800" b="1" lang="zh-TW" dirty="0">
+                <a:solidFill>
+                  <a:srgbClr val="000000"/>
+                </a:solidFill>
+                <a:latin typeface="Arial Unicode MS"/>
+                <a:ea typeface="Arial Unicode MS"/>
+                <a:cs typeface="Arial Unicode MS"/>
+              </a:rPr>
+              <a:t>點準準地長在它們身上，沒有飄開。</a:t>
+            </a:r>
+            <a:r>
+              <a:rPr sz="800" lang="zh-TW" dirty="0">
+                <a:solidFill>
+                  <a:srgbClr val="000000"/>
+                </a:solidFill>
+                <a:latin typeface="Arial Unicode MS"/>
+                <a:ea typeface="Arial Unicode MS"/>
+                <a:cs typeface="Arial Unicode MS"/>
+              </a:rPr>
+              <a:t>這就是外參對了。要是差一度，那些點會整片往旁邊偏。
 </a:t>
             </a:r>
           </a:p>
@@ -5398,7 +5498,7 @@
                 <a:ea typeface="Arial Unicode MS"/>
                 <a:cs typeface="Arial Unicode MS"/>
               </a:rPr>
-              <a:t>假設它們之間的角度差了</a:t>
+              <a:t>那不準會怎樣？我們算一下。假設它們之間的角度差了</a:t>
             </a:r>
             <a:r>
               <a:rPr sz="800" b="1" lang="zh-TW" dirty="0">
@@ -5618,7 +5718,7 @@
                 <a:ea typeface="Arial Unicode MS"/>
                 <a:cs typeface="Arial Unicode MS"/>
               </a:rPr>
-              <a:t>更麻煩的是：標定</a:t>
+              <a:t>這也是為什麼期末專題如果各位要做感測器融合，第一個卡住你們的一定是標定，不是演算法。剛剛講的都是原理，下一張我們看真的——</a:t>
             </a:r>
             <a:r>
               <a:rPr sz="800" b="1" lang="zh-TW" dirty="0">
@@ -5629,62 +5729,7 @@
                 <a:ea typeface="Arial Unicode MS"/>
                 <a:cs typeface="Arial Unicode MS"/>
               </a:rPr>
-              <a:t>會跑掉</a:t>
-            </a:r>
-            <a:r>
-              <a:rPr sz="800" lang="zh-TW" dirty="0">
-                <a:solidFill>
-                  <a:srgbClr val="000000"/>
-                </a:solidFill>
-                <a:latin typeface="Arial Unicode MS"/>
-                <a:ea typeface="Arial Unicode MS"/>
-                <a:cs typeface="Arial Unicode MS"/>
-              </a:rPr>
-              <a:t>。車子每天在路上震動，過了一個坑洞，或者擋風玻璃換過一次，外參就變了。所以真正在營運的自駕車隊，要</a:t>
-            </a:r>
-            <a:r>
-              <a:rPr sz="800" b="1" lang="zh-TW" dirty="0">
-                <a:solidFill>
-                  <a:srgbClr val="000000"/>
-                </a:solidFill>
-                <a:latin typeface="Arial Unicode MS"/>
-                <a:ea typeface="Arial Unicode MS"/>
-                <a:cs typeface="Arial Unicode MS"/>
-              </a:rPr>
-              <a:t>定期重新標定</a:t>
-            </a:r>
-            <a:r>
-              <a:rPr sz="800" lang="zh-TW" dirty="0">
-                <a:solidFill>
-                  <a:srgbClr val="000000"/>
-                </a:solidFill>
-                <a:latin typeface="Arial Unicode MS"/>
-                <a:ea typeface="Arial Unicode MS"/>
-                <a:cs typeface="Arial Unicode MS"/>
-              </a:rPr>
-              <a:t>，有些車還會自己在行駛中偷偷校正。
-</a:t>
-            </a:r>
-          </a:p>
-          <a:p>
-            <a:pPr algn="l">
-              <a:spcBef>
-                <a:spcPts val="0"/>
-              </a:spcBef>
-              <a:spcAft>
-                <a:spcPts val="133"/>
-              </a:spcAft>
-            </a:pPr>
-            <a:r>
-              <a:rPr sz="800" lang="zh-TW" dirty="0">
-                <a:solidFill>
-                  <a:srgbClr val="000000"/>
-                </a:solidFill>
-                <a:latin typeface="Arial Unicode MS"/>
-                <a:ea typeface="Arial Unicode MS"/>
-                <a:cs typeface="Arial Unicode MS"/>
-              </a:rPr>
-              <a:t>這也是為什麼期末專題如果各位要做感測器融合，第一個卡住你們的一定是標定，不是演算法。</a:t>
+              <a:t>修車廠裡面，技師怎麼做標定。</a:t>
             </a:r>
           </a:p>
         </p:txBody>
@@ -5793,11 +5838,11 @@
                 <a:spcPts val="0"/>
               </a:spcBef>
               <a:spcAft>
-                <a:spcPts val="133"/>
-              </a:spcAft>
-            </a:pPr>
-            <a:r>
-              <a:rPr sz="800" b="1" lang="zh-TW" dirty="0">
+                <a:spcPts val="142"/>
+              </a:spcAft>
+            </a:pPr>
+            <a:r>
+              <a:rPr sz="850" b="1" lang="zh-TW" dirty="0">
                 <a:solidFill>
                   <a:srgbClr val="000000"/>
                 </a:solidFill>
@@ -5808,7 +5853,7 @@
               <a:t>▍這一張要做什麼</a:t>
             </a:r>
             <a:r>
-              <a:rPr sz="800" lang="zh-TW" dirty="0">
+              <a:rPr sz="850" lang="zh-TW" dirty="0">
                 <a:solidFill>
                   <a:srgbClr val="000000"/>
                 </a:solidFill>
@@ -5826,19 +5871,19 @@
                 <a:spcPts val="0"/>
               </a:spcBef>
               <a:spcAft>
-                <a:spcPts val="133"/>
-              </a:spcAft>
-            </a:pPr>
-            <a:r>
-              <a:rPr sz="800" lang="zh-TW" dirty="0">
-                <a:solidFill>
-                  <a:srgbClr val="000000"/>
-                </a:solidFill>
-                <a:latin typeface="Arial Unicode MS"/>
-                <a:ea typeface="Arial Unicode MS"/>
-                <a:cs typeface="Arial Unicode MS"/>
-              </a:rPr>
-              <a:t>時間同步：兩隻眼睛要看的是同一個瞬間。
+                <a:spcPts val="142"/>
+              </a:spcAft>
+            </a:pPr>
+            <a:r>
+              <a:rPr sz="850" lang="zh-TW" dirty="0">
+                <a:solidFill>
+                  <a:srgbClr val="000000"/>
+                </a:solidFill>
+                <a:latin typeface="Arial Unicode MS"/>
+                <a:ea typeface="Arial Unicode MS"/>
+                <a:cs typeface="Arial Unicode MS"/>
+              </a:rPr>
+              <a:t>把標定從理論拉回現場：修車廠每天在做這件事，而且換完擋風玻璃是原廠規定要做的。
 </a:t>
             </a:r>
           </a:p>
@@ -5848,11 +5893,11 @@
                 <a:spcPts val="0"/>
               </a:spcBef>
               <a:spcAft>
-                <a:spcPts val="133"/>
-              </a:spcAft>
-            </a:pPr>
-            <a:r>
-              <a:rPr sz="800" b="1" lang="zh-TW" dirty="0">
+                <a:spcPts val="142"/>
+              </a:spcAft>
+            </a:pPr>
+            <a:r>
+              <a:rPr sz="850" b="1" lang="zh-TW" dirty="0">
                 <a:solidFill>
                   <a:srgbClr val="000000"/>
                 </a:solidFill>
@@ -5863,7 +5908,7 @@
               <a:t>▍畫面上圈這裡</a:t>
             </a:r>
             <a:r>
-              <a:rPr sz="800" lang="zh-TW" dirty="0">
+              <a:rPr sz="850" lang="zh-TW" dirty="0">
                 <a:solidFill>
                   <a:srgbClr val="000000"/>
                 </a:solidFill>
@@ -5881,19 +5926,19 @@
                 <a:spcPts val="0"/>
               </a:spcBef>
               <a:spcAft>
-                <a:spcPts val="133"/>
-              </a:spcAft>
-            </a:pPr>
-            <a:r>
-              <a:rPr sz="800" lang="zh-TW" dirty="0">
-                <a:solidFill>
-                  <a:srgbClr val="000000"/>
-                </a:solidFill>
-                <a:latin typeface="Arial Unicode MS"/>
-                <a:ea typeface="Arial Unicode MS"/>
-                <a:cs typeface="Arial Unicode MS"/>
-              </a:rPr>
-              <a:t>圈 50 毫秒與半公尺，再指圖裡的 Multi-sensor phase lock——七行裡只有這行在講同步，要講明。其餘六行快速點過，每一行都回扣今天講過的一張。
+                <a:spcPts val="142"/>
+              </a:spcAft>
+            </a:pPr>
+            <a:r>
+              <a:rPr sz="850" lang="zh-TW" dirty="0">
+                <a:solidFill>
+                  <a:srgbClr val="000000"/>
+                </a:solidFill>
+                <a:latin typeface="Arial Unicode MS"/>
+                <a:ea typeface="Arial Unicode MS"/>
+                <a:cs typeface="Arial Unicode MS"/>
+              </a:rPr>
+              <a:t>這是 Safelite 的廣告，品牌的段落跳過。跳著播三段：0:20–0:35、1:25–2:00、2:02–2:33。播完問「你家的車換過擋風玻璃嗎？店家有沒有說要重新標定？」
 </a:t>
             </a:r>
           </a:p>
@@ -5903,11 +5948,11 @@
                 <a:spcPts val="0"/>
               </a:spcBef>
               <a:spcAft>
-                <a:spcPts val="133"/>
-              </a:spcAft>
-            </a:pPr>
-            <a:r>
-              <a:rPr sz="800" b="1" lang="zh-TW" dirty="0">
+                <a:spcPts val="142"/>
+              </a:spcAft>
+            </a:pPr>
+            <a:r>
+              <a:rPr sz="850" b="1" lang="zh-TW" dirty="0">
                 <a:solidFill>
                   <a:srgbClr val="000000"/>
                 </a:solidFill>
@@ -5918,7 +5963,7 @@
               <a:t>▍以下照著唸</a:t>
             </a:r>
             <a:r>
-              <a:rPr sz="800" lang="zh-TW" dirty="0">
+              <a:rPr sz="850" lang="zh-TW" dirty="0">
                 <a:solidFill>
                   <a:srgbClr val="000000"/>
                 </a:solidFill>
@@ -5936,41 +5981,63 @@
                 <a:spcPts val="0"/>
               </a:spcBef>
               <a:spcAft>
-                <a:spcPts val="133"/>
-              </a:spcAft>
-            </a:pPr>
-            <a:r>
-              <a:rPr sz="800" lang="zh-TW" dirty="0">
-                <a:solidFill>
-                  <a:srgbClr val="000000"/>
-                </a:solidFill>
-                <a:latin typeface="Arial Unicode MS"/>
-                <a:ea typeface="Arial Unicode MS"/>
-                <a:cs typeface="Arial Unicode MS"/>
-              </a:rPr>
-              <a:t>最後一件事是</a:t>
-            </a:r>
-            <a:r>
-              <a:rPr sz="800" b="1" lang="zh-TW" dirty="0">
-                <a:solidFill>
-                  <a:srgbClr val="000000"/>
-                </a:solidFill>
-                <a:latin typeface="Arial Unicode MS"/>
-                <a:ea typeface="Arial Unicode MS"/>
-                <a:cs typeface="Arial Unicode MS"/>
-              </a:rPr>
-              <a:t>時間同步</a:t>
-            </a:r>
-            <a:r>
-              <a:rPr sz="800" lang="zh-TW" dirty="0">
-                <a:solidFill>
-                  <a:srgbClr val="000000"/>
-                </a:solidFill>
-                <a:latin typeface="Arial Unicode MS"/>
-                <a:ea typeface="Arial Unicode MS"/>
-                <a:cs typeface="Arial Unicode MS"/>
-              </a:rPr>
-              <a:t>。剛剛講的標定是「空間」上要對準，這一件是「時間」上要對準。
+                <a:spcPts val="142"/>
+              </a:spcAft>
+            </a:pPr>
+            <a:r>
+              <a:rPr sz="850" lang="zh-TW" dirty="0">
+                <a:solidFill>
+                  <a:srgbClr val="000000"/>
+                </a:solidFill>
+                <a:latin typeface="Arial Unicode MS"/>
+                <a:ea typeface="Arial Unicode MS"/>
+                <a:cs typeface="Arial Unicode MS"/>
+              </a:rPr>
+              <a:t>剛剛講的都是原理，現在看真的。這支是 </a:t>
+            </a:r>
+            <a:r>
+              <a:rPr sz="850" b="1" lang="zh-TW" dirty="0">
+                <a:solidFill>
+                  <a:srgbClr val="000000"/>
+                </a:solidFill>
+                <a:latin typeface="Arial Unicode MS"/>
+                <a:ea typeface="Arial Unicode MS"/>
+                <a:cs typeface="Arial Unicode MS"/>
+              </a:rPr>
+              <a:t>Safelite</a:t>
+            </a:r>
+            <a:r>
+              <a:rPr sz="850" lang="zh-TW" dirty="0">
+                <a:solidFill>
+                  <a:srgbClr val="000000"/>
+                </a:solidFill>
+                <a:latin typeface="Arial Unicode MS"/>
+                <a:ea typeface="Arial Unicode MS"/>
+                <a:cs typeface="Arial Unicode MS"/>
+              </a:rPr>
+              <a:t> 拍的，美國最大的擋風玻璃商。</a:t>
+            </a:r>
+            <a:r>
+              <a:rPr sz="850" b="1" lang="zh-TW" dirty="0">
+                <a:solidFill>
+                  <a:srgbClr val="000000"/>
+                </a:solidFill>
+                <a:latin typeface="Arial Unicode MS"/>
+                <a:ea typeface="Arial Unicode MS"/>
+                <a:cs typeface="Arial Unicode MS"/>
+              </a:rPr>
+              <a:t>它是廣告，品牌的段落我們跳過，只看技師在做什麼。</a:t>
+            </a:r>
+            <a:r>
+              <a:rPr sz="850" lang="zh-TW" dirty="0">
+                <a:solidFill>
+                  <a:srgbClr val="000000"/>
+                </a:solidFill>
+                <a:latin typeface="Arial Unicode MS"/>
+                <a:ea typeface="Arial Unicode MS"/>
+                <a:cs typeface="Arial Unicode MS"/>
+              </a:rPr>
+              <a:t>我會跳著播三段。
 </a:t>
             </a:r>
           </a:p>
@@ -5980,33 +6047,264 @@
                 <a:spcPts val="0"/>
               </a:spcBef>
               <a:spcAft>
-                <a:spcPts val="133"/>
-              </a:spcAft>
-            </a:pPr>
-            <a:r>
-              <a:rPr sz="800" lang="zh-TW" dirty="0">
-                <a:solidFill>
-                  <a:srgbClr val="000000"/>
-                </a:solidFill>
-                <a:latin typeface="Arial Unicode MS"/>
-                <a:ea typeface="Arial Unicode MS"/>
-                <a:cs typeface="Arial Unicode MS"/>
-              </a:rPr>
-              <a:t>想想看：光達一秒轉十圈，相機一秒拍六十張，兩個的節奏完全不一樣。假設車子現在收到一張相機的畫面，還有一圈光達的點雲，要把它們合起來。問題是——</a:t>
-            </a:r>
-            <a:r>
-              <a:rPr sz="800" b="1" lang="zh-TW" dirty="0">
-                <a:solidFill>
-                  <a:srgbClr val="000000"/>
-                </a:solidFill>
-                <a:latin typeface="Arial Unicode MS"/>
-                <a:ea typeface="Arial Unicode MS"/>
-                <a:cs typeface="Arial Unicode MS"/>
-              </a:rPr>
-              <a:t>這兩份資料是同一個瞬間的嗎？</a:t>
-            </a:r>
-            <a:r>
-              <a:rPr sz="800" lang="zh-TW" dirty="0">
+                <a:spcPts val="142"/>
+              </a:spcAft>
+            </a:pPr>
+            <a:r>
+              <a:rPr sz="850" b="1" lang="zh-TW" dirty="0">
+                <a:solidFill>
+                  <a:srgbClr val="000000"/>
+                </a:solidFill>
+                <a:latin typeface="Arial Unicode MS"/>
+                <a:ea typeface="Arial Unicode MS"/>
+                <a:cs typeface="Arial Unicode MS"/>
+              </a:rPr>
+              <a:t>第一段，0:20。</a:t>
+            </a:r>
+            <a:r>
+              <a:rPr sz="850" lang="zh-TW" dirty="0">
+                <a:solidFill>
+                  <a:srgbClr val="000000"/>
+                </a:solidFill>
+                <a:latin typeface="Arial Unicode MS"/>
+                <a:ea typeface="Arial Unicode MS"/>
+                <a:cs typeface="Arial Unicode MS"/>
+              </a:rPr>
+              <a:t>他說：</a:t>
+            </a:r>
+            <a:r>
+              <a:rPr sz="850" b="1" lang="zh-TW" dirty="0">
+                <a:solidFill>
+                  <a:srgbClr val="000000"/>
+                </a:solidFill>
+                <a:latin typeface="Arial Unicode MS"/>
+                <a:ea typeface="Arial Unicode MS"/>
+                <a:cs typeface="Arial Unicode MS"/>
+              </a:rPr>
+              <a:t>所有車廠都規定，擋風玻璃換過之後，這些安全系統一定要重新標定。</a:t>
+            </a:r>
+            <a:r>
+              <a:rPr sz="850" lang="zh-TW" dirty="0">
+                <a:solidFill>
+                  <a:srgbClr val="000000"/>
+                </a:solidFill>
+                <a:latin typeface="Arial Unicode MS"/>
+                <a:ea typeface="Arial Unicode MS"/>
+                <a:cs typeface="Arial Unicode MS"/>
+              </a:rPr>
+              <a:t>各位注意，這不是建議，是規定。我們剛剛算出來那零點八七公尺，就是為什麼。
+</a:t>
+            </a:r>
+          </a:p>
+          <a:p>
+            <a:pPr algn="l">
+              <a:spcBef>
+                <a:spcPts val="0"/>
+              </a:spcBef>
+              <a:spcAft>
+                <a:spcPts val="142"/>
+              </a:spcAft>
+            </a:pPr>
+            <a:r>
+              <a:rPr sz="850" b="1" lang="zh-TW" dirty="0">
+                <a:solidFill>
+                  <a:srgbClr val="000000"/>
+                </a:solidFill>
+                <a:latin typeface="Arial Unicode MS"/>
+                <a:ea typeface="Arial Unicode MS"/>
+                <a:cs typeface="Arial Unicode MS"/>
+              </a:rPr>
+              <a:t>第二段，1:25。</a:t>
+            </a:r>
+            <a:r>
+              <a:rPr sz="850" lang="zh-TW" dirty="0">
+                <a:solidFill>
+                  <a:srgbClr val="000000"/>
+                </a:solidFill>
+                <a:latin typeface="Arial Unicode MS"/>
+                <a:ea typeface="Arial Unicode MS"/>
+                <a:cs typeface="Arial Unicode MS"/>
+              </a:rPr>
+              <a:t>技師先用</a:t>
+            </a:r>
+            <a:r>
+              <a:rPr sz="850" b="1" lang="zh-TW" dirty="0">
+                <a:solidFill>
+                  <a:srgbClr val="000000"/>
+                </a:solidFill>
+                <a:latin typeface="Arial Unicode MS"/>
+                <a:ea typeface="Arial Unicode MS"/>
+                <a:cs typeface="Arial Unicode MS"/>
+              </a:rPr>
+              <a:t>雷射</a:t>
+            </a:r>
+            <a:r>
+              <a:rPr sz="850" lang="zh-TW" dirty="0">
+                <a:solidFill>
+                  <a:srgbClr val="000000"/>
+                </a:solidFill>
+                <a:latin typeface="Arial Unicode MS"/>
+                <a:ea typeface="Arial Unicode MS"/>
+                <a:cs typeface="Arial Unicode MS"/>
+              </a:rPr>
+              <a:t>把車對正，平板上跑的是「Static Camera Aiming，第 2 步，共 15 步」。然後看他搬出來那塊</a:t>
+            </a:r>
+            <a:r>
+              <a:rPr sz="850" b="1" lang="zh-TW" dirty="0">
+                <a:solidFill>
+                  <a:srgbClr val="000000"/>
+                </a:solidFill>
+                <a:latin typeface="Arial Unicode MS"/>
+                <a:ea typeface="Arial Unicode MS"/>
+                <a:cs typeface="Arial Unicode MS"/>
+              </a:rPr>
+              <a:t>黑白格子板</a:t>
+            </a:r>
+            <a:r>
+              <a:rPr sz="850" lang="zh-TW" dirty="0">
+                <a:solidFill>
+                  <a:srgbClr val="000000"/>
+                </a:solidFill>
+                <a:latin typeface="Arial Unicode MS"/>
+                <a:ea typeface="Arial Unicode MS"/>
+                <a:cs typeface="Arial Unicode MS"/>
+              </a:rPr>
+              <a:t>——那就是標定板。相機對著那塊板子，演算法才知道「正前方」到底是畫面上哪一個像素。</a:t>
+            </a:r>
+            <a:r>
+              <a:rPr sz="850" b="1" lang="zh-TW" dirty="0">
+                <a:solidFill>
+                  <a:srgbClr val="000000"/>
+                </a:solidFill>
+                <a:latin typeface="Arial Unicode MS"/>
+                <a:ea typeface="Arial Unicode MS"/>
+                <a:cs typeface="Arial Unicode MS"/>
+              </a:rPr>
+              <a:t>每一款車用的板子都不一樣</a:t>
+            </a:r>
+            <a:r>
+              <a:rPr sz="850" lang="zh-TW" dirty="0">
+                <a:solidFill>
+                  <a:srgbClr val="000000"/>
+                </a:solidFill>
+                <a:latin typeface="Arial Unicode MS"/>
+                <a:ea typeface="Arial Unicode MS"/>
+                <a:cs typeface="Arial Unicode MS"/>
+              </a:rPr>
+              <a:t>，所以這件事通常只能在原廠或特約廠做。
+</a:t>
+            </a:r>
+          </a:p>
+          <a:p>
+            <a:pPr algn="l">
+              <a:spcBef>
+                <a:spcPts val="0"/>
+              </a:spcBef>
+              <a:spcAft>
+                <a:spcPts val="142"/>
+              </a:spcAft>
+            </a:pPr>
+            <a:r>
+              <a:rPr sz="850" b="1" lang="zh-TW" dirty="0">
+                <a:solidFill>
+                  <a:srgbClr val="000000"/>
+                </a:solidFill>
+                <a:latin typeface="Arial Unicode MS"/>
+                <a:ea typeface="Arial Unicode MS"/>
+                <a:cs typeface="Arial Unicode MS"/>
+              </a:rPr>
+              <a:t>第三段，2:02。</a:t>
+            </a:r>
+            <a:r>
+              <a:rPr sz="850" lang="zh-TW" dirty="0">
+                <a:solidFill>
+                  <a:srgbClr val="000000"/>
+                </a:solidFill>
+                <a:latin typeface="Arial Unicode MS"/>
+                <a:ea typeface="Arial Unicode MS"/>
+                <a:cs typeface="Arial Unicode MS"/>
+              </a:rPr>
+              <a:t>有些車不靠板子，靠開的。技師把車開上</a:t>
+            </a:r>
+            <a:r>
+              <a:rPr sz="850" b="1" lang="zh-TW" dirty="0">
+                <a:solidFill>
+                  <a:srgbClr val="000000"/>
+                </a:solidFill>
+                <a:latin typeface="Arial Unicode MS"/>
+                <a:ea typeface="Arial Unicode MS"/>
+                <a:cs typeface="Arial Unicode MS"/>
+              </a:rPr>
+              <a:t>有清楚標線的路</a:t>
+            </a:r>
+            <a:r>
+              <a:rPr sz="850" lang="zh-TW" dirty="0">
+                <a:solidFill>
+                  <a:srgbClr val="000000"/>
+                </a:solidFill>
+                <a:latin typeface="Arial Unicode MS"/>
+                <a:ea typeface="Arial Unicode MS"/>
+                <a:cs typeface="Arial Unicode MS"/>
+              </a:rPr>
+              <a:t>，跑到指定速度，車子自己用車道線把相機校回來——這叫</a:t>
+            </a:r>
+            <a:r>
+              <a:rPr sz="850" b="1" lang="zh-TW" dirty="0">
+                <a:solidFill>
+                  <a:srgbClr val="000000"/>
+                </a:solidFill>
+                <a:latin typeface="Arial Unicode MS"/>
+                <a:ea typeface="Arial Unicode MS"/>
+                <a:cs typeface="Arial Unicode MS"/>
+              </a:rPr>
+              <a:t>動態標定</a:t>
+            </a:r>
+            <a:r>
+              <a:rPr sz="850" lang="zh-TW" dirty="0">
+                <a:solidFill>
+                  <a:srgbClr val="000000"/>
+                </a:solidFill>
+                <a:latin typeface="Arial Unicode MS"/>
+                <a:ea typeface="Arial Unicode MS"/>
+                <a:cs typeface="Arial Unicode MS"/>
+              </a:rPr>
+              <a:t>，最久要跑一個小時。
+</a:t>
+            </a:r>
+          </a:p>
+          <a:p>
+            <a:pPr algn="l">
+              <a:spcBef>
+                <a:spcPts val="0"/>
+              </a:spcBef>
+              <a:spcAft>
+                <a:spcPts val="142"/>
+              </a:spcAft>
+            </a:pPr>
+            <a:r>
+              <a:rPr sz="850" lang="zh-TW" dirty="0">
+                <a:solidFill>
+                  <a:srgbClr val="000000"/>
+                </a:solidFill>
+                <a:latin typeface="Arial Unicode MS"/>
+                <a:ea typeface="Arial Unicode MS"/>
+                <a:cs typeface="Arial Unicode MS"/>
+              </a:rPr>
+              <a:t>所以標定要花多久？光是掃故障碼就十五分鐘，整套做完常常一兩個小時。這就是為什麼換一片擋風玻璃，現在比十年前貴那麼多——</a:t>
+            </a:r>
+            <a:r>
+              <a:rPr sz="850" b="1" lang="zh-TW" dirty="0">
+                <a:solidFill>
+                  <a:srgbClr val="000000"/>
+                </a:solidFill>
+                <a:latin typeface="Arial Unicode MS"/>
+                <a:ea typeface="Arial Unicode MS"/>
+                <a:cs typeface="Arial Unicode MS"/>
+              </a:rPr>
+              <a:t>玻璃本身沒貴多少，貴的是後面這段。</a:t>
+            </a:r>
+            <a:r>
+              <a:rPr sz="850" lang="zh-TW" dirty="0">
                 <a:solidFill>
                   <a:srgbClr val="000000"/>
                 </a:solidFill>
@@ -6024,41 +6322,63 @@
                 <a:spcPts val="0"/>
               </a:spcBef>
               <a:spcAft>
-                <a:spcPts val="133"/>
-              </a:spcAft>
-            </a:pPr>
-            <a:r>
-              <a:rPr sz="800" lang="zh-TW" dirty="0">
-                <a:solidFill>
-                  <a:srgbClr val="000000"/>
-                </a:solidFill>
-                <a:latin typeface="Arial Unicode MS"/>
-                <a:ea typeface="Arial Unicode MS"/>
-                <a:cs typeface="Arial Unicode MS"/>
-              </a:rPr>
-              <a:t>如果沒有處理，它們可能差到五十毫秒。時速四十的時候，五十毫秒車子走了</a:t>
-            </a:r>
-            <a:r>
-              <a:rPr sz="800" b="1" lang="zh-TW" dirty="0">
-                <a:solidFill>
-                  <a:srgbClr val="000000"/>
-                </a:solidFill>
-                <a:latin typeface="Arial Unicode MS"/>
-                <a:ea typeface="Arial Unicode MS"/>
-                <a:cs typeface="Arial Unicode MS"/>
-              </a:rPr>
-              <a:t>零點五六公尺</a:t>
-            </a:r>
-            <a:r>
-              <a:rPr sz="800" lang="zh-TW" dirty="0">
-                <a:solidFill>
-                  <a:srgbClr val="000000"/>
-                </a:solidFill>
-                <a:latin typeface="Arial Unicode MS"/>
-                <a:ea typeface="Arial Unicode MS"/>
-                <a:cs typeface="Arial Unicode MS"/>
-              </a:rPr>
-              <a:t>。
+                <a:spcPts val="142"/>
+              </a:spcAft>
+            </a:pPr>
+            <a:r>
+              <a:rPr sz="850" lang="zh-TW" dirty="0">
+                <a:solidFill>
+                  <a:srgbClr val="000000"/>
+                </a:solidFill>
+                <a:latin typeface="Arial Unicode MS"/>
+                <a:ea typeface="Arial Unicode MS"/>
+                <a:cs typeface="Arial Unicode MS"/>
+              </a:rPr>
+              <a:t>還有一件事上一張沒講完：</a:t>
+            </a:r>
+            <a:r>
+              <a:rPr sz="850" b="1" lang="zh-TW" dirty="0">
+                <a:solidFill>
+                  <a:srgbClr val="000000"/>
+                </a:solidFill>
+                <a:latin typeface="Arial Unicode MS"/>
+                <a:ea typeface="Arial Unicode MS"/>
+                <a:cs typeface="Arial Unicode MS"/>
+              </a:rPr>
+              <a:t>標定會跑掉。</a:t>
+            </a:r>
+            <a:r>
+              <a:rPr sz="850" lang="zh-TW" dirty="0">
+                <a:solidFill>
+                  <a:srgbClr val="000000"/>
+                </a:solidFill>
+                <a:latin typeface="Arial Unicode MS"/>
+                <a:ea typeface="Arial Unicode MS"/>
+                <a:cs typeface="Arial Unicode MS"/>
+              </a:rPr>
+              <a:t>車子每天在路上震動，過了一個坑洞，或者擋風玻璃換過一次，外參就變了。所以真正在營運的自駕車隊要</a:t>
+            </a:r>
+            <a:r>
+              <a:rPr sz="850" b="1" lang="zh-TW" dirty="0">
+                <a:solidFill>
+                  <a:srgbClr val="000000"/>
+                </a:solidFill>
+                <a:latin typeface="Arial Unicode MS"/>
+                <a:ea typeface="Arial Unicode MS"/>
+                <a:cs typeface="Arial Unicode MS"/>
+              </a:rPr>
+              <a:t>定期重新標定</a:t>
+            </a:r>
+            <a:r>
+              <a:rPr sz="850" lang="zh-TW" dirty="0">
+                <a:solidFill>
+                  <a:srgbClr val="000000"/>
+                </a:solidFill>
+                <a:latin typeface="Arial Unicode MS"/>
+                <a:ea typeface="Arial Unicode MS"/>
+                <a:cs typeface="Arial Unicode MS"/>
+              </a:rPr>
+              <a:t>，有些車還會自己在行駛中偷偷校正。
 </a:t>
             </a:r>
           </a:p>
@@ -6068,41 +6388,41 @@
                 <a:spcPts val="0"/>
               </a:spcBef>
               <a:spcAft>
-                <a:spcPts val="133"/>
-              </a:spcAft>
-            </a:pPr>
-            <a:r>
-              <a:rPr sz="800" lang="zh-TW" dirty="0">
-                <a:solidFill>
-                  <a:srgbClr val="000000"/>
-                </a:solidFill>
-                <a:latin typeface="Arial Unicode MS"/>
-                <a:ea typeface="Arial Unicode MS"/>
-                <a:cs typeface="Arial Unicode MS"/>
-              </a:rPr>
-              <a:t>所以你會把相機在 A 點看到的人，跟光達在 B 點量到的距離配在一起，得到一個</a:t>
-            </a:r>
-            <a:r>
-              <a:rPr sz="800" b="1" lang="zh-TW" dirty="0">
-                <a:solidFill>
-                  <a:srgbClr val="000000"/>
-                </a:solidFill>
-                <a:latin typeface="Arial Unicode MS"/>
-                <a:ea typeface="Arial Unicode MS"/>
-                <a:cs typeface="Arial Unicode MS"/>
-              </a:rPr>
-              <a:t>根本不存在的位置</a:t>
-            </a:r>
-            <a:r>
-              <a:rPr sz="800" lang="zh-TW" dirty="0">
-                <a:solidFill>
-                  <a:srgbClr val="000000"/>
-                </a:solidFill>
-                <a:latin typeface="Arial Unicode MS"/>
-                <a:ea typeface="Arial Unicode MS"/>
-                <a:cs typeface="Arial Unicode MS"/>
-              </a:rPr>
-              <a:t>。而且這個誤差會跟剛剛的標定誤差疊加。
+                <a:spcPts val="142"/>
+              </a:spcAft>
+            </a:pPr>
+            <a:r>
+              <a:rPr sz="850" lang="zh-TW" dirty="0">
+                <a:solidFill>
+                  <a:srgbClr val="000000"/>
+                </a:solidFill>
+                <a:latin typeface="Arial Unicode MS"/>
+                <a:ea typeface="Arial Unicode MS"/>
+                <a:cs typeface="Arial Unicode MS"/>
+              </a:rPr>
+              <a:t>問各位一句：</a:t>
+            </a:r>
+            <a:r>
+              <a:rPr sz="850" b="1" lang="zh-TW" dirty="0">
+                <a:solidFill>
+                  <a:srgbClr val="000000"/>
+                </a:solidFill>
+                <a:latin typeface="Arial Unicode MS"/>
+                <a:ea typeface="Arial Unicode MS"/>
+                <a:cs typeface="Arial Unicode MS"/>
+              </a:rPr>
+              <a:t>你家的車，換過擋風玻璃嗎？</a:t>
+            </a:r>
+            <a:r>
+              <a:rPr sz="850" lang="zh-TW" dirty="0">
+                <a:solidFill>
+                  <a:srgbClr val="000000"/>
+                </a:solidFill>
+                <a:latin typeface="Arial Unicode MS"/>
+                <a:ea typeface="Arial Unicode MS"/>
+                <a:cs typeface="Arial Unicode MS"/>
+              </a:rPr>
+              <a:t>換的時候，店家有沒有跟你說還要重新標定？
 </a:t>
             </a:r>
           </a:p>
@@ -6112,624 +6432,19 @@
                 <a:spcPts val="0"/>
               </a:spcBef>
               <a:spcAft>
-                <a:spcPts val="133"/>
-              </a:spcAft>
-            </a:pPr>
-            <a:r>
-              <a:rPr sz="800" lang="zh-TW" dirty="0">
-                <a:solidFill>
-                  <a:srgbClr val="000000"/>
-                </a:solidFill>
-                <a:latin typeface="Arial Unicode MS"/>
-                <a:ea typeface="Arial Unicode MS"/>
-                <a:cs typeface="Arial Unicode MS"/>
-              </a:rPr>
-              <a:t>解法有兩層。</a:t>
-            </a:r>
-            <a:r>
-              <a:rPr sz="800" b="1" lang="zh-TW" dirty="0">
-                <a:solidFill>
-                  <a:srgbClr val="000000"/>
-                </a:solidFill>
-                <a:latin typeface="Arial Unicode MS"/>
-                <a:ea typeface="Arial Unicode MS"/>
-                <a:cs typeface="Arial Unicode MS"/>
-              </a:rPr>
-              <a:t>第一層是共同時鐘</a:t>
-            </a:r>
-            <a:r>
-              <a:rPr sz="800" lang="zh-TW" dirty="0">
-                <a:solidFill>
-                  <a:srgbClr val="000000"/>
-                </a:solidFill>
-                <a:latin typeface="Arial Unicode MS"/>
-                <a:ea typeface="Arial Unicode MS"/>
-                <a:cs typeface="Arial Unicode MS"/>
-              </a:rPr>
-              <a:t>：每一顆感測器都在自己的資料上蓋</a:t>
-            </a:r>
-            <a:r>
-              <a:rPr sz="800" b="1" lang="zh-TW" dirty="0">
-                <a:solidFill>
-                  <a:srgbClr val="000000"/>
-                </a:solidFill>
-                <a:latin typeface="Arial Unicode MS"/>
-                <a:ea typeface="Arial Unicode MS"/>
-                <a:cs typeface="Arial Unicode MS"/>
-              </a:rPr>
-              <a:t>時間戳</a:t>
-            </a:r>
-            <a:r>
-              <a:rPr sz="800" lang="zh-TW" dirty="0">
-                <a:solidFill>
-                  <a:srgbClr val="000000"/>
-                </a:solidFill>
-                <a:latin typeface="Arial Unicode MS"/>
-                <a:ea typeface="Arial Unicode MS"/>
-                <a:cs typeface="Arial Unicode MS"/>
-              </a:rPr>
-              <a:t>，全車用同一個時鐘——車上通常用 PTP，一種跑在網路線上的對時協定。但這一層只讓你知道「各自是幾點拍的」，還沒有讓它們同時拍。
-</a:t>
-            </a:r>
-          </a:p>
-          <a:p>
-            <a:pPr algn="l">
-              <a:spcBef>
-                <a:spcPts val="0"/>
-              </a:spcBef>
-              <a:spcAft>
-                <a:spcPts val="133"/>
-              </a:spcAft>
-            </a:pPr>
-            <a:r>
-              <a:rPr sz="800" b="1" lang="zh-TW" dirty="0">
-                <a:solidFill>
-                  <a:srgbClr val="000000"/>
-                </a:solidFill>
-                <a:latin typeface="Arial Unicode MS"/>
-                <a:ea typeface="Arial Unicode MS"/>
-                <a:cs typeface="Arial Unicode MS"/>
-              </a:rPr>
-              <a:t>第二層就是圖上那一行：multi-sensor phase lock。</a:t>
-            </a:r>
-            <a:r>
-              <a:rPr sz="800" lang="zh-TW" dirty="0">
-                <a:solidFill>
-                  <a:srgbClr val="000000"/>
-                </a:solidFill>
-                <a:latin typeface="Arial Unicode MS"/>
-                <a:ea typeface="Arial Unicode MS"/>
-                <a:cs typeface="Arial Unicode MS"/>
-              </a:rPr>
-              <a:t>光達是一直在轉的，一秒十圈，所以每一百毫秒經過正前方一次——</a:t>
-            </a:r>
-            <a:r>
-              <a:rPr sz="800" b="1" lang="zh-TW" dirty="0">
-                <a:solidFill>
-                  <a:srgbClr val="000000"/>
-                </a:solidFill>
-                <a:latin typeface="Arial Unicode MS"/>
-                <a:ea typeface="Arial Unicode MS"/>
-                <a:cs typeface="Arial Unicode MS"/>
-              </a:rPr>
-              <a:t>可是經過的那個時刻是隨機的</a:t>
-            </a:r>
-            <a:r>
-              <a:rPr sz="800" lang="zh-TW" dirty="0">
-                <a:solidFill>
-                  <a:srgbClr val="000000"/>
-                </a:solidFill>
-                <a:latin typeface="Arial Unicode MS"/>
-                <a:ea typeface="Arial Unicode MS"/>
-                <a:cs typeface="Arial Unicode MS"/>
-              </a:rPr>
-              <a:t>，開機的時候轉子從哪裡起步就決定了。Phase lock 做的事是：先對好時，再</a:t>
-            </a:r>
-            <a:r>
-              <a:rPr sz="800" b="1" lang="zh-TW" dirty="0">
-                <a:solidFill>
-                  <a:srgbClr val="000000"/>
-                </a:solidFill>
-                <a:latin typeface="Arial Unicode MS"/>
-                <a:ea typeface="Arial Unicode MS"/>
-                <a:cs typeface="Arial Unicode MS"/>
-              </a:rPr>
-              <a:t>把轉子的相位鎖住</a:t>
-            </a:r>
-            <a:r>
-              <a:rPr sz="800" lang="zh-TW" dirty="0">
-                <a:solidFill>
-                  <a:srgbClr val="000000"/>
-                </a:solidFill>
-                <a:latin typeface="Arial Unicode MS"/>
-                <a:ea typeface="Arial Unicode MS"/>
-                <a:cs typeface="Arial Unicode MS"/>
-              </a:rPr>
-              <a:t>，讓它在每一個整十分之一秒的那個瞬間，剛好轉到你指定的角度。
-</a:t>
-            </a:r>
-          </a:p>
-          <a:p>
-            <a:pPr algn="l">
-              <a:spcBef>
-                <a:spcPts val="0"/>
-              </a:spcBef>
-              <a:spcAft>
-                <a:spcPts val="133"/>
-              </a:spcAft>
-            </a:pPr>
-            <a:r>
-              <a:rPr sz="800" lang="zh-TW" dirty="0">
-                <a:solidFill>
-                  <a:srgbClr val="000000"/>
-                </a:solidFill>
-                <a:latin typeface="Arial Unicode MS"/>
-                <a:ea typeface="Arial Unicode MS"/>
-                <a:cs typeface="Arial Unicode MS"/>
-              </a:rPr>
-              <a:t>所以你可以設成「每個十分之一秒的整點，光達剛好指著正前方」，再把相機的快門排在同一個時刻——</a:t>
-            </a:r>
-            <a:r>
-              <a:rPr sz="800" b="1" lang="zh-TW" dirty="0">
-                <a:solidFill>
-                  <a:srgbClr val="000000"/>
-                </a:solidFill>
-                <a:latin typeface="Arial Unicode MS"/>
-                <a:ea typeface="Arial Unicode MS"/>
-                <a:cs typeface="Arial Unicode MS"/>
-              </a:rPr>
-              <a:t>兩隻眼睛看的就是同一個瞬間的同一塊</a:t>
-            </a:r>
-            <a:r>
-              <a:rPr sz="800" lang="zh-TW" dirty="0">
-                <a:solidFill>
-                  <a:srgbClr val="000000"/>
-                </a:solidFill>
-                <a:latin typeface="Arial Unicode MS"/>
-                <a:ea typeface="Arial Unicode MS"/>
-                <a:cs typeface="Arial Unicode MS"/>
-              </a:rPr>
-              <a:t>。兩顆光達也一樣，鎖住相位就知道誰什麼時候掃到重疊區。這一行有一個前提要記住：</a:t>
-            </a:r>
-            <a:r>
-              <a:rPr sz="800" b="1" lang="zh-TW" dirty="0">
-                <a:solidFill>
-                  <a:srgbClr val="000000"/>
-                </a:solidFill>
-                <a:latin typeface="Arial Unicode MS"/>
-                <a:ea typeface="Arial Unicode MS"/>
-                <a:cs typeface="Arial Unicode MS"/>
-              </a:rPr>
-              <a:t>要先有外部時間來源</a:t>
-            </a:r>
-            <a:r>
-              <a:rPr sz="800" lang="zh-TW" dirty="0">
-                <a:solidFill>
-                  <a:srgbClr val="000000"/>
-                </a:solidFill>
-                <a:latin typeface="Arial Unicode MS"/>
-                <a:ea typeface="Arial Unicode MS"/>
-                <a:cs typeface="Arial Unicode MS"/>
-              </a:rPr>
-              <a:t>（PTP 或同步脈衝），沒有對時就鎖不住相位。
-</a:t>
-            </a:r>
-          </a:p>
-          <a:p>
-            <a:pPr algn="l">
-              <a:spcBef>
-                <a:spcPts val="0"/>
-              </a:spcBef>
-              <a:spcAft>
-                <a:spcPts val="133"/>
-              </a:spcAft>
-            </a:pPr>
-            <a:r>
-              <a:rPr sz="800" lang="zh-TW" dirty="0">
-                <a:solidFill>
-                  <a:srgbClr val="000000"/>
-                </a:solidFill>
-                <a:latin typeface="Arial Unicode MS"/>
-                <a:ea typeface="Arial Unicode MS"/>
-                <a:cs typeface="Arial Unicode MS"/>
-              </a:rPr>
-              <a:t>各位會問：這一格其他幾行跟同步有什麼關係？</a:t>
-            </a:r>
-            <a:r>
-              <a:rPr sz="800" b="1" lang="zh-TW" dirty="0">
-                <a:solidFill>
-                  <a:srgbClr val="000000"/>
-                </a:solidFill>
-                <a:latin typeface="Arial Unicode MS"/>
-                <a:ea typeface="Arial Unicode MS"/>
-                <a:cs typeface="Arial Unicode MS"/>
-              </a:rPr>
-              <a:t>沒有關係。</a:t>
-            </a:r>
-            <a:r>
-              <a:rPr sz="800" lang="zh-TW" dirty="0">
-                <a:solidFill>
-                  <a:srgbClr val="000000"/>
-                </a:solidFill>
-                <a:latin typeface="Arial Unicode MS"/>
-                <a:ea typeface="Arial Unicode MS"/>
-                <a:cs typeface="Arial Unicode MS"/>
-              </a:rPr>
-              <a:t>這一格的標題是 Additional Programmability——「其他可以設定的項目」，</a:t>
-            </a:r>
-            <a:r>
-              <a:rPr sz="800" b="1" lang="zh-TW" dirty="0">
-                <a:solidFill>
-                  <a:srgbClr val="000000"/>
-                </a:solidFill>
-                <a:latin typeface="Arial Unicode MS"/>
-                <a:ea typeface="Arial Unicode MS"/>
-                <a:cs typeface="Arial Unicode MS"/>
-              </a:rPr>
-              <a:t>七行裡只有第一行在講同步</a:t>
-            </a:r>
-            <a:r>
-              <a:rPr sz="800" lang="zh-TW" dirty="0">
-                <a:solidFill>
-                  <a:srgbClr val="000000"/>
-                </a:solidFill>
-                <a:latin typeface="Arial Unicode MS"/>
-                <a:ea typeface="Arial Unicode MS"/>
-                <a:cs typeface="Arial Unicode MS"/>
-              </a:rPr>
-              <a:t>，其他是剛好印在同一格。這件事本身要學起來：</a:t>
-            </a:r>
-            <a:r>
-              <a:rPr sz="800" b="1" lang="zh-TW" dirty="0">
-                <a:solidFill>
-                  <a:srgbClr val="000000"/>
-                </a:solidFill>
-                <a:latin typeface="Arial Unicode MS"/>
-                <a:ea typeface="Arial Unicode MS"/>
-                <a:cs typeface="Arial Unicode MS"/>
-              </a:rPr>
-              <a:t>規格表上同一個框裡的東西，不一定是同一個主題。</a:t>
-            </a:r>
-            <a:r>
-              <a:rPr sz="800" lang="zh-TW" dirty="0">
-                <a:solidFill>
-                  <a:srgbClr val="000000"/>
-                </a:solidFill>
-                <a:latin typeface="Arial Unicode MS"/>
-                <a:ea typeface="Arial Unicode MS"/>
-                <a:cs typeface="Arial Unicode MS"/>
-              </a:rPr>
-              <a:t>
-</a:t>
-            </a:r>
-          </a:p>
-          <a:p>
-            <a:pPr algn="l">
-              <a:spcBef>
-                <a:spcPts val="0"/>
-              </a:spcBef>
-              <a:spcAft>
-                <a:spcPts val="133"/>
-              </a:spcAft>
-            </a:pPr>
-            <a:r>
-              <a:rPr sz="800" lang="zh-TW" dirty="0">
-                <a:solidFill>
-                  <a:srgbClr val="000000"/>
-                </a:solidFill>
-                <a:latin typeface="Arial Unicode MS"/>
-                <a:ea typeface="Arial Unicode MS"/>
-                <a:cs typeface="Arial Unicode MS"/>
-              </a:rPr>
-              <a:t>其他幾行快速帶過，各位會發現每一行都是今天講過的。</a:t>
-            </a:r>
-            <a:r>
-              <a:rPr sz="800" b="1" lang="zh-TW" dirty="0">
-                <a:solidFill>
-                  <a:srgbClr val="000000"/>
-                </a:solidFill>
-                <a:latin typeface="Arial Unicode MS"/>
-                <a:ea typeface="Arial Unicode MS"/>
-                <a:cs typeface="Arial Unicode MS"/>
-              </a:rPr>
-              <a:t>Queryable intrinsic calibration information</a:t>
-            </a:r>
-            <a:r>
-              <a:rPr sz="800" lang="zh-TW" dirty="0">
-                <a:solidFill>
-                  <a:srgbClr val="000000"/>
-                </a:solidFill>
-                <a:latin typeface="Arial Unicode MS"/>
-                <a:ea typeface="Arial Unicode MS"/>
-                <a:cs typeface="Arial Unicode MS"/>
-              </a:rPr>
-              <a:t>：可以直接問這顆光達要它自己的</a:t>
-            </a:r>
-            <a:r>
-              <a:rPr sz="800" b="1" lang="zh-TW" dirty="0">
-                <a:solidFill>
-                  <a:srgbClr val="000000"/>
-                </a:solidFill>
-                <a:latin typeface="Arial Unicode MS"/>
-                <a:ea typeface="Arial Unicode MS"/>
-                <a:cs typeface="Arial Unicode MS"/>
-              </a:rPr>
-              <a:t>內參</a:t>
-            </a:r>
-            <a:r>
-              <a:rPr sz="800" lang="zh-TW" dirty="0">
-                <a:solidFill>
-                  <a:srgbClr val="000000"/>
-                </a:solidFill>
-                <a:latin typeface="Arial Unicode MS"/>
-                <a:ea typeface="Arial Unicode MS"/>
-                <a:cs typeface="Arial Unicode MS"/>
-              </a:rPr>
-              <a:t>——底下的 </a:t>
-            </a:r>
-            <a:r>
-              <a:rPr sz="800" b="1" lang="zh-TW" dirty="0">
-                <a:solidFill>
-                  <a:srgbClr val="000000"/>
-                </a:solidFill>
-                <a:latin typeface="Arial Unicode MS"/>
-                <a:ea typeface="Arial Unicode MS"/>
-                <a:cs typeface="Arial Unicode MS"/>
-              </a:rPr>
-              <a:t>Beam angles</a:t>
-            </a:r>
-            <a:r>
-              <a:rPr sz="800" lang="zh-TW" dirty="0">
-                <a:solidFill>
-                  <a:srgbClr val="000000"/>
-                </a:solidFill>
-                <a:latin typeface="Arial Unicode MS"/>
-                <a:ea typeface="Arial Unicode MS"/>
-                <a:cs typeface="Arial Unicode MS"/>
-              </a:rPr>
-              <a:t> 是每條線束實際的垂直角度（出廠量過，不是真的平均分布），</a:t>
-            </a:r>
-            <a:r>
-              <a:rPr sz="800" b="1" lang="zh-TW" dirty="0">
-                <a:solidFill>
-                  <a:srgbClr val="000000"/>
-                </a:solidFill>
-                <a:latin typeface="Arial Unicode MS"/>
-                <a:ea typeface="Arial Unicode MS"/>
-                <a:cs typeface="Arial Unicode MS"/>
-              </a:rPr>
-              <a:t>IMU pose correction matrix</a:t>
-            </a:r>
-            <a:r>
-              <a:rPr sz="800" lang="zh-TW" dirty="0">
-                <a:solidFill>
-                  <a:srgbClr val="000000"/>
-                </a:solidFill>
-                <a:latin typeface="Arial Unicode MS"/>
-                <a:ea typeface="Arial Unicode MS"/>
-                <a:cs typeface="Arial Unicode MS"/>
-              </a:rPr>
-              <a:t> 是機內那顆慣性感測器和光達本體的關係，等於原廠標好的</a:t>
-            </a:r>
-            <a:r>
-              <a:rPr sz="800" b="1" lang="zh-TW" dirty="0">
-                <a:solidFill>
-                  <a:srgbClr val="000000"/>
-                </a:solidFill>
-                <a:latin typeface="Arial Unicode MS"/>
-                <a:ea typeface="Arial Unicode MS"/>
-                <a:cs typeface="Arial Unicode MS"/>
-              </a:rPr>
-              <a:t>外參</a:t>
-            </a:r>
-            <a:r>
-              <a:rPr sz="800" lang="zh-TW" dirty="0">
-                <a:solidFill>
-                  <a:srgbClr val="000000"/>
-                </a:solidFill>
-                <a:latin typeface="Arial Unicode MS"/>
-                <a:ea typeface="Arial Unicode MS"/>
-                <a:cs typeface="Arial Unicode MS"/>
-              </a:rPr>
-              <a:t>。</a:t>
-            </a:r>
-            <a:r>
-              <a:rPr sz="800" b="1" lang="zh-TW" dirty="0">
-                <a:solidFill>
-                  <a:srgbClr val="000000"/>
-                </a:solidFill>
-                <a:latin typeface="Arial Unicode MS"/>
-                <a:ea typeface="Arial Unicode MS"/>
-                <a:cs typeface="Arial Unicode MS"/>
-              </a:rPr>
-              <a:t>Return ordering</a:t>
-            </a:r>
-            <a:r>
-              <a:rPr sz="800" lang="zh-TW" dirty="0">
-                <a:solidFill>
-                  <a:srgbClr val="000000"/>
-                </a:solidFill>
-                <a:latin typeface="Arial Unicode MS"/>
-                <a:ea typeface="Arial Unicode MS"/>
-                <a:cs typeface="Arial Unicode MS"/>
-              </a:rPr>
-              <a:t> 就是第十一張的兩次回波，可以選先給最強、最遠還是最近。</a:t>
-            </a:r>
-            <a:r>
-              <a:rPr sz="800" b="1" lang="zh-TW" dirty="0">
-                <a:solidFill>
-                  <a:srgbClr val="000000"/>
-                </a:solidFill>
-                <a:latin typeface="Arial Unicode MS"/>
-                <a:ea typeface="Arial Unicode MS"/>
-                <a:cs typeface="Arial Unicode MS"/>
-              </a:rPr>
-              <a:t>Minimum range</a:t>
-            </a:r>
-            <a:r>
-              <a:rPr sz="800" lang="zh-TW" dirty="0">
-                <a:solidFill>
-                  <a:srgbClr val="000000"/>
-                </a:solidFill>
-                <a:latin typeface="Arial Unicode MS"/>
-                <a:ea typeface="Arial Unicode MS"/>
-                <a:cs typeface="Arial Unicode MS"/>
-              </a:rPr>
-              <a:t> 設 0、30 或 50 公分，比這個近的不回報。</a:t>
-            </a:r>
-            <a:r>
-              <a:rPr sz="800" b="1" lang="zh-TW" dirty="0">
-                <a:solidFill>
-                  <a:srgbClr val="000000"/>
-                </a:solidFill>
-                <a:latin typeface="Arial Unicode MS"/>
-                <a:ea typeface="Arial Unicode MS"/>
-                <a:cs typeface="Arial Unicode MS"/>
-              </a:rPr>
-              <a:t>Azimuth masking</a:t>
-            </a:r>
-            <a:r>
-              <a:rPr sz="800" lang="zh-TW" dirty="0">
-                <a:solidFill>
-                  <a:srgbClr val="000000"/>
-                </a:solidFill>
-                <a:latin typeface="Arial Unicode MS"/>
-                <a:ea typeface="Arial Unicode MS"/>
-                <a:cs typeface="Arial Unicode MS"/>
-              </a:rPr>
-              <a:t> 把不要的那一段角度關掉——這一行和第一行是同一套東西，都在設「這一圈從哪裡開始、到哪裡結束」。</a:t>
-            </a:r>
-            <a:r>
-              <a:rPr sz="800" b="1" lang="zh-TW" dirty="0">
-                <a:solidFill>
-                  <a:srgbClr val="000000"/>
-                </a:solidFill>
-                <a:latin typeface="Arial Unicode MS"/>
-                <a:ea typeface="Arial Unicode MS"/>
-                <a:cs typeface="Arial Unicode MS"/>
-              </a:rPr>
-              <a:t>Low-power standby mode</a:t>
-            </a:r>
-            <a:r>
-              <a:rPr sz="800" lang="zh-TW" dirty="0">
-                <a:solidFill>
-                  <a:srgbClr val="000000"/>
-                </a:solidFill>
-                <a:latin typeface="Arial Unicode MS"/>
-                <a:ea typeface="Arial Unicode MS"/>
-                <a:cs typeface="Arial Unicode MS"/>
-              </a:rPr>
-              <a:t> 停車省電。第一節第十二張我說過「可設定」是模式不是數字——</a:t>
-            </a:r>
-            <a:r>
-              <a:rPr sz="800" b="1" lang="zh-TW" dirty="0">
-                <a:solidFill>
-                  <a:srgbClr val="000000"/>
-                </a:solidFill>
-                <a:latin typeface="Arial Unicode MS"/>
-                <a:ea typeface="Arial Unicode MS"/>
-                <a:cs typeface="Arial Unicode MS"/>
-              </a:rPr>
-              <a:t>這一整格就是最好的例子。</a:t>
-            </a:r>
-            <a:r>
-              <a:rPr sz="800" lang="zh-TW" dirty="0">
-                <a:solidFill>
-                  <a:srgbClr val="000000"/>
-                </a:solidFill>
-                <a:latin typeface="Arial Unicode MS"/>
-                <a:ea typeface="Arial Unicode MS"/>
-                <a:cs typeface="Arial Unicode MS"/>
-              </a:rPr>
-              <a:t>
-</a:t>
-            </a:r>
-          </a:p>
-          <a:p>
-            <a:pPr algn="l">
-              <a:spcBef>
-                <a:spcPts val="0"/>
-              </a:spcBef>
-              <a:spcAft>
-                <a:spcPts val="133"/>
-              </a:spcAft>
-            </a:pPr>
-            <a:r>
-              <a:rPr sz="800" lang="zh-TW" dirty="0">
-                <a:solidFill>
-                  <a:srgbClr val="000000"/>
-                </a:solidFill>
-                <a:latin typeface="Arial Unicode MS"/>
-                <a:ea typeface="Arial Unicode MS"/>
-                <a:cs typeface="Arial Unicode MS"/>
-              </a:rPr>
-              <a:t>所以請各位記住：</a:t>
-            </a:r>
-            <a:r>
-              <a:rPr sz="800" b="1" lang="zh-TW" dirty="0">
-                <a:solidFill>
-                  <a:srgbClr val="000000"/>
-                </a:solidFill>
-                <a:latin typeface="Arial Unicode MS"/>
-                <a:ea typeface="Arial Unicode MS"/>
-                <a:cs typeface="Arial Unicode MS"/>
-              </a:rPr>
-              <a:t>兩顆感測器各自都是好的，不代表合起來是對的。</a:t>
-            </a:r>
-            <a:r>
-              <a:rPr sz="800" lang="zh-TW" dirty="0">
-                <a:solidFill>
-                  <a:srgbClr val="000000"/>
-                </a:solidFill>
-                <a:latin typeface="Arial Unicode MS"/>
-                <a:ea typeface="Arial Unicode MS"/>
-                <a:cs typeface="Arial Unicode MS"/>
-              </a:rPr>
-              <a:t>中間還有標定和同步這兩關，而它們在規格表上常常只有一兩行、甚至完全沒有，可是實際做系統的時候吃掉的時間比選型還多。
-</a:t>
-            </a:r>
-          </a:p>
-          <a:p>
-            <a:pPr algn="l">
-              <a:spcBef>
-                <a:spcPts val="0"/>
-              </a:spcBef>
-              <a:spcAft>
-                <a:spcPts val="133"/>
-              </a:spcAft>
-            </a:pPr>
-            <a:r>
-              <a:rPr sz="800" lang="zh-TW" dirty="0">
-                <a:solidFill>
-                  <a:srgbClr val="000000"/>
-                </a:solidFill>
-                <a:latin typeface="Arial Unicode MS"/>
-                <a:ea typeface="Arial Unicode MS"/>
-                <a:cs typeface="Arial Unicode MS"/>
-              </a:rPr>
-              <a:t>下一節我們回到工具上，把今天和上一節講的東西，全部用在一件事上：</a:t>
-            </a:r>
-            <a:r>
-              <a:rPr sz="800" b="1" lang="zh-TW" dirty="0">
-                <a:solidFill>
-                  <a:srgbClr val="000000"/>
-                </a:solidFill>
-                <a:latin typeface="Arial Unicode MS"/>
-                <a:ea typeface="Arial Unicode MS"/>
-                <a:cs typeface="Arial Unicode MS"/>
-              </a:rPr>
-              <a:t>幫一個指定的情境選一顆感測器</a:t>
-            </a:r>
-            <a:r>
-              <a:rPr sz="800" lang="zh-TW" dirty="0">
-                <a:solidFill>
-                  <a:srgbClr val="000000"/>
-                </a:solidFill>
-                <a:latin typeface="Arial Unicode MS"/>
-                <a:ea typeface="Arial Unicode MS"/>
-                <a:cs typeface="Arial Unicode MS"/>
-              </a:rPr>
-              <a:t>，而且要說得出是卡在哪一行。</a:t>
+                <a:spcPts val="142"/>
+              </a:spcAft>
+            </a:pPr>
+            <a:r>
+              <a:rPr sz="850" lang="zh-TW" dirty="0">
+                <a:solidFill>
+                  <a:srgbClr val="000000"/>
+                </a:solidFill>
+                <a:latin typeface="Arial Unicode MS"/>
+                <a:ea typeface="Arial Unicode MS"/>
+                <a:cs typeface="Arial Unicode MS"/>
+              </a:rPr>
+              <a:t>播完請按暫停。</a:t>
             </a:r>
           </a:p>
         </p:txBody>
@@ -6838,11 +6553,11 @@
                 <a:spcPts val="0"/>
               </a:spcBef>
               <a:spcAft>
-                <a:spcPts val="167"/>
-              </a:spcAft>
-            </a:pPr>
-            <a:r>
-              <a:rPr sz="1000" b="1" lang="zh-TW" dirty="0">
+                <a:spcPts val="133"/>
+              </a:spcAft>
+            </a:pPr>
+            <a:r>
+              <a:rPr sz="800" b="1" lang="zh-TW" dirty="0">
                 <a:solidFill>
                   <a:srgbClr val="000000"/>
                 </a:solidFill>
@@ -6853,7 +6568,7 @@
               <a:t>▍這一張要做什麼</a:t>
             </a:r>
             <a:r>
-              <a:rPr sz="1000" lang="zh-TW" dirty="0">
+              <a:rPr sz="800" lang="zh-TW" dirty="0">
                 <a:solidFill>
                   <a:srgbClr val="000000"/>
                 </a:solidFill>
@@ -6871,19 +6586,19 @@
                 <a:spcPts val="0"/>
               </a:spcBef>
               <a:spcAft>
-                <a:spcPts val="167"/>
-              </a:spcAft>
-            </a:pPr>
-            <a:r>
-              <a:rPr sz="1000" lang="zh-TW" dirty="0">
-                <a:solidFill>
-                  <a:srgbClr val="000000"/>
-                </a:solidFill>
-                <a:latin typeface="Arial Unicode MS"/>
-                <a:ea typeface="Arial Unicode MS"/>
-                <a:cs typeface="Arial Unicode MS"/>
-              </a:rPr>
-              <a:t>第二節小結，三句話帶上機。
+                <a:spcPts val="133"/>
+              </a:spcAft>
+            </a:pPr>
+            <a:r>
+              <a:rPr sz="800" lang="zh-TW" dirty="0">
+                <a:solidFill>
+                  <a:srgbClr val="000000"/>
+                </a:solidFill>
+                <a:latin typeface="Arial Unicode MS"/>
+                <a:ea typeface="Arial Unicode MS"/>
+                <a:cs typeface="Arial Unicode MS"/>
+              </a:rPr>
+              <a:t>時間同步：兩隻眼睛要看的是同一個瞬間。
 </a:t>
             </a:r>
           </a:p>
@@ -6893,11 +6608,11 @@
                 <a:spcPts val="0"/>
               </a:spcBef>
               <a:spcAft>
-                <a:spcPts val="167"/>
-              </a:spcAft>
-            </a:pPr>
-            <a:r>
-              <a:rPr sz="1000" b="1" lang="zh-TW" dirty="0">
+                <a:spcPts val="133"/>
+              </a:spcAft>
+            </a:pPr>
+            <a:r>
+              <a:rPr sz="800" b="1" lang="zh-TW" dirty="0">
                 <a:solidFill>
                   <a:srgbClr val="000000"/>
                 </a:solidFill>
@@ -6908,7 +6623,7 @@
               <a:t>▍畫面上圈這裡</a:t>
             </a:r>
             <a:r>
-              <a:rPr sz="1000" lang="zh-TW" dirty="0">
+              <a:rPr sz="800" lang="zh-TW" dirty="0">
                 <a:solidFill>
                   <a:srgbClr val="000000"/>
                 </a:solidFill>
@@ -6926,19 +6641,19 @@
                 <a:spcPts val="0"/>
               </a:spcBef>
               <a:spcAft>
-                <a:spcPts val="167"/>
-              </a:spcAft>
-            </a:pPr>
-            <a:r>
-              <a:rPr sz="1000" lang="zh-TW" dirty="0">
-                <a:solidFill>
-                  <a:srgbClr val="000000"/>
-                </a:solidFill>
-                <a:latin typeface="Arial Unicode MS"/>
-                <a:ea typeface="Arial Unicode MS"/>
-                <a:cs typeface="Arial Unicode MS"/>
-              </a:rPr>
-              <a:t>三條一條一條圈。第三條「合起來不一定對」是明天做專題時最常忘的。
+                <a:spcPts val="133"/>
+              </a:spcAft>
+            </a:pPr>
+            <a:r>
+              <a:rPr sz="800" lang="zh-TW" dirty="0">
+                <a:solidFill>
+                  <a:srgbClr val="000000"/>
+                </a:solidFill>
+                <a:latin typeface="Arial Unicode MS"/>
+                <a:ea typeface="Arial Unicode MS"/>
+                <a:cs typeface="Arial Unicode MS"/>
+              </a:rPr>
+              <a:t>圈 50 毫秒與半公尺，再指圖裡的 Multi-sensor phase lock——七行裡只有這行在講同步，要講明。其餘六行快速點過，每一行都回扣今天講過的一張。
 </a:t>
             </a:r>
           </a:p>
@@ -6948,11 +6663,11 @@
                 <a:spcPts val="0"/>
               </a:spcBef>
               <a:spcAft>
-                <a:spcPts val="167"/>
-              </a:spcAft>
-            </a:pPr>
-            <a:r>
-              <a:rPr sz="1000" b="1" lang="zh-TW" dirty="0">
+                <a:spcPts val="133"/>
+              </a:spcAft>
+            </a:pPr>
+            <a:r>
+              <a:rPr sz="800" b="1" lang="zh-TW" dirty="0">
                 <a:solidFill>
                   <a:srgbClr val="000000"/>
                 </a:solidFill>
@@ -6963,7 +6678,7 @@
               <a:t>▍以下照著唸</a:t>
             </a:r>
             <a:r>
-              <a:rPr sz="1000" lang="zh-TW" dirty="0">
+              <a:rPr sz="800" lang="zh-TW" dirty="0">
                 <a:solidFill>
                   <a:srgbClr val="000000"/>
                 </a:solidFill>
@@ -6981,19 +6696,41 @@
                 <a:spcPts val="0"/>
               </a:spcBef>
               <a:spcAft>
-                <a:spcPts val="167"/>
-              </a:spcAft>
-            </a:pPr>
-            <a:r>
-              <a:rPr sz="1000" lang="zh-TW" dirty="0">
-                <a:solidFill>
-                  <a:srgbClr val="000000"/>
-                </a:solidFill>
-                <a:latin typeface="Arial Unicode MS"/>
-                <a:ea typeface="Arial Unicode MS"/>
-                <a:cs typeface="Arial Unicode MS"/>
-              </a:rPr>
-              <a:t>第二節收起來，三句話。
+                <a:spcPts val="133"/>
+              </a:spcAft>
+            </a:pPr>
+            <a:r>
+              <a:rPr sz="800" lang="zh-TW" dirty="0">
+                <a:solidFill>
+                  <a:srgbClr val="000000"/>
+                </a:solidFill>
+                <a:latin typeface="Arial Unicode MS"/>
+                <a:ea typeface="Arial Unicode MS"/>
+                <a:cs typeface="Arial Unicode MS"/>
+              </a:rPr>
+              <a:t>最後一件事是</a:t>
+            </a:r>
+            <a:r>
+              <a:rPr sz="800" b="1" lang="zh-TW" dirty="0">
+                <a:solidFill>
+                  <a:srgbClr val="000000"/>
+                </a:solidFill>
+                <a:latin typeface="Arial Unicode MS"/>
+                <a:ea typeface="Arial Unicode MS"/>
+                <a:cs typeface="Arial Unicode MS"/>
+              </a:rPr>
+              <a:t>時間同步</a:t>
+            </a:r>
+            <a:r>
+              <a:rPr sz="800" lang="zh-TW" dirty="0">
+                <a:solidFill>
+                  <a:srgbClr val="000000"/>
+                </a:solidFill>
+                <a:latin typeface="Arial Unicode MS"/>
+                <a:ea typeface="Arial Unicode MS"/>
+                <a:cs typeface="Arial Unicode MS"/>
+              </a:rPr>
+              <a:t>。剛剛講的標定是「空間」上要對準，這一件是「時間」上要對準。
 </a:t>
             </a:r>
           </a:p>
@@ -7003,30 +6740,41 @@
                 <a:spcPts val="0"/>
               </a:spcBef>
               <a:spcAft>
-                <a:spcPts val="167"/>
-              </a:spcAft>
-            </a:pPr>
-            <a:r>
-              <a:rPr sz="1000" b="1" lang="zh-TW" dirty="0">
-                <a:solidFill>
-                  <a:srgbClr val="000000"/>
-                </a:solidFill>
-                <a:latin typeface="Arial Unicode MS"/>
-                <a:ea typeface="Arial Unicode MS"/>
-                <a:cs typeface="Arial Unicode MS"/>
-              </a:rPr>
-              <a:t>第一句，相機的三件事。</a:t>
-            </a:r>
-            <a:r>
-              <a:rPr sz="1000" lang="zh-TW" dirty="0">
-                <a:solidFill>
-                  <a:srgbClr val="000000"/>
-                </a:solidFill>
-                <a:latin typeface="Arial Unicode MS"/>
-                <a:ea typeface="Arial Unicode MS"/>
-                <a:cs typeface="Arial Unicode MS"/>
-              </a:rPr>
-              <a:t>捲簾快門會把移動中的東西扭掉；動態範圍不夠，隧道裡面黑掉或者外面白掉；沒有 LED 閃爍抑制，紅燈可能被拍成沒亮。
+                <a:spcPts val="133"/>
+              </a:spcAft>
+            </a:pPr>
+            <a:r>
+              <a:rPr sz="800" lang="zh-TW" dirty="0">
+                <a:solidFill>
+                  <a:srgbClr val="000000"/>
+                </a:solidFill>
+                <a:latin typeface="Arial Unicode MS"/>
+                <a:ea typeface="Arial Unicode MS"/>
+                <a:cs typeface="Arial Unicode MS"/>
+              </a:rPr>
+              <a:t>想想看：光達一秒轉十圈，相機一秒拍六十張，兩個的節奏完全不一樣。假設車子現在收到一張相機的畫面，還有一圈光達的點雲，要把它們合起來。問題是——</a:t>
+            </a:r>
+            <a:r>
+              <a:rPr sz="800" b="1" lang="zh-TW" dirty="0">
+                <a:solidFill>
+                  <a:srgbClr val="000000"/>
+                </a:solidFill>
+                <a:latin typeface="Arial Unicode MS"/>
+                <a:ea typeface="Arial Unicode MS"/>
+                <a:cs typeface="Arial Unicode MS"/>
+              </a:rPr>
+              <a:t>這兩份資料是同一個瞬間的嗎？</a:t>
+            </a:r>
+            <a:r>
+              <a:rPr sz="800" lang="zh-TW" dirty="0">
+                <a:solidFill>
+                  <a:srgbClr val="000000"/>
+                </a:solidFill>
+                <a:latin typeface="Arial Unicode MS"/>
+                <a:ea typeface="Arial Unicode MS"/>
+                <a:cs typeface="Arial Unicode MS"/>
+              </a:rPr>
+              <a:t>
 </a:t>
             </a:r>
           </a:p>
@@ -7036,99 +6784,33 @@
                 <a:spcPts val="0"/>
               </a:spcBef>
               <a:spcAft>
-                <a:spcPts val="167"/>
-              </a:spcAft>
-            </a:pPr>
-            <a:r>
-              <a:rPr sz="1000" b="1" lang="zh-TW" dirty="0">
-                <a:solidFill>
-                  <a:srgbClr val="000000"/>
-                </a:solidFill>
-                <a:latin typeface="Arial Unicode MS"/>
-                <a:ea typeface="Arial Unicode MS"/>
-                <a:cs typeface="Arial Unicode MS"/>
-              </a:rPr>
-              <a:t>第二句，光達的三行。</a:t>
-            </a:r>
-            <a:r>
-              <a:rPr sz="1000" lang="zh-TW" dirty="0">
-                <a:solidFill>
-                  <a:srgbClr val="000000"/>
-                </a:solidFill>
-                <a:latin typeface="Arial Unicode MS"/>
-                <a:ea typeface="Arial Unicode MS"/>
-                <a:cs typeface="Arial Unicode MS"/>
-              </a:rPr>
-              <a:t>波長決定法規允許你打多強，也就決定看多遠；Class 1 對眼睛安全是門檻，不是加分；多次回波決定它在雨和灰塵裡好不好用。
-</a:t>
-            </a:r>
-          </a:p>
-          <a:p>
-            <a:pPr algn="l">
-              <a:spcBef>
-                <a:spcPts val="0"/>
-              </a:spcBef>
-              <a:spcAft>
-                <a:spcPts val="167"/>
-              </a:spcAft>
-            </a:pPr>
-            <a:r>
-              <a:rPr sz="1000" b="1" lang="zh-TW" dirty="0">
-                <a:solidFill>
-                  <a:srgbClr val="000000"/>
-                </a:solidFill>
-                <a:latin typeface="Arial Unicode MS"/>
-                <a:ea typeface="Arial Unicode MS"/>
-                <a:cs typeface="Arial Unicode MS"/>
-              </a:rPr>
-              <a:t>第三句，兩顆好的感測器合起來不一定對。</a:t>
-            </a:r>
-            <a:r>
-              <a:rPr sz="1000" lang="zh-TW" dirty="0">
-                <a:solidFill>
-                  <a:srgbClr val="000000"/>
-                </a:solidFill>
-                <a:latin typeface="Arial Unicode MS"/>
-                <a:ea typeface="Arial Unicode MS"/>
-                <a:cs typeface="Arial Unicode MS"/>
-              </a:rPr>
-              <a:t>空間要標定，差一度在五十公尺外就差快一公尺；時間要同步，差五十毫秒在時速四十下就差半公尺以上。
-</a:t>
-            </a:r>
-          </a:p>
-          <a:p>
-            <a:pPr algn="l">
-              <a:spcBef>
-                <a:spcPts val="0"/>
-              </a:spcBef>
-              <a:spcAft>
-                <a:spcPts val="167"/>
-              </a:spcAft>
-            </a:pPr>
-            <a:r>
-              <a:rPr sz="1000" lang="zh-TW" dirty="0">
-                <a:solidFill>
-                  <a:srgbClr val="000000"/>
-                </a:solidFill>
-                <a:latin typeface="Arial Unicode MS"/>
-                <a:ea typeface="Arial Unicode MS"/>
-                <a:cs typeface="Arial Unicode MS"/>
-              </a:rPr>
-              <a:t>下一節整節都在電腦上。各位要做的事是：拿四個型號、三個情境，自己判斷哪一顆能用、哪一顆不行，而且要講得出</a:t>
-            </a:r>
-            <a:r>
-              <a:rPr sz="1000" b="1" lang="zh-TW" dirty="0">
-                <a:solidFill>
-                  <a:srgbClr val="000000"/>
-                </a:solidFill>
-                <a:latin typeface="Arial Unicode MS"/>
-                <a:ea typeface="Arial Unicode MS"/>
-                <a:cs typeface="Arial Unicode MS"/>
-              </a:rPr>
-              <a:t>卡在哪一行</a:t>
-            </a:r>
-            <a:r>
-              <a:rPr sz="1000" lang="zh-TW" dirty="0">
+                <a:spcPts val="133"/>
+              </a:spcAft>
+            </a:pPr>
+            <a:r>
+              <a:rPr sz="800" lang="zh-TW" dirty="0">
+                <a:solidFill>
+                  <a:srgbClr val="000000"/>
+                </a:solidFill>
+                <a:latin typeface="Arial Unicode MS"/>
+                <a:ea typeface="Arial Unicode MS"/>
+                <a:cs typeface="Arial Unicode MS"/>
+              </a:rPr>
+              <a:t>如果沒有處理，它們可能差到五十毫秒。時速四十的時候，五十毫秒車子走了</a:t>
+            </a:r>
+            <a:r>
+              <a:rPr sz="800" b="1" lang="zh-TW" dirty="0">
+                <a:solidFill>
+                  <a:srgbClr val="000000"/>
+                </a:solidFill>
+                <a:latin typeface="Arial Unicode MS"/>
+                <a:ea typeface="Arial Unicode MS"/>
+                <a:cs typeface="Arial Unicode MS"/>
+              </a:rPr>
+              <a:t>零點五六公尺</a:t>
+            </a:r>
+            <a:r>
+              <a:rPr sz="800" lang="zh-TW" dirty="0">
                 <a:solidFill>
                   <a:srgbClr val="000000"/>
                 </a:solidFill>
@@ -7146,19 +6828,41 @@
                 <a:spcPts val="0"/>
               </a:spcBef>
               <a:spcAft>
-                <a:spcPts val="167"/>
-              </a:spcAft>
-            </a:pPr>
-            <a:r>
-              <a:rPr sz="1000" lang="zh-TW" dirty="0">
-                <a:solidFill>
-                  <a:srgbClr val="000000"/>
-                </a:solidFill>
-                <a:latin typeface="Arial Unicode MS"/>
-                <a:ea typeface="Arial Unicode MS"/>
-                <a:cs typeface="Arial Unicode MS"/>
-              </a:rPr>
-              <a:t>這份東西第三節結束前要交，是個人作業。
+                <a:spcPts val="133"/>
+              </a:spcAft>
+            </a:pPr>
+            <a:r>
+              <a:rPr sz="800" lang="zh-TW" dirty="0">
+                <a:solidFill>
+                  <a:srgbClr val="000000"/>
+                </a:solidFill>
+                <a:latin typeface="Arial Unicode MS"/>
+                <a:ea typeface="Arial Unicode MS"/>
+                <a:cs typeface="Arial Unicode MS"/>
+              </a:rPr>
+              <a:t>所以你會把相機在 A 點看到的人，跟光達在 B 點量到的距離配在一起，得到一個</a:t>
+            </a:r>
+            <a:r>
+              <a:rPr sz="800" b="1" lang="zh-TW" dirty="0">
+                <a:solidFill>
+                  <a:srgbClr val="000000"/>
+                </a:solidFill>
+                <a:latin typeface="Arial Unicode MS"/>
+                <a:ea typeface="Arial Unicode MS"/>
+                <a:cs typeface="Arial Unicode MS"/>
+              </a:rPr>
+              <a:t>根本不存在的位置</a:t>
+            </a:r>
+            <a:r>
+              <a:rPr sz="800" lang="zh-TW" dirty="0">
+                <a:solidFill>
+                  <a:srgbClr val="000000"/>
+                </a:solidFill>
+                <a:latin typeface="Arial Unicode MS"/>
+                <a:ea typeface="Arial Unicode MS"/>
+                <a:cs typeface="Arial Unicode MS"/>
+              </a:rPr>
+              <a:t>。而且這個誤差會跟剛剛的標定誤差疊加。
 </a:t>
             </a:r>
           </a:p>
@@ -7168,19 +6872,624 @@
                 <a:spcPts val="0"/>
               </a:spcBef>
               <a:spcAft>
-                <a:spcPts val="167"/>
-              </a:spcAft>
-            </a:pPr>
-            <a:r>
-              <a:rPr sz="1000" lang="zh-TW" dirty="0">
-                <a:solidFill>
-                  <a:srgbClr val="000000"/>
-                </a:solidFill>
-                <a:latin typeface="Arial Unicode MS"/>
-                <a:ea typeface="Arial Unicode MS"/>
-                <a:cs typeface="Arial Unicode MS"/>
-              </a:rPr>
-              <a:t>休息十分鐘。</a:t>
+                <a:spcPts val="133"/>
+              </a:spcAft>
+            </a:pPr>
+            <a:r>
+              <a:rPr sz="800" lang="zh-TW" dirty="0">
+                <a:solidFill>
+                  <a:srgbClr val="000000"/>
+                </a:solidFill>
+                <a:latin typeface="Arial Unicode MS"/>
+                <a:ea typeface="Arial Unicode MS"/>
+                <a:cs typeface="Arial Unicode MS"/>
+              </a:rPr>
+              <a:t>解法有兩層。</a:t>
+            </a:r>
+            <a:r>
+              <a:rPr sz="800" b="1" lang="zh-TW" dirty="0">
+                <a:solidFill>
+                  <a:srgbClr val="000000"/>
+                </a:solidFill>
+                <a:latin typeface="Arial Unicode MS"/>
+                <a:ea typeface="Arial Unicode MS"/>
+                <a:cs typeface="Arial Unicode MS"/>
+              </a:rPr>
+              <a:t>第一層是共同時鐘</a:t>
+            </a:r>
+            <a:r>
+              <a:rPr sz="800" lang="zh-TW" dirty="0">
+                <a:solidFill>
+                  <a:srgbClr val="000000"/>
+                </a:solidFill>
+                <a:latin typeface="Arial Unicode MS"/>
+                <a:ea typeface="Arial Unicode MS"/>
+                <a:cs typeface="Arial Unicode MS"/>
+              </a:rPr>
+              <a:t>：每一顆感測器都在自己的資料上蓋</a:t>
+            </a:r>
+            <a:r>
+              <a:rPr sz="800" b="1" lang="zh-TW" dirty="0">
+                <a:solidFill>
+                  <a:srgbClr val="000000"/>
+                </a:solidFill>
+                <a:latin typeface="Arial Unicode MS"/>
+                <a:ea typeface="Arial Unicode MS"/>
+                <a:cs typeface="Arial Unicode MS"/>
+              </a:rPr>
+              <a:t>時間戳</a:t>
+            </a:r>
+            <a:r>
+              <a:rPr sz="800" lang="zh-TW" dirty="0">
+                <a:solidFill>
+                  <a:srgbClr val="000000"/>
+                </a:solidFill>
+                <a:latin typeface="Arial Unicode MS"/>
+                <a:ea typeface="Arial Unicode MS"/>
+                <a:cs typeface="Arial Unicode MS"/>
+              </a:rPr>
+              <a:t>，全車用同一個時鐘——車上通常用 PTP，一種跑在網路線上的對時協定。但這一層只讓你知道「各自是幾點拍的」，還沒有讓它們同時拍。
+</a:t>
+            </a:r>
+          </a:p>
+          <a:p>
+            <a:pPr algn="l">
+              <a:spcBef>
+                <a:spcPts val="0"/>
+              </a:spcBef>
+              <a:spcAft>
+                <a:spcPts val="133"/>
+              </a:spcAft>
+            </a:pPr>
+            <a:r>
+              <a:rPr sz="800" b="1" lang="zh-TW" dirty="0">
+                <a:solidFill>
+                  <a:srgbClr val="000000"/>
+                </a:solidFill>
+                <a:latin typeface="Arial Unicode MS"/>
+                <a:ea typeface="Arial Unicode MS"/>
+                <a:cs typeface="Arial Unicode MS"/>
+              </a:rPr>
+              <a:t>第二層就是圖上那一行：multi-sensor phase lock。</a:t>
+            </a:r>
+            <a:r>
+              <a:rPr sz="800" lang="zh-TW" dirty="0">
+                <a:solidFill>
+                  <a:srgbClr val="000000"/>
+                </a:solidFill>
+                <a:latin typeface="Arial Unicode MS"/>
+                <a:ea typeface="Arial Unicode MS"/>
+                <a:cs typeface="Arial Unicode MS"/>
+              </a:rPr>
+              <a:t>光達是一直在轉的，一秒十圈，所以每一百毫秒經過正前方一次——</a:t>
+            </a:r>
+            <a:r>
+              <a:rPr sz="800" b="1" lang="zh-TW" dirty="0">
+                <a:solidFill>
+                  <a:srgbClr val="000000"/>
+                </a:solidFill>
+                <a:latin typeface="Arial Unicode MS"/>
+                <a:ea typeface="Arial Unicode MS"/>
+                <a:cs typeface="Arial Unicode MS"/>
+              </a:rPr>
+              <a:t>可是經過的那個時刻是隨機的</a:t>
+            </a:r>
+            <a:r>
+              <a:rPr sz="800" lang="zh-TW" dirty="0">
+                <a:solidFill>
+                  <a:srgbClr val="000000"/>
+                </a:solidFill>
+                <a:latin typeface="Arial Unicode MS"/>
+                <a:ea typeface="Arial Unicode MS"/>
+                <a:cs typeface="Arial Unicode MS"/>
+              </a:rPr>
+              <a:t>，開機的時候轉子從哪裡起步就決定了。Phase lock 做的事是：先對好時，再</a:t>
+            </a:r>
+            <a:r>
+              <a:rPr sz="800" b="1" lang="zh-TW" dirty="0">
+                <a:solidFill>
+                  <a:srgbClr val="000000"/>
+                </a:solidFill>
+                <a:latin typeface="Arial Unicode MS"/>
+                <a:ea typeface="Arial Unicode MS"/>
+                <a:cs typeface="Arial Unicode MS"/>
+              </a:rPr>
+              <a:t>把轉子的相位鎖住</a:t>
+            </a:r>
+            <a:r>
+              <a:rPr sz="800" lang="zh-TW" dirty="0">
+                <a:solidFill>
+                  <a:srgbClr val="000000"/>
+                </a:solidFill>
+                <a:latin typeface="Arial Unicode MS"/>
+                <a:ea typeface="Arial Unicode MS"/>
+                <a:cs typeface="Arial Unicode MS"/>
+              </a:rPr>
+              <a:t>，讓它在每一個整十分之一秒的那個瞬間，剛好轉到你指定的角度。
+</a:t>
+            </a:r>
+          </a:p>
+          <a:p>
+            <a:pPr algn="l">
+              <a:spcBef>
+                <a:spcPts val="0"/>
+              </a:spcBef>
+              <a:spcAft>
+                <a:spcPts val="133"/>
+              </a:spcAft>
+            </a:pPr>
+            <a:r>
+              <a:rPr sz="800" lang="zh-TW" dirty="0">
+                <a:solidFill>
+                  <a:srgbClr val="000000"/>
+                </a:solidFill>
+                <a:latin typeface="Arial Unicode MS"/>
+                <a:ea typeface="Arial Unicode MS"/>
+                <a:cs typeface="Arial Unicode MS"/>
+              </a:rPr>
+              <a:t>所以你可以設成「每個十分之一秒的整點，光達剛好指著正前方」，再把相機的快門排在同一個時刻——</a:t>
+            </a:r>
+            <a:r>
+              <a:rPr sz="800" b="1" lang="zh-TW" dirty="0">
+                <a:solidFill>
+                  <a:srgbClr val="000000"/>
+                </a:solidFill>
+                <a:latin typeface="Arial Unicode MS"/>
+                <a:ea typeface="Arial Unicode MS"/>
+                <a:cs typeface="Arial Unicode MS"/>
+              </a:rPr>
+              <a:t>兩隻眼睛看的就是同一個瞬間的同一塊</a:t>
+            </a:r>
+            <a:r>
+              <a:rPr sz="800" lang="zh-TW" dirty="0">
+                <a:solidFill>
+                  <a:srgbClr val="000000"/>
+                </a:solidFill>
+                <a:latin typeface="Arial Unicode MS"/>
+                <a:ea typeface="Arial Unicode MS"/>
+                <a:cs typeface="Arial Unicode MS"/>
+              </a:rPr>
+              <a:t>。兩顆光達也一樣，鎖住相位就知道誰什麼時候掃到重疊區。這一行有一個前提要記住：</a:t>
+            </a:r>
+            <a:r>
+              <a:rPr sz="800" b="1" lang="zh-TW" dirty="0">
+                <a:solidFill>
+                  <a:srgbClr val="000000"/>
+                </a:solidFill>
+                <a:latin typeface="Arial Unicode MS"/>
+                <a:ea typeface="Arial Unicode MS"/>
+                <a:cs typeface="Arial Unicode MS"/>
+              </a:rPr>
+              <a:t>要先有外部時間來源</a:t>
+            </a:r>
+            <a:r>
+              <a:rPr sz="800" lang="zh-TW" dirty="0">
+                <a:solidFill>
+                  <a:srgbClr val="000000"/>
+                </a:solidFill>
+                <a:latin typeface="Arial Unicode MS"/>
+                <a:ea typeface="Arial Unicode MS"/>
+                <a:cs typeface="Arial Unicode MS"/>
+              </a:rPr>
+              <a:t>（PTP 或同步脈衝），沒有對時就鎖不住相位。
+</a:t>
+            </a:r>
+          </a:p>
+          <a:p>
+            <a:pPr algn="l">
+              <a:spcBef>
+                <a:spcPts val="0"/>
+              </a:spcBef>
+              <a:spcAft>
+                <a:spcPts val="133"/>
+              </a:spcAft>
+            </a:pPr>
+            <a:r>
+              <a:rPr sz="800" lang="zh-TW" dirty="0">
+                <a:solidFill>
+                  <a:srgbClr val="000000"/>
+                </a:solidFill>
+                <a:latin typeface="Arial Unicode MS"/>
+                <a:ea typeface="Arial Unicode MS"/>
+                <a:cs typeface="Arial Unicode MS"/>
+              </a:rPr>
+              <a:t>各位會問：這一格其他幾行跟同步有什麼關係？</a:t>
+            </a:r>
+            <a:r>
+              <a:rPr sz="800" b="1" lang="zh-TW" dirty="0">
+                <a:solidFill>
+                  <a:srgbClr val="000000"/>
+                </a:solidFill>
+                <a:latin typeface="Arial Unicode MS"/>
+                <a:ea typeface="Arial Unicode MS"/>
+                <a:cs typeface="Arial Unicode MS"/>
+              </a:rPr>
+              <a:t>沒有關係。</a:t>
+            </a:r>
+            <a:r>
+              <a:rPr sz="800" lang="zh-TW" dirty="0">
+                <a:solidFill>
+                  <a:srgbClr val="000000"/>
+                </a:solidFill>
+                <a:latin typeface="Arial Unicode MS"/>
+                <a:ea typeface="Arial Unicode MS"/>
+                <a:cs typeface="Arial Unicode MS"/>
+              </a:rPr>
+              <a:t>這一格的標題是 Additional Programmability——「其他可以設定的項目」，</a:t>
+            </a:r>
+            <a:r>
+              <a:rPr sz="800" b="1" lang="zh-TW" dirty="0">
+                <a:solidFill>
+                  <a:srgbClr val="000000"/>
+                </a:solidFill>
+                <a:latin typeface="Arial Unicode MS"/>
+                <a:ea typeface="Arial Unicode MS"/>
+                <a:cs typeface="Arial Unicode MS"/>
+              </a:rPr>
+              <a:t>七行裡只有第一行在講同步</a:t>
+            </a:r>
+            <a:r>
+              <a:rPr sz="800" lang="zh-TW" dirty="0">
+                <a:solidFill>
+                  <a:srgbClr val="000000"/>
+                </a:solidFill>
+                <a:latin typeface="Arial Unicode MS"/>
+                <a:ea typeface="Arial Unicode MS"/>
+                <a:cs typeface="Arial Unicode MS"/>
+              </a:rPr>
+              <a:t>，其他是剛好印在同一格。這件事本身要學起來：</a:t>
+            </a:r>
+            <a:r>
+              <a:rPr sz="800" b="1" lang="zh-TW" dirty="0">
+                <a:solidFill>
+                  <a:srgbClr val="000000"/>
+                </a:solidFill>
+                <a:latin typeface="Arial Unicode MS"/>
+                <a:ea typeface="Arial Unicode MS"/>
+                <a:cs typeface="Arial Unicode MS"/>
+              </a:rPr>
+              <a:t>規格表上同一個框裡的東西，不一定是同一個主題。</a:t>
+            </a:r>
+            <a:r>
+              <a:rPr sz="800" lang="zh-TW" dirty="0">
+                <a:solidFill>
+                  <a:srgbClr val="000000"/>
+                </a:solidFill>
+                <a:latin typeface="Arial Unicode MS"/>
+                <a:ea typeface="Arial Unicode MS"/>
+                <a:cs typeface="Arial Unicode MS"/>
+              </a:rPr>
+              <a:t>
+</a:t>
+            </a:r>
+          </a:p>
+          <a:p>
+            <a:pPr algn="l">
+              <a:spcBef>
+                <a:spcPts val="0"/>
+              </a:spcBef>
+              <a:spcAft>
+                <a:spcPts val="133"/>
+              </a:spcAft>
+            </a:pPr>
+            <a:r>
+              <a:rPr sz="800" lang="zh-TW" dirty="0">
+                <a:solidFill>
+                  <a:srgbClr val="000000"/>
+                </a:solidFill>
+                <a:latin typeface="Arial Unicode MS"/>
+                <a:ea typeface="Arial Unicode MS"/>
+                <a:cs typeface="Arial Unicode MS"/>
+              </a:rPr>
+              <a:t>其他幾行快速帶過，各位會發現每一行都是今天講過的。</a:t>
+            </a:r>
+            <a:r>
+              <a:rPr sz="800" b="1" lang="zh-TW" dirty="0">
+                <a:solidFill>
+                  <a:srgbClr val="000000"/>
+                </a:solidFill>
+                <a:latin typeface="Arial Unicode MS"/>
+                <a:ea typeface="Arial Unicode MS"/>
+                <a:cs typeface="Arial Unicode MS"/>
+              </a:rPr>
+              <a:t>Queryable intrinsic calibration information</a:t>
+            </a:r>
+            <a:r>
+              <a:rPr sz="800" lang="zh-TW" dirty="0">
+                <a:solidFill>
+                  <a:srgbClr val="000000"/>
+                </a:solidFill>
+                <a:latin typeface="Arial Unicode MS"/>
+                <a:ea typeface="Arial Unicode MS"/>
+                <a:cs typeface="Arial Unicode MS"/>
+              </a:rPr>
+              <a:t>：可以直接問這顆光達要它自己的</a:t>
+            </a:r>
+            <a:r>
+              <a:rPr sz="800" b="1" lang="zh-TW" dirty="0">
+                <a:solidFill>
+                  <a:srgbClr val="000000"/>
+                </a:solidFill>
+                <a:latin typeface="Arial Unicode MS"/>
+                <a:ea typeface="Arial Unicode MS"/>
+                <a:cs typeface="Arial Unicode MS"/>
+              </a:rPr>
+              <a:t>內參</a:t>
+            </a:r>
+            <a:r>
+              <a:rPr sz="800" lang="zh-TW" dirty="0">
+                <a:solidFill>
+                  <a:srgbClr val="000000"/>
+                </a:solidFill>
+                <a:latin typeface="Arial Unicode MS"/>
+                <a:ea typeface="Arial Unicode MS"/>
+                <a:cs typeface="Arial Unicode MS"/>
+              </a:rPr>
+              <a:t>——底下的 </a:t>
+            </a:r>
+            <a:r>
+              <a:rPr sz="800" b="1" lang="zh-TW" dirty="0">
+                <a:solidFill>
+                  <a:srgbClr val="000000"/>
+                </a:solidFill>
+                <a:latin typeface="Arial Unicode MS"/>
+                <a:ea typeface="Arial Unicode MS"/>
+                <a:cs typeface="Arial Unicode MS"/>
+              </a:rPr>
+              <a:t>Beam angles</a:t>
+            </a:r>
+            <a:r>
+              <a:rPr sz="800" lang="zh-TW" dirty="0">
+                <a:solidFill>
+                  <a:srgbClr val="000000"/>
+                </a:solidFill>
+                <a:latin typeface="Arial Unicode MS"/>
+                <a:ea typeface="Arial Unicode MS"/>
+                <a:cs typeface="Arial Unicode MS"/>
+              </a:rPr>
+              <a:t> 是每條線束實際的垂直角度（出廠量過，不是真的平均分布），</a:t>
+            </a:r>
+            <a:r>
+              <a:rPr sz="800" b="1" lang="zh-TW" dirty="0">
+                <a:solidFill>
+                  <a:srgbClr val="000000"/>
+                </a:solidFill>
+                <a:latin typeface="Arial Unicode MS"/>
+                <a:ea typeface="Arial Unicode MS"/>
+                <a:cs typeface="Arial Unicode MS"/>
+              </a:rPr>
+              <a:t>IMU pose correction matrix</a:t>
+            </a:r>
+            <a:r>
+              <a:rPr sz="800" lang="zh-TW" dirty="0">
+                <a:solidFill>
+                  <a:srgbClr val="000000"/>
+                </a:solidFill>
+                <a:latin typeface="Arial Unicode MS"/>
+                <a:ea typeface="Arial Unicode MS"/>
+                <a:cs typeface="Arial Unicode MS"/>
+              </a:rPr>
+              <a:t> 是機內那顆慣性感測器和光達本體的關係，等於原廠標好的</a:t>
+            </a:r>
+            <a:r>
+              <a:rPr sz="800" b="1" lang="zh-TW" dirty="0">
+                <a:solidFill>
+                  <a:srgbClr val="000000"/>
+                </a:solidFill>
+                <a:latin typeface="Arial Unicode MS"/>
+                <a:ea typeface="Arial Unicode MS"/>
+                <a:cs typeface="Arial Unicode MS"/>
+              </a:rPr>
+              <a:t>外參</a:t>
+            </a:r>
+            <a:r>
+              <a:rPr sz="800" lang="zh-TW" dirty="0">
+                <a:solidFill>
+                  <a:srgbClr val="000000"/>
+                </a:solidFill>
+                <a:latin typeface="Arial Unicode MS"/>
+                <a:ea typeface="Arial Unicode MS"/>
+                <a:cs typeface="Arial Unicode MS"/>
+              </a:rPr>
+              <a:t>。</a:t>
+            </a:r>
+            <a:r>
+              <a:rPr sz="800" b="1" lang="zh-TW" dirty="0">
+                <a:solidFill>
+                  <a:srgbClr val="000000"/>
+                </a:solidFill>
+                <a:latin typeface="Arial Unicode MS"/>
+                <a:ea typeface="Arial Unicode MS"/>
+                <a:cs typeface="Arial Unicode MS"/>
+              </a:rPr>
+              <a:t>Return ordering</a:t>
+            </a:r>
+            <a:r>
+              <a:rPr sz="800" lang="zh-TW" dirty="0">
+                <a:solidFill>
+                  <a:srgbClr val="000000"/>
+                </a:solidFill>
+                <a:latin typeface="Arial Unicode MS"/>
+                <a:ea typeface="Arial Unicode MS"/>
+                <a:cs typeface="Arial Unicode MS"/>
+              </a:rPr>
+              <a:t> 就是第十一張的兩次回波，可以選先給最強、最遠還是最近。</a:t>
+            </a:r>
+            <a:r>
+              <a:rPr sz="800" b="1" lang="zh-TW" dirty="0">
+                <a:solidFill>
+                  <a:srgbClr val="000000"/>
+                </a:solidFill>
+                <a:latin typeface="Arial Unicode MS"/>
+                <a:ea typeface="Arial Unicode MS"/>
+                <a:cs typeface="Arial Unicode MS"/>
+              </a:rPr>
+              <a:t>Minimum range</a:t>
+            </a:r>
+            <a:r>
+              <a:rPr sz="800" lang="zh-TW" dirty="0">
+                <a:solidFill>
+                  <a:srgbClr val="000000"/>
+                </a:solidFill>
+                <a:latin typeface="Arial Unicode MS"/>
+                <a:ea typeface="Arial Unicode MS"/>
+                <a:cs typeface="Arial Unicode MS"/>
+              </a:rPr>
+              <a:t> 設 0、30 或 50 公分，比這個近的不回報。</a:t>
+            </a:r>
+            <a:r>
+              <a:rPr sz="800" b="1" lang="zh-TW" dirty="0">
+                <a:solidFill>
+                  <a:srgbClr val="000000"/>
+                </a:solidFill>
+                <a:latin typeface="Arial Unicode MS"/>
+                <a:ea typeface="Arial Unicode MS"/>
+                <a:cs typeface="Arial Unicode MS"/>
+              </a:rPr>
+              <a:t>Azimuth masking</a:t>
+            </a:r>
+            <a:r>
+              <a:rPr sz="800" lang="zh-TW" dirty="0">
+                <a:solidFill>
+                  <a:srgbClr val="000000"/>
+                </a:solidFill>
+                <a:latin typeface="Arial Unicode MS"/>
+                <a:ea typeface="Arial Unicode MS"/>
+                <a:cs typeface="Arial Unicode MS"/>
+              </a:rPr>
+              <a:t> 把不要的那一段角度關掉——這一行和第一行是同一套東西，都在設「這一圈從哪裡開始、到哪裡結束」。</a:t>
+            </a:r>
+            <a:r>
+              <a:rPr sz="800" b="1" lang="zh-TW" dirty="0">
+                <a:solidFill>
+                  <a:srgbClr val="000000"/>
+                </a:solidFill>
+                <a:latin typeface="Arial Unicode MS"/>
+                <a:ea typeface="Arial Unicode MS"/>
+                <a:cs typeface="Arial Unicode MS"/>
+              </a:rPr>
+              <a:t>Low-power standby mode</a:t>
+            </a:r>
+            <a:r>
+              <a:rPr sz="800" lang="zh-TW" dirty="0">
+                <a:solidFill>
+                  <a:srgbClr val="000000"/>
+                </a:solidFill>
+                <a:latin typeface="Arial Unicode MS"/>
+                <a:ea typeface="Arial Unicode MS"/>
+                <a:cs typeface="Arial Unicode MS"/>
+              </a:rPr>
+              <a:t> 停車省電。第一節第十二張我說過「可設定」是模式不是數字——</a:t>
+            </a:r>
+            <a:r>
+              <a:rPr sz="800" b="1" lang="zh-TW" dirty="0">
+                <a:solidFill>
+                  <a:srgbClr val="000000"/>
+                </a:solidFill>
+                <a:latin typeface="Arial Unicode MS"/>
+                <a:ea typeface="Arial Unicode MS"/>
+                <a:cs typeface="Arial Unicode MS"/>
+              </a:rPr>
+              <a:t>這一整格就是最好的例子。</a:t>
+            </a:r>
+            <a:r>
+              <a:rPr sz="800" lang="zh-TW" dirty="0">
+                <a:solidFill>
+                  <a:srgbClr val="000000"/>
+                </a:solidFill>
+                <a:latin typeface="Arial Unicode MS"/>
+                <a:ea typeface="Arial Unicode MS"/>
+                <a:cs typeface="Arial Unicode MS"/>
+              </a:rPr>
+              <a:t>
+</a:t>
+            </a:r>
+          </a:p>
+          <a:p>
+            <a:pPr algn="l">
+              <a:spcBef>
+                <a:spcPts val="0"/>
+              </a:spcBef>
+              <a:spcAft>
+                <a:spcPts val="133"/>
+              </a:spcAft>
+            </a:pPr>
+            <a:r>
+              <a:rPr sz="800" lang="zh-TW" dirty="0">
+                <a:solidFill>
+                  <a:srgbClr val="000000"/>
+                </a:solidFill>
+                <a:latin typeface="Arial Unicode MS"/>
+                <a:ea typeface="Arial Unicode MS"/>
+                <a:cs typeface="Arial Unicode MS"/>
+              </a:rPr>
+              <a:t>所以請各位記住：</a:t>
+            </a:r>
+            <a:r>
+              <a:rPr sz="800" b="1" lang="zh-TW" dirty="0">
+                <a:solidFill>
+                  <a:srgbClr val="000000"/>
+                </a:solidFill>
+                <a:latin typeface="Arial Unicode MS"/>
+                <a:ea typeface="Arial Unicode MS"/>
+                <a:cs typeface="Arial Unicode MS"/>
+              </a:rPr>
+              <a:t>兩顆感測器各自都是好的，不代表合起來是對的。</a:t>
+            </a:r>
+            <a:r>
+              <a:rPr sz="800" lang="zh-TW" dirty="0">
+                <a:solidFill>
+                  <a:srgbClr val="000000"/>
+                </a:solidFill>
+                <a:latin typeface="Arial Unicode MS"/>
+                <a:ea typeface="Arial Unicode MS"/>
+                <a:cs typeface="Arial Unicode MS"/>
+              </a:rPr>
+              <a:t>中間還有標定和同步這兩關，而它們在規格表上常常只有一兩行、甚至完全沒有，可是實際做系統的時候吃掉的時間比選型還多。
+</a:t>
+            </a:r>
+          </a:p>
+          <a:p>
+            <a:pPr algn="l">
+              <a:spcBef>
+                <a:spcPts val="0"/>
+              </a:spcBef>
+              <a:spcAft>
+                <a:spcPts val="133"/>
+              </a:spcAft>
+            </a:pPr>
+            <a:r>
+              <a:rPr sz="800" lang="zh-TW" dirty="0">
+                <a:solidFill>
+                  <a:srgbClr val="000000"/>
+                </a:solidFill>
+                <a:latin typeface="Arial Unicode MS"/>
+                <a:ea typeface="Arial Unicode MS"/>
+                <a:cs typeface="Arial Unicode MS"/>
+              </a:rPr>
+              <a:t>下一節我們回到工具上，把今天和上一節講的東西，全部用在一件事上：</a:t>
+            </a:r>
+            <a:r>
+              <a:rPr sz="800" b="1" lang="zh-TW" dirty="0">
+                <a:solidFill>
+                  <a:srgbClr val="000000"/>
+                </a:solidFill>
+                <a:latin typeface="Arial Unicode MS"/>
+                <a:ea typeface="Arial Unicode MS"/>
+                <a:cs typeface="Arial Unicode MS"/>
+              </a:rPr>
+              <a:t>幫一個指定的情境選一顆感測器</a:t>
+            </a:r>
+            <a:r>
+              <a:rPr sz="800" lang="zh-TW" dirty="0">
+                <a:solidFill>
+                  <a:srgbClr val="000000"/>
+                </a:solidFill>
+                <a:latin typeface="Arial Unicode MS"/>
+                <a:ea typeface="Arial Unicode MS"/>
+                <a:cs typeface="Arial Unicode MS"/>
+              </a:rPr>
+              <a:t>，而且要說得出是卡在哪一行。</a:t>
             </a:r>
           </a:p>
         </p:txBody>
@@ -7289,11 +7598,11 @@
                 <a:spcPts val="0"/>
               </a:spcBef>
               <a:spcAft>
-                <a:spcPts val="200"/>
-              </a:spcAft>
-            </a:pPr>
-            <a:r>
-              <a:rPr sz="1200" b="1" lang="zh-TW" dirty="0">
+                <a:spcPts val="167"/>
+              </a:spcAft>
+            </a:pPr>
+            <a:r>
+              <a:rPr sz="1000" b="1" lang="zh-TW" dirty="0">
                 <a:solidFill>
                   <a:srgbClr val="000000"/>
                 </a:solidFill>
@@ -7304,7 +7613,7 @@
               <a:t>▍這一張要做什麼</a:t>
             </a:r>
             <a:r>
-              <a:rPr sz="1200" lang="zh-TW" dirty="0">
+              <a:rPr sz="1000" lang="zh-TW" dirty="0">
                 <a:solidFill>
                   <a:srgbClr val="000000"/>
                 </a:solidFill>
@@ -7322,19 +7631,19 @@
                 <a:spcPts val="0"/>
               </a:spcBef>
               <a:spcAft>
-                <a:spcPts val="200"/>
-              </a:spcAft>
-            </a:pPr>
-            <a:r>
-              <a:rPr sz="1200" lang="zh-TW" dirty="0">
-                <a:solidFill>
-                  <a:srgbClr val="000000"/>
-                </a:solidFill>
-                <a:latin typeface="Arial Unicode MS"/>
-                <a:ea typeface="Arial Unicode MS"/>
-                <a:cs typeface="Arial Unicode MS"/>
-              </a:rPr>
-              <a:t>附錄：光達那份規格書的完整原頁（規格那三頁），備查用。
+                <a:spcPts val="167"/>
+              </a:spcAft>
+            </a:pPr>
+            <a:r>
+              <a:rPr sz="1000" lang="zh-TW" dirty="0">
+                <a:solidFill>
+                  <a:srgbClr val="000000"/>
+                </a:solidFill>
+                <a:latin typeface="Arial Unicode MS"/>
+                <a:ea typeface="Arial Unicode MS"/>
+                <a:cs typeface="Arial Unicode MS"/>
+              </a:rPr>
+              <a:t>第二節小結，三句話帶上機。
 </a:t>
             </a:r>
           </a:p>
@@ -7344,11 +7653,11 @@
                 <a:spcPts val="0"/>
               </a:spcBef>
               <a:spcAft>
-                <a:spcPts val="200"/>
-              </a:spcAft>
-            </a:pPr>
-            <a:r>
-              <a:rPr sz="1200" b="1" lang="zh-TW" dirty="0">
+                <a:spcPts val="167"/>
+              </a:spcAft>
+            </a:pPr>
+            <a:r>
+              <a:rPr sz="1000" b="1" lang="zh-TW" dirty="0">
                 <a:solidFill>
                   <a:srgbClr val="000000"/>
                 </a:solidFill>
@@ -7359,7 +7668,7 @@
               <a:t>▍畫面上圈這裡</a:t>
             </a:r>
             <a:r>
-              <a:rPr sz="1200" lang="zh-TW" dirty="0">
+              <a:rPr sz="1000" lang="zh-TW" dirty="0">
                 <a:solidFill>
                   <a:srgbClr val="000000"/>
                 </a:solidFill>
@@ -7377,19 +7686,19 @@
                 <a:spcPts val="0"/>
               </a:spcBef>
               <a:spcAft>
-                <a:spcPts val="200"/>
-              </a:spcAft>
-            </a:pPr>
-            <a:r>
-              <a:rPr sz="1200" lang="zh-TW" dirty="0">
-                <a:solidFill>
-                  <a:srgbClr val="000000"/>
-                </a:solidFill>
-                <a:latin typeface="Arial Unicode MS"/>
-                <a:ea typeface="Arial Unicode MS"/>
-                <a:cs typeface="Arial Unicode MS"/>
-              </a:rPr>
-              <a:t>上課不唸。學生問「你圈的那一行在哪」的時候翻到這裡，或放映時放大看。
+                <a:spcPts val="167"/>
+              </a:spcAft>
+            </a:pPr>
+            <a:r>
+              <a:rPr sz="1000" lang="zh-TW" dirty="0">
+                <a:solidFill>
+                  <a:srgbClr val="000000"/>
+                </a:solidFill>
+                <a:latin typeface="Arial Unicode MS"/>
+                <a:ea typeface="Arial Unicode MS"/>
+                <a:cs typeface="Arial Unicode MS"/>
+              </a:rPr>
+              <a:t>三條一條一條圈。第三條「合起來不一定對」是明天做專題時最常忘的。
 </a:t>
             </a:r>
           </a:p>
@@ -7399,11 +7708,11 @@
                 <a:spcPts val="0"/>
               </a:spcBef>
               <a:spcAft>
-                <a:spcPts val="200"/>
-              </a:spcAft>
-            </a:pPr>
-            <a:r>
-              <a:rPr sz="1200" b="1" lang="zh-TW" dirty="0">
+                <a:spcPts val="167"/>
+              </a:spcAft>
+            </a:pPr>
+            <a:r>
+              <a:rPr sz="1000" b="1" lang="zh-TW" dirty="0">
                 <a:solidFill>
                   <a:srgbClr val="000000"/>
                 </a:solidFill>
@@ -7414,7 +7723,7 @@
               <a:t>▍以下照著唸</a:t>
             </a:r>
             <a:r>
-              <a:rPr sz="1200" lang="zh-TW" dirty="0">
+              <a:rPr sz="1000" lang="zh-TW" dirty="0">
                 <a:solidFill>
                   <a:srgbClr val="000000"/>
                 </a:solidFill>
@@ -7432,19 +7741,19 @@
                 <a:spcPts val="0"/>
               </a:spcBef>
               <a:spcAft>
-                <a:spcPts val="200"/>
-              </a:spcAft>
-            </a:pPr>
-            <a:r>
-              <a:rPr sz="1200" lang="zh-TW" dirty="0">
-                <a:solidFill>
-                  <a:srgbClr val="000000"/>
-                </a:solidFill>
-                <a:latin typeface="Arial Unicode MS"/>
-                <a:ea typeface="Arial Unicode MS"/>
-                <a:cs typeface="Arial Unicode MS"/>
-              </a:rPr>
-              <a:t>這一張不唸，是附錄。
+                <a:spcPts val="167"/>
+              </a:spcAft>
+            </a:pPr>
+            <a:r>
+              <a:rPr sz="1000" lang="zh-TW" dirty="0">
+                <a:solidFill>
+                  <a:srgbClr val="000000"/>
+                </a:solidFill>
+                <a:latin typeface="Arial Unicode MS"/>
+                <a:ea typeface="Arial Unicode MS"/>
+                <a:cs typeface="Arial Unicode MS"/>
+              </a:rPr>
+              <a:t>第二節收起來，三句話。
 </a:t>
             </a:r>
           </a:p>
@@ -7454,19 +7763,30 @@
                 <a:spcPts val="0"/>
               </a:spcBef>
               <a:spcAft>
-                <a:spcPts val="200"/>
-              </a:spcAft>
-            </a:pPr>
-            <a:r>
-              <a:rPr sz="1200" lang="zh-TW" dirty="0">
-                <a:solidFill>
-                  <a:srgbClr val="000000"/>
-                </a:solidFill>
-                <a:latin typeface="Arial Unicode MS"/>
-                <a:ea typeface="Arial Unicode MS"/>
-                <a:cs typeface="Arial Unicode MS"/>
-              </a:rPr>
-              <a:t>今天圈過的光達那幾行，全部都在這三頁上：PDF 第 1 頁是 HIGHLIGHTS 和 OPTICAL PERFORMANCE——測距、視野、通道數、每圈點數都在那裡；第 2 頁有 LASER 那一段，Class 1、865 奈米、光束寬度和發散角；第 3 頁有 Additional Programmability，multi-sensor phase lock 那一行。
+                <a:spcPts val="167"/>
+              </a:spcAft>
+            </a:pPr>
+            <a:r>
+              <a:rPr sz="1000" b="1" lang="zh-TW" dirty="0">
+                <a:solidFill>
+                  <a:srgbClr val="000000"/>
+                </a:solidFill>
+                <a:latin typeface="Arial Unicode MS"/>
+                <a:ea typeface="Arial Unicode MS"/>
+                <a:cs typeface="Arial Unicode MS"/>
+              </a:rPr>
+              <a:t>第一句，相機的三件事。</a:t>
+            </a:r>
+            <a:r>
+              <a:rPr sz="1000" lang="zh-TW" dirty="0">
+                <a:solidFill>
+                  <a:srgbClr val="000000"/>
+                </a:solidFill>
+                <a:latin typeface="Arial Unicode MS"/>
+                <a:ea typeface="Arial Unicode MS"/>
+                <a:cs typeface="Arial Unicode MS"/>
+              </a:rPr>
+              <a:t>捲簾快門會把移動中的東西扭掉；動態範圍不夠，隧道裡面黑掉或者外面白掉；沒有 LED 閃爍抑制，紅燈可能被拍成沒亮。
 </a:t>
             </a:r>
           </a:p>
@@ -7476,19 +7796,30 @@
                 <a:spcPts val="0"/>
               </a:spcBef>
               <a:spcAft>
-                <a:spcPts val="200"/>
-              </a:spcAft>
-            </a:pPr>
-            <a:r>
-              <a:rPr sz="1200" lang="zh-TW" dirty="0">
-                <a:solidFill>
-                  <a:srgbClr val="000000"/>
-                </a:solidFill>
-                <a:latin typeface="Arial Unicode MS"/>
-                <a:ea typeface="Arial Unicode MS"/>
-                <a:cs typeface="Arial Unicode MS"/>
-              </a:rPr>
-              <a:t>原始 PDF 總共八頁，後面五頁是外觀尺寸、配件和接線圖，和今天要讀的規格沒有關係，所以沒有放進來。
+                <a:spcPts val="167"/>
+              </a:spcAft>
+            </a:pPr>
+            <a:r>
+              <a:rPr sz="1000" b="1" lang="zh-TW" dirty="0">
+                <a:solidFill>
+                  <a:srgbClr val="000000"/>
+                </a:solidFill>
+                <a:latin typeface="Arial Unicode MS"/>
+                <a:ea typeface="Arial Unicode MS"/>
+                <a:cs typeface="Arial Unicode MS"/>
+              </a:rPr>
+              <a:t>第二句，光達的三行。</a:t>
+            </a:r>
+            <a:r>
+              <a:rPr sz="1000" lang="zh-TW" dirty="0">
+                <a:solidFill>
+                  <a:srgbClr val="000000"/>
+                </a:solidFill>
+                <a:latin typeface="Arial Unicode MS"/>
+                <a:ea typeface="Arial Unicode MS"/>
+                <a:cs typeface="Arial Unicode MS"/>
+              </a:rPr>
+              <a:t>波長決定法規允許你打多強，也就決定看多遠；Class 1 對眼睛安全是門檻，不是加分；多次回波決定它在雨和灰塵裡好不好用。
 </a:t>
             </a:r>
           </a:p>
@@ -7498,19 +7829,118 @@
                 <a:spcPts val="0"/>
               </a:spcBef>
               <a:spcAft>
-                <a:spcPts val="200"/>
-              </a:spcAft>
-            </a:pPr>
-            <a:r>
-              <a:rPr sz="1200" lang="zh-TW" dirty="0">
-                <a:solidFill>
-                  <a:srgbClr val="000000"/>
-                </a:solidFill>
-                <a:latin typeface="Arial Unicode MS"/>
-                <a:ea typeface="Arial Unicode MS"/>
-                <a:cs typeface="Arial Unicode MS"/>
-              </a:rPr>
-              <a:t>放映的時候可以放大看；要看完整的八頁，到 Ouster 官網下載。</a:t>
+                <a:spcPts val="167"/>
+              </a:spcAft>
+            </a:pPr>
+            <a:r>
+              <a:rPr sz="1000" b="1" lang="zh-TW" dirty="0">
+                <a:solidFill>
+                  <a:srgbClr val="000000"/>
+                </a:solidFill>
+                <a:latin typeface="Arial Unicode MS"/>
+                <a:ea typeface="Arial Unicode MS"/>
+                <a:cs typeface="Arial Unicode MS"/>
+              </a:rPr>
+              <a:t>第三句，兩顆好的感測器合起來不一定對。</a:t>
+            </a:r>
+            <a:r>
+              <a:rPr sz="1000" lang="zh-TW" dirty="0">
+                <a:solidFill>
+                  <a:srgbClr val="000000"/>
+                </a:solidFill>
+                <a:latin typeface="Arial Unicode MS"/>
+                <a:ea typeface="Arial Unicode MS"/>
+                <a:cs typeface="Arial Unicode MS"/>
+              </a:rPr>
+              <a:t>空間要標定，差一度在五十公尺外就差快一公尺；時間要同步，差五十毫秒在時速四十下就差半公尺以上。
+</a:t>
+            </a:r>
+          </a:p>
+          <a:p>
+            <a:pPr algn="l">
+              <a:spcBef>
+                <a:spcPts val="0"/>
+              </a:spcBef>
+              <a:spcAft>
+                <a:spcPts val="167"/>
+              </a:spcAft>
+            </a:pPr>
+            <a:r>
+              <a:rPr sz="1000" lang="zh-TW" dirty="0">
+                <a:solidFill>
+                  <a:srgbClr val="000000"/>
+                </a:solidFill>
+                <a:latin typeface="Arial Unicode MS"/>
+                <a:ea typeface="Arial Unicode MS"/>
+                <a:cs typeface="Arial Unicode MS"/>
+              </a:rPr>
+              <a:t>下一節整節都在電腦上。各位要做的事是：拿四個型號、三個情境，自己判斷哪一顆能用、哪一顆不行，而且要講得出</a:t>
+            </a:r>
+            <a:r>
+              <a:rPr sz="1000" b="1" lang="zh-TW" dirty="0">
+                <a:solidFill>
+                  <a:srgbClr val="000000"/>
+                </a:solidFill>
+                <a:latin typeface="Arial Unicode MS"/>
+                <a:ea typeface="Arial Unicode MS"/>
+                <a:cs typeface="Arial Unicode MS"/>
+              </a:rPr>
+              <a:t>卡在哪一行</a:t>
+            </a:r>
+            <a:r>
+              <a:rPr sz="1000" lang="zh-TW" dirty="0">
+                <a:solidFill>
+                  <a:srgbClr val="000000"/>
+                </a:solidFill>
+                <a:latin typeface="Arial Unicode MS"/>
+                <a:ea typeface="Arial Unicode MS"/>
+                <a:cs typeface="Arial Unicode MS"/>
+              </a:rPr>
+              <a:t>。
+</a:t>
+            </a:r>
+          </a:p>
+          <a:p>
+            <a:pPr algn="l">
+              <a:spcBef>
+                <a:spcPts val="0"/>
+              </a:spcBef>
+              <a:spcAft>
+                <a:spcPts val="167"/>
+              </a:spcAft>
+            </a:pPr>
+            <a:r>
+              <a:rPr sz="1000" lang="zh-TW" dirty="0">
+                <a:solidFill>
+                  <a:srgbClr val="000000"/>
+                </a:solidFill>
+                <a:latin typeface="Arial Unicode MS"/>
+                <a:ea typeface="Arial Unicode MS"/>
+                <a:cs typeface="Arial Unicode MS"/>
+              </a:rPr>
+              <a:t>這份東西第三節結束前要交，是個人作業。
+</a:t>
+            </a:r>
+          </a:p>
+          <a:p>
+            <a:pPr algn="l">
+              <a:spcBef>
+                <a:spcPts val="0"/>
+              </a:spcBef>
+              <a:spcAft>
+                <a:spcPts val="167"/>
+              </a:spcAft>
+            </a:pPr>
+            <a:r>
+              <a:rPr sz="1000" lang="zh-TW" dirty="0">
+                <a:solidFill>
+                  <a:srgbClr val="000000"/>
+                </a:solidFill>
+                <a:latin typeface="Arial Unicode MS"/>
+                <a:ea typeface="Arial Unicode MS"/>
+                <a:cs typeface="Arial Unicode MS"/>
+              </a:rPr>
+              <a:t>休息十分鐘。</a:t>
             </a:r>
           </a:p>
         </p:txBody>
@@ -8016,7 +8446,7 @@
                 <a:ea typeface="Arial Unicode MS"/>
                 <a:cs typeface="Arial Unicode MS"/>
               </a:rPr>
-              <a:t>附錄：AT128P 使用手冊的規格那兩頁，備查用。
+              <a:t>附錄：光達那份規格書的完整原頁（規格那三頁），備查用。
 </a:t>
             </a:r>
           </a:p>
@@ -8071,7 +8501,7 @@
                 <a:ea typeface="Arial Unicode MS"/>
                 <a:cs typeface="Arial Unicode MS"/>
               </a:rPr>
-              <a:t>上課不唸。第 1 節第 5 張圈的 Far-field 與 (10 Hz)，原文就在左邊那一頁。
+              <a:t>上課不唸。學生問「你圈的那一行在哪」的時候翻到這裡，或放映時放大看。
 </a:t>
             </a:r>
           </a:p>
@@ -8126,7 +8556,7 @@
                 <a:ea typeface="Arial Unicode MS"/>
                 <a:cs typeface="Arial Unicode MS"/>
               </a:rPr>
-              <a:t>這一張也不唸，是附錄。
+              <a:t>這一張不唸，是附錄。
 </a:t>
             </a:r>
           </a:p>
@@ -8148,7 +8578,7 @@
                 <a:ea typeface="Arial Unicode MS"/>
                 <a:cs typeface="Arial Unicode MS"/>
               </a:rPr>
-              <a:t>左邊那一頁是 §1.5 Specifications，第 1 節第 5 張圈過的東西都在上面：Number of channels 128、Horizontal FOV 120 度、Vertical FOV 25.4 度，還有那兩行寫著 Far-field 和 Near-field 的解析度。
+              <a:t>今天圈過的光達那幾行，全部都在這三頁上：PDF 第 1 頁是 HIGHLIGHTS 和 OPTICAL PERFORMANCE——測距、視野、通道數、每圈點數都在那裡；第 2 頁有 LASER 那一段，Class 1、865 奈米、光束寬度和發散角；第 3 頁有 Additional Programmability，multi-sensor phase lock 那一行。
 </a:t>
             </a:r>
           </a:p>
@@ -8170,7 +8600,7 @@
                 <a:ea typeface="Arial Unicode MS"/>
                 <a:cs typeface="Arial Unicode MS"/>
               </a:rPr>
-              <a:t>右邊那一頁是同一節的註解。註②就是遠近場的定義——遠場超過 7.2 公尺、近場 0.5 到 7.2 公尺；註①說量測範圍是由分配給每一條通道的飛行時間決定的；註⑥還把每秒點數怎麼算整個列出來，1200 乘 128 乘 10 等於一百五十三萬六千。
+              <a:t>原始 PDF 總共八頁，後面五頁是外觀尺寸、配件和接線圖，和今天要讀的規格沒有關係，所以沒有放進來。
 </a:t>
             </a:r>
           </a:p>
@@ -8192,7 +8622,7 @@
                 <a:ea typeface="Arial Unicode MS"/>
                 <a:cs typeface="Arial Unicode MS"/>
               </a:rPr>
-              <a:t>各位如果對「那個 0.1 度為什麼有兩個條件」還有疑問，答案就在右邊那一頁。</a:t>
+              <a:t>放映的時候可以放大看；要看完整的八頁，到 Ouster 官網下載。</a:t>
             </a:r>
           </a:p>
         </p:txBody>
@@ -8346,7 +8776,7 @@
                 <a:ea typeface="Arial Unicode MS"/>
                 <a:cs typeface="Arial Unicode MS"/>
               </a:rPr>
-              <a:t>附錄：相機那份規格書的完整原頁，備查用。
+              <a:t>附錄：AT128P 使用手冊的規格那兩頁，備查用。
 </a:t>
             </a:r>
           </a:p>
@@ -8401,7 +8831,7 @@
                 <a:ea typeface="Arial Unicode MS"/>
                 <a:cs typeface="Arial Unicode MS"/>
               </a:rPr>
-              <a:t>上課不唸。學生問「你圈的那一行在哪」的時候翻到這裡，或放映時放大看。
+              <a:t>上課不唸。第 1 節第 5 張圈的 Far-field 與 (10 Hz)，原文就在左邊那一頁。
 </a:t>
             </a:r>
           </a:p>
@@ -8478,19 +8908,19 @@
                 <a:ea typeface="Arial Unicode MS"/>
                 <a:cs typeface="Arial Unicode MS"/>
               </a:rPr>
-              <a:t>今天圈過的那幾行——有效像素、像素尺寸、動態範圍、LED 閃爍抑制——全部都在左邊那一頁的 Specifications 那一欄上。右邊第二頁是封裝尺寸，整頁寫 TBD，那是因為這份是 </a:t>
-            </a:r>
-            <a:r>
-              <a:rPr sz="1200" b="1" lang="zh-TW" dirty="0">
-                <a:solidFill>
-                  <a:srgbClr val="000000"/>
-                </a:solidFill>
-                <a:latin typeface="Arial Unicode MS"/>
-                <a:ea typeface="Arial Unicode MS"/>
-                <a:cs typeface="Arial Unicode MS"/>
-              </a:rPr>
-              <a:t>Product Preview</a:t>
-            </a:r>
+              <a:t>左邊那一頁是 §1.5 Specifications，第 1 節第 5 張圈過的東西都在上面：Number of channels 128、Horizontal FOV 120 度、Vertical FOV 25.4 度，還有那兩行寫著 Far-field 和 Near-field 的解析度。
+</a:t>
+            </a:r>
+          </a:p>
+          <a:p>
+            <a:pPr algn="l">
+              <a:spcBef>
+                <a:spcPts val="0"/>
+              </a:spcBef>
+              <a:spcAft>
+                <a:spcPts val="200"/>
+              </a:spcAft>
+            </a:pPr>
             <a:r>
               <a:rPr sz="1200" lang="zh-TW" dirty="0">
                 <a:solidFill>
@@ -8500,7 +8930,7 @@
                 <a:ea typeface="Arial Unicode MS"/>
                 <a:cs typeface="Arial Unicode MS"/>
               </a:rPr>
-              <a:t>，還不是正式規格書。
+              <a:t>右邊那一頁是同一節的註解。註②就是遠近場的定義——遠場超過 7.2 公尺、近場 0.5 到 7.2 公尺；註①說量測範圍是由分配給每一條通道的飛行時間決定的；註⑥還把每秒點數怎麼算整個列出來，1200 乘 128 乘 10 等於一百五十三萬六千。
 </a:t>
             </a:r>
           </a:p>
@@ -8522,51 +8952,7 @@
                 <a:ea typeface="Arial Unicode MS"/>
                 <a:cs typeface="Arial Unicode MS"/>
               </a:rPr>
-              <a:t>各位記得第 1 節第 2 張說過的：</a:t>
-            </a:r>
-            <a:r>
-              <a:rPr sz="1200" b="1" lang="zh-TW" dirty="0">
-                <a:solidFill>
-                  <a:srgbClr val="000000"/>
-                </a:solidFill>
-                <a:latin typeface="Arial Unicode MS"/>
-                <a:ea typeface="Arial Unicode MS"/>
-                <a:cs typeface="Arial Unicode MS"/>
-              </a:rPr>
-              <a:t>快門方式這一行，這兩頁上都沒有。</a:t>
-            </a:r>
-            <a:r>
-              <a:rPr sz="1200" lang="zh-TW" dirty="0">
-                <a:solidFill>
-                  <a:srgbClr val="000000"/>
-                </a:solidFill>
-                <a:latin typeface="Arial Unicode MS"/>
-                <a:ea typeface="Arial Unicode MS"/>
-                <a:cs typeface="Arial Unicode MS"/>
-              </a:rPr>
-              <a:t>現在可以自己確認一次。要看快門方式，得去 onsemi 的產品頁。
-</a:t>
-            </a:r>
-          </a:p>
-          <a:p>
-            <a:pPr algn="l">
-              <a:spcBef>
-                <a:spcPts val="0"/>
-              </a:spcBef>
-              <a:spcAft>
-                <a:spcPts val="200"/>
-              </a:spcAft>
-            </a:pPr>
-            <a:r>
-              <a:rPr sz="1200" lang="zh-TW" dirty="0">
-                <a:solidFill>
-                  <a:srgbClr val="000000"/>
-                </a:solidFill>
-                <a:latin typeface="Arial Unicode MS"/>
-                <a:ea typeface="Arial Unicode MS"/>
-                <a:cs typeface="Arial Unicode MS"/>
-              </a:rPr>
-              <a:t>放映的時候可以放大看；發下去的 PDF 也印得出來。</a:t>
+              <a:t>各位如果對「那個 0.1 度為什麼有兩個條件」還有疑問，答案就在右邊那一頁。</a:t>
             </a:r>
           </a:p>
         </p:txBody>
@@ -8609,6 +8995,380 @@
                 <a:cs typeface="Arial Unicode MS"/>
               </a:rPr>
               <a:t>21</a:t>
+            </a:r>
+          </a:p>
+        </p:txBody>
+      </p:sp>
+    </p:spTree>
+  </p:cSld>
+  <p:clrMapOvr>
+    <a:masterClrMapping/>
+  </p:clrMapOvr>
+</p:notes>
+</file>
+
+<file path=ppt/notesSlides/notesSlide22.xml><?xml version="1.0" encoding="utf-8"?>
+<p:notes xmlns:a="http://schemas.openxmlformats.org/drawingml/2006/main" xmlns:p="http://schemas.openxmlformats.org/presentationml/2006/main">
+  <p:cSld>
+    <p:spTree>
+      <p:nvGrpSpPr>
+        <p:cNvPr id="1" name=""/>
+        <p:cNvGrpSpPr/>
+        <p:nvPr/>
+      </p:nvGrpSpPr>
+      <p:grpSpPr>
+        <a:xfrm/>
+      </p:grpSpPr>
+      <p:sp>
+        <p:nvSpPr>
+          <p:cNvPr id="2" name="Slide Image Placeholder 1"/>
+          <p:cNvSpPr>
+            <a:spLocks noGrp="1"/>
+          </p:cNvSpPr>
+          <p:nvPr>
+            <p:ph type="sldImg" idx="2"/>
+          </p:nvPr>
+        </p:nvSpPr>
+        <p:spPr>
+          <a:xfrm>
+            <a:off x="540000" y="540000"/>
+            <a:ext cx="6480000" cy="3645000"/>
+          </a:xfrm>
+        </p:spPr>
+      </p:sp>
+      <p:sp>
+        <p:nvSpPr>
+          <p:cNvPr id="3" name="Notes Placeholder 2"/>
+          <p:cNvSpPr>
+            <a:spLocks noGrp="1"/>
+          </p:cNvSpPr>
+          <p:nvPr>
+            <p:ph type="body" idx="3"/>
+          </p:nvPr>
+        </p:nvSpPr>
+        <p:spPr>
+          <a:xfrm>
+            <a:off x="540000" y="4440000"/>
+            <a:ext cx="6480000" cy="5500000"/>
+          </a:xfrm>
+        </p:spPr>
+        <p:txBody>
+          <a:bodyPr vert="horz" wrap="square" anchor="t" lIns="91440" rIns="91440" tIns="45720" bIns="45720"/>
+          <a:lstStyle/>
+          <a:p>
+            <a:pPr algn="l">
+              <a:spcBef>
+                <a:spcPts val="0"/>
+              </a:spcBef>
+              <a:spcAft>
+                <a:spcPts val="200"/>
+              </a:spcAft>
+            </a:pPr>
+            <a:r>
+              <a:rPr sz="1200" b="1" lang="zh-TW" dirty="0">
+                <a:solidFill>
+                  <a:srgbClr val="000000"/>
+                </a:solidFill>
+                <a:latin typeface="Arial Unicode MS"/>
+                <a:ea typeface="Arial Unicode MS"/>
+                <a:cs typeface="Arial Unicode MS"/>
+              </a:rPr>
+              <a:t>▍這一張要做什麼</a:t>
+            </a:r>
+            <a:r>
+              <a:rPr sz="1200" lang="zh-TW" dirty="0">
+                <a:solidFill>
+                  <a:srgbClr val="000000"/>
+                </a:solidFill>
+                <a:latin typeface="Arial Unicode MS"/>
+                <a:ea typeface="Arial Unicode MS"/>
+                <a:cs typeface="Arial Unicode MS"/>
+              </a:rPr>
+              <a:t>
+</a:t>
+            </a:r>
+          </a:p>
+          <a:p>
+            <a:pPr algn="l">
+              <a:spcBef>
+                <a:spcPts val="0"/>
+              </a:spcBef>
+              <a:spcAft>
+                <a:spcPts val="200"/>
+              </a:spcAft>
+            </a:pPr>
+            <a:r>
+              <a:rPr sz="1200" lang="zh-TW" dirty="0">
+                <a:solidFill>
+                  <a:srgbClr val="000000"/>
+                </a:solidFill>
+                <a:latin typeface="Arial Unicode MS"/>
+                <a:ea typeface="Arial Unicode MS"/>
+                <a:cs typeface="Arial Unicode MS"/>
+              </a:rPr>
+              <a:t>附錄：相機那份規格書的完整原頁，備查用。
+</a:t>
+            </a:r>
+          </a:p>
+          <a:p>
+            <a:pPr algn="l">
+              <a:spcBef>
+                <a:spcPts val="0"/>
+              </a:spcBef>
+              <a:spcAft>
+                <a:spcPts val="200"/>
+              </a:spcAft>
+            </a:pPr>
+            <a:r>
+              <a:rPr sz="1200" b="1" lang="zh-TW" dirty="0">
+                <a:solidFill>
+                  <a:srgbClr val="000000"/>
+                </a:solidFill>
+                <a:latin typeface="Arial Unicode MS"/>
+                <a:ea typeface="Arial Unicode MS"/>
+                <a:cs typeface="Arial Unicode MS"/>
+              </a:rPr>
+              <a:t>▍畫面上圈這裡</a:t>
+            </a:r>
+            <a:r>
+              <a:rPr sz="1200" lang="zh-TW" dirty="0">
+                <a:solidFill>
+                  <a:srgbClr val="000000"/>
+                </a:solidFill>
+                <a:latin typeface="Arial Unicode MS"/>
+                <a:ea typeface="Arial Unicode MS"/>
+                <a:cs typeface="Arial Unicode MS"/>
+              </a:rPr>
+              <a:t>
+</a:t>
+            </a:r>
+          </a:p>
+          <a:p>
+            <a:pPr algn="l">
+              <a:spcBef>
+                <a:spcPts val="0"/>
+              </a:spcBef>
+              <a:spcAft>
+                <a:spcPts val="200"/>
+              </a:spcAft>
+            </a:pPr>
+            <a:r>
+              <a:rPr sz="1200" lang="zh-TW" dirty="0">
+                <a:solidFill>
+                  <a:srgbClr val="000000"/>
+                </a:solidFill>
+                <a:latin typeface="Arial Unicode MS"/>
+                <a:ea typeface="Arial Unicode MS"/>
+                <a:cs typeface="Arial Unicode MS"/>
+              </a:rPr>
+              <a:t>上課不唸。學生問「你圈的那一行在哪」的時候翻到這裡，或放映時放大看。
+</a:t>
+            </a:r>
+          </a:p>
+          <a:p>
+            <a:pPr algn="l">
+              <a:spcBef>
+                <a:spcPts val="0"/>
+              </a:spcBef>
+              <a:spcAft>
+                <a:spcPts val="200"/>
+              </a:spcAft>
+            </a:pPr>
+            <a:r>
+              <a:rPr sz="1200" b="1" lang="zh-TW" dirty="0">
+                <a:solidFill>
+                  <a:srgbClr val="000000"/>
+                </a:solidFill>
+                <a:latin typeface="Arial Unicode MS"/>
+                <a:ea typeface="Arial Unicode MS"/>
+                <a:cs typeface="Arial Unicode MS"/>
+              </a:rPr>
+              <a:t>▍以下照著唸</a:t>
+            </a:r>
+            <a:r>
+              <a:rPr sz="1200" lang="zh-TW" dirty="0">
+                <a:solidFill>
+                  <a:srgbClr val="000000"/>
+                </a:solidFill>
+                <a:latin typeface="Arial Unicode MS"/>
+                <a:ea typeface="Arial Unicode MS"/>
+                <a:cs typeface="Arial Unicode MS"/>
+              </a:rPr>
+              <a:t>
+</a:t>
+            </a:r>
+          </a:p>
+          <a:p>
+            <a:pPr algn="l">
+              <a:spcBef>
+                <a:spcPts val="0"/>
+              </a:spcBef>
+              <a:spcAft>
+                <a:spcPts val="200"/>
+              </a:spcAft>
+            </a:pPr>
+            <a:r>
+              <a:rPr sz="1200" lang="zh-TW" dirty="0">
+                <a:solidFill>
+                  <a:srgbClr val="000000"/>
+                </a:solidFill>
+                <a:latin typeface="Arial Unicode MS"/>
+                <a:ea typeface="Arial Unicode MS"/>
+                <a:cs typeface="Arial Unicode MS"/>
+              </a:rPr>
+              <a:t>這一張也不唸，是附錄。
+</a:t>
+            </a:r>
+          </a:p>
+          <a:p>
+            <a:pPr algn="l">
+              <a:spcBef>
+                <a:spcPts val="0"/>
+              </a:spcBef>
+              <a:spcAft>
+                <a:spcPts val="200"/>
+              </a:spcAft>
+            </a:pPr>
+            <a:r>
+              <a:rPr sz="1200" lang="zh-TW" dirty="0">
+                <a:solidFill>
+                  <a:srgbClr val="000000"/>
+                </a:solidFill>
+                <a:latin typeface="Arial Unicode MS"/>
+                <a:ea typeface="Arial Unicode MS"/>
+                <a:cs typeface="Arial Unicode MS"/>
+              </a:rPr>
+              <a:t>今天圈過的那幾行——有效像素、像素尺寸、動態範圍、LED 閃爍抑制——全部都在左邊那一頁的 Specifications 那一欄上。右邊第二頁是封裝尺寸，整頁寫 TBD，那是因為這份是 </a:t>
+            </a:r>
+            <a:r>
+              <a:rPr sz="1200" b="1" lang="zh-TW" dirty="0">
+                <a:solidFill>
+                  <a:srgbClr val="000000"/>
+                </a:solidFill>
+                <a:latin typeface="Arial Unicode MS"/>
+                <a:ea typeface="Arial Unicode MS"/>
+                <a:cs typeface="Arial Unicode MS"/>
+              </a:rPr>
+              <a:t>Product Preview</a:t>
+            </a:r>
+            <a:r>
+              <a:rPr sz="1200" lang="zh-TW" dirty="0">
+                <a:solidFill>
+                  <a:srgbClr val="000000"/>
+                </a:solidFill>
+                <a:latin typeface="Arial Unicode MS"/>
+                <a:ea typeface="Arial Unicode MS"/>
+                <a:cs typeface="Arial Unicode MS"/>
+              </a:rPr>
+              <a:t>，還不是正式規格書。
+</a:t>
+            </a:r>
+          </a:p>
+          <a:p>
+            <a:pPr algn="l">
+              <a:spcBef>
+                <a:spcPts val="0"/>
+              </a:spcBef>
+              <a:spcAft>
+                <a:spcPts val="200"/>
+              </a:spcAft>
+            </a:pPr>
+            <a:r>
+              <a:rPr sz="1200" lang="zh-TW" dirty="0">
+                <a:solidFill>
+                  <a:srgbClr val="000000"/>
+                </a:solidFill>
+                <a:latin typeface="Arial Unicode MS"/>
+                <a:ea typeface="Arial Unicode MS"/>
+                <a:cs typeface="Arial Unicode MS"/>
+              </a:rPr>
+              <a:t>各位記得第 1 節第 2 張說過的：</a:t>
+            </a:r>
+            <a:r>
+              <a:rPr sz="1200" b="1" lang="zh-TW" dirty="0">
+                <a:solidFill>
+                  <a:srgbClr val="000000"/>
+                </a:solidFill>
+                <a:latin typeface="Arial Unicode MS"/>
+                <a:ea typeface="Arial Unicode MS"/>
+                <a:cs typeface="Arial Unicode MS"/>
+              </a:rPr>
+              <a:t>快門方式這一行，這兩頁上都沒有。</a:t>
+            </a:r>
+            <a:r>
+              <a:rPr sz="1200" lang="zh-TW" dirty="0">
+                <a:solidFill>
+                  <a:srgbClr val="000000"/>
+                </a:solidFill>
+                <a:latin typeface="Arial Unicode MS"/>
+                <a:ea typeface="Arial Unicode MS"/>
+                <a:cs typeface="Arial Unicode MS"/>
+              </a:rPr>
+              <a:t>現在可以自己確認一次。要看快門方式，得去 onsemi 的產品頁。
+</a:t>
+            </a:r>
+          </a:p>
+          <a:p>
+            <a:pPr algn="l">
+              <a:spcBef>
+                <a:spcPts val="0"/>
+              </a:spcBef>
+              <a:spcAft>
+                <a:spcPts val="200"/>
+              </a:spcAft>
+            </a:pPr>
+            <a:r>
+              <a:rPr sz="1200" lang="zh-TW" dirty="0">
+                <a:solidFill>
+                  <a:srgbClr val="000000"/>
+                </a:solidFill>
+                <a:latin typeface="Arial Unicode MS"/>
+                <a:ea typeface="Arial Unicode MS"/>
+                <a:cs typeface="Arial Unicode MS"/>
+              </a:rPr>
+              <a:t>放映的時候可以放大看；發下去的 PDF 也印得出來。</a:t>
+            </a:r>
+          </a:p>
+        </p:txBody>
+      </p:sp>
+      <p:sp>
+        <p:nvSpPr>
+          <p:cNvPr id="4" name="Slide Number Placeholder 3"/>
+          <p:cNvSpPr>
+            <a:spLocks noGrp="1"/>
+          </p:cNvSpPr>
+          <p:nvPr>
+            <p:ph type="sldNum" idx="5"/>
+          </p:nvPr>
+        </p:nvSpPr>
+        <p:spPr>
+          <a:xfrm>
+            <a:off x="6500000" y="10200000"/>
+            <a:ext cx="500000" cy="300000"/>
+          </a:xfrm>
+        </p:spPr>
+        <p:txBody>
+          <a:bodyPr vert="horz" wrap="square" anchor="t" lIns="91440" rIns="91440" tIns="45720" bIns="45720"/>
+          <a:lstStyle/>
+          <a:p>
+            <a:pPr algn="l">
+              <a:spcBef>
+                <a:spcPts val="0"/>
+              </a:spcBef>
+              <a:spcAft>
+                <a:spcPts val="167"/>
+              </a:spcAft>
+            </a:pPr>
+            <a:r>
+              <a:rPr sz="1000" lang="zh-TW" dirty="0">
+                <a:solidFill>
+                  <a:srgbClr val="000000"/>
+                </a:solidFill>
+                <a:latin typeface="Arial Unicode MS"/>
+                <a:ea typeface="Arial Unicode MS"/>
+                <a:cs typeface="Arial Unicode MS"/>
+              </a:rPr>
+              <a:t>22</a:t>
             </a:r>
           </a:p>
         </p:txBody>
@@ -14573,7 +15333,7 @@
                 <a:ea typeface="Arial" pitchFamily="34" charset="-122"/>
                 <a:cs typeface="Arial" pitchFamily="34" charset="-120"/>
               </a:rPr>
-              <a:t>10 / 21</a:t>
+              <a:t>10 / 22</a:t>
             </a:r>
             <a:endParaRPr lang="en-US" sz="900" dirty="0"/>
           </a:p>
@@ -15113,7 +15873,7 @@
                 <a:ea typeface="Arial" pitchFamily="34" charset="-122"/>
                 <a:cs typeface="Arial" pitchFamily="34" charset="-120"/>
               </a:rPr>
-              <a:t>11 / 21</a:t>
+              <a:t>11 / 22</a:t>
             </a:r>
             <a:endParaRPr lang="en-US" sz="900" dirty="0"/>
           </a:p>
@@ -15563,7 +16323,7 @@
                 <a:ea typeface="Arial" pitchFamily="34" charset="-122"/>
                 <a:cs typeface="Arial" pitchFamily="34" charset="-120"/>
               </a:rPr>
-              <a:t>12 / 21</a:t>
+              <a:t>12 / 22</a:t>
             </a:r>
             <a:endParaRPr lang="en-US" sz="900" dirty="0"/>
           </a:p>
@@ -16798,7 +17558,7 @@
                 <a:ea typeface="Arial" pitchFamily="34" charset="-122"/>
                 <a:cs typeface="Arial" pitchFamily="34" charset="-120"/>
               </a:rPr>
-              <a:t>13 / 21</a:t>
+              <a:t>13 / 22</a:t>
             </a:r>
             <a:endParaRPr lang="en-US" sz="900" dirty="0"/>
           </a:p>
@@ -17547,7 +18307,7 @@
                 <a:ea typeface="Arial" pitchFamily="34" charset="-122"/>
                 <a:cs typeface="Arial" pitchFamily="34" charset="-120"/>
               </a:rPr>
-              <a:t>14 / 21</a:t>
+              <a:t>14 / 22</a:t>
             </a:r>
             <a:endParaRPr lang="en-US" sz="900" dirty="0"/>
           </a:p>
@@ -17867,7 +18627,7 @@
                 <a:ea typeface="Arial" pitchFamily="34" charset="-122"/>
                 <a:cs typeface="Arial" pitchFamily="34" charset="-120"/>
               </a:rPr>
-              <a:t>15 / 21</a:t>
+              <a:t>15 / 22</a:t>
             </a:r>
             <a:endParaRPr lang="en-US" sz="900" dirty="0"/>
           </a:p>
@@ -18967,7 +19727,7 @@
                 <a:ea typeface="Arial" pitchFamily="34" charset="-122"/>
                 <a:cs typeface="Arial" pitchFamily="34" charset="-120"/>
               </a:rPr>
-              <a:t>16 / 21</a:t>
+              <a:t>16 / 22</a:t>
             </a:r>
             <a:endParaRPr lang="en-US" sz="880" dirty="0"/>
           </a:p>
@@ -19045,6 +19805,871 @@
         </p:nvSpPr>
         <p:spPr>
           <a:xfrm>
+            <a:off x="502920" y="365760"/>
+            <a:ext cx="8138160" cy="274320"/>
+          </a:xfrm>
+          <a:prstGeom prst="rect">
+            <a:avLst/>
+          </a:prstGeom>
+          <a:noFill/>
+          <a:ln/>
+        </p:spPr>
+        <p:txBody>
+          <a:bodyPr wrap="square" lIns="0" tIns="0" rIns="0" bIns="0" rtlCol="0" anchor="ctr"/>
+          <a:lstStyle/>
+          <a:p>
+            <a:pPr indent="0" marL="0">
+              <a:buNone/>
+            </a:pPr>
+            <a:r>
+              <a:rPr lang="en-US" sz="1300" b="1" dirty="0">
+                <a:solidFill>
+                  <a:srgbClr val="007F72"/>
+                </a:solidFill>
+                <a:latin typeface="Arial" pitchFamily="34" charset="0"/>
+                <a:ea typeface="Arial" pitchFamily="34" charset="-122"/>
+                <a:cs typeface="Arial" pitchFamily="34" charset="-120"/>
+              </a:rPr>
+              <a:t>Xem thử · 2:55，跳著播三段</a:t>
+            </a:r>
+            <a:endParaRPr lang="en-US" sz="1300" dirty="0"/>
+          </a:p>
+        </p:txBody>
+      </p:sp>
+      <p:sp>
+        <p:nvSpPr>
+          <p:cNvPr id="3" name="Text 1"/>
+          <p:cNvSpPr txBox="1"/>
+          <p:nvPr/>
+        </p:nvSpPr>
+        <p:spPr>
+          <a:xfrm>
+            <a:off x="502920" y="676656"/>
+            <a:ext cx="8138160" cy="560684"/>
+          </a:xfrm>
+          <a:prstGeom prst="rect">
+            <a:avLst/>
+          </a:prstGeom>
+          <a:noFill/>
+          <a:ln/>
+        </p:spPr>
+        <p:txBody>
+          <a:bodyPr wrap="square" lIns="0" tIns="0" rIns="0" bIns="0" rtlCol="0" anchor="t"/>
+          <a:lstStyle/>
+          <a:p>
+            <a:pPr indent="0" marL="0">
+              <a:lnSpc>
+                <a:spcPct val="116000"/>
+              </a:lnSpc>
+              <a:buNone/>
+            </a:pPr>
+            <a:r>
+              <a:rPr lang="en-US" sz="1700" b="1" dirty="0">
+                <a:solidFill>
+                  <a:srgbClr val="0B1F3A"/>
+                </a:solidFill>
+                <a:latin typeface="Arial" pitchFamily="34" charset="0"/>
+                <a:ea typeface="Arial" pitchFamily="34" charset="-122"/>
+                <a:cs typeface="Arial" pitchFamily="34" charset="-120"/>
+              </a:rPr>
+              <a:t>Hiệu chuẩn ngoài tiệm: kỹ thuật viên thật sự làm gì</a:t>
+            </a:r>
+            <a:endParaRPr lang="en-US" sz="1700" dirty="0"/>
+          </a:p>
+          <a:p>
+            <a:pPr indent="0" marL="0">
+              <a:lnSpc>
+                <a:spcPct val="116000"/>
+              </a:lnSpc>
+              <a:buNone/>
+            </a:pPr>
+            <a:r>
+              <a:rPr lang="en-US" sz="1250" dirty="0">
+                <a:solidFill>
+                  <a:srgbClr val="5F7183"/>
+                </a:solidFill>
+                <a:latin typeface="微軟正黑體" pitchFamily="34" charset="0"/>
+                <a:ea typeface="微軟正黑體" pitchFamily="34" charset="-122"/>
+                <a:cs typeface="微軟正黑體" pitchFamily="34" charset="-120"/>
+              </a:rPr>
+              <a:t>標定在修車廠長什麼樣：技師實際在做什麼</a:t>
+            </a:r>
+            <a:endParaRPr lang="en-US" sz="1700" dirty="0"/>
+          </a:p>
+        </p:txBody>
+      </p:sp>
+      <p:sp>
+        <p:nvSpPr>
+          <p:cNvPr id="4" name="Shape 2"/>
+          <p:cNvSpPr/>
+          <p:nvPr/>
+        </p:nvSpPr>
+        <p:spPr>
+          <a:xfrm>
+            <a:off x="502920" y="1255628"/>
+            <a:ext cx="3904488" cy="2566564"/>
+          </a:xfrm>
+          <a:prstGeom prst="roundRect">
+            <a:avLst>
+              <a:gd name="adj" fmla="val 3563"/>
+            </a:avLst>
+          </a:prstGeom>
+          <a:solidFill>
+            <a:srgbClr val="0B1F3A"/>
+          </a:solidFill>
+          <a:ln w="12700">
+            <a:solidFill>
+              <a:srgbClr val="DBE3EA"/>
+            </a:solidFill>
+            <a:prstDash val="solid"/>
+          </a:ln>
+        </p:spPr>
+      </p:sp>
+      <p:pic>
+        <p:nvPicPr>
+          <p:cNvPr id="5" name="Image 0" descr="/Users/tsengchenghsun/Class/carClass/Claude outputs/第五週(10-8)/src/img/w5_s17_target.png">    </p:cNvPr>
+          <p:cNvPicPr>
+            <a:picLocks noChangeAspect="1"/>
+          </p:cNvPicPr>
+          <p:nvPr/>
+        </p:nvPicPr>
+        <p:blipFill>
+          <a:blip r:embed="rId1"/>
+          <a:stretch>
+            <a:fillRect/>
+          </a:stretch>
+        </p:blipFill>
+        <p:spPr>
+          <a:xfrm>
+            <a:off x="735981" y="1301348"/>
+            <a:ext cx="3438366" cy="2292244"/>
+          </a:xfrm>
+          <a:prstGeom prst="rect">
+            <a:avLst/>
+          </a:prstGeom>
+        </p:spPr>
+      </p:pic>
+      <p:sp>
+        <p:nvSpPr>
+          <p:cNvPr id="6" name="Text 3"/>
+          <p:cNvSpPr txBox="1"/>
+          <p:nvPr/>
+        </p:nvSpPr>
+        <p:spPr>
+          <a:xfrm>
+            <a:off x="594360" y="3584448"/>
+            <a:ext cx="3721608" cy="182880"/>
+          </a:xfrm>
+          <a:prstGeom prst="rect">
+            <a:avLst/>
+          </a:prstGeom>
+          <a:noFill/>
+          <a:ln/>
+        </p:spPr>
+        <p:txBody>
+          <a:bodyPr wrap="square" lIns="0" tIns="0" rIns="0" bIns="0" rtlCol="0" anchor="ctr"/>
+          <a:lstStyle/>
+          <a:p>
+            <a:pPr algn="r" indent="0" marL="0">
+              <a:buNone/>
+            </a:pPr>
+            <a:r>
+              <a:rPr lang="en-US" sz="750" dirty="0">
+                <a:solidFill>
+                  <a:srgbClr val="9FB3C8"/>
+                </a:solidFill>
+                <a:latin typeface="Arial" pitchFamily="34" charset="0"/>
+                <a:ea typeface="Arial" pitchFamily="34" charset="-122"/>
+                <a:cs typeface="Arial" pitchFamily="34" charset="-120"/>
+              </a:rPr>
+              <a:t>示意圖：課程自製（src/tools_make_target_png.py）</a:t>
+            </a:r>
+            <a:endParaRPr lang="en-US" sz="750" dirty="0"/>
+          </a:p>
+        </p:txBody>
+      </p:sp>
+      <p:sp>
+        <p:nvSpPr>
+          <p:cNvPr id="7" name="Shape 4"/>
+          <p:cNvSpPr/>
+          <p:nvPr/>
+        </p:nvSpPr>
+        <p:spPr>
+          <a:xfrm>
+            <a:off x="4736592" y="1255628"/>
+            <a:ext cx="3904488" cy="2566564"/>
+          </a:xfrm>
+          <a:prstGeom prst="roundRect">
+            <a:avLst>
+              <a:gd name="adj" fmla="val 3563"/>
+            </a:avLst>
+          </a:prstGeom>
+          <a:solidFill>
+            <a:srgbClr val="F4F7FA"/>
+          </a:solidFill>
+          <a:ln w="12700">
+            <a:solidFill>
+              <a:srgbClr val="DBE3EA"/>
+            </a:solidFill>
+            <a:prstDash val="solid"/>
+          </a:ln>
+        </p:spPr>
+      </p:sp>
+      <p:sp>
+        <p:nvSpPr>
+          <p:cNvPr id="8" name="Shape 5"/>
+          <p:cNvSpPr/>
+          <p:nvPr/>
+        </p:nvSpPr>
+        <p:spPr>
+          <a:xfrm>
+            <a:off x="4919472" y="1420220"/>
+            <a:ext cx="347472" cy="347472"/>
+          </a:xfrm>
+          <a:prstGeom prst="ellipse">
+            <a:avLst/>
+          </a:prstGeom>
+          <a:solidFill>
+            <a:srgbClr val="D9463E"/>
+          </a:solidFill>
+          <a:ln/>
+        </p:spPr>
+      </p:sp>
+      <p:sp>
+        <p:nvSpPr>
+          <p:cNvPr id="9" name="Text 6"/>
+          <p:cNvSpPr txBox="1"/>
+          <p:nvPr/>
+        </p:nvSpPr>
+        <p:spPr>
+          <a:xfrm>
+            <a:off x="4919472" y="1465940"/>
+            <a:ext cx="347472" cy="256032"/>
+          </a:xfrm>
+          <a:prstGeom prst="rect">
+            <a:avLst/>
+          </a:prstGeom>
+          <a:noFill/>
+          <a:ln/>
+        </p:spPr>
+        <p:txBody>
+          <a:bodyPr wrap="square" lIns="0" tIns="0" rIns="0" bIns="0" rtlCol="0" anchor="ctr"/>
+          <a:lstStyle/>
+          <a:p>
+            <a:pPr algn="ctr" indent="0" marL="0">
+              <a:buNone/>
+            </a:pPr>
+            <a:r>
+              <a:rPr lang="en-US" sz="1200" b="1" dirty="0">
+                <a:solidFill>
+                  <a:srgbClr val="FFFFFF"/>
+                </a:solidFill>
+                <a:latin typeface="Arial" pitchFamily="34" charset="0"/>
+                <a:ea typeface="Arial" pitchFamily="34" charset="-122"/>
+                <a:cs typeface="Arial" pitchFamily="34" charset="-120"/>
+              </a:rPr>
+              <a:t>▶</a:t>
+            </a:r>
+            <a:endParaRPr lang="en-US" sz="1200" dirty="0"/>
+          </a:p>
+        </p:txBody>
+      </p:sp>
+      <p:sp>
+        <p:nvSpPr>
+          <p:cNvPr id="10" name="Text 7"/>
+          <p:cNvSpPr txBox="1"/>
+          <p:nvPr/>
+        </p:nvSpPr>
+        <p:spPr>
+          <a:xfrm>
+            <a:off x="5340096" y="1401932"/>
+            <a:ext cx="3118104" cy="420624"/>
+          </a:xfrm>
+          <a:prstGeom prst="rect">
+            <a:avLst/>
+          </a:prstGeom>
+          <a:noFill/>
+          <a:ln/>
+        </p:spPr>
+        <p:txBody>
+          <a:bodyPr wrap="square" lIns="0" tIns="0" rIns="0" bIns="0" rtlCol="0" anchor="ctr"/>
+          <a:lstStyle/>
+          <a:p>
+            <a:pPr indent="0" marL="0">
+              <a:buNone/>
+            </a:pPr>
+            <a:r>
+              <a:rPr lang="en-US" sz="1050" b="1" dirty="0">
+                <a:solidFill>
+                  <a:srgbClr val="0B1F3A"/>
+                </a:solidFill>
+                <a:latin typeface="Arial" pitchFamily="34" charset="0"/>
+                <a:ea typeface="Arial" pitchFamily="34" charset="-122"/>
+                <a:cs typeface="Arial" pitchFamily="34" charset="-120"/>
+              </a:rPr>
+              <a:t>Windshield camera recalibration: Static vs. Dynamic</a:t>
+            </a:r>
+            <a:endParaRPr lang="en-US" sz="1050" dirty="0"/>
+          </a:p>
+        </p:txBody>
+      </p:sp>
+      <p:sp>
+        <p:nvSpPr>
+          <p:cNvPr id="11" name="Text 8"/>
+          <p:cNvSpPr txBox="1"/>
+          <p:nvPr/>
+        </p:nvSpPr>
+        <p:spPr>
+          <a:xfrm>
+            <a:off x="4919472" y="1859132"/>
+            <a:ext cx="3538728" cy="201168"/>
+          </a:xfrm>
+          <a:prstGeom prst="rect">
+            <a:avLst/>
+          </a:prstGeom>
+          <a:noFill/>
+          <a:ln/>
+        </p:spPr>
+        <p:txBody>
+          <a:bodyPr wrap="square" lIns="0" tIns="0" rIns="0" bIns="0" rtlCol="0" anchor="ctr"/>
+          <a:lstStyle/>
+          <a:p>
+            <a:pPr indent="0" marL="0">
+              <a:buNone/>
+            </a:pPr>
+            <a:r>
+              <a:rPr lang="en-US" sz="900" dirty="0">
+                <a:solidFill>
+                  <a:srgbClr val="5F7183"/>
+                </a:solidFill>
+                <a:latin typeface="Arial" pitchFamily="34" charset="0"/>
+                <a:ea typeface="Arial" pitchFamily="34" charset="-122"/>
+                <a:cs typeface="Arial" pitchFamily="34" charset="-120"/>
+              </a:rPr>
+              <a:t>Safelite AutoGlass（美國最大的擋風玻璃商）　·　2:55（只看 0:20–0:35、1:25–2:00、2:02–2:33）</a:t>
+            </a:r>
+            <a:endParaRPr lang="en-US" sz="900" dirty="0"/>
+          </a:p>
+        </p:txBody>
+      </p:sp>
+      <p:sp>
+        <p:nvSpPr>
+          <p:cNvPr id="12" name="Text 9">
+            <a:hlinkClick r:id="rId2" tooltip=""/>
+          </p:cNvPr>
+          <p:cNvSpPr txBox="1"/>
+          <p:nvPr/>
+        </p:nvSpPr>
+        <p:spPr>
+          <a:xfrm>
+            <a:off x="4919472" y="2042012"/>
+            <a:ext cx="3538728" cy="201168"/>
+          </a:xfrm>
+          <a:prstGeom prst="rect">
+            <a:avLst/>
+          </a:prstGeom>
+          <a:noFill/>
+          <a:ln/>
+        </p:spPr>
+        <p:txBody>
+          <a:bodyPr wrap="square" lIns="0" tIns="0" rIns="0" bIns="0" rtlCol="0" anchor="ctr"/>
+          <a:lstStyle/>
+          <a:p>
+            <a:pPr indent="0" marL="0">
+              <a:buNone/>
+            </a:pPr>
+            <a:r>
+              <a:rPr lang="en-US" sz="850" u="sng" dirty="0">
+                <a:solidFill>
+                  <a:srgbClr val="1F6FBF"/>
+                </a:solidFill>
+                <a:latin typeface="Arial" pitchFamily="34" charset="0"/>
+                <a:ea typeface="Arial" pitchFamily="34" charset="-122"/>
+                <a:cs typeface="Arial" pitchFamily="34" charset="-120"/>
+                <a:hlinkClick r:id="rId2" invalidUrl="" action="" tgtFrame="" tooltip="" history="1" highlightClick="0" endSnd="0">
+                  <a:extLst>
+                    <a:ext uri="{A12FA001-AC4F-418D-AE19-62706E023703}">
+                      <ahyp:hlinkClr xmlns:ahyp="http://schemas.microsoft.com/office/drawing/2018/hyperlinkcolor" val="tx"/>
+                    </a:ext>
+                  </a:extLst>
+                </a:hlinkClick>
+              </a:rPr>
+              <a:t>https://youtu.be/LDptg_z9aCk</a:t>
+            </a:r>
+            <a:endParaRPr lang="en-US" sz="850" dirty="0"/>
+          </a:p>
+        </p:txBody>
+      </p:sp>
+      <p:sp>
+        <p:nvSpPr>
+          <p:cNvPr id="13" name="Shape 10"/>
+          <p:cNvSpPr/>
+          <p:nvPr/>
+        </p:nvSpPr>
+        <p:spPr>
+          <a:xfrm>
+            <a:off x="4919472" y="2316332"/>
+            <a:ext cx="36576" cy="237744"/>
+          </a:xfrm>
+          <a:prstGeom prst="rect">
+            <a:avLst/>
+          </a:prstGeom>
+          <a:solidFill>
+            <a:srgbClr val="00A896"/>
+          </a:solidFill>
+          <a:ln/>
+        </p:spPr>
+      </p:sp>
+      <p:sp>
+        <p:nvSpPr>
+          <p:cNvPr id="14" name="Text 11"/>
+          <p:cNvSpPr txBox="1"/>
+          <p:nvPr/>
+        </p:nvSpPr>
+        <p:spPr>
+          <a:xfrm>
+            <a:off x="5047488" y="2279756"/>
+            <a:ext cx="3429000" cy="456079"/>
+          </a:xfrm>
+          <a:prstGeom prst="rect">
+            <a:avLst/>
+          </a:prstGeom>
+          <a:noFill/>
+          <a:ln/>
+        </p:spPr>
+        <p:txBody>
+          <a:bodyPr wrap="square" lIns="0" tIns="0" rIns="0" bIns="0" rtlCol="0" anchor="t"/>
+          <a:lstStyle/>
+          <a:p>
+            <a:pPr indent="0" marL="0">
+              <a:lnSpc>
+                <a:spcPct val="118000"/>
+              </a:lnSpc>
+              <a:buNone/>
+            </a:pPr>
+            <a:r>
+              <a:rPr lang="en-US" sz="950" dirty="0">
+                <a:solidFill>
+                  <a:srgbClr val="1A2733"/>
+                </a:solidFill>
+                <a:latin typeface="Arial" pitchFamily="34" charset="0"/>
+                <a:ea typeface="Arial" pitchFamily="34" charset="-122"/>
+                <a:cs typeface="Arial" pitchFamily="34" charset="-120"/>
+              </a:rPr>
+              <a:t>0:20 Hãng quy định: thay kính chắn gió là phải hiệu chuẩn lại</a:t>
+            </a:r>
+            <a:endParaRPr lang="en-US" sz="950" dirty="0"/>
+          </a:p>
+          <a:p>
+            <a:pPr indent="0" marL="0">
+              <a:lnSpc>
+                <a:spcPct val="118000"/>
+              </a:lnSpc>
+              <a:buNone/>
+            </a:pPr>
+            <a:r>
+              <a:rPr lang="en-US" sz="900" dirty="0">
+                <a:solidFill>
+                  <a:srgbClr val="5F7183"/>
+                </a:solidFill>
+                <a:latin typeface="微軟正黑體" pitchFamily="34" charset="0"/>
+                <a:ea typeface="微軟正黑體" pitchFamily="34" charset="-122"/>
+                <a:cs typeface="微軟正黑體" pitchFamily="34" charset="-120"/>
+              </a:rPr>
+              <a:t>0:20 原廠規定：擋風玻璃換過就一定要重新標定</a:t>
+            </a:r>
+            <a:endParaRPr lang="en-US" sz="950" dirty="0"/>
+          </a:p>
+        </p:txBody>
+      </p:sp>
+      <p:sp>
+        <p:nvSpPr>
+          <p:cNvPr id="15" name="Shape 12"/>
+          <p:cNvSpPr/>
+          <p:nvPr/>
+        </p:nvSpPr>
+        <p:spPr>
+          <a:xfrm>
+            <a:off x="4919472" y="2808987"/>
+            <a:ext cx="36576" cy="237744"/>
+          </a:xfrm>
+          <a:prstGeom prst="rect">
+            <a:avLst/>
+          </a:prstGeom>
+          <a:solidFill>
+            <a:srgbClr val="00A896"/>
+          </a:solidFill>
+          <a:ln/>
+        </p:spPr>
+      </p:sp>
+      <p:sp>
+        <p:nvSpPr>
+          <p:cNvPr id="16" name="Text 13"/>
+          <p:cNvSpPr txBox="1"/>
+          <p:nvPr/>
+        </p:nvSpPr>
+        <p:spPr>
+          <a:xfrm>
+            <a:off x="5047488" y="2772411"/>
+            <a:ext cx="3429000" cy="313748"/>
+          </a:xfrm>
+          <a:prstGeom prst="rect">
+            <a:avLst/>
+          </a:prstGeom>
+          <a:noFill/>
+          <a:ln/>
+        </p:spPr>
+        <p:txBody>
+          <a:bodyPr wrap="square" lIns="0" tIns="0" rIns="0" bIns="0" rtlCol="0" anchor="t"/>
+          <a:lstStyle/>
+          <a:p>
+            <a:pPr indent="0" marL="0">
+              <a:lnSpc>
+                <a:spcPct val="118000"/>
+              </a:lnSpc>
+              <a:buNone/>
+            </a:pPr>
+            <a:r>
+              <a:rPr lang="en-US" sz="950" dirty="0">
+                <a:solidFill>
+                  <a:srgbClr val="1A2733"/>
+                </a:solidFill>
+                <a:latin typeface="Arial" pitchFamily="34" charset="0"/>
+                <a:ea typeface="Arial" pitchFamily="34" charset="-122"/>
+                <a:cs typeface="Arial" pitchFamily="34" charset="-120"/>
+              </a:rPr>
+              <a:t>1:25 Laser canh xe → dựng bảng ô vuông đen trắng</a:t>
+            </a:r>
+            <a:endParaRPr lang="en-US" sz="950" dirty="0"/>
+          </a:p>
+          <a:p>
+            <a:pPr indent="0" marL="0">
+              <a:lnSpc>
+                <a:spcPct val="118000"/>
+              </a:lnSpc>
+              <a:buNone/>
+            </a:pPr>
+            <a:r>
+              <a:rPr lang="en-US" sz="900" dirty="0">
+                <a:solidFill>
+                  <a:srgbClr val="5F7183"/>
+                </a:solidFill>
+                <a:latin typeface="微軟正黑體" pitchFamily="34" charset="0"/>
+                <a:ea typeface="微軟正黑體" pitchFamily="34" charset="-122"/>
+                <a:cs typeface="微軟正黑體" pitchFamily="34" charset="-120"/>
+              </a:rPr>
+              <a:t>1:25 雷射把車對正 → 搬出黑白格子標定板</a:t>
+            </a:r>
+            <a:endParaRPr lang="en-US" sz="950" dirty="0"/>
+          </a:p>
+        </p:txBody>
+      </p:sp>
+      <p:sp>
+        <p:nvSpPr>
+          <p:cNvPr id="17" name="Shape 14"/>
+          <p:cNvSpPr/>
+          <p:nvPr/>
+        </p:nvSpPr>
+        <p:spPr>
+          <a:xfrm>
+            <a:off x="4919472" y="3159311"/>
+            <a:ext cx="36576" cy="237744"/>
+          </a:xfrm>
+          <a:prstGeom prst="rect">
+            <a:avLst/>
+          </a:prstGeom>
+          <a:solidFill>
+            <a:srgbClr val="00A896"/>
+          </a:solidFill>
+          <a:ln/>
+        </p:spPr>
+      </p:sp>
+      <p:sp>
+        <p:nvSpPr>
+          <p:cNvPr id="18" name="Text 15"/>
+          <p:cNvSpPr txBox="1"/>
+          <p:nvPr/>
+        </p:nvSpPr>
+        <p:spPr>
+          <a:xfrm>
+            <a:off x="5047488" y="3122735"/>
+            <a:ext cx="3429000" cy="313748"/>
+          </a:xfrm>
+          <a:prstGeom prst="rect">
+            <a:avLst/>
+          </a:prstGeom>
+          <a:noFill/>
+          <a:ln/>
+        </p:spPr>
+        <p:txBody>
+          <a:bodyPr wrap="square" lIns="0" tIns="0" rIns="0" bIns="0" rtlCol="0" anchor="t"/>
+          <a:lstStyle/>
+          <a:p>
+            <a:pPr indent="0" marL="0">
+              <a:lnSpc>
+                <a:spcPct val="118000"/>
+              </a:lnSpc>
+              <a:buNone/>
+            </a:pPr>
+            <a:r>
+              <a:rPr lang="en-US" sz="950" dirty="0">
+                <a:solidFill>
+                  <a:srgbClr val="1A2733"/>
+                </a:solidFill>
+                <a:latin typeface="Arial" pitchFamily="34" charset="0"/>
+                <a:ea typeface="Arial" pitchFamily="34" charset="-122"/>
+                <a:cs typeface="Arial" pitchFamily="34" charset="-120"/>
+              </a:rPr>
+              <a:t>2:02 Hiệu chuẩn động: chạy trên đường có vạch kẻ rõ</a:t>
+            </a:r>
+            <a:endParaRPr lang="en-US" sz="950" dirty="0"/>
+          </a:p>
+          <a:p>
+            <a:pPr indent="0" marL="0">
+              <a:lnSpc>
+                <a:spcPct val="118000"/>
+              </a:lnSpc>
+              <a:buNone/>
+            </a:pPr>
+            <a:r>
+              <a:rPr lang="en-US" sz="900" dirty="0">
+                <a:solidFill>
+                  <a:srgbClr val="5F7183"/>
+                </a:solidFill>
+                <a:latin typeface="微軟正黑體" pitchFamily="34" charset="0"/>
+                <a:ea typeface="微軟正黑體" pitchFamily="34" charset="-122"/>
+                <a:cs typeface="微軟正黑體" pitchFamily="34" charset="-120"/>
+              </a:rPr>
+              <a:t>2:02 動態標定：開上有清楚標線的路，跑到指定速度</a:t>
+            </a:r>
+            <a:endParaRPr lang="en-US" sz="950" dirty="0"/>
+          </a:p>
+        </p:txBody>
+      </p:sp>
+      <p:sp>
+        <p:nvSpPr>
+          <p:cNvPr id="19" name="Shape 16"/>
+          <p:cNvSpPr/>
+          <p:nvPr/>
+        </p:nvSpPr>
+        <p:spPr>
+          <a:xfrm>
+            <a:off x="502920" y="3931920"/>
+            <a:ext cx="8138160" cy="548640"/>
+          </a:xfrm>
+          <a:prstGeom prst="roundRect">
+            <a:avLst>
+              <a:gd name="adj" fmla="val 15000"/>
+            </a:avLst>
+          </a:prstGeom>
+          <a:solidFill>
+            <a:srgbClr val="FFF6E3"/>
+          </a:solidFill>
+          <a:ln w="12700">
+            <a:solidFill>
+              <a:srgbClr val="FFB020"/>
+            </a:solidFill>
+            <a:prstDash val="solid"/>
+          </a:ln>
+        </p:spPr>
+      </p:sp>
+      <p:sp>
+        <p:nvSpPr>
+          <p:cNvPr id="20" name="Text 17"/>
+          <p:cNvSpPr txBox="1"/>
+          <p:nvPr/>
+        </p:nvSpPr>
+        <p:spPr>
+          <a:xfrm>
+            <a:off x="685800" y="3995928"/>
+            <a:ext cx="7772400" cy="438912"/>
+          </a:xfrm>
+          <a:prstGeom prst="rect">
+            <a:avLst/>
+          </a:prstGeom>
+          <a:noFill/>
+          <a:ln/>
+        </p:spPr>
+        <p:txBody>
+          <a:bodyPr wrap="square" lIns="0" tIns="0" rIns="0" bIns="0" rtlCol="0" anchor="t"/>
+          <a:lstStyle/>
+          <a:p>
+            <a:pPr indent="0" marL="0">
+              <a:lnSpc>
+                <a:spcPct val="114000"/>
+              </a:lnSpc>
+              <a:buNone/>
+            </a:pPr>
+            <a:r>
+              <a:rPr lang="en-US" sz="1150" b="1" dirty="0">
+                <a:solidFill>
+                  <a:srgbClr val="7A4E00"/>
+                </a:solidFill>
+                <a:latin typeface="Arial" pitchFamily="34" charset="0"/>
+                <a:ea typeface="Arial" pitchFamily="34" charset="-122"/>
+                <a:cs typeface="Arial" pitchFamily="34" charset="-120"/>
+              </a:rPr>
+              <a:t>Kính không đắt hơn bao nhiêu — đắt là khúc hiệu chuẩn phía sau.</a:t>
+            </a:r>
+            <a:endParaRPr lang="en-US" sz="1150" dirty="0"/>
+          </a:p>
+          <a:p>
+            <a:pPr indent="0" marL="0">
+              <a:lnSpc>
+                <a:spcPct val="114000"/>
+              </a:lnSpc>
+              <a:buNone/>
+            </a:pPr>
+            <a:r>
+              <a:rPr lang="en-US" sz="1050" dirty="0">
+                <a:solidFill>
+                  <a:srgbClr val="7A4E00"/>
+                </a:solidFill>
+                <a:latin typeface="微軟正黑體" pitchFamily="34" charset="0"/>
+                <a:ea typeface="微軟正黑體" pitchFamily="34" charset="-122"/>
+                <a:cs typeface="微軟正黑體" pitchFamily="34" charset="-120"/>
+              </a:rPr>
+              <a:t>玻璃本身沒貴多少，貴的是後面這段標定。</a:t>
+            </a:r>
+            <a:endParaRPr lang="en-US" sz="1150" dirty="0"/>
+          </a:p>
+        </p:txBody>
+      </p:sp>
+      <p:pic>
+        <p:nvPicPr>
+          <p:cNvPr id="22" name="Image 1" descr="/Users/tsengchenghsun/Class/carClass/Claude outputs/第五週(10-8)/src/logo.png">    </p:cNvPr>
+          <p:cNvPicPr>
+            <a:picLocks noChangeAspect="1"/>
+          </p:cNvPicPr>
+          <p:nvPr/>
+        </p:nvPicPr>
+        <p:blipFill>
+          <a:blip r:embed="rId3"/>
+          <a:stretch>
+            <a:fillRect/>
+          </a:stretch>
+        </p:blipFill>
+        <p:spPr>
+          <a:xfrm>
+            <a:off x="7882128" y="109728"/>
+            <a:ext cx="1097280" cy="242439"/>
+          </a:xfrm>
+          <a:prstGeom prst="rect">
+            <a:avLst/>
+          </a:prstGeom>
+        </p:spPr>
+      </p:pic>
+      <p:sp>
+        <p:nvSpPr>
+          <p:cNvPr id="23" name="Text 18"/>
+          <p:cNvSpPr txBox="1"/>
+          <p:nvPr/>
+        </p:nvSpPr>
+        <p:spPr>
+          <a:xfrm>
+            <a:off x="109728" y="128016"/>
+            <a:ext cx="822960" cy="256032"/>
+          </a:xfrm>
+          <a:prstGeom prst="rect">
+            <a:avLst/>
+          </a:prstGeom>
+          <a:noFill/>
+          <a:ln/>
+        </p:spPr>
+        <p:txBody>
+          <a:bodyPr wrap="square" lIns="0" tIns="0" rIns="0" bIns="0" rtlCol="0" anchor="ctr"/>
+          <a:lstStyle/>
+          <a:p>
+            <a:pPr indent="0" marL="0">
+              <a:buNone/>
+            </a:pPr>
+            <a:r>
+              <a:rPr lang="en-US" sz="900" dirty="0">
+                <a:solidFill>
+                  <a:srgbClr val="5F7183"/>
+                </a:solidFill>
+                <a:latin typeface="Arial" pitchFamily="34" charset="0"/>
+                <a:ea typeface="Arial" pitchFamily="34" charset="-122"/>
+                <a:cs typeface="Arial" pitchFamily="34" charset="-120"/>
+              </a:rPr>
+              <a:t>17 / 22</a:t>
+            </a:r>
+            <a:endParaRPr lang="en-US" sz="900" dirty="0"/>
+          </a:p>
+        </p:txBody>
+      </p:sp>
+      <p:sp>
+        <p:nvSpPr>
+          <p:cNvPr id="24" name="Text 19"/>
+          <p:cNvSpPr txBox="1"/>
+          <p:nvPr/>
+        </p:nvSpPr>
+        <p:spPr>
+          <a:xfrm>
+            <a:off x="960120" y="128016"/>
+            <a:ext cx="2011680" cy="256032"/>
+          </a:xfrm>
+          <a:prstGeom prst="rect">
+            <a:avLst/>
+          </a:prstGeom>
+          <a:noFill/>
+          <a:ln/>
+        </p:spPr>
+        <p:txBody>
+          <a:bodyPr wrap="square" lIns="0" tIns="0" rIns="0" bIns="0" rtlCol="0" anchor="ctr"/>
+          <a:lstStyle/>
+          <a:p>
+            <a:pPr indent="0" marL="0">
+              <a:buNone/>
+            </a:pPr>
+            <a:r>
+              <a:rPr lang="en-US" sz="900" dirty="0">
+                <a:solidFill>
+                  <a:srgbClr val="5F7183"/>
+                </a:solidFill>
+                <a:latin typeface="Arial" pitchFamily="34" charset="0"/>
+                <a:ea typeface="Arial" pitchFamily="34" charset="-122"/>
+                <a:cs typeface="Arial" pitchFamily="34" charset="-120"/>
+              </a:rPr>
+              <a:t>Tiết 2 · 第 2 節</a:t>
+            </a:r>
+            <a:endParaRPr lang="en-US" sz="900" dirty="0"/>
+          </a:p>
+        </p:txBody>
+      </p:sp>
+    </p:spTree>
+  </p:cSld>
+  <p:clrMapOvr>
+    <a:masterClrMapping/>
+  </p:clrMapOvr>
+</p:sld>
+</file>
+
+<file path=ppt/slides/slide18.xml><?xml version="1.0" encoding="utf-8"?>
+<p:sld xmlns:a="http://schemas.openxmlformats.org/drawingml/2006/main" xmlns:r="http://schemas.openxmlformats.org/officeDocument/2006/relationships" xmlns:p="http://schemas.openxmlformats.org/presentationml/2006/main">
+  <p:cSld name="Slide 18">
+    <p:spTree>
+      <p:nvGrpSpPr>
+        <p:cNvPr id="1" name=""/>
+        <p:cNvGrpSpPr/>
+        <p:nvPr/>
+      </p:nvGrpSpPr>
+      <p:grpSpPr>
+        <a:xfrm>
+          <a:off x="0" y="0"/>
+          <a:ext cx="1" cy="1"/>
+          <a:chOff x="0" y="0"/>
+          <a:chExt cx="0" cy="0"/>
+        </a:xfrm>
+      </p:grpSpPr>
+      <p:sp>
+        <p:nvSpPr>
+          <p:cNvPr id="2" name="Text 0"/>
+          <p:cNvSpPr txBox="1"/>
+          <p:nvPr/>
+        </p:nvSpPr>
+        <p:spPr>
+          <a:xfrm>
             <a:off x="502920" y="420624"/>
             <a:ext cx="8138160" cy="274320"/>
           </a:xfrm>
@@ -19417,7 +21042,7 @@
                 <a:ea typeface="Arial" pitchFamily="34" charset="-122"/>
                 <a:cs typeface="Arial" pitchFamily="34" charset="-120"/>
               </a:rPr>
-              <a:t>17 / 21</a:t>
+              <a:t>18 / 22</a:t>
             </a:r>
             <a:endParaRPr lang="en-US" sz="900" dirty="0"/>
           </a:p>
@@ -19470,9 +21095,9 @@
 </p:sld>
 </file>
 
-<file path=ppt/slides/slide18.xml><?xml version="1.0" encoding="utf-8"?>
+<file path=ppt/slides/slide19.xml><?xml version="1.0" encoding="utf-8"?>
 <p:sld xmlns:a="http://schemas.openxmlformats.org/drawingml/2006/main" xmlns:r="http://schemas.openxmlformats.org/officeDocument/2006/relationships" xmlns:p="http://schemas.openxmlformats.org/presentationml/2006/main">
-  <p:cSld name="Slide 18">
+  <p:cSld name="Slide 19">
     <p:bg>
       <p:bgPr>
         <a:solidFill>
@@ -19921,7 +21546,7 @@
                 <a:ea typeface="Arial" pitchFamily="34" charset="-122"/>
                 <a:cs typeface="Arial" pitchFamily="34" charset="-120"/>
               </a:rPr>
-              <a:t>18 / 21</a:t>
+              <a:t>19 / 22</a:t>
             </a:r>
             <a:endParaRPr lang="en-US" sz="900" dirty="0"/>
           </a:p>
@@ -19955,420 +21580,6 @@
               <a:rPr lang="en-US" sz="900" dirty="0">
                 <a:solidFill>
                   <a:srgbClr val="9FB3C8"/>
-                </a:solidFill>
-                <a:latin typeface="Arial" pitchFamily="34" charset="0"/>
-                <a:ea typeface="Arial" pitchFamily="34" charset="-122"/>
-                <a:cs typeface="Arial" pitchFamily="34" charset="-120"/>
-              </a:rPr>
-              <a:t>Tiết 2 · 第 2 節</a:t>
-            </a:r>
-            <a:endParaRPr lang="en-US" sz="900" dirty="0"/>
-          </a:p>
-        </p:txBody>
-      </p:sp>
-    </p:spTree>
-  </p:cSld>
-  <p:clrMapOvr>
-    <a:masterClrMapping/>
-  </p:clrMapOvr>
-</p:sld>
-</file>
-
-<file path=ppt/slides/slide19.xml><?xml version="1.0" encoding="utf-8"?>
-<p:sld xmlns:a="http://schemas.openxmlformats.org/drawingml/2006/main" xmlns:r="http://schemas.openxmlformats.org/officeDocument/2006/relationships" xmlns:p="http://schemas.openxmlformats.org/presentationml/2006/main">
-  <p:cSld name="Slide 19">
-    <p:spTree>
-      <p:nvGrpSpPr>
-        <p:cNvPr id="1" name=""/>
-        <p:cNvGrpSpPr/>
-        <p:nvPr/>
-      </p:nvGrpSpPr>
-      <p:grpSpPr>
-        <a:xfrm>
-          <a:off x="0" y="0"/>
-          <a:ext cx="1" cy="1"/>
-          <a:chOff x="0" y="0"/>
-          <a:chExt cx="0" cy="0"/>
-        </a:xfrm>
-      </p:grpSpPr>
-      <p:sp>
-        <p:nvSpPr>
-          <p:cNvPr id="2" name="Text 0"/>
-          <p:cNvSpPr txBox="1"/>
-          <p:nvPr/>
-        </p:nvSpPr>
-        <p:spPr>
-          <a:xfrm>
-            <a:off x="502920" y="420624"/>
-            <a:ext cx="8138160" cy="274320"/>
-          </a:xfrm>
-          <a:prstGeom prst="rect">
-            <a:avLst/>
-          </a:prstGeom>
-          <a:noFill/>
-          <a:ln/>
-        </p:spPr>
-        <p:txBody>
-          <a:bodyPr wrap="square" lIns="0" tIns="0" rIns="0" bIns="0" rtlCol="0" anchor="ctr"/>
-          <a:lstStyle/>
-          <a:p>
-            <a:pPr indent="0" marL="0">
-              <a:buNone/>
-            </a:pPr>
-            <a:r>
-              <a:rPr lang="en-US" sz="1250" b="1" dirty="0">
-                <a:solidFill>
-                  <a:srgbClr val="007F72"/>
-                </a:solidFill>
-                <a:latin typeface="Arial" pitchFamily="34" charset="0"/>
-                <a:ea typeface="Arial" pitchFamily="34" charset="-122"/>
-                <a:cs typeface="Arial" pitchFamily="34" charset="-120"/>
-              </a:rPr>
-              <a:t>Phụ lục · 附錄（不計時）</a:t>
-            </a:r>
-            <a:endParaRPr lang="en-US" sz="1250" dirty="0"/>
-          </a:p>
-        </p:txBody>
-      </p:sp>
-      <p:sp>
-        <p:nvSpPr>
-          <p:cNvPr id="3" name="Text 1"/>
-          <p:cNvSpPr txBox="1"/>
-          <p:nvPr/>
-        </p:nvSpPr>
-        <p:spPr>
-          <a:xfrm>
-            <a:off x="502920" y="731520"/>
-            <a:ext cx="8138160" cy="585216"/>
-          </a:xfrm>
-          <a:prstGeom prst="rect">
-            <a:avLst/>
-          </a:prstGeom>
-          <a:noFill/>
-          <a:ln/>
-        </p:spPr>
-        <p:txBody>
-          <a:bodyPr wrap="square" lIns="0" tIns="0" rIns="0" bIns="0" rtlCol="0" anchor="t"/>
-          <a:lstStyle/>
-          <a:p>
-            <a:pPr indent="0" marL="0">
-              <a:lnSpc>
-                <a:spcPct val="120000"/>
-              </a:lnSpc>
-              <a:buNone/>
-            </a:pPr>
-            <a:r>
-              <a:rPr lang="en-US" sz="1700" b="1" dirty="0">
-                <a:solidFill>
-                  <a:srgbClr val="0B1F3A"/>
-                </a:solidFill>
-                <a:latin typeface="Arial" pitchFamily="34" charset="0"/>
-                <a:ea typeface="Arial" pitchFamily="34" charset="-122"/>
-                <a:cs typeface="Arial" pitchFamily="34" charset="-120"/>
-              </a:rPr>
-              <a:t>Ouster OS1 — toàn bộ datasheet gốc (3 trang thông số)</a:t>
-            </a:r>
-            <a:endParaRPr lang="en-US" sz="1700" dirty="0"/>
-          </a:p>
-          <a:p>
-            <a:pPr indent="0" marL="0">
-              <a:lnSpc>
-                <a:spcPct val="120000"/>
-              </a:lnSpc>
-              <a:buNone/>
-            </a:pPr>
-            <a:r>
-              <a:rPr lang="en-US" sz="1300" dirty="0">
-                <a:solidFill>
-                  <a:srgbClr val="007F72"/>
-                </a:solidFill>
-                <a:latin typeface="微軟正黑體" pitchFamily="34" charset="0"/>
-                <a:ea typeface="微軟正黑體" pitchFamily="34" charset="-122"/>
-                <a:cs typeface="微軟正黑體" pitchFamily="34" charset="-120"/>
-              </a:rPr>
-              <a:t>Ouster OS1 — 廠商規格書原頁（規格那三頁）</a:t>
-            </a:r>
-            <a:endParaRPr lang="en-US" sz="1700" dirty="0"/>
-          </a:p>
-        </p:txBody>
-      </p:sp>
-      <p:sp>
-        <p:nvSpPr>
-          <p:cNvPr id="4" name="Shape 2"/>
-          <p:cNvSpPr/>
-          <p:nvPr/>
-        </p:nvSpPr>
-        <p:spPr>
-          <a:xfrm>
-            <a:off x="970511" y="1371600"/>
-            <a:ext cx="2340033" cy="3017520"/>
-          </a:xfrm>
-          <a:prstGeom prst="rect">
-            <a:avLst/>
-          </a:prstGeom>
-          <a:solidFill>
-            <a:srgbClr val="FFFFFF"/>
-          </a:solidFill>
-          <a:ln w="12700">
-            <a:solidFill>
-              <a:srgbClr val="DBE3EA"/>
-            </a:solidFill>
-            <a:prstDash val="solid"/>
-          </a:ln>
-        </p:spPr>
-      </p:sp>
-      <p:pic>
-        <p:nvPicPr>
-          <p:cNvPr id="5" name="Image 0" descr="/Users/tsengchenghsun/Class/carClass/Claude outputs/第五週(10-8)/src/img/w5_ds_os1_p1.png">    </p:cNvPr>
-          <p:cNvPicPr>
-            <a:picLocks noChangeAspect="1"/>
-          </p:cNvPicPr>
-          <p:nvPr/>
-        </p:nvPicPr>
-        <p:blipFill>
-          <a:blip r:embed="rId1"/>
-          <a:stretch>
-            <a:fillRect/>
-          </a:stretch>
-        </p:blipFill>
-        <p:spPr>
-          <a:xfrm>
-            <a:off x="988799" y="1389888"/>
-            <a:ext cx="2303457" cy="2980944"/>
-          </a:xfrm>
-          <a:prstGeom prst="rect">
-            <a:avLst/>
-          </a:prstGeom>
-        </p:spPr>
-      </p:pic>
-      <p:sp>
-        <p:nvSpPr>
-          <p:cNvPr id="6" name="Shape 3"/>
-          <p:cNvSpPr/>
-          <p:nvPr/>
-        </p:nvSpPr>
-        <p:spPr>
-          <a:xfrm>
-            <a:off x="3401984" y="1371600"/>
-            <a:ext cx="2340033" cy="3017520"/>
-          </a:xfrm>
-          <a:prstGeom prst="rect">
-            <a:avLst/>
-          </a:prstGeom>
-          <a:solidFill>
-            <a:srgbClr val="FFFFFF"/>
-          </a:solidFill>
-          <a:ln w="12700">
-            <a:solidFill>
-              <a:srgbClr val="DBE3EA"/>
-            </a:solidFill>
-            <a:prstDash val="solid"/>
-          </a:ln>
-        </p:spPr>
-      </p:sp>
-      <p:pic>
-        <p:nvPicPr>
-          <p:cNvPr id="7" name="Image 1" descr="/Users/tsengchenghsun/Class/carClass/Claude outputs/第五週(10-8)/src/img/w5_ds_os1_p2.png">    </p:cNvPr>
-          <p:cNvPicPr>
-            <a:picLocks noChangeAspect="1"/>
-          </p:cNvPicPr>
-          <p:nvPr/>
-        </p:nvPicPr>
-        <p:blipFill>
-          <a:blip r:embed="rId2"/>
-          <a:stretch>
-            <a:fillRect/>
-          </a:stretch>
-        </p:blipFill>
-        <p:spPr>
-          <a:xfrm>
-            <a:off x="3420272" y="1389888"/>
-            <a:ext cx="2303457" cy="2980944"/>
-          </a:xfrm>
-          <a:prstGeom prst="rect">
-            <a:avLst/>
-          </a:prstGeom>
-        </p:spPr>
-      </p:pic>
-      <p:sp>
-        <p:nvSpPr>
-          <p:cNvPr id="8" name="Shape 4"/>
-          <p:cNvSpPr/>
-          <p:nvPr/>
-        </p:nvSpPr>
-        <p:spPr>
-          <a:xfrm>
-            <a:off x="5833456" y="1371600"/>
-            <a:ext cx="2340033" cy="3017520"/>
-          </a:xfrm>
-          <a:prstGeom prst="rect">
-            <a:avLst/>
-          </a:prstGeom>
-          <a:solidFill>
-            <a:srgbClr val="FFFFFF"/>
-          </a:solidFill>
-          <a:ln w="12700">
-            <a:solidFill>
-              <a:srgbClr val="DBE3EA"/>
-            </a:solidFill>
-            <a:prstDash val="solid"/>
-          </a:ln>
-        </p:spPr>
-      </p:sp>
-      <p:pic>
-        <p:nvPicPr>
-          <p:cNvPr id="9" name="Image 2" descr="/Users/tsengchenghsun/Class/carClass/Claude outputs/第五週(10-8)/src/img/w5_ds_os1_p3.png">    </p:cNvPr>
-          <p:cNvPicPr>
-            <a:picLocks noChangeAspect="1"/>
-          </p:cNvPicPr>
-          <p:nvPr/>
-        </p:nvPicPr>
-        <p:blipFill>
-          <a:blip r:embed="rId3"/>
-          <a:stretch>
-            <a:fillRect/>
-          </a:stretch>
-        </p:blipFill>
-        <p:spPr>
-          <a:xfrm>
-            <a:off x="5851744" y="1389888"/>
-            <a:ext cx="2303457" cy="2980944"/>
-          </a:xfrm>
-          <a:prstGeom prst="rect">
-            <a:avLst/>
-          </a:prstGeom>
-        </p:spPr>
-      </p:pic>
-      <p:sp>
-        <p:nvSpPr>
-          <p:cNvPr id="10" name="Text 5"/>
-          <p:cNvSpPr txBox="1"/>
-          <p:nvPr/>
-        </p:nvSpPr>
-        <p:spPr>
-          <a:xfrm>
-            <a:off x="502920" y="4407408"/>
-            <a:ext cx="8138160" cy="201168"/>
-          </a:xfrm>
-          <a:prstGeom prst="rect">
-            <a:avLst/>
-          </a:prstGeom>
-          <a:noFill/>
-          <a:ln/>
-        </p:spPr>
-        <p:txBody>
-          <a:bodyPr wrap="square" lIns="0" tIns="0" rIns="0" bIns="0" rtlCol="0" anchor="ctr"/>
-          <a:lstStyle/>
-          <a:p>
-            <a:pPr algn="ctr" indent="0" marL="0">
-              <a:buNone/>
-            </a:pPr>
-            <a:r>
-              <a:rPr lang="en-US" sz="850" dirty="0">
-                <a:solidFill>
-                  <a:srgbClr val="5F7183"/>
-                </a:solidFill>
-                <a:latin typeface="Arial" pitchFamily="34" charset="0"/>
-                <a:ea typeface="Arial" pitchFamily="34" charset="-122"/>
-                <a:cs typeface="Arial" pitchFamily="34" charset="-120"/>
-              </a:rPr>
-              <a:t>Ouster OS1 datasheet, hardware Rev7 / firmware 3.2 · 官方 PDF 第 1–3 頁原頁全文 · 讀取 2026/10/02 · 版權歸 Ouster，課堂引用</a:t>
-            </a:r>
-            <a:endParaRPr lang="en-US" sz="850" dirty="0"/>
-          </a:p>
-        </p:txBody>
-      </p:sp>
-      <p:pic>
-        <p:nvPicPr>
-          <p:cNvPr id="12" name="Image 3" descr="/Users/tsengchenghsun/Class/carClass/Claude outputs/第五週(10-8)/src/logo.png">    </p:cNvPr>
-          <p:cNvPicPr>
-            <a:picLocks noChangeAspect="1"/>
-          </p:cNvPicPr>
-          <p:nvPr/>
-        </p:nvPicPr>
-        <p:blipFill>
-          <a:blip r:embed="rId4"/>
-          <a:stretch>
-            <a:fillRect/>
-          </a:stretch>
-        </p:blipFill>
-        <p:spPr>
-          <a:xfrm>
-            <a:off x="7882128" y="109728"/>
-            <a:ext cx="1097280" cy="242439"/>
-          </a:xfrm>
-          <a:prstGeom prst="rect">
-            <a:avLst/>
-          </a:prstGeom>
-        </p:spPr>
-      </p:pic>
-      <p:sp>
-        <p:nvSpPr>
-          <p:cNvPr id="13" name="Text 6"/>
-          <p:cNvSpPr txBox="1"/>
-          <p:nvPr/>
-        </p:nvSpPr>
-        <p:spPr>
-          <a:xfrm>
-            <a:off x="109728" y="128016"/>
-            <a:ext cx="822960" cy="256032"/>
-          </a:xfrm>
-          <a:prstGeom prst="rect">
-            <a:avLst/>
-          </a:prstGeom>
-          <a:noFill/>
-          <a:ln/>
-        </p:spPr>
-        <p:txBody>
-          <a:bodyPr wrap="square" lIns="0" tIns="0" rIns="0" bIns="0" rtlCol="0" anchor="ctr"/>
-          <a:lstStyle/>
-          <a:p>
-            <a:pPr indent="0" marL="0">
-              <a:buNone/>
-            </a:pPr>
-            <a:r>
-              <a:rPr lang="en-US" sz="900" dirty="0">
-                <a:solidFill>
-                  <a:srgbClr val="5F7183"/>
-                </a:solidFill>
-                <a:latin typeface="Arial" pitchFamily="34" charset="0"/>
-                <a:ea typeface="Arial" pitchFamily="34" charset="-122"/>
-                <a:cs typeface="Arial" pitchFamily="34" charset="-120"/>
-              </a:rPr>
-              <a:t>19 / 21</a:t>
-            </a:r>
-            <a:endParaRPr lang="en-US" sz="900" dirty="0"/>
-          </a:p>
-        </p:txBody>
-      </p:sp>
-      <p:sp>
-        <p:nvSpPr>
-          <p:cNvPr id="14" name="Text 7"/>
-          <p:cNvSpPr txBox="1"/>
-          <p:nvPr/>
-        </p:nvSpPr>
-        <p:spPr>
-          <a:xfrm>
-            <a:off x="960120" y="128016"/>
-            <a:ext cx="2011680" cy="256032"/>
-          </a:xfrm>
-          <a:prstGeom prst="rect">
-            <a:avLst/>
-          </a:prstGeom>
-          <a:noFill/>
-          <a:ln/>
-        </p:spPr>
-        <p:txBody>
-          <a:bodyPr wrap="square" lIns="0" tIns="0" rIns="0" bIns="0" rtlCol="0" anchor="ctr"/>
-          <a:lstStyle/>
-          <a:p>
-            <a:pPr indent="0" marL="0">
-              <a:buNone/>
-            </a:pPr>
-            <a:r>
-              <a:rPr lang="en-US" sz="900" dirty="0">
-                <a:solidFill>
-                  <a:srgbClr val="5F7183"/>
                 </a:solidFill>
                 <a:latin typeface="Arial" pitchFamily="34" charset="0"/>
                 <a:ea typeface="Arial" pitchFamily="34" charset="-122"/>
@@ -20655,7 +21866,7 @@
                 <a:ea typeface="Arial" pitchFamily="34" charset="-122"/>
                 <a:cs typeface="Arial" pitchFamily="34" charset="-120"/>
               </a:rPr>
-              <a:t>2 / 21</a:t>
+              <a:t>2 / 22</a:t>
             </a:r>
             <a:endParaRPr lang="en-US" sz="900" dirty="0"/>
           </a:p>
@@ -20800,7 +22011,7 @@
                 <a:ea typeface="Arial" pitchFamily="34" charset="-122"/>
                 <a:cs typeface="Arial" pitchFamily="34" charset="-120"/>
               </a:rPr>
-              <a:t>Hesai AT128P — nguyên trang sổ tay (phần thông số)</a:t>
+              <a:t>Ouster OS1 — toàn bộ datasheet gốc (3 trang thông số)</a:t>
             </a:r>
             <a:endParaRPr lang="en-US" sz="1700" dirty="0"/>
           </a:p>
@@ -20820,7 +22031,7 @@
                 <a:ea typeface="微軟正黑體" pitchFamily="34" charset="-122"/>
                 <a:cs typeface="微軟正黑體" pitchFamily="34" charset="-120"/>
               </a:rPr>
-              <a:t>Hesai AT128P — 使用手冊原頁（規格那兩頁）</a:t>
+              <a:t>Ouster OS1 — 廠商規格書原頁（規格那三頁）</a:t>
             </a:r>
             <a:endParaRPr lang="en-US" sz="1700" dirty="0"/>
           </a:p>
@@ -20834,8 +22045,8 @@
         </p:nvSpPr>
         <p:spPr>
           <a:xfrm>
-            <a:off x="484632" y="1445999"/>
-            <a:ext cx="4041648" cy="2868722"/>
+            <a:off x="970511" y="1371600"/>
+            <a:ext cx="2340033" cy="3017520"/>
           </a:xfrm>
           <a:prstGeom prst="rect">
             <a:avLst/>
@@ -20853,7 +22064,7 @@
       </p:sp>
       <p:pic>
         <p:nvPicPr>
-          <p:cNvPr id="5" name="Image 0" descr="/Users/tsengchenghsun/Class/carClass/Claude outputs/第五週(10-8)/src/img/w5_ds_at128p_p13.png">    </p:cNvPr>
+          <p:cNvPr id="5" name="Image 0" descr="/Users/tsengchenghsun/Class/carClass/Claude outputs/第五週(10-8)/src/img/w5_ds_os1_p1.png">    </p:cNvPr>
           <p:cNvPicPr>
             <a:picLocks noChangeAspect="1"/>
           </p:cNvPicPr>
@@ -20867,8 +22078,8 @@
         </p:blipFill>
         <p:spPr>
           <a:xfrm>
-            <a:off x="502920" y="1464287"/>
-            <a:ext cx="4005072" cy="2832146"/>
+            <a:off x="988799" y="1389888"/>
+            <a:ext cx="2303457" cy="2980944"/>
           </a:xfrm>
           <a:prstGeom prst="rect">
             <a:avLst/>
@@ -20883,8 +22094,8 @@
         </p:nvSpPr>
         <p:spPr>
           <a:xfrm>
-            <a:off x="4617720" y="1445999"/>
-            <a:ext cx="4041648" cy="2868722"/>
+            <a:off x="3401984" y="1371600"/>
+            <a:ext cx="2340033" cy="3017520"/>
           </a:xfrm>
           <a:prstGeom prst="rect">
             <a:avLst/>
@@ -20902,7 +22113,7 @@
       </p:sp>
       <p:pic>
         <p:nvPicPr>
-          <p:cNvPr id="7" name="Image 1" descr="/Users/tsengchenghsun/Class/carClass/Claude outputs/第五週(10-8)/src/img/w5_ds_at128p_p15.png">    </p:cNvPr>
+          <p:cNvPr id="7" name="Image 1" descr="/Users/tsengchenghsun/Class/carClass/Claude outputs/第五週(10-8)/src/img/w5_ds_os1_p2.png">    </p:cNvPr>
           <p:cNvPicPr>
             <a:picLocks noChangeAspect="1"/>
           </p:cNvPicPr>
@@ -20916,8 +22127,8 @@
         </p:blipFill>
         <p:spPr>
           <a:xfrm>
-            <a:off x="4636008" y="1464287"/>
-            <a:ext cx="4005072" cy="2832146"/>
+            <a:off x="3420272" y="1389888"/>
+            <a:ext cx="2303457" cy="2980944"/>
           </a:xfrm>
           <a:prstGeom prst="rect">
             <a:avLst/>
@@ -20926,46 +22137,32 @@
       </p:pic>
       <p:sp>
         <p:nvSpPr>
-          <p:cNvPr id="8" name="Text 4"/>
-          <p:cNvSpPr txBox="1"/>
+          <p:cNvPr id="8" name="Shape 4"/>
+          <p:cNvSpPr/>
           <p:nvPr/>
         </p:nvSpPr>
         <p:spPr>
           <a:xfrm>
-            <a:off x="502920" y="4407408"/>
-            <a:ext cx="8138160" cy="201168"/>
+            <a:off x="5833456" y="1371600"/>
+            <a:ext cx="2340033" cy="3017520"/>
           </a:xfrm>
           <a:prstGeom prst="rect">
             <a:avLst/>
           </a:prstGeom>
-          <a:noFill/>
-          <a:ln/>
-        </p:spPr>
-        <p:txBody>
-          <a:bodyPr wrap="square" lIns="0" tIns="0" rIns="0" bIns="0" rtlCol="0" anchor="ctr"/>
-          <a:lstStyle/>
-          <a:p>
-            <a:pPr algn="ctr" indent="0" marL="0">
-              <a:buNone/>
-            </a:pPr>
-            <a:r>
-              <a:rPr lang="en-US" sz="850" dirty="0">
-                <a:solidFill>
-                  <a:srgbClr val="5F7183"/>
-                </a:solidFill>
-                <a:latin typeface="Arial" pitchFamily="34" charset="0"/>
-                <a:ea typeface="Arial" pitchFamily="34" charset="-122"/>
-                <a:cs typeface="Arial" pitchFamily="34" charset="-120"/>
-              </a:rPr>
-              <a:t>Hesai AT128P User Manual A02（en-250410）· §1.5 Specifications 第 13 頁與註解第 15 頁原頁全文 · 讀取 2026/10/02 · 版權歸 Hesai，課堂引用</a:t>
-            </a:r>
-            <a:endParaRPr lang="en-US" sz="850" dirty="0"/>
-          </a:p>
-        </p:txBody>
+          <a:solidFill>
+            <a:srgbClr val="FFFFFF"/>
+          </a:solidFill>
+          <a:ln w="12700">
+            <a:solidFill>
+              <a:srgbClr val="DBE3EA"/>
+            </a:solidFill>
+            <a:prstDash val="solid"/>
+          </a:ln>
+        </p:spPr>
       </p:sp>
       <p:pic>
         <p:nvPicPr>
-          <p:cNvPr id="10" name="Image 2" descr="/Users/tsengchenghsun/Class/carClass/Claude outputs/第五週(10-8)/src/logo.png">    </p:cNvPr>
+          <p:cNvPr id="9" name="Image 2" descr="/Users/tsengchenghsun/Class/carClass/Claude outputs/第五週(10-8)/src/img/w5_ds_os1_p3.png">    </p:cNvPr>
           <p:cNvPicPr>
             <a:picLocks noChangeAspect="1"/>
           </p:cNvPicPr>
@@ -20979,8 +22176,8 @@
         </p:blipFill>
         <p:spPr>
           <a:xfrm>
-            <a:off x="7882128" y="109728"/>
-            <a:ext cx="1097280" cy="242439"/>
+            <a:off x="5851744" y="1389888"/>
+            <a:ext cx="2303457" cy="2980944"/>
           </a:xfrm>
           <a:prstGeom prst="rect">
             <a:avLst/>
@@ -20989,14 +22186,14 @@
       </p:pic>
       <p:sp>
         <p:nvSpPr>
-          <p:cNvPr id="11" name="Text 5"/>
+          <p:cNvPr id="10" name="Text 5"/>
           <p:cNvSpPr txBox="1"/>
           <p:nvPr/>
         </p:nvSpPr>
         <p:spPr>
           <a:xfrm>
-            <a:off x="109728" y="128016"/>
-            <a:ext cx="822960" cy="256032"/>
+            <a:off x="502920" y="4407408"/>
+            <a:ext cx="8138160" cy="201168"/>
           </a:xfrm>
           <a:prstGeom prst="rect">
             <a:avLst/>
@@ -21008,11 +22205,11 @@
           <a:bodyPr wrap="square" lIns="0" tIns="0" rIns="0" bIns="0" rtlCol="0" anchor="ctr"/>
           <a:lstStyle/>
           <a:p>
-            <a:pPr indent="0" marL="0">
+            <a:pPr algn="ctr" indent="0" marL="0">
               <a:buNone/>
             </a:pPr>
             <a:r>
-              <a:rPr lang="en-US" sz="900" dirty="0">
+              <a:rPr lang="en-US" sz="850" dirty="0">
                 <a:solidFill>
                   <a:srgbClr val="5F7183"/>
                 </a:solidFill>
@@ -21020,7 +22217,70 @@
                 <a:ea typeface="Arial" pitchFamily="34" charset="-122"/>
                 <a:cs typeface="Arial" pitchFamily="34" charset="-120"/>
               </a:rPr>
-              <a:t>20 / 21</a:t>
+              <a:t>Ouster OS1 datasheet, hardware Rev7 / firmware 3.2 · 官方 PDF 第 1–3 頁原頁全文 · 讀取 2026/10/02 · 版權歸 Ouster，課堂引用</a:t>
+            </a:r>
+            <a:endParaRPr lang="en-US" sz="850" dirty="0"/>
+          </a:p>
+        </p:txBody>
+      </p:sp>
+      <p:pic>
+        <p:nvPicPr>
+          <p:cNvPr id="12" name="Image 3" descr="/Users/tsengchenghsun/Class/carClass/Claude outputs/第五週(10-8)/src/logo.png">    </p:cNvPr>
+          <p:cNvPicPr>
+            <a:picLocks noChangeAspect="1"/>
+          </p:cNvPicPr>
+          <p:nvPr/>
+        </p:nvPicPr>
+        <p:blipFill>
+          <a:blip r:embed="rId4"/>
+          <a:stretch>
+            <a:fillRect/>
+          </a:stretch>
+        </p:blipFill>
+        <p:spPr>
+          <a:xfrm>
+            <a:off x="7882128" y="109728"/>
+            <a:ext cx="1097280" cy="242439"/>
+          </a:xfrm>
+          <a:prstGeom prst="rect">
+            <a:avLst/>
+          </a:prstGeom>
+        </p:spPr>
+      </p:pic>
+      <p:sp>
+        <p:nvSpPr>
+          <p:cNvPr id="13" name="Text 6"/>
+          <p:cNvSpPr txBox="1"/>
+          <p:nvPr/>
+        </p:nvSpPr>
+        <p:spPr>
+          <a:xfrm>
+            <a:off x="109728" y="128016"/>
+            <a:ext cx="822960" cy="256032"/>
+          </a:xfrm>
+          <a:prstGeom prst="rect">
+            <a:avLst/>
+          </a:prstGeom>
+          <a:noFill/>
+          <a:ln/>
+        </p:spPr>
+        <p:txBody>
+          <a:bodyPr wrap="square" lIns="0" tIns="0" rIns="0" bIns="0" rtlCol="0" anchor="ctr"/>
+          <a:lstStyle/>
+          <a:p>
+            <a:pPr indent="0" marL="0">
+              <a:buNone/>
+            </a:pPr>
+            <a:r>
+              <a:rPr lang="en-US" sz="900" dirty="0">
+                <a:solidFill>
+                  <a:srgbClr val="5F7183"/>
+                </a:solidFill>
+                <a:latin typeface="Arial" pitchFamily="34" charset="0"/>
+                <a:ea typeface="Arial" pitchFamily="34" charset="-122"/>
+                <a:cs typeface="Arial" pitchFamily="34" charset="-120"/>
+              </a:rPr>
+              <a:t>20 / 22</a:t>
             </a:r>
             <a:endParaRPr lang="en-US" sz="900" dirty="0"/>
           </a:p>
@@ -21028,7 +22288,7 @@
       </p:sp>
       <p:sp>
         <p:nvSpPr>
-          <p:cNvPr id="12" name="Text 6"/>
+          <p:cNvPr id="14" name="Text 7"/>
           <p:cNvSpPr txBox="1"/>
           <p:nvPr/>
         </p:nvSpPr>
@@ -21165,6 +22425,371 @@
                 <a:ea typeface="Arial" pitchFamily="34" charset="-122"/>
                 <a:cs typeface="Arial" pitchFamily="34" charset="-120"/>
               </a:rPr>
+              <a:t>Hesai AT128P — nguyên trang sổ tay (phần thông số)</a:t>
+            </a:r>
+            <a:endParaRPr lang="en-US" sz="1700" dirty="0"/>
+          </a:p>
+          <a:p>
+            <a:pPr indent="0" marL="0">
+              <a:lnSpc>
+                <a:spcPct val="120000"/>
+              </a:lnSpc>
+              <a:buNone/>
+            </a:pPr>
+            <a:r>
+              <a:rPr lang="en-US" sz="1300" dirty="0">
+                <a:solidFill>
+                  <a:srgbClr val="007F72"/>
+                </a:solidFill>
+                <a:latin typeface="微軟正黑體" pitchFamily="34" charset="0"/>
+                <a:ea typeface="微軟正黑體" pitchFamily="34" charset="-122"/>
+                <a:cs typeface="微軟正黑體" pitchFamily="34" charset="-120"/>
+              </a:rPr>
+              <a:t>Hesai AT128P — 使用手冊原頁（規格那兩頁）</a:t>
+            </a:r>
+            <a:endParaRPr lang="en-US" sz="1700" dirty="0"/>
+          </a:p>
+        </p:txBody>
+      </p:sp>
+      <p:sp>
+        <p:nvSpPr>
+          <p:cNvPr id="4" name="Shape 2"/>
+          <p:cNvSpPr/>
+          <p:nvPr/>
+        </p:nvSpPr>
+        <p:spPr>
+          <a:xfrm>
+            <a:off x="484632" y="1445999"/>
+            <a:ext cx="4041648" cy="2868722"/>
+          </a:xfrm>
+          <a:prstGeom prst="rect">
+            <a:avLst/>
+          </a:prstGeom>
+          <a:solidFill>
+            <a:srgbClr val="FFFFFF"/>
+          </a:solidFill>
+          <a:ln w="12700">
+            <a:solidFill>
+              <a:srgbClr val="DBE3EA"/>
+            </a:solidFill>
+            <a:prstDash val="solid"/>
+          </a:ln>
+        </p:spPr>
+      </p:sp>
+      <p:pic>
+        <p:nvPicPr>
+          <p:cNvPr id="5" name="Image 0" descr="/Users/tsengchenghsun/Class/carClass/Claude outputs/第五週(10-8)/src/img/w5_ds_at128p_p13.png">    </p:cNvPr>
+          <p:cNvPicPr>
+            <a:picLocks noChangeAspect="1"/>
+          </p:cNvPicPr>
+          <p:nvPr/>
+        </p:nvPicPr>
+        <p:blipFill>
+          <a:blip r:embed="rId1"/>
+          <a:stretch>
+            <a:fillRect/>
+          </a:stretch>
+        </p:blipFill>
+        <p:spPr>
+          <a:xfrm>
+            <a:off x="502920" y="1464287"/>
+            <a:ext cx="4005072" cy="2832146"/>
+          </a:xfrm>
+          <a:prstGeom prst="rect">
+            <a:avLst/>
+          </a:prstGeom>
+        </p:spPr>
+      </p:pic>
+      <p:sp>
+        <p:nvSpPr>
+          <p:cNvPr id="6" name="Shape 3"/>
+          <p:cNvSpPr/>
+          <p:nvPr/>
+        </p:nvSpPr>
+        <p:spPr>
+          <a:xfrm>
+            <a:off x="4617720" y="1445999"/>
+            <a:ext cx="4041648" cy="2868722"/>
+          </a:xfrm>
+          <a:prstGeom prst="rect">
+            <a:avLst/>
+          </a:prstGeom>
+          <a:solidFill>
+            <a:srgbClr val="FFFFFF"/>
+          </a:solidFill>
+          <a:ln w="12700">
+            <a:solidFill>
+              <a:srgbClr val="DBE3EA"/>
+            </a:solidFill>
+            <a:prstDash val="solid"/>
+          </a:ln>
+        </p:spPr>
+      </p:sp>
+      <p:pic>
+        <p:nvPicPr>
+          <p:cNvPr id="7" name="Image 1" descr="/Users/tsengchenghsun/Class/carClass/Claude outputs/第五週(10-8)/src/img/w5_ds_at128p_p15.png">    </p:cNvPr>
+          <p:cNvPicPr>
+            <a:picLocks noChangeAspect="1"/>
+          </p:cNvPicPr>
+          <p:nvPr/>
+        </p:nvPicPr>
+        <p:blipFill>
+          <a:blip r:embed="rId2"/>
+          <a:stretch>
+            <a:fillRect/>
+          </a:stretch>
+        </p:blipFill>
+        <p:spPr>
+          <a:xfrm>
+            <a:off x="4636008" y="1464287"/>
+            <a:ext cx="4005072" cy="2832146"/>
+          </a:xfrm>
+          <a:prstGeom prst="rect">
+            <a:avLst/>
+          </a:prstGeom>
+        </p:spPr>
+      </p:pic>
+      <p:sp>
+        <p:nvSpPr>
+          <p:cNvPr id="8" name="Text 4"/>
+          <p:cNvSpPr txBox="1"/>
+          <p:nvPr/>
+        </p:nvSpPr>
+        <p:spPr>
+          <a:xfrm>
+            <a:off x="502920" y="4407408"/>
+            <a:ext cx="8138160" cy="201168"/>
+          </a:xfrm>
+          <a:prstGeom prst="rect">
+            <a:avLst/>
+          </a:prstGeom>
+          <a:noFill/>
+          <a:ln/>
+        </p:spPr>
+        <p:txBody>
+          <a:bodyPr wrap="square" lIns="0" tIns="0" rIns="0" bIns="0" rtlCol="0" anchor="ctr"/>
+          <a:lstStyle/>
+          <a:p>
+            <a:pPr algn="ctr" indent="0" marL="0">
+              <a:buNone/>
+            </a:pPr>
+            <a:r>
+              <a:rPr lang="en-US" sz="850" dirty="0">
+                <a:solidFill>
+                  <a:srgbClr val="5F7183"/>
+                </a:solidFill>
+                <a:latin typeface="Arial" pitchFamily="34" charset="0"/>
+                <a:ea typeface="Arial" pitchFamily="34" charset="-122"/>
+                <a:cs typeface="Arial" pitchFamily="34" charset="-120"/>
+              </a:rPr>
+              <a:t>Hesai AT128P User Manual A02（en-250410）· §1.5 Specifications 第 13 頁與註解第 15 頁原頁全文 · 讀取 2026/10/02 · 版權歸 Hesai，課堂引用</a:t>
+            </a:r>
+            <a:endParaRPr lang="en-US" sz="850" dirty="0"/>
+          </a:p>
+        </p:txBody>
+      </p:sp>
+      <p:pic>
+        <p:nvPicPr>
+          <p:cNvPr id="10" name="Image 2" descr="/Users/tsengchenghsun/Class/carClass/Claude outputs/第五週(10-8)/src/logo.png">    </p:cNvPr>
+          <p:cNvPicPr>
+            <a:picLocks noChangeAspect="1"/>
+          </p:cNvPicPr>
+          <p:nvPr/>
+        </p:nvPicPr>
+        <p:blipFill>
+          <a:blip r:embed="rId3"/>
+          <a:stretch>
+            <a:fillRect/>
+          </a:stretch>
+        </p:blipFill>
+        <p:spPr>
+          <a:xfrm>
+            <a:off x="7882128" y="109728"/>
+            <a:ext cx="1097280" cy="242439"/>
+          </a:xfrm>
+          <a:prstGeom prst="rect">
+            <a:avLst/>
+          </a:prstGeom>
+        </p:spPr>
+      </p:pic>
+      <p:sp>
+        <p:nvSpPr>
+          <p:cNvPr id="11" name="Text 5"/>
+          <p:cNvSpPr txBox="1"/>
+          <p:nvPr/>
+        </p:nvSpPr>
+        <p:spPr>
+          <a:xfrm>
+            <a:off x="109728" y="128016"/>
+            <a:ext cx="822960" cy="256032"/>
+          </a:xfrm>
+          <a:prstGeom prst="rect">
+            <a:avLst/>
+          </a:prstGeom>
+          <a:noFill/>
+          <a:ln/>
+        </p:spPr>
+        <p:txBody>
+          <a:bodyPr wrap="square" lIns="0" tIns="0" rIns="0" bIns="0" rtlCol="0" anchor="ctr"/>
+          <a:lstStyle/>
+          <a:p>
+            <a:pPr indent="0" marL="0">
+              <a:buNone/>
+            </a:pPr>
+            <a:r>
+              <a:rPr lang="en-US" sz="900" dirty="0">
+                <a:solidFill>
+                  <a:srgbClr val="5F7183"/>
+                </a:solidFill>
+                <a:latin typeface="Arial" pitchFamily="34" charset="0"/>
+                <a:ea typeface="Arial" pitchFamily="34" charset="-122"/>
+                <a:cs typeface="Arial" pitchFamily="34" charset="-120"/>
+              </a:rPr>
+              <a:t>21 / 22</a:t>
+            </a:r>
+            <a:endParaRPr lang="en-US" sz="900" dirty="0"/>
+          </a:p>
+        </p:txBody>
+      </p:sp>
+      <p:sp>
+        <p:nvSpPr>
+          <p:cNvPr id="12" name="Text 6"/>
+          <p:cNvSpPr txBox="1"/>
+          <p:nvPr/>
+        </p:nvSpPr>
+        <p:spPr>
+          <a:xfrm>
+            <a:off x="960120" y="128016"/>
+            <a:ext cx="2011680" cy="256032"/>
+          </a:xfrm>
+          <a:prstGeom prst="rect">
+            <a:avLst/>
+          </a:prstGeom>
+          <a:noFill/>
+          <a:ln/>
+        </p:spPr>
+        <p:txBody>
+          <a:bodyPr wrap="square" lIns="0" tIns="0" rIns="0" bIns="0" rtlCol="0" anchor="ctr"/>
+          <a:lstStyle/>
+          <a:p>
+            <a:pPr indent="0" marL="0">
+              <a:buNone/>
+            </a:pPr>
+            <a:r>
+              <a:rPr lang="en-US" sz="900" dirty="0">
+                <a:solidFill>
+                  <a:srgbClr val="5F7183"/>
+                </a:solidFill>
+                <a:latin typeface="Arial" pitchFamily="34" charset="0"/>
+                <a:ea typeface="Arial" pitchFamily="34" charset="-122"/>
+                <a:cs typeface="Arial" pitchFamily="34" charset="-120"/>
+              </a:rPr>
+              <a:t>Tiết 2 · 第 2 節</a:t>
+            </a:r>
+            <a:endParaRPr lang="en-US" sz="900" dirty="0"/>
+          </a:p>
+        </p:txBody>
+      </p:sp>
+    </p:spTree>
+  </p:cSld>
+  <p:clrMapOvr>
+    <a:masterClrMapping/>
+  </p:clrMapOvr>
+</p:sld>
+</file>
+
+<file path=ppt/slides/slide22.xml><?xml version="1.0" encoding="utf-8"?>
+<p:sld xmlns:a="http://schemas.openxmlformats.org/drawingml/2006/main" xmlns:r="http://schemas.openxmlformats.org/officeDocument/2006/relationships" xmlns:p="http://schemas.openxmlformats.org/presentationml/2006/main">
+  <p:cSld name="Slide 22">
+    <p:spTree>
+      <p:nvGrpSpPr>
+        <p:cNvPr id="1" name=""/>
+        <p:cNvGrpSpPr/>
+        <p:nvPr/>
+      </p:nvGrpSpPr>
+      <p:grpSpPr>
+        <a:xfrm>
+          <a:off x="0" y="0"/>
+          <a:ext cx="1" cy="1"/>
+          <a:chOff x="0" y="0"/>
+          <a:chExt cx="0" cy="0"/>
+        </a:xfrm>
+      </p:grpSpPr>
+      <p:sp>
+        <p:nvSpPr>
+          <p:cNvPr id="2" name="Text 0"/>
+          <p:cNvSpPr txBox="1"/>
+          <p:nvPr/>
+        </p:nvSpPr>
+        <p:spPr>
+          <a:xfrm>
+            <a:off x="502920" y="420624"/>
+            <a:ext cx="8138160" cy="274320"/>
+          </a:xfrm>
+          <a:prstGeom prst="rect">
+            <a:avLst/>
+          </a:prstGeom>
+          <a:noFill/>
+          <a:ln/>
+        </p:spPr>
+        <p:txBody>
+          <a:bodyPr wrap="square" lIns="0" tIns="0" rIns="0" bIns="0" rtlCol="0" anchor="ctr"/>
+          <a:lstStyle/>
+          <a:p>
+            <a:pPr indent="0" marL="0">
+              <a:buNone/>
+            </a:pPr>
+            <a:r>
+              <a:rPr lang="en-US" sz="1250" b="1" dirty="0">
+                <a:solidFill>
+                  <a:srgbClr val="007F72"/>
+                </a:solidFill>
+                <a:latin typeface="Arial" pitchFamily="34" charset="0"/>
+                <a:ea typeface="Arial" pitchFamily="34" charset="-122"/>
+                <a:cs typeface="Arial" pitchFamily="34" charset="-120"/>
+              </a:rPr>
+              <a:t>Phụ lục · 附錄（不計時）</a:t>
+            </a:r>
+            <a:endParaRPr lang="en-US" sz="1250" dirty="0"/>
+          </a:p>
+        </p:txBody>
+      </p:sp>
+      <p:sp>
+        <p:nvSpPr>
+          <p:cNvPr id="3" name="Text 1"/>
+          <p:cNvSpPr txBox="1"/>
+          <p:nvPr/>
+        </p:nvSpPr>
+        <p:spPr>
+          <a:xfrm>
+            <a:off x="502920" y="731520"/>
+            <a:ext cx="8138160" cy="585216"/>
+          </a:xfrm>
+          <a:prstGeom prst="rect">
+            <a:avLst/>
+          </a:prstGeom>
+          <a:noFill/>
+          <a:ln/>
+        </p:spPr>
+        <p:txBody>
+          <a:bodyPr wrap="square" lIns="0" tIns="0" rIns="0" bIns="0" rtlCol="0" anchor="t"/>
+          <a:lstStyle/>
+          <a:p>
+            <a:pPr indent="0" marL="0">
+              <a:lnSpc>
+                <a:spcPct val="120000"/>
+              </a:lnSpc>
+              <a:buNone/>
+            </a:pPr>
+            <a:r>
+              <a:rPr lang="en-US" sz="1700" b="1" dirty="0">
+                <a:solidFill>
+                  <a:srgbClr val="0B1F3A"/>
+                </a:solidFill>
+                <a:latin typeface="Arial" pitchFamily="34" charset="0"/>
+                <a:ea typeface="Arial" pitchFamily="34" charset="-122"/>
+                <a:cs typeface="Arial" pitchFamily="34" charset="-120"/>
+              </a:rPr>
               <a:t>onsemi AR0233AT — toàn bộ datasheet gốc (2 trang)</a:t>
             </a:r>
             <a:endParaRPr lang="en-US" sz="1700" dirty="0"/>
@@ -21385,7 +23010,7 @@
                 <a:ea typeface="Arial" pitchFamily="34" charset="-122"/>
                 <a:cs typeface="Arial" pitchFamily="34" charset="-120"/>
               </a:rPr>
-              <a:t>21 / 21</a:t>
+              <a:t>22 / 22</a:t>
             </a:r>
             <a:endParaRPr lang="en-US" sz="900" dirty="0"/>
           </a:p>
@@ -21835,7 +23460,7 @@
                 <a:ea typeface="Arial" pitchFamily="34" charset="-122"/>
                 <a:cs typeface="Arial" pitchFamily="34" charset="-120"/>
               </a:rPr>
-              <a:t>3 / 21</a:t>
+              <a:t>3 / 22</a:t>
             </a:r>
             <a:endParaRPr lang="en-US" sz="900" dirty="0"/>
           </a:p>
@@ -22700,7 +24325,7 @@
                 <a:ea typeface="Arial" pitchFamily="34" charset="-122"/>
                 <a:cs typeface="Arial" pitchFamily="34" charset="-120"/>
               </a:rPr>
-              <a:t>4 / 21</a:t>
+              <a:t>4 / 22</a:t>
             </a:r>
             <a:endParaRPr lang="en-US" sz="900" dirty="0"/>
           </a:p>
@@ -23150,7 +24775,7 @@
                 <a:ea typeface="Arial" pitchFamily="34" charset="-122"/>
                 <a:cs typeface="Arial" pitchFamily="34" charset="-120"/>
               </a:rPr>
-              <a:t>5 / 21</a:t>
+              <a:t>5 / 22</a:t>
             </a:r>
             <a:endParaRPr lang="en-US" sz="900" dirty="0"/>
           </a:p>
@@ -24015,7 +25640,7 @@
                 <a:ea typeface="Arial" pitchFamily="34" charset="-122"/>
                 <a:cs typeface="Arial" pitchFamily="34" charset="-120"/>
               </a:rPr>
-              <a:t>6 / 21</a:t>
+              <a:t>6 / 22</a:t>
             </a:r>
             <a:endParaRPr lang="en-US" sz="900" dirty="0"/>
           </a:p>
@@ -24465,7 +26090,7 @@
                 <a:ea typeface="Arial" pitchFamily="34" charset="-122"/>
                 <a:cs typeface="Arial" pitchFamily="34" charset="-120"/>
               </a:rPr>
-              <a:t>7 / 21</a:t>
+              <a:t>7 / 22</a:t>
             </a:r>
             <a:endParaRPr lang="en-US" sz="900" dirty="0"/>
           </a:p>
@@ -24785,7 +26410,7 @@
                 <a:ea typeface="Arial" pitchFamily="34" charset="-122"/>
                 <a:cs typeface="Arial" pitchFamily="34" charset="-120"/>
               </a:rPr>
-              <a:t>8 / 21</a:t>
+              <a:t>8 / 22</a:t>
             </a:r>
             <a:endParaRPr lang="en-US" sz="900" dirty="0"/>
           </a:p>
@@ -26420,7 +28045,7 @@
                 <a:ea typeface="Arial" pitchFamily="34" charset="-122"/>
                 <a:cs typeface="Arial" pitchFamily="34" charset="-120"/>
               </a:rPr>
-              <a:t>9 / 21</a:t>
+              <a:t>9 / 22</a:t>
             </a:r>
             <a:endParaRPr lang="en-US" sz="880" dirty="0"/>
           </a:p>

--- a/第五週(10-08)/第五週_第2節_簡報.pptx
+++ b/第五週(10-08)/第五週_第2節_簡報.pptx
@@ -5036,7 +5036,7 @@
                 <a:ea typeface="Arial Unicode MS"/>
                 <a:cs typeface="Arial Unicode MS"/>
               </a:rPr>
-              <a:t>標定：告訴車子每一隻眼睛裝在哪、朝哪看。
+              <a:t>標定：告訴車子每一隻眼睛裝在哪、朝哪看。內參外參是一條鏈不是兩件並排的事，外參是對車身不是對另一顆。
 </a:t>
             </a:r>
           </a:p>
@@ -5091,7 +5091,7 @@
                 <a:ea typeface="Arial Unicode MS"/>
                 <a:cs typeface="Arial Unicode MS"/>
               </a:rPr>
-              <a:t>一步一步圈，最後圈偏差角度造成的位置誤差那個數字。中間要切出去播兩支短片（內參 19 秒、外參 14 秒），網址在口白裡，先開好分頁。
+              <a:t>三格不是三件並列的事：①②是一條鏈（像素→射線→車身座標），③是②沒做好的後果，要講清楚。中間切出去播兩支短片（內參 19 秒、外參 14 秒），網址在口白裡，先開好分頁。
 </a:t>
             </a:r>
           </a:p>
@@ -5168,7 +5168,7 @@
                 <a:ea typeface="Arial Unicode MS"/>
                 <a:cs typeface="Arial Unicode MS"/>
               </a:rPr>
-              <a:t>，但是害人最慘的事：</a:t>
+              <a:t>、但是害人最慘的事：</a:t>
             </a:r>
             <a:r>
               <a:rPr sz="800" b="1" lang="zh-TW" dirty="0">
@@ -5190,7 +5190,29 @@
                 <a:ea typeface="Arial Unicode MS"/>
                 <a:cs typeface="Arial Unicode MS"/>
               </a:rPr>
-              <a:t>。
+              <a:t>。先講問題。一台車上有相機、有光達。相機說「前面有一個人」，光達說「前面三十公尺有一團東西」。要把這兩句話</a:t>
+            </a:r>
+            <a:r>
+              <a:rPr sz="800" b="1" lang="zh-TW" dirty="0">
+                <a:solidFill>
+                  <a:srgbClr val="000000"/>
+                </a:solidFill>
+                <a:latin typeface="Arial Unicode MS"/>
+                <a:ea typeface="Arial Unicode MS"/>
+                <a:cs typeface="Arial Unicode MS"/>
+              </a:rPr>
+              <a:t>合成一句</a:t>
+            </a:r>
+            <a:r>
+              <a:rPr sz="800" lang="zh-TW" dirty="0">
+                <a:solidFill>
+                  <a:srgbClr val="000000"/>
+                </a:solidFill>
+                <a:latin typeface="Arial Unicode MS"/>
+                <a:ea typeface="Arial Unicode MS"/>
+                <a:cs typeface="Arial Unicode MS"/>
+              </a:rPr>
+              <a:t>——「那個人在三十公尺外」——車子得先知道這兩隻眼睛各自裝在哪、朝哪看。這就是標定。
 </a:t>
             </a:r>
           </a:p>
@@ -5212,7 +5234,7 @@
                 <a:ea typeface="Arial Unicode MS"/>
                 <a:cs typeface="Arial Unicode MS"/>
               </a:rPr>
-              <a:t>先講問題。一台車上有相機、有光達。相機說「前面有一個人」，光達說「前面三十公尺有一團東西」。要把這兩句話</a:t>
+              <a:t>分成兩種，可是</a:t>
             </a:r>
             <a:r>
               <a:rPr sz="800" b="1" lang="zh-TW" dirty="0">
@@ -5223,18 +5245,18 @@
                 <a:ea typeface="Arial Unicode MS"/>
                 <a:cs typeface="Arial Unicode MS"/>
               </a:rPr>
-              <a:t>合成一句</a:t>
-            </a:r>
-            <a:r>
-              <a:rPr sz="800" lang="zh-TW" dirty="0">
-                <a:solidFill>
-                  <a:srgbClr val="000000"/>
-                </a:solidFill>
-                <a:latin typeface="Arial Unicode MS"/>
-                <a:ea typeface="Arial Unicode MS"/>
-                <a:cs typeface="Arial Unicode MS"/>
-              </a:rPr>
-              <a:t>——「那個人在三十公尺外」——車子必須知道一件事：</a:t>
+              <a:t>它們不是並排的兩件事，是一條鏈</a:t>
+            </a:r>
+            <a:r>
+              <a:rPr sz="800" lang="zh-TW" dirty="0">
+                <a:solidFill>
+                  <a:srgbClr val="000000"/>
+                </a:solidFill>
+                <a:latin typeface="Arial Unicode MS"/>
+                <a:ea typeface="Arial Unicode MS"/>
+                <a:cs typeface="Arial Unicode MS"/>
+              </a:rPr>
+              <a:t>。各位跟我走三步：畫面上的</a:t>
             </a:r>
             <a:r>
               <a:rPr sz="800" b="1" lang="zh-TW" dirty="0">
@@ -5245,18 +5267,128 @@
                 <a:ea typeface="Arial Unicode MS"/>
                 <a:cs typeface="Arial Unicode MS"/>
               </a:rPr>
-              <a:t>相機和光達，到底差多遠、差幾度？</a:t>
-            </a:r>
-            <a:r>
-              <a:rPr sz="800" lang="zh-TW" dirty="0">
-                <a:solidFill>
-                  <a:srgbClr val="000000"/>
-                </a:solidFill>
-                <a:latin typeface="Arial Unicode MS"/>
-                <a:ea typeface="Arial Unicode MS"/>
-                <a:cs typeface="Arial Unicode MS"/>
-              </a:rPr>
-              <a:t>這就是標定，分成兩種。
+              <a:t>一個像素</a:t>
+            </a:r>
+            <a:r>
+              <a:rPr sz="800" lang="zh-TW" dirty="0">
+                <a:solidFill>
+                  <a:srgbClr val="000000"/>
+                </a:solidFill>
+                <a:latin typeface="Arial Unicode MS"/>
+                <a:ea typeface="Arial Unicode MS"/>
+                <a:cs typeface="Arial Unicode MS"/>
+              </a:rPr>
+              <a:t> →（用</a:t>
+            </a:r>
+            <a:r>
+              <a:rPr sz="800" b="1" lang="zh-TW" dirty="0">
+                <a:solidFill>
+                  <a:srgbClr val="000000"/>
+                </a:solidFill>
+                <a:latin typeface="Arial Unicode MS"/>
+                <a:ea typeface="Arial Unicode MS"/>
+                <a:cs typeface="Arial Unicode MS"/>
+              </a:rPr>
+              <a:t>內參</a:t>
+            </a:r>
+            <a:r>
+              <a:rPr sz="800" lang="zh-TW" dirty="0">
+                <a:solidFill>
+                  <a:srgbClr val="000000"/>
+                </a:solidFill>
+                <a:latin typeface="Arial Unicode MS"/>
+                <a:ea typeface="Arial Unicode MS"/>
+                <a:cs typeface="Arial Unicode MS"/>
+              </a:rPr>
+              <a:t>）→ 還原成相機前面的</a:t>
+            </a:r>
+            <a:r>
+              <a:rPr sz="800" b="1" lang="zh-TW" dirty="0">
+                <a:solidFill>
+                  <a:srgbClr val="000000"/>
+                </a:solidFill>
+                <a:latin typeface="Arial Unicode MS"/>
+                <a:ea typeface="Arial Unicode MS"/>
+                <a:cs typeface="Arial Unicode MS"/>
+              </a:rPr>
+              <a:t>一條射線</a:t>
+            </a:r>
+            <a:r>
+              <a:rPr sz="800" lang="zh-TW" dirty="0">
+                <a:solidFill>
+                  <a:srgbClr val="000000"/>
+                </a:solidFill>
+                <a:latin typeface="Arial Unicode MS"/>
+                <a:ea typeface="Arial Unicode MS"/>
+                <a:cs typeface="Arial Unicode MS"/>
+              </a:rPr>
+              <a:t> →（用</a:t>
+            </a:r>
+            <a:r>
+              <a:rPr sz="800" b="1" lang="zh-TW" dirty="0">
+                <a:solidFill>
+                  <a:srgbClr val="000000"/>
+                </a:solidFill>
+                <a:latin typeface="Arial Unicode MS"/>
+                <a:ea typeface="Arial Unicode MS"/>
+                <a:cs typeface="Arial Unicode MS"/>
+              </a:rPr>
+              <a:t>外參</a:t>
+            </a:r>
+            <a:r>
+              <a:rPr sz="800" lang="zh-TW" dirty="0">
+                <a:solidFill>
+                  <a:srgbClr val="000000"/>
+                </a:solidFill>
+                <a:latin typeface="Arial Unicode MS"/>
+                <a:ea typeface="Arial Unicode MS"/>
+                <a:cs typeface="Arial Unicode MS"/>
+              </a:rPr>
+              <a:t>）→ 換算到</a:t>
+            </a:r>
+            <a:r>
+              <a:rPr sz="800" b="1" lang="zh-TW" dirty="0">
+                <a:solidFill>
+                  <a:srgbClr val="000000"/>
+                </a:solidFill>
+                <a:latin typeface="Arial Unicode MS"/>
+                <a:ea typeface="Arial Unicode MS"/>
+                <a:cs typeface="Arial Unicode MS"/>
+              </a:rPr>
+              <a:t>車身座標系</a:t>
+            </a:r>
+            <a:r>
+              <a:rPr sz="800" lang="zh-TW" dirty="0">
+                <a:solidFill>
+                  <a:srgbClr val="000000"/>
+                </a:solidFill>
+                <a:latin typeface="Arial Unicode MS"/>
+                <a:ea typeface="Arial Unicode MS"/>
+                <a:cs typeface="Arial Unicode MS"/>
+              </a:rPr>
+              <a:t>。少掉任何一段，剛剛那句話就合不起來。而且順序不能反：</a:t>
+            </a:r>
+            <a:r>
+              <a:rPr sz="800" b="1" lang="zh-TW" dirty="0">
+                <a:solidFill>
+                  <a:srgbClr val="000000"/>
+                </a:solidFill>
+                <a:latin typeface="Arial Unicode MS"/>
+                <a:ea typeface="Arial Unicode MS"/>
+                <a:cs typeface="Arial Unicode MS"/>
+              </a:rPr>
+              <a:t>內參要先標</a:t>
+            </a:r>
+            <a:r>
+              <a:rPr sz="800" lang="zh-TW" dirty="0">
+                <a:solidFill>
+                  <a:srgbClr val="000000"/>
+                </a:solidFill>
+                <a:latin typeface="Arial Unicode MS"/>
+                <a:ea typeface="Arial Unicode MS"/>
+                <a:cs typeface="Arial Unicode MS"/>
+              </a:rPr>
+              <a:t>，因為外參是拿影像上的點去解的，鏡頭的扭曲沒先修掉，解出來的外參一定是歪的。
 </a:t>
             </a:r>
           </a:p>
@@ -5377,7 +5509,51 @@
                 <a:ea typeface="Arial Unicode MS"/>
                 <a:cs typeface="Arial Unicode MS"/>
               </a:rPr>
-              <a:t>，算出來以後每一張照片都先修掉，後面的計算才會對。
+              <a:t>，算出來以後每一張照片都先修掉，後面的計算才會對。</a:t>
+            </a:r>
+            <a:r>
+              <a:rPr sz="800" b="1" lang="zh-TW" dirty="0">
+                <a:solidFill>
+                  <a:srgbClr val="000000"/>
+                </a:solidFill>
+                <a:latin typeface="Arial Unicode MS"/>
+                <a:ea typeface="Arial Unicode MS"/>
+                <a:cs typeface="Arial Unicode MS"/>
+              </a:rPr>
+              <a:t>而且不是只有相機有內參</a:t>
+            </a:r>
+            <a:r>
+              <a:rPr sz="800" lang="zh-TW" dirty="0">
+                <a:solidFill>
+                  <a:srgbClr val="000000"/>
+                </a:solidFill>
+                <a:latin typeface="Arial Unicode MS"/>
+                <a:ea typeface="Arial Unicode MS"/>
+                <a:cs typeface="Arial Unicode MS"/>
+              </a:rPr>
+              <a:t>——第一節那張 OS1 的規格上寫著 Queryable intrinsic calibration，光達的內參就是</a:t>
+            </a:r>
+            <a:r>
+              <a:rPr sz="800" b="1" lang="zh-TW" dirty="0">
+                <a:solidFill>
+                  <a:srgbClr val="000000"/>
+                </a:solidFill>
+                <a:latin typeface="Arial Unicode MS"/>
+                <a:ea typeface="Arial Unicode MS"/>
+                <a:cs typeface="Arial Unicode MS"/>
+              </a:rPr>
+              <a:t>每條線束實際的垂直角度</a:t>
+            </a:r>
+            <a:r>
+              <a:rPr sz="800" lang="zh-TW" dirty="0">
+                <a:solidFill>
+                  <a:srgbClr val="000000"/>
+                </a:solidFill>
+                <a:latin typeface="Arial Unicode MS"/>
+                <a:ea typeface="Arial Unicode MS"/>
+                <a:cs typeface="Arial Unicode MS"/>
+              </a:rPr>
+              <a:t>，出廠量過，可以直接跟它要。
 </a:t>
             </a:r>
           </a:p>
@@ -5410,7 +5586,95 @@
                 <a:ea typeface="Arial Unicode MS"/>
                 <a:cs typeface="Arial Unicode MS"/>
               </a:rPr>
-              <a:t>講的是感測器彼此之間的關係：光達裝在車頂，相機裝在擋風玻璃後面，兩者相距六十公分、角度差三度。這六十公分和三度，要量得很準。
+              <a:t>它回答的是：</a:t>
+            </a:r>
+            <a:r>
+              <a:rPr sz="800" b="1" lang="zh-TW" dirty="0">
+                <a:solidFill>
+                  <a:srgbClr val="000000"/>
+                </a:solidFill>
+                <a:latin typeface="Arial Unicode MS"/>
+                <a:ea typeface="Arial Unicode MS"/>
+                <a:cs typeface="Arial Unicode MS"/>
+              </a:rPr>
+              <a:t>這隻眼睛裝在車身的哪裡、朝哪個方向看。</a:t>
+            </a:r>
+            <a:r>
+              <a:rPr sz="800" lang="zh-TW" dirty="0">
+                <a:solidFill>
+                  <a:srgbClr val="000000"/>
+                </a:solidFill>
+                <a:latin typeface="Arial Unicode MS"/>
+                <a:ea typeface="Arial Unicode MS"/>
+                <a:cs typeface="Arial Unicode MS"/>
+              </a:rPr>
+              <a:t>請注意是</a:t>
+            </a:r>
+            <a:r>
+              <a:rPr sz="800" b="1" lang="zh-TW" dirty="0">
+                <a:solidFill>
+                  <a:srgbClr val="000000"/>
+                </a:solidFill>
+                <a:latin typeface="Arial Unicode MS"/>
+                <a:ea typeface="Arial Unicode MS"/>
+                <a:cs typeface="Arial Unicode MS"/>
+              </a:rPr>
+              <a:t>對車身</a:t>
+            </a:r>
+            <a:r>
+              <a:rPr sz="800" lang="zh-TW" dirty="0">
+                <a:solidFill>
+                  <a:srgbClr val="000000"/>
+                </a:solidFill>
+                <a:latin typeface="Arial Unicode MS"/>
+                <a:ea typeface="Arial Unicode MS"/>
+                <a:cs typeface="Arial Unicode MS"/>
+              </a:rPr>
+              <a:t>，不是對另一顆感測器——所以</a:t>
+            </a:r>
+            <a:r>
+              <a:rPr sz="800" b="1" lang="zh-TW" dirty="0">
+                <a:solidFill>
+                  <a:srgbClr val="000000"/>
+                </a:solidFill>
+                <a:latin typeface="Arial Unicode MS"/>
+                <a:ea typeface="Arial Unicode MS"/>
+                <a:cs typeface="Arial Unicode MS"/>
+              </a:rPr>
+              <a:t>只有一顆相機的車也有外參，也要標</a:t>
+            </a:r>
+            <a:r>
+              <a:rPr sz="800" lang="zh-TW" dirty="0">
+                <a:solidFill>
+                  <a:srgbClr val="000000"/>
+                </a:solidFill>
+                <a:latin typeface="Arial Unicode MS"/>
+                <a:ea typeface="Arial Unicode MS"/>
+                <a:cs typeface="Arial Unicode MS"/>
+              </a:rPr>
+              <a:t>，下一張那支影片整台車就只有一顆相機。那兩顆要怎麼對上？相機對車身量好了、光達對車身也量好了，</a:t>
+            </a:r>
+            <a:r>
+              <a:rPr sz="800" b="1" lang="zh-TW" dirty="0">
+                <a:solidFill>
+                  <a:srgbClr val="000000"/>
+                </a:solidFill>
+                <a:latin typeface="Arial Unicode MS"/>
+                <a:ea typeface="Arial Unicode MS"/>
+                <a:cs typeface="Arial Unicode MS"/>
+              </a:rPr>
+              <a:t>相機和光達的關係就推得出來</a:t>
+            </a:r>
+            <a:r>
+              <a:rPr sz="800" lang="zh-TW" dirty="0">
+                <a:solidFill>
+                  <a:srgbClr val="000000"/>
+                </a:solidFill>
+                <a:latin typeface="Arial Unicode MS"/>
+                <a:ea typeface="Arial Unicode MS"/>
+                <a:cs typeface="Arial Unicode MS"/>
+              </a:rPr>
+              <a:t>。光達裝在車頂、相機裝在擋風玻璃後面，兩者相距六十公分、角度差三度——這六十公分和三度，就是這樣來的。
 </a:t>
             </a:r>
           </a:p>
@@ -5498,7 +5762,7 @@
                 <a:ea typeface="Arial Unicode MS"/>
                 <a:cs typeface="Arial Unicode MS"/>
               </a:rPr>
-              <a:t>那不準會怎樣？我們算一下。假設它們之間的角度差了</a:t>
+              <a:t>那不準會怎樣？我們算一下。</a:t>
             </a:r>
             <a:r>
               <a:rPr sz="800" b="1" lang="zh-TW" dirty="0">
@@ -5509,6 +5773,28 @@
                 <a:ea typeface="Arial Unicode MS"/>
                 <a:cs typeface="Arial Unicode MS"/>
               </a:rPr>
+              <a:t>第三格不是第三種標定，是第二格沒做好的後果。</a:t>
+            </a:r>
+            <a:r>
+              <a:rPr sz="800" lang="zh-TW" dirty="0">
+                <a:solidFill>
+                  <a:srgbClr val="000000"/>
+                </a:solidFill>
+                <a:latin typeface="Arial Unicode MS"/>
+                <a:ea typeface="Arial Unicode MS"/>
+                <a:cs typeface="Arial Unicode MS"/>
+              </a:rPr>
+              <a:t>假設角度差了</a:t>
+            </a:r>
+            <a:r>
+              <a:rPr sz="800" b="1" lang="zh-TW" dirty="0">
+                <a:solidFill>
+                  <a:srgbClr val="000000"/>
+                </a:solidFill>
+                <a:latin typeface="Arial Unicode MS"/>
+                <a:ea typeface="Arial Unicode MS"/>
+                <a:cs typeface="Arial Unicode MS"/>
+              </a:rPr>
               <a:t>一度</a:t>
             </a:r>
             <a:r>
@@ -5542,7 +5828,29 @@
                 <a:ea typeface="Arial Unicode MS"/>
                 <a:cs typeface="Arial Unicode MS"/>
               </a:rPr>
-              <a:t>——外參講的是</a:t>
+              <a:t>——只要實際的角度和車子記在檔案裡的那組數字差一度，結果都一樣。我們就拿最常見的那個情況：擋風玻璃換過一次，相機裝回去的時候差了一度。一度聽起來很小對不對？
+</a:t>
+            </a:r>
+          </a:p>
+          <a:p>
+            <a:pPr algn="l">
+              <a:spcBef>
+                <a:spcPts val="0"/>
+              </a:spcBef>
+              <a:spcAft>
+                <a:spcPts val="133"/>
+              </a:spcAft>
+            </a:pPr>
+            <a:r>
+              <a:rPr sz="800" lang="zh-TW" dirty="0">
+                <a:solidFill>
+                  <a:srgbClr val="000000"/>
+                </a:solidFill>
+                <a:latin typeface="Arial Unicode MS"/>
+                <a:ea typeface="Arial Unicode MS"/>
+                <a:cs typeface="Arial Unicode MS"/>
+              </a:rPr>
+              <a:t>在五十公尺外，差一度會差多少？</a:t>
             </a:r>
             <a:r>
               <a:rPr sz="800" b="1" lang="zh-TW" dirty="0">
@@ -5553,50 +5861,6 @@
                 <a:ea typeface="Arial Unicode MS"/>
                 <a:cs typeface="Arial Unicode MS"/>
               </a:rPr>
-              <a:t>兩者之間的關係</a:t>
-            </a:r>
-            <a:r>
-              <a:rPr sz="800" lang="zh-TW" dirty="0">
-                <a:solidFill>
-                  <a:srgbClr val="000000"/>
-                </a:solidFill>
-                <a:latin typeface="Arial Unicode MS"/>
-                <a:ea typeface="Arial Unicode MS"/>
-                <a:cs typeface="Arial Unicode MS"/>
-              </a:rPr>
-              <a:t>，只要這個關係和車子記在檔案裡的那組數字差一度，結果都一樣。我們就拿最常見的那個情況：擋風玻璃換過一次，相機裝回去的時候差了一度。一度聽起來很小對不對？
-</a:t>
-            </a:r>
-          </a:p>
-          <a:p>
-            <a:pPr algn="l">
-              <a:spcBef>
-                <a:spcPts val="0"/>
-              </a:spcBef>
-              <a:spcAft>
-                <a:spcPts val="133"/>
-              </a:spcAft>
-            </a:pPr>
-            <a:r>
-              <a:rPr sz="800" lang="zh-TW" dirty="0">
-                <a:solidFill>
-                  <a:srgbClr val="000000"/>
-                </a:solidFill>
-                <a:latin typeface="Arial Unicode MS"/>
-                <a:ea typeface="Arial Unicode MS"/>
-                <a:cs typeface="Arial Unicode MS"/>
-              </a:rPr>
-              <a:t>在五十公尺外，差一度會差多少？</a:t>
-            </a:r>
-            <a:r>
-              <a:rPr sz="800" b="1" lang="zh-TW" dirty="0">
-                <a:solidFill>
-                  <a:srgbClr val="000000"/>
-                </a:solidFill>
-                <a:latin typeface="Arial Unicode MS"/>
-                <a:ea typeface="Arial Unicode MS"/>
-                <a:cs typeface="Arial Unicode MS"/>
-              </a:rPr>
               <a:t>五十公尺 × tan(一度) ＝ 零點八七公尺</a:t>
             </a:r>
             <a:r>
@@ -5608,29 +5872,7 @@
                 <a:ea typeface="Arial Unicode MS"/>
                 <a:cs typeface="Arial Unicode MS"/>
               </a:rPr>
-              <a:t>，將近一公尺。
-</a:t>
-            </a:r>
-          </a:p>
-          <a:p>
-            <a:pPr algn="l">
-              <a:spcBef>
-                <a:spcPts val="0"/>
-              </a:spcBef>
-              <a:spcAft>
-                <a:spcPts val="133"/>
-              </a:spcAft>
-            </a:pPr>
-            <a:r>
-              <a:rPr sz="800" lang="zh-TW" dirty="0">
-                <a:solidFill>
-                  <a:srgbClr val="000000"/>
-                </a:solidFill>
-                <a:latin typeface="Arial Unicode MS"/>
-                <a:ea typeface="Arial Unicode MS"/>
-                <a:cs typeface="Arial Unicode MS"/>
-              </a:rPr>
-              <a:t>這一公尺是</a:t>
+              <a:t>，將近一公尺。這一公尺是</a:t>
             </a:r>
             <a:r>
               <a:rPr sz="800" b="1" lang="zh-TW" dirty="0">
@@ -5696,29 +5938,7 @@
                 <a:ea typeface="Arial Unicode MS"/>
                 <a:cs typeface="Arial Unicode MS"/>
               </a:rPr>
-              <a:t>一公尺是什麼概念？車道寬三點五公尺。差一公尺，你可能就把隔壁車道的車，當成自己車道上的車，然後急煞。
-</a:t>
-            </a:r>
-          </a:p>
-          <a:p>
-            <a:pPr algn="l">
-              <a:spcBef>
-                <a:spcPts val="0"/>
-              </a:spcBef>
-              <a:spcAft>
-                <a:spcPts val="133"/>
-              </a:spcAft>
-            </a:pPr>
-            <a:r>
-              <a:rPr sz="800" lang="zh-TW" dirty="0">
-                <a:solidFill>
-                  <a:srgbClr val="000000"/>
-                </a:solidFill>
-                <a:latin typeface="Arial Unicode MS"/>
-                <a:ea typeface="Arial Unicode MS"/>
-                <a:cs typeface="Arial Unicode MS"/>
-              </a:rPr>
-              <a:t>這也是為什麼期末專題如果各位要做感測器融合，第一個卡住你們的一定是標定，不是演算法。剛剛講的都是原理，下一張我們看真的——</a:t>
+              <a:t>一公尺是什麼概念？車道寬三點五公尺。差一公尺，你可能就把隔壁車道的車，當成自己車道上的車，然後急煞。這也是為什麼期末專題如果各位要做感測器融合，第一個卡住你們的一定是標定，不是演算法。剛剛講的都是原理，下一張我們看真的——</a:t>
             </a:r>
             <a:r>
               <a:rPr sz="800" b="1" lang="zh-TW" dirty="0">
@@ -18950,7 +19170,7 @@
                 <a:ea typeface="Arial" pitchFamily="34" charset="-122"/>
                 <a:cs typeface="Arial" pitchFamily="34" charset="-120"/>
               </a:rPr>
-              <a:t>Ống kính méo bao nhiêu</a:t>
+              <a:t>Ống kính méo, tâm ảnh ở đâu</a:t>
             </a:r>
             <a:endParaRPr lang="en-US" sz="1120" dirty="0"/>
           </a:p>
@@ -18970,7 +19190,7 @@
                 <a:ea typeface="Arial" pitchFamily="34" charset="-122"/>
                 <a:cs typeface="Arial" pitchFamily="34" charset="-120"/>
               </a:rPr>
-              <a:t>Tâm ảnh ở đâu</a:t>
+              <a:t>Lidar cũng có: góc từng tia</a:t>
             </a:r>
             <a:endParaRPr lang="en-US" sz="1120" dirty="0"/>
           </a:p>
@@ -18990,7 +19210,7 @@
                 <a:ea typeface="微軟正黑體" pitchFamily="34" charset="-122"/>
                 <a:cs typeface="微軟正黑體" pitchFamily="34" charset="-120"/>
               </a:rPr>
-              <a:t>鏡頭扭曲多少</a:t>
+              <a:t>鏡頭扭曲多少、畫面中心在哪</a:t>
             </a:r>
             <a:endParaRPr lang="en-US" sz="1120" dirty="0"/>
           </a:p>
@@ -19010,7 +19230,7 @@
                 <a:ea typeface="微軟正黑體" pitchFamily="34" charset="-122"/>
                 <a:cs typeface="微軟正黑體" pitchFamily="34" charset="-120"/>
               </a:rPr>
-              <a:t>畫面中心在哪</a:t>
+              <a:t>光達也有：每條線束的角度</a:t>
             </a:r>
             <a:endParaRPr lang="en-US" sz="1120" dirty="0"/>
           </a:p>
@@ -19246,7 +19466,7 @@
                 <a:ea typeface="Arial" pitchFamily="34" charset="-122"/>
                 <a:cs typeface="Arial" pitchFamily="34" charset="-120"/>
               </a:rPr>
-              <a:t>Camera và lidar</a:t>
+              <a:t>Gắn ở đâu trên thân xe</a:t>
             </a:r>
             <a:endParaRPr lang="en-US" sz="1120" dirty="0"/>
           </a:p>
@@ -19266,7 +19486,7 @@
                 <a:ea typeface="Arial" pitchFamily="34" charset="-122"/>
                 <a:cs typeface="Arial" pitchFamily="34" charset="-120"/>
               </a:rPr>
-              <a:t>cách nhau bao xa, lệch mấy độ</a:t>
+              <a:t>nhìn hướng nào</a:t>
             </a:r>
             <a:endParaRPr lang="en-US" sz="1120" dirty="0"/>
           </a:p>
@@ -19286,7 +19506,7 @@
                 <a:ea typeface="微軟正黑體" pitchFamily="34" charset="-122"/>
                 <a:cs typeface="微軟正黑體" pitchFamily="34" charset="-120"/>
               </a:rPr>
-              <a:t>相機和光達</a:t>
+              <a:t>裝在車身的哪裡</a:t>
             </a:r>
             <a:endParaRPr lang="en-US" sz="1120" dirty="0"/>
           </a:p>
@@ -19306,7 +19526,7 @@
                 <a:ea typeface="微軟正黑體" pitchFamily="34" charset="-122"/>
                 <a:cs typeface="微軟正黑體" pitchFamily="34" charset="-120"/>
               </a:rPr>
-              <a:t>相距多遠、差幾度</a:t>
+              <a:t>朝哪個方向看</a:t>
             </a:r>
             <a:endParaRPr lang="en-US" sz="1120" dirty="0"/>
           </a:p>
@@ -19480,7 +19700,7 @@
                 <a:ea typeface="Arial" pitchFamily="34" charset="-122"/>
                 <a:cs typeface="Arial" pitchFamily="34" charset="-120"/>
               </a:rPr>
-              <a:t>Sai 1°</a:t>
+              <a:t>Tham số ngoài lệch 1°</a:t>
             </a:r>
             <a:endParaRPr lang="en-US" sz="1360" dirty="0"/>
           </a:p>
@@ -19500,7 +19720,7 @@
                 <a:ea typeface="微軟正黑體" pitchFamily="34" charset="-122"/>
                 <a:cs typeface="微軟正黑體" pitchFamily="34" charset="-120"/>
               </a:rPr>
-              <a:t>差 1 度</a:t>
+              <a:t>外參差 1 度</a:t>
             </a:r>
             <a:endParaRPr lang="en-US" sz="1360" dirty="0"/>
           </a:p>

--- a/第五週(10-08)/第五週_第2節_簡報.pptx
+++ b/第五週(10-08)/第五週_第2節_簡報.pptx
@@ -5091,7 +5091,7 @@
                 <a:ea typeface="Arial Unicode MS"/>
                 <a:cs typeface="Arial Unicode MS"/>
               </a:rPr>
-              <a:t>三格不是三件並列的事：①②是一條鏈（像素→射線→車身座標），③是②沒做好的後果，要講清楚。中間切出去播兩支短片（內參 19 秒、外參 14 秒），網址在口白裡，先開好分頁。
+              <a:t>三格不是三件並列的事：①②是兩個有先後的問題（這個位置是哪個方向／相機自己朝哪），③是②沒做好的後果，要講清楚。中間切出去播兩支短片（內參 19 秒、外參 14 秒），網址在口白裡，先開好分頁。
 </a:t>
             </a:r>
           </a:p>
@@ -5146,7 +5146,7 @@
                 <a:ea typeface="Arial Unicode MS"/>
                 <a:cs typeface="Arial Unicode MS"/>
               </a:rPr>
-              <a:t>現在講一件規格表上</a:t>
+              <a:t>現在講一件規格表上常常找不到、可是出事的時候最要命的事：</a:t>
             </a:r>
             <a:r>
               <a:rPr sz="800" b="1" lang="zh-TW" dirty="0">
@@ -5157,18 +5157,18 @@
                 <a:ea typeface="Arial Unicode MS"/>
                 <a:cs typeface="Arial Unicode MS"/>
               </a:rPr>
-              <a:t>常常找不到</a:t>
-            </a:r>
-            <a:r>
-              <a:rPr sz="800" lang="zh-TW" dirty="0">
-                <a:solidFill>
-                  <a:srgbClr val="000000"/>
-                </a:solidFill>
-                <a:latin typeface="Arial Unicode MS"/>
-                <a:ea typeface="Arial Unicode MS"/>
-                <a:cs typeface="Arial Unicode MS"/>
-              </a:rPr>
-              <a:t>、但是害人最慘的事：</a:t>
+              <a:t>標定</a:t>
+            </a:r>
+            <a:r>
+              <a:rPr sz="800" lang="zh-TW" dirty="0">
+                <a:solidFill>
+                  <a:srgbClr val="000000"/>
+                </a:solidFill>
+                <a:latin typeface="Arial Unicode MS"/>
+                <a:ea typeface="Arial Unicode MS"/>
+                <a:cs typeface="Arial Unicode MS"/>
+              </a:rPr>
+              <a:t>。先講問題。車上有相機，也有光達。相機說：前面有一個人。光達說：前面三十公尺，有一團東西。車子要把這兩句話變成一句——</a:t>
             </a:r>
             <a:r>
               <a:rPr sz="800" b="1" lang="zh-TW" dirty="0">
@@ -5179,18 +5179,18 @@
                 <a:ea typeface="Arial Unicode MS"/>
                 <a:cs typeface="Arial Unicode MS"/>
               </a:rPr>
-              <a:t>標定</a:t>
-            </a:r>
-            <a:r>
-              <a:rPr sz="800" lang="zh-TW" dirty="0">
-                <a:solidFill>
-                  <a:srgbClr val="000000"/>
-                </a:solidFill>
-                <a:latin typeface="Arial Unicode MS"/>
-                <a:ea typeface="Arial Unicode MS"/>
-                <a:cs typeface="Arial Unicode MS"/>
-              </a:rPr>
-              <a:t>。先講問題。一台車上有相機、有光達。相機說「前面有一個人」，光達說「前面三十公尺有一團東西」。要把這兩句話</a:t>
+              <a:t>那個人在三十公尺外</a:t>
+            </a:r>
+            <a:r>
+              <a:rPr sz="800" lang="zh-TW" dirty="0">
+                <a:solidFill>
+                  <a:srgbClr val="000000"/>
+                </a:solidFill>
+                <a:latin typeface="Arial Unicode MS"/>
+                <a:ea typeface="Arial Unicode MS"/>
+                <a:cs typeface="Arial Unicode MS"/>
+              </a:rPr>
+              <a:t>。它憑什麼知道那是同一個人？因為它</a:t>
             </a:r>
             <a:r>
               <a:rPr sz="800" b="1" lang="zh-TW" dirty="0">
@@ -5201,18 +5201,18 @@
                 <a:ea typeface="Arial Unicode MS"/>
                 <a:cs typeface="Arial Unicode MS"/>
               </a:rPr>
-              <a:t>合成一句</a:t>
-            </a:r>
-            <a:r>
-              <a:rPr sz="800" lang="zh-TW" dirty="0">
-                <a:solidFill>
-                  <a:srgbClr val="000000"/>
-                </a:solidFill>
-                <a:latin typeface="Arial Unicode MS"/>
-                <a:ea typeface="Arial Unicode MS"/>
-                <a:cs typeface="Arial Unicode MS"/>
-              </a:rPr>
-              <a:t>——「那個人在三十公尺外」——車子得先知道這兩隻眼睛各自裝在哪、朝哪看。這就是標定。
+              <a:t>事先量好了這兩隻眼睛各自裝在哪、朝哪看</a:t>
+            </a:r>
+            <a:r>
+              <a:rPr sz="800" lang="zh-TW" dirty="0">
+                <a:solidFill>
+                  <a:srgbClr val="000000"/>
+                </a:solidFill>
+                <a:latin typeface="Arial Unicode MS"/>
+                <a:ea typeface="Arial Unicode MS"/>
+                <a:cs typeface="Arial Unicode MS"/>
+              </a:rPr>
+              <a:t>。這就是標定。
 </a:t>
             </a:r>
           </a:p>
@@ -5234,7 +5234,7 @@
                 <a:ea typeface="Arial Unicode MS"/>
                 <a:cs typeface="Arial Unicode MS"/>
               </a:rPr>
-              <a:t>分成兩種，可是</a:t>
+              <a:t>它分兩種，而且</a:t>
             </a:r>
             <a:r>
               <a:rPr sz="800" b="1" lang="zh-TW" dirty="0">
@@ -5245,18 +5245,18 @@
                 <a:ea typeface="Arial Unicode MS"/>
                 <a:cs typeface="Arial Unicode MS"/>
               </a:rPr>
-              <a:t>它們不是並排的兩件事，是一條鏈</a:t>
-            </a:r>
-            <a:r>
-              <a:rPr sz="800" lang="zh-TW" dirty="0">
-                <a:solidFill>
-                  <a:srgbClr val="000000"/>
-                </a:solidFill>
-                <a:latin typeface="Arial Unicode MS"/>
-                <a:ea typeface="Arial Unicode MS"/>
-                <a:cs typeface="Arial Unicode MS"/>
-              </a:rPr>
-              <a:t>。各位跟我走三步：畫面上的</a:t>
+              <a:t>有先後</a:t>
+            </a:r>
+            <a:r>
+              <a:rPr sz="800" lang="zh-TW" dirty="0">
+                <a:solidFill>
+                  <a:srgbClr val="000000"/>
+                </a:solidFill>
+                <a:latin typeface="Arial Unicode MS"/>
+                <a:ea typeface="Arial Unicode MS"/>
+                <a:cs typeface="Arial Unicode MS"/>
+              </a:rPr>
+              <a:t>。相機拍到一個人，在畫面的右邊。車子要問兩個問題。</a:t>
             </a:r>
             <a:r>
               <a:rPr sz="800" b="1" lang="zh-TW" dirty="0">
@@ -5267,18 +5267,18 @@
                 <a:ea typeface="Arial Unicode MS"/>
                 <a:cs typeface="Arial Unicode MS"/>
               </a:rPr>
-              <a:t>一個像素</a:t>
-            </a:r>
-            <a:r>
-              <a:rPr sz="800" lang="zh-TW" dirty="0">
-                <a:solidFill>
-                  <a:srgbClr val="000000"/>
-                </a:solidFill>
-                <a:latin typeface="Arial Unicode MS"/>
-                <a:ea typeface="Arial Unicode MS"/>
-                <a:cs typeface="Arial Unicode MS"/>
-              </a:rPr>
-              <a:t> →（用</a:t>
+              <a:t>第一個問題——畫面上這個位置，是相機前面的哪一個方向？</a:t>
+            </a:r>
+            <a:r>
+              <a:rPr sz="800" lang="zh-TW" dirty="0">
+                <a:solidFill>
+                  <a:srgbClr val="000000"/>
+                </a:solidFill>
+                <a:latin typeface="Arial Unicode MS"/>
+                <a:ea typeface="Arial Unicode MS"/>
+                <a:cs typeface="Arial Unicode MS"/>
+              </a:rPr>
+              <a:t>答這一題，靠</a:t>
             </a:r>
             <a:r>
               <a:rPr sz="800" b="1" lang="zh-TW" dirty="0">
@@ -5300,7 +5300,7 @@
                 <a:ea typeface="Arial Unicode MS"/>
                 <a:cs typeface="Arial Unicode MS"/>
               </a:rPr>
-              <a:t>）→ 還原成相機前面的</a:t>
+              <a:t>。</a:t>
             </a:r>
             <a:r>
               <a:rPr sz="800" b="1" lang="zh-TW" dirty="0">
@@ -5311,18 +5311,18 @@
                 <a:ea typeface="Arial Unicode MS"/>
                 <a:cs typeface="Arial Unicode MS"/>
               </a:rPr>
-              <a:t>一條射線</a:t>
-            </a:r>
-            <a:r>
-              <a:rPr sz="800" lang="zh-TW" dirty="0">
-                <a:solidFill>
-                  <a:srgbClr val="000000"/>
-                </a:solidFill>
-                <a:latin typeface="Arial Unicode MS"/>
-                <a:ea typeface="Arial Unicode MS"/>
-                <a:cs typeface="Arial Unicode MS"/>
-              </a:rPr>
-              <a:t> →（用</a:t>
+              <a:t>第二個問題——那相機自己，又是朝哪個方向裝上去的？</a:t>
+            </a:r>
+            <a:r>
+              <a:rPr sz="800" lang="zh-TW" dirty="0">
+                <a:solidFill>
+                  <a:srgbClr val="000000"/>
+                </a:solidFill>
+                <a:latin typeface="Arial Unicode MS"/>
+                <a:ea typeface="Arial Unicode MS"/>
+                <a:cs typeface="Arial Unicode MS"/>
+              </a:rPr>
+              <a:t>答這一題，靠</a:t>
             </a:r>
             <a:r>
               <a:rPr sz="800" b="1" lang="zh-TW" dirty="0">
@@ -5344,7 +5344,7 @@
                 <a:ea typeface="Arial Unicode MS"/>
                 <a:cs typeface="Arial Unicode MS"/>
               </a:rPr>
-              <a:t>）→ 換算到</a:t>
+              <a:t>。兩題都答出來，才知道那個人在</a:t>
             </a:r>
             <a:r>
               <a:rPr sz="800" b="1" lang="zh-TW" dirty="0">
@@ -5355,18 +5355,18 @@
                 <a:ea typeface="Arial Unicode MS"/>
                 <a:cs typeface="Arial Unicode MS"/>
               </a:rPr>
-              <a:t>車身座標系</a:t>
-            </a:r>
-            <a:r>
-              <a:rPr sz="800" lang="zh-TW" dirty="0">
-                <a:solidFill>
-                  <a:srgbClr val="000000"/>
-                </a:solidFill>
-                <a:latin typeface="Arial Unicode MS"/>
-                <a:ea typeface="Arial Unicode MS"/>
-                <a:cs typeface="Arial Unicode MS"/>
-              </a:rPr>
-              <a:t>。少掉任何一段，剛剛那句話就合不起來。而且順序不能反：</a:t>
+              <a:t>車子</a:t>
+            </a:r>
+            <a:r>
+              <a:rPr sz="800" lang="zh-TW" dirty="0">
+                <a:solidFill>
+                  <a:srgbClr val="000000"/>
+                </a:solidFill>
+                <a:latin typeface="Arial Unicode MS"/>
+                <a:ea typeface="Arial Unicode MS"/>
+                <a:cs typeface="Arial Unicode MS"/>
+              </a:rPr>
+              <a:t>的哪個方向。順序不能換：</a:t>
             </a:r>
             <a:r>
               <a:rPr sz="800" b="1" lang="zh-TW" dirty="0">
@@ -5377,18 +5377,18 @@
                 <a:ea typeface="Arial Unicode MS"/>
                 <a:cs typeface="Arial Unicode MS"/>
               </a:rPr>
-              <a:t>內參要先標</a:t>
-            </a:r>
-            <a:r>
-              <a:rPr sz="800" lang="zh-TW" dirty="0">
-                <a:solidFill>
-                  <a:srgbClr val="000000"/>
-                </a:solidFill>
-                <a:latin typeface="Arial Unicode MS"/>
-                <a:ea typeface="Arial Unicode MS"/>
-                <a:cs typeface="Arial Unicode MS"/>
-              </a:rPr>
-              <a:t>，因為外參是拿影像上的點去解的，鏡頭的扭曲沒先修掉，解出來的外參一定是歪的。
+              <a:t>第一題答錯，第二題一定跟著錯。</a:t>
+            </a:r>
+            <a:r>
+              <a:rPr sz="800" lang="zh-TW" dirty="0">
+                <a:solidFill>
+                  <a:srgbClr val="000000"/>
+                </a:solidFill>
+                <a:latin typeface="Arial Unicode MS"/>
+                <a:ea typeface="Arial Unicode MS"/>
+                <a:cs typeface="Arial Unicode MS"/>
+              </a:rPr>
+              <a:t>因為量外參的時候，用的就是相機拍的畫面。畫面本身是歪的，量出來的角度就跟著歪。
 </a:t>
             </a:r>
           </a:p>

--- a/第五週(10-08)/第五週_第2節_簡報.pptx
+++ b/第五週(10-08)/第五週_第2節_簡報.pptx
@@ -5091,7 +5091,29 @@
                 <a:ea typeface="Arial Unicode MS"/>
                 <a:cs typeface="Arial Unicode MS"/>
               </a:rPr>
-              <a:t>三格不是三件並列的事：①②是兩個有先後的問題（這個位置是哪個方向／相機自己朝哪），③是②沒做好的後果，要講清楚。中間切出去播兩支短片（內參 19 秒、外參 14 秒），網址在口白裡，先開好分頁。
+              <a:t>三格不是三件並列的事：①②是兩個有先後的問題（這個位置是哪個方向／相機自己朝哪），③是②沒做好的後果，要講清楚。中間要播兩支短片，</a:t>
+            </a:r>
+            <a:r>
+              <a:rPr sz="800" b="1" lang="zh-TW" dirty="0">
+                <a:solidFill>
+                  <a:srgbClr val="000000"/>
+                </a:solidFill>
+                <a:latin typeface="Arial Unicode MS"/>
+                <a:ea typeface="Arial Unicode MS"/>
+                <a:cs typeface="Arial Unicode MS"/>
+              </a:rPr>
+              <a:t>連結直接印在①②兩格下面，點了就開</a:t>
+            </a:r>
+            <a:r>
+              <a:rPr sz="800" lang="zh-TW" dirty="0">
+                <a:solidFill>
+                  <a:srgbClr val="000000"/>
+                </a:solidFill>
+                <a:latin typeface="Arial Unicode MS"/>
+                <a:ea typeface="Arial Unicode MS"/>
+                <a:cs typeface="Arial Unicode MS"/>
+              </a:rPr>
+              <a:t>（內參 19 秒、外參 14 秒），不必先開分頁。
 </a:t>
             </a:r>
           </a:p>
@@ -5443,7 +5465,7 @@
                 <a:ea typeface="Arial Unicode MS"/>
                 <a:cs typeface="Arial Unicode MS"/>
               </a:rPr>
-              <a:t>我放十九秒給各位看。</a:t>
+              <a:t>我放十九秒給各位看，</a:t>
             </a:r>
             <a:r>
               <a:rPr sz="800" b="1" lang="zh-TW" dirty="0">
@@ -5454,18 +5476,18 @@
                 <a:ea typeface="Arial Unicode MS"/>
                 <a:cs typeface="Arial Unicode MS"/>
               </a:rPr>
-              <a:t>（切出去播 youtu.be/J7hdrMn2RII）</a:t>
-            </a:r>
-            <a:r>
-              <a:rPr sz="800" lang="zh-TW" dirty="0">
-                <a:solidFill>
-                  <a:srgbClr val="000000"/>
-                </a:solidFill>
-                <a:latin typeface="Arial Unicode MS"/>
-                <a:ea typeface="Arial Unicode MS"/>
-                <a:cs typeface="Arial Unicode MS"/>
-              </a:rPr>
-              <a:t>畫面上疊了一層格子線——各位看那些格子，</a:t>
+              <a:t>連結就印在①那一格下面，直接點</a:t>
+            </a:r>
+            <a:r>
+              <a:rPr sz="800" lang="zh-TW" dirty="0">
+                <a:solidFill>
+                  <a:srgbClr val="000000"/>
+                </a:solidFill>
+                <a:latin typeface="Arial Unicode MS"/>
+                <a:ea typeface="Arial Unicode MS"/>
+                <a:cs typeface="Arial Unicode MS"/>
+              </a:rPr>
+              <a:t>。畫面上疊了一層格子線——各位看那些格子，</a:t>
             </a:r>
             <a:r>
               <a:rPr sz="800" b="1" lang="zh-TW" dirty="0">
@@ -5696,7 +5718,7 @@
                 <a:ea typeface="Arial Unicode MS"/>
                 <a:cs typeface="Arial Unicode MS"/>
               </a:rPr>
-              <a:t>外參對的時候長什麼樣？再給各位看十四秒。</a:t>
+              <a:t>外參對的時候長什麼樣？再給各位看十四秒，</a:t>
             </a:r>
             <a:r>
               <a:rPr sz="800" b="1" lang="zh-TW" dirty="0">
@@ -5707,18 +5729,18 @@
                 <a:ea typeface="Arial Unicode MS"/>
                 <a:cs typeface="Arial Unicode MS"/>
               </a:rPr>
-              <a:t>（切出去播 youtu.be/yqRNU7EsHJY）</a:t>
-            </a:r>
-            <a:r>
-              <a:rPr sz="800" lang="zh-TW" dirty="0">
-                <a:solidFill>
-                  <a:srgbClr val="000000"/>
-                </a:solidFill>
-                <a:latin typeface="Arial Unicode MS"/>
-                <a:ea typeface="Arial Unicode MS"/>
-                <a:cs typeface="Arial Unicode MS"/>
-              </a:rPr>
-              <a:t>畫面是相機拍的街景，上面那些彩色的點是光達的點雲疊上去的。各位看那根路燈桿、那塊黃色的行人標誌、前面那台車——</a:t>
+              <a:t>連結印在②那一格下面</a:t>
+            </a:r>
+            <a:r>
+              <a:rPr sz="800" lang="zh-TW" dirty="0">
+                <a:solidFill>
+                  <a:srgbClr val="000000"/>
+                </a:solidFill>
+                <a:latin typeface="Arial Unicode MS"/>
+                <a:ea typeface="Arial Unicode MS"/>
+                <a:cs typeface="Arial Unicode MS"/>
+              </a:rPr>
+              <a:t>。畫面是相機拍的街景，上面那些彩色的點是光達的點雲疊上去的。各位看那根路燈桿、那塊黃色的行人標誌、前面那台車——</a:t>
             </a:r>
             <a:r>
               <a:rPr sz="800" b="1" lang="zh-TW" dirty="0">
@@ -19142,8 +19164,8 @@
         </p:nvSpPr>
         <p:spPr>
           <a:xfrm>
-            <a:off x="739684" y="2690763"/>
-            <a:ext cx="2211065" cy="1138135"/>
+            <a:off x="739684" y="2530713"/>
+            <a:ext cx="2211065" cy="853602"/>
           </a:xfrm>
           <a:prstGeom prst="rect">
             <a:avLst/>
@@ -19238,14 +19260,57 @@
       </p:sp>
       <p:sp>
         <p:nvSpPr>
-          <p:cNvPr id="8" name="Text 6"/>
+          <p:cNvPr id="8" name="Shape 6"/>
+          <p:cNvSpPr/>
+          <p:nvPr/>
+        </p:nvSpPr>
+        <p:spPr>
+          <a:xfrm>
+            <a:off x="881951" y="3526581"/>
+            <a:ext cx="1926531" cy="1"/>
+          </a:xfrm>
+          <a:prstGeom prst="line">
+            <a:avLst/>
+          </a:prstGeom>
+          <a:noFill/>
+          <a:ln w="12700">
+            <a:solidFill>
+              <a:srgbClr val="DBE3EA"/>
+            </a:solidFill>
+            <a:prstDash val="solid"/>
+          </a:ln>
+        </p:spPr>
+      </p:sp>
+      <p:sp>
+        <p:nvSpPr>
+          <p:cNvPr id="9" name="Shape 7"/>
+          <p:cNvSpPr/>
+          <p:nvPr/>
+        </p:nvSpPr>
+        <p:spPr>
+          <a:xfrm>
+            <a:off x="793035" y="3633281"/>
+            <a:ext cx="195617" cy="195617"/>
+          </a:xfrm>
+          <a:prstGeom prst="ellipse">
+            <a:avLst/>
+          </a:prstGeom>
+          <a:solidFill>
+            <a:srgbClr val="D9463E"/>
+          </a:solidFill>
+          <a:ln/>
+        </p:spPr>
+      </p:sp>
+      <p:sp>
+        <p:nvSpPr>
+          <p:cNvPr id="10" name="Text 8"/>
           <p:cNvSpPr txBox="1"/>
           <p:nvPr/>
         </p:nvSpPr>
         <p:spPr>
           <a:xfrm>
-            <a:off x="3075233" y="2175045"/>
-            <a:ext cx="266751" cy="355667"/>
+            <a:off x="793035" y="3651065"/>
+            <a:ext cx="195617" cy="160050"/>
           </a:xfrm>
           <a:prstGeom prst="rect">
             <a:avLst/>
@@ -19261,6 +19326,112 @@
               <a:buNone/>
             </a:pPr>
             <a:r>
+              <a:rPr lang="en-US" sz="680" b="1" dirty="0">
+                <a:solidFill>
+                  <a:srgbClr val="FFFFFF"/>
+                </a:solidFill>
+                <a:latin typeface="Arial" pitchFamily="34" charset="0"/>
+                <a:ea typeface="Arial" pitchFamily="34" charset="-122"/>
+                <a:cs typeface="Arial" pitchFamily="34" charset="-120"/>
+              </a:rPr>
+              <a:t>▶</a:t>
+            </a:r>
+            <a:endParaRPr lang="en-US" sz="680" dirty="0"/>
+          </a:p>
+        </p:txBody>
+      </p:sp>
+      <p:sp>
+        <p:nvSpPr>
+          <p:cNvPr id="11" name="Text 9"/>
+          <p:cNvSpPr txBox="1"/>
+          <p:nvPr/>
+        </p:nvSpPr>
+        <p:spPr>
+          <a:xfrm>
+            <a:off x="1024218" y="3624390"/>
+            <a:ext cx="1908748" cy="213400"/>
+          </a:xfrm>
+          <a:prstGeom prst="rect">
+            <a:avLst/>
+          </a:prstGeom>
+          <a:noFill/>
+          <a:ln/>
+        </p:spPr>
+        <p:txBody>
+          <a:bodyPr wrap="square" lIns="0" tIns="0" rIns="0" bIns="0" rtlCol="0" anchor="ctr"/>
+          <a:lstStyle/>
+          <a:p>
+            <a:pPr indent="0" marL="0">
+              <a:buNone/>
+            </a:pPr>
+            <a:r>
+              <a:rPr lang="en-US" sz="880" b="1" u="sng" dirty="0">
+                <a:solidFill>
+                  <a:srgbClr val="0B1F3A"/>
+                </a:solidFill>
+                <a:latin typeface="Arial" pitchFamily="34" charset="0"/>
+                <a:ea typeface="Arial" pitchFamily="34" charset="-122"/>
+                <a:cs typeface="Arial" pitchFamily="34" charset="-120"/>
+                <a:hlinkClick r:id="rId1" invalidUrl="" action="" tgtFrame="" tooltip="" history="1" highlightClick="0" endSnd="0">
+                  <a:extLst>
+                    <a:ext uri="{A12FA001-AC4F-418D-AE19-62706E023703}">
+                      <ahyp:hlinkClr xmlns:ahyp="http://schemas.microsoft.com/office/drawing/2018/hyperlinkcolor" val="tx"/>
+                    </a:ext>
+                  </a:extLst>
+                </a:hlinkClick>
+              </a:rPr>
+              <a:t>0:19　</a:t>
+            </a:r>
+            <a:pPr indent="0" marL="0">
+              <a:buNone/>
+            </a:pPr>
+            <a:r>
+              <a:rPr lang="en-US" sz="880" u="sng" dirty="0">
+                <a:solidFill>
+                  <a:srgbClr val="1F6FBF"/>
+                </a:solidFill>
+                <a:latin typeface="Arial" pitchFamily="34" charset="0"/>
+                <a:ea typeface="Arial" pitchFamily="34" charset="-122"/>
+                <a:cs typeface="Arial" pitchFamily="34" charset="-120"/>
+                <a:hlinkClick r:id="rId1" invalidUrl="" action="" tgtFrame="" tooltip="" history="1" highlightClick="0" endSnd="0">
+                  <a:extLst>
+                    <a:ext uri="{A12FA001-AC4F-418D-AE19-62706E023703}">
+                      <ahyp:hlinkClr xmlns:ahyp="http://schemas.microsoft.com/office/drawing/2018/hyperlinkcolor" val="tx"/>
+                    </a:ext>
+                  </a:extLst>
+                </a:hlinkClick>
+              </a:rPr>
+              <a:t>youtu.be/J7hdrMn2RII</a:t>
+            </a:r>
+            <a:endParaRPr lang="en-US" sz="880" dirty="0"/>
+          </a:p>
+        </p:txBody>
+      </p:sp>
+      <p:sp>
+        <p:nvSpPr>
+          <p:cNvPr id="12" name="Text 10"/>
+          <p:cNvSpPr txBox="1"/>
+          <p:nvPr/>
+        </p:nvSpPr>
+        <p:spPr>
+          <a:xfrm>
+            <a:off x="3075233" y="2175045"/>
+            <a:ext cx="266751" cy="355667"/>
+          </a:xfrm>
+          <a:prstGeom prst="rect">
+            <a:avLst/>
+          </a:prstGeom>
+          <a:noFill/>
+          <a:ln/>
+        </p:spPr>
+        <p:txBody>
+          <a:bodyPr wrap="square" lIns="0" tIns="0" rIns="0" bIns="0" rtlCol="0" anchor="ctr"/>
+          <a:lstStyle/>
+          <a:p>
+            <a:pPr algn="ctr" indent="0" marL="0">
+              <a:buNone/>
+            </a:pPr>
+            <a:r>
               <a:rPr lang="en-US" sz="1850" b="1" dirty="0">
                 <a:solidFill>
                   <a:srgbClr val="00A896"/>
@@ -19277,7 +19448,7 @@
       </p:sp>
       <p:sp>
         <p:nvSpPr>
-          <p:cNvPr id="9" name="Shape 7"/>
+          <p:cNvPr id="13" name="Shape 11"/>
           <p:cNvSpPr/>
           <p:nvPr/>
         </p:nvSpPr>
@@ -19311,7 +19482,7 @@
       </p:sp>
       <p:sp>
         <p:nvSpPr>
-          <p:cNvPr id="10" name="Shape 8"/>
+          <p:cNvPr id="14" name="Shape 12"/>
           <p:cNvSpPr/>
           <p:nvPr/>
         </p:nvSpPr>
@@ -19331,7 +19502,7 @@
       </p:sp>
       <p:sp>
         <p:nvSpPr>
-          <p:cNvPr id="11" name="Text 9"/>
+          <p:cNvPr id="15" name="Text 13"/>
           <p:cNvSpPr txBox="1"/>
           <p:nvPr/>
         </p:nvSpPr>
@@ -19370,7 +19541,7 @@
       </p:sp>
       <p:sp>
         <p:nvSpPr>
-          <p:cNvPr id="12" name="Text 10"/>
+          <p:cNvPr id="16" name="Text 14"/>
           <p:cNvSpPr txBox="1"/>
           <p:nvPr/>
         </p:nvSpPr>
@@ -19432,14 +19603,14 @@
       </p:sp>
       <p:sp>
         <p:nvSpPr>
-          <p:cNvPr id="13" name="Text 11"/>
+          <p:cNvPr id="17" name="Text 15"/>
           <p:cNvSpPr txBox="1"/>
           <p:nvPr/>
         </p:nvSpPr>
         <p:spPr>
           <a:xfrm>
-            <a:off x="3466467" y="2690763"/>
-            <a:ext cx="2211065" cy="1138135"/>
+            <a:off x="3466467" y="2530713"/>
+            <a:ext cx="2211065" cy="853602"/>
           </a:xfrm>
           <a:prstGeom prst="rect">
             <a:avLst/>
@@ -19534,14 +19705,57 @@
       </p:sp>
       <p:sp>
         <p:nvSpPr>
-          <p:cNvPr id="14" name="Text 12"/>
+          <p:cNvPr id="18" name="Shape 16"/>
+          <p:cNvSpPr/>
+          <p:nvPr/>
+        </p:nvSpPr>
+        <p:spPr>
+          <a:xfrm>
+            <a:off x="3608734" y="3526581"/>
+            <a:ext cx="1926531" cy="1"/>
+          </a:xfrm>
+          <a:prstGeom prst="line">
+            <a:avLst/>
+          </a:prstGeom>
+          <a:noFill/>
+          <a:ln w="12700">
+            <a:solidFill>
+              <a:srgbClr val="DBE3EA"/>
+            </a:solidFill>
+            <a:prstDash val="solid"/>
+          </a:ln>
+        </p:spPr>
+      </p:sp>
+      <p:sp>
+        <p:nvSpPr>
+          <p:cNvPr id="19" name="Shape 17"/>
+          <p:cNvSpPr/>
+          <p:nvPr/>
+        </p:nvSpPr>
+        <p:spPr>
+          <a:xfrm>
+            <a:off x="3519817" y="3633281"/>
+            <a:ext cx="195617" cy="195617"/>
+          </a:xfrm>
+          <a:prstGeom prst="ellipse">
+            <a:avLst/>
+          </a:prstGeom>
+          <a:solidFill>
+            <a:srgbClr val="D9463E"/>
+          </a:solidFill>
+          <a:ln/>
+        </p:spPr>
+      </p:sp>
+      <p:sp>
+        <p:nvSpPr>
+          <p:cNvPr id="20" name="Text 18"/>
           <p:cNvSpPr txBox="1"/>
           <p:nvPr/>
         </p:nvSpPr>
         <p:spPr>
           <a:xfrm>
-            <a:off x="5802016" y="2175045"/>
-            <a:ext cx="266751" cy="355667"/>
+            <a:off x="3519817" y="3651065"/>
+            <a:ext cx="195617" cy="160050"/>
           </a:xfrm>
           <a:prstGeom prst="rect">
             <a:avLst/>
@@ -19557,6 +19771,112 @@
               <a:buNone/>
             </a:pPr>
             <a:r>
+              <a:rPr lang="en-US" sz="680" b="1" dirty="0">
+                <a:solidFill>
+                  <a:srgbClr val="FFFFFF"/>
+                </a:solidFill>
+                <a:latin typeface="Arial" pitchFamily="34" charset="0"/>
+                <a:ea typeface="Arial" pitchFamily="34" charset="-122"/>
+                <a:cs typeface="Arial" pitchFamily="34" charset="-120"/>
+              </a:rPr>
+              <a:t>▶</a:t>
+            </a:r>
+            <a:endParaRPr lang="en-US" sz="680" dirty="0"/>
+          </a:p>
+        </p:txBody>
+      </p:sp>
+      <p:sp>
+        <p:nvSpPr>
+          <p:cNvPr id="21" name="Text 19"/>
+          <p:cNvSpPr txBox="1"/>
+          <p:nvPr/>
+        </p:nvSpPr>
+        <p:spPr>
+          <a:xfrm>
+            <a:off x="3751001" y="3624390"/>
+            <a:ext cx="1908748" cy="213400"/>
+          </a:xfrm>
+          <a:prstGeom prst="rect">
+            <a:avLst/>
+          </a:prstGeom>
+          <a:noFill/>
+          <a:ln/>
+        </p:spPr>
+        <p:txBody>
+          <a:bodyPr wrap="square" lIns="0" tIns="0" rIns="0" bIns="0" rtlCol="0" anchor="ctr"/>
+          <a:lstStyle/>
+          <a:p>
+            <a:pPr indent="0" marL="0">
+              <a:buNone/>
+            </a:pPr>
+            <a:r>
+              <a:rPr lang="en-US" sz="880" b="1" u="sng" dirty="0">
+                <a:solidFill>
+                  <a:srgbClr val="0B1F3A"/>
+                </a:solidFill>
+                <a:latin typeface="Arial" pitchFamily="34" charset="0"/>
+                <a:ea typeface="Arial" pitchFamily="34" charset="-122"/>
+                <a:cs typeface="Arial" pitchFamily="34" charset="-120"/>
+                <a:hlinkClick r:id="rId2" invalidUrl="" action="" tgtFrame="" tooltip="" history="1" highlightClick="0" endSnd="0">
+                  <a:extLst>
+                    <a:ext uri="{A12FA001-AC4F-418D-AE19-62706E023703}">
+                      <ahyp:hlinkClr xmlns:ahyp="http://schemas.microsoft.com/office/drawing/2018/hyperlinkcolor" val="tx"/>
+                    </a:ext>
+                  </a:extLst>
+                </a:hlinkClick>
+              </a:rPr>
+              <a:t>0:14　</a:t>
+            </a:r>
+            <a:pPr indent="0" marL="0">
+              <a:buNone/>
+            </a:pPr>
+            <a:r>
+              <a:rPr lang="en-US" sz="880" u="sng" dirty="0">
+                <a:solidFill>
+                  <a:srgbClr val="1F6FBF"/>
+                </a:solidFill>
+                <a:latin typeface="Arial" pitchFamily="34" charset="0"/>
+                <a:ea typeface="Arial" pitchFamily="34" charset="-122"/>
+                <a:cs typeface="Arial" pitchFamily="34" charset="-120"/>
+                <a:hlinkClick r:id="rId2" invalidUrl="" action="" tgtFrame="" tooltip="" history="1" highlightClick="0" endSnd="0">
+                  <a:extLst>
+                    <a:ext uri="{A12FA001-AC4F-418D-AE19-62706E023703}">
+                      <ahyp:hlinkClr xmlns:ahyp="http://schemas.microsoft.com/office/drawing/2018/hyperlinkcolor" val="tx"/>
+                    </a:ext>
+                  </a:extLst>
+                </a:hlinkClick>
+              </a:rPr>
+              <a:t>youtu.be/yqRNU7EsHJY</a:t>
+            </a:r>
+            <a:endParaRPr lang="en-US" sz="880" dirty="0"/>
+          </a:p>
+        </p:txBody>
+      </p:sp>
+      <p:sp>
+        <p:nvSpPr>
+          <p:cNvPr id="22" name="Text 20"/>
+          <p:cNvSpPr txBox="1"/>
+          <p:nvPr/>
+        </p:nvSpPr>
+        <p:spPr>
+          <a:xfrm>
+            <a:off x="5802016" y="2175045"/>
+            <a:ext cx="266751" cy="355667"/>
+          </a:xfrm>
+          <a:prstGeom prst="rect">
+            <a:avLst/>
+          </a:prstGeom>
+          <a:noFill/>
+          <a:ln/>
+        </p:spPr>
+        <p:txBody>
+          <a:bodyPr wrap="square" lIns="0" tIns="0" rIns="0" bIns="0" rtlCol="0" anchor="ctr"/>
+          <a:lstStyle/>
+          <a:p>
+            <a:pPr algn="ctr" indent="0" marL="0">
+              <a:buNone/>
+            </a:pPr>
+            <a:r>
               <a:rPr lang="en-US" sz="1850" b="1" dirty="0">
                 <a:solidFill>
                   <a:srgbClr val="00A896"/>
@@ -19573,7 +19893,7 @@
       </p:sp>
       <p:sp>
         <p:nvSpPr>
-          <p:cNvPr id="15" name="Shape 13"/>
+          <p:cNvPr id="23" name="Shape 21"/>
           <p:cNvSpPr/>
           <p:nvPr/>
         </p:nvSpPr>
@@ -19607,7 +19927,7 @@
       </p:sp>
       <p:sp>
         <p:nvSpPr>
-          <p:cNvPr id="16" name="Shape 14"/>
+          <p:cNvPr id="24" name="Shape 22"/>
           <p:cNvSpPr/>
           <p:nvPr/>
         </p:nvSpPr>
@@ -19627,7 +19947,7 @@
       </p:sp>
       <p:sp>
         <p:nvSpPr>
-          <p:cNvPr id="17" name="Text 15"/>
+          <p:cNvPr id="25" name="Text 23"/>
           <p:cNvSpPr txBox="1"/>
           <p:nvPr/>
         </p:nvSpPr>
@@ -19666,7 +19986,7 @@
       </p:sp>
       <p:sp>
         <p:nvSpPr>
-          <p:cNvPr id="18" name="Text 16"/>
+          <p:cNvPr id="26" name="Text 24"/>
           <p:cNvSpPr txBox="1"/>
           <p:nvPr/>
         </p:nvSpPr>
@@ -19728,7 +20048,7 @@
       </p:sp>
       <p:sp>
         <p:nvSpPr>
-          <p:cNvPr id="19" name="Text 17"/>
+          <p:cNvPr id="27" name="Text 25"/>
           <p:cNvSpPr txBox="1"/>
           <p:nvPr/>
         </p:nvSpPr>
@@ -19830,7 +20150,7 @@
       </p:sp>
       <p:sp>
         <p:nvSpPr>
-          <p:cNvPr id="20" name="Text 18"/>
+          <p:cNvPr id="28" name="Text 26"/>
           <p:cNvSpPr txBox="1"/>
           <p:nvPr/>
         </p:nvSpPr>
@@ -19892,14 +20212,14 @@
       </p:sp>
       <p:pic>
         <p:nvPicPr>
-          <p:cNvPr id="22" name="Image 0" descr="/Users/tsengchenghsun/Class/carClass/Claude outputs/第五週(10-8)/src/logo.png">    </p:cNvPr>
+          <p:cNvPr id="30" name="Image 0" descr="/Users/tsengchenghsun/Class/carClass/Claude outputs/第五週(10-8)/src/logo.png">    </p:cNvPr>
           <p:cNvPicPr>
             <a:picLocks noChangeAspect="1"/>
           </p:cNvPicPr>
           <p:nvPr/>
         </p:nvPicPr>
         <p:blipFill>
-          <a:blip r:embed="rId1"/>
+          <a:blip r:embed="rId3"/>
           <a:stretch>
             <a:fillRect/>
           </a:stretch>
@@ -19916,7 +20236,7 @@
       </p:pic>
       <p:sp>
         <p:nvSpPr>
-          <p:cNvPr id="23" name="Text 19"/>
+          <p:cNvPr id="31" name="Text 27"/>
           <p:cNvSpPr txBox="1"/>
           <p:nvPr/>
         </p:nvSpPr>
@@ -19955,7 +20275,7 @@
       </p:sp>
       <p:sp>
         <p:nvSpPr>
-          <p:cNvPr id="24" name="Text 20"/>
+          <p:cNvPr id="32" name="Text 28"/>
           <p:cNvSpPr txBox="1"/>
           <p:nvPr/>
         </p:nvSpPr>

--- a/第五週(10-08)/第五週_第2節_簡報.pptx
+++ b/第五週(10-08)/第五週_第2節_簡報.pptx
@@ -5806,7 +5806,7 @@
                 <a:ea typeface="Arial Unicode MS"/>
                 <a:cs typeface="Arial Unicode MS"/>
               </a:rPr>
-              <a:t>假設角度差了</a:t>
+              <a:t>先講清楚是</a:t>
             </a:r>
             <a:r>
               <a:rPr sz="800" b="1" lang="zh-TW" dirty="0">
@@ -5817,18 +5817,18 @@
                 <a:ea typeface="Arial Unicode MS"/>
                 <a:cs typeface="Arial Unicode MS"/>
               </a:rPr>
-              <a:t>一度</a:t>
-            </a:r>
-            <a:r>
-              <a:rPr sz="800" lang="zh-TW" dirty="0">
-                <a:solidFill>
-                  <a:srgbClr val="000000"/>
-                </a:solidFill>
-                <a:latin typeface="Arial Unicode MS"/>
-                <a:ea typeface="Arial Unicode MS"/>
-                <a:cs typeface="Arial Unicode MS"/>
-              </a:rPr>
-              <a:t>。有人會問：是相機歪了還是光達歪了？</a:t>
+              <a:t>什麼跟什麼差一度</a:t>
+            </a:r>
+            <a:r>
+              <a:rPr sz="800" lang="zh-TW" dirty="0">
+                <a:solidFill>
+                  <a:srgbClr val="000000"/>
+                </a:solidFill>
+                <a:latin typeface="Arial Unicode MS"/>
+                <a:ea typeface="Arial Unicode MS"/>
+                <a:cs typeface="Arial Unicode MS"/>
+              </a:rPr>
+              <a:t>。車子的檔案裡記著一組數字：這顆相機是朝這個方向裝的。可是</a:t>
             </a:r>
             <a:r>
               <a:rPr sz="800" b="1" lang="zh-TW" dirty="0">
@@ -5839,6 +5839,50 @@
                 <a:ea typeface="Arial Unicode MS"/>
                 <a:cs typeface="Arial Unicode MS"/>
               </a:rPr>
+              <a:t>實際裝上去的方向</a:t>
+            </a:r>
+            <a:r>
+              <a:rPr sz="800" lang="zh-TW" dirty="0">
+                <a:solidFill>
+                  <a:srgbClr val="000000"/>
+                </a:solidFill>
+                <a:latin typeface="Arial Unicode MS"/>
+                <a:ea typeface="Arial Unicode MS"/>
+                <a:cs typeface="Arial Unicode MS"/>
+              </a:rPr>
+              <a:t>，和那組數字差了一度。最常見的情況就是：擋風玻璃換過一次，相機裝回去的時候歪了一點點，可是</a:t>
+            </a:r>
+            <a:r>
+              <a:rPr sz="800" b="1" lang="zh-TW" dirty="0">
+                <a:solidFill>
+                  <a:srgbClr val="000000"/>
+                </a:solidFill>
+                <a:latin typeface="Arial Unicode MS"/>
+                <a:ea typeface="Arial Unicode MS"/>
+                <a:cs typeface="Arial Unicode MS"/>
+              </a:rPr>
+              <a:t>檔案裡那組數字沒人去改</a:t>
+            </a:r>
+            <a:r>
+              <a:rPr sz="800" lang="zh-TW" dirty="0">
+                <a:solidFill>
+                  <a:srgbClr val="000000"/>
+                </a:solidFill>
+                <a:latin typeface="Arial Unicode MS"/>
+                <a:ea typeface="Arial Unicode MS"/>
+                <a:cs typeface="Arial Unicode MS"/>
+              </a:rPr>
+              <a:t>。有人會問：那到底是相機歪了，還是光達歪了？</a:t>
+            </a:r>
+            <a:r>
+              <a:rPr sz="800" b="1" lang="zh-TW" dirty="0">
+                <a:solidFill>
+                  <a:srgbClr val="000000"/>
+                </a:solidFill>
+                <a:latin typeface="Arial Unicode MS"/>
+                <a:ea typeface="Arial Unicode MS"/>
+                <a:cs typeface="Arial Unicode MS"/>
+              </a:rPr>
               <a:t>都可以，而且不重要</a:t>
             </a:r>
             <a:r>
@@ -5850,7 +5894,7 @@
                 <a:ea typeface="Arial Unicode MS"/>
                 <a:cs typeface="Arial Unicode MS"/>
               </a:rPr>
-              <a:t>——只要實際的角度和車子記在檔案裡的那組數字差一度，結果都一樣。我們就拿最常見的那個情況：擋風玻璃換過一次，相機裝回去的時候差了一度。一度聽起來很小對不對？
+              <a:t>——只要實際的和記錄的差一度，結果都一樣。一度聽起來很小對不對？
 </a:t>
             </a:r>
           </a:p>
@@ -20020,7 +20064,7 @@
                 <a:ea typeface="Arial" pitchFamily="34" charset="-122"/>
                 <a:cs typeface="Arial" pitchFamily="34" charset="-120"/>
               </a:rPr>
-              <a:t>Tham số ngoài lệch 1°</a:t>
+              <a:t>Lệch 1° so với số đã ghi</a:t>
             </a:r>
             <a:endParaRPr lang="en-US" sz="1360" dirty="0"/>
           </a:p>
@@ -20040,7 +20084,7 @@
                 <a:ea typeface="微軟正黑體" pitchFamily="34" charset="-122"/>
                 <a:cs typeface="微軟正黑體" pitchFamily="34" charset="-120"/>
               </a:rPr>
-              <a:t>外參差 1 度</a:t>
+              <a:t>實際角度和車上記的差 1 度</a:t>
             </a:r>
             <a:endParaRPr lang="en-US" sz="1360" dirty="0"/>
           </a:p>

--- a/第五週(10-08)/第五週_第2節_簡報.pptx
+++ b/第五週(10-08)/第五週_第2節_簡報.pptx
@@ -7554,11 +7554,11 @@
                 <a:spcPts val="0"/>
               </a:spcBef>
               <a:spcAft>
-                <a:spcPts val="150"/>
+                <a:spcPts val="133"/>
               </a:spcAft>
             </a:pPr>
             <a:r>
-              <a:rPr sz="900" lang="zh-TW" dirty="0">
+              <a:rPr sz="800" lang="zh-TW" dirty="0">
                 <a:solidFill>
                   <a:srgbClr val="000000"/>
                 </a:solidFill>
@@ -7569,7 +7569,7 @@
               <a:t>先講第一件，</a:t>
             </a:r>
             <a:r>
-              <a:rPr sz="900" b="1" lang="zh-TW" dirty="0">
+              <a:rPr sz="800" b="1" lang="zh-TW" dirty="0">
                 <a:solidFill>
                   <a:srgbClr val="000000"/>
                 </a:solidFill>
@@ -7580,7 +7580,7 @@
               <a:t>快門方式</a:t>
             </a:r>
             <a:r>
-              <a:rPr sz="900" lang="zh-TW" dirty="0">
+              <a:rPr sz="800" lang="zh-TW" dirty="0">
                 <a:solidFill>
                   <a:srgbClr val="000000"/>
                 </a:solidFill>
@@ -7591,7 +7591,7 @@
               <a:t>。規格表上那一行的欄位名叫 </a:t>
             </a:r>
             <a:r>
-              <a:rPr sz="900" b="1" lang="zh-TW" dirty="0">
+              <a:rPr sz="800" b="1" lang="zh-TW" dirty="0">
                 <a:solidFill>
                   <a:srgbClr val="000000"/>
                 </a:solidFill>
@@ -7602,7 +7602,7 @@
               <a:t>Shutter Type</a:t>
             </a:r>
             <a:r>
-              <a:rPr sz="900" lang="zh-TW" dirty="0">
+              <a:rPr sz="800" lang="zh-TW" dirty="0">
                 <a:solidFill>
                   <a:srgbClr val="000000"/>
                 </a:solidFill>
@@ -7613,7 +7613,7 @@
               <a:t>，有的廠商只寫 Shutter；上面填的不是 rolling shutter 就是 global shutter。AR0233AT 填的是 </a:t>
             </a:r>
             <a:r>
-              <a:rPr sz="900" b="1" lang="zh-TW" dirty="0">
+              <a:rPr sz="800" b="1" lang="zh-TW" dirty="0">
                 <a:solidFill>
                   <a:srgbClr val="000000"/>
                 </a:solidFill>
@@ -7624,7 +7624,7 @@
               <a:t>electronic rolling shutter</a:t>
             </a:r>
             <a:r>
-              <a:rPr sz="900" lang="zh-TW" dirty="0">
+              <a:rPr sz="800" lang="zh-TW" dirty="0">
                 <a:solidFill>
                   <a:srgbClr val="000000"/>
                 </a:solidFill>
@@ -7642,11 +7642,11 @@
                 <a:spcPts val="0"/>
               </a:spcBef>
               <a:spcAft>
-                <a:spcPts val="150"/>
+                <a:spcPts val="133"/>
               </a:spcAft>
             </a:pPr>
             <a:r>
-              <a:rPr sz="900" lang="zh-TW" dirty="0">
+              <a:rPr sz="800" lang="zh-TW" dirty="0">
                 <a:solidFill>
                   <a:srgbClr val="000000"/>
                 </a:solidFill>
@@ -7657,7 +7657,7 @@
               <a:t>這裡要提醒一次：</a:t>
             </a:r>
             <a:r>
-              <a:rPr sz="900" b="1" lang="zh-TW" dirty="0">
+              <a:rPr sz="800" b="1" lang="zh-TW" dirty="0">
                 <a:solidFill>
                   <a:srgbClr val="000000"/>
                 </a:solidFill>
@@ -7668,7 +7668,7 @@
               <a:t>第二張說過，這一行不在那份兩頁的 Product Preview 上</a:t>
             </a:r>
             <a:r>
-              <a:rPr sz="900" lang="zh-TW" dirty="0">
+              <a:rPr sz="800" lang="zh-TW" dirty="0">
                 <a:solidFill>
                   <a:srgbClr val="000000"/>
                 </a:solidFill>
@@ -7686,11 +7686,11 @@
                 <a:spcPts val="0"/>
               </a:spcBef>
               <a:spcAft>
-                <a:spcPts val="150"/>
+                <a:spcPts val="133"/>
               </a:spcAft>
             </a:pPr>
             <a:r>
-              <a:rPr sz="900" lang="zh-TW" dirty="0">
+              <a:rPr sz="800" lang="zh-TW" dirty="0">
                 <a:solidFill>
                   <a:srgbClr val="000000"/>
                 </a:solidFill>
@@ -7701,7 +7701,7 @@
               <a:t>大部分的人以為，相機按一下就是一整張照片同時拍好。</a:t>
             </a:r>
             <a:r>
-              <a:rPr sz="900" b="1" lang="zh-TW" dirty="0">
+              <a:rPr sz="800" b="1" lang="zh-TW" dirty="0">
                 <a:solidFill>
                   <a:srgbClr val="000000"/>
                 </a:solidFill>
@@ -7712,7 +7712,7 @@
               <a:t>大部分的車用相機不是這樣。</a:t>
             </a:r>
             <a:r>
-              <a:rPr sz="900" lang="zh-TW" dirty="0">
+              <a:rPr sz="800" lang="zh-TW" dirty="0">
                 <a:solidFill>
                   <a:srgbClr val="000000"/>
                 </a:solidFill>
@@ -7723,7 +7723,7 @@
               <a:t>它叫</a:t>
             </a:r>
             <a:r>
-              <a:rPr sz="900" b="1" lang="zh-TW" dirty="0">
+              <a:rPr sz="800" b="1" lang="zh-TW" dirty="0">
                 <a:solidFill>
                   <a:srgbClr val="000000"/>
                 </a:solidFill>
@@ -7734,37 +7734,15 @@
               <a:t>捲簾快門</a:t>
             </a:r>
             <a:r>
-              <a:rPr sz="900" lang="zh-TW" dirty="0">
-                <a:solidFill>
-                  <a:srgbClr val="000000"/>
-                </a:solidFill>
-                <a:latin typeface="Arial Unicode MS"/>
-                <a:ea typeface="Arial Unicode MS"/>
-                <a:cs typeface="Arial Unicode MS"/>
-              </a:rPr>
-              <a:t>，rolling shutter。感光元件是</a:t>
-            </a:r>
-            <a:r>
-              <a:rPr sz="900" b="1" lang="zh-TW" dirty="0">
-                <a:solidFill>
-                  <a:srgbClr val="000000"/>
-                </a:solidFill>
-                <a:latin typeface="Arial Unicode MS"/>
-                <a:ea typeface="Arial Unicode MS"/>
-                <a:cs typeface="Arial Unicode MS"/>
-              </a:rPr>
-              <a:t>一列一列</a:t>
-            </a:r>
-            <a:r>
-              <a:rPr sz="900" lang="zh-TW" dirty="0">
-                <a:solidFill>
-                  <a:srgbClr val="000000"/>
-                </a:solidFill>
-                <a:latin typeface="Arial Unicode MS"/>
-                <a:ea typeface="Arial Unicode MS"/>
-                <a:cs typeface="Arial Unicode MS"/>
-              </a:rPr>
-              <a:t>讀出來的：先讀第一列，再讀第二列，一路讀到最後一列。整張讀完要幾十毫秒。
+              <a:rPr sz="800" lang="zh-TW" dirty="0">
+                <a:solidFill>
+                  <a:srgbClr val="000000"/>
+                </a:solidFill>
+                <a:latin typeface="Arial Unicode MS"/>
+                <a:ea typeface="Arial Unicode MS"/>
+                <a:cs typeface="Arial Unicode MS"/>
+              </a:rPr>
+              <a:t>，rolling shutter。
 </a:t>
             </a:r>
           </a:p>
@@ -7774,41 +7752,107 @@
                 <a:spcPts val="0"/>
               </a:spcBef>
               <a:spcAft>
-                <a:spcPts val="150"/>
+                <a:spcPts val="133"/>
               </a:spcAft>
             </a:pPr>
             <a:r>
-              <a:rPr sz="900" lang="zh-TW" dirty="0">
-                <a:solidFill>
-                  <a:srgbClr val="000000"/>
-                </a:solidFill>
-                <a:latin typeface="Arial Unicode MS"/>
-                <a:ea typeface="Arial Unicode MS"/>
-                <a:cs typeface="Arial Unicode MS"/>
-              </a:rPr>
-              <a:t>所以同一張照片裡面，最上面那一列和最下面那一列，</a:t>
-            </a:r>
-            <a:r>
-              <a:rPr sz="900" b="1" lang="zh-TW" dirty="0">
-                <a:solidFill>
-                  <a:srgbClr val="000000"/>
-                </a:solidFill>
-                <a:latin typeface="Arial Unicode MS"/>
-                <a:ea typeface="Arial Unicode MS"/>
-                <a:cs typeface="Arial Unicode MS"/>
-              </a:rPr>
-              <a:t>不是同一個時間拍的</a:t>
-            </a:r>
-            <a:r>
-              <a:rPr sz="900" lang="zh-TW" dirty="0">
-                <a:solidFill>
-                  <a:srgbClr val="000000"/>
-                </a:solidFill>
-                <a:latin typeface="Arial Unicode MS"/>
-                <a:ea typeface="Arial Unicode MS"/>
-                <a:cs typeface="Arial Unicode MS"/>
-              </a:rPr>
-              <a:t>。這會怎樣？各位有沒有看過那種照片，車子開過去的時候路邊的電線桿是歪的？或者拍飛機的螺旋槳，葉片變成香蕉形？那就是捲簾快門。
+              <a:rPr sz="800" lang="zh-TW" dirty="0">
+                <a:solidFill>
+                  <a:srgbClr val="000000"/>
+                </a:solidFill>
+                <a:latin typeface="Arial Unicode MS"/>
+                <a:ea typeface="Arial Unicode MS"/>
+                <a:cs typeface="Arial Unicode MS"/>
+              </a:rPr>
+              <a:t>講清楚一件事，不然後面會想錯：捲簾快門</a:t>
+            </a:r>
+            <a:r>
+              <a:rPr sz="800" b="1" lang="zh-TW" dirty="0">
+                <a:solidFill>
+                  <a:srgbClr val="000000"/>
+                </a:solidFill>
+                <a:latin typeface="Arial Unicode MS"/>
+                <a:ea typeface="Arial Unicode MS"/>
+                <a:cs typeface="Arial Unicode MS"/>
+              </a:rPr>
+              <a:t>不是「曝光時間比較長」</a:t>
+            </a:r>
+            <a:r>
+              <a:rPr sz="800" lang="zh-TW" dirty="0">
+                <a:solidFill>
+                  <a:srgbClr val="000000"/>
+                </a:solidFill>
+                <a:latin typeface="Arial Unicode MS"/>
+                <a:ea typeface="Arial Unicode MS"/>
+                <a:cs typeface="Arial Unicode MS"/>
+              </a:rPr>
+              <a:t>，它的每一列</a:t>
+            </a:r>
+            <a:r>
+              <a:rPr sz="800" b="1" lang="zh-TW" dirty="0">
+                <a:solidFill>
+                  <a:srgbClr val="000000"/>
+                </a:solidFill>
+                <a:latin typeface="Arial Unicode MS"/>
+                <a:ea typeface="Arial Unicode MS"/>
+                <a:cs typeface="Arial Unicode MS"/>
+              </a:rPr>
+              <a:t>曝光一樣長</a:t>
+            </a:r>
+            <a:r>
+              <a:rPr sz="800" lang="zh-TW" dirty="0">
+                <a:solidFill>
+                  <a:srgbClr val="000000"/>
+                </a:solidFill>
+                <a:latin typeface="Arial Unicode MS"/>
+                <a:ea typeface="Arial Unicode MS"/>
+                <a:cs typeface="Arial Unicode MS"/>
+              </a:rPr>
+              <a:t>。差別在</a:t>
+            </a:r>
+            <a:r>
+              <a:rPr sz="800" b="1" lang="zh-TW" dirty="0">
+                <a:solidFill>
+                  <a:srgbClr val="000000"/>
+                </a:solidFill>
+                <a:latin typeface="Arial Unicode MS"/>
+                <a:ea typeface="Arial Unicode MS"/>
+                <a:cs typeface="Arial Unicode MS"/>
+              </a:rPr>
+              <a:t>時刻</a:t>
+            </a:r>
+            <a:r>
+              <a:rPr sz="800" lang="zh-TW" dirty="0">
+                <a:solidFill>
+                  <a:srgbClr val="000000"/>
+                </a:solidFill>
+                <a:latin typeface="Arial Unicode MS"/>
+                <a:ea typeface="Arial Unicode MS"/>
+                <a:cs typeface="Arial Unicode MS"/>
+              </a:rPr>
+              <a:t>——第一列先開始曝光，第二列晚一點點，第三列再晚一點點，一路往下錯開；每一列曝完就讀走，讀完上一列才輪得到下一列。所以</a:t>
+            </a:r>
+            <a:r>
+              <a:rPr sz="800" b="1" lang="zh-TW" dirty="0">
+                <a:solidFill>
+                  <a:srgbClr val="000000"/>
+                </a:solidFill>
+                <a:latin typeface="Arial Unicode MS"/>
+                <a:ea typeface="Arial Unicode MS"/>
+                <a:cs typeface="Arial Unicode MS"/>
+              </a:rPr>
+              <a:t>最後一列比第一列晚了幾十毫秒</a:t>
+            </a:r>
+            <a:r>
+              <a:rPr sz="800" lang="zh-TW" dirty="0">
+                <a:solidFill>
+                  <a:srgbClr val="000000"/>
+                </a:solidFill>
+                <a:latin typeface="Arial Unicode MS"/>
+                <a:ea typeface="Arial Unicode MS"/>
+                <a:cs typeface="Arial Unicode MS"/>
+              </a:rPr>
+              <a:t>。
 </a:t>
             </a:r>
           </a:p>
@@ -7818,63 +7862,41 @@
                 <a:spcPts val="0"/>
               </a:spcBef>
               <a:spcAft>
-                <a:spcPts val="150"/>
+                <a:spcPts val="133"/>
               </a:spcAft>
             </a:pPr>
             <a:r>
-              <a:rPr sz="900" lang="zh-TW" dirty="0">
-                <a:solidFill>
-                  <a:srgbClr val="000000"/>
-                </a:solidFill>
-                <a:latin typeface="Arial Unicode MS"/>
-                <a:ea typeface="Arial Unicode MS"/>
-                <a:cs typeface="Arial Unicode MS"/>
-              </a:rPr>
-              <a:t>左邊這張動圖就是在演這件事，它會一直循環播，各位邊聽邊看。一開始那根電線桿是</a:t>
-            </a:r>
-            <a:r>
-              <a:rPr sz="900" b="1" lang="zh-TW" dirty="0">
-                <a:solidFill>
-                  <a:srgbClr val="000000"/>
-                </a:solidFill>
-                <a:latin typeface="Arial Unicode MS"/>
-                <a:ea typeface="Arial Unicode MS"/>
-                <a:cs typeface="Arial Unicode MS"/>
-              </a:rPr>
-              <a:t>直的</a:t>
-            </a:r>
-            <a:r>
-              <a:rPr sz="900" lang="zh-TW" dirty="0">
-                <a:solidFill>
-                  <a:srgbClr val="000000"/>
-                </a:solidFill>
-                <a:latin typeface="Arial Unicode MS"/>
-                <a:ea typeface="Arial Unicode MS"/>
-                <a:cs typeface="Arial Unicode MS"/>
-              </a:rPr>
-              <a:t>，這是它本來的樣子。然後黃色那條線從上往下掃，掃到哪一列，那一列才拍下來。左邊標的是時間：最上面那一列是第零毫秒，中間是第十五毫秒，最下面是第三十毫秒。這三十毫秒裡面車子一直在走，所以每一列拍到的電線桿都在不同的地方。掃完各位看結果——</a:t>
-            </a:r>
-            <a:r>
-              <a:rPr sz="900" b="1" lang="zh-TW" dirty="0">
-                <a:solidFill>
-                  <a:srgbClr val="000000"/>
-                </a:solidFill>
-                <a:latin typeface="Arial Unicode MS"/>
-                <a:ea typeface="Arial Unicode MS"/>
-                <a:cs typeface="Arial Unicode MS"/>
-              </a:rPr>
-              <a:t>那根直的電線桿，在照片裡變成斜的</a:t>
-            </a:r>
-            <a:r>
-              <a:rPr sz="900" lang="zh-TW" dirty="0">
-                <a:solidFill>
-                  <a:srgbClr val="000000"/>
-                </a:solidFill>
-                <a:latin typeface="Arial Unicode MS"/>
-                <a:ea typeface="Arial Unicode MS"/>
-                <a:cs typeface="Arial Unicode MS"/>
-              </a:rPr>
-              <a:t>。下面那個箭頭就是上下差了多少。
+              <a:rPr sz="800" lang="zh-TW" dirty="0">
+                <a:solidFill>
+                  <a:srgbClr val="000000"/>
+                </a:solidFill>
+                <a:latin typeface="Arial Unicode MS"/>
+                <a:ea typeface="Arial Unicode MS"/>
+                <a:cs typeface="Arial Unicode MS"/>
+              </a:rPr>
+              <a:t>結果就是：</a:t>
+            </a:r>
+            <a:r>
+              <a:rPr sz="800" b="1" lang="zh-TW" dirty="0">
+                <a:solidFill>
+                  <a:srgbClr val="000000"/>
+                </a:solidFill>
+                <a:latin typeface="Arial Unicode MS"/>
+                <a:ea typeface="Arial Unicode MS"/>
+                <a:cs typeface="Arial Unicode MS"/>
+              </a:rPr>
+              <a:t>同一張照片裡，每一列拍到的是不同的瞬間。</a:t>
+            </a:r>
+            <a:r>
+              <a:rPr sz="800" lang="zh-TW" dirty="0">
+                <a:solidFill>
+                  <a:srgbClr val="000000"/>
+                </a:solidFill>
+                <a:latin typeface="Arial Unicode MS"/>
+                <a:ea typeface="Arial Unicode MS"/>
+                <a:cs typeface="Arial Unicode MS"/>
+              </a:rPr>
+              <a:t>
 </a:t>
             </a:r>
           </a:p>
@@ -7884,19 +7906,41 @@
                 <a:spcPts val="0"/>
               </a:spcBef>
               <a:spcAft>
-                <a:spcPts val="150"/>
+                <a:spcPts val="133"/>
               </a:spcAft>
             </a:pPr>
             <a:r>
-              <a:rPr sz="900" lang="zh-TW" dirty="0">
-                <a:solidFill>
-                  <a:srgbClr val="000000"/>
-                </a:solidFill>
-                <a:latin typeface="Arial Unicode MS"/>
-                <a:ea typeface="Arial Unicode MS"/>
-                <a:cs typeface="Arial Unicode MS"/>
-              </a:rPr>
-              <a:t>對自駕車來說，這件事的嚴重性在哪裡？
+              <a:rPr sz="800" lang="zh-TW" dirty="0">
+                <a:solidFill>
+                  <a:srgbClr val="000000"/>
+                </a:solidFill>
+                <a:latin typeface="Arial Unicode MS"/>
+                <a:ea typeface="Arial Unicode MS"/>
+                <a:cs typeface="Arial Unicode MS"/>
+              </a:rPr>
+              <a:t>所以同一張照片裡面，最上面那一列和最下面那一列，</a:t>
+            </a:r>
+            <a:r>
+              <a:rPr sz="800" b="1" lang="zh-TW" dirty="0">
+                <a:solidFill>
+                  <a:srgbClr val="000000"/>
+                </a:solidFill>
+                <a:latin typeface="Arial Unicode MS"/>
+                <a:ea typeface="Arial Unicode MS"/>
+                <a:cs typeface="Arial Unicode MS"/>
+              </a:rPr>
+              <a:t>不是同一個時間拍的</a:t>
+            </a:r>
+            <a:r>
+              <a:rPr sz="800" lang="zh-TW" dirty="0">
+                <a:solidFill>
+                  <a:srgbClr val="000000"/>
+                </a:solidFill>
+                <a:latin typeface="Arial Unicode MS"/>
+                <a:ea typeface="Arial Unicode MS"/>
+                <a:cs typeface="Arial Unicode MS"/>
+              </a:rPr>
+              <a:t>。這會怎樣？各位有沒有看過那種照片，車子開過去的時候路邊的電線桿是歪的？或者拍飛機的螺旋槳，葉片變成香蕉形？那就是捲簾快門。
 </a:t>
             </a:r>
           </a:p>
@@ -7906,41 +7950,63 @@
                 <a:spcPts val="0"/>
               </a:spcBef>
               <a:spcAft>
-                <a:spcPts val="150"/>
+                <a:spcPts val="133"/>
               </a:spcAft>
             </a:pPr>
             <a:r>
-              <a:rPr sz="900" lang="zh-TW" dirty="0">
-                <a:solidFill>
-                  <a:srgbClr val="000000"/>
-                </a:solidFill>
-                <a:latin typeface="Arial Unicode MS"/>
-                <a:ea typeface="Arial Unicode MS"/>
-                <a:cs typeface="Arial Unicode MS"/>
-              </a:rPr>
-              <a:t>假設你的車以時速六十在跑，旁邊有一台機車從右邊切過來。畫面上半部拍到他的時候他在 A 點，下半部拍到他的時候他已經到 B 點了。演算法看到的是一個</a:t>
-            </a:r>
-            <a:r>
-              <a:rPr sz="900" b="1" lang="zh-TW" dirty="0">
-                <a:solidFill>
-                  <a:srgbClr val="000000"/>
-                </a:solidFill>
-                <a:latin typeface="Arial Unicode MS"/>
-                <a:ea typeface="Arial Unicode MS"/>
-                <a:cs typeface="Arial Unicode MS"/>
-              </a:rPr>
-              <a:t>被扭曲的形狀</a:t>
-            </a:r>
-            <a:r>
-              <a:rPr sz="900" lang="zh-TW" dirty="0">
-                <a:solidFill>
-                  <a:srgbClr val="000000"/>
-                </a:solidFill>
-                <a:latin typeface="Arial Unicode MS"/>
-                <a:ea typeface="Arial Unicode MS"/>
-                <a:cs typeface="Arial Unicode MS"/>
-              </a:rPr>
-              <a:t>，而且它不知道那是扭曲的，它以為那就是真的。
+              <a:rPr sz="800" lang="zh-TW" dirty="0">
+                <a:solidFill>
+                  <a:srgbClr val="000000"/>
+                </a:solidFill>
+                <a:latin typeface="Arial Unicode MS"/>
+                <a:ea typeface="Arial Unicode MS"/>
+                <a:cs typeface="Arial Unicode MS"/>
+              </a:rPr>
+              <a:t>左邊這張動圖就是在演這件事，它會一直循環播，各位邊聽邊看。一開始那根電線桿是</a:t>
+            </a:r>
+            <a:r>
+              <a:rPr sz="800" b="1" lang="zh-TW" dirty="0">
+                <a:solidFill>
+                  <a:srgbClr val="000000"/>
+                </a:solidFill>
+                <a:latin typeface="Arial Unicode MS"/>
+                <a:ea typeface="Arial Unicode MS"/>
+                <a:cs typeface="Arial Unicode MS"/>
+              </a:rPr>
+              <a:t>直的</a:t>
+            </a:r>
+            <a:r>
+              <a:rPr sz="800" lang="zh-TW" dirty="0">
+                <a:solidFill>
+                  <a:srgbClr val="000000"/>
+                </a:solidFill>
+                <a:latin typeface="Arial Unicode MS"/>
+                <a:ea typeface="Arial Unicode MS"/>
+                <a:cs typeface="Arial Unicode MS"/>
+              </a:rPr>
+              <a:t>，這是它本來的樣子。然後黃色那條線從上往下掃，掃到哪一列，那一列才拍下來。左邊標的是時間：最上面那一列是第零毫秒，中間是第十五毫秒，最下面是第三十毫秒。這三十毫秒裡面車子一直在走，所以每一列拍到的電線桿都在不同的地方。掃完各位看結果——</a:t>
+            </a:r>
+            <a:r>
+              <a:rPr sz="800" b="1" lang="zh-TW" dirty="0">
+                <a:solidFill>
+                  <a:srgbClr val="000000"/>
+                </a:solidFill>
+                <a:latin typeface="Arial Unicode MS"/>
+                <a:ea typeface="Arial Unicode MS"/>
+                <a:cs typeface="Arial Unicode MS"/>
+              </a:rPr>
+              <a:t>那根直的電線桿，在照片裡變成斜的</a:t>
+            </a:r>
+            <a:r>
+              <a:rPr sz="800" lang="zh-TW" dirty="0">
+                <a:solidFill>
+                  <a:srgbClr val="000000"/>
+                </a:solidFill>
+                <a:latin typeface="Arial Unicode MS"/>
+                <a:ea typeface="Arial Unicode MS"/>
+                <a:cs typeface="Arial Unicode MS"/>
+              </a:rPr>
+              <a:t>。下面那個箭頭就是上下差了多少。
 </a:t>
             </a:r>
           </a:p>
@@ -7950,63 +8016,19 @@
                 <a:spcPts val="0"/>
               </a:spcBef>
               <a:spcAft>
-                <a:spcPts val="150"/>
+                <a:spcPts val="133"/>
               </a:spcAft>
             </a:pPr>
             <a:r>
-              <a:rPr sz="900" lang="zh-TW" dirty="0">
-                <a:solidFill>
-                  <a:srgbClr val="000000"/>
-                </a:solidFill>
-                <a:latin typeface="Arial Unicode MS"/>
-                <a:ea typeface="Arial Unicode MS"/>
-                <a:cs typeface="Arial Unicode MS"/>
-              </a:rPr>
-              <a:t>那 </a:t>
-            </a:r>
-            <a:r>
-              <a:rPr sz="900" b="1" lang="zh-TW" dirty="0">
-                <a:solidFill>
-                  <a:srgbClr val="000000"/>
-                </a:solidFill>
-                <a:latin typeface="Arial Unicode MS"/>
-                <a:ea typeface="Arial Unicode MS"/>
-                <a:cs typeface="Arial Unicode MS"/>
-              </a:rPr>
-              <a:t>global shutter</a:t>
-            </a:r>
-            <a:r>
-              <a:rPr sz="900" lang="zh-TW" dirty="0">
-                <a:solidFill>
-                  <a:srgbClr val="000000"/>
-                </a:solidFill>
-                <a:latin typeface="Arial Unicode MS"/>
-                <a:ea typeface="Arial Unicode MS"/>
-                <a:cs typeface="Arial Unicode MS"/>
-              </a:rPr>
-              <a:t>——中文叫</a:t>
-            </a:r>
-            <a:r>
-              <a:rPr sz="900" b="1" lang="zh-TW" dirty="0">
-                <a:solidFill>
-                  <a:srgbClr val="000000"/>
-                </a:solidFill>
-                <a:latin typeface="Arial Unicode MS"/>
-                <a:ea typeface="Arial Unicode MS"/>
-                <a:cs typeface="Arial Unicode MS"/>
-              </a:rPr>
-              <a:t>全域快門</a:t>
-            </a:r>
-            <a:r>
-              <a:rPr sz="900" lang="zh-TW" dirty="0">
-                <a:solidFill>
-                  <a:srgbClr val="000000"/>
-                </a:solidFill>
-                <a:latin typeface="Arial Unicode MS"/>
-                <a:ea typeface="Arial Unicode MS"/>
-                <a:cs typeface="Arial Unicode MS"/>
-              </a:rPr>
-              <a:t>——呢？整張同時曝光，沒有這個問題，但是貴很多，而且同樣的價錢下感光度比較差。所以快門方式這一行不是文字遊戲，它決定了你的感知演算法要不要另外寫一段程式去補償。
+              <a:rPr sz="800" lang="zh-TW" dirty="0">
+                <a:solidFill>
+                  <a:srgbClr val="000000"/>
+                </a:solidFill>
+                <a:latin typeface="Arial Unicode MS"/>
+                <a:ea typeface="Arial Unicode MS"/>
+                <a:cs typeface="Arial Unicode MS"/>
+              </a:rPr>
+              <a:t>對自駕車來說，這件事的嚴重性在哪裡？
 </a:t>
             </a:r>
           </a:p>
@@ -8016,63 +8038,41 @@
                 <a:spcPts val="0"/>
               </a:spcBef>
               <a:spcAft>
-                <a:spcPts val="150"/>
+                <a:spcPts val="133"/>
               </a:spcAft>
             </a:pPr>
             <a:r>
-              <a:rPr sz="900" lang="zh-TW" dirty="0">
-                <a:solidFill>
-                  <a:srgbClr val="000000"/>
-                </a:solidFill>
-                <a:latin typeface="Arial Unicode MS"/>
-                <a:ea typeface="Arial Unicode MS"/>
-                <a:cs typeface="Arial Unicode MS"/>
-              </a:rPr>
-              <a:t>大部分的車用感測器還是用捲簾，因為便宜。它的補救方式是</a:t>
-            </a:r>
-            <a:r>
-              <a:rPr sz="900" b="1" lang="zh-TW" dirty="0">
-                <a:solidFill>
-                  <a:srgbClr val="000000"/>
-                </a:solidFill>
-                <a:latin typeface="Arial Unicode MS"/>
-                <a:ea typeface="Arial Unicode MS"/>
-                <a:cs typeface="Arial Unicode MS"/>
-              </a:rPr>
-              <a:t>讀得快一點</a:t>
-            </a:r>
-            <a:r>
-              <a:rPr sz="900" lang="zh-TW" dirty="0">
-                <a:solidFill>
-                  <a:srgbClr val="000000"/>
-                </a:solidFill>
-                <a:latin typeface="Arial Unicode MS"/>
-                <a:ea typeface="Arial Unicode MS"/>
-                <a:cs typeface="Arial Unicode MS"/>
-              </a:rPr>
-              <a:t>——像上一節看的 AR0233AT，一秒六十張，等於整張一定要在</a:t>
-            </a:r>
-            <a:r>
-              <a:rPr sz="900" b="1" lang="zh-TW" dirty="0">
-                <a:solidFill>
-                  <a:srgbClr val="000000"/>
-                </a:solidFill>
-                <a:latin typeface="Arial Unicode MS"/>
-                <a:ea typeface="Arial Unicode MS"/>
-                <a:cs typeface="Arial Unicode MS"/>
-              </a:rPr>
-              <a:t>十六點七毫秒</a:t>
-            </a:r>
-            <a:r>
-              <a:rPr sz="900" lang="zh-TW" dirty="0">
-                <a:solidFill>
-                  <a:srgbClr val="000000"/>
-                </a:solidFill>
-                <a:latin typeface="Arial Unicode MS"/>
-                <a:ea typeface="Arial Unicode MS"/>
-                <a:cs typeface="Arial Unicode MS"/>
-              </a:rPr>
-              <a:t>之內讀完。一秒三十張是三十三毫秒，差一倍；同一台車經過，歪掉的程度也差不多少一半。
+              <a:rPr sz="800" lang="zh-TW" dirty="0">
+                <a:solidFill>
+                  <a:srgbClr val="000000"/>
+                </a:solidFill>
+                <a:latin typeface="Arial Unicode MS"/>
+                <a:ea typeface="Arial Unicode MS"/>
+                <a:cs typeface="Arial Unicode MS"/>
+              </a:rPr>
+              <a:t>假設你的車以時速六十在跑，旁邊有一台機車從右邊切過來。畫面上半部拍到他的時候他在 A 點，下半部拍到他的時候他已經到 B 點了。演算法看到的是一個</a:t>
+            </a:r>
+            <a:r>
+              <a:rPr sz="800" b="1" lang="zh-TW" dirty="0">
+                <a:solidFill>
+                  <a:srgbClr val="000000"/>
+                </a:solidFill>
+                <a:latin typeface="Arial Unicode MS"/>
+                <a:ea typeface="Arial Unicode MS"/>
+                <a:cs typeface="Arial Unicode MS"/>
+              </a:rPr>
+              <a:t>被扭曲的形狀</a:t>
+            </a:r>
+            <a:r>
+              <a:rPr sz="800" lang="zh-TW" dirty="0">
+                <a:solidFill>
+                  <a:srgbClr val="000000"/>
+                </a:solidFill>
+                <a:latin typeface="Arial Unicode MS"/>
+                <a:ea typeface="Arial Unicode MS"/>
+                <a:cs typeface="Arial Unicode MS"/>
+              </a:rPr>
+              <a:t>，而且它不知道那是扭曲的，它以為那就是真的。
 </a:t>
             </a:r>
           </a:p>
@@ -8082,11 +8082,209 @@
                 <a:spcPts val="0"/>
               </a:spcBef>
               <a:spcAft>
-                <a:spcPts val="150"/>
+                <a:spcPts val="133"/>
               </a:spcAft>
             </a:pPr>
             <a:r>
-              <a:rPr sz="900" lang="zh-TW" dirty="0">
+              <a:rPr sz="800" lang="zh-TW" dirty="0">
+                <a:solidFill>
+                  <a:srgbClr val="000000"/>
+                </a:solidFill>
+                <a:latin typeface="Arial Unicode MS"/>
+                <a:ea typeface="Arial Unicode MS"/>
+                <a:cs typeface="Arial Unicode MS"/>
+              </a:rPr>
+              <a:t>那 </a:t>
+            </a:r>
+            <a:r>
+              <a:rPr sz="800" b="1" lang="zh-TW" dirty="0">
+                <a:solidFill>
+                  <a:srgbClr val="000000"/>
+                </a:solidFill>
+                <a:latin typeface="Arial Unicode MS"/>
+                <a:ea typeface="Arial Unicode MS"/>
+                <a:cs typeface="Arial Unicode MS"/>
+              </a:rPr>
+              <a:t>global shutter</a:t>
+            </a:r>
+            <a:r>
+              <a:rPr sz="800" lang="zh-TW" dirty="0">
+                <a:solidFill>
+                  <a:srgbClr val="000000"/>
+                </a:solidFill>
+                <a:latin typeface="Arial Unicode MS"/>
+                <a:ea typeface="Arial Unicode MS"/>
+                <a:cs typeface="Arial Unicode MS"/>
+              </a:rPr>
+              <a:t>——中文叫</a:t>
+            </a:r>
+            <a:r>
+              <a:rPr sz="800" b="1" lang="zh-TW" dirty="0">
+                <a:solidFill>
+                  <a:srgbClr val="000000"/>
+                </a:solidFill>
+                <a:latin typeface="Arial Unicode MS"/>
+                <a:ea typeface="Arial Unicode MS"/>
+                <a:cs typeface="Arial Unicode MS"/>
+              </a:rPr>
+              <a:t>全域快門</a:t>
+            </a:r>
+            <a:r>
+              <a:rPr sz="800" lang="zh-TW" dirty="0">
+                <a:solidFill>
+                  <a:srgbClr val="000000"/>
+                </a:solidFill>
+                <a:latin typeface="Arial Unicode MS"/>
+                <a:ea typeface="Arial Unicode MS"/>
+                <a:cs typeface="Arial Unicode MS"/>
+              </a:rPr>
+              <a:t>——呢？</a:t>
+            </a:r>
+            <a:r>
+              <a:rPr sz="800" b="1" lang="zh-TW" dirty="0">
+                <a:solidFill>
+                  <a:srgbClr val="000000"/>
+                </a:solidFill>
+                <a:latin typeface="Arial Unicode MS"/>
+                <a:ea typeface="Arial Unicode MS"/>
+                <a:cs typeface="Arial Unicode MS"/>
+              </a:rPr>
+              <a:t>所有列同時曝光</a:t>
+            </a:r>
+            <a:r>
+              <a:rPr sz="800" lang="zh-TW" dirty="0">
+                <a:solidFill>
+                  <a:srgbClr val="000000"/>
+                </a:solidFill>
+                <a:latin typeface="Arial Unicode MS"/>
+                <a:ea typeface="Arial Unicode MS"/>
+                <a:cs typeface="Arial Unicode MS"/>
+              </a:rPr>
+              <a:t>，曝完一起轉存到每個像素旁邊的暫存區，然後才慢慢讀出來。各位注意：</a:t>
+            </a:r>
+            <a:r>
+              <a:rPr sz="800" b="1" lang="zh-TW" dirty="0">
+                <a:solidFill>
+                  <a:srgbClr val="000000"/>
+                </a:solidFill>
+                <a:latin typeface="Arial Unicode MS"/>
+                <a:ea typeface="Arial Unicode MS"/>
+                <a:cs typeface="Arial Unicode MS"/>
+              </a:rPr>
+              <a:t>它一樣是一列一列讀的</a:t>
+            </a:r>
+            <a:r>
+              <a:rPr sz="800" lang="zh-TW" dirty="0">
+                <a:solidFill>
+                  <a:srgbClr val="000000"/>
+                </a:solidFill>
+                <a:latin typeface="Arial Unicode MS"/>
+                <a:ea typeface="Arial Unicode MS"/>
+                <a:cs typeface="Arial Unicode MS"/>
+              </a:rPr>
+              <a:t>，差別在</a:t>
+            </a:r>
+            <a:r>
+              <a:rPr sz="800" b="1" lang="zh-TW" dirty="0">
+                <a:solidFill>
+                  <a:srgbClr val="000000"/>
+                </a:solidFill>
+                <a:latin typeface="Arial Unicode MS"/>
+                <a:ea typeface="Arial Unicode MS"/>
+                <a:cs typeface="Arial Unicode MS"/>
+              </a:rPr>
+              <a:t>曝光是不是同時</a:t>
+            </a:r>
+            <a:r>
+              <a:rPr sz="800" lang="zh-TW" dirty="0">
+                <a:solidFill>
+                  <a:srgbClr val="000000"/>
+                </a:solidFill>
+                <a:latin typeface="Arial Unicode MS"/>
+                <a:ea typeface="Arial Unicode MS"/>
+                <a:cs typeface="Arial Unicode MS"/>
+              </a:rPr>
+              <a:t>。所以它沒有這個問題——但是貴很多，而且同樣的價錢下感光度比較差。所以快門方式這一行不是文字遊戲，它決定了你的感知演算法要不要另外寫一段程式去補償。
+</a:t>
+            </a:r>
+          </a:p>
+          <a:p>
+            <a:pPr algn="l">
+              <a:spcBef>
+                <a:spcPts val="0"/>
+              </a:spcBef>
+              <a:spcAft>
+                <a:spcPts val="133"/>
+              </a:spcAft>
+            </a:pPr>
+            <a:r>
+              <a:rPr sz="800" lang="zh-TW" dirty="0">
+                <a:solidFill>
+                  <a:srgbClr val="000000"/>
+                </a:solidFill>
+                <a:latin typeface="Arial Unicode MS"/>
+                <a:ea typeface="Arial Unicode MS"/>
+                <a:cs typeface="Arial Unicode MS"/>
+              </a:rPr>
+              <a:t>大部分的車用感測器還是用捲簾，因為便宜。它的補救方式是</a:t>
+            </a:r>
+            <a:r>
+              <a:rPr sz="800" b="1" lang="zh-TW" dirty="0">
+                <a:solidFill>
+                  <a:srgbClr val="000000"/>
+                </a:solidFill>
+                <a:latin typeface="Arial Unicode MS"/>
+                <a:ea typeface="Arial Unicode MS"/>
+                <a:cs typeface="Arial Unicode MS"/>
+              </a:rPr>
+              <a:t>讀得快一點</a:t>
+            </a:r>
+            <a:r>
+              <a:rPr sz="800" lang="zh-TW" dirty="0">
+                <a:solidFill>
+                  <a:srgbClr val="000000"/>
+                </a:solidFill>
+                <a:latin typeface="Arial Unicode MS"/>
+                <a:ea typeface="Arial Unicode MS"/>
+                <a:cs typeface="Arial Unicode MS"/>
+              </a:rPr>
+              <a:t>——像上一節看的 AR0233AT，一秒六十張，等於整張一定要在</a:t>
+            </a:r>
+            <a:r>
+              <a:rPr sz="800" b="1" lang="zh-TW" dirty="0">
+                <a:solidFill>
+                  <a:srgbClr val="000000"/>
+                </a:solidFill>
+                <a:latin typeface="Arial Unicode MS"/>
+                <a:ea typeface="Arial Unicode MS"/>
+                <a:cs typeface="Arial Unicode MS"/>
+              </a:rPr>
+              <a:t>十六點七毫秒</a:t>
+            </a:r>
+            <a:r>
+              <a:rPr sz="800" lang="zh-TW" dirty="0">
+                <a:solidFill>
+                  <a:srgbClr val="000000"/>
+                </a:solidFill>
+                <a:latin typeface="Arial Unicode MS"/>
+                <a:ea typeface="Arial Unicode MS"/>
+                <a:cs typeface="Arial Unicode MS"/>
+              </a:rPr>
+              <a:t>之內讀完。一秒三十張是三十三毫秒，差一倍；同一台車經過，歪掉的程度也差不多少一半。
+</a:t>
+            </a:r>
+          </a:p>
+          <a:p>
+            <a:pPr algn="l">
+              <a:spcBef>
+                <a:spcPts val="0"/>
+              </a:spcBef>
+              <a:spcAft>
+                <a:spcPts val="133"/>
+              </a:spcAft>
+            </a:pPr>
+            <a:r>
+              <a:rPr sz="800" lang="zh-TW" dirty="0">
                 <a:solidFill>
                   <a:srgbClr val="000000"/>
                 </a:solidFill>
@@ -8097,7 +8295,7 @@
               <a:t>所以「更新率 60 fps」這一行，除了講即時性，也順便給了</a:t>
             </a:r>
             <a:r>
-              <a:rPr sz="900" b="1" lang="zh-TW" dirty="0">
+              <a:rPr sz="800" b="1" lang="zh-TW" dirty="0">
                 <a:solidFill>
                   <a:srgbClr val="000000"/>
                 </a:solidFill>
@@ -8108,7 +8306,7 @@
               <a:t>扭曲的上限</a:t>
             </a:r>
             <a:r>
-              <a:rPr sz="900" lang="zh-TW" dirty="0">
+              <a:rPr sz="800" lang="zh-TW" dirty="0">
                 <a:solidFill>
                   <a:srgbClr val="000000"/>
                 </a:solidFill>
@@ -8119,7 +8317,7 @@
               <a:t>：fps 愈高，從第一列到最後一列的時間差一定愈短。要講精確一點：真正決定扭曲的是</a:t>
             </a:r>
             <a:r>
-              <a:rPr sz="900" b="1" lang="zh-TW" dirty="0">
+              <a:rPr sz="800" b="1" lang="zh-TW" dirty="0">
                 <a:solidFill>
                   <a:srgbClr val="000000"/>
                 </a:solidFill>
@@ -8130,7 +8328,7 @@
               <a:t>整張讀完要多久</a:t>
             </a:r>
             <a:r>
-              <a:rPr sz="900" lang="zh-TW" dirty="0">
+              <a:rPr sz="800" lang="zh-TW" dirty="0">
                 <a:solidFill>
                   <a:srgbClr val="000000"/>
                 </a:solidFill>
@@ -8380,7 +8578,29 @@
                 <a:ea typeface="Arial Unicode MS"/>
                 <a:cs typeface="Arial Unicode MS"/>
               </a:rPr>
-              <a:t>這就是我們剛剛算出來的那件事：旋翼轉得很快，感測器一列一列讀下來的那幾十毫秒裡，葉片已經轉過去了，所以每一列拍到的葉片都在不同的角度，拼起來就是一條彎的。
+              <a:t>這就是我們剛剛算出來的那件事：旋翼轉得很快，而感測器一列一列</a:t>
+            </a:r>
+            <a:r>
+              <a:rPr sz="1200" b="1" lang="zh-TW" dirty="0">
+                <a:solidFill>
+                  <a:srgbClr val="000000"/>
+                </a:solidFill>
+                <a:latin typeface="Arial Unicode MS"/>
+                <a:ea typeface="Arial Unicode MS"/>
+                <a:cs typeface="Arial Unicode MS"/>
+              </a:rPr>
+              <a:t>錯開曝光</a:t>
+            </a:r>
+            <a:r>
+              <a:rPr sz="1200" lang="zh-TW" dirty="0">
+                <a:solidFill>
+                  <a:srgbClr val="000000"/>
+                </a:solidFill>
+                <a:latin typeface="Arial Unicode MS"/>
+                <a:ea typeface="Arial Unicode MS"/>
+                <a:cs typeface="Arial Unicode MS"/>
+              </a:rPr>
+              <a:t>的那幾十毫秒裡，葉片已經轉過去了，所以每一列拍到的葉片都在不同的角度，拼起來就是一條彎的。
 </a:t>
             </a:r>
           </a:p>
@@ -20704,7 +20924,7 @@
                 <a:ea typeface="Arial" pitchFamily="34" charset="-122"/>
                 <a:cs typeface="Arial" pitchFamily="34" charset="-120"/>
               </a:rPr>
-              <a:t>Cảm biến đọc từng hàng, hàng cuối chậm hơn hàng đầu vài chục mili giây. Trong khoảng đó xe và vật đều đã di chuyển, nên cột điện bị nghiêng, cánh quạt bị cong.</a:t>
+              <a:t>Mỗi hàng phơi sáng dài như nhau, nhưng thời điểm lệch nhau: hàng cuối chậm hơn hàng đầu vài chục mili giây. Mỗi hàng chụp một khoảnh khắc khác nhau, nên cột điện bị nghiêng, cánh quạt bị cong.</a:t>
             </a:r>
             <a:endParaRPr lang="en-US" sz="2300" dirty="0"/>
           </a:p>
@@ -20724,7 +20944,7 @@
                 <a:ea typeface="微軟正黑體" pitchFamily="34" charset="-122"/>
                 <a:cs typeface="微軟正黑體" pitchFamily="34" charset="-120"/>
               </a:rPr>
-              <a:t>感光元件是一列一列讀出來的，最後一列比第一列晚了幾十毫秒。這段時間裡車子和目標都在動，所以電線桿會歪、螺旋槳會彎。</a:t>
+              <a:t>每一列曝光一樣長，但時刻錯開：最後一列比第一列晚了幾十毫秒。每一列拍到的是不同的瞬間，所以電線桿會歪、螺旋槳會彎。</a:t>
             </a:r>
             <a:endParaRPr lang="en-US" sz="2300" dirty="0"/>
           </a:p>

--- a/第五週(10-08)/第五週_第2節_簡報.pptx
+++ b/第五週(10-08)/第五週_第2節_簡報.pptx
@@ -899,33 +899,55 @@
                 <a:spcPts val="0"/>
               </a:spcBef>
               <a:spcAft>
-                <a:spcPts val="158"/>
+                <a:spcPts val="150"/>
               </a:spcAft>
             </a:pPr>
             <a:r>
-              <a:rPr sz="950" lang="zh-TW" dirty="0">
-                <a:solidFill>
-                  <a:srgbClr val="000000"/>
-                </a:solidFill>
-                <a:latin typeface="Arial Unicode MS"/>
-                <a:ea typeface="Arial Unicode MS"/>
-                <a:cs typeface="Arial Unicode MS"/>
-              </a:rPr>
-              <a:t>左邊這一塊，是 OS1 datasheet 上 LASER 那一段。</a:t>
-            </a:r>
-            <a:r>
-              <a:rPr sz="950" b="1" lang="zh-TW" dirty="0">
-                <a:solidFill>
-                  <a:srgbClr val="000000"/>
-                </a:solidFill>
-                <a:latin typeface="Arial Unicode MS"/>
-                <a:ea typeface="Arial Unicode MS"/>
-                <a:cs typeface="Arial Unicode MS"/>
-              </a:rPr>
-              <a:t>第一行就是眼睛安全等級</a:t>
-            </a:r>
-            <a:r>
-              <a:rPr sz="950" lang="zh-TW" dirty="0">
+              <a:rPr sz="900" lang="zh-TW" dirty="0">
+                <a:solidFill>
+                  <a:srgbClr val="000000"/>
+                </a:solidFill>
+                <a:latin typeface="Arial Unicode MS"/>
+                <a:ea typeface="Arial Unicode MS"/>
+                <a:cs typeface="Arial Unicode MS"/>
+              </a:rPr>
+              <a:t>左邊這一塊，是 OS1 datasheet 上 LASER 那一段。先講清楚：這裡說的「行」是</a:t>
+            </a:r>
+            <a:r>
+              <a:rPr sz="900" b="1" lang="zh-TW" dirty="0">
+                <a:solidFill>
+                  <a:srgbClr val="000000"/>
+                </a:solidFill>
+                <a:latin typeface="Arial Unicode MS"/>
+                <a:ea typeface="Arial Unicode MS"/>
+                <a:cs typeface="Arial Unicode MS"/>
+              </a:rPr>
+              <a:t>這一格裡的列</a:t>
+            </a:r>
+            <a:r>
+              <a:rPr sz="900" lang="zh-TW" dirty="0">
+                <a:solidFill>
+                  <a:srgbClr val="000000"/>
+                </a:solidFill>
+                <a:latin typeface="Arial Unicode MS"/>
+                <a:ea typeface="Arial Unicode MS"/>
+                <a:cs typeface="Arial Unicode MS"/>
+              </a:rPr>
+              <a:t>，不是我們挑的那三行。</a:t>
+            </a:r>
+            <a:r>
+              <a:rPr sz="900" b="1" lang="zh-TW" dirty="0">
+                <a:solidFill>
+                  <a:srgbClr val="000000"/>
+                </a:solidFill>
+                <a:latin typeface="Arial Unicode MS"/>
+                <a:ea typeface="Arial Unicode MS"/>
+                <a:cs typeface="Arial Unicode MS"/>
+              </a:rPr>
+              <a:t>這一格的第一列就是眼睛安全等級</a:t>
+            </a:r>
+            <a:r>
+              <a:rPr sz="900" lang="zh-TW" dirty="0">
                 <a:solidFill>
                   <a:srgbClr val="000000"/>
                 </a:solidFill>
@@ -943,11 +965,11 @@
                 <a:spcPts val="0"/>
               </a:spcBef>
               <a:spcAft>
-                <a:spcPts val="158"/>
+                <a:spcPts val="150"/>
               </a:spcAft>
             </a:pPr>
             <a:r>
-              <a:rPr sz="950" lang="zh-TW" dirty="0">
+              <a:rPr sz="900" lang="zh-TW" dirty="0">
                 <a:solidFill>
                   <a:srgbClr val="000000"/>
                 </a:solidFill>
@@ -958,7 +980,7 @@
               <a:t>上面寫的是：</a:t>
             </a:r>
             <a:r>
-              <a:rPr sz="950" b="1" lang="zh-TW" dirty="0">
+              <a:rPr sz="900" b="1" lang="zh-TW" dirty="0">
                 <a:solidFill>
                   <a:srgbClr val="000000"/>
                 </a:solidFill>
@@ -969,7 +991,7 @@
               <a:t>Class 1 eye-safe per IEC/EN 60825-1: 2014</a:t>
             </a:r>
             <a:r>
-              <a:rPr sz="950" lang="zh-TW" dirty="0">
+              <a:rPr sz="900" lang="zh-TW" dirty="0">
                 <a:solidFill>
                   <a:srgbClr val="000000"/>
                 </a:solidFill>
@@ -987,11 +1009,11 @@
                 <a:spcPts val="0"/>
               </a:spcBef>
               <a:spcAft>
-                <a:spcPts val="158"/>
+                <a:spcPts val="150"/>
               </a:spcAft>
             </a:pPr>
             <a:r>
-              <a:rPr sz="950" lang="zh-TW" dirty="0">
+              <a:rPr sz="900" lang="zh-TW" dirty="0">
                 <a:solidFill>
                   <a:srgbClr val="000000"/>
                 </a:solidFill>
@@ -1002,7 +1024,7 @@
               <a:t>這一行在講什麼？IEC 60825 是雷射產品的國際安全標準，把雷射分成好幾級。Class 1 是最安全的那一級，意思是：</a:t>
             </a:r>
             <a:r>
-              <a:rPr sz="950" b="1" lang="zh-TW" dirty="0">
+              <a:rPr sz="900" b="1" lang="zh-TW" dirty="0">
                 <a:solidFill>
                   <a:srgbClr val="000000"/>
                 </a:solidFill>
@@ -1013,7 +1035,7 @@
               <a:t>在正常使用的情況下，就算有人直直盯著它看，也不會傷到眼睛。</a:t>
             </a:r>
             <a:r>
-              <a:rPr sz="950" lang="zh-TW" dirty="0">
+              <a:rPr sz="900" lang="zh-TW" dirty="0">
                 <a:solidFill>
                   <a:srgbClr val="000000"/>
                 </a:solidFill>
@@ -1031,11 +1053,11 @@
                 <a:spcPts val="0"/>
               </a:spcBef>
               <a:spcAft>
-                <a:spcPts val="158"/>
+                <a:spcPts val="150"/>
               </a:spcAft>
             </a:pPr>
             <a:r>
-              <a:rPr sz="950" lang="zh-TW" dirty="0">
+              <a:rPr sz="900" lang="zh-TW" dirty="0">
                 <a:solidFill>
                   <a:srgbClr val="000000"/>
                 </a:solidFill>
@@ -1053,11 +1075,11 @@
                 <a:spcPts val="0"/>
               </a:spcBef>
               <a:spcAft>
-                <a:spcPts val="158"/>
+                <a:spcPts val="150"/>
               </a:spcAft>
             </a:pPr>
             <a:r>
-              <a:rPr sz="950" lang="zh-TW" dirty="0">
+              <a:rPr sz="900" lang="zh-TW" dirty="0">
                 <a:solidFill>
                   <a:srgbClr val="000000"/>
                 </a:solidFill>
@@ -1068,7 +1090,7 @@
               <a:t>因為光達是裝在</a:t>
             </a:r>
             <a:r>
-              <a:rPr sz="950" b="1" lang="zh-TW" dirty="0">
+              <a:rPr sz="900" b="1" lang="zh-TW" dirty="0">
                 <a:solidFill>
                   <a:srgbClr val="000000"/>
                 </a:solidFill>
@@ -1079,7 +1101,7 @@
               <a:t>馬路上跑的車</a:t>
             </a:r>
             <a:r>
-              <a:rPr sz="950" lang="zh-TW" dirty="0">
+              <a:rPr sz="900" lang="zh-TW" dirty="0">
                 <a:solidFill>
                   <a:srgbClr val="000000"/>
                 </a:solidFill>
@@ -1097,11 +1119,11 @@
                 <a:spcPts val="0"/>
               </a:spcBef>
               <a:spcAft>
-                <a:spcPts val="158"/>
+                <a:spcPts val="150"/>
               </a:spcAft>
             </a:pPr>
             <a:r>
-              <a:rPr sz="950" lang="zh-TW" dirty="0">
+              <a:rPr sz="900" lang="zh-TW" dirty="0">
                 <a:solidFill>
                   <a:srgbClr val="000000"/>
                 </a:solidFill>
@@ -1112,7 +1134,7 @@
               <a:t>所以這一行不是拿來加分的，是</a:t>
             </a:r>
             <a:r>
-              <a:rPr sz="950" b="1" lang="zh-TW" dirty="0">
+              <a:rPr sz="900" b="1" lang="zh-TW" dirty="0">
                 <a:solidFill>
                   <a:srgbClr val="000000"/>
                 </a:solidFill>
@@ -1123,7 +1145,7 @@
               <a:t>門檻</a:t>
             </a:r>
             <a:r>
-              <a:rPr sz="950" lang="zh-TW" dirty="0">
+              <a:rPr sz="900" lang="zh-TW" dirty="0">
                 <a:solidFill>
                   <a:srgbClr val="000000"/>
                 </a:solidFill>
@@ -1141,11 +1163,11 @@
                 <a:spcPts val="0"/>
               </a:spcBef>
               <a:spcAft>
-                <a:spcPts val="158"/>
+                <a:spcPts val="150"/>
               </a:spcAft>
             </a:pPr>
             <a:r>
-              <a:rPr sz="950" lang="zh-TW" dirty="0">
+              <a:rPr sz="900" lang="zh-TW" dirty="0">
                 <a:solidFill>
                   <a:srgbClr val="000000"/>
                 </a:solidFill>
@@ -1156,18 +1178,18 @@
               <a:t>這裡也牽涉到剛剛講的波長。</a:t>
             </a:r>
             <a:r>
-              <a:rPr sz="950" b="1" lang="zh-TW" dirty="0">
-                <a:solidFill>
-                  <a:srgbClr val="000000"/>
-                </a:solidFill>
-                <a:latin typeface="Arial Unicode MS"/>
-                <a:ea typeface="Arial Unicode MS"/>
-                <a:cs typeface="Arial Unicode MS"/>
-              </a:rPr>
-              <a:t>第二行 Laser Wavelength，865 奈米</a:t>
-            </a:r>
-            <a:r>
-              <a:rPr sz="950" lang="zh-TW" dirty="0">
+              <a:rPr sz="900" b="1" lang="zh-TW" dirty="0">
+                <a:solidFill>
+                  <a:srgbClr val="000000"/>
+                </a:solidFill>
+                <a:latin typeface="Arial Unicode MS"/>
+                <a:ea typeface="Arial Unicode MS"/>
+                <a:cs typeface="Arial Unicode MS"/>
+              </a:rPr>
+              <a:t>這一格的第二列 Laser Wavelength，865 奈米</a:t>
+            </a:r>
+            <a:r>
+              <a:rPr sz="900" lang="zh-TW" dirty="0">
                 <a:solidFill>
                   <a:srgbClr val="000000"/>
                 </a:solidFill>
@@ -1185,11 +1207,11 @@
                 <a:spcPts val="0"/>
               </a:spcBef>
               <a:spcAft>
-                <a:spcPts val="158"/>
+                <a:spcPts val="150"/>
               </a:spcAft>
             </a:pPr>
             <a:r>
-              <a:rPr sz="950" lang="zh-TW" dirty="0">
+              <a:rPr sz="900" lang="zh-TW" dirty="0">
                 <a:solidFill>
                   <a:srgbClr val="000000"/>
                 </a:solidFill>
@@ -1200,7 +1222,7 @@
               <a:t>下面兩行順便看一下，它們其實也在講同一件事。</a:t>
             </a:r>
             <a:r>
-              <a:rPr sz="950" b="1" lang="zh-TW" dirty="0">
+              <a:rPr sz="900" b="1" lang="zh-TW" dirty="0">
                 <a:solidFill>
                   <a:srgbClr val="000000"/>
                 </a:solidFill>
@@ -1211,7 +1233,7 @@
               <a:t>Beam Diameter Exiting Sensor，9.5 公釐</a:t>
             </a:r>
             <a:r>
-              <a:rPr sz="950" lang="zh-TW" dirty="0">
+              <a:rPr sz="900" lang="zh-TW" dirty="0">
                 <a:solidFill>
                   <a:srgbClr val="000000"/>
                 </a:solidFill>
@@ -1222,7 +1244,7 @@
               <a:t>——雷射離開感測器的時候，光束有 9.5 公釐寬。為什麼要列這個？因為同樣的功率，</a:t>
             </a:r>
             <a:r>
-              <a:rPr sz="950" b="1" lang="zh-TW" dirty="0">
+              <a:rPr sz="900" b="1" lang="zh-TW" dirty="0">
                 <a:solidFill>
                   <a:srgbClr val="000000"/>
                 </a:solidFill>
@@ -1233,7 +1255,7 @@
               <a:t>光束愈寬，攤在眼睛上的能量密度就愈低</a:t>
             </a:r>
             <a:r>
-              <a:rPr sz="950" lang="zh-TW" dirty="0">
+              <a:rPr sz="900" lang="zh-TW" dirty="0">
                 <a:solidFill>
                   <a:srgbClr val="000000"/>
                 </a:solidFill>
@@ -1251,11 +1273,11 @@
                 <a:spcPts val="0"/>
               </a:spcBef>
               <a:spcAft>
-                <a:spcPts val="158"/>
+                <a:spcPts val="150"/>
               </a:spcAft>
             </a:pPr>
             <a:r>
-              <a:rPr sz="950" b="1" lang="zh-TW" dirty="0">
+              <a:rPr sz="900" b="1" lang="zh-TW" dirty="0">
                 <a:solidFill>
                   <a:srgbClr val="000000"/>
                 </a:solidFill>
@@ -1266,7 +1288,7 @@
               <a:t>Beam Divergence，0.18 度</a:t>
             </a:r>
             <a:r>
-              <a:rPr sz="950" lang="zh-TW" dirty="0">
+              <a:rPr sz="900" lang="zh-TW" dirty="0">
                 <a:solidFill>
                   <a:srgbClr val="000000"/>
                 </a:solidFill>
@@ -1277,7 +1299,7 @@
               <a:t>——光束飛出去會愈來愈寬。括號裡的 FWHM 是量法：從最亮的地方往兩邊量到剩一半亮度的寬度。各位算一下：0.18 度，到一百公尺外，光點大概 </a:t>
             </a:r>
             <a:r>
-              <a:rPr sz="950" b="1" lang="zh-TW" dirty="0">
+              <a:rPr sz="900" b="1" lang="zh-TW" dirty="0">
                 <a:solidFill>
                   <a:srgbClr val="000000"/>
                 </a:solidFill>
@@ -1288,7 +1310,7 @@
               <a:t>31 公分寬</a:t>
             </a:r>
             <a:r>
-              <a:rPr sz="950" lang="zh-TW" dirty="0">
+              <a:rPr sz="900" lang="zh-TW" dirty="0">
                 <a:solidFill>
                   <a:srgbClr val="000000"/>
                 </a:solidFill>
@@ -1306,11 +1328,11 @@
                 <a:spcPts val="0"/>
               </a:spcBef>
               <a:spcAft>
-                <a:spcPts val="158"/>
+                <a:spcPts val="150"/>
               </a:spcAft>
             </a:pPr>
             <a:r>
-              <a:rPr sz="950" lang="zh-TW" dirty="0">
+              <a:rPr sz="900" lang="zh-TW" dirty="0">
                 <a:solidFill>
                   <a:srgbClr val="000000"/>
                 </a:solidFill>
@@ -1321,7 +1343,7 @@
               <a:t>所以請記住一件事：</a:t>
             </a:r>
             <a:r>
-              <a:rPr sz="950" b="1" lang="zh-TW" dirty="0">
+              <a:rPr sz="900" b="1" lang="zh-TW" dirty="0">
                 <a:solidFill>
                   <a:srgbClr val="000000"/>
                 </a:solidFill>
@@ -1332,7 +1354,7 @@
               <a:t>光達的「一個點」，在遠處根本不是一個點。</a:t>
             </a:r>
             <a:r>
-              <a:rPr sz="950" lang="zh-TW" dirty="0">
+              <a:rPr sz="900" lang="zh-TW" dirty="0">
                 <a:solidFill>
                   <a:srgbClr val="000000"/>
                 </a:solidFill>
@@ -1350,11 +1372,11 @@
                 <a:spcPts val="0"/>
               </a:spcBef>
               <a:spcAft>
-                <a:spcPts val="158"/>
+                <a:spcPts val="150"/>
               </a:spcAft>
             </a:pPr>
             <a:r>
-              <a:rPr sz="950" lang="zh-TW" dirty="0">
+              <a:rPr sz="900" lang="zh-TW" dirty="0">
                 <a:solidFill>
                   <a:srgbClr val="000000"/>
                 </a:solidFill>
@@ -1475,17 +1497,6 @@
               </a:spcAft>
             </a:pPr>
             <a:r>
-              <a:rPr sz="1000" lang="zh-TW" dirty="0">
-                <a:solidFill>
-                  <a:srgbClr val="000000"/>
-                </a:solidFill>
-                <a:latin typeface="Arial Unicode MS"/>
-                <a:ea typeface="Arial Unicode MS"/>
-                <a:cs typeface="Arial Unicode MS"/>
-              </a:rPr>
-              <a:t>光達的第三件事是</a:t>
-            </a:r>
-            <a:r>
               <a:rPr sz="1000" b="1" lang="zh-TW" dirty="0">
                 <a:solidFill>
                   <a:srgbClr val="000000"/>
@@ -1494,7 +1505,7 @@
                 <a:ea typeface="Arial Unicode MS"/>
                 <a:cs typeface="Arial Unicode MS"/>
               </a:rPr>
-              <a:t>回波次數</a:t>
+              <a:t>光達那三行的第三行，回波次數</a:t>
             </a:r>
             <a:r>
               <a:rPr sz="1000" lang="zh-TW" dirty="0">
@@ -7566,7 +7577,7 @@
                 <a:ea typeface="Arial Unicode MS"/>
                 <a:cs typeface="Arial Unicode MS"/>
               </a:rPr>
-              <a:t>先講第一件，</a:t>
+              <a:t>先講</a:t>
             </a:r>
             <a:r>
               <a:rPr sz="800" b="1" lang="zh-TW" dirty="0">
@@ -7577,7 +7588,7 @@
                 <a:ea typeface="Arial Unicode MS"/>
                 <a:cs typeface="Arial Unicode MS"/>
               </a:rPr>
-              <a:t>快門方式</a:t>
+              <a:t>相機那三行的第一行，快門方式</a:t>
             </a:r>
             <a:r>
               <a:rPr sz="800" lang="zh-TW" dirty="0">
@@ -8878,17 +8889,6 @@
               </a:spcAft>
             </a:pPr>
             <a:r>
-              <a:rPr sz="950" lang="zh-TW" dirty="0">
-                <a:solidFill>
-                  <a:srgbClr val="000000"/>
-                </a:solidFill>
-                <a:latin typeface="Arial Unicode MS"/>
-                <a:ea typeface="Arial Unicode MS"/>
-                <a:cs typeface="Arial Unicode MS"/>
-              </a:rPr>
-              <a:t>第二行是</a:t>
-            </a:r>
-            <a:r>
               <a:rPr sz="950" b="1" lang="zh-TW" dirty="0">
                 <a:solidFill>
                   <a:srgbClr val="000000"/>
@@ -8897,7 +8897,7 @@
                 <a:ea typeface="Arial Unicode MS"/>
                 <a:cs typeface="Arial Unicode MS"/>
               </a:rPr>
-              <a:t>動態範圍</a:t>
+              <a:t>相機那三行的第二行，是動態範圍</a:t>
             </a:r>
             <a:r>
               <a:rPr sz="950" lang="zh-TW" dirty="0">
@@ -9923,17 +9923,6 @@
               </a:spcAft>
             </a:pPr>
             <a:r>
-              <a:rPr sz="800" lang="zh-TW" dirty="0">
-                <a:solidFill>
-                  <a:srgbClr val="000000"/>
-                </a:solidFill>
-                <a:latin typeface="Arial Unicode MS"/>
-                <a:ea typeface="Arial Unicode MS"/>
-                <a:cs typeface="Arial Unicode MS"/>
-              </a:rPr>
-              <a:t>第三行是</a:t>
-            </a:r>
-            <a:r>
               <a:rPr sz="800" b="1" lang="zh-TW" dirty="0">
                 <a:solidFill>
                   <a:srgbClr val="000000"/>
@@ -9942,7 +9931,7 @@
                 <a:ea typeface="Arial Unicode MS"/>
                 <a:cs typeface="Arial Unicode MS"/>
               </a:rPr>
-              <a:t>LED 閃爍抑制</a:t>
+              <a:t>相機那三行的最後一行，LED 閃爍抑制</a:t>
             </a:r>
             <a:r>
               <a:rPr sz="800" lang="zh-TW" dirty="0">
@@ -10748,17 +10737,6 @@
               </a:spcAft>
             </a:pPr>
             <a:r>
-              <a:rPr sz="800" lang="zh-TW" dirty="0">
-                <a:solidFill>
-                  <a:srgbClr val="000000"/>
-                </a:solidFill>
-                <a:latin typeface="Arial Unicode MS"/>
-                <a:ea typeface="Arial Unicode MS"/>
-                <a:cs typeface="Arial Unicode MS"/>
-              </a:rPr>
-              <a:t>光達的第一行講的是</a:t>
-            </a:r>
-            <a:r>
               <a:rPr sz="800" b="1" lang="zh-TW" dirty="0">
                 <a:solidFill>
                   <a:srgbClr val="000000"/>
@@ -10767,7 +10745,7 @@
                 <a:ea typeface="Arial Unicode MS"/>
                 <a:cs typeface="Arial Unicode MS"/>
               </a:rPr>
-              <a:t>波長</a:t>
+              <a:t>光達那三行的第一行，講的是波長</a:t>
             </a:r>
             <a:r>
               <a:rPr sz="800" lang="zh-TW" dirty="0">

--- a/第五週(10-08)/第五週_第2節_簡報.pptx
+++ b/第五週(10-08)/第五週_第2節_簡報.pptx
@@ -10173,7 +10173,29 @@
                 <a:ea typeface="Arial Unicode MS"/>
                 <a:cs typeface="Arial Unicode MS"/>
               </a:rPr>
-              <a:t>，燈就在那邊閃；換成十毫秒的曝光，六張全部抓到。
+              <a:t>，燈就在那邊閃；換成十毫秒的曝光，</a:t>
+            </a:r>
+            <a:r>
+              <a:rPr sz="800" b="1" lang="zh-TW" dirty="0">
+                <a:solidFill>
+                  <a:srgbClr val="000000"/>
+                </a:solidFill>
+                <a:latin typeface="Arial Unicode MS"/>
+                <a:ea typeface="Arial Unicode MS"/>
+                <a:cs typeface="Arial Unicode MS"/>
+              </a:rPr>
+              <a:t>三張全部抓到</a:t>
+            </a:r>
+            <a:r>
+              <a:rPr sz="800" lang="zh-TW" dirty="0">
+                <a:solidFill>
+                  <a:srgbClr val="000000"/>
+                </a:solidFill>
+                <a:latin typeface="Arial Unicode MS"/>
+                <a:ea typeface="Arial Unicode MS"/>
+                <a:cs typeface="Arial Unicode MS"/>
+              </a:rPr>
+              <a:t>。
 </a:t>
             </a:r>
           </a:p>

--- a/第五週(10-08)/第五週_第2節_簡報.pptx
+++ b/第五週(10-08)/第五週_第2節_簡報.pptx
@@ -11021,6 +11021,226 @@
                 <a:cs typeface="Arial Unicode MS"/>
               </a:rPr>
               <a:t>的功率。
+</a:t>
+            </a:r>
+          </a:p>
+          <a:p>
+            <a:pPr algn="l">
+              <a:spcBef>
+                <a:spcPts val="0"/>
+              </a:spcBef>
+              <a:spcAft>
+                <a:spcPts val="133"/>
+              </a:spcAft>
+            </a:pPr>
+            <a:r>
+              <a:rPr sz="800" lang="zh-TW" dirty="0">
+                <a:solidFill>
+                  <a:srgbClr val="000000"/>
+                </a:solidFill>
+                <a:latin typeface="Arial Unicode MS"/>
+                <a:ea typeface="Arial Unicode MS"/>
+                <a:cs typeface="Arial Unicode MS"/>
+              </a:rPr>
+              <a:t>那界線到底在哪裡？</a:t>
+            </a:r>
+            <a:r>
+              <a:rPr sz="800" b="1" lang="zh-TW" dirty="0">
+                <a:solidFill>
+                  <a:srgbClr val="000000"/>
+                </a:solidFill>
+                <a:latin typeface="Arial Unicode MS"/>
+                <a:ea typeface="Arial Unicode MS"/>
+                <a:cs typeface="Arial Unicode MS"/>
+              </a:rPr>
+              <a:t>一千四百奈米。</a:t>
+            </a:r>
+            <a:r>
+              <a:rPr sz="800" lang="zh-TW" dirty="0">
+                <a:solidFill>
+                  <a:srgbClr val="000000"/>
+                </a:solidFill>
+                <a:latin typeface="Arial Unicode MS"/>
+                <a:ea typeface="Arial Unicode MS"/>
+                <a:cs typeface="Arial Unicode MS"/>
+              </a:rPr>
+              <a:t>四百到一千四百奈米這一段，法規上叫</a:t>
+            </a:r>
+            <a:r>
+              <a:rPr sz="800" b="1" lang="zh-TW" dirty="0">
+                <a:solidFill>
+                  <a:srgbClr val="000000"/>
+                </a:solidFill>
+                <a:latin typeface="Arial Unicode MS"/>
+                <a:ea typeface="Arial Unicode MS"/>
+                <a:cs typeface="Arial Unicode MS"/>
+              </a:rPr>
+              <a:t>視網膜危害區</a:t>
+            </a:r>
+            <a:r>
+              <a:rPr sz="800" lang="zh-TW" dirty="0">
+                <a:solidFill>
+                  <a:srgbClr val="000000"/>
+                </a:solidFill>
+                <a:latin typeface="Arial Unicode MS"/>
+                <a:ea typeface="Arial Unicode MS"/>
+                <a:cs typeface="Arial Unicode MS"/>
+              </a:rPr>
+              <a:t>——眼睛對這一段是透明的，光會被水晶體</a:t>
+            </a:r>
+            <a:r>
+              <a:rPr sz="800" b="1" lang="zh-TW" dirty="0">
+                <a:solidFill>
+                  <a:srgbClr val="000000"/>
+                </a:solidFill>
+                <a:latin typeface="Arial Unicode MS"/>
+                <a:ea typeface="Arial Unicode MS"/>
+                <a:cs typeface="Arial Unicode MS"/>
+              </a:rPr>
+              <a:t>聚焦到視網膜上一個小點</a:t>
+            </a:r>
+            <a:r>
+              <a:rPr sz="800" lang="zh-TW" dirty="0">
+                <a:solidFill>
+                  <a:srgbClr val="000000"/>
+                </a:solidFill>
+                <a:latin typeface="Arial Unicode MS"/>
+                <a:ea typeface="Arial Unicode MS"/>
+                <a:cs typeface="Arial Unicode MS"/>
+              </a:rPr>
+              <a:t>，功率密度放大大約</a:t>
+            </a:r>
+            <a:r>
+              <a:rPr sz="800" b="1" lang="zh-TW" dirty="0">
+                <a:solidFill>
+                  <a:srgbClr val="000000"/>
+                </a:solidFill>
+                <a:latin typeface="Arial Unicode MS"/>
+                <a:ea typeface="Arial Unicode MS"/>
+                <a:cs typeface="Arial Unicode MS"/>
+              </a:rPr>
+              <a:t>十萬倍</a:t>
+            </a:r>
+            <a:r>
+              <a:rPr sz="800" lang="zh-TW" dirty="0">
+                <a:solidFill>
+                  <a:srgbClr val="000000"/>
+                </a:solidFill>
+                <a:latin typeface="Arial Unicode MS"/>
+                <a:ea typeface="Arial Unicode MS"/>
+                <a:cs typeface="Arial Unicode MS"/>
+              </a:rPr>
+              <a:t>，所以很小的功率就燒得起來，而且視網膜燒了</a:t>
+            </a:r>
+            <a:r>
+              <a:rPr sz="800" b="1" lang="zh-TW" dirty="0">
+                <a:solidFill>
+                  <a:srgbClr val="000000"/>
+                </a:solidFill>
+                <a:latin typeface="Arial Unicode MS"/>
+                <a:ea typeface="Arial Unicode MS"/>
+                <a:cs typeface="Arial Unicode MS"/>
+              </a:rPr>
+              <a:t>不會再生</a:t>
+            </a:r>
+            <a:r>
+              <a:rPr sz="800" lang="zh-TW" dirty="0">
+                <a:solidFill>
+                  <a:srgbClr val="000000"/>
+                </a:solidFill>
+                <a:latin typeface="Arial Unicode MS"/>
+                <a:ea typeface="Arial Unicode MS"/>
+                <a:cs typeface="Arial Unicode MS"/>
+              </a:rPr>
+              <a:t>。超過一千四百，水就在角膜那裡把它擋下來了。</a:t>
+            </a:r>
+            <a:r>
+              <a:rPr sz="800" b="1" lang="zh-TW" dirty="0">
+                <a:solidFill>
+                  <a:srgbClr val="000000"/>
+                </a:solidFill>
+                <a:latin typeface="Arial Unicode MS"/>
+                <a:ea typeface="Arial Unicode MS"/>
+                <a:cs typeface="Arial Unicode MS"/>
+              </a:rPr>
+              <a:t>905 和 865 在區內，1550 在區外</a:t>
+            </a:r>
+            <a:r>
+              <a:rPr sz="800" lang="zh-TW" dirty="0">
+                <a:solidFill>
+                  <a:srgbClr val="000000"/>
+                </a:solidFill>
+                <a:latin typeface="Arial Unicode MS"/>
+                <a:ea typeface="Arial Unicode MS"/>
+                <a:cs typeface="Arial Unicode MS"/>
+              </a:rPr>
+              <a:t>——差的就是這條線。
+</a:t>
+            </a:r>
+          </a:p>
+          <a:p>
+            <a:pPr algn="l">
+              <a:spcBef>
+                <a:spcPts val="0"/>
+              </a:spcBef>
+              <a:spcAft>
+                <a:spcPts val="133"/>
+              </a:spcAft>
+            </a:pPr>
+            <a:r>
+              <a:rPr sz="800" lang="zh-TW" dirty="0">
+                <a:solidFill>
+                  <a:srgbClr val="000000"/>
+                </a:solidFill>
+                <a:latin typeface="Arial Unicode MS"/>
+                <a:ea typeface="Arial Unicode MS"/>
+                <a:cs typeface="Arial Unicode MS"/>
+              </a:rPr>
+              <a:t>這裡再擋一個誤會：</a:t>
+            </a:r>
+            <a:r>
+              <a:rPr sz="800" b="1" lang="zh-TW" dirty="0">
+                <a:solidFill>
+                  <a:srgbClr val="000000"/>
+                </a:solidFill>
+                <a:latin typeface="Arial Unicode MS"/>
+                <a:ea typeface="Arial Unicode MS"/>
+                <a:cs typeface="Arial Unicode MS"/>
+              </a:rPr>
+              <a:t>不是波長愈長雷射就愈有力。</a:t>
+            </a:r>
+            <a:r>
+              <a:rPr sz="800" lang="zh-TW" dirty="0">
+                <a:solidFill>
+                  <a:srgbClr val="000000"/>
+                </a:solidFill>
+                <a:latin typeface="Arial Unicode MS"/>
+                <a:ea typeface="Arial Unicode MS"/>
+                <a:cs typeface="Arial Unicode MS"/>
+              </a:rPr>
+              <a:t>功率是你驅動多大電流決定的，跟波長沒關係。1550 之所以打得強，是因為它站在危害區外面，</a:t>
+            </a:r>
+            <a:r>
+              <a:rPr sz="800" b="1" lang="zh-TW" dirty="0">
+                <a:solidFill>
+                  <a:srgbClr val="000000"/>
+                </a:solidFill>
+                <a:latin typeface="Arial Unicode MS"/>
+                <a:ea typeface="Arial Unicode MS"/>
+                <a:cs typeface="Arial Unicode MS"/>
+              </a:rPr>
+              <a:t>法規讓它打到那麼強</a:t>
+            </a:r>
+            <a:r>
+              <a:rPr sz="800" lang="zh-TW" dirty="0">
+                <a:solidFill>
+                  <a:srgbClr val="000000"/>
+                </a:solidFill>
+                <a:latin typeface="Arial Unicode MS"/>
+                <a:ea typeface="Arial Unicode MS"/>
+                <a:cs typeface="Arial Unicode MS"/>
+              </a:rPr>
+              <a:t>——雷射本身沒有變強。
 </a:t>
             </a:r>
           </a:p>

--- a/第五週(10-08)/第五週_第2節_簡報.pptx
+++ b/第五週(10-08)/第五週_第2節_簡報.pptx
@@ -12519,7 +12519,7 @@
         </p:nvSpPr>
         <p:spPr>
           <a:xfrm>
-            <a:off x="502920" y="420624"/>
+            <a:off x="502920" y="365760"/>
             <a:ext cx="8138160" cy="274320"/>
           </a:xfrm>
           <a:prstGeom prst="rect">
@@ -12536,7 +12536,7 @@
               <a:buNone/>
             </a:pPr>
             <a:r>
-              <a:rPr lang="en-US" sz="1250" b="1" dirty="0">
+              <a:rPr lang="en-US" sz="1300" b="1" dirty="0">
                 <a:solidFill>
                   <a:srgbClr val="007F72"/>
                 </a:solidFill>
@@ -12546,129 +12546,24 @@
               </a:rPr>
               <a:t>An toàn mắt · 眼睛安全</a:t>
             </a:r>
-            <a:endParaRPr lang="en-US" sz="1250" dirty="0"/>
+            <a:endParaRPr lang="en-US" sz="1300" dirty="0"/>
           </a:p>
         </p:txBody>
       </p:sp>
       <p:sp>
         <p:nvSpPr>
-          <p:cNvPr id="3" name="Text 1"/>
-          <p:cNvSpPr txBox="1"/>
-          <p:nvPr/>
-        </p:nvSpPr>
-        <p:spPr>
-          <a:xfrm>
-            <a:off x="502920" y="914400"/>
-            <a:ext cx="8138160" cy="1572768"/>
-          </a:xfrm>
-          <a:prstGeom prst="rect">
-            <a:avLst/>
-          </a:prstGeom>
-          <a:noFill/>
-          <a:ln/>
-        </p:spPr>
-        <p:txBody>
-          <a:bodyPr wrap="square" lIns="0" tIns="0" rIns="0" bIns="0" rtlCol="0" anchor="ctr"/>
-          <a:lstStyle/>
-          <a:p>
-            <a:pPr indent="0" marL="0">
-              <a:lnSpc>
-                <a:spcPct val="120000"/>
-              </a:lnSpc>
-              <a:buNone/>
-            </a:pPr>
-            <a:r>
-              <a:rPr lang="en-US" sz="1900" b="1" dirty="0">
-                <a:solidFill>
-                  <a:srgbClr val="0B1F3A"/>
-                </a:solidFill>
-                <a:latin typeface="Arial" pitchFamily="34" charset="0"/>
-                <a:ea typeface="Arial" pitchFamily="34" charset="-122"/>
-                <a:cs typeface="Arial" pitchFamily="34" charset="-120"/>
-              </a:rPr>
-              <a:t>Class 1 eye-safe: dòng này không có thì đừng lắp lên xe</a:t>
-            </a:r>
-            <a:endParaRPr lang="en-US" sz="1900" dirty="0"/>
-          </a:p>
-          <a:p>
-            <a:pPr indent="0" marL="0">
-              <a:lnSpc>
-                <a:spcPct val="120000"/>
-              </a:lnSpc>
-              <a:buNone/>
-            </a:pPr>
-            <a:r>
-              <a:rPr lang="en-US" sz="1200" b="1" dirty="0">
-                <a:solidFill>
-                  <a:srgbClr val="007F72"/>
-                </a:solidFill>
-                <a:latin typeface="微軟正黑體" pitchFamily="34" charset="0"/>
-                <a:ea typeface="微軟正黑體" pitchFamily="34" charset="-122"/>
-                <a:cs typeface="微軟正黑體" pitchFamily="34" charset="-120"/>
-              </a:rPr>
-              <a:t>Class 1 對眼睛安全：沒有這一行就不要裝上車</a:t>
-            </a:r>
-            <a:endParaRPr lang="en-US" sz="1900" dirty="0"/>
-          </a:p>
-          <a:p>
-            <a:pPr indent="0" marL="0">
-              <a:lnSpc>
-                <a:spcPct val="120000"/>
-              </a:lnSpc>
-              <a:spcBef>
-                <a:spcPts val="1440"/>
-              </a:spcBef>
-              <a:buNone/>
-            </a:pPr>
-            <a:r>
-              <a:rPr lang="en-US" sz="1250" dirty="0">
-                <a:solidFill>
-                  <a:srgbClr val="5F7183"/>
-                </a:solidFill>
-                <a:latin typeface="Arial" pitchFamily="34" charset="0"/>
-                <a:ea typeface="Arial" pitchFamily="34" charset="-122"/>
-                <a:cs typeface="Arial" pitchFamily="34" charset="-120"/>
-              </a:rPr>
-              <a:t>Nghĩa là dùng bình thường, nhìn thẳng vào nó cũng không hại mắt.</a:t>
-            </a:r>
-            <a:endParaRPr lang="en-US" sz="1900" dirty="0"/>
-          </a:p>
-          <a:p>
-            <a:pPr indent="0" marL="0">
-              <a:lnSpc>
-                <a:spcPct val="120000"/>
-              </a:lnSpc>
-              <a:buNone/>
-            </a:pPr>
-            <a:r>
-              <a:rPr lang="en-US" sz="1150" dirty="0">
-                <a:solidFill>
-                  <a:srgbClr val="5F7183"/>
-                </a:solidFill>
-                <a:latin typeface="微軟正黑體" pitchFamily="34" charset="0"/>
-                <a:ea typeface="微軟正黑體" pitchFamily="34" charset="-122"/>
-                <a:cs typeface="微軟正黑體" pitchFamily="34" charset="-120"/>
-              </a:rPr>
-              <a:t>意思是在正常使用的情況下，就算直視它也不會傷到眼睛。</a:t>
-            </a:r>
-            <a:endParaRPr lang="en-US" sz="1900" dirty="0"/>
-          </a:p>
-        </p:txBody>
-      </p:sp>
-      <p:sp>
-        <p:nvSpPr>
-          <p:cNvPr id="4" name="Shape 2"/>
+          <p:cNvPr id="3" name="Shape 1"/>
           <p:cNvSpPr/>
           <p:nvPr/>
         </p:nvSpPr>
         <p:spPr>
           <a:xfrm>
-            <a:off x="502920" y="2615184"/>
-            <a:ext cx="8138160" cy="1261872"/>
+            <a:off x="502920" y="877824"/>
+            <a:ext cx="4206240" cy="1307938"/>
           </a:xfrm>
           <a:prstGeom prst="roundRect">
             <a:avLst>
-              <a:gd name="adj" fmla="val 6522"/>
+              <a:gd name="adj" fmla="val 8389"/>
             </a:avLst>
           </a:prstGeom>
           <a:solidFill>
@@ -12684,7 +12579,7 @@
       </p:sp>
       <p:pic>
         <p:nvPicPr>
-          <p:cNvPr id="5" name="Image 0" descr="/Users/tsengchenghsun/Class/carClass/Claude outputs/第五週(10-8)/src/img/w5_os1_laser.png">    </p:cNvPr>
+          <p:cNvPr id="4" name="Image 0" descr="/Users/tsengchenghsun/Class/carClass/Claude outputs/第五週(10-8)/src/img/w5_os1_laser.png">    </p:cNvPr>
           <p:cNvPicPr>
             <a:picLocks noChangeAspect="1"/>
           </p:cNvPicPr>
@@ -12698,8 +12593,8 @@
         </p:blipFill>
         <p:spPr>
           <a:xfrm>
-            <a:off x="2607162" y="2706624"/>
-            <a:ext cx="3929676" cy="914400"/>
+            <a:off x="576072" y="967998"/>
+            <a:ext cx="4059936" cy="944710"/>
           </a:xfrm>
           <a:prstGeom prst="rect">
             <a:avLst/>
@@ -12708,14 +12603,14 @@
       </p:pic>
       <p:sp>
         <p:nvSpPr>
-          <p:cNvPr id="6" name="Text 3"/>
+          <p:cNvPr id="5" name="Text 2"/>
           <p:cNvSpPr txBox="1"/>
           <p:nvPr/>
         </p:nvSpPr>
         <p:spPr>
           <a:xfrm>
-            <a:off x="576072" y="3657600"/>
-            <a:ext cx="7991856" cy="182880"/>
+            <a:off x="576072" y="1948018"/>
+            <a:ext cx="4059936" cy="182880"/>
           </a:xfrm>
           <a:prstGeom prst="rect">
             <a:avLst/>
@@ -12747,18 +12642,664 @@
       </p:sp>
       <p:sp>
         <p:nvSpPr>
+          <p:cNvPr id="6" name="Text 3"/>
+          <p:cNvSpPr txBox="1"/>
+          <p:nvPr/>
+        </p:nvSpPr>
+        <p:spPr>
+          <a:xfrm>
+            <a:off x="4983480" y="786384"/>
+            <a:ext cx="3657600" cy="787475"/>
+          </a:xfrm>
+          <a:prstGeom prst="rect">
+            <a:avLst/>
+          </a:prstGeom>
+          <a:noFill/>
+          <a:ln/>
+        </p:spPr>
+        <p:txBody>
+          <a:bodyPr wrap="square" lIns="0" tIns="0" rIns="0" bIns="0" rtlCol="0" anchor="t"/>
+          <a:lstStyle/>
+          <a:p>
+            <a:pPr indent="0" marL="0">
+              <a:lnSpc>
+                <a:spcPct val="116000"/>
+              </a:lnSpc>
+              <a:buNone/>
+            </a:pPr>
+            <a:r>
+              <a:rPr lang="en-US" sz="1800" b="1" dirty="0">
+                <a:solidFill>
+                  <a:srgbClr val="0B1F3A"/>
+                </a:solidFill>
+                <a:latin typeface="Arial" pitchFamily="34" charset="0"/>
+                <a:ea typeface="Arial" pitchFamily="34" charset="-122"/>
+                <a:cs typeface="Arial" pitchFamily="34" charset="-120"/>
+              </a:rPr>
+              <a:t>Class 1 eye-safe: dòng này không có thì đừng lắp lên xe</a:t>
+            </a:r>
+            <a:endParaRPr lang="en-US" sz="1800" dirty="0"/>
+          </a:p>
+          <a:p>
+            <a:pPr indent="0" marL="0">
+              <a:lnSpc>
+                <a:spcPct val="116000"/>
+              </a:lnSpc>
+              <a:buNone/>
+            </a:pPr>
+            <a:r>
+              <a:rPr lang="en-US" sz="1250" dirty="0">
+                <a:solidFill>
+                  <a:srgbClr val="007F72"/>
+                </a:solidFill>
+                <a:latin typeface="微軟正黑體" pitchFamily="34" charset="0"/>
+                <a:ea typeface="微軟正黑體" pitchFamily="34" charset="-122"/>
+                <a:cs typeface="微軟正黑體" pitchFamily="34" charset="-120"/>
+              </a:rPr>
+ 